--- a/docs/AutoBench.pptx
+++ b/docs/AutoBench.pptx
@@ -3358,7 +3358,7 @@
                 </a:solidFill>
                 <a:latin typeface="Calibri"/>
               </a:rPr>
-              <a:t>Last modified 2026-09-11 22:06 EDT</a:t>
+              <a:t>Last modified 2026-09-16 00:33 EDT</a:t>
             </a:r>
           </a:p>
         </p:txBody>
@@ -3657,7 +3657,7 @@
                 </a:solidFill>
                 <a:latin typeface="Calibri"/>
               </a:rPr>
-              <a:t>• Saturated at ~1.0, so it cannot discriminate models. Never read it as one.</a:t>
+              <a:t>• Saturates near 1.0, so it cannot discriminate models. Never read it as one.</a:t>
             </a:r>
           </a:p>
           <a:p>
@@ -3906,7 +3906,7 @@
                 </a:solidFill>
                 <a:latin typeface="Calibri"/>
               </a:rPr>
-              <a:t>• Episodes are nondeterministic: across 6 samples of the same 10 tasks, 4 flip.</a:t>
+              <a:t>• Episodes are nondeterministic: the same 10 tasks scored 0.90 on one cluster and 1.00 on the other, in the same matrix.</a:t>
             </a:r>
           </a:p>
           <a:p>
@@ -4107,7 +4107,7 @@
                 </a:solidFill>
                 <a:latin typeface="Calibri"/>
               </a:rPr>
-              <a:t>• ~28 LLM calls, ~14 tool calls, ~254k input, ~5 min per task.</a:t>
+              <a:t>• ~29 LLM calls, ~15 tool calls, ~270k input, ~4.5 min per task.</a:t>
             </a:r>
           </a:p>
           <a:p>
@@ -4155,7 +4155,7 @@
                 </a:solidFill>
                 <a:latin typeface="Calibri"/>
               </a:rPr>
-              <a:t>• ~92% of tasks call finish: it believes it is done and the assertions disagree. No verification pass.</a:t>
+              <a:t>• 34 of 35 measured tasks call finish: it believes it is done and the assertions disagree. No verification pass.</a:t>
             </a:r>
           </a:p>
           <a:p>
@@ -4735,7 +4735,7 @@
                 </a:solidFill>
                 <a:latin typeface="Calibri"/>
               </a:rPr>
-              <a:t>2.  The llm column overcounts real calls by one</a:t>
+              <a:t>2.  The llm column changed meaning between agent versions — never compare across it</a:t>
             </a:r>
           </a:p>
           <a:p>
@@ -4747,7 +4747,7 @@
                 </a:solidFill>
                 <a:latin typeface="Calibri"/>
               </a:rPr>
-              <a:t>Every task issues an extra max_tokens=1 capability probe, counted as a chat span. llm=2 on gsm8k means ONE real call.</a:t>
+              <a:t>Agents up to exgentic 0.3.5.dev131 issued a max_tokens=1 capability probe counted as a chat span, so THEIR llm=2 on gsm8k means ONE real call. From dev145 the probe is an unbilled GET /v1/models that emits no span — verified absent across all 1,895 chat spans of these two matrices. Current runs count real calls 1:1, with no offset to subtract.</a:t>
             </a:r>
           </a:p>
         </p:txBody>
@@ -4814,7 +4814,7 @@
                 </a:solidFill>
                 <a:latin typeface="Calibri"/>
               </a:rPr>
-              <a:t>When a usage-bearing span is lost, what survives is the probe — whose own usage is 0/0 on reasoning models but 8/1 on claude-sonnet-5 and 1/0 on gemini. Use the structural test: llm &lt;= 1 with tool &gt;= 2 is impossible.</a:t>
+              <a:t>Use the structural test: llm &lt;= 1 with tool &gt;= 2 is impossible, since each tool call needs a preceding model turn. A zero-check misses the cases that matter — while the probe existed it was the span that SURVIVED the loss, carrying 8/1 on claude-sonnet-5 and 1/0 on gemini. The structural pair holds across agent versions; it is what the generators use.</a:t>
             </a:r>
           </a:p>
         </p:txBody>
@@ -6674,7 +6674,7 @@
                 </a:solidFill>
                 <a:latin typeface="Calibri"/>
               </a:rPr>
-              <a:t>Why a FIXED matrix: task selection is deterministic, so the same leg run anywhere executes the same tasks in the same order. That is what makes a difference attributable to the platform rather than to the workload — and it is why every leg deploys fresh, since reusing a warm agent silently loses telemetry. Driven by one command (reference/run-12.py, ~1h50m); the three generated documents in results/ derive every number from the mirrored artifacts.</a:t>
+              <a:t>Why a FIXED matrix: task selection is deterministic, so the same leg run anywhere executes the same tasks in the same order. That is what makes a difference attributable to the platform rather than to the workload. Every leg deploys fresh — originally because a warm agent lost telemetry (fixed in agent dev145), now because only a NEWLY CREATED pod re-pulls :latest. Driven by one command (reference/run-12.py): ~1h35m of leg wall time per platform, plus the deploys and ~33 min of gateway-cache gaps. The generated documents in docs/results/ derive every number from the mirrored artifacts.</a:t>
             </a:r>
           </a:p>
         </p:txBody>
@@ -6795,7 +6795,7 @@
                 </a:solidFill>
                 <a:latin typeface="Calibri"/>
               </a:rPr>
-              <a:t>v1.26 on OpenShift (Service on ykt3, workloads on ykt2) — 136 tasks, all 12 legs succeeded</a:t>
+              <a:t>v1.28 on OpenShift (Service on ykt3, workloads on ykt2) — 141 tasks, all 12 legs succeeded</a:t>
             </a:r>
           </a:p>
         </p:txBody>
@@ -6819,11 +6819,12 @@
                 <a:tableStyleId>{5C22544A-7EE6-4342-B048-85BDC9FD1C3A}</a:tableStyleId>
               </a:tblPr>
               <a:tblGrid>
-                <a:gridCol w="548640"/>
-                <a:gridCol w="1371600"/>
-                <a:gridCol w="914400"/>
-                <a:gridCol w="1051560"/>
-                <a:gridCol w="1645920"/>
+                <a:gridCol w="502920"/>
+                <a:gridCol w="1280160"/>
+                <a:gridCol w="822960"/>
+                <a:gridCol w="777240"/>
+                <a:gridCol w="960120"/>
+                <a:gridCol w="1188720"/>
               </a:tblGrid>
               <a:tr h="291904">
                 <a:tc>
@@ -6908,6 +6909,29 @@
                           </a:solidFill>
                           <a:latin typeface="Calibri"/>
                         </a:rPr>
+                        <a:t>err</a:t>
+                      </a:r>
+                    </a:p>
+                  </a:txBody>
+                  <a:tcPr marL="63500" marR="63500" marT="12700" marB="12700" anchor="ctr">
+                    <a:solidFill>
+                      <a:srgbClr val="1B3A5C"/>
+                    </a:solidFill>
+                  </a:tcPr>
+                </a:tc>
+                <a:tc>
+                  <a:txBody>
+                    <a:bodyPr/>
+                    <a:lstStyle/>
+                    <a:p>
+                      <a:pPr algn="ctr"/>
+                      <a:r>
+                        <a:rPr sz="1050" b="1" i="0">
+                          <a:solidFill>
+                            <a:srgbClr val="FFFFFF"/>
+                          </a:solidFill>
+                          <a:latin typeface="Calibri"/>
+                        </a:rPr>
                         <a:t>wall</a:t>
                       </a:r>
                     </a:p>
@@ -7025,7 +7049,30 @@
                           </a:solidFill>
                           <a:latin typeface="Calibri"/>
                         </a:rPr>
-                        <a:t>4 s</a:t>
+                        <a:t>0/1</a:t>
+                      </a:r>
+                    </a:p>
+                  </a:txBody>
+                  <a:tcPr marL="63500" marR="63500" marT="12700" marB="12700" anchor="ctr">
+                    <a:solidFill>
+                      <a:srgbClr val="FFFFFF"/>
+                    </a:solidFill>
+                  </a:tcPr>
+                </a:tc>
+                <a:tc>
+                  <a:txBody>
+                    <a:bodyPr/>
+                    <a:lstStyle/>
+                    <a:p>
+                      <a:pPr algn="ctr"/>
+                      <a:r>
+                        <a:rPr sz="1050" b="0" i="0">
+                          <a:solidFill>
+                            <a:srgbClr val="1F2A37"/>
+                          </a:solidFill>
+                          <a:latin typeface="Calibri"/>
+                        </a:rPr>
+                        <a:t>7 s</a:t>
                       </a:r>
                     </a:p>
                   </a:txBody>
@@ -7142,7 +7189,30 @@
                           </a:solidFill>
                           <a:latin typeface="Calibri"/>
                         </a:rPr>
-                        <a:t>63 s</a:t>
+                        <a:t>0/10</a:t>
+                      </a:r>
+                    </a:p>
+                  </a:txBody>
+                  <a:tcPr marL="63500" marR="63500" marT="12700" marB="12700" anchor="ctr">
+                    <a:solidFill>
+                      <a:srgbClr val="F4F6F8"/>
+                    </a:solidFill>
+                  </a:tcPr>
+                </a:tc>
+                <a:tc>
+                  <a:txBody>
+                    <a:bodyPr/>
+                    <a:lstStyle/>
+                    <a:p>
+                      <a:pPr algn="ctr"/>
+                      <a:r>
+                        <a:rPr sz="1050" b="0" i="0">
+                          <a:solidFill>
+                            <a:srgbClr val="1F2A37"/>
+                          </a:solidFill>
+                          <a:latin typeface="Calibri"/>
+                        </a:rPr>
+                        <a:t>41 s</a:t>
                       </a:r>
                     </a:p>
                   </a:txBody>
@@ -7259,7 +7329,30 @@
                           </a:solidFill>
                           <a:latin typeface="Calibri"/>
                         </a:rPr>
-                        <a:t>89 s</a:t>
+                        <a:t>0/50</a:t>
+                      </a:r>
+                    </a:p>
+                  </a:txBody>
+                  <a:tcPr marL="63500" marR="63500" marT="12700" marB="12700" anchor="ctr">
+                    <a:solidFill>
+                      <a:srgbClr val="FFFFFF"/>
+                    </a:solidFill>
+                  </a:tcPr>
+                </a:tc>
+                <a:tc>
+                  <a:txBody>
+                    <a:bodyPr/>
+                    <a:lstStyle/>
+                    <a:p>
+                      <a:pPr algn="ctr"/>
+                      <a:r>
+                        <a:rPr sz="1050" b="0" i="0">
+                          <a:solidFill>
+                            <a:srgbClr val="1F2A37"/>
+                          </a:solidFill>
+                          <a:latin typeface="Calibri"/>
+                        </a:rPr>
+                        <a:t>46 s</a:t>
                       </a:r>
                     </a:p>
                   </a:txBody>
@@ -7353,7 +7446,7 @@
                           </a:solidFill>
                           <a:latin typeface="Calibri"/>
                         </a:rPr>
-                        <a:t>1.00</a:t>
+                        <a:t>0.80</a:t>
                       </a:r>
                     </a:p>
                   </a:txBody>
@@ -7376,7 +7469,7 @@
                           </a:solidFill>
                           <a:latin typeface="Calibri"/>
                         </a:rPr>
-                        <a:t>11 s</a:t>
+                        <a:t>0/5</a:t>
                       </a:r>
                     </a:p>
                   </a:txBody>
@@ -7399,7 +7492,30 @@
                           </a:solidFill>
                           <a:latin typeface="Calibri"/>
                         </a:rPr>
-                        <a:t>4,213</a:t>
+                        <a:t>16 s</a:t>
+                      </a:r>
+                    </a:p>
+                  </a:txBody>
+                  <a:tcPr marL="63500" marR="63500" marT="12700" marB="12700" anchor="ctr">
+                    <a:solidFill>
+                      <a:srgbClr val="F4F6F8"/>
+                    </a:solidFill>
+                  </a:tcPr>
+                </a:tc>
+                <a:tc>
+                  <a:txBody>
+                    <a:bodyPr/>
+                    <a:lstStyle/>
+                    <a:p>
+                      <a:pPr algn="ctr"/>
+                      <a:r>
+                        <a:rPr sz="1050" b="0" i="0">
+                          <a:solidFill>
+                            <a:srgbClr val="1F2A37"/>
+                          </a:solidFill>
+                          <a:latin typeface="Calibri"/>
+                        </a:rPr>
+                        <a:t>3,874</a:t>
                       </a:r>
                     </a:p>
                   </a:txBody>
@@ -7493,7 +7609,30 @@
                           </a:solidFill>
                           <a:latin typeface="Calibri"/>
                         </a:rPr>
-                        <a:t>28 s</a:t>
+                        <a:t>0/5</a:t>
+                      </a:r>
+                    </a:p>
+                  </a:txBody>
+                  <a:tcPr marL="63500" marR="63500" marT="12700" marB="12700" anchor="ctr">
+                    <a:solidFill>
+                      <a:srgbClr val="FFFFFF"/>
+                    </a:solidFill>
+                  </a:tcPr>
+                </a:tc>
+                <a:tc>
+                  <a:txBody>
+                    <a:bodyPr/>
+                    <a:lstStyle/>
+                    <a:p>
+                      <a:pPr algn="ctr"/>
+                      <a:r>
+                        <a:rPr sz="1050" b="0" i="0">
+                          <a:solidFill>
+                            <a:srgbClr val="1F2A37"/>
+                          </a:solidFill>
+                          <a:latin typeface="Calibri"/>
+                        </a:rPr>
+                        <a:t>25 s</a:t>
                       </a:r>
                     </a:p>
                   </a:txBody>
@@ -7587,7 +7726,7 @@
                           </a:solidFill>
                           <a:latin typeface="Calibri"/>
                         </a:rPr>
-                        <a:t>1.00</a:t>
+                        <a:t>0.60</a:t>
                       </a:r>
                     </a:p>
                   </a:txBody>
@@ -7610,7 +7749,7 @@
                           </a:solidFill>
                           <a:latin typeface="Calibri"/>
                         </a:rPr>
-                        <a:t>32 s</a:t>
+                        <a:t>2/5</a:t>
                       </a:r>
                     </a:p>
                   </a:txBody>
@@ -7633,7 +7772,30 @@
                           </a:solidFill>
                           <a:latin typeface="Calibri"/>
                         </a:rPr>
-                        <a:t>1,564</a:t>
+                        <a:t>39 s</a:t>
+                      </a:r>
+                    </a:p>
+                  </a:txBody>
+                  <a:tcPr marL="63500" marR="63500" marT="12700" marB="12700" anchor="ctr">
+                    <a:solidFill>
+                      <a:srgbClr val="F4F6F8"/>
+                    </a:solidFill>
+                  </a:tcPr>
+                </a:tc>
+                <a:tc>
+                  <a:txBody>
+                    <a:bodyPr/>
+                    <a:lstStyle/>
+                    <a:p>
+                      <a:pPr algn="ctr"/>
+                      <a:r>
+                        <a:rPr sz="1050" b="0" i="0">
+                          <a:solidFill>
+                            <a:srgbClr val="1F2A37"/>
+                          </a:solidFill>
+                          <a:latin typeface="Calibri"/>
+                        </a:rPr>
+                        <a:t>1,258</a:t>
                       </a:r>
                     </a:p>
                   </a:txBody>
@@ -7704,7 +7866,7 @@
                           </a:solidFill>
                           <a:latin typeface="Calibri"/>
                         </a:rPr>
-                        <a:t>1.00</a:t>
+                        <a:t>0.80</a:t>
                       </a:r>
                     </a:p>
                   </a:txBody>
@@ -7727,7 +7889,30 @@
                           </a:solidFill>
                           <a:latin typeface="Calibri"/>
                         </a:rPr>
-                        <a:t>25 s</a:t>
+                        <a:t>1/5</a:t>
+                      </a:r>
+                    </a:p>
+                  </a:txBody>
+                  <a:tcPr marL="63500" marR="63500" marT="12700" marB="12700" anchor="ctr">
+                    <a:solidFill>
+                      <a:srgbClr val="FFFFFF"/>
+                    </a:solidFill>
+                  </a:tcPr>
+                </a:tc>
+                <a:tc>
+                  <a:txBody>
+                    <a:bodyPr/>
+                    <a:lstStyle/>
+                    <a:p>
+                      <a:pPr algn="ctr"/>
+                      <a:r>
+                        <a:rPr sz="1050" b="0" i="0">
+                          <a:solidFill>
+                            <a:srgbClr val="1F2A37"/>
+                          </a:solidFill>
+                          <a:latin typeface="Calibri"/>
+                        </a:rPr>
+                        <a:t>30 s</a:t>
                       </a:r>
                     </a:p>
                   </a:txBody>
@@ -7844,7 +8029,30 @@
                           </a:solidFill>
                           <a:latin typeface="Calibri"/>
                         </a:rPr>
-                        <a:t>30 s</a:t>
+                        <a:t>0/5</a:t>
+                      </a:r>
+                    </a:p>
+                  </a:txBody>
+                  <a:tcPr marL="63500" marR="63500" marT="12700" marB="12700" anchor="ctr">
+                    <a:solidFill>
+                      <a:srgbClr val="F4F6F8"/>
+                    </a:solidFill>
+                  </a:tcPr>
+                </a:tc>
+                <a:tc>
+                  <a:txBody>
+                    <a:bodyPr/>
+                    <a:lstStyle/>
+                    <a:p>
+                      <a:pPr algn="ctr"/>
+                      <a:r>
+                        <a:rPr sz="1050" b="0" i="0">
+                          <a:solidFill>
+                            <a:srgbClr val="1F2A37"/>
+                          </a:solidFill>
+                          <a:latin typeface="Calibri"/>
+                        </a:rPr>
+                        <a:t>23 s</a:t>
                       </a:r>
                     </a:p>
                   </a:txBody>
@@ -7938,7 +8146,7 @@
                           </a:solidFill>
                           <a:latin typeface="Calibri"/>
                         </a:rPr>
-                        <a:t>0.80</a:t>
+                        <a:t>0.90</a:t>
                       </a:r>
                     </a:p>
                   </a:txBody>
@@ -7961,7 +8169,7 @@
                           </a:solidFill>
                           <a:latin typeface="Calibri"/>
                         </a:rPr>
-                        <a:t>802 s</a:t>
+                        <a:t>0/10</a:t>
                       </a:r>
                     </a:p>
                   </a:txBody>
@@ -7984,7 +8192,30 @@
                           </a:solidFill>
                           <a:latin typeface="Calibri"/>
                         </a:rPr>
-                        <a:t>863,927</a:t>
+                        <a:t>803 s</a:t>
+                      </a:r>
+                    </a:p>
+                  </a:txBody>
+                  <a:tcPr marL="63500" marR="63500" marT="12700" marB="12700" anchor="ctr">
+                    <a:solidFill>
+                      <a:srgbClr val="FFFFFF"/>
+                    </a:solidFill>
+                  </a:tcPr>
+                </a:tc>
+                <a:tc>
+                  <a:txBody>
+                    <a:bodyPr/>
+                    <a:lstStyle/>
+                    <a:p>
+                      <a:pPr algn="ctr"/>
+                      <a:r>
+                        <a:rPr sz="1050" b="0" i="0">
+                          <a:solidFill>
+                            <a:srgbClr val="1F2A37"/>
+                          </a:solidFill>
+                          <a:latin typeface="Calibri"/>
+                        </a:rPr>
+                        <a:t>988,110</a:t>
                       </a:r>
                     </a:p>
                   </a:txBody>
@@ -8055,7 +8286,7 @@
                           </a:solidFill>
                           <a:latin typeface="Calibri"/>
                         </a:rPr>
-                        <a:t>0.85</a:t>
+                        <a:t>0.75</a:t>
                       </a:r>
                     </a:p>
                   </a:txBody>
@@ -8078,7 +8309,7 @@
                           </a:solidFill>
                           <a:latin typeface="Calibri"/>
                         </a:rPr>
-                        <a:t>483 s</a:t>
+                        <a:t>0/20</a:t>
                       </a:r>
                     </a:p>
                   </a:txBody>
@@ -8101,7 +8332,30 @@
                           </a:solidFill>
                           <a:latin typeface="Calibri"/>
                         </a:rPr>
-                        <a:t>1,656,724</a:t>
+                        <a:t>436 s</a:t>
+                      </a:r>
+                    </a:p>
+                  </a:txBody>
+                  <a:tcPr marL="63500" marR="63500" marT="12700" marB="12700" anchor="ctr">
+                    <a:solidFill>
+                      <a:srgbClr val="F4F6F8"/>
+                    </a:solidFill>
+                  </a:tcPr>
+                </a:tc>
+                <a:tc>
+                  <a:txBody>
+                    <a:bodyPr/>
+                    <a:lstStyle/>
+                    <a:p>
+                      <a:pPr algn="ctr"/>
+                      <a:r>
+                        <a:rPr sz="1050" b="0" i="0">
+                          <a:solidFill>
+                            <a:srgbClr val="1F2A37"/>
+                          </a:solidFill>
+                          <a:latin typeface="Calibri"/>
+                        </a:rPr>
+                        <a:t>1,703,460</a:t>
                       </a:r>
                     </a:p>
                   </a:txBody>
@@ -8195,7 +8449,7 @@
                           </a:solidFill>
                           <a:latin typeface="Calibri"/>
                         </a:rPr>
-                        <a:t>1619 s</a:t>
+                        <a:t>2/5</a:t>
                       </a:r>
                     </a:p>
                   </a:txBody>
@@ -8218,7 +8472,30 @@
                           </a:solidFill>
                           <a:latin typeface="Calibri"/>
                         </a:rPr>
-                        <a:t>868,819</a:t>
+                        <a:t>2433 s</a:t>
+                      </a:r>
+                    </a:p>
+                  </a:txBody>
+                  <a:tcPr marL="63500" marR="63500" marT="12700" marB="12700" anchor="ctr">
+                    <a:solidFill>
+                      <a:srgbClr val="FFFFFF"/>
+                    </a:solidFill>
+                  </a:tcPr>
+                </a:tc>
+                <a:tc>
+                  <a:txBody>
+                    <a:bodyPr/>
+                    <a:lstStyle/>
+                    <a:p>
+                      <a:pPr algn="ctr"/>
+                      <a:r>
+                        <a:rPr sz="1050" b="0" i="0">
+                          <a:solidFill>
+                            <a:srgbClr val="1F2A37"/>
+                          </a:solidFill>
+                          <a:latin typeface="Calibri"/>
+                        </a:rPr>
+                        <a:t>1,387,383</a:t>
                       </a:r>
                     </a:p>
                   </a:txBody>
@@ -8312,7 +8589,7 @@
                           </a:solidFill>
                           <a:latin typeface="Calibri"/>
                         </a:rPr>
-                        <a:t>1804 s</a:t>
+                        <a:t>3/20</a:t>
                       </a:r>
                     </a:p>
                   </a:txBody>
@@ -8335,7 +8612,30 @@
                           </a:solidFill>
                           <a:latin typeface="Calibri"/>
                         </a:rPr>
-                        <a:t>3,598,730</a:t>
+                        <a:t>1818 s</a:t>
+                      </a:r>
+                    </a:p>
+                  </a:txBody>
+                  <a:tcPr marL="63500" marR="63500" marT="12700" marB="12700" anchor="ctr">
+                    <a:solidFill>
+                      <a:srgbClr val="F4F6F8"/>
+                    </a:solidFill>
+                  </a:tcPr>
+                </a:tc>
+                <a:tc>
+                  <a:txBody>
+                    <a:bodyPr/>
+                    <a:lstStyle/>
+                    <a:p>
+                      <a:pPr algn="ctr"/>
+                      <a:r>
+                        <a:rPr sz="1050" b="0" i="0">
+                          <a:solidFill>
+                            <a:srgbClr val="1F2A37"/>
+                          </a:solidFill>
+                          <a:latin typeface="Calibri"/>
+                        </a:rPr>
+                        <a:t>5,211,584</a:t>
                       </a:r>
                     </a:p>
                   </a:txBody>
@@ -8359,7 +8659,7 @@
         <p:spPr>
           <a:xfrm>
             <a:off x="6172200" y="1188720"/>
-            <a:ext cx="5577840" cy="731520"/>
+            <a:ext cx="5577840" cy="868680"/>
           </a:xfrm>
           <a:prstGeom prst="roundRect">
             <a:avLst/>
@@ -8400,7 +8700,7 @@
                 </a:solidFill>
                 <a:latin typeface="Calibri"/>
               </a:rPr>
-              <a:t>All eight gsm8k legs pass 1.00</a:t>
+              <a:t>gsm8k does not quite saturate here: 5 of 8 legs at 1.00</a:t>
             </a:r>
           </a:p>
           <a:p>
@@ -8412,7 +8712,7 @@
                 </a:solidFill>
                 <a:latin typeface="Calibri"/>
               </a:rPr>
-              <a:t>Including #4's gpt-4.1 swap, which cost one task of five on the previous matrix. The four AuthBridge presets do not change the result — only the latency.</a:t>
+              <a:t>#4's gpt-4.1 swap and #7 lose one task of five, #6 two — five of 86. Read the CAUSE, not the rate: one of #6's was a dropped socket, not the model. The runner retries those now.</a:t>
             </a:r>
           </a:p>
         </p:txBody>
@@ -8425,8 +8725,8 @@
         </p:nvSpPr>
         <p:spPr>
           <a:xfrm>
-            <a:off x="6172200" y="1975104"/>
-            <a:ext cx="5577840" cy="731520"/>
+            <a:off x="6172200" y="2112264"/>
+            <a:ext cx="5577840" cy="868680"/>
           </a:xfrm>
           <a:prstGeom prst="roundRect">
             <a:avLst/>
@@ -8467,7 +8767,7 @@
                 </a:solidFill>
                 <a:latin typeface="Calibri"/>
               </a:rPr>
-              <a:t>tau2 is the only leg that moves</a:t>
+              <a:t>tau2 is the leg that moves</a:t>
             </a:r>
           </a:p>
           <a:p>
@@ -8479,7 +8779,7 @@
                 </a:solidFill>
                 <a:latin typeface="Calibri"/>
               </a:rPr>
-              <a:t>0.80 and 0.85 here, 0.90 and 0.75 on KinD. Across samples of the same 10 tasks some flip: at n=10 one task is worth 0.10, so it cannot resolve less.</a:t>
+              <a:t>0.90 and 0.75 here, 1.00 and 0.80 on KinD. Episodes are nondeterministic: at n=10 one task is worth 0.10, so it cannot resolve less.</a:t>
             </a:r>
           </a:p>
         </p:txBody>
@@ -8492,8 +8792,8 @@
         </p:nvSpPr>
         <p:spPr>
           <a:xfrm>
-            <a:off x="6172200" y="2761488"/>
-            <a:ext cx="5577840" cy="731520"/>
+            <a:off x="6172200" y="3035808"/>
+            <a:ext cx="5577840" cy="868680"/>
           </a:xfrm>
           <a:prstGeom prst="roundRect">
             <a:avLst/>
@@ -8546,7 +8846,7 @@
                 </a:solidFill>
                 <a:latin typeface="Calibri"/>
               </a:rPr>
-              <a:t>Runs complete, tokens record, evaluation says the goal was not met. ~92% of tasks self-declare finish.</a:t>
+              <a:t>Runs complete, tokens record, evaluation says the goal was not met — 34 of 35 tasks self-declare finish. The per-task TIMEOUT dominates: 4 of 25 tasks left no report row, so err reads run.json.</a:t>
             </a:r>
           </a:p>
         </p:txBody>
@@ -8559,8 +8859,8 @@
         </p:nvSpPr>
         <p:spPr>
           <a:xfrm>
-            <a:off x="6172200" y="3547872"/>
-            <a:ext cx="5577840" cy="731520"/>
+            <a:off x="6172200" y="3959352"/>
+            <a:ext cx="5577840" cy="868680"/>
           </a:xfrm>
           <a:prstGeom prst="roundRect">
             <a:avLst/>
@@ -8601,7 +8901,7 @@
                 </a:solidFill>
                 <a:latin typeface="Calibri"/>
               </a:rPr>
-              <a:t>Token attribution complete: 0 of 136 rows lost</a:t>
+              <a:t>0 rows lost attribution, 0 tasks lost to the health probe</a:t>
             </a:r>
           </a:p>
           <a:p>
@@ -8613,7 +8913,7 @@
                 </a:solidFill>
                 <a:latin typeface="Calibri"/>
               </a:rPr>
-              <a:t>An earlier matrix had 15 damaged rows that a tokens == 0 check reported as clean. Fresh deploy per leg, plus a structural detector.</a:t>
+              <a:t>The dev145 agent's per-task GET /v1/models probe (10 s cap, no retry) killed 12 of 141 KinD tasks; dev146 fixed it. An earlier matrix's 15 damaged rows passed a tokens == 0 check as clean — hence the structural detector.</a:t>
             </a:r>
           </a:p>
         </p:txBody>
@@ -8626,8 +8926,8 @@
         </p:nvSpPr>
         <p:spPr>
           <a:xfrm>
-            <a:off x="6172200" y="4334256"/>
-            <a:ext cx="5577840" cy="731520"/>
+            <a:off x="6172200" y="4882896"/>
+            <a:ext cx="5577840" cy="868680"/>
           </a:xfrm>
           <a:prstGeom prst="roundRect">
             <a:avLst/>
@@ -8668,7 +8968,7 @@
                 </a:solidFill>
                 <a:latin typeface="Calibri"/>
               </a:rPr>
-              <a:t>7.0M input / 513k output tokens</a:t>
+              <a:t>9.3M input / 683k output tokens</a:t>
             </a:r>
           </a:p>
           <a:p>
@@ -8680,7 +8980,7 @@
                 </a:solidFill>
                 <a:latin typeface="Calibri"/>
               </a:rPr>
-              <a:t>over 4,990 s of wall time — appworld alone is 64% of the input, on 20 of 136 rows.</a:t>
+              <a:t>over 5,719 s of leg wall time — appworld alone is 71% of the input, on 21 of 137 rows.</a:t>
             </a:r>
           </a:p>
         </p:txBody>
@@ -8985,7 +9285,7 @@
                           </a:solidFill>
                           <a:latin typeface="Calibri"/>
                         </a:rPr>
-                        <a:t/>
+                        <a:t>input</a:t>
                       </a:r>
                     </a:p>
                   </a:txBody>
@@ -9545,6 +9845,29 @@
                           </a:solidFill>
                           <a:latin typeface="Calibri"/>
                         </a:rPr>
+                        <a:t>0.80</a:t>
+                      </a:r>
+                    </a:p>
+                  </a:txBody>
+                  <a:tcPr marL="63500" marR="63500" marT="12700" marB="12700" anchor="ctr">
+                    <a:solidFill>
+                      <a:srgbClr val="F4F6F8"/>
+                    </a:solidFill>
+                  </a:tcPr>
+                </a:tc>
+                <a:tc>
+                  <a:txBody>
+                    <a:bodyPr/>
+                    <a:lstStyle/>
+                    <a:p>
+                      <a:pPr algn="ctr"/>
+                      <a:r>
+                        <a:rPr sz="1000" b="0" i="0">
+                          <a:solidFill>
+                            <a:srgbClr val="1F2A37"/>
+                          </a:solidFill>
+                          <a:latin typeface="Calibri"/>
+                        </a:rPr>
                         <a:t>1.00</a:t>
                       </a:r>
                     </a:p>
@@ -9568,7 +9891,7 @@
                           </a:solidFill>
                           <a:latin typeface="Calibri"/>
                         </a:rPr>
-                        <a:t>0.80</a:t>
+                        <a:t>3,874</a:t>
                       </a:r>
                     </a:p>
                   </a:txBody>
@@ -9591,30 +9914,7 @@
                           </a:solidFill>
                           <a:latin typeface="Calibri"/>
                         </a:rPr>
-                        <a:t>4,213</a:t>
-                      </a:r>
-                    </a:p>
-                  </a:txBody>
-                  <a:tcPr marL="63500" marR="63500" marT="12700" marB="12700" anchor="ctr">
-                    <a:solidFill>
-                      <a:srgbClr val="F4F6F8"/>
-                    </a:solidFill>
-                  </a:tcPr>
-                </a:tc>
-                <a:tc>
-                  <a:txBody>
-                    <a:bodyPr/>
-                    <a:lstStyle/>
-                    <a:p>
-                      <a:pPr algn="ctr"/>
-                      <a:r>
-                        <a:rPr sz="1000" b="0" i="0">
-                          <a:solidFill>
-                            <a:srgbClr val="1F2A37"/>
-                          </a:solidFill>
-                          <a:latin typeface="Calibri"/>
-                        </a:rPr>
-                        <a:t>3,642</a:t>
+                        <a:t>4,183</a:t>
                       </a:r>
                     </a:p>
                   </a:txBody>
@@ -9871,7 +10171,7 @@
                           </a:solidFill>
                           <a:latin typeface="Calibri"/>
                         </a:rPr>
-                        <a:t>1.00</a:t>
+                        <a:t>0.60</a:t>
                       </a:r>
                     </a:p>
                   </a:txBody>
@@ -9894,7 +10194,7 @@
                           </a:solidFill>
                           <a:latin typeface="Calibri"/>
                         </a:rPr>
-                        <a:t>1.00</a:t>
+                        <a:t>0.80</a:t>
                       </a:r>
                     </a:p>
                   </a:txBody>
@@ -9917,6 +10217,29 @@
                           </a:solidFill>
                           <a:latin typeface="Calibri"/>
                         </a:rPr>
+                        <a:t>1,258</a:t>
+                      </a:r>
+                    </a:p>
+                  </a:txBody>
+                  <a:tcPr marL="63500" marR="63500" marT="12700" marB="12700" anchor="ctr">
+                    <a:solidFill>
+                      <a:srgbClr val="F4F6F8"/>
+                    </a:solidFill>
+                  </a:tcPr>
+                </a:tc>
+                <a:tc>
+                  <a:txBody>
+                    <a:bodyPr/>
+                    <a:lstStyle/>
+                    <a:p>
+                      <a:pPr algn="ctr"/>
+                      <a:r>
+                        <a:rPr sz="1000" b="0" i="0">
+                          <a:solidFill>
+                            <a:srgbClr val="1F2A37"/>
+                          </a:solidFill>
+                          <a:latin typeface="Calibri"/>
+                        </a:rPr>
                         <a:t>1,564</a:t>
                       </a:r>
                     </a:p>
@@ -9940,30 +10263,7 @@
                           </a:solidFill>
                           <a:latin typeface="Calibri"/>
                         </a:rPr>
-                        <a:t>1,564</a:t>
-                      </a:r>
-                    </a:p>
-                  </a:txBody>
-                  <a:tcPr marL="63500" marR="63500" marT="12700" marB="12700" anchor="ctr">
-                    <a:solidFill>
-                      <a:srgbClr val="F4F6F8"/>
-                    </a:solidFill>
-                  </a:tcPr>
-                </a:tc>
-                <a:tc>
-                  <a:txBody>
-                    <a:bodyPr/>
-                    <a:lstStyle/>
-                    <a:p>
-                      <a:pPr algn="ctr"/>
-                      <a:r>
-                        <a:rPr sz="1000" b="0" i="0">
-                          <a:solidFill>
-                            <a:srgbClr val="1F2A37"/>
-                          </a:solidFill>
-                          <a:latin typeface="Calibri"/>
-                        </a:rPr>
-                        <a:t>identical</a:t>
+                        <a:t/>
                       </a:r>
                     </a:p>
                   </a:txBody>
@@ -10034,7 +10334,7 @@
                           </a:solidFill>
                           <a:latin typeface="Calibri"/>
                         </a:rPr>
-                        <a:t>1.00</a:t>
+                        <a:t>0.80</a:t>
                       </a:r>
                     </a:p>
                   </a:txBody>
@@ -10360,7 +10660,7 @@
                           </a:solidFill>
                           <a:latin typeface="Calibri"/>
                         </a:rPr>
-                        <a:t>0.80</a:t>
+                        <a:t>0.90</a:t>
                       </a:r>
                     </a:p>
                   </a:txBody>
@@ -10383,7 +10683,7 @@
                           </a:solidFill>
                           <a:latin typeface="Calibri"/>
                         </a:rPr>
-                        <a:t>0.90</a:t>
+                        <a:t>1.00</a:t>
                       </a:r>
                     </a:p>
                   </a:txBody>
@@ -10406,7 +10706,7 @@
                           </a:solidFill>
                           <a:latin typeface="Calibri"/>
                         </a:rPr>
-                        <a:t>863,927</a:t>
+                        <a:t>988,110</a:t>
                       </a:r>
                     </a:p>
                   </a:txBody>
@@ -10429,7 +10729,7 @@
                           </a:solidFill>
                           <a:latin typeface="Calibri"/>
                         </a:rPr>
-                        <a:t>910,744</a:t>
+                        <a:t>1,019,232</a:t>
                       </a:r>
                     </a:p>
                   </a:txBody>
@@ -10523,7 +10823,7 @@
                           </a:solidFill>
                           <a:latin typeface="Calibri"/>
                         </a:rPr>
-                        <a:t>0.85</a:t>
+                        <a:t>0.75</a:t>
                       </a:r>
                     </a:p>
                   </a:txBody>
@@ -10546,7 +10846,7 @@
                           </a:solidFill>
                           <a:latin typeface="Calibri"/>
                         </a:rPr>
-                        <a:t>0.75</a:t>
+                        <a:t>0.80</a:t>
                       </a:r>
                     </a:p>
                   </a:txBody>
@@ -10569,7 +10869,7 @@
                           </a:solidFill>
                           <a:latin typeface="Calibri"/>
                         </a:rPr>
-                        <a:t>1,656,724</a:t>
+                        <a:t>1,703,460</a:t>
                       </a:r>
                     </a:p>
                   </a:txBody>
@@ -10592,7 +10892,7 @@
                           </a:solidFill>
                           <a:latin typeface="Calibri"/>
                         </a:rPr>
-                        <a:t>1,546,050</a:t>
+                        <a:t>1,743,312</a:t>
                       </a:r>
                     </a:p>
                   </a:txBody>
@@ -10732,7 +11032,7 @@
                           </a:solidFill>
                           <a:latin typeface="Calibri"/>
                         </a:rPr>
-                        <a:t>868,819</a:t>
+                        <a:t>1,387,383</a:t>
                       </a:r>
                     </a:p>
                   </a:txBody>
@@ -10755,7 +11055,7 @@
                           </a:solidFill>
                           <a:latin typeface="Calibri"/>
                         </a:rPr>
-                        <a:t>1,071,356</a:t>
+                        <a:t>840,030</a:t>
                       </a:r>
                     </a:p>
                   </a:txBody>
@@ -10895,7 +11195,7 @@
                           </a:solidFill>
                           <a:latin typeface="Calibri"/>
                         </a:rPr>
-                        <a:t>3,598,730</a:t>
+                        <a:t>5,211,584</a:t>
                       </a:r>
                     </a:p>
                   </a:txBody>
@@ -10918,7 +11218,7 @@
                           </a:solidFill>
                           <a:latin typeface="Calibri"/>
                         </a:rPr>
-                        <a:t>4,376,562</a:t>
+                        <a:t>2,009,348</a:t>
                       </a:r>
                     </a:p>
                   </a:txBody>
@@ -10965,7 +11265,7 @@
         <p:spPr>
           <a:xfrm>
             <a:off x="7543800" y="1188720"/>
-            <a:ext cx="4206240" cy="731520"/>
+            <a:ext cx="4206240" cy="896112"/>
           </a:xfrm>
           <a:prstGeom prst="roundRect">
             <a:avLst/>
@@ -11006,7 +11306,7 @@
                 </a:solidFill>
                 <a:latin typeface="Calibri"/>
               </a:rPr>
-              <a:t>9 of 12 pass rates identical</a:t>
+              <a:t>7 of 12 pass rates identical, and all 5 deltas favour KinD</a:t>
             </a:r>
           </a:p>
           <a:p>
@@ -11018,7 +11318,7 @@
                 </a:solidFill>
                 <a:latin typeface="Calibri"/>
               </a:rPr>
-              <a:t>The three that differ are #4 (one gsm8k task of five) and both tau2 legs — and tau2 is the leg we know flips run to run on either platform.</a:t>
+              <a:t>So read the per-CAUSE table instead of the rate: wrong answers split 2 (OCP) to 1 (KinD), per-task timeouts 4 to 11 — all appworld — and one dropped socket, OCP #6.</a:t>
             </a:r>
           </a:p>
         </p:txBody>
@@ -11031,8 +11331,8 @@
         </p:nvSpPr>
         <p:spPr>
           <a:xfrm>
-            <a:off x="7543800" y="1975104"/>
-            <a:ext cx="4206240" cy="731520"/>
+            <a:off x="7543800" y="2139696"/>
+            <a:ext cx="4206240" cy="896112"/>
           </a:xfrm>
           <a:prstGeom prst="roundRect">
             <a:avLst/>
@@ -11073,7 +11373,7 @@
                 </a:solidFill>
                 <a:latin typeface="Calibri"/>
               </a:rPr>
-              <a:t>7 legs byte-identical on input tokens</a:t>
+              <a:t>6 legs byte-identical on input tokens</a:t>
             </a:r>
           </a:p>
           <a:p>
@@ -11085,7 +11385,7 @@
                 </a:solidFill>
                 <a:latin typeface="Calibri"/>
               </a:rPr>
-              <a:t>320 / 3,166 / 15,684 / 1,564 x4. Deterministic task selection plus the same model means identical work — the strongest available proof this is a like-for-like comparison, not merely a similar one.</a:t>
+              <a:t>320 / 3,166 / 15,684 / 1,564 x3. Deterministic task selection plus the same model means identical work — the strongest available proof this is a like-for-like comparison, not merely a similar one.</a:t>
             </a:r>
           </a:p>
         </p:txBody>
@@ -11098,8 +11398,8 @@
         </p:nvSpPr>
         <p:spPr>
           <a:xfrm>
-            <a:off x="7543800" y="2761488"/>
-            <a:ext cx="4206240" cy="731520"/>
+            <a:off x="7543800" y="3090672"/>
+            <a:ext cx="4206240" cy="896112"/>
           </a:xfrm>
           <a:prstGeom prst="roundRect">
             <a:avLst/>
@@ -11140,7 +11440,7 @@
                 </a:solidFill>
                 <a:latin typeface="Calibri"/>
               </a:rPr>
-              <a:t>Wall time: 4,990 s OCP vs 5,986 s KinD</a:t>
+              <a:t>#7 is in that set at 0.80 vs 1.00</a:t>
             </a:r>
           </a:p>
           <a:p>
@@ -11152,7 +11452,7 @@
                 </a:solidFill>
                 <a:latin typeface="Calibri"/>
               </a:rPr>
-              <a:t>The single node is 20% slower overall, and individual legs differ by up to 3.4x in either direction — appworld dominates the total.</a:t>
+              <a:t>Identical input tokens with different pass rates is not a contradiction: same prompts, different answers. Tokens prove the WORK matched; they say nothing about whether it was right.</a:t>
             </a:r>
           </a:p>
         </p:txBody>
@@ -11165,8 +11465,8 @@
         </p:nvSpPr>
         <p:spPr>
           <a:xfrm>
-            <a:off x="7543800" y="3547872"/>
-            <a:ext cx="4206240" cy="731520"/>
+            <a:off x="7543800" y="4041648"/>
+            <a:ext cx="4206240" cy="896112"/>
           </a:xfrm>
           <a:prstGeom prst="roundRect">
             <a:avLst/>
@@ -11207,7 +11507,7 @@
                 </a:solidFill>
                 <a:latin typeface="Calibri"/>
               </a:rPr>
-              <a:t>0 lost-attribution rows on both sides</a:t>
+              <a:t>Wall time: 5,719 s OCP vs 5,975 s KinD</a:t>
             </a:r>
           </a:p>
           <a:p>
@@ -11219,7 +11519,7 @@
                 </a:solidFill>
                 <a:latin typeface="Calibri"/>
               </a:rPr>
-              <a:t>136 OCP rows, 135 KinD rows.</a:t>
+              <a:t>Within 5% overall, but individual legs differ by up to 2.3x in either direction, and appworld — which dominates the total — inverts: #11 is faster on KinD, #12 is slower.</a:t>
             </a:r>
           </a:p>
         </p:txBody>
@@ -11232,8 +11532,8 @@
         </p:nvSpPr>
         <p:spPr>
           <a:xfrm>
-            <a:off x="7543800" y="4334256"/>
-            <a:ext cx="4206240" cy="731520"/>
+            <a:off x="7543800" y="4992624"/>
+            <a:ext cx="4206240" cy="896112"/>
           </a:xfrm>
           <a:prstGeom prst="roundRect">
             <a:avLst/>
@@ -11274,7 +11574,7 @@
                 </a:solidFill>
                 <a:latin typeface="Calibri"/>
               </a:rPr>
-              <a:t>So the platform is not the variable</a:t>
+              <a:t>0 lost-attribution rows and 0 probe failures on both sides</a:t>
             </a:r>
           </a:p>
           <a:p>
@@ -11286,7 +11586,7 @@
                 </a:solidFill>
                 <a:latin typeface="Calibri"/>
               </a:rPr>
-              <a:t>Where the two differ it traces to episode nondeterminism (tau2), small samples (#4 = one task), or appworld task timeouts — not to OpenShift vs KinD.</a:t>
+              <a:t>137 OCP rows against 130 KinD. The 7-row gap is appworld tasks that timed out before the harness wrote a row (4 OCP, 11 KinD) — not lost telemetry.</a:t>
             </a:r>
           </a:p>
         </p:txBody>
@@ -11340,7 +11640,7 @@
 
 <file path=ppt/slides/slide15.xml><?xml version="1.0" encoding="utf-8"?>
 <p:sld xmlns:a="http://schemas.openxmlformats.org/drawingml/2006/main" xmlns:p="http://schemas.openxmlformats.org/presentationml/2006/main" xmlns:r="http://schemas.openxmlformats.org/officeDocument/2006/relationships">
-  <p:cSld name="9.2 What AuthBridge Costs">
+  <p:cSld name="9.2 What AuthBridge Costs — and Why It Has No Single Number">
     <p:spTree>
       <p:nvGrpSpPr>
         <p:cNvPr id="1" name=""/>
@@ -11396,7 +11696,7 @@
                 </a:solidFill>
                 <a:latin typeface="Calibri"/>
               </a:rPr>
-              <a:t>9.2  What AuthBridge Costs</a:t>
+              <a:t>9.2  What AuthBridge Costs — and Why It Has No Single Number</a:t>
             </a:r>
           </a:p>
           <a:p>
@@ -11407,7 +11707,7 @@
                 </a:solidFill>
                 <a:latin typeface="Calibri"/>
               </a:rPr>
-              <a:t>Legs #3 and #5–8 ran byte-identical work, so latency differences are the plugin config</a:t>
+              <a:t>The designed 13-leg experiment (n=50, crossover replicates, gateway cache spaced), v1.28</a:t>
             </a:r>
           </a:p>
         </p:txBody>
@@ -11422,7 +11722,7 @@
         </p:nvGraphicFramePr>
         <p:xfrm>
           <a:off x="411480" y="1188720"/>
-          <a:ext cx="5806440" cy="1737360"/>
+          <a:ext cx="5806440" cy="2011680"/>
         </p:xfrm>
         <a:graphic>
           <a:graphicData uri="http://schemas.openxmlformats.org/drawingml/2006/table">
@@ -11431,11 +11731,13 @@
                 <a:tableStyleId>{5C22544A-7EE6-4342-B048-85BDC9FD1C3A}</a:tableStyleId>
               </a:tblPr>
               <a:tblGrid>
-                <a:gridCol w="2377440"/>
-                <a:gridCol w="1691640"/>
-                <a:gridCol w="1737360"/>
+                <a:gridCol w="2240280"/>
+                <a:gridCol w="960120"/>
+                <a:gridCol w="868680"/>
+                <a:gridCol w="868680"/>
+                <a:gridCol w="868680"/>
               </a:tblGrid>
-              <a:tr h="347472">
+              <a:tr h="335280">
                 <a:tc>
                   <a:txBody>
                     <a:bodyPr/>
@@ -11449,7 +11751,7 @@
                           </a:solidFill>
                           <a:latin typeface="Calibri"/>
                         </a:rPr>
-                        <a:t>component</a:t>
+                        <a:t>non-LLM s / task (steady)</a:t>
                       </a:r>
                     </a:p>
                   </a:txBody>
@@ -11472,7 +11774,7 @@
                           </a:solidFill>
                           <a:latin typeface="Calibri"/>
                         </a:rPr>
-                        <a:t>cost</a:t>
+                        <a:t>OpenShift</a:t>
                       </a:r>
                     </a:p>
                   </a:txBody>
@@ -11495,7 +11797,7 @@
                           </a:solidFill>
                           <a:latin typeface="Calibri"/>
                         </a:rPr>
-                        <a:t>measured from</a:t>
+                        <a:t>KinD</a:t>
                       </a:r>
                     </a:p>
                   </a:txBody>
@@ -11505,8 +11807,54 @@
                     </a:solidFill>
                   </a:tcPr>
                 </a:tc>
+                <a:tc>
+                  <a:txBody>
+                    <a:bodyPr/>
+                    <a:lstStyle/>
+                    <a:p>
+                      <a:pPr algn="ctr"/>
+                      <a:r>
+                        <a:rPr sz="1050" b="1" i="0">
+                          <a:solidFill>
+                            <a:srgbClr val="FFFFFF"/>
+                          </a:solidFill>
+                          <a:latin typeface="Calibri"/>
+                        </a:rPr>
+                        <a:t>OCP step</a:t>
+                      </a:r>
+                    </a:p>
+                  </a:txBody>
+                  <a:tcPr marL="63500" marR="63500" marT="12700" marB="12700" anchor="ctr">
+                    <a:solidFill>
+                      <a:srgbClr val="1B3A5C"/>
+                    </a:solidFill>
+                  </a:tcPr>
+                </a:tc>
+                <a:tc>
+                  <a:txBody>
+                    <a:bodyPr/>
+                    <a:lstStyle/>
+                    <a:p>
+                      <a:pPr algn="ctr"/>
+                      <a:r>
+                        <a:rPr sz="1050" b="1" i="0">
+                          <a:solidFill>
+                            <a:srgbClr val="FFFFFF"/>
+                          </a:solidFill>
+                          <a:latin typeface="Calibri"/>
+                        </a:rPr>
+                        <a:t>KinD step</a:t>
+                      </a:r>
+                    </a:p>
+                  </a:txBody>
+                  <a:tcPr marL="63500" marR="63500" marT="12700" marB="12700" anchor="ctr">
+                    <a:solidFill>
+                      <a:srgbClr val="1B3A5C"/>
+                    </a:solidFill>
+                  </a:tcPr>
+                </a:tc>
               </a:tr>
-              <a:tr h="347472">
+              <a:tr h="335280">
                 <a:tc>
                   <a:txBody>
                     <a:bodyPr/>
@@ -11520,7 +11868,7 @@
                           </a:solidFill>
                           <a:latin typeface="Calibri"/>
                         </a:rPr>
-                        <a:t>Sidecar present at all</a:t>
+                        <a:t>baseline (AuthBridge off)</a:t>
                       </a:r>
                     </a:p>
                   </a:txBody>
@@ -11543,7 +11891,7 @@
                           </a:solidFill>
                           <a:latin typeface="Calibri"/>
                         </a:rPr>
-                        <a:t>+12.6 s / task (OCP)</a:t>
+                        <a:t>0.423</a:t>
                       </a:r>
                     </a:p>
                   </a:txBody>
@@ -11566,7 +11914,7 @@
                           </a:solidFill>
                           <a:latin typeface="Calibri"/>
                         </a:rPr>
-                        <a:t>flat-ish across all four presets</a:t>
+                        <a:t>0.099</a:t>
                       </a:r>
                     </a:p>
                   </a:txBody>
@@ -11576,8 +11924,54 @@
                     </a:solidFill>
                   </a:tcPr>
                 </a:tc>
+                <a:tc>
+                  <a:txBody>
+                    <a:bodyPr/>
+                    <a:lstStyle/>
+                    <a:p>
+                      <a:pPr algn="ctr"/>
+                      <a:r>
+                        <a:rPr sz="1050" b="0" i="0">
+                          <a:solidFill>
+                            <a:srgbClr val="1F2A37"/>
+                          </a:solidFill>
+                          <a:latin typeface="Calibri"/>
+                        </a:rPr>
+                        <a:t>—</a:t>
+                      </a:r>
+                    </a:p>
+                  </a:txBody>
+                  <a:tcPr marL="63500" marR="63500" marT="12700" marB="12700" anchor="ctr">
+                    <a:solidFill>
+                      <a:srgbClr val="FFFFFF"/>
+                    </a:solidFill>
+                  </a:tcPr>
+                </a:tc>
+                <a:tc>
+                  <a:txBody>
+                    <a:bodyPr/>
+                    <a:lstStyle/>
+                    <a:p>
+                      <a:pPr algn="ctr"/>
+                      <a:r>
+                        <a:rPr sz="1050" b="0" i="0">
+                          <a:solidFill>
+                            <a:srgbClr val="1F2A37"/>
+                          </a:solidFill>
+                          <a:latin typeface="Calibri"/>
+                        </a:rPr>
+                        <a:t>—</a:t>
+                      </a:r>
+                    </a:p>
+                  </a:txBody>
+                  <a:tcPr marL="63500" marR="63500" marT="12700" marB="12700" anchor="ctr">
+                    <a:solidFill>
+                      <a:srgbClr val="FFFFFF"/>
+                    </a:solidFill>
+                  </a:tcPr>
+                </a:tc>
               </a:tr>
-              <a:tr h="347472">
+              <a:tr h="335280">
                 <a:tc>
                   <a:txBody>
                     <a:bodyPr/>
@@ -11591,7 +11985,7 @@
                           </a:solidFill>
                           <a:latin typeface="Calibri"/>
                         </a:rPr>
-                        <a:t/>
+                        <a:t>auth-only</a:t>
                       </a:r>
                     </a:p>
                   </a:txBody>
@@ -11614,7 +12008,7 @@
                           </a:solidFill>
                           <a:latin typeface="Calibri"/>
                         </a:rPr>
-                        <a:t>+1.0 s / task (KinD)</a:t>
+                        <a:t>14.101</a:t>
                       </a:r>
                     </a:p>
                   </a:txBody>
@@ -11637,7 +12031,7 @@
                           </a:solidFill>
                           <a:latin typeface="Calibri"/>
                         </a:rPr>
-                        <a:t>same legs, single node</a:t>
+                        <a:t>0.152</a:t>
                       </a:r>
                     </a:p>
                   </a:txBody>
@@ -11647,8 +12041,54 @@
                     </a:solidFill>
                   </a:tcPr>
                 </a:tc>
+                <a:tc>
+                  <a:txBody>
+                    <a:bodyPr/>
+                    <a:lstStyle/>
+                    <a:p>
+                      <a:pPr algn="ctr"/>
+                      <a:r>
+                        <a:rPr sz="1050" b="0" i="0">
+                          <a:solidFill>
+                            <a:srgbClr val="1F2A37"/>
+                          </a:solidFill>
+                          <a:latin typeface="Calibri"/>
+                        </a:rPr>
+                        <a:t>+13.68</a:t>
+                      </a:r>
+                    </a:p>
+                  </a:txBody>
+                  <a:tcPr marL="63500" marR="63500" marT="12700" marB="12700" anchor="ctr">
+                    <a:solidFill>
+                      <a:srgbClr val="F4F6F8"/>
+                    </a:solidFill>
+                  </a:tcPr>
+                </a:tc>
+                <a:tc>
+                  <a:txBody>
+                    <a:bodyPr/>
+                    <a:lstStyle/>
+                    <a:p>
+                      <a:pPr algn="ctr"/>
+                      <a:r>
+                        <a:rPr sz="1050" b="0" i="0">
+                          <a:solidFill>
+                            <a:srgbClr val="1F2A37"/>
+                          </a:solidFill>
+                          <a:latin typeface="Calibri"/>
+                        </a:rPr>
+                        <a:t>+0.05</a:t>
+                      </a:r>
+                    </a:p>
+                  </a:txBody>
+                  <a:tcPr marL="63500" marR="63500" marT="12700" marB="12700" anchor="ctr">
+                    <a:solidFill>
+                      <a:srgbClr val="F4F6F8"/>
+                    </a:solidFill>
+                  </a:tcPr>
+                </a:tc>
               </a:tr>
-              <a:tr h="347472">
+              <a:tr h="335280">
                 <a:tc>
                   <a:txBody>
                     <a:bodyPr/>
@@ -11662,7 +12102,7 @@
                           </a:solidFill>
                           <a:latin typeface="Calibri"/>
                         </a:rPr>
-                        <a:t>Tool call, sidecar but unjudged</a:t>
+                        <a:t>ibac-only</a:t>
                       </a:r>
                     </a:p>
                   </a:txBody>
@@ -11685,7 +12125,7 @@
                           </a:solidFill>
                           <a:latin typeface="Calibri"/>
                         </a:rPr>
-                        <a:t>+1.56 s (OCP)</a:t>
+                        <a:t>14.148</a:t>
                       </a:r>
                     </a:p>
                   </a:txBody>
@@ -11708,7 +12148,7 @@
                           </a:solidFill>
                           <a:latin typeface="Calibri"/>
                         </a:rPr>
-                        <a:t>auth-only; +0 ms on KinD</a:t>
+                        <a:t>1.688</a:t>
                       </a:r>
                     </a:p>
                   </a:txBody>
@@ -11718,8 +12158,54 @@
                     </a:solidFill>
                   </a:tcPr>
                 </a:tc>
+                <a:tc>
+                  <a:txBody>
+                    <a:bodyPr/>
+                    <a:lstStyle/>
+                    <a:p>
+                      <a:pPr algn="ctr"/>
+                      <a:r>
+                        <a:rPr sz="1050" b="0" i="0">
+                          <a:solidFill>
+                            <a:srgbClr val="1F2A37"/>
+                          </a:solidFill>
+                          <a:latin typeface="Calibri"/>
+                        </a:rPr>
+                        <a:t>+0.05</a:t>
+                      </a:r>
+                    </a:p>
+                  </a:txBody>
+                  <a:tcPr marL="63500" marR="63500" marT="12700" marB="12700" anchor="ctr">
+                    <a:solidFill>
+                      <a:srgbClr val="FFFFFF"/>
+                    </a:solidFill>
+                  </a:tcPr>
+                </a:tc>
+                <a:tc>
+                  <a:txBody>
+                    <a:bodyPr/>
+                    <a:lstStyle/>
+                    <a:p>
+                      <a:pPr algn="ctr"/>
+                      <a:r>
+                        <a:rPr sz="1050" b="0" i="0">
+                          <a:solidFill>
+                            <a:srgbClr val="1F2A37"/>
+                          </a:solidFill>
+                          <a:latin typeface="Calibri"/>
+                        </a:rPr>
+                        <a:t>+1.54</a:t>
+                      </a:r>
+                    </a:p>
+                  </a:txBody>
+                  <a:tcPr marL="63500" marR="63500" marT="12700" marB="12700" anchor="ctr">
+                    <a:solidFill>
+                      <a:srgbClr val="FFFFFF"/>
+                    </a:solidFill>
+                  </a:tcPr>
+                </a:tc>
               </a:tr>
-              <a:tr h="347472">
+              <a:tr h="335280">
                 <a:tc>
                   <a:txBody>
                     <a:bodyPr/>
@@ -11733,7 +12219,7 @@
                           </a:solidFill>
                           <a:latin typeface="Calibri"/>
                         </a:rPr>
-                        <a:t>Tool call, judged</a:t>
+                        <a:t>full (auth + ibac)</a:t>
                       </a:r>
                     </a:p>
                   </a:txBody>
@@ -11756,7 +12242,7 @@
                           </a:solidFill>
                           <a:latin typeface="Calibri"/>
                         </a:rPr>
-                        <a:t>not isolable</a:t>
+                        <a:t>14.446</a:t>
                       </a:r>
                     </a:p>
                   </a:txBody>
@@ -11779,13 +12265,176 @@
                           </a:solidFill>
                           <a:latin typeface="Calibri"/>
                         </a:rPr>
-                        <a:t>no leg judged all 5 calls</a:t>
+                        <a:t>1.824</a:t>
                       </a:r>
                     </a:p>
                   </a:txBody>
                   <a:tcPr marL="63500" marR="63500" marT="12700" marB="12700" anchor="ctr">
                     <a:solidFill>
                       <a:srgbClr val="F4F6F8"/>
+                    </a:solidFill>
+                  </a:tcPr>
+                </a:tc>
+                <a:tc>
+                  <a:txBody>
+                    <a:bodyPr/>
+                    <a:lstStyle/>
+                    <a:p>
+                      <a:pPr algn="ctr"/>
+                      <a:r>
+                        <a:rPr sz="1050" b="0" i="0">
+                          <a:solidFill>
+                            <a:srgbClr val="1F2A37"/>
+                          </a:solidFill>
+                          <a:latin typeface="Calibri"/>
+                        </a:rPr>
+                        <a:t>+0.30</a:t>
+                      </a:r>
+                    </a:p>
+                  </a:txBody>
+                  <a:tcPr marL="63500" marR="63500" marT="12700" marB="12700" anchor="ctr">
+                    <a:solidFill>
+                      <a:srgbClr val="F4F6F8"/>
+                    </a:solidFill>
+                  </a:tcPr>
+                </a:tc>
+                <a:tc>
+                  <a:txBody>
+                    <a:bodyPr/>
+                    <a:lstStyle/>
+                    <a:p>
+                      <a:pPr algn="ctr"/>
+                      <a:r>
+                        <a:rPr sz="1050" b="0" i="0">
+                          <a:solidFill>
+                            <a:srgbClr val="1F2A37"/>
+                          </a:solidFill>
+                          <a:latin typeface="Calibri"/>
+                        </a:rPr>
+                        <a:t>+0.14</a:t>
+                      </a:r>
+                    </a:p>
+                  </a:txBody>
+                  <a:tcPr marL="63500" marR="63500" marT="12700" marB="12700" anchor="ctr">
+                    <a:solidFill>
+                      <a:srgbClr val="F4F6F8"/>
+                    </a:solidFill>
+                  </a:tcPr>
+                </a:tc>
+              </a:tr>
+              <a:tr h="335280">
+                <a:tc>
+                  <a:txBody>
+                    <a:bodyPr/>
+                    <a:lstStyle/>
+                    <a:p>
+                      <a:pPr algn="l"/>
+                      <a:r>
+                        <a:rPr sz="1050" b="1" i="0">
+                          <a:solidFill>
+                            <a:srgbClr val="1F2A37"/>
+                          </a:solidFill>
+                          <a:latin typeface="Calibri"/>
+                        </a:rPr>
+                        <a:t>full + ibac:observe</a:t>
+                      </a:r>
+                    </a:p>
+                  </a:txBody>
+                  <a:tcPr marL="63500" marR="63500" marT="12700" marB="12700" anchor="ctr">
+                    <a:solidFill>
+                      <a:srgbClr val="FFFFFF"/>
+                    </a:solidFill>
+                  </a:tcPr>
+                </a:tc>
+                <a:tc>
+                  <a:txBody>
+                    <a:bodyPr/>
+                    <a:lstStyle/>
+                    <a:p>
+                      <a:pPr algn="ctr"/>
+                      <a:r>
+                        <a:rPr sz="1050" b="0" i="0">
+                          <a:solidFill>
+                            <a:srgbClr val="1F2A37"/>
+                          </a:solidFill>
+                          <a:latin typeface="Calibri"/>
+                        </a:rPr>
+                        <a:t>14.598</a:t>
+                      </a:r>
+                    </a:p>
+                  </a:txBody>
+                  <a:tcPr marL="63500" marR="63500" marT="12700" marB="12700" anchor="ctr">
+                    <a:solidFill>
+                      <a:srgbClr val="FFFFFF"/>
+                    </a:solidFill>
+                  </a:tcPr>
+                </a:tc>
+                <a:tc>
+                  <a:txBody>
+                    <a:bodyPr/>
+                    <a:lstStyle/>
+                    <a:p>
+                      <a:pPr algn="ctr"/>
+                      <a:r>
+                        <a:rPr sz="1050" b="0" i="0">
+                          <a:solidFill>
+                            <a:srgbClr val="1F2A37"/>
+                          </a:solidFill>
+                          <a:latin typeface="Calibri"/>
+                        </a:rPr>
+                        <a:t>1.826</a:t>
+                      </a:r>
+                    </a:p>
+                  </a:txBody>
+                  <a:tcPr marL="63500" marR="63500" marT="12700" marB="12700" anchor="ctr">
+                    <a:solidFill>
+                      <a:srgbClr val="FFFFFF"/>
+                    </a:solidFill>
+                  </a:tcPr>
+                </a:tc>
+                <a:tc>
+                  <a:txBody>
+                    <a:bodyPr/>
+                    <a:lstStyle/>
+                    <a:p>
+                      <a:pPr algn="ctr"/>
+                      <a:r>
+                        <a:rPr sz="1050" b="0" i="0">
+                          <a:solidFill>
+                            <a:srgbClr val="1F2A37"/>
+                          </a:solidFill>
+                          <a:latin typeface="Calibri"/>
+                        </a:rPr>
+                        <a:t>+0.15</a:t>
+                      </a:r>
+                    </a:p>
+                  </a:txBody>
+                  <a:tcPr marL="63500" marR="63500" marT="12700" marB="12700" anchor="ctr">
+                    <a:solidFill>
+                      <a:srgbClr val="FFFFFF"/>
+                    </a:solidFill>
+                  </a:tcPr>
+                </a:tc>
+                <a:tc>
+                  <a:txBody>
+                    <a:bodyPr/>
+                    <a:lstStyle/>
+                    <a:p>
+                      <a:pPr algn="ctr"/>
+                      <a:r>
+                        <a:rPr sz="1050" b="0" i="0">
+                          <a:solidFill>
+                            <a:srgbClr val="1F2A37"/>
+                          </a:solidFill>
+                          <a:latin typeface="Calibri"/>
+                        </a:rPr>
+                        <a:t>+0.00</a:t>
+                      </a:r>
+                    </a:p>
+                  </a:txBody>
+                  <a:tcPr marL="63500" marR="63500" marT="12700" marB="12700" anchor="ctr">
+                    <a:solidFill>
+                      <a:srgbClr val="FFFFFF"/>
                     </a:solidFill>
                   </a:tcPr>
                 </a:tc>
@@ -11803,8 +12452,8 @@
           <p:nvPr/>
         </p:nvGraphicFramePr>
         <p:xfrm>
-          <a:off x="411480" y="3429000"/>
-          <a:ext cx="5806440" cy="1737360"/>
+          <a:off x="411480" y="3456432"/>
+          <a:ext cx="5806440" cy="2331720"/>
         </p:xfrm>
         <a:graphic>
           <a:graphicData uri="http://schemas.openxmlformats.org/drawingml/2006/table">
@@ -11813,12 +12462,12 @@
                 <a:tableStyleId>{5C22544A-7EE6-4342-B048-85BDC9FD1C3A}</a:tableStyleId>
               </a:tblPr>
               <a:tblGrid>
-                <a:gridCol w="2377440"/>
-                <a:gridCol w="1143000"/>
-                <a:gridCol w="1143000"/>
-                <a:gridCol w="1143000"/>
+                <a:gridCol w="2240280"/>
+                <a:gridCol w="1280160"/>
+                <a:gridCol w="1188720"/>
+                <a:gridCol w="1097280"/>
               </a:tblGrid>
-              <a:tr h="347472">
+              <a:tr h="333102">
                 <a:tc>
                   <a:txBody>
                     <a:bodyPr/>
@@ -11832,7 +12481,7 @@
                           </a:solidFill>
                           <a:latin typeface="Calibri"/>
                         </a:rPr>
-                        <a:t>median span</a:t>
+                        <a:t>does the finding travel?</a:t>
                       </a:r>
                     </a:p>
                   </a:txBody>
@@ -11855,7 +12504,7 @@
                           </a:solidFill>
                           <a:latin typeface="Calibri"/>
                         </a:rPr>
-                        <a:t>OCP</a:t>
+                        <a:t>OpenShift</a:t>
                       </a:r>
                     </a:p>
                   </a:txBody>
@@ -11901,7 +12550,7 @@
                           </a:solidFill>
                           <a:latin typeface="Calibri"/>
                         </a:rPr>
-                        <a:t>ratio</a:t>
+                        <a:t>travels?</a:t>
                       </a:r>
                     </a:p>
                   </a:txBody>
@@ -11912,7 +12561,7 @@
                   </a:tcPr>
                 </a:tc>
               </a:tr>
-              <a:tr h="347472">
+              <a:tr h="333102">
                 <a:tc>
                   <a:txBody>
                     <a:bodyPr/>
@@ -11926,7 +12575,7 @@
                           </a:solidFill>
                           <a:latin typeface="Calibri"/>
                         </a:rPr>
-                        <a:t>connect_mcp, no sidecar</a:t>
+                        <a:t>Which layer costs anything</a:t>
                       </a:r>
                     </a:p>
                   </a:txBody>
@@ -11949,7 +12598,7 @@
                           </a:solidFill>
                           <a:latin typeface="Calibri"/>
                         </a:rPr>
-                        <a:t>424 ms</a:t>
+                        <a:t>the sidecar</a:t>
                       </a:r>
                     </a:p>
                   </a:txBody>
@@ -11972,7 +12621,7 @@
                           </a:solidFill>
                           <a:latin typeface="Calibri"/>
                         </a:rPr>
-                        <a:t>79 ms</a:t>
+                        <a:t>the judge</a:t>
                       </a:r>
                     </a:p>
                   </a:txBody>
@@ -11995,7 +12644,7 @@
                           </a:solidFill>
                           <a:latin typeface="Calibri"/>
                         </a:rPr>
-                        <a:t>5.4x</a:t>
+                        <a:t>NO</a:t>
                       </a:r>
                     </a:p>
                   </a:txBody>
@@ -12006,7 +12655,7 @@
                   </a:tcPr>
                 </a:tc>
               </a:tr>
-              <a:tr h="347472">
+              <a:tr h="333102">
                 <a:tc>
                   <a:txBody>
                     <a:bodyPr/>
@@ -12020,7 +12669,7 @@
                           </a:solidFill>
                           <a:latin typeface="Calibri"/>
                         </a:rPr>
-                        <a:t>connect_mcp with sidecar</a:t>
+                        <a:t>Serial tool calls judged (p=1)</a:t>
                       </a:r>
                     </a:p>
                   </a:txBody>
@@ -12043,7 +12692,7 @@
                           </a:solidFill>
                           <a:latin typeface="Calibri"/>
                         </a:rPr>
-                        <a:t>3200 ms</a:t>
+                        <a:t>10 / 10</a:t>
                       </a:r>
                     </a:p>
                   </a:txBody>
@@ -12066,7 +12715,7 @@
                           </a:solidFill>
                           <a:latin typeface="Calibri"/>
                         </a:rPr>
-                        <a:t>131 ms</a:t>
+                        <a:t>10 / 10</a:t>
                       </a:r>
                     </a:p>
                   </a:txBody>
@@ -12089,7 +12738,7 @@
                           </a:solidFill>
                           <a:latin typeface="Calibri"/>
                         </a:rPr>
-                        <a:t>24.4x</a:t>
+                        <a:t>YES</a:t>
                       </a:r>
                     </a:p>
                   </a:txBody>
@@ -12100,7 +12749,7 @@
                   </a:tcPr>
                 </a:tc>
               </a:tr>
-              <a:tr h="347472">
+              <a:tr h="333102">
                 <a:tc>
                   <a:txBody>
                     <a:bodyPr/>
@@ -12114,7 +12763,7 @@
                           </a:solidFill>
                           <a:latin typeface="Calibri"/>
                         </a:rPr>
-                        <a:t>tool call, unjudged</a:t>
+                        <a:t>Judged / tool-call ratio, n=50</a:t>
                       </a:r>
                     </a:p>
                   </a:txBody>
@@ -12137,7 +12786,7 @@
                           </a:solidFill>
                           <a:latin typeface="Calibri"/>
                         </a:rPr>
-                        <a:t>1657 ms</a:t>
+                        <a:t>0.90–0.98</a:t>
                       </a:r>
                     </a:p>
                   </a:txBody>
@@ -12160,7 +12809,7 @@
                           </a:solidFill>
                           <a:latin typeface="Calibri"/>
                         </a:rPr>
-                        <a:t>11 ms</a:t>
+                        <a:t>0.90–0.98</a:t>
                       </a:r>
                     </a:p>
                   </a:txBody>
@@ -12183,7 +12832,7 @@
                           </a:solidFill>
                           <a:latin typeface="Calibri"/>
                         </a:rPr>
-                        <a:t>150.6x</a:t>
+                        <a:t>YES</a:t>
                       </a:r>
                     </a:p>
                   </a:txBody>
@@ -12194,7 +12843,7 @@
                   </a:tcPr>
                 </a:tc>
               </a:tr>
-              <a:tr h="347472">
+              <a:tr h="333102">
                 <a:tc>
                   <a:txBody>
                     <a:bodyPr/>
@@ -12208,7 +12857,7 @@
                           </a:solidFill>
                           <a:latin typeface="Calibri"/>
                         </a:rPr>
-                        <a:t>tool call, judged</a:t>
+                        <a:t>tau2 measured / projected</a:t>
                       </a:r>
                     </a:p>
                   </a:txBody>
@@ -12231,7 +12880,7 @@
                           </a:solidFill>
                           <a:latin typeface="Calibri"/>
                         </a:rPr>
-                        <a:t>4689 ms</a:t>
+                        <a:t>0.31x</a:t>
                       </a:r>
                     </a:p>
                   </a:txBody>
@@ -12254,7 +12903,7 @@
                           </a:solidFill>
                           <a:latin typeface="Calibri"/>
                         </a:rPr>
-                        <a:t>1306 ms</a:t>
+                        <a:t>2.49x</a:t>
                       </a:r>
                     </a:p>
                   </a:txBody>
@@ -12277,7 +12926,195 @@
                           </a:solidFill>
                           <a:latin typeface="Calibri"/>
                         </a:rPr>
-                        <a:t>3.6x</a:t>
+                        <a:t>NO</a:t>
+                      </a:r>
+                    </a:p>
+                  </a:txBody>
+                  <a:tcPr marL="63500" marR="63500" marT="12700" marB="12700" anchor="ctr">
+                    <a:solidFill>
+                      <a:srgbClr val="F4F6F8"/>
+                    </a:solidFill>
+                  </a:tcPr>
+                </a:tc>
+              </a:tr>
+              <a:tr h="333102">
+                <a:tc>
+                  <a:txBody>
+                    <a:bodyPr/>
+                    <a:lstStyle/>
+                    <a:p>
+                      <a:pPr algn="l"/>
+                      <a:r>
+                        <a:rPr sz="1050" b="1" i="0">
+                          <a:solidFill>
+                            <a:srgbClr val="1F2A37"/>
+                          </a:solidFill>
+                          <a:latin typeface="Calibri"/>
+                        </a:rPr>
+                        <a:t>Between-deploy noise floor</a:t>
+                      </a:r>
+                    </a:p>
+                  </a:txBody>
+                  <a:tcPr marL="63500" marR="63500" marT="12700" marB="12700" anchor="ctr">
+                    <a:solidFill>
+                      <a:srgbClr val="FFFFFF"/>
+                    </a:solidFill>
+                  </a:tcPr>
+                </a:tc>
+                <a:tc>
+                  <a:txBody>
+                    <a:bodyPr/>
+                    <a:lstStyle/>
+                    <a:p>
+                      <a:pPr algn="ctr"/>
+                      <a:r>
+                        <a:rPr sz="1050" b="0" i="0">
+                          <a:solidFill>
+                            <a:srgbClr val="1F2A37"/>
+                          </a:solidFill>
+                          <a:latin typeface="Calibri"/>
+                        </a:rPr>
+                        <a:t>0.22 s</a:t>
+                      </a:r>
+                    </a:p>
+                  </a:txBody>
+                  <a:tcPr marL="63500" marR="63500" marT="12700" marB="12700" anchor="ctr">
+                    <a:solidFill>
+                      <a:srgbClr val="FFFFFF"/>
+                    </a:solidFill>
+                  </a:tcPr>
+                </a:tc>
+                <a:tc>
+                  <a:txBody>
+                    <a:bodyPr/>
+                    <a:lstStyle/>
+                    <a:p>
+                      <a:pPr algn="ctr"/>
+                      <a:r>
+                        <a:rPr sz="1050" b="0" i="0">
+                          <a:solidFill>
+                            <a:srgbClr val="1F2A37"/>
+                          </a:solidFill>
+                          <a:latin typeface="Calibri"/>
+                        </a:rPr>
+                        <a:t>0.155 s</a:t>
+                      </a:r>
+                    </a:p>
+                  </a:txBody>
+                  <a:tcPr marL="63500" marR="63500" marT="12700" marB="12700" anchor="ctr">
+                    <a:solidFill>
+                      <a:srgbClr val="FFFFFF"/>
+                    </a:solidFill>
+                  </a:tcPr>
+                </a:tc>
+                <a:tc>
+                  <a:txBody>
+                    <a:bodyPr/>
+                    <a:lstStyle/>
+                    <a:p>
+                      <a:pPr algn="ctr"/>
+                      <a:r>
+                        <a:rPr sz="1050" b="0" i="0">
+                          <a:solidFill>
+                            <a:srgbClr val="1F2A37"/>
+                          </a:solidFill>
+                          <a:latin typeface="Calibri"/>
+                        </a:rPr>
+                        <a:t>YES</a:t>
+                      </a:r>
+                    </a:p>
+                  </a:txBody>
+                  <a:tcPr marL="63500" marR="63500" marT="12700" marB="12700" anchor="ctr">
+                    <a:solidFill>
+                      <a:srgbClr val="FFFFFF"/>
+                    </a:solidFill>
+                  </a:tcPr>
+                </a:tc>
+              </a:tr>
+              <a:tr h="333108">
+                <a:tc>
+                  <a:txBody>
+                    <a:bodyPr/>
+                    <a:lstStyle/>
+                    <a:p>
+                      <a:pPr algn="l"/>
+                      <a:r>
+                        <a:rPr sz="1050" b="1" i="0">
+                          <a:solidFill>
+                            <a:srgbClr val="1F2A37"/>
+                          </a:solidFill>
+                          <a:latin typeface="Calibri"/>
+                        </a:rPr>
+                        <a:t>Sidecar CPU / memory</a:t>
+                      </a:r>
+                    </a:p>
+                  </a:txBody>
+                  <a:tcPr marL="63500" marR="63500" marT="12700" marB="12700" anchor="ctr">
+                    <a:solidFill>
+                      <a:srgbClr val="F4F6F8"/>
+                    </a:solidFill>
+                  </a:tcPr>
+                </a:tc>
+                <a:tc>
+                  <a:txBody>
+                    <a:bodyPr/>
+                    <a:lstStyle/>
+                    <a:p>
+                      <a:pPr algn="ctr"/>
+                      <a:r>
+                        <a:rPr sz="1050" b="0" i="0">
+                          <a:solidFill>
+                            <a:srgbClr val="1F2A37"/>
+                          </a:solidFill>
+                          <a:latin typeface="Calibri"/>
+                        </a:rPr>
+                        <a:t>no data</a:t>
+                      </a:r>
+                    </a:p>
+                  </a:txBody>
+                  <a:tcPr marL="63500" marR="63500" marT="12700" marB="12700" anchor="ctr">
+                    <a:solidFill>
+                      <a:srgbClr val="F4F6F8"/>
+                    </a:solidFill>
+                  </a:tcPr>
+                </a:tc>
+                <a:tc>
+                  <a:txBody>
+                    <a:bodyPr/>
+                    <a:lstStyle/>
+                    <a:p>
+                      <a:pPr algn="ctr"/>
+                      <a:r>
+                        <a:rPr sz="1050" b="0" i="0">
+                          <a:solidFill>
+                            <a:srgbClr val="1F2A37"/>
+                          </a:solidFill>
+                          <a:latin typeface="Calibri"/>
+                        </a:rPr>
+                        <a:t>no data</a:t>
+                      </a:r>
+                    </a:p>
+                  </a:txBody>
+                  <a:tcPr marL="63500" marR="63500" marT="12700" marB="12700" anchor="ctr">
+                    <a:solidFill>
+                      <a:srgbClr val="F4F6F8"/>
+                    </a:solidFill>
+                  </a:tcPr>
+                </a:tc>
+                <a:tc>
+                  <a:txBody>
+                    <a:bodyPr/>
+                    <a:lstStyle/>
+                    <a:p>
+                      <a:pPr algn="ctr"/>
+                      <a:r>
+                        <a:rPr sz="1050" b="0" i="0">
+                          <a:solidFill>
+                            <a:srgbClr val="1F2A37"/>
+                          </a:solidFill>
+                          <a:latin typeface="Calibri"/>
+                        </a:rPr>
+                        <a:t>—</a:t>
                       </a:r>
                     </a:p>
                   </a:txBody>
@@ -12301,7 +13138,7 @@
         <p:spPr>
           <a:xfrm>
             <a:off x="6446520" y="1188720"/>
-            <a:ext cx="5303520" cy="1188720"/>
+            <a:ext cx="5303520" cy="1298448"/>
           </a:xfrm>
           <a:prstGeom prst="roundRect">
             <a:avLst/>
@@ -12342,7 +13179,7 @@
                 </a:solidFill>
                 <a:latin typeface="Calibri"/>
               </a:rPr>
-              <a:t>The judge is itself an LLM call</a:t>
+              <a:t>The two clusters disagree about WHICH layer costs anything</a:t>
             </a:r>
           </a:p>
           <a:p>
@@ -12354,7 +13191,7 @@
                 </a:solidFill>
                 <a:latin typeface="Calibri"/>
               </a:rPr>
-              <a:t>The sidecar POSTs to a chat-completions endpoint per authorized action, which is why it costs seconds and why its latency is so variable.</a:t>
+              <a:t>On OpenShift the whole expense is the sidecar's mere presence and the judge is noise; on KinD the sidecar is nearly free and the judge is all of it. Both are right about their own cluster, and the same condition on the same image measures 4–93x apart. Never quote an absolute per-task plugin figure without naming the cluster.</a:t>
             </a:r>
           </a:p>
         </p:txBody>
@@ -12367,8 +13204,8 @@
         </p:nvSpPr>
         <p:spPr>
           <a:xfrm>
-            <a:off x="6446520" y="2432304"/>
-            <a:ext cx="5303520" cy="1188720"/>
+            <a:off x="6446520" y="2523744"/>
+            <a:ext cx="5303520" cy="1298448"/>
           </a:xfrm>
           <a:prstGeom prst="roundRect">
             <a:avLst/>
@@ -12409,7 +13246,7 @@
                 </a:solidFill>
                 <a:latin typeface="Calibri"/>
               </a:rPr>
-              <a:t>Most of the OCP figure is topology, not plugins</a:t>
+              <a:t>Not a timeout — we checked</a:t>
             </a:r>
           </a:p>
           <a:p>
@@ -12421,7 +13258,7 @@
                 </a:solidFill>
                 <a:latin typeface="Calibri"/>
               </a:rPr>
-              <a:t>The judged-call cost is broadly comparable across platforms (3.6x) because it is dominated by a shared external gateway. The fixed cost is 13x apart because this OCP matrix is cross-cluster — token exchange over external routes. Do NOT quote +12.6 s as “the cost of AuthBridge”; the single-node figure (~+1.0 s fixed) is the better estimate of the intrinsic cost.</a:t>
+              <a:t>A timeout piles values on a round number. OpenShift's auth-only runs 8.05–17.93 s, SD 1.92, broad and unimodal: contention and queueing. On the quiet cluster the tail moves to full (median 1.82 s, max 14.00 s) because the judge is itself an LLM call — so the sidecar costs reproducibility, not only latency.</a:t>
             </a:r>
           </a:p>
         </p:txBody>
@@ -12434,8 +13271,8 @@
         </p:nvSpPr>
         <p:spPr>
           <a:xfrm>
-            <a:off x="6446520" y="3675888"/>
-            <a:ext cx="5303520" cy="1188720"/>
+            <a:off x="6446520" y="3858768"/>
+            <a:ext cx="5303520" cy="1298448"/>
           </a:xfrm>
           <a:prstGeom prst="roundRect">
             <a:avLst/>
@@ -12476,7 +13313,7 @@
                 </a:solidFill>
                 <a:latin typeface="Calibri"/>
               </a:rPr>
-              <a:t>Presets cannot be ranked from these numbers</a:t>
+              <a:t>One flag decides whether the study measures anything</a:t>
             </a:r>
           </a:p>
           <a:p>
@@ -12488,7 +13325,7 @@
                 </a:solidFill>
                 <a:latin typeface="Calibri"/>
               </a:rPr>
-              <a:t>NOT ONE of the six IBAC legs authorized all of its tool calls: OCP judged 4/5, 3/5, 4/5 and KinD 3/5, 2/5, 3/5. A leg that judged fewer calls shows a lower median — a mixture, not a saving, which is why the judged-call cost cannot be isolated at all from this matrix. Decision caching under concurrency, or a fail-open hole? Still OPEN; the test is one ibac-only leg at parallelism 1.</a:t>
+              <a:t>Every gsm8k leg sends the SAME 50 prompts and the gateway replays completions for ~10 min: unspaced, later legs measure the cache, in run order — the shape of a plugin effect. BM_CACHE_GAP=900 spaces them. The check needs no statistics: the conditions NEST, so no sidecar leg can beat a sidecar-free one. Clear by 41.8x (OCP), 1.4x (KinD).</a:t>
             </a:r>
           </a:p>
         </p:txBody>
@@ -12501,8 +13338,8 @@
         </p:nvSpPr>
         <p:spPr>
           <a:xfrm>
-            <a:off x="6446520" y="4919472"/>
-            <a:ext cx="5303520" cy="1188720"/>
+            <a:off x="6446520" y="5193792"/>
+            <a:ext cx="5303520" cy="1298448"/>
           </a:xfrm>
           <a:prstGeom prst="roundRect">
             <a:avLst/>
@@ -12543,7 +13380,7 @@
                 </a:solidFill>
                 <a:latin typeface="Calibri"/>
               </a:rPr>
-              <a:t>Latency only</a:t>
+              <a:t>The deploy is the unit of replication, not the task</a:t>
             </a:r>
           </a:p>
           <a:p>
@@ -12555,7 +13392,7 @@
                 </a:solidFill>
                 <a:latin typeface="Calibri"/>
               </a:rPr>
-              <a:t>The sidecar's CPU and memory cost is unmeasured — every infra field in these runs is 0.0.</a:t>
+              <a:t>A per-task interval measures variance WITHIN one deploy. The honest floor is between two deploys of one condition, and it exceeds every step but the dominant layer — so presets cannot be RANKED at any task count; add deploys, not tasks. Cut the other way: at σ ≈ 0.23 s two deploys already resolve a 1 s effect, so the small steps are genuinely small rather than unresolved.</a:t>
             </a:r>
           </a:p>
         </p:txBody>
@@ -22044,7 +22881,7 @@
                 </a:solidFill>
                 <a:latin typeface="Calibri"/>
               </a:rPr>
-              <a:t>~13</a:t>
+              <a:t>~15</a:t>
             </a:r>
           </a:p>
         </p:txBody>
@@ -22333,7 +23170,7 @@
                 </a:solidFill>
                 <a:latin typeface="Calibri"/>
               </a:rPr>
-              <a:t>3  agent → gateway:  1 probe + N real chat calls</a:t>
+              <a:t>3  agent → gateway:  N real chat calls per task</a:t>
             </a:r>
           </a:p>
           <a:p>
@@ -24175,7 +25012,7 @@
                 <a:gridCol w="3017520"/>
                 <a:gridCol w="3017520"/>
               </a:tblGrid>
-              <a:tr h="331469">
+              <a:tr h="305972">
                 <a:tc>
                   <a:txBody>
                     <a:bodyPr/>
@@ -24269,7 +25106,7 @@
                   </a:tcPr>
                 </a:tc>
               </a:tr>
-              <a:tr h="331469">
+              <a:tr h="305972">
                 <a:tc>
                   <a:txBody>
                     <a:bodyPr/>
@@ -24363,7 +25200,7 @@
                   </a:tcPr>
                 </a:tc>
               </a:tr>
-              <a:tr h="331469">
+              <a:tr h="305972">
                 <a:tc>
                   <a:txBody>
                     <a:bodyPr/>
@@ -24377,7 +25214,7 @@
                           </a:solidFill>
                           <a:latin typeface="Calibri"/>
                         </a:rPr>
-                        <a:t>Tasks measured</a:t>
+                        <a:t>Task rows measured</a:t>
                       </a:r>
                     </a:p>
                   </a:txBody>
@@ -24400,7 +25237,7 @@
                           </a:solidFill>
                           <a:latin typeface="Calibri"/>
                         </a:rPr>
-                        <a:t>172 (all clean)</a:t>
+                        <a:t>172 of 172</a:t>
                       </a:r>
                     </a:p>
                   </a:txBody>
@@ -24423,7 +25260,7 @@
                           </a:solidFill>
                           <a:latin typeface="Calibri"/>
                         </a:rPr>
-                        <a:t>60 (all clean)</a:t>
+                        <a:t>60 of 60</a:t>
                       </a:r>
                     </a:p>
                   </a:txBody>
@@ -24446,7 +25283,7 @@
                           </a:solidFill>
                           <a:latin typeface="Calibri"/>
                         </a:rPr>
-                        <a:t>39 (all clean)</a:t>
+                        <a:t>35 of 50 (15 timed out)</a:t>
                       </a:r>
                     </a:p>
                   </a:txBody>
@@ -24457,7 +25294,7 @@
                   </a:tcPr>
                 </a:tc>
               </a:tr>
-              <a:tr h="331469">
+              <a:tr h="305972">
                 <a:tc>
                   <a:txBody>
                     <a:bodyPr/>
@@ -24471,12 +25308,200 @@
                           </a:solidFill>
                           <a:latin typeface="Calibri"/>
                         </a:rPr>
+                        <a:t>Rows with lost telemetry</a:t>
+                      </a:r>
+                    </a:p>
+                  </a:txBody>
+                  <a:tcPr marL="63500" marR="63500" marT="12700" marB="12700" anchor="ctr">
+                    <a:solidFill>
+                      <a:srgbClr val="FFFFFF"/>
+                    </a:solidFill>
+                  </a:tcPr>
+                </a:tc>
+                <a:tc>
+                  <a:txBody>
+                    <a:bodyPr/>
+                    <a:lstStyle/>
+                    <a:p>
+                      <a:pPr algn="ctr"/>
+                      <a:r>
+                        <a:rPr sz="1100" b="0" i="0">
+                          <a:solidFill>
+                            <a:srgbClr val="1F2A37"/>
+                          </a:solidFill>
+                          <a:latin typeface="Calibri"/>
+                        </a:rPr>
+                        <a:t>0</a:t>
+                      </a:r>
+                    </a:p>
+                  </a:txBody>
+                  <a:tcPr marL="63500" marR="63500" marT="12700" marB="12700" anchor="ctr">
+                    <a:solidFill>
+                      <a:srgbClr val="FFFFFF"/>
+                    </a:solidFill>
+                  </a:tcPr>
+                </a:tc>
+                <a:tc>
+                  <a:txBody>
+                    <a:bodyPr/>
+                    <a:lstStyle/>
+                    <a:p>
+                      <a:pPr algn="ctr"/>
+                      <a:r>
+                        <a:rPr sz="1100" b="0" i="0">
+                          <a:solidFill>
+                            <a:srgbClr val="1F2A37"/>
+                          </a:solidFill>
+                          <a:latin typeface="Calibri"/>
+                        </a:rPr>
+                        <a:t>0</a:t>
+                      </a:r>
+                    </a:p>
+                  </a:txBody>
+                  <a:tcPr marL="63500" marR="63500" marT="12700" marB="12700" anchor="ctr">
+                    <a:solidFill>
+                      <a:srgbClr val="FFFFFF"/>
+                    </a:solidFill>
+                  </a:tcPr>
+                </a:tc>
+                <a:tc>
+                  <a:txBody>
+                    <a:bodyPr/>
+                    <a:lstStyle/>
+                    <a:p>
+                      <a:pPr algn="ctr"/>
+                      <a:r>
+                        <a:rPr sz="1100" b="0" i="0">
+                          <a:solidFill>
+                            <a:srgbClr val="1F2A37"/>
+                          </a:solidFill>
+                          <a:latin typeface="Calibri"/>
+                        </a:rPr>
+                        <a:t>0</a:t>
+                      </a:r>
+                    </a:p>
+                  </a:txBody>
+                  <a:tcPr marL="63500" marR="63500" marT="12700" marB="12700" anchor="ctr">
+                    <a:solidFill>
+                      <a:srgbClr val="FFFFFF"/>
+                    </a:solidFill>
+                  </a:tcPr>
+                </a:tc>
+              </a:tr>
+              <a:tr h="305972">
+                <a:tc>
+                  <a:txBody>
+                    <a:bodyPr/>
+                    <a:lstStyle/>
+                    <a:p>
+                      <a:pPr algn="l"/>
+                      <a:r>
+                        <a:rPr sz="1100" b="1" i="0">
+                          <a:solidFill>
+                            <a:srgbClr val="1F2A37"/>
+                          </a:solidFill>
+                          <a:latin typeface="Calibri"/>
+                        </a:rPr>
                         <a:t>Pass rate</a:t>
                       </a:r>
                     </a:p>
                   </a:txBody>
                   <a:tcPr marL="63500" marR="63500" marT="12700" marB="12700" anchor="ctr">
                     <a:solidFill>
+                      <a:srgbClr val="F4F6F8"/>
+                    </a:solidFill>
+                  </a:tcPr>
+                </a:tc>
+                <a:tc>
+                  <a:txBody>
+                    <a:bodyPr/>
+                    <a:lstStyle/>
+                    <a:p>
+                      <a:pPr algn="ctr"/>
+                      <a:r>
+                        <a:rPr sz="1100" b="0" i="0">
+                          <a:solidFill>
+                            <a:srgbClr val="1F2A37"/>
+                          </a:solidFill>
+                          <a:latin typeface="Calibri"/>
+                        </a:rPr>
+                        <a:t>0.97</a:t>
+                      </a:r>
+                    </a:p>
+                  </a:txBody>
+                  <a:tcPr marL="63500" marR="63500" marT="12700" marB="12700" anchor="ctr">
+                    <a:solidFill>
+                      <a:srgbClr val="F4F6F8"/>
+                    </a:solidFill>
+                  </a:tcPr>
+                </a:tc>
+                <a:tc>
+                  <a:txBody>
+                    <a:bodyPr/>
+                    <a:lstStyle/>
+                    <a:p>
+                      <a:pPr algn="ctr"/>
+                      <a:r>
+                        <a:rPr sz="1100" b="0" i="0">
+                          <a:solidFill>
+                            <a:srgbClr val="1F2A37"/>
+                          </a:solidFill>
+                          <a:latin typeface="Calibri"/>
+                        </a:rPr>
+                        <a:t>0.83</a:t>
+                      </a:r>
+                    </a:p>
+                  </a:txBody>
+                  <a:tcPr marL="63500" marR="63500" marT="12700" marB="12700" anchor="ctr">
+                    <a:solidFill>
+                      <a:srgbClr val="F4F6F8"/>
+                    </a:solidFill>
+                  </a:tcPr>
+                </a:tc>
+                <a:tc>
+                  <a:txBody>
+                    <a:bodyPr/>
+                    <a:lstStyle/>
+                    <a:p>
+                      <a:pPr algn="ctr"/>
+                      <a:r>
+                        <a:rPr sz="1100" b="0" i="0">
+                          <a:solidFill>
+                            <a:srgbClr val="1F2A37"/>
+                          </a:solidFill>
+                          <a:latin typeface="Calibri"/>
+                        </a:rPr>
+                        <a:t>0.00</a:t>
+                      </a:r>
+                    </a:p>
+                  </a:txBody>
+                  <a:tcPr marL="63500" marR="63500" marT="12700" marB="12700" anchor="ctr">
+                    <a:solidFill>
+                      <a:srgbClr val="F4F6F8"/>
+                    </a:solidFill>
+                  </a:tcPr>
+                </a:tc>
+              </a:tr>
+              <a:tr h="305972">
+                <a:tc>
+                  <a:txBody>
+                    <a:bodyPr/>
+                    <a:lstStyle/>
+                    <a:p>
+                      <a:pPr algn="l"/>
+                      <a:r>
+                        <a:rPr sz="1100" b="1" i="0">
+                          <a:solidFill>
+                            <a:srgbClr val="1F2A37"/>
+                          </a:solidFill>
+                          <a:latin typeface="Calibri"/>
+                        </a:rPr>
+                        <a:t>Input tokens / task</a:t>
+                      </a:r>
+                    </a:p>
+                  </a:txBody>
+                  <a:tcPr marL="63500" marR="63500" marT="12700" marB="12700" anchor="ctr">
+                    <a:solidFill>
                       <a:srgbClr val="FFFFFF"/>
                     </a:solidFill>
                   </a:tcPr>
@@ -24494,7 +25519,7 @@
                           </a:solidFill>
                           <a:latin typeface="Calibri"/>
                         </a:rPr>
-                        <a:t>0.99</a:t>
+                        <a:t>341</a:t>
                       </a:r>
                     </a:p>
                   </a:txBody>
@@ -24517,7 +25542,7 @@
                           </a:solidFill>
                           <a:latin typeface="Calibri"/>
                         </a:rPr>
-                        <a:t>0.82</a:t>
+                        <a:t>90,902</a:t>
                       </a:r>
                     </a:p>
                   </a:txBody>
@@ -24540,7 +25565,7 @@
                           </a:solidFill>
                           <a:latin typeface="Calibri"/>
                         </a:rPr>
-                        <a:t>0.00</a:t>
+                        <a:t>269,953</a:t>
                       </a:r>
                     </a:p>
                   </a:txBody>
@@ -24551,7 +25576,7 @@
                   </a:tcPr>
                 </a:tc>
               </a:tr>
-              <a:tr h="331469">
+              <a:tr h="305972">
                 <a:tc>
                   <a:txBody>
                     <a:bodyPr/>
@@ -24565,7 +25590,7 @@
                           </a:solidFill>
                           <a:latin typeface="Calibri"/>
                         </a:rPr>
-                        <a:t>Input tokens / task</a:t>
+                        <a:t>Output tokens / task</a:t>
                       </a:r>
                     </a:p>
                   </a:txBody>
@@ -24588,7 +25613,7 @@
                           </a:solidFill>
                           <a:latin typeface="Calibri"/>
                         </a:rPr>
-                        <a:t>341</a:t>
+                        <a:t>180</a:t>
                       </a:r>
                     </a:p>
                   </a:txBody>
@@ -24611,7 +25636,7 @@
                           </a:solidFill>
                           <a:latin typeface="Calibri"/>
                         </a:rPr>
-                        <a:t>82,957</a:t>
+                        <a:t>2,061</a:t>
                       </a:r>
                     </a:p>
                   </a:txBody>
@@ -24634,7 +25659,7 @@
                           </a:solidFill>
                           <a:latin typeface="Calibri"/>
                         </a:rPr>
-                        <a:t>254,243</a:t>
+                        <a:t>25,140</a:t>
                       </a:r>
                     </a:p>
                   </a:txBody>
@@ -24645,7 +25670,7 @@
                   </a:tcPr>
                 </a:tc>
               </a:tr>
-              <a:tr h="331469">
+              <a:tr h="305972">
                 <a:tc>
                   <a:txBody>
                     <a:bodyPr/>
@@ -24659,7 +25684,7 @@
                           </a:solidFill>
                           <a:latin typeface="Calibri"/>
                         </a:rPr>
-                        <a:t>Output tokens / task</a:t>
+                        <a:t>LLM calls / task</a:t>
                       </a:r>
                     </a:p>
                   </a:txBody>
@@ -24682,7 +25707,7 @@
                           </a:solidFill>
                           <a:latin typeface="Calibri"/>
                         </a:rPr>
-                        <a:t>192</a:t>
+                        <a:t>1.1</a:t>
                       </a:r>
                     </a:p>
                   </a:txBody>
@@ -24705,7 +25730,7 @@
                           </a:solidFill>
                           <a:latin typeface="Calibri"/>
                         </a:rPr>
-                        <a:t>1,969</a:t>
+                        <a:t>11.4</a:t>
                       </a:r>
                     </a:p>
                   </a:txBody>
@@ -24728,7 +25753,7 @@
                           </a:solidFill>
                           <a:latin typeface="Calibri"/>
                         </a:rPr>
-                        <a:t>24,157</a:t>
+                        <a:t>29.2</a:t>
                       </a:r>
                     </a:p>
                   </a:txBody>
@@ -24739,7 +25764,7 @@
                   </a:tcPr>
                 </a:tc>
               </a:tr>
-              <a:tr h="331469">
+              <a:tr h="305972">
                 <a:tc>
                   <a:txBody>
                     <a:bodyPr/>
@@ -24753,7 +25778,7 @@
                           </a:solidFill>
                           <a:latin typeface="Calibri"/>
                         </a:rPr>
-                        <a:t>LLM calls / task</a:t>
+                        <a:t>Tool calls / task</a:t>
                       </a:r>
                     </a:p>
                   </a:txBody>
@@ -24776,7 +25801,7 @@
                           </a:solidFill>
                           <a:latin typeface="Calibri"/>
                         </a:rPr>
-                        <a:t>2.1</a:t>
+                        <a:t>1.1</a:t>
                       </a:r>
                     </a:p>
                   </a:txBody>
@@ -24799,7 +25824,7 @@
                           </a:solidFill>
                           <a:latin typeface="Calibri"/>
                         </a:rPr>
-                        <a:t>11.1</a:t>
+                        <a:t>11.4</a:t>
                       </a:r>
                     </a:p>
                   </a:txBody>
@@ -24822,7 +25847,7 @@
                           </a:solidFill>
                           <a:latin typeface="Calibri"/>
                         </a:rPr>
-                        <a:t>28.3</a:t>
+                        <a:t>14.6</a:t>
                       </a:r>
                     </a:p>
                   </a:txBody>
@@ -24833,7 +25858,7 @@
                   </a:tcPr>
                 </a:tc>
               </a:tr>
-              <a:tr h="331469">
+              <a:tr h="305972">
                 <a:tc>
                   <a:txBody>
                     <a:bodyPr/>
@@ -24847,7 +25872,7 @@
                           </a:solidFill>
                           <a:latin typeface="Calibri"/>
                         </a:rPr>
-                        <a:t>Tool calls / task</a:t>
+                        <a:t>Median task latency</a:t>
                       </a:r>
                     </a:p>
                   </a:txBody>
@@ -24870,7 +25895,7 @@
                           </a:solidFill>
                           <a:latin typeface="Calibri"/>
                         </a:rPr>
-                        <a:t>1.1</a:t>
+                        <a:t>4.9 s</a:t>
                       </a:r>
                     </a:p>
                   </a:txBody>
@@ -24893,7 +25918,7 @@
                           </a:solidFill>
                           <a:latin typeface="Calibri"/>
                         </a:rPr>
-                        <a:t>11.2</a:t>
+                        <a:t>84 s</a:t>
                       </a:r>
                     </a:p>
                   </a:txBody>
@@ -24916,7 +25941,7 @@
                           </a:solidFill>
                           <a:latin typeface="Calibri"/>
                         </a:rPr>
-                        <a:t>13.6</a:t>
+                        <a:t>264 s</a:t>
                       </a:r>
                     </a:p>
                   </a:txBody>
@@ -24927,7 +25952,7 @@
                   </a:tcPr>
                 </a:tc>
               </a:tr>
-              <a:tr h="331469">
+              <a:tr h="305972">
                 <a:tc>
                   <a:txBody>
                     <a:bodyPr/>
@@ -24941,7 +25966,7 @@
                           </a:solidFill>
                           <a:latin typeface="Calibri"/>
                         </a:rPr>
-                        <a:t>Median task latency</a:t>
+                        <a:t>Slowest task seen</a:t>
                       </a:r>
                     </a:p>
                   </a:txBody>
@@ -24964,7 +25989,7 @@
                           </a:solidFill>
                           <a:latin typeface="Calibri"/>
                         </a:rPr>
-                        <a:t>7.7 s</a:t>
+                        <a:t>39 s</a:t>
                       </a:r>
                     </a:p>
                   </a:txBody>
@@ -24987,7 +26012,7 @@
                           </a:solidFill>
                           <a:latin typeface="Calibri"/>
                         </a:rPr>
-                        <a:t>97 s</a:t>
+                        <a:t>136 s</a:t>
                       </a:r>
                     </a:p>
                   </a:txBody>
@@ -25010,7 +26035,7 @@
                           </a:solidFill>
                           <a:latin typeface="Calibri"/>
                         </a:rPr>
-                        <a:t>290 s</a:t>
+                        <a:t>592 s</a:t>
                       </a:r>
                     </a:p>
                   </a:txBody>
@@ -25021,7 +26046,7 @@
                   </a:tcPr>
                 </a:tc>
               </a:tr>
-              <a:tr h="331469">
+              <a:tr h="305972">
                 <a:tc>
                   <a:txBody>
                     <a:bodyPr/>
@@ -25035,7 +26060,7 @@
                           </a:solidFill>
                           <a:latin typeface="Calibri"/>
                         </a:rPr>
-                        <a:t>Slowest task seen</a:t>
+                        <a:t>Model we use</a:t>
                       </a:r>
                     </a:p>
                   </a:txBody>
@@ -25058,7 +26083,7 @@
                           </a:solidFill>
                           <a:latin typeface="Calibri"/>
                         </a:rPr>
-                        <a:t>29 s</a:t>
+                        <a:t>gpt-5-mini</a:t>
                       </a:r>
                     </a:p>
                   </a:txBody>
@@ -25081,7 +26106,7 @@
                           </a:solidFill>
                           <a:latin typeface="Calibri"/>
                         </a:rPr>
-                        <a:t>181 s</a:t>
+                        <a:t>claude-sonnet-5</a:t>
                       </a:r>
                     </a:p>
                   </a:txBody>
@@ -25104,7 +26129,7 @@
                           </a:solidFill>
                           <a:latin typeface="Calibri"/>
                         </a:rPr>
-                        <a:t>596 s</a:t>
+                        <a:t>gemini-2.5-pro</a:t>
                       </a:r>
                     </a:p>
                   </a:txBody>
@@ -25115,7 +26140,7 @@
                   </a:tcPr>
                 </a:tc>
               </a:tr>
-              <a:tr h="331469">
+              <a:tr h="305975">
                 <a:tc>
                   <a:txBody>
                     <a:bodyPr/>
@@ -25129,7 +26154,7 @@
                           </a:solidFill>
                           <a:latin typeface="Calibri"/>
                         </a:rPr>
-                        <a:t>Model we use</a:t>
+                        <a:t>Task pool</a:t>
                       </a:r>
                     </a:p>
                   </a:txBody>
@@ -25152,7 +26177,7 @@
                           </a:solidFill>
                           <a:latin typeface="Calibri"/>
                         </a:rPr>
-                        <a:t>gpt-5-mini</a:t>
+                        <a:t>8.5K (HuggingFace)</a:t>
                       </a:r>
                     </a:p>
                   </a:txBody>
@@ -25175,7 +26200,7 @@
                           </a:solidFill>
                           <a:latin typeface="Calibri"/>
                         </a:rPr>
-                        <a:t>claude-sonnet-5</a:t>
+                        <a:t>114 (retail domain)</a:t>
                       </a:r>
                     </a:p>
                   </a:txBody>
@@ -25198,107 +26223,13 @@
                           </a:solidFill>
                           <a:latin typeface="Calibri"/>
                         </a:rPr>
-                        <a:t>gemini-2.5-pro</a:t>
+                        <a:t>grouped scenarios</a:t>
                       </a:r>
                     </a:p>
                   </a:txBody>
                   <a:tcPr marL="63500" marR="63500" marT="12700" marB="12700" anchor="ctr">
                     <a:solidFill>
                       <a:srgbClr val="F4F6F8"/>
-                    </a:solidFill>
-                  </a:tcPr>
-                </a:tc>
-              </a:tr>
-              <a:tr h="331480">
-                <a:tc>
-                  <a:txBody>
-                    <a:bodyPr/>
-                    <a:lstStyle/>
-                    <a:p>
-                      <a:pPr algn="l"/>
-                      <a:r>
-                        <a:rPr sz="1100" b="1" i="0">
-                          <a:solidFill>
-                            <a:srgbClr val="1F2A37"/>
-                          </a:solidFill>
-                          <a:latin typeface="Calibri"/>
-                        </a:rPr>
-                        <a:t>Task pool</a:t>
-                      </a:r>
-                    </a:p>
-                  </a:txBody>
-                  <a:tcPr marL="63500" marR="63500" marT="12700" marB="12700" anchor="ctr">
-                    <a:solidFill>
-                      <a:srgbClr val="FFFFFF"/>
-                    </a:solidFill>
-                  </a:tcPr>
-                </a:tc>
-                <a:tc>
-                  <a:txBody>
-                    <a:bodyPr/>
-                    <a:lstStyle/>
-                    <a:p>
-                      <a:pPr algn="ctr"/>
-                      <a:r>
-                        <a:rPr sz="1100" b="0" i="0">
-                          <a:solidFill>
-                            <a:srgbClr val="1F2A37"/>
-                          </a:solidFill>
-                          <a:latin typeface="Calibri"/>
-                        </a:rPr>
-                        <a:t>8.5K (HuggingFace)</a:t>
-                      </a:r>
-                    </a:p>
-                  </a:txBody>
-                  <a:tcPr marL="63500" marR="63500" marT="12700" marB="12700" anchor="ctr">
-                    <a:solidFill>
-                      <a:srgbClr val="FFFFFF"/>
-                    </a:solidFill>
-                  </a:tcPr>
-                </a:tc>
-                <a:tc>
-                  <a:txBody>
-                    <a:bodyPr/>
-                    <a:lstStyle/>
-                    <a:p>
-                      <a:pPr algn="ctr"/>
-                      <a:r>
-                        <a:rPr sz="1100" b="0" i="0">
-                          <a:solidFill>
-                            <a:srgbClr val="1F2A37"/>
-                          </a:solidFill>
-                          <a:latin typeface="Calibri"/>
-                        </a:rPr>
-                        <a:t>114 (retail domain)</a:t>
-                      </a:r>
-                    </a:p>
-                  </a:txBody>
-                  <a:tcPr marL="63500" marR="63500" marT="12700" marB="12700" anchor="ctr">
-                    <a:solidFill>
-                      <a:srgbClr val="FFFFFF"/>
-                    </a:solidFill>
-                  </a:tcPr>
-                </a:tc>
-                <a:tc>
-                  <a:txBody>
-                    <a:bodyPr/>
-                    <a:lstStyle/>
-                    <a:p>
-                      <a:pPr algn="ctr"/>
-                      <a:r>
-                        <a:rPr sz="1100" b="0" i="0">
-                          <a:solidFill>
-                            <a:srgbClr val="1F2A37"/>
-                          </a:solidFill>
-                          <a:latin typeface="Calibri"/>
-                        </a:rPr>
-                        <a:t>grouped scenarios</a:t>
-                      </a:r>
-                    </a:p>
-                  </a:txBody>
-                  <a:tcPr marL="63500" marR="63500" marT="12700" marB="12700" anchor="ctr">
-                    <a:solidFill>
-                      <a:srgbClr val="FFFFFF"/>
                     </a:solidFill>
                   </a:tcPr>
                 </a:tc>
@@ -25357,7 +26288,7 @@
                 </a:solidFill>
                 <a:latin typeface="Calibri"/>
               </a:rPr>
-              <a:t>The scale gap is the headline: a tau2 task costs ~245x the input tokens of a gsm8k task, an appworld task ~745x. A 50-task gsm8k run is minutes; a 20-task appworld run is half an hour and millions of tokens. Budget by benchmark, not by task count.</a:t>
+              <a:t>The scale gap is the headline: a tau2 task costs ~267x the input tokens of a gsm8k task, an appworld task ~792x. A 50-task gsm8k run is a minute; a 20-task appworld run is 30-45 minutes and millions of tokens. Budget by benchmark, not by task count.</a:t>
             </a:r>
           </a:p>
         </p:txBody>

--- a/docs/AutoBench.pptx
+++ b/docs/AutoBench.pptx
@@ -21,6 +21,7 @@
     <p:sldId id="269" r:id="rId20"/>
     <p:sldId id="270" r:id="rId21"/>
     <p:sldId id="271" r:id="rId22"/>
+    <p:sldId id="272" r:id="rId23"/>
   </p:sldIdLst>
   <p:sldSz cx="12192000" cy="6858000" type="screen4x3"/>
   <p:notesSz cx="6858000" cy="9144000"/>
@@ -3358,7 +3359,7 @@
                 </a:solidFill>
                 <a:latin typeface="Calibri"/>
               </a:rPr>
-              <a:t>Last modified 2026-09-16 00:33 EDT</a:t>
+              <a:t>Last modified 2026-09-16 16:06 EDT</a:t>
             </a:r>
           </a:p>
         </p:txBody>
@@ -3411,6 +3412,1432 @@
 </file>
 
 <file path=ppt/slides/slide10.xml><?xml version="1.0" encoding="utf-8"?>
+<p:sld xmlns:a="http://schemas.openxmlformats.org/drawingml/2006/main" xmlns:p="http://schemas.openxmlformats.org/presentationml/2006/main" xmlns:r="http://schemas.openxmlformats.org/officeDocument/2006/relationships">
+  <p:cSld name="7.1 The Three Benchmarks — a Difficulty Ladder">
+    <p:spTree>
+      <p:nvGrpSpPr>
+        <p:cNvPr id="1" name=""/>
+        <p:cNvGrpSpPr/>
+        <p:nvPr/>
+      </p:nvGrpSpPr>
+      <p:grpSpPr/>
+      <p:sp>
+        <p:nvSpPr>
+          <p:cNvPr id="2" name="Rectangle 1"/>
+          <p:cNvSpPr/>
+          <p:nvPr/>
+        </p:nvSpPr>
+        <p:spPr>
+          <a:xfrm>
+            <a:off x="0" y="0"/>
+            <a:ext cx="12192000" cy="950000"/>
+          </a:xfrm>
+          <a:prstGeom prst="rect">
+            <a:avLst/>
+          </a:prstGeom>
+          <a:solidFill>
+            <a:srgbClr val="1B3A5C"/>
+          </a:solidFill>
+          <a:ln>
+            <a:noFill/>
+          </a:ln>
+          <a:effectLst/>
+        </p:spPr>
+        <p:style>
+          <a:lnRef idx="1">
+            <a:schemeClr val="accent1"/>
+          </a:lnRef>
+          <a:fillRef idx="3">
+            <a:schemeClr val="accent1"/>
+          </a:fillRef>
+          <a:effectRef idx="2">
+            <a:schemeClr val="accent1"/>
+          </a:effectRef>
+          <a:fontRef idx="minor">
+            <a:schemeClr val="lt1"/>
+          </a:fontRef>
+        </p:style>
+        <p:txBody>
+          <a:bodyPr rtlCol="0" anchor="ctr" lIns="355600"/>
+          <a:lstStyle/>
+          <a:p>
+            <a:pPr algn="ctr"/>
+            <a:r>
+              <a:rPr sz="2600" b="1" i="0">
+                <a:solidFill>
+                  <a:srgbClr val="FFFFFF"/>
+                </a:solidFill>
+                <a:latin typeface="Calibri"/>
+              </a:rPr>
+              <a:t>7.1  The Three Benchmarks — a Difficulty Ladder</a:t>
+            </a:r>
+          </a:p>
+          <a:p>
+            <a:r>
+              <a:rPr sz="1400" b="0" i="0">
+                <a:solidFill>
+                  <a:srgbClr val="C9D9EC"/>
+                </a:solidFill>
+                <a:latin typeface="Calibri"/>
+              </a:rPr>
+              <a:t>Not interchangeable suites: each costs ~an order of magnitude more than the last</a:t>
+            </a:r>
+          </a:p>
+        </p:txBody>
+      </p:sp>
+      <p:graphicFrame>
+        <p:nvGraphicFramePr>
+          <p:cNvPr id="3" name="Table 2"/>
+          <p:cNvGraphicFramePr>
+            <a:graphicFrameLocks noGrp="1"/>
+          </p:cNvGraphicFramePr>
+          <p:nvPr/>
+        </p:nvGraphicFramePr>
+        <p:xfrm>
+          <a:off x="411480" y="1188720"/>
+          <a:ext cx="11338560" cy="3977639"/>
+        </p:xfrm>
+        <a:graphic>
+          <a:graphicData uri="http://schemas.openxmlformats.org/drawingml/2006/table">
+            <a:tbl>
+              <a:tblPr firstRow="1">
+                <a:tableStyleId>{5C22544A-7EE6-4342-B048-85BDC9FD1C3A}</a:tableStyleId>
+              </a:tblPr>
+              <a:tblGrid>
+                <a:gridCol w="2286000"/>
+                <a:gridCol w="3017520"/>
+                <a:gridCol w="3017520"/>
+                <a:gridCol w="3017520"/>
+              </a:tblGrid>
+              <a:tr h="305972">
+                <a:tc>
+                  <a:txBody>
+                    <a:bodyPr/>
+                    <a:lstStyle/>
+                    <a:p>
+                      <a:pPr algn="l"/>
+                      <a:r>
+                        <a:rPr sz="1100" b="1" i="0">
+                          <a:solidFill>
+                            <a:srgbClr val="FFFFFF"/>
+                          </a:solidFill>
+                          <a:latin typeface="Calibri"/>
+                        </a:rPr>
+                        <a:t/>
+                      </a:r>
+                    </a:p>
+                  </a:txBody>
+                  <a:tcPr marL="63500" marR="63500" marT="12700" marB="12700" anchor="ctr">
+                    <a:solidFill>
+                      <a:srgbClr val="1B3A5C"/>
+                    </a:solidFill>
+                  </a:tcPr>
+                </a:tc>
+                <a:tc>
+                  <a:txBody>
+                    <a:bodyPr/>
+                    <a:lstStyle/>
+                    <a:p>
+                      <a:pPr algn="ctr"/>
+                      <a:r>
+                        <a:rPr sz="1100" b="1" i="0">
+                          <a:solidFill>
+                            <a:srgbClr val="FFFFFF"/>
+                          </a:solidFill>
+                          <a:latin typeface="Calibri"/>
+                        </a:rPr>
+                        <a:t>gsm8k</a:t>
+                      </a:r>
+                    </a:p>
+                  </a:txBody>
+                  <a:tcPr marL="63500" marR="63500" marT="12700" marB="12700" anchor="ctr">
+                    <a:solidFill>
+                      <a:srgbClr val="1B3A5C"/>
+                    </a:solidFill>
+                  </a:tcPr>
+                </a:tc>
+                <a:tc>
+                  <a:txBody>
+                    <a:bodyPr/>
+                    <a:lstStyle/>
+                    <a:p>
+                      <a:pPr algn="ctr"/>
+                      <a:r>
+                        <a:rPr sz="1100" b="1" i="0">
+                          <a:solidFill>
+                            <a:srgbClr val="FFFFFF"/>
+                          </a:solidFill>
+                          <a:latin typeface="Calibri"/>
+                        </a:rPr>
+                        <a:t>tau2</a:t>
+                      </a:r>
+                    </a:p>
+                  </a:txBody>
+                  <a:tcPr marL="63500" marR="63500" marT="12700" marB="12700" anchor="ctr">
+                    <a:solidFill>
+                      <a:srgbClr val="1B3A5C"/>
+                    </a:solidFill>
+                  </a:tcPr>
+                </a:tc>
+                <a:tc>
+                  <a:txBody>
+                    <a:bodyPr/>
+                    <a:lstStyle/>
+                    <a:p>
+                      <a:pPr algn="ctr"/>
+                      <a:r>
+                        <a:rPr sz="1100" b="1" i="0">
+                          <a:solidFill>
+                            <a:srgbClr val="FFFFFF"/>
+                          </a:solidFill>
+                          <a:latin typeface="Calibri"/>
+                        </a:rPr>
+                        <a:t>appworld</a:t>
+                      </a:r>
+                    </a:p>
+                  </a:txBody>
+                  <a:tcPr marL="63500" marR="63500" marT="12700" marB="12700" anchor="ctr">
+                    <a:solidFill>
+                      <a:srgbClr val="1B3A5C"/>
+                    </a:solidFill>
+                  </a:tcPr>
+                </a:tc>
+              </a:tr>
+              <a:tr h="305972">
+                <a:tc>
+                  <a:txBody>
+                    <a:bodyPr/>
+                    <a:lstStyle/>
+                    <a:p>
+                      <a:pPr algn="l"/>
+                      <a:r>
+                        <a:rPr sz="1100" b="1" i="0">
+                          <a:solidFill>
+                            <a:srgbClr val="1F2A37"/>
+                          </a:solidFill>
+                          <a:latin typeface="Calibri"/>
+                        </a:rPr>
+                        <a:t>What it tests</a:t>
+                      </a:r>
+                    </a:p>
+                  </a:txBody>
+                  <a:tcPr marL="63500" marR="63500" marT="12700" marB="12700" anchor="ctr">
+                    <a:solidFill>
+                      <a:srgbClr val="FFFFFF"/>
+                    </a:solidFill>
+                  </a:tcPr>
+                </a:tc>
+                <a:tc>
+                  <a:txBody>
+                    <a:bodyPr/>
+                    <a:lstStyle/>
+                    <a:p>
+                      <a:pPr algn="ctr"/>
+                      <a:r>
+                        <a:rPr sz="1100" b="0" i="0">
+                          <a:solidFill>
+                            <a:srgbClr val="1F2A37"/>
+                          </a:solidFill>
+                          <a:latin typeface="Calibri"/>
+                        </a:rPr>
+                        <a:t>multi-step arithmetic</a:t>
+                      </a:r>
+                    </a:p>
+                  </a:txBody>
+                  <a:tcPr marL="63500" marR="63500" marT="12700" marB="12700" anchor="ctr">
+                    <a:solidFill>
+                      <a:srgbClr val="FFFFFF"/>
+                    </a:solidFill>
+                  </a:tcPr>
+                </a:tc>
+                <a:tc>
+                  <a:txBody>
+                    <a:bodyPr/>
+                    <a:lstStyle/>
+                    <a:p>
+                      <a:pPr algn="ctr"/>
+                      <a:r>
+                        <a:rPr sz="1100" b="0" i="0">
+                          <a:solidFill>
+                            <a:srgbClr val="1F2A37"/>
+                          </a:solidFill>
+                          <a:latin typeface="Calibri"/>
+                        </a:rPr>
+                        <a:t>multi-turn dialogue + tools</a:t>
+                      </a:r>
+                    </a:p>
+                  </a:txBody>
+                  <a:tcPr marL="63500" marR="63500" marT="12700" marB="12700" anchor="ctr">
+                    <a:solidFill>
+                      <a:srgbClr val="FFFFFF"/>
+                    </a:solidFill>
+                  </a:tcPr>
+                </a:tc>
+                <a:tc>
+                  <a:txBody>
+                    <a:bodyPr/>
+                    <a:lstStyle/>
+                    <a:p>
+                      <a:pPr algn="ctr"/>
+                      <a:r>
+                        <a:rPr sz="1100" b="0" i="0">
+                          <a:solidFill>
+                            <a:srgbClr val="1F2A37"/>
+                          </a:solidFill>
+                          <a:latin typeface="Calibri"/>
+                        </a:rPr>
+                        <a:t>long-horizon app automation</a:t>
+                      </a:r>
+                    </a:p>
+                  </a:txBody>
+                  <a:tcPr marL="63500" marR="63500" marT="12700" marB="12700" anchor="ctr">
+                    <a:solidFill>
+                      <a:srgbClr val="FFFFFF"/>
+                    </a:solidFill>
+                  </a:tcPr>
+                </a:tc>
+              </a:tr>
+              <a:tr h="305972">
+                <a:tc>
+                  <a:txBody>
+                    <a:bodyPr/>
+                    <a:lstStyle/>
+                    <a:p>
+                      <a:pPr algn="l"/>
+                      <a:r>
+                        <a:rPr sz="1100" b="1" i="0">
+                          <a:solidFill>
+                            <a:srgbClr val="1F2A37"/>
+                          </a:solidFill>
+                          <a:latin typeface="Calibri"/>
+                        </a:rPr>
+                        <a:t>Task rows measured</a:t>
+                      </a:r>
+                    </a:p>
+                  </a:txBody>
+                  <a:tcPr marL="63500" marR="63500" marT="12700" marB="12700" anchor="ctr">
+                    <a:solidFill>
+                      <a:srgbClr val="F4F6F8"/>
+                    </a:solidFill>
+                  </a:tcPr>
+                </a:tc>
+                <a:tc>
+                  <a:txBody>
+                    <a:bodyPr/>
+                    <a:lstStyle/>
+                    <a:p>
+                      <a:pPr algn="ctr"/>
+                      <a:r>
+                        <a:rPr sz="1100" b="0" i="0">
+                          <a:solidFill>
+                            <a:srgbClr val="1F2A37"/>
+                          </a:solidFill>
+                          <a:latin typeface="Calibri"/>
+                        </a:rPr>
+                        <a:t>172 of 172</a:t>
+                      </a:r>
+                    </a:p>
+                  </a:txBody>
+                  <a:tcPr marL="63500" marR="63500" marT="12700" marB="12700" anchor="ctr">
+                    <a:solidFill>
+                      <a:srgbClr val="F4F6F8"/>
+                    </a:solidFill>
+                  </a:tcPr>
+                </a:tc>
+                <a:tc>
+                  <a:txBody>
+                    <a:bodyPr/>
+                    <a:lstStyle/>
+                    <a:p>
+                      <a:pPr algn="ctr"/>
+                      <a:r>
+                        <a:rPr sz="1100" b="0" i="0">
+                          <a:solidFill>
+                            <a:srgbClr val="1F2A37"/>
+                          </a:solidFill>
+                          <a:latin typeface="Calibri"/>
+                        </a:rPr>
+                        <a:t>60 of 60</a:t>
+                      </a:r>
+                    </a:p>
+                  </a:txBody>
+                  <a:tcPr marL="63500" marR="63500" marT="12700" marB="12700" anchor="ctr">
+                    <a:solidFill>
+                      <a:srgbClr val="F4F6F8"/>
+                    </a:solidFill>
+                  </a:tcPr>
+                </a:tc>
+                <a:tc>
+                  <a:txBody>
+                    <a:bodyPr/>
+                    <a:lstStyle/>
+                    <a:p>
+                      <a:pPr algn="ctr"/>
+                      <a:r>
+                        <a:rPr sz="1100" b="0" i="0">
+                          <a:solidFill>
+                            <a:srgbClr val="1F2A37"/>
+                          </a:solidFill>
+                          <a:latin typeface="Calibri"/>
+                        </a:rPr>
+                        <a:t>35 of 50 (15 timed out)</a:t>
+                      </a:r>
+                    </a:p>
+                  </a:txBody>
+                  <a:tcPr marL="63500" marR="63500" marT="12700" marB="12700" anchor="ctr">
+                    <a:solidFill>
+                      <a:srgbClr val="F4F6F8"/>
+                    </a:solidFill>
+                  </a:tcPr>
+                </a:tc>
+              </a:tr>
+              <a:tr h="305972">
+                <a:tc>
+                  <a:txBody>
+                    <a:bodyPr/>
+                    <a:lstStyle/>
+                    <a:p>
+                      <a:pPr algn="l"/>
+                      <a:r>
+                        <a:rPr sz="1100" b="1" i="0">
+                          <a:solidFill>
+                            <a:srgbClr val="1F2A37"/>
+                          </a:solidFill>
+                          <a:latin typeface="Calibri"/>
+                        </a:rPr>
+                        <a:t>Rows with lost telemetry</a:t>
+                      </a:r>
+                    </a:p>
+                  </a:txBody>
+                  <a:tcPr marL="63500" marR="63500" marT="12700" marB="12700" anchor="ctr">
+                    <a:solidFill>
+                      <a:srgbClr val="FFFFFF"/>
+                    </a:solidFill>
+                  </a:tcPr>
+                </a:tc>
+                <a:tc>
+                  <a:txBody>
+                    <a:bodyPr/>
+                    <a:lstStyle/>
+                    <a:p>
+                      <a:pPr algn="ctr"/>
+                      <a:r>
+                        <a:rPr sz="1100" b="0" i="0">
+                          <a:solidFill>
+                            <a:srgbClr val="1F2A37"/>
+                          </a:solidFill>
+                          <a:latin typeface="Calibri"/>
+                        </a:rPr>
+                        <a:t>0</a:t>
+                      </a:r>
+                    </a:p>
+                  </a:txBody>
+                  <a:tcPr marL="63500" marR="63500" marT="12700" marB="12700" anchor="ctr">
+                    <a:solidFill>
+                      <a:srgbClr val="FFFFFF"/>
+                    </a:solidFill>
+                  </a:tcPr>
+                </a:tc>
+                <a:tc>
+                  <a:txBody>
+                    <a:bodyPr/>
+                    <a:lstStyle/>
+                    <a:p>
+                      <a:pPr algn="ctr"/>
+                      <a:r>
+                        <a:rPr sz="1100" b="0" i="0">
+                          <a:solidFill>
+                            <a:srgbClr val="1F2A37"/>
+                          </a:solidFill>
+                          <a:latin typeface="Calibri"/>
+                        </a:rPr>
+                        <a:t>0</a:t>
+                      </a:r>
+                    </a:p>
+                  </a:txBody>
+                  <a:tcPr marL="63500" marR="63500" marT="12700" marB="12700" anchor="ctr">
+                    <a:solidFill>
+                      <a:srgbClr val="FFFFFF"/>
+                    </a:solidFill>
+                  </a:tcPr>
+                </a:tc>
+                <a:tc>
+                  <a:txBody>
+                    <a:bodyPr/>
+                    <a:lstStyle/>
+                    <a:p>
+                      <a:pPr algn="ctr"/>
+                      <a:r>
+                        <a:rPr sz="1100" b="0" i="0">
+                          <a:solidFill>
+                            <a:srgbClr val="1F2A37"/>
+                          </a:solidFill>
+                          <a:latin typeface="Calibri"/>
+                        </a:rPr>
+                        <a:t>0</a:t>
+                      </a:r>
+                    </a:p>
+                  </a:txBody>
+                  <a:tcPr marL="63500" marR="63500" marT="12700" marB="12700" anchor="ctr">
+                    <a:solidFill>
+                      <a:srgbClr val="FFFFFF"/>
+                    </a:solidFill>
+                  </a:tcPr>
+                </a:tc>
+              </a:tr>
+              <a:tr h="305972">
+                <a:tc>
+                  <a:txBody>
+                    <a:bodyPr/>
+                    <a:lstStyle/>
+                    <a:p>
+                      <a:pPr algn="l"/>
+                      <a:r>
+                        <a:rPr sz="1100" b="1" i="0">
+                          <a:solidFill>
+                            <a:srgbClr val="1F2A37"/>
+                          </a:solidFill>
+                          <a:latin typeface="Calibri"/>
+                        </a:rPr>
+                        <a:t>Pass rate</a:t>
+                      </a:r>
+                    </a:p>
+                  </a:txBody>
+                  <a:tcPr marL="63500" marR="63500" marT="12700" marB="12700" anchor="ctr">
+                    <a:solidFill>
+                      <a:srgbClr val="F4F6F8"/>
+                    </a:solidFill>
+                  </a:tcPr>
+                </a:tc>
+                <a:tc>
+                  <a:txBody>
+                    <a:bodyPr/>
+                    <a:lstStyle/>
+                    <a:p>
+                      <a:pPr algn="ctr"/>
+                      <a:r>
+                        <a:rPr sz="1100" b="0" i="0">
+                          <a:solidFill>
+                            <a:srgbClr val="1F2A37"/>
+                          </a:solidFill>
+                          <a:latin typeface="Calibri"/>
+                        </a:rPr>
+                        <a:t>0.97</a:t>
+                      </a:r>
+                    </a:p>
+                  </a:txBody>
+                  <a:tcPr marL="63500" marR="63500" marT="12700" marB="12700" anchor="ctr">
+                    <a:solidFill>
+                      <a:srgbClr val="F4F6F8"/>
+                    </a:solidFill>
+                  </a:tcPr>
+                </a:tc>
+                <a:tc>
+                  <a:txBody>
+                    <a:bodyPr/>
+                    <a:lstStyle/>
+                    <a:p>
+                      <a:pPr algn="ctr"/>
+                      <a:r>
+                        <a:rPr sz="1100" b="0" i="0">
+                          <a:solidFill>
+                            <a:srgbClr val="1F2A37"/>
+                          </a:solidFill>
+                          <a:latin typeface="Calibri"/>
+                        </a:rPr>
+                        <a:t>0.83</a:t>
+                      </a:r>
+                    </a:p>
+                  </a:txBody>
+                  <a:tcPr marL="63500" marR="63500" marT="12700" marB="12700" anchor="ctr">
+                    <a:solidFill>
+                      <a:srgbClr val="F4F6F8"/>
+                    </a:solidFill>
+                  </a:tcPr>
+                </a:tc>
+                <a:tc>
+                  <a:txBody>
+                    <a:bodyPr/>
+                    <a:lstStyle/>
+                    <a:p>
+                      <a:pPr algn="ctr"/>
+                      <a:r>
+                        <a:rPr sz="1100" b="0" i="0">
+                          <a:solidFill>
+                            <a:srgbClr val="1F2A37"/>
+                          </a:solidFill>
+                          <a:latin typeface="Calibri"/>
+                        </a:rPr>
+                        <a:t>0.00</a:t>
+                      </a:r>
+                    </a:p>
+                  </a:txBody>
+                  <a:tcPr marL="63500" marR="63500" marT="12700" marB="12700" anchor="ctr">
+                    <a:solidFill>
+                      <a:srgbClr val="F4F6F8"/>
+                    </a:solidFill>
+                  </a:tcPr>
+                </a:tc>
+              </a:tr>
+              <a:tr h="305972">
+                <a:tc>
+                  <a:txBody>
+                    <a:bodyPr/>
+                    <a:lstStyle/>
+                    <a:p>
+                      <a:pPr algn="l"/>
+                      <a:r>
+                        <a:rPr sz="1100" b="1" i="0">
+                          <a:solidFill>
+                            <a:srgbClr val="1F2A37"/>
+                          </a:solidFill>
+                          <a:latin typeface="Calibri"/>
+                        </a:rPr>
+                        <a:t>Input tokens / task</a:t>
+                      </a:r>
+                    </a:p>
+                  </a:txBody>
+                  <a:tcPr marL="63500" marR="63500" marT="12700" marB="12700" anchor="ctr">
+                    <a:solidFill>
+                      <a:srgbClr val="FFFFFF"/>
+                    </a:solidFill>
+                  </a:tcPr>
+                </a:tc>
+                <a:tc>
+                  <a:txBody>
+                    <a:bodyPr/>
+                    <a:lstStyle/>
+                    <a:p>
+                      <a:pPr algn="ctr"/>
+                      <a:r>
+                        <a:rPr sz="1100" b="0" i="0">
+                          <a:solidFill>
+                            <a:srgbClr val="1F2A37"/>
+                          </a:solidFill>
+                          <a:latin typeface="Calibri"/>
+                        </a:rPr>
+                        <a:t>341</a:t>
+                      </a:r>
+                    </a:p>
+                  </a:txBody>
+                  <a:tcPr marL="63500" marR="63500" marT="12700" marB="12700" anchor="ctr">
+                    <a:solidFill>
+                      <a:srgbClr val="FFFFFF"/>
+                    </a:solidFill>
+                  </a:tcPr>
+                </a:tc>
+                <a:tc>
+                  <a:txBody>
+                    <a:bodyPr/>
+                    <a:lstStyle/>
+                    <a:p>
+                      <a:pPr algn="ctr"/>
+                      <a:r>
+                        <a:rPr sz="1100" b="0" i="0">
+                          <a:solidFill>
+                            <a:srgbClr val="1F2A37"/>
+                          </a:solidFill>
+                          <a:latin typeface="Calibri"/>
+                        </a:rPr>
+                        <a:t>90,902</a:t>
+                      </a:r>
+                    </a:p>
+                  </a:txBody>
+                  <a:tcPr marL="63500" marR="63500" marT="12700" marB="12700" anchor="ctr">
+                    <a:solidFill>
+                      <a:srgbClr val="FFFFFF"/>
+                    </a:solidFill>
+                  </a:tcPr>
+                </a:tc>
+                <a:tc>
+                  <a:txBody>
+                    <a:bodyPr/>
+                    <a:lstStyle/>
+                    <a:p>
+                      <a:pPr algn="ctr"/>
+                      <a:r>
+                        <a:rPr sz="1100" b="0" i="0">
+                          <a:solidFill>
+                            <a:srgbClr val="1F2A37"/>
+                          </a:solidFill>
+                          <a:latin typeface="Calibri"/>
+                        </a:rPr>
+                        <a:t>269,953</a:t>
+                      </a:r>
+                    </a:p>
+                  </a:txBody>
+                  <a:tcPr marL="63500" marR="63500" marT="12700" marB="12700" anchor="ctr">
+                    <a:solidFill>
+                      <a:srgbClr val="FFFFFF"/>
+                    </a:solidFill>
+                  </a:tcPr>
+                </a:tc>
+              </a:tr>
+              <a:tr h="305972">
+                <a:tc>
+                  <a:txBody>
+                    <a:bodyPr/>
+                    <a:lstStyle/>
+                    <a:p>
+                      <a:pPr algn="l"/>
+                      <a:r>
+                        <a:rPr sz="1100" b="1" i="0">
+                          <a:solidFill>
+                            <a:srgbClr val="1F2A37"/>
+                          </a:solidFill>
+                          <a:latin typeface="Calibri"/>
+                        </a:rPr>
+                        <a:t>Output tokens / task</a:t>
+                      </a:r>
+                    </a:p>
+                  </a:txBody>
+                  <a:tcPr marL="63500" marR="63500" marT="12700" marB="12700" anchor="ctr">
+                    <a:solidFill>
+                      <a:srgbClr val="F4F6F8"/>
+                    </a:solidFill>
+                  </a:tcPr>
+                </a:tc>
+                <a:tc>
+                  <a:txBody>
+                    <a:bodyPr/>
+                    <a:lstStyle/>
+                    <a:p>
+                      <a:pPr algn="ctr"/>
+                      <a:r>
+                        <a:rPr sz="1100" b="0" i="0">
+                          <a:solidFill>
+                            <a:srgbClr val="1F2A37"/>
+                          </a:solidFill>
+                          <a:latin typeface="Calibri"/>
+                        </a:rPr>
+                        <a:t>180</a:t>
+                      </a:r>
+                    </a:p>
+                  </a:txBody>
+                  <a:tcPr marL="63500" marR="63500" marT="12700" marB="12700" anchor="ctr">
+                    <a:solidFill>
+                      <a:srgbClr val="F4F6F8"/>
+                    </a:solidFill>
+                  </a:tcPr>
+                </a:tc>
+                <a:tc>
+                  <a:txBody>
+                    <a:bodyPr/>
+                    <a:lstStyle/>
+                    <a:p>
+                      <a:pPr algn="ctr"/>
+                      <a:r>
+                        <a:rPr sz="1100" b="0" i="0">
+                          <a:solidFill>
+                            <a:srgbClr val="1F2A37"/>
+                          </a:solidFill>
+                          <a:latin typeface="Calibri"/>
+                        </a:rPr>
+                        <a:t>2,061</a:t>
+                      </a:r>
+                    </a:p>
+                  </a:txBody>
+                  <a:tcPr marL="63500" marR="63500" marT="12700" marB="12700" anchor="ctr">
+                    <a:solidFill>
+                      <a:srgbClr val="F4F6F8"/>
+                    </a:solidFill>
+                  </a:tcPr>
+                </a:tc>
+                <a:tc>
+                  <a:txBody>
+                    <a:bodyPr/>
+                    <a:lstStyle/>
+                    <a:p>
+                      <a:pPr algn="ctr"/>
+                      <a:r>
+                        <a:rPr sz="1100" b="0" i="0">
+                          <a:solidFill>
+                            <a:srgbClr val="1F2A37"/>
+                          </a:solidFill>
+                          <a:latin typeface="Calibri"/>
+                        </a:rPr>
+                        <a:t>25,140</a:t>
+                      </a:r>
+                    </a:p>
+                  </a:txBody>
+                  <a:tcPr marL="63500" marR="63500" marT="12700" marB="12700" anchor="ctr">
+                    <a:solidFill>
+                      <a:srgbClr val="F4F6F8"/>
+                    </a:solidFill>
+                  </a:tcPr>
+                </a:tc>
+              </a:tr>
+              <a:tr h="305972">
+                <a:tc>
+                  <a:txBody>
+                    <a:bodyPr/>
+                    <a:lstStyle/>
+                    <a:p>
+                      <a:pPr algn="l"/>
+                      <a:r>
+                        <a:rPr sz="1100" b="1" i="0">
+                          <a:solidFill>
+                            <a:srgbClr val="1F2A37"/>
+                          </a:solidFill>
+                          <a:latin typeface="Calibri"/>
+                        </a:rPr>
+                        <a:t>LLM calls / task</a:t>
+                      </a:r>
+                    </a:p>
+                  </a:txBody>
+                  <a:tcPr marL="63500" marR="63500" marT="12700" marB="12700" anchor="ctr">
+                    <a:solidFill>
+                      <a:srgbClr val="FFFFFF"/>
+                    </a:solidFill>
+                  </a:tcPr>
+                </a:tc>
+                <a:tc>
+                  <a:txBody>
+                    <a:bodyPr/>
+                    <a:lstStyle/>
+                    <a:p>
+                      <a:pPr algn="ctr"/>
+                      <a:r>
+                        <a:rPr sz="1100" b="0" i="0">
+                          <a:solidFill>
+                            <a:srgbClr val="1F2A37"/>
+                          </a:solidFill>
+                          <a:latin typeface="Calibri"/>
+                        </a:rPr>
+                        <a:t>1.1</a:t>
+                      </a:r>
+                    </a:p>
+                  </a:txBody>
+                  <a:tcPr marL="63500" marR="63500" marT="12700" marB="12700" anchor="ctr">
+                    <a:solidFill>
+                      <a:srgbClr val="FFFFFF"/>
+                    </a:solidFill>
+                  </a:tcPr>
+                </a:tc>
+                <a:tc>
+                  <a:txBody>
+                    <a:bodyPr/>
+                    <a:lstStyle/>
+                    <a:p>
+                      <a:pPr algn="ctr"/>
+                      <a:r>
+                        <a:rPr sz="1100" b="0" i="0">
+                          <a:solidFill>
+                            <a:srgbClr val="1F2A37"/>
+                          </a:solidFill>
+                          <a:latin typeface="Calibri"/>
+                        </a:rPr>
+                        <a:t>11.4</a:t>
+                      </a:r>
+                    </a:p>
+                  </a:txBody>
+                  <a:tcPr marL="63500" marR="63500" marT="12700" marB="12700" anchor="ctr">
+                    <a:solidFill>
+                      <a:srgbClr val="FFFFFF"/>
+                    </a:solidFill>
+                  </a:tcPr>
+                </a:tc>
+                <a:tc>
+                  <a:txBody>
+                    <a:bodyPr/>
+                    <a:lstStyle/>
+                    <a:p>
+                      <a:pPr algn="ctr"/>
+                      <a:r>
+                        <a:rPr sz="1100" b="0" i="0">
+                          <a:solidFill>
+                            <a:srgbClr val="1F2A37"/>
+                          </a:solidFill>
+                          <a:latin typeface="Calibri"/>
+                        </a:rPr>
+                        <a:t>29.2</a:t>
+                      </a:r>
+                    </a:p>
+                  </a:txBody>
+                  <a:tcPr marL="63500" marR="63500" marT="12700" marB="12700" anchor="ctr">
+                    <a:solidFill>
+                      <a:srgbClr val="FFFFFF"/>
+                    </a:solidFill>
+                  </a:tcPr>
+                </a:tc>
+              </a:tr>
+              <a:tr h="305972">
+                <a:tc>
+                  <a:txBody>
+                    <a:bodyPr/>
+                    <a:lstStyle/>
+                    <a:p>
+                      <a:pPr algn="l"/>
+                      <a:r>
+                        <a:rPr sz="1100" b="1" i="0">
+                          <a:solidFill>
+                            <a:srgbClr val="1F2A37"/>
+                          </a:solidFill>
+                          <a:latin typeface="Calibri"/>
+                        </a:rPr>
+                        <a:t>Tool calls / task</a:t>
+                      </a:r>
+                    </a:p>
+                  </a:txBody>
+                  <a:tcPr marL="63500" marR="63500" marT="12700" marB="12700" anchor="ctr">
+                    <a:solidFill>
+                      <a:srgbClr val="F4F6F8"/>
+                    </a:solidFill>
+                  </a:tcPr>
+                </a:tc>
+                <a:tc>
+                  <a:txBody>
+                    <a:bodyPr/>
+                    <a:lstStyle/>
+                    <a:p>
+                      <a:pPr algn="ctr"/>
+                      <a:r>
+                        <a:rPr sz="1100" b="0" i="0">
+                          <a:solidFill>
+                            <a:srgbClr val="1F2A37"/>
+                          </a:solidFill>
+                          <a:latin typeface="Calibri"/>
+                        </a:rPr>
+                        <a:t>1.1</a:t>
+                      </a:r>
+                    </a:p>
+                  </a:txBody>
+                  <a:tcPr marL="63500" marR="63500" marT="12700" marB="12700" anchor="ctr">
+                    <a:solidFill>
+                      <a:srgbClr val="F4F6F8"/>
+                    </a:solidFill>
+                  </a:tcPr>
+                </a:tc>
+                <a:tc>
+                  <a:txBody>
+                    <a:bodyPr/>
+                    <a:lstStyle/>
+                    <a:p>
+                      <a:pPr algn="ctr"/>
+                      <a:r>
+                        <a:rPr sz="1100" b="0" i="0">
+                          <a:solidFill>
+                            <a:srgbClr val="1F2A37"/>
+                          </a:solidFill>
+                          <a:latin typeface="Calibri"/>
+                        </a:rPr>
+                        <a:t>11.4</a:t>
+                      </a:r>
+                    </a:p>
+                  </a:txBody>
+                  <a:tcPr marL="63500" marR="63500" marT="12700" marB="12700" anchor="ctr">
+                    <a:solidFill>
+                      <a:srgbClr val="F4F6F8"/>
+                    </a:solidFill>
+                  </a:tcPr>
+                </a:tc>
+                <a:tc>
+                  <a:txBody>
+                    <a:bodyPr/>
+                    <a:lstStyle/>
+                    <a:p>
+                      <a:pPr algn="ctr"/>
+                      <a:r>
+                        <a:rPr sz="1100" b="0" i="0">
+                          <a:solidFill>
+                            <a:srgbClr val="1F2A37"/>
+                          </a:solidFill>
+                          <a:latin typeface="Calibri"/>
+                        </a:rPr>
+                        <a:t>14.6</a:t>
+                      </a:r>
+                    </a:p>
+                  </a:txBody>
+                  <a:tcPr marL="63500" marR="63500" marT="12700" marB="12700" anchor="ctr">
+                    <a:solidFill>
+                      <a:srgbClr val="F4F6F8"/>
+                    </a:solidFill>
+                  </a:tcPr>
+                </a:tc>
+              </a:tr>
+              <a:tr h="305972">
+                <a:tc>
+                  <a:txBody>
+                    <a:bodyPr/>
+                    <a:lstStyle/>
+                    <a:p>
+                      <a:pPr algn="l"/>
+                      <a:r>
+                        <a:rPr sz="1100" b="1" i="0">
+                          <a:solidFill>
+                            <a:srgbClr val="1F2A37"/>
+                          </a:solidFill>
+                          <a:latin typeface="Calibri"/>
+                        </a:rPr>
+                        <a:t>Median task latency</a:t>
+                      </a:r>
+                    </a:p>
+                  </a:txBody>
+                  <a:tcPr marL="63500" marR="63500" marT="12700" marB="12700" anchor="ctr">
+                    <a:solidFill>
+                      <a:srgbClr val="FFFFFF"/>
+                    </a:solidFill>
+                  </a:tcPr>
+                </a:tc>
+                <a:tc>
+                  <a:txBody>
+                    <a:bodyPr/>
+                    <a:lstStyle/>
+                    <a:p>
+                      <a:pPr algn="ctr"/>
+                      <a:r>
+                        <a:rPr sz="1100" b="0" i="0">
+                          <a:solidFill>
+                            <a:srgbClr val="1F2A37"/>
+                          </a:solidFill>
+                          <a:latin typeface="Calibri"/>
+                        </a:rPr>
+                        <a:t>4.9 s</a:t>
+                      </a:r>
+                    </a:p>
+                  </a:txBody>
+                  <a:tcPr marL="63500" marR="63500" marT="12700" marB="12700" anchor="ctr">
+                    <a:solidFill>
+                      <a:srgbClr val="FFFFFF"/>
+                    </a:solidFill>
+                  </a:tcPr>
+                </a:tc>
+                <a:tc>
+                  <a:txBody>
+                    <a:bodyPr/>
+                    <a:lstStyle/>
+                    <a:p>
+                      <a:pPr algn="ctr"/>
+                      <a:r>
+                        <a:rPr sz="1100" b="0" i="0">
+                          <a:solidFill>
+                            <a:srgbClr val="1F2A37"/>
+                          </a:solidFill>
+                          <a:latin typeface="Calibri"/>
+                        </a:rPr>
+                        <a:t>84 s</a:t>
+                      </a:r>
+                    </a:p>
+                  </a:txBody>
+                  <a:tcPr marL="63500" marR="63500" marT="12700" marB="12700" anchor="ctr">
+                    <a:solidFill>
+                      <a:srgbClr val="FFFFFF"/>
+                    </a:solidFill>
+                  </a:tcPr>
+                </a:tc>
+                <a:tc>
+                  <a:txBody>
+                    <a:bodyPr/>
+                    <a:lstStyle/>
+                    <a:p>
+                      <a:pPr algn="ctr"/>
+                      <a:r>
+                        <a:rPr sz="1100" b="0" i="0">
+                          <a:solidFill>
+                            <a:srgbClr val="1F2A37"/>
+                          </a:solidFill>
+                          <a:latin typeface="Calibri"/>
+                        </a:rPr>
+                        <a:t>264 s</a:t>
+                      </a:r>
+                    </a:p>
+                  </a:txBody>
+                  <a:tcPr marL="63500" marR="63500" marT="12700" marB="12700" anchor="ctr">
+                    <a:solidFill>
+                      <a:srgbClr val="FFFFFF"/>
+                    </a:solidFill>
+                  </a:tcPr>
+                </a:tc>
+              </a:tr>
+              <a:tr h="305972">
+                <a:tc>
+                  <a:txBody>
+                    <a:bodyPr/>
+                    <a:lstStyle/>
+                    <a:p>
+                      <a:pPr algn="l"/>
+                      <a:r>
+                        <a:rPr sz="1100" b="1" i="0">
+                          <a:solidFill>
+                            <a:srgbClr val="1F2A37"/>
+                          </a:solidFill>
+                          <a:latin typeface="Calibri"/>
+                        </a:rPr>
+                        <a:t>Slowest task seen</a:t>
+                      </a:r>
+                    </a:p>
+                  </a:txBody>
+                  <a:tcPr marL="63500" marR="63500" marT="12700" marB="12700" anchor="ctr">
+                    <a:solidFill>
+                      <a:srgbClr val="F4F6F8"/>
+                    </a:solidFill>
+                  </a:tcPr>
+                </a:tc>
+                <a:tc>
+                  <a:txBody>
+                    <a:bodyPr/>
+                    <a:lstStyle/>
+                    <a:p>
+                      <a:pPr algn="ctr"/>
+                      <a:r>
+                        <a:rPr sz="1100" b="0" i="0">
+                          <a:solidFill>
+                            <a:srgbClr val="1F2A37"/>
+                          </a:solidFill>
+                          <a:latin typeface="Calibri"/>
+                        </a:rPr>
+                        <a:t>39 s</a:t>
+                      </a:r>
+                    </a:p>
+                  </a:txBody>
+                  <a:tcPr marL="63500" marR="63500" marT="12700" marB="12700" anchor="ctr">
+                    <a:solidFill>
+                      <a:srgbClr val="F4F6F8"/>
+                    </a:solidFill>
+                  </a:tcPr>
+                </a:tc>
+                <a:tc>
+                  <a:txBody>
+                    <a:bodyPr/>
+                    <a:lstStyle/>
+                    <a:p>
+                      <a:pPr algn="ctr"/>
+                      <a:r>
+                        <a:rPr sz="1100" b="0" i="0">
+                          <a:solidFill>
+                            <a:srgbClr val="1F2A37"/>
+                          </a:solidFill>
+                          <a:latin typeface="Calibri"/>
+                        </a:rPr>
+                        <a:t>136 s</a:t>
+                      </a:r>
+                    </a:p>
+                  </a:txBody>
+                  <a:tcPr marL="63500" marR="63500" marT="12700" marB="12700" anchor="ctr">
+                    <a:solidFill>
+                      <a:srgbClr val="F4F6F8"/>
+                    </a:solidFill>
+                  </a:tcPr>
+                </a:tc>
+                <a:tc>
+                  <a:txBody>
+                    <a:bodyPr/>
+                    <a:lstStyle/>
+                    <a:p>
+                      <a:pPr algn="ctr"/>
+                      <a:r>
+                        <a:rPr sz="1100" b="0" i="0">
+                          <a:solidFill>
+                            <a:srgbClr val="1F2A37"/>
+                          </a:solidFill>
+                          <a:latin typeface="Calibri"/>
+                        </a:rPr>
+                        <a:t>592 s</a:t>
+                      </a:r>
+                    </a:p>
+                  </a:txBody>
+                  <a:tcPr marL="63500" marR="63500" marT="12700" marB="12700" anchor="ctr">
+                    <a:solidFill>
+                      <a:srgbClr val="F4F6F8"/>
+                    </a:solidFill>
+                  </a:tcPr>
+                </a:tc>
+              </a:tr>
+              <a:tr h="305972">
+                <a:tc>
+                  <a:txBody>
+                    <a:bodyPr/>
+                    <a:lstStyle/>
+                    <a:p>
+                      <a:pPr algn="l"/>
+                      <a:r>
+                        <a:rPr sz="1100" b="1" i="0">
+                          <a:solidFill>
+                            <a:srgbClr val="1F2A37"/>
+                          </a:solidFill>
+                          <a:latin typeface="Calibri"/>
+                        </a:rPr>
+                        <a:t>Model we use</a:t>
+                      </a:r>
+                    </a:p>
+                  </a:txBody>
+                  <a:tcPr marL="63500" marR="63500" marT="12700" marB="12700" anchor="ctr">
+                    <a:solidFill>
+                      <a:srgbClr val="FFFFFF"/>
+                    </a:solidFill>
+                  </a:tcPr>
+                </a:tc>
+                <a:tc>
+                  <a:txBody>
+                    <a:bodyPr/>
+                    <a:lstStyle/>
+                    <a:p>
+                      <a:pPr algn="ctr"/>
+                      <a:r>
+                        <a:rPr sz="1100" b="0" i="0">
+                          <a:solidFill>
+                            <a:srgbClr val="1F2A37"/>
+                          </a:solidFill>
+                          <a:latin typeface="Calibri"/>
+                        </a:rPr>
+                        <a:t>gpt-5-mini</a:t>
+                      </a:r>
+                    </a:p>
+                  </a:txBody>
+                  <a:tcPr marL="63500" marR="63500" marT="12700" marB="12700" anchor="ctr">
+                    <a:solidFill>
+                      <a:srgbClr val="FFFFFF"/>
+                    </a:solidFill>
+                  </a:tcPr>
+                </a:tc>
+                <a:tc>
+                  <a:txBody>
+                    <a:bodyPr/>
+                    <a:lstStyle/>
+                    <a:p>
+                      <a:pPr algn="ctr"/>
+                      <a:r>
+                        <a:rPr sz="1100" b="0" i="0">
+                          <a:solidFill>
+                            <a:srgbClr val="1F2A37"/>
+                          </a:solidFill>
+                          <a:latin typeface="Calibri"/>
+                        </a:rPr>
+                        <a:t>claude-sonnet-5</a:t>
+                      </a:r>
+                    </a:p>
+                  </a:txBody>
+                  <a:tcPr marL="63500" marR="63500" marT="12700" marB="12700" anchor="ctr">
+                    <a:solidFill>
+                      <a:srgbClr val="FFFFFF"/>
+                    </a:solidFill>
+                  </a:tcPr>
+                </a:tc>
+                <a:tc>
+                  <a:txBody>
+                    <a:bodyPr/>
+                    <a:lstStyle/>
+                    <a:p>
+                      <a:pPr algn="ctr"/>
+                      <a:r>
+                        <a:rPr sz="1100" b="0" i="0">
+                          <a:solidFill>
+                            <a:srgbClr val="1F2A37"/>
+                          </a:solidFill>
+                          <a:latin typeface="Calibri"/>
+                        </a:rPr>
+                        <a:t>gemini-2.5-pro</a:t>
+                      </a:r>
+                    </a:p>
+                  </a:txBody>
+                  <a:tcPr marL="63500" marR="63500" marT="12700" marB="12700" anchor="ctr">
+                    <a:solidFill>
+                      <a:srgbClr val="FFFFFF"/>
+                    </a:solidFill>
+                  </a:tcPr>
+                </a:tc>
+              </a:tr>
+              <a:tr h="305975">
+                <a:tc>
+                  <a:txBody>
+                    <a:bodyPr/>
+                    <a:lstStyle/>
+                    <a:p>
+                      <a:pPr algn="l"/>
+                      <a:r>
+                        <a:rPr sz="1100" b="1" i="0">
+                          <a:solidFill>
+                            <a:srgbClr val="1F2A37"/>
+                          </a:solidFill>
+                          <a:latin typeface="Calibri"/>
+                        </a:rPr>
+                        <a:t>Task pool</a:t>
+                      </a:r>
+                    </a:p>
+                  </a:txBody>
+                  <a:tcPr marL="63500" marR="63500" marT="12700" marB="12700" anchor="ctr">
+                    <a:solidFill>
+                      <a:srgbClr val="F4F6F8"/>
+                    </a:solidFill>
+                  </a:tcPr>
+                </a:tc>
+                <a:tc>
+                  <a:txBody>
+                    <a:bodyPr/>
+                    <a:lstStyle/>
+                    <a:p>
+                      <a:pPr algn="ctr"/>
+                      <a:r>
+                        <a:rPr sz="1100" b="0" i="0">
+                          <a:solidFill>
+                            <a:srgbClr val="1F2A37"/>
+                          </a:solidFill>
+                          <a:latin typeface="Calibri"/>
+                        </a:rPr>
+                        <a:t>8.5K (HuggingFace)</a:t>
+                      </a:r>
+                    </a:p>
+                  </a:txBody>
+                  <a:tcPr marL="63500" marR="63500" marT="12700" marB="12700" anchor="ctr">
+                    <a:solidFill>
+                      <a:srgbClr val="F4F6F8"/>
+                    </a:solidFill>
+                  </a:tcPr>
+                </a:tc>
+                <a:tc>
+                  <a:txBody>
+                    <a:bodyPr/>
+                    <a:lstStyle/>
+                    <a:p>
+                      <a:pPr algn="ctr"/>
+                      <a:r>
+                        <a:rPr sz="1100" b="0" i="0">
+                          <a:solidFill>
+                            <a:srgbClr val="1F2A37"/>
+                          </a:solidFill>
+                          <a:latin typeface="Calibri"/>
+                        </a:rPr>
+                        <a:t>114 (retail domain)</a:t>
+                      </a:r>
+                    </a:p>
+                  </a:txBody>
+                  <a:tcPr marL="63500" marR="63500" marT="12700" marB="12700" anchor="ctr">
+                    <a:solidFill>
+                      <a:srgbClr val="F4F6F8"/>
+                    </a:solidFill>
+                  </a:tcPr>
+                </a:tc>
+                <a:tc>
+                  <a:txBody>
+                    <a:bodyPr/>
+                    <a:lstStyle/>
+                    <a:p>
+                      <a:pPr algn="ctr"/>
+                      <a:r>
+                        <a:rPr sz="1100" b="0" i="0">
+                          <a:solidFill>
+                            <a:srgbClr val="1F2A37"/>
+                          </a:solidFill>
+                          <a:latin typeface="Calibri"/>
+                        </a:rPr>
+                        <a:t>grouped scenarios</a:t>
+                      </a:r>
+                    </a:p>
+                  </a:txBody>
+                  <a:tcPr marL="63500" marR="63500" marT="12700" marB="12700" anchor="ctr">
+                    <a:solidFill>
+                      <a:srgbClr val="F4F6F8"/>
+                    </a:solidFill>
+                  </a:tcPr>
+                </a:tc>
+              </a:tr>
+            </a:tbl>
+          </a:graphicData>
+        </a:graphic>
+      </p:graphicFrame>
+      <p:sp>
+        <p:nvSpPr>
+          <p:cNvPr id="4" name="Rounded Rectangle 3"/>
+          <p:cNvSpPr/>
+          <p:nvPr/>
+        </p:nvSpPr>
+        <p:spPr>
+          <a:xfrm>
+            <a:off x="411480" y="5532120"/>
+            <a:ext cx="11338560" cy="868680"/>
+          </a:xfrm>
+          <a:prstGeom prst="roundRect">
+            <a:avLst/>
+          </a:prstGeom>
+          <a:solidFill>
+            <a:srgbClr val="EEEFF1"/>
+          </a:solidFill>
+          <a:ln w="12700">
+            <a:solidFill>
+              <a:srgbClr val="6B6B6B"/>
+            </a:solidFill>
+          </a:ln>
+          <a:effectLst/>
+        </p:spPr>
+        <p:style>
+          <a:lnRef idx="1">
+            <a:schemeClr val="accent1"/>
+          </a:lnRef>
+          <a:fillRef idx="3">
+            <a:schemeClr val="accent1"/>
+          </a:fillRef>
+          <a:effectRef idx="2">
+            <a:schemeClr val="accent1"/>
+          </a:effectRef>
+          <a:fontRef idx="minor">
+            <a:schemeClr val="lt1"/>
+          </a:fontRef>
+        </p:style>
+        <p:txBody>
+          <a:bodyPr rtlCol="0" anchor="ctr" wrap="square" tIns="25400" bIns="25400" lIns="228600" rIns="228600"/>
+          <a:lstStyle/>
+          <a:p>
+            <a:pPr algn="ctr"/>
+            <a:r>
+              <a:rPr sz="1250" b="1" i="0">
+                <a:solidFill>
+                  <a:srgbClr val="1F2A37"/>
+                </a:solidFill>
+                <a:latin typeface="Calibri"/>
+              </a:rPr>
+              <a:t>The scale gap is the headline: a tau2 task costs ~267x the input tokens of a gsm8k task, an appworld task ~792x. A 50-task gsm8k run is a minute; a 20-task appworld run is 30-45 minutes and millions of tokens. Budget by benchmark, not by task count.</a:t>
+            </a:r>
+          </a:p>
+        </p:txBody>
+      </p:sp>
+      <p:sp>
+        <p:nvSpPr>
+          <p:cNvPr id="5" name="TextBox 4"/>
+          <p:cNvSpPr txBox="1"/>
+          <p:nvPr/>
+        </p:nvSpPr>
+        <p:spPr>
+          <a:xfrm>
+            <a:off x="11795760" y="6437376"/>
+            <a:ext cx="320040" cy="310896"/>
+          </a:xfrm>
+          <a:prstGeom prst="rect">
+            <a:avLst/>
+          </a:prstGeom>
+          <a:noFill/>
+        </p:spPr>
+        <p:txBody>
+          <a:bodyPr wrap="none" anchor="ctr" lIns="0" rIns="0" tIns="0" bIns="0">
+            <a:spAutoFit/>
+          </a:bodyPr>
+          <a:lstStyle/>
+          <a:p>
+            <a:pPr algn="r">
+              <a:spcAft>
+                <a:spcPts val="300"/>
+              </a:spcAft>
+            </a:pPr>
+            <a:r>
+              <a:rPr sz="1200" b="0" i="0">
+                <a:solidFill>
+                  <a:srgbClr val="6B6B6B"/>
+                </a:solidFill>
+                <a:latin typeface="Calibri"/>
+              </a:rPr>
+              <a:t>10</a:t>
+            </a:r>
+          </a:p>
+        </p:txBody>
+      </p:sp>
+    </p:spTree>
+  </p:cSld>
+  <p:clrMapOvr>
+    <a:masterClrMapping/>
+  </p:clrMapOvr>
+</p:sld>
+</file>
+
+<file path=ppt/slides/slide11.xml><?xml version="1.0" encoding="utf-8"?>
 <p:sld xmlns:a="http://schemas.openxmlformats.org/drawingml/2006/main" xmlns:p="http://schemas.openxmlformats.org/presentationml/2006/main" xmlns:r="http://schemas.openxmlformats.org/officeDocument/2006/relationships">
   <p:cSld name="7.2 What Each Benchmark Stresses">
     <p:spTree>
@@ -4531,7 +5958,7 @@
                 </a:solidFill>
                 <a:latin typeface="Calibri"/>
               </a:rPr>
-              <a:t>10</a:t>
+              <a:t>11</a:t>
             </a:r>
           </a:p>
         </p:txBody>
@@ -4544,7 +5971,7 @@
 </p:sld>
 </file>
 
-<file path=ppt/slides/slide11.xml><?xml version="1.0" encoding="utf-8"?>
+<file path=ppt/slides/slide12.xml><?xml version="1.0" encoding="utf-8"?>
 <p:sld xmlns:a="http://schemas.openxmlformats.org/drawingml/2006/main" xmlns:p="http://schemas.openxmlformats.org/presentationml/2006/main" xmlns:r="http://schemas.openxmlformats.org/officeDocument/2006/relationships">
   <p:cSld name="7.3 Reading the Numbers — Five Things That Mislead">
     <p:spTree>
@@ -4881,7 +6308,7 @@
                 </a:solidFill>
                 <a:latin typeface="Calibri"/>
               </a:rPr>
-              <a:t>Measured OUT CV &gt; IN CV in 27 of 33 legs. gsm8k's prompt is near-constant while answer length swings; only long-horizon appworld inverts it. Do not infer a direction — read the CV.</a:t>
+              <a:t>Measured OUT CV &gt; IN CV in 15 of the 22 legs that ran more than one task. gsm8k's prompt is near-constant while answer length swings; only long-horizon appworld inverts it, in all four of its legs. Do not infer a direction from the mechanism — read the CV.</a:t>
             </a:r>
           </a:p>
         </p:txBody>
@@ -4987,7 +6414,7 @@
                 </a:solidFill>
                 <a:latin typeface="Calibri"/>
               </a:rPr>
-              <a:t>11</a:t>
+              <a:t>12</a:t>
             </a:r>
           </a:p>
         </p:txBody>
@@ -5000,7 +6427,7 @@
 </p:sld>
 </file>
 
-<file path=ppt/slides/slide12.xml><?xml version="1.0" encoding="utf-8"?>
+<file path=ppt/slides/slide13.xml><?xml version="1.0" encoding="utf-8"?>
 <p:sld xmlns:a="http://schemas.openxmlformats.org/drawingml/2006/main" xmlns:p="http://schemas.openxmlformats.org/presentationml/2006/main" xmlns:r="http://schemas.openxmlformats.org/officeDocument/2006/relationships">
   <p:cSld name="8.1 The Canonical 12-Run Matrix">
     <p:spTree>
@@ -6713,7 +8140,7 @@
                 </a:solidFill>
                 <a:latin typeface="Calibri"/>
               </a:rPr>
-              <a:t>12</a:t>
+              <a:t>13</a:t>
             </a:r>
           </a:p>
         </p:txBody>
@@ -6726,7 +8153,7 @@
 </p:sld>
 </file>
 
-<file path=ppt/slides/slide13.xml><?xml version="1.0" encoding="utf-8"?>
+<file path=ppt/slides/slide14.xml><?xml version="1.0" encoding="utf-8"?>
 <p:sld xmlns:a="http://schemas.openxmlformats.org/drawingml/2006/main" xmlns:p="http://schemas.openxmlformats.org/presentationml/2006/main" xmlns:r="http://schemas.openxmlformats.org/officeDocument/2006/relationships">
   <p:cSld name="8.2 What the 12 Runs Measured">
     <p:spTree>
@@ -9019,7 +10446,7 @@
                 </a:solidFill>
                 <a:latin typeface="Calibri"/>
               </a:rPr>
-              <a:t>13</a:t>
+              <a:t>14</a:t>
             </a:r>
           </a:p>
         </p:txBody>
@@ -9032,7 +10459,7 @@
 </p:sld>
 </file>
 
-<file path=ppt/slides/slide14.xml><?xml version="1.0" encoding="utf-8"?>
+<file path=ppt/slides/slide15.xml><?xml version="1.0" encoding="utf-8"?>
 <p:sld xmlns:a="http://schemas.openxmlformats.org/drawingml/2006/main" xmlns:p="http://schemas.openxmlformats.org/presentationml/2006/main" xmlns:r="http://schemas.openxmlformats.org/officeDocument/2006/relationships">
   <p:cSld name="9.1 OpenShift vs KinD — Like-for-Like">
     <p:spTree>
@@ -11625,7 +13052,7 @@
                 </a:solidFill>
                 <a:latin typeface="Calibri"/>
               </a:rPr>
-              <a:t>14</a:t>
+              <a:t>15</a:t>
             </a:r>
           </a:p>
         </p:txBody>
@@ -11638,7 +13065,7 @@
 </p:sld>
 </file>
 
-<file path=ppt/slides/slide15.xml><?xml version="1.0" encoding="utf-8"?>
+<file path=ppt/slides/slide16.xml><?xml version="1.0" encoding="utf-8"?>
 <p:sld xmlns:a="http://schemas.openxmlformats.org/drawingml/2006/main" xmlns:p="http://schemas.openxmlformats.org/presentationml/2006/main" xmlns:r="http://schemas.openxmlformats.org/officeDocument/2006/relationships">
   <p:cSld name="9.2 What AuthBridge Costs — and Why It Has No Single Number">
     <p:spTree>
@@ -13431,7 +14858,7 @@
                 </a:solidFill>
                 <a:latin typeface="Calibri"/>
               </a:rPr>
-              <a:t>15</a:t>
+              <a:t>16</a:t>
             </a:r>
           </a:p>
         </p:txBody>
@@ -13444,7 +14871,7 @@
 </p:sld>
 </file>
 
-<file path=ppt/slides/slide16.xml><?xml version="1.0" encoding="utf-8"?>
+<file path=ppt/slides/slide17.xml><?xml version="1.0" encoding="utf-8"?>
 <p:sld xmlns:a="http://schemas.openxmlformats.org/drawingml/2006/main" xmlns:p="http://schemas.openxmlformats.org/presentationml/2006/main" xmlns:r="http://schemas.openxmlformats.org/officeDocument/2006/relationships">
   <p:cSld name="10. What the Service Can &amp; Cannot Enact">
     <p:spTree>
@@ -14035,7 +15462,7 @@
                 </a:solidFill>
                 <a:latin typeface="Calibri"/>
               </a:rPr>
-              <a:t>16</a:t>
+              <a:t>17</a:t>
             </a:r>
           </a:p>
         </p:txBody>
@@ -14649,7 +16076,7 @@
                 </a:solidFill>
                 <a:latin typeface="Calibri"/>
               </a:rPr>
-              <a:t>inside the workload: sidecar, user simulator, IBAC judge</a:t>
+              <a:t>4.1 inside the workload: sidecar, user simulator, IBAC judge · 4.2 how interception is wired</a:t>
             </a:r>
           </a:p>
         </p:txBody>
@@ -20592,7 +22019,7 @@
 
 <file path=ppt/slides/slide6.xml><?xml version="1.0" encoding="utf-8"?>
 <p:sld xmlns:a="http://schemas.openxmlformats.org/drawingml/2006/main" xmlns:p="http://schemas.openxmlformats.org/presentationml/2006/main" xmlns:r="http://schemas.openxmlformats.org/officeDocument/2006/relationships">
-  <p:cSld name="4. Architecture with Workload Specific Components">
+  <p:cSld name="4.1 Architecture with Workload Specific Components">
     <p:spTree>
       <p:nvGrpSpPr>
         <p:cNvPr id="1" name=""/>
@@ -20648,7 +22075,7 @@
                 </a:solidFill>
                 <a:latin typeface="Calibri"/>
               </a:rPr>
-              <a:t>4.  Architecture with Workload Specific Components</a:t>
+              <a:t>4.1  Architecture with Workload Specific Components</a:t>
             </a:r>
           </a:p>
           <a:p>
@@ -23336,7 +24763,7 @@
 
 <file path=ppt/slides/slide7.xml><?xml version="1.0" encoding="utf-8"?>
 <p:sld xmlns:a="http://schemas.openxmlformats.org/drawingml/2006/main" xmlns:p="http://schemas.openxmlformats.org/presentationml/2006/main" xmlns:r="http://schemas.openxmlformats.org/officeDocument/2006/relationships">
-  <p:cSld name="5. The Two-Token Auth Model">
+  <p:cSld name="4.2 How Interception Is Wired — and How It Silently Isn't">
     <p:spTree>
       <p:nvGrpSpPr>
         <p:cNvPr id="1" name=""/>
@@ -23392,7 +24819,7 @@
                 </a:solidFill>
                 <a:latin typeface="Calibri"/>
               </a:rPr>
-              <a:t>5.  The Two-Token Auth Model</a:t>
+              <a:t>4.2  How Interception Is Wired — and How It Silently Isn't</a:t>
             </a:r>
           </a:p>
           <a:p>
@@ -23403,29 +24830,315 @@
                 </a:solidFill>
                 <a:latin typeface="Calibri"/>
               </a:rPr>
-              <a:t>Why the caller's token is never forwarded upstream</a:t>
-            </a:r>
-          </a:p>
-        </p:txBody>
-      </p:sp>
-      <p:sp>
-        <p:nvSpPr>
-          <p:cNvPr id="3" name="Rectangle 2"/>
+              <a:t>The sidecar sees traffic only because of two env vars; a plausible config takes it back out of the path</a:t>
+            </a:r>
+          </a:p>
+        </p:txBody>
+      </p:sp>
+      <p:sp>
+        <p:nvSpPr>
+          <p:cNvPr id="3" name="Rounded Rectangle 2"/>
           <p:cNvSpPr/>
           <p:nvPr/>
         </p:nvSpPr>
         <p:spPr>
           <a:xfrm>
-            <a:off x="457200" y="1280160"/>
-            <a:ext cx="5394960" cy="457200"/>
+            <a:off x="411480" y="1115568"/>
+            <a:ext cx="11365992" cy="1371600"/>
+          </a:xfrm>
+          <a:prstGeom prst="roundRect">
+            <a:avLst/>
+          </a:prstGeom>
+          <a:solidFill>
+            <a:srgbClr val="F1E8F6"/>
+          </a:solidFill>
+          <a:ln>
+            <a:solidFill>
+              <a:srgbClr val="8E44AD"/>
+            </a:solidFill>
+          </a:ln>
+          <a:effectLst/>
+        </p:spPr>
+        <p:style>
+          <a:lnRef idx="1">
+            <a:schemeClr val="accent1"/>
+          </a:lnRef>
+          <a:fillRef idx="3">
+            <a:schemeClr val="accent1"/>
+          </a:fillRef>
+          <a:effectRef idx="2">
+            <a:schemeClr val="accent1"/>
+          </a:effectRef>
+          <a:fontRef idx="minor">
+            <a:schemeClr val="lt1"/>
+          </a:fontRef>
+        </p:style>
+        <p:txBody>
+          <a:bodyPr rtlCol="0" anchor="ctr"/>
+          <a:lstStyle/>
+          <a:p>
+            <a:pPr algn="ctr"/>
+          </a:p>
+        </p:txBody>
+      </p:sp>
+      <p:sp>
+        <p:nvSpPr>
+          <p:cNvPr id="4" name="TextBox 3"/>
+          <p:cNvSpPr txBox="1"/>
+          <p:nvPr/>
+        </p:nvSpPr>
+        <p:spPr>
+          <a:xfrm>
+            <a:off x="566928" y="1170432"/>
+            <a:ext cx="11064240" cy="237744"/>
           </a:xfrm>
           <a:prstGeom prst="rect">
             <a:avLst/>
           </a:prstGeom>
+          <a:noFill/>
+        </p:spPr>
+        <p:txBody>
+          <a:bodyPr wrap="square" anchor="t">
+            <a:spAutoFit/>
+          </a:bodyPr>
+          <a:lstStyle/>
+          <a:p>
+            <a:pPr algn="l">
+              <a:spcAft>
+                <a:spcPts val="300"/>
+              </a:spcAft>
+            </a:pPr>
+            <a:r>
+              <a:rPr sz="1150" b="1" i="0">
+                <a:solidFill>
+                  <a:srgbClr val="1B3A5C"/>
+                </a:solidFill>
+                <a:latin typeface="Calibri"/>
+              </a:rPr>
+              <a:t>Interception is a blanket forward proxy plus an allowlist — not a tool-aware hook. Three settings decide what the sidecar actually sees:</a:t>
+            </a:r>
+          </a:p>
+        </p:txBody>
+      </p:sp>
+      <p:sp>
+        <p:nvSpPr>
+          <p:cNvPr id="5" name="Rounded Rectangle 4"/>
+          <p:cNvSpPr/>
+          <p:nvPr/>
+        </p:nvSpPr>
+        <p:spPr>
+          <a:xfrm>
+            <a:off x="566928" y="1463040"/>
+            <a:ext cx="3529584" cy="932688"/>
+          </a:xfrm>
+          <a:prstGeom prst="roundRect">
+            <a:avLst/>
+          </a:prstGeom>
           <a:solidFill>
-            <a:srgbClr val="5B8C5A"/>
+            <a:srgbClr val="FFFFFF"/>
           </a:solidFill>
           <a:ln w="12700">
+            <a:solidFill>
+              <a:srgbClr val="8E44AD"/>
+            </a:solidFill>
+          </a:ln>
+          <a:effectLst/>
+        </p:spPr>
+        <p:style>
+          <a:lnRef idx="1">
+            <a:schemeClr val="accent1"/>
+          </a:lnRef>
+          <a:fillRef idx="3">
+            <a:schemeClr val="accent1"/>
+          </a:fillRef>
+          <a:effectRef idx="2">
+            <a:schemeClr val="accent1"/>
+          </a:effectRef>
+          <a:fontRef idx="minor">
+            <a:schemeClr val="lt1"/>
+          </a:fontRef>
+        </p:style>
+        <p:txBody>
+          <a:bodyPr rtlCol="0" anchor="ctr" wrap="square" tIns="25400" bIns="25400"/>
+          <a:lstStyle/>
+          <a:p>
+            <a:pPr algn="ctr"/>
+            <a:r>
+              <a:rPr sz="1100" b="1" i="0">
+                <a:solidFill>
+                  <a:srgbClr val="1B3A5C"/>
+                </a:solidFill>
+                <a:latin typeface="Calibri"/>
+              </a:rPr>
+              <a:t>HTTP_PROXY = HTTPS_PROXY = http://127.0.0.1:8081</a:t>
+            </a:r>
+          </a:p>
+          <a:p>
+            <a:pPr algn="ctr"/>
+            <a:r>
+              <a:rPr sz="800" b="0" i="0">
+                <a:solidFill>
+                  <a:srgbClr val="3A4654"/>
+                </a:solidFill>
+                <a:latin typeface="Calibri"/>
+              </a:rPr>
+              <a:t>the OPERATOR injects this into the agent pod when AuthBridge is enabled — 127.0.0.1:8081 IS the sidecar, so by default every outbound HTTP call the agent makes is captured</a:t>
+            </a:r>
+          </a:p>
+        </p:txBody>
+      </p:sp>
+      <p:sp>
+        <p:nvSpPr>
+          <p:cNvPr id="6" name="Rounded Rectangle 5"/>
+          <p:cNvSpPr/>
+          <p:nvPr/>
+        </p:nvSpPr>
+        <p:spPr>
+          <a:xfrm>
+            <a:off x="4224528" y="1463040"/>
+            <a:ext cx="3529584" cy="932688"/>
+          </a:xfrm>
+          <a:prstGeom prst="roundRect">
+            <a:avLst/>
+          </a:prstGeom>
+          <a:solidFill>
+            <a:srgbClr val="FFFFFF"/>
+          </a:solidFill>
+          <a:ln w="12700">
+            <a:solidFill>
+              <a:srgbClr val="8E44AD"/>
+            </a:solidFill>
+          </a:ln>
+          <a:effectLst/>
+        </p:spPr>
+        <p:style>
+          <a:lnRef idx="1">
+            <a:schemeClr val="accent1"/>
+          </a:lnRef>
+          <a:fillRef idx="3">
+            <a:schemeClr val="accent1"/>
+          </a:fillRef>
+          <a:effectRef idx="2">
+            <a:schemeClr val="accent1"/>
+          </a:effectRef>
+          <a:fontRef idx="minor">
+            <a:schemeClr val="lt1"/>
+          </a:fontRef>
+        </p:style>
+        <p:txBody>
+          <a:bodyPr rtlCol="0" anchor="ctr" wrap="square" tIns="25400" bIns="25400"/>
+          <a:lstStyle/>
+          <a:p>
+            <a:pPr algn="ctr"/>
+            <a:r>
+              <a:rPr sz="1100" b="1" i="0">
+                <a:solidFill>
+                  <a:srgbClr val="1B3A5C"/>
+                </a:solidFill>
+                <a:latin typeface="Calibri"/>
+              </a:rPr>
+              <a:t>no_proxy = LLM gateway, OTEL collector, Keycloak</a:t>
+            </a:r>
+          </a:p>
+          <a:p>
+            <a:pPr algn="ctr"/>
+            <a:r>
+              <a:rPr sz="800" b="0" i="0">
+                <a:solidFill>
+                  <a:srgbClr val="3A4654"/>
+                </a:solidFill>
+                <a:latin typeface="Calibri"/>
+              </a:rPr>
+              <a:t>instance config — the hosts that stay DIRECT. This is the only reason flow 3, the agent's own chat calls, does not go through the sidecar</a:t>
+            </a:r>
+          </a:p>
+        </p:txBody>
+      </p:sp>
+      <p:sp>
+        <p:nvSpPr>
+          <p:cNvPr id="7" name="Rounded Rectangle 6"/>
+          <p:cNvSpPr/>
+          <p:nvPr/>
+        </p:nvSpPr>
+        <p:spPr>
+          <a:xfrm>
+            <a:off x="7882127" y="1463040"/>
+            <a:ext cx="3730752" cy="932688"/>
+          </a:xfrm>
+          <a:prstGeom prst="roundRect">
+            <a:avLst/>
+          </a:prstGeom>
+          <a:solidFill>
+            <a:srgbClr val="FFFFFF"/>
+          </a:solidFill>
+          <a:ln w="12700">
+            <a:solidFill>
+              <a:srgbClr val="8E44AD"/>
+            </a:solidFill>
+          </a:ln>
+          <a:effectLst/>
+        </p:spPr>
+        <p:style>
+          <a:lnRef idx="1">
+            <a:schemeClr val="accent1"/>
+          </a:lnRef>
+          <a:fillRef idx="3">
+            <a:schemeClr val="accent1"/>
+          </a:fillRef>
+          <a:effectRef idx="2">
+            <a:schemeClr val="accent1"/>
+          </a:effectRef>
+          <a:fontRef idx="minor">
+            <a:schemeClr val="lt1"/>
+          </a:fontRef>
+        </p:style>
+        <p:txBody>
+          <a:bodyPr rtlCol="0" anchor="ctr" wrap="square" tIns="25400" bIns="25400"/>
+          <a:lstStyle/>
+          <a:p>
+            <a:pPr algn="ctr"/>
+            <a:r>
+              <a:rPr sz="1100" b="1" i="0">
+                <a:solidFill>
+                  <a:srgbClr val="1B3A5C"/>
+                </a:solidFill>
+                <a:latin typeface="Calibri"/>
+              </a:rPr>
+              <a:t>judge_inference: false</a:t>
+            </a:r>
+          </a:p>
+          <a:p>
+            <a:pPr algn="ctr"/>
+            <a:r>
+              <a:rPr sz="800" b="0" i="0">
+                <a:solidFill>
+                  <a:srgbClr val="3A4654"/>
+                </a:solidFill>
+                <a:latin typeface="Calibri"/>
+              </a:rPr>
+              <a:t>IBAC's own default — even proxied inference is not judged. BOTH this and no_proxy would have to change for the agent's model calls to be authorized</a:t>
+            </a:r>
+          </a:p>
+        </p:txBody>
+      </p:sp>
+      <p:sp>
+        <p:nvSpPr>
+          <p:cNvPr id="8" name="Rounded Rectangle 7"/>
+          <p:cNvSpPr/>
+          <p:nvPr/>
+        </p:nvSpPr>
+        <p:spPr>
+          <a:xfrm>
+            <a:off x="411480" y="2596896"/>
+            <a:ext cx="5532120" cy="1444752"/>
+          </a:xfrm>
+          <a:prstGeom prst="roundRect">
+            <a:avLst/>
+          </a:prstGeom>
+          <a:solidFill>
+            <a:srgbClr val="E9F3E8"/>
+          </a:solidFill>
+          <a:ln>
             <a:solidFill>
               <a:srgbClr val="5B8C5A"/>
             </a:solidFill>
@@ -23447,32 +25160,23 @@
           </a:fontRef>
         </p:style>
         <p:txBody>
-          <a:bodyPr rtlCol="0" anchor="ctr" wrap="square" tIns="25400" bIns="25400"/>
+          <a:bodyPr rtlCol="0" anchor="ctr"/>
           <a:lstStyle/>
           <a:p>
             <a:pPr algn="ctr"/>
-            <a:r>
-              <a:rPr sz="1500" b="1" i="0">
-                <a:solidFill>
-                  <a:srgbClr val="FFFFFF"/>
-                </a:solidFill>
-                <a:latin typeface="Calibri"/>
-              </a:rPr>
-              <a:t>Caller JWT  (inbound)</a:t>
-            </a:r>
-          </a:p>
-        </p:txBody>
-      </p:sp>
-      <p:sp>
-        <p:nvSpPr>
-          <p:cNvPr id="4" name="TextBox 3"/>
+          </a:p>
+        </p:txBody>
+      </p:sp>
+      <p:sp>
+        <p:nvSpPr>
+          <p:cNvPr id="9" name="TextBox 8"/>
           <p:cNvSpPr txBox="1"/>
           <p:nvPr/>
         </p:nvSpPr>
         <p:spPr>
           <a:xfrm>
-            <a:off x="548640" y="1828800"/>
-            <a:ext cx="5303520" cy="3291840"/>
+            <a:off x="566928" y="2651760"/>
+            <a:ext cx="5221224" cy="237744"/>
           </a:xfrm>
           <a:prstGeom prst="rect">
             <a:avLst/>
@@ -23491,79 +25195,38 @@
               </a:spcAft>
             </a:pPr>
             <a:r>
-              <a:rPr sz="1350" b="0" i="0">
-                <a:solidFill>
-                  <a:srgbClr val="1F2A37"/>
-                </a:solidFill>
-                <a:latin typeface="Calibri"/>
-              </a:rPr>
-              <a:t>Presented by the client as Authorization: Bearer.</a:t>
-            </a:r>
-          </a:p>
-          <a:p>
-            <a:pPr algn="l" lvl="1">
-              <a:spcAft>
-                <a:spcPts val="300"/>
-              </a:spcAft>
-            </a:pPr>
-            <a:r>
-              <a:rPr sz="1300" b="0" i="0">
-                <a:solidFill>
-                  <a:srgbClr val="1F2A37"/>
-                </a:solidFill>
-                <a:latin typeface="Calibri"/>
-              </a:rPr>
-              <a:t>• Used ONLY to attribute (preferred_username) and route (iss → instance)</a:t>
-            </a:r>
-          </a:p>
-          <a:p>
-            <a:pPr algn="l" lvl="1">
-              <a:spcAft>
-                <a:spcPts val="300"/>
-              </a:spcAft>
-            </a:pPr>
-            <a:r>
-              <a:rPr sz="1300" b="0" i="0">
-                <a:solidFill>
-                  <a:srgbClr val="1F2A37"/>
-                </a:solidFill>
-                <a:latin typeface="Calibri"/>
-              </a:rPr>
-              <a:t>• Signature validated via the issuer's JWKS</a:t>
-            </a:r>
-          </a:p>
-          <a:p>
-            <a:pPr algn="l" lvl="1">
-              <a:spcAft>
-                <a:spcPts val="300"/>
-              </a:spcAft>
-            </a:pPr>
-            <a:r>
-              <a:rPr sz="1300" b="0" i="0">
-                <a:solidFill>
-                  <a:srgbClr val="1F2A37"/>
-                </a:solidFill>
-                <a:latin typeface="Calibri"/>
-              </a:rPr>
-              <a:t>• aud / exp deliberately lenient in the dev/ops context</a:t>
-            </a:r>
-          </a:p>
-          <a:p>
-            <a:pPr algn="l" lvl="1">
-              <a:spcAft>
-                <a:spcPts val="300"/>
-              </a:spcAft>
-            </a:pPr>
-            <a:r>
-              <a:rPr sz="1300" b="1" i="0">
-                <a:solidFill>
-                  <a:srgbClr val="B55A2E"/>
-                </a:solidFill>
-                <a:latin typeface="Calibri"/>
-              </a:rPr>
-              <a:t>• NEVER forwarded to Rossoctl</a:t>
-            </a:r>
-          </a:p>
+              <a:rPr sz="1200" b="1" i="0">
+                <a:solidFill>
+                  <a:srgbClr val="5B8C5A"/>
+                </a:solidFill>
+                <a:latin typeface="Calibri"/>
+              </a:rPr>
+              <a:t>✓  Through the sidecar</a:t>
+            </a:r>
+          </a:p>
+        </p:txBody>
+      </p:sp>
+      <p:sp>
+        <p:nvSpPr>
+          <p:cNvPr id="10" name="TextBox 9"/>
+          <p:cNvSpPr txBox="1"/>
+          <p:nvPr/>
+        </p:nvSpPr>
+        <p:spPr>
+          <a:xfrm>
+            <a:off x="566928" y="2926080"/>
+            <a:ext cx="5221224" cy="1060704"/>
+          </a:xfrm>
+          <a:prstGeom prst="rect">
+            <a:avLst/>
+          </a:prstGeom>
+          <a:noFill/>
+        </p:spPr>
+        <p:txBody>
+          <a:bodyPr wrap="square" anchor="t">
+            <a:spAutoFit/>
+          </a:bodyPr>
+          <a:lstStyle/>
           <a:p>
             <a:pPr algn="l">
               <a:spcAft>
@@ -23571,53 +25234,85 @@
               </a:spcAft>
             </a:pPr>
             <a:r>
-              <a:rPr sz="1350" b="1" i="0">
-                <a:solidFill>
-                  <a:srgbClr val="5B8C5A"/>
-                </a:solidFill>
-                <a:latin typeface="Calibri"/>
-              </a:rPr>
-              <a:t>benchmarker is special:</a:t>
-            </a:r>
-          </a:p>
-          <a:p>
-            <a:pPr algn="l" lvl="1">
+              <a:rPr sz="1050" b="0" i="0">
+                <a:solidFill>
+                  <a:srgbClr val="1F2A37"/>
+                </a:solidFill>
+                <a:latin typeface="Calibri"/>
+              </a:rPr>
+              <a:t>•  agent → MCP tool calls  (flows 5 → 6) — the interception point</a:t>
+            </a:r>
+          </a:p>
+          <a:p>
+            <a:pPr algn="l">
               <a:spcAft>
                 <a:spcPts val="300"/>
               </a:spcAft>
             </a:pPr>
             <a:r>
-              <a:rPr sz="1300" b="0" i="0">
+              <a:rPr sz="1050" b="0" i="0">
                 <a:solidFill>
                   <a:srgbClr val="1F2A37"/>
                 </a:solidFill>
                 <a:latin typeface="Calibri"/>
               </a:rPr>
-              <a:t>• A caller JWT with preferred_username == benchmarker authorizes config ops (GET/PUT /config)</a:t>
-            </a:r>
-          </a:p>
-        </p:txBody>
-      </p:sp>
-      <p:sp>
-        <p:nvSpPr>
-          <p:cNvPr id="5" name="Rectangle 4"/>
+              <a:t>•  tools/call → isAction=true → one IBAC judge call each  (flow 7)</a:t>
+            </a:r>
+          </a:p>
+          <a:p>
+            <a:pPr algn="l">
+              <a:spcAft>
+                <a:spcPts val="300"/>
+              </a:spcAft>
+            </a:pPr>
+            <a:r>
+              <a:rPr sz="1050" b="0" i="0">
+                <a:solidFill>
+                  <a:srgbClr val="1F2A37"/>
+                </a:solidFill>
+                <a:latin typeface="Calibri"/>
+              </a:rPr>
+              <a:t>•  inbound A2A message/stream → a2a-parser, isAction=false,</a:t>
+            </a:r>
+          </a:p>
+          <a:p>
+            <a:pPr algn="l">
+              <a:spcAft>
+                <a:spcPts val="300"/>
+              </a:spcAft>
+            </a:pPr>
+            <a:r>
+              <a:rPr sz="1050" b="0" i="0">
+                <a:solidFill>
+                  <a:srgbClr val="1F2A37"/>
+                </a:solidFill>
+                <a:latin typeface="Calibri"/>
+              </a:rPr>
+              <a:t>    so the Service's send_prompt is logged but never judged</a:t>
+            </a:r>
+          </a:p>
+        </p:txBody>
+      </p:sp>
+      <p:sp>
+        <p:nvSpPr>
+          <p:cNvPr id="11" name="Rounded Rectangle 10"/>
           <p:cNvSpPr/>
           <p:nvPr/>
         </p:nvSpPr>
         <p:spPr>
           <a:xfrm>
-            <a:off x="6309360" y="1280160"/>
-            <a:ext cx="5394960" cy="457200"/>
-          </a:xfrm>
-          <a:prstGeom prst="rect">
+            <a:off x="6245352" y="2596896"/>
+            <a:ext cx="5532120" cy="1444752"/>
+          </a:xfrm>
+          <a:prstGeom prst="roundRect">
             <a:avLst/>
           </a:prstGeom>
           <a:solidFill>
-            <a:srgbClr val="2E6FB5"/>
+            <a:srgbClr val="EEEFF1"/>
           </a:solidFill>
-          <a:ln w="12700">
+          <a:ln>
             <a:solidFill>
-              <a:srgbClr val="2E6FB5"/>
+              <a:srgbClr val="6B6B6B"/>
             </a:solidFill>
           </a:ln>
           <a:effectLst/>
@@ -23637,32 +25332,23 @@
           </a:fontRef>
         </p:style>
         <p:txBody>
-          <a:bodyPr rtlCol="0" anchor="ctr" wrap="square" tIns="25400" bIns="25400"/>
+          <a:bodyPr rtlCol="0" anchor="ctr"/>
           <a:lstStyle/>
           <a:p>
             <a:pPr algn="ctr"/>
-            <a:r>
-              <a:rPr sz="1500" b="1" i="0">
-                <a:solidFill>
-                  <a:srgbClr val="FFFFFF"/>
-                </a:solidFill>
-                <a:latin typeface="Calibri"/>
-              </a:rPr>
-              <a:t>Service token  (outbound)</a:t>
-            </a:r>
-          </a:p>
-        </p:txBody>
-      </p:sp>
-      <p:sp>
-        <p:nvSpPr>
-          <p:cNvPr id="6" name="TextBox 5"/>
+          </a:p>
+        </p:txBody>
+      </p:sp>
+      <p:sp>
+        <p:nvSpPr>
+          <p:cNvPr id="12" name="TextBox 11"/>
           <p:cNvSpPr txBox="1"/>
           <p:nvPr/>
         </p:nvSpPr>
         <p:spPr>
           <a:xfrm>
-            <a:off x="6400800" y="1828800"/>
-            <a:ext cx="5303520" cy="3291840"/>
+            <a:off x="6400800" y="2651760"/>
+            <a:ext cx="5221224" cy="237744"/>
           </a:xfrm>
           <a:prstGeom prst="rect">
             <a:avLst/>
@@ -23681,63 +25367,38 @@
               </a:spcAft>
             </a:pPr>
             <a:r>
-              <a:rPr sz="1350" b="0" i="0">
-                <a:solidFill>
-                  <a:srgbClr val="1F2A37"/>
-                </a:solidFill>
-                <a:latin typeface="Calibri"/>
-              </a:rPr>
-              <a:t>Minted by the Service per request via ROPC (password grant) using the instance's benchmarker credential.</a:t>
-            </a:r>
-          </a:p>
-          <a:p>
-            <a:pPr algn="l" lvl="1">
-              <a:spcAft>
-                <a:spcPts val="300"/>
-              </a:spcAft>
-            </a:pPr>
-            <a:r>
-              <a:rPr sz="1300" b="0" i="0">
-                <a:solidFill>
-                  <a:srgbClr val="1F2A37"/>
-                </a:solidFill>
-                <a:latin typeface="Calibri"/>
-              </a:rPr>
-              <a:t>• Always fresh → no expiry handling</a:t>
-            </a:r>
-          </a:p>
-          <a:p>
-            <a:pPr algn="l" lvl="1">
-              <a:spcAft>
-                <a:spcPts val="300"/>
-              </a:spcAft>
-            </a:pPr>
-            <a:r>
-              <a:rPr sz="1300" b="0" i="0">
-                <a:solidFill>
-                  <a:srgbClr val="1F2A37"/>
-                </a:solidFill>
-                <a:latin typeface="Calibri"/>
-              </a:rPr>
-              <a:t>• Presented to Rossoctl for all cluster-facing ops</a:t>
-            </a:r>
-          </a:p>
-          <a:p>
-            <a:pPr algn="l" lvl="1">
-              <a:spcAft>
-                <a:spcPts val="300"/>
-              </a:spcAft>
-            </a:pPr>
-            <a:r>
-              <a:rPr sz="1300" b="1" i="0">
-                <a:solidFill>
-                  <a:srgbClr val="2E6FB5"/>
-                </a:solidFill>
-                <a:latin typeface="Calibri"/>
-              </a:rPr>
-              <a:t>• The Service acts under its OWN identity, not the caller's</a:t>
-            </a:r>
-          </a:p>
+              <a:rPr sz="1200" b="1" i="0">
+                <a:solidFill>
+                  <a:srgbClr val="6B6B6B"/>
+                </a:solidFill>
+                <a:latin typeface="Calibri"/>
+              </a:rPr>
+              <a:t>✗  Direct — the plugins never see it</a:t>
+            </a:r>
+          </a:p>
+        </p:txBody>
+      </p:sp>
+      <p:sp>
+        <p:nvSpPr>
+          <p:cNvPr id="13" name="TextBox 12"/>
+          <p:cNvSpPr txBox="1"/>
+          <p:nvPr/>
+        </p:nvSpPr>
+        <p:spPr>
+          <a:xfrm>
+            <a:off x="6400800" y="2926080"/>
+            <a:ext cx="5221224" cy="1060704"/>
+          </a:xfrm>
+          <a:prstGeom prst="rect">
+            <a:avLst/>
+          </a:prstGeom>
+          <a:noFill/>
+        </p:spPr>
+        <p:txBody>
+          <a:bodyPr wrap="square" anchor="t">
+            <a:spAutoFit/>
+          </a:bodyPr>
+          <a:lstStyle/>
           <a:p>
             <a:pPr algn="l">
               <a:spcAft>
@@ -23745,43 +25406,451 @@
               </a:spcAft>
             </a:pPr>
             <a:r>
-              <a:rPr sz="1350" b="1" i="0">
-                <a:solidFill>
-                  <a:srgbClr val="2E6FB5"/>
-                </a:solidFill>
-                <a:latin typeface="Calibri"/>
-              </a:rPr>
-              <a:t>Backchannel split (iss ≠ dialed host):</a:t>
-            </a:r>
-          </a:p>
-          <a:p>
-            <a:pPr algn="l" lvl="1">
+              <a:rPr sz="1050" b="0" i="0">
+                <a:solidFill>
+                  <a:srgbClr val="1F2A37"/>
+                </a:solidFill>
+                <a:latin typeface="Calibri"/>
+              </a:rPr>
+              <a:t>•  agent → LLM gateway  (flow 3) — named in no_proxy, and</a:t>
+            </a:r>
+          </a:p>
+          <a:p>
+            <a:pPr algn="l">
               <a:spcAft>
                 <a:spcPts val="300"/>
               </a:spcAft>
             </a:pPr>
             <a:r>
-              <a:rPr sz="1300" b="0" i="0">
+              <a:rPr sz="1050" b="0" i="0">
                 <a:solidFill>
                   <a:srgbClr val="1F2A37"/>
                 </a:solidFill>
                 <a:latin typeface="Calibri"/>
               </a:rPr>
-              <a:t>• When the iss host is unreachable (in-cluster kind), JWKS + token come from a configured backchannel URL; iss is matched, never dialed</a:t>
-            </a:r>
-          </a:p>
-        </p:txBody>
-      </p:sp>
-      <p:sp>
-        <p:nvSpPr>
-          <p:cNvPr id="7" name="Rounded Rectangle 6"/>
+              <a:t>    judge_inference: false would exempt it even if proxied</a:t>
+            </a:r>
+          </a:p>
+          <a:p>
+            <a:pPr algn="l">
+              <a:spcAft>
+                <a:spcPts val="300"/>
+              </a:spcAft>
+            </a:pPr>
+            <a:r>
+              <a:rPr sz="1050" b="0" i="0">
+                <a:solidFill>
+                  <a:srgbClr val="1F2A37"/>
+                </a:solidFill>
+                <a:latin typeface="Calibri"/>
+              </a:rPr>
+              <a:t>•  Service → MCP server  (flow 2) — a different pod; the Service</a:t>
+            </a:r>
+          </a:p>
+          <a:p>
+            <a:pPr algn="l">
+              <a:spcAft>
+                <a:spcPts val="300"/>
+              </a:spcAft>
+            </a:pPr>
+            <a:r>
+              <a:rPr sz="1050" b="0" i="0">
+                <a:solidFill>
+                  <a:srgbClr val="1F2A37"/>
+                </a:solidFill>
+                <a:latin typeface="Calibri"/>
+              </a:rPr>
+              <a:t>    does not dial through the agent's proxy</a:t>
+            </a:r>
+          </a:p>
+          <a:p>
+            <a:pPr algn="l">
+              <a:spcAft>
+                <a:spcPts val="300"/>
+              </a:spcAft>
+            </a:pPr>
+            <a:r>
+              <a:rPr sz="1050" b="0" i="0">
+                <a:solidFill>
+                  <a:srgbClr val="1F2A37"/>
+                </a:solidFill>
+                <a:latin typeface="Calibri"/>
+              </a:rPr>
+              <a:t>•  MCP tool → gateway  (flow 4, tau2's user simulator) — different pod</a:t>
+            </a:r>
+          </a:p>
+        </p:txBody>
+      </p:sp>
+      <p:sp>
+        <p:nvSpPr>
+          <p:cNvPr id="14" name="Rounded Rectangle 13"/>
           <p:cNvSpPr/>
           <p:nvPr/>
         </p:nvSpPr>
         <p:spPr>
           <a:xfrm>
-            <a:off x="1463040" y="5212080"/>
-            <a:ext cx="9235440" cy="1005840"/>
+            <a:off x="411480" y="4151376"/>
+            <a:ext cx="11365992" cy="1517904"/>
+          </a:xfrm>
+          <a:prstGeom prst="roundRect">
+            <a:avLst/>
+          </a:prstGeom>
+          <a:solidFill>
+            <a:srgbClr val="FBEEE4"/>
+          </a:solidFill>
+          <a:ln>
+            <a:solidFill>
+              <a:srgbClr val="B55A2E"/>
+            </a:solidFill>
+          </a:ln>
+          <a:effectLst/>
+        </p:spPr>
+        <p:style>
+          <a:lnRef idx="1">
+            <a:schemeClr val="accent1"/>
+          </a:lnRef>
+          <a:fillRef idx="3">
+            <a:schemeClr val="accent1"/>
+          </a:fillRef>
+          <a:effectRef idx="2">
+            <a:schemeClr val="accent1"/>
+          </a:effectRef>
+          <a:fontRef idx="minor">
+            <a:schemeClr val="lt1"/>
+          </a:fontRef>
+        </p:style>
+        <p:txBody>
+          <a:bodyPr rtlCol="0" anchor="ctr"/>
+          <a:lstStyle/>
+          <a:p>
+            <a:pPr algn="ctr"/>
+          </a:p>
+        </p:txBody>
+      </p:sp>
+      <p:sp>
+        <p:nvSpPr>
+          <p:cNvPr id="15" name="TextBox 14"/>
+          <p:cNvSpPr txBox="1"/>
+          <p:nvPr/>
+        </p:nvSpPr>
+        <p:spPr>
+          <a:xfrm>
+            <a:off x="566928" y="4206240"/>
+            <a:ext cx="11064240" cy="237744"/>
+          </a:xfrm>
+          <a:prstGeom prst="rect">
+            <a:avLst/>
+          </a:prstGeom>
+          <a:noFill/>
+        </p:spPr>
+        <p:txBody>
+          <a:bodyPr wrap="square" anchor="t">
+            <a:spAutoFit/>
+          </a:bodyPr>
+          <a:lstStyle/>
+          <a:p>
+            <a:pPr algn="l">
+              <a:spcAft>
+                <a:spcPts val="300"/>
+              </a:spcAft>
+            </a:pPr>
+            <a:r>
+              <a:rPr sz="1150" b="1" i="0">
+                <a:solidFill>
+                  <a:srgbClr val="1B3A5C"/>
+                </a:solidFill>
+                <a:latin typeface="Calibri"/>
+              </a:rPr>
+              <a:t>A ready sidecar proves nothing about enforcement — the double bypass we actually shipped:</a:t>
+            </a:r>
+          </a:p>
+        </p:txBody>
+      </p:sp>
+      <p:sp>
+        <p:nvSpPr>
+          <p:cNvPr id="16" name="Rounded Rectangle 15"/>
+          <p:cNvSpPr/>
+          <p:nvPr/>
+        </p:nvSpPr>
+        <p:spPr>
+          <a:xfrm>
+            <a:off x="566928" y="4498848"/>
+            <a:ext cx="2688336" cy="749808"/>
+          </a:xfrm>
+          <a:prstGeom prst="roundRect">
+            <a:avLst/>
+          </a:prstGeom>
+          <a:solidFill>
+            <a:srgbClr val="FFFFFF"/>
+          </a:solidFill>
+          <a:ln w="12700">
+            <a:solidFill>
+              <a:srgbClr val="B55A2E"/>
+            </a:solidFill>
+          </a:ln>
+          <a:effectLst/>
+        </p:spPr>
+        <p:style>
+          <a:lnRef idx="1">
+            <a:schemeClr val="accent1"/>
+          </a:lnRef>
+          <a:fillRef idx="3">
+            <a:schemeClr val="accent1"/>
+          </a:fillRef>
+          <a:effectRef idx="2">
+            <a:schemeClr val="accent1"/>
+          </a:effectRef>
+          <a:fontRef idx="minor">
+            <a:schemeClr val="lt1"/>
+          </a:fontRef>
+        </p:style>
+        <p:txBody>
+          <a:bodyPr rtlCol="0" anchor="ctr" wrap="square" tIns="25400" bIns="25400"/>
+          <a:lstStyle/>
+          <a:p>
+            <a:pPr algn="ctr"/>
+            <a:r>
+              <a:rPr sz="1000" b="0" i="0">
+                <a:solidFill>
+                  <a:srgbClr val="1F2A37"/>
+                </a:solidFill>
+                <a:latin typeface="Calibri"/>
+              </a:rPr>
+              <a:t>1.  workload_llm.disable_proxy: true makes the SERVICE inject HTTP_PROXY="" first</a:t>
+            </a:r>
+          </a:p>
+        </p:txBody>
+      </p:sp>
+      <p:sp>
+        <p:nvSpPr>
+          <p:cNvPr id="17" name="Rounded Rectangle 16"/>
+          <p:cNvSpPr/>
+          <p:nvPr/>
+        </p:nvSpPr>
+        <p:spPr>
+          <a:xfrm>
+            <a:off x="3364992" y="4498848"/>
+            <a:ext cx="2688336" cy="749808"/>
+          </a:xfrm>
+          <a:prstGeom prst="roundRect">
+            <a:avLst/>
+          </a:prstGeom>
+          <a:solidFill>
+            <a:srgbClr val="FFFFFF"/>
+          </a:solidFill>
+          <a:ln w="12700">
+            <a:solidFill>
+              <a:srgbClr val="B55A2E"/>
+            </a:solidFill>
+          </a:ln>
+          <a:effectLst/>
+        </p:spPr>
+        <p:style>
+          <a:lnRef idx="1">
+            <a:schemeClr val="accent1"/>
+          </a:lnRef>
+          <a:fillRef idx="3">
+            <a:schemeClr val="accent1"/>
+          </a:fillRef>
+          <a:effectRef idx="2">
+            <a:schemeClr val="accent1"/>
+          </a:effectRef>
+          <a:fontRef idx="minor">
+            <a:schemeClr val="lt1"/>
+          </a:fontRef>
+        </p:style>
+        <p:txBody>
+          <a:bodyPr rtlCol="0" anchor="ctr" wrap="square" tIns="25400" bIns="25400"/>
+          <a:lstStyle/>
+          <a:p>
+            <a:pPr algn="ctr"/>
+            <a:r>
+              <a:rPr sz="1000" b="0" i="0">
+                <a:solidFill>
+                  <a:srgbClr val="1F2A37"/>
+                </a:solidFill>
+                <a:latin typeface="Calibri"/>
+              </a:rPr>
+              <a:t>2.  the operator adds a var only when ABSENT → it skips HTTP_PROXY, but still sets HTTPS_PROXY</a:t>
+            </a:r>
+          </a:p>
+        </p:txBody>
+      </p:sp>
+      <p:sp>
+        <p:nvSpPr>
+          <p:cNvPr id="18" name="Rounded Rectangle 17"/>
+          <p:cNvSpPr/>
+          <p:nvPr/>
+        </p:nvSpPr>
+        <p:spPr>
+          <a:xfrm>
+            <a:off x="6163056" y="4498848"/>
+            <a:ext cx="2688336" cy="749808"/>
+          </a:xfrm>
+          <a:prstGeom prst="roundRect">
+            <a:avLst/>
+          </a:prstGeom>
+          <a:solidFill>
+            <a:srgbClr val="FFFFFF"/>
+          </a:solidFill>
+          <a:ln w="12700">
+            <a:solidFill>
+              <a:srgbClr val="B55A2E"/>
+            </a:solidFill>
+          </a:ln>
+          <a:effectLst/>
+        </p:spPr>
+        <p:style>
+          <a:lnRef idx="1">
+            <a:schemeClr val="accent1"/>
+          </a:lnRef>
+          <a:fillRef idx="3">
+            <a:schemeClr val="accent1"/>
+          </a:fillRef>
+          <a:effectRef idx="2">
+            <a:schemeClr val="accent1"/>
+          </a:effectRef>
+          <a:fontRef idx="minor">
+            <a:schemeClr val="lt1"/>
+          </a:fontRef>
+        </p:style>
+        <p:txBody>
+          <a:bodyPr rtlCol="0" anchor="ctr" wrap="square" tIns="25400" bIns="25400"/>
+          <a:lstStyle/>
+          <a:p>
+            <a:pPr algn="ctr"/>
+            <a:r>
+              <a:rPr sz="1000" b="0" i="0">
+                <a:solidFill>
+                  <a:srgbClr val="1F2A37"/>
+                </a:solidFill>
+                <a:latin typeface="Calibri"/>
+              </a:rPr>
+              <a:t>3.  MCP_URL is http:// → tool calls take the empty HTTP_PROXY and go direct</a:t>
+            </a:r>
+          </a:p>
+        </p:txBody>
+      </p:sp>
+      <p:sp>
+        <p:nvSpPr>
+          <p:cNvPr id="19" name="Rounded Rectangle 18"/>
+          <p:cNvSpPr/>
+          <p:nvPr/>
+        </p:nvSpPr>
+        <p:spPr>
+          <a:xfrm>
+            <a:off x="8961120" y="4498848"/>
+            <a:ext cx="2651760" cy="749808"/>
+          </a:xfrm>
+          <a:prstGeom prst="roundRect">
+            <a:avLst/>
+          </a:prstGeom>
+          <a:solidFill>
+            <a:srgbClr val="FFFFFF"/>
+          </a:solidFill>
+          <a:ln w="12700">
+            <a:solidFill>
+              <a:srgbClr val="B55A2E"/>
+            </a:solidFill>
+          </a:ln>
+          <a:effectLst/>
+        </p:spPr>
+        <p:style>
+          <a:lnRef idx="1">
+            <a:schemeClr val="accent1"/>
+          </a:lnRef>
+          <a:fillRef idx="3">
+            <a:schemeClr val="accent1"/>
+          </a:fillRef>
+          <a:effectRef idx="2">
+            <a:schemeClr val="accent1"/>
+          </a:effectRef>
+          <a:fontRef idx="minor">
+            <a:schemeClr val="lt1"/>
+          </a:fontRef>
+        </p:style>
+        <p:txBody>
+          <a:bodyPr rtlCol="0" anchor="ctr" wrap="square" tIns="25400" bIns="25400"/>
+          <a:lstStyle/>
+          <a:p>
+            <a:pPr algn="ctr"/>
+            <a:r>
+              <a:rPr sz="1000" b="0" i="0">
+                <a:solidFill>
+                  <a:srgbClr val="1F2A37"/>
+                </a:solidFill>
+                <a:latin typeface="Calibri"/>
+              </a:rPr>
+              <a:t>4.  no_proxy carried .svc.cluster.local → the same calls are excluded a second time</a:t>
+            </a:r>
+          </a:p>
+        </p:txBody>
+      </p:sp>
+      <p:sp>
+        <p:nvSpPr>
+          <p:cNvPr id="20" name="Rounded Rectangle 19"/>
+          <p:cNvSpPr/>
+          <p:nvPr/>
+        </p:nvSpPr>
+        <p:spPr>
+          <a:xfrm>
+            <a:off x="566928" y="5321808"/>
+            <a:ext cx="11045952" cy="292608"/>
+          </a:xfrm>
+          <a:prstGeom prst="roundRect">
+            <a:avLst/>
+          </a:prstGeom>
+          <a:solidFill>
+            <a:srgbClr val="B55A2E"/>
+          </a:solidFill>
+          <a:ln w="12700">
+            <a:solidFill>
+              <a:srgbClr val="B55A2E"/>
+            </a:solidFill>
+          </a:ln>
+          <a:effectLst/>
+        </p:spPr>
+        <p:style>
+          <a:lnRef idx="1">
+            <a:schemeClr val="accent1"/>
+          </a:lnRef>
+          <a:fillRef idx="3">
+            <a:schemeClr val="accent1"/>
+          </a:fillRef>
+          <a:effectRef idx="2">
+            <a:schemeClr val="accent1"/>
+          </a:effectRef>
+          <a:fontRef idx="minor">
+            <a:schemeClr val="lt1"/>
+          </a:fontRef>
+        </p:style>
+        <p:txBody>
+          <a:bodyPr rtlCol="0" anchor="ctr" wrap="square" tIns="25400" bIns="25400"/>
+          <a:lstStyle/>
+          <a:p>
+            <a:pPr algn="ctr"/>
+            <a:r>
+              <a:rPr sz="1050" b="1" i="0">
+                <a:solidFill>
+                  <a:srgbClr val="FFFFFF"/>
+                </a:solidFill>
+                <a:latin typeface="Calibri"/>
+              </a:rPr>
+              <a:t>Result: sidecar ready = True, pipeline ConfigMap rendered, plugins loaded — and the judge called ZERO times, on both clusters.</a:t>
+            </a:r>
+          </a:p>
+        </p:txBody>
+      </p:sp>
+      <p:sp>
+        <p:nvSpPr>
+          <p:cNvPr id="21" name="Rounded Rectangle 20"/>
+          <p:cNvSpPr/>
+          <p:nvPr/>
+        </p:nvSpPr>
+        <p:spPr>
+          <a:xfrm>
+            <a:off x="411480" y="5779008"/>
+            <a:ext cx="11365992" cy="768096"/>
           </a:xfrm>
           <a:prstGeom prst="roundRect">
             <a:avLst/>
@@ -23811,25 +25880,25 @@
           </a:fontRef>
         </p:style>
         <p:txBody>
-          <a:bodyPr rtlCol="0" anchor="ctr" wrap="square" tIns="25400" bIns="25400"/>
+          <a:bodyPr rtlCol="0" anchor="ctr" wrap="square" tIns="25400" bIns="25400" lIns="177800" rIns="177800"/>
           <a:lstStyle/>
           <a:p>
             <a:pPr algn="ctr"/>
             <a:r>
-              <a:rPr sz="1350" b="1" i="0">
+              <a:rPr sz="1100" b="0" i="0">
                 <a:solidFill>
                   <a:srgbClr val="1F2A37"/>
                 </a:solidFill>
                 <a:latin typeface="Calibri"/>
               </a:rPr>
-              <a:t>Implication:  at the Rossoctl / cluster layer every action appears as the Service's identity — so per-user attribution &amp; audit live in the Service, keyed on (iss, preferred_username).</a:t>
-            </a:r>
-          </a:p>
-        </p:txBody>
-      </p:sp>
-      <p:sp>
-        <p:nvSpPr>
-          <p:cNvPr id="8" name="TextBox 7"/>
+              <a:t>Verify by COUNTING judge chat completions across a run. IBAC emits no log line of its own, so a healthy sidecar log proves nothing — and initialize / tools/list are isAction=false and legitimately never reach the judge, so a zero count only means something if real tool calls occurred.   Working config: leave disable_proxy off, keep the NAMED hosts in no_proxy, drop the WILDCARDS (.svc, .svc.cluster.local).</a:t>
+            </a:r>
+          </a:p>
+        </p:txBody>
+      </p:sp>
+      <p:sp>
+        <p:nvSpPr>
+          <p:cNvPr id="22" name="TextBox 21"/>
           <p:cNvSpPr txBox="1"/>
           <p:nvPr/>
         </p:nvSpPr>
@@ -23876,7 +25945,7 @@
 
 <file path=ppt/slides/slide8.xml><?xml version="1.0" encoding="utf-8"?>
 <p:sld xmlns:a="http://schemas.openxmlformats.org/drawingml/2006/main" xmlns:p="http://schemas.openxmlformats.org/presentationml/2006/main" xmlns:r="http://schemas.openxmlformats.org/officeDocument/2006/relationships">
-  <p:cSld name="6. Benchmark Catalog &amp; Run Lifecycle">
+  <p:cSld name="5. The Two-Token Auth Model">
     <p:spTree>
       <p:nvGrpSpPr>
         <p:cNvPr id="1" name=""/>
@@ -23932,7 +26001,18 @@
                 </a:solidFill>
                 <a:latin typeface="Calibri"/>
               </a:rPr>
-              <a:t>6.  Benchmark Catalog &amp; Run Lifecycle</a:t>
+              <a:t>5.  The Two-Token Auth Model</a:t>
+            </a:r>
+          </a:p>
+          <a:p>
+            <a:r>
+              <a:rPr sz="1400" b="0" i="0">
+                <a:solidFill>
+                  <a:srgbClr val="C9D9EC"/>
+                </a:solidFill>
+                <a:latin typeface="Calibri"/>
+              </a:rPr>
+              <a:t>Why the caller's token is never forwarded upstream</a:t>
             </a:r>
           </a:p>
         </p:txBody>
@@ -23945,18 +26025,18 @@
         </p:nvSpPr>
         <p:spPr>
           <a:xfrm>
-            <a:off x="411480" y="1143000"/>
-            <a:ext cx="5257800" cy="457200"/>
+            <a:off x="457200" y="1280160"/>
+            <a:ext cx="5394960" cy="457200"/>
           </a:xfrm>
           <a:prstGeom prst="rect">
             <a:avLst/>
           </a:prstGeom>
           <a:solidFill>
-            <a:srgbClr val="1B3A5C"/>
+            <a:srgbClr val="5B8C5A"/>
           </a:solidFill>
           <a:ln w="12700">
             <a:solidFill>
-              <a:srgbClr val="1B3A5C"/>
+              <a:srgbClr val="5B8C5A"/>
             </a:solidFill>
           </a:ln>
           <a:effectLst/>
@@ -23987,31 +26067,166 @@
                 </a:solidFill>
                 <a:latin typeface="Calibri"/>
               </a:rPr>
-              <a:t>Catalog (static registry)</a:t>
-            </a:r>
-          </a:p>
-        </p:txBody>
-      </p:sp>
-      <p:sp>
-        <p:nvSpPr>
-          <p:cNvPr id="4" name="Rounded Rectangle 3"/>
+              <a:t>Caller JWT  (inbound)</a:t>
+            </a:r>
+          </a:p>
+        </p:txBody>
+      </p:sp>
+      <p:sp>
+        <p:nvSpPr>
+          <p:cNvPr id="4" name="TextBox 3"/>
+          <p:cNvSpPr txBox="1"/>
+          <p:nvPr/>
+        </p:nvSpPr>
+        <p:spPr>
+          <a:xfrm>
+            <a:off x="548640" y="1828800"/>
+            <a:ext cx="5303520" cy="3291840"/>
+          </a:xfrm>
+          <a:prstGeom prst="rect">
+            <a:avLst/>
+          </a:prstGeom>
+          <a:noFill/>
+        </p:spPr>
+        <p:txBody>
+          <a:bodyPr wrap="square" anchor="t">
+            <a:spAutoFit/>
+          </a:bodyPr>
+          <a:lstStyle/>
+          <a:p>
+            <a:pPr algn="l">
+              <a:spcAft>
+                <a:spcPts val="300"/>
+              </a:spcAft>
+            </a:pPr>
+            <a:r>
+              <a:rPr sz="1350" b="0" i="0">
+                <a:solidFill>
+                  <a:srgbClr val="1F2A37"/>
+                </a:solidFill>
+                <a:latin typeface="Calibri"/>
+              </a:rPr>
+              <a:t>Presented by the client as Authorization: Bearer.</a:t>
+            </a:r>
+          </a:p>
+          <a:p>
+            <a:pPr algn="l" lvl="1">
+              <a:spcAft>
+                <a:spcPts val="300"/>
+              </a:spcAft>
+            </a:pPr>
+            <a:r>
+              <a:rPr sz="1300" b="0" i="0">
+                <a:solidFill>
+                  <a:srgbClr val="1F2A37"/>
+                </a:solidFill>
+                <a:latin typeface="Calibri"/>
+              </a:rPr>
+              <a:t>• Used ONLY to attribute (preferred_username) and route (iss → instance)</a:t>
+            </a:r>
+          </a:p>
+          <a:p>
+            <a:pPr algn="l" lvl="1">
+              <a:spcAft>
+                <a:spcPts val="300"/>
+              </a:spcAft>
+            </a:pPr>
+            <a:r>
+              <a:rPr sz="1300" b="0" i="0">
+                <a:solidFill>
+                  <a:srgbClr val="1F2A37"/>
+                </a:solidFill>
+                <a:latin typeface="Calibri"/>
+              </a:rPr>
+              <a:t>• Signature validated via the issuer's JWKS</a:t>
+            </a:r>
+          </a:p>
+          <a:p>
+            <a:pPr algn="l" lvl="1">
+              <a:spcAft>
+                <a:spcPts val="300"/>
+              </a:spcAft>
+            </a:pPr>
+            <a:r>
+              <a:rPr sz="1300" b="0" i="0">
+                <a:solidFill>
+                  <a:srgbClr val="1F2A37"/>
+                </a:solidFill>
+                <a:latin typeface="Calibri"/>
+              </a:rPr>
+              <a:t>• aud / exp deliberately lenient in the dev/ops context</a:t>
+            </a:r>
+          </a:p>
+          <a:p>
+            <a:pPr algn="l" lvl="1">
+              <a:spcAft>
+                <a:spcPts val="300"/>
+              </a:spcAft>
+            </a:pPr>
+            <a:r>
+              <a:rPr sz="1300" b="1" i="0">
+                <a:solidFill>
+                  <a:srgbClr val="B55A2E"/>
+                </a:solidFill>
+                <a:latin typeface="Calibri"/>
+              </a:rPr>
+              <a:t>• NEVER forwarded to Rossoctl</a:t>
+            </a:r>
+          </a:p>
+          <a:p>
+            <a:pPr algn="l">
+              <a:spcAft>
+                <a:spcPts val="300"/>
+              </a:spcAft>
+            </a:pPr>
+            <a:r>
+              <a:rPr sz="1350" b="1" i="0">
+                <a:solidFill>
+                  <a:srgbClr val="5B8C5A"/>
+                </a:solidFill>
+                <a:latin typeface="Calibri"/>
+              </a:rPr>
+              <a:t>benchmarker is special:</a:t>
+            </a:r>
+          </a:p>
+          <a:p>
+            <a:pPr algn="l" lvl="1">
+              <a:spcAft>
+                <a:spcPts val="300"/>
+              </a:spcAft>
+            </a:pPr>
+            <a:r>
+              <a:rPr sz="1300" b="0" i="0">
+                <a:solidFill>
+                  <a:srgbClr val="1F2A37"/>
+                </a:solidFill>
+                <a:latin typeface="Calibri"/>
+              </a:rPr>
+              <a:t>• A caller JWT with preferred_username == benchmarker authorizes config ops (GET/PUT /config)</a:t>
+            </a:r>
+          </a:p>
+        </p:txBody>
+      </p:sp>
+      <p:sp>
+        <p:nvSpPr>
+          <p:cNvPr id="5" name="Rectangle 4"/>
           <p:cNvSpPr/>
           <p:nvPr/>
         </p:nvSpPr>
         <p:spPr>
           <a:xfrm>
-            <a:off x="411480" y="1783080"/>
-            <a:ext cx="5257800" cy="914400"/>
-          </a:xfrm>
-          <a:prstGeom prst="roundRect">
+            <a:off x="6309360" y="1280160"/>
+            <a:ext cx="5394960" cy="457200"/>
+          </a:xfrm>
+          <a:prstGeom prst="rect">
             <a:avLst/>
           </a:prstGeom>
           <a:solidFill>
-            <a:srgbClr val="E4F0F0"/>
+            <a:srgbClr val="2E6FB5"/>
           </a:solidFill>
           <a:ln w="12700">
             <a:solidFill>
-              <a:srgbClr val="3D6E70"/>
+              <a:srgbClr val="2E6FB5"/>
             </a:solidFill>
           </a:ln>
           <a:effectLst/>
@@ -24031,233 +26246,151 @@
           </a:fontRef>
         </p:style>
         <p:txBody>
-          <a:bodyPr rtlCol="0" anchor="ctr" wrap="square" tIns="25400" bIns="25400" lIns="127000"/>
-          <a:lstStyle/>
-          <a:p>
-            <a:pPr algn="l"/>
+          <a:bodyPr rtlCol="0" anchor="ctr" wrap="square" tIns="25400" bIns="25400"/>
+          <a:lstStyle/>
+          <a:p>
+            <a:pPr algn="ctr"/>
             <a:r>
               <a:rPr sz="1500" b="1" i="0">
                 <a:solidFill>
-                  <a:srgbClr val="3D6E70"/>
-                </a:solidFill>
-                <a:latin typeface="Calibri"/>
-              </a:rPr>
-              <a:t>gsm8k</a:t>
-            </a:r>
-          </a:p>
-          <a:p>
-            <a:pPr algn="l"/>
-            <a:r>
-              <a:rPr sz="1150" b="0" i="0">
+                  <a:srgbClr val="FFFFFF"/>
+                </a:solidFill>
+                <a:latin typeface="Calibri"/>
+              </a:rPr>
+              <a:t>Service token  (outbound)</a:t>
+            </a:r>
+          </a:p>
+        </p:txBody>
+      </p:sp>
+      <p:sp>
+        <p:nvSpPr>
+          <p:cNvPr id="6" name="TextBox 5"/>
+          <p:cNvSpPr txBox="1"/>
+          <p:nvPr/>
+        </p:nvSpPr>
+        <p:spPr>
+          <a:xfrm>
+            <a:off x="6400800" y="1828800"/>
+            <a:ext cx="5303520" cy="3291840"/>
+          </a:xfrm>
+          <a:prstGeom prst="rect">
+            <a:avLst/>
+          </a:prstGeom>
+          <a:noFill/>
+        </p:spPr>
+        <p:txBody>
+          <a:bodyPr wrap="square" anchor="t">
+            <a:spAutoFit/>
+          </a:bodyPr>
+          <a:lstStyle/>
+          <a:p>
+            <a:pPr algn="l">
+              <a:spcAft>
+                <a:spcPts val="300"/>
+              </a:spcAft>
+            </a:pPr>
+            <a:r>
+              <a:rPr sz="1350" b="0" i="0">
                 <a:solidFill>
                   <a:srgbClr val="1F2A37"/>
                 </a:solidFill>
                 <a:latin typeface="Calibri"/>
               </a:rPr>
-              <a:t>single-turn · needs hf-secret + openai-secret</a:t>
-            </a:r>
-          </a:p>
-        </p:txBody>
-      </p:sp>
-      <p:sp>
-        <p:nvSpPr>
-          <p:cNvPr id="5" name="Rounded Rectangle 4"/>
+              <a:t>Minted by the Service per request via ROPC (password grant) using the instance's benchmarker credential.</a:t>
+            </a:r>
+          </a:p>
+          <a:p>
+            <a:pPr algn="l" lvl="1">
+              <a:spcAft>
+                <a:spcPts val="300"/>
+              </a:spcAft>
+            </a:pPr>
+            <a:r>
+              <a:rPr sz="1300" b="0" i="0">
+                <a:solidFill>
+                  <a:srgbClr val="1F2A37"/>
+                </a:solidFill>
+                <a:latin typeface="Calibri"/>
+              </a:rPr>
+              <a:t>• Always fresh → no expiry handling</a:t>
+            </a:r>
+          </a:p>
+          <a:p>
+            <a:pPr algn="l" lvl="1">
+              <a:spcAft>
+                <a:spcPts val="300"/>
+              </a:spcAft>
+            </a:pPr>
+            <a:r>
+              <a:rPr sz="1300" b="0" i="0">
+                <a:solidFill>
+                  <a:srgbClr val="1F2A37"/>
+                </a:solidFill>
+                <a:latin typeface="Calibri"/>
+              </a:rPr>
+              <a:t>• Presented to Rossoctl for all cluster-facing ops</a:t>
+            </a:r>
+          </a:p>
+          <a:p>
+            <a:pPr algn="l" lvl="1">
+              <a:spcAft>
+                <a:spcPts val="300"/>
+              </a:spcAft>
+            </a:pPr>
+            <a:r>
+              <a:rPr sz="1300" b="1" i="0">
+                <a:solidFill>
+                  <a:srgbClr val="2E6FB5"/>
+                </a:solidFill>
+                <a:latin typeface="Calibri"/>
+              </a:rPr>
+              <a:t>• The Service acts under its OWN identity, not the caller's</a:t>
+            </a:r>
+          </a:p>
+          <a:p>
+            <a:pPr algn="l">
+              <a:spcAft>
+                <a:spcPts val="300"/>
+              </a:spcAft>
+            </a:pPr>
+            <a:r>
+              <a:rPr sz="1350" b="1" i="0">
+                <a:solidFill>
+                  <a:srgbClr val="2E6FB5"/>
+                </a:solidFill>
+                <a:latin typeface="Calibri"/>
+              </a:rPr>
+              <a:t>Backchannel split (iss ≠ dialed host):</a:t>
+            </a:r>
+          </a:p>
+          <a:p>
+            <a:pPr algn="l" lvl="1">
+              <a:spcAft>
+                <a:spcPts val="300"/>
+              </a:spcAft>
+            </a:pPr>
+            <a:r>
+              <a:rPr sz="1300" b="0" i="0">
+                <a:solidFill>
+                  <a:srgbClr val="1F2A37"/>
+                </a:solidFill>
+                <a:latin typeface="Calibri"/>
+              </a:rPr>
+              <a:t>• When the iss host is unreachable (in-cluster kind), JWKS + token come from a configured backchannel URL; iss is matched, never dialed</a:t>
+            </a:r>
+          </a:p>
+        </p:txBody>
+      </p:sp>
+      <p:sp>
+        <p:nvSpPr>
+          <p:cNvPr id="7" name="Rounded Rectangle 6"/>
           <p:cNvSpPr/>
           <p:nvPr/>
         </p:nvSpPr>
         <p:spPr>
           <a:xfrm>
-            <a:off x="411480" y="2834640"/>
-            <a:ext cx="5257800" cy="914400"/>
-          </a:xfrm>
-          <a:prstGeom prst="roundRect">
-            <a:avLst/>
-          </a:prstGeom>
-          <a:solidFill>
-            <a:srgbClr val="F1E8F6"/>
-          </a:solidFill>
-          <a:ln w="12700">
-            <a:solidFill>
-              <a:srgbClr val="8E44AD"/>
-            </a:solidFill>
-          </a:ln>
-          <a:effectLst/>
-        </p:spPr>
-        <p:style>
-          <a:lnRef idx="1">
-            <a:schemeClr val="accent1"/>
-          </a:lnRef>
-          <a:fillRef idx="3">
-            <a:schemeClr val="accent1"/>
-          </a:fillRef>
-          <a:effectRef idx="2">
-            <a:schemeClr val="accent1"/>
-          </a:effectRef>
-          <a:fontRef idx="minor">
-            <a:schemeClr val="lt1"/>
-          </a:fontRef>
-        </p:style>
-        <p:txBody>
-          <a:bodyPr rtlCol="0" anchor="ctr" wrap="square" tIns="25400" bIns="25400" lIns="127000"/>
-          <a:lstStyle/>
-          <a:p>
-            <a:pPr algn="l"/>
-            <a:r>
-              <a:rPr sz="1500" b="1" i="0">
-                <a:solidFill>
-                  <a:srgbClr val="8E44AD"/>
-                </a:solidFill>
-                <a:latin typeface="Calibri"/>
-              </a:rPr>
-              <a:t>tau2</a:t>
-            </a:r>
-          </a:p>
-          <a:p>
-            <a:pPr algn="l"/>
-            <a:r>
-              <a:rPr sz="1150" b="0" i="0">
-                <a:solidFill>
-                  <a:srgbClr val="1F2A37"/>
-                </a:solidFill>
-                <a:latin typeface="Calibri"/>
-              </a:rPr>
-              <a:t>multi-turn · user-simulator LLM runs server-side in the MCP pod · raise timeout</a:t>
-            </a:r>
-          </a:p>
-        </p:txBody>
-      </p:sp>
-      <p:sp>
-        <p:nvSpPr>
-          <p:cNvPr id="6" name="Rounded Rectangle 5"/>
-          <p:cNvSpPr/>
-          <p:nvPr/>
-        </p:nvSpPr>
-        <p:spPr>
-          <a:xfrm>
-            <a:off x="411480" y="3886200"/>
-            <a:ext cx="5257800" cy="914400"/>
-          </a:xfrm>
-          <a:prstGeom prst="roundRect">
-            <a:avLst/>
-          </a:prstGeom>
-          <a:solidFill>
-            <a:srgbClr val="FBEEE4"/>
-          </a:solidFill>
-          <a:ln w="12700">
-            <a:solidFill>
-              <a:srgbClr val="B55A2E"/>
-            </a:solidFill>
-          </a:ln>
-          <a:effectLst/>
-        </p:spPr>
-        <p:style>
-          <a:lnRef idx="1">
-            <a:schemeClr val="accent1"/>
-          </a:lnRef>
-          <a:fillRef idx="3">
-            <a:schemeClr val="accent1"/>
-          </a:fillRef>
-          <a:effectRef idx="2">
-            <a:schemeClr val="accent1"/>
-          </a:effectRef>
-          <a:fontRef idx="minor">
-            <a:schemeClr val="lt1"/>
-          </a:fontRef>
-        </p:style>
-        <p:txBody>
-          <a:bodyPr rtlCol="0" anchor="ctr" wrap="square" tIns="25400" bIns="25400" lIns="127000"/>
-          <a:lstStyle/>
-          <a:p>
-            <a:pPr algn="l"/>
-            <a:r>
-              <a:rPr sz="1500" b="1" i="0">
-                <a:solidFill>
-                  <a:srgbClr val="B55A2E"/>
-                </a:solidFill>
-                <a:latin typeface="Calibri"/>
-              </a:rPr>
-              <a:t>appworld</a:t>
-            </a:r>
-          </a:p>
-          <a:p>
-            <a:pPr algn="l"/>
-            <a:r>
-              <a:rPr sz="1150" b="0" i="0">
-                <a:solidFill>
-                  <a:srgbClr val="1F2A37"/>
-                </a:solidFill>
-                <a:latin typeface="Calibri"/>
-              </a:rPr>
-              <a:t>long-horizon across simulated apps · runs e2e · raise task_timeout_seconds</a:t>
-            </a:r>
-          </a:p>
-        </p:txBody>
-      </p:sp>
-      <p:sp>
-        <p:nvSpPr>
-          <p:cNvPr id="7" name="Rectangle 6"/>
-          <p:cNvSpPr/>
-          <p:nvPr/>
-        </p:nvSpPr>
-        <p:spPr>
-          <a:xfrm>
-            <a:off x="5989320" y="1143000"/>
-            <a:ext cx="5760720" cy="457200"/>
-          </a:xfrm>
-          <a:prstGeom prst="rect">
-            <a:avLst/>
-          </a:prstGeom>
-          <a:solidFill>
-            <a:srgbClr val="1B3A5C"/>
-          </a:solidFill>
-          <a:ln w="12700">
-            <a:solidFill>
-              <a:srgbClr val="1B3A5C"/>
-            </a:solidFill>
-          </a:ln>
-          <a:effectLst/>
-        </p:spPr>
-        <p:style>
-          <a:lnRef idx="1">
-            <a:schemeClr val="accent1"/>
-          </a:lnRef>
-          <a:fillRef idx="3">
-            <a:schemeClr val="accent1"/>
-          </a:fillRef>
-          <a:effectRef idx="2">
-            <a:schemeClr val="accent1"/>
-          </a:effectRef>
-          <a:fontRef idx="minor">
-            <a:schemeClr val="lt1"/>
-          </a:fontRef>
-        </p:style>
-        <p:txBody>
-          <a:bodyPr rtlCol="0" anchor="ctr" wrap="square" tIns="25400" bIns="25400"/>
-          <a:lstStyle/>
-          <a:p>
-            <a:pPr algn="ctr"/>
-            <a:r>
-              <a:rPr sz="1500" b="1" i="0">
-                <a:solidFill>
-                  <a:srgbClr val="FFFFFF"/>
-                </a:solidFill>
-                <a:latin typeface="Calibri"/>
-              </a:rPr>
-              <a:t>Lifecycle (REST)</a:t>
-            </a:r>
-          </a:p>
-        </p:txBody>
-      </p:sp>
-      <p:sp>
-        <p:nvSpPr>
-          <p:cNvPr id="8" name="Rounded Rectangle 7"/>
-          <p:cNvSpPr/>
-          <p:nvPr/>
-        </p:nvSpPr>
-        <p:spPr>
-          <a:xfrm>
-            <a:off x="6309360" y="1783080"/>
-            <a:ext cx="5440680" cy="603504"/>
+            <a:off x="1463040" y="5212080"/>
+            <a:ext cx="9235440" cy="1005840"/>
           </a:xfrm>
           <a:prstGeom prst="roundRect">
             <a:avLst/>
@@ -24287,589 +26420,25 @@
           </a:fontRef>
         </p:style>
         <p:txBody>
-          <a:bodyPr rtlCol="0" anchor="ctr" wrap="square" tIns="25400" bIns="25400" lIns="101600"/>
-          <a:lstStyle/>
-          <a:p>
-            <a:pPr algn="l"/>
-            <a:r>
-              <a:rPr sz="1250" b="1" i="0">
+          <a:bodyPr rtlCol="0" anchor="ctr" wrap="square" tIns="25400" bIns="25400"/>
+          <a:lstStyle/>
+          <a:p>
+            <a:pPr algn="ctr"/>
+            <a:r>
+              <a:rPr sz="1350" b="1" i="0">
                 <a:solidFill>
                   <a:srgbClr val="1F2A37"/>
                 </a:solidFill>
                 <a:latin typeface="Calibri"/>
               </a:rPr>
-              <a:t>POST /benchmarks/{n}/deploy</a:t>
-            </a:r>
-          </a:p>
-          <a:p>
-            <a:pPr algn="l"/>
-            <a:r>
-              <a:rPr sz="1050" b="0" i="0">
-                <a:solidFill>
-                  <a:srgbClr val="3A4654"/>
-                </a:solidFill>
-                <a:latin typeface="Calibri"/>
-              </a:rPr>
-              <a:t>create MCP tool + A2A agent → 201</a:t>
-            </a:r>
-          </a:p>
-        </p:txBody>
-      </p:sp>
-      <p:cxnSp>
-        <p:nvCxnSpPr>
-          <p:cNvPr id="9" name="Connector 8"/>
-          <p:cNvCxnSpPr/>
-          <p:nvPr/>
-        </p:nvCxnSpPr>
-        <p:spPr>
-          <a:xfrm>
-            <a:off x="6172200" y="2084832"/>
-            <a:ext cx="137160" cy="640080"/>
-          </a:xfrm>
-          <a:prstGeom prst="line">
-            <a:avLst/>
-          </a:prstGeom>
-          <a:ln w="12700">
-            <a:solidFill>
-              <a:srgbClr val="C7CED6"/>
-            </a:solidFill>
-          </a:ln>
-          <a:effectLst/>
-        </p:spPr>
-        <p:style>
-          <a:lnRef idx="2">
-            <a:schemeClr val="accent1"/>
-          </a:lnRef>
-          <a:fillRef idx="0">
-            <a:schemeClr val="accent1"/>
-          </a:fillRef>
-          <a:effectRef idx="1">
-            <a:schemeClr val="accent1"/>
-          </a:effectRef>
-          <a:fontRef idx="minor">
-            <a:schemeClr val="tx1"/>
-          </a:fontRef>
-        </p:style>
-      </p:cxnSp>
-      <p:sp>
-        <p:nvSpPr>
-          <p:cNvPr id="10" name="Rounded Rectangle 9"/>
-          <p:cNvSpPr/>
-          <p:nvPr/>
-        </p:nvSpPr>
-        <p:spPr>
-          <a:xfrm>
-            <a:off x="6309360" y="2468880"/>
-            <a:ext cx="5440680" cy="603504"/>
-          </a:xfrm>
-          <a:prstGeom prst="roundRect">
-            <a:avLst/>
-          </a:prstGeom>
-          <a:solidFill>
-            <a:srgbClr val="E8F1FB"/>
-          </a:solidFill>
-          <a:ln w="12700">
-            <a:solidFill>
-              <a:srgbClr val="2E6FB5"/>
-            </a:solidFill>
-          </a:ln>
-          <a:effectLst/>
-        </p:spPr>
-        <p:style>
-          <a:lnRef idx="1">
-            <a:schemeClr val="accent1"/>
-          </a:lnRef>
-          <a:fillRef idx="3">
-            <a:schemeClr val="accent1"/>
-          </a:fillRef>
-          <a:effectRef idx="2">
-            <a:schemeClr val="accent1"/>
-          </a:effectRef>
-          <a:fontRef idx="minor">
-            <a:schemeClr val="lt1"/>
-          </a:fontRef>
-        </p:style>
-        <p:txBody>
-          <a:bodyPr rtlCol="0" anchor="ctr" wrap="square" tIns="25400" bIns="25400" lIns="101600"/>
-          <a:lstStyle/>
-          <a:p>
-            <a:pPr algn="l"/>
-            <a:r>
-              <a:rPr sz="1250" b="1" i="0">
-                <a:solidFill>
-                  <a:srgbClr val="1F2A37"/>
-                </a:solidFill>
-                <a:latin typeface="Calibri"/>
-              </a:rPr>
-              <a:t>GET /benchmarks/{n}/status</a:t>
-            </a:r>
-          </a:p>
-          <a:p>
-            <a:pPr algn="l"/>
-            <a:r>
-              <a:rPr sz="1050" b="0" i="0">
-                <a:solidFill>
-                  <a:srgbClr val="3A4654"/>
-                </a:solidFill>
-                <a:latin typeface="Calibri"/>
-              </a:rPr>
-              <a:t>poll until tool_ready &amp; agent_ready</a:t>
-            </a:r>
-          </a:p>
-        </p:txBody>
-      </p:sp>
-      <p:cxnSp>
-        <p:nvCxnSpPr>
-          <p:cNvPr id="11" name="Connector 10"/>
-          <p:cNvCxnSpPr/>
-          <p:nvPr/>
-        </p:nvCxnSpPr>
-        <p:spPr>
-          <a:xfrm>
-            <a:off x="6172200" y="2770632"/>
-            <a:ext cx="137160" cy="640080"/>
-          </a:xfrm>
-          <a:prstGeom prst="line">
-            <a:avLst/>
-          </a:prstGeom>
-          <a:ln w="12700">
-            <a:solidFill>
-              <a:srgbClr val="C7CED6"/>
-            </a:solidFill>
-          </a:ln>
-          <a:effectLst/>
-        </p:spPr>
-        <p:style>
-          <a:lnRef idx="2">
-            <a:schemeClr val="accent1"/>
-          </a:lnRef>
-          <a:fillRef idx="0">
-            <a:schemeClr val="accent1"/>
-          </a:fillRef>
-          <a:effectRef idx="1">
-            <a:schemeClr val="accent1"/>
-          </a:effectRef>
-          <a:fontRef idx="minor">
-            <a:schemeClr val="tx1"/>
-          </a:fontRef>
-        </p:style>
-      </p:cxnSp>
-      <p:sp>
-        <p:nvSpPr>
-          <p:cNvPr id="12" name="Rounded Rectangle 11"/>
-          <p:cNvSpPr/>
-          <p:nvPr/>
-        </p:nvSpPr>
-        <p:spPr>
-          <a:xfrm>
-            <a:off x="6309360" y="3154680"/>
-            <a:ext cx="5440680" cy="603504"/>
-          </a:xfrm>
-          <a:prstGeom prst="roundRect">
-            <a:avLst/>
-          </a:prstGeom>
-          <a:solidFill>
-            <a:srgbClr val="E8F1FB"/>
-          </a:solidFill>
-          <a:ln w="12700">
-            <a:solidFill>
-              <a:srgbClr val="2E6FB5"/>
-            </a:solidFill>
-          </a:ln>
-          <a:effectLst/>
-        </p:spPr>
-        <p:style>
-          <a:lnRef idx="1">
-            <a:schemeClr val="accent1"/>
-          </a:lnRef>
-          <a:fillRef idx="3">
-            <a:schemeClr val="accent1"/>
-          </a:fillRef>
-          <a:effectRef idx="2">
-            <a:schemeClr val="accent1"/>
-          </a:effectRef>
-          <a:fontRef idx="minor">
-            <a:schemeClr val="lt1"/>
-          </a:fontRef>
-        </p:style>
-        <p:txBody>
-          <a:bodyPr rtlCol="0" anchor="ctr" wrap="square" tIns="25400" bIns="25400" lIns="101600"/>
-          <a:lstStyle/>
-          <a:p>
-            <a:pPr algn="l"/>
-            <a:r>
-              <a:rPr sz="1250" b="1" i="0">
-                <a:solidFill>
-                  <a:srgbClr val="1F2A37"/>
-                </a:solidFill>
-                <a:latin typeface="Calibri"/>
-              </a:rPr>
-              <a:t>POST /benchmarks/{n}/runs</a:t>
-            </a:r>
-          </a:p>
-          <a:p>
-            <a:pPr algn="l"/>
-            <a:r>
-              <a:rPr sz="1050" b="0" i="0">
-                <a:solidFill>
-                  <a:srgbClr val="3A4654"/>
-                </a:solidFill>
-                <a:latin typeface="Calibri"/>
-              </a:rPr>
-              <a:t>precheck → 202 run_id  (409 not deployed · 424 secret missing)</a:t>
-            </a:r>
-          </a:p>
-        </p:txBody>
-      </p:sp>
-      <p:cxnSp>
-        <p:nvCxnSpPr>
-          <p:cNvPr id="13" name="Connector 12"/>
-          <p:cNvCxnSpPr/>
-          <p:nvPr/>
-        </p:nvCxnSpPr>
-        <p:spPr>
-          <a:xfrm>
-            <a:off x="6172200" y="3456432"/>
-            <a:ext cx="137160" cy="640080"/>
-          </a:xfrm>
-          <a:prstGeom prst="line">
-            <a:avLst/>
-          </a:prstGeom>
-          <a:ln w="12700">
-            <a:solidFill>
-              <a:srgbClr val="C7CED6"/>
-            </a:solidFill>
-          </a:ln>
-          <a:effectLst/>
-        </p:spPr>
-        <p:style>
-          <a:lnRef idx="2">
-            <a:schemeClr val="accent1"/>
-          </a:lnRef>
-          <a:fillRef idx="0">
-            <a:schemeClr val="accent1"/>
-          </a:fillRef>
-          <a:effectRef idx="1">
-            <a:schemeClr val="accent1"/>
-          </a:effectRef>
-          <a:fontRef idx="minor">
-            <a:schemeClr val="tx1"/>
-          </a:fontRef>
-        </p:style>
-      </p:cxnSp>
-      <p:sp>
-        <p:nvSpPr>
-          <p:cNvPr id="14" name="Rounded Rectangle 13"/>
-          <p:cNvSpPr/>
-          <p:nvPr/>
-        </p:nvSpPr>
-        <p:spPr>
-          <a:xfrm>
-            <a:off x="6309360" y="3840480"/>
-            <a:ext cx="5440680" cy="603504"/>
-          </a:xfrm>
-          <a:prstGeom prst="roundRect">
-            <a:avLst/>
-          </a:prstGeom>
-          <a:solidFill>
-            <a:srgbClr val="E8F1FB"/>
-          </a:solidFill>
-          <a:ln w="12700">
-            <a:solidFill>
-              <a:srgbClr val="2E6FB5"/>
-            </a:solidFill>
-          </a:ln>
-          <a:effectLst/>
-        </p:spPr>
-        <p:style>
-          <a:lnRef idx="1">
-            <a:schemeClr val="accent1"/>
-          </a:lnRef>
-          <a:fillRef idx="3">
-            <a:schemeClr val="accent1"/>
-          </a:fillRef>
-          <a:effectRef idx="2">
-            <a:schemeClr val="accent1"/>
-          </a:effectRef>
-          <a:fontRef idx="minor">
-            <a:schemeClr val="lt1"/>
-          </a:fontRef>
-        </p:style>
-        <p:txBody>
-          <a:bodyPr rtlCol="0" anchor="ctr" wrap="square" tIns="25400" bIns="25400" lIns="101600"/>
-          <a:lstStyle/>
-          <a:p>
-            <a:pPr algn="l"/>
-            <a:r>
-              <a:rPr sz="1250" b="1" i="0">
-                <a:solidFill>
-                  <a:srgbClr val="1F2A37"/>
-                </a:solidFill>
-                <a:latin typeface="Calibri"/>
-              </a:rPr>
-              <a:t>GET …/runs/{id}</a:t>
-            </a:r>
-          </a:p>
-          <a:p>
-            <a:pPr algn="l"/>
-            <a:r>
-              <a:rPr sz="1050" b="0" i="0">
-                <a:solidFill>
-                  <a:srgbClr val="3A4654"/>
-                </a:solidFill>
-                <a:latin typeface="Calibri"/>
-              </a:rPr>
-              <a:t>poll pending → running → succeeded / failed</a:t>
-            </a:r>
-          </a:p>
-        </p:txBody>
-      </p:sp>
-      <p:cxnSp>
-        <p:nvCxnSpPr>
-          <p:cNvPr id="15" name="Connector 14"/>
-          <p:cNvCxnSpPr/>
-          <p:nvPr/>
-        </p:nvCxnSpPr>
-        <p:spPr>
-          <a:xfrm>
-            <a:off x="6172200" y="4142232"/>
-            <a:ext cx="137160" cy="640080"/>
-          </a:xfrm>
-          <a:prstGeom prst="line">
-            <a:avLst/>
-          </a:prstGeom>
-          <a:ln w="12700">
-            <a:solidFill>
-              <a:srgbClr val="C7CED6"/>
-            </a:solidFill>
-          </a:ln>
-          <a:effectLst/>
-        </p:spPr>
-        <p:style>
-          <a:lnRef idx="2">
-            <a:schemeClr val="accent1"/>
-          </a:lnRef>
-          <a:fillRef idx="0">
-            <a:schemeClr val="accent1"/>
-          </a:fillRef>
-          <a:effectRef idx="1">
-            <a:schemeClr val="accent1"/>
-          </a:effectRef>
-          <a:fontRef idx="minor">
-            <a:schemeClr val="tx1"/>
-          </a:fontRef>
-        </p:style>
-      </p:cxnSp>
-      <p:sp>
-        <p:nvSpPr>
-          <p:cNvPr id="16" name="Rounded Rectangle 15"/>
-          <p:cNvSpPr/>
-          <p:nvPr/>
-        </p:nvSpPr>
-        <p:spPr>
-          <a:xfrm>
-            <a:off x="6309360" y="4526280"/>
-            <a:ext cx="5440680" cy="603504"/>
-          </a:xfrm>
-          <a:prstGeom prst="roundRect">
-            <a:avLst/>
-          </a:prstGeom>
-          <a:solidFill>
-            <a:srgbClr val="E8F1FB"/>
-          </a:solidFill>
-          <a:ln w="12700">
-            <a:solidFill>
-              <a:srgbClr val="2E6FB5"/>
-            </a:solidFill>
-          </a:ln>
-          <a:effectLst/>
-        </p:spPr>
-        <p:style>
-          <a:lnRef idx="1">
-            <a:schemeClr val="accent1"/>
-          </a:lnRef>
-          <a:fillRef idx="3">
-            <a:schemeClr val="accent1"/>
-          </a:fillRef>
-          <a:effectRef idx="2">
-            <a:schemeClr val="accent1"/>
-          </a:effectRef>
-          <a:fontRef idx="minor">
-            <a:schemeClr val="lt1"/>
-          </a:fontRef>
-        </p:style>
-        <p:txBody>
-          <a:bodyPr rtlCol="0" anchor="ctr" wrap="square" tIns="25400" bIns="25400" lIns="101600"/>
-          <a:lstStyle/>
-          <a:p>
-            <a:pPr algn="l"/>
-            <a:r>
-              <a:rPr sz="1250" b="1" i="0">
-                <a:solidFill>
-                  <a:srgbClr val="1F2A37"/>
-                </a:solidFill>
-                <a:latin typeface="Calibri"/>
-              </a:rPr>
-              <a:t>GET …/runs/{id}/report</a:t>
-            </a:r>
-          </a:p>
-          <a:p>
-            <a:pPr algn="l"/>
-            <a:r>
-              <a:rPr sz="1050" b="0" i="0">
-                <a:solidFill>
-                  <a:srgbClr val="3A4654"/>
-                </a:solidFill>
-                <a:latin typeface="Calibri"/>
-              </a:rPr>
-              <a:t>MLflow records + artifacts  (409 if MLflow unset)</a:t>
-            </a:r>
-          </a:p>
-        </p:txBody>
-      </p:sp>
-      <p:cxnSp>
-        <p:nvCxnSpPr>
-          <p:cNvPr id="17" name="Connector 16"/>
-          <p:cNvCxnSpPr/>
-          <p:nvPr/>
-        </p:nvCxnSpPr>
-        <p:spPr>
-          <a:xfrm>
-            <a:off x="6172200" y="4828032"/>
-            <a:ext cx="137160" cy="640080"/>
-          </a:xfrm>
-          <a:prstGeom prst="line">
-            <a:avLst/>
-          </a:prstGeom>
-          <a:ln w="12700">
-            <a:solidFill>
-              <a:srgbClr val="C7CED6"/>
-            </a:solidFill>
-          </a:ln>
-          <a:effectLst/>
-        </p:spPr>
-        <p:style>
-          <a:lnRef idx="2">
-            <a:schemeClr val="accent1"/>
-          </a:lnRef>
-          <a:fillRef idx="0">
-            <a:schemeClr val="accent1"/>
-          </a:fillRef>
-          <a:effectRef idx="1">
-            <a:schemeClr val="accent1"/>
-          </a:effectRef>
-          <a:fontRef idx="minor">
-            <a:schemeClr val="tx1"/>
-          </a:fontRef>
-        </p:style>
-      </p:cxnSp>
-      <p:sp>
-        <p:nvSpPr>
-          <p:cNvPr id="18" name="Rounded Rectangle 17"/>
-          <p:cNvSpPr/>
-          <p:nvPr/>
-        </p:nvSpPr>
-        <p:spPr>
-          <a:xfrm>
-            <a:off x="6309360" y="5212080"/>
-            <a:ext cx="5440680" cy="603504"/>
-          </a:xfrm>
-          <a:prstGeom prst="roundRect">
-            <a:avLst/>
-          </a:prstGeom>
-          <a:solidFill>
-            <a:srgbClr val="E8F1FB"/>
-          </a:solidFill>
-          <a:ln w="12700">
-            <a:solidFill>
-              <a:srgbClr val="2E6FB5"/>
-            </a:solidFill>
-          </a:ln>
-          <a:effectLst/>
-        </p:spPr>
-        <p:style>
-          <a:lnRef idx="1">
-            <a:schemeClr val="accent1"/>
-          </a:lnRef>
-          <a:fillRef idx="3">
-            <a:schemeClr val="accent1"/>
-          </a:fillRef>
-          <a:effectRef idx="2">
-            <a:schemeClr val="accent1"/>
-          </a:effectRef>
-          <a:fontRef idx="minor">
-            <a:schemeClr val="lt1"/>
-          </a:fontRef>
-        </p:style>
-        <p:txBody>
-          <a:bodyPr rtlCol="0" anchor="ctr" wrap="square" tIns="25400" bIns="25400" lIns="101600"/>
-          <a:lstStyle/>
-          <a:p>
-            <a:pPr algn="l"/>
-            <a:r>
-              <a:rPr sz="1250" b="1" i="0">
-                <a:solidFill>
-                  <a:srgbClr val="1F2A37"/>
-                </a:solidFill>
-                <a:latin typeface="Calibri"/>
-              </a:rPr>
-              <a:t>download from S3</a:t>
-            </a:r>
-          </a:p>
-          <a:p>
-            <a:pPr algn="l"/>
-            <a:r>
-              <a:rPr sz="1050" b="0" i="0">
-                <a:solidFill>
-                  <a:srgbClr val="3A4654"/>
-                </a:solidFill>
-                <a:latin typeface="Calibri"/>
-              </a:rPr>
-              <a:t>run.json · report.* · token_report.* · span_report.* · manifest.json</a:t>
-            </a:r>
-          </a:p>
-        </p:txBody>
-      </p:sp>
-      <p:cxnSp>
-        <p:nvCxnSpPr>
-          <p:cNvPr id="19" name="Connector 18"/>
-          <p:cNvCxnSpPr/>
-          <p:nvPr/>
-        </p:nvCxnSpPr>
-        <p:spPr>
-          <a:xfrm>
-            <a:off x="6144768" y="1920240"/>
-            <a:ext cx="0" cy="3931920"/>
-          </a:xfrm>
-          <a:prstGeom prst="line">
-            <a:avLst/>
-          </a:prstGeom>
-          <a:ln w="19050">
-            <a:solidFill>
-              <a:srgbClr val="E87A1E"/>
-            </a:solidFill>
-            <a:tailEnd type="triangle" w="med" len="med"/>
-          </a:ln>
-          <a:effectLst/>
-        </p:spPr>
-        <p:style>
-          <a:lnRef idx="2">
-            <a:schemeClr val="accent1"/>
-          </a:lnRef>
-          <a:fillRef idx="0">
-            <a:schemeClr val="accent1"/>
-          </a:fillRef>
-          <a:effectRef idx="1">
-            <a:schemeClr val="accent1"/>
-          </a:effectRef>
-          <a:fontRef idx="minor">
-            <a:schemeClr val="tx1"/>
-          </a:fontRef>
-        </p:style>
-      </p:cxnSp>
-      <p:sp>
-        <p:nvSpPr>
-          <p:cNvPr id="20" name="TextBox 19"/>
+              <a:t>Implication:  at the Rossoctl / cluster layer every action appears as the Service's identity — so per-user attribution &amp; audit live in the Service, keyed on (iss, preferred_username).</a:t>
+            </a:r>
+          </a:p>
+        </p:txBody>
+      </p:sp>
+      <p:sp>
+        <p:nvSpPr>
+          <p:cNvPr id="8" name="TextBox 7"/>
           <p:cNvSpPr txBox="1"/>
           <p:nvPr/>
         </p:nvSpPr>
@@ -24916,7 +26485,7 @@
 
 <file path=ppt/slides/slide9.xml><?xml version="1.0" encoding="utf-8"?>
 <p:sld xmlns:a="http://schemas.openxmlformats.org/drawingml/2006/main" xmlns:p="http://schemas.openxmlformats.org/presentationml/2006/main" xmlns:r="http://schemas.openxmlformats.org/officeDocument/2006/relationships">
-  <p:cSld name="7.1 The Three Benchmarks — a Difficulty Ladder">
+  <p:cSld name="6. Benchmark Catalog &amp; Run Lifecycle">
     <p:spTree>
       <p:nvGrpSpPr>
         <p:cNvPr id="1" name=""/>
@@ -24972,1292 +26541,31 @@
                 </a:solidFill>
                 <a:latin typeface="Calibri"/>
               </a:rPr>
-              <a:t>7.1  The Three Benchmarks — a Difficulty Ladder</a:t>
-            </a:r>
-          </a:p>
-          <a:p>
-            <a:r>
-              <a:rPr sz="1400" b="0" i="0">
-                <a:solidFill>
-                  <a:srgbClr val="C9D9EC"/>
-                </a:solidFill>
-                <a:latin typeface="Calibri"/>
-              </a:rPr>
-              <a:t>Not interchangeable suites: each costs ~an order of magnitude more than the last</a:t>
-            </a:r>
-          </a:p>
-        </p:txBody>
-      </p:sp>
-      <p:graphicFrame>
-        <p:nvGraphicFramePr>
-          <p:cNvPr id="3" name="Table 2"/>
-          <p:cNvGraphicFramePr>
-            <a:graphicFrameLocks noGrp="1"/>
-          </p:cNvGraphicFramePr>
-          <p:nvPr/>
-        </p:nvGraphicFramePr>
-        <p:xfrm>
-          <a:off x="411480" y="1188720"/>
-          <a:ext cx="11338560" cy="3977639"/>
-        </p:xfrm>
-        <a:graphic>
-          <a:graphicData uri="http://schemas.openxmlformats.org/drawingml/2006/table">
-            <a:tbl>
-              <a:tblPr firstRow="1">
-                <a:tableStyleId>{5C22544A-7EE6-4342-B048-85BDC9FD1C3A}</a:tableStyleId>
-              </a:tblPr>
-              <a:tblGrid>
-                <a:gridCol w="2286000"/>
-                <a:gridCol w="3017520"/>
-                <a:gridCol w="3017520"/>
-                <a:gridCol w="3017520"/>
-              </a:tblGrid>
-              <a:tr h="305972">
-                <a:tc>
-                  <a:txBody>
-                    <a:bodyPr/>
-                    <a:lstStyle/>
-                    <a:p>
-                      <a:pPr algn="l"/>
-                      <a:r>
-                        <a:rPr sz="1100" b="1" i="0">
-                          <a:solidFill>
-                            <a:srgbClr val="FFFFFF"/>
-                          </a:solidFill>
-                          <a:latin typeface="Calibri"/>
-                        </a:rPr>
-                        <a:t/>
-                      </a:r>
-                    </a:p>
-                  </a:txBody>
-                  <a:tcPr marL="63500" marR="63500" marT="12700" marB="12700" anchor="ctr">
-                    <a:solidFill>
-                      <a:srgbClr val="1B3A5C"/>
-                    </a:solidFill>
-                  </a:tcPr>
-                </a:tc>
-                <a:tc>
-                  <a:txBody>
-                    <a:bodyPr/>
-                    <a:lstStyle/>
-                    <a:p>
-                      <a:pPr algn="ctr"/>
-                      <a:r>
-                        <a:rPr sz="1100" b="1" i="0">
-                          <a:solidFill>
-                            <a:srgbClr val="FFFFFF"/>
-                          </a:solidFill>
-                          <a:latin typeface="Calibri"/>
-                        </a:rPr>
-                        <a:t>gsm8k</a:t>
-                      </a:r>
-                    </a:p>
-                  </a:txBody>
-                  <a:tcPr marL="63500" marR="63500" marT="12700" marB="12700" anchor="ctr">
-                    <a:solidFill>
-                      <a:srgbClr val="1B3A5C"/>
-                    </a:solidFill>
-                  </a:tcPr>
-                </a:tc>
-                <a:tc>
-                  <a:txBody>
-                    <a:bodyPr/>
-                    <a:lstStyle/>
-                    <a:p>
-                      <a:pPr algn="ctr"/>
-                      <a:r>
-                        <a:rPr sz="1100" b="1" i="0">
-                          <a:solidFill>
-                            <a:srgbClr val="FFFFFF"/>
-                          </a:solidFill>
-                          <a:latin typeface="Calibri"/>
-                        </a:rPr>
-                        <a:t>tau2</a:t>
-                      </a:r>
-                    </a:p>
-                  </a:txBody>
-                  <a:tcPr marL="63500" marR="63500" marT="12700" marB="12700" anchor="ctr">
-                    <a:solidFill>
-                      <a:srgbClr val="1B3A5C"/>
-                    </a:solidFill>
-                  </a:tcPr>
-                </a:tc>
-                <a:tc>
-                  <a:txBody>
-                    <a:bodyPr/>
-                    <a:lstStyle/>
-                    <a:p>
-                      <a:pPr algn="ctr"/>
-                      <a:r>
-                        <a:rPr sz="1100" b="1" i="0">
-                          <a:solidFill>
-                            <a:srgbClr val="FFFFFF"/>
-                          </a:solidFill>
-                          <a:latin typeface="Calibri"/>
-                        </a:rPr>
-                        <a:t>appworld</a:t>
-                      </a:r>
-                    </a:p>
-                  </a:txBody>
-                  <a:tcPr marL="63500" marR="63500" marT="12700" marB="12700" anchor="ctr">
-                    <a:solidFill>
-                      <a:srgbClr val="1B3A5C"/>
-                    </a:solidFill>
-                  </a:tcPr>
-                </a:tc>
-              </a:tr>
-              <a:tr h="305972">
-                <a:tc>
-                  <a:txBody>
-                    <a:bodyPr/>
-                    <a:lstStyle/>
-                    <a:p>
-                      <a:pPr algn="l"/>
-                      <a:r>
-                        <a:rPr sz="1100" b="1" i="0">
-                          <a:solidFill>
-                            <a:srgbClr val="1F2A37"/>
-                          </a:solidFill>
-                          <a:latin typeface="Calibri"/>
-                        </a:rPr>
-                        <a:t>What it tests</a:t>
-                      </a:r>
-                    </a:p>
-                  </a:txBody>
-                  <a:tcPr marL="63500" marR="63500" marT="12700" marB="12700" anchor="ctr">
-                    <a:solidFill>
-                      <a:srgbClr val="FFFFFF"/>
-                    </a:solidFill>
-                  </a:tcPr>
-                </a:tc>
-                <a:tc>
-                  <a:txBody>
-                    <a:bodyPr/>
-                    <a:lstStyle/>
-                    <a:p>
-                      <a:pPr algn="ctr"/>
-                      <a:r>
-                        <a:rPr sz="1100" b="0" i="0">
-                          <a:solidFill>
-                            <a:srgbClr val="1F2A37"/>
-                          </a:solidFill>
-                          <a:latin typeface="Calibri"/>
-                        </a:rPr>
-                        <a:t>multi-step arithmetic</a:t>
-                      </a:r>
-                    </a:p>
-                  </a:txBody>
-                  <a:tcPr marL="63500" marR="63500" marT="12700" marB="12700" anchor="ctr">
-                    <a:solidFill>
-                      <a:srgbClr val="FFFFFF"/>
-                    </a:solidFill>
-                  </a:tcPr>
-                </a:tc>
-                <a:tc>
-                  <a:txBody>
-                    <a:bodyPr/>
-                    <a:lstStyle/>
-                    <a:p>
-                      <a:pPr algn="ctr"/>
-                      <a:r>
-                        <a:rPr sz="1100" b="0" i="0">
-                          <a:solidFill>
-                            <a:srgbClr val="1F2A37"/>
-                          </a:solidFill>
-                          <a:latin typeface="Calibri"/>
-                        </a:rPr>
-                        <a:t>multi-turn dialogue + tools</a:t>
-                      </a:r>
-                    </a:p>
-                  </a:txBody>
-                  <a:tcPr marL="63500" marR="63500" marT="12700" marB="12700" anchor="ctr">
-                    <a:solidFill>
-                      <a:srgbClr val="FFFFFF"/>
-                    </a:solidFill>
-                  </a:tcPr>
-                </a:tc>
-                <a:tc>
-                  <a:txBody>
-                    <a:bodyPr/>
-                    <a:lstStyle/>
-                    <a:p>
-                      <a:pPr algn="ctr"/>
-                      <a:r>
-                        <a:rPr sz="1100" b="0" i="0">
-                          <a:solidFill>
-                            <a:srgbClr val="1F2A37"/>
-                          </a:solidFill>
-                          <a:latin typeface="Calibri"/>
-                        </a:rPr>
-                        <a:t>long-horizon app automation</a:t>
-                      </a:r>
-                    </a:p>
-                  </a:txBody>
-                  <a:tcPr marL="63500" marR="63500" marT="12700" marB="12700" anchor="ctr">
-                    <a:solidFill>
-                      <a:srgbClr val="FFFFFF"/>
-                    </a:solidFill>
-                  </a:tcPr>
-                </a:tc>
-              </a:tr>
-              <a:tr h="305972">
-                <a:tc>
-                  <a:txBody>
-                    <a:bodyPr/>
-                    <a:lstStyle/>
-                    <a:p>
-                      <a:pPr algn="l"/>
-                      <a:r>
-                        <a:rPr sz="1100" b="1" i="0">
-                          <a:solidFill>
-                            <a:srgbClr val="1F2A37"/>
-                          </a:solidFill>
-                          <a:latin typeface="Calibri"/>
-                        </a:rPr>
-                        <a:t>Task rows measured</a:t>
-                      </a:r>
-                    </a:p>
-                  </a:txBody>
-                  <a:tcPr marL="63500" marR="63500" marT="12700" marB="12700" anchor="ctr">
-                    <a:solidFill>
-                      <a:srgbClr val="F4F6F8"/>
-                    </a:solidFill>
-                  </a:tcPr>
-                </a:tc>
-                <a:tc>
-                  <a:txBody>
-                    <a:bodyPr/>
-                    <a:lstStyle/>
-                    <a:p>
-                      <a:pPr algn="ctr"/>
-                      <a:r>
-                        <a:rPr sz="1100" b="0" i="0">
-                          <a:solidFill>
-                            <a:srgbClr val="1F2A37"/>
-                          </a:solidFill>
-                          <a:latin typeface="Calibri"/>
-                        </a:rPr>
-                        <a:t>172 of 172</a:t>
-                      </a:r>
-                    </a:p>
-                  </a:txBody>
-                  <a:tcPr marL="63500" marR="63500" marT="12700" marB="12700" anchor="ctr">
-                    <a:solidFill>
-                      <a:srgbClr val="F4F6F8"/>
-                    </a:solidFill>
-                  </a:tcPr>
-                </a:tc>
-                <a:tc>
-                  <a:txBody>
-                    <a:bodyPr/>
-                    <a:lstStyle/>
-                    <a:p>
-                      <a:pPr algn="ctr"/>
-                      <a:r>
-                        <a:rPr sz="1100" b="0" i="0">
-                          <a:solidFill>
-                            <a:srgbClr val="1F2A37"/>
-                          </a:solidFill>
-                          <a:latin typeface="Calibri"/>
-                        </a:rPr>
-                        <a:t>60 of 60</a:t>
-                      </a:r>
-                    </a:p>
-                  </a:txBody>
-                  <a:tcPr marL="63500" marR="63500" marT="12700" marB="12700" anchor="ctr">
-                    <a:solidFill>
-                      <a:srgbClr val="F4F6F8"/>
-                    </a:solidFill>
-                  </a:tcPr>
-                </a:tc>
-                <a:tc>
-                  <a:txBody>
-                    <a:bodyPr/>
-                    <a:lstStyle/>
-                    <a:p>
-                      <a:pPr algn="ctr"/>
-                      <a:r>
-                        <a:rPr sz="1100" b="0" i="0">
-                          <a:solidFill>
-                            <a:srgbClr val="1F2A37"/>
-                          </a:solidFill>
-                          <a:latin typeface="Calibri"/>
-                        </a:rPr>
-                        <a:t>35 of 50 (15 timed out)</a:t>
-                      </a:r>
-                    </a:p>
-                  </a:txBody>
-                  <a:tcPr marL="63500" marR="63500" marT="12700" marB="12700" anchor="ctr">
-                    <a:solidFill>
-                      <a:srgbClr val="F4F6F8"/>
-                    </a:solidFill>
-                  </a:tcPr>
-                </a:tc>
-              </a:tr>
-              <a:tr h="305972">
-                <a:tc>
-                  <a:txBody>
-                    <a:bodyPr/>
-                    <a:lstStyle/>
-                    <a:p>
-                      <a:pPr algn="l"/>
-                      <a:r>
-                        <a:rPr sz="1100" b="1" i="0">
-                          <a:solidFill>
-                            <a:srgbClr val="1F2A37"/>
-                          </a:solidFill>
-                          <a:latin typeface="Calibri"/>
-                        </a:rPr>
-                        <a:t>Rows with lost telemetry</a:t>
-                      </a:r>
-                    </a:p>
-                  </a:txBody>
-                  <a:tcPr marL="63500" marR="63500" marT="12700" marB="12700" anchor="ctr">
-                    <a:solidFill>
-                      <a:srgbClr val="FFFFFF"/>
-                    </a:solidFill>
-                  </a:tcPr>
-                </a:tc>
-                <a:tc>
-                  <a:txBody>
-                    <a:bodyPr/>
-                    <a:lstStyle/>
-                    <a:p>
-                      <a:pPr algn="ctr"/>
-                      <a:r>
-                        <a:rPr sz="1100" b="0" i="0">
-                          <a:solidFill>
-                            <a:srgbClr val="1F2A37"/>
-                          </a:solidFill>
-                          <a:latin typeface="Calibri"/>
-                        </a:rPr>
-                        <a:t>0</a:t>
-                      </a:r>
-                    </a:p>
-                  </a:txBody>
-                  <a:tcPr marL="63500" marR="63500" marT="12700" marB="12700" anchor="ctr">
-                    <a:solidFill>
-                      <a:srgbClr val="FFFFFF"/>
-                    </a:solidFill>
-                  </a:tcPr>
-                </a:tc>
-                <a:tc>
-                  <a:txBody>
-                    <a:bodyPr/>
-                    <a:lstStyle/>
-                    <a:p>
-                      <a:pPr algn="ctr"/>
-                      <a:r>
-                        <a:rPr sz="1100" b="0" i="0">
-                          <a:solidFill>
-                            <a:srgbClr val="1F2A37"/>
-                          </a:solidFill>
-                          <a:latin typeface="Calibri"/>
-                        </a:rPr>
-                        <a:t>0</a:t>
-                      </a:r>
-                    </a:p>
-                  </a:txBody>
-                  <a:tcPr marL="63500" marR="63500" marT="12700" marB="12700" anchor="ctr">
-                    <a:solidFill>
-                      <a:srgbClr val="FFFFFF"/>
-                    </a:solidFill>
-                  </a:tcPr>
-                </a:tc>
-                <a:tc>
-                  <a:txBody>
-                    <a:bodyPr/>
-                    <a:lstStyle/>
-                    <a:p>
-                      <a:pPr algn="ctr"/>
-                      <a:r>
-                        <a:rPr sz="1100" b="0" i="0">
-                          <a:solidFill>
-                            <a:srgbClr val="1F2A37"/>
-                          </a:solidFill>
-                          <a:latin typeface="Calibri"/>
-                        </a:rPr>
-                        <a:t>0</a:t>
-                      </a:r>
-                    </a:p>
-                  </a:txBody>
-                  <a:tcPr marL="63500" marR="63500" marT="12700" marB="12700" anchor="ctr">
-                    <a:solidFill>
-                      <a:srgbClr val="FFFFFF"/>
-                    </a:solidFill>
-                  </a:tcPr>
-                </a:tc>
-              </a:tr>
-              <a:tr h="305972">
-                <a:tc>
-                  <a:txBody>
-                    <a:bodyPr/>
-                    <a:lstStyle/>
-                    <a:p>
-                      <a:pPr algn="l"/>
-                      <a:r>
-                        <a:rPr sz="1100" b="1" i="0">
-                          <a:solidFill>
-                            <a:srgbClr val="1F2A37"/>
-                          </a:solidFill>
-                          <a:latin typeface="Calibri"/>
-                        </a:rPr>
-                        <a:t>Pass rate</a:t>
-                      </a:r>
-                    </a:p>
-                  </a:txBody>
-                  <a:tcPr marL="63500" marR="63500" marT="12700" marB="12700" anchor="ctr">
-                    <a:solidFill>
-                      <a:srgbClr val="F4F6F8"/>
-                    </a:solidFill>
-                  </a:tcPr>
-                </a:tc>
-                <a:tc>
-                  <a:txBody>
-                    <a:bodyPr/>
-                    <a:lstStyle/>
-                    <a:p>
-                      <a:pPr algn="ctr"/>
-                      <a:r>
-                        <a:rPr sz="1100" b="0" i="0">
-                          <a:solidFill>
-                            <a:srgbClr val="1F2A37"/>
-                          </a:solidFill>
-                          <a:latin typeface="Calibri"/>
-                        </a:rPr>
-                        <a:t>0.97</a:t>
-                      </a:r>
-                    </a:p>
-                  </a:txBody>
-                  <a:tcPr marL="63500" marR="63500" marT="12700" marB="12700" anchor="ctr">
-                    <a:solidFill>
-                      <a:srgbClr val="F4F6F8"/>
-                    </a:solidFill>
-                  </a:tcPr>
-                </a:tc>
-                <a:tc>
-                  <a:txBody>
-                    <a:bodyPr/>
-                    <a:lstStyle/>
-                    <a:p>
-                      <a:pPr algn="ctr"/>
-                      <a:r>
-                        <a:rPr sz="1100" b="0" i="0">
-                          <a:solidFill>
-                            <a:srgbClr val="1F2A37"/>
-                          </a:solidFill>
-                          <a:latin typeface="Calibri"/>
-                        </a:rPr>
-                        <a:t>0.83</a:t>
-                      </a:r>
-                    </a:p>
-                  </a:txBody>
-                  <a:tcPr marL="63500" marR="63500" marT="12700" marB="12700" anchor="ctr">
-                    <a:solidFill>
-                      <a:srgbClr val="F4F6F8"/>
-                    </a:solidFill>
-                  </a:tcPr>
-                </a:tc>
-                <a:tc>
-                  <a:txBody>
-                    <a:bodyPr/>
-                    <a:lstStyle/>
-                    <a:p>
-                      <a:pPr algn="ctr"/>
-                      <a:r>
-                        <a:rPr sz="1100" b="0" i="0">
-                          <a:solidFill>
-                            <a:srgbClr val="1F2A37"/>
-                          </a:solidFill>
-                          <a:latin typeface="Calibri"/>
-                        </a:rPr>
-                        <a:t>0.00</a:t>
-                      </a:r>
-                    </a:p>
-                  </a:txBody>
-                  <a:tcPr marL="63500" marR="63500" marT="12700" marB="12700" anchor="ctr">
-                    <a:solidFill>
-                      <a:srgbClr val="F4F6F8"/>
-                    </a:solidFill>
-                  </a:tcPr>
-                </a:tc>
-              </a:tr>
-              <a:tr h="305972">
-                <a:tc>
-                  <a:txBody>
-                    <a:bodyPr/>
-                    <a:lstStyle/>
-                    <a:p>
-                      <a:pPr algn="l"/>
-                      <a:r>
-                        <a:rPr sz="1100" b="1" i="0">
-                          <a:solidFill>
-                            <a:srgbClr val="1F2A37"/>
-                          </a:solidFill>
-                          <a:latin typeface="Calibri"/>
-                        </a:rPr>
-                        <a:t>Input tokens / task</a:t>
-                      </a:r>
-                    </a:p>
-                  </a:txBody>
-                  <a:tcPr marL="63500" marR="63500" marT="12700" marB="12700" anchor="ctr">
-                    <a:solidFill>
-                      <a:srgbClr val="FFFFFF"/>
-                    </a:solidFill>
-                  </a:tcPr>
-                </a:tc>
-                <a:tc>
-                  <a:txBody>
-                    <a:bodyPr/>
-                    <a:lstStyle/>
-                    <a:p>
-                      <a:pPr algn="ctr"/>
-                      <a:r>
-                        <a:rPr sz="1100" b="0" i="0">
-                          <a:solidFill>
-                            <a:srgbClr val="1F2A37"/>
-                          </a:solidFill>
-                          <a:latin typeface="Calibri"/>
-                        </a:rPr>
-                        <a:t>341</a:t>
-                      </a:r>
-                    </a:p>
-                  </a:txBody>
-                  <a:tcPr marL="63500" marR="63500" marT="12700" marB="12700" anchor="ctr">
-                    <a:solidFill>
-                      <a:srgbClr val="FFFFFF"/>
-                    </a:solidFill>
-                  </a:tcPr>
-                </a:tc>
-                <a:tc>
-                  <a:txBody>
-                    <a:bodyPr/>
-                    <a:lstStyle/>
-                    <a:p>
-                      <a:pPr algn="ctr"/>
-                      <a:r>
-                        <a:rPr sz="1100" b="0" i="0">
-                          <a:solidFill>
-                            <a:srgbClr val="1F2A37"/>
-                          </a:solidFill>
-                          <a:latin typeface="Calibri"/>
-                        </a:rPr>
-                        <a:t>90,902</a:t>
-                      </a:r>
-                    </a:p>
-                  </a:txBody>
-                  <a:tcPr marL="63500" marR="63500" marT="12700" marB="12700" anchor="ctr">
-                    <a:solidFill>
-                      <a:srgbClr val="FFFFFF"/>
-                    </a:solidFill>
-                  </a:tcPr>
-                </a:tc>
-                <a:tc>
-                  <a:txBody>
-                    <a:bodyPr/>
-                    <a:lstStyle/>
-                    <a:p>
-                      <a:pPr algn="ctr"/>
-                      <a:r>
-                        <a:rPr sz="1100" b="0" i="0">
-                          <a:solidFill>
-                            <a:srgbClr val="1F2A37"/>
-                          </a:solidFill>
-                          <a:latin typeface="Calibri"/>
-                        </a:rPr>
-                        <a:t>269,953</a:t>
-                      </a:r>
-                    </a:p>
-                  </a:txBody>
-                  <a:tcPr marL="63500" marR="63500" marT="12700" marB="12700" anchor="ctr">
-                    <a:solidFill>
-                      <a:srgbClr val="FFFFFF"/>
-                    </a:solidFill>
-                  </a:tcPr>
-                </a:tc>
-              </a:tr>
-              <a:tr h="305972">
-                <a:tc>
-                  <a:txBody>
-                    <a:bodyPr/>
-                    <a:lstStyle/>
-                    <a:p>
-                      <a:pPr algn="l"/>
-                      <a:r>
-                        <a:rPr sz="1100" b="1" i="0">
-                          <a:solidFill>
-                            <a:srgbClr val="1F2A37"/>
-                          </a:solidFill>
-                          <a:latin typeface="Calibri"/>
-                        </a:rPr>
-                        <a:t>Output tokens / task</a:t>
-                      </a:r>
-                    </a:p>
-                  </a:txBody>
-                  <a:tcPr marL="63500" marR="63500" marT="12700" marB="12700" anchor="ctr">
-                    <a:solidFill>
-                      <a:srgbClr val="F4F6F8"/>
-                    </a:solidFill>
-                  </a:tcPr>
-                </a:tc>
-                <a:tc>
-                  <a:txBody>
-                    <a:bodyPr/>
-                    <a:lstStyle/>
-                    <a:p>
-                      <a:pPr algn="ctr"/>
-                      <a:r>
-                        <a:rPr sz="1100" b="0" i="0">
-                          <a:solidFill>
-                            <a:srgbClr val="1F2A37"/>
-                          </a:solidFill>
-                          <a:latin typeface="Calibri"/>
-                        </a:rPr>
-                        <a:t>180</a:t>
-                      </a:r>
-                    </a:p>
-                  </a:txBody>
-                  <a:tcPr marL="63500" marR="63500" marT="12700" marB="12700" anchor="ctr">
-                    <a:solidFill>
-                      <a:srgbClr val="F4F6F8"/>
-                    </a:solidFill>
-                  </a:tcPr>
-                </a:tc>
-                <a:tc>
-                  <a:txBody>
-                    <a:bodyPr/>
-                    <a:lstStyle/>
-                    <a:p>
-                      <a:pPr algn="ctr"/>
-                      <a:r>
-                        <a:rPr sz="1100" b="0" i="0">
-                          <a:solidFill>
-                            <a:srgbClr val="1F2A37"/>
-                          </a:solidFill>
-                          <a:latin typeface="Calibri"/>
-                        </a:rPr>
-                        <a:t>2,061</a:t>
-                      </a:r>
-                    </a:p>
-                  </a:txBody>
-                  <a:tcPr marL="63500" marR="63500" marT="12700" marB="12700" anchor="ctr">
-                    <a:solidFill>
-                      <a:srgbClr val="F4F6F8"/>
-                    </a:solidFill>
-                  </a:tcPr>
-                </a:tc>
-                <a:tc>
-                  <a:txBody>
-                    <a:bodyPr/>
-                    <a:lstStyle/>
-                    <a:p>
-                      <a:pPr algn="ctr"/>
-                      <a:r>
-                        <a:rPr sz="1100" b="0" i="0">
-                          <a:solidFill>
-                            <a:srgbClr val="1F2A37"/>
-                          </a:solidFill>
-                          <a:latin typeface="Calibri"/>
-                        </a:rPr>
-                        <a:t>25,140</a:t>
-                      </a:r>
-                    </a:p>
-                  </a:txBody>
-                  <a:tcPr marL="63500" marR="63500" marT="12700" marB="12700" anchor="ctr">
-                    <a:solidFill>
-                      <a:srgbClr val="F4F6F8"/>
-                    </a:solidFill>
-                  </a:tcPr>
-                </a:tc>
-              </a:tr>
-              <a:tr h="305972">
-                <a:tc>
-                  <a:txBody>
-                    <a:bodyPr/>
-                    <a:lstStyle/>
-                    <a:p>
-                      <a:pPr algn="l"/>
-                      <a:r>
-                        <a:rPr sz="1100" b="1" i="0">
-                          <a:solidFill>
-                            <a:srgbClr val="1F2A37"/>
-                          </a:solidFill>
-                          <a:latin typeface="Calibri"/>
-                        </a:rPr>
-                        <a:t>LLM calls / task</a:t>
-                      </a:r>
-                    </a:p>
-                  </a:txBody>
-                  <a:tcPr marL="63500" marR="63500" marT="12700" marB="12700" anchor="ctr">
-                    <a:solidFill>
-                      <a:srgbClr val="FFFFFF"/>
-                    </a:solidFill>
-                  </a:tcPr>
-                </a:tc>
-                <a:tc>
-                  <a:txBody>
-                    <a:bodyPr/>
-                    <a:lstStyle/>
-                    <a:p>
-                      <a:pPr algn="ctr"/>
-                      <a:r>
-                        <a:rPr sz="1100" b="0" i="0">
-                          <a:solidFill>
-                            <a:srgbClr val="1F2A37"/>
-                          </a:solidFill>
-                          <a:latin typeface="Calibri"/>
-                        </a:rPr>
-                        <a:t>1.1</a:t>
-                      </a:r>
-                    </a:p>
-                  </a:txBody>
-                  <a:tcPr marL="63500" marR="63500" marT="12700" marB="12700" anchor="ctr">
-                    <a:solidFill>
-                      <a:srgbClr val="FFFFFF"/>
-                    </a:solidFill>
-                  </a:tcPr>
-                </a:tc>
-                <a:tc>
-                  <a:txBody>
-                    <a:bodyPr/>
-                    <a:lstStyle/>
-                    <a:p>
-                      <a:pPr algn="ctr"/>
-                      <a:r>
-                        <a:rPr sz="1100" b="0" i="0">
-                          <a:solidFill>
-                            <a:srgbClr val="1F2A37"/>
-                          </a:solidFill>
-                          <a:latin typeface="Calibri"/>
-                        </a:rPr>
-                        <a:t>11.4</a:t>
-                      </a:r>
-                    </a:p>
-                  </a:txBody>
-                  <a:tcPr marL="63500" marR="63500" marT="12700" marB="12700" anchor="ctr">
-                    <a:solidFill>
-                      <a:srgbClr val="FFFFFF"/>
-                    </a:solidFill>
-                  </a:tcPr>
-                </a:tc>
-                <a:tc>
-                  <a:txBody>
-                    <a:bodyPr/>
-                    <a:lstStyle/>
-                    <a:p>
-                      <a:pPr algn="ctr"/>
-                      <a:r>
-                        <a:rPr sz="1100" b="0" i="0">
-                          <a:solidFill>
-                            <a:srgbClr val="1F2A37"/>
-                          </a:solidFill>
-                          <a:latin typeface="Calibri"/>
-                        </a:rPr>
-                        <a:t>29.2</a:t>
-                      </a:r>
-                    </a:p>
-                  </a:txBody>
-                  <a:tcPr marL="63500" marR="63500" marT="12700" marB="12700" anchor="ctr">
-                    <a:solidFill>
-                      <a:srgbClr val="FFFFFF"/>
-                    </a:solidFill>
-                  </a:tcPr>
-                </a:tc>
-              </a:tr>
-              <a:tr h="305972">
-                <a:tc>
-                  <a:txBody>
-                    <a:bodyPr/>
-                    <a:lstStyle/>
-                    <a:p>
-                      <a:pPr algn="l"/>
-                      <a:r>
-                        <a:rPr sz="1100" b="1" i="0">
-                          <a:solidFill>
-                            <a:srgbClr val="1F2A37"/>
-                          </a:solidFill>
-                          <a:latin typeface="Calibri"/>
-                        </a:rPr>
-                        <a:t>Tool calls / task</a:t>
-                      </a:r>
-                    </a:p>
-                  </a:txBody>
-                  <a:tcPr marL="63500" marR="63500" marT="12700" marB="12700" anchor="ctr">
-                    <a:solidFill>
-                      <a:srgbClr val="F4F6F8"/>
-                    </a:solidFill>
-                  </a:tcPr>
-                </a:tc>
-                <a:tc>
-                  <a:txBody>
-                    <a:bodyPr/>
-                    <a:lstStyle/>
-                    <a:p>
-                      <a:pPr algn="ctr"/>
-                      <a:r>
-                        <a:rPr sz="1100" b="0" i="0">
-                          <a:solidFill>
-                            <a:srgbClr val="1F2A37"/>
-                          </a:solidFill>
-                          <a:latin typeface="Calibri"/>
-                        </a:rPr>
-                        <a:t>1.1</a:t>
-                      </a:r>
-                    </a:p>
-                  </a:txBody>
-                  <a:tcPr marL="63500" marR="63500" marT="12700" marB="12700" anchor="ctr">
-                    <a:solidFill>
-                      <a:srgbClr val="F4F6F8"/>
-                    </a:solidFill>
-                  </a:tcPr>
-                </a:tc>
-                <a:tc>
-                  <a:txBody>
-                    <a:bodyPr/>
-                    <a:lstStyle/>
-                    <a:p>
-                      <a:pPr algn="ctr"/>
-                      <a:r>
-                        <a:rPr sz="1100" b="0" i="0">
-                          <a:solidFill>
-                            <a:srgbClr val="1F2A37"/>
-                          </a:solidFill>
-                          <a:latin typeface="Calibri"/>
-                        </a:rPr>
-                        <a:t>11.4</a:t>
-                      </a:r>
-                    </a:p>
-                  </a:txBody>
-                  <a:tcPr marL="63500" marR="63500" marT="12700" marB="12700" anchor="ctr">
-                    <a:solidFill>
-                      <a:srgbClr val="F4F6F8"/>
-                    </a:solidFill>
-                  </a:tcPr>
-                </a:tc>
-                <a:tc>
-                  <a:txBody>
-                    <a:bodyPr/>
-                    <a:lstStyle/>
-                    <a:p>
-                      <a:pPr algn="ctr"/>
-                      <a:r>
-                        <a:rPr sz="1100" b="0" i="0">
-                          <a:solidFill>
-                            <a:srgbClr val="1F2A37"/>
-                          </a:solidFill>
-                          <a:latin typeface="Calibri"/>
-                        </a:rPr>
-                        <a:t>14.6</a:t>
-                      </a:r>
-                    </a:p>
-                  </a:txBody>
-                  <a:tcPr marL="63500" marR="63500" marT="12700" marB="12700" anchor="ctr">
-                    <a:solidFill>
-                      <a:srgbClr val="F4F6F8"/>
-                    </a:solidFill>
-                  </a:tcPr>
-                </a:tc>
-              </a:tr>
-              <a:tr h="305972">
-                <a:tc>
-                  <a:txBody>
-                    <a:bodyPr/>
-                    <a:lstStyle/>
-                    <a:p>
-                      <a:pPr algn="l"/>
-                      <a:r>
-                        <a:rPr sz="1100" b="1" i="0">
-                          <a:solidFill>
-                            <a:srgbClr val="1F2A37"/>
-                          </a:solidFill>
-                          <a:latin typeface="Calibri"/>
-                        </a:rPr>
-                        <a:t>Median task latency</a:t>
-                      </a:r>
-                    </a:p>
-                  </a:txBody>
-                  <a:tcPr marL="63500" marR="63500" marT="12700" marB="12700" anchor="ctr">
-                    <a:solidFill>
-                      <a:srgbClr val="FFFFFF"/>
-                    </a:solidFill>
-                  </a:tcPr>
-                </a:tc>
-                <a:tc>
-                  <a:txBody>
-                    <a:bodyPr/>
-                    <a:lstStyle/>
-                    <a:p>
-                      <a:pPr algn="ctr"/>
-                      <a:r>
-                        <a:rPr sz="1100" b="0" i="0">
-                          <a:solidFill>
-                            <a:srgbClr val="1F2A37"/>
-                          </a:solidFill>
-                          <a:latin typeface="Calibri"/>
-                        </a:rPr>
-                        <a:t>4.9 s</a:t>
-                      </a:r>
-                    </a:p>
-                  </a:txBody>
-                  <a:tcPr marL="63500" marR="63500" marT="12700" marB="12700" anchor="ctr">
-                    <a:solidFill>
-                      <a:srgbClr val="FFFFFF"/>
-                    </a:solidFill>
-                  </a:tcPr>
-                </a:tc>
-                <a:tc>
-                  <a:txBody>
-                    <a:bodyPr/>
-                    <a:lstStyle/>
-                    <a:p>
-                      <a:pPr algn="ctr"/>
-                      <a:r>
-                        <a:rPr sz="1100" b="0" i="0">
-                          <a:solidFill>
-                            <a:srgbClr val="1F2A37"/>
-                          </a:solidFill>
-                          <a:latin typeface="Calibri"/>
-                        </a:rPr>
-                        <a:t>84 s</a:t>
-                      </a:r>
-                    </a:p>
-                  </a:txBody>
-                  <a:tcPr marL="63500" marR="63500" marT="12700" marB="12700" anchor="ctr">
-                    <a:solidFill>
-                      <a:srgbClr val="FFFFFF"/>
-                    </a:solidFill>
-                  </a:tcPr>
-                </a:tc>
-                <a:tc>
-                  <a:txBody>
-                    <a:bodyPr/>
-                    <a:lstStyle/>
-                    <a:p>
-                      <a:pPr algn="ctr"/>
-                      <a:r>
-                        <a:rPr sz="1100" b="0" i="0">
-                          <a:solidFill>
-                            <a:srgbClr val="1F2A37"/>
-                          </a:solidFill>
-                          <a:latin typeface="Calibri"/>
-                        </a:rPr>
-                        <a:t>264 s</a:t>
-                      </a:r>
-                    </a:p>
-                  </a:txBody>
-                  <a:tcPr marL="63500" marR="63500" marT="12700" marB="12700" anchor="ctr">
-                    <a:solidFill>
-                      <a:srgbClr val="FFFFFF"/>
-                    </a:solidFill>
-                  </a:tcPr>
-                </a:tc>
-              </a:tr>
-              <a:tr h="305972">
-                <a:tc>
-                  <a:txBody>
-                    <a:bodyPr/>
-                    <a:lstStyle/>
-                    <a:p>
-                      <a:pPr algn="l"/>
-                      <a:r>
-                        <a:rPr sz="1100" b="1" i="0">
-                          <a:solidFill>
-                            <a:srgbClr val="1F2A37"/>
-                          </a:solidFill>
-                          <a:latin typeface="Calibri"/>
-                        </a:rPr>
-                        <a:t>Slowest task seen</a:t>
-                      </a:r>
-                    </a:p>
-                  </a:txBody>
-                  <a:tcPr marL="63500" marR="63500" marT="12700" marB="12700" anchor="ctr">
-                    <a:solidFill>
-                      <a:srgbClr val="F4F6F8"/>
-                    </a:solidFill>
-                  </a:tcPr>
-                </a:tc>
-                <a:tc>
-                  <a:txBody>
-                    <a:bodyPr/>
-                    <a:lstStyle/>
-                    <a:p>
-                      <a:pPr algn="ctr"/>
-                      <a:r>
-                        <a:rPr sz="1100" b="0" i="0">
-                          <a:solidFill>
-                            <a:srgbClr val="1F2A37"/>
-                          </a:solidFill>
-                          <a:latin typeface="Calibri"/>
-                        </a:rPr>
-                        <a:t>39 s</a:t>
-                      </a:r>
-                    </a:p>
-                  </a:txBody>
-                  <a:tcPr marL="63500" marR="63500" marT="12700" marB="12700" anchor="ctr">
-                    <a:solidFill>
-                      <a:srgbClr val="F4F6F8"/>
-                    </a:solidFill>
-                  </a:tcPr>
-                </a:tc>
-                <a:tc>
-                  <a:txBody>
-                    <a:bodyPr/>
-                    <a:lstStyle/>
-                    <a:p>
-                      <a:pPr algn="ctr"/>
-                      <a:r>
-                        <a:rPr sz="1100" b="0" i="0">
-                          <a:solidFill>
-                            <a:srgbClr val="1F2A37"/>
-                          </a:solidFill>
-                          <a:latin typeface="Calibri"/>
-                        </a:rPr>
-                        <a:t>136 s</a:t>
-                      </a:r>
-                    </a:p>
-                  </a:txBody>
-                  <a:tcPr marL="63500" marR="63500" marT="12700" marB="12700" anchor="ctr">
-                    <a:solidFill>
-                      <a:srgbClr val="F4F6F8"/>
-                    </a:solidFill>
-                  </a:tcPr>
-                </a:tc>
-                <a:tc>
-                  <a:txBody>
-                    <a:bodyPr/>
-                    <a:lstStyle/>
-                    <a:p>
-                      <a:pPr algn="ctr"/>
-                      <a:r>
-                        <a:rPr sz="1100" b="0" i="0">
-                          <a:solidFill>
-                            <a:srgbClr val="1F2A37"/>
-                          </a:solidFill>
-                          <a:latin typeface="Calibri"/>
-                        </a:rPr>
-                        <a:t>592 s</a:t>
-                      </a:r>
-                    </a:p>
-                  </a:txBody>
-                  <a:tcPr marL="63500" marR="63500" marT="12700" marB="12700" anchor="ctr">
-                    <a:solidFill>
-                      <a:srgbClr val="F4F6F8"/>
-                    </a:solidFill>
-                  </a:tcPr>
-                </a:tc>
-              </a:tr>
-              <a:tr h="305972">
-                <a:tc>
-                  <a:txBody>
-                    <a:bodyPr/>
-                    <a:lstStyle/>
-                    <a:p>
-                      <a:pPr algn="l"/>
-                      <a:r>
-                        <a:rPr sz="1100" b="1" i="0">
-                          <a:solidFill>
-                            <a:srgbClr val="1F2A37"/>
-                          </a:solidFill>
-                          <a:latin typeface="Calibri"/>
-                        </a:rPr>
-                        <a:t>Model we use</a:t>
-                      </a:r>
-                    </a:p>
-                  </a:txBody>
-                  <a:tcPr marL="63500" marR="63500" marT="12700" marB="12700" anchor="ctr">
-                    <a:solidFill>
-                      <a:srgbClr val="FFFFFF"/>
-                    </a:solidFill>
-                  </a:tcPr>
-                </a:tc>
-                <a:tc>
-                  <a:txBody>
-                    <a:bodyPr/>
-                    <a:lstStyle/>
-                    <a:p>
-                      <a:pPr algn="ctr"/>
-                      <a:r>
-                        <a:rPr sz="1100" b="0" i="0">
-                          <a:solidFill>
-                            <a:srgbClr val="1F2A37"/>
-                          </a:solidFill>
-                          <a:latin typeface="Calibri"/>
-                        </a:rPr>
-                        <a:t>gpt-5-mini</a:t>
-                      </a:r>
-                    </a:p>
-                  </a:txBody>
-                  <a:tcPr marL="63500" marR="63500" marT="12700" marB="12700" anchor="ctr">
-                    <a:solidFill>
-                      <a:srgbClr val="FFFFFF"/>
-                    </a:solidFill>
-                  </a:tcPr>
-                </a:tc>
-                <a:tc>
-                  <a:txBody>
-                    <a:bodyPr/>
-                    <a:lstStyle/>
-                    <a:p>
-                      <a:pPr algn="ctr"/>
-                      <a:r>
-                        <a:rPr sz="1100" b="0" i="0">
-                          <a:solidFill>
-                            <a:srgbClr val="1F2A37"/>
-                          </a:solidFill>
-                          <a:latin typeface="Calibri"/>
-                        </a:rPr>
-                        <a:t>claude-sonnet-5</a:t>
-                      </a:r>
-                    </a:p>
-                  </a:txBody>
-                  <a:tcPr marL="63500" marR="63500" marT="12700" marB="12700" anchor="ctr">
-                    <a:solidFill>
-                      <a:srgbClr val="FFFFFF"/>
-                    </a:solidFill>
-                  </a:tcPr>
-                </a:tc>
-                <a:tc>
-                  <a:txBody>
-                    <a:bodyPr/>
-                    <a:lstStyle/>
-                    <a:p>
-                      <a:pPr algn="ctr"/>
-                      <a:r>
-                        <a:rPr sz="1100" b="0" i="0">
-                          <a:solidFill>
-                            <a:srgbClr val="1F2A37"/>
-                          </a:solidFill>
-                          <a:latin typeface="Calibri"/>
-                        </a:rPr>
-                        <a:t>gemini-2.5-pro</a:t>
-                      </a:r>
-                    </a:p>
-                  </a:txBody>
-                  <a:tcPr marL="63500" marR="63500" marT="12700" marB="12700" anchor="ctr">
-                    <a:solidFill>
-                      <a:srgbClr val="FFFFFF"/>
-                    </a:solidFill>
-                  </a:tcPr>
-                </a:tc>
-              </a:tr>
-              <a:tr h="305975">
-                <a:tc>
-                  <a:txBody>
-                    <a:bodyPr/>
-                    <a:lstStyle/>
-                    <a:p>
-                      <a:pPr algn="l"/>
-                      <a:r>
-                        <a:rPr sz="1100" b="1" i="0">
-                          <a:solidFill>
-                            <a:srgbClr val="1F2A37"/>
-                          </a:solidFill>
-                          <a:latin typeface="Calibri"/>
-                        </a:rPr>
-                        <a:t>Task pool</a:t>
-                      </a:r>
-                    </a:p>
-                  </a:txBody>
-                  <a:tcPr marL="63500" marR="63500" marT="12700" marB="12700" anchor="ctr">
-                    <a:solidFill>
-                      <a:srgbClr val="F4F6F8"/>
-                    </a:solidFill>
-                  </a:tcPr>
-                </a:tc>
-                <a:tc>
-                  <a:txBody>
-                    <a:bodyPr/>
-                    <a:lstStyle/>
-                    <a:p>
-                      <a:pPr algn="ctr"/>
-                      <a:r>
-                        <a:rPr sz="1100" b="0" i="0">
-                          <a:solidFill>
-                            <a:srgbClr val="1F2A37"/>
-                          </a:solidFill>
-                          <a:latin typeface="Calibri"/>
-                        </a:rPr>
-                        <a:t>8.5K (HuggingFace)</a:t>
-                      </a:r>
-                    </a:p>
-                  </a:txBody>
-                  <a:tcPr marL="63500" marR="63500" marT="12700" marB="12700" anchor="ctr">
-                    <a:solidFill>
-                      <a:srgbClr val="F4F6F8"/>
-                    </a:solidFill>
-                  </a:tcPr>
-                </a:tc>
-                <a:tc>
-                  <a:txBody>
-                    <a:bodyPr/>
-                    <a:lstStyle/>
-                    <a:p>
-                      <a:pPr algn="ctr"/>
-                      <a:r>
-                        <a:rPr sz="1100" b="0" i="0">
-                          <a:solidFill>
-                            <a:srgbClr val="1F2A37"/>
-                          </a:solidFill>
-                          <a:latin typeface="Calibri"/>
-                        </a:rPr>
-                        <a:t>114 (retail domain)</a:t>
-                      </a:r>
-                    </a:p>
-                  </a:txBody>
-                  <a:tcPr marL="63500" marR="63500" marT="12700" marB="12700" anchor="ctr">
-                    <a:solidFill>
-                      <a:srgbClr val="F4F6F8"/>
-                    </a:solidFill>
-                  </a:tcPr>
-                </a:tc>
-                <a:tc>
-                  <a:txBody>
-                    <a:bodyPr/>
-                    <a:lstStyle/>
-                    <a:p>
-                      <a:pPr algn="ctr"/>
-                      <a:r>
-                        <a:rPr sz="1100" b="0" i="0">
-                          <a:solidFill>
-                            <a:srgbClr val="1F2A37"/>
-                          </a:solidFill>
-                          <a:latin typeface="Calibri"/>
-                        </a:rPr>
-                        <a:t>grouped scenarios</a:t>
-                      </a:r>
-                    </a:p>
-                  </a:txBody>
-                  <a:tcPr marL="63500" marR="63500" marT="12700" marB="12700" anchor="ctr">
-                    <a:solidFill>
-                      <a:srgbClr val="F4F6F8"/>
-                    </a:solidFill>
-                  </a:tcPr>
-                </a:tc>
-              </a:tr>
-            </a:tbl>
-          </a:graphicData>
-        </a:graphic>
-      </p:graphicFrame>
-      <p:sp>
-        <p:nvSpPr>
-          <p:cNvPr id="4" name="Rounded Rectangle 3"/>
+              <a:t>6.  Benchmark Catalog &amp; Run Lifecycle</a:t>
+            </a:r>
+          </a:p>
+        </p:txBody>
+      </p:sp>
+      <p:sp>
+        <p:nvSpPr>
+          <p:cNvPr id="3" name="Rectangle 2"/>
           <p:cNvSpPr/>
           <p:nvPr/>
         </p:nvSpPr>
         <p:spPr>
           <a:xfrm>
-            <a:off x="411480" y="5532120"/>
-            <a:ext cx="11338560" cy="868680"/>
-          </a:xfrm>
-          <a:prstGeom prst="roundRect">
+            <a:off x="411480" y="1143000"/>
+            <a:ext cx="5257800" cy="457200"/>
+          </a:xfrm>
+          <a:prstGeom prst="rect">
             <a:avLst/>
           </a:prstGeom>
           <a:solidFill>
-            <a:srgbClr val="EEEFF1"/>
+            <a:srgbClr val="1B3A5C"/>
           </a:solidFill>
           <a:ln w="12700">
             <a:solidFill>
-              <a:srgbClr val="6B6B6B"/>
+              <a:srgbClr val="1B3A5C"/>
             </a:solidFill>
           </a:ln>
           <a:effectLst/>
@@ -26277,25 +26585,900 @@
           </a:fontRef>
         </p:style>
         <p:txBody>
-          <a:bodyPr rtlCol="0" anchor="ctr" wrap="square" tIns="25400" bIns="25400" lIns="228600" rIns="228600"/>
+          <a:bodyPr rtlCol="0" anchor="ctr" wrap="square" tIns="25400" bIns="25400"/>
           <a:lstStyle/>
           <a:p>
             <a:pPr algn="ctr"/>
             <a:r>
+              <a:rPr sz="1500" b="1" i="0">
+                <a:solidFill>
+                  <a:srgbClr val="FFFFFF"/>
+                </a:solidFill>
+                <a:latin typeface="Calibri"/>
+              </a:rPr>
+              <a:t>Catalog (static registry)</a:t>
+            </a:r>
+          </a:p>
+        </p:txBody>
+      </p:sp>
+      <p:sp>
+        <p:nvSpPr>
+          <p:cNvPr id="4" name="Rounded Rectangle 3"/>
+          <p:cNvSpPr/>
+          <p:nvPr/>
+        </p:nvSpPr>
+        <p:spPr>
+          <a:xfrm>
+            <a:off x="411480" y="1783080"/>
+            <a:ext cx="5257800" cy="914400"/>
+          </a:xfrm>
+          <a:prstGeom prst="roundRect">
+            <a:avLst/>
+          </a:prstGeom>
+          <a:solidFill>
+            <a:srgbClr val="E4F0F0"/>
+          </a:solidFill>
+          <a:ln w="12700">
+            <a:solidFill>
+              <a:srgbClr val="3D6E70"/>
+            </a:solidFill>
+          </a:ln>
+          <a:effectLst/>
+        </p:spPr>
+        <p:style>
+          <a:lnRef idx="1">
+            <a:schemeClr val="accent1"/>
+          </a:lnRef>
+          <a:fillRef idx="3">
+            <a:schemeClr val="accent1"/>
+          </a:fillRef>
+          <a:effectRef idx="2">
+            <a:schemeClr val="accent1"/>
+          </a:effectRef>
+          <a:fontRef idx="minor">
+            <a:schemeClr val="lt1"/>
+          </a:fontRef>
+        </p:style>
+        <p:txBody>
+          <a:bodyPr rtlCol="0" anchor="ctr" wrap="square" tIns="25400" bIns="25400" lIns="127000"/>
+          <a:lstStyle/>
+          <a:p>
+            <a:pPr algn="l"/>
+            <a:r>
+              <a:rPr sz="1500" b="1" i="0">
+                <a:solidFill>
+                  <a:srgbClr val="3D6E70"/>
+                </a:solidFill>
+                <a:latin typeface="Calibri"/>
+              </a:rPr>
+              <a:t>gsm8k</a:t>
+            </a:r>
+          </a:p>
+          <a:p>
+            <a:pPr algn="l"/>
+            <a:r>
+              <a:rPr sz="1150" b="0" i="0">
+                <a:solidFill>
+                  <a:srgbClr val="1F2A37"/>
+                </a:solidFill>
+                <a:latin typeface="Calibri"/>
+              </a:rPr>
+              <a:t>single-turn · needs hf-secret + openai-secret</a:t>
+            </a:r>
+          </a:p>
+        </p:txBody>
+      </p:sp>
+      <p:sp>
+        <p:nvSpPr>
+          <p:cNvPr id="5" name="Rounded Rectangle 4"/>
+          <p:cNvSpPr/>
+          <p:nvPr/>
+        </p:nvSpPr>
+        <p:spPr>
+          <a:xfrm>
+            <a:off x="411480" y="2834640"/>
+            <a:ext cx="5257800" cy="914400"/>
+          </a:xfrm>
+          <a:prstGeom prst="roundRect">
+            <a:avLst/>
+          </a:prstGeom>
+          <a:solidFill>
+            <a:srgbClr val="F1E8F6"/>
+          </a:solidFill>
+          <a:ln w="12700">
+            <a:solidFill>
+              <a:srgbClr val="8E44AD"/>
+            </a:solidFill>
+          </a:ln>
+          <a:effectLst/>
+        </p:spPr>
+        <p:style>
+          <a:lnRef idx="1">
+            <a:schemeClr val="accent1"/>
+          </a:lnRef>
+          <a:fillRef idx="3">
+            <a:schemeClr val="accent1"/>
+          </a:fillRef>
+          <a:effectRef idx="2">
+            <a:schemeClr val="accent1"/>
+          </a:effectRef>
+          <a:fontRef idx="minor">
+            <a:schemeClr val="lt1"/>
+          </a:fontRef>
+        </p:style>
+        <p:txBody>
+          <a:bodyPr rtlCol="0" anchor="ctr" wrap="square" tIns="25400" bIns="25400" lIns="127000"/>
+          <a:lstStyle/>
+          <a:p>
+            <a:pPr algn="l"/>
+            <a:r>
+              <a:rPr sz="1500" b="1" i="0">
+                <a:solidFill>
+                  <a:srgbClr val="8E44AD"/>
+                </a:solidFill>
+                <a:latin typeface="Calibri"/>
+              </a:rPr>
+              <a:t>tau2</a:t>
+            </a:r>
+          </a:p>
+          <a:p>
+            <a:pPr algn="l"/>
+            <a:r>
+              <a:rPr sz="1150" b="0" i="0">
+                <a:solidFill>
+                  <a:srgbClr val="1F2A37"/>
+                </a:solidFill>
+                <a:latin typeface="Calibri"/>
+              </a:rPr>
+              <a:t>multi-turn · user-simulator LLM runs server-side in the MCP pod · raise timeout</a:t>
+            </a:r>
+          </a:p>
+        </p:txBody>
+      </p:sp>
+      <p:sp>
+        <p:nvSpPr>
+          <p:cNvPr id="6" name="Rounded Rectangle 5"/>
+          <p:cNvSpPr/>
+          <p:nvPr/>
+        </p:nvSpPr>
+        <p:spPr>
+          <a:xfrm>
+            <a:off x="411480" y="3886200"/>
+            <a:ext cx="5257800" cy="914400"/>
+          </a:xfrm>
+          <a:prstGeom prst="roundRect">
+            <a:avLst/>
+          </a:prstGeom>
+          <a:solidFill>
+            <a:srgbClr val="FBEEE4"/>
+          </a:solidFill>
+          <a:ln w="12700">
+            <a:solidFill>
+              <a:srgbClr val="B55A2E"/>
+            </a:solidFill>
+          </a:ln>
+          <a:effectLst/>
+        </p:spPr>
+        <p:style>
+          <a:lnRef idx="1">
+            <a:schemeClr val="accent1"/>
+          </a:lnRef>
+          <a:fillRef idx="3">
+            <a:schemeClr val="accent1"/>
+          </a:fillRef>
+          <a:effectRef idx="2">
+            <a:schemeClr val="accent1"/>
+          </a:effectRef>
+          <a:fontRef idx="minor">
+            <a:schemeClr val="lt1"/>
+          </a:fontRef>
+        </p:style>
+        <p:txBody>
+          <a:bodyPr rtlCol="0" anchor="ctr" wrap="square" tIns="25400" bIns="25400" lIns="127000"/>
+          <a:lstStyle/>
+          <a:p>
+            <a:pPr algn="l"/>
+            <a:r>
+              <a:rPr sz="1500" b="1" i="0">
+                <a:solidFill>
+                  <a:srgbClr val="B55A2E"/>
+                </a:solidFill>
+                <a:latin typeface="Calibri"/>
+              </a:rPr>
+              <a:t>appworld</a:t>
+            </a:r>
+          </a:p>
+          <a:p>
+            <a:pPr algn="l"/>
+            <a:r>
+              <a:rPr sz="1150" b="0" i="0">
+                <a:solidFill>
+                  <a:srgbClr val="1F2A37"/>
+                </a:solidFill>
+                <a:latin typeface="Calibri"/>
+              </a:rPr>
+              <a:t>long-horizon across simulated apps · runs e2e · raise task_timeout_seconds</a:t>
+            </a:r>
+          </a:p>
+        </p:txBody>
+      </p:sp>
+      <p:sp>
+        <p:nvSpPr>
+          <p:cNvPr id="7" name="Rectangle 6"/>
+          <p:cNvSpPr/>
+          <p:nvPr/>
+        </p:nvSpPr>
+        <p:spPr>
+          <a:xfrm>
+            <a:off x="5989320" y="1143000"/>
+            <a:ext cx="5760720" cy="457200"/>
+          </a:xfrm>
+          <a:prstGeom prst="rect">
+            <a:avLst/>
+          </a:prstGeom>
+          <a:solidFill>
+            <a:srgbClr val="1B3A5C"/>
+          </a:solidFill>
+          <a:ln w="12700">
+            <a:solidFill>
+              <a:srgbClr val="1B3A5C"/>
+            </a:solidFill>
+          </a:ln>
+          <a:effectLst/>
+        </p:spPr>
+        <p:style>
+          <a:lnRef idx="1">
+            <a:schemeClr val="accent1"/>
+          </a:lnRef>
+          <a:fillRef idx="3">
+            <a:schemeClr val="accent1"/>
+          </a:fillRef>
+          <a:effectRef idx="2">
+            <a:schemeClr val="accent1"/>
+          </a:effectRef>
+          <a:fontRef idx="minor">
+            <a:schemeClr val="lt1"/>
+          </a:fontRef>
+        </p:style>
+        <p:txBody>
+          <a:bodyPr rtlCol="0" anchor="ctr" wrap="square" tIns="25400" bIns="25400"/>
+          <a:lstStyle/>
+          <a:p>
+            <a:pPr algn="ctr"/>
+            <a:r>
+              <a:rPr sz="1500" b="1" i="0">
+                <a:solidFill>
+                  <a:srgbClr val="FFFFFF"/>
+                </a:solidFill>
+                <a:latin typeface="Calibri"/>
+              </a:rPr>
+              <a:t>Lifecycle (REST)</a:t>
+            </a:r>
+          </a:p>
+        </p:txBody>
+      </p:sp>
+      <p:sp>
+        <p:nvSpPr>
+          <p:cNvPr id="8" name="Rounded Rectangle 7"/>
+          <p:cNvSpPr/>
+          <p:nvPr/>
+        </p:nvSpPr>
+        <p:spPr>
+          <a:xfrm>
+            <a:off x="6309360" y="1783080"/>
+            <a:ext cx="5440680" cy="603504"/>
+          </a:xfrm>
+          <a:prstGeom prst="roundRect">
+            <a:avLst/>
+          </a:prstGeom>
+          <a:solidFill>
+            <a:srgbClr val="E8F1FB"/>
+          </a:solidFill>
+          <a:ln w="12700">
+            <a:solidFill>
+              <a:srgbClr val="2E6FB5"/>
+            </a:solidFill>
+          </a:ln>
+          <a:effectLst/>
+        </p:spPr>
+        <p:style>
+          <a:lnRef idx="1">
+            <a:schemeClr val="accent1"/>
+          </a:lnRef>
+          <a:fillRef idx="3">
+            <a:schemeClr val="accent1"/>
+          </a:fillRef>
+          <a:effectRef idx="2">
+            <a:schemeClr val="accent1"/>
+          </a:effectRef>
+          <a:fontRef idx="minor">
+            <a:schemeClr val="lt1"/>
+          </a:fontRef>
+        </p:style>
+        <p:txBody>
+          <a:bodyPr rtlCol="0" anchor="ctr" wrap="square" tIns="25400" bIns="25400" lIns="101600"/>
+          <a:lstStyle/>
+          <a:p>
+            <a:pPr algn="l"/>
+            <a:r>
               <a:rPr sz="1250" b="1" i="0">
                 <a:solidFill>
                   <a:srgbClr val="1F2A37"/>
                 </a:solidFill>
                 <a:latin typeface="Calibri"/>
               </a:rPr>
-              <a:t>The scale gap is the headline: a tau2 task costs ~267x the input tokens of a gsm8k task, an appworld task ~792x. A 50-task gsm8k run is a minute; a 20-task appworld run is 30-45 minutes and millions of tokens. Budget by benchmark, not by task count.</a:t>
-            </a:r>
-          </a:p>
-        </p:txBody>
-      </p:sp>
-      <p:sp>
-        <p:nvSpPr>
-          <p:cNvPr id="5" name="TextBox 4"/>
+              <a:t>POST /benchmarks/{n}/deploy</a:t>
+            </a:r>
+          </a:p>
+          <a:p>
+            <a:pPr algn="l"/>
+            <a:r>
+              <a:rPr sz="1050" b="0" i="0">
+                <a:solidFill>
+                  <a:srgbClr val="3A4654"/>
+                </a:solidFill>
+                <a:latin typeface="Calibri"/>
+              </a:rPr>
+              <a:t>create MCP tool + A2A agent → 201</a:t>
+            </a:r>
+          </a:p>
+        </p:txBody>
+      </p:sp>
+      <p:cxnSp>
+        <p:nvCxnSpPr>
+          <p:cNvPr id="9" name="Connector 8"/>
+          <p:cNvCxnSpPr/>
+          <p:nvPr/>
+        </p:nvCxnSpPr>
+        <p:spPr>
+          <a:xfrm>
+            <a:off x="6172200" y="2084832"/>
+            <a:ext cx="137160" cy="640080"/>
+          </a:xfrm>
+          <a:prstGeom prst="line">
+            <a:avLst/>
+          </a:prstGeom>
+          <a:ln w="12700">
+            <a:solidFill>
+              <a:srgbClr val="C7CED6"/>
+            </a:solidFill>
+          </a:ln>
+          <a:effectLst/>
+        </p:spPr>
+        <p:style>
+          <a:lnRef idx="2">
+            <a:schemeClr val="accent1"/>
+          </a:lnRef>
+          <a:fillRef idx="0">
+            <a:schemeClr val="accent1"/>
+          </a:fillRef>
+          <a:effectRef idx="1">
+            <a:schemeClr val="accent1"/>
+          </a:effectRef>
+          <a:fontRef idx="minor">
+            <a:schemeClr val="tx1"/>
+          </a:fontRef>
+        </p:style>
+      </p:cxnSp>
+      <p:sp>
+        <p:nvSpPr>
+          <p:cNvPr id="10" name="Rounded Rectangle 9"/>
+          <p:cNvSpPr/>
+          <p:nvPr/>
+        </p:nvSpPr>
+        <p:spPr>
+          <a:xfrm>
+            <a:off x="6309360" y="2468880"/>
+            <a:ext cx="5440680" cy="603504"/>
+          </a:xfrm>
+          <a:prstGeom prst="roundRect">
+            <a:avLst/>
+          </a:prstGeom>
+          <a:solidFill>
+            <a:srgbClr val="E8F1FB"/>
+          </a:solidFill>
+          <a:ln w="12700">
+            <a:solidFill>
+              <a:srgbClr val="2E6FB5"/>
+            </a:solidFill>
+          </a:ln>
+          <a:effectLst/>
+        </p:spPr>
+        <p:style>
+          <a:lnRef idx="1">
+            <a:schemeClr val="accent1"/>
+          </a:lnRef>
+          <a:fillRef idx="3">
+            <a:schemeClr val="accent1"/>
+          </a:fillRef>
+          <a:effectRef idx="2">
+            <a:schemeClr val="accent1"/>
+          </a:effectRef>
+          <a:fontRef idx="minor">
+            <a:schemeClr val="lt1"/>
+          </a:fontRef>
+        </p:style>
+        <p:txBody>
+          <a:bodyPr rtlCol="0" anchor="ctr" wrap="square" tIns="25400" bIns="25400" lIns="101600"/>
+          <a:lstStyle/>
+          <a:p>
+            <a:pPr algn="l"/>
+            <a:r>
+              <a:rPr sz="1250" b="1" i="0">
+                <a:solidFill>
+                  <a:srgbClr val="1F2A37"/>
+                </a:solidFill>
+                <a:latin typeface="Calibri"/>
+              </a:rPr>
+              <a:t>GET /benchmarks/{n}/status</a:t>
+            </a:r>
+          </a:p>
+          <a:p>
+            <a:pPr algn="l"/>
+            <a:r>
+              <a:rPr sz="1050" b="0" i="0">
+                <a:solidFill>
+                  <a:srgbClr val="3A4654"/>
+                </a:solidFill>
+                <a:latin typeface="Calibri"/>
+              </a:rPr>
+              <a:t>poll until tool_ready &amp; agent_ready</a:t>
+            </a:r>
+          </a:p>
+        </p:txBody>
+      </p:sp>
+      <p:cxnSp>
+        <p:nvCxnSpPr>
+          <p:cNvPr id="11" name="Connector 10"/>
+          <p:cNvCxnSpPr/>
+          <p:nvPr/>
+        </p:nvCxnSpPr>
+        <p:spPr>
+          <a:xfrm>
+            <a:off x="6172200" y="2770632"/>
+            <a:ext cx="137160" cy="640080"/>
+          </a:xfrm>
+          <a:prstGeom prst="line">
+            <a:avLst/>
+          </a:prstGeom>
+          <a:ln w="12700">
+            <a:solidFill>
+              <a:srgbClr val="C7CED6"/>
+            </a:solidFill>
+          </a:ln>
+          <a:effectLst/>
+        </p:spPr>
+        <p:style>
+          <a:lnRef idx="2">
+            <a:schemeClr val="accent1"/>
+          </a:lnRef>
+          <a:fillRef idx="0">
+            <a:schemeClr val="accent1"/>
+          </a:fillRef>
+          <a:effectRef idx="1">
+            <a:schemeClr val="accent1"/>
+          </a:effectRef>
+          <a:fontRef idx="minor">
+            <a:schemeClr val="tx1"/>
+          </a:fontRef>
+        </p:style>
+      </p:cxnSp>
+      <p:sp>
+        <p:nvSpPr>
+          <p:cNvPr id="12" name="Rounded Rectangle 11"/>
+          <p:cNvSpPr/>
+          <p:nvPr/>
+        </p:nvSpPr>
+        <p:spPr>
+          <a:xfrm>
+            <a:off x="6309360" y="3154680"/>
+            <a:ext cx="5440680" cy="603504"/>
+          </a:xfrm>
+          <a:prstGeom prst="roundRect">
+            <a:avLst/>
+          </a:prstGeom>
+          <a:solidFill>
+            <a:srgbClr val="E8F1FB"/>
+          </a:solidFill>
+          <a:ln w="12700">
+            <a:solidFill>
+              <a:srgbClr val="2E6FB5"/>
+            </a:solidFill>
+          </a:ln>
+          <a:effectLst/>
+        </p:spPr>
+        <p:style>
+          <a:lnRef idx="1">
+            <a:schemeClr val="accent1"/>
+          </a:lnRef>
+          <a:fillRef idx="3">
+            <a:schemeClr val="accent1"/>
+          </a:fillRef>
+          <a:effectRef idx="2">
+            <a:schemeClr val="accent1"/>
+          </a:effectRef>
+          <a:fontRef idx="minor">
+            <a:schemeClr val="lt1"/>
+          </a:fontRef>
+        </p:style>
+        <p:txBody>
+          <a:bodyPr rtlCol="0" anchor="ctr" wrap="square" tIns="25400" bIns="25400" lIns="101600"/>
+          <a:lstStyle/>
+          <a:p>
+            <a:pPr algn="l"/>
+            <a:r>
+              <a:rPr sz="1250" b="1" i="0">
+                <a:solidFill>
+                  <a:srgbClr val="1F2A37"/>
+                </a:solidFill>
+                <a:latin typeface="Calibri"/>
+              </a:rPr>
+              <a:t>POST /benchmarks/{n}/runs</a:t>
+            </a:r>
+          </a:p>
+          <a:p>
+            <a:pPr algn="l"/>
+            <a:r>
+              <a:rPr sz="1050" b="0" i="0">
+                <a:solidFill>
+                  <a:srgbClr val="3A4654"/>
+                </a:solidFill>
+                <a:latin typeface="Calibri"/>
+              </a:rPr>
+              <a:t>precheck → 202 run_id  (409 not deployed · 424 secret missing)</a:t>
+            </a:r>
+          </a:p>
+        </p:txBody>
+      </p:sp>
+      <p:cxnSp>
+        <p:nvCxnSpPr>
+          <p:cNvPr id="13" name="Connector 12"/>
+          <p:cNvCxnSpPr/>
+          <p:nvPr/>
+        </p:nvCxnSpPr>
+        <p:spPr>
+          <a:xfrm>
+            <a:off x="6172200" y="3456432"/>
+            <a:ext cx="137160" cy="640080"/>
+          </a:xfrm>
+          <a:prstGeom prst="line">
+            <a:avLst/>
+          </a:prstGeom>
+          <a:ln w="12700">
+            <a:solidFill>
+              <a:srgbClr val="C7CED6"/>
+            </a:solidFill>
+          </a:ln>
+          <a:effectLst/>
+        </p:spPr>
+        <p:style>
+          <a:lnRef idx="2">
+            <a:schemeClr val="accent1"/>
+          </a:lnRef>
+          <a:fillRef idx="0">
+            <a:schemeClr val="accent1"/>
+          </a:fillRef>
+          <a:effectRef idx="1">
+            <a:schemeClr val="accent1"/>
+          </a:effectRef>
+          <a:fontRef idx="minor">
+            <a:schemeClr val="tx1"/>
+          </a:fontRef>
+        </p:style>
+      </p:cxnSp>
+      <p:sp>
+        <p:nvSpPr>
+          <p:cNvPr id="14" name="Rounded Rectangle 13"/>
+          <p:cNvSpPr/>
+          <p:nvPr/>
+        </p:nvSpPr>
+        <p:spPr>
+          <a:xfrm>
+            <a:off x="6309360" y="3840480"/>
+            <a:ext cx="5440680" cy="603504"/>
+          </a:xfrm>
+          <a:prstGeom prst="roundRect">
+            <a:avLst/>
+          </a:prstGeom>
+          <a:solidFill>
+            <a:srgbClr val="E8F1FB"/>
+          </a:solidFill>
+          <a:ln w="12700">
+            <a:solidFill>
+              <a:srgbClr val="2E6FB5"/>
+            </a:solidFill>
+          </a:ln>
+          <a:effectLst/>
+        </p:spPr>
+        <p:style>
+          <a:lnRef idx="1">
+            <a:schemeClr val="accent1"/>
+          </a:lnRef>
+          <a:fillRef idx="3">
+            <a:schemeClr val="accent1"/>
+          </a:fillRef>
+          <a:effectRef idx="2">
+            <a:schemeClr val="accent1"/>
+          </a:effectRef>
+          <a:fontRef idx="minor">
+            <a:schemeClr val="lt1"/>
+          </a:fontRef>
+        </p:style>
+        <p:txBody>
+          <a:bodyPr rtlCol="0" anchor="ctr" wrap="square" tIns="25400" bIns="25400" lIns="101600"/>
+          <a:lstStyle/>
+          <a:p>
+            <a:pPr algn="l"/>
+            <a:r>
+              <a:rPr sz="1250" b="1" i="0">
+                <a:solidFill>
+                  <a:srgbClr val="1F2A37"/>
+                </a:solidFill>
+                <a:latin typeface="Calibri"/>
+              </a:rPr>
+              <a:t>GET …/runs/{id}</a:t>
+            </a:r>
+          </a:p>
+          <a:p>
+            <a:pPr algn="l"/>
+            <a:r>
+              <a:rPr sz="1050" b="0" i="0">
+                <a:solidFill>
+                  <a:srgbClr val="3A4654"/>
+                </a:solidFill>
+                <a:latin typeface="Calibri"/>
+              </a:rPr>
+              <a:t>poll pending → running → succeeded / failed</a:t>
+            </a:r>
+          </a:p>
+        </p:txBody>
+      </p:sp>
+      <p:cxnSp>
+        <p:nvCxnSpPr>
+          <p:cNvPr id="15" name="Connector 14"/>
+          <p:cNvCxnSpPr/>
+          <p:nvPr/>
+        </p:nvCxnSpPr>
+        <p:spPr>
+          <a:xfrm>
+            <a:off x="6172200" y="4142232"/>
+            <a:ext cx="137160" cy="640080"/>
+          </a:xfrm>
+          <a:prstGeom prst="line">
+            <a:avLst/>
+          </a:prstGeom>
+          <a:ln w="12700">
+            <a:solidFill>
+              <a:srgbClr val="C7CED6"/>
+            </a:solidFill>
+          </a:ln>
+          <a:effectLst/>
+        </p:spPr>
+        <p:style>
+          <a:lnRef idx="2">
+            <a:schemeClr val="accent1"/>
+          </a:lnRef>
+          <a:fillRef idx="0">
+            <a:schemeClr val="accent1"/>
+          </a:fillRef>
+          <a:effectRef idx="1">
+            <a:schemeClr val="accent1"/>
+          </a:effectRef>
+          <a:fontRef idx="minor">
+            <a:schemeClr val="tx1"/>
+          </a:fontRef>
+        </p:style>
+      </p:cxnSp>
+      <p:sp>
+        <p:nvSpPr>
+          <p:cNvPr id="16" name="Rounded Rectangle 15"/>
+          <p:cNvSpPr/>
+          <p:nvPr/>
+        </p:nvSpPr>
+        <p:spPr>
+          <a:xfrm>
+            <a:off x="6309360" y="4526280"/>
+            <a:ext cx="5440680" cy="603504"/>
+          </a:xfrm>
+          <a:prstGeom prst="roundRect">
+            <a:avLst/>
+          </a:prstGeom>
+          <a:solidFill>
+            <a:srgbClr val="E8F1FB"/>
+          </a:solidFill>
+          <a:ln w="12700">
+            <a:solidFill>
+              <a:srgbClr val="2E6FB5"/>
+            </a:solidFill>
+          </a:ln>
+          <a:effectLst/>
+        </p:spPr>
+        <p:style>
+          <a:lnRef idx="1">
+            <a:schemeClr val="accent1"/>
+          </a:lnRef>
+          <a:fillRef idx="3">
+            <a:schemeClr val="accent1"/>
+          </a:fillRef>
+          <a:effectRef idx="2">
+            <a:schemeClr val="accent1"/>
+          </a:effectRef>
+          <a:fontRef idx="minor">
+            <a:schemeClr val="lt1"/>
+          </a:fontRef>
+        </p:style>
+        <p:txBody>
+          <a:bodyPr rtlCol="0" anchor="ctr" wrap="square" tIns="25400" bIns="25400" lIns="101600"/>
+          <a:lstStyle/>
+          <a:p>
+            <a:pPr algn="l"/>
+            <a:r>
+              <a:rPr sz="1250" b="1" i="0">
+                <a:solidFill>
+                  <a:srgbClr val="1F2A37"/>
+                </a:solidFill>
+                <a:latin typeface="Calibri"/>
+              </a:rPr>
+              <a:t>GET …/runs/{id}/report</a:t>
+            </a:r>
+          </a:p>
+          <a:p>
+            <a:pPr algn="l"/>
+            <a:r>
+              <a:rPr sz="1050" b="0" i="0">
+                <a:solidFill>
+                  <a:srgbClr val="3A4654"/>
+                </a:solidFill>
+                <a:latin typeface="Calibri"/>
+              </a:rPr>
+              <a:t>MLflow records + artifacts  (409 if MLflow unset)</a:t>
+            </a:r>
+          </a:p>
+        </p:txBody>
+      </p:sp>
+      <p:cxnSp>
+        <p:nvCxnSpPr>
+          <p:cNvPr id="17" name="Connector 16"/>
+          <p:cNvCxnSpPr/>
+          <p:nvPr/>
+        </p:nvCxnSpPr>
+        <p:spPr>
+          <a:xfrm>
+            <a:off x="6172200" y="4828032"/>
+            <a:ext cx="137160" cy="640080"/>
+          </a:xfrm>
+          <a:prstGeom prst="line">
+            <a:avLst/>
+          </a:prstGeom>
+          <a:ln w="12700">
+            <a:solidFill>
+              <a:srgbClr val="C7CED6"/>
+            </a:solidFill>
+          </a:ln>
+          <a:effectLst/>
+        </p:spPr>
+        <p:style>
+          <a:lnRef idx="2">
+            <a:schemeClr val="accent1"/>
+          </a:lnRef>
+          <a:fillRef idx="0">
+            <a:schemeClr val="accent1"/>
+          </a:fillRef>
+          <a:effectRef idx="1">
+            <a:schemeClr val="accent1"/>
+          </a:effectRef>
+          <a:fontRef idx="minor">
+            <a:schemeClr val="tx1"/>
+          </a:fontRef>
+        </p:style>
+      </p:cxnSp>
+      <p:sp>
+        <p:nvSpPr>
+          <p:cNvPr id="18" name="Rounded Rectangle 17"/>
+          <p:cNvSpPr/>
+          <p:nvPr/>
+        </p:nvSpPr>
+        <p:spPr>
+          <a:xfrm>
+            <a:off x="6309360" y="5212080"/>
+            <a:ext cx="5440680" cy="603504"/>
+          </a:xfrm>
+          <a:prstGeom prst="roundRect">
+            <a:avLst/>
+          </a:prstGeom>
+          <a:solidFill>
+            <a:srgbClr val="E8F1FB"/>
+          </a:solidFill>
+          <a:ln w="12700">
+            <a:solidFill>
+              <a:srgbClr val="2E6FB5"/>
+            </a:solidFill>
+          </a:ln>
+          <a:effectLst/>
+        </p:spPr>
+        <p:style>
+          <a:lnRef idx="1">
+            <a:schemeClr val="accent1"/>
+          </a:lnRef>
+          <a:fillRef idx="3">
+            <a:schemeClr val="accent1"/>
+          </a:fillRef>
+          <a:effectRef idx="2">
+            <a:schemeClr val="accent1"/>
+          </a:effectRef>
+          <a:fontRef idx="minor">
+            <a:schemeClr val="lt1"/>
+          </a:fontRef>
+        </p:style>
+        <p:txBody>
+          <a:bodyPr rtlCol="0" anchor="ctr" wrap="square" tIns="25400" bIns="25400" lIns="101600"/>
+          <a:lstStyle/>
+          <a:p>
+            <a:pPr algn="l"/>
+            <a:r>
+              <a:rPr sz="1250" b="1" i="0">
+                <a:solidFill>
+                  <a:srgbClr val="1F2A37"/>
+                </a:solidFill>
+                <a:latin typeface="Calibri"/>
+              </a:rPr>
+              <a:t>download from S3</a:t>
+            </a:r>
+          </a:p>
+          <a:p>
+            <a:pPr algn="l"/>
+            <a:r>
+              <a:rPr sz="1050" b="0" i="0">
+                <a:solidFill>
+                  <a:srgbClr val="3A4654"/>
+                </a:solidFill>
+                <a:latin typeface="Calibri"/>
+              </a:rPr>
+              <a:t>run.json · report.* · token_report.* · span_report.* · manifest.json</a:t>
+            </a:r>
+          </a:p>
+        </p:txBody>
+      </p:sp>
+      <p:cxnSp>
+        <p:nvCxnSpPr>
+          <p:cNvPr id="19" name="Connector 18"/>
+          <p:cNvCxnSpPr/>
+          <p:nvPr/>
+        </p:nvCxnSpPr>
+        <p:spPr>
+          <a:xfrm>
+            <a:off x="6144768" y="1920240"/>
+            <a:ext cx="0" cy="3931920"/>
+          </a:xfrm>
+          <a:prstGeom prst="line">
+            <a:avLst/>
+          </a:prstGeom>
+          <a:ln w="19050">
+            <a:solidFill>
+              <a:srgbClr val="E87A1E"/>
+            </a:solidFill>
+            <a:tailEnd type="triangle" w="med" len="med"/>
+          </a:ln>
+          <a:effectLst/>
+        </p:spPr>
+        <p:style>
+          <a:lnRef idx="2">
+            <a:schemeClr val="accent1"/>
+          </a:lnRef>
+          <a:fillRef idx="0">
+            <a:schemeClr val="accent1"/>
+          </a:fillRef>
+          <a:effectRef idx="1">
+            <a:schemeClr val="accent1"/>
+          </a:effectRef>
+          <a:fontRef idx="minor">
+            <a:schemeClr val="tx1"/>
+          </a:fontRef>
+        </p:style>
+      </p:cxnSp>
+      <p:sp>
+        <p:nvSpPr>
+          <p:cNvPr id="20" name="TextBox 19"/>
           <p:cNvSpPr txBox="1"/>
           <p:nvPr/>
         </p:nvSpPr>

--- a/docs/AutoBench.pptx
+++ b/docs/AutoBench.pptx
@@ -3359,7 +3359,7 @@
                 </a:solidFill>
                 <a:latin typeface="Calibri"/>
               </a:rPr>
-              <a:t>Last modified 2026-09-16 16:06 EDT</a:t>
+              <a:t>Last modified 2026-09-16 16:41 EDT</a:t>
             </a:r>
           </a:p>
         </p:txBody>
@@ -22895,7 +22895,7 @@
         </p:nvCxnSpPr>
         <p:spPr>
           <a:xfrm>
-            <a:off x="2414016" y="3840480"/>
+            <a:off x="1371600" y="3840480"/>
             <a:ext cx="0" cy="566928"/>
           </a:xfrm>
           <a:prstGeom prst="line">
@@ -22931,8 +22931,8 @@
         </p:nvCxnSpPr>
         <p:spPr>
           <a:xfrm>
-            <a:off x="2414016" y="4407408"/>
-            <a:ext cx="5907024" cy="0"/>
+            <a:off x="1371600" y="4407408"/>
+            <a:ext cx="6949440" cy="0"/>
           </a:xfrm>
           <a:prstGeom prst="line">
             <a:avLst/>

--- a/docs/AutoBench.pptx
+++ b/docs/AutoBench.pptx
@@ -22,6 +22,7 @@
     <p:sldId id="270" r:id="rId21"/>
     <p:sldId id="271" r:id="rId22"/>
     <p:sldId id="272" r:id="rId23"/>
+    <p:sldId id="273" r:id="rId24"/>
   </p:sldIdLst>
   <p:sldSz cx="12192000" cy="6858000" type="screen4x3"/>
   <p:notesSz cx="6858000" cy="9144000"/>
@@ -3359,7 +3360,7 @@
                 </a:solidFill>
                 <a:latin typeface="Calibri"/>
               </a:rPr>
-              <a:t>Last modified 2026-09-16 16:41 EDT</a:t>
+              <a:t>Last modified 2026-09-17 00:45 EDT</a:t>
             </a:r>
           </a:p>
         </p:txBody>
@@ -3412,6 +3413,720 @@
 </file>
 
 <file path=ppt/slides/slide10.xml><?xml version="1.0" encoding="utf-8"?>
+<p:sld xmlns:a="http://schemas.openxmlformats.org/drawingml/2006/main" xmlns:p="http://schemas.openxmlformats.org/presentationml/2006/main" xmlns:r="http://schemas.openxmlformats.org/officeDocument/2006/relationships">
+  <p:cSld name="6.2 What Each Benchmark Bakes In — and What It Needs From Us">
+    <p:spTree>
+      <p:nvGrpSpPr>
+        <p:cNvPr id="1" name=""/>
+        <p:cNvGrpSpPr/>
+        <p:nvPr/>
+      </p:nvGrpSpPr>
+      <p:grpSpPr/>
+      <p:sp>
+        <p:nvSpPr>
+          <p:cNvPr id="2" name="Rectangle 1"/>
+          <p:cNvSpPr/>
+          <p:nvPr/>
+        </p:nvSpPr>
+        <p:spPr>
+          <a:xfrm>
+            <a:off x="0" y="0"/>
+            <a:ext cx="12192000" cy="950000"/>
+          </a:xfrm>
+          <a:prstGeom prst="rect">
+            <a:avLst/>
+          </a:prstGeom>
+          <a:solidFill>
+            <a:srgbClr val="1B3A5C"/>
+          </a:solidFill>
+          <a:ln>
+            <a:noFill/>
+          </a:ln>
+          <a:effectLst/>
+        </p:spPr>
+        <p:style>
+          <a:lnRef idx="1">
+            <a:schemeClr val="accent1"/>
+          </a:lnRef>
+          <a:fillRef idx="3">
+            <a:schemeClr val="accent1"/>
+          </a:fillRef>
+          <a:effectRef idx="2">
+            <a:schemeClr val="accent1"/>
+          </a:effectRef>
+          <a:fontRef idx="minor">
+            <a:schemeClr val="lt1"/>
+          </a:fontRef>
+        </p:style>
+        <p:txBody>
+          <a:bodyPr rtlCol="0" anchor="ctr" lIns="355600"/>
+          <a:lstStyle/>
+          <a:p>
+            <a:pPr algn="ctr"/>
+            <a:r>
+              <a:rPr sz="2600" b="1" i="0">
+                <a:solidFill>
+                  <a:srgbClr val="FFFFFF"/>
+                </a:solidFill>
+                <a:latin typeface="Calibri"/>
+              </a:rPr>
+              <a:t>6.2  What Each Benchmark Bakes In — and What It Needs From Us</a:t>
+            </a:r>
+          </a:p>
+          <a:p>
+            <a:r>
+              <a:rPr sz="1400" b="0" i="0">
+                <a:solidFill>
+                  <a:srgbClr val="C9D9EC"/>
+                </a:solidFill>
+                <a:latin typeface="Calibri"/>
+              </a:rPr>
+              <a:t>The MCP image carries the benchmark itself; only the credentials and quirk overrides come from tool_env</a:t>
+            </a:r>
+          </a:p>
+        </p:txBody>
+      </p:sp>
+      <p:graphicFrame>
+        <p:nvGraphicFramePr>
+          <p:cNvPr id="3" name="Table 2"/>
+          <p:cNvGraphicFramePr>
+            <a:graphicFrameLocks noGrp="1"/>
+          </p:cNvGraphicFramePr>
+          <p:nvPr/>
+        </p:nvGraphicFramePr>
+        <p:xfrm>
+          <a:off x="411480" y="1188720"/>
+          <a:ext cx="11338559" cy="2103120"/>
+        </p:xfrm>
+        <a:graphic>
+          <a:graphicData uri="http://schemas.openxmlformats.org/drawingml/2006/table">
+            <a:tbl>
+              <a:tblPr firstRow="1">
+                <a:tableStyleId>{5C22544A-7EE6-4342-B048-85BDC9FD1C3A}</a:tableStyleId>
+              </a:tblPr>
+              <a:tblGrid>
+                <a:gridCol w="1280160"/>
+                <a:gridCol w="2514600"/>
+                <a:gridCol w="3749039"/>
+                <a:gridCol w="3794760"/>
+              </a:tblGrid>
+              <a:tr h="525780">
+                <a:tc>
+                  <a:txBody>
+                    <a:bodyPr/>
+                    <a:lstStyle/>
+                    <a:p>
+                      <a:pPr algn="l"/>
+                      <a:r>
+                        <a:rPr sz="1150" b="1" i="0">
+                          <a:solidFill>
+                            <a:srgbClr val="FFFFFF"/>
+                          </a:solidFill>
+                          <a:latin typeface="Calibri"/>
+                        </a:rPr>
+                        <a:t/>
+                      </a:r>
+                    </a:p>
+                  </a:txBody>
+                  <a:tcPr marL="63500" marR="63500" marT="12700" marB="12700" anchor="ctr">
+                    <a:solidFill>
+                      <a:srgbClr val="1B3A5C"/>
+                    </a:solidFill>
+                  </a:tcPr>
+                </a:tc>
+                <a:tc>
+                  <a:txBody>
+                    <a:bodyPr/>
+                    <a:lstStyle/>
+                    <a:p>
+                      <a:pPr algn="ctr"/>
+                      <a:r>
+                        <a:rPr sz="1150" b="1" i="0">
+                          <a:solidFill>
+                            <a:srgbClr val="FFFFFF"/>
+                          </a:solidFill>
+                          <a:latin typeface="Calibri"/>
+                        </a:rPr>
+                        <a:t>MCP tool image</a:t>
+                      </a:r>
+                    </a:p>
+                  </a:txBody>
+                  <a:tcPr marL="63500" marR="63500" marT="12700" marB="12700" anchor="ctr">
+                    <a:solidFill>
+                      <a:srgbClr val="1B3A5C"/>
+                    </a:solidFill>
+                  </a:tcPr>
+                </a:tc>
+                <a:tc>
+                  <a:txBody>
+                    <a:bodyPr/>
+                    <a:lstStyle/>
+                    <a:p>
+                      <a:pPr algn="ctr"/>
+                      <a:r>
+                        <a:rPr sz="1150" b="1" i="0">
+                          <a:solidFill>
+                            <a:srgbClr val="FFFFFF"/>
+                          </a:solidFill>
+                          <a:latin typeface="Calibri"/>
+                        </a:rPr>
+                        <a:t>what the image bakes in</a:t>
+                      </a:r>
+                    </a:p>
+                  </a:txBody>
+                  <a:tcPr marL="63500" marR="63500" marT="12700" marB="12700" anchor="ctr">
+                    <a:solidFill>
+                      <a:srgbClr val="1B3A5C"/>
+                    </a:solidFill>
+                  </a:tcPr>
+                </a:tc>
+                <a:tc>
+                  <a:txBody>
+                    <a:bodyPr/>
+                    <a:lstStyle/>
+                    <a:p>
+                      <a:pPr algn="ctr"/>
+                      <a:r>
+                        <a:rPr sz="1150" b="1" i="0">
+                          <a:solidFill>
+                            <a:srgbClr val="FFFFFF"/>
+                          </a:solidFill>
+                          <a:latin typeface="Calibri"/>
+                        </a:rPr>
+                        <a:t>what tool_env must add</a:t>
+                      </a:r>
+                    </a:p>
+                  </a:txBody>
+                  <a:tcPr marL="63500" marR="63500" marT="12700" marB="12700" anchor="ctr">
+                    <a:solidFill>
+                      <a:srgbClr val="1B3A5C"/>
+                    </a:solidFill>
+                  </a:tcPr>
+                </a:tc>
+              </a:tr>
+              <a:tr h="525780">
+                <a:tc>
+                  <a:txBody>
+                    <a:bodyPr/>
+                    <a:lstStyle/>
+                    <a:p>
+                      <a:pPr algn="l"/>
+                      <a:r>
+                        <a:rPr sz="1150" b="1" i="0">
+                          <a:solidFill>
+                            <a:srgbClr val="1F2A37"/>
+                          </a:solidFill>
+                          <a:latin typeface="Calibri"/>
+                        </a:rPr>
+                        <a:t>gsm8k</a:t>
+                      </a:r>
+                    </a:p>
+                  </a:txBody>
+                  <a:tcPr marL="63500" marR="63500" marT="12700" marB="12700" anchor="ctr">
+                    <a:solidFill>
+                      <a:srgbClr val="FFFFFF"/>
+                    </a:solidFill>
+                  </a:tcPr>
+                </a:tc>
+                <a:tc>
+                  <a:txBody>
+                    <a:bodyPr/>
+                    <a:lstStyle/>
+                    <a:p>
+                      <a:pPr algn="ctr"/>
+                      <a:r>
+                        <a:rPr sz="1150" b="0" i="0">
+                          <a:solidFill>
+                            <a:srgbClr val="1F2A37"/>
+                          </a:solidFill>
+                          <a:latin typeface="Calibri"/>
+                        </a:rPr>
+                        <a:t>exgentic-mcp-gsm8k</a:t>
+                      </a:r>
+                    </a:p>
+                  </a:txBody>
+                  <a:tcPr marL="63500" marR="63500" marT="12700" marB="12700" anchor="ctr">
+                    <a:solidFill>
+                      <a:srgbClr val="FFFFFF"/>
+                    </a:solidFill>
+                  </a:tcPr>
+                </a:tc>
+                <a:tc>
+                  <a:txBody>
+                    <a:bodyPr/>
+                    <a:lstStyle/>
+                    <a:p>
+                      <a:pPr algn="ctr"/>
+                      <a:r>
+                        <a:rPr sz="1150" b="0" i="0">
+                          <a:solidFill>
+                            <a:srgbClr val="1F2A37"/>
+                          </a:solidFill>
+                          <a:latin typeface="Calibri"/>
+                        </a:rPr>
+                        <a:t>the HuggingFace dataset loader — 8.5K problems, fetched at pod startup</a:t>
+                      </a:r>
+                    </a:p>
+                  </a:txBody>
+                  <a:tcPr marL="63500" marR="63500" marT="12700" marB="12700" anchor="ctr">
+                    <a:solidFill>
+                      <a:srgbClr val="FFFFFF"/>
+                    </a:solidFill>
+                  </a:tcPr>
+                </a:tc>
+                <a:tc>
+                  <a:txBody>
+                    <a:bodyPr/>
+                    <a:lstStyle/>
+                    <a:p>
+                      <a:pPr algn="ctr"/>
+                      <a:r>
+                        <a:rPr sz="1150" b="0" i="0">
+                          <a:solidFill>
+                            <a:srgbClr val="1F2A37"/>
+                          </a:solidFill>
+                          <a:latin typeface="Calibri"/>
+                        </a:rPr>
+                        <a:t>HF_TOKEN (from hf-secret), plus EXGENTIC_SET_BENCHMARK_RUNNER=direct</a:t>
+                      </a:r>
+                    </a:p>
+                  </a:txBody>
+                  <a:tcPr marL="63500" marR="63500" marT="12700" marB="12700" anchor="ctr">
+                    <a:solidFill>
+                      <a:srgbClr val="FFFFFF"/>
+                    </a:solidFill>
+                  </a:tcPr>
+                </a:tc>
+              </a:tr>
+              <a:tr h="525780">
+                <a:tc>
+                  <a:txBody>
+                    <a:bodyPr/>
+                    <a:lstStyle/>
+                    <a:p>
+                      <a:pPr algn="l"/>
+                      <a:r>
+                        <a:rPr sz="1150" b="1" i="0">
+                          <a:solidFill>
+                            <a:srgbClr val="1F2A37"/>
+                          </a:solidFill>
+                          <a:latin typeface="Calibri"/>
+                        </a:rPr>
+                        <a:t>tau2</a:t>
+                      </a:r>
+                    </a:p>
+                  </a:txBody>
+                  <a:tcPr marL="63500" marR="63500" marT="12700" marB="12700" anchor="ctr">
+                    <a:solidFill>
+                      <a:srgbClr val="F4F6F8"/>
+                    </a:solidFill>
+                  </a:tcPr>
+                </a:tc>
+                <a:tc>
+                  <a:txBody>
+                    <a:bodyPr/>
+                    <a:lstStyle/>
+                    <a:p>
+                      <a:pPr algn="ctr"/>
+                      <a:r>
+                        <a:rPr sz="1150" b="0" i="0">
+                          <a:solidFill>
+                            <a:srgbClr val="1F2A37"/>
+                          </a:solidFill>
+                          <a:latin typeface="Calibri"/>
+                        </a:rPr>
+                        <a:t>exgentic-mcp-tau2</a:t>
+                      </a:r>
+                    </a:p>
+                  </a:txBody>
+                  <a:tcPr marL="63500" marR="63500" marT="12700" marB="12700" anchor="ctr">
+                    <a:solidFill>
+                      <a:srgbClr val="F4F6F8"/>
+                    </a:solidFill>
+                  </a:tcPr>
+                </a:tc>
+                <a:tc>
+                  <a:txBody>
+                    <a:bodyPr/>
+                    <a:lstStyle/>
+                    <a:p>
+                      <a:pPr algn="ctr"/>
+                      <a:r>
+                        <a:rPr sz="1150" b="0" i="0">
+                          <a:solidFill>
+                            <a:srgbClr val="1F2A37"/>
+                          </a:solidFill>
+                          <a:latin typeface="Calibri"/>
+                        </a:rPr>
+                        <a:t>the tau2-bench library + its retail domain (114 tasks), and a user-simulator LLM</a:t>
+                      </a:r>
+                    </a:p>
+                  </a:txBody>
+                  <a:tcPr marL="63500" marR="63500" marT="12700" marB="12700" anchor="ctr">
+                    <a:solidFill>
+                      <a:srgbClr val="F4F6F8"/>
+                    </a:solidFill>
+                  </a:tcPr>
+                </a:tc>
+                <a:tc>
+                  <a:txBody>
+                    <a:bodyPr/>
+                    <a:lstStyle/>
+                    <a:p>
+                      <a:pPr algn="ctr"/>
+                      <a:r>
+                        <a:rPr sz="1150" b="0" i="0">
+                          <a:solidFill>
+                            <a:srgbClr val="1F2A37"/>
+                          </a:solidFill>
+                          <a:latin typeface="Calibri"/>
+                        </a:rPr>
+                        <a:t>OPENAI_API_KEY (from openai-secret) + EXGENTIC_SET_BENCHMARK_ACTION_TIMEOUT=1000 — the simulator makes its own inference calls (flow 4)</a:t>
+                      </a:r>
+                    </a:p>
+                  </a:txBody>
+                  <a:tcPr marL="63500" marR="63500" marT="12700" marB="12700" anchor="ctr">
+                    <a:solidFill>
+                      <a:srgbClr val="F4F6F8"/>
+                    </a:solidFill>
+                  </a:tcPr>
+                </a:tc>
+              </a:tr>
+              <a:tr h="525780">
+                <a:tc>
+                  <a:txBody>
+                    <a:bodyPr/>
+                    <a:lstStyle/>
+                    <a:p>
+                      <a:pPr algn="l"/>
+                      <a:r>
+                        <a:rPr sz="1150" b="1" i="0">
+                          <a:solidFill>
+                            <a:srgbClr val="1F2A37"/>
+                          </a:solidFill>
+                          <a:latin typeface="Calibri"/>
+                        </a:rPr>
+                        <a:t>appworld</a:t>
+                      </a:r>
+                    </a:p>
+                  </a:txBody>
+                  <a:tcPr marL="63500" marR="63500" marT="12700" marB="12700" anchor="ctr">
+                    <a:solidFill>
+                      <a:srgbClr val="FFFFFF"/>
+                    </a:solidFill>
+                  </a:tcPr>
+                </a:tc>
+                <a:tc>
+                  <a:txBody>
+                    <a:bodyPr/>
+                    <a:lstStyle/>
+                    <a:p>
+                      <a:pPr algn="ctr"/>
+                      <a:r>
+                        <a:rPr sz="1150" b="0" i="0">
+                          <a:solidFill>
+                            <a:srgbClr val="1F2A37"/>
+                          </a:solidFill>
+                          <a:latin typeface="Calibri"/>
+                        </a:rPr>
+                        <a:t>exgentic-mcp-appworld</a:t>
+                      </a:r>
+                    </a:p>
+                  </a:txBody>
+                  <a:tcPr marL="63500" marR="63500" marT="12700" marB="12700" anchor="ctr">
+                    <a:solidFill>
+                      <a:srgbClr val="FFFFFF"/>
+                    </a:solidFill>
+                  </a:tcPr>
+                </a:tc>
+                <a:tc>
+                  <a:txBody>
+                    <a:bodyPr/>
+                    <a:lstStyle/>
+                    <a:p>
+                      <a:pPr algn="ctr"/>
+                      <a:r>
+                        <a:rPr sz="1150" b="0" i="0">
+                          <a:solidFill>
+                            <a:srgbClr val="1F2A37"/>
+                          </a:solidFill>
+                          <a:latin typeface="Calibri"/>
+                        </a:rPr>
+                        <a:t>the whole app-suite sandbox (exgentic install --benchmark appworld)</a:t>
+                      </a:r>
+                    </a:p>
+                  </a:txBody>
+                  <a:tcPr marL="63500" marR="63500" marT="12700" marB="12700" anchor="ctr">
+                    <a:solidFill>
+                      <a:srgbClr val="FFFFFF"/>
+                    </a:solidFill>
+                  </a:tcPr>
+                </a:tc>
+                <a:tc>
+                  <a:txBody>
+                    <a:bodyPr/>
+                    <a:lstStyle/>
+                    <a:p>
+                      <a:pPr algn="ctr"/>
+                      <a:r>
+                        <a:rPr sz="1150" b="0" i="0">
+                          <a:solidFill>
+                            <a:srgbClr val="1F2A37"/>
+                          </a:solidFill>
+                          <a:latin typeface="Calibri"/>
+                        </a:rPr>
+                        <a:t>nothing beyond BENCHMARK_NAME — upstream's .env.appworld is explicitly empty</a:t>
+                      </a:r>
+                    </a:p>
+                  </a:txBody>
+                  <a:tcPr marL="63500" marR="63500" marT="12700" marB="12700" anchor="ctr">
+                    <a:solidFill>
+                      <a:srgbClr val="FFFFFF"/>
+                    </a:solidFill>
+                  </a:tcPr>
+                </a:tc>
+              </a:tr>
+            </a:tbl>
+          </a:graphicData>
+        </a:graphic>
+      </p:graphicFrame>
+      <p:sp>
+        <p:nvSpPr>
+          <p:cNvPr id="4" name="Rounded Rectangle 3"/>
+          <p:cNvSpPr/>
+          <p:nvPr/>
+        </p:nvSpPr>
+        <p:spPr>
+          <a:xfrm>
+            <a:off x="411480" y="3566160"/>
+            <a:ext cx="5532120" cy="1097280"/>
+          </a:xfrm>
+          <a:prstGeom prst="roundRect">
+            <a:avLst/>
+          </a:prstGeom>
+          <a:solidFill>
+            <a:srgbClr val="E4F0F0"/>
+          </a:solidFill>
+          <a:ln w="12700">
+            <a:solidFill>
+              <a:srgbClr val="3D6E70"/>
+            </a:solidFill>
+          </a:ln>
+          <a:effectLst/>
+        </p:spPr>
+        <p:style>
+          <a:lnRef idx="1">
+            <a:schemeClr val="accent1"/>
+          </a:lnRef>
+          <a:fillRef idx="3">
+            <a:schemeClr val="accent1"/>
+          </a:fillRef>
+          <a:effectRef idx="2">
+            <a:schemeClr val="accent1"/>
+          </a:effectRef>
+          <a:fontRef idx="minor">
+            <a:schemeClr val="lt1"/>
+          </a:fontRef>
+        </p:style>
+        <p:txBody>
+          <a:bodyPr rtlCol="0" anchor="ctr" wrap="square" tIns="25400" bIns="25400"/>
+          <a:lstStyle/>
+          <a:p>
+            <a:pPr algn="ctr"/>
+            <a:r>
+              <a:rPr sz="1400" b="1" i="0">
+                <a:solidFill>
+                  <a:srgbClr val="3D6E70"/>
+                </a:solidFill>
+                <a:latin typeface="Calibri"/>
+              </a:rPr>
+              <a:t>One agent image serves all three</a:t>
+            </a:r>
+          </a:p>
+          <a:p>
+            <a:pPr algn="ctr"/>
+            <a:r>
+              <a:rPr sz="1100" b="0" i="0">
+                <a:solidFill>
+                  <a:srgbClr val="1F2A37"/>
+                </a:solidFill>
+                <a:latin typeface="Calibri"/>
+              </a:rPr>
+              <a:t>exgentic-a2a-tool_calling:latest is the only key in every agents={...} map; per benchmark it only gains a -&lt;benchmark&gt; name suffix. So the benchmark lives in the MCP pod, and the subject under test is the same binary every time.</a:t>
+            </a:r>
+          </a:p>
+        </p:txBody>
+      </p:sp>
+      <p:sp>
+        <p:nvSpPr>
+          <p:cNvPr id="5" name="Rounded Rectangle 4"/>
+          <p:cNvSpPr/>
+          <p:nvPr/>
+        </p:nvSpPr>
+        <p:spPr>
+          <a:xfrm>
+            <a:off x="6217920" y="3566160"/>
+            <a:ext cx="5532120" cy="1097280"/>
+          </a:xfrm>
+          <a:prstGeom prst="roundRect">
+            <a:avLst/>
+          </a:prstGeom>
+          <a:solidFill>
+            <a:srgbClr val="E8F1FB"/>
+          </a:solidFill>
+          <a:ln w="12700">
+            <a:solidFill>
+              <a:srgbClr val="2E6FB5"/>
+            </a:solidFill>
+          </a:ln>
+          <a:effectLst/>
+        </p:spPr>
+        <p:style>
+          <a:lnRef idx="1">
+            <a:schemeClr val="accent1"/>
+          </a:lnRef>
+          <a:fillRef idx="3">
+            <a:schemeClr val="accent1"/>
+          </a:fillRef>
+          <a:effectRef idx="2">
+            <a:schemeClr val="accent1"/>
+          </a:effectRef>
+          <a:fontRef idx="minor">
+            <a:schemeClr val="lt1"/>
+          </a:fontRef>
+        </p:style>
+        <p:txBody>
+          <a:bodyPr rtlCol="0" anchor="ctr" wrap="square" tIns="25400" bIns="25400"/>
+          <a:lstStyle/>
+          <a:p>
+            <a:pPr algn="ctr"/>
+            <a:r>
+              <a:rPr sz="1400" b="1" i="0">
+                <a:solidFill>
+                  <a:srgbClr val="2E6FB5"/>
+                </a:solidFill>
+                <a:latin typeface="Calibri"/>
+              </a:rPr>
+              <a:t>The LLM base is never baked in</a:t>
+            </a:r>
+          </a:p>
+          <a:p>
+            <a:pPr algn="ctr"/>
+            <a:r>
+              <a:rPr sz="1100" b="0" i="0">
+                <a:solidFill>
+                  <a:srgbClr val="1F2A37"/>
+                </a:solidFill>
+                <a:latin typeface="Calibri"/>
+              </a:rPr>
+              <a:t>OPENAI_API_BASE is injected per deploy from the instance's workload_llm.api_base, and tau2's simulator model from the run's model — a deploy with no gateway configured is rejected with 422 rather than defaulting.</a:t>
+            </a:r>
+          </a:p>
+        </p:txBody>
+      </p:sp>
+      <p:sp>
+        <p:nvSpPr>
+          <p:cNvPr id="6" name="Rounded Rectangle 5"/>
+          <p:cNvSpPr/>
+          <p:nvPr/>
+        </p:nvSpPr>
+        <p:spPr>
+          <a:xfrm>
+            <a:off x="411480" y="4892040"/>
+            <a:ext cx="11338560" cy="1417320"/>
+          </a:xfrm>
+          <a:prstGeom prst="roundRect">
+            <a:avLst/>
+          </a:prstGeom>
+          <a:solidFill>
+            <a:srgbClr val="EEEFF1"/>
+          </a:solidFill>
+          <a:ln w="12700">
+            <a:solidFill>
+              <a:srgbClr val="6B6B6B"/>
+            </a:solidFill>
+          </a:ln>
+          <a:effectLst/>
+        </p:spPr>
+        <p:style>
+          <a:lnRef idx="1">
+            <a:schemeClr val="accent1"/>
+          </a:lnRef>
+          <a:fillRef idx="3">
+            <a:schemeClr val="accent1"/>
+          </a:fillRef>
+          <a:effectRef idx="2">
+            <a:schemeClr val="accent1"/>
+          </a:effectRef>
+          <a:fontRef idx="minor">
+            <a:schemeClr val="lt1"/>
+          </a:fontRef>
+        </p:style>
+        <p:txBody>
+          <a:bodyPr rtlCol="0" anchor="ctr" wrap="square" tIns="25400" bIns="25400" lIns="228600" rIns="228600"/>
+          <a:lstStyle/>
+          <a:p>
+            <a:pPr algn="ctr"/>
+            <a:r>
+              <a:rPr sz="1250" b="1" i="0">
+                <a:solidFill>
+                  <a:srgbClr val="1F2A37"/>
+                </a:solidFill>
+                <a:latin typeface="Calibri"/>
+              </a:rPr>
+              <a:t>Two traps in that last column:  appworld REJECTS the same action-timeout override tau2 needs and crashes at startup with "Unknown benchmark override 'action_timeout'" — the env is per-benchmark, not a shared default.  And hf-secret must EXIST for gsm8k even though the dataset is public: without it the MCP pod sits in CreateContainerConfigError and the agent crash-loops.  Missing secrets surface as a 424 on the run precheck, naming exactly what to provision.</a:t>
+            </a:r>
+          </a:p>
+        </p:txBody>
+      </p:sp>
+      <p:sp>
+        <p:nvSpPr>
+          <p:cNvPr id="7" name="TextBox 6"/>
+          <p:cNvSpPr txBox="1"/>
+          <p:nvPr/>
+        </p:nvSpPr>
+        <p:spPr>
+          <a:xfrm>
+            <a:off x="11795760" y="6437376"/>
+            <a:ext cx="320040" cy="310896"/>
+          </a:xfrm>
+          <a:prstGeom prst="rect">
+            <a:avLst/>
+          </a:prstGeom>
+          <a:noFill/>
+        </p:spPr>
+        <p:txBody>
+          <a:bodyPr wrap="none" anchor="ctr" lIns="0" rIns="0" tIns="0" bIns="0">
+            <a:spAutoFit/>
+          </a:bodyPr>
+          <a:lstStyle/>
+          <a:p>
+            <a:pPr algn="r">
+              <a:spcAft>
+                <a:spcPts val="300"/>
+              </a:spcAft>
+            </a:pPr>
+            <a:r>
+              <a:rPr sz="1200" b="0" i="0">
+                <a:solidFill>
+                  <a:srgbClr val="6B6B6B"/>
+                </a:solidFill>
+                <a:latin typeface="Calibri"/>
+              </a:rPr>
+              <a:t>10</a:t>
+            </a:r>
+          </a:p>
+        </p:txBody>
+      </p:sp>
+    </p:spTree>
+  </p:cSld>
+  <p:clrMapOvr>
+    <a:masterClrMapping/>
+  </p:clrMapOvr>
+</p:sld>
+</file>
+
+<file path=ppt/slides/slide11.xml><?xml version="1.0" encoding="utf-8"?>
 <p:sld xmlns:a="http://schemas.openxmlformats.org/drawingml/2006/main" xmlns:p="http://schemas.openxmlformats.org/presentationml/2006/main" xmlns:r="http://schemas.openxmlformats.org/officeDocument/2006/relationships">
   <p:cSld name="7.1 The Three Benchmarks — a Difficulty Ladder">
     <p:spTree>
@@ -4824,7 +5539,7 @@
                 </a:solidFill>
                 <a:latin typeface="Calibri"/>
               </a:rPr>
-              <a:t>10</a:t>
+              <a:t>11</a:t>
             </a:r>
           </a:p>
         </p:txBody>
@@ -4837,7 +5552,7 @@
 </p:sld>
 </file>
 
-<file path=ppt/slides/slide11.xml><?xml version="1.0" encoding="utf-8"?>
+<file path=ppt/slides/slide12.xml><?xml version="1.0" encoding="utf-8"?>
 <p:sld xmlns:a="http://schemas.openxmlformats.org/drawingml/2006/main" xmlns:p="http://schemas.openxmlformats.org/presentationml/2006/main" xmlns:r="http://schemas.openxmlformats.org/officeDocument/2006/relationships">
   <p:cSld name="7.2 What Each Benchmark Stresses">
     <p:spTree>
@@ -5958,7 +6673,7 @@
                 </a:solidFill>
                 <a:latin typeface="Calibri"/>
               </a:rPr>
-              <a:t>11</a:t>
+              <a:t>12</a:t>
             </a:r>
           </a:p>
         </p:txBody>
@@ -5971,7 +6686,7 @@
 </p:sld>
 </file>
 
-<file path=ppt/slides/slide12.xml><?xml version="1.0" encoding="utf-8"?>
+<file path=ppt/slides/slide13.xml><?xml version="1.0" encoding="utf-8"?>
 <p:sld xmlns:a="http://schemas.openxmlformats.org/drawingml/2006/main" xmlns:p="http://schemas.openxmlformats.org/presentationml/2006/main" xmlns:r="http://schemas.openxmlformats.org/officeDocument/2006/relationships">
   <p:cSld name="7.3 Reading the Numbers — Five Things That Mislead">
     <p:spTree>
@@ -6414,7 +7129,7 @@
                 </a:solidFill>
                 <a:latin typeface="Calibri"/>
               </a:rPr>
-              <a:t>12</a:t>
+              <a:t>13</a:t>
             </a:r>
           </a:p>
         </p:txBody>
@@ -6427,7 +7142,7 @@
 </p:sld>
 </file>
 
-<file path=ppt/slides/slide13.xml><?xml version="1.0" encoding="utf-8"?>
+<file path=ppt/slides/slide14.xml><?xml version="1.0" encoding="utf-8"?>
 <p:sld xmlns:a="http://schemas.openxmlformats.org/drawingml/2006/main" xmlns:p="http://schemas.openxmlformats.org/presentationml/2006/main" xmlns:r="http://schemas.openxmlformats.org/officeDocument/2006/relationships">
   <p:cSld name="8.1 The Canonical 12-Run Matrix">
     <p:spTree>
@@ -8140,7 +8855,7 @@
                 </a:solidFill>
                 <a:latin typeface="Calibri"/>
               </a:rPr>
-              <a:t>13</a:t>
+              <a:t>14</a:t>
             </a:r>
           </a:p>
         </p:txBody>
@@ -8153,7 +8868,7 @@
 </p:sld>
 </file>
 
-<file path=ppt/slides/slide14.xml><?xml version="1.0" encoding="utf-8"?>
+<file path=ppt/slides/slide15.xml><?xml version="1.0" encoding="utf-8"?>
 <p:sld xmlns:a="http://schemas.openxmlformats.org/drawingml/2006/main" xmlns:p="http://schemas.openxmlformats.org/presentationml/2006/main" xmlns:r="http://schemas.openxmlformats.org/officeDocument/2006/relationships">
   <p:cSld name="8.2 What the 12 Runs Measured">
     <p:spTree>
@@ -10446,7 +11161,7 @@
                 </a:solidFill>
                 <a:latin typeface="Calibri"/>
               </a:rPr>
-              <a:t>14</a:t>
+              <a:t>15</a:t>
             </a:r>
           </a:p>
         </p:txBody>
@@ -10459,7 +11174,7 @@
 </p:sld>
 </file>
 
-<file path=ppt/slides/slide15.xml><?xml version="1.0" encoding="utf-8"?>
+<file path=ppt/slides/slide16.xml><?xml version="1.0" encoding="utf-8"?>
 <p:sld xmlns:a="http://schemas.openxmlformats.org/drawingml/2006/main" xmlns:p="http://schemas.openxmlformats.org/presentationml/2006/main" xmlns:r="http://schemas.openxmlformats.org/officeDocument/2006/relationships">
   <p:cSld name="9.1 OpenShift vs KinD — Like-for-Like">
     <p:spTree>
@@ -13052,7 +13767,7 @@
                 </a:solidFill>
                 <a:latin typeface="Calibri"/>
               </a:rPr>
-              <a:t>15</a:t>
+              <a:t>16</a:t>
             </a:r>
           </a:p>
         </p:txBody>
@@ -13065,7 +13780,7 @@
 </p:sld>
 </file>
 
-<file path=ppt/slides/slide16.xml><?xml version="1.0" encoding="utf-8"?>
+<file path=ppt/slides/slide17.xml><?xml version="1.0" encoding="utf-8"?>
 <p:sld xmlns:a="http://schemas.openxmlformats.org/drawingml/2006/main" xmlns:p="http://schemas.openxmlformats.org/presentationml/2006/main" xmlns:r="http://schemas.openxmlformats.org/officeDocument/2006/relationships">
   <p:cSld name="9.2 What AuthBridge Costs — and Why It Has No Single Number">
     <p:spTree>
@@ -14858,7 +15573,7 @@
                 </a:solidFill>
                 <a:latin typeface="Calibri"/>
               </a:rPr>
-              <a:t>16</a:t>
+              <a:t>17</a:t>
             </a:r>
           </a:p>
         </p:txBody>
@@ -14871,7 +15586,7 @@
 </p:sld>
 </file>
 
-<file path=ppt/slides/slide17.xml><?xml version="1.0" encoding="utf-8"?>
+<file path=ppt/slides/slide18.xml><?xml version="1.0" encoding="utf-8"?>
 <p:sld xmlns:a="http://schemas.openxmlformats.org/drawingml/2006/main" xmlns:p="http://schemas.openxmlformats.org/presentationml/2006/main" xmlns:r="http://schemas.openxmlformats.org/officeDocument/2006/relationships">
   <p:cSld name="10. What the Service Can &amp; Cannot Enact">
     <p:spTree>
@@ -15462,7 +16177,7 @@
                 </a:solidFill>
                 <a:latin typeface="Calibri"/>
               </a:rPr>
-              <a:t>17</a:t>
+              <a:t>18</a:t>
             </a:r>
           </a:p>
         </p:txBody>
@@ -16342,7 +17057,7 @@
                 </a:solidFill>
                 <a:latin typeface="Calibri"/>
               </a:rPr>
-              <a:t>the three benchmarks and the REST flow that drives them</a:t>
+              <a:t>6.1 the three benchmarks and the REST flow that drives them · 6.2 what each image bakes in</a:t>
             </a:r>
           </a:p>
         </p:txBody>
@@ -26485,7 +27200,7 @@
 
 <file path=ppt/slides/slide9.xml><?xml version="1.0" encoding="utf-8"?>
 <p:sld xmlns:a="http://schemas.openxmlformats.org/drawingml/2006/main" xmlns:p="http://schemas.openxmlformats.org/presentationml/2006/main" xmlns:r="http://schemas.openxmlformats.org/officeDocument/2006/relationships">
-  <p:cSld name="6. Benchmark Catalog &amp; Run Lifecycle">
+  <p:cSld name="6.1 Benchmark Catalog &amp; Run Lifecycle">
     <p:spTree>
       <p:nvGrpSpPr>
         <p:cNvPr id="1" name=""/>
@@ -26541,7 +27256,7 @@
                 </a:solidFill>
                 <a:latin typeface="Calibri"/>
               </a:rPr>
-              <a:t>6.  Benchmark Catalog &amp; Run Lifecycle</a:t>
+              <a:t>6.1  Benchmark Catalog &amp; Run Lifecycle</a:t>
             </a:r>
           </a:p>
         </p:txBody>

--- a/docs/AutoBench.pptx
+++ b/docs/AutoBench.pptx
@@ -23,6 +23,8 @@
     <p:sldId id="271" r:id="rId22"/>
     <p:sldId id="272" r:id="rId23"/>
     <p:sldId id="273" r:id="rId24"/>
+    <p:sldId id="274" r:id="rId25"/>
+    <p:sldId id="275" r:id="rId26"/>
   </p:sldIdLst>
   <p:sldSz cx="12192000" cy="6858000" type="screen4x3"/>
   <p:notesSz cx="6858000" cy="9144000"/>
@@ -3360,7 +3362,7 @@
                 </a:solidFill>
                 <a:latin typeface="Calibri"/>
               </a:rPr>
-              <a:t>Last modified 2026-09-17 00:45 EDT</a:t>
+              <a:t>Last modified 2026-09-17 01:07 EDT</a:t>
             </a:r>
           </a:p>
         </p:txBody>
@@ -5690,7 +5692,7 @@
         <p:spPr>
           <a:xfrm>
             <a:off x="411480" y="1847088"/>
-            <a:ext cx="3703320" cy="3154680"/>
+            <a:ext cx="3703320" cy="4160520"/>
           </a:xfrm>
           <a:prstGeom prst="roundRect">
             <a:avLst/>
@@ -5818,6 +5820,22 @@
               <a:t>• Deterministic enough that task 0 costs 320 input tokens on every cluster — we use that to prove two environments are comparable.</a:t>
             </a:r>
           </a:p>
+          <a:p>
+            <a:pPr algn="l">
+              <a:spcAft>
+                <a:spcPts val="500"/>
+              </a:spcAft>
+            </a:pPr>
+            <a:r>
+              <a:rPr sz="1000" b="0" i="0">
+                <a:solidFill>
+                  <a:srgbClr val="1F2A37"/>
+                </a:solidFill>
+                <a:latin typeface="Calibri"/>
+              </a:rPr>
+              <a:t>• Cheap enough to run often: a 50-task leg is 25 K tokens — 0.4% of the whole 12-run matrix's bill, and less than a SINGLE appworld task (see 7.4).</a:t>
+            </a:r>
+          </a:p>
         </p:txBody>
       </p:sp>
       <p:sp>
@@ -5939,7 +5957,7 @@
         <p:spPr>
           <a:xfrm>
             <a:off x="4270248" y="1847088"/>
-            <a:ext cx="3703320" cy="3154680"/>
+            <a:ext cx="3703320" cy="4160520"/>
           </a:xfrm>
           <a:prstGeom prst="roundRect">
             <a:avLst/>
@@ -6067,6 +6085,22 @@
               <a:t>• At n=10 one task moves pass_rate by 0.10 — it cannot resolve less than that.</a:t>
             </a:r>
           </a:p>
+          <a:p>
+            <a:pPr algn="l">
+              <a:spcAft>
+                <a:spcPts val="500"/>
+              </a:spcAft>
+            </a:pPr>
+            <a:r>
+              <a:rPr sz="1000" b="0" i="0">
+                <a:solidFill>
+                  <a:srgbClr val="1F2A37"/>
+                </a:solidFill>
+                <a:latin typeface="Calibri"/>
+              </a:rPr>
+              <a:t>• 27% of a task's wall time sits INSIDE tool calls — that is the simulator generating, server-side, and its tokens appear in no report of ours.</a:t>
+            </a:r>
+          </a:p>
         </p:txBody>
       </p:sp>
       <p:sp>
@@ -6188,7 +6222,7 @@
         <p:spPr>
           <a:xfrm>
             <a:off x="8129016" y="1847088"/>
-            <a:ext cx="3703320" cy="3154680"/>
+            <a:ext cx="3703320" cy="4160520"/>
           </a:xfrm>
           <a:prstGeom prst="roundRect">
             <a:avLst/>
@@ -6316,6 +6350,22 @@
               <a:t>• Its job here is pipeline stress: long contexts, big traces, real timeouts.</a:t>
             </a:r>
           </a:p>
+          <a:p>
+            <a:pPr algn="l">
+              <a:spcAft>
+                <a:spcPts val="500"/>
+              </a:spcAft>
+            </a:pPr>
+            <a:r>
+              <a:rPr sz="1000" b="0" i="0">
+                <a:solidFill>
+                  <a:srgbClr val="1F2A37"/>
+                </a:solidFill>
+                <a:latin typeface="Calibri"/>
+              </a:rPr>
+              <a:t>• Two model calls per tool call — tool shortlisting, which only bites with an API surface this large. The first carries 68% of the input tokens.</a:t>
+            </a:r>
+          </a:p>
         </p:txBody>
       </p:sp>
       <p:sp>
@@ -6373,275 +6423,9 @@
           </a:p>
         </p:txBody>
       </p:sp>
-      <p:graphicFrame>
-        <p:nvGraphicFramePr>
-          <p:cNvPr id="12" name="Table 11"/>
-          <p:cNvGraphicFramePr>
-            <a:graphicFrameLocks noGrp="1"/>
-          </p:cNvGraphicFramePr>
-          <p:nvPr/>
-        </p:nvGraphicFramePr>
-        <p:xfrm>
-          <a:off x="411480" y="5212080"/>
-          <a:ext cx="11338560" cy="1325880"/>
-        </p:xfrm>
-        <a:graphic>
-          <a:graphicData uri="http://schemas.openxmlformats.org/drawingml/2006/table">
-            <a:tbl>
-              <a:tblPr firstRow="1">
-                <a:tableStyleId>{5C22544A-7EE6-4342-B048-85BDC9FD1C3A}</a:tableStyleId>
-              </a:tblPr>
-              <a:tblGrid>
-                <a:gridCol w="6766560"/>
-                <a:gridCol w="4572000"/>
-              </a:tblGrid>
-              <a:tr h="265176">
-                <a:tc>
-                  <a:txBody>
-                    <a:bodyPr/>
-                    <a:lstStyle/>
-                    <a:p>
-                      <a:pPr algn="l"/>
-                      <a:r>
-                        <a:rPr sz="1100" b="1" i="0">
-                          <a:solidFill>
-                            <a:srgbClr val="FFFFFF"/>
-                          </a:solidFill>
-                          <a:latin typeface="Calibri"/>
-                        </a:rPr>
-                        <a:t>If you want to …</a:t>
-                      </a:r>
-                    </a:p>
-                  </a:txBody>
-                  <a:tcPr marL="63500" marR="63500" marT="12700" marB="12700" anchor="ctr">
-                    <a:solidFill>
-                      <a:srgbClr val="1B3A5C"/>
-                    </a:solidFill>
-                  </a:tcPr>
-                </a:tc>
-                <a:tc>
-                  <a:txBody>
-                    <a:bodyPr/>
-                    <a:lstStyle/>
-                    <a:p>
-                      <a:pPr algn="ctr"/>
-                      <a:r>
-                        <a:rPr sz="1100" b="1" i="0">
-                          <a:solidFill>
-                            <a:srgbClr val="FFFFFF"/>
-                          </a:solidFill>
-                          <a:latin typeface="Calibri"/>
-                        </a:rPr>
-                        <a:t>use</a:t>
-                      </a:r>
-                    </a:p>
-                  </a:txBody>
-                  <a:tcPr marL="63500" marR="63500" marT="12700" marB="12700" anchor="ctr">
-                    <a:solidFill>
-                      <a:srgbClr val="1B3A5C"/>
-                    </a:solidFill>
-                  </a:tcPr>
-                </a:tc>
-              </a:tr>
-              <a:tr h="265176">
-                <a:tc>
-                  <a:txBody>
-                    <a:bodyPr/>
-                    <a:lstStyle/>
-                    <a:p>
-                      <a:pPr algn="l"/>
-                      <a:r>
-                        <a:rPr sz="1100" b="0" i="0">
-                          <a:solidFill>
-                            <a:srgbClr val="1F2A37"/>
-                          </a:solidFill>
-                          <a:latin typeface="Calibri"/>
-                        </a:rPr>
-                        <a:t>check a cluster / deploy / auth / telemetry path works</a:t>
-                      </a:r>
-                    </a:p>
-                  </a:txBody>
-                  <a:tcPr marL="63500" marR="63500" marT="12700" marB="12700" anchor="ctr">
-                    <a:solidFill>
-                      <a:srgbClr val="FFFFFF"/>
-                    </a:solidFill>
-                  </a:tcPr>
-                </a:tc>
-                <a:tc>
-                  <a:txBody>
-                    <a:bodyPr/>
-                    <a:lstStyle/>
-                    <a:p>
-                      <a:pPr algn="ctr"/>
-                      <a:r>
-                        <a:rPr sz="1100" b="0" i="0">
-                          <a:solidFill>
-                            <a:srgbClr val="1F2A37"/>
-                          </a:solidFill>
-                          <a:latin typeface="Calibri"/>
-                        </a:rPr>
-                        <a:t>gsm8k, 1–10 tasks</a:t>
-                      </a:r>
-                    </a:p>
-                  </a:txBody>
-                  <a:tcPr marL="63500" marR="63500" marT="12700" marB="12700" anchor="ctr">
-                    <a:solidFill>
-                      <a:srgbClr val="FFFFFF"/>
-                    </a:solidFill>
-                  </a:tcPr>
-                </a:tc>
-              </a:tr>
-              <a:tr h="265176">
-                <a:tc>
-                  <a:txBody>
-                    <a:bodyPr/>
-                    <a:lstStyle/>
-                    <a:p>
-                      <a:pPr algn="l"/>
-                      <a:r>
-                        <a:rPr sz="1100" b="0" i="0">
-                          <a:solidFill>
-                            <a:srgbClr val="1F2A37"/>
-                          </a:solidFill>
-                          <a:latin typeface="Calibri"/>
-                        </a:rPr>
-                        <a:t>exercise concurrency and volume cheaply</a:t>
-                      </a:r>
-                    </a:p>
-                  </a:txBody>
-                  <a:tcPr marL="63500" marR="63500" marT="12700" marB="12700" anchor="ctr">
-                    <a:solidFill>
-                      <a:srgbClr val="F4F6F8"/>
-                    </a:solidFill>
-                  </a:tcPr>
-                </a:tc>
-                <a:tc>
-                  <a:txBody>
-                    <a:bodyPr/>
-                    <a:lstStyle/>
-                    <a:p>
-                      <a:pPr algn="ctr"/>
-                      <a:r>
-                        <a:rPr sz="1100" b="0" i="0">
-                          <a:solidFill>
-                            <a:srgbClr val="1F2A37"/>
-                          </a:solidFill>
-                          <a:latin typeface="Calibri"/>
-                        </a:rPr>
-                        <a:t>gsm8k, 50 tasks at max_parallel_sessions=4</a:t>
-                      </a:r>
-                    </a:p>
-                  </a:txBody>
-                  <a:tcPr marL="63500" marR="63500" marT="12700" marB="12700" anchor="ctr">
-                    <a:solidFill>
-                      <a:srgbClr val="F4F6F8"/>
-                    </a:solidFill>
-                  </a:tcPr>
-                </a:tc>
-              </a:tr>
-              <a:tr h="265176">
-                <a:tc>
-                  <a:txBody>
-                    <a:bodyPr/>
-                    <a:lstStyle/>
-                    <a:p>
-                      <a:pPr algn="l"/>
-                      <a:r>
-                        <a:rPr sz="1100" b="0" i="0">
-                          <a:solidFill>
-                            <a:srgbClr val="1F2A37"/>
-                          </a:solidFill>
-                          <a:latin typeface="Calibri"/>
-                        </a:rPr>
-                        <a:t>compare models meaningfully</a:t>
-                      </a:r>
-                    </a:p>
-                  </a:txBody>
-                  <a:tcPr marL="63500" marR="63500" marT="12700" marB="12700" anchor="ctr">
-                    <a:solidFill>
-                      <a:srgbClr val="FFFFFF"/>
-                    </a:solidFill>
-                  </a:tcPr>
-                </a:tc>
-                <a:tc>
-                  <a:txBody>
-                    <a:bodyPr/>
-                    <a:lstStyle/>
-                    <a:p>
-                      <a:pPr algn="ctr"/>
-                      <a:r>
-                        <a:rPr sz="1100" b="0" i="0">
-                          <a:solidFill>
-                            <a:srgbClr val="1F2A37"/>
-                          </a:solidFill>
-                          <a:latin typeface="Calibri"/>
-                        </a:rPr>
-                        <a:t>tau2 — it discriminates; gsm8k saturates at ~1.0</a:t>
-                      </a:r>
-                    </a:p>
-                  </a:txBody>
-                  <a:tcPr marL="63500" marR="63500" marT="12700" marB="12700" anchor="ctr">
-                    <a:solidFill>
-                      <a:srgbClr val="FFFFFF"/>
-                    </a:solidFill>
-                  </a:tcPr>
-                </a:tc>
-              </a:tr>
-              <a:tr h="265176">
-                <a:tc>
-                  <a:txBody>
-                    <a:bodyPr/>
-                    <a:lstStyle/>
-                    <a:p>
-                      <a:pPr algn="l"/>
-                      <a:r>
-                        <a:rPr sz="1100" b="0" i="0">
-                          <a:solidFill>
-                            <a:srgbClr val="1F2A37"/>
-                          </a:solidFill>
-                          <a:latin typeface="Calibri"/>
-                        </a:rPr>
-                        <a:t>stress long contexts, long tasks, timeouts</a:t>
-                      </a:r>
-                    </a:p>
-                  </a:txBody>
-                  <a:tcPr marL="63500" marR="63500" marT="12700" marB="12700" anchor="ctr">
-                    <a:solidFill>
-                      <a:srgbClr val="F4F6F8"/>
-                    </a:solidFill>
-                  </a:tcPr>
-                </a:tc>
-                <a:tc>
-                  <a:txBody>
-                    <a:bodyPr/>
-                    <a:lstStyle/>
-                    <a:p>
-                      <a:pPr algn="ctr"/>
-                      <a:r>
-                        <a:rPr sz="1100" b="0" i="0">
-                          <a:solidFill>
-                            <a:srgbClr val="1F2A37"/>
-                          </a:solidFill>
-                          <a:latin typeface="Calibri"/>
-                        </a:rPr>
-                        <a:t>appworld</a:t>
-                      </a:r>
-                    </a:p>
-                  </a:txBody>
-                  <a:tcPr marL="63500" marR="63500" marT="12700" marB="12700" anchor="ctr">
-                    <a:solidFill>
-                      <a:srgbClr val="F4F6F8"/>
-                    </a:solidFill>
-                  </a:tcPr>
-                </a:tc>
-              </a:tr>
-            </a:tbl>
-          </a:graphicData>
-        </a:graphic>
-      </p:graphicFrame>
-      <p:sp>
-        <p:nvSpPr>
-          <p:cNvPr id="13" name="TextBox 12"/>
+      <p:sp>
+        <p:nvSpPr>
+          <p:cNvPr id="12" name="TextBox 11"/>
           <p:cNvSpPr txBox="1"/>
           <p:nvPr/>
         </p:nvSpPr>
@@ -7143,6 +6927,3125 @@
 </file>
 
 <file path=ppt/slides/slide14.xml><?xml version="1.0" encoding="utf-8"?>
+<p:sld xmlns:a="http://schemas.openxmlformats.org/drawingml/2006/main" xmlns:p="http://schemas.openxmlformats.org/presentationml/2006/main" xmlns:r="http://schemas.openxmlformats.org/officeDocument/2006/relationships">
+  <p:cSld name="7.4 Picking a Benchmark — and What That Leg Costs">
+    <p:spTree>
+      <p:nvGrpSpPr>
+        <p:cNvPr id="1" name=""/>
+        <p:cNvGrpSpPr/>
+        <p:nvPr/>
+      </p:nvGrpSpPr>
+      <p:grpSpPr/>
+      <p:sp>
+        <p:nvSpPr>
+          <p:cNvPr id="2" name="Rectangle 1"/>
+          <p:cNvSpPr/>
+          <p:nvPr/>
+        </p:nvSpPr>
+        <p:spPr>
+          <a:xfrm>
+            <a:off x="0" y="0"/>
+            <a:ext cx="12192000" cy="950000"/>
+          </a:xfrm>
+          <a:prstGeom prst="rect">
+            <a:avLst/>
+          </a:prstGeom>
+          <a:solidFill>
+            <a:srgbClr val="1B3A5C"/>
+          </a:solidFill>
+          <a:ln>
+            <a:noFill/>
+          </a:ln>
+          <a:effectLst/>
+        </p:spPr>
+        <p:style>
+          <a:lnRef idx="1">
+            <a:schemeClr val="accent1"/>
+          </a:lnRef>
+          <a:fillRef idx="3">
+            <a:schemeClr val="accent1"/>
+          </a:fillRef>
+          <a:effectRef idx="2">
+            <a:schemeClr val="accent1"/>
+          </a:effectRef>
+          <a:fontRef idx="minor">
+            <a:schemeClr val="lt1"/>
+          </a:fontRef>
+        </p:style>
+        <p:txBody>
+          <a:bodyPr rtlCol="0" anchor="ctr" lIns="355600"/>
+          <a:lstStyle/>
+          <a:p>
+            <a:pPr algn="ctr"/>
+            <a:r>
+              <a:rPr sz="2600" b="1" i="0">
+                <a:solidFill>
+                  <a:srgbClr val="FFFFFF"/>
+                </a:solidFill>
+                <a:latin typeface="Calibri"/>
+              </a:rPr>
+              <a:t>7.4  Picking a Benchmark — and What That Leg Costs</a:t>
+            </a:r>
+          </a:p>
+          <a:p>
+            <a:r>
+              <a:rPr sz="1400" b="0" i="0">
+                <a:solidFill>
+                  <a:srgbClr val="C9D9EC"/>
+                </a:solidFill>
+                <a:latin typeface="Calibri"/>
+              </a:rPr>
+              <a:t>The actionable summary: what each benchmark is FOR, and the token bill it hands you</a:t>
+            </a:r>
+          </a:p>
+        </p:txBody>
+      </p:sp>
+      <p:graphicFrame>
+        <p:nvGraphicFramePr>
+          <p:cNvPr id="3" name="Table 2"/>
+          <p:cNvGraphicFramePr>
+            <a:graphicFrameLocks noGrp="1"/>
+          </p:cNvGraphicFramePr>
+          <p:nvPr/>
+        </p:nvGraphicFramePr>
+        <p:xfrm>
+          <a:off x="411480" y="1188720"/>
+          <a:ext cx="5989320" cy="2331720"/>
+        </p:xfrm>
+        <a:graphic>
+          <a:graphicData uri="http://schemas.openxmlformats.org/drawingml/2006/table">
+            <a:tbl>
+              <a:tblPr firstRow="1">
+                <a:tableStyleId>{5C22544A-7EE6-4342-B048-85BDC9FD1C3A}</a:tableStyleId>
+              </a:tblPr>
+              <a:tblGrid>
+                <a:gridCol w="3291840"/>
+                <a:gridCol w="2697480"/>
+              </a:tblGrid>
+              <a:tr h="388620">
+                <a:tc>
+                  <a:txBody>
+                    <a:bodyPr/>
+                    <a:lstStyle/>
+                    <a:p>
+                      <a:pPr algn="l"/>
+                      <a:r>
+                        <a:rPr sz="1050" b="1" i="0">
+                          <a:solidFill>
+                            <a:srgbClr val="FFFFFF"/>
+                          </a:solidFill>
+                          <a:latin typeface="Calibri"/>
+                        </a:rPr>
+                        <a:t>If you want to …</a:t>
+                      </a:r>
+                    </a:p>
+                  </a:txBody>
+                  <a:tcPr marL="63500" marR="63500" marT="12700" marB="12700" anchor="ctr">
+                    <a:solidFill>
+                      <a:srgbClr val="1B3A5C"/>
+                    </a:solidFill>
+                  </a:tcPr>
+                </a:tc>
+                <a:tc>
+                  <a:txBody>
+                    <a:bodyPr/>
+                    <a:lstStyle/>
+                    <a:p>
+                      <a:pPr algn="ctr"/>
+                      <a:r>
+                        <a:rPr sz="1050" b="1" i="0">
+                          <a:solidFill>
+                            <a:srgbClr val="FFFFFF"/>
+                          </a:solidFill>
+                          <a:latin typeface="Calibri"/>
+                        </a:rPr>
+                        <a:t>use</a:t>
+                      </a:r>
+                    </a:p>
+                  </a:txBody>
+                  <a:tcPr marL="63500" marR="63500" marT="12700" marB="12700" anchor="ctr">
+                    <a:solidFill>
+                      <a:srgbClr val="1B3A5C"/>
+                    </a:solidFill>
+                  </a:tcPr>
+                </a:tc>
+              </a:tr>
+              <a:tr h="388620">
+                <a:tc>
+                  <a:txBody>
+                    <a:bodyPr/>
+                    <a:lstStyle/>
+                    <a:p>
+                      <a:pPr algn="l"/>
+                      <a:r>
+                        <a:rPr sz="1050" b="0" i="0">
+                          <a:solidFill>
+                            <a:srgbClr val="1F2A37"/>
+                          </a:solidFill>
+                          <a:latin typeface="Calibri"/>
+                        </a:rPr>
+                        <a:t>check a cluster / deploy / auth / telemetry path works</a:t>
+                      </a:r>
+                    </a:p>
+                  </a:txBody>
+                  <a:tcPr marL="63500" marR="63500" marT="12700" marB="12700" anchor="ctr">
+                    <a:solidFill>
+                      <a:srgbClr val="FFFFFF"/>
+                    </a:solidFill>
+                  </a:tcPr>
+                </a:tc>
+                <a:tc>
+                  <a:txBody>
+                    <a:bodyPr/>
+                    <a:lstStyle/>
+                    <a:p>
+                      <a:pPr algn="ctr"/>
+                      <a:r>
+                        <a:rPr sz="1050" b="0" i="0">
+                          <a:solidFill>
+                            <a:srgbClr val="1F2A37"/>
+                          </a:solidFill>
+                          <a:latin typeface="Calibri"/>
+                        </a:rPr>
+                        <a:t>gsm8k, 1–10 tasks</a:t>
+                      </a:r>
+                    </a:p>
+                  </a:txBody>
+                  <a:tcPr marL="63500" marR="63500" marT="12700" marB="12700" anchor="ctr">
+                    <a:solidFill>
+                      <a:srgbClr val="FFFFFF"/>
+                    </a:solidFill>
+                  </a:tcPr>
+                </a:tc>
+              </a:tr>
+              <a:tr h="388620">
+                <a:tc>
+                  <a:txBody>
+                    <a:bodyPr/>
+                    <a:lstStyle/>
+                    <a:p>
+                      <a:pPr algn="l"/>
+                      <a:r>
+                        <a:rPr sz="1050" b="0" i="0">
+                          <a:solidFill>
+                            <a:srgbClr val="1F2A37"/>
+                          </a:solidFill>
+                          <a:latin typeface="Calibri"/>
+                        </a:rPr>
+                        <a:t>exercise concurrency and volume cheaply</a:t>
+                      </a:r>
+                    </a:p>
+                  </a:txBody>
+                  <a:tcPr marL="63500" marR="63500" marT="12700" marB="12700" anchor="ctr">
+                    <a:solidFill>
+                      <a:srgbClr val="F4F6F8"/>
+                    </a:solidFill>
+                  </a:tcPr>
+                </a:tc>
+                <a:tc>
+                  <a:txBody>
+                    <a:bodyPr/>
+                    <a:lstStyle/>
+                    <a:p>
+                      <a:pPr algn="ctr"/>
+                      <a:r>
+                        <a:rPr sz="1050" b="0" i="0">
+                          <a:solidFill>
+                            <a:srgbClr val="1F2A37"/>
+                          </a:solidFill>
+                          <a:latin typeface="Calibri"/>
+                        </a:rPr>
+                        <a:t>gsm8k, 50 tasks at p=4</a:t>
+                      </a:r>
+                    </a:p>
+                  </a:txBody>
+                  <a:tcPr marL="63500" marR="63500" marT="12700" marB="12700" anchor="ctr">
+                    <a:solidFill>
+                      <a:srgbClr val="F4F6F8"/>
+                    </a:solidFill>
+                  </a:tcPr>
+                </a:tc>
+              </a:tr>
+              <a:tr h="388620">
+                <a:tc>
+                  <a:txBody>
+                    <a:bodyPr/>
+                    <a:lstStyle/>
+                    <a:p>
+                      <a:pPr algn="l"/>
+                      <a:r>
+                        <a:rPr sz="1050" b="0" i="0">
+                          <a:solidFill>
+                            <a:srgbClr val="1F2A37"/>
+                          </a:solidFill>
+                          <a:latin typeface="Calibri"/>
+                        </a:rPr>
+                        <a:t>compare models meaningfully</a:t>
+                      </a:r>
+                    </a:p>
+                  </a:txBody>
+                  <a:tcPr marL="63500" marR="63500" marT="12700" marB="12700" anchor="ctr">
+                    <a:solidFill>
+                      <a:srgbClr val="FFFFFF"/>
+                    </a:solidFill>
+                  </a:tcPr>
+                </a:tc>
+                <a:tc>
+                  <a:txBody>
+                    <a:bodyPr/>
+                    <a:lstStyle/>
+                    <a:p>
+                      <a:pPr algn="ctr"/>
+                      <a:r>
+                        <a:rPr sz="1050" b="0" i="0">
+                          <a:solidFill>
+                            <a:srgbClr val="1F2A37"/>
+                          </a:solidFill>
+                          <a:latin typeface="Calibri"/>
+                        </a:rPr>
+                        <a:t>tau2 — it discriminates; gsm8k saturates at ~1.0</a:t>
+                      </a:r>
+                    </a:p>
+                  </a:txBody>
+                  <a:tcPr marL="63500" marR="63500" marT="12700" marB="12700" anchor="ctr">
+                    <a:solidFill>
+                      <a:srgbClr val="FFFFFF"/>
+                    </a:solidFill>
+                  </a:tcPr>
+                </a:tc>
+              </a:tr>
+              <a:tr h="388620">
+                <a:tc>
+                  <a:txBody>
+                    <a:bodyPr/>
+                    <a:lstStyle/>
+                    <a:p>
+                      <a:pPr algn="l"/>
+                      <a:r>
+                        <a:rPr sz="1050" b="0" i="0">
+                          <a:solidFill>
+                            <a:srgbClr val="1F2A37"/>
+                          </a:solidFill>
+                          <a:latin typeface="Calibri"/>
+                        </a:rPr>
+                        <a:t>stress long contexts, long tasks, timeouts</a:t>
+                      </a:r>
+                    </a:p>
+                  </a:txBody>
+                  <a:tcPr marL="63500" marR="63500" marT="12700" marB="12700" anchor="ctr">
+                    <a:solidFill>
+                      <a:srgbClr val="F4F6F8"/>
+                    </a:solidFill>
+                  </a:tcPr>
+                </a:tc>
+                <a:tc>
+                  <a:txBody>
+                    <a:bodyPr/>
+                    <a:lstStyle/>
+                    <a:p>
+                      <a:pPr algn="ctr"/>
+                      <a:r>
+                        <a:rPr sz="1050" b="0" i="0">
+                          <a:solidFill>
+                            <a:srgbClr val="1F2A37"/>
+                          </a:solidFill>
+                          <a:latin typeface="Calibri"/>
+                        </a:rPr>
+                        <a:t>appworld</a:t>
+                      </a:r>
+                    </a:p>
+                  </a:txBody>
+                  <a:tcPr marL="63500" marR="63500" marT="12700" marB="12700" anchor="ctr">
+                    <a:solidFill>
+                      <a:srgbClr val="F4F6F8"/>
+                    </a:solidFill>
+                  </a:tcPr>
+                </a:tc>
+              </a:tr>
+              <a:tr h="388620">
+                <a:tc>
+                  <a:txBody>
+                    <a:bodyPr/>
+                    <a:lstStyle/>
+                    <a:p>
+                      <a:pPr algn="l"/>
+                      <a:r>
+                        <a:rPr sz="1050" b="0" i="0">
+                          <a:solidFill>
+                            <a:srgbClr val="1F2A37"/>
+                          </a:solidFill>
+                          <a:latin typeface="Calibri"/>
+                        </a:rPr>
+                        <a:t>get a fast signal that nothing regressed</a:t>
+                      </a:r>
+                    </a:p>
+                  </a:txBody>
+                  <a:tcPr marL="63500" marR="63500" marT="12700" marB="12700" anchor="ctr">
+                    <a:solidFill>
+                      <a:srgbClr val="FFFFFF"/>
+                    </a:solidFill>
+                  </a:tcPr>
+                </a:tc>
+                <a:tc>
+                  <a:txBody>
+                    <a:bodyPr/>
+                    <a:lstStyle/>
+                    <a:p>
+                      <a:pPr algn="ctr"/>
+                      <a:r>
+                        <a:rPr sz="1050" b="0" i="0">
+                          <a:solidFill>
+                            <a:srgbClr val="1F2A37"/>
+                          </a:solidFill>
+                          <a:latin typeface="Calibri"/>
+                        </a:rPr>
+                        <a:t>gsm8k — if it fails, stop and fix infrastructure</a:t>
+                      </a:r>
+                    </a:p>
+                  </a:txBody>
+                  <a:tcPr marL="63500" marR="63500" marT="12700" marB="12700" anchor="ctr">
+                    <a:solidFill>
+                      <a:srgbClr val="FFFFFF"/>
+                    </a:solidFill>
+                  </a:tcPr>
+                </a:tc>
+              </a:tr>
+            </a:tbl>
+          </a:graphicData>
+        </a:graphic>
+      </p:graphicFrame>
+      <p:graphicFrame>
+        <p:nvGraphicFramePr>
+          <p:cNvPr id="4" name="Table 3"/>
+          <p:cNvGraphicFramePr>
+            <a:graphicFrameLocks noGrp="1"/>
+          </p:cNvGraphicFramePr>
+          <p:nvPr/>
+        </p:nvGraphicFramePr>
+        <p:xfrm>
+          <a:off x="6675120" y="1188720"/>
+          <a:ext cx="5074920" cy="2331720"/>
+        </p:xfrm>
+        <a:graphic>
+          <a:graphicData uri="http://schemas.openxmlformats.org/drawingml/2006/table">
+            <a:tbl>
+              <a:tblPr firstRow="1">
+                <a:tableStyleId>{5C22544A-7EE6-4342-B048-85BDC9FD1C3A}</a:tableStyleId>
+              </a:tblPr>
+              <a:tblGrid>
+                <a:gridCol w="2697480"/>
+                <a:gridCol w="1188720"/>
+                <a:gridCol w="1188720"/>
+              </a:tblGrid>
+              <a:tr h="259080">
+                <a:tc>
+                  <a:txBody>
+                    <a:bodyPr/>
+                    <a:lstStyle/>
+                    <a:p>
+                      <a:pPr algn="l"/>
+                      <a:r>
+                        <a:rPr sz="1050" b="1" i="0">
+                          <a:solidFill>
+                            <a:srgbClr val="FFFFFF"/>
+                          </a:solidFill>
+                          <a:latin typeface="Calibri"/>
+                        </a:rPr>
+                        <a:t>leg (v1.28)</a:t>
+                      </a:r>
+                    </a:p>
+                  </a:txBody>
+                  <a:tcPr marL="63500" marR="63500" marT="12700" marB="12700" anchor="ctr">
+                    <a:solidFill>
+                      <a:srgbClr val="1B3A5C"/>
+                    </a:solidFill>
+                  </a:tcPr>
+                </a:tc>
+                <a:tc>
+                  <a:txBody>
+                    <a:bodyPr/>
+                    <a:lstStyle/>
+                    <a:p>
+                      <a:pPr algn="ctr"/>
+                      <a:r>
+                        <a:rPr sz="1050" b="1" i="0">
+                          <a:solidFill>
+                            <a:srgbClr val="FFFFFF"/>
+                          </a:solidFill>
+                          <a:latin typeface="Calibri"/>
+                        </a:rPr>
+                        <a:t>tokens OCP</a:t>
+                      </a:r>
+                    </a:p>
+                  </a:txBody>
+                  <a:tcPr marL="63500" marR="63500" marT="12700" marB="12700" anchor="ctr">
+                    <a:solidFill>
+                      <a:srgbClr val="1B3A5C"/>
+                    </a:solidFill>
+                  </a:tcPr>
+                </a:tc>
+                <a:tc>
+                  <a:txBody>
+                    <a:bodyPr/>
+                    <a:lstStyle/>
+                    <a:p>
+                      <a:pPr algn="ctr"/>
+                      <a:r>
+                        <a:rPr sz="1050" b="1" i="0">
+                          <a:solidFill>
+                            <a:srgbClr val="FFFFFF"/>
+                          </a:solidFill>
+                          <a:latin typeface="Calibri"/>
+                        </a:rPr>
+                        <a:t>tokens KinD</a:t>
+                      </a:r>
+                    </a:p>
+                  </a:txBody>
+                  <a:tcPr marL="63500" marR="63500" marT="12700" marB="12700" anchor="ctr">
+                    <a:solidFill>
+                      <a:srgbClr val="1B3A5C"/>
+                    </a:solidFill>
+                  </a:tcPr>
+                </a:tc>
+              </a:tr>
+              <a:tr h="259080">
+                <a:tc>
+                  <a:txBody>
+                    <a:bodyPr/>
+                    <a:lstStyle/>
+                    <a:p>
+                      <a:pPr algn="l"/>
+                      <a:r>
+                        <a:rPr sz="1050" b="1" i="0">
+                          <a:solidFill>
+                            <a:srgbClr val="1F2A37"/>
+                          </a:solidFill>
+                          <a:latin typeface="Calibri"/>
+                        </a:rPr>
+                        <a:t>#1  gsm8k, 1 task</a:t>
+                      </a:r>
+                    </a:p>
+                  </a:txBody>
+                  <a:tcPr marL="63500" marR="63500" marT="12700" marB="12700" anchor="ctr">
+                    <a:solidFill>
+                      <a:srgbClr val="FFFFFF"/>
+                    </a:solidFill>
+                  </a:tcPr>
+                </a:tc>
+                <a:tc>
+                  <a:txBody>
+                    <a:bodyPr/>
+                    <a:lstStyle/>
+                    <a:p>
+                      <a:pPr algn="ctr"/>
+                      <a:r>
+                        <a:rPr sz="1050" b="0" i="0">
+                          <a:solidFill>
+                            <a:srgbClr val="1F2A37"/>
+                          </a:solidFill>
+                          <a:latin typeface="Calibri"/>
+                        </a:rPr>
+                        <a:t>470</a:t>
+                      </a:r>
+                    </a:p>
+                  </a:txBody>
+                  <a:tcPr marL="63500" marR="63500" marT="12700" marB="12700" anchor="ctr">
+                    <a:solidFill>
+                      <a:srgbClr val="FFFFFF"/>
+                    </a:solidFill>
+                  </a:tcPr>
+                </a:tc>
+                <a:tc>
+                  <a:txBody>
+                    <a:bodyPr/>
+                    <a:lstStyle/>
+                    <a:p>
+                      <a:pPr algn="ctr"/>
+                      <a:r>
+                        <a:rPr sz="1050" b="0" i="0">
+                          <a:solidFill>
+                            <a:srgbClr val="1F2A37"/>
+                          </a:solidFill>
+                          <a:latin typeface="Calibri"/>
+                        </a:rPr>
+                        <a:t>790</a:t>
+                      </a:r>
+                    </a:p>
+                  </a:txBody>
+                  <a:tcPr marL="63500" marR="63500" marT="12700" marB="12700" anchor="ctr">
+                    <a:solidFill>
+                      <a:srgbClr val="FFFFFF"/>
+                    </a:solidFill>
+                  </a:tcPr>
+                </a:tc>
+              </a:tr>
+              <a:tr h="259080">
+                <a:tc>
+                  <a:txBody>
+                    <a:bodyPr/>
+                    <a:lstStyle/>
+                    <a:p>
+                      <a:pPr algn="l"/>
+                      <a:r>
+                        <a:rPr sz="1050" b="1" i="0">
+                          <a:solidFill>
+                            <a:srgbClr val="1F2A37"/>
+                          </a:solidFill>
+                          <a:latin typeface="Calibri"/>
+                        </a:rPr>
+                        <a:t>#2  gsm8k, 10 tasks</a:t>
+                      </a:r>
+                    </a:p>
+                  </a:txBody>
+                  <a:tcPr marL="63500" marR="63500" marT="12700" marB="12700" anchor="ctr">
+                    <a:solidFill>
+                      <a:srgbClr val="F4F6F8"/>
+                    </a:solidFill>
+                  </a:tcPr>
+                </a:tc>
+                <a:tc>
+                  <a:txBody>
+                    <a:bodyPr/>
+                    <a:lstStyle/>
+                    <a:p>
+                      <a:pPr algn="ctr"/>
+                      <a:r>
+                        <a:rPr sz="1050" b="0" i="0">
+                          <a:solidFill>
+                            <a:srgbClr val="1F2A37"/>
+                          </a:solidFill>
+                          <a:latin typeface="Calibri"/>
+                        </a:rPr>
+                        <a:t>5.1 K</a:t>
+                      </a:r>
+                    </a:p>
+                  </a:txBody>
+                  <a:tcPr marL="63500" marR="63500" marT="12700" marB="12700" anchor="ctr">
+                    <a:solidFill>
+                      <a:srgbClr val="F4F6F8"/>
+                    </a:solidFill>
+                  </a:tcPr>
+                </a:tc>
+                <a:tc>
+                  <a:txBody>
+                    <a:bodyPr/>
+                    <a:lstStyle/>
+                    <a:p>
+                      <a:pPr algn="ctr"/>
+                      <a:r>
+                        <a:rPr sz="1050" b="0" i="0">
+                          <a:solidFill>
+                            <a:srgbClr val="1F2A37"/>
+                          </a:solidFill>
+                          <a:latin typeface="Calibri"/>
+                        </a:rPr>
+                        <a:t>5.1 K</a:t>
+                      </a:r>
+                    </a:p>
+                  </a:txBody>
+                  <a:tcPr marL="63500" marR="63500" marT="12700" marB="12700" anchor="ctr">
+                    <a:solidFill>
+                      <a:srgbClr val="F4F6F8"/>
+                    </a:solidFill>
+                  </a:tcPr>
+                </a:tc>
+              </a:tr>
+              <a:tr h="259080">
+                <a:tc>
+                  <a:txBody>
+                    <a:bodyPr/>
+                    <a:lstStyle/>
+                    <a:p>
+                      <a:pPr algn="l"/>
+                      <a:r>
+                        <a:rPr sz="1050" b="1" i="0">
+                          <a:solidFill>
+                            <a:srgbClr val="1F2A37"/>
+                          </a:solidFill>
+                          <a:latin typeface="Calibri"/>
+                        </a:rPr>
+                        <a:t>#3  gsm8k, 50 tasks p=4</a:t>
+                      </a:r>
+                    </a:p>
+                  </a:txBody>
+                  <a:tcPr marL="63500" marR="63500" marT="12700" marB="12700" anchor="ctr">
+                    <a:solidFill>
+                      <a:srgbClr val="FFFFFF"/>
+                    </a:solidFill>
+                  </a:tcPr>
+                </a:tc>
+                <a:tc>
+                  <a:txBody>
+                    <a:bodyPr/>
+                    <a:lstStyle/>
+                    <a:p>
+                      <a:pPr algn="ctr"/>
+                      <a:r>
+                        <a:rPr sz="1050" b="0" i="0">
+                          <a:solidFill>
+                            <a:srgbClr val="1F2A37"/>
+                          </a:solidFill>
+                          <a:latin typeface="Calibri"/>
+                        </a:rPr>
+                        <a:t>25 K</a:t>
+                      </a:r>
+                    </a:p>
+                  </a:txBody>
+                  <a:tcPr marL="63500" marR="63500" marT="12700" marB="12700" anchor="ctr">
+                    <a:solidFill>
+                      <a:srgbClr val="FFFFFF"/>
+                    </a:solidFill>
+                  </a:tcPr>
+                </a:tc>
+                <a:tc>
+                  <a:txBody>
+                    <a:bodyPr/>
+                    <a:lstStyle/>
+                    <a:p>
+                      <a:pPr algn="ctr"/>
+                      <a:r>
+                        <a:rPr sz="1050" b="0" i="0">
+                          <a:solidFill>
+                            <a:srgbClr val="1F2A37"/>
+                          </a:solidFill>
+                          <a:latin typeface="Calibri"/>
+                        </a:rPr>
+                        <a:t>24 K</a:t>
+                      </a:r>
+                    </a:p>
+                  </a:txBody>
+                  <a:tcPr marL="63500" marR="63500" marT="12700" marB="12700" anchor="ctr">
+                    <a:solidFill>
+                      <a:srgbClr val="FFFFFF"/>
+                    </a:solidFill>
+                  </a:tcPr>
+                </a:tc>
+              </a:tr>
+              <a:tr h="259080">
+                <a:tc>
+                  <a:txBody>
+                    <a:bodyPr/>
+                    <a:lstStyle/>
+                    <a:p>
+                      <a:pPr algn="l"/>
+                      <a:r>
+                        <a:rPr sz="1050" b="1" i="0">
+                          <a:solidFill>
+                            <a:srgbClr val="1F2A37"/>
+                          </a:solidFill>
+                          <a:latin typeface="Calibri"/>
+                        </a:rPr>
+                        <a:t>#9  tau2, 10 tasks</a:t>
+                      </a:r>
+                    </a:p>
+                  </a:txBody>
+                  <a:tcPr marL="63500" marR="63500" marT="12700" marB="12700" anchor="ctr">
+                    <a:solidFill>
+                      <a:srgbClr val="F4F6F8"/>
+                    </a:solidFill>
+                  </a:tcPr>
+                </a:tc>
+                <a:tc>
+                  <a:txBody>
+                    <a:bodyPr/>
+                    <a:lstStyle/>
+                    <a:p>
+                      <a:pPr algn="ctr"/>
+                      <a:r>
+                        <a:rPr sz="1050" b="0" i="0">
+                          <a:solidFill>
+                            <a:srgbClr val="1F2A37"/>
+                          </a:solidFill>
+                          <a:latin typeface="Calibri"/>
+                        </a:rPr>
+                        <a:t>1.01 M</a:t>
+                      </a:r>
+                    </a:p>
+                  </a:txBody>
+                  <a:tcPr marL="63500" marR="63500" marT="12700" marB="12700" anchor="ctr">
+                    <a:solidFill>
+                      <a:srgbClr val="F4F6F8"/>
+                    </a:solidFill>
+                  </a:tcPr>
+                </a:tc>
+                <a:tc>
+                  <a:txBody>
+                    <a:bodyPr/>
+                    <a:lstStyle/>
+                    <a:p>
+                      <a:pPr algn="ctr"/>
+                      <a:r>
+                        <a:rPr sz="1050" b="0" i="0">
+                          <a:solidFill>
+                            <a:srgbClr val="1F2A37"/>
+                          </a:solidFill>
+                          <a:latin typeface="Calibri"/>
+                        </a:rPr>
+                        <a:t>1.04 M</a:t>
+                      </a:r>
+                    </a:p>
+                  </a:txBody>
+                  <a:tcPr marL="63500" marR="63500" marT="12700" marB="12700" anchor="ctr">
+                    <a:solidFill>
+                      <a:srgbClr val="F4F6F8"/>
+                    </a:solidFill>
+                  </a:tcPr>
+                </a:tc>
+              </a:tr>
+              <a:tr h="259080">
+                <a:tc>
+                  <a:txBody>
+                    <a:bodyPr/>
+                    <a:lstStyle/>
+                    <a:p>
+                      <a:pPr algn="l"/>
+                      <a:r>
+                        <a:rPr sz="1050" b="1" i="0">
+                          <a:solidFill>
+                            <a:srgbClr val="1F2A37"/>
+                          </a:solidFill>
+                          <a:latin typeface="Calibri"/>
+                        </a:rPr>
+                        <a:t>#10  tau2, 20 tasks p=4</a:t>
+                      </a:r>
+                    </a:p>
+                  </a:txBody>
+                  <a:tcPr marL="63500" marR="63500" marT="12700" marB="12700" anchor="ctr">
+                    <a:solidFill>
+                      <a:srgbClr val="FFFFFF"/>
+                    </a:solidFill>
+                  </a:tcPr>
+                </a:tc>
+                <a:tc>
+                  <a:txBody>
+                    <a:bodyPr/>
+                    <a:lstStyle/>
+                    <a:p>
+                      <a:pPr algn="ctr"/>
+                      <a:r>
+                        <a:rPr sz="1050" b="0" i="0">
+                          <a:solidFill>
+                            <a:srgbClr val="1F2A37"/>
+                          </a:solidFill>
+                          <a:latin typeface="Calibri"/>
+                        </a:rPr>
+                        <a:t>1.74 M</a:t>
+                      </a:r>
+                    </a:p>
+                  </a:txBody>
+                  <a:tcPr marL="63500" marR="63500" marT="12700" marB="12700" anchor="ctr">
+                    <a:solidFill>
+                      <a:srgbClr val="FFFFFF"/>
+                    </a:solidFill>
+                  </a:tcPr>
+                </a:tc>
+                <a:tc>
+                  <a:txBody>
+                    <a:bodyPr/>
+                    <a:lstStyle/>
+                    <a:p>
+                      <a:pPr algn="ctr"/>
+                      <a:r>
+                        <a:rPr sz="1050" b="0" i="0">
+                          <a:solidFill>
+                            <a:srgbClr val="1F2A37"/>
+                          </a:solidFill>
+                          <a:latin typeface="Calibri"/>
+                        </a:rPr>
+                        <a:t>1.78 M</a:t>
+                      </a:r>
+                    </a:p>
+                  </a:txBody>
+                  <a:tcPr marL="63500" marR="63500" marT="12700" marB="12700" anchor="ctr">
+                    <a:solidFill>
+                      <a:srgbClr val="FFFFFF"/>
+                    </a:solidFill>
+                  </a:tcPr>
+                </a:tc>
+              </a:tr>
+              <a:tr h="259080">
+                <a:tc>
+                  <a:txBody>
+                    <a:bodyPr/>
+                    <a:lstStyle/>
+                    <a:p>
+                      <a:pPr algn="l"/>
+                      <a:r>
+                        <a:rPr sz="1050" b="1" i="0">
+                          <a:solidFill>
+                            <a:srgbClr val="1F2A37"/>
+                          </a:solidFill>
+                          <a:latin typeface="Calibri"/>
+                        </a:rPr>
+                        <a:t>#11  appworld, 5 tasks</a:t>
+                      </a:r>
+                    </a:p>
+                  </a:txBody>
+                  <a:tcPr marL="63500" marR="63500" marT="12700" marB="12700" anchor="ctr">
+                    <a:solidFill>
+                      <a:srgbClr val="F4F6F8"/>
+                    </a:solidFill>
+                  </a:tcPr>
+                </a:tc>
+                <a:tc>
+                  <a:txBody>
+                    <a:bodyPr/>
+                    <a:lstStyle/>
+                    <a:p>
+                      <a:pPr algn="ctr"/>
+                      <a:r>
+                        <a:rPr sz="1050" b="0" i="0">
+                          <a:solidFill>
+                            <a:srgbClr val="1F2A37"/>
+                          </a:solidFill>
+                          <a:latin typeface="Calibri"/>
+                        </a:rPr>
+                        <a:t>1.49 M</a:t>
+                      </a:r>
+                    </a:p>
+                  </a:txBody>
+                  <a:tcPr marL="63500" marR="63500" marT="12700" marB="12700" anchor="ctr">
+                    <a:solidFill>
+                      <a:srgbClr val="F4F6F8"/>
+                    </a:solidFill>
+                  </a:tcPr>
+                </a:tc>
+                <a:tc>
+                  <a:txBody>
+                    <a:bodyPr/>
+                    <a:lstStyle/>
+                    <a:p>
+                      <a:pPr algn="ctr"/>
+                      <a:r>
+                        <a:rPr sz="1050" b="0" i="0">
+                          <a:solidFill>
+                            <a:srgbClr val="1F2A37"/>
+                          </a:solidFill>
+                          <a:latin typeface="Calibri"/>
+                        </a:rPr>
+                        <a:t>0.93 M</a:t>
+                      </a:r>
+                    </a:p>
+                  </a:txBody>
+                  <a:tcPr marL="63500" marR="63500" marT="12700" marB="12700" anchor="ctr">
+                    <a:solidFill>
+                      <a:srgbClr val="F4F6F8"/>
+                    </a:solidFill>
+                  </a:tcPr>
+                </a:tc>
+              </a:tr>
+              <a:tr h="259080">
+                <a:tc>
+                  <a:txBody>
+                    <a:bodyPr/>
+                    <a:lstStyle/>
+                    <a:p>
+                      <a:pPr algn="l"/>
+                      <a:r>
+                        <a:rPr sz="1050" b="1" i="0">
+                          <a:solidFill>
+                            <a:srgbClr val="1F2A37"/>
+                          </a:solidFill>
+                          <a:latin typeface="Calibri"/>
+                        </a:rPr>
+                        <a:t>#12  appworld, 20 tasks p=4</a:t>
+                      </a:r>
+                    </a:p>
+                  </a:txBody>
+                  <a:tcPr marL="63500" marR="63500" marT="12700" marB="12700" anchor="ctr">
+                    <a:solidFill>
+                      <a:srgbClr val="FFFFFF"/>
+                    </a:solidFill>
+                  </a:tcPr>
+                </a:tc>
+                <a:tc>
+                  <a:txBody>
+                    <a:bodyPr/>
+                    <a:lstStyle/>
+                    <a:p>
+                      <a:pPr algn="ctr"/>
+                      <a:r>
+                        <a:rPr sz="1050" b="0" i="0">
+                          <a:solidFill>
+                            <a:srgbClr val="1F2A37"/>
+                          </a:solidFill>
+                          <a:latin typeface="Calibri"/>
+                        </a:rPr>
+                        <a:t>5.71 M</a:t>
+                      </a:r>
+                    </a:p>
+                  </a:txBody>
+                  <a:tcPr marL="63500" marR="63500" marT="12700" marB="12700" anchor="ctr">
+                    <a:solidFill>
+                      <a:srgbClr val="FFFFFF"/>
+                    </a:solidFill>
+                  </a:tcPr>
+                </a:tc>
+                <a:tc>
+                  <a:txBody>
+                    <a:bodyPr/>
+                    <a:lstStyle/>
+                    <a:p>
+                      <a:pPr algn="ctr"/>
+                      <a:r>
+                        <a:rPr sz="1050" b="0" i="0">
+                          <a:solidFill>
+                            <a:srgbClr val="1F2A37"/>
+                          </a:solidFill>
+                          <a:latin typeface="Calibri"/>
+                        </a:rPr>
+                        <a:t>2.20 M</a:t>
+                      </a:r>
+                    </a:p>
+                  </a:txBody>
+                  <a:tcPr marL="63500" marR="63500" marT="12700" marB="12700" anchor="ctr">
+                    <a:solidFill>
+                      <a:srgbClr val="FFFFFF"/>
+                    </a:solidFill>
+                  </a:tcPr>
+                </a:tc>
+              </a:tr>
+              <a:tr h="259080">
+                <a:tc>
+                  <a:txBody>
+                    <a:bodyPr/>
+                    <a:lstStyle/>
+                    <a:p>
+                      <a:pPr algn="l"/>
+                      <a:r>
+                        <a:rPr sz="1050" b="1" i="0">
+                          <a:solidFill>
+                            <a:srgbClr val="1F2A37"/>
+                          </a:solidFill>
+                          <a:latin typeface="Calibri"/>
+                        </a:rPr>
+                        <a:t>all 12 legs</a:t>
+                      </a:r>
+                    </a:p>
+                  </a:txBody>
+                  <a:tcPr marL="63500" marR="63500" marT="12700" marB="12700" anchor="ctr">
+                    <a:solidFill>
+                      <a:srgbClr val="F4F6F8"/>
+                    </a:solidFill>
+                  </a:tcPr>
+                </a:tc>
+                <a:tc>
+                  <a:txBody>
+                    <a:bodyPr/>
+                    <a:lstStyle/>
+                    <a:p>
+                      <a:pPr algn="ctr"/>
+                      <a:r>
+                        <a:rPr sz="1050" b="0" i="0">
+                          <a:solidFill>
+                            <a:srgbClr val="1F2A37"/>
+                          </a:solidFill>
+                          <a:latin typeface="Calibri"/>
+                        </a:rPr>
+                        <a:t>10.0 M</a:t>
+                      </a:r>
+                    </a:p>
+                  </a:txBody>
+                  <a:tcPr marL="63500" marR="63500" marT="12700" marB="12700" anchor="ctr">
+                    <a:solidFill>
+                      <a:srgbClr val="F4F6F8"/>
+                    </a:solidFill>
+                  </a:tcPr>
+                </a:tc>
+                <a:tc>
+                  <a:txBody>
+                    <a:bodyPr/>
+                    <a:lstStyle/>
+                    <a:p>
+                      <a:pPr algn="ctr"/>
+                      <a:r>
+                        <a:rPr sz="1050" b="0" i="0">
+                          <a:solidFill>
+                            <a:srgbClr val="1F2A37"/>
+                          </a:solidFill>
+                          <a:latin typeface="Calibri"/>
+                        </a:rPr>
+                        <a:t>6.0 M</a:t>
+                      </a:r>
+                    </a:p>
+                  </a:txBody>
+                  <a:tcPr marL="63500" marR="63500" marT="12700" marB="12700" anchor="ctr">
+                    <a:solidFill>
+                      <a:srgbClr val="F4F6F8"/>
+                    </a:solidFill>
+                  </a:tcPr>
+                </a:tc>
+              </a:tr>
+            </a:tbl>
+          </a:graphicData>
+        </a:graphic>
+      </p:graphicFrame>
+      <p:sp>
+        <p:nvSpPr>
+          <p:cNvPr id="5" name="Rounded Rectangle 4"/>
+          <p:cNvSpPr/>
+          <p:nvPr/>
+        </p:nvSpPr>
+        <p:spPr>
+          <a:xfrm>
+            <a:off x="411480" y="3703320"/>
+            <a:ext cx="5989320" cy="1234440"/>
+          </a:xfrm>
+          <a:prstGeom prst="roundRect">
+            <a:avLst/>
+          </a:prstGeom>
+          <a:solidFill>
+            <a:srgbClr val="E4F0F0"/>
+          </a:solidFill>
+          <a:ln w="12700">
+            <a:solidFill>
+              <a:srgbClr val="3D6E70"/>
+            </a:solidFill>
+          </a:ln>
+          <a:effectLst/>
+        </p:spPr>
+        <p:style>
+          <a:lnRef idx="1">
+            <a:schemeClr val="accent1"/>
+          </a:lnRef>
+          <a:fillRef idx="3">
+            <a:schemeClr val="accent1"/>
+          </a:fillRef>
+          <a:effectRef idx="2">
+            <a:schemeClr val="accent1"/>
+          </a:effectRef>
+          <a:fontRef idx="minor">
+            <a:schemeClr val="lt1"/>
+          </a:fontRef>
+        </p:style>
+        <p:txBody>
+          <a:bodyPr rtlCol="0" anchor="ctr" wrap="square" tIns="25400" bIns="25400"/>
+          <a:lstStyle/>
+          <a:p>
+            <a:pPr algn="ctr"/>
+            <a:r>
+              <a:rPr sz="1400" b="1" i="0">
+                <a:solidFill>
+                  <a:srgbClr val="3D6E70"/>
+                </a:solidFill>
+                <a:latin typeface="Calibri"/>
+              </a:rPr>
+              <a:t>Budget by benchmark, not by task count</a:t>
+            </a:r>
+          </a:p>
+          <a:p>
+            <a:pPr algn="ctr"/>
+            <a:r>
+              <a:rPr sz="1100" b="0" i="0">
+                <a:solidFill>
+                  <a:srgbClr val="1F2A37"/>
+                </a:solidFill>
+                <a:latin typeface="Calibri"/>
+              </a:rPr>
+              <a:t>The eight gsm8k legs together are 0.4% of the matrix's token bill (0.8% on KinD). appworld's two legs are 72% of it (52% on KinD). A 50-task gsm8k leg is cheaper than a SINGLE appworld task — 25 K tokens against 295 K.</a:t>
+            </a:r>
+          </a:p>
+        </p:txBody>
+      </p:sp>
+      <p:sp>
+        <p:nvSpPr>
+          <p:cNvPr id="6" name="Rounded Rectangle 5"/>
+          <p:cNvSpPr/>
+          <p:nvPr/>
+        </p:nvSpPr>
+        <p:spPr>
+          <a:xfrm>
+            <a:off x="6675120" y="3703320"/>
+            <a:ext cx="5074920" cy="1234440"/>
+          </a:xfrm>
+          <a:prstGeom prst="roundRect">
+            <a:avLst/>
+          </a:prstGeom>
+          <a:solidFill>
+            <a:srgbClr val="FBEEE4"/>
+          </a:solidFill>
+          <a:ln w="12700">
+            <a:solidFill>
+              <a:srgbClr val="B55A2E"/>
+            </a:solidFill>
+          </a:ln>
+          <a:effectLst/>
+        </p:spPr>
+        <p:style>
+          <a:lnRef idx="1">
+            <a:schemeClr val="accent1"/>
+          </a:lnRef>
+          <a:fillRef idx="3">
+            <a:schemeClr val="accent1"/>
+          </a:fillRef>
+          <a:effectRef idx="2">
+            <a:schemeClr val="accent1"/>
+          </a:effectRef>
+          <a:fontRef idx="minor">
+            <a:schemeClr val="lt1"/>
+          </a:fontRef>
+        </p:style>
+        <p:txBody>
+          <a:bodyPr rtlCol="0" anchor="ctr" wrap="square" tIns="25400" bIns="25400"/>
+          <a:lstStyle/>
+          <a:p>
+            <a:pPr algn="ctr"/>
+            <a:r>
+              <a:rPr sz="1400" b="1" i="0">
+                <a:solidFill>
+                  <a:srgbClr val="B55A2E"/>
+                </a:solidFill>
+                <a:latin typeface="Calibri"/>
+              </a:rPr>
+              <a:t>Two legs of the same size are not the same bill</a:t>
+            </a:r>
+          </a:p>
+          <a:p>
+            <a:pPr algn="ctr"/>
+            <a:r>
+              <a:rPr sz="1100" b="0" i="0">
+                <a:solidFill>
+                  <a:srgbClr val="1F2A37"/>
+                </a:solidFill>
+                <a:latin typeface="Calibri"/>
+              </a:rPr>
+              <a:t>#12 cost 2.6x more on OpenShift than on KinD for the same 20 requested tasks: appworld turn counts are nondeterministic, and the slower cluster's tasks ran longer before the 600 s timeout. Size appworld on YOUR cluster.</a:t>
+            </a:r>
+          </a:p>
+        </p:txBody>
+      </p:sp>
+      <p:sp>
+        <p:nvSpPr>
+          <p:cNvPr id="7" name="Rounded Rectangle 6"/>
+          <p:cNvSpPr/>
+          <p:nvPr/>
+        </p:nvSpPr>
+        <p:spPr>
+          <a:xfrm>
+            <a:off x="411480" y="5120640"/>
+            <a:ext cx="11338560" cy="1188720"/>
+          </a:xfrm>
+          <a:prstGeom prst="roundRect">
+            <a:avLst/>
+          </a:prstGeom>
+          <a:solidFill>
+            <a:srgbClr val="EEEFF1"/>
+          </a:solidFill>
+          <a:ln w="12700">
+            <a:solidFill>
+              <a:srgbClr val="6B6B6B"/>
+            </a:solidFill>
+          </a:ln>
+          <a:effectLst/>
+        </p:spPr>
+        <p:style>
+          <a:lnRef idx="1">
+            <a:schemeClr val="accent1"/>
+          </a:lnRef>
+          <a:fillRef idx="3">
+            <a:schemeClr val="accent1"/>
+          </a:fillRef>
+          <a:effectRef idx="2">
+            <a:schemeClr val="accent1"/>
+          </a:effectRef>
+          <a:fontRef idx="minor">
+            <a:schemeClr val="lt1"/>
+          </a:fontRef>
+        </p:style>
+        <p:txBody>
+          <a:bodyPr rtlCol="0" anchor="ctr" wrap="square" tIns="25400" bIns="25400" lIns="228600" rIns="228600"/>
+          <a:lstStyle/>
+          <a:p>
+            <a:pPr algn="ctr"/>
+            <a:r>
+              <a:rPr sz="1250" b="1" i="0">
+                <a:solidFill>
+                  <a:srgbClr val="1F2A37"/>
+                </a:solidFill>
+                <a:latin typeface="Calibri"/>
+              </a:rPr>
+              <a:t>And the totals UNDERSTATE it three ways:  a task killed by the per-task timeout burns tokens but leaves no report row, so appworld's 15 timed-out tasks are missing from the numbers above.  tau2's user simulator runs in the MCP pod, which is not instrumented — its inference is billed by the gateway and counted nowhere here.  And a leg that replays the gateway's completion cache re-reports stored usage for calls that were never made upstream.</a:t>
+            </a:r>
+          </a:p>
+        </p:txBody>
+      </p:sp>
+      <p:sp>
+        <p:nvSpPr>
+          <p:cNvPr id="8" name="TextBox 7"/>
+          <p:cNvSpPr txBox="1"/>
+          <p:nvPr/>
+        </p:nvSpPr>
+        <p:spPr>
+          <a:xfrm>
+            <a:off x="11795760" y="6437376"/>
+            <a:ext cx="320040" cy="310896"/>
+          </a:xfrm>
+          <a:prstGeom prst="rect">
+            <a:avLst/>
+          </a:prstGeom>
+          <a:noFill/>
+        </p:spPr>
+        <p:txBody>
+          <a:bodyPr wrap="none" anchor="ctr" lIns="0" rIns="0" tIns="0" bIns="0">
+            <a:spAutoFit/>
+          </a:bodyPr>
+          <a:lstStyle/>
+          <a:p>
+            <a:pPr algn="r">
+              <a:spcAft>
+                <a:spcPts val="300"/>
+              </a:spcAft>
+            </a:pPr>
+            <a:r>
+              <a:rPr sz="1200" b="0" i="0">
+                <a:solidFill>
+                  <a:srgbClr val="6B6B6B"/>
+                </a:solidFill>
+                <a:latin typeface="Calibri"/>
+              </a:rPr>
+              <a:t>14</a:t>
+            </a:r>
+          </a:p>
+        </p:txBody>
+      </p:sp>
+    </p:spTree>
+  </p:cSld>
+  <p:clrMapOvr>
+    <a:masterClrMapping/>
+  </p:clrMapOvr>
+</p:sld>
+</file>
+
+<file path=ppt/slides/slide15.xml><?xml version="1.0" encoding="utf-8"?>
+<p:sld xmlns:a="http://schemas.openxmlformats.org/drawingml/2006/main" xmlns:p="http://schemas.openxmlformats.org/presentationml/2006/main" xmlns:r="http://schemas.openxmlformats.org/officeDocument/2006/relationships">
+  <p:cSld name="7.5 The Cost Model — Tokens, Models, Money">
+    <p:spTree>
+      <p:nvGrpSpPr>
+        <p:cNvPr id="1" name=""/>
+        <p:cNvGrpSpPr/>
+        <p:nvPr/>
+      </p:nvGrpSpPr>
+      <p:grpSpPr/>
+      <p:sp>
+        <p:nvSpPr>
+          <p:cNvPr id="2" name="Rectangle 1"/>
+          <p:cNvSpPr/>
+          <p:nvPr/>
+        </p:nvSpPr>
+        <p:spPr>
+          <a:xfrm>
+            <a:off x="0" y="0"/>
+            <a:ext cx="12192000" cy="950000"/>
+          </a:xfrm>
+          <a:prstGeom prst="rect">
+            <a:avLst/>
+          </a:prstGeom>
+          <a:solidFill>
+            <a:srgbClr val="1B3A5C"/>
+          </a:solidFill>
+          <a:ln>
+            <a:noFill/>
+          </a:ln>
+          <a:effectLst/>
+        </p:spPr>
+        <p:style>
+          <a:lnRef idx="1">
+            <a:schemeClr val="accent1"/>
+          </a:lnRef>
+          <a:fillRef idx="3">
+            <a:schemeClr val="accent1"/>
+          </a:fillRef>
+          <a:effectRef idx="2">
+            <a:schemeClr val="accent1"/>
+          </a:effectRef>
+          <a:fontRef idx="minor">
+            <a:schemeClr val="lt1"/>
+          </a:fontRef>
+        </p:style>
+        <p:txBody>
+          <a:bodyPr rtlCol="0" anchor="ctr" lIns="355600"/>
+          <a:lstStyle/>
+          <a:p>
+            <a:pPr algn="ctr"/>
+            <a:r>
+              <a:rPr sz="2600" b="1" i="0">
+                <a:solidFill>
+                  <a:srgbClr val="FFFFFF"/>
+                </a:solidFill>
+                <a:latin typeface="Calibri"/>
+              </a:rPr>
+              <a:t>7.5  The Cost Model — Tokens, Models, Money</a:t>
+            </a:r>
+          </a:p>
+          <a:p>
+            <a:r>
+              <a:rPr sz="1400" b="0" i="0">
+                <a:solidFill>
+                  <a:srgbClr val="C9D9EC"/>
+                </a:solidFill>
+                <a:latin typeface="Calibri"/>
+              </a:rPr>
+              <a:t>What a task costs, what a model choice costs, and the one ratio that decides it</a:t>
+            </a:r>
+          </a:p>
+        </p:txBody>
+      </p:sp>
+      <p:graphicFrame>
+        <p:nvGraphicFramePr>
+          <p:cNvPr id="3" name="Table 2"/>
+          <p:cNvGraphicFramePr>
+            <a:graphicFrameLocks noGrp="1"/>
+          </p:cNvGraphicFramePr>
+          <p:nvPr/>
+        </p:nvGraphicFramePr>
+        <p:xfrm>
+          <a:off x="411480" y="1188720"/>
+          <a:ext cx="5623560" cy="3703320"/>
+        </p:xfrm>
+        <a:graphic>
+          <a:graphicData uri="http://schemas.openxmlformats.org/drawingml/2006/table">
+            <a:tbl>
+              <a:tblPr firstRow="1">
+                <a:tableStyleId>{5C22544A-7EE6-4342-B048-85BDC9FD1C3A}</a:tableStyleId>
+              </a:tblPr>
+              <a:tblGrid>
+                <a:gridCol w="2194560"/>
+                <a:gridCol w="1143000"/>
+                <a:gridCol w="1143000"/>
+                <a:gridCol w="1143000"/>
+              </a:tblGrid>
+              <a:tr h="336665">
+                <a:tc>
+                  <a:txBody>
+                    <a:bodyPr/>
+                    <a:lstStyle/>
+                    <a:p>
+                      <a:pPr algn="l"/>
+                      <a:r>
+                        <a:rPr sz="1050" b="1" i="0">
+                          <a:solidFill>
+                            <a:srgbClr val="FFFFFF"/>
+                          </a:solidFill>
+                          <a:latin typeface="Calibri"/>
+                        </a:rPr>
+                        <a:t>per task, pooled</a:t>
+                      </a:r>
+                    </a:p>
+                  </a:txBody>
+                  <a:tcPr marL="63500" marR="63500" marT="12700" marB="12700" anchor="ctr">
+                    <a:solidFill>
+                      <a:srgbClr val="1B3A5C"/>
+                    </a:solidFill>
+                  </a:tcPr>
+                </a:tc>
+                <a:tc>
+                  <a:txBody>
+                    <a:bodyPr/>
+                    <a:lstStyle/>
+                    <a:p>
+                      <a:pPr algn="ctr"/>
+                      <a:r>
+                        <a:rPr sz="1050" b="1" i="0">
+                          <a:solidFill>
+                            <a:srgbClr val="FFFFFF"/>
+                          </a:solidFill>
+                          <a:latin typeface="Calibri"/>
+                        </a:rPr>
+                        <a:t>gsm8k</a:t>
+                      </a:r>
+                    </a:p>
+                  </a:txBody>
+                  <a:tcPr marL="63500" marR="63500" marT="12700" marB="12700" anchor="ctr">
+                    <a:solidFill>
+                      <a:srgbClr val="1B3A5C"/>
+                    </a:solidFill>
+                  </a:tcPr>
+                </a:tc>
+                <a:tc>
+                  <a:txBody>
+                    <a:bodyPr/>
+                    <a:lstStyle/>
+                    <a:p>
+                      <a:pPr algn="ctr"/>
+                      <a:r>
+                        <a:rPr sz="1050" b="1" i="0">
+                          <a:solidFill>
+                            <a:srgbClr val="FFFFFF"/>
+                          </a:solidFill>
+                          <a:latin typeface="Calibri"/>
+                        </a:rPr>
+                        <a:t>tau2</a:t>
+                      </a:r>
+                    </a:p>
+                  </a:txBody>
+                  <a:tcPr marL="63500" marR="63500" marT="12700" marB="12700" anchor="ctr">
+                    <a:solidFill>
+                      <a:srgbClr val="1B3A5C"/>
+                    </a:solidFill>
+                  </a:tcPr>
+                </a:tc>
+                <a:tc>
+                  <a:txBody>
+                    <a:bodyPr/>
+                    <a:lstStyle/>
+                    <a:p>
+                      <a:pPr algn="ctr"/>
+                      <a:r>
+                        <a:rPr sz="1050" b="1" i="0">
+                          <a:solidFill>
+                            <a:srgbClr val="FFFFFF"/>
+                          </a:solidFill>
+                          <a:latin typeface="Calibri"/>
+                        </a:rPr>
+                        <a:t>appworld</a:t>
+                      </a:r>
+                    </a:p>
+                  </a:txBody>
+                  <a:tcPr marL="63500" marR="63500" marT="12700" marB="12700" anchor="ctr">
+                    <a:solidFill>
+                      <a:srgbClr val="1B3A5C"/>
+                    </a:solidFill>
+                  </a:tcPr>
+                </a:tc>
+              </a:tr>
+              <a:tr h="336665">
+                <a:tc>
+                  <a:txBody>
+                    <a:bodyPr/>
+                    <a:lstStyle/>
+                    <a:p>
+                      <a:pPr algn="l"/>
+                      <a:r>
+                        <a:rPr sz="1050" b="1" i="0">
+                          <a:solidFill>
+                            <a:srgbClr val="1F2A37"/>
+                          </a:solidFill>
+                          <a:latin typeface="Calibri"/>
+                        </a:rPr>
+                        <a:t>LLM calls</a:t>
+                      </a:r>
+                    </a:p>
+                  </a:txBody>
+                  <a:tcPr marL="63500" marR="63500" marT="12700" marB="12700" anchor="ctr">
+                    <a:solidFill>
+                      <a:srgbClr val="FFFFFF"/>
+                    </a:solidFill>
+                  </a:tcPr>
+                </a:tc>
+                <a:tc>
+                  <a:txBody>
+                    <a:bodyPr/>
+                    <a:lstStyle/>
+                    <a:p>
+                      <a:pPr algn="ctr"/>
+                      <a:r>
+                        <a:rPr sz="1050" b="0" i="0">
+                          <a:solidFill>
+                            <a:srgbClr val="1F2A37"/>
+                          </a:solidFill>
+                          <a:latin typeface="Calibri"/>
+                        </a:rPr>
+                        <a:t>1.10</a:t>
+                      </a:r>
+                    </a:p>
+                  </a:txBody>
+                  <a:tcPr marL="63500" marR="63500" marT="12700" marB="12700" anchor="ctr">
+                    <a:solidFill>
+                      <a:srgbClr val="FFFFFF"/>
+                    </a:solidFill>
+                  </a:tcPr>
+                </a:tc>
+                <a:tc>
+                  <a:txBody>
+                    <a:bodyPr/>
+                    <a:lstStyle/>
+                    <a:p>
+                      <a:pPr algn="ctr"/>
+                      <a:r>
+                        <a:rPr sz="1050" b="0" i="0">
+                          <a:solidFill>
+                            <a:srgbClr val="1F2A37"/>
+                          </a:solidFill>
+                          <a:latin typeface="Calibri"/>
+                        </a:rPr>
+                        <a:t>11.38</a:t>
+                      </a:r>
+                    </a:p>
+                  </a:txBody>
+                  <a:tcPr marL="63500" marR="63500" marT="12700" marB="12700" anchor="ctr">
+                    <a:solidFill>
+                      <a:srgbClr val="FFFFFF"/>
+                    </a:solidFill>
+                  </a:tcPr>
+                </a:tc>
+                <a:tc>
+                  <a:txBody>
+                    <a:bodyPr/>
+                    <a:lstStyle/>
+                    <a:p>
+                      <a:pPr algn="ctr"/>
+                      <a:r>
+                        <a:rPr sz="1050" b="0" i="0">
+                          <a:solidFill>
+                            <a:srgbClr val="1F2A37"/>
+                          </a:solidFill>
+                          <a:latin typeface="Calibri"/>
+                        </a:rPr>
+                        <a:t>29.20</a:t>
+                      </a:r>
+                    </a:p>
+                  </a:txBody>
+                  <a:tcPr marL="63500" marR="63500" marT="12700" marB="12700" anchor="ctr">
+                    <a:solidFill>
+                      <a:srgbClr val="FFFFFF"/>
+                    </a:solidFill>
+                  </a:tcPr>
+                </a:tc>
+              </a:tr>
+              <a:tr h="336665">
+                <a:tc>
+                  <a:txBody>
+                    <a:bodyPr/>
+                    <a:lstStyle/>
+                    <a:p>
+                      <a:pPr algn="l"/>
+                      <a:r>
+                        <a:rPr sz="1050" b="1" i="0">
+                          <a:solidFill>
+                            <a:srgbClr val="1F2A37"/>
+                          </a:solidFill>
+                          <a:latin typeface="Calibri"/>
+                        </a:rPr>
+                        <a:t>input tokens</a:t>
+                      </a:r>
+                    </a:p>
+                  </a:txBody>
+                  <a:tcPr marL="63500" marR="63500" marT="12700" marB="12700" anchor="ctr">
+                    <a:solidFill>
+                      <a:srgbClr val="F4F6F8"/>
+                    </a:solidFill>
+                  </a:tcPr>
+                </a:tc>
+                <a:tc>
+                  <a:txBody>
+                    <a:bodyPr/>
+                    <a:lstStyle/>
+                    <a:p>
+                      <a:pPr algn="ctr"/>
+                      <a:r>
+                        <a:rPr sz="1050" b="0" i="0">
+                          <a:solidFill>
+                            <a:srgbClr val="1F2A37"/>
+                          </a:solidFill>
+                          <a:latin typeface="Calibri"/>
+                        </a:rPr>
+                        <a:t>341</a:t>
+                      </a:r>
+                    </a:p>
+                  </a:txBody>
+                  <a:tcPr marL="63500" marR="63500" marT="12700" marB="12700" anchor="ctr">
+                    <a:solidFill>
+                      <a:srgbClr val="F4F6F8"/>
+                    </a:solidFill>
+                  </a:tcPr>
+                </a:tc>
+                <a:tc>
+                  <a:txBody>
+                    <a:bodyPr/>
+                    <a:lstStyle/>
+                    <a:p>
+                      <a:pPr algn="ctr"/>
+                      <a:r>
+                        <a:rPr sz="1050" b="0" i="0">
+                          <a:solidFill>
+                            <a:srgbClr val="1F2A37"/>
+                          </a:solidFill>
+                          <a:latin typeface="Calibri"/>
+                        </a:rPr>
+                        <a:t>90,902</a:t>
+                      </a:r>
+                    </a:p>
+                  </a:txBody>
+                  <a:tcPr marL="63500" marR="63500" marT="12700" marB="12700" anchor="ctr">
+                    <a:solidFill>
+                      <a:srgbClr val="F4F6F8"/>
+                    </a:solidFill>
+                  </a:tcPr>
+                </a:tc>
+                <a:tc>
+                  <a:txBody>
+                    <a:bodyPr/>
+                    <a:lstStyle/>
+                    <a:p>
+                      <a:pPr algn="ctr"/>
+                      <a:r>
+                        <a:rPr sz="1050" b="0" i="0">
+                          <a:solidFill>
+                            <a:srgbClr val="1F2A37"/>
+                          </a:solidFill>
+                          <a:latin typeface="Calibri"/>
+                        </a:rPr>
+                        <a:t>269,953</a:t>
+                      </a:r>
+                    </a:p>
+                  </a:txBody>
+                  <a:tcPr marL="63500" marR="63500" marT="12700" marB="12700" anchor="ctr">
+                    <a:solidFill>
+                      <a:srgbClr val="F4F6F8"/>
+                    </a:solidFill>
+                  </a:tcPr>
+                </a:tc>
+              </a:tr>
+              <a:tr h="336665">
+                <a:tc>
+                  <a:txBody>
+                    <a:bodyPr/>
+                    <a:lstStyle/>
+                    <a:p>
+                      <a:pPr algn="l"/>
+                      <a:r>
+                        <a:rPr sz="1050" b="1" i="0">
+                          <a:solidFill>
+                            <a:srgbClr val="1F2A37"/>
+                          </a:solidFill>
+                          <a:latin typeface="Calibri"/>
+                        </a:rPr>
+                        <a:t>output tokens</a:t>
+                      </a:r>
+                    </a:p>
+                  </a:txBody>
+                  <a:tcPr marL="63500" marR="63500" marT="12700" marB="12700" anchor="ctr">
+                    <a:solidFill>
+                      <a:srgbClr val="FFFFFF"/>
+                    </a:solidFill>
+                  </a:tcPr>
+                </a:tc>
+                <a:tc>
+                  <a:txBody>
+                    <a:bodyPr/>
+                    <a:lstStyle/>
+                    <a:p>
+                      <a:pPr algn="ctr"/>
+                      <a:r>
+                        <a:rPr sz="1050" b="0" i="0">
+                          <a:solidFill>
+                            <a:srgbClr val="1F2A37"/>
+                          </a:solidFill>
+                          <a:latin typeface="Calibri"/>
+                        </a:rPr>
+                        <a:t>180</a:t>
+                      </a:r>
+                    </a:p>
+                  </a:txBody>
+                  <a:tcPr marL="63500" marR="63500" marT="12700" marB="12700" anchor="ctr">
+                    <a:solidFill>
+                      <a:srgbClr val="FFFFFF"/>
+                    </a:solidFill>
+                  </a:tcPr>
+                </a:tc>
+                <a:tc>
+                  <a:txBody>
+                    <a:bodyPr/>
+                    <a:lstStyle/>
+                    <a:p>
+                      <a:pPr algn="ctr"/>
+                      <a:r>
+                        <a:rPr sz="1050" b="0" i="0">
+                          <a:solidFill>
+                            <a:srgbClr val="1F2A37"/>
+                          </a:solidFill>
+                          <a:latin typeface="Calibri"/>
+                        </a:rPr>
+                        <a:t>2,061</a:t>
+                      </a:r>
+                    </a:p>
+                  </a:txBody>
+                  <a:tcPr marL="63500" marR="63500" marT="12700" marB="12700" anchor="ctr">
+                    <a:solidFill>
+                      <a:srgbClr val="FFFFFF"/>
+                    </a:solidFill>
+                  </a:tcPr>
+                </a:tc>
+                <a:tc>
+                  <a:txBody>
+                    <a:bodyPr/>
+                    <a:lstStyle/>
+                    <a:p>
+                      <a:pPr algn="ctr"/>
+                      <a:r>
+                        <a:rPr sz="1050" b="0" i="0">
+                          <a:solidFill>
+                            <a:srgbClr val="1F2A37"/>
+                          </a:solidFill>
+                          <a:latin typeface="Calibri"/>
+                        </a:rPr>
+                        <a:t>25,140</a:t>
+                      </a:r>
+                    </a:p>
+                  </a:txBody>
+                  <a:tcPr marL="63500" marR="63500" marT="12700" marB="12700" anchor="ctr">
+                    <a:solidFill>
+                      <a:srgbClr val="FFFFFF"/>
+                    </a:solidFill>
+                  </a:tcPr>
+                </a:tc>
+              </a:tr>
+              <a:tr h="336665">
+                <a:tc>
+                  <a:txBody>
+                    <a:bodyPr/>
+                    <a:lstStyle/>
+                    <a:p>
+                      <a:pPr algn="l"/>
+                      <a:r>
+                        <a:rPr sz="1050" b="1" i="0">
+                          <a:solidFill>
+                            <a:srgbClr val="1F2A37"/>
+                          </a:solidFill>
+                          <a:latin typeface="Calibri"/>
+                        </a:rPr>
+                        <a:t>total tokens</a:t>
+                      </a:r>
+                    </a:p>
+                  </a:txBody>
+                  <a:tcPr marL="63500" marR="63500" marT="12700" marB="12700" anchor="ctr">
+                    <a:solidFill>
+                      <a:srgbClr val="F4F6F8"/>
+                    </a:solidFill>
+                  </a:tcPr>
+                </a:tc>
+                <a:tc>
+                  <a:txBody>
+                    <a:bodyPr/>
+                    <a:lstStyle/>
+                    <a:p>
+                      <a:pPr algn="ctr"/>
+                      <a:r>
+                        <a:rPr sz="1050" b="0" i="0">
+                          <a:solidFill>
+                            <a:srgbClr val="1F2A37"/>
+                          </a:solidFill>
+                          <a:latin typeface="Calibri"/>
+                        </a:rPr>
+                        <a:t>520</a:t>
+                      </a:r>
+                    </a:p>
+                  </a:txBody>
+                  <a:tcPr marL="63500" marR="63500" marT="12700" marB="12700" anchor="ctr">
+                    <a:solidFill>
+                      <a:srgbClr val="F4F6F8"/>
+                    </a:solidFill>
+                  </a:tcPr>
+                </a:tc>
+                <a:tc>
+                  <a:txBody>
+                    <a:bodyPr/>
+                    <a:lstStyle/>
+                    <a:p>
+                      <a:pPr algn="ctr"/>
+                      <a:r>
+                        <a:rPr sz="1050" b="0" i="0">
+                          <a:solidFill>
+                            <a:srgbClr val="1F2A37"/>
+                          </a:solidFill>
+                          <a:latin typeface="Calibri"/>
+                        </a:rPr>
+                        <a:t>92,963</a:t>
+                      </a:r>
+                    </a:p>
+                  </a:txBody>
+                  <a:tcPr marL="63500" marR="63500" marT="12700" marB="12700" anchor="ctr">
+                    <a:solidFill>
+                      <a:srgbClr val="F4F6F8"/>
+                    </a:solidFill>
+                  </a:tcPr>
+                </a:tc>
+                <a:tc>
+                  <a:txBody>
+                    <a:bodyPr/>
+                    <a:lstStyle/>
+                    <a:p>
+                      <a:pPr algn="ctr"/>
+                      <a:r>
+                        <a:rPr sz="1050" b="0" i="0">
+                          <a:solidFill>
+                            <a:srgbClr val="1F2A37"/>
+                          </a:solidFill>
+                          <a:latin typeface="Calibri"/>
+                        </a:rPr>
+                        <a:t>295,093</a:t>
+                      </a:r>
+                    </a:p>
+                  </a:txBody>
+                  <a:tcPr marL="63500" marR="63500" marT="12700" marB="12700" anchor="ctr">
+                    <a:solidFill>
+                      <a:srgbClr val="F4F6F8"/>
+                    </a:solidFill>
+                  </a:tcPr>
+                </a:tc>
+              </a:tr>
+              <a:tr h="336665">
+                <a:tc>
+                  <a:txBody>
+                    <a:bodyPr/>
+                    <a:lstStyle/>
+                    <a:p>
+                      <a:pPr algn="l"/>
+                      <a:r>
+                        <a:rPr sz="1050" b="1" i="0">
+                          <a:solidFill>
+                            <a:srgbClr val="1F2A37"/>
+                          </a:solidFill>
+                          <a:latin typeface="Calibri"/>
+                        </a:rPr>
+                        <a:t>x a gsm8k task</a:t>
+                      </a:r>
+                    </a:p>
+                  </a:txBody>
+                  <a:tcPr marL="63500" marR="63500" marT="12700" marB="12700" anchor="ctr">
+                    <a:solidFill>
+                      <a:srgbClr val="FFFFFF"/>
+                    </a:solidFill>
+                  </a:tcPr>
+                </a:tc>
+                <a:tc>
+                  <a:txBody>
+                    <a:bodyPr/>
+                    <a:lstStyle/>
+                    <a:p>
+                      <a:pPr algn="ctr"/>
+                      <a:r>
+                        <a:rPr sz="1050" b="0" i="0">
+                          <a:solidFill>
+                            <a:srgbClr val="1F2A37"/>
+                          </a:solidFill>
+                          <a:latin typeface="Calibri"/>
+                        </a:rPr>
+                        <a:t>1x</a:t>
+                      </a:r>
+                    </a:p>
+                  </a:txBody>
+                  <a:tcPr marL="63500" marR="63500" marT="12700" marB="12700" anchor="ctr">
+                    <a:solidFill>
+                      <a:srgbClr val="FFFFFF"/>
+                    </a:solidFill>
+                  </a:tcPr>
+                </a:tc>
+                <a:tc>
+                  <a:txBody>
+                    <a:bodyPr/>
+                    <a:lstStyle/>
+                    <a:p>
+                      <a:pPr algn="ctr"/>
+                      <a:r>
+                        <a:rPr sz="1050" b="0" i="0">
+                          <a:solidFill>
+                            <a:srgbClr val="1F2A37"/>
+                          </a:solidFill>
+                          <a:latin typeface="Calibri"/>
+                        </a:rPr>
+                        <a:t>179x</a:t>
+                      </a:r>
+                    </a:p>
+                  </a:txBody>
+                  <a:tcPr marL="63500" marR="63500" marT="12700" marB="12700" anchor="ctr">
+                    <a:solidFill>
+                      <a:srgbClr val="FFFFFF"/>
+                    </a:solidFill>
+                  </a:tcPr>
+                </a:tc>
+                <a:tc>
+                  <a:txBody>
+                    <a:bodyPr/>
+                    <a:lstStyle/>
+                    <a:p>
+                      <a:pPr algn="ctr"/>
+                      <a:r>
+                        <a:rPr sz="1050" b="0" i="0">
+                          <a:solidFill>
+                            <a:srgbClr val="1F2A37"/>
+                          </a:solidFill>
+                          <a:latin typeface="Calibri"/>
+                        </a:rPr>
+                        <a:t>567x</a:t>
+                      </a:r>
+                    </a:p>
+                  </a:txBody>
+                  <a:tcPr marL="63500" marR="63500" marT="12700" marB="12700" anchor="ctr">
+                    <a:solidFill>
+                      <a:srgbClr val="FFFFFF"/>
+                    </a:solidFill>
+                  </a:tcPr>
+                </a:tc>
+              </a:tr>
+              <a:tr h="336665">
+                <a:tc>
+                  <a:txBody>
+                    <a:bodyPr/>
+                    <a:lstStyle/>
+                    <a:p>
+                      <a:pPr algn="l"/>
+                      <a:r>
+                        <a:rPr sz="1050" b="1" i="0">
+                          <a:solidFill>
+                            <a:srgbClr val="1F2A37"/>
+                          </a:solidFill>
+                          <a:latin typeface="Calibri"/>
+                        </a:rPr>
+                        <a:t>input share of tokens</a:t>
+                      </a:r>
+                    </a:p>
+                  </a:txBody>
+                  <a:tcPr marL="63500" marR="63500" marT="12700" marB="12700" anchor="ctr">
+                    <a:solidFill>
+                      <a:srgbClr val="F4F6F8"/>
+                    </a:solidFill>
+                  </a:tcPr>
+                </a:tc>
+                <a:tc>
+                  <a:txBody>
+                    <a:bodyPr/>
+                    <a:lstStyle/>
+                    <a:p>
+                      <a:pPr algn="ctr"/>
+                      <a:r>
+                        <a:rPr sz="1050" b="0" i="0">
+                          <a:solidFill>
+                            <a:srgbClr val="1F2A37"/>
+                          </a:solidFill>
+                          <a:latin typeface="Calibri"/>
+                        </a:rPr>
+                        <a:t>66%</a:t>
+                      </a:r>
+                    </a:p>
+                  </a:txBody>
+                  <a:tcPr marL="63500" marR="63500" marT="12700" marB="12700" anchor="ctr">
+                    <a:solidFill>
+                      <a:srgbClr val="F4F6F8"/>
+                    </a:solidFill>
+                  </a:tcPr>
+                </a:tc>
+                <a:tc>
+                  <a:txBody>
+                    <a:bodyPr/>
+                    <a:lstStyle/>
+                    <a:p>
+                      <a:pPr algn="ctr"/>
+                      <a:r>
+                        <a:rPr sz="1050" b="0" i="0">
+                          <a:solidFill>
+                            <a:srgbClr val="1F2A37"/>
+                          </a:solidFill>
+                          <a:latin typeface="Calibri"/>
+                        </a:rPr>
+                        <a:t>98%</a:t>
+                      </a:r>
+                    </a:p>
+                  </a:txBody>
+                  <a:tcPr marL="63500" marR="63500" marT="12700" marB="12700" anchor="ctr">
+                    <a:solidFill>
+                      <a:srgbClr val="F4F6F8"/>
+                    </a:solidFill>
+                  </a:tcPr>
+                </a:tc>
+                <a:tc>
+                  <a:txBody>
+                    <a:bodyPr/>
+                    <a:lstStyle/>
+                    <a:p>
+                      <a:pPr algn="ctr"/>
+                      <a:r>
+                        <a:rPr sz="1050" b="0" i="0">
+                          <a:solidFill>
+                            <a:srgbClr val="1F2A37"/>
+                          </a:solidFill>
+                          <a:latin typeface="Calibri"/>
+                        </a:rPr>
+                        <a:t>92%</a:t>
+                      </a:r>
+                    </a:p>
+                  </a:txBody>
+                  <a:tcPr marL="63500" marR="63500" marT="12700" marB="12700" anchor="ctr">
+                    <a:solidFill>
+                      <a:srgbClr val="F4F6F8"/>
+                    </a:solidFill>
+                  </a:tcPr>
+                </a:tc>
+              </a:tr>
+              <a:tr h="336665">
+                <a:tc>
+                  <a:txBody>
+                    <a:bodyPr/>
+                    <a:lstStyle/>
+                    <a:p>
+                      <a:pPr algn="l"/>
+                      <a:r>
+                        <a:rPr sz="1050" b="1" i="0">
+                          <a:solidFill>
+                            <a:srgbClr val="1F2A37"/>
+                          </a:solidFill>
+                          <a:latin typeface="Calibri"/>
+                        </a:rPr>
+                        <a:t>median task latency</a:t>
+                      </a:r>
+                    </a:p>
+                  </a:txBody>
+                  <a:tcPr marL="63500" marR="63500" marT="12700" marB="12700" anchor="ctr">
+                    <a:solidFill>
+                      <a:srgbClr val="FFFFFF"/>
+                    </a:solidFill>
+                  </a:tcPr>
+                </a:tc>
+                <a:tc>
+                  <a:txBody>
+                    <a:bodyPr/>
+                    <a:lstStyle/>
+                    <a:p>
+                      <a:pPr algn="ctr"/>
+                      <a:r>
+                        <a:rPr sz="1050" b="0" i="0">
+                          <a:solidFill>
+                            <a:srgbClr val="1F2A37"/>
+                          </a:solidFill>
+                          <a:latin typeface="Calibri"/>
+                        </a:rPr>
+                        <a:t>4.9 s</a:t>
+                      </a:r>
+                    </a:p>
+                  </a:txBody>
+                  <a:tcPr marL="63500" marR="63500" marT="12700" marB="12700" anchor="ctr">
+                    <a:solidFill>
+                      <a:srgbClr val="FFFFFF"/>
+                    </a:solidFill>
+                  </a:tcPr>
+                </a:tc>
+                <a:tc>
+                  <a:txBody>
+                    <a:bodyPr/>
+                    <a:lstStyle/>
+                    <a:p>
+                      <a:pPr algn="ctr"/>
+                      <a:r>
+                        <a:rPr sz="1050" b="0" i="0">
+                          <a:solidFill>
+                            <a:srgbClr val="1F2A37"/>
+                          </a:solidFill>
+                          <a:latin typeface="Calibri"/>
+                        </a:rPr>
+                        <a:t>84 s</a:t>
+                      </a:r>
+                    </a:p>
+                  </a:txBody>
+                  <a:tcPr marL="63500" marR="63500" marT="12700" marB="12700" anchor="ctr">
+                    <a:solidFill>
+                      <a:srgbClr val="FFFFFF"/>
+                    </a:solidFill>
+                  </a:tcPr>
+                </a:tc>
+                <a:tc>
+                  <a:txBody>
+                    <a:bodyPr/>
+                    <a:lstStyle/>
+                    <a:p>
+                      <a:pPr algn="ctr"/>
+                      <a:r>
+                        <a:rPr sz="1050" b="0" i="0">
+                          <a:solidFill>
+                            <a:srgbClr val="1F2A37"/>
+                          </a:solidFill>
+                          <a:latin typeface="Calibri"/>
+                        </a:rPr>
+                        <a:t>264 s</a:t>
+                      </a:r>
+                    </a:p>
+                  </a:txBody>
+                  <a:tcPr marL="63500" marR="63500" marT="12700" marB="12700" anchor="ctr">
+                    <a:solidFill>
+                      <a:srgbClr val="FFFFFF"/>
+                    </a:solidFill>
+                  </a:tcPr>
+                </a:tc>
+              </a:tr>
+              <a:tr h="336665">
+                <a:tc>
+                  <a:txBody>
+                    <a:bodyPr/>
+                    <a:lstStyle/>
+                    <a:p>
+                      <a:pPr algn="l"/>
+                      <a:r>
+                        <a:rPr sz="1050" b="1" i="0">
+                          <a:solidFill>
+                            <a:srgbClr val="1F2A37"/>
+                          </a:solidFill>
+                          <a:latin typeface="Calibri"/>
+                        </a:rPr>
+                        <a:t>… of it inside model calls</a:t>
+                      </a:r>
+                    </a:p>
+                  </a:txBody>
+                  <a:tcPr marL="63500" marR="63500" marT="12700" marB="12700" anchor="ctr">
+                    <a:solidFill>
+                      <a:srgbClr val="F4F6F8"/>
+                    </a:solidFill>
+                  </a:tcPr>
+                </a:tc>
+                <a:tc>
+                  <a:txBody>
+                    <a:bodyPr/>
+                    <a:lstStyle/>
+                    <a:p>
+                      <a:pPr algn="ctr"/>
+                      <a:r>
+                        <a:rPr sz="1050" b="0" i="0">
+                          <a:solidFill>
+                            <a:srgbClr val="1F2A37"/>
+                          </a:solidFill>
+                          <a:latin typeface="Calibri"/>
+                        </a:rPr>
+                        <a:t>90%</a:t>
+                      </a:r>
+                    </a:p>
+                  </a:txBody>
+                  <a:tcPr marL="63500" marR="63500" marT="12700" marB="12700" anchor="ctr">
+                    <a:solidFill>
+                      <a:srgbClr val="F4F6F8"/>
+                    </a:solidFill>
+                  </a:tcPr>
+                </a:tc>
+                <a:tc>
+                  <a:txBody>
+                    <a:bodyPr/>
+                    <a:lstStyle/>
+                    <a:p>
+                      <a:pPr algn="ctr"/>
+                      <a:r>
+                        <a:rPr sz="1050" b="0" i="0">
+                          <a:solidFill>
+                            <a:srgbClr val="1F2A37"/>
+                          </a:solidFill>
+                          <a:latin typeface="Calibri"/>
+                        </a:rPr>
+                        <a:t>58%</a:t>
+                      </a:r>
+                    </a:p>
+                  </a:txBody>
+                  <a:tcPr marL="63500" marR="63500" marT="12700" marB="12700" anchor="ctr">
+                    <a:solidFill>
+                      <a:srgbClr val="F4F6F8"/>
+                    </a:solidFill>
+                  </a:tcPr>
+                </a:tc>
+                <a:tc>
+                  <a:txBody>
+                    <a:bodyPr/>
+                    <a:lstStyle/>
+                    <a:p>
+                      <a:pPr algn="ctr"/>
+                      <a:r>
+                        <a:rPr sz="1050" b="0" i="0">
+                          <a:solidFill>
+                            <a:srgbClr val="1F2A37"/>
+                          </a:solidFill>
+                          <a:latin typeface="Calibri"/>
+                        </a:rPr>
+                        <a:t>96%</a:t>
+                      </a:r>
+                    </a:p>
+                  </a:txBody>
+                  <a:tcPr marL="63500" marR="63500" marT="12700" marB="12700" anchor="ctr">
+                    <a:solidFill>
+                      <a:srgbClr val="F4F6F8"/>
+                    </a:solidFill>
+                  </a:tcPr>
+                </a:tc>
+              </a:tr>
+              <a:tr h="336665">
+                <a:tc>
+                  <a:txBody>
+                    <a:bodyPr/>
+                    <a:lstStyle/>
+                    <a:p>
+                      <a:pPr algn="l"/>
+                      <a:r>
+                        <a:rPr sz="1050" b="1" i="0">
+                          <a:solidFill>
+                            <a:srgbClr val="1F2A37"/>
+                          </a:solidFill>
+                          <a:latin typeface="Calibri"/>
+                        </a:rPr>
+                        <a:t>pass rate</a:t>
+                      </a:r>
+                    </a:p>
+                  </a:txBody>
+                  <a:tcPr marL="63500" marR="63500" marT="12700" marB="12700" anchor="ctr">
+                    <a:solidFill>
+                      <a:srgbClr val="FFFFFF"/>
+                    </a:solidFill>
+                  </a:tcPr>
+                </a:tc>
+                <a:tc>
+                  <a:txBody>
+                    <a:bodyPr/>
+                    <a:lstStyle/>
+                    <a:p>
+                      <a:pPr algn="ctr"/>
+                      <a:r>
+                        <a:rPr sz="1050" b="0" i="0">
+                          <a:solidFill>
+                            <a:srgbClr val="1F2A37"/>
+                          </a:solidFill>
+                          <a:latin typeface="Calibri"/>
+                        </a:rPr>
+                        <a:t>0.97</a:t>
+                      </a:r>
+                    </a:p>
+                  </a:txBody>
+                  <a:tcPr marL="63500" marR="63500" marT="12700" marB="12700" anchor="ctr">
+                    <a:solidFill>
+                      <a:srgbClr val="FFFFFF"/>
+                    </a:solidFill>
+                  </a:tcPr>
+                </a:tc>
+                <a:tc>
+                  <a:txBody>
+                    <a:bodyPr/>
+                    <a:lstStyle/>
+                    <a:p>
+                      <a:pPr algn="ctr"/>
+                      <a:r>
+                        <a:rPr sz="1050" b="0" i="0">
+                          <a:solidFill>
+                            <a:srgbClr val="1F2A37"/>
+                          </a:solidFill>
+                          <a:latin typeface="Calibri"/>
+                        </a:rPr>
+                        <a:t>0.83</a:t>
+                      </a:r>
+                    </a:p>
+                  </a:txBody>
+                  <a:tcPr marL="63500" marR="63500" marT="12700" marB="12700" anchor="ctr">
+                    <a:solidFill>
+                      <a:srgbClr val="FFFFFF"/>
+                    </a:solidFill>
+                  </a:tcPr>
+                </a:tc>
+                <a:tc>
+                  <a:txBody>
+                    <a:bodyPr/>
+                    <a:lstStyle/>
+                    <a:p>
+                      <a:pPr algn="ctr"/>
+                      <a:r>
+                        <a:rPr sz="1050" b="0" i="0">
+                          <a:solidFill>
+                            <a:srgbClr val="1F2A37"/>
+                          </a:solidFill>
+                          <a:latin typeface="Calibri"/>
+                        </a:rPr>
+                        <a:t>0.00</a:t>
+                      </a:r>
+                    </a:p>
+                  </a:txBody>
+                  <a:tcPr marL="63500" marR="63500" marT="12700" marB="12700" anchor="ctr">
+                    <a:solidFill>
+                      <a:srgbClr val="FFFFFF"/>
+                    </a:solidFill>
+                  </a:tcPr>
+                </a:tc>
+              </a:tr>
+              <a:tr h="336670">
+                <a:tc>
+                  <a:txBody>
+                    <a:bodyPr/>
+                    <a:lstStyle/>
+                    <a:p>
+                      <a:pPr algn="l"/>
+                      <a:r>
+                        <a:rPr sz="1050" b="1" i="0">
+                          <a:solidFill>
+                            <a:srgbClr val="1F2A37"/>
+                          </a:solidFill>
+                          <a:latin typeface="Calibri"/>
+                        </a:rPr>
+                        <a:t>tokens per PASSED task</a:t>
+                      </a:r>
+                    </a:p>
+                  </a:txBody>
+                  <a:tcPr marL="63500" marR="63500" marT="12700" marB="12700" anchor="ctr">
+                    <a:solidFill>
+                      <a:srgbClr val="F4F6F8"/>
+                    </a:solidFill>
+                  </a:tcPr>
+                </a:tc>
+                <a:tc>
+                  <a:txBody>
+                    <a:bodyPr/>
+                    <a:lstStyle/>
+                    <a:p>
+                      <a:pPr algn="ctr"/>
+                      <a:r>
+                        <a:rPr sz="1050" b="0" i="0">
+                          <a:solidFill>
+                            <a:srgbClr val="1F2A37"/>
+                          </a:solidFill>
+                          <a:latin typeface="Calibri"/>
+                        </a:rPr>
+                        <a:t>537</a:t>
+                      </a:r>
+                    </a:p>
+                  </a:txBody>
+                  <a:tcPr marL="63500" marR="63500" marT="12700" marB="12700" anchor="ctr">
+                    <a:solidFill>
+                      <a:srgbClr val="F4F6F8"/>
+                    </a:solidFill>
+                  </a:tcPr>
+                </a:tc>
+                <a:tc>
+                  <a:txBody>
+                    <a:bodyPr/>
+                    <a:lstStyle/>
+                    <a:p>
+                      <a:pPr algn="ctr"/>
+                      <a:r>
+                        <a:rPr sz="1050" b="0" i="0">
+                          <a:solidFill>
+                            <a:srgbClr val="1F2A37"/>
+                          </a:solidFill>
+                          <a:latin typeface="Calibri"/>
+                        </a:rPr>
+                        <a:t>112 K</a:t>
+                      </a:r>
+                    </a:p>
+                  </a:txBody>
+                  <a:tcPr marL="63500" marR="63500" marT="12700" marB="12700" anchor="ctr">
+                    <a:solidFill>
+                      <a:srgbClr val="F4F6F8"/>
+                    </a:solidFill>
+                  </a:tcPr>
+                </a:tc>
+                <a:tc>
+                  <a:txBody>
+                    <a:bodyPr/>
+                    <a:lstStyle/>
+                    <a:p>
+                      <a:pPr algn="ctr"/>
+                      <a:r>
+                        <a:rPr sz="1050" b="0" i="0">
+                          <a:solidFill>
+                            <a:srgbClr val="1F2A37"/>
+                          </a:solidFill>
+                          <a:latin typeface="Calibri"/>
+                        </a:rPr>
+                        <a:t>no finite value</a:t>
+                      </a:r>
+                    </a:p>
+                  </a:txBody>
+                  <a:tcPr marL="63500" marR="63500" marT="12700" marB="12700" anchor="ctr">
+                    <a:solidFill>
+                      <a:srgbClr val="F4F6F8"/>
+                    </a:solidFill>
+                  </a:tcPr>
+                </a:tc>
+              </a:tr>
+            </a:tbl>
+          </a:graphicData>
+        </a:graphic>
+      </p:graphicFrame>
+      <p:graphicFrame>
+        <p:nvGraphicFramePr>
+          <p:cNvPr id="4" name="Table 3"/>
+          <p:cNvGraphicFramePr>
+            <a:graphicFrameLocks noGrp="1"/>
+          </p:cNvGraphicFramePr>
+          <p:nvPr/>
+        </p:nvGraphicFramePr>
+        <p:xfrm>
+          <a:off x="6309360" y="1188720"/>
+          <a:ext cx="5440680" cy="2377440"/>
+        </p:xfrm>
+        <a:graphic>
+          <a:graphicData uri="http://schemas.openxmlformats.org/drawingml/2006/table">
+            <a:tbl>
+              <a:tblPr firstRow="1">
+                <a:tableStyleId>{5C22544A-7EE6-4342-B048-85BDC9FD1C3A}</a:tableStyleId>
+              </a:tblPr>
+              <a:tblGrid>
+                <a:gridCol w="2514600"/>
+                <a:gridCol w="1463040"/>
+                <a:gridCol w="1463040"/>
+              </a:tblGrid>
+              <a:tr h="339634">
+                <a:tc>
+                  <a:txBody>
+                    <a:bodyPr/>
+                    <a:lstStyle/>
+                    <a:p>
+                      <a:pPr algn="l"/>
+                      <a:r>
+                        <a:rPr sz="1050" b="1" i="0">
+                          <a:solidFill>
+                            <a:srgbClr val="FFFFFF"/>
+                          </a:solidFill>
+                          <a:latin typeface="Calibri"/>
+                        </a:rPr>
+                        <a:t>same 5 gsm8k tasks, p=4</a:t>
+                      </a:r>
+                    </a:p>
+                  </a:txBody>
+                  <a:tcPr marL="63500" marR="63500" marT="12700" marB="12700" anchor="ctr">
+                    <a:solidFill>
+                      <a:srgbClr val="1B3A5C"/>
+                    </a:solidFill>
+                  </a:tcPr>
+                </a:tc>
+                <a:tc>
+                  <a:txBody>
+                    <a:bodyPr/>
+                    <a:lstStyle/>
+                    <a:p>
+                      <a:pPr algn="ctr"/>
+                      <a:r>
+                        <a:rPr sz="1050" b="1" i="0">
+                          <a:solidFill>
+                            <a:srgbClr val="FFFFFF"/>
+                          </a:solidFill>
+                          <a:latin typeface="Calibri"/>
+                        </a:rPr>
+                        <a:t>gpt-4.1</a:t>
+                      </a:r>
+                    </a:p>
+                  </a:txBody>
+                  <a:tcPr marL="63500" marR="63500" marT="12700" marB="12700" anchor="ctr">
+                    <a:solidFill>
+                      <a:srgbClr val="1B3A5C"/>
+                    </a:solidFill>
+                  </a:tcPr>
+                </a:tc>
+                <a:tc>
+                  <a:txBody>
+                    <a:bodyPr/>
+                    <a:lstStyle/>
+                    <a:p>
+                      <a:pPr algn="ctr"/>
+                      <a:r>
+                        <a:rPr sz="1050" b="1" i="0">
+                          <a:solidFill>
+                            <a:srgbClr val="FFFFFF"/>
+                          </a:solidFill>
+                          <a:latin typeface="Calibri"/>
+                        </a:rPr>
+                        <a:t>gpt-5-mini</a:t>
+                      </a:r>
+                    </a:p>
+                  </a:txBody>
+                  <a:tcPr marL="63500" marR="63500" marT="12700" marB="12700" anchor="ctr">
+                    <a:solidFill>
+                      <a:srgbClr val="1B3A5C"/>
+                    </a:solidFill>
+                  </a:tcPr>
+                </a:tc>
+              </a:tr>
+              <a:tr h="339634">
+                <a:tc>
+                  <a:txBody>
+                    <a:bodyPr/>
+                    <a:lstStyle/>
+                    <a:p>
+                      <a:pPr algn="l"/>
+                      <a:r>
+                        <a:rPr sz="1050" b="1" i="0">
+                          <a:solidFill>
+                            <a:srgbClr val="1F2A37"/>
+                          </a:solidFill>
+                          <a:latin typeface="Calibri"/>
+                        </a:rPr>
+                        <a:t>pass rate  (OCP / KinD)</a:t>
+                      </a:r>
+                    </a:p>
+                  </a:txBody>
+                  <a:tcPr marL="63500" marR="63500" marT="12700" marB="12700" anchor="ctr">
+                    <a:solidFill>
+                      <a:srgbClr val="FFFFFF"/>
+                    </a:solidFill>
+                  </a:tcPr>
+                </a:tc>
+                <a:tc>
+                  <a:txBody>
+                    <a:bodyPr/>
+                    <a:lstStyle/>
+                    <a:p>
+                      <a:pPr algn="ctr"/>
+                      <a:r>
+                        <a:rPr sz="1050" b="0" i="0">
+                          <a:solidFill>
+                            <a:srgbClr val="1F2A37"/>
+                          </a:solidFill>
+                          <a:latin typeface="Calibri"/>
+                        </a:rPr>
+                        <a:t>0.80 / 1.00</a:t>
+                      </a:r>
+                    </a:p>
+                  </a:txBody>
+                  <a:tcPr marL="63500" marR="63500" marT="12700" marB="12700" anchor="ctr">
+                    <a:solidFill>
+                      <a:srgbClr val="FFFFFF"/>
+                    </a:solidFill>
+                  </a:tcPr>
+                </a:tc>
+                <a:tc>
+                  <a:txBody>
+                    <a:bodyPr/>
+                    <a:lstStyle/>
+                    <a:p>
+                      <a:pPr algn="ctr"/>
+                      <a:r>
+                        <a:rPr sz="1050" b="0" i="0">
+                          <a:solidFill>
+                            <a:srgbClr val="1F2A37"/>
+                          </a:solidFill>
+                          <a:latin typeface="Calibri"/>
+                        </a:rPr>
+                        <a:t>1.00 / 1.00</a:t>
+                      </a:r>
+                    </a:p>
+                  </a:txBody>
+                  <a:tcPr marL="63500" marR="63500" marT="12700" marB="12700" anchor="ctr">
+                    <a:solidFill>
+                      <a:srgbClr val="FFFFFF"/>
+                    </a:solidFill>
+                  </a:tcPr>
+                </a:tc>
+              </a:tr>
+              <a:tr h="339634">
+                <a:tc>
+                  <a:txBody>
+                    <a:bodyPr/>
+                    <a:lstStyle/>
+                    <a:p>
+                      <a:pPr algn="l"/>
+                      <a:r>
+                        <a:rPr sz="1050" b="1" i="0">
+                          <a:solidFill>
+                            <a:srgbClr val="1F2A37"/>
+                          </a:solidFill>
+                          <a:latin typeface="Calibri"/>
+                        </a:rPr>
+                        <a:t>LLM calls per task</a:t>
+                      </a:r>
+                    </a:p>
+                  </a:txBody>
+                  <a:tcPr marL="63500" marR="63500" marT="12700" marB="12700" anchor="ctr">
+                    <a:solidFill>
+                      <a:srgbClr val="F4F6F8"/>
+                    </a:solidFill>
+                  </a:tcPr>
+                </a:tc>
+                <a:tc>
+                  <a:txBody>
+                    <a:bodyPr/>
+                    <a:lstStyle/>
+                    <a:p>
+                      <a:pPr algn="ctr"/>
+                      <a:r>
+                        <a:rPr sz="1050" b="0" i="0">
+                          <a:solidFill>
+                            <a:srgbClr val="1F2A37"/>
+                          </a:solidFill>
+                          <a:latin typeface="Calibri"/>
+                        </a:rPr>
+                        <a:t>2.8 – 3.0</a:t>
+                      </a:r>
+                    </a:p>
+                  </a:txBody>
+                  <a:tcPr marL="63500" marR="63500" marT="12700" marB="12700" anchor="ctr">
+                    <a:solidFill>
+                      <a:srgbClr val="F4F6F8"/>
+                    </a:solidFill>
+                  </a:tcPr>
+                </a:tc>
+                <a:tc>
+                  <a:txBody>
+                    <a:bodyPr/>
+                    <a:lstStyle/>
+                    <a:p>
+                      <a:pPr algn="ctr"/>
+                      <a:r>
+                        <a:rPr sz="1050" b="0" i="0">
+                          <a:solidFill>
+                            <a:srgbClr val="1F2A37"/>
+                          </a:solidFill>
+                          <a:latin typeface="Calibri"/>
+                        </a:rPr>
+                        <a:t>1.0</a:t>
+                      </a:r>
+                    </a:p>
+                  </a:txBody>
+                  <a:tcPr marL="63500" marR="63500" marT="12700" marB="12700" anchor="ctr">
+                    <a:solidFill>
+                      <a:srgbClr val="F4F6F8"/>
+                    </a:solidFill>
+                  </a:tcPr>
+                </a:tc>
+              </a:tr>
+              <a:tr h="339634">
+                <a:tc>
+                  <a:txBody>
+                    <a:bodyPr/>
+                    <a:lstStyle/>
+                    <a:p>
+                      <a:pPr algn="l"/>
+                      <a:r>
+                        <a:rPr sz="1050" b="1" i="0">
+                          <a:solidFill>
+                            <a:srgbClr val="1F2A37"/>
+                          </a:solidFill>
+                          <a:latin typeface="Calibri"/>
+                        </a:rPr>
+                        <a:t>input tokens per task</a:t>
+                      </a:r>
+                    </a:p>
+                  </a:txBody>
+                  <a:tcPr marL="63500" marR="63500" marT="12700" marB="12700" anchor="ctr">
+                    <a:solidFill>
+                      <a:srgbClr val="FFFFFF"/>
+                    </a:solidFill>
+                  </a:tcPr>
+                </a:tc>
+                <a:tc>
+                  <a:txBody>
+                    <a:bodyPr/>
+                    <a:lstStyle/>
+                    <a:p>
+                      <a:pPr algn="ctr"/>
+                      <a:r>
+                        <a:rPr sz="1050" b="0" i="0">
+                          <a:solidFill>
+                            <a:srgbClr val="1F2A37"/>
+                          </a:solidFill>
+                          <a:latin typeface="Calibri"/>
+                        </a:rPr>
+                        <a:t>775 – 837</a:t>
+                      </a:r>
+                    </a:p>
+                  </a:txBody>
+                  <a:tcPr marL="63500" marR="63500" marT="12700" marB="12700" anchor="ctr">
+                    <a:solidFill>
+                      <a:srgbClr val="FFFFFF"/>
+                    </a:solidFill>
+                  </a:tcPr>
+                </a:tc>
+                <a:tc>
+                  <a:txBody>
+                    <a:bodyPr/>
+                    <a:lstStyle/>
+                    <a:p>
+                      <a:pPr algn="ctr"/>
+                      <a:r>
+                        <a:rPr sz="1050" b="0" i="0">
+                          <a:solidFill>
+                            <a:srgbClr val="1F2A37"/>
+                          </a:solidFill>
+                          <a:latin typeface="Calibri"/>
+                        </a:rPr>
+                        <a:t>313</a:t>
+                      </a:r>
+                    </a:p>
+                  </a:txBody>
+                  <a:tcPr marL="63500" marR="63500" marT="12700" marB="12700" anchor="ctr">
+                    <a:solidFill>
+                      <a:srgbClr val="FFFFFF"/>
+                    </a:solidFill>
+                  </a:tcPr>
+                </a:tc>
+              </a:tr>
+              <a:tr h="339634">
+                <a:tc>
+                  <a:txBody>
+                    <a:bodyPr/>
+                    <a:lstStyle/>
+                    <a:p>
+                      <a:pPr algn="l"/>
+                      <a:r>
+                        <a:rPr sz="1050" b="1" i="0">
+                          <a:solidFill>
+                            <a:srgbClr val="1F2A37"/>
+                          </a:solidFill>
+                          <a:latin typeface="Calibri"/>
+                        </a:rPr>
+                        <a:t>output tokens per task</a:t>
+                      </a:r>
+                    </a:p>
+                  </a:txBody>
+                  <a:tcPr marL="63500" marR="63500" marT="12700" marB="12700" anchor="ctr">
+                    <a:solidFill>
+                      <a:srgbClr val="F4F6F8"/>
+                    </a:solidFill>
+                  </a:tcPr>
+                </a:tc>
+                <a:tc>
+                  <a:txBody>
+                    <a:bodyPr/>
+                    <a:lstStyle/>
+                    <a:p>
+                      <a:pPr algn="ctr"/>
+                      <a:r>
+                        <a:rPr sz="1050" b="0" i="0">
+                          <a:solidFill>
+                            <a:srgbClr val="1F2A37"/>
+                          </a:solidFill>
+                          <a:latin typeface="Calibri"/>
+                        </a:rPr>
+                        <a:t>57 – 63</a:t>
+                      </a:r>
+                    </a:p>
+                  </a:txBody>
+                  <a:tcPr marL="63500" marR="63500" marT="12700" marB="12700" anchor="ctr">
+                    <a:solidFill>
+                      <a:srgbClr val="F4F6F8"/>
+                    </a:solidFill>
+                  </a:tcPr>
+                </a:tc>
+                <a:tc>
+                  <a:txBody>
+                    <a:bodyPr/>
+                    <a:lstStyle/>
+                    <a:p>
+                      <a:pPr algn="ctr"/>
+                      <a:r>
+                        <a:rPr sz="1050" b="0" i="0">
+                          <a:solidFill>
+                            <a:srgbClr val="1F2A37"/>
+                          </a:solidFill>
+                          <a:latin typeface="Calibri"/>
+                        </a:rPr>
+                        <a:t>137 – 355</a:t>
+                      </a:r>
+                    </a:p>
+                  </a:txBody>
+                  <a:tcPr marL="63500" marR="63500" marT="12700" marB="12700" anchor="ctr">
+                    <a:solidFill>
+                      <a:srgbClr val="F4F6F8"/>
+                    </a:solidFill>
+                  </a:tcPr>
+                </a:tc>
+              </a:tr>
+              <a:tr h="339634">
+                <a:tc>
+                  <a:txBody>
+                    <a:bodyPr/>
+                    <a:lstStyle/>
+                    <a:p>
+                      <a:pPr algn="l"/>
+                      <a:r>
+                        <a:rPr sz="1050" b="1" i="0">
+                          <a:solidFill>
+                            <a:srgbClr val="1F2A37"/>
+                          </a:solidFill>
+                          <a:latin typeface="Calibri"/>
+                        </a:rPr>
+                        <a:t>total tokens per task</a:t>
+                      </a:r>
+                    </a:p>
+                  </a:txBody>
+                  <a:tcPr marL="63500" marR="63500" marT="12700" marB="12700" anchor="ctr">
+                    <a:solidFill>
+                      <a:srgbClr val="FFFFFF"/>
+                    </a:solidFill>
+                  </a:tcPr>
+                </a:tc>
+                <a:tc>
+                  <a:txBody>
+                    <a:bodyPr/>
+                    <a:lstStyle/>
+                    <a:p>
+                      <a:pPr algn="ctr"/>
+                      <a:r>
+                        <a:rPr sz="1050" b="0" i="0">
+                          <a:solidFill>
+                            <a:srgbClr val="1F2A37"/>
+                          </a:solidFill>
+                          <a:latin typeface="Calibri"/>
+                        </a:rPr>
+                        <a:t>832 – 900</a:t>
+                      </a:r>
+                    </a:p>
+                  </a:txBody>
+                  <a:tcPr marL="63500" marR="63500" marT="12700" marB="12700" anchor="ctr">
+                    <a:solidFill>
+                      <a:srgbClr val="FFFFFF"/>
+                    </a:solidFill>
+                  </a:tcPr>
+                </a:tc>
+                <a:tc>
+                  <a:txBody>
+                    <a:bodyPr/>
+                    <a:lstStyle/>
+                    <a:p>
+                      <a:pPr algn="ctr"/>
+                      <a:r>
+                        <a:rPr sz="1050" b="0" i="0">
+                          <a:solidFill>
+                            <a:srgbClr val="1F2A37"/>
+                          </a:solidFill>
+                          <a:latin typeface="Calibri"/>
+                        </a:rPr>
+                        <a:t>450 – 668</a:t>
+                      </a:r>
+                    </a:p>
+                  </a:txBody>
+                  <a:tcPr marL="63500" marR="63500" marT="12700" marB="12700" anchor="ctr">
+                    <a:solidFill>
+                      <a:srgbClr val="FFFFFF"/>
+                    </a:solidFill>
+                  </a:tcPr>
+                </a:tc>
+              </a:tr>
+              <a:tr h="339636">
+                <a:tc>
+                  <a:txBody>
+                    <a:bodyPr/>
+                    <a:lstStyle/>
+                    <a:p>
+                      <a:pPr algn="l"/>
+                      <a:r>
+                        <a:rPr sz="1050" b="1" i="0">
+                          <a:solidFill>
+                            <a:srgbClr val="1F2A37"/>
+                          </a:solidFill>
+                          <a:latin typeface="Calibri"/>
+                        </a:rPr>
+                        <a:t>median task latency</a:t>
+                      </a:r>
+                    </a:p>
+                  </a:txBody>
+                  <a:tcPr marL="63500" marR="63500" marT="12700" marB="12700" anchor="ctr">
+                    <a:solidFill>
+                      <a:srgbClr val="F4F6F8"/>
+                    </a:solidFill>
+                  </a:tcPr>
+                </a:tc>
+                <a:tc>
+                  <a:txBody>
+                    <a:bodyPr/>
+                    <a:lstStyle/>
+                    <a:p>
+                      <a:pPr algn="ctr"/>
+                      <a:r>
+                        <a:rPr sz="1050" b="0" i="0">
+                          <a:solidFill>
+                            <a:srgbClr val="1F2A37"/>
+                          </a:solidFill>
+                          <a:latin typeface="Calibri"/>
+                        </a:rPr>
+                        <a:t>10.4 – 10.8 s</a:t>
+                      </a:r>
+                    </a:p>
+                  </a:txBody>
+                  <a:tcPr marL="63500" marR="63500" marT="12700" marB="12700" anchor="ctr">
+                    <a:solidFill>
+                      <a:srgbClr val="F4F6F8"/>
+                    </a:solidFill>
+                  </a:tcPr>
+                </a:tc>
+                <a:tc>
+                  <a:txBody>
+                    <a:bodyPr/>
+                    <a:lstStyle/>
+                    <a:p>
+                      <a:pPr algn="ctr"/>
+                      <a:r>
+                        <a:rPr sz="1050" b="0" i="0">
+                          <a:solidFill>
+                            <a:srgbClr val="1F2A37"/>
+                          </a:solidFill>
+                          <a:latin typeface="Calibri"/>
+                        </a:rPr>
+                        <a:t>11.2 – 16.4 s</a:t>
+                      </a:r>
+                    </a:p>
+                  </a:txBody>
+                  <a:tcPr marL="63500" marR="63500" marT="12700" marB="12700" anchor="ctr">
+                    <a:solidFill>
+                      <a:srgbClr val="F4F6F8"/>
+                    </a:solidFill>
+                  </a:tcPr>
+                </a:tc>
+              </a:tr>
+            </a:tbl>
+          </a:graphicData>
+        </a:graphic>
+      </p:graphicFrame>
+      <p:sp>
+        <p:nvSpPr>
+          <p:cNvPr id="5" name="Rounded Rectangle 4"/>
+          <p:cNvSpPr/>
+          <p:nvPr/>
+        </p:nvSpPr>
+        <p:spPr>
+          <a:xfrm>
+            <a:off x="6309360" y="3749039"/>
+            <a:ext cx="5440680" cy="1143000"/>
+          </a:xfrm>
+          <a:prstGeom prst="roundRect">
+            <a:avLst/>
+          </a:prstGeom>
+          <a:solidFill>
+            <a:srgbClr val="F1E8F6"/>
+          </a:solidFill>
+          <a:ln w="12700">
+            <a:solidFill>
+              <a:srgbClr val="8E44AD"/>
+            </a:solidFill>
+          </a:ln>
+          <a:effectLst/>
+        </p:spPr>
+        <p:style>
+          <a:lnRef idx="1">
+            <a:schemeClr val="accent1"/>
+          </a:lnRef>
+          <a:fillRef idx="3">
+            <a:schemeClr val="accent1"/>
+          </a:fillRef>
+          <a:effectRef idx="2">
+            <a:schemeClr val="accent1"/>
+          </a:effectRef>
+          <a:fontRef idx="minor">
+            <a:schemeClr val="lt1"/>
+          </a:fontRef>
+        </p:style>
+        <p:txBody>
+          <a:bodyPr rtlCol="0" anchor="ctr" wrap="square" tIns="25400" bIns="25400"/>
+          <a:lstStyle/>
+          <a:p>
+            <a:pPr algn="ctr"/>
+            <a:r>
+              <a:rPr sz="1350" b="1" i="0">
+                <a:solidFill>
+                  <a:srgbClr val="8E44AD"/>
+                </a:solidFill>
+                <a:latin typeface="Calibri"/>
+              </a:rPr>
+              <a:t>The token ranking and the money ranking disagree</a:t>
+            </a:r>
+          </a:p>
+          <a:p>
+            <a:pPr algn="ctr"/>
+            <a:r>
+              <a:rPr sz="1050" b="0" i="0">
+                <a:solidFill>
+                  <a:srgbClr val="1F2A37"/>
+                </a:solidFill>
+                <a:latin typeface="Calibri"/>
+              </a:rPr>
+              <a:t>The reasoning model answers in ONE call; gpt-4.1 needs ~3 tool round-trips, so it sends 2.6x the input but emits a quarter of the output. Equating the two bills solves for break-even at output:input ≈ 2.7x (the platforms bracket it, 1.8x–5.8x). Priced above that ratio gpt-4.1 is cheaper; below it, gpt-5-mini.</a:t>
+            </a:r>
+          </a:p>
+        </p:txBody>
+      </p:sp>
+      <p:sp>
+        <p:nvSpPr>
+          <p:cNvPr id="6" name="Rounded Rectangle 5"/>
+          <p:cNvSpPr/>
+          <p:nvPr/>
+        </p:nvSpPr>
+        <p:spPr>
+          <a:xfrm>
+            <a:off x="411480" y="5074920"/>
+            <a:ext cx="11338560" cy="1234440"/>
+          </a:xfrm>
+          <a:prstGeom prst="roundRect">
+            <a:avLst/>
+          </a:prstGeom>
+          <a:solidFill>
+            <a:srgbClr val="EEEFF1"/>
+          </a:solidFill>
+          <a:ln w="12700">
+            <a:solidFill>
+              <a:srgbClr val="6B6B6B"/>
+            </a:solidFill>
+          </a:ln>
+          <a:effectLst/>
+        </p:spPr>
+        <p:style>
+          <a:lnRef idx="1">
+            <a:schemeClr val="accent1"/>
+          </a:lnRef>
+          <a:fillRef idx="3">
+            <a:schemeClr val="accent1"/>
+          </a:fillRef>
+          <a:effectRef idx="2">
+            <a:schemeClr val="accent1"/>
+          </a:effectRef>
+          <a:fontRef idx="minor">
+            <a:schemeClr val="lt1"/>
+          </a:fontRef>
+        </p:style>
+        <p:txBody>
+          <a:bodyPr rtlCol="0" anchor="ctr" wrap="square" tIns="25400" bIns="25400" lIns="228600" rIns="228600"/>
+          <a:lstStyle/>
+          <a:p>
+            <a:pPr algn="ctr"/>
+            <a:r>
+              <a:rPr sz="1200" b="1" i="0">
+                <a:solidFill>
+                  <a:srgbClr val="1F2A37"/>
+                </a:solidFill>
+                <a:latin typeface="Calibri"/>
+              </a:rPr>
+              <a:t>cost per task  =  (input tokens x P_in  +  output tokens x P_out) / 1 M     — we publish the token counts, you supply your own rates; our gateway does not bill us, so no dollar figure here would be ours to quote.  Two consequences of the input-share row:  for tau2 and appworld the bill IS the input side, so the cost driver is turn count and context compounding, not verbosity — and a cheaper-input model beats a terser one.  For gsm8k, output is a third of the tokens and reasoning effort moves it 2.6x between clusters.</a:t>
+            </a:r>
+          </a:p>
+        </p:txBody>
+      </p:sp>
+      <p:sp>
+        <p:nvSpPr>
+          <p:cNvPr id="7" name="TextBox 6"/>
+          <p:cNvSpPr txBox="1"/>
+          <p:nvPr/>
+        </p:nvSpPr>
+        <p:spPr>
+          <a:xfrm>
+            <a:off x="11795760" y="6437376"/>
+            <a:ext cx="320040" cy="310896"/>
+          </a:xfrm>
+          <a:prstGeom prst="rect">
+            <a:avLst/>
+          </a:prstGeom>
+          <a:noFill/>
+        </p:spPr>
+        <p:txBody>
+          <a:bodyPr wrap="none" anchor="ctr" lIns="0" rIns="0" tIns="0" bIns="0">
+            <a:spAutoFit/>
+          </a:bodyPr>
+          <a:lstStyle/>
+          <a:p>
+            <a:pPr algn="r">
+              <a:spcAft>
+                <a:spcPts val="300"/>
+              </a:spcAft>
+            </a:pPr>
+            <a:r>
+              <a:rPr sz="1200" b="0" i="0">
+                <a:solidFill>
+                  <a:srgbClr val="6B6B6B"/>
+                </a:solidFill>
+                <a:latin typeface="Calibri"/>
+              </a:rPr>
+              <a:t>15</a:t>
+            </a:r>
+          </a:p>
+        </p:txBody>
+      </p:sp>
+    </p:spTree>
+  </p:cSld>
+  <p:clrMapOvr>
+    <a:masterClrMapping/>
+  </p:clrMapOvr>
+</p:sld>
+</file>
+
+<file path=ppt/slides/slide16.xml><?xml version="1.0" encoding="utf-8"?>
 <p:sld xmlns:a="http://schemas.openxmlformats.org/drawingml/2006/main" xmlns:p="http://schemas.openxmlformats.org/presentationml/2006/main" xmlns:r="http://schemas.openxmlformats.org/officeDocument/2006/relationships">
   <p:cSld name="8.1 The Canonical 12-Run Matrix">
     <p:spTree>
@@ -8855,7 +11758,7 @@
                 </a:solidFill>
                 <a:latin typeface="Calibri"/>
               </a:rPr>
-              <a:t>14</a:t>
+              <a:t>16</a:t>
             </a:r>
           </a:p>
         </p:txBody>
@@ -8868,7 +11771,7 @@
 </p:sld>
 </file>
 
-<file path=ppt/slides/slide15.xml><?xml version="1.0" encoding="utf-8"?>
+<file path=ppt/slides/slide17.xml><?xml version="1.0" encoding="utf-8"?>
 <p:sld xmlns:a="http://schemas.openxmlformats.org/drawingml/2006/main" xmlns:p="http://schemas.openxmlformats.org/presentationml/2006/main" xmlns:r="http://schemas.openxmlformats.org/officeDocument/2006/relationships">
   <p:cSld name="8.2 What the 12 Runs Measured">
     <p:spTree>
@@ -11161,7 +14064,7 @@
                 </a:solidFill>
                 <a:latin typeface="Calibri"/>
               </a:rPr>
-              <a:t>15</a:t>
+              <a:t>17</a:t>
             </a:r>
           </a:p>
         </p:txBody>
@@ -11174,7 +14077,7 @@
 </p:sld>
 </file>
 
-<file path=ppt/slides/slide16.xml><?xml version="1.0" encoding="utf-8"?>
+<file path=ppt/slides/slide18.xml><?xml version="1.0" encoding="utf-8"?>
 <p:sld xmlns:a="http://schemas.openxmlformats.org/drawingml/2006/main" xmlns:p="http://schemas.openxmlformats.org/presentationml/2006/main" xmlns:r="http://schemas.openxmlformats.org/officeDocument/2006/relationships">
   <p:cSld name="9.1 OpenShift vs KinD — Like-for-Like">
     <p:spTree>
@@ -13767,7 +16670,7 @@
                 </a:solidFill>
                 <a:latin typeface="Calibri"/>
               </a:rPr>
-              <a:t>16</a:t>
+              <a:t>18</a:t>
             </a:r>
           </a:p>
         </p:txBody>
@@ -13780,7 +16683,7 @@
 </p:sld>
 </file>
 
-<file path=ppt/slides/slide17.xml><?xml version="1.0" encoding="utf-8"?>
+<file path=ppt/slides/slide19.xml><?xml version="1.0" encoding="utf-8"?>
 <p:sld xmlns:a="http://schemas.openxmlformats.org/drawingml/2006/main" xmlns:p="http://schemas.openxmlformats.org/presentationml/2006/main" xmlns:r="http://schemas.openxmlformats.org/officeDocument/2006/relationships">
   <p:cSld name="9.2 What AuthBridge Costs — and Why It Has No Single Number">
     <p:spTree>
@@ -15573,611 +18476,7 @@
                 </a:solidFill>
                 <a:latin typeface="Calibri"/>
               </a:rPr>
-              <a:t>17</a:t>
-            </a:r>
-          </a:p>
-        </p:txBody>
-      </p:sp>
-    </p:spTree>
-  </p:cSld>
-  <p:clrMapOvr>
-    <a:masterClrMapping/>
-  </p:clrMapOvr>
-</p:sld>
-</file>
-
-<file path=ppt/slides/slide18.xml><?xml version="1.0" encoding="utf-8"?>
-<p:sld xmlns:a="http://schemas.openxmlformats.org/drawingml/2006/main" xmlns:p="http://schemas.openxmlformats.org/presentationml/2006/main" xmlns:r="http://schemas.openxmlformats.org/officeDocument/2006/relationships">
-  <p:cSld name="10. What the Service Can &amp; Cannot Enact">
-    <p:spTree>
-      <p:nvGrpSpPr>
-        <p:cNvPr id="1" name=""/>
-        <p:cNvGrpSpPr/>
-        <p:nvPr/>
-      </p:nvGrpSpPr>
-      <p:grpSpPr/>
-      <p:sp>
-        <p:nvSpPr>
-          <p:cNvPr id="2" name="Rectangle 1"/>
-          <p:cNvSpPr/>
-          <p:nvPr/>
-        </p:nvSpPr>
-        <p:spPr>
-          <a:xfrm>
-            <a:off x="0" y="0"/>
-            <a:ext cx="12192000" cy="950000"/>
-          </a:xfrm>
-          <a:prstGeom prst="rect">
-            <a:avLst/>
-          </a:prstGeom>
-          <a:solidFill>
-            <a:srgbClr val="1B3A5C"/>
-          </a:solidFill>
-          <a:ln>
-            <a:noFill/>
-          </a:ln>
-          <a:effectLst/>
-        </p:spPr>
-        <p:style>
-          <a:lnRef idx="1">
-            <a:schemeClr val="accent1"/>
-          </a:lnRef>
-          <a:fillRef idx="3">
-            <a:schemeClr val="accent1"/>
-          </a:fillRef>
-          <a:effectRef idx="2">
-            <a:schemeClr val="accent1"/>
-          </a:effectRef>
-          <a:fontRef idx="minor">
-            <a:schemeClr val="lt1"/>
-          </a:fontRef>
-        </p:style>
-        <p:txBody>
-          <a:bodyPr rtlCol="0" anchor="ctr" lIns="355600"/>
-          <a:lstStyle/>
-          <a:p>
-            <a:pPr algn="ctr"/>
-            <a:r>
-              <a:rPr sz="2600" b="1" i="0">
-                <a:solidFill>
-                  <a:srgbClr val="FFFFFF"/>
-                </a:solidFill>
-                <a:latin typeface="Calibri"/>
-              </a:rPr>
-              <a:t>10.  What the Service Can &amp; Cannot Enact</a:t>
-            </a:r>
-          </a:p>
-          <a:p>
-            <a:r>
-              <a:rPr sz="1400" b="0" i="0">
-                <a:solidFill>
-                  <a:srgbClr val="C9D9EC"/>
-                </a:solidFill>
-                <a:latin typeface="Calibri"/>
-              </a:rPr>
-              <a:t>The HTTP-only boundary, made explicit</a:t>
-            </a:r>
-          </a:p>
-        </p:txBody>
-      </p:sp>
-      <p:sp>
-        <p:nvSpPr>
-          <p:cNvPr id="3" name="Rectangle 2"/>
-          <p:cNvSpPr/>
-          <p:nvPr/>
-        </p:nvSpPr>
-        <p:spPr>
-          <a:xfrm>
-            <a:off x="457200" y="1234440"/>
-            <a:ext cx="5394960" cy="457200"/>
-          </a:xfrm>
-          <a:prstGeom prst="rect">
-            <a:avLst/>
-          </a:prstGeom>
-          <a:solidFill>
-            <a:srgbClr val="5B8C5A"/>
-          </a:solidFill>
-          <a:ln w="12700">
-            <a:solidFill>
-              <a:srgbClr val="5B8C5A"/>
-            </a:solidFill>
-          </a:ln>
-          <a:effectLst/>
-        </p:spPr>
-        <p:style>
-          <a:lnRef idx="1">
-            <a:schemeClr val="accent1"/>
-          </a:lnRef>
-          <a:fillRef idx="3">
-            <a:schemeClr val="accent1"/>
-          </a:fillRef>
-          <a:effectRef idx="2">
-            <a:schemeClr val="accent1"/>
-          </a:effectRef>
-          <a:fontRef idx="minor">
-            <a:schemeClr val="lt1"/>
-          </a:fontRef>
-        </p:style>
-        <p:txBody>
-          <a:bodyPr rtlCol="0" anchor="ctr" wrap="square" tIns="25400" bIns="25400"/>
-          <a:lstStyle/>
-          <a:p>
-            <a:pPr algn="ctr"/>
-            <a:r>
-              <a:rPr sz="1500" b="1" i="0">
-                <a:solidFill>
-                  <a:srgbClr val="FFFFFF"/>
-                </a:solidFill>
-                <a:latin typeface="Calibri"/>
-              </a:rPr>
-              <a:t>✓  Enacts over HTTP</a:t>
-            </a:r>
-          </a:p>
-        </p:txBody>
-      </p:sp>
-      <p:sp>
-        <p:nvSpPr>
-          <p:cNvPr id="4" name="TextBox 3"/>
-          <p:cNvSpPr txBox="1"/>
-          <p:nvPr/>
-        </p:nvSpPr>
-        <p:spPr>
-          <a:xfrm>
-            <a:off x="548640" y="1828800"/>
-            <a:ext cx="5303520" cy="4206240"/>
-          </a:xfrm>
-          <a:prstGeom prst="rect">
-            <a:avLst/>
-          </a:prstGeom>
-          <a:noFill/>
-        </p:spPr>
-        <p:txBody>
-          <a:bodyPr wrap="square" anchor="t">
-            <a:spAutoFit/>
-          </a:bodyPr>
-          <a:lstStyle/>
-          <a:p>
-            <a:pPr algn="l" lvl="1">
-              <a:spcAft>
-                <a:spcPts val="300"/>
-              </a:spcAft>
-            </a:pPr>
-            <a:r>
-              <a:rPr sz="1300" b="0" i="0">
-                <a:solidFill>
-                  <a:srgbClr val="1F2A37"/>
-                </a:solidFill>
-                <a:latin typeface="Calibri"/>
-              </a:rPr>
-              <a:t>• Deploy MCP tool + A2A agent (CPU/mem, image, env)</a:t>
-            </a:r>
-          </a:p>
-          <a:p>
-            <a:pPr algn="l" lvl="1">
-              <a:spcAft>
-                <a:spcPts val="300"/>
-              </a:spcAft>
-            </a:pPr>
-            <a:r>
-              <a:rPr sz="1300" b="0" i="0">
-                <a:solidFill>
-                  <a:srgbClr val="1F2A37"/>
-                </a:solidFill>
-                <a:latin typeface="Calibri"/>
-              </a:rPr>
-              <a:t>• Deploy-time model swap (per-experiment agent)</a:t>
-            </a:r>
-          </a:p>
-          <a:p>
-            <a:pPr algn="l" lvl="1">
-              <a:spcAft>
-                <a:spcPts val="300"/>
-              </a:spcAft>
-            </a:pPr>
-            <a:r>
-              <a:rPr sz="1300" b="0" i="0">
-                <a:solidFill>
-                  <a:srgbClr val="1F2A37"/>
-                </a:solidFill>
-                <a:latin typeface="Calibri"/>
-              </a:rPr>
-              <a:t>• authbridge_enabled → inject the sidecar (layer-2)</a:t>
-            </a:r>
-          </a:p>
-          <a:p>
-            <a:pPr algn="l" lvl="1">
-              <a:spcAft>
-                <a:spcPts val="300"/>
-              </a:spcAft>
-            </a:pPr>
-            <a:r>
-              <a:rPr sz="1300" b="0" i="0">
-                <a:solidFill>
-                  <a:srgbClr val="1F2A37"/>
-                </a:solidFill>
-                <a:latin typeface="Calibri"/>
-              </a:rPr>
-              <a:t>• plugin_preset / plugins / on_error → AuthBridge layer-3</a:t>
-            </a:r>
-          </a:p>
-          <a:p>
-            <a:pPr algn="l" lvl="2">
-              <a:spcAft>
-                <a:spcPts val="300"/>
-              </a:spcAft>
-            </a:pPr>
-            <a:r>
-              <a:rPr sz="1150" b="0" i="0">
-                <a:solidFill>
-                  <a:srgbClr val="3A4654"/>
-                </a:solidFill>
-                <a:latin typeface="Calibri"/>
-              </a:rPr>
-              <a:t>→ pluginPreset/plugins/onError; operator renders ConfigMap</a:t>
-            </a:r>
-          </a:p>
-          <a:p>
-            <a:pPr algn="l" lvl="1">
-              <a:spcAft>
-                <a:spcPts val="300"/>
-              </a:spcAft>
-            </a:pPr>
-            <a:r>
-              <a:rPr sz="1300" b="0" i="0">
-                <a:solidFill>
-                  <a:srgbClr val="1F2A37"/>
-                </a:solidFill>
-                <a:latin typeface="Calibri"/>
-              </a:rPr>
-              <a:t>• Run benchmark sessions; collect pass/fail + latency</a:t>
-            </a:r>
-          </a:p>
-          <a:p>
-            <a:pPr algn="l" lvl="1">
-              <a:spcAft>
-                <a:spcPts val="300"/>
-              </a:spcAft>
-            </a:pPr>
-            <a:r>
-              <a:rPr sz="1300" b="0" i="0">
-                <a:solidFill>
-                  <a:srgbClr val="1F2A37"/>
-                </a:solidFill>
-                <a:latin typeface="Calibri"/>
-              </a:rPr>
-              <a:t>• Emit + read MLflow traces; export to S3</a:t>
-            </a:r>
-          </a:p>
-          <a:p>
-            <a:pPr algn="l" lvl="1">
-              <a:spcAft>
-                <a:spcPts val="300"/>
-              </a:spcAft>
-            </a:pPr>
-            <a:r>
-              <a:rPr sz="1300" b="0" i="0">
-                <a:solidFill>
-                  <a:srgbClr val="1F2A37"/>
-                </a:solidFill>
-                <a:latin typeface="Calibri"/>
-              </a:rPr>
-              <a:t>• Service-owned config: MLflow + S3 via PUT /config</a:t>
-            </a:r>
-          </a:p>
-          <a:p>
-            <a:pPr algn="l" lvl="2">
-              <a:spcAft>
-                <a:spcPts val="300"/>
-              </a:spcAft>
-            </a:pPr>
-            <a:r>
-              <a:rPr sz="1150" b="0" i="0">
-                <a:solidFill>
-                  <a:srgbClr val="3A4654"/>
-                </a:solidFill>
-                <a:latin typeface="Calibri"/>
-              </a:rPr>
-              <a:t>benchmarker only</a:t>
-            </a:r>
-          </a:p>
-        </p:txBody>
-      </p:sp>
-      <p:sp>
-        <p:nvSpPr>
-          <p:cNvPr id="5" name="Rectangle 4"/>
-          <p:cNvSpPr/>
-          <p:nvPr/>
-        </p:nvSpPr>
-        <p:spPr>
-          <a:xfrm>
-            <a:off x="6309360" y="1234440"/>
-            <a:ext cx="5394960" cy="457200"/>
-          </a:xfrm>
-          <a:prstGeom prst="rect">
-            <a:avLst/>
-          </a:prstGeom>
-          <a:solidFill>
-            <a:srgbClr val="B55A2E"/>
-          </a:solidFill>
-          <a:ln w="12700">
-            <a:solidFill>
-              <a:srgbClr val="B55A2E"/>
-            </a:solidFill>
-          </a:ln>
-          <a:effectLst/>
-        </p:spPr>
-        <p:style>
-          <a:lnRef idx="1">
-            <a:schemeClr val="accent1"/>
-          </a:lnRef>
-          <a:fillRef idx="3">
-            <a:schemeClr val="accent1"/>
-          </a:fillRef>
-          <a:effectRef idx="2">
-            <a:schemeClr val="accent1"/>
-          </a:effectRef>
-          <a:fontRef idx="minor">
-            <a:schemeClr val="lt1"/>
-          </a:fontRef>
-        </p:style>
-        <p:txBody>
-          <a:bodyPr rtlCol="0" anchor="ctr" wrap="square" tIns="25400" bIns="25400"/>
-          <a:lstStyle/>
-          <a:p>
-            <a:pPr algn="ctr"/>
-            <a:r>
-              <a:rPr sz="1500" b="1" i="0">
-                <a:solidFill>
-                  <a:srgbClr val="FFFFFF"/>
-                </a:solidFill>
-                <a:latin typeface="Calibri"/>
-              </a:rPr>
-              <a:t>✗  Out-of-band (reports, doesn't do)</a:t>
-            </a:r>
-          </a:p>
-        </p:txBody>
-      </p:sp>
-      <p:sp>
-        <p:nvSpPr>
-          <p:cNvPr id="6" name="TextBox 5"/>
-          <p:cNvSpPr txBox="1"/>
-          <p:nvPr/>
-        </p:nvSpPr>
-        <p:spPr>
-          <a:xfrm>
-            <a:off x="6400800" y="1828800"/>
-            <a:ext cx="5303520" cy="4206240"/>
-          </a:xfrm>
-          <a:prstGeom prst="rect">
-            <a:avLst/>
-          </a:prstGeom>
-          <a:noFill/>
-        </p:spPr>
-        <p:txBody>
-          <a:bodyPr wrap="square" anchor="t">
-            <a:spAutoFit/>
-          </a:bodyPr>
-          <a:lstStyle/>
-          <a:p>
-            <a:pPr algn="l" lvl="1">
-              <a:spcAft>
-                <a:spcPts val="300"/>
-              </a:spcAft>
-            </a:pPr>
-            <a:r>
-              <a:rPr sz="1300" b="0" i="0">
-                <a:solidFill>
-                  <a:srgbClr val="1F2A37"/>
-                </a:solidFill>
-                <a:latin typeface="Calibri"/>
-              </a:rPr>
-              <a:t>• Cluster Secrets (hf-secret, openai-secret)</a:t>
-            </a:r>
-          </a:p>
-          <a:p>
-            <a:pPr algn="l" lvl="2">
-              <a:spcAft>
-                <a:spcPts val="300"/>
-              </a:spcAft>
-            </a:pPr>
-            <a:r>
-              <a:rPr sz="1150" b="0" i="0">
-                <a:solidFill>
-                  <a:srgbClr val="3A4654"/>
-                </a:solidFill>
-                <a:latin typeface="Calibri"/>
-              </a:rPr>
-              <a:t>operator provisions; run precheck returns 424 naming it</a:t>
-            </a:r>
-          </a:p>
-          <a:p>
-            <a:pPr algn="l" lvl="1">
-              <a:spcAft>
-                <a:spcPts val="300"/>
-              </a:spcAft>
-            </a:pPr>
-            <a:r>
-              <a:rPr sz="1300" b="0" i="0">
-                <a:solidFill>
-                  <a:srgbClr val="1F2A37"/>
-                </a:solidFill>
-                <a:latin typeface="Calibri"/>
-              </a:rPr>
-              <a:t>• AuthBridge CLUSTER config — ibac judgeEndpoint / judgeModel</a:t>
-            </a:r>
-          </a:p>
-          <a:p>
-            <a:pPr algn="l" lvl="2">
-              <a:spcAft>
-                <a:spcPts val="300"/>
-              </a:spcAft>
-            </a:pPr>
-            <a:r>
-              <a:rPr sz="1150" b="0" i="0">
-                <a:solidFill>
-                  <a:srgbClr val="3A4654"/>
-                </a:solidFill>
-                <a:latin typeface="Calibri"/>
-              </a:rPr>
-              <a:t>in the platform-config ConfigMap, not the agent API</a:t>
-            </a:r>
-          </a:p>
-          <a:p>
-            <a:pPr algn="l" lvl="1">
-              <a:spcAft>
-                <a:spcPts val="300"/>
-              </a:spcAft>
-            </a:pPr>
-            <a:r>
-              <a:rPr sz="1300" b="0" i="0">
-                <a:solidFill>
-                  <a:srgbClr val="1F2A37"/>
-                </a:solidFill>
-                <a:latin typeface="Calibri"/>
-              </a:rPr>
-              <a:t>• Any cluster-level API call — Rossoctl does these server-side</a:t>
-            </a:r>
-          </a:p>
-          <a:p>
-            <a:pPr algn="l">
-              <a:spcAft>
-                <a:spcPts val="300"/>
-              </a:spcAft>
-            </a:pPr>
-            <a:r>
-              <a:rPr sz="1350" b="1" i="0">
-                <a:solidFill>
-                  <a:srgbClr val="B55A2E"/>
-                </a:solidFill>
-                <a:latin typeface="Calibri"/>
-              </a:rPr>
-              <a:t>Principle:</a:t>
-            </a:r>
-          </a:p>
-          <a:p>
-            <a:pPr algn="l" lvl="1">
-              <a:spcAft>
-                <a:spcPts val="300"/>
-              </a:spcAft>
-            </a:pPr>
-            <a:r>
-              <a:rPr sz="1300" b="0" i="0">
-                <a:solidFill>
-                  <a:srgbClr val="1F2A37"/>
-                </a:solidFill>
-                <a:latin typeface="Calibri"/>
-              </a:rPr>
-              <a:t>• Never silently ignore an un-enactable request —</a:t>
-            </a:r>
-          </a:p>
-          <a:p>
-            <a:pPr algn="l" lvl="2">
-              <a:spcAft>
-                <a:spcPts val="300"/>
-              </a:spcAft>
-            </a:pPr>
-            <a:r>
-              <a:rPr sz="1150" b="0" i="0">
-                <a:solidFill>
-                  <a:srgbClr val="3A4654"/>
-                </a:solidFill>
-                <a:latin typeface="Calibri"/>
-              </a:rPr>
-              <a:t>precheck (424) or reject (422), with an actionable reason</a:t>
-            </a:r>
-          </a:p>
-        </p:txBody>
-      </p:sp>
-      <p:sp>
-        <p:nvSpPr>
-          <p:cNvPr id="7" name="Rounded Rectangle 6"/>
-          <p:cNvSpPr/>
-          <p:nvPr/>
-        </p:nvSpPr>
-        <p:spPr>
-          <a:xfrm>
-            <a:off x="1463040" y="5257800"/>
-            <a:ext cx="9235440" cy="685800"/>
-          </a:xfrm>
-          <a:prstGeom prst="roundRect">
-            <a:avLst/>
-          </a:prstGeom>
-          <a:solidFill>
-            <a:srgbClr val="EEEFF1"/>
-          </a:solidFill>
-          <a:ln w="12700">
-            <a:solidFill>
-              <a:srgbClr val="6B6B6B"/>
-            </a:solidFill>
-          </a:ln>
-          <a:effectLst/>
-        </p:spPr>
-        <p:style>
-          <a:lnRef idx="1">
-            <a:schemeClr val="accent1"/>
-          </a:lnRef>
-          <a:fillRef idx="3">
-            <a:schemeClr val="accent1"/>
-          </a:fillRef>
-          <a:effectRef idx="2">
-            <a:schemeClr val="accent1"/>
-          </a:effectRef>
-          <a:fontRef idx="minor">
-            <a:schemeClr val="lt1"/>
-          </a:fontRef>
-        </p:style>
-        <p:txBody>
-          <a:bodyPr rtlCol="0" anchor="ctr" wrap="square" tIns="25400" bIns="25400"/>
-          <a:lstStyle/>
-          <a:p>
-            <a:pPr algn="ctr"/>
-            <a:r>
-              <a:rPr sz="1250" b="1" i="0">
-                <a:solidFill>
-                  <a:srgbClr val="1F2A37"/>
-                </a:solidFill>
-                <a:latin typeface="Calibri"/>
-              </a:rPr>
-              <a:t>Cluster-agnostic by construction: works on kind / vanilla k8s / OpenShift; cross-cluster runs use per-instance route templates + a reachable internal issuer.</a:t>
-            </a:r>
-          </a:p>
-        </p:txBody>
-      </p:sp>
-      <p:sp>
-        <p:nvSpPr>
-          <p:cNvPr id="8" name="TextBox 7"/>
-          <p:cNvSpPr txBox="1"/>
-          <p:nvPr/>
-        </p:nvSpPr>
-        <p:spPr>
-          <a:xfrm>
-            <a:off x="11795760" y="6437376"/>
-            <a:ext cx="320040" cy="310896"/>
-          </a:xfrm>
-          <a:prstGeom prst="rect">
-            <a:avLst/>
-          </a:prstGeom>
-          <a:noFill/>
-        </p:spPr>
-        <p:txBody>
-          <a:bodyPr wrap="none" anchor="ctr" lIns="0" rIns="0" tIns="0" bIns="0">
-            <a:spAutoFit/>
-          </a:bodyPr>
-          <a:lstStyle/>
-          <a:p>
-            <a:pPr algn="r">
-              <a:spcAft>
-                <a:spcPts val="300"/>
-              </a:spcAft>
-            </a:pPr>
-            <a:r>
-              <a:rPr sz="1200" b="0" i="0">
-                <a:solidFill>
-                  <a:srgbClr val="6B6B6B"/>
-                </a:solidFill>
-                <a:latin typeface="Calibri"/>
-              </a:rPr>
-              <a:t>18</a:t>
+              <a:t>19</a:t>
             </a:r>
           </a:p>
         </p:txBody>
@@ -17190,7 +19489,7 @@
                 </a:solidFill>
                 <a:latin typeface="Calibri"/>
               </a:rPr>
-              <a:t>7.1 the difficulty ladder · 7.2 what each stresses · 7.3 the traps</a:t>
+              <a:t>7.1 the ladder · 7.2 what each stresses · 7.3 the traps · 7.4 picking one · 7.5 what it costs</a:t>
             </a:r>
           </a:p>
         </p:txBody>
@@ -17665,6 +19964,610 @@
                 <a:latin typeface="Calibri"/>
               </a:rPr>
               <a:t>2</a:t>
+            </a:r>
+          </a:p>
+        </p:txBody>
+      </p:sp>
+    </p:spTree>
+  </p:cSld>
+  <p:clrMapOvr>
+    <a:masterClrMapping/>
+  </p:clrMapOvr>
+</p:sld>
+</file>
+
+<file path=ppt/slides/slide20.xml><?xml version="1.0" encoding="utf-8"?>
+<p:sld xmlns:a="http://schemas.openxmlformats.org/drawingml/2006/main" xmlns:p="http://schemas.openxmlformats.org/presentationml/2006/main" xmlns:r="http://schemas.openxmlformats.org/officeDocument/2006/relationships">
+  <p:cSld name="10. What the Service Can &amp; Cannot Enact">
+    <p:spTree>
+      <p:nvGrpSpPr>
+        <p:cNvPr id="1" name=""/>
+        <p:cNvGrpSpPr/>
+        <p:nvPr/>
+      </p:nvGrpSpPr>
+      <p:grpSpPr/>
+      <p:sp>
+        <p:nvSpPr>
+          <p:cNvPr id="2" name="Rectangle 1"/>
+          <p:cNvSpPr/>
+          <p:nvPr/>
+        </p:nvSpPr>
+        <p:spPr>
+          <a:xfrm>
+            <a:off x="0" y="0"/>
+            <a:ext cx="12192000" cy="950000"/>
+          </a:xfrm>
+          <a:prstGeom prst="rect">
+            <a:avLst/>
+          </a:prstGeom>
+          <a:solidFill>
+            <a:srgbClr val="1B3A5C"/>
+          </a:solidFill>
+          <a:ln>
+            <a:noFill/>
+          </a:ln>
+          <a:effectLst/>
+        </p:spPr>
+        <p:style>
+          <a:lnRef idx="1">
+            <a:schemeClr val="accent1"/>
+          </a:lnRef>
+          <a:fillRef idx="3">
+            <a:schemeClr val="accent1"/>
+          </a:fillRef>
+          <a:effectRef idx="2">
+            <a:schemeClr val="accent1"/>
+          </a:effectRef>
+          <a:fontRef idx="minor">
+            <a:schemeClr val="lt1"/>
+          </a:fontRef>
+        </p:style>
+        <p:txBody>
+          <a:bodyPr rtlCol="0" anchor="ctr" lIns="355600"/>
+          <a:lstStyle/>
+          <a:p>
+            <a:pPr algn="ctr"/>
+            <a:r>
+              <a:rPr sz="2600" b="1" i="0">
+                <a:solidFill>
+                  <a:srgbClr val="FFFFFF"/>
+                </a:solidFill>
+                <a:latin typeface="Calibri"/>
+              </a:rPr>
+              <a:t>10.  What the Service Can &amp; Cannot Enact</a:t>
+            </a:r>
+          </a:p>
+          <a:p>
+            <a:r>
+              <a:rPr sz="1400" b="0" i="0">
+                <a:solidFill>
+                  <a:srgbClr val="C9D9EC"/>
+                </a:solidFill>
+                <a:latin typeface="Calibri"/>
+              </a:rPr>
+              <a:t>The HTTP-only boundary, made explicit</a:t>
+            </a:r>
+          </a:p>
+        </p:txBody>
+      </p:sp>
+      <p:sp>
+        <p:nvSpPr>
+          <p:cNvPr id="3" name="Rectangle 2"/>
+          <p:cNvSpPr/>
+          <p:nvPr/>
+        </p:nvSpPr>
+        <p:spPr>
+          <a:xfrm>
+            <a:off x="457200" y="1234440"/>
+            <a:ext cx="5394960" cy="457200"/>
+          </a:xfrm>
+          <a:prstGeom prst="rect">
+            <a:avLst/>
+          </a:prstGeom>
+          <a:solidFill>
+            <a:srgbClr val="5B8C5A"/>
+          </a:solidFill>
+          <a:ln w="12700">
+            <a:solidFill>
+              <a:srgbClr val="5B8C5A"/>
+            </a:solidFill>
+          </a:ln>
+          <a:effectLst/>
+        </p:spPr>
+        <p:style>
+          <a:lnRef idx="1">
+            <a:schemeClr val="accent1"/>
+          </a:lnRef>
+          <a:fillRef idx="3">
+            <a:schemeClr val="accent1"/>
+          </a:fillRef>
+          <a:effectRef idx="2">
+            <a:schemeClr val="accent1"/>
+          </a:effectRef>
+          <a:fontRef idx="minor">
+            <a:schemeClr val="lt1"/>
+          </a:fontRef>
+        </p:style>
+        <p:txBody>
+          <a:bodyPr rtlCol="0" anchor="ctr" wrap="square" tIns="25400" bIns="25400"/>
+          <a:lstStyle/>
+          <a:p>
+            <a:pPr algn="ctr"/>
+            <a:r>
+              <a:rPr sz="1500" b="1" i="0">
+                <a:solidFill>
+                  <a:srgbClr val="FFFFFF"/>
+                </a:solidFill>
+                <a:latin typeface="Calibri"/>
+              </a:rPr>
+              <a:t>✓  Enacts over HTTP</a:t>
+            </a:r>
+          </a:p>
+        </p:txBody>
+      </p:sp>
+      <p:sp>
+        <p:nvSpPr>
+          <p:cNvPr id="4" name="TextBox 3"/>
+          <p:cNvSpPr txBox="1"/>
+          <p:nvPr/>
+        </p:nvSpPr>
+        <p:spPr>
+          <a:xfrm>
+            <a:off x="548640" y="1828800"/>
+            <a:ext cx="5303520" cy="4206240"/>
+          </a:xfrm>
+          <a:prstGeom prst="rect">
+            <a:avLst/>
+          </a:prstGeom>
+          <a:noFill/>
+        </p:spPr>
+        <p:txBody>
+          <a:bodyPr wrap="square" anchor="t">
+            <a:spAutoFit/>
+          </a:bodyPr>
+          <a:lstStyle/>
+          <a:p>
+            <a:pPr algn="l" lvl="1">
+              <a:spcAft>
+                <a:spcPts val="300"/>
+              </a:spcAft>
+            </a:pPr>
+            <a:r>
+              <a:rPr sz="1300" b="0" i="0">
+                <a:solidFill>
+                  <a:srgbClr val="1F2A37"/>
+                </a:solidFill>
+                <a:latin typeface="Calibri"/>
+              </a:rPr>
+              <a:t>• Deploy MCP tool + A2A agent (CPU/mem, image, env)</a:t>
+            </a:r>
+          </a:p>
+          <a:p>
+            <a:pPr algn="l" lvl="1">
+              <a:spcAft>
+                <a:spcPts val="300"/>
+              </a:spcAft>
+            </a:pPr>
+            <a:r>
+              <a:rPr sz="1300" b="0" i="0">
+                <a:solidFill>
+                  <a:srgbClr val="1F2A37"/>
+                </a:solidFill>
+                <a:latin typeface="Calibri"/>
+              </a:rPr>
+              <a:t>• Deploy-time model swap (per-experiment agent)</a:t>
+            </a:r>
+          </a:p>
+          <a:p>
+            <a:pPr algn="l" lvl="1">
+              <a:spcAft>
+                <a:spcPts val="300"/>
+              </a:spcAft>
+            </a:pPr>
+            <a:r>
+              <a:rPr sz="1300" b="0" i="0">
+                <a:solidFill>
+                  <a:srgbClr val="1F2A37"/>
+                </a:solidFill>
+                <a:latin typeface="Calibri"/>
+              </a:rPr>
+              <a:t>• authbridge_enabled → inject the sidecar (layer-2)</a:t>
+            </a:r>
+          </a:p>
+          <a:p>
+            <a:pPr algn="l" lvl="1">
+              <a:spcAft>
+                <a:spcPts val="300"/>
+              </a:spcAft>
+            </a:pPr>
+            <a:r>
+              <a:rPr sz="1300" b="0" i="0">
+                <a:solidFill>
+                  <a:srgbClr val="1F2A37"/>
+                </a:solidFill>
+                <a:latin typeface="Calibri"/>
+              </a:rPr>
+              <a:t>• plugin_preset / plugins / on_error → AuthBridge layer-3</a:t>
+            </a:r>
+          </a:p>
+          <a:p>
+            <a:pPr algn="l" lvl="2">
+              <a:spcAft>
+                <a:spcPts val="300"/>
+              </a:spcAft>
+            </a:pPr>
+            <a:r>
+              <a:rPr sz="1150" b="0" i="0">
+                <a:solidFill>
+                  <a:srgbClr val="3A4654"/>
+                </a:solidFill>
+                <a:latin typeface="Calibri"/>
+              </a:rPr>
+              <a:t>→ pluginPreset/plugins/onError; operator renders ConfigMap</a:t>
+            </a:r>
+          </a:p>
+          <a:p>
+            <a:pPr algn="l" lvl="1">
+              <a:spcAft>
+                <a:spcPts val="300"/>
+              </a:spcAft>
+            </a:pPr>
+            <a:r>
+              <a:rPr sz="1300" b="0" i="0">
+                <a:solidFill>
+                  <a:srgbClr val="1F2A37"/>
+                </a:solidFill>
+                <a:latin typeface="Calibri"/>
+              </a:rPr>
+              <a:t>• Run benchmark sessions; collect pass/fail + latency</a:t>
+            </a:r>
+          </a:p>
+          <a:p>
+            <a:pPr algn="l" lvl="1">
+              <a:spcAft>
+                <a:spcPts val="300"/>
+              </a:spcAft>
+            </a:pPr>
+            <a:r>
+              <a:rPr sz="1300" b="0" i="0">
+                <a:solidFill>
+                  <a:srgbClr val="1F2A37"/>
+                </a:solidFill>
+                <a:latin typeface="Calibri"/>
+              </a:rPr>
+              <a:t>• Emit + read MLflow traces; export to S3</a:t>
+            </a:r>
+          </a:p>
+          <a:p>
+            <a:pPr algn="l" lvl="1">
+              <a:spcAft>
+                <a:spcPts val="300"/>
+              </a:spcAft>
+            </a:pPr>
+            <a:r>
+              <a:rPr sz="1300" b="0" i="0">
+                <a:solidFill>
+                  <a:srgbClr val="1F2A37"/>
+                </a:solidFill>
+                <a:latin typeface="Calibri"/>
+              </a:rPr>
+              <a:t>• Service-owned config: MLflow + S3 via PUT /config</a:t>
+            </a:r>
+          </a:p>
+          <a:p>
+            <a:pPr algn="l" lvl="2">
+              <a:spcAft>
+                <a:spcPts val="300"/>
+              </a:spcAft>
+            </a:pPr>
+            <a:r>
+              <a:rPr sz="1150" b="0" i="0">
+                <a:solidFill>
+                  <a:srgbClr val="3A4654"/>
+                </a:solidFill>
+                <a:latin typeface="Calibri"/>
+              </a:rPr>
+              <a:t>benchmarker only</a:t>
+            </a:r>
+          </a:p>
+        </p:txBody>
+      </p:sp>
+      <p:sp>
+        <p:nvSpPr>
+          <p:cNvPr id="5" name="Rectangle 4"/>
+          <p:cNvSpPr/>
+          <p:nvPr/>
+        </p:nvSpPr>
+        <p:spPr>
+          <a:xfrm>
+            <a:off x="6309360" y="1234440"/>
+            <a:ext cx="5394960" cy="457200"/>
+          </a:xfrm>
+          <a:prstGeom prst="rect">
+            <a:avLst/>
+          </a:prstGeom>
+          <a:solidFill>
+            <a:srgbClr val="B55A2E"/>
+          </a:solidFill>
+          <a:ln w="12700">
+            <a:solidFill>
+              <a:srgbClr val="B55A2E"/>
+            </a:solidFill>
+          </a:ln>
+          <a:effectLst/>
+        </p:spPr>
+        <p:style>
+          <a:lnRef idx="1">
+            <a:schemeClr val="accent1"/>
+          </a:lnRef>
+          <a:fillRef idx="3">
+            <a:schemeClr val="accent1"/>
+          </a:fillRef>
+          <a:effectRef idx="2">
+            <a:schemeClr val="accent1"/>
+          </a:effectRef>
+          <a:fontRef idx="minor">
+            <a:schemeClr val="lt1"/>
+          </a:fontRef>
+        </p:style>
+        <p:txBody>
+          <a:bodyPr rtlCol="0" anchor="ctr" wrap="square" tIns="25400" bIns="25400"/>
+          <a:lstStyle/>
+          <a:p>
+            <a:pPr algn="ctr"/>
+            <a:r>
+              <a:rPr sz="1500" b="1" i="0">
+                <a:solidFill>
+                  <a:srgbClr val="FFFFFF"/>
+                </a:solidFill>
+                <a:latin typeface="Calibri"/>
+              </a:rPr>
+              <a:t>✗  Out-of-band (reports, doesn't do)</a:t>
+            </a:r>
+          </a:p>
+        </p:txBody>
+      </p:sp>
+      <p:sp>
+        <p:nvSpPr>
+          <p:cNvPr id="6" name="TextBox 5"/>
+          <p:cNvSpPr txBox="1"/>
+          <p:nvPr/>
+        </p:nvSpPr>
+        <p:spPr>
+          <a:xfrm>
+            <a:off x="6400800" y="1828800"/>
+            <a:ext cx="5303520" cy="4206240"/>
+          </a:xfrm>
+          <a:prstGeom prst="rect">
+            <a:avLst/>
+          </a:prstGeom>
+          <a:noFill/>
+        </p:spPr>
+        <p:txBody>
+          <a:bodyPr wrap="square" anchor="t">
+            <a:spAutoFit/>
+          </a:bodyPr>
+          <a:lstStyle/>
+          <a:p>
+            <a:pPr algn="l" lvl="1">
+              <a:spcAft>
+                <a:spcPts val="300"/>
+              </a:spcAft>
+            </a:pPr>
+            <a:r>
+              <a:rPr sz="1300" b="0" i="0">
+                <a:solidFill>
+                  <a:srgbClr val="1F2A37"/>
+                </a:solidFill>
+                <a:latin typeface="Calibri"/>
+              </a:rPr>
+              <a:t>• Cluster Secrets (hf-secret, openai-secret)</a:t>
+            </a:r>
+          </a:p>
+          <a:p>
+            <a:pPr algn="l" lvl="2">
+              <a:spcAft>
+                <a:spcPts val="300"/>
+              </a:spcAft>
+            </a:pPr>
+            <a:r>
+              <a:rPr sz="1150" b="0" i="0">
+                <a:solidFill>
+                  <a:srgbClr val="3A4654"/>
+                </a:solidFill>
+                <a:latin typeface="Calibri"/>
+              </a:rPr>
+              <a:t>operator provisions; run precheck returns 424 naming it</a:t>
+            </a:r>
+          </a:p>
+          <a:p>
+            <a:pPr algn="l" lvl="1">
+              <a:spcAft>
+                <a:spcPts val="300"/>
+              </a:spcAft>
+            </a:pPr>
+            <a:r>
+              <a:rPr sz="1300" b="0" i="0">
+                <a:solidFill>
+                  <a:srgbClr val="1F2A37"/>
+                </a:solidFill>
+                <a:latin typeface="Calibri"/>
+              </a:rPr>
+              <a:t>• AuthBridge CLUSTER config — ibac judgeEndpoint / judgeModel</a:t>
+            </a:r>
+          </a:p>
+          <a:p>
+            <a:pPr algn="l" lvl="2">
+              <a:spcAft>
+                <a:spcPts val="300"/>
+              </a:spcAft>
+            </a:pPr>
+            <a:r>
+              <a:rPr sz="1150" b="0" i="0">
+                <a:solidFill>
+                  <a:srgbClr val="3A4654"/>
+                </a:solidFill>
+                <a:latin typeface="Calibri"/>
+              </a:rPr>
+              <a:t>in the platform-config ConfigMap, not the agent API</a:t>
+            </a:r>
+          </a:p>
+          <a:p>
+            <a:pPr algn="l" lvl="1">
+              <a:spcAft>
+                <a:spcPts val="300"/>
+              </a:spcAft>
+            </a:pPr>
+            <a:r>
+              <a:rPr sz="1300" b="0" i="0">
+                <a:solidFill>
+                  <a:srgbClr val="1F2A37"/>
+                </a:solidFill>
+                <a:latin typeface="Calibri"/>
+              </a:rPr>
+              <a:t>• Any cluster-level API call — Rossoctl does these server-side</a:t>
+            </a:r>
+          </a:p>
+          <a:p>
+            <a:pPr algn="l">
+              <a:spcAft>
+                <a:spcPts val="300"/>
+              </a:spcAft>
+            </a:pPr>
+            <a:r>
+              <a:rPr sz="1350" b="1" i="0">
+                <a:solidFill>
+                  <a:srgbClr val="B55A2E"/>
+                </a:solidFill>
+                <a:latin typeface="Calibri"/>
+              </a:rPr>
+              <a:t>Principle:</a:t>
+            </a:r>
+          </a:p>
+          <a:p>
+            <a:pPr algn="l" lvl="1">
+              <a:spcAft>
+                <a:spcPts val="300"/>
+              </a:spcAft>
+            </a:pPr>
+            <a:r>
+              <a:rPr sz="1300" b="0" i="0">
+                <a:solidFill>
+                  <a:srgbClr val="1F2A37"/>
+                </a:solidFill>
+                <a:latin typeface="Calibri"/>
+              </a:rPr>
+              <a:t>• Never silently ignore an un-enactable request —</a:t>
+            </a:r>
+          </a:p>
+          <a:p>
+            <a:pPr algn="l" lvl="2">
+              <a:spcAft>
+                <a:spcPts val="300"/>
+              </a:spcAft>
+            </a:pPr>
+            <a:r>
+              <a:rPr sz="1150" b="0" i="0">
+                <a:solidFill>
+                  <a:srgbClr val="3A4654"/>
+                </a:solidFill>
+                <a:latin typeface="Calibri"/>
+              </a:rPr>
+              <a:t>precheck (424) or reject (422), with an actionable reason</a:t>
+            </a:r>
+          </a:p>
+        </p:txBody>
+      </p:sp>
+      <p:sp>
+        <p:nvSpPr>
+          <p:cNvPr id="7" name="Rounded Rectangle 6"/>
+          <p:cNvSpPr/>
+          <p:nvPr/>
+        </p:nvSpPr>
+        <p:spPr>
+          <a:xfrm>
+            <a:off x="1463040" y="5257800"/>
+            <a:ext cx="9235440" cy="685800"/>
+          </a:xfrm>
+          <a:prstGeom prst="roundRect">
+            <a:avLst/>
+          </a:prstGeom>
+          <a:solidFill>
+            <a:srgbClr val="EEEFF1"/>
+          </a:solidFill>
+          <a:ln w="12700">
+            <a:solidFill>
+              <a:srgbClr val="6B6B6B"/>
+            </a:solidFill>
+          </a:ln>
+          <a:effectLst/>
+        </p:spPr>
+        <p:style>
+          <a:lnRef idx="1">
+            <a:schemeClr val="accent1"/>
+          </a:lnRef>
+          <a:fillRef idx="3">
+            <a:schemeClr val="accent1"/>
+          </a:fillRef>
+          <a:effectRef idx="2">
+            <a:schemeClr val="accent1"/>
+          </a:effectRef>
+          <a:fontRef idx="minor">
+            <a:schemeClr val="lt1"/>
+          </a:fontRef>
+        </p:style>
+        <p:txBody>
+          <a:bodyPr rtlCol="0" anchor="ctr" wrap="square" tIns="25400" bIns="25400"/>
+          <a:lstStyle/>
+          <a:p>
+            <a:pPr algn="ctr"/>
+            <a:r>
+              <a:rPr sz="1250" b="1" i="0">
+                <a:solidFill>
+                  <a:srgbClr val="1F2A37"/>
+                </a:solidFill>
+                <a:latin typeface="Calibri"/>
+              </a:rPr>
+              <a:t>Cluster-agnostic by construction: works on kind / vanilla k8s / OpenShift; cross-cluster runs use per-instance route templates + a reachable internal issuer.</a:t>
+            </a:r>
+          </a:p>
+        </p:txBody>
+      </p:sp>
+      <p:sp>
+        <p:nvSpPr>
+          <p:cNvPr id="8" name="TextBox 7"/>
+          <p:cNvSpPr txBox="1"/>
+          <p:nvPr/>
+        </p:nvSpPr>
+        <p:spPr>
+          <a:xfrm>
+            <a:off x="11795760" y="6437376"/>
+            <a:ext cx="320040" cy="310896"/>
+          </a:xfrm>
+          <a:prstGeom prst="rect">
+            <a:avLst/>
+          </a:prstGeom>
+          <a:noFill/>
+        </p:spPr>
+        <p:txBody>
+          <a:bodyPr wrap="none" anchor="ctr" lIns="0" rIns="0" tIns="0" bIns="0">
+            <a:spAutoFit/>
+          </a:bodyPr>
+          <a:lstStyle/>
+          <a:p>
+            <a:pPr algn="r">
+              <a:spcAft>
+                <a:spcPts val="300"/>
+              </a:spcAft>
+            </a:pPr>
+            <a:r>
+              <a:rPr sz="1200" b="0" i="0">
+                <a:solidFill>
+                  <a:srgbClr val="6B6B6B"/>
+                </a:solidFill>
+                <a:latin typeface="Calibri"/>
+              </a:rPr>
+              <a:t>20</a:t>
             </a:r>
           </a:p>
         </p:txBody>

--- a/docs/AutoBench.pptx
+++ b/docs/AutoBench.pptx
@@ -3362,7 +3362,7 @@
                 </a:solidFill>
                 <a:latin typeface="Calibri"/>
               </a:rPr>
-              <a:t>Last modified 2026-09-17 01:07 EDT</a:t>
+              <a:t>Last modified 2026-09-17 08:56 EDT</a:t>
             </a:r>
           </a:p>
         </p:txBody>
@@ -6807,7 +6807,7 @@
                 </a:solidFill>
                 <a:latin typeface="Calibri"/>
               </a:rPr>
-              <a:t>Measured OUT CV &gt; IN CV in 15 of the 22 legs that ran more than one task. gsm8k's prompt is near-constant while answer length swings; only long-horizon appworld inverts it, in all four of its legs. Do not infer a direction from the mechanism — read the CV.</a:t>
+              <a:t>Measured OUT CV &gt; IN CV in 15 of the 22 legs that ran more than one task. On a one-call model gsm8k's prompt is near-constant while answer length swings (IN 0.06-0.09 vs OUT 0.52-0.86); gpt-4.1 needs tool round-trips and varies on the input side too (IN 0.39-0.44). Only long-horizon appworld is input-led, in all four of its legs. Read the CV, not the mechanism.</a:t>
             </a:r>
           </a:p>
         </p:txBody>

--- a/docs/AutoBench.pptx
+++ b/docs/AutoBench.pptx
@@ -25,6 +25,7 @@
     <p:sldId id="273" r:id="rId24"/>
     <p:sldId id="274" r:id="rId25"/>
     <p:sldId id="275" r:id="rId26"/>
+    <p:sldId id="276" r:id="rId27"/>
   </p:sldIdLst>
   <p:sldSz cx="12192000" cy="6858000" type="screen4x3"/>
   <p:notesSz cx="6858000" cy="9144000"/>
@@ -3362,7 +3363,7 @@
                 </a:solidFill>
                 <a:latin typeface="Calibri"/>
               </a:rPr>
-              <a:t>Last modified 2026-09-17 08:56 EDT</a:t>
+              <a:t>Last modified 2026-09-17 17:58 EDT</a:t>
             </a:r>
           </a:p>
         </p:txBody>
@@ -4226,7 +4227,7 @@
                 <a:gridCol w="3017520"/>
                 <a:gridCol w="3017520"/>
               </a:tblGrid>
-              <a:tr h="305972">
+              <a:tr h="284117">
                 <a:tc>
                   <a:txBody>
                     <a:bodyPr/>
@@ -4320,7 +4321,7 @@
                   </a:tcPr>
                 </a:tc>
               </a:tr>
-              <a:tr h="305972">
+              <a:tr h="284117">
                 <a:tc>
                   <a:txBody>
                     <a:bodyPr/>
@@ -4414,7 +4415,7 @@
                   </a:tcPr>
                 </a:tc>
               </a:tr>
-              <a:tr h="305972">
+              <a:tr h="284117">
                 <a:tc>
                   <a:txBody>
                     <a:bodyPr/>
@@ -4508,7 +4509,7 @@
                   </a:tcPr>
                 </a:tc>
               </a:tr>
-              <a:tr h="305972">
+              <a:tr h="284117">
                 <a:tc>
                   <a:txBody>
                     <a:bodyPr/>
@@ -4602,7 +4603,7 @@
                   </a:tcPr>
                 </a:tc>
               </a:tr>
-              <a:tr h="305972">
+              <a:tr h="284117">
                 <a:tc>
                   <a:txBody>
                     <a:bodyPr/>
@@ -4696,7 +4697,7 @@
                   </a:tcPr>
                 </a:tc>
               </a:tr>
-              <a:tr h="305972">
+              <a:tr h="284117">
                 <a:tc>
                   <a:txBody>
                     <a:bodyPr/>
@@ -4790,7 +4791,7 @@
                   </a:tcPr>
                 </a:tc>
               </a:tr>
-              <a:tr h="305972">
+              <a:tr h="284117">
                 <a:tc>
                   <a:txBody>
                     <a:bodyPr/>
@@ -4884,7 +4885,7 @@
                   </a:tcPr>
                 </a:tc>
               </a:tr>
-              <a:tr h="305972">
+              <a:tr h="284117">
                 <a:tc>
                   <a:txBody>
                     <a:bodyPr/>
@@ -4898,12 +4899,200 @@
                           </a:solidFill>
                           <a:latin typeface="Calibri"/>
                         </a:rPr>
+                        <a:t>Cost / task, our rates</a:t>
+                      </a:r>
+                    </a:p>
+                  </a:txBody>
+                  <a:tcPr marL="63500" marR="63500" marT="12700" marB="12700" anchor="ctr">
+                    <a:solidFill>
+                      <a:srgbClr val="FFFFFF"/>
+                    </a:solidFill>
+                  </a:tcPr>
+                </a:tc>
+                <a:tc>
+                  <a:txBody>
+                    <a:bodyPr/>
+                    <a:lstStyle/>
+                    <a:p>
+                      <a:pPr algn="ctr"/>
+                      <a:r>
+                        <a:rPr sz="1100" b="0" i="0">
+                          <a:solidFill>
+                            <a:srgbClr val="1F2A37"/>
+                          </a:solidFill>
+                          <a:latin typeface="Calibri"/>
+                        </a:rPr>
+                        <a:t>$0.00055</a:t>
+                      </a:r>
+                    </a:p>
+                  </a:txBody>
+                  <a:tcPr marL="63500" marR="63500" marT="12700" marB="12700" anchor="ctr">
+                    <a:solidFill>
+                      <a:srgbClr val="FFFFFF"/>
+                    </a:solidFill>
+                  </a:tcPr>
+                </a:tc>
+                <a:tc>
+                  <a:txBody>
+                    <a:bodyPr/>
+                    <a:lstStyle/>
+                    <a:p>
+                      <a:pPr algn="ctr"/>
+                      <a:r>
+                        <a:rPr sz="1100" b="0" i="0">
+                          <a:solidFill>
+                            <a:srgbClr val="1F2A37"/>
+                          </a:solidFill>
+                          <a:latin typeface="Calibri"/>
+                        </a:rPr>
+                        <a:t>$0.154</a:t>
+                      </a:r>
+                    </a:p>
+                  </a:txBody>
+                  <a:tcPr marL="63500" marR="63500" marT="12700" marB="12700" anchor="ctr">
+                    <a:solidFill>
+                      <a:srgbClr val="FFFFFF"/>
+                    </a:solidFill>
+                  </a:tcPr>
+                </a:tc>
+                <a:tc>
+                  <a:txBody>
+                    <a:bodyPr/>
+                    <a:lstStyle/>
+                    <a:p>
+                      <a:pPr algn="ctr"/>
+                      <a:r>
+                        <a:rPr sz="1100" b="0" i="0">
+                          <a:solidFill>
+                            <a:srgbClr val="1F2A37"/>
+                          </a:solidFill>
+                          <a:latin typeface="Calibri"/>
+                        </a:rPr>
+                        <a:t>$0.589</a:t>
+                      </a:r>
+                    </a:p>
+                  </a:txBody>
+                  <a:tcPr marL="63500" marR="63500" marT="12700" marB="12700" anchor="ctr">
+                    <a:solidFill>
+                      <a:srgbClr val="FFFFFF"/>
+                    </a:solidFill>
+                  </a:tcPr>
+                </a:tc>
+              </a:tr>
+              <a:tr h="284117">
+                <a:tc>
+                  <a:txBody>
+                    <a:bodyPr/>
+                    <a:lstStyle/>
+                    <a:p>
+                      <a:pPr algn="l"/>
+                      <a:r>
+                        <a:rPr sz="1100" b="1" i="0">
+                          <a:solidFill>
+                            <a:srgbClr val="1F2A37"/>
+                          </a:solidFill>
+                          <a:latin typeface="Calibri"/>
+                        </a:rPr>
                         <a:t>LLM calls / task</a:t>
                       </a:r>
                     </a:p>
                   </a:txBody>
                   <a:tcPr marL="63500" marR="63500" marT="12700" marB="12700" anchor="ctr">
                     <a:solidFill>
+                      <a:srgbClr val="F4F6F8"/>
+                    </a:solidFill>
+                  </a:tcPr>
+                </a:tc>
+                <a:tc>
+                  <a:txBody>
+                    <a:bodyPr/>
+                    <a:lstStyle/>
+                    <a:p>
+                      <a:pPr algn="ctr"/>
+                      <a:r>
+                        <a:rPr sz="1100" b="0" i="0">
+                          <a:solidFill>
+                            <a:srgbClr val="1F2A37"/>
+                          </a:solidFill>
+                          <a:latin typeface="Calibri"/>
+                        </a:rPr>
+                        <a:t>1.1</a:t>
+                      </a:r>
+                    </a:p>
+                  </a:txBody>
+                  <a:tcPr marL="63500" marR="63500" marT="12700" marB="12700" anchor="ctr">
+                    <a:solidFill>
+                      <a:srgbClr val="F4F6F8"/>
+                    </a:solidFill>
+                  </a:tcPr>
+                </a:tc>
+                <a:tc>
+                  <a:txBody>
+                    <a:bodyPr/>
+                    <a:lstStyle/>
+                    <a:p>
+                      <a:pPr algn="ctr"/>
+                      <a:r>
+                        <a:rPr sz="1100" b="0" i="0">
+                          <a:solidFill>
+                            <a:srgbClr val="1F2A37"/>
+                          </a:solidFill>
+                          <a:latin typeface="Calibri"/>
+                        </a:rPr>
+                        <a:t>11.4</a:t>
+                      </a:r>
+                    </a:p>
+                  </a:txBody>
+                  <a:tcPr marL="63500" marR="63500" marT="12700" marB="12700" anchor="ctr">
+                    <a:solidFill>
+                      <a:srgbClr val="F4F6F8"/>
+                    </a:solidFill>
+                  </a:tcPr>
+                </a:tc>
+                <a:tc>
+                  <a:txBody>
+                    <a:bodyPr/>
+                    <a:lstStyle/>
+                    <a:p>
+                      <a:pPr algn="ctr"/>
+                      <a:r>
+                        <a:rPr sz="1100" b="0" i="0">
+                          <a:solidFill>
+                            <a:srgbClr val="1F2A37"/>
+                          </a:solidFill>
+                          <a:latin typeface="Calibri"/>
+                        </a:rPr>
+                        <a:t>29.2</a:t>
+                      </a:r>
+                    </a:p>
+                  </a:txBody>
+                  <a:tcPr marL="63500" marR="63500" marT="12700" marB="12700" anchor="ctr">
+                    <a:solidFill>
+                      <a:srgbClr val="F4F6F8"/>
+                    </a:solidFill>
+                  </a:tcPr>
+                </a:tc>
+              </a:tr>
+              <a:tr h="284117">
+                <a:tc>
+                  <a:txBody>
+                    <a:bodyPr/>
+                    <a:lstStyle/>
+                    <a:p>
+                      <a:pPr algn="l"/>
+                      <a:r>
+                        <a:rPr sz="1100" b="1" i="0">
+                          <a:solidFill>
+                            <a:srgbClr val="1F2A37"/>
+                          </a:solidFill>
+                          <a:latin typeface="Calibri"/>
+                        </a:rPr>
+                        <a:t>Tool calls / task</a:t>
+                      </a:r>
+                    </a:p>
+                  </a:txBody>
+                  <a:tcPr marL="63500" marR="63500" marT="12700" marB="12700" anchor="ctr">
+                    <a:solidFill>
                       <a:srgbClr val="FFFFFF"/>
                     </a:solidFill>
                   </a:tcPr>
@@ -4967,7 +5156,7 @@
                           </a:solidFill>
                           <a:latin typeface="Calibri"/>
                         </a:rPr>
-                        <a:t>29.2</a:t>
+                        <a:t>14.6</a:t>
                       </a:r>
                     </a:p>
                   </a:txBody>
@@ -4978,7 +5167,7 @@
                   </a:tcPr>
                 </a:tc>
               </a:tr>
-              <a:tr h="305972">
+              <a:tr h="284117">
                 <a:tc>
                   <a:txBody>
                     <a:bodyPr/>
@@ -4992,7 +5181,7 @@
                           </a:solidFill>
                           <a:latin typeface="Calibri"/>
                         </a:rPr>
-                        <a:t>Tool calls / task</a:t>
+                        <a:t>Median task latency</a:t>
                       </a:r>
                     </a:p>
                   </a:txBody>
@@ -5015,7 +5204,7 @@
                           </a:solidFill>
                           <a:latin typeface="Calibri"/>
                         </a:rPr>
-                        <a:t>1.1</a:t>
+                        <a:t>4.9 s</a:t>
                       </a:r>
                     </a:p>
                   </a:txBody>
@@ -5038,7 +5227,7 @@
                           </a:solidFill>
                           <a:latin typeface="Calibri"/>
                         </a:rPr>
-                        <a:t>11.4</a:t>
+                        <a:t>84 s</a:t>
                       </a:r>
                     </a:p>
                   </a:txBody>
@@ -5061,7 +5250,7 @@
                           </a:solidFill>
                           <a:latin typeface="Calibri"/>
                         </a:rPr>
-                        <a:t>14.6</a:t>
+                        <a:t>264 s</a:t>
                       </a:r>
                     </a:p>
                   </a:txBody>
@@ -5072,7 +5261,7 @@
                   </a:tcPr>
                 </a:tc>
               </a:tr>
-              <a:tr h="305972">
+              <a:tr h="284117">
                 <a:tc>
                   <a:txBody>
                     <a:bodyPr/>
@@ -5086,7 +5275,7 @@
                           </a:solidFill>
                           <a:latin typeface="Calibri"/>
                         </a:rPr>
-                        <a:t>Median task latency</a:t>
+                        <a:t>Slowest task seen</a:t>
                       </a:r>
                     </a:p>
                   </a:txBody>
@@ -5109,7 +5298,7 @@
                           </a:solidFill>
                           <a:latin typeface="Calibri"/>
                         </a:rPr>
-                        <a:t>4.9 s</a:t>
+                        <a:t>39 s</a:t>
                       </a:r>
                     </a:p>
                   </a:txBody>
@@ -5132,7 +5321,7 @@
                           </a:solidFill>
                           <a:latin typeface="Calibri"/>
                         </a:rPr>
-                        <a:t>84 s</a:t>
+                        <a:t>136 s</a:t>
                       </a:r>
                     </a:p>
                   </a:txBody>
@@ -5155,7 +5344,7 @@
                           </a:solidFill>
                           <a:latin typeface="Calibri"/>
                         </a:rPr>
-                        <a:t>264 s</a:t>
+                        <a:t>592 s</a:t>
                       </a:r>
                     </a:p>
                   </a:txBody>
@@ -5166,7 +5355,7 @@
                   </a:tcPr>
                 </a:tc>
               </a:tr>
-              <a:tr h="305972">
+              <a:tr h="284117">
                 <a:tc>
                   <a:txBody>
                     <a:bodyPr/>
@@ -5180,7 +5369,7 @@
                           </a:solidFill>
                           <a:latin typeface="Calibri"/>
                         </a:rPr>
-                        <a:t>Slowest task seen</a:t>
+                        <a:t>Model we use</a:t>
                       </a:r>
                     </a:p>
                   </a:txBody>
@@ -5203,7 +5392,7 @@
                           </a:solidFill>
                           <a:latin typeface="Calibri"/>
                         </a:rPr>
-                        <a:t>39 s</a:t>
+                        <a:t>gpt-5-mini</a:t>
                       </a:r>
                     </a:p>
                   </a:txBody>
@@ -5226,7 +5415,7 @@
                           </a:solidFill>
                           <a:latin typeface="Calibri"/>
                         </a:rPr>
-                        <a:t>136 s</a:t>
+                        <a:t>claude-sonnet-5</a:t>
                       </a:r>
                     </a:p>
                   </a:txBody>
@@ -5249,7 +5438,7 @@
                           </a:solidFill>
                           <a:latin typeface="Calibri"/>
                         </a:rPr>
-                        <a:t>592 s</a:t>
+                        <a:t>gemini-2.5-pro</a:t>
                       </a:r>
                     </a:p>
                   </a:txBody>
@@ -5260,7 +5449,7 @@
                   </a:tcPr>
                 </a:tc>
               </a:tr>
-              <a:tr h="305972">
+              <a:tr h="284118">
                 <a:tc>
                   <a:txBody>
                     <a:bodyPr/>
@@ -5274,7 +5463,7 @@
                           </a:solidFill>
                           <a:latin typeface="Calibri"/>
                         </a:rPr>
-                        <a:t>Model we use</a:t>
+                        <a:t>Task pool</a:t>
                       </a:r>
                     </a:p>
                   </a:txBody>
@@ -5297,7 +5486,7 @@
                           </a:solidFill>
                           <a:latin typeface="Calibri"/>
                         </a:rPr>
-                        <a:t>gpt-5-mini</a:t>
+                        <a:t>8.5K (HuggingFace)</a:t>
                       </a:r>
                     </a:p>
                   </a:txBody>
@@ -5320,7 +5509,7 @@
                           </a:solidFill>
                           <a:latin typeface="Calibri"/>
                         </a:rPr>
-                        <a:t>claude-sonnet-5</a:t>
+                        <a:t>114 (retail domain)</a:t>
                       </a:r>
                     </a:p>
                   </a:txBody>
@@ -5343,107 +5532,13 @@
                           </a:solidFill>
                           <a:latin typeface="Calibri"/>
                         </a:rPr>
-                        <a:t>gemini-2.5-pro</a:t>
+                        <a:t>grouped scenarios</a:t>
                       </a:r>
                     </a:p>
                   </a:txBody>
                   <a:tcPr marL="63500" marR="63500" marT="12700" marB="12700" anchor="ctr">
                     <a:solidFill>
                       <a:srgbClr val="FFFFFF"/>
-                    </a:solidFill>
-                  </a:tcPr>
-                </a:tc>
-              </a:tr>
-              <a:tr h="305975">
-                <a:tc>
-                  <a:txBody>
-                    <a:bodyPr/>
-                    <a:lstStyle/>
-                    <a:p>
-                      <a:pPr algn="l"/>
-                      <a:r>
-                        <a:rPr sz="1100" b="1" i="0">
-                          <a:solidFill>
-                            <a:srgbClr val="1F2A37"/>
-                          </a:solidFill>
-                          <a:latin typeface="Calibri"/>
-                        </a:rPr>
-                        <a:t>Task pool</a:t>
-                      </a:r>
-                    </a:p>
-                  </a:txBody>
-                  <a:tcPr marL="63500" marR="63500" marT="12700" marB="12700" anchor="ctr">
-                    <a:solidFill>
-                      <a:srgbClr val="F4F6F8"/>
-                    </a:solidFill>
-                  </a:tcPr>
-                </a:tc>
-                <a:tc>
-                  <a:txBody>
-                    <a:bodyPr/>
-                    <a:lstStyle/>
-                    <a:p>
-                      <a:pPr algn="ctr"/>
-                      <a:r>
-                        <a:rPr sz="1100" b="0" i="0">
-                          <a:solidFill>
-                            <a:srgbClr val="1F2A37"/>
-                          </a:solidFill>
-                          <a:latin typeface="Calibri"/>
-                        </a:rPr>
-                        <a:t>8.5K (HuggingFace)</a:t>
-                      </a:r>
-                    </a:p>
-                  </a:txBody>
-                  <a:tcPr marL="63500" marR="63500" marT="12700" marB="12700" anchor="ctr">
-                    <a:solidFill>
-                      <a:srgbClr val="F4F6F8"/>
-                    </a:solidFill>
-                  </a:tcPr>
-                </a:tc>
-                <a:tc>
-                  <a:txBody>
-                    <a:bodyPr/>
-                    <a:lstStyle/>
-                    <a:p>
-                      <a:pPr algn="ctr"/>
-                      <a:r>
-                        <a:rPr sz="1100" b="0" i="0">
-                          <a:solidFill>
-                            <a:srgbClr val="1F2A37"/>
-                          </a:solidFill>
-                          <a:latin typeface="Calibri"/>
-                        </a:rPr>
-                        <a:t>114 (retail domain)</a:t>
-                      </a:r>
-                    </a:p>
-                  </a:txBody>
-                  <a:tcPr marL="63500" marR="63500" marT="12700" marB="12700" anchor="ctr">
-                    <a:solidFill>
-                      <a:srgbClr val="F4F6F8"/>
-                    </a:solidFill>
-                  </a:tcPr>
-                </a:tc>
-                <a:tc>
-                  <a:txBody>
-                    <a:bodyPr/>
-                    <a:lstStyle/>
-                    <a:p>
-                      <a:pPr algn="ctr"/>
-                      <a:r>
-                        <a:rPr sz="1100" b="0" i="0">
-                          <a:solidFill>
-                            <a:srgbClr val="1F2A37"/>
-                          </a:solidFill>
-                          <a:latin typeface="Calibri"/>
-                        </a:rPr>
-                        <a:t>grouped scenarios</a:t>
-                      </a:r>
-                    </a:p>
-                  </a:txBody>
-                  <a:tcPr marL="63500" marR="63500" marT="12700" marB="12700" anchor="ctr">
-                    <a:solidFill>
-                      <a:srgbClr val="F4F6F8"/>
                     </a:solidFill>
                   </a:tcPr>
                 </a:tc>
@@ -5502,7 +5597,7 @@
                 </a:solidFill>
                 <a:latin typeface="Calibri"/>
               </a:rPr>
-              <a:t>The scale gap is the headline: a tau2 task costs ~267x the input tokens of a gsm8k task, an appworld task ~792x. A 50-task gsm8k run is a minute; a 20-task appworld run is 30-45 minutes and millions of tokens. Budget by benchmark, not by task count.</a:t>
+              <a:t>The scale gap is the headline: a tau2 task costs ~267x the input tokens of a gsm8k task, an appworld task ~792x — and in MONEY 279x and 1,069x, because the harder benchmarks also run the dearer models (7.6). A 50-task gsm8k run is a minute and 2 cents; a 20-task appworld run is 30-45 minutes, millions of tokens and dollars. Budget by benchmark, not by task count.</a:t>
             </a:r>
           </a:p>
         </p:txBody>
@@ -6995,7 +7090,7 @@
                 </a:solidFill>
                 <a:latin typeface="Calibri"/>
               </a:rPr>
-              <a:t>The actionable summary: what each benchmark is FOR, and the token bill it hands you</a:t>
+              <a:t>The actionable summary: what each benchmark is FOR, and the bill it hands you — in tokens and in dollars</a:t>
             </a:r>
           </a:p>
         </p:txBody>
@@ -7019,8 +7114,9 @@
                 <a:tableStyleId>{5C22544A-7EE6-4342-B048-85BDC9FD1C3A}</a:tableStyleId>
               </a:tblPr>
               <a:tblGrid>
-                <a:gridCol w="3291840"/>
-                <a:gridCol w="2697480"/>
+                <a:gridCol w="2880360"/>
+                <a:gridCol w="2103120"/>
+                <a:gridCol w="1005840"/>
               </a:tblGrid>
               <a:tr h="388620">
                 <a:tc>
@@ -7069,6 +7165,29 @@
                     </a:solidFill>
                   </a:tcPr>
                 </a:tc>
+                <a:tc>
+                  <a:txBody>
+                    <a:bodyPr/>
+                    <a:lstStyle/>
+                    <a:p>
+                      <a:pPr algn="ctr"/>
+                      <a:r>
+                        <a:rPr sz="1050" b="1" i="0">
+                          <a:solidFill>
+                            <a:srgbClr val="FFFFFF"/>
+                          </a:solidFill>
+                          <a:latin typeface="Calibri"/>
+                        </a:rPr>
+                        <a:t>costs</a:t>
+                      </a:r>
+                    </a:p>
+                  </a:txBody>
+                  <a:tcPr marL="63500" marR="63500" marT="12700" marB="12700" anchor="ctr">
+                    <a:solidFill>
+                      <a:srgbClr val="1B3A5C"/>
+                    </a:solidFill>
+                  </a:tcPr>
+                </a:tc>
               </a:tr>
               <a:tr h="388620">
                 <a:tc>
@@ -7117,6 +7236,29 @@
                     </a:solidFill>
                   </a:tcPr>
                 </a:tc>
+                <a:tc>
+                  <a:txBody>
+                    <a:bodyPr/>
+                    <a:lstStyle/>
+                    <a:p>
+                      <a:pPr algn="ctr"/>
+                      <a:r>
+                        <a:rPr sz="1050" b="0" i="0">
+                          <a:solidFill>
+                            <a:srgbClr val="1F2A37"/>
+                          </a:solidFill>
+                          <a:latin typeface="Calibri"/>
+                        </a:rPr>
+                        <a:t>&lt; $0.01</a:t>
+                      </a:r>
+                    </a:p>
+                  </a:txBody>
+                  <a:tcPr marL="63500" marR="63500" marT="12700" marB="12700" anchor="ctr">
+                    <a:solidFill>
+                      <a:srgbClr val="FFFFFF"/>
+                    </a:solidFill>
+                  </a:tcPr>
+                </a:tc>
               </a:tr>
               <a:tr h="388620">
                 <a:tc>
@@ -7165,6 +7307,29 @@
                     </a:solidFill>
                   </a:tcPr>
                 </a:tc>
+                <a:tc>
+                  <a:txBody>
+                    <a:bodyPr/>
+                    <a:lstStyle/>
+                    <a:p>
+                      <a:pPr algn="ctr"/>
+                      <a:r>
+                        <a:rPr sz="1050" b="0" i="0">
+                          <a:solidFill>
+                            <a:srgbClr val="1F2A37"/>
+                          </a:solidFill>
+                          <a:latin typeface="Calibri"/>
+                        </a:rPr>
+                        <a:t>$0.02</a:t>
+                      </a:r>
+                    </a:p>
+                  </a:txBody>
+                  <a:tcPr marL="63500" marR="63500" marT="12700" marB="12700" anchor="ctr">
+                    <a:solidFill>
+                      <a:srgbClr val="F4F6F8"/>
+                    </a:solidFill>
+                  </a:tcPr>
+                </a:tc>
               </a:tr>
               <a:tr h="388620">
                 <a:tc>
@@ -7203,7 +7368,30 @@
                           </a:solidFill>
                           <a:latin typeface="Calibri"/>
                         </a:rPr>
-                        <a:t>tau2 — it discriminates; gsm8k saturates at ~1.0</a:t>
+                        <a:t>tau2 — it discriminates; gsm8k saturates</a:t>
+                      </a:r>
+                    </a:p>
+                  </a:txBody>
+                  <a:tcPr marL="63500" marR="63500" marT="12700" marB="12700" anchor="ctr">
+                    <a:solidFill>
+                      <a:srgbClr val="FFFFFF"/>
+                    </a:solidFill>
+                  </a:tcPr>
+                </a:tc>
+                <a:tc>
+                  <a:txBody>
+                    <a:bodyPr/>
+                    <a:lstStyle/>
+                    <a:p>
+                      <a:pPr algn="ctr"/>
+                      <a:r>
+                        <a:rPr sz="1050" b="0" i="0">
+                          <a:solidFill>
+                            <a:srgbClr val="1F2A37"/>
+                          </a:solidFill>
+                          <a:latin typeface="Calibri"/>
+                        </a:rPr>
+                        <a:t>$1.70 / 10</a:t>
                       </a:r>
                     </a:p>
                   </a:txBody>
@@ -7261,6 +7449,29 @@
                     </a:solidFill>
                   </a:tcPr>
                 </a:tc>
+                <a:tc>
+                  <a:txBody>
+                    <a:bodyPr/>
+                    <a:lstStyle/>
+                    <a:p>
+                      <a:pPr algn="ctr"/>
+                      <a:r>
+                        <a:rPr sz="1050" b="0" i="0">
+                          <a:solidFill>
+                            <a:srgbClr val="1F2A37"/>
+                          </a:solidFill>
+                          <a:latin typeface="Calibri"/>
+                        </a:rPr>
+                        <a:t>$1.90–2.80 / 5</a:t>
+                      </a:r>
+                    </a:p>
+                  </a:txBody>
+                  <a:tcPr marL="63500" marR="63500" marT="12700" marB="12700" anchor="ctr">
+                    <a:solidFill>
+                      <a:srgbClr val="F4F6F8"/>
+                    </a:solidFill>
+                  </a:tcPr>
+                </a:tc>
               </a:tr>
               <a:tr h="388620">
                 <a:tc>
@@ -7299,7 +7510,30 @@
                           </a:solidFill>
                           <a:latin typeface="Calibri"/>
                         </a:rPr>
-                        <a:t>gsm8k — if it fails, stop and fix infrastructure</a:t>
+                        <a:t>gsm8k — if it fails, fix infrastructure</a:t>
+                      </a:r>
+                    </a:p>
+                  </a:txBody>
+                  <a:tcPr marL="63500" marR="63500" marT="12700" marB="12700" anchor="ctr">
+                    <a:solidFill>
+                      <a:srgbClr val="FFFFFF"/>
+                    </a:solidFill>
+                  </a:tcPr>
+                </a:tc>
+                <a:tc>
+                  <a:txBody>
+                    <a:bodyPr/>
+                    <a:lstStyle/>
+                    <a:p>
+                      <a:pPr algn="ctr"/>
+                      <a:r>
+                        <a:rPr sz="1050" b="0" i="0">
+                          <a:solidFill>
+                            <a:srgbClr val="1F2A37"/>
+                          </a:solidFill>
+                          <a:latin typeface="Calibri"/>
+                        </a:rPr>
+                        <a:t>&lt; $0.01</a:t>
                       </a:r>
                     </a:p>
                   </a:txBody>
@@ -7333,9 +7567,11 @@
                 <a:tableStyleId>{5C22544A-7EE6-4342-B048-85BDC9FD1C3A}</a:tableStyleId>
               </a:tblPr>
               <a:tblGrid>
-                <a:gridCol w="2697480"/>
-                <a:gridCol w="1188720"/>
-                <a:gridCol w="1188720"/>
+                <a:gridCol w="1965960"/>
+                <a:gridCol w="777240"/>
+                <a:gridCol w="777240"/>
+                <a:gridCol w="777240"/>
+                <a:gridCol w="777240"/>
               </a:tblGrid>
               <a:tr h="259080">
                 <a:tc>
@@ -7374,7 +7610,7 @@
                           </a:solidFill>
                           <a:latin typeface="Calibri"/>
                         </a:rPr>
-                        <a:t>tokens OCP</a:t>
+                        <a:t>tok OCP</a:t>
                       </a:r>
                     </a:p>
                   </a:txBody>
@@ -7397,7 +7633,53 @@
                           </a:solidFill>
                           <a:latin typeface="Calibri"/>
                         </a:rPr>
-                        <a:t>tokens KinD</a:t>
+                        <a:t>$ OCP</a:t>
+                      </a:r>
+                    </a:p>
+                  </a:txBody>
+                  <a:tcPr marL="63500" marR="63500" marT="12700" marB="12700" anchor="ctr">
+                    <a:solidFill>
+                      <a:srgbClr val="1B3A5C"/>
+                    </a:solidFill>
+                  </a:tcPr>
+                </a:tc>
+                <a:tc>
+                  <a:txBody>
+                    <a:bodyPr/>
+                    <a:lstStyle/>
+                    <a:p>
+                      <a:pPr algn="ctr"/>
+                      <a:r>
+                        <a:rPr sz="1050" b="1" i="0">
+                          <a:solidFill>
+                            <a:srgbClr val="FFFFFF"/>
+                          </a:solidFill>
+                          <a:latin typeface="Calibri"/>
+                        </a:rPr>
+                        <a:t>tok KinD</a:t>
+                      </a:r>
+                    </a:p>
+                  </a:txBody>
+                  <a:tcPr marL="63500" marR="63500" marT="12700" marB="12700" anchor="ctr">
+                    <a:solidFill>
+                      <a:srgbClr val="1B3A5C"/>
+                    </a:solidFill>
+                  </a:tcPr>
+                </a:tc>
+                <a:tc>
+                  <a:txBody>
+                    <a:bodyPr/>
+                    <a:lstStyle/>
+                    <a:p>
+                      <a:pPr algn="ctr"/>
+                      <a:r>
+                        <a:rPr sz="1050" b="1" i="0">
+                          <a:solidFill>
+                            <a:srgbClr val="FFFFFF"/>
+                          </a:solidFill>
+                          <a:latin typeface="Calibri"/>
+                        </a:rPr>
+                        <a:t>$ KinD</a:t>
                       </a:r>
                     </a:p>
                   </a:txBody>
@@ -7468,7 +7750,53 @@
                           </a:solidFill>
                           <a:latin typeface="Calibri"/>
                         </a:rPr>
+                        <a:t>$0.0004</a:t>
+                      </a:r>
+                    </a:p>
+                  </a:txBody>
+                  <a:tcPr marL="63500" marR="63500" marT="12700" marB="12700" anchor="ctr">
+                    <a:solidFill>
+                      <a:srgbClr val="FFFFFF"/>
+                    </a:solidFill>
+                  </a:tcPr>
+                </a:tc>
+                <a:tc>
+                  <a:txBody>
+                    <a:bodyPr/>
+                    <a:lstStyle/>
+                    <a:p>
+                      <a:pPr algn="ctr"/>
+                      <a:r>
+                        <a:rPr sz="1050" b="0" i="0">
+                          <a:solidFill>
+                            <a:srgbClr val="1F2A37"/>
+                          </a:solidFill>
+                          <a:latin typeface="Calibri"/>
+                        </a:rPr>
                         <a:t>790</a:t>
+                      </a:r>
+                    </a:p>
+                  </a:txBody>
+                  <a:tcPr marL="63500" marR="63500" marT="12700" marB="12700" anchor="ctr">
+                    <a:solidFill>
+                      <a:srgbClr val="FFFFFF"/>
+                    </a:solidFill>
+                  </a:tcPr>
+                </a:tc>
+                <a:tc>
+                  <a:txBody>
+                    <a:bodyPr/>
+                    <a:lstStyle/>
+                    <a:p>
+                      <a:pPr algn="ctr"/>
+                      <a:r>
+                        <a:rPr sz="1050" b="0" i="0">
+                          <a:solidFill>
+                            <a:srgbClr val="1F2A37"/>
+                          </a:solidFill>
+                          <a:latin typeface="Calibri"/>
+                        </a:rPr>
+                        <a:t>$0.0010</a:t>
                       </a:r>
                     </a:p>
                   </a:txBody>
@@ -7539,7 +7867,53 @@
                           </a:solidFill>
                           <a:latin typeface="Calibri"/>
                         </a:rPr>
+                        <a:t>$0.005</a:t>
+                      </a:r>
+                    </a:p>
+                  </a:txBody>
+                  <a:tcPr marL="63500" marR="63500" marT="12700" marB="12700" anchor="ctr">
+                    <a:solidFill>
+                      <a:srgbClr val="F4F6F8"/>
+                    </a:solidFill>
+                  </a:tcPr>
+                </a:tc>
+                <a:tc>
+                  <a:txBody>
+                    <a:bodyPr/>
+                    <a:lstStyle/>
+                    <a:p>
+                      <a:pPr algn="ctr"/>
+                      <a:r>
+                        <a:rPr sz="1050" b="0" i="0">
+                          <a:solidFill>
+                            <a:srgbClr val="1F2A37"/>
+                          </a:solidFill>
+                          <a:latin typeface="Calibri"/>
+                        </a:rPr>
                         <a:t>5.1 K</a:t>
+                      </a:r>
+                    </a:p>
+                  </a:txBody>
+                  <a:tcPr marL="63500" marR="63500" marT="12700" marB="12700" anchor="ctr">
+                    <a:solidFill>
+                      <a:srgbClr val="F4F6F8"/>
+                    </a:solidFill>
+                  </a:tcPr>
+                </a:tc>
+                <a:tc>
+                  <a:txBody>
+                    <a:bodyPr/>
+                    <a:lstStyle/>
+                    <a:p>
+                      <a:pPr algn="ctr"/>
+                      <a:r>
+                        <a:rPr sz="1050" b="0" i="0">
+                          <a:solidFill>
+                            <a:srgbClr val="1F2A37"/>
+                          </a:solidFill>
+                          <a:latin typeface="Calibri"/>
+                        </a:rPr>
+                        <a:t>$0.005</a:t>
                       </a:r>
                     </a:p>
                   </a:txBody>
@@ -7610,7 +7984,53 @@
                           </a:solidFill>
                           <a:latin typeface="Calibri"/>
                         </a:rPr>
+                        <a:t>$0.023</a:t>
+                      </a:r>
+                    </a:p>
+                  </a:txBody>
+                  <a:tcPr marL="63500" marR="63500" marT="12700" marB="12700" anchor="ctr">
+                    <a:solidFill>
+                      <a:srgbClr val="FFFFFF"/>
+                    </a:solidFill>
+                  </a:tcPr>
+                </a:tc>
+                <a:tc>
+                  <a:txBody>
+                    <a:bodyPr/>
+                    <a:lstStyle/>
+                    <a:p>
+                      <a:pPr algn="ctr"/>
+                      <a:r>
+                        <a:rPr sz="1050" b="0" i="0">
+                          <a:solidFill>
+                            <a:srgbClr val="1F2A37"/>
+                          </a:solidFill>
+                          <a:latin typeface="Calibri"/>
+                        </a:rPr>
                         <a:t>24 K</a:t>
+                      </a:r>
+                    </a:p>
+                  </a:txBody>
+                  <a:tcPr marL="63500" marR="63500" marT="12700" marB="12700" anchor="ctr">
+                    <a:solidFill>
+                      <a:srgbClr val="FFFFFF"/>
+                    </a:solidFill>
+                  </a:tcPr>
+                </a:tc>
+                <a:tc>
+                  <a:txBody>
+                    <a:bodyPr/>
+                    <a:lstStyle/>
+                    <a:p>
+                      <a:pPr algn="ctr"/>
+                      <a:r>
+                        <a:rPr sz="1050" b="0" i="0">
+                          <a:solidFill>
+                            <a:srgbClr val="1F2A37"/>
+                          </a:solidFill>
+                          <a:latin typeface="Calibri"/>
+                        </a:rPr>
+                        <a:t>$0.021</a:t>
                       </a:r>
                     </a:p>
                   </a:txBody>
@@ -7681,7 +8101,53 @@
                           </a:solidFill>
                           <a:latin typeface="Calibri"/>
                         </a:rPr>
+                        <a:t>$1.66</a:t>
+                      </a:r>
+                    </a:p>
+                  </a:txBody>
+                  <a:tcPr marL="63500" marR="63500" marT="12700" marB="12700" anchor="ctr">
+                    <a:solidFill>
+                      <a:srgbClr val="F4F6F8"/>
+                    </a:solidFill>
+                  </a:tcPr>
+                </a:tc>
+                <a:tc>
+                  <a:txBody>
+                    <a:bodyPr/>
+                    <a:lstStyle/>
+                    <a:p>
+                      <a:pPr algn="ctr"/>
+                      <a:r>
+                        <a:rPr sz="1050" b="0" i="0">
+                          <a:solidFill>
+                            <a:srgbClr val="1F2A37"/>
+                          </a:solidFill>
+                          <a:latin typeface="Calibri"/>
+                        </a:rPr>
                         <a:t>1.04 M</a:t>
+                      </a:r>
+                    </a:p>
+                  </a:txBody>
+                  <a:tcPr marL="63500" marR="63500" marT="12700" marB="12700" anchor="ctr">
+                    <a:solidFill>
+                      <a:srgbClr val="F4F6F8"/>
+                    </a:solidFill>
+                  </a:tcPr>
+                </a:tc>
+                <a:tc>
+                  <a:txBody>
+                    <a:bodyPr/>
+                    <a:lstStyle/>
+                    <a:p>
+                      <a:pPr algn="ctr"/>
+                      <a:r>
+                        <a:rPr sz="1050" b="0" i="0">
+                          <a:solidFill>
+                            <a:srgbClr val="1F2A37"/>
+                          </a:solidFill>
+                          <a:latin typeface="Calibri"/>
+                        </a:rPr>
+                        <a:t>$1.73</a:t>
                       </a:r>
                     </a:p>
                   </a:txBody>
@@ -7752,7 +8218,53 @@
                           </a:solidFill>
                           <a:latin typeface="Calibri"/>
                         </a:rPr>
+                        <a:t>$2.90</a:t>
+                      </a:r>
+                    </a:p>
+                  </a:txBody>
+                  <a:tcPr marL="63500" marR="63500" marT="12700" marB="12700" anchor="ctr">
+                    <a:solidFill>
+                      <a:srgbClr val="FFFFFF"/>
+                    </a:solidFill>
+                  </a:tcPr>
+                </a:tc>
+                <a:tc>
+                  <a:txBody>
+                    <a:bodyPr/>
+                    <a:lstStyle/>
+                    <a:p>
+                      <a:pPr algn="ctr"/>
+                      <a:r>
+                        <a:rPr sz="1050" b="0" i="0">
+                          <a:solidFill>
+                            <a:srgbClr val="1F2A37"/>
+                          </a:solidFill>
+                          <a:latin typeface="Calibri"/>
+                        </a:rPr>
                         <a:t>1.78 M</a:t>
+                      </a:r>
+                    </a:p>
+                  </a:txBody>
+                  <a:tcPr marL="63500" marR="63500" marT="12700" marB="12700" anchor="ctr">
+                    <a:solidFill>
+                      <a:srgbClr val="FFFFFF"/>
+                    </a:solidFill>
+                  </a:tcPr>
+                </a:tc>
+                <a:tc>
+                  <a:txBody>
+                    <a:bodyPr/>
+                    <a:lstStyle/>
+                    <a:p>
+                      <a:pPr algn="ctr"/>
+                      <a:r>
+                        <a:rPr sz="1050" b="0" i="0">
+                          <a:solidFill>
+                            <a:srgbClr val="1F2A37"/>
+                          </a:solidFill>
+                          <a:latin typeface="Calibri"/>
+                        </a:rPr>
+                        <a:t>$2.94</a:t>
                       </a:r>
                     </a:p>
                   </a:txBody>
@@ -7823,7 +8335,53 @@
                           </a:solidFill>
                           <a:latin typeface="Calibri"/>
                         </a:rPr>
+                        <a:t>$2.79</a:t>
+                      </a:r>
+                    </a:p>
+                  </a:txBody>
+                  <a:tcPr marL="63500" marR="63500" marT="12700" marB="12700" anchor="ctr">
+                    <a:solidFill>
+                      <a:srgbClr val="F4F6F8"/>
+                    </a:solidFill>
+                  </a:tcPr>
+                </a:tc>
+                <a:tc>
+                  <a:txBody>
+                    <a:bodyPr/>
+                    <a:lstStyle/>
+                    <a:p>
+                      <a:pPr algn="ctr"/>
+                      <a:r>
+                        <a:rPr sz="1050" b="0" i="0">
+                          <a:solidFill>
+                            <a:srgbClr val="1F2A37"/>
+                          </a:solidFill>
+                          <a:latin typeface="Calibri"/>
+                        </a:rPr>
                         <a:t>0.93 M</a:t>
+                      </a:r>
+                    </a:p>
+                  </a:txBody>
+                  <a:tcPr marL="63500" marR="63500" marT="12700" marB="12700" anchor="ctr">
+                    <a:solidFill>
+                      <a:srgbClr val="F4F6F8"/>
+                    </a:solidFill>
+                  </a:tcPr>
+                </a:tc>
+                <a:tc>
+                  <a:txBody>
+                    <a:bodyPr/>
+                    <a:lstStyle/>
+                    <a:p>
+                      <a:pPr algn="ctr"/>
+                      <a:r>
+                        <a:rPr sz="1050" b="0" i="0">
+                          <a:solidFill>
+                            <a:srgbClr val="1F2A37"/>
+                          </a:solidFill>
+                          <a:latin typeface="Calibri"/>
+                        </a:rPr>
+                        <a:t>$1.90</a:t>
                       </a:r>
                     </a:p>
                   </a:txBody>
@@ -7894,7 +8452,53 @@
                           </a:solidFill>
                           <a:latin typeface="Calibri"/>
                         </a:rPr>
+                        <a:t>$11.52</a:t>
+                      </a:r>
+                    </a:p>
+                  </a:txBody>
+                  <a:tcPr marL="63500" marR="63500" marT="12700" marB="12700" anchor="ctr">
+                    <a:solidFill>
+                      <a:srgbClr val="FFFFFF"/>
+                    </a:solidFill>
+                  </a:tcPr>
+                </a:tc>
+                <a:tc>
+                  <a:txBody>
+                    <a:bodyPr/>
+                    <a:lstStyle/>
+                    <a:p>
+                      <a:pPr algn="ctr"/>
+                      <a:r>
+                        <a:rPr sz="1050" b="0" i="0">
+                          <a:solidFill>
+                            <a:srgbClr val="1F2A37"/>
+                          </a:solidFill>
+                          <a:latin typeface="Calibri"/>
+                        </a:rPr>
                         <a:t>2.20 M</a:t>
+                      </a:r>
+                    </a:p>
+                  </a:txBody>
+                  <a:tcPr marL="63500" marR="63500" marT="12700" marB="12700" anchor="ctr">
+                    <a:solidFill>
+                      <a:srgbClr val="FFFFFF"/>
+                    </a:solidFill>
+                  </a:tcPr>
+                </a:tc>
+                <a:tc>
+                  <a:txBody>
+                    <a:bodyPr/>
+                    <a:lstStyle/>
+                    <a:p>
+                      <a:pPr algn="ctr"/>
+                      <a:r>
+                        <a:rPr sz="1050" b="0" i="0">
+                          <a:solidFill>
+                            <a:srgbClr val="1F2A37"/>
+                          </a:solidFill>
+                          <a:latin typeface="Calibri"/>
+                        </a:rPr>
+                        <a:t>$4.40</a:t>
                       </a:r>
                     </a:p>
                   </a:txBody>
@@ -7965,7 +8569,53 @@
                           </a:solidFill>
                           <a:latin typeface="Calibri"/>
                         </a:rPr>
+                        <a:t>$18.91</a:t>
+                      </a:r>
+                    </a:p>
+                  </a:txBody>
+                  <a:tcPr marL="63500" marR="63500" marT="12700" marB="12700" anchor="ctr">
+                    <a:solidFill>
+                      <a:srgbClr val="F4F6F8"/>
+                    </a:solidFill>
+                  </a:tcPr>
+                </a:tc>
+                <a:tc>
+                  <a:txBody>
+                    <a:bodyPr/>
+                    <a:lstStyle/>
+                    <a:p>
+                      <a:pPr algn="ctr"/>
+                      <a:r>
+                        <a:rPr sz="1050" b="0" i="0">
+                          <a:solidFill>
+                            <a:srgbClr val="1F2A37"/>
+                          </a:solidFill>
+                          <a:latin typeface="Calibri"/>
+                        </a:rPr>
                         <a:t>6.0 M</a:t>
+                      </a:r>
+                    </a:p>
+                  </a:txBody>
+                  <a:tcPr marL="63500" marR="63500" marT="12700" marB="12700" anchor="ctr">
+                    <a:solidFill>
+                      <a:srgbClr val="F4F6F8"/>
+                    </a:solidFill>
+                  </a:tcPr>
+                </a:tc>
+                <a:tc>
+                  <a:txBody>
+                    <a:bodyPr/>
+                    <a:lstStyle/>
+                    <a:p>
+                      <a:pPr algn="ctr"/>
+                      <a:r>
+                        <a:rPr sz="1050" b="0" i="0">
+                          <a:solidFill>
+                            <a:srgbClr val="1F2A37"/>
+                          </a:solidFill>
+                          <a:latin typeface="Calibri"/>
+                        </a:rPr>
+                        <a:t>$11.02</a:t>
                       </a:r>
                     </a:p>
                   </a:txBody>
@@ -8042,7 +8692,7 @@
                 </a:solidFill>
                 <a:latin typeface="Calibri"/>
               </a:rPr>
-              <a:t>The eight gsm8k legs together are 0.4% of the matrix's token bill (0.8% on KinD). appworld's two legs are 72% of it (52% on KinD). A 50-task gsm8k leg is cheaper than a SINGLE appworld task — 25 K tokens against 295 K.</a:t>
+              <a:t>The eight gsm8k legs together are 0.2% of the matrix's bill on OpenShift (0.4% on KinD). appworld's two legs are 76% of it (57%); tau2's two are 24% (42%). A 50-task gsm8k leg costs 2 cents — less than a twenty-fifth of a SINGLE appworld task.</a:t>
             </a:r>
           </a:p>
         </p:txBody>
@@ -8109,7 +8759,7 @@
                 </a:solidFill>
                 <a:latin typeface="Calibri"/>
               </a:rPr>
-              <a:t>#12 cost 2.6x more on OpenShift than on KinD for the same 20 requested tasks: appworld turn counts are nondeterministic, and the slower cluster's tasks ran longer before the 600 s timeout. Size appworld on YOUR cluster.</a:t>
+              <a:t>#12 cost 2.6x more on OpenShift than on KinD for the same 20 requested tasks: appworld turn counts are nondeterministic, and the slower cluster's tasks ran longer before the 600 s timeout. So the two $18.91 / $11.02 totals are NOT a platform comparison — OpenShift completed 18 appworld tasks against KinD's 10. Size appworld on YOUR cluster.</a:t>
             </a:r>
           </a:p>
         </p:txBody>
@@ -8164,7 +8814,7 @@
                 </a:solidFill>
                 <a:latin typeface="Calibri"/>
               </a:rPr>
-              <a:t>And the totals UNDERSTATE it three ways:  a task killed by the per-task timeout burns tokens but leaves no report row, so appworld's 15 timed-out tasks are missing from the numbers above.  tau2's user simulator runs in the MCP pod, which is not instrumented — its inference is billed by the gateway and counted nowhere here.  And a leg that replays the gateway's completion cache re-reports stored usage for calls that were never made upstream.</a:t>
+              <a:t>And the totals UNDERSTATE it three ways:  a task killed by the per-task timeout burns tokens but leaves no report row, so appworld's 15 timed-out tasks are missing from the numbers above.  tau2's user simulator runs in the MCP pod, which is not instrumented — its inference is billed by the gateway and counted nowhere here.  And a leg that replays the gateway's completion cache re-reports stored usage for calls that were never made upstream.  7.6 puts a dollar figure on the fourth: the IBAC judge, which the agent's spans never see.</a:t>
             </a:r>
           </a:p>
         </p:txBody>
@@ -8285,7 +8935,7 @@
                 </a:solidFill>
                 <a:latin typeface="Calibri"/>
               </a:rPr>
-              <a:t>What a task costs, what a model choice costs, and the one ratio that decides it</a:t>
+              <a:t>What a task costs in tokens AND in dollars, and why the two rankings disagree</a:t>
             </a:r>
           </a:p>
         </p:txBody>
@@ -8300,7 +8950,7 @@
         </p:nvGraphicFramePr>
         <p:xfrm>
           <a:off x="411480" y="1188720"/>
-          <a:ext cx="5623560" cy="3703320"/>
+          <a:ext cx="5623560" cy="4160520"/>
         </p:xfrm>
         <a:graphic>
           <a:graphicData uri="http://schemas.openxmlformats.org/drawingml/2006/table">
@@ -8314,7 +8964,7 @@
                 <a:gridCol w="1143000"/>
                 <a:gridCol w="1143000"/>
               </a:tblGrid>
-              <a:tr h="336665">
+              <a:tr h="297180">
                 <a:tc>
                   <a:txBody>
                     <a:bodyPr/>
@@ -8408,7 +9058,7 @@
                   </a:tcPr>
                 </a:tc>
               </a:tr>
-              <a:tr h="336665">
+              <a:tr h="297180">
                 <a:tc>
                   <a:txBody>
                     <a:bodyPr/>
@@ -8502,7 +9152,7 @@
                   </a:tcPr>
                 </a:tc>
               </a:tr>
-              <a:tr h="336665">
+              <a:tr h="297180">
                 <a:tc>
                   <a:txBody>
                     <a:bodyPr/>
@@ -8596,7 +9246,7 @@
                   </a:tcPr>
                 </a:tc>
               </a:tr>
-              <a:tr h="336665">
+              <a:tr h="297180">
                 <a:tc>
                   <a:txBody>
                     <a:bodyPr/>
@@ -8690,7 +9340,7 @@
                   </a:tcPr>
                 </a:tc>
               </a:tr>
-              <a:tr h="336665">
+              <a:tr h="297180">
                 <a:tc>
                   <a:txBody>
                     <a:bodyPr/>
@@ -8784,7 +9434,7 @@
                   </a:tcPr>
                 </a:tc>
               </a:tr>
-              <a:tr h="336665">
+              <a:tr h="297180">
                 <a:tc>
                   <a:txBody>
                     <a:bodyPr/>
@@ -8798,7 +9448,7 @@
                           </a:solidFill>
                           <a:latin typeface="Calibri"/>
                         </a:rPr>
-                        <a:t>x a gsm8k task</a:t>
+                        <a:t>x a gsm8k task, in TOKENS</a:t>
                       </a:r>
                     </a:p>
                   </a:txBody>
@@ -8878,7 +9528,7 @@
                   </a:tcPr>
                 </a:tc>
               </a:tr>
-              <a:tr h="336665">
+              <a:tr h="297180">
                 <a:tc>
                   <a:txBody>
                     <a:bodyPr/>
@@ -8892,12 +9542,388 @@
                           </a:solidFill>
                           <a:latin typeface="Calibri"/>
                         </a:rPr>
+                        <a:t>cost at our gateway's rates</a:t>
+                      </a:r>
+                    </a:p>
+                  </a:txBody>
+                  <a:tcPr marL="63500" marR="63500" marT="12700" marB="12700" anchor="ctr">
+                    <a:solidFill>
+                      <a:srgbClr val="F4F6F8"/>
+                    </a:solidFill>
+                  </a:tcPr>
+                </a:tc>
+                <a:tc>
+                  <a:txBody>
+                    <a:bodyPr/>
+                    <a:lstStyle/>
+                    <a:p>
+                      <a:pPr algn="ctr"/>
+                      <a:r>
+                        <a:rPr sz="1050" b="0" i="0">
+                          <a:solidFill>
+                            <a:srgbClr val="1F2A37"/>
+                          </a:solidFill>
+                          <a:latin typeface="Calibri"/>
+                        </a:rPr>
+                        <a:t>$0.00055</a:t>
+                      </a:r>
+                    </a:p>
+                  </a:txBody>
+                  <a:tcPr marL="63500" marR="63500" marT="12700" marB="12700" anchor="ctr">
+                    <a:solidFill>
+                      <a:srgbClr val="F4F6F8"/>
+                    </a:solidFill>
+                  </a:tcPr>
+                </a:tc>
+                <a:tc>
+                  <a:txBody>
+                    <a:bodyPr/>
+                    <a:lstStyle/>
+                    <a:p>
+                      <a:pPr algn="ctr"/>
+                      <a:r>
+                        <a:rPr sz="1050" b="0" i="0">
+                          <a:solidFill>
+                            <a:srgbClr val="1F2A37"/>
+                          </a:solidFill>
+                          <a:latin typeface="Calibri"/>
+                        </a:rPr>
+                        <a:t>$0.154</a:t>
+                      </a:r>
+                    </a:p>
+                  </a:txBody>
+                  <a:tcPr marL="63500" marR="63500" marT="12700" marB="12700" anchor="ctr">
+                    <a:solidFill>
+                      <a:srgbClr val="F4F6F8"/>
+                    </a:solidFill>
+                  </a:tcPr>
+                </a:tc>
+                <a:tc>
+                  <a:txBody>
+                    <a:bodyPr/>
+                    <a:lstStyle/>
+                    <a:p>
+                      <a:pPr algn="ctr"/>
+                      <a:r>
+                        <a:rPr sz="1050" b="0" i="0">
+                          <a:solidFill>
+                            <a:srgbClr val="1F2A37"/>
+                          </a:solidFill>
+                          <a:latin typeface="Calibri"/>
+                        </a:rPr>
+                        <a:t>$0.589</a:t>
+                      </a:r>
+                    </a:p>
+                  </a:txBody>
+                  <a:tcPr marL="63500" marR="63500" marT="12700" marB="12700" anchor="ctr">
+                    <a:solidFill>
+                      <a:srgbClr val="F4F6F8"/>
+                    </a:solidFill>
+                  </a:tcPr>
+                </a:tc>
+              </a:tr>
+              <a:tr h="297180">
+                <a:tc>
+                  <a:txBody>
+                    <a:bodyPr/>
+                    <a:lstStyle/>
+                    <a:p>
+                      <a:pPr algn="l"/>
+                      <a:r>
+                        <a:rPr sz="1050" b="1" i="0">
+                          <a:solidFill>
+                            <a:srgbClr val="1F2A37"/>
+                          </a:solidFill>
+                          <a:latin typeface="Calibri"/>
+                        </a:rPr>
+                        <a:t>x a gsm8k task, in DOLLARS</a:t>
+                      </a:r>
+                    </a:p>
+                  </a:txBody>
+                  <a:tcPr marL="63500" marR="63500" marT="12700" marB="12700" anchor="ctr">
+                    <a:solidFill>
+                      <a:srgbClr val="FFFFFF"/>
+                    </a:solidFill>
+                  </a:tcPr>
+                </a:tc>
+                <a:tc>
+                  <a:txBody>
+                    <a:bodyPr/>
+                    <a:lstStyle/>
+                    <a:p>
+                      <a:pPr algn="ctr"/>
+                      <a:r>
+                        <a:rPr sz="1050" b="0" i="0">
+                          <a:solidFill>
+                            <a:srgbClr val="1F2A37"/>
+                          </a:solidFill>
+                          <a:latin typeface="Calibri"/>
+                        </a:rPr>
+                        <a:t>1x</a:t>
+                      </a:r>
+                    </a:p>
+                  </a:txBody>
+                  <a:tcPr marL="63500" marR="63500" marT="12700" marB="12700" anchor="ctr">
+                    <a:solidFill>
+                      <a:srgbClr val="FFFFFF"/>
+                    </a:solidFill>
+                  </a:tcPr>
+                </a:tc>
+                <a:tc>
+                  <a:txBody>
+                    <a:bodyPr/>
+                    <a:lstStyle/>
+                    <a:p>
+                      <a:pPr algn="ctr"/>
+                      <a:r>
+                        <a:rPr sz="1050" b="0" i="0">
+                          <a:solidFill>
+                            <a:srgbClr val="1F2A37"/>
+                          </a:solidFill>
+                          <a:latin typeface="Calibri"/>
+                        </a:rPr>
+                        <a:t>279x</a:t>
+                      </a:r>
+                    </a:p>
+                  </a:txBody>
+                  <a:tcPr marL="63500" marR="63500" marT="12700" marB="12700" anchor="ctr">
+                    <a:solidFill>
+                      <a:srgbClr val="FFFFFF"/>
+                    </a:solidFill>
+                  </a:tcPr>
+                </a:tc>
+                <a:tc>
+                  <a:txBody>
+                    <a:bodyPr/>
+                    <a:lstStyle/>
+                    <a:p>
+                      <a:pPr algn="ctr"/>
+                      <a:r>
+                        <a:rPr sz="1050" b="0" i="0">
+                          <a:solidFill>
+                            <a:srgbClr val="1F2A37"/>
+                          </a:solidFill>
+                          <a:latin typeface="Calibri"/>
+                        </a:rPr>
+                        <a:t>1,069x</a:t>
+                      </a:r>
+                    </a:p>
+                  </a:txBody>
+                  <a:tcPr marL="63500" marR="63500" marT="12700" marB="12700" anchor="ctr">
+                    <a:solidFill>
+                      <a:srgbClr val="FFFFFF"/>
+                    </a:solidFill>
+                  </a:tcPr>
+                </a:tc>
+              </a:tr>
+              <a:tr h="297180">
+                <a:tc>
+                  <a:txBody>
+                    <a:bodyPr/>
+                    <a:lstStyle/>
+                    <a:p>
+                      <a:pPr algn="l"/>
+                      <a:r>
+                        <a:rPr sz="1050" b="1" i="0">
+                          <a:solidFill>
+                            <a:srgbClr val="1F2A37"/>
+                          </a:solidFill>
+                          <a:latin typeface="Calibri"/>
+                        </a:rPr>
+                        <a:t>cost of 100 tasks</a:t>
+                      </a:r>
+                    </a:p>
+                  </a:txBody>
+                  <a:tcPr marL="63500" marR="63500" marT="12700" marB="12700" anchor="ctr">
+                    <a:solidFill>
+                      <a:srgbClr val="F4F6F8"/>
+                    </a:solidFill>
+                  </a:tcPr>
+                </a:tc>
+                <a:tc>
+                  <a:txBody>
+                    <a:bodyPr/>
+                    <a:lstStyle/>
+                    <a:p>
+                      <a:pPr algn="ctr"/>
+                      <a:r>
+                        <a:rPr sz="1050" b="0" i="0">
+                          <a:solidFill>
+                            <a:srgbClr val="1F2A37"/>
+                          </a:solidFill>
+                          <a:latin typeface="Calibri"/>
+                        </a:rPr>
+                        <a:t>$0.06</a:t>
+                      </a:r>
+                    </a:p>
+                  </a:txBody>
+                  <a:tcPr marL="63500" marR="63500" marT="12700" marB="12700" anchor="ctr">
+                    <a:solidFill>
+                      <a:srgbClr val="F4F6F8"/>
+                    </a:solidFill>
+                  </a:tcPr>
+                </a:tc>
+                <a:tc>
+                  <a:txBody>
+                    <a:bodyPr/>
+                    <a:lstStyle/>
+                    <a:p>
+                      <a:pPr algn="ctr"/>
+                      <a:r>
+                        <a:rPr sz="1050" b="0" i="0">
+                          <a:solidFill>
+                            <a:srgbClr val="1F2A37"/>
+                          </a:solidFill>
+                          <a:latin typeface="Calibri"/>
+                        </a:rPr>
+                        <a:t>$15.38</a:t>
+                      </a:r>
+                    </a:p>
+                  </a:txBody>
+                  <a:tcPr marL="63500" marR="63500" marT="12700" marB="12700" anchor="ctr">
+                    <a:solidFill>
+                      <a:srgbClr val="F4F6F8"/>
+                    </a:solidFill>
+                  </a:tcPr>
+                </a:tc>
+                <a:tc>
+                  <a:txBody>
+                    <a:bodyPr/>
+                    <a:lstStyle/>
+                    <a:p>
+                      <a:pPr algn="ctr"/>
+                      <a:r>
+                        <a:rPr sz="1050" b="0" i="0">
+                          <a:solidFill>
+                            <a:srgbClr val="1F2A37"/>
+                          </a:solidFill>
+                          <a:latin typeface="Calibri"/>
+                        </a:rPr>
+                        <a:t>$58.88</a:t>
+                      </a:r>
+                    </a:p>
+                  </a:txBody>
+                  <a:tcPr marL="63500" marR="63500" marT="12700" marB="12700" anchor="ctr">
+                    <a:solidFill>
+                      <a:srgbClr val="F4F6F8"/>
+                    </a:solidFill>
+                  </a:tcPr>
+                </a:tc>
+              </a:tr>
+              <a:tr h="297180">
+                <a:tc>
+                  <a:txBody>
+                    <a:bodyPr/>
+                    <a:lstStyle/>
+                    <a:p>
+                      <a:pPr algn="l"/>
+                      <a:r>
+                        <a:rPr sz="1050" b="1" i="0">
+                          <a:solidFill>
+                            <a:srgbClr val="1F2A37"/>
+                          </a:solidFill>
+                          <a:latin typeface="Calibri"/>
+                        </a:rPr>
                         <a:t>input share of tokens</a:t>
                       </a:r>
                     </a:p>
                   </a:txBody>
                   <a:tcPr marL="63500" marR="63500" marT="12700" marB="12700" anchor="ctr">
                     <a:solidFill>
+                      <a:srgbClr val="FFFFFF"/>
+                    </a:solidFill>
+                  </a:tcPr>
+                </a:tc>
+                <a:tc>
+                  <a:txBody>
+                    <a:bodyPr/>
+                    <a:lstStyle/>
+                    <a:p>
+                      <a:pPr algn="ctr"/>
+                      <a:r>
+                        <a:rPr sz="1050" b="0" i="0">
+                          <a:solidFill>
+                            <a:srgbClr val="1F2A37"/>
+                          </a:solidFill>
+                          <a:latin typeface="Calibri"/>
+                        </a:rPr>
+                        <a:t>66%</a:t>
+                      </a:r>
+                    </a:p>
+                  </a:txBody>
+                  <a:tcPr marL="63500" marR="63500" marT="12700" marB="12700" anchor="ctr">
+                    <a:solidFill>
+                      <a:srgbClr val="FFFFFF"/>
+                    </a:solidFill>
+                  </a:tcPr>
+                </a:tc>
+                <a:tc>
+                  <a:txBody>
+                    <a:bodyPr/>
+                    <a:lstStyle/>
+                    <a:p>
+                      <a:pPr algn="ctr"/>
+                      <a:r>
+                        <a:rPr sz="1050" b="0" i="0">
+                          <a:solidFill>
+                            <a:srgbClr val="1F2A37"/>
+                          </a:solidFill>
+                          <a:latin typeface="Calibri"/>
+                        </a:rPr>
+                        <a:t>98%</a:t>
+                      </a:r>
+                    </a:p>
+                  </a:txBody>
+                  <a:tcPr marL="63500" marR="63500" marT="12700" marB="12700" anchor="ctr">
+                    <a:solidFill>
+                      <a:srgbClr val="FFFFFF"/>
+                    </a:solidFill>
+                  </a:tcPr>
+                </a:tc>
+                <a:tc>
+                  <a:txBody>
+                    <a:bodyPr/>
+                    <a:lstStyle/>
+                    <a:p>
+                      <a:pPr algn="ctr"/>
+                      <a:r>
+                        <a:rPr sz="1050" b="0" i="0">
+                          <a:solidFill>
+                            <a:srgbClr val="1F2A37"/>
+                          </a:solidFill>
+                          <a:latin typeface="Calibri"/>
+                        </a:rPr>
+                        <a:t>92%</a:t>
+                      </a:r>
+                    </a:p>
+                  </a:txBody>
+                  <a:tcPr marL="63500" marR="63500" marT="12700" marB="12700" anchor="ctr">
+                    <a:solidFill>
+                      <a:srgbClr val="FFFFFF"/>
+                    </a:solidFill>
+                  </a:tcPr>
+                </a:tc>
+              </a:tr>
+              <a:tr h="297180">
+                <a:tc>
+                  <a:txBody>
+                    <a:bodyPr/>
+                    <a:lstStyle/>
+                    <a:p>
+                      <a:pPr algn="l"/>
+                      <a:r>
+                        <a:rPr sz="1050" b="1" i="0">
+                          <a:solidFill>
+                            <a:srgbClr val="1F2A37"/>
+                          </a:solidFill>
+                          <a:latin typeface="Calibri"/>
+                        </a:rPr>
+                        <a:t>input share of COST</a:t>
+                      </a:r>
+                    </a:p>
+                  </a:txBody>
+                  <a:tcPr marL="63500" marR="63500" marT="12700" marB="12700" anchor="ctr">
+                    <a:solidFill>
                       <a:srgbClr val="F4F6F8"/>
                     </a:solidFill>
                   </a:tcPr>
@@ -8915,7 +9941,7 @@
                           </a:solidFill>
                           <a:latin typeface="Calibri"/>
                         </a:rPr>
-                        <a:t>66%</a:t>
+                        <a:t>31%</a:t>
                       </a:r>
                     </a:p>
                   </a:txBody>
@@ -8938,7 +9964,7 @@
                           </a:solidFill>
                           <a:latin typeface="Calibri"/>
                         </a:rPr>
-                        <a:t>98%</a:t>
+                        <a:t>90%</a:t>
                       </a:r>
                     </a:p>
                   </a:txBody>
@@ -8961,7 +9987,7 @@
                           </a:solidFill>
                           <a:latin typeface="Calibri"/>
                         </a:rPr>
-                        <a:t>92%</a:t>
+                        <a:t>57%</a:t>
                       </a:r>
                     </a:p>
                   </a:txBody>
@@ -8972,7 +9998,7 @@
                   </a:tcPr>
                 </a:tc>
               </a:tr>
-              <a:tr h="336665">
+              <a:tr h="297180">
                 <a:tc>
                   <a:txBody>
                     <a:bodyPr/>
@@ -9066,7 +10092,7 @@
                   </a:tcPr>
                 </a:tc>
               </a:tr>
-              <a:tr h="336665">
+              <a:tr h="297180">
                 <a:tc>
                   <a:txBody>
                     <a:bodyPr/>
@@ -9160,7 +10186,7 @@
                   </a:tcPr>
                 </a:tc>
               </a:tr>
-              <a:tr h="336665">
+              <a:tr h="297180">
                 <a:tc>
                   <a:txBody>
                     <a:bodyPr/>
@@ -9250,100 +10276,6 @@
                   <a:tcPr marL="63500" marR="63500" marT="12700" marB="12700" anchor="ctr">
                     <a:solidFill>
                       <a:srgbClr val="FFFFFF"/>
-                    </a:solidFill>
-                  </a:tcPr>
-                </a:tc>
-              </a:tr>
-              <a:tr h="336670">
-                <a:tc>
-                  <a:txBody>
-                    <a:bodyPr/>
-                    <a:lstStyle/>
-                    <a:p>
-                      <a:pPr algn="l"/>
-                      <a:r>
-                        <a:rPr sz="1050" b="1" i="0">
-                          <a:solidFill>
-                            <a:srgbClr val="1F2A37"/>
-                          </a:solidFill>
-                          <a:latin typeface="Calibri"/>
-                        </a:rPr>
-                        <a:t>tokens per PASSED task</a:t>
-                      </a:r>
-                    </a:p>
-                  </a:txBody>
-                  <a:tcPr marL="63500" marR="63500" marT="12700" marB="12700" anchor="ctr">
-                    <a:solidFill>
-                      <a:srgbClr val="F4F6F8"/>
-                    </a:solidFill>
-                  </a:tcPr>
-                </a:tc>
-                <a:tc>
-                  <a:txBody>
-                    <a:bodyPr/>
-                    <a:lstStyle/>
-                    <a:p>
-                      <a:pPr algn="ctr"/>
-                      <a:r>
-                        <a:rPr sz="1050" b="0" i="0">
-                          <a:solidFill>
-                            <a:srgbClr val="1F2A37"/>
-                          </a:solidFill>
-                          <a:latin typeface="Calibri"/>
-                        </a:rPr>
-                        <a:t>537</a:t>
-                      </a:r>
-                    </a:p>
-                  </a:txBody>
-                  <a:tcPr marL="63500" marR="63500" marT="12700" marB="12700" anchor="ctr">
-                    <a:solidFill>
-                      <a:srgbClr val="F4F6F8"/>
-                    </a:solidFill>
-                  </a:tcPr>
-                </a:tc>
-                <a:tc>
-                  <a:txBody>
-                    <a:bodyPr/>
-                    <a:lstStyle/>
-                    <a:p>
-                      <a:pPr algn="ctr"/>
-                      <a:r>
-                        <a:rPr sz="1050" b="0" i="0">
-                          <a:solidFill>
-                            <a:srgbClr val="1F2A37"/>
-                          </a:solidFill>
-                          <a:latin typeface="Calibri"/>
-                        </a:rPr>
-                        <a:t>112 K</a:t>
-                      </a:r>
-                    </a:p>
-                  </a:txBody>
-                  <a:tcPr marL="63500" marR="63500" marT="12700" marB="12700" anchor="ctr">
-                    <a:solidFill>
-                      <a:srgbClr val="F4F6F8"/>
-                    </a:solidFill>
-                  </a:tcPr>
-                </a:tc>
-                <a:tc>
-                  <a:txBody>
-                    <a:bodyPr/>
-                    <a:lstStyle/>
-                    <a:p>
-                      <a:pPr algn="ctr"/>
-                      <a:r>
-                        <a:rPr sz="1050" b="0" i="0">
-                          <a:solidFill>
-                            <a:srgbClr val="1F2A37"/>
-                          </a:solidFill>
-                          <a:latin typeface="Calibri"/>
-                        </a:rPr>
-                        <a:t>no finite value</a:t>
-                      </a:r>
-                    </a:p>
-                  </a:txBody>
-                  <a:tcPr marL="63500" marR="63500" marT="12700" marB="12700" anchor="ctr">
-                    <a:solidFill>
-                      <a:srgbClr val="F4F6F8"/>
                     </a:solidFill>
                   </a:tcPr>
                 </a:tc>
@@ -9371,9 +10303,9 @@
                 <a:tableStyleId>{5C22544A-7EE6-4342-B048-85BDC9FD1C3A}</a:tableStyleId>
               </a:tblPr>
               <a:tblGrid>
-                <a:gridCol w="2514600"/>
-                <a:gridCol w="1463040"/>
-                <a:gridCol w="1463040"/>
+                <a:gridCol w="2331720"/>
+                <a:gridCol w="1554480"/>
+                <a:gridCol w="1554480"/>
               </a:tblGrid>
               <a:tr h="339634">
                 <a:tc>
@@ -9719,7 +10651,7 @@
                           </a:solidFill>
                           <a:latin typeface="Calibri"/>
                         </a:rPr>
-                        <a:t>137 – 355</a:t>
+                        <a:t>125 – 368</a:t>
                       </a:r>
                     </a:p>
                   </a:txBody>
@@ -9790,7 +10722,7 @@
                           </a:solidFill>
                           <a:latin typeface="Calibri"/>
                         </a:rPr>
-                        <a:t>450 – 668</a:t>
+                        <a:t>438 – 681</a:t>
                       </a:r>
                     </a:p>
                   </a:txBody>
@@ -9815,7 +10747,7 @@
                           </a:solidFill>
                           <a:latin typeface="Calibri"/>
                         </a:rPr>
-                        <a:t>median task latency</a:t>
+                        <a:t>cost per task</a:t>
                       </a:r>
                     </a:p>
                   </a:txBody>
@@ -9838,7 +10770,7 @@
                           </a:solidFill>
                           <a:latin typeface="Calibri"/>
                         </a:rPr>
-                        <a:t>10.4 – 10.8 s</a:t>
+                        <a:t>$0.0020 – 0.0022</a:t>
                       </a:r>
                     </a:p>
                   </a:txBody>
@@ -9861,7 +10793,7 @@
                           </a:solidFill>
                           <a:latin typeface="Calibri"/>
                         </a:rPr>
-                        <a:t>11.2 – 16.4 s</a:t>
+                        <a:t>$0.00033 – 0.00081</a:t>
                       </a:r>
                     </a:p>
                   </a:txBody>
@@ -9885,7 +10817,7 @@
         <p:spPr>
           <a:xfrm>
             <a:off x="6309360" y="3749039"/>
-            <a:ext cx="5440680" cy="1143000"/>
+            <a:ext cx="5440680" cy="1600200"/>
           </a:xfrm>
           <a:prstGeom prst="roundRect">
             <a:avLst/>
@@ -9926,7 +10858,7 @@
                 </a:solidFill>
                 <a:latin typeface="Calibri"/>
               </a:rPr>
-              <a:t>The token ranking and the money ranking disagree</a:t>
+              <a:t>Same five tasks: gpt-4.1 costs 4.1x gpt-5-mini</a:t>
             </a:r>
           </a:p>
           <a:p>
@@ -9938,7 +10870,7 @@
                 </a:solidFill>
                 <a:latin typeface="Calibri"/>
               </a:rPr>
-              <a:t>The reasoning model answers in ONE call; gpt-4.1 needs ~3 tool round-trips, so it sends 2.6x the input but emits a quarter of the output. Equating the two bills solves for break-even at output:input ≈ 2.7x (the platforms bracket it, 1.8x–5.8x). Priced above that ratio gpt-4.1 is cheaper; below it, gpt-5-mini.</a:t>
+              <a:t>Mean of its 2 legs against gpt-5-mini's 7; leg-to-leg the ratio spans 2.5x–6.7x, because gpt-5-mini's output length swings with reasoning effort. The reasoning model answers in ONE call; gpt-4.1 needs ~3 tool round-trips. On our card the INPUT side decides it alone — 2.6x the tokens at 8x the price is a 21x input bill, and the output side cannot offset it (gpt-5-mini emits 3.6x more output at a quarter the rate, so the two output bills land within 10% of each other).</a:t>
             </a:r>
           </a:p>
         </p:txBody>
@@ -9951,8 +10883,8 @@
         </p:nvSpPr>
         <p:spPr>
           <a:xfrm>
-            <a:off x="411480" y="5074920"/>
-            <a:ext cx="11338560" cy="1234440"/>
+            <a:off x="411480" y="5486400"/>
+            <a:ext cx="11338560" cy="868680"/>
           </a:xfrm>
           <a:prstGeom prst="roundRect">
             <a:avLst/>
@@ -9993,7 +10925,7 @@
                 </a:solidFill>
                 <a:latin typeface="Calibri"/>
               </a:rPr>
-              <a:t>cost per task  =  (input tokens x P_in  +  output tokens x P_out) / 1 M     — we publish the token counts, you supply your own rates; our gateway does not bill us, so no dollar figure here would be ours to quote.  Two consequences of the input-share row:  for tau2 and appworld the bill IS the input side, so the cost driver is turn count and context compounding, not verbosity — and a cheaper-input model beats a terser one.  For gsm8k, output is a third of the tokens and reasoning effort moves it 2.6x between clusters.</a:t>
+              <a:t>cost per task  =  (input tokens x P_in  +  output tokens x P_out) / 1 M     — which model is cheaper is a property of the PRICE LIST, not of the models: compute it for your own rates.  Money AMPLIFIES the difficulty ladder rather than tracking it (tau2 179x a gsm8k task in tokens but 279x in dollars; appworld 567x but 1,069x), because the harder benchmarks also run the dearer models — a budget scaled off the token ratios is short by 1.6–1.9x.</a:t>
             </a:r>
           </a:p>
         </p:txBody>
@@ -10046,6 +10978,1058 @@
 </file>
 
 <file path=ppt/slides/slide16.xml><?xml version="1.0" encoding="utf-8"?>
+<p:sld xmlns:a="http://schemas.openxmlformats.org/drawingml/2006/main" xmlns:p="http://schemas.openxmlformats.org/presentationml/2006/main" xmlns:r="http://schemas.openxmlformats.org/officeDocument/2006/relationships">
+  <p:cSld name="7.6 The Rate Card — and Which Way the Dollars Are Wrong">
+    <p:spTree>
+      <p:nvGrpSpPr>
+        <p:cNvPr id="1" name=""/>
+        <p:cNvGrpSpPr/>
+        <p:nvPr/>
+      </p:nvGrpSpPr>
+      <p:grpSpPr/>
+      <p:sp>
+        <p:nvSpPr>
+          <p:cNvPr id="2" name="Rectangle 1"/>
+          <p:cNvSpPr/>
+          <p:nvPr/>
+        </p:nvSpPr>
+        <p:spPr>
+          <a:xfrm>
+            <a:off x="0" y="0"/>
+            <a:ext cx="12192000" cy="950000"/>
+          </a:xfrm>
+          <a:prstGeom prst="rect">
+            <a:avLst/>
+          </a:prstGeom>
+          <a:solidFill>
+            <a:srgbClr val="1B3A5C"/>
+          </a:solidFill>
+          <a:ln>
+            <a:noFill/>
+          </a:ln>
+          <a:effectLst/>
+        </p:spPr>
+        <p:style>
+          <a:lnRef idx="1">
+            <a:schemeClr val="accent1"/>
+          </a:lnRef>
+          <a:fillRef idx="3">
+            <a:schemeClr val="accent1"/>
+          </a:fillRef>
+          <a:effectRef idx="2">
+            <a:schemeClr val="accent1"/>
+          </a:effectRef>
+          <a:fontRef idx="minor">
+            <a:schemeClr val="lt1"/>
+          </a:fontRef>
+        </p:style>
+        <p:txBody>
+          <a:bodyPr rtlCol="0" anchor="ctr" lIns="355600"/>
+          <a:lstStyle/>
+          <a:p>
+            <a:pPr algn="ctr"/>
+            <a:r>
+              <a:rPr sz="2600" b="1" i="0">
+                <a:solidFill>
+                  <a:srgbClr val="FFFFFF"/>
+                </a:solidFill>
+                <a:latin typeface="Calibri"/>
+              </a:rPr>
+              <a:t>7.6  The Rate Card — and Which Way the Dollars Are Wrong</a:t>
+            </a:r>
+          </a:p>
+          <a:p>
+            <a:r>
+              <a:rPr sz="1400" b="0" i="0">
+                <a:solidFill>
+                  <a:srgbClr val="C9D9EC"/>
+                </a:solidFill>
+                <a:latin typeface="Calibri"/>
+              </a:rPr>
+              <a:t>Read off the gateway's admin UI on 2026-09-17 and kept in reference/model_prices.json — posted rates, not an invoice</a:t>
+            </a:r>
+          </a:p>
+        </p:txBody>
+      </p:sp>
+      <p:graphicFrame>
+        <p:nvGraphicFramePr>
+          <p:cNvPr id="3" name="Table 2"/>
+          <p:cNvGraphicFramePr>
+            <a:graphicFrameLocks noGrp="1"/>
+          </p:cNvGraphicFramePr>
+          <p:nvPr/>
+        </p:nvGraphicFramePr>
+        <p:xfrm>
+          <a:off x="411480" y="1188720"/>
+          <a:ext cx="11338560" cy="1783080"/>
+        </p:xfrm>
+        <a:graphic>
+          <a:graphicData uri="http://schemas.openxmlformats.org/drawingml/2006/table">
+            <a:tbl>
+              <a:tblPr firstRow="1">
+                <a:tableStyleId>{5C22544A-7EE6-4342-B048-85BDC9FD1C3A}</a:tableStyleId>
+              </a:tblPr>
+              <a:tblGrid>
+                <a:gridCol w="3931920"/>
+                <a:gridCol w="1417320"/>
+                <a:gridCol w="1234440"/>
+                <a:gridCol w="1234440"/>
+                <a:gridCol w="1051560"/>
+                <a:gridCol w="2468880"/>
+              </a:tblGrid>
+              <a:tr h="356616">
+                <a:tc>
+                  <a:txBody>
+                    <a:bodyPr/>
+                    <a:lstStyle/>
+                    <a:p>
+                      <a:pPr algn="l"/>
+                      <a:r>
+                        <a:rPr sz="1100" b="1" i="0">
+                          <a:solidFill>
+                            <a:srgbClr val="FFFFFF"/>
+                          </a:solidFill>
+                          <a:latin typeface="Calibri"/>
+                        </a:rPr>
+                        <a:t>model (as report.ndjson records it)</a:t>
+                      </a:r>
+                    </a:p>
+                  </a:txBody>
+                  <a:tcPr marL="63500" marR="63500" marT="12700" marB="12700" anchor="ctr">
+                    <a:solidFill>
+                      <a:srgbClr val="1B3A5C"/>
+                    </a:solidFill>
+                  </a:tcPr>
+                </a:tc>
+                <a:tc>
+                  <a:txBody>
+                    <a:bodyPr/>
+                    <a:lstStyle/>
+                    <a:p>
+                      <a:pPr algn="ctr"/>
+                      <a:r>
+                        <a:rPr sz="1100" b="1" i="0">
+                          <a:solidFill>
+                            <a:srgbClr val="FFFFFF"/>
+                          </a:solidFill>
+                          <a:latin typeface="Calibri"/>
+                        </a:rPr>
+                        <a:t>provider</a:t>
+                      </a:r>
+                    </a:p>
+                  </a:txBody>
+                  <a:tcPr marL="63500" marR="63500" marT="12700" marB="12700" anchor="ctr">
+                    <a:solidFill>
+                      <a:srgbClr val="1B3A5C"/>
+                    </a:solidFill>
+                  </a:tcPr>
+                </a:tc>
+                <a:tc>
+                  <a:txBody>
+                    <a:bodyPr/>
+                    <a:lstStyle/>
+                    <a:p>
+                      <a:pPr algn="ctr"/>
+                      <a:r>
+                        <a:rPr sz="1100" b="1" i="0">
+                          <a:solidFill>
+                            <a:srgbClr val="FFFFFF"/>
+                          </a:solidFill>
+                          <a:latin typeface="Calibri"/>
+                        </a:rPr>
+                        <a:t>in $/1M</a:t>
+                      </a:r>
+                    </a:p>
+                  </a:txBody>
+                  <a:tcPr marL="63500" marR="63500" marT="12700" marB="12700" anchor="ctr">
+                    <a:solidFill>
+                      <a:srgbClr val="1B3A5C"/>
+                    </a:solidFill>
+                  </a:tcPr>
+                </a:tc>
+                <a:tc>
+                  <a:txBody>
+                    <a:bodyPr/>
+                    <a:lstStyle/>
+                    <a:p>
+                      <a:pPr algn="ctr"/>
+                      <a:r>
+                        <a:rPr sz="1100" b="1" i="0">
+                          <a:solidFill>
+                            <a:srgbClr val="FFFFFF"/>
+                          </a:solidFill>
+                          <a:latin typeface="Calibri"/>
+                        </a:rPr>
+                        <a:t>out $/1M</a:t>
+                      </a:r>
+                    </a:p>
+                  </a:txBody>
+                  <a:tcPr marL="63500" marR="63500" marT="12700" marB="12700" anchor="ctr">
+                    <a:solidFill>
+                      <a:srgbClr val="1B3A5C"/>
+                    </a:solidFill>
+                  </a:tcPr>
+                </a:tc>
+                <a:tc>
+                  <a:txBody>
+                    <a:bodyPr/>
+                    <a:lstStyle/>
+                    <a:p>
+                      <a:pPr algn="ctr"/>
+                      <a:r>
+                        <a:rPr sz="1100" b="1" i="0">
+                          <a:solidFill>
+                            <a:srgbClr val="FFFFFF"/>
+                          </a:solidFill>
+                          <a:latin typeface="Calibri"/>
+                        </a:rPr>
+                        <a:t>out/in</a:t>
+                      </a:r>
+                    </a:p>
+                  </a:txBody>
+                  <a:tcPr marL="63500" marR="63500" marT="12700" marB="12700" anchor="ctr">
+                    <a:solidFill>
+                      <a:srgbClr val="1B3A5C"/>
+                    </a:solidFill>
+                  </a:tcPr>
+                </a:tc>
+                <a:tc>
+                  <a:txBody>
+                    <a:bodyPr/>
+                    <a:lstStyle/>
+                    <a:p>
+                      <a:pPr algn="ctr"/>
+                      <a:r>
+                        <a:rPr sz="1100" b="1" i="0">
+                          <a:solidFill>
+                            <a:srgbClr val="FFFFFF"/>
+                          </a:solidFill>
+                          <a:latin typeface="Calibri"/>
+                        </a:rPr>
+                        <a:t>used by</a:t>
+                      </a:r>
+                    </a:p>
+                  </a:txBody>
+                  <a:tcPr marL="63500" marR="63500" marT="12700" marB="12700" anchor="ctr">
+                    <a:solidFill>
+                      <a:srgbClr val="1B3A5C"/>
+                    </a:solidFill>
+                  </a:tcPr>
+                </a:tc>
+              </a:tr>
+              <a:tr h="356616">
+                <a:tc>
+                  <a:txBody>
+                    <a:bodyPr/>
+                    <a:lstStyle/>
+                    <a:p>
+                      <a:pPr algn="l"/>
+                      <a:r>
+                        <a:rPr sz="1100" b="1" i="0">
+                          <a:solidFill>
+                            <a:srgbClr val="1F2A37"/>
+                          </a:solidFill>
+                          <a:latin typeface="Calibri"/>
+                        </a:rPr>
+                        <a:t>Azure/gpt-5-mini-2025-08-07</a:t>
+                      </a:r>
+                    </a:p>
+                  </a:txBody>
+                  <a:tcPr marL="63500" marR="63500" marT="12700" marB="12700" anchor="ctr">
+                    <a:solidFill>
+                      <a:srgbClr val="FFFFFF"/>
+                    </a:solidFill>
+                  </a:tcPr>
+                </a:tc>
+                <a:tc>
+                  <a:txBody>
+                    <a:bodyPr/>
+                    <a:lstStyle/>
+                    <a:p>
+                      <a:pPr algn="ctr"/>
+                      <a:r>
+                        <a:rPr sz="1100" b="0" i="0">
+                          <a:solidFill>
+                            <a:srgbClr val="1F2A37"/>
+                          </a:solidFill>
+                          <a:latin typeface="Calibri"/>
+                        </a:rPr>
+                        <a:t>azure</a:t>
+                      </a:r>
+                    </a:p>
+                  </a:txBody>
+                  <a:tcPr marL="63500" marR="63500" marT="12700" marB="12700" anchor="ctr">
+                    <a:solidFill>
+                      <a:srgbClr val="FFFFFF"/>
+                    </a:solidFill>
+                  </a:tcPr>
+                </a:tc>
+                <a:tc>
+                  <a:txBody>
+                    <a:bodyPr/>
+                    <a:lstStyle/>
+                    <a:p>
+                      <a:pPr algn="ctr"/>
+                      <a:r>
+                        <a:rPr sz="1100" b="0" i="0">
+                          <a:solidFill>
+                            <a:srgbClr val="1F2A37"/>
+                          </a:solidFill>
+                          <a:latin typeface="Calibri"/>
+                        </a:rPr>
+                        <a:t>0.25</a:t>
+                      </a:r>
+                    </a:p>
+                  </a:txBody>
+                  <a:tcPr marL="63500" marR="63500" marT="12700" marB="12700" anchor="ctr">
+                    <a:solidFill>
+                      <a:srgbClr val="FFFFFF"/>
+                    </a:solidFill>
+                  </a:tcPr>
+                </a:tc>
+                <a:tc>
+                  <a:txBody>
+                    <a:bodyPr/>
+                    <a:lstStyle/>
+                    <a:p>
+                      <a:pPr algn="ctr"/>
+                      <a:r>
+                        <a:rPr sz="1100" b="0" i="0">
+                          <a:solidFill>
+                            <a:srgbClr val="1F2A37"/>
+                          </a:solidFill>
+                          <a:latin typeface="Calibri"/>
+                        </a:rPr>
+                        <a:t>2.00</a:t>
+                      </a:r>
+                    </a:p>
+                  </a:txBody>
+                  <a:tcPr marL="63500" marR="63500" marT="12700" marB="12700" anchor="ctr">
+                    <a:solidFill>
+                      <a:srgbClr val="FFFFFF"/>
+                    </a:solidFill>
+                  </a:tcPr>
+                </a:tc>
+                <a:tc>
+                  <a:txBody>
+                    <a:bodyPr/>
+                    <a:lstStyle/>
+                    <a:p>
+                      <a:pPr algn="ctr"/>
+                      <a:r>
+                        <a:rPr sz="1100" b="0" i="0">
+                          <a:solidFill>
+                            <a:srgbClr val="1F2A37"/>
+                          </a:solidFill>
+                          <a:latin typeface="Calibri"/>
+                        </a:rPr>
+                        <a:t>8.0x</a:t>
+                      </a:r>
+                    </a:p>
+                  </a:txBody>
+                  <a:tcPr marL="63500" marR="63500" marT="12700" marB="12700" anchor="ctr">
+                    <a:solidFill>
+                      <a:srgbClr val="FFFFFF"/>
+                    </a:solidFill>
+                  </a:tcPr>
+                </a:tc>
+                <a:tc>
+                  <a:txBody>
+                    <a:bodyPr/>
+                    <a:lstStyle/>
+                    <a:p>
+                      <a:pPr algn="ctr"/>
+                      <a:r>
+                        <a:rPr sz="1100" b="0" i="0">
+                          <a:solidFill>
+                            <a:srgbClr val="1F2A37"/>
+                          </a:solidFill>
+                          <a:latin typeface="Calibri"/>
+                        </a:rPr>
+                        <a:t>gsm8k default</a:t>
+                      </a:r>
+                    </a:p>
+                  </a:txBody>
+                  <a:tcPr marL="63500" marR="63500" marT="12700" marB="12700" anchor="ctr">
+                    <a:solidFill>
+                      <a:srgbClr val="FFFFFF"/>
+                    </a:solidFill>
+                  </a:tcPr>
+                </a:tc>
+              </a:tr>
+              <a:tr h="356616">
+                <a:tc>
+                  <a:txBody>
+                    <a:bodyPr/>
+                    <a:lstStyle/>
+                    <a:p>
+                      <a:pPr algn="l"/>
+                      <a:r>
+                        <a:rPr sz="1100" b="1" i="0">
+                          <a:solidFill>
+                            <a:srgbClr val="1F2A37"/>
+                          </a:solidFill>
+                          <a:latin typeface="Calibri"/>
+                        </a:rPr>
+                        <a:t>gemini-2.5-pro</a:t>
+                      </a:r>
+                    </a:p>
+                  </a:txBody>
+                  <a:tcPr marL="63500" marR="63500" marT="12700" marB="12700" anchor="ctr">
+                    <a:solidFill>
+                      <a:srgbClr val="F4F6F8"/>
+                    </a:solidFill>
+                  </a:tcPr>
+                </a:tc>
+                <a:tc>
+                  <a:txBody>
+                    <a:bodyPr/>
+                    <a:lstStyle/>
+                    <a:p>
+                      <a:pPr algn="ctr"/>
+                      <a:r>
+                        <a:rPr sz="1100" b="0" i="0">
+                          <a:solidFill>
+                            <a:srgbClr val="1F2A37"/>
+                          </a:solidFill>
+                          <a:latin typeface="Calibri"/>
+                        </a:rPr>
+                        <a:t>vertex_ai</a:t>
+                      </a:r>
+                    </a:p>
+                  </a:txBody>
+                  <a:tcPr marL="63500" marR="63500" marT="12700" marB="12700" anchor="ctr">
+                    <a:solidFill>
+                      <a:srgbClr val="F4F6F8"/>
+                    </a:solidFill>
+                  </a:tcPr>
+                </a:tc>
+                <a:tc>
+                  <a:txBody>
+                    <a:bodyPr/>
+                    <a:lstStyle/>
+                    <a:p>
+                      <a:pPr algn="ctr"/>
+                      <a:r>
+                        <a:rPr sz="1100" b="0" i="0">
+                          <a:solidFill>
+                            <a:srgbClr val="1F2A37"/>
+                          </a:solidFill>
+                          <a:latin typeface="Calibri"/>
+                        </a:rPr>
+                        <a:t>1.25</a:t>
+                      </a:r>
+                    </a:p>
+                  </a:txBody>
+                  <a:tcPr marL="63500" marR="63500" marT="12700" marB="12700" anchor="ctr">
+                    <a:solidFill>
+                      <a:srgbClr val="F4F6F8"/>
+                    </a:solidFill>
+                  </a:tcPr>
+                </a:tc>
+                <a:tc>
+                  <a:txBody>
+                    <a:bodyPr/>
+                    <a:lstStyle/>
+                    <a:p>
+                      <a:pPr algn="ctr"/>
+                      <a:r>
+                        <a:rPr sz="1100" b="0" i="0">
+                          <a:solidFill>
+                            <a:srgbClr val="1F2A37"/>
+                          </a:solidFill>
+                          <a:latin typeface="Calibri"/>
+                        </a:rPr>
+                        <a:t>10.00</a:t>
+                      </a:r>
+                    </a:p>
+                  </a:txBody>
+                  <a:tcPr marL="63500" marR="63500" marT="12700" marB="12700" anchor="ctr">
+                    <a:solidFill>
+                      <a:srgbClr val="F4F6F8"/>
+                    </a:solidFill>
+                  </a:tcPr>
+                </a:tc>
+                <a:tc>
+                  <a:txBody>
+                    <a:bodyPr/>
+                    <a:lstStyle/>
+                    <a:p>
+                      <a:pPr algn="ctr"/>
+                      <a:r>
+                        <a:rPr sz="1100" b="0" i="0">
+                          <a:solidFill>
+                            <a:srgbClr val="1F2A37"/>
+                          </a:solidFill>
+                          <a:latin typeface="Calibri"/>
+                        </a:rPr>
+                        <a:t>8.0x</a:t>
+                      </a:r>
+                    </a:p>
+                  </a:txBody>
+                  <a:tcPr marL="63500" marR="63500" marT="12700" marB="12700" anchor="ctr">
+                    <a:solidFill>
+                      <a:srgbClr val="F4F6F8"/>
+                    </a:solidFill>
+                  </a:tcPr>
+                </a:tc>
+                <a:tc>
+                  <a:txBody>
+                    <a:bodyPr/>
+                    <a:lstStyle/>
+                    <a:p>
+                      <a:pPr algn="ctr"/>
+                      <a:r>
+                        <a:rPr sz="1100" b="0" i="0">
+                          <a:solidFill>
+                            <a:srgbClr val="1F2A37"/>
+                          </a:solidFill>
+                          <a:latin typeface="Calibri"/>
+                        </a:rPr>
+                        <a:t>appworld</a:t>
+                      </a:r>
+                    </a:p>
+                  </a:txBody>
+                  <a:tcPr marL="63500" marR="63500" marT="12700" marB="12700" anchor="ctr">
+                    <a:solidFill>
+                      <a:srgbClr val="F4F6F8"/>
+                    </a:solidFill>
+                  </a:tcPr>
+                </a:tc>
+              </a:tr>
+              <a:tr h="356616">
+                <a:tc>
+                  <a:txBody>
+                    <a:bodyPr/>
+                    <a:lstStyle/>
+                    <a:p>
+                      <a:pPr algn="l"/>
+                      <a:r>
+                        <a:rPr sz="1100" b="1" i="0">
+                          <a:solidFill>
+                            <a:srgbClr val="1F2A37"/>
+                          </a:solidFill>
+                          <a:latin typeface="Calibri"/>
+                        </a:rPr>
+                        <a:t>aws/claude-sonnet-5</a:t>
+                      </a:r>
+                    </a:p>
+                  </a:txBody>
+                  <a:tcPr marL="63500" marR="63500" marT="12700" marB="12700" anchor="ctr">
+                    <a:solidFill>
+                      <a:srgbClr val="FFFFFF"/>
+                    </a:solidFill>
+                  </a:tcPr>
+                </a:tc>
+                <a:tc>
+                  <a:txBody>
+                    <a:bodyPr/>
+                    <a:lstStyle/>
+                    <a:p>
+                      <a:pPr algn="ctr"/>
+                      <a:r>
+                        <a:rPr sz="1100" b="0" i="0">
+                          <a:solidFill>
+                            <a:srgbClr val="1F2A37"/>
+                          </a:solidFill>
+                          <a:latin typeface="Calibri"/>
+                        </a:rPr>
+                        <a:t>bedrock</a:t>
+                      </a:r>
+                    </a:p>
+                  </a:txBody>
+                  <a:tcPr marL="63500" marR="63500" marT="12700" marB="12700" anchor="ctr">
+                    <a:solidFill>
+                      <a:srgbClr val="FFFFFF"/>
+                    </a:solidFill>
+                  </a:tcPr>
+                </a:tc>
+                <a:tc>
+                  <a:txBody>
+                    <a:bodyPr/>
+                    <a:lstStyle/>
+                    <a:p>
+                      <a:pPr algn="ctr"/>
+                      <a:r>
+                        <a:rPr sz="1100" b="0" i="0">
+                          <a:solidFill>
+                            <a:srgbClr val="1F2A37"/>
+                          </a:solidFill>
+                          <a:latin typeface="Calibri"/>
+                        </a:rPr>
+                        <a:t>1.52</a:t>
+                      </a:r>
+                    </a:p>
+                  </a:txBody>
+                  <a:tcPr marL="63500" marR="63500" marT="12700" marB="12700" anchor="ctr">
+                    <a:solidFill>
+                      <a:srgbClr val="FFFFFF"/>
+                    </a:solidFill>
+                  </a:tcPr>
+                </a:tc>
+                <a:tc>
+                  <a:txBody>
+                    <a:bodyPr/>
+                    <a:lstStyle/>
+                    <a:p>
+                      <a:pPr algn="ctr"/>
+                      <a:r>
+                        <a:rPr sz="1100" b="0" i="0">
+                          <a:solidFill>
+                            <a:srgbClr val="1F2A37"/>
+                          </a:solidFill>
+                          <a:latin typeface="Calibri"/>
+                        </a:rPr>
+                        <a:t>7.60</a:t>
+                      </a:r>
+                    </a:p>
+                  </a:txBody>
+                  <a:tcPr marL="63500" marR="63500" marT="12700" marB="12700" anchor="ctr">
+                    <a:solidFill>
+                      <a:srgbClr val="FFFFFF"/>
+                    </a:solidFill>
+                  </a:tcPr>
+                </a:tc>
+                <a:tc>
+                  <a:txBody>
+                    <a:bodyPr/>
+                    <a:lstStyle/>
+                    <a:p>
+                      <a:pPr algn="ctr"/>
+                      <a:r>
+                        <a:rPr sz="1100" b="0" i="0">
+                          <a:solidFill>
+                            <a:srgbClr val="1F2A37"/>
+                          </a:solidFill>
+                          <a:latin typeface="Calibri"/>
+                        </a:rPr>
+                        <a:t>5.0x</a:t>
+                      </a:r>
+                    </a:p>
+                  </a:txBody>
+                  <a:tcPr marL="63500" marR="63500" marT="12700" marB="12700" anchor="ctr">
+                    <a:solidFill>
+                      <a:srgbClr val="FFFFFF"/>
+                    </a:solidFill>
+                  </a:tcPr>
+                </a:tc>
+                <a:tc>
+                  <a:txBody>
+                    <a:bodyPr/>
+                    <a:lstStyle/>
+                    <a:p>
+                      <a:pPr algn="ctr"/>
+                      <a:r>
+                        <a:rPr sz="1100" b="0" i="0">
+                          <a:solidFill>
+                            <a:srgbClr val="1F2A37"/>
+                          </a:solidFill>
+                          <a:latin typeface="Calibri"/>
+                        </a:rPr>
+                        <a:t>tau2</a:t>
+                      </a:r>
+                    </a:p>
+                  </a:txBody>
+                  <a:tcPr marL="63500" marR="63500" marT="12700" marB="12700" anchor="ctr">
+                    <a:solidFill>
+                      <a:srgbClr val="FFFFFF"/>
+                    </a:solidFill>
+                  </a:tcPr>
+                </a:tc>
+              </a:tr>
+              <a:tr h="356616">
+                <a:tc>
+                  <a:txBody>
+                    <a:bodyPr/>
+                    <a:lstStyle/>
+                    <a:p>
+                      <a:pPr algn="l"/>
+                      <a:r>
+                        <a:rPr sz="1100" b="1" i="0">
+                          <a:solidFill>
+                            <a:srgbClr val="1F2A37"/>
+                          </a:solidFill>
+                          <a:latin typeface="Calibri"/>
+                        </a:rPr>
+                        <a:t>Azure/gpt-4.1</a:t>
+                      </a:r>
+                    </a:p>
+                  </a:txBody>
+                  <a:tcPr marL="63500" marR="63500" marT="12700" marB="12700" anchor="ctr">
+                    <a:solidFill>
+                      <a:srgbClr val="F4F6F8"/>
+                    </a:solidFill>
+                  </a:tcPr>
+                </a:tc>
+                <a:tc>
+                  <a:txBody>
+                    <a:bodyPr/>
+                    <a:lstStyle/>
+                    <a:p>
+                      <a:pPr algn="ctr"/>
+                      <a:r>
+                        <a:rPr sz="1100" b="0" i="0">
+                          <a:solidFill>
+                            <a:srgbClr val="1F2A37"/>
+                          </a:solidFill>
+                          <a:latin typeface="Calibri"/>
+                        </a:rPr>
+                        <a:t>azure</a:t>
+                      </a:r>
+                    </a:p>
+                  </a:txBody>
+                  <a:tcPr marL="63500" marR="63500" marT="12700" marB="12700" anchor="ctr">
+                    <a:solidFill>
+                      <a:srgbClr val="F4F6F8"/>
+                    </a:solidFill>
+                  </a:tcPr>
+                </a:tc>
+                <a:tc>
+                  <a:txBody>
+                    <a:bodyPr/>
+                    <a:lstStyle/>
+                    <a:p>
+                      <a:pPr algn="ctr"/>
+                      <a:r>
+                        <a:rPr sz="1100" b="0" i="0">
+                          <a:solidFill>
+                            <a:srgbClr val="1F2A37"/>
+                          </a:solidFill>
+                          <a:latin typeface="Calibri"/>
+                        </a:rPr>
+                        <a:t>2.00</a:t>
+                      </a:r>
+                    </a:p>
+                  </a:txBody>
+                  <a:tcPr marL="63500" marR="63500" marT="12700" marB="12700" anchor="ctr">
+                    <a:solidFill>
+                      <a:srgbClr val="F4F6F8"/>
+                    </a:solidFill>
+                  </a:tcPr>
+                </a:tc>
+                <a:tc>
+                  <a:txBody>
+                    <a:bodyPr/>
+                    <a:lstStyle/>
+                    <a:p>
+                      <a:pPr algn="ctr"/>
+                      <a:r>
+                        <a:rPr sz="1100" b="0" i="0">
+                          <a:solidFill>
+                            <a:srgbClr val="1F2A37"/>
+                          </a:solidFill>
+                          <a:latin typeface="Calibri"/>
+                        </a:rPr>
+                        <a:t>8.00</a:t>
+                      </a:r>
+                    </a:p>
+                  </a:txBody>
+                  <a:tcPr marL="63500" marR="63500" marT="12700" marB="12700" anchor="ctr">
+                    <a:solidFill>
+                      <a:srgbClr val="F4F6F8"/>
+                    </a:solidFill>
+                  </a:tcPr>
+                </a:tc>
+                <a:tc>
+                  <a:txBody>
+                    <a:bodyPr/>
+                    <a:lstStyle/>
+                    <a:p>
+                      <a:pPr algn="ctr"/>
+                      <a:r>
+                        <a:rPr sz="1100" b="0" i="0">
+                          <a:solidFill>
+                            <a:srgbClr val="1F2A37"/>
+                          </a:solidFill>
+                          <a:latin typeface="Calibri"/>
+                        </a:rPr>
+                        <a:t>4.0x</a:t>
+                      </a:r>
+                    </a:p>
+                  </a:txBody>
+                  <a:tcPr marL="63500" marR="63500" marT="12700" marB="12700" anchor="ctr">
+                    <a:solidFill>
+                      <a:srgbClr val="F4F6F8"/>
+                    </a:solidFill>
+                  </a:tcPr>
+                </a:tc>
+                <a:tc>
+                  <a:txBody>
+                    <a:bodyPr/>
+                    <a:lstStyle/>
+                    <a:p>
+                      <a:pPr algn="ctr"/>
+                      <a:r>
+                        <a:rPr sz="1100" b="0" i="0">
+                          <a:solidFill>
+                            <a:srgbClr val="1F2A37"/>
+                          </a:solidFill>
+                          <a:latin typeface="Calibri"/>
+                        </a:rPr>
+                        <a:t>leg #4, AND the IBAC judge</a:t>
+                      </a:r>
+                    </a:p>
+                  </a:txBody>
+                  <a:tcPr marL="63500" marR="63500" marT="12700" marB="12700" anchor="ctr">
+                    <a:solidFill>
+                      <a:srgbClr val="F4F6F8"/>
+                    </a:solidFill>
+                  </a:tcPr>
+                </a:tc>
+              </a:tr>
+            </a:tbl>
+          </a:graphicData>
+        </a:graphic>
+      </p:graphicFrame>
+      <p:sp>
+        <p:nvSpPr>
+          <p:cNvPr id="4" name="Rounded Rectangle 3"/>
+          <p:cNvSpPr/>
+          <p:nvPr/>
+        </p:nvSpPr>
+        <p:spPr>
+          <a:xfrm>
+            <a:off x="411480" y="3154680"/>
+            <a:ext cx="11338560" cy="822960"/>
+          </a:xfrm>
+          <a:prstGeom prst="roundRect">
+            <a:avLst/>
+          </a:prstGeom>
+          <a:solidFill>
+            <a:srgbClr val="E4F0F0"/>
+          </a:solidFill>
+          <a:ln w="12700">
+            <a:solidFill>
+              <a:srgbClr val="3D6E70"/>
+            </a:solidFill>
+          </a:ln>
+          <a:effectLst/>
+        </p:spPr>
+        <p:style>
+          <a:lnRef idx="1">
+            <a:schemeClr val="accent1"/>
+          </a:lnRef>
+          <a:fillRef idx="3">
+            <a:schemeClr val="accent1"/>
+          </a:fillRef>
+          <a:effectRef idx="2">
+            <a:schemeClr val="accent1"/>
+          </a:effectRef>
+          <a:fontRef idx="minor">
+            <a:schemeClr val="lt1"/>
+          </a:fontRef>
+        </p:style>
+        <p:txBody>
+          <a:bodyPr rtlCol="0" anchor="ctr" wrap="square" tIns="25400" bIns="25400"/>
+          <a:lstStyle/>
+          <a:p>
+            <a:pPr algn="ctr"/>
+            <a:r>
+              <a:rPr sz="1400" b="1" i="0">
+                <a:solidFill>
+                  <a:srgbClr val="3D6E70"/>
+                </a:solidFill>
+                <a:latin typeface="Calibri"/>
+              </a:rPr>
+              <a:t>Output is priced 4–8x input at every provider</a:t>
+            </a:r>
+          </a:p>
+          <a:p>
+            <a:pPr algn="ctr"/>
+            <a:r>
+              <a:rPr sz="1100" b="0" i="0">
+                <a:solidFill>
+                  <a:srgbClr val="1F2A37"/>
+                </a:solidFill>
+                <a:latin typeface="Calibri"/>
+              </a:rPr>
+              <a:t>That one fact explains the counter-intuitive results: a reasoning model's verbosity is charged at the expensive end, so a model can win on token count and lose on the bill. Read the input-share-of-COST row, not the share of tokens, to find the driver.</a:t>
+            </a:r>
+          </a:p>
+        </p:txBody>
+      </p:sp>
+      <p:sp>
+        <p:nvSpPr>
+          <p:cNvPr id="5" name="Rounded Rectangle 4"/>
+          <p:cNvSpPr/>
+          <p:nvPr/>
+        </p:nvSpPr>
+        <p:spPr>
+          <a:xfrm>
+            <a:off x="411480" y="4160520"/>
+            <a:ext cx="5623560" cy="2148840"/>
+          </a:xfrm>
+          <a:prstGeom prst="roundRect">
+            <a:avLst/>
+          </a:prstGeom>
+          <a:solidFill>
+            <a:srgbClr val="FBEEE4"/>
+          </a:solidFill>
+          <a:ln w="12700">
+            <a:solidFill>
+              <a:srgbClr val="B55A2E"/>
+            </a:solidFill>
+          </a:ln>
+          <a:effectLst/>
+        </p:spPr>
+        <p:style>
+          <a:lnRef idx="1">
+            <a:schemeClr val="accent1"/>
+          </a:lnRef>
+          <a:fillRef idx="3">
+            <a:schemeClr val="accent1"/>
+          </a:fillRef>
+          <a:effectRef idx="2">
+            <a:schemeClr val="accent1"/>
+          </a:effectRef>
+          <a:fontRef idx="minor">
+            <a:schemeClr val="lt1"/>
+          </a:fontRef>
+        </p:style>
+        <p:txBody>
+          <a:bodyPr rtlCol="0" anchor="ctr" wrap="square" tIns="25400" bIns="25400"/>
+          <a:lstStyle/>
+          <a:p>
+            <a:pPr algn="ctr"/>
+            <a:r>
+              <a:rPr sz="1350" b="1" i="0">
+                <a:solidFill>
+                  <a:srgbClr val="B55A2E"/>
+                </a:solidFill>
+                <a:latin typeface="Calibri"/>
+              </a:rPr>
+              <a:t>Too LOW:  the IBAC judge is not in our telemetry</a:t>
+            </a:r>
+          </a:p>
+          <a:p>
+            <a:pPr algn="ctr"/>
+            <a:r>
+              <a:rPr sz="1050" b="0" i="0">
+                <a:solidFill>
+                  <a:srgbClr val="1F2A37"/>
+                </a:solidFill>
+                <a:latin typeface="Calibri"/>
+              </a:rPr>
+              <a:t>The judge makes ~1 completion per authorized tool call, on Azure/gpt-4.1 — the dearest model on the card — against a FIXED 1,577-char system prompt that does not shrink with the task. That is ≥ $0.00111 per call, which is 2.4x the entire gsm8k task it is authorizing ($0.00045), and 1.4x–4.4x the agent's whole bill across legs #6–#8. On the plugin legs IBAC is not overhead on the bill; it IS the bill.  tau2's user simulator is invisible the same way: same model as the agent, but inside the uninstrumented MCP pod.</a:t>
+            </a:r>
+          </a:p>
+        </p:txBody>
+      </p:sp>
+      <p:sp>
+        <p:nvSpPr>
+          <p:cNvPr id="6" name="Rounded Rectangle 5"/>
+          <p:cNvSpPr/>
+          <p:nvPr/>
+        </p:nvSpPr>
+        <p:spPr>
+          <a:xfrm>
+            <a:off x="6309360" y="4160520"/>
+            <a:ext cx="5440680" cy="2148840"/>
+          </a:xfrm>
+          <a:prstGeom prst="roundRect">
+            <a:avLst/>
+          </a:prstGeom>
+          <a:solidFill>
+            <a:srgbClr val="F1E8F6"/>
+          </a:solidFill>
+          <a:ln w="12700">
+            <a:solidFill>
+              <a:srgbClr val="8E44AD"/>
+            </a:solidFill>
+          </a:ln>
+          <a:effectLst/>
+        </p:spPr>
+        <p:style>
+          <a:lnRef idx="1">
+            <a:schemeClr val="accent1"/>
+          </a:lnRef>
+          <a:fillRef idx="3">
+            <a:schemeClr val="accent1"/>
+          </a:fillRef>
+          <a:effectRef idx="2">
+            <a:schemeClr val="accent1"/>
+          </a:effectRef>
+          <a:fontRef idx="minor">
+            <a:schemeClr val="lt1"/>
+          </a:fontRef>
+        </p:style>
+        <p:txBody>
+          <a:bodyPr rtlCol="0" anchor="ctr" wrap="square" tIns="25400" bIns="25400"/>
+          <a:lstStyle/>
+          <a:p>
+            <a:pPr algn="ctr"/>
+            <a:r>
+              <a:rPr sz="1350" b="1" i="0">
+                <a:solidFill>
+                  <a:srgbClr val="8E44AD"/>
+                </a:solidFill>
+                <a:latin typeface="Calibri"/>
+              </a:rPr>
+              <a:t>Too HIGH:  an unmodelled cache discount</a:t>
+            </a:r>
+          </a:p>
+          <a:p>
+            <a:pPr algn="ctr"/>
+            <a:r>
+              <a:rPr sz="1050" b="0" i="0">
+                <a:solidFill>
+                  <a:srgbClr val="1F2A37"/>
+                </a:solidFill>
+                <a:latin typeface="Calibri"/>
+              </a:rPr>
+              <a:t>The gateway REPORTS cached input (usage.prompt_tokens_details.cached_tokens, verified by probe) but publishes no cached-input rate, and report.ndjson stores one undifferentiated llm_input_tokens — so no past run can be re-priced. The exposure is capped by input's share of the bill: if cached input were FREE, tau2 would floor at $0.0157 a task instead of $0.154 and appworld at $0.251 instead of $0.589, while gsm8k barely moves. That ordering is structural — caching pays off on a long re-sent prefix, which is what makes input dominate.</a:t>
+            </a:r>
+          </a:p>
+        </p:txBody>
+      </p:sp>
+      <p:sp>
+        <p:nvSpPr>
+          <p:cNvPr id="7" name="TextBox 6"/>
+          <p:cNvSpPr txBox="1"/>
+          <p:nvPr/>
+        </p:nvSpPr>
+        <p:spPr>
+          <a:xfrm>
+            <a:off x="11795760" y="6437376"/>
+            <a:ext cx="320040" cy="310896"/>
+          </a:xfrm>
+          <a:prstGeom prst="rect">
+            <a:avLst/>
+          </a:prstGeom>
+          <a:noFill/>
+        </p:spPr>
+        <p:txBody>
+          <a:bodyPr wrap="none" anchor="ctr" lIns="0" rIns="0" tIns="0" bIns="0">
+            <a:spAutoFit/>
+          </a:bodyPr>
+          <a:lstStyle/>
+          <a:p>
+            <a:pPr algn="r">
+              <a:spcAft>
+                <a:spcPts val="300"/>
+              </a:spcAft>
+            </a:pPr>
+            <a:r>
+              <a:rPr sz="1200" b="0" i="0">
+                <a:solidFill>
+                  <a:srgbClr val="6B6B6B"/>
+                </a:solidFill>
+                <a:latin typeface="Calibri"/>
+              </a:rPr>
+              <a:t>16</a:t>
+            </a:r>
+          </a:p>
+        </p:txBody>
+      </p:sp>
+    </p:spTree>
+  </p:cSld>
+  <p:clrMapOvr>
+    <a:masterClrMapping/>
+  </p:clrMapOvr>
+</p:sld>
+</file>
+
+<file path=ppt/slides/slide17.xml><?xml version="1.0" encoding="utf-8"?>
 <p:sld xmlns:a="http://schemas.openxmlformats.org/drawingml/2006/main" xmlns:p="http://schemas.openxmlformats.org/presentationml/2006/main" xmlns:r="http://schemas.openxmlformats.org/officeDocument/2006/relationships">
   <p:cSld name="8.1 The Canonical 12-Run Matrix">
     <p:spTree>
@@ -11758,7 +13742,7 @@
                 </a:solidFill>
                 <a:latin typeface="Calibri"/>
               </a:rPr>
-              <a:t>16</a:t>
+              <a:t>17</a:t>
             </a:r>
           </a:p>
         </p:txBody>
@@ -11771,7 +13755,7 @@
 </p:sld>
 </file>
 
-<file path=ppt/slides/slide17.xml><?xml version="1.0" encoding="utf-8"?>
+<file path=ppt/slides/slide18.xml><?xml version="1.0" encoding="utf-8"?>
 <p:sld xmlns:a="http://schemas.openxmlformats.org/drawingml/2006/main" xmlns:p="http://schemas.openxmlformats.org/presentationml/2006/main" xmlns:r="http://schemas.openxmlformats.org/officeDocument/2006/relationships">
   <p:cSld name="8.2 What the 12 Runs Measured">
     <p:spTree>
@@ -14064,7 +16048,7 @@
                 </a:solidFill>
                 <a:latin typeface="Calibri"/>
               </a:rPr>
-              <a:t>17</a:t>
+              <a:t>18</a:t>
             </a:r>
           </a:p>
         </p:txBody>
@@ -14077,7 +16061,7 @@
 </p:sld>
 </file>
 
-<file path=ppt/slides/slide18.xml><?xml version="1.0" encoding="utf-8"?>
+<file path=ppt/slides/slide19.xml><?xml version="1.0" encoding="utf-8"?>
 <p:sld xmlns:a="http://schemas.openxmlformats.org/drawingml/2006/main" xmlns:p="http://schemas.openxmlformats.org/presentationml/2006/main" xmlns:r="http://schemas.openxmlformats.org/officeDocument/2006/relationships">
   <p:cSld name="9.1 OpenShift vs KinD — Like-for-Like">
     <p:spTree>
@@ -16632,1812 +18616,6 @@
                 <a:latin typeface="Calibri"/>
               </a:rPr>
               <a:t>137 OCP rows against 130 KinD. The 7-row gap is appworld tasks that timed out before the harness wrote a row (4 OCP, 11 KinD) — not lost telemetry.</a:t>
-            </a:r>
-          </a:p>
-        </p:txBody>
-      </p:sp>
-      <p:sp>
-        <p:nvSpPr>
-          <p:cNvPr id="9" name="TextBox 8"/>
-          <p:cNvSpPr txBox="1"/>
-          <p:nvPr/>
-        </p:nvSpPr>
-        <p:spPr>
-          <a:xfrm>
-            <a:off x="11795760" y="6437376"/>
-            <a:ext cx="320040" cy="310896"/>
-          </a:xfrm>
-          <a:prstGeom prst="rect">
-            <a:avLst/>
-          </a:prstGeom>
-          <a:noFill/>
-        </p:spPr>
-        <p:txBody>
-          <a:bodyPr wrap="none" anchor="ctr" lIns="0" rIns="0" tIns="0" bIns="0">
-            <a:spAutoFit/>
-          </a:bodyPr>
-          <a:lstStyle/>
-          <a:p>
-            <a:pPr algn="r">
-              <a:spcAft>
-                <a:spcPts val="300"/>
-              </a:spcAft>
-            </a:pPr>
-            <a:r>
-              <a:rPr sz="1200" b="0" i="0">
-                <a:solidFill>
-                  <a:srgbClr val="6B6B6B"/>
-                </a:solidFill>
-                <a:latin typeface="Calibri"/>
-              </a:rPr>
-              <a:t>18</a:t>
-            </a:r>
-          </a:p>
-        </p:txBody>
-      </p:sp>
-    </p:spTree>
-  </p:cSld>
-  <p:clrMapOvr>
-    <a:masterClrMapping/>
-  </p:clrMapOvr>
-</p:sld>
-</file>
-
-<file path=ppt/slides/slide19.xml><?xml version="1.0" encoding="utf-8"?>
-<p:sld xmlns:a="http://schemas.openxmlformats.org/drawingml/2006/main" xmlns:p="http://schemas.openxmlformats.org/presentationml/2006/main" xmlns:r="http://schemas.openxmlformats.org/officeDocument/2006/relationships">
-  <p:cSld name="9.2 What AuthBridge Costs — and Why It Has No Single Number">
-    <p:spTree>
-      <p:nvGrpSpPr>
-        <p:cNvPr id="1" name=""/>
-        <p:cNvGrpSpPr/>
-        <p:nvPr/>
-      </p:nvGrpSpPr>
-      <p:grpSpPr/>
-      <p:sp>
-        <p:nvSpPr>
-          <p:cNvPr id="2" name="Rectangle 1"/>
-          <p:cNvSpPr/>
-          <p:nvPr/>
-        </p:nvSpPr>
-        <p:spPr>
-          <a:xfrm>
-            <a:off x="0" y="0"/>
-            <a:ext cx="12192000" cy="950000"/>
-          </a:xfrm>
-          <a:prstGeom prst="rect">
-            <a:avLst/>
-          </a:prstGeom>
-          <a:solidFill>
-            <a:srgbClr val="1B3A5C"/>
-          </a:solidFill>
-          <a:ln>
-            <a:noFill/>
-          </a:ln>
-          <a:effectLst/>
-        </p:spPr>
-        <p:style>
-          <a:lnRef idx="1">
-            <a:schemeClr val="accent1"/>
-          </a:lnRef>
-          <a:fillRef idx="3">
-            <a:schemeClr val="accent1"/>
-          </a:fillRef>
-          <a:effectRef idx="2">
-            <a:schemeClr val="accent1"/>
-          </a:effectRef>
-          <a:fontRef idx="minor">
-            <a:schemeClr val="lt1"/>
-          </a:fontRef>
-        </p:style>
-        <p:txBody>
-          <a:bodyPr rtlCol="0" anchor="ctr" lIns="355600"/>
-          <a:lstStyle/>
-          <a:p>
-            <a:pPr algn="ctr"/>
-            <a:r>
-              <a:rPr sz="2600" b="1" i="0">
-                <a:solidFill>
-                  <a:srgbClr val="FFFFFF"/>
-                </a:solidFill>
-                <a:latin typeface="Calibri"/>
-              </a:rPr>
-              <a:t>9.2  What AuthBridge Costs — and Why It Has No Single Number</a:t>
-            </a:r>
-          </a:p>
-          <a:p>
-            <a:r>
-              <a:rPr sz="1400" b="0" i="0">
-                <a:solidFill>
-                  <a:srgbClr val="C9D9EC"/>
-                </a:solidFill>
-                <a:latin typeface="Calibri"/>
-              </a:rPr>
-              <a:t>The designed 13-leg experiment (n=50, crossover replicates, gateway cache spaced), v1.28</a:t>
-            </a:r>
-          </a:p>
-        </p:txBody>
-      </p:sp>
-      <p:graphicFrame>
-        <p:nvGraphicFramePr>
-          <p:cNvPr id="3" name="Table 2"/>
-          <p:cNvGraphicFramePr>
-            <a:graphicFrameLocks noGrp="1"/>
-          </p:cNvGraphicFramePr>
-          <p:nvPr/>
-        </p:nvGraphicFramePr>
-        <p:xfrm>
-          <a:off x="411480" y="1188720"/>
-          <a:ext cx="5806440" cy="2011680"/>
-        </p:xfrm>
-        <a:graphic>
-          <a:graphicData uri="http://schemas.openxmlformats.org/drawingml/2006/table">
-            <a:tbl>
-              <a:tblPr firstRow="1">
-                <a:tableStyleId>{5C22544A-7EE6-4342-B048-85BDC9FD1C3A}</a:tableStyleId>
-              </a:tblPr>
-              <a:tblGrid>
-                <a:gridCol w="2240280"/>
-                <a:gridCol w="960120"/>
-                <a:gridCol w="868680"/>
-                <a:gridCol w="868680"/>
-                <a:gridCol w="868680"/>
-              </a:tblGrid>
-              <a:tr h="335280">
-                <a:tc>
-                  <a:txBody>
-                    <a:bodyPr/>
-                    <a:lstStyle/>
-                    <a:p>
-                      <a:pPr algn="l"/>
-                      <a:r>
-                        <a:rPr sz="1050" b="1" i="0">
-                          <a:solidFill>
-                            <a:srgbClr val="FFFFFF"/>
-                          </a:solidFill>
-                          <a:latin typeface="Calibri"/>
-                        </a:rPr>
-                        <a:t>non-LLM s / task (steady)</a:t>
-                      </a:r>
-                    </a:p>
-                  </a:txBody>
-                  <a:tcPr marL="63500" marR="63500" marT="12700" marB="12700" anchor="ctr">
-                    <a:solidFill>
-                      <a:srgbClr val="1B3A5C"/>
-                    </a:solidFill>
-                  </a:tcPr>
-                </a:tc>
-                <a:tc>
-                  <a:txBody>
-                    <a:bodyPr/>
-                    <a:lstStyle/>
-                    <a:p>
-                      <a:pPr algn="ctr"/>
-                      <a:r>
-                        <a:rPr sz="1050" b="1" i="0">
-                          <a:solidFill>
-                            <a:srgbClr val="FFFFFF"/>
-                          </a:solidFill>
-                          <a:latin typeface="Calibri"/>
-                        </a:rPr>
-                        <a:t>OpenShift</a:t>
-                      </a:r>
-                    </a:p>
-                  </a:txBody>
-                  <a:tcPr marL="63500" marR="63500" marT="12700" marB="12700" anchor="ctr">
-                    <a:solidFill>
-                      <a:srgbClr val="1B3A5C"/>
-                    </a:solidFill>
-                  </a:tcPr>
-                </a:tc>
-                <a:tc>
-                  <a:txBody>
-                    <a:bodyPr/>
-                    <a:lstStyle/>
-                    <a:p>
-                      <a:pPr algn="ctr"/>
-                      <a:r>
-                        <a:rPr sz="1050" b="1" i="0">
-                          <a:solidFill>
-                            <a:srgbClr val="FFFFFF"/>
-                          </a:solidFill>
-                          <a:latin typeface="Calibri"/>
-                        </a:rPr>
-                        <a:t>KinD</a:t>
-                      </a:r>
-                    </a:p>
-                  </a:txBody>
-                  <a:tcPr marL="63500" marR="63500" marT="12700" marB="12700" anchor="ctr">
-                    <a:solidFill>
-                      <a:srgbClr val="1B3A5C"/>
-                    </a:solidFill>
-                  </a:tcPr>
-                </a:tc>
-                <a:tc>
-                  <a:txBody>
-                    <a:bodyPr/>
-                    <a:lstStyle/>
-                    <a:p>
-                      <a:pPr algn="ctr"/>
-                      <a:r>
-                        <a:rPr sz="1050" b="1" i="0">
-                          <a:solidFill>
-                            <a:srgbClr val="FFFFFF"/>
-                          </a:solidFill>
-                          <a:latin typeface="Calibri"/>
-                        </a:rPr>
-                        <a:t>OCP step</a:t>
-                      </a:r>
-                    </a:p>
-                  </a:txBody>
-                  <a:tcPr marL="63500" marR="63500" marT="12700" marB="12700" anchor="ctr">
-                    <a:solidFill>
-                      <a:srgbClr val="1B3A5C"/>
-                    </a:solidFill>
-                  </a:tcPr>
-                </a:tc>
-                <a:tc>
-                  <a:txBody>
-                    <a:bodyPr/>
-                    <a:lstStyle/>
-                    <a:p>
-                      <a:pPr algn="ctr"/>
-                      <a:r>
-                        <a:rPr sz="1050" b="1" i="0">
-                          <a:solidFill>
-                            <a:srgbClr val="FFFFFF"/>
-                          </a:solidFill>
-                          <a:latin typeface="Calibri"/>
-                        </a:rPr>
-                        <a:t>KinD step</a:t>
-                      </a:r>
-                    </a:p>
-                  </a:txBody>
-                  <a:tcPr marL="63500" marR="63500" marT="12700" marB="12700" anchor="ctr">
-                    <a:solidFill>
-                      <a:srgbClr val="1B3A5C"/>
-                    </a:solidFill>
-                  </a:tcPr>
-                </a:tc>
-              </a:tr>
-              <a:tr h="335280">
-                <a:tc>
-                  <a:txBody>
-                    <a:bodyPr/>
-                    <a:lstStyle/>
-                    <a:p>
-                      <a:pPr algn="l"/>
-                      <a:r>
-                        <a:rPr sz="1050" b="1" i="0">
-                          <a:solidFill>
-                            <a:srgbClr val="1F2A37"/>
-                          </a:solidFill>
-                          <a:latin typeface="Calibri"/>
-                        </a:rPr>
-                        <a:t>baseline (AuthBridge off)</a:t>
-                      </a:r>
-                    </a:p>
-                  </a:txBody>
-                  <a:tcPr marL="63500" marR="63500" marT="12700" marB="12700" anchor="ctr">
-                    <a:solidFill>
-                      <a:srgbClr val="FFFFFF"/>
-                    </a:solidFill>
-                  </a:tcPr>
-                </a:tc>
-                <a:tc>
-                  <a:txBody>
-                    <a:bodyPr/>
-                    <a:lstStyle/>
-                    <a:p>
-                      <a:pPr algn="ctr"/>
-                      <a:r>
-                        <a:rPr sz="1050" b="0" i="0">
-                          <a:solidFill>
-                            <a:srgbClr val="1F2A37"/>
-                          </a:solidFill>
-                          <a:latin typeface="Calibri"/>
-                        </a:rPr>
-                        <a:t>0.423</a:t>
-                      </a:r>
-                    </a:p>
-                  </a:txBody>
-                  <a:tcPr marL="63500" marR="63500" marT="12700" marB="12700" anchor="ctr">
-                    <a:solidFill>
-                      <a:srgbClr val="FFFFFF"/>
-                    </a:solidFill>
-                  </a:tcPr>
-                </a:tc>
-                <a:tc>
-                  <a:txBody>
-                    <a:bodyPr/>
-                    <a:lstStyle/>
-                    <a:p>
-                      <a:pPr algn="ctr"/>
-                      <a:r>
-                        <a:rPr sz="1050" b="0" i="0">
-                          <a:solidFill>
-                            <a:srgbClr val="1F2A37"/>
-                          </a:solidFill>
-                          <a:latin typeface="Calibri"/>
-                        </a:rPr>
-                        <a:t>0.099</a:t>
-                      </a:r>
-                    </a:p>
-                  </a:txBody>
-                  <a:tcPr marL="63500" marR="63500" marT="12700" marB="12700" anchor="ctr">
-                    <a:solidFill>
-                      <a:srgbClr val="FFFFFF"/>
-                    </a:solidFill>
-                  </a:tcPr>
-                </a:tc>
-                <a:tc>
-                  <a:txBody>
-                    <a:bodyPr/>
-                    <a:lstStyle/>
-                    <a:p>
-                      <a:pPr algn="ctr"/>
-                      <a:r>
-                        <a:rPr sz="1050" b="0" i="0">
-                          <a:solidFill>
-                            <a:srgbClr val="1F2A37"/>
-                          </a:solidFill>
-                          <a:latin typeface="Calibri"/>
-                        </a:rPr>
-                        <a:t>—</a:t>
-                      </a:r>
-                    </a:p>
-                  </a:txBody>
-                  <a:tcPr marL="63500" marR="63500" marT="12700" marB="12700" anchor="ctr">
-                    <a:solidFill>
-                      <a:srgbClr val="FFFFFF"/>
-                    </a:solidFill>
-                  </a:tcPr>
-                </a:tc>
-                <a:tc>
-                  <a:txBody>
-                    <a:bodyPr/>
-                    <a:lstStyle/>
-                    <a:p>
-                      <a:pPr algn="ctr"/>
-                      <a:r>
-                        <a:rPr sz="1050" b="0" i="0">
-                          <a:solidFill>
-                            <a:srgbClr val="1F2A37"/>
-                          </a:solidFill>
-                          <a:latin typeface="Calibri"/>
-                        </a:rPr>
-                        <a:t>—</a:t>
-                      </a:r>
-                    </a:p>
-                  </a:txBody>
-                  <a:tcPr marL="63500" marR="63500" marT="12700" marB="12700" anchor="ctr">
-                    <a:solidFill>
-                      <a:srgbClr val="FFFFFF"/>
-                    </a:solidFill>
-                  </a:tcPr>
-                </a:tc>
-              </a:tr>
-              <a:tr h="335280">
-                <a:tc>
-                  <a:txBody>
-                    <a:bodyPr/>
-                    <a:lstStyle/>
-                    <a:p>
-                      <a:pPr algn="l"/>
-                      <a:r>
-                        <a:rPr sz="1050" b="1" i="0">
-                          <a:solidFill>
-                            <a:srgbClr val="1F2A37"/>
-                          </a:solidFill>
-                          <a:latin typeface="Calibri"/>
-                        </a:rPr>
-                        <a:t>auth-only</a:t>
-                      </a:r>
-                    </a:p>
-                  </a:txBody>
-                  <a:tcPr marL="63500" marR="63500" marT="12700" marB="12700" anchor="ctr">
-                    <a:solidFill>
-                      <a:srgbClr val="F4F6F8"/>
-                    </a:solidFill>
-                  </a:tcPr>
-                </a:tc>
-                <a:tc>
-                  <a:txBody>
-                    <a:bodyPr/>
-                    <a:lstStyle/>
-                    <a:p>
-                      <a:pPr algn="ctr"/>
-                      <a:r>
-                        <a:rPr sz="1050" b="0" i="0">
-                          <a:solidFill>
-                            <a:srgbClr val="1F2A37"/>
-                          </a:solidFill>
-                          <a:latin typeface="Calibri"/>
-                        </a:rPr>
-                        <a:t>14.101</a:t>
-                      </a:r>
-                    </a:p>
-                  </a:txBody>
-                  <a:tcPr marL="63500" marR="63500" marT="12700" marB="12700" anchor="ctr">
-                    <a:solidFill>
-                      <a:srgbClr val="F4F6F8"/>
-                    </a:solidFill>
-                  </a:tcPr>
-                </a:tc>
-                <a:tc>
-                  <a:txBody>
-                    <a:bodyPr/>
-                    <a:lstStyle/>
-                    <a:p>
-                      <a:pPr algn="ctr"/>
-                      <a:r>
-                        <a:rPr sz="1050" b="0" i="0">
-                          <a:solidFill>
-                            <a:srgbClr val="1F2A37"/>
-                          </a:solidFill>
-                          <a:latin typeface="Calibri"/>
-                        </a:rPr>
-                        <a:t>0.152</a:t>
-                      </a:r>
-                    </a:p>
-                  </a:txBody>
-                  <a:tcPr marL="63500" marR="63500" marT="12700" marB="12700" anchor="ctr">
-                    <a:solidFill>
-                      <a:srgbClr val="F4F6F8"/>
-                    </a:solidFill>
-                  </a:tcPr>
-                </a:tc>
-                <a:tc>
-                  <a:txBody>
-                    <a:bodyPr/>
-                    <a:lstStyle/>
-                    <a:p>
-                      <a:pPr algn="ctr"/>
-                      <a:r>
-                        <a:rPr sz="1050" b="0" i="0">
-                          <a:solidFill>
-                            <a:srgbClr val="1F2A37"/>
-                          </a:solidFill>
-                          <a:latin typeface="Calibri"/>
-                        </a:rPr>
-                        <a:t>+13.68</a:t>
-                      </a:r>
-                    </a:p>
-                  </a:txBody>
-                  <a:tcPr marL="63500" marR="63500" marT="12700" marB="12700" anchor="ctr">
-                    <a:solidFill>
-                      <a:srgbClr val="F4F6F8"/>
-                    </a:solidFill>
-                  </a:tcPr>
-                </a:tc>
-                <a:tc>
-                  <a:txBody>
-                    <a:bodyPr/>
-                    <a:lstStyle/>
-                    <a:p>
-                      <a:pPr algn="ctr"/>
-                      <a:r>
-                        <a:rPr sz="1050" b="0" i="0">
-                          <a:solidFill>
-                            <a:srgbClr val="1F2A37"/>
-                          </a:solidFill>
-                          <a:latin typeface="Calibri"/>
-                        </a:rPr>
-                        <a:t>+0.05</a:t>
-                      </a:r>
-                    </a:p>
-                  </a:txBody>
-                  <a:tcPr marL="63500" marR="63500" marT="12700" marB="12700" anchor="ctr">
-                    <a:solidFill>
-                      <a:srgbClr val="F4F6F8"/>
-                    </a:solidFill>
-                  </a:tcPr>
-                </a:tc>
-              </a:tr>
-              <a:tr h="335280">
-                <a:tc>
-                  <a:txBody>
-                    <a:bodyPr/>
-                    <a:lstStyle/>
-                    <a:p>
-                      <a:pPr algn="l"/>
-                      <a:r>
-                        <a:rPr sz="1050" b="1" i="0">
-                          <a:solidFill>
-                            <a:srgbClr val="1F2A37"/>
-                          </a:solidFill>
-                          <a:latin typeface="Calibri"/>
-                        </a:rPr>
-                        <a:t>ibac-only</a:t>
-                      </a:r>
-                    </a:p>
-                  </a:txBody>
-                  <a:tcPr marL="63500" marR="63500" marT="12700" marB="12700" anchor="ctr">
-                    <a:solidFill>
-                      <a:srgbClr val="FFFFFF"/>
-                    </a:solidFill>
-                  </a:tcPr>
-                </a:tc>
-                <a:tc>
-                  <a:txBody>
-                    <a:bodyPr/>
-                    <a:lstStyle/>
-                    <a:p>
-                      <a:pPr algn="ctr"/>
-                      <a:r>
-                        <a:rPr sz="1050" b="0" i="0">
-                          <a:solidFill>
-                            <a:srgbClr val="1F2A37"/>
-                          </a:solidFill>
-                          <a:latin typeface="Calibri"/>
-                        </a:rPr>
-                        <a:t>14.148</a:t>
-                      </a:r>
-                    </a:p>
-                  </a:txBody>
-                  <a:tcPr marL="63500" marR="63500" marT="12700" marB="12700" anchor="ctr">
-                    <a:solidFill>
-                      <a:srgbClr val="FFFFFF"/>
-                    </a:solidFill>
-                  </a:tcPr>
-                </a:tc>
-                <a:tc>
-                  <a:txBody>
-                    <a:bodyPr/>
-                    <a:lstStyle/>
-                    <a:p>
-                      <a:pPr algn="ctr"/>
-                      <a:r>
-                        <a:rPr sz="1050" b="0" i="0">
-                          <a:solidFill>
-                            <a:srgbClr val="1F2A37"/>
-                          </a:solidFill>
-                          <a:latin typeface="Calibri"/>
-                        </a:rPr>
-                        <a:t>1.688</a:t>
-                      </a:r>
-                    </a:p>
-                  </a:txBody>
-                  <a:tcPr marL="63500" marR="63500" marT="12700" marB="12700" anchor="ctr">
-                    <a:solidFill>
-                      <a:srgbClr val="FFFFFF"/>
-                    </a:solidFill>
-                  </a:tcPr>
-                </a:tc>
-                <a:tc>
-                  <a:txBody>
-                    <a:bodyPr/>
-                    <a:lstStyle/>
-                    <a:p>
-                      <a:pPr algn="ctr"/>
-                      <a:r>
-                        <a:rPr sz="1050" b="0" i="0">
-                          <a:solidFill>
-                            <a:srgbClr val="1F2A37"/>
-                          </a:solidFill>
-                          <a:latin typeface="Calibri"/>
-                        </a:rPr>
-                        <a:t>+0.05</a:t>
-                      </a:r>
-                    </a:p>
-                  </a:txBody>
-                  <a:tcPr marL="63500" marR="63500" marT="12700" marB="12700" anchor="ctr">
-                    <a:solidFill>
-                      <a:srgbClr val="FFFFFF"/>
-                    </a:solidFill>
-                  </a:tcPr>
-                </a:tc>
-                <a:tc>
-                  <a:txBody>
-                    <a:bodyPr/>
-                    <a:lstStyle/>
-                    <a:p>
-                      <a:pPr algn="ctr"/>
-                      <a:r>
-                        <a:rPr sz="1050" b="0" i="0">
-                          <a:solidFill>
-                            <a:srgbClr val="1F2A37"/>
-                          </a:solidFill>
-                          <a:latin typeface="Calibri"/>
-                        </a:rPr>
-                        <a:t>+1.54</a:t>
-                      </a:r>
-                    </a:p>
-                  </a:txBody>
-                  <a:tcPr marL="63500" marR="63500" marT="12700" marB="12700" anchor="ctr">
-                    <a:solidFill>
-                      <a:srgbClr val="FFFFFF"/>
-                    </a:solidFill>
-                  </a:tcPr>
-                </a:tc>
-              </a:tr>
-              <a:tr h="335280">
-                <a:tc>
-                  <a:txBody>
-                    <a:bodyPr/>
-                    <a:lstStyle/>
-                    <a:p>
-                      <a:pPr algn="l"/>
-                      <a:r>
-                        <a:rPr sz="1050" b="1" i="0">
-                          <a:solidFill>
-                            <a:srgbClr val="1F2A37"/>
-                          </a:solidFill>
-                          <a:latin typeface="Calibri"/>
-                        </a:rPr>
-                        <a:t>full (auth + ibac)</a:t>
-                      </a:r>
-                    </a:p>
-                  </a:txBody>
-                  <a:tcPr marL="63500" marR="63500" marT="12700" marB="12700" anchor="ctr">
-                    <a:solidFill>
-                      <a:srgbClr val="F4F6F8"/>
-                    </a:solidFill>
-                  </a:tcPr>
-                </a:tc>
-                <a:tc>
-                  <a:txBody>
-                    <a:bodyPr/>
-                    <a:lstStyle/>
-                    <a:p>
-                      <a:pPr algn="ctr"/>
-                      <a:r>
-                        <a:rPr sz="1050" b="0" i="0">
-                          <a:solidFill>
-                            <a:srgbClr val="1F2A37"/>
-                          </a:solidFill>
-                          <a:latin typeface="Calibri"/>
-                        </a:rPr>
-                        <a:t>14.446</a:t>
-                      </a:r>
-                    </a:p>
-                  </a:txBody>
-                  <a:tcPr marL="63500" marR="63500" marT="12700" marB="12700" anchor="ctr">
-                    <a:solidFill>
-                      <a:srgbClr val="F4F6F8"/>
-                    </a:solidFill>
-                  </a:tcPr>
-                </a:tc>
-                <a:tc>
-                  <a:txBody>
-                    <a:bodyPr/>
-                    <a:lstStyle/>
-                    <a:p>
-                      <a:pPr algn="ctr"/>
-                      <a:r>
-                        <a:rPr sz="1050" b="0" i="0">
-                          <a:solidFill>
-                            <a:srgbClr val="1F2A37"/>
-                          </a:solidFill>
-                          <a:latin typeface="Calibri"/>
-                        </a:rPr>
-                        <a:t>1.824</a:t>
-                      </a:r>
-                    </a:p>
-                  </a:txBody>
-                  <a:tcPr marL="63500" marR="63500" marT="12700" marB="12700" anchor="ctr">
-                    <a:solidFill>
-                      <a:srgbClr val="F4F6F8"/>
-                    </a:solidFill>
-                  </a:tcPr>
-                </a:tc>
-                <a:tc>
-                  <a:txBody>
-                    <a:bodyPr/>
-                    <a:lstStyle/>
-                    <a:p>
-                      <a:pPr algn="ctr"/>
-                      <a:r>
-                        <a:rPr sz="1050" b="0" i="0">
-                          <a:solidFill>
-                            <a:srgbClr val="1F2A37"/>
-                          </a:solidFill>
-                          <a:latin typeface="Calibri"/>
-                        </a:rPr>
-                        <a:t>+0.30</a:t>
-                      </a:r>
-                    </a:p>
-                  </a:txBody>
-                  <a:tcPr marL="63500" marR="63500" marT="12700" marB="12700" anchor="ctr">
-                    <a:solidFill>
-                      <a:srgbClr val="F4F6F8"/>
-                    </a:solidFill>
-                  </a:tcPr>
-                </a:tc>
-                <a:tc>
-                  <a:txBody>
-                    <a:bodyPr/>
-                    <a:lstStyle/>
-                    <a:p>
-                      <a:pPr algn="ctr"/>
-                      <a:r>
-                        <a:rPr sz="1050" b="0" i="0">
-                          <a:solidFill>
-                            <a:srgbClr val="1F2A37"/>
-                          </a:solidFill>
-                          <a:latin typeface="Calibri"/>
-                        </a:rPr>
-                        <a:t>+0.14</a:t>
-                      </a:r>
-                    </a:p>
-                  </a:txBody>
-                  <a:tcPr marL="63500" marR="63500" marT="12700" marB="12700" anchor="ctr">
-                    <a:solidFill>
-                      <a:srgbClr val="F4F6F8"/>
-                    </a:solidFill>
-                  </a:tcPr>
-                </a:tc>
-              </a:tr>
-              <a:tr h="335280">
-                <a:tc>
-                  <a:txBody>
-                    <a:bodyPr/>
-                    <a:lstStyle/>
-                    <a:p>
-                      <a:pPr algn="l"/>
-                      <a:r>
-                        <a:rPr sz="1050" b="1" i="0">
-                          <a:solidFill>
-                            <a:srgbClr val="1F2A37"/>
-                          </a:solidFill>
-                          <a:latin typeface="Calibri"/>
-                        </a:rPr>
-                        <a:t>full + ibac:observe</a:t>
-                      </a:r>
-                    </a:p>
-                  </a:txBody>
-                  <a:tcPr marL="63500" marR="63500" marT="12700" marB="12700" anchor="ctr">
-                    <a:solidFill>
-                      <a:srgbClr val="FFFFFF"/>
-                    </a:solidFill>
-                  </a:tcPr>
-                </a:tc>
-                <a:tc>
-                  <a:txBody>
-                    <a:bodyPr/>
-                    <a:lstStyle/>
-                    <a:p>
-                      <a:pPr algn="ctr"/>
-                      <a:r>
-                        <a:rPr sz="1050" b="0" i="0">
-                          <a:solidFill>
-                            <a:srgbClr val="1F2A37"/>
-                          </a:solidFill>
-                          <a:latin typeface="Calibri"/>
-                        </a:rPr>
-                        <a:t>14.598</a:t>
-                      </a:r>
-                    </a:p>
-                  </a:txBody>
-                  <a:tcPr marL="63500" marR="63500" marT="12700" marB="12700" anchor="ctr">
-                    <a:solidFill>
-                      <a:srgbClr val="FFFFFF"/>
-                    </a:solidFill>
-                  </a:tcPr>
-                </a:tc>
-                <a:tc>
-                  <a:txBody>
-                    <a:bodyPr/>
-                    <a:lstStyle/>
-                    <a:p>
-                      <a:pPr algn="ctr"/>
-                      <a:r>
-                        <a:rPr sz="1050" b="0" i="0">
-                          <a:solidFill>
-                            <a:srgbClr val="1F2A37"/>
-                          </a:solidFill>
-                          <a:latin typeface="Calibri"/>
-                        </a:rPr>
-                        <a:t>1.826</a:t>
-                      </a:r>
-                    </a:p>
-                  </a:txBody>
-                  <a:tcPr marL="63500" marR="63500" marT="12700" marB="12700" anchor="ctr">
-                    <a:solidFill>
-                      <a:srgbClr val="FFFFFF"/>
-                    </a:solidFill>
-                  </a:tcPr>
-                </a:tc>
-                <a:tc>
-                  <a:txBody>
-                    <a:bodyPr/>
-                    <a:lstStyle/>
-                    <a:p>
-                      <a:pPr algn="ctr"/>
-                      <a:r>
-                        <a:rPr sz="1050" b="0" i="0">
-                          <a:solidFill>
-                            <a:srgbClr val="1F2A37"/>
-                          </a:solidFill>
-                          <a:latin typeface="Calibri"/>
-                        </a:rPr>
-                        <a:t>+0.15</a:t>
-                      </a:r>
-                    </a:p>
-                  </a:txBody>
-                  <a:tcPr marL="63500" marR="63500" marT="12700" marB="12700" anchor="ctr">
-                    <a:solidFill>
-                      <a:srgbClr val="FFFFFF"/>
-                    </a:solidFill>
-                  </a:tcPr>
-                </a:tc>
-                <a:tc>
-                  <a:txBody>
-                    <a:bodyPr/>
-                    <a:lstStyle/>
-                    <a:p>
-                      <a:pPr algn="ctr"/>
-                      <a:r>
-                        <a:rPr sz="1050" b="0" i="0">
-                          <a:solidFill>
-                            <a:srgbClr val="1F2A37"/>
-                          </a:solidFill>
-                          <a:latin typeface="Calibri"/>
-                        </a:rPr>
-                        <a:t>+0.00</a:t>
-                      </a:r>
-                    </a:p>
-                  </a:txBody>
-                  <a:tcPr marL="63500" marR="63500" marT="12700" marB="12700" anchor="ctr">
-                    <a:solidFill>
-                      <a:srgbClr val="FFFFFF"/>
-                    </a:solidFill>
-                  </a:tcPr>
-                </a:tc>
-              </a:tr>
-            </a:tbl>
-          </a:graphicData>
-        </a:graphic>
-      </p:graphicFrame>
-      <p:graphicFrame>
-        <p:nvGraphicFramePr>
-          <p:cNvPr id="4" name="Table 3"/>
-          <p:cNvGraphicFramePr>
-            <a:graphicFrameLocks noGrp="1"/>
-          </p:cNvGraphicFramePr>
-          <p:nvPr/>
-        </p:nvGraphicFramePr>
-        <p:xfrm>
-          <a:off x="411480" y="3456432"/>
-          <a:ext cx="5806440" cy="2331720"/>
-        </p:xfrm>
-        <a:graphic>
-          <a:graphicData uri="http://schemas.openxmlformats.org/drawingml/2006/table">
-            <a:tbl>
-              <a:tblPr firstRow="1">
-                <a:tableStyleId>{5C22544A-7EE6-4342-B048-85BDC9FD1C3A}</a:tableStyleId>
-              </a:tblPr>
-              <a:tblGrid>
-                <a:gridCol w="2240280"/>
-                <a:gridCol w="1280160"/>
-                <a:gridCol w="1188720"/>
-                <a:gridCol w="1097280"/>
-              </a:tblGrid>
-              <a:tr h="333102">
-                <a:tc>
-                  <a:txBody>
-                    <a:bodyPr/>
-                    <a:lstStyle/>
-                    <a:p>
-                      <a:pPr algn="l"/>
-                      <a:r>
-                        <a:rPr sz="1050" b="1" i="0">
-                          <a:solidFill>
-                            <a:srgbClr val="FFFFFF"/>
-                          </a:solidFill>
-                          <a:latin typeface="Calibri"/>
-                        </a:rPr>
-                        <a:t>does the finding travel?</a:t>
-                      </a:r>
-                    </a:p>
-                  </a:txBody>
-                  <a:tcPr marL="63500" marR="63500" marT="12700" marB="12700" anchor="ctr">
-                    <a:solidFill>
-                      <a:srgbClr val="1B3A5C"/>
-                    </a:solidFill>
-                  </a:tcPr>
-                </a:tc>
-                <a:tc>
-                  <a:txBody>
-                    <a:bodyPr/>
-                    <a:lstStyle/>
-                    <a:p>
-                      <a:pPr algn="ctr"/>
-                      <a:r>
-                        <a:rPr sz="1050" b="1" i="0">
-                          <a:solidFill>
-                            <a:srgbClr val="FFFFFF"/>
-                          </a:solidFill>
-                          <a:latin typeface="Calibri"/>
-                        </a:rPr>
-                        <a:t>OpenShift</a:t>
-                      </a:r>
-                    </a:p>
-                  </a:txBody>
-                  <a:tcPr marL="63500" marR="63500" marT="12700" marB="12700" anchor="ctr">
-                    <a:solidFill>
-                      <a:srgbClr val="1B3A5C"/>
-                    </a:solidFill>
-                  </a:tcPr>
-                </a:tc>
-                <a:tc>
-                  <a:txBody>
-                    <a:bodyPr/>
-                    <a:lstStyle/>
-                    <a:p>
-                      <a:pPr algn="ctr"/>
-                      <a:r>
-                        <a:rPr sz="1050" b="1" i="0">
-                          <a:solidFill>
-                            <a:srgbClr val="FFFFFF"/>
-                          </a:solidFill>
-                          <a:latin typeface="Calibri"/>
-                        </a:rPr>
-                        <a:t>KinD</a:t>
-                      </a:r>
-                    </a:p>
-                  </a:txBody>
-                  <a:tcPr marL="63500" marR="63500" marT="12700" marB="12700" anchor="ctr">
-                    <a:solidFill>
-                      <a:srgbClr val="1B3A5C"/>
-                    </a:solidFill>
-                  </a:tcPr>
-                </a:tc>
-                <a:tc>
-                  <a:txBody>
-                    <a:bodyPr/>
-                    <a:lstStyle/>
-                    <a:p>
-                      <a:pPr algn="ctr"/>
-                      <a:r>
-                        <a:rPr sz="1050" b="1" i="0">
-                          <a:solidFill>
-                            <a:srgbClr val="FFFFFF"/>
-                          </a:solidFill>
-                          <a:latin typeface="Calibri"/>
-                        </a:rPr>
-                        <a:t>travels?</a:t>
-                      </a:r>
-                    </a:p>
-                  </a:txBody>
-                  <a:tcPr marL="63500" marR="63500" marT="12700" marB="12700" anchor="ctr">
-                    <a:solidFill>
-                      <a:srgbClr val="1B3A5C"/>
-                    </a:solidFill>
-                  </a:tcPr>
-                </a:tc>
-              </a:tr>
-              <a:tr h="333102">
-                <a:tc>
-                  <a:txBody>
-                    <a:bodyPr/>
-                    <a:lstStyle/>
-                    <a:p>
-                      <a:pPr algn="l"/>
-                      <a:r>
-                        <a:rPr sz="1050" b="1" i="0">
-                          <a:solidFill>
-                            <a:srgbClr val="1F2A37"/>
-                          </a:solidFill>
-                          <a:latin typeface="Calibri"/>
-                        </a:rPr>
-                        <a:t>Which layer costs anything</a:t>
-                      </a:r>
-                    </a:p>
-                  </a:txBody>
-                  <a:tcPr marL="63500" marR="63500" marT="12700" marB="12700" anchor="ctr">
-                    <a:solidFill>
-                      <a:srgbClr val="FFFFFF"/>
-                    </a:solidFill>
-                  </a:tcPr>
-                </a:tc>
-                <a:tc>
-                  <a:txBody>
-                    <a:bodyPr/>
-                    <a:lstStyle/>
-                    <a:p>
-                      <a:pPr algn="ctr"/>
-                      <a:r>
-                        <a:rPr sz="1050" b="0" i="0">
-                          <a:solidFill>
-                            <a:srgbClr val="1F2A37"/>
-                          </a:solidFill>
-                          <a:latin typeface="Calibri"/>
-                        </a:rPr>
-                        <a:t>the sidecar</a:t>
-                      </a:r>
-                    </a:p>
-                  </a:txBody>
-                  <a:tcPr marL="63500" marR="63500" marT="12700" marB="12700" anchor="ctr">
-                    <a:solidFill>
-                      <a:srgbClr val="FFFFFF"/>
-                    </a:solidFill>
-                  </a:tcPr>
-                </a:tc>
-                <a:tc>
-                  <a:txBody>
-                    <a:bodyPr/>
-                    <a:lstStyle/>
-                    <a:p>
-                      <a:pPr algn="ctr"/>
-                      <a:r>
-                        <a:rPr sz="1050" b="0" i="0">
-                          <a:solidFill>
-                            <a:srgbClr val="1F2A37"/>
-                          </a:solidFill>
-                          <a:latin typeface="Calibri"/>
-                        </a:rPr>
-                        <a:t>the judge</a:t>
-                      </a:r>
-                    </a:p>
-                  </a:txBody>
-                  <a:tcPr marL="63500" marR="63500" marT="12700" marB="12700" anchor="ctr">
-                    <a:solidFill>
-                      <a:srgbClr val="FFFFFF"/>
-                    </a:solidFill>
-                  </a:tcPr>
-                </a:tc>
-                <a:tc>
-                  <a:txBody>
-                    <a:bodyPr/>
-                    <a:lstStyle/>
-                    <a:p>
-                      <a:pPr algn="ctr"/>
-                      <a:r>
-                        <a:rPr sz="1050" b="0" i="0">
-                          <a:solidFill>
-                            <a:srgbClr val="1F2A37"/>
-                          </a:solidFill>
-                          <a:latin typeface="Calibri"/>
-                        </a:rPr>
-                        <a:t>NO</a:t>
-                      </a:r>
-                    </a:p>
-                  </a:txBody>
-                  <a:tcPr marL="63500" marR="63500" marT="12700" marB="12700" anchor="ctr">
-                    <a:solidFill>
-                      <a:srgbClr val="FFFFFF"/>
-                    </a:solidFill>
-                  </a:tcPr>
-                </a:tc>
-              </a:tr>
-              <a:tr h="333102">
-                <a:tc>
-                  <a:txBody>
-                    <a:bodyPr/>
-                    <a:lstStyle/>
-                    <a:p>
-                      <a:pPr algn="l"/>
-                      <a:r>
-                        <a:rPr sz="1050" b="1" i="0">
-                          <a:solidFill>
-                            <a:srgbClr val="1F2A37"/>
-                          </a:solidFill>
-                          <a:latin typeface="Calibri"/>
-                        </a:rPr>
-                        <a:t>Serial tool calls judged (p=1)</a:t>
-                      </a:r>
-                    </a:p>
-                  </a:txBody>
-                  <a:tcPr marL="63500" marR="63500" marT="12700" marB="12700" anchor="ctr">
-                    <a:solidFill>
-                      <a:srgbClr val="F4F6F8"/>
-                    </a:solidFill>
-                  </a:tcPr>
-                </a:tc>
-                <a:tc>
-                  <a:txBody>
-                    <a:bodyPr/>
-                    <a:lstStyle/>
-                    <a:p>
-                      <a:pPr algn="ctr"/>
-                      <a:r>
-                        <a:rPr sz="1050" b="0" i="0">
-                          <a:solidFill>
-                            <a:srgbClr val="1F2A37"/>
-                          </a:solidFill>
-                          <a:latin typeface="Calibri"/>
-                        </a:rPr>
-                        <a:t>10 / 10</a:t>
-                      </a:r>
-                    </a:p>
-                  </a:txBody>
-                  <a:tcPr marL="63500" marR="63500" marT="12700" marB="12700" anchor="ctr">
-                    <a:solidFill>
-                      <a:srgbClr val="F4F6F8"/>
-                    </a:solidFill>
-                  </a:tcPr>
-                </a:tc>
-                <a:tc>
-                  <a:txBody>
-                    <a:bodyPr/>
-                    <a:lstStyle/>
-                    <a:p>
-                      <a:pPr algn="ctr"/>
-                      <a:r>
-                        <a:rPr sz="1050" b="0" i="0">
-                          <a:solidFill>
-                            <a:srgbClr val="1F2A37"/>
-                          </a:solidFill>
-                          <a:latin typeface="Calibri"/>
-                        </a:rPr>
-                        <a:t>10 / 10</a:t>
-                      </a:r>
-                    </a:p>
-                  </a:txBody>
-                  <a:tcPr marL="63500" marR="63500" marT="12700" marB="12700" anchor="ctr">
-                    <a:solidFill>
-                      <a:srgbClr val="F4F6F8"/>
-                    </a:solidFill>
-                  </a:tcPr>
-                </a:tc>
-                <a:tc>
-                  <a:txBody>
-                    <a:bodyPr/>
-                    <a:lstStyle/>
-                    <a:p>
-                      <a:pPr algn="ctr"/>
-                      <a:r>
-                        <a:rPr sz="1050" b="0" i="0">
-                          <a:solidFill>
-                            <a:srgbClr val="1F2A37"/>
-                          </a:solidFill>
-                          <a:latin typeface="Calibri"/>
-                        </a:rPr>
-                        <a:t>YES</a:t>
-                      </a:r>
-                    </a:p>
-                  </a:txBody>
-                  <a:tcPr marL="63500" marR="63500" marT="12700" marB="12700" anchor="ctr">
-                    <a:solidFill>
-                      <a:srgbClr val="F4F6F8"/>
-                    </a:solidFill>
-                  </a:tcPr>
-                </a:tc>
-              </a:tr>
-              <a:tr h="333102">
-                <a:tc>
-                  <a:txBody>
-                    <a:bodyPr/>
-                    <a:lstStyle/>
-                    <a:p>
-                      <a:pPr algn="l"/>
-                      <a:r>
-                        <a:rPr sz="1050" b="1" i="0">
-                          <a:solidFill>
-                            <a:srgbClr val="1F2A37"/>
-                          </a:solidFill>
-                          <a:latin typeface="Calibri"/>
-                        </a:rPr>
-                        <a:t>Judged / tool-call ratio, n=50</a:t>
-                      </a:r>
-                    </a:p>
-                  </a:txBody>
-                  <a:tcPr marL="63500" marR="63500" marT="12700" marB="12700" anchor="ctr">
-                    <a:solidFill>
-                      <a:srgbClr val="FFFFFF"/>
-                    </a:solidFill>
-                  </a:tcPr>
-                </a:tc>
-                <a:tc>
-                  <a:txBody>
-                    <a:bodyPr/>
-                    <a:lstStyle/>
-                    <a:p>
-                      <a:pPr algn="ctr"/>
-                      <a:r>
-                        <a:rPr sz="1050" b="0" i="0">
-                          <a:solidFill>
-                            <a:srgbClr val="1F2A37"/>
-                          </a:solidFill>
-                          <a:latin typeface="Calibri"/>
-                        </a:rPr>
-                        <a:t>0.90–0.98</a:t>
-                      </a:r>
-                    </a:p>
-                  </a:txBody>
-                  <a:tcPr marL="63500" marR="63500" marT="12700" marB="12700" anchor="ctr">
-                    <a:solidFill>
-                      <a:srgbClr val="FFFFFF"/>
-                    </a:solidFill>
-                  </a:tcPr>
-                </a:tc>
-                <a:tc>
-                  <a:txBody>
-                    <a:bodyPr/>
-                    <a:lstStyle/>
-                    <a:p>
-                      <a:pPr algn="ctr"/>
-                      <a:r>
-                        <a:rPr sz="1050" b="0" i="0">
-                          <a:solidFill>
-                            <a:srgbClr val="1F2A37"/>
-                          </a:solidFill>
-                          <a:latin typeface="Calibri"/>
-                        </a:rPr>
-                        <a:t>0.90–0.98</a:t>
-                      </a:r>
-                    </a:p>
-                  </a:txBody>
-                  <a:tcPr marL="63500" marR="63500" marT="12700" marB="12700" anchor="ctr">
-                    <a:solidFill>
-                      <a:srgbClr val="FFFFFF"/>
-                    </a:solidFill>
-                  </a:tcPr>
-                </a:tc>
-                <a:tc>
-                  <a:txBody>
-                    <a:bodyPr/>
-                    <a:lstStyle/>
-                    <a:p>
-                      <a:pPr algn="ctr"/>
-                      <a:r>
-                        <a:rPr sz="1050" b="0" i="0">
-                          <a:solidFill>
-                            <a:srgbClr val="1F2A37"/>
-                          </a:solidFill>
-                          <a:latin typeface="Calibri"/>
-                        </a:rPr>
-                        <a:t>YES</a:t>
-                      </a:r>
-                    </a:p>
-                  </a:txBody>
-                  <a:tcPr marL="63500" marR="63500" marT="12700" marB="12700" anchor="ctr">
-                    <a:solidFill>
-                      <a:srgbClr val="FFFFFF"/>
-                    </a:solidFill>
-                  </a:tcPr>
-                </a:tc>
-              </a:tr>
-              <a:tr h="333102">
-                <a:tc>
-                  <a:txBody>
-                    <a:bodyPr/>
-                    <a:lstStyle/>
-                    <a:p>
-                      <a:pPr algn="l"/>
-                      <a:r>
-                        <a:rPr sz="1050" b="1" i="0">
-                          <a:solidFill>
-                            <a:srgbClr val="1F2A37"/>
-                          </a:solidFill>
-                          <a:latin typeface="Calibri"/>
-                        </a:rPr>
-                        <a:t>tau2 measured / projected</a:t>
-                      </a:r>
-                    </a:p>
-                  </a:txBody>
-                  <a:tcPr marL="63500" marR="63500" marT="12700" marB="12700" anchor="ctr">
-                    <a:solidFill>
-                      <a:srgbClr val="F4F6F8"/>
-                    </a:solidFill>
-                  </a:tcPr>
-                </a:tc>
-                <a:tc>
-                  <a:txBody>
-                    <a:bodyPr/>
-                    <a:lstStyle/>
-                    <a:p>
-                      <a:pPr algn="ctr"/>
-                      <a:r>
-                        <a:rPr sz="1050" b="0" i="0">
-                          <a:solidFill>
-                            <a:srgbClr val="1F2A37"/>
-                          </a:solidFill>
-                          <a:latin typeface="Calibri"/>
-                        </a:rPr>
-                        <a:t>0.31x</a:t>
-                      </a:r>
-                    </a:p>
-                  </a:txBody>
-                  <a:tcPr marL="63500" marR="63500" marT="12700" marB="12700" anchor="ctr">
-                    <a:solidFill>
-                      <a:srgbClr val="F4F6F8"/>
-                    </a:solidFill>
-                  </a:tcPr>
-                </a:tc>
-                <a:tc>
-                  <a:txBody>
-                    <a:bodyPr/>
-                    <a:lstStyle/>
-                    <a:p>
-                      <a:pPr algn="ctr"/>
-                      <a:r>
-                        <a:rPr sz="1050" b="0" i="0">
-                          <a:solidFill>
-                            <a:srgbClr val="1F2A37"/>
-                          </a:solidFill>
-                          <a:latin typeface="Calibri"/>
-                        </a:rPr>
-                        <a:t>2.49x</a:t>
-                      </a:r>
-                    </a:p>
-                  </a:txBody>
-                  <a:tcPr marL="63500" marR="63500" marT="12700" marB="12700" anchor="ctr">
-                    <a:solidFill>
-                      <a:srgbClr val="F4F6F8"/>
-                    </a:solidFill>
-                  </a:tcPr>
-                </a:tc>
-                <a:tc>
-                  <a:txBody>
-                    <a:bodyPr/>
-                    <a:lstStyle/>
-                    <a:p>
-                      <a:pPr algn="ctr"/>
-                      <a:r>
-                        <a:rPr sz="1050" b="0" i="0">
-                          <a:solidFill>
-                            <a:srgbClr val="1F2A37"/>
-                          </a:solidFill>
-                          <a:latin typeface="Calibri"/>
-                        </a:rPr>
-                        <a:t>NO</a:t>
-                      </a:r>
-                    </a:p>
-                  </a:txBody>
-                  <a:tcPr marL="63500" marR="63500" marT="12700" marB="12700" anchor="ctr">
-                    <a:solidFill>
-                      <a:srgbClr val="F4F6F8"/>
-                    </a:solidFill>
-                  </a:tcPr>
-                </a:tc>
-              </a:tr>
-              <a:tr h="333102">
-                <a:tc>
-                  <a:txBody>
-                    <a:bodyPr/>
-                    <a:lstStyle/>
-                    <a:p>
-                      <a:pPr algn="l"/>
-                      <a:r>
-                        <a:rPr sz="1050" b="1" i="0">
-                          <a:solidFill>
-                            <a:srgbClr val="1F2A37"/>
-                          </a:solidFill>
-                          <a:latin typeface="Calibri"/>
-                        </a:rPr>
-                        <a:t>Between-deploy noise floor</a:t>
-                      </a:r>
-                    </a:p>
-                  </a:txBody>
-                  <a:tcPr marL="63500" marR="63500" marT="12700" marB="12700" anchor="ctr">
-                    <a:solidFill>
-                      <a:srgbClr val="FFFFFF"/>
-                    </a:solidFill>
-                  </a:tcPr>
-                </a:tc>
-                <a:tc>
-                  <a:txBody>
-                    <a:bodyPr/>
-                    <a:lstStyle/>
-                    <a:p>
-                      <a:pPr algn="ctr"/>
-                      <a:r>
-                        <a:rPr sz="1050" b="0" i="0">
-                          <a:solidFill>
-                            <a:srgbClr val="1F2A37"/>
-                          </a:solidFill>
-                          <a:latin typeface="Calibri"/>
-                        </a:rPr>
-                        <a:t>0.22 s</a:t>
-                      </a:r>
-                    </a:p>
-                  </a:txBody>
-                  <a:tcPr marL="63500" marR="63500" marT="12700" marB="12700" anchor="ctr">
-                    <a:solidFill>
-                      <a:srgbClr val="FFFFFF"/>
-                    </a:solidFill>
-                  </a:tcPr>
-                </a:tc>
-                <a:tc>
-                  <a:txBody>
-                    <a:bodyPr/>
-                    <a:lstStyle/>
-                    <a:p>
-                      <a:pPr algn="ctr"/>
-                      <a:r>
-                        <a:rPr sz="1050" b="0" i="0">
-                          <a:solidFill>
-                            <a:srgbClr val="1F2A37"/>
-                          </a:solidFill>
-                          <a:latin typeface="Calibri"/>
-                        </a:rPr>
-                        <a:t>0.155 s</a:t>
-                      </a:r>
-                    </a:p>
-                  </a:txBody>
-                  <a:tcPr marL="63500" marR="63500" marT="12700" marB="12700" anchor="ctr">
-                    <a:solidFill>
-                      <a:srgbClr val="FFFFFF"/>
-                    </a:solidFill>
-                  </a:tcPr>
-                </a:tc>
-                <a:tc>
-                  <a:txBody>
-                    <a:bodyPr/>
-                    <a:lstStyle/>
-                    <a:p>
-                      <a:pPr algn="ctr"/>
-                      <a:r>
-                        <a:rPr sz="1050" b="0" i="0">
-                          <a:solidFill>
-                            <a:srgbClr val="1F2A37"/>
-                          </a:solidFill>
-                          <a:latin typeface="Calibri"/>
-                        </a:rPr>
-                        <a:t>YES</a:t>
-                      </a:r>
-                    </a:p>
-                  </a:txBody>
-                  <a:tcPr marL="63500" marR="63500" marT="12700" marB="12700" anchor="ctr">
-                    <a:solidFill>
-                      <a:srgbClr val="FFFFFF"/>
-                    </a:solidFill>
-                  </a:tcPr>
-                </a:tc>
-              </a:tr>
-              <a:tr h="333108">
-                <a:tc>
-                  <a:txBody>
-                    <a:bodyPr/>
-                    <a:lstStyle/>
-                    <a:p>
-                      <a:pPr algn="l"/>
-                      <a:r>
-                        <a:rPr sz="1050" b="1" i="0">
-                          <a:solidFill>
-                            <a:srgbClr val="1F2A37"/>
-                          </a:solidFill>
-                          <a:latin typeface="Calibri"/>
-                        </a:rPr>
-                        <a:t>Sidecar CPU / memory</a:t>
-                      </a:r>
-                    </a:p>
-                  </a:txBody>
-                  <a:tcPr marL="63500" marR="63500" marT="12700" marB="12700" anchor="ctr">
-                    <a:solidFill>
-                      <a:srgbClr val="F4F6F8"/>
-                    </a:solidFill>
-                  </a:tcPr>
-                </a:tc>
-                <a:tc>
-                  <a:txBody>
-                    <a:bodyPr/>
-                    <a:lstStyle/>
-                    <a:p>
-                      <a:pPr algn="ctr"/>
-                      <a:r>
-                        <a:rPr sz="1050" b="0" i="0">
-                          <a:solidFill>
-                            <a:srgbClr val="1F2A37"/>
-                          </a:solidFill>
-                          <a:latin typeface="Calibri"/>
-                        </a:rPr>
-                        <a:t>no data</a:t>
-                      </a:r>
-                    </a:p>
-                  </a:txBody>
-                  <a:tcPr marL="63500" marR="63500" marT="12700" marB="12700" anchor="ctr">
-                    <a:solidFill>
-                      <a:srgbClr val="F4F6F8"/>
-                    </a:solidFill>
-                  </a:tcPr>
-                </a:tc>
-                <a:tc>
-                  <a:txBody>
-                    <a:bodyPr/>
-                    <a:lstStyle/>
-                    <a:p>
-                      <a:pPr algn="ctr"/>
-                      <a:r>
-                        <a:rPr sz="1050" b="0" i="0">
-                          <a:solidFill>
-                            <a:srgbClr val="1F2A37"/>
-                          </a:solidFill>
-                          <a:latin typeface="Calibri"/>
-                        </a:rPr>
-                        <a:t>no data</a:t>
-                      </a:r>
-                    </a:p>
-                  </a:txBody>
-                  <a:tcPr marL="63500" marR="63500" marT="12700" marB="12700" anchor="ctr">
-                    <a:solidFill>
-                      <a:srgbClr val="F4F6F8"/>
-                    </a:solidFill>
-                  </a:tcPr>
-                </a:tc>
-                <a:tc>
-                  <a:txBody>
-                    <a:bodyPr/>
-                    <a:lstStyle/>
-                    <a:p>
-                      <a:pPr algn="ctr"/>
-                      <a:r>
-                        <a:rPr sz="1050" b="0" i="0">
-                          <a:solidFill>
-                            <a:srgbClr val="1F2A37"/>
-                          </a:solidFill>
-                          <a:latin typeface="Calibri"/>
-                        </a:rPr>
-                        <a:t>—</a:t>
-                      </a:r>
-                    </a:p>
-                  </a:txBody>
-                  <a:tcPr marL="63500" marR="63500" marT="12700" marB="12700" anchor="ctr">
-                    <a:solidFill>
-                      <a:srgbClr val="F4F6F8"/>
-                    </a:solidFill>
-                  </a:tcPr>
-                </a:tc>
-              </a:tr>
-            </a:tbl>
-          </a:graphicData>
-        </a:graphic>
-      </p:graphicFrame>
-      <p:sp>
-        <p:nvSpPr>
-          <p:cNvPr id="5" name="Rounded Rectangle 4"/>
-          <p:cNvSpPr/>
-          <p:nvPr/>
-        </p:nvSpPr>
-        <p:spPr>
-          <a:xfrm>
-            <a:off x="6446520" y="1188720"/>
-            <a:ext cx="5303520" cy="1298448"/>
-          </a:xfrm>
-          <a:prstGeom prst="roundRect">
-            <a:avLst/>
-          </a:prstGeom>
-          <a:solidFill>
-            <a:srgbClr val="F1E8F6"/>
-          </a:solidFill>
-          <a:ln w="12700">
-            <a:solidFill>
-              <a:srgbClr val="8E44AD"/>
-            </a:solidFill>
-          </a:ln>
-          <a:effectLst/>
-        </p:spPr>
-        <p:style>
-          <a:lnRef idx="1">
-            <a:schemeClr val="accent1"/>
-          </a:lnRef>
-          <a:fillRef idx="3">
-            <a:schemeClr val="accent1"/>
-          </a:fillRef>
-          <a:effectRef idx="2">
-            <a:schemeClr val="accent1"/>
-          </a:effectRef>
-          <a:fontRef idx="minor">
-            <a:schemeClr val="lt1"/>
-          </a:fontRef>
-        </p:style>
-        <p:txBody>
-          <a:bodyPr rtlCol="0" anchor="t" wrap="square" tIns="63500" bIns="25400" lIns="127000"/>
-          <a:lstStyle/>
-          <a:p>
-            <a:pPr algn="l"/>
-            <a:r>
-              <a:rPr sz="1150" b="1" i="0">
-                <a:solidFill>
-                  <a:srgbClr val="1F2A37"/>
-                </a:solidFill>
-                <a:latin typeface="Calibri"/>
-              </a:rPr>
-              <a:t>The two clusters disagree about WHICH layer costs anything</a:t>
-            </a:r>
-          </a:p>
-          <a:p>
-            <a:pPr algn="l"/>
-            <a:r>
-              <a:rPr sz="950" b="0" i="0">
-                <a:solidFill>
-                  <a:srgbClr val="3A4654"/>
-                </a:solidFill>
-                <a:latin typeface="Calibri"/>
-              </a:rPr>
-              <a:t>On OpenShift the whole expense is the sidecar's mere presence and the judge is noise; on KinD the sidecar is nearly free and the judge is all of it. Both are right about their own cluster, and the same condition on the same image measures 4–93x apart. Never quote an absolute per-task plugin figure without naming the cluster.</a:t>
-            </a:r>
-          </a:p>
-        </p:txBody>
-      </p:sp>
-      <p:sp>
-        <p:nvSpPr>
-          <p:cNvPr id="6" name="Rounded Rectangle 5"/>
-          <p:cNvSpPr/>
-          <p:nvPr/>
-        </p:nvSpPr>
-        <p:spPr>
-          <a:xfrm>
-            <a:off x="6446520" y="2523744"/>
-            <a:ext cx="5303520" cy="1298448"/>
-          </a:xfrm>
-          <a:prstGeom prst="roundRect">
-            <a:avLst/>
-          </a:prstGeom>
-          <a:solidFill>
-            <a:srgbClr val="F1E8F6"/>
-          </a:solidFill>
-          <a:ln w="12700">
-            <a:solidFill>
-              <a:srgbClr val="8E44AD"/>
-            </a:solidFill>
-          </a:ln>
-          <a:effectLst/>
-        </p:spPr>
-        <p:style>
-          <a:lnRef idx="1">
-            <a:schemeClr val="accent1"/>
-          </a:lnRef>
-          <a:fillRef idx="3">
-            <a:schemeClr val="accent1"/>
-          </a:fillRef>
-          <a:effectRef idx="2">
-            <a:schemeClr val="accent1"/>
-          </a:effectRef>
-          <a:fontRef idx="minor">
-            <a:schemeClr val="lt1"/>
-          </a:fontRef>
-        </p:style>
-        <p:txBody>
-          <a:bodyPr rtlCol="0" anchor="t" wrap="square" tIns="63500" bIns="25400" lIns="127000"/>
-          <a:lstStyle/>
-          <a:p>
-            <a:pPr algn="l"/>
-            <a:r>
-              <a:rPr sz="1150" b="1" i="0">
-                <a:solidFill>
-                  <a:srgbClr val="1F2A37"/>
-                </a:solidFill>
-                <a:latin typeface="Calibri"/>
-              </a:rPr>
-              <a:t>Not a timeout — we checked</a:t>
-            </a:r>
-          </a:p>
-          <a:p>
-            <a:pPr algn="l"/>
-            <a:r>
-              <a:rPr sz="950" b="0" i="0">
-                <a:solidFill>
-                  <a:srgbClr val="3A4654"/>
-                </a:solidFill>
-                <a:latin typeface="Calibri"/>
-              </a:rPr>
-              <a:t>A timeout piles values on a round number. OpenShift's auth-only runs 8.05–17.93 s, SD 1.92, broad and unimodal: contention and queueing. On the quiet cluster the tail moves to full (median 1.82 s, max 14.00 s) because the judge is itself an LLM call — so the sidecar costs reproducibility, not only latency.</a:t>
-            </a:r>
-          </a:p>
-        </p:txBody>
-      </p:sp>
-      <p:sp>
-        <p:nvSpPr>
-          <p:cNvPr id="7" name="Rounded Rectangle 6"/>
-          <p:cNvSpPr/>
-          <p:nvPr/>
-        </p:nvSpPr>
-        <p:spPr>
-          <a:xfrm>
-            <a:off x="6446520" y="3858768"/>
-            <a:ext cx="5303520" cy="1298448"/>
-          </a:xfrm>
-          <a:prstGeom prst="roundRect">
-            <a:avLst/>
-          </a:prstGeom>
-          <a:solidFill>
-            <a:srgbClr val="F1E8F6"/>
-          </a:solidFill>
-          <a:ln w="12700">
-            <a:solidFill>
-              <a:srgbClr val="8E44AD"/>
-            </a:solidFill>
-          </a:ln>
-          <a:effectLst/>
-        </p:spPr>
-        <p:style>
-          <a:lnRef idx="1">
-            <a:schemeClr val="accent1"/>
-          </a:lnRef>
-          <a:fillRef idx="3">
-            <a:schemeClr val="accent1"/>
-          </a:fillRef>
-          <a:effectRef idx="2">
-            <a:schemeClr val="accent1"/>
-          </a:effectRef>
-          <a:fontRef idx="minor">
-            <a:schemeClr val="lt1"/>
-          </a:fontRef>
-        </p:style>
-        <p:txBody>
-          <a:bodyPr rtlCol="0" anchor="t" wrap="square" tIns="63500" bIns="25400" lIns="127000"/>
-          <a:lstStyle/>
-          <a:p>
-            <a:pPr algn="l"/>
-            <a:r>
-              <a:rPr sz="1150" b="1" i="0">
-                <a:solidFill>
-                  <a:srgbClr val="1F2A37"/>
-                </a:solidFill>
-                <a:latin typeface="Calibri"/>
-              </a:rPr>
-              <a:t>One flag decides whether the study measures anything</a:t>
-            </a:r>
-          </a:p>
-          <a:p>
-            <a:pPr algn="l"/>
-            <a:r>
-              <a:rPr sz="950" b="0" i="0">
-                <a:solidFill>
-                  <a:srgbClr val="3A4654"/>
-                </a:solidFill>
-                <a:latin typeface="Calibri"/>
-              </a:rPr>
-              <a:t>Every gsm8k leg sends the SAME 50 prompts and the gateway replays completions for ~10 min: unspaced, later legs measure the cache, in run order — the shape of a plugin effect. BM_CACHE_GAP=900 spaces them. The check needs no statistics: the conditions NEST, so no sidecar leg can beat a sidecar-free one. Clear by 41.8x (OCP), 1.4x (KinD).</a:t>
-            </a:r>
-          </a:p>
-        </p:txBody>
-      </p:sp>
-      <p:sp>
-        <p:nvSpPr>
-          <p:cNvPr id="8" name="Rounded Rectangle 7"/>
-          <p:cNvSpPr/>
-          <p:nvPr/>
-        </p:nvSpPr>
-        <p:spPr>
-          <a:xfrm>
-            <a:off x="6446520" y="5193792"/>
-            <a:ext cx="5303520" cy="1298448"/>
-          </a:xfrm>
-          <a:prstGeom prst="roundRect">
-            <a:avLst/>
-          </a:prstGeom>
-          <a:solidFill>
-            <a:srgbClr val="F1E8F6"/>
-          </a:solidFill>
-          <a:ln w="12700">
-            <a:solidFill>
-              <a:srgbClr val="8E44AD"/>
-            </a:solidFill>
-          </a:ln>
-          <a:effectLst/>
-        </p:spPr>
-        <p:style>
-          <a:lnRef idx="1">
-            <a:schemeClr val="accent1"/>
-          </a:lnRef>
-          <a:fillRef idx="3">
-            <a:schemeClr val="accent1"/>
-          </a:fillRef>
-          <a:effectRef idx="2">
-            <a:schemeClr val="accent1"/>
-          </a:effectRef>
-          <a:fontRef idx="minor">
-            <a:schemeClr val="lt1"/>
-          </a:fontRef>
-        </p:style>
-        <p:txBody>
-          <a:bodyPr rtlCol="0" anchor="t" wrap="square" tIns="63500" bIns="25400" lIns="127000"/>
-          <a:lstStyle/>
-          <a:p>
-            <a:pPr algn="l"/>
-            <a:r>
-              <a:rPr sz="1150" b="1" i="0">
-                <a:solidFill>
-                  <a:srgbClr val="1F2A37"/>
-                </a:solidFill>
-                <a:latin typeface="Calibri"/>
-              </a:rPr>
-              <a:t>The deploy is the unit of replication, not the task</a:t>
-            </a:r>
-          </a:p>
-          <a:p>
-            <a:pPr algn="l"/>
-            <a:r>
-              <a:rPr sz="950" b="0" i="0">
-                <a:solidFill>
-                  <a:srgbClr val="3A4654"/>
-                </a:solidFill>
-                <a:latin typeface="Calibri"/>
-              </a:rPr>
-              <a:t>A per-task interval measures variance WITHIN one deploy. The honest floor is between two deploys of one condition, and it exceeds every step but the dominant layer — so presets cannot be RANKED at any task count; add deploys, not tasks. Cut the other way: at σ ≈ 0.23 s two deploys already resolve a 1 s effect, so the small steps are genuinely small rather than unresolved.</a:t>
             </a:r>
           </a:p>
         </p:txBody>
@@ -19489,7 +19667,7 @@
                 </a:solidFill>
                 <a:latin typeface="Calibri"/>
               </a:rPr>
-              <a:t>7.1 the ladder · 7.2 what each stresses · 7.3 the traps · 7.4 picking one · 7.5 what it costs</a:t>
+              <a:t>7.1 the ladder · 7.2 what each stresses · 7.3 the traps · 7.4 picking one · 7.5 what it costs · 7.6 the rate card</a:t>
             </a:r>
           </a:p>
         </p:txBody>
@@ -19977,6 +20155,1812 @@
 </file>
 
 <file path=ppt/slides/slide20.xml><?xml version="1.0" encoding="utf-8"?>
+<p:sld xmlns:a="http://schemas.openxmlformats.org/drawingml/2006/main" xmlns:p="http://schemas.openxmlformats.org/presentationml/2006/main" xmlns:r="http://schemas.openxmlformats.org/officeDocument/2006/relationships">
+  <p:cSld name="9.2 What AuthBridge Costs — and Why It Has No Single Number">
+    <p:spTree>
+      <p:nvGrpSpPr>
+        <p:cNvPr id="1" name=""/>
+        <p:cNvGrpSpPr/>
+        <p:nvPr/>
+      </p:nvGrpSpPr>
+      <p:grpSpPr/>
+      <p:sp>
+        <p:nvSpPr>
+          <p:cNvPr id="2" name="Rectangle 1"/>
+          <p:cNvSpPr/>
+          <p:nvPr/>
+        </p:nvSpPr>
+        <p:spPr>
+          <a:xfrm>
+            <a:off x="0" y="0"/>
+            <a:ext cx="12192000" cy="950000"/>
+          </a:xfrm>
+          <a:prstGeom prst="rect">
+            <a:avLst/>
+          </a:prstGeom>
+          <a:solidFill>
+            <a:srgbClr val="1B3A5C"/>
+          </a:solidFill>
+          <a:ln>
+            <a:noFill/>
+          </a:ln>
+          <a:effectLst/>
+        </p:spPr>
+        <p:style>
+          <a:lnRef idx="1">
+            <a:schemeClr val="accent1"/>
+          </a:lnRef>
+          <a:fillRef idx="3">
+            <a:schemeClr val="accent1"/>
+          </a:fillRef>
+          <a:effectRef idx="2">
+            <a:schemeClr val="accent1"/>
+          </a:effectRef>
+          <a:fontRef idx="minor">
+            <a:schemeClr val="lt1"/>
+          </a:fontRef>
+        </p:style>
+        <p:txBody>
+          <a:bodyPr rtlCol="0" anchor="ctr" lIns="355600"/>
+          <a:lstStyle/>
+          <a:p>
+            <a:pPr algn="ctr"/>
+            <a:r>
+              <a:rPr sz="2600" b="1" i="0">
+                <a:solidFill>
+                  <a:srgbClr val="FFFFFF"/>
+                </a:solidFill>
+                <a:latin typeface="Calibri"/>
+              </a:rPr>
+              <a:t>9.2  What AuthBridge Costs — and Why It Has No Single Number</a:t>
+            </a:r>
+          </a:p>
+          <a:p>
+            <a:r>
+              <a:rPr sz="1400" b="0" i="0">
+                <a:solidFill>
+                  <a:srgbClr val="C9D9EC"/>
+                </a:solidFill>
+                <a:latin typeface="Calibri"/>
+              </a:rPr>
+              <a:t>The designed 13-leg experiment (n=50, crossover replicates, gateway cache spaced), v1.28</a:t>
+            </a:r>
+          </a:p>
+        </p:txBody>
+      </p:sp>
+      <p:graphicFrame>
+        <p:nvGraphicFramePr>
+          <p:cNvPr id="3" name="Table 2"/>
+          <p:cNvGraphicFramePr>
+            <a:graphicFrameLocks noGrp="1"/>
+          </p:cNvGraphicFramePr>
+          <p:nvPr/>
+        </p:nvGraphicFramePr>
+        <p:xfrm>
+          <a:off x="411480" y="1188720"/>
+          <a:ext cx="5806440" cy="2011680"/>
+        </p:xfrm>
+        <a:graphic>
+          <a:graphicData uri="http://schemas.openxmlformats.org/drawingml/2006/table">
+            <a:tbl>
+              <a:tblPr firstRow="1">
+                <a:tableStyleId>{5C22544A-7EE6-4342-B048-85BDC9FD1C3A}</a:tableStyleId>
+              </a:tblPr>
+              <a:tblGrid>
+                <a:gridCol w="2240280"/>
+                <a:gridCol w="960120"/>
+                <a:gridCol w="868680"/>
+                <a:gridCol w="868680"/>
+                <a:gridCol w="868680"/>
+              </a:tblGrid>
+              <a:tr h="335280">
+                <a:tc>
+                  <a:txBody>
+                    <a:bodyPr/>
+                    <a:lstStyle/>
+                    <a:p>
+                      <a:pPr algn="l"/>
+                      <a:r>
+                        <a:rPr sz="1050" b="1" i="0">
+                          <a:solidFill>
+                            <a:srgbClr val="FFFFFF"/>
+                          </a:solidFill>
+                          <a:latin typeface="Calibri"/>
+                        </a:rPr>
+                        <a:t>non-LLM s / task (steady)</a:t>
+                      </a:r>
+                    </a:p>
+                  </a:txBody>
+                  <a:tcPr marL="63500" marR="63500" marT="12700" marB="12700" anchor="ctr">
+                    <a:solidFill>
+                      <a:srgbClr val="1B3A5C"/>
+                    </a:solidFill>
+                  </a:tcPr>
+                </a:tc>
+                <a:tc>
+                  <a:txBody>
+                    <a:bodyPr/>
+                    <a:lstStyle/>
+                    <a:p>
+                      <a:pPr algn="ctr"/>
+                      <a:r>
+                        <a:rPr sz="1050" b="1" i="0">
+                          <a:solidFill>
+                            <a:srgbClr val="FFFFFF"/>
+                          </a:solidFill>
+                          <a:latin typeface="Calibri"/>
+                        </a:rPr>
+                        <a:t>OpenShift</a:t>
+                      </a:r>
+                    </a:p>
+                  </a:txBody>
+                  <a:tcPr marL="63500" marR="63500" marT="12700" marB="12700" anchor="ctr">
+                    <a:solidFill>
+                      <a:srgbClr val="1B3A5C"/>
+                    </a:solidFill>
+                  </a:tcPr>
+                </a:tc>
+                <a:tc>
+                  <a:txBody>
+                    <a:bodyPr/>
+                    <a:lstStyle/>
+                    <a:p>
+                      <a:pPr algn="ctr"/>
+                      <a:r>
+                        <a:rPr sz="1050" b="1" i="0">
+                          <a:solidFill>
+                            <a:srgbClr val="FFFFFF"/>
+                          </a:solidFill>
+                          <a:latin typeface="Calibri"/>
+                        </a:rPr>
+                        <a:t>KinD</a:t>
+                      </a:r>
+                    </a:p>
+                  </a:txBody>
+                  <a:tcPr marL="63500" marR="63500" marT="12700" marB="12700" anchor="ctr">
+                    <a:solidFill>
+                      <a:srgbClr val="1B3A5C"/>
+                    </a:solidFill>
+                  </a:tcPr>
+                </a:tc>
+                <a:tc>
+                  <a:txBody>
+                    <a:bodyPr/>
+                    <a:lstStyle/>
+                    <a:p>
+                      <a:pPr algn="ctr"/>
+                      <a:r>
+                        <a:rPr sz="1050" b="1" i="0">
+                          <a:solidFill>
+                            <a:srgbClr val="FFFFFF"/>
+                          </a:solidFill>
+                          <a:latin typeface="Calibri"/>
+                        </a:rPr>
+                        <a:t>OCP step</a:t>
+                      </a:r>
+                    </a:p>
+                  </a:txBody>
+                  <a:tcPr marL="63500" marR="63500" marT="12700" marB="12700" anchor="ctr">
+                    <a:solidFill>
+                      <a:srgbClr val="1B3A5C"/>
+                    </a:solidFill>
+                  </a:tcPr>
+                </a:tc>
+                <a:tc>
+                  <a:txBody>
+                    <a:bodyPr/>
+                    <a:lstStyle/>
+                    <a:p>
+                      <a:pPr algn="ctr"/>
+                      <a:r>
+                        <a:rPr sz="1050" b="1" i="0">
+                          <a:solidFill>
+                            <a:srgbClr val="FFFFFF"/>
+                          </a:solidFill>
+                          <a:latin typeface="Calibri"/>
+                        </a:rPr>
+                        <a:t>KinD step</a:t>
+                      </a:r>
+                    </a:p>
+                  </a:txBody>
+                  <a:tcPr marL="63500" marR="63500" marT="12700" marB="12700" anchor="ctr">
+                    <a:solidFill>
+                      <a:srgbClr val="1B3A5C"/>
+                    </a:solidFill>
+                  </a:tcPr>
+                </a:tc>
+              </a:tr>
+              <a:tr h="335280">
+                <a:tc>
+                  <a:txBody>
+                    <a:bodyPr/>
+                    <a:lstStyle/>
+                    <a:p>
+                      <a:pPr algn="l"/>
+                      <a:r>
+                        <a:rPr sz="1050" b="1" i="0">
+                          <a:solidFill>
+                            <a:srgbClr val="1F2A37"/>
+                          </a:solidFill>
+                          <a:latin typeface="Calibri"/>
+                        </a:rPr>
+                        <a:t>baseline (AuthBridge off)</a:t>
+                      </a:r>
+                    </a:p>
+                  </a:txBody>
+                  <a:tcPr marL="63500" marR="63500" marT="12700" marB="12700" anchor="ctr">
+                    <a:solidFill>
+                      <a:srgbClr val="FFFFFF"/>
+                    </a:solidFill>
+                  </a:tcPr>
+                </a:tc>
+                <a:tc>
+                  <a:txBody>
+                    <a:bodyPr/>
+                    <a:lstStyle/>
+                    <a:p>
+                      <a:pPr algn="ctr"/>
+                      <a:r>
+                        <a:rPr sz="1050" b="0" i="0">
+                          <a:solidFill>
+                            <a:srgbClr val="1F2A37"/>
+                          </a:solidFill>
+                          <a:latin typeface="Calibri"/>
+                        </a:rPr>
+                        <a:t>0.423</a:t>
+                      </a:r>
+                    </a:p>
+                  </a:txBody>
+                  <a:tcPr marL="63500" marR="63500" marT="12700" marB="12700" anchor="ctr">
+                    <a:solidFill>
+                      <a:srgbClr val="FFFFFF"/>
+                    </a:solidFill>
+                  </a:tcPr>
+                </a:tc>
+                <a:tc>
+                  <a:txBody>
+                    <a:bodyPr/>
+                    <a:lstStyle/>
+                    <a:p>
+                      <a:pPr algn="ctr"/>
+                      <a:r>
+                        <a:rPr sz="1050" b="0" i="0">
+                          <a:solidFill>
+                            <a:srgbClr val="1F2A37"/>
+                          </a:solidFill>
+                          <a:latin typeface="Calibri"/>
+                        </a:rPr>
+                        <a:t>0.099</a:t>
+                      </a:r>
+                    </a:p>
+                  </a:txBody>
+                  <a:tcPr marL="63500" marR="63500" marT="12700" marB="12700" anchor="ctr">
+                    <a:solidFill>
+                      <a:srgbClr val="FFFFFF"/>
+                    </a:solidFill>
+                  </a:tcPr>
+                </a:tc>
+                <a:tc>
+                  <a:txBody>
+                    <a:bodyPr/>
+                    <a:lstStyle/>
+                    <a:p>
+                      <a:pPr algn="ctr"/>
+                      <a:r>
+                        <a:rPr sz="1050" b="0" i="0">
+                          <a:solidFill>
+                            <a:srgbClr val="1F2A37"/>
+                          </a:solidFill>
+                          <a:latin typeface="Calibri"/>
+                        </a:rPr>
+                        <a:t>—</a:t>
+                      </a:r>
+                    </a:p>
+                  </a:txBody>
+                  <a:tcPr marL="63500" marR="63500" marT="12700" marB="12700" anchor="ctr">
+                    <a:solidFill>
+                      <a:srgbClr val="FFFFFF"/>
+                    </a:solidFill>
+                  </a:tcPr>
+                </a:tc>
+                <a:tc>
+                  <a:txBody>
+                    <a:bodyPr/>
+                    <a:lstStyle/>
+                    <a:p>
+                      <a:pPr algn="ctr"/>
+                      <a:r>
+                        <a:rPr sz="1050" b="0" i="0">
+                          <a:solidFill>
+                            <a:srgbClr val="1F2A37"/>
+                          </a:solidFill>
+                          <a:latin typeface="Calibri"/>
+                        </a:rPr>
+                        <a:t>—</a:t>
+                      </a:r>
+                    </a:p>
+                  </a:txBody>
+                  <a:tcPr marL="63500" marR="63500" marT="12700" marB="12700" anchor="ctr">
+                    <a:solidFill>
+                      <a:srgbClr val="FFFFFF"/>
+                    </a:solidFill>
+                  </a:tcPr>
+                </a:tc>
+              </a:tr>
+              <a:tr h="335280">
+                <a:tc>
+                  <a:txBody>
+                    <a:bodyPr/>
+                    <a:lstStyle/>
+                    <a:p>
+                      <a:pPr algn="l"/>
+                      <a:r>
+                        <a:rPr sz="1050" b="1" i="0">
+                          <a:solidFill>
+                            <a:srgbClr val="1F2A37"/>
+                          </a:solidFill>
+                          <a:latin typeface="Calibri"/>
+                        </a:rPr>
+                        <a:t>auth-only</a:t>
+                      </a:r>
+                    </a:p>
+                  </a:txBody>
+                  <a:tcPr marL="63500" marR="63500" marT="12700" marB="12700" anchor="ctr">
+                    <a:solidFill>
+                      <a:srgbClr val="F4F6F8"/>
+                    </a:solidFill>
+                  </a:tcPr>
+                </a:tc>
+                <a:tc>
+                  <a:txBody>
+                    <a:bodyPr/>
+                    <a:lstStyle/>
+                    <a:p>
+                      <a:pPr algn="ctr"/>
+                      <a:r>
+                        <a:rPr sz="1050" b="0" i="0">
+                          <a:solidFill>
+                            <a:srgbClr val="1F2A37"/>
+                          </a:solidFill>
+                          <a:latin typeface="Calibri"/>
+                        </a:rPr>
+                        <a:t>14.101</a:t>
+                      </a:r>
+                    </a:p>
+                  </a:txBody>
+                  <a:tcPr marL="63500" marR="63500" marT="12700" marB="12700" anchor="ctr">
+                    <a:solidFill>
+                      <a:srgbClr val="F4F6F8"/>
+                    </a:solidFill>
+                  </a:tcPr>
+                </a:tc>
+                <a:tc>
+                  <a:txBody>
+                    <a:bodyPr/>
+                    <a:lstStyle/>
+                    <a:p>
+                      <a:pPr algn="ctr"/>
+                      <a:r>
+                        <a:rPr sz="1050" b="0" i="0">
+                          <a:solidFill>
+                            <a:srgbClr val="1F2A37"/>
+                          </a:solidFill>
+                          <a:latin typeface="Calibri"/>
+                        </a:rPr>
+                        <a:t>0.152</a:t>
+                      </a:r>
+                    </a:p>
+                  </a:txBody>
+                  <a:tcPr marL="63500" marR="63500" marT="12700" marB="12700" anchor="ctr">
+                    <a:solidFill>
+                      <a:srgbClr val="F4F6F8"/>
+                    </a:solidFill>
+                  </a:tcPr>
+                </a:tc>
+                <a:tc>
+                  <a:txBody>
+                    <a:bodyPr/>
+                    <a:lstStyle/>
+                    <a:p>
+                      <a:pPr algn="ctr"/>
+                      <a:r>
+                        <a:rPr sz="1050" b="0" i="0">
+                          <a:solidFill>
+                            <a:srgbClr val="1F2A37"/>
+                          </a:solidFill>
+                          <a:latin typeface="Calibri"/>
+                        </a:rPr>
+                        <a:t>+13.68</a:t>
+                      </a:r>
+                    </a:p>
+                  </a:txBody>
+                  <a:tcPr marL="63500" marR="63500" marT="12700" marB="12700" anchor="ctr">
+                    <a:solidFill>
+                      <a:srgbClr val="F4F6F8"/>
+                    </a:solidFill>
+                  </a:tcPr>
+                </a:tc>
+                <a:tc>
+                  <a:txBody>
+                    <a:bodyPr/>
+                    <a:lstStyle/>
+                    <a:p>
+                      <a:pPr algn="ctr"/>
+                      <a:r>
+                        <a:rPr sz="1050" b="0" i="0">
+                          <a:solidFill>
+                            <a:srgbClr val="1F2A37"/>
+                          </a:solidFill>
+                          <a:latin typeface="Calibri"/>
+                        </a:rPr>
+                        <a:t>+0.05</a:t>
+                      </a:r>
+                    </a:p>
+                  </a:txBody>
+                  <a:tcPr marL="63500" marR="63500" marT="12700" marB="12700" anchor="ctr">
+                    <a:solidFill>
+                      <a:srgbClr val="F4F6F8"/>
+                    </a:solidFill>
+                  </a:tcPr>
+                </a:tc>
+              </a:tr>
+              <a:tr h="335280">
+                <a:tc>
+                  <a:txBody>
+                    <a:bodyPr/>
+                    <a:lstStyle/>
+                    <a:p>
+                      <a:pPr algn="l"/>
+                      <a:r>
+                        <a:rPr sz="1050" b="1" i="0">
+                          <a:solidFill>
+                            <a:srgbClr val="1F2A37"/>
+                          </a:solidFill>
+                          <a:latin typeface="Calibri"/>
+                        </a:rPr>
+                        <a:t>ibac-only</a:t>
+                      </a:r>
+                    </a:p>
+                  </a:txBody>
+                  <a:tcPr marL="63500" marR="63500" marT="12700" marB="12700" anchor="ctr">
+                    <a:solidFill>
+                      <a:srgbClr val="FFFFFF"/>
+                    </a:solidFill>
+                  </a:tcPr>
+                </a:tc>
+                <a:tc>
+                  <a:txBody>
+                    <a:bodyPr/>
+                    <a:lstStyle/>
+                    <a:p>
+                      <a:pPr algn="ctr"/>
+                      <a:r>
+                        <a:rPr sz="1050" b="0" i="0">
+                          <a:solidFill>
+                            <a:srgbClr val="1F2A37"/>
+                          </a:solidFill>
+                          <a:latin typeface="Calibri"/>
+                        </a:rPr>
+                        <a:t>14.148</a:t>
+                      </a:r>
+                    </a:p>
+                  </a:txBody>
+                  <a:tcPr marL="63500" marR="63500" marT="12700" marB="12700" anchor="ctr">
+                    <a:solidFill>
+                      <a:srgbClr val="FFFFFF"/>
+                    </a:solidFill>
+                  </a:tcPr>
+                </a:tc>
+                <a:tc>
+                  <a:txBody>
+                    <a:bodyPr/>
+                    <a:lstStyle/>
+                    <a:p>
+                      <a:pPr algn="ctr"/>
+                      <a:r>
+                        <a:rPr sz="1050" b="0" i="0">
+                          <a:solidFill>
+                            <a:srgbClr val="1F2A37"/>
+                          </a:solidFill>
+                          <a:latin typeface="Calibri"/>
+                        </a:rPr>
+                        <a:t>1.688</a:t>
+                      </a:r>
+                    </a:p>
+                  </a:txBody>
+                  <a:tcPr marL="63500" marR="63500" marT="12700" marB="12700" anchor="ctr">
+                    <a:solidFill>
+                      <a:srgbClr val="FFFFFF"/>
+                    </a:solidFill>
+                  </a:tcPr>
+                </a:tc>
+                <a:tc>
+                  <a:txBody>
+                    <a:bodyPr/>
+                    <a:lstStyle/>
+                    <a:p>
+                      <a:pPr algn="ctr"/>
+                      <a:r>
+                        <a:rPr sz="1050" b="0" i="0">
+                          <a:solidFill>
+                            <a:srgbClr val="1F2A37"/>
+                          </a:solidFill>
+                          <a:latin typeface="Calibri"/>
+                        </a:rPr>
+                        <a:t>+0.05</a:t>
+                      </a:r>
+                    </a:p>
+                  </a:txBody>
+                  <a:tcPr marL="63500" marR="63500" marT="12700" marB="12700" anchor="ctr">
+                    <a:solidFill>
+                      <a:srgbClr val="FFFFFF"/>
+                    </a:solidFill>
+                  </a:tcPr>
+                </a:tc>
+                <a:tc>
+                  <a:txBody>
+                    <a:bodyPr/>
+                    <a:lstStyle/>
+                    <a:p>
+                      <a:pPr algn="ctr"/>
+                      <a:r>
+                        <a:rPr sz="1050" b="0" i="0">
+                          <a:solidFill>
+                            <a:srgbClr val="1F2A37"/>
+                          </a:solidFill>
+                          <a:latin typeface="Calibri"/>
+                        </a:rPr>
+                        <a:t>+1.54</a:t>
+                      </a:r>
+                    </a:p>
+                  </a:txBody>
+                  <a:tcPr marL="63500" marR="63500" marT="12700" marB="12700" anchor="ctr">
+                    <a:solidFill>
+                      <a:srgbClr val="FFFFFF"/>
+                    </a:solidFill>
+                  </a:tcPr>
+                </a:tc>
+              </a:tr>
+              <a:tr h="335280">
+                <a:tc>
+                  <a:txBody>
+                    <a:bodyPr/>
+                    <a:lstStyle/>
+                    <a:p>
+                      <a:pPr algn="l"/>
+                      <a:r>
+                        <a:rPr sz="1050" b="1" i="0">
+                          <a:solidFill>
+                            <a:srgbClr val="1F2A37"/>
+                          </a:solidFill>
+                          <a:latin typeface="Calibri"/>
+                        </a:rPr>
+                        <a:t>full (auth + ibac)</a:t>
+                      </a:r>
+                    </a:p>
+                  </a:txBody>
+                  <a:tcPr marL="63500" marR="63500" marT="12700" marB="12700" anchor="ctr">
+                    <a:solidFill>
+                      <a:srgbClr val="F4F6F8"/>
+                    </a:solidFill>
+                  </a:tcPr>
+                </a:tc>
+                <a:tc>
+                  <a:txBody>
+                    <a:bodyPr/>
+                    <a:lstStyle/>
+                    <a:p>
+                      <a:pPr algn="ctr"/>
+                      <a:r>
+                        <a:rPr sz="1050" b="0" i="0">
+                          <a:solidFill>
+                            <a:srgbClr val="1F2A37"/>
+                          </a:solidFill>
+                          <a:latin typeface="Calibri"/>
+                        </a:rPr>
+                        <a:t>14.446</a:t>
+                      </a:r>
+                    </a:p>
+                  </a:txBody>
+                  <a:tcPr marL="63500" marR="63500" marT="12700" marB="12700" anchor="ctr">
+                    <a:solidFill>
+                      <a:srgbClr val="F4F6F8"/>
+                    </a:solidFill>
+                  </a:tcPr>
+                </a:tc>
+                <a:tc>
+                  <a:txBody>
+                    <a:bodyPr/>
+                    <a:lstStyle/>
+                    <a:p>
+                      <a:pPr algn="ctr"/>
+                      <a:r>
+                        <a:rPr sz="1050" b="0" i="0">
+                          <a:solidFill>
+                            <a:srgbClr val="1F2A37"/>
+                          </a:solidFill>
+                          <a:latin typeface="Calibri"/>
+                        </a:rPr>
+                        <a:t>1.824</a:t>
+                      </a:r>
+                    </a:p>
+                  </a:txBody>
+                  <a:tcPr marL="63500" marR="63500" marT="12700" marB="12700" anchor="ctr">
+                    <a:solidFill>
+                      <a:srgbClr val="F4F6F8"/>
+                    </a:solidFill>
+                  </a:tcPr>
+                </a:tc>
+                <a:tc>
+                  <a:txBody>
+                    <a:bodyPr/>
+                    <a:lstStyle/>
+                    <a:p>
+                      <a:pPr algn="ctr"/>
+                      <a:r>
+                        <a:rPr sz="1050" b="0" i="0">
+                          <a:solidFill>
+                            <a:srgbClr val="1F2A37"/>
+                          </a:solidFill>
+                          <a:latin typeface="Calibri"/>
+                        </a:rPr>
+                        <a:t>+0.30</a:t>
+                      </a:r>
+                    </a:p>
+                  </a:txBody>
+                  <a:tcPr marL="63500" marR="63500" marT="12700" marB="12700" anchor="ctr">
+                    <a:solidFill>
+                      <a:srgbClr val="F4F6F8"/>
+                    </a:solidFill>
+                  </a:tcPr>
+                </a:tc>
+                <a:tc>
+                  <a:txBody>
+                    <a:bodyPr/>
+                    <a:lstStyle/>
+                    <a:p>
+                      <a:pPr algn="ctr"/>
+                      <a:r>
+                        <a:rPr sz="1050" b="0" i="0">
+                          <a:solidFill>
+                            <a:srgbClr val="1F2A37"/>
+                          </a:solidFill>
+                          <a:latin typeface="Calibri"/>
+                        </a:rPr>
+                        <a:t>+0.14</a:t>
+                      </a:r>
+                    </a:p>
+                  </a:txBody>
+                  <a:tcPr marL="63500" marR="63500" marT="12700" marB="12700" anchor="ctr">
+                    <a:solidFill>
+                      <a:srgbClr val="F4F6F8"/>
+                    </a:solidFill>
+                  </a:tcPr>
+                </a:tc>
+              </a:tr>
+              <a:tr h="335280">
+                <a:tc>
+                  <a:txBody>
+                    <a:bodyPr/>
+                    <a:lstStyle/>
+                    <a:p>
+                      <a:pPr algn="l"/>
+                      <a:r>
+                        <a:rPr sz="1050" b="1" i="0">
+                          <a:solidFill>
+                            <a:srgbClr val="1F2A37"/>
+                          </a:solidFill>
+                          <a:latin typeface="Calibri"/>
+                        </a:rPr>
+                        <a:t>full + ibac:observe</a:t>
+                      </a:r>
+                    </a:p>
+                  </a:txBody>
+                  <a:tcPr marL="63500" marR="63500" marT="12700" marB="12700" anchor="ctr">
+                    <a:solidFill>
+                      <a:srgbClr val="FFFFFF"/>
+                    </a:solidFill>
+                  </a:tcPr>
+                </a:tc>
+                <a:tc>
+                  <a:txBody>
+                    <a:bodyPr/>
+                    <a:lstStyle/>
+                    <a:p>
+                      <a:pPr algn="ctr"/>
+                      <a:r>
+                        <a:rPr sz="1050" b="0" i="0">
+                          <a:solidFill>
+                            <a:srgbClr val="1F2A37"/>
+                          </a:solidFill>
+                          <a:latin typeface="Calibri"/>
+                        </a:rPr>
+                        <a:t>14.598</a:t>
+                      </a:r>
+                    </a:p>
+                  </a:txBody>
+                  <a:tcPr marL="63500" marR="63500" marT="12700" marB="12700" anchor="ctr">
+                    <a:solidFill>
+                      <a:srgbClr val="FFFFFF"/>
+                    </a:solidFill>
+                  </a:tcPr>
+                </a:tc>
+                <a:tc>
+                  <a:txBody>
+                    <a:bodyPr/>
+                    <a:lstStyle/>
+                    <a:p>
+                      <a:pPr algn="ctr"/>
+                      <a:r>
+                        <a:rPr sz="1050" b="0" i="0">
+                          <a:solidFill>
+                            <a:srgbClr val="1F2A37"/>
+                          </a:solidFill>
+                          <a:latin typeface="Calibri"/>
+                        </a:rPr>
+                        <a:t>1.826</a:t>
+                      </a:r>
+                    </a:p>
+                  </a:txBody>
+                  <a:tcPr marL="63500" marR="63500" marT="12700" marB="12700" anchor="ctr">
+                    <a:solidFill>
+                      <a:srgbClr val="FFFFFF"/>
+                    </a:solidFill>
+                  </a:tcPr>
+                </a:tc>
+                <a:tc>
+                  <a:txBody>
+                    <a:bodyPr/>
+                    <a:lstStyle/>
+                    <a:p>
+                      <a:pPr algn="ctr"/>
+                      <a:r>
+                        <a:rPr sz="1050" b="0" i="0">
+                          <a:solidFill>
+                            <a:srgbClr val="1F2A37"/>
+                          </a:solidFill>
+                          <a:latin typeface="Calibri"/>
+                        </a:rPr>
+                        <a:t>+0.15</a:t>
+                      </a:r>
+                    </a:p>
+                  </a:txBody>
+                  <a:tcPr marL="63500" marR="63500" marT="12700" marB="12700" anchor="ctr">
+                    <a:solidFill>
+                      <a:srgbClr val="FFFFFF"/>
+                    </a:solidFill>
+                  </a:tcPr>
+                </a:tc>
+                <a:tc>
+                  <a:txBody>
+                    <a:bodyPr/>
+                    <a:lstStyle/>
+                    <a:p>
+                      <a:pPr algn="ctr"/>
+                      <a:r>
+                        <a:rPr sz="1050" b="0" i="0">
+                          <a:solidFill>
+                            <a:srgbClr val="1F2A37"/>
+                          </a:solidFill>
+                          <a:latin typeface="Calibri"/>
+                        </a:rPr>
+                        <a:t>+0.00</a:t>
+                      </a:r>
+                    </a:p>
+                  </a:txBody>
+                  <a:tcPr marL="63500" marR="63500" marT="12700" marB="12700" anchor="ctr">
+                    <a:solidFill>
+                      <a:srgbClr val="FFFFFF"/>
+                    </a:solidFill>
+                  </a:tcPr>
+                </a:tc>
+              </a:tr>
+            </a:tbl>
+          </a:graphicData>
+        </a:graphic>
+      </p:graphicFrame>
+      <p:graphicFrame>
+        <p:nvGraphicFramePr>
+          <p:cNvPr id="4" name="Table 3"/>
+          <p:cNvGraphicFramePr>
+            <a:graphicFrameLocks noGrp="1"/>
+          </p:cNvGraphicFramePr>
+          <p:nvPr/>
+        </p:nvGraphicFramePr>
+        <p:xfrm>
+          <a:off x="411480" y="3456432"/>
+          <a:ext cx="5806440" cy="2331720"/>
+        </p:xfrm>
+        <a:graphic>
+          <a:graphicData uri="http://schemas.openxmlformats.org/drawingml/2006/table">
+            <a:tbl>
+              <a:tblPr firstRow="1">
+                <a:tableStyleId>{5C22544A-7EE6-4342-B048-85BDC9FD1C3A}</a:tableStyleId>
+              </a:tblPr>
+              <a:tblGrid>
+                <a:gridCol w="2240280"/>
+                <a:gridCol w="1280160"/>
+                <a:gridCol w="1188720"/>
+                <a:gridCol w="1097280"/>
+              </a:tblGrid>
+              <a:tr h="333102">
+                <a:tc>
+                  <a:txBody>
+                    <a:bodyPr/>
+                    <a:lstStyle/>
+                    <a:p>
+                      <a:pPr algn="l"/>
+                      <a:r>
+                        <a:rPr sz="1050" b="1" i="0">
+                          <a:solidFill>
+                            <a:srgbClr val="FFFFFF"/>
+                          </a:solidFill>
+                          <a:latin typeface="Calibri"/>
+                        </a:rPr>
+                        <a:t>does the finding travel?</a:t>
+                      </a:r>
+                    </a:p>
+                  </a:txBody>
+                  <a:tcPr marL="63500" marR="63500" marT="12700" marB="12700" anchor="ctr">
+                    <a:solidFill>
+                      <a:srgbClr val="1B3A5C"/>
+                    </a:solidFill>
+                  </a:tcPr>
+                </a:tc>
+                <a:tc>
+                  <a:txBody>
+                    <a:bodyPr/>
+                    <a:lstStyle/>
+                    <a:p>
+                      <a:pPr algn="ctr"/>
+                      <a:r>
+                        <a:rPr sz="1050" b="1" i="0">
+                          <a:solidFill>
+                            <a:srgbClr val="FFFFFF"/>
+                          </a:solidFill>
+                          <a:latin typeface="Calibri"/>
+                        </a:rPr>
+                        <a:t>OpenShift</a:t>
+                      </a:r>
+                    </a:p>
+                  </a:txBody>
+                  <a:tcPr marL="63500" marR="63500" marT="12700" marB="12700" anchor="ctr">
+                    <a:solidFill>
+                      <a:srgbClr val="1B3A5C"/>
+                    </a:solidFill>
+                  </a:tcPr>
+                </a:tc>
+                <a:tc>
+                  <a:txBody>
+                    <a:bodyPr/>
+                    <a:lstStyle/>
+                    <a:p>
+                      <a:pPr algn="ctr"/>
+                      <a:r>
+                        <a:rPr sz="1050" b="1" i="0">
+                          <a:solidFill>
+                            <a:srgbClr val="FFFFFF"/>
+                          </a:solidFill>
+                          <a:latin typeface="Calibri"/>
+                        </a:rPr>
+                        <a:t>KinD</a:t>
+                      </a:r>
+                    </a:p>
+                  </a:txBody>
+                  <a:tcPr marL="63500" marR="63500" marT="12700" marB="12700" anchor="ctr">
+                    <a:solidFill>
+                      <a:srgbClr val="1B3A5C"/>
+                    </a:solidFill>
+                  </a:tcPr>
+                </a:tc>
+                <a:tc>
+                  <a:txBody>
+                    <a:bodyPr/>
+                    <a:lstStyle/>
+                    <a:p>
+                      <a:pPr algn="ctr"/>
+                      <a:r>
+                        <a:rPr sz="1050" b="1" i="0">
+                          <a:solidFill>
+                            <a:srgbClr val="FFFFFF"/>
+                          </a:solidFill>
+                          <a:latin typeface="Calibri"/>
+                        </a:rPr>
+                        <a:t>travels?</a:t>
+                      </a:r>
+                    </a:p>
+                  </a:txBody>
+                  <a:tcPr marL="63500" marR="63500" marT="12700" marB="12700" anchor="ctr">
+                    <a:solidFill>
+                      <a:srgbClr val="1B3A5C"/>
+                    </a:solidFill>
+                  </a:tcPr>
+                </a:tc>
+              </a:tr>
+              <a:tr h="333102">
+                <a:tc>
+                  <a:txBody>
+                    <a:bodyPr/>
+                    <a:lstStyle/>
+                    <a:p>
+                      <a:pPr algn="l"/>
+                      <a:r>
+                        <a:rPr sz="1050" b="1" i="0">
+                          <a:solidFill>
+                            <a:srgbClr val="1F2A37"/>
+                          </a:solidFill>
+                          <a:latin typeface="Calibri"/>
+                        </a:rPr>
+                        <a:t>Which layer costs anything</a:t>
+                      </a:r>
+                    </a:p>
+                  </a:txBody>
+                  <a:tcPr marL="63500" marR="63500" marT="12700" marB="12700" anchor="ctr">
+                    <a:solidFill>
+                      <a:srgbClr val="FFFFFF"/>
+                    </a:solidFill>
+                  </a:tcPr>
+                </a:tc>
+                <a:tc>
+                  <a:txBody>
+                    <a:bodyPr/>
+                    <a:lstStyle/>
+                    <a:p>
+                      <a:pPr algn="ctr"/>
+                      <a:r>
+                        <a:rPr sz="1050" b="0" i="0">
+                          <a:solidFill>
+                            <a:srgbClr val="1F2A37"/>
+                          </a:solidFill>
+                          <a:latin typeface="Calibri"/>
+                        </a:rPr>
+                        <a:t>the sidecar</a:t>
+                      </a:r>
+                    </a:p>
+                  </a:txBody>
+                  <a:tcPr marL="63500" marR="63500" marT="12700" marB="12700" anchor="ctr">
+                    <a:solidFill>
+                      <a:srgbClr val="FFFFFF"/>
+                    </a:solidFill>
+                  </a:tcPr>
+                </a:tc>
+                <a:tc>
+                  <a:txBody>
+                    <a:bodyPr/>
+                    <a:lstStyle/>
+                    <a:p>
+                      <a:pPr algn="ctr"/>
+                      <a:r>
+                        <a:rPr sz="1050" b="0" i="0">
+                          <a:solidFill>
+                            <a:srgbClr val="1F2A37"/>
+                          </a:solidFill>
+                          <a:latin typeface="Calibri"/>
+                        </a:rPr>
+                        <a:t>the judge</a:t>
+                      </a:r>
+                    </a:p>
+                  </a:txBody>
+                  <a:tcPr marL="63500" marR="63500" marT="12700" marB="12700" anchor="ctr">
+                    <a:solidFill>
+                      <a:srgbClr val="FFFFFF"/>
+                    </a:solidFill>
+                  </a:tcPr>
+                </a:tc>
+                <a:tc>
+                  <a:txBody>
+                    <a:bodyPr/>
+                    <a:lstStyle/>
+                    <a:p>
+                      <a:pPr algn="ctr"/>
+                      <a:r>
+                        <a:rPr sz="1050" b="0" i="0">
+                          <a:solidFill>
+                            <a:srgbClr val="1F2A37"/>
+                          </a:solidFill>
+                          <a:latin typeface="Calibri"/>
+                        </a:rPr>
+                        <a:t>NO</a:t>
+                      </a:r>
+                    </a:p>
+                  </a:txBody>
+                  <a:tcPr marL="63500" marR="63500" marT="12700" marB="12700" anchor="ctr">
+                    <a:solidFill>
+                      <a:srgbClr val="FFFFFF"/>
+                    </a:solidFill>
+                  </a:tcPr>
+                </a:tc>
+              </a:tr>
+              <a:tr h="333102">
+                <a:tc>
+                  <a:txBody>
+                    <a:bodyPr/>
+                    <a:lstStyle/>
+                    <a:p>
+                      <a:pPr algn="l"/>
+                      <a:r>
+                        <a:rPr sz="1050" b="1" i="0">
+                          <a:solidFill>
+                            <a:srgbClr val="1F2A37"/>
+                          </a:solidFill>
+                          <a:latin typeface="Calibri"/>
+                        </a:rPr>
+                        <a:t>Serial tool calls judged (p=1)</a:t>
+                      </a:r>
+                    </a:p>
+                  </a:txBody>
+                  <a:tcPr marL="63500" marR="63500" marT="12700" marB="12700" anchor="ctr">
+                    <a:solidFill>
+                      <a:srgbClr val="F4F6F8"/>
+                    </a:solidFill>
+                  </a:tcPr>
+                </a:tc>
+                <a:tc>
+                  <a:txBody>
+                    <a:bodyPr/>
+                    <a:lstStyle/>
+                    <a:p>
+                      <a:pPr algn="ctr"/>
+                      <a:r>
+                        <a:rPr sz="1050" b="0" i="0">
+                          <a:solidFill>
+                            <a:srgbClr val="1F2A37"/>
+                          </a:solidFill>
+                          <a:latin typeface="Calibri"/>
+                        </a:rPr>
+                        <a:t>10 / 10</a:t>
+                      </a:r>
+                    </a:p>
+                  </a:txBody>
+                  <a:tcPr marL="63500" marR="63500" marT="12700" marB="12700" anchor="ctr">
+                    <a:solidFill>
+                      <a:srgbClr val="F4F6F8"/>
+                    </a:solidFill>
+                  </a:tcPr>
+                </a:tc>
+                <a:tc>
+                  <a:txBody>
+                    <a:bodyPr/>
+                    <a:lstStyle/>
+                    <a:p>
+                      <a:pPr algn="ctr"/>
+                      <a:r>
+                        <a:rPr sz="1050" b="0" i="0">
+                          <a:solidFill>
+                            <a:srgbClr val="1F2A37"/>
+                          </a:solidFill>
+                          <a:latin typeface="Calibri"/>
+                        </a:rPr>
+                        <a:t>10 / 10</a:t>
+                      </a:r>
+                    </a:p>
+                  </a:txBody>
+                  <a:tcPr marL="63500" marR="63500" marT="12700" marB="12700" anchor="ctr">
+                    <a:solidFill>
+                      <a:srgbClr val="F4F6F8"/>
+                    </a:solidFill>
+                  </a:tcPr>
+                </a:tc>
+                <a:tc>
+                  <a:txBody>
+                    <a:bodyPr/>
+                    <a:lstStyle/>
+                    <a:p>
+                      <a:pPr algn="ctr"/>
+                      <a:r>
+                        <a:rPr sz="1050" b="0" i="0">
+                          <a:solidFill>
+                            <a:srgbClr val="1F2A37"/>
+                          </a:solidFill>
+                          <a:latin typeface="Calibri"/>
+                        </a:rPr>
+                        <a:t>YES</a:t>
+                      </a:r>
+                    </a:p>
+                  </a:txBody>
+                  <a:tcPr marL="63500" marR="63500" marT="12700" marB="12700" anchor="ctr">
+                    <a:solidFill>
+                      <a:srgbClr val="F4F6F8"/>
+                    </a:solidFill>
+                  </a:tcPr>
+                </a:tc>
+              </a:tr>
+              <a:tr h="333102">
+                <a:tc>
+                  <a:txBody>
+                    <a:bodyPr/>
+                    <a:lstStyle/>
+                    <a:p>
+                      <a:pPr algn="l"/>
+                      <a:r>
+                        <a:rPr sz="1050" b="1" i="0">
+                          <a:solidFill>
+                            <a:srgbClr val="1F2A37"/>
+                          </a:solidFill>
+                          <a:latin typeface="Calibri"/>
+                        </a:rPr>
+                        <a:t>Judged / tool-call ratio, n=50</a:t>
+                      </a:r>
+                    </a:p>
+                  </a:txBody>
+                  <a:tcPr marL="63500" marR="63500" marT="12700" marB="12700" anchor="ctr">
+                    <a:solidFill>
+                      <a:srgbClr val="FFFFFF"/>
+                    </a:solidFill>
+                  </a:tcPr>
+                </a:tc>
+                <a:tc>
+                  <a:txBody>
+                    <a:bodyPr/>
+                    <a:lstStyle/>
+                    <a:p>
+                      <a:pPr algn="ctr"/>
+                      <a:r>
+                        <a:rPr sz="1050" b="0" i="0">
+                          <a:solidFill>
+                            <a:srgbClr val="1F2A37"/>
+                          </a:solidFill>
+                          <a:latin typeface="Calibri"/>
+                        </a:rPr>
+                        <a:t>0.90–0.98</a:t>
+                      </a:r>
+                    </a:p>
+                  </a:txBody>
+                  <a:tcPr marL="63500" marR="63500" marT="12700" marB="12700" anchor="ctr">
+                    <a:solidFill>
+                      <a:srgbClr val="FFFFFF"/>
+                    </a:solidFill>
+                  </a:tcPr>
+                </a:tc>
+                <a:tc>
+                  <a:txBody>
+                    <a:bodyPr/>
+                    <a:lstStyle/>
+                    <a:p>
+                      <a:pPr algn="ctr"/>
+                      <a:r>
+                        <a:rPr sz="1050" b="0" i="0">
+                          <a:solidFill>
+                            <a:srgbClr val="1F2A37"/>
+                          </a:solidFill>
+                          <a:latin typeface="Calibri"/>
+                        </a:rPr>
+                        <a:t>0.90–0.98</a:t>
+                      </a:r>
+                    </a:p>
+                  </a:txBody>
+                  <a:tcPr marL="63500" marR="63500" marT="12700" marB="12700" anchor="ctr">
+                    <a:solidFill>
+                      <a:srgbClr val="FFFFFF"/>
+                    </a:solidFill>
+                  </a:tcPr>
+                </a:tc>
+                <a:tc>
+                  <a:txBody>
+                    <a:bodyPr/>
+                    <a:lstStyle/>
+                    <a:p>
+                      <a:pPr algn="ctr"/>
+                      <a:r>
+                        <a:rPr sz="1050" b="0" i="0">
+                          <a:solidFill>
+                            <a:srgbClr val="1F2A37"/>
+                          </a:solidFill>
+                          <a:latin typeface="Calibri"/>
+                        </a:rPr>
+                        <a:t>YES</a:t>
+                      </a:r>
+                    </a:p>
+                  </a:txBody>
+                  <a:tcPr marL="63500" marR="63500" marT="12700" marB="12700" anchor="ctr">
+                    <a:solidFill>
+                      <a:srgbClr val="FFFFFF"/>
+                    </a:solidFill>
+                  </a:tcPr>
+                </a:tc>
+              </a:tr>
+              <a:tr h="333102">
+                <a:tc>
+                  <a:txBody>
+                    <a:bodyPr/>
+                    <a:lstStyle/>
+                    <a:p>
+                      <a:pPr algn="l"/>
+                      <a:r>
+                        <a:rPr sz="1050" b="1" i="0">
+                          <a:solidFill>
+                            <a:srgbClr val="1F2A37"/>
+                          </a:solidFill>
+                          <a:latin typeface="Calibri"/>
+                        </a:rPr>
+                        <a:t>tau2 measured / projected</a:t>
+                      </a:r>
+                    </a:p>
+                  </a:txBody>
+                  <a:tcPr marL="63500" marR="63500" marT="12700" marB="12700" anchor="ctr">
+                    <a:solidFill>
+                      <a:srgbClr val="F4F6F8"/>
+                    </a:solidFill>
+                  </a:tcPr>
+                </a:tc>
+                <a:tc>
+                  <a:txBody>
+                    <a:bodyPr/>
+                    <a:lstStyle/>
+                    <a:p>
+                      <a:pPr algn="ctr"/>
+                      <a:r>
+                        <a:rPr sz="1050" b="0" i="0">
+                          <a:solidFill>
+                            <a:srgbClr val="1F2A37"/>
+                          </a:solidFill>
+                          <a:latin typeface="Calibri"/>
+                        </a:rPr>
+                        <a:t>0.31x</a:t>
+                      </a:r>
+                    </a:p>
+                  </a:txBody>
+                  <a:tcPr marL="63500" marR="63500" marT="12700" marB="12700" anchor="ctr">
+                    <a:solidFill>
+                      <a:srgbClr val="F4F6F8"/>
+                    </a:solidFill>
+                  </a:tcPr>
+                </a:tc>
+                <a:tc>
+                  <a:txBody>
+                    <a:bodyPr/>
+                    <a:lstStyle/>
+                    <a:p>
+                      <a:pPr algn="ctr"/>
+                      <a:r>
+                        <a:rPr sz="1050" b="0" i="0">
+                          <a:solidFill>
+                            <a:srgbClr val="1F2A37"/>
+                          </a:solidFill>
+                          <a:latin typeface="Calibri"/>
+                        </a:rPr>
+                        <a:t>2.49x</a:t>
+                      </a:r>
+                    </a:p>
+                  </a:txBody>
+                  <a:tcPr marL="63500" marR="63500" marT="12700" marB="12700" anchor="ctr">
+                    <a:solidFill>
+                      <a:srgbClr val="F4F6F8"/>
+                    </a:solidFill>
+                  </a:tcPr>
+                </a:tc>
+                <a:tc>
+                  <a:txBody>
+                    <a:bodyPr/>
+                    <a:lstStyle/>
+                    <a:p>
+                      <a:pPr algn="ctr"/>
+                      <a:r>
+                        <a:rPr sz="1050" b="0" i="0">
+                          <a:solidFill>
+                            <a:srgbClr val="1F2A37"/>
+                          </a:solidFill>
+                          <a:latin typeface="Calibri"/>
+                        </a:rPr>
+                        <a:t>NO</a:t>
+                      </a:r>
+                    </a:p>
+                  </a:txBody>
+                  <a:tcPr marL="63500" marR="63500" marT="12700" marB="12700" anchor="ctr">
+                    <a:solidFill>
+                      <a:srgbClr val="F4F6F8"/>
+                    </a:solidFill>
+                  </a:tcPr>
+                </a:tc>
+              </a:tr>
+              <a:tr h="333102">
+                <a:tc>
+                  <a:txBody>
+                    <a:bodyPr/>
+                    <a:lstStyle/>
+                    <a:p>
+                      <a:pPr algn="l"/>
+                      <a:r>
+                        <a:rPr sz="1050" b="1" i="0">
+                          <a:solidFill>
+                            <a:srgbClr val="1F2A37"/>
+                          </a:solidFill>
+                          <a:latin typeface="Calibri"/>
+                        </a:rPr>
+                        <a:t>Between-deploy noise floor</a:t>
+                      </a:r>
+                    </a:p>
+                  </a:txBody>
+                  <a:tcPr marL="63500" marR="63500" marT="12700" marB="12700" anchor="ctr">
+                    <a:solidFill>
+                      <a:srgbClr val="FFFFFF"/>
+                    </a:solidFill>
+                  </a:tcPr>
+                </a:tc>
+                <a:tc>
+                  <a:txBody>
+                    <a:bodyPr/>
+                    <a:lstStyle/>
+                    <a:p>
+                      <a:pPr algn="ctr"/>
+                      <a:r>
+                        <a:rPr sz="1050" b="0" i="0">
+                          <a:solidFill>
+                            <a:srgbClr val="1F2A37"/>
+                          </a:solidFill>
+                          <a:latin typeface="Calibri"/>
+                        </a:rPr>
+                        <a:t>0.22 s</a:t>
+                      </a:r>
+                    </a:p>
+                  </a:txBody>
+                  <a:tcPr marL="63500" marR="63500" marT="12700" marB="12700" anchor="ctr">
+                    <a:solidFill>
+                      <a:srgbClr val="FFFFFF"/>
+                    </a:solidFill>
+                  </a:tcPr>
+                </a:tc>
+                <a:tc>
+                  <a:txBody>
+                    <a:bodyPr/>
+                    <a:lstStyle/>
+                    <a:p>
+                      <a:pPr algn="ctr"/>
+                      <a:r>
+                        <a:rPr sz="1050" b="0" i="0">
+                          <a:solidFill>
+                            <a:srgbClr val="1F2A37"/>
+                          </a:solidFill>
+                          <a:latin typeface="Calibri"/>
+                        </a:rPr>
+                        <a:t>0.155 s</a:t>
+                      </a:r>
+                    </a:p>
+                  </a:txBody>
+                  <a:tcPr marL="63500" marR="63500" marT="12700" marB="12700" anchor="ctr">
+                    <a:solidFill>
+                      <a:srgbClr val="FFFFFF"/>
+                    </a:solidFill>
+                  </a:tcPr>
+                </a:tc>
+                <a:tc>
+                  <a:txBody>
+                    <a:bodyPr/>
+                    <a:lstStyle/>
+                    <a:p>
+                      <a:pPr algn="ctr"/>
+                      <a:r>
+                        <a:rPr sz="1050" b="0" i="0">
+                          <a:solidFill>
+                            <a:srgbClr val="1F2A37"/>
+                          </a:solidFill>
+                          <a:latin typeface="Calibri"/>
+                        </a:rPr>
+                        <a:t>YES</a:t>
+                      </a:r>
+                    </a:p>
+                  </a:txBody>
+                  <a:tcPr marL="63500" marR="63500" marT="12700" marB="12700" anchor="ctr">
+                    <a:solidFill>
+                      <a:srgbClr val="FFFFFF"/>
+                    </a:solidFill>
+                  </a:tcPr>
+                </a:tc>
+              </a:tr>
+              <a:tr h="333108">
+                <a:tc>
+                  <a:txBody>
+                    <a:bodyPr/>
+                    <a:lstStyle/>
+                    <a:p>
+                      <a:pPr algn="l"/>
+                      <a:r>
+                        <a:rPr sz="1050" b="1" i="0">
+                          <a:solidFill>
+                            <a:srgbClr val="1F2A37"/>
+                          </a:solidFill>
+                          <a:latin typeface="Calibri"/>
+                        </a:rPr>
+                        <a:t>Sidecar CPU / memory</a:t>
+                      </a:r>
+                    </a:p>
+                  </a:txBody>
+                  <a:tcPr marL="63500" marR="63500" marT="12700" marB="12700" anchor="ctr">
+                    <a:solidFill>
+                      <a:srgbClr val="F4F6F8"/>
+                    </a:solidFill>
+                  </a:tcPr>
+                </a:tc>
+                <a:tc>
+                  <a:txBody>
+                    <a:bodyPr/>
+                    <a:lstStyle/>
+                    <a:p>
+                      <a:pPr algn="ctr"/>
+                      <a:r>
+                        <a:rPr sz="1050" b="0" i="0">
+                          <a:solidFill>
+                            <a:srgbClr val="1F2A37"/>
+                          </a:solidFill>
+                          <a:latin typeface="Calibri"/>
+                        </a:rPr>
+                        <a:t>no data</a:t>
+                      </a:r>
+                    </a:p>
+                  </a:txBody>
+                  <a:tcPr marL="63500" marR="63500" marT="12700" marB="12700" anchor="ctr">
+                    <a:solidFill>
+                      <a:srgbClr val="F4F6F8"/>
+                    </a:solidFill>
+                  </a:tcPr>
+                </a:tc>
+                <a:tc>
+                  <a:txBody>
+                    <a:bodyPr/>
+                    <a:lstStyle/>
+                    <a:p>
+                      <a:pPr algn="ctr"/>
+                      <a:r>
+                        <a:rPr sz="1050" b="0" i="0">
+                          <a:solidFill>
+                            <a:srgbClr val="1F2A37"/>
+                          </a:solidFill>
+                          <a:latin typeface="Calibri"/>
+                        </a:rPr>
+                        <a:t>no data</a:t>
+                      </a:r>
+                    </a:p>
+                  </a:txBody>
+                  <a:tcPr marL="63500" marR="63500" marT="12700" marB="12700" anchor="ctr">
+                    <a:solidFill>
+                      <a:srgbClr val="F4F6F8"/>
+                    </a:solidFill>
+                  </a:tcPr>
+                </a:tc>
+                <a:tc>
+                  <a:txBody>
+                    <a:bodyPr/>
+                    <a:lstStyle/>
+                    <a:p>
+                      <a:pPr algn="ctr"/>
+                      <a:r>
+                        <a:rPr sz="1050" b="0" i="0">
+                          <a:solidFill>
+                            <a:srgbClr val="1F2A37"/>
+                          </a:solidFill>
+                          <a:latin typeface="Calibri"/>
+                        </a:rPr>
+                        <a:t>—</a:t>
+                      </a:r>
+                    </a:p>
+                  </a:txBody>
+                  <a:tcPr marL="63500" marR="63500" marT="12700" marB="12700" anchor="ctr">
+                    <a:solidFill>
+                      <a:srgbClr val="F4F6F8"/>
+                    </a:solidFill>
+                  </a:tcPr>
+                </a:tc>
+              </a:tr>
+            </a:tbl>
+          </a:graphicData>
+        </a:graphic>
+      </p:graphicFrame>
+      <p:sp>
+        <p:nvSpPr>
+          <p:cNvPr id="5" name="Rounded Rectangle 4"/>
+          <p:cNvSpPr/>
+          <p:nvPr/>
+        </p:nvSpPr>
+        <p:spPr>
+          <a:xfrm>
+            <a:off x="6446520" y="1188720"/>
+            <a:ext cx="5303520" cy="1298448"/>
+          </a:xfrm>
+          <a:prstGeom prst="roundRect">
+            <a:avLst/>
+          </a:prstGeom>
+          <a:solidFill>
+            <a:srgbClr val="F1E8F6"/>
+          </a:solidFill>
+          <a:ln w="12700">
+            <a:solidFill>
+              <a:srgbClr val="8E44AD"/>
+            </a:solidFill>
+          </a:ln>
+          <a:effectLst/>
+        </p:spPr>
+        <p:style>
+          <a:lnRef idx="1">
+            <a:schemeClr val="accent1"/>
+          </a:lnRef>
+          <a:fillRef idx="3">
+            <a:schemeClr val="accent1"/>
+          </a:fillRef>
+          <a:effectRef idx="2">
+            <a:schemeClr val="accent1"/>
+          </a:effectRef>
+          <a:fontRef idx="minor">
+            <a:schemeClr val="lt1"/>
+          </a:fontRef>
+        </p:style>
+        <p:txBody>
+          <a:bodyPr rtlCol="0" anchor="t" wrap="square" tIns="63500" bIns="25400" lIns="127000"/>
+          <a:lstStyle/>
+          <a:p>
+            <a:pPr algn="l"/>
+            <a:r>
+              <a:rPr sz="1150" b="1" i="0">
+                <a:solidFill>
+                  <a:srgbClr val="1F2A37"/>
+                </a:solidFill>
+                <a:latin typeface="Calibri"/>
+              </a:rPr>
+              <a:t>The two clusters disagree about WHICH layer costs anything</a:t>
+            </a:r>
+          </a:p>
+          <a:p>
+            <a:pPr algn="l"/>
+            <a:r>
+              <a:rPr sz="950" b="0" i="0">
+                <a:solidFill>
+                  <a:srgbClr val="3A4654"/>
+                </a:solidFill>
+                <a:latin typeface="Calibri"/>
+              </a:rPr>
+              <a:t>On OpenShift the whole expense is the sidecar's mere presence and the judge is noise; on KinD the sidecar is nearly free and the judge is all of it. Both are right about their own cluster, and the same condition on the same image measures 4–93x apart. Never quote an absolute per-task plugin figure without naming the cluster.</a:t>
+            </a:r>
+          </a:p>
+        </p:txBody>
+      </p:sp>
+      <p:sp>
+        <p:nvSpPr>
+          <p:cNvPr id="6" name="Rounded Rectangle 5"/>
+          <p:cNvSpPr/>
+          <p:nvPr/>
+        </p:nvSpPr>
+        <p:spPr>
+          <a:xfrm>
+            <a:off x="6446520" y="2523744"/>
+            <a:ext cx="5303520" cy="1298448"/>
+          </a:xfrm>
+          <a:prstGeom prst="roundRect">
+            <a:avLst/>
+          </a:prstGeom>
+          <a:solidFill>
+            <a:srgbClr val="F1E8F6"/>
+          </a:solidFill>
+          <a:ln w="12700">
+            <a:solidFill>
+              <a:srgbClr val="8E44AD"/>
+            </a:solidFill>
+          </a:ln>
+          <a:effectLst/>
+        </p:spPr>
+        <p:style>
+          <a:lnRef idx="1">
+            <a:schemeClr val="accent1"/>
+          </a:lnRef>
+          <a:fillRef idx="3">
+            <a:schemeClr val="accent1"/>
+          </a:fillRef>
+          <a:effectRef idx="2">
+            <a:schemeClr val="accent1"/>
+          </a:effectRef>
+          <a:fontRef idx="minor">
+            <a:schemeClr val="lt1"/>
+          </a:fontRef>
+        </p:style>
+        <p:txBody>
+          <a:bodyPr rtlCol="0" anchor="t" wrap="square" tIns="63500" bIns="25400" lIns="127000"/>
+          <a:lstStyle/>
+          <a:p>
+            <a:pPr algn="l"/>
+            <a:r>
+              <a:rPr sz="1150" b="1" i="0">
+                <a:solidFill>
+                  <a:srgbClr val="1F2A37"/>
+                </a:solidFill>
+                <a:latin typeface="Calibri"/>
+              </a:rPr>
+              <a:t>Not a timeout — we checked</a:t>
+            </a:r>
+          </a:p>
+          <a:p>
+            <a:pPr algn="l"/>
+            <a:r>
+              <a:rPr sz="950" b="0" i="0">
+                <a:solidFill>
+                  <a:srgbClr val="3A4654"/>
+                </a:solidFill>
+                <a:latin typeface="Calibri"/>
+              </a:rPr>
+              <a:t>A timeout piles values on a round number. OpenShift's auth-only runs 8.05–17.93 s, SD 1.92, broad and unimodal: contention and queueing. On the quiet cluster the tail moves to full (median 1.82 s, max 14.00 s) because the judge is itself an LLM call — so the sidecar costs reproducibility, not only latency.</a:t>
+            </a:r>
+          </a:p>
+        </p:txBody>
+      </p:sp>
+      <p:sp>
+        <p:nvSpPr>
+          <p:cNvPr id="7" name="Rounded Rectangle 6"/>
+          <p:cNvSpPr/>
+          <p:nvPr/>
+        </p:nvSpPr>
+        <p:spPr>
+          <a:xfrm>
+            <a:off x="6446520" y="3858768"/>
+            <a:ext cx="5303520" cy="1298448"/>
+          </a:xfrm>
+          <a:prstGeom prst="roundRect">
+            <a:avLst/>
+          </a:prstGeom>
+          <a:solidFill>
+            <a:srgbClr val="F1E8F6"/>
+          </a:solidFill>
+          <a:ln w="12700">
+            <a:solidFill>
+              <a:srgbClr val="8E44AD"/>
+            </a:solidFill>
+          </a:ln>
+          <a:effectLst/>
+        </p:spPr>
+        <p:style>
+          <a:lnRef idx="1">
+            <a:schemeClr val="accent1"/>
+          </a:lnRef>
+          <a:fillRef idx="3">
+            <a:schemeClr val="accent1"/>
+          </a:fillRef>
+          <a:effectRef idx="2">
+            <a:schemeClr val="accent1"/>
+          </a:effectRef>
+          <a:fontRef idx="minor">
+            <a:schemeClr val="lt1"/>
+          </a:fontRef>
+        </p:style>
+        <p:txBody>
+          <a:bodyPr rtlCol="0" anchor="t" wrap="square" tIns="63500" bIns="25400" lIns="127000"/>
+          <a:lstStyle/>
+          <a:p>
+            <a:pPr algn="l"/>
+            <a:r>
+              <a:rPr sz="1150" b="1" i="0">
+                <a:solidFill>
+                  <a:srgbClr val="1F2A37"/>
+                </a:solidFill>
+                <a:latin typeface="Calibri"/>
+              </a:rPr>
+              <a:t>One flag decides whether the study measures anything</a:t>
+            </a:r>
+          </a:p>
+          <a:p>
+            <a:pPr algn="l"/>
+            <a:r>
+              <a:rPr sz="950" b="0" i="0">
+                <a:solidFill>
+                  <a:srgbClr val="3A4654"/>
+                </a:solidFill>
+                <a:latin typeface="Calibri"/>
+              </a:rPr>
+              <a:t>Every gsm8k leg sends the SAME 50 prompts and the gateway replays completions for ~10 min: unspaced, later legs measure the cache, in run order — the shape of a plugin effect. BM_CACHE_GAP=900 spaces them. The check needs no statistics: the conditions NEST, so no sidecar leg can beat a sidecar-free one. Clear by 41.8x (OCP), 1.4x (KinD).</a:t>
+            </a:r>
+          </a:p>
+        </p:txBody>
+      </p:sp>
+      <p:sp>
+        <p:nvSpPr>
+          <p:cNvPr id="8" name="Rounded Rectangle 7"/>
+          <p:cNvSpPr/>
+          <p:nvPr/>
+        </p:nvSpPr>
+        <p:spPr>
+          <a:xfrm>
+            <a:off x="6446520" y="5193792"/>
+            <a:ext cx="5303520" cy="1298448"/>
+          </a:xfrm>
+          <a:prstGeom prst="roundRect">
+            <a:avLst/>
+          </a:prstGeom>
+          <a:solidFill>
+            <a:srgbClr val="F1E8F6"/>
+          </a:solidFill>
+          <a:ln w="12700">
+            <a:solidFill>
+              <a:srgbClr val="8E44AD"/>
+            </a:solidFill>
+          </a:ln>
+          <a:effectLst/>
+        </p:spPr>
+        <p:style>
+          <a:lnRef idx="1">
+            <a:schemeClr val="accent1"/>
+          </a:lnRef>
+          <a:fillRef idx="3">
+            <a:schemeClr val="accent1"/>
+          </a:fillRef>
+          <a:effectRef idx="2">
+            <a:schemeClr val="accent1"/>
+          </a:effectRef>
+          <a:fontRef idx="minor">
+            <a:schemeClr val="lt1"/>
+          </a:fontRef>
+        </p:style>
+        <p:txBody>
+          <a:bodyPr rtlCol="0" anchor="t" wrap="square" tIns="63500" bIns="25400" lIns="127000"/>
+          <a:lstStyle/>
+          <a:p>
+            <a:pPr algn="l"/>
+            <a:r>
+              <a:rPr sz="1150" b="1" i="0">
+                <a:solidFill>
+                  <a:srgbClr val="1F2A37"/>
+                </a:solidFill>
+                <a:latin typeface="Calibri"/>
+              </a:rPr>
+              <a:t>The deploy is the unit of replication, not the task</a:t>
+            </a:r>
+          </a:p>
+          <a:p>
+            <a:pPr algn="l"/>
+            <a:r>
+              <a:rPr sz="950" b="0" i="0">
+                <a:solidFill>
+                  <a:srgbClr val="3A4654"/>
+                </a:solidFill>
+                <a:latin typeface="Calibri"/>
+              </a:rPr>
+              <a:t>A per-task interval measures variance WITHIN one deploy. The honest floor is between two deploys of one condition, and it exceeds every step but the dominant layer — so presets cannot be RANKED at any task count; add deploys, not tasks. Cut the other way: at σ ≈ 0.23 s two deploys already resolve a 1 s effect, so the small steps are genuinely small rather than unresolved.</a:t>
+            </a:r>
+          </a:p>
+        </p:txBody>
+      </p:sp>
+      <p:sp>
+        <p:nvSpPr>
+          <p:cNvPr id="9" name="TextBox 8"/>
+          <p:cNvSpPr txBox="1"/>
+          <p:nvPr/>
+        </p:nvSpPr>
+        <p:spPr>
+          <a:xfrm>
+            <a:off x="11795760" y="6437376"/>
+            <a:ext cx="320040" cy="310896"/>
+          </a:xfrm>
+          <a:prstGeom prst="rect">
+            <a:avLst/>
+          </a:prstGeom>
+          <a:noFill/>
+        </p:spPr>
+        <p:txBody>
+          <a:bodyPr wrap="none" anchor="ctr" lIns="0" rIns="0" tIns="0" bIns="0">
+            <a:spAutoFit/>
+          </a:bodyPr>
+          <a:lstStyle/>
+          <a:p>
+            <a:pPr algn="r">
+              <a:spcAft>
+                <a:spcPts val="300"/>
+              </a:spcAft>
+            </a:pPr>
+            <a:r>
+              <a:rPr sz="1200" b="0" i="0">
+                <a:solidFill>
+                  <a:srgbClr val="6B6B6B"/>
+                </a:solidFill>
+                <a:latin typeface="Calibri"/>
+              </a:rPr>
+              <a:t>20</a:t>
+            </a:r>
+          </a:p>
+        </p:txBody>
+      </p:sp>
+    </p:spTree>
+  </p:cSld>
+  <p:clrMapOvr>
+    <a:masterClrMapping/>
+  </p:clrMapOvr>
+</p:sld>
+</file>
+
+<file path=ppt/slides/slide21.xml><?xml version="1.0" encoding="utf-8"?>
 <p:sld xmlns:a="http://schemas.openxmlformats.org/drawingml/2006/main" xmlns:p="http://schemas.openxmlformats.org/presentationml/2006/main" xmlns:r="http://schemas.openxmlformats.org/officeDocument/2006/relationships">
   <p:cSld name="10. What the Service Can &amp; Cannot Enact">
     <p:spTree>
@@ -20567,7 +22551,7 @@
                 </a:solidFill>
                 <a:latin typeface="Calibri"/>
               </a:rPr>
-              <a:t>20</a:t>
+              <a:t>21</a:t>
             </a:r>
           </a:p>
         </p:txBody>

--- a/docs/AutoBench.pptx
+++ b/docs/AutoBench.pptx
@@ -3363,7 +3363,7 @@
                 </a:solidFill>
                 <a:latin typeface="Calibri"/>
               </a:rPr>
-              <a:t>Last modified 2026-09-17 17:58 EDT</a:t>
+              <a:t>Last modified 2026-09-20 14:05 EDT</a:t>
             </a:r>
           </a:p>
         </p:txBody>
@@ -19667,7 +19667,7 @@
                 </a:solidFill>
                 <a:latin typeface="Calibri"/>
               </a:rPr>
-              <a:t>7.1 the ladder · 7.2 what each stresses · 7.3 the traps · 7.4 picking one · 7.5 what it costs · 7.6 the rate card</a:t>
+              <a:t>7.1 the difficulty ladder · 7.2 what each stresses · 7.3 the traps · 7.4 picking one · 7.5 what it costs · 7.6 the rate card</a:t>
             </a:r>
           </a:p>
         </p:txBody>

--- a/docs/AutoBench.pptx
+++ b/docs/AutoBench.pptx
@@ -3367,7 +3367,7 @@
                 </a:solidFill>
                 <a:latin typeface="Calibri"/>
               </a:rPr>
-              <a:t>Last modified 2026-09-20 15:27 EDT</a:t>
+              <a:t>Last modified 2026-09-20 20:14 EDT</a:t>
             </a:r>
           </a:p>
         </p:txBody>
@@ -22873,7 +22873,7 @@
                 </a:solidFill>
                 <a:latin typeface="Calibri"/>
               </a:rPr>
-              <a:t>137 OCP rows against 130 KinD. The 7-row gap is appworld tasks that timed out before the harness wrote a row (4 OCP, 11 KinD) — not lost telemetry.</a:t>
+              <a:t>137 OCP rows against 130 KinD. The 7-row gap is appworld tasks that timed out before the Service wrote a row (4 OCP, 11 KinD) — not lost telemetry.</a:t>
             </a:r>
           </a:p>
         </p:txBody>
@@ -26773,7 +26773,7 @@
                 </a:solidFill>
                 <a:latin typeface="Calibri"/>
               </a:rPr>
-              <a:t>Deployment helper for harnessed benchmark workload</a:t>
+              <a:t>Deployment helper for the benchmark workload</a:t>
             </a:r>
           </a:p>
         </p:txBody>
@@ -26828,7 +26828,7 @@
                 </a:solidFill>
                 <a:latin typeface="Calibri"/>
               </a:rPr>
-              <a:t>Harnessed benchmark workload</a:t>
+              <a:t>Benchmark workload (agent + MCP)</a:t>
             </a:r>
           </a:p>
         </p:txBody>
@@ -27814,7 +27814,7 @@
                 </a:solidFill>
                 <a:latin typeface="Calibri"/>
               </a:rPr>
-              <a:t>2  Service → deployment helper:  create the harnessed workload</a:t>
+              <a:t>2  Service → deployment helper:  create the benchmark workload</a:t>
             </a:r>
           </a:p>
           <a:p>
@@ -27830,7 +27830,7 @@
                 </a:solidFill>
                 <a:latin typeface="Calibri"/>
               </a:rPr>
-              <a:t>3  helper → harnessed workload</a:t>
+              <a:t>3  helper → benchmark workload</a:t>
             </a:r>
           </a:p>
           <a:p>
@@ -27846,7 +27846,7 @@
                 </a:solidFill>
                 <a:latin typeface="Calibri"/>
               </a:rPr>
-              <a:t>4  Service → harnessed workload:  run and monitor benchmark execution</a:t>
+              <a:t>4  Service → benchmark workload:  run and monitor execution</a:t>
             </a:r>
           </a:p>
         </p:txBody>

--- a/docs/AutoBench.pptx
+++ b/docs/AutoBench.pptx
@@ -30,6 +30,7 @@
     <p:sldId id="278" r:id="rId29"/>
     <p:sldId id="279" r:id="rId30"/>
     <p:sldId id="280" r:id="rId31"/>
+    <p:sldId id="281" r:id="rId32"/>
   </p:sldIdLst>
   <p:sldSz cx="12192000" cy="6858000" type="screen4x3"/>
   <p:notesSz cx="6858000" cy="9144000"/>
@@ -3367,7 +3368,7 @@
                 </a:solidFill>
                 <a:latin typeface="Calibri"/>
               </a:rPr>
-              <a:t>Last modified 2026-09-20 20:14 EDT</a:t>
+              <a:t>Last modified 2026-09-20 20:58 EDT</a:t>
             </a:r>
           </a:p>
         </p:txBody>
@@ -4135,6 +4136,698 @@
 
 <file path=ppt/slides/slide11.xml><?xml version="1.0" encoding="utf-8"?>
 <p:sld xmlns:a="http://schemas.openxmlformats.org/drawingml/2006/main" xmlns:p="http://schemas.openxmlformats.org/presentationml/2006/main" xmlns:r="http://schemas.openxmlformats.org/officeDocument/2006/relationships">
+  <p:cSld name="6.3 Who Decides What Happens Inside a Task">
+    <p:spTree>
+      <p:nvGrpSpPr>
+        <p:cNvPr id="1" name=""/>
+        <p:cNvGrpSpPr/>
+        <p:nvPr/>
+      </p:nvGrpSpPr>
+      <p:grpSpPr/>
+      <p:sp>
+        <p:nvSpPr>
+          <p:cNvPr id="2" name="Rectangle 1"/>
+          <p:cNvSpPr/>
+          <p:nvPr/>
+        </p:nvSpPr>
+        <p:spPr>
+          <a:xfrm>
+            <a:off x="0" y="0"/>
+            <a:ext cx="12192000" cy="950000"/>
+          </a:xfrm>
+          <a:prstGeom prst="rect">
+            <a:avLst/>
+          </a:prstGeom>
+          <a:solidFill>
+            <a:srgbClr val="1B3A5C"/>
+          </a:solidFill>
+          <a:ln>
+            <a:noFill/>
+          </a:ln>
+          <a:effectLst/>
+        </p:spPr>
+        <p:style>
+          <a:lnRef idx="1">
+            <a:schemeClr val="accent1"/>
+          </a:lnRef>
+          <a:fillRef idx="3">
+            <a:schemeClr val="accent1"/>
+          </a:fillRef>
+          <a:effectRef idx="2">
+            <a:schemeClr val="accent1"/>
+          </a:effectRef>
+          <a:fontRef idx="minor">
+            <a:schemeClr val="lt1"/>
+          </a:fontRef>
+        </p:style>
+        <p:txBody>
+          <a:bodyPr rtlCol="0" anchor="ctr" lIns="355600"/>
+          <a:lstStyle/>
+          <a:p>
+            <a:pPr algn="ctr"/>
+            <a:r>
+              <a:rPr sz="2600" b="1" i="0">
+                <a:solidFill>
+                  <a:srgbClr val="FFFFFF"/>
+                </a:solidFill>
+                <a:latin typeface="Calibri"/>
+              </a:rPr>
+              <a:t>6.3  Who Decides What Happens Inside a Task</a:t>
+            </a:r>
+          </a:p>
+          <a:p>
+            <a:r>
+              <a:rPr sz="1400" b="0" i="0">
+                <a:solidFill>
+                  <a:srgbClr val="C9D9EC"/>
+                </a:solidFill>
+                <a:latin typeface="Calibri"/>
+              </a:rPr>
+              <a:t>The sequence of model calls and tool calls is defined nowhere — the model produces it, step by step</a:t>
+            </a:r>
+          </a:p>
+        </p:txBody>
+      </p:sp>
+      <p:graphicFrame>
+        <p:nvGraphicFramePr>
+          <p:cNvPr id="3" name="Table 2"/>
+          <p:cNvGraphicFramePr>
+            <a:graphicFrameLocks noGrp="1"/>
+          </p:cNvGraphicFramePr>
+          <p:nvPr/>
+        </p:nvGraphicFramePr>
+        <p:xfrm>
+          <a:off x="411480" y="1188720"/>
+          <a:ext cx="11338560" cy="2514600"/>
+        </p:xfrm>
+        <a:graphic>
+          <a:graphicData uri="http://schemas.openxmlformats.org/drawingml/2006/table">
+            <a:tbl>
+              <a:tblPr firstRow="1">
+                <a:tableStyleId>{5C22544A-7EE6-4342-B048-85BDC9FD1C3A}</a:tableStyleId>
+              </a:tblPr>
+              <a:tblGrid>
+                <a:gridCol w="2103120"/>
+                <a:gridCol w="5760720"/>
+                <a:gridCol w="3474720"/>
+              </a:tblGrid>
+              <a:tr h="502920">
+                <a:tc>
+                  <a:txBody>
+                    <a:bodyPr/>
+                    <a:lstStyle/>
+                    <a:p>
+                      <a:pPr algn="l"/>
+                      <a:r>
+                        <a:rPr sz="1150" b="1" i="0">
+                          <a:solidFill>
+                            <a:srgbClr val="FFFFFF"/>
+                          </a:solidFill>
+                          <a:latin typeface="Calibri"/>
+                        </a:rPr>
+                        <a:t>component</a:t>
+                      </a:r>
+                    </a:p>
+                  </a:txBody>
+                  <a:tcPr marL="63500" marR="63500" marT="12700" marB="12700" anchor="ctr">
+                    <a:solidFill>
+                      <a:srgbClr val="1B3A5C"/>
+                    </a:solidFill>
+                  </a:tcPr>
+                </a:tc>
+                <a:tc>
+                  <a:txBody>
+                    <a:bodyPr/>
+                    <a:lstStyle/>
+                    <a:p>
+                      <a:pPr algn="ctr"/>
+                      <a:r>
+                        <a:rPr sz="1150" b="1" i="0">
+                          <a:solidFill>
+                            <a:srgbClr val="FFFFFF"/>
+                          </a:solidFill>
+                          <a:latin typeface="Calibri"/>
+                        </a:rPr>
+                        <a:t>defines</a:t>
+                      </a:r>
+                    </a:p>
+                  </a:txBody>
+                  <a:tcPr marL="63500" marR="63500" marT="12700" marB="12700" anchor="ctr">
+                    <a:solidFill>
+                      <a:srgbClr val="1B3A5C"/>
+                    </a:solidFill>
+                  </a:tcPr>
+                </a:tc>
+                <a:tc>
+                  <a:txBody>
+                    <a:bodyPr/>
+                    <a:lstStyle/>
+                    <a:p>
+                      <a:pPr algn="ctr"/>
+                      <a:r>
+                        <a:rPr sz="1150" b="1" i="0">
+                          <a:solidFill>
+                            <a:srgbClr val="FFFFFF"/>
+                          </a:solidFill>
+                          <a:latin typeface="Calibri"/>
+                        </a:rPr>
+                        <a:t>does NOT define</a:t>
+                      </a:r>
+                    </a:p>
+                  </a:txBody>
+                  <a:tcPr marL="63500" marR="63500" marT="12700" marB="12700" anchor="ctr">
+                    <a:solidFill>
+                      <a:srgbClr val="1B3A5C"/>
+                    </a:solidFill>
+                  </a:tcPr>
+                </a:tc>
+              </a:tr>
+              <a:tr h="502920">
+                <a:tc>
+                  <a:txBody>
+                    <a:bodyPr/>
+                    <a:lstStyle/>
+                    <a:p>
+                      <a:pPr algn="l"/>
+                      <a:r>
+                        <a:rPr sz="1150" b="1" i="0">
+                          <a:solidFill>
+                            <a:srgbClr val="1F2A37"/>
+                          </a:solidFill>
+                          <a:latin typeface="Calibri"/>
+                        </a:rPr>
+                        <a:t>MCP pod</a:t>
+                      </a:r>
+                    </a:p>
+                  </a:txBody>
+                  <a:tcPr marL="63500" marR="63500" marT="12700" marB="12700" anchor="ctr">
+                    <a:solidFill>
+                      <a:srgbClr val="FFFFFF"/>
+                    </a:solidFill>
+                  </a:tcPr>
+                </a:tc>
+                <a:tc>
+                  <a:txBody>
+                    <a:bodyPr/>
+                    <a:lstStyle/>
+                    <a:p>
+                      <a:pPr algn="ctr"/>
+                      <a:r>
+                        <a:rPr sz="1150" b="0" i="0">
+                          <a:solidFill>
+                            <a:srgbClr val="1F2A37"/>
+                          </a:solidFill>
+                          <a:latin typeface="Calibri"/>
+                        </a:rPr>
+                        <a:t>the task list; each task's initial state and instruction; the TOOL SURFACE — names, schemas, semantics, the observations tools return; the EVALUATOR (evaluate_session → verdict)</a:t>
+                      </a:r>
+                    </a:p>
+                  </a:txBody>
+                  <a:tcPr marL="63500" marR="63500" marT="12700" marB="12700" anchor="ctr">
+                    <a:solidFill>
+                      <a:srgbClr val="FFFFFF"/>
+                    </a:solidFill>
+                  </a:tcPr>
+                </a:tc>
+                <a:tc>
+                  <a:txBody>
+                    <a:bodyPr/>
+                    <a:lstStyle/>
+                    <a:p>
+                      <a:pPr algn="ctr"/>
+                      <a:r>
+                        <a:rPr sz="1150" b="0" i="0">
+                          <a:solidFill>
+                            <a:srgbClr val="1F2A37"/>
+                          </a:solidFill>
+                          <a:latin typeface="Calibri"/>
+                        </a:rPr>
+                        <a:t>any ordering.  It answers calls; it never asks for one</a:t>
+                      </a:r>
+                    </a:p>
+                  </a:txBody>
+                  <a:tcPr marL="63500" marR="63500" marT="12700" marB="12700" anchor="ctr">
+                    <a:solidFill>
+                      <a:srgbClr val="FFFFFF"/>
+                    </a:solidFill>
+                  </a:tcPr>
+                </a:tc>
+              </a:tr>
+              <a:tr h="502920">
+                <a:tc>
+                  <a:txBody>
+                    <a:bodyPr/>
+                    <a:lstStyle/>
+                    <a:p>
+                      <a:pPr algn="l"/>
+                      <a:r>
+                        <a:rPr sz="1150" b="1" i="0">
+                          <a:solidFill>
+                            <a:srgbClr val="1F2A37"/>
+                          </a:solidFill>
+                          <a:latin typeface="Calibri"/>
+                        </a:rPr>
+                        <a:t>agent runtime (in the agent image)</a:t>
+                      </a:r>
+                    </a:p>
+                  </a:txBody>
+                  <a:tcPr marL="63500" marR="63500" marT="12700" marB="12700" anchor="ctr">
+                    <a:solidFill>
+                      <a:srgbClr val="F4F6F8"/>
+                    </a:solidFill>
+                  </a:tcPr>
+                </a:tc>
+                <a:tc>
+                  <a:txBody>
+                    <a:bodyPr/>
+                    <a:lstStyle/>
+                    <a:p>
+                      <a:pPr algn="ctr"/>
+                      <a:r>
+                        <a:rPr sz="1150" b="0" i="0">
+                          <a:solidFill>
+                            <a:srgbClr val="1F2A37"/>
+                          </a:solidFill>
+                          <a:latin typeface="Calibri"/>
+                        </a:rPr>
+                        <a:t>the LOOP — model → tool → observation → model — and when to stop</a:t>
+                      </a:r>
+                    </a:p>
+                  </a:txBody>
+                  <a:tcPr marL="63500" marR="63500" marT="12700" marB="12700" anchor="ctr">
+                    <a:solidFill>
+                      <a:srgbClr val="F4F6F8"/>
+                    </a:solidFill>
+                  </a:tcPr>
+                </a:tc>
+                <a:tc>
+                  <a:txBody>
+                    <a:bodyPr/>
+                    <a:lstStyle/>
+                    <a:p>
+                      <a:pPr algn="ctr"/>
+                      <a:r>
+                        <a:rPr sz="1150" b="0" i="0">
+                          <a:solidFill>
+                            <a:srgbClr val="1F2A37"/>
+                          </a:solidFill>
+                          <a:latin typeface="Calibri"/>
+                        </a:rPr>
+                        <a:t>which tool, with which arguments</a:t>
+                      </a:r>
+                    </a:p>
+                  </a:txBody>
+                  <a:tcPr marL="63500" marR="63500" marT="12700" marB="12700" anchor="ctr">
+                    <a:solidFill>
+                      <a:srgbClr val="F4F6F8"/>
+                    </a:solidFill>
+                  </a:tcPr>
+                </a:tc>
+              </a:tr>
+              <a:tr h="502920">
+                <a:tc>
+                  <a:txBody>
+                    <a:bodyPr/>
+                    <a:lstStyle/>
+                    <a:p>
+                      <a:pPr algn="l"/>
+                      <a:r>
+                        <a:rPr sz="1150" b="1" i="0">
+                          <a:solidFill>
+                            <a:srgbClr val="1F2A37"/>
+                          </a:solidFill>
+                          <a:latin typeface="Calibri"/>
+                        </a:rPr>
+                        <a:t>the Service</a:t>
+                      </a:r>
+                    </a:p>
+                  </a:txBody>
+                  <a:tcPr marL="63500" marR="63500" marT="12700" marB="12700" anchor="ctr">
+                    <a:solidFill>
+                      <a:srgbClr val="FFFFFF"/>
+                    </a:solidFill>
+                  </a:tcPr>
+                </a:tc>
+                <a:tc>
+                  <a:txBody>
+                    <a:bodyPr/>
+                    <a:lstStyle/>
+                    <a:p>
+                      <a:pPr algn="ctr"/>
+                      <a:r>
+                        <a:rPr sz="1150" b="0" i="0">
+                          <a:solidFill>
+                            <a:srgbClr val="1F2A37"/>
+                          </a:solidFill>
+                          <a:latin typeface="Calibri"/>
+                        </a:rPr>
+                        <a:t>one prompt per task (runner/prompt.py: the task text plus optional context, no tool instructions), the session lifecycle, the per-task timeout, the telemetry</a:t>
+                      </a:r>
+                    </a:p>
+                  </a:txBody>
+                  <a:tcPr marL="63500" marR="63500" marT="12700" marB="12700" anchor="ctr">
+                    <a:solidFill>
+                      <a:srgbClr val="FFFFFF"/>
+                    </a:solidFill>
+                  </a:tcPr>
+                </a:tc>
+                <a:tc>
+                  <a:txBody>
+                    <a:bodyPr/>
+                    <a:lstStyle/>
+                    <a:p>
+                      <a:pPr algn="ctr"/>
+                      <a:r>
+                        <a:rPr sz="1150" b="0" i="0">
+                          <a:solidFill>
+                            <a:srgbClr val="1F2A37"/>
+                          </a:solidFill>
+                          <a:latin typeface="Calibri"/>
+                        </a:rPr>
+                        <a:t>anything about the trajectory</a:t>
+                      </a:r>
+                    </a:p>
+                  </a:txBody>
+                  <a:tcPr marL="63500" marR="63500" marT="12700" marB="12700" anchor="ctr">
+                    <a:solidFill>
+                      <a:srgbClr val="FFFFFF"/>
+                    </a:solidFill>
+                  </a:tcPr>
+                </a:tc>
+              </a:tr>
+              <a:tr h="502920">
+                <a:tc>
+                  <a:txBody>
+                    <a:bodyPr/>
+                    <a:lstStyle/>
+                    <a:p>
+                      <a:pPr algn="l"/>
+                      <a:r>
+                        <a:rPr sz="1150" b="1" i="0">
+                          <a:solidFill>
+                            <a:srgbClr val="1F2A37"/>
+                          </a:solidFill>
+                          <a:latin typeface="Calibri"/>
+                        </a:rPr>
+                        <a:t>the model</a:t>
+                      </a:r>
+                    </a:p>
+                  </a:txBody>
+                  <a:tcPr marL="63500" marR="63500" marT="12700" marB="12700" anchor="ctr">
+                    <a:solidFill>
+                      <a:srgbClr val="F4F6F8"/>
+                    </a:solidFill>
+                  </a:tcPr>
+                </a:tc>
+                <a:tc>
+                  <a:txBody>
+                    <a:bodyPr/>
+                    <a:lstStyle/>
+                    <a:p>
+                      <a:pPr algn="ctr"/>
+                      <a:r>
+                        <a:rPr sz="1150" b="0" i="0">
+                          <a:solidFill>
+                            <a:srgbClr val="1F2A37"/>
+                          </a:solidFill>
+                          <a:latin typeface="Calibri"/>
+                        </a:rPr>
+                        <a:t>EVERY step</a:t>
+                      </a:r>
+                    </a:p>
+                  </a:txBody>
+                  <a:tcPr marL="63500" marR="63500" marT="12700" marB="12700" anchor="ctr">
+                    <a:solidFill>
+                      <a:srgbClr val="F4F6F8"/>
+                    </a:solidFill>
+                  </a:tcPr>
+                </a:tc>
+                <a:tc>
+                  <a:txBody>
+                    <a:bodyPr/>
+                    <a:lstStyle/>
+                    <a:p>
+                      <a:pPr algn="ctr"/>
+                      <a:r>
+                        <a:rPr sz="1150" b="0" i="0">
+                          <a:solidFill>
+                            <a:srgbClr val="1F2A37"/>
+                          </a:solidFill>
+                          <a:latin typeface="Calibri"/>
+                        </a:rPr>
+                        <a:t>—</a:t>
+                      </a:r>
+                    </a:p>
+                  </a:txBody>
+                  <a:tcPr marL="63500" marR="63500" marT="12700" marB="12700" anchor="ctr">
+                    <a:solidFill>
+                      <a:srgbClr val="F4F6F8"/>
+                    </a:solidFill>
+                  </a:tcPr>
+                </a:tc>
+              </a:tr>
+            </a:tbl>
+          </a:graphicData>
+        </a:graphic>
+      </p:graphicFrame>
+      <p:sp>
+        <p:nvSpPr>
+          <p:cNvPr id="4" name="Rounded Rectangle 3"/>
+          <p:cNvSpPr/>
+          <p:nvPr/>
+        </p:nvSpPr>
+        <p:spPr>
+          <a:xfrm>
+            <a:off x="411480" y="3977639"/>
+            <a:ext cx="5532120" cy="1417320"/>
+          </a:xfrm>
+          <a:prstGeom prst="roundRect">
+            <a:avLst/>
+          </a:prstGeom>
+          <a:solidFill>
+            <a:srgbClr val="E8F1FB"/>
+          </a:solidFill>
+          <a:ln w="12700">
+            <a:solidFill>
+              <a:srgbClr val="2E6FB5"/>
+            </a:solidFill>
+          </a:ln>
+          <a:effectLst/>
+        </p:spPr>
+        <p:style>
+          <a:lnRef idx="1">
+            <a:schemeClr val="accent1"/>
+          </a:lnRef>
+          <a:fillRef idx="3">
+            <a:schemeClr val="accent1"/>
+          </a:fillRef>
+          <a:effectRef idx="2">
+            <a:schemeClr val="accent1"/>
+          </a:effectRef>
+          <a:fontRef idx="minor">
+            <a:schemeClr val="lt1"/>
+          </a:fontRef>
+        </p:style>
+        <p:txBody>
+          <a:bodyPr rtlCol="0" anchor="ctr" wrap="square" tIns="25400" bIns="25400"/>
+          <a:lstStyle/>
+          <a:p>
+            <a:pPr algn="ctr"/>
+            <a:r>
+              <a:rPr sz="1400" b="1" i="0">
+                <a:solidFill>
+                  <a:srgbClr val="2E6FB5"/>
+                </a:solidFill>
+                <a:latin typeface="Calibri"/>
+              </a:rPr>
+              <a:t>Selection is deterministic.  Execution is not.</a:t>
+            </a:r>
+          </a:p>
+          <a:p>
+            <a:pPr algn="ctr"/>
+            <a:r>
+              <a:rPr sz="1100" b="0" i="0">
+                <a:solidFill>
+                  <a:srgbClr val="1F2A37"/>
+                </a:solidFill>
+                <a:latin typeface="Calibri"/>
+              </a:rPr>
+              <a:t>Same task id, same model, same platform, two different legs: tau2 task 2 took 13 chat / 13 tool in one and 9 / 9 in the other; appworld 3d9a636_3 took 20 / 10 and 26 / 13. Of tasks appearing in more than one leg, 8 of 10 tau2 and 3 of 3 appworld differ — the 10 that agree are all gsm8k, where 1 chat / 1 tool leaves nothing to vary.</a:t>
+            </a:r>
+          </a:p>
+        </p:txBody>
+      </p:sp>
+      <p:sp>
+        <p:nvSpPr>
+          <p:cNvPr id="5" name="Rounded Rectangle 4"/>
+          <p:cNvSpPr/>
+          <p:nvPr/>
+        </p:nvSpPr>
+        <p:spPr>
+          <a:xfrm>
+            <a:off x="6217920" y="3977639"/>
+            <a:ext cx="5532120" cy="1417320"/>
+          </a:xfrm>
+          <a:prstGeom prst="roundRect">
+            <a:avLst/>
+          </a:prstGeom>
+          <a:solidFill>
+            <a:srgbClr val="E4F0F0"/>
+          </a:solidFill>
+          <a:ln w="12700">
+            <a:solidFill>
+              <a:srgbClr val="3D6E70"/>
+            </a:solidFill>
+          </a:ln>
+          <a:effectLst/>
+        </p:spPr>
+        <p:style>
+          <a:lnRef idx="1">
+            <a:schemeClr val="accent1"/>
+          </a:lnRef>
+          <a:fillRef idx="3">
+            <a:schemeClr val="accent1"/>
+          </a:fillRef>
+          <a:effectRef idx="2">
+            <a:schemeClr val="accent1"/>
+          </a:effectRef>
+          <a:fontRef idx="minor">
+            <a:schemeClr val="lt1"/>
+          </a:fontRef>
+        </p:style>
+        <p:txBody>
+          <a:bodyPr rtlCol="0" anchor="ctr" wrap="square" tIns="25400" bIns="25400"/>
+          <a:lstStyle/>
+          <a:p>
+            <a:pPr algn="ctr"/>
+            <a:r>
+              <a:rPr sz="1400" b="1" i="0">
+                <a:solidFill>
+                  <a:srgbClr val="3D6E70"/>
+                </a:solidFill>
+                <a:latin typeface="Calibri"/>
+              </a:rPr>
+              <a:t>The stop signal comes from the MCP pod, not from us</a:t>
+            </a:r>
+          </a:p>
+          <a:p>
+            <a:pPr algn="ctr"/>
+            <a:r>
+              <a:rPr sz="1100" b="0" i="0">
+                <a:solidFill>
+                  <a:srgbClr val="1F2A37"/>
+                </a:solidFill>
+                <a:latin typeface="Calibri"/>
+              </a:rPr>
+              <a:t>No terminal tool name exists anywhere in the Service. The agent reads the tool declarations at connect_mcp, and gsm8k's whole first model call is 320 input tokens — system prompt, task text and every schema. It lands: submit 173/173 on gsm8k, finish 34/35 on appworld (the miss timed out), while tau2 has NO terminal tool — 60/60 end on message.</a:t>
+            </a:r>
+          </a:p>
+        </p:txBody>
+      </p:sp>
+      <p:sp>
+        <p:nvSpPr>
+          <p:cNvPr id="6" name="Rounded Rectangle 5"/>
+          <p:cNvSpPr/>
+          <p:nvPr/>
+        </p:nvSpPr>
+        <p:spPr>
+          <a:xfrm>
+            <a:off x="411480" y="5623560"/>
+            <a:ext cx="11338560" cy="777240"/>
+          </a:xfrm>
+          <a:prstGeom prst="roundRect">
+            <a:avLst/>
+          </a:prstGeom>
+          <a:solidFill>
+            <a:srgbClr val="EEEFF1"/>
+          </a:solidFill>
+          <a:ln w="12700">
+            <a:solidFill>
+              <a:srgbClr val="6B6B6B"/>
+            </a:solidFill>
+          </a:ln>
+          <a:effectLst/>
+        </p:spPr>
+        <p:style>
+          <a:lnRef idx="1">
+            <a:schemeClr val="accent1"/>
+          </a:lnRef>
+          <a:fillRef idx="3">
+            <a:schemeClr val="accent1"/>
+          </a:fillRef>
+          <a:effectRef idx="2">
+            <a:schemeClr val="accent1"/>
+          </a:effectRef>
+          <a:fontRef idx="minor">
+            <a:schemeClr val="lt1"/>
+          </a:fontRef>
+        </p:style>
+        <p:txBody>
+          <a:bodyPr rtlCol="0" anchor="ctr" wrap="square" tIns="25400" bIns="25400" lIns="228600" rIns="228600"/>
+          <a:lstStyle/>
+          <a:p>
+            <a:pPr algn="ctr"/>
+            <a:r>
+              <a:rPr sz="1250" b="1" i="0">
+                <a:solidFill>
+                  <a:srgbClr val="1F2A37"/>
+                </a:solidFill>
+                <a:latin typeface="Calibri"/>
+              </a:rPr>
+              <a:t>Why it matters downstream:  grading reads the session's FINAL STATE, never a reference trajectory — so a task can pass by two routes at different token cost.  Per-task cost and latency are distributions, which is why the reports carry CV columns; and an appworld gap between platforms is not automatically a platform difference.</a:t>
+            </a:r>
+          </a:p>
+        </p:txBody>
+      </p:sp>
+      <p:sp>
+        <p:nvSpPr>
+          <p:cNvPr id="7" name="TextBox 6"/>
+          <p:cNvSpPr txBox="1"/>
+          <p:nvPr/>
+        </p:nvSpPr>
+        <p:spPr>
+          <a:xfrm>
+            <a:off x="11795760" y="6437376"/>
+            <a:ext cx="320040" cy="310896"/>
+          </a:xfrm>
+          <a:prstGeom prst="rect">
+            <a:avLst/>
+          </a:prstGeom>
+          <a:noFill/>
+        </p:spPr>
+        <p:txBody>
+          <a:bodyPr wrap="none" anchor="ctr" lIns="0" rIns="0" tIns="0" bIns="0">
+            <a:spAutoFit/>
+          </a:bodyPr>
+          <a:lstStyle/>
+          <a:p>
+            <a:pPr algn="r">
+              <a:spcAft>
+                <a:spcPts val="300"/>
+              </a:spcAft>
+            </a:pPr>
+            <a:r>
+              <a:rPr sz="1200" b="0" i="0">
+                <a:solidFill>
+                  <a:srgbClr val="6B6B6B"/>
+                </a:solidFill>
+                <a:latin typeface="Calibri"/>
+              </a:rPr>
+              <a:t>11</a:t>
+            </a:r>
+          </a:p>
+        </p:txBody>
+      </p:sp>
+    </p:spTree>
+  </p:cSld>
+  <p:clrMapOvr>
+    <a:masterClrMapping/>
+  </p:clrMapOvr>
+</p:sld>
+</file>
+
+<file path=ppt/slides/slide12.xml><?xml version="1.0" encoding="utf-8"?>
+<p:sld xmlns:a="http://schemas.openxmlformats.org/drawingml/2006/main" xmlns:p="http://schemas.openxmlformats.org/presentationml/2006/main" xmlns:r="http://schemas.openxmlformats.org/officeDocument/2006/relationships">
   <p:cSld name="7.1 The Three Benchmarks — a Difficulty Ladder">
     <p:spTree>
       <p:nvGrpSpPr>
@@ -5734,7 +6427,7 @@
                 </a:solidFill>
                 <a:latin typeface="Calibri"/>
               </a:rPr>
-              <a:t>11</a:t>
+              <a:t>12</a:t>
             </a:r>
           </a:p>
         </p:txBody>
@@ -5747,7 +6440,7 @@
 </p:sld>
 </file>
 
-<file path=ppt/slides/slide12.xml><?xml version="1.0" encoding="utf-8"?>
+<file path=ppt/slides/slide13.xml><?xml version="1.0" encoding="utf-8"?>
 <p:sld xmlns:a="http://schemas.openxmlformats.org/drawingml/2006/main" xmlns:p="http://schemas.openxmlformats.org/presentationml/2006/main" xmlns:r="http://schemas.openxmlformats.org/officeDocument/2006/relationships">
   <p:cSld name="7.2 What Each Benchmark Stresses">
     <p:spTree>
@@ -6650,7 +7343,7 @@
                 </a:solidFill>
                 <a:latin typeface="Calibri"/>
               </a:rPr>
-              <a:t>12</a:t>
+              <a:t>13</a:t>
             </a:r>
           </a:p>
         </p:txBody>
@@ -6663,7 +7356,7 @@
 </p:sld>
 </file>
 
-<file path=ppt/slides/slide13.xml><?xml version="1.0" encoding="utf-8"?>
+<file path=ppt/slides/slide14.xml><?xml version="1.0" encoding="utf-8"?>
 <p:sld xmlns:a="http://schemas.openxmlformats.org/drawingml/2006/main" xmlns:p="http://schemas.openxmlformats.org/presentationml/2006/main" xmlns:r="http://schemas.openxmlformats.org/officeDocument/2006/relationships">
   <p:cSld name="7.3 Reading the Numbers — Five Things That Mislead">
     <p:spTree>
@@ -7106,7 +7799,7 @@
                 </a:solidFill>
                 <a:latin typeface="Calibri"/>
               </a:rPr>
-              <a:t>13</a:t>
+              <a:t>14</a:t>
             </a:r>
           </a:p>
         </p:txBody>
@@ -7119,7 +7812,7 @@
 </p:sld>
 </file>
 
-<file path=ppt/slides/slide14.xml><?xml version="1.0" encoding="utf-8"?>
+<file path=ppt/slides/slide15.xml><?xml version="1.0" encoding="utf-8"?>
 <p:sld xmlns:a="http://schemas.openxmlformats.org/drawingml/2006/main" xmlns:p="http://schemas.openxmlformats.org/presentationml/2006/main" xmlns:r="http://schemas.openxmlformats.org/officeDocument/2006/relationships">
   <p:cSld name="7.4 Picking a Benchmark — and What That Leg Costs">
     <p:spTree>
@@ -8951,7 +9644,7 @@
                 </a:solidFill>
                 <a:latin typeface="Calibri"/>
               </a:rPr>
-              <a:t>14</a:t>
+              <a:t>15</a:t>
             </a:r>
           </a:p>
         </p:txBody>
@@ -8964,7 +9657,7 @@
 </p:sld>
 </file>
 
-<file path=ppt/slides/slide15.xml><?xml version="1.0" encoding="utf-8"?>
+<file path=ppt/slides/slide16.xml><?xml version="1.0" encoding="utf-8"?>
 <p:sld xmlns:a="http://schemas.openxmlformats.org/drawingml/2006/main" xmlns:p="http://schemas.openxmlformats.org/presentationml/2006/main" xmlns:r="http://schemas.openxmlformats.org/officeDocument/2006/relationships">
   <p:cSld name="7.5 The Cost Model — Tokens, Models, Money">
     <p:spTree>
@@ -11250,7 +11943,7 @@
                 </a:solidFill>
                 <a:latin typeface="Calibri"/>
               </a:rPr>
-              <a:t>15</a:t>
+              <a:t>16</a:t>
             </a:r>
           </a:p>
         </p:txBody>
@@ -11263,7 +11956,7 @@
 </p:sld>
 </file>
 
-<file path=ppt/slides/slide16.xml><?xml version="1.0" encoding="utf-8"?>
+<file path=ppt/slides/slide17.xml><?xml version="1.0" encoding="utf-8"?>
 <p:sld xmlns:a="http://schemas.openxmlformats.org/drawingml/2006/main" xmlns:p="http://schemas.openxmlformats.org/presentationml/2006/main" xmlns:r="http://schemas.openxmlformats.org/officeDocument/2006/relationships">
   <p:cSld name="7.6 The Rate Card — and Which Way the Dollars Are Wrong">
     <p:spTree>
@@ -12302,7 +12995,7 @@
                 </a:solidFill>
                 <a:latin typeface="Calibri"/>
               </a:rPr>
-              <a:t>16</a:t>
+              <a:t>17</a:t>
             </a:r>
           </a:p>
         </p:txBody>
@@ -12315,7 +13008,7 @@
 </p:sld>
 </file>
 
-<file path=ppt/slides/slide17.xml><?xml version="1.0" encoding="utf-8"?>
+<file path=ppt/slides/slide18.xml><?xml version="1.0" encoding="utf-8"?>
 <p:sld xmlns:a="http://schemas.openxmlformats.org/drawingml/2006/main" xmlns:p="http://schemas.openxmlformats.org/presentationml/2006/main" xmlns:r="http://schemas.openxmlformats.org/officeDocument/2006/relationships">
   <p:cSld name="7.7 Token- and Cost-Efficiency — Where the Money Actually Goes">
     <p:spTree>
@@ -12696,7 +13389,7 @@
                 </a:solidFill>
                 <a:latin typeface="Calibri"/>
               </a:rPr>
-              <a:t>17</a:t>
+              <a:t>18</a:t>
             </a:r>
           </a:p>
         </p:txBody>
@@ -12709,7 +13402,7 @@
 </p:sld>
 </file>
 
-<file path=ppt/slides/slide18.xml><?xml version="1.0" encoding="utf-8"?>
+<file path=ppt/slides/slide19.xml><?xml version="1.0" encoding="utf-8"?>
 <p:sld xmlns:a="http://schemas.openxmlformats.org/drawingml/2006/main" xmlns:p="http://schemas.openxmlformats.org/presentationml/2006/main" xmlns:r="http://schemas.openxmlformats.org/officeDocument/2006/relationships">
   <p:cSld name="7.8 Token- and Cost-Efficiency — What To Budget, and What To Divide By">
     <p:spTree>
@@ -13090,985 +13783,6 @@
                 </a:solidFill>
                 <a:latin typeface="Calibri"/>
               </a:rPr>
-              <a:t>18</a:t>
-            </a:r>
-          </a:p>
-        </p:txBody>
-      </p:sp>
-    </p:spTree>
-  </p:cSld>
-  <p:clrMapOvr>
-    <a:masterClrMapping/>
-  </p:clrMapOvr>
-</p:sld>
-</file>
-
-<file path=ppt/slides/slide19.xml><?xml version="1.0" encoding="utf-8"?>
-<p:sld xmlns:a="http://schemas.openxmlformats.org/drawingml/2006/main" xmlns:p="http://schemas.openxmlformats.org/presentationml/2006/main" xmlns:r="http://schemas.openxmlformats.org/officeDocument/2006/relationships">
-  <p:cSld name="7.9 The Three Benchmarks Compared — Task, Purpose, Worth">
-    <p:spTree>
-      <p:nvGrpSpPr>
-        <p:cNvPr id="1" name=""/>
-        <p:cNvGrpSpPr/>
-        <p:nvPr/>
-      </p:nvGrpSpPr>
-      <p:grpSpPr/>
-      <p:sp>
-        <p:nvSpPr>
-          <p:cNvPr id="2" name="Rectangle 1"/>
-          <p:cNvSpPr/>
-          <p:nvPr/>
-        </p:nvSpPr>
-        <p:spPr>
-          <a:xfrm>
-            <a:off x="0" y="0"/>
-            <a:ext cx="12192000" cy="950000"/>
-          </a:xfrm>
-          <a:prstGeom prst="rect">
-            <a:avLst/>
-          </a:prstGeom>
-          <a:solidFill>
-            <a:srgbClr val="1B3A5C"/>
-          </a:solidFill>
-          <a:ln>
-            <a:noFill/>
-          </a:ln>
-          <a:effectLst/>
-        </p:spPr>
-        <p:style>
-          <a:lnRef idx="1">
-            <a:schemeClr val="accent1"/>
-          </a:lnRef>
-          <a:fillRef idx="3">
-            <a:schemeClr val="accent1"/>
-          </a:fillRef>
-          <a:effectRef idx="2">
-            <a:schemeClr val="accent1"/>
-          </a:effectRef>
-          <a:fontRef idx="minor">
-            <a:schemeClr val="lt1"/>
-          </a:fontRef>
-        </p:style>
-        <p:txBody>
-          <a:bodyPr rtlCol="0" anchor="ctr" lIns="355600"/>
-          <a:lstStyle/>
-          <a:p>
-            <a:pPr algn="ctr"/>
-            <a:r>
-              <a:rPr sz="2600" b="1" i="0">
-                <a:solidFill>
-                  <a:srgbClr val="FFFFFF"/>
-                </a:solidFill>
-                <a:latin typeface="Calibri"/>
-              </a:rPr>
-              <a:t>7.9  The Three Benchmarks Compared — Task, Purpose, Worth</a:t>
-            </a:r>
-          </a:p>
-          <a:p>
-            <a:r>
-              <a:rPr sz="1400" b="0" i="0">
-                <a:solidFill>
-                  <a:srgbClr val="C9D9EC"/>
-                </a:solidFill>
-                <a:latin typeface="Calibri"/>
-              </a:rPr>
-              <a:t>They differ in the SHAPE of a task, not just its size — which is what makes the ladder a ladder</a:t>
-            </a:r>
-          </a:p>
-        </p:txBody>
-      </p:sp>
-      <p:graphicFrame>
-        <p:nvGraphicFramePr>
-          <p:cNvPr id="3" name="Table 2"/>
-          <p:cNvGraphicFramePr>
-            <a:graphicFrameLocks noGrp="1"/>
-          </p:cNvGraphicFramePr>
-          <p:nvPr/>
-        </p:nvGraphicFramePr>
-        <p:xfrm>
-          <a:off x="411480" y="1143000"/>
-          <a:ext cx="11338560" cy="4297680"/>
-        </p:xfrm>
-        <a:graphic>
-          <a:graphicData uri="http://schemas.openxmlformats.org/drawingml/2006/table">
-            <a:tbl>
-              <a:tblPr firstRow="1">
-                <a:tableStyleId>{5C22544A-7EE6-4342-B048-85BDC9FD1C3A}</a:tableStyleId>
-              </a:tblPr>
-              <a:tblGrid>
-                <a:gridCol w="2011680"/>
-                <a:gridCol w="3063240"/>
-                <a:gridCol w="3154680"/>
-                <a:gridCol w="3108960"/>
-              </a:tblGrid>
-              <a:tr h="537210">
-                <a:tc>
-                  <a:txBody>
-                    <a:bodyPr/>
-                    <a:lstStyle/>
-                    <a:p>
-                      <a:pPr algn="l"/>
-                      <a:r>
-                        <a:rPr sz="1050" b="1" i="0">
-                          <a:solidFill>
-                            <a:srgbClr val="FFFFFF"/>
-                          </a:solidFill>
-                          <a:latin typeface="Calibri"/>
-                        </a:rPr>
-                        <a:t/>
-                      </a:r>
-                    </a:p>
-                  </a:txBody>
-                  <a:tcPr marL="63500" marR="63500" marT="12700" marB="12700" anchor="ctr">
-                    <a:solidFill>
-                      <a:srgbClr val="1B3A5C"/>
-                    </a:solidFill>
-                  </a:tcPr>
-                </a:tc>
-                <a:tc>
-                  <a:txBody>
-                    <a:bodyPr/>
-                    <a:lstStyle/>
-                    <a:p>
-                      <a:pPr algn="ctr"/>
-                      <a:r>
-                        <a:rPr sz="1050" b="1" i="0">
-                          <a:solidFill>
-                            <a:srgbClr val="FFFFFF"/>
-                          </a:solidFill>
-                          <a:latin typeface="Calibri"/>
-                        </a:rPr>
-                        <a:t>gsm8k</a:t>
-                      </a:r>
-                    </a:p>
-                  </a:txBody>
-                  <a:tcPr marL="63500" marR="63500" marT="12700" marB="12700" anchor="ctr">
-                    <a:solidFill>
-                      <a:srgbClr val="1B3A5C"/>
-                    </a:solidFill>
-                  </a:tcPr>
-                </a:tc>
-                <a:tc>
-                  <a:txBody>
-                    <a:bodyPr/>
-                    <a:lstStyle/>
-                    <a:p>
-                      <a:pPr algn="ctr"/>
-                      <a:r>
-                        <a:rPr sz="1050" b="1" i="0">
-                          <a:solidFill>
-                            <a:srgbClr val="FFFFFF"/>
-                          </a:solidFill>
-                          <a:latin typeface="Calibri"/>
-                        </a:rPr>
-                        <a:t>tau2</a:t>
-                      </a:r>
-                    </a:p>
-                  </a:txBody>
-                  <a:tcPr marL="63500" marR="63500" marT="12700" marB="12700" anchor="ctr">
-                    <a:solidFill>
-                      <a:srgbClr val="1B3A5C"/>
-                    </a:solidFill>
-                  </a:tcPr>
-                </a:tc>
-                <a:tc>
-                  <a:txBody>
-                    <a:bodyPr/>
-                    <a:lstStyle/>
-                    <a:p>
-                      <a:pPr algn="ctr"/>
-                      <a:r>
-                        <a:rPr sz="1050" b="1" i="0">
-                          <a:solidFill>
-                            <a:srgbClr val="FFFFFF"/>
-                          </a:solidFill>
-                          <a:latin typeface="Calibri"/>
-                        </a:rPr>
-                        <a:t>appworld</a:t>
-                      </a:r>
-                    </a:p>
-                  </a:txBody>
-                  <a:tcPr marL="63500" marR="63500" marT="12700" marB="12700" anchor="ctr">
-                    <a:solidFill>
-                      <a:srgbClr val="1B3A5C"/>
-                    </a:solidFill>
-                  </a:tcPr>
-                </a:tc>
-              </a:tr>
-              <a:tr h="537210">
-                <a:tc>
-                  <a:txBody>
-                    <a:bodyPr/>
-                    <a:lstStyle/>
-                    <a:p>
-                      <a:pPr algn="l"/>
-                      <a:r>
-                        <a:rPr sz="1050" b="1" i="0">
-                          <a:solidFill>
-                            <a:srgbClr val="1F2A37"/>
-                          </a:solidFill>
-                          <a:latin typeface="Calibri"/>
-                        </a:rPr>
-                        <a:t>A task IS</a:t>
-                      </a:r>
-                    </a:p>
-                  </a:txBody>
-                  <a:tcPr marL="63500" marR="63500" marT="12700" marB="12700" anchor="ctr">
-                    <a:solidFill>
-                      <a:srgbClr val="FFFFFF"/>
-                    </a:solidFill>
-                  </a:tcPr>
-                </a:tc>
-                <a:tc>
-                  <a:txBody>
-                    <a:bodyPr/>
-                    <a:lstStyle/>
-                    <a:p>
-                      <a:pPr algn="l"/>
-                      <a:r>
-                        <a:rPr sz="1050" b="0" i="0">
-                          <a:solidFill>
-                            <a:srgbClr val="1F2A37"/>
-                          </a:solidFill>
-                          <a:latin typeface="Calibri"/>
-                        </a:rPr>
-                        <a:t>one grade-school word problem,
-answered in text</a:t>
-                      </a:r>
-                    </a:p>
-                  </a:txBody>
-                  <a:tcPr marL="63500" marR="63500" marT="12700" marB="12700" anchor="ctr">
-                    <a:solidFill>
-                      <a:srgbClr val="FFFFFF"/>
-                    </a:solidFill>
-                  </a:tcPr>
-                </a:tc>
-                <a:tc>
-                  <a:txBody>
-                    <a:bodyPr/>
-                    <a:lstStyle/>
-                    <a:p>
-                      <a:pPr algn="l"/>
-                      <a:r>
-                        <a:rPr sz="1050" b="0" i="0">
-                          <a:solidFill>
-                            <a:srgbClr val="1F2A37"/>
-                          </a:solidFill>
-                          <a:latin typeface="Calibri"/>
-                        </a:rPr>
-                        <a:t>one retail customer-service
-conversation vs a simulated user</a:t>
-                      </a:r>
-                    </a:p>
-                  </a:txBody>
-                  <a:tcPr marL="63500" marR="63500" marT="12700" marB="12700" anchor="ctr">
-                    <a:solidFill>
-                      <a:srgbClr val="FFFFFF"/>
-                    </a:solidFill>
-                  </a:tcPr>
-                </a:tc>
-                <a:tc>
-                  <a:txBody>
-                    <a:bodyPr/>
-                    <a:lstStyle/>
-                    <a:p>
-                      <a:pPr algn="l"/>
-                      <a:r>
-                        <a:rPr sz="1050" b="0" i="0">
-                          <a:solidFill>
-                            <a:srgbClr val="1F2A37"/>
-                          </a:solidFill>
-                          <a:latin typeface="Calibri"/>
-                        </a:rPr>
-                        <a:t>one multi-app scenario automated
-through an API surface</a:t>
-                      </a:r>
-                    </a:p>
-                  </a:txBody>
-                  <a:tcPr marL="63500" marR="63500" marT="12700" marB="12700" anchor="ctr">
-                    <a:solidFill>
-                      <a:srgbClr val="FFFFFF"/>
-                    </a:solidFill>
-                  </a:tcPr>
-                </a:tc>
-              </a:tr>
-              <a:tr h="537210">
-                <a:tc>
-                  <a:txBody>
-                    <a:bodyPr/>
-                    <a:lstStyle/>
-                    <a:p>
-                      <a:pPr algn="l"/>
-                      <a:r>
-                        <a:rPr sz="1050" b="1" i="0">
-                          <a:solidFill>
-                            <a:srgbClr val="1F2A37"/>
-                          </a:solidFill>
-                          <a:latin typeface="Calibri"/>
-                        </a:rPr>
-                        <a:t>Turn structure</a:t>
-                      </a:r>
-                    </a:p>
-                  </a:txBody>
-                  <a:tcPr marL="63500" marR="63500" marT="12700" marB="12700" anchor="ctr">
-                    <a:solidFill>
-                      <a:srgbClr val="F4F6F8"/>
-                    </a:solidFill>
-                  </a:tcPr>
-                </a:tc>
-                <a:tc>
-                  <a:txBody>
-                    <a:bodyPr/>
-                    <a:lstStyle/>
-                    <a:p>
-                      <a:pPr algn="l"/>
-                      <a:r>
-                        <a:rPr sz="1050" b="0" i="0">
-                          <a:solidFill>
-                            <a:srgbClr val="1F2A37"/>
-                          </a:solidFill>
-                          <a:latin typeface="Calibri"/>
-                        </a:rPr>
-                        <a:t>1 model call, ~1 tool call</a:t>
-                      </a:r>
-                    </a:p>
-                  </a:txBody>
-                  <a:tcPr marL="63500" marR="63500" marT="12700" marB="12700" anchor="ctr">
-                    <a:solidFill>
-                      <a:srgbClr val="F4F6F8"/>
-                    </a:solidFill>
-                  </a:tcPr>
-                </a:tc>
-                <a:tc>
-                  <a:txBody>
-                    <a:bodyPr/>
-                    <a:lstStyle/>
-                    <a:p>
-                      <a:pPr algn="l"/>
-                      <a:r>
-                        <a:rPr sz="1050" b="0" i="0">
-                          <a:solidFill>
-                            <a:srgbClr val="1F2A37"/>
-                          </a:solidFill>
-                          <a:latin typeface="Calibri"/>
-                        </a:rPr>
-                        <a:t>~11 calls alternating with a
-USER SIMULATOR in character</a:t>
-                      </a:r>
-                    </a:p>
-                  </a:txBody>
-                  <a:tcPr marL="63500" marR="63500" marT="12700" marB="12700" anchor="ctr">
-                    <a:solidFill>
-                      <a:srgbClr val="F4F6F8"/>
-                    </a:solidFill>
-                  </a:tcPr>
-                </a:tc>
-                <a:tc>
-                  <a:txBody>
-                    <a:bodyPr/>
-                    <a:lstStyle/>
-                    <a:p>
-                      <a:pPr algn="l"/>
-                      <a:r>
-                        <a:rPr sz="1050" b="0" i="0">
-                          <a:solidFill>
-                            <a:srgbClr val="1F2A37"/>
-                          </a:solidFill>
-                          <a:latin typeface="Calibri"/>
-                        </a:rPr>
-                        <a:t>~29 calls, each re-sending the
-whole conversation</a:t>
-                      </a:r>
-                    </a:p>
-                  </a:txBody>
-                  <a:tcPr marL="63500" marR="63500" marT="12700" marB="12700" anchor="ctr">
-                    <a:solidFill>
-                      <a:srgbClr val="F4F6F8"/>
-                    </a:solidFill>
-                  </a:tcPr>
-                </a:tc>
-              </a:tr>
-              <a:tr h="537210">
-                <a:tc>
-                  <a:txBody>
-                    <a:bodyPr/>
-                    <a:lstStyle/>
-                    <a:p>
-                      <a:pPr algn="l"/>
-                      <a:r>
-                        <a:rPr sz="1050" b="1" i="0">
-                          <a:solidFill>
-                            <a:srgbClr val="1F2A37"/>
-                          </a:solidFill>
-                          <a:latin typeface="Calibri"/>
-                        </a:rPr>
-                        <a:t>Ends when</a:t>
-                      </a:r>
-                    </a:p>
-                  </a:txBody>
-                  <a:tcPr marL="63500" marR="63500" marT="12700" marB="12700" anchor="ctr">
-                    <a:solidFill>
-                      <a:srgbClr val="FFFFFF"/>
-                    </a:solidFill>
-                  </a:tcPr>
-                </a:tc>
-                <a:tc>
-                  <a:txBody>
-                    <a:bodyPr/>
-                    <a:lstStyle/>
-                    <a:p>
-                      <a:pPr algn="l"/>
-                      <a:r>
-                        <a:rPr sz="1050" b="0" i="0">
-                          <a:solidFill>
-                            <a:srgbClr val="1F2A37"/>
-                          </a:solidFill>
-                          <a:latin typeface="Calibri"/>
-                        </a:rPr>
-                        <a:t>the answer is emitted</a:t>
-                      </a:r>
-                    </a:p>
-                  </a:txBody>
-                  <a:tcPr marL="63500" marR="63500" marT="12700" marB="12700" anchor="ctr">
-                    <a:solidFill>
-                      <a:srgbClr val="FFFFFF"/>
-                    </a:solidFill>
-                  </a:tcPr>
-                </a:tc>
-                <a:tc>
-                  <a:txBody>
-                    <a:bodyPr/>
-                    <a:lstStyle/>
-                    <a:p>
-                      <a:pPr algn="l"/>
-                      <a:r>
-                        <a:rPr sz="1050" b="0" i="0">
-                          <a:solidFill>
-                            <a:srgbClr val="1F2A37"/>
-                          </a:solidFill>
-                          <a:latin typeface="Calibri"/>
-                        </a:rPr>
-                        <a:t>the dialogue resolves, or policy
-is violated</a:t>
-                      </a:r>
-                    </a:p>
-                  </a:txBody>
-                  <a:tcPr marL="63500" marR="63500" marT="12700" marB="12700" anchor="ctr">
-                    <a:solidFill>
-                      <a:srgbClr val="FFFFFF"/>
-                    </a:solidFill>
-                  </a:tcPr>
-                </a:tc>
-                <a:tc>
-                  <a:txBody>
-                    <a:bodyPr/>
-                    <a:lstStyle/>
-                    <a:p>
-                      <a:pPr algn="l"/>
-                      <a:r>
-                        <a:rPr sz="1050" b="0" i="0">
-                          <a:solidFill>
-                            <a:srgbClr val="1F2A37"/>
-                          </a:solidFill>
-                          <a:latin typeface="Calibri"/>
-                        </a:rPr>
-                        <a:t>the goal state is reached — or the
-600 s task timeout kills it</a:t>
-                      </a:r>
-                    </a:p>
-                  </a:txBody>
-                  <a:tcPr marL="63500" marR="63500" marT="12700" marB="12700" anchor="ctr">
-                    <a:solidFill>
-                      <a:srgbClr val="FFFFFF"/>
-                    </a:solidFill>
-                  </a:tcPr>
-                </a:tc>
-              </a:tr>
-              <a:tr h="537210">
-                <a:tc>
-                  <a:txBody>
-                    <a:bodyPr/>
-                    <a:lstStyle/>
-                    <a:p>
-                      <a:pPr algn="l"/>
-                      <a:r>
-                        <a:rPr sz="1050" b="1" i="0">
-                          <a:solidFill>
-                            <a:srgbClr val="1F2A37"/>
-                          </a:solidFill>
-                          <a:latin typeface="Calibri"/>
-                        </a:rPr>
-                        <a:t>Scored by</a:t>
-                      </a:r>
-                    </a:p>
-                  </a:txBody>
-                  <a:tcPr marL="63500" marR="63500" marT="12700" marB="12700" anchor="ctr">
-                    <a:solidFill>
-                      <a:srgbClr val="F4F6F8"/>
-                    </a:solidFill>
-                  </a:tcPr>
-                </a:tc>
-                <a:tc>
-                  <a:txBody>
-                    <a:bodyPr/>
-                    <a:lstStyle/>
-                    <a:p>
-                      <a:pPr algn="l"/>
-                      <a:r>
-                        <a:rPr sz="1050" b="0" i="0">
-                          <a:solidFill>
-                            <a:srgbClr val="1F2A37"/>
-                          </a:solidFill>
-                          <a:latin typeface="Calibri"/>
-                        </a:rPr>
-                        <a:t>exact numeric match</a:t>
-                      </a:r>
-                    </a:p>
-                  </a:txBody>
-                  <a:tcPr marL="63500" marR="63500" marT="12700" marB="12700" anchor="ctr">
-                    <a:solidFill>
-                      <a:srgbClr val="F4F6F8"/>
-                    </a:solidFill>
-                  </a:tcPr>
-                </a:tc>
-                <a:tc>
-                  <a:txBody>
-                    <a:bodyPr/>
-                    <a:lstStyle/>
-                    <a:p>
-                      <a:pPr algn="l"/>
-                      <a:r>
-                        <a:rPr sz="1050" b="0" i="0">
-                          <a:solidFill>
-                            <a:srgbClr val="1F2A37"/>
-                          </a:solidFill>
-                          <a:latin typeface="Calibri"/>
-                        </a:rPr>
-                        <a:t>task completion + policy
-compliance (tau2's own scorer)</a:t>
-                      </a:r>
-                    </a:p>
-                  </a:txBody>
-                  <a:tcPr marL="63500" marR="63500" marT="12700" marB="12700" anchor="ctr">
-                    <a:solidFill>
-                      <a:srgbClr val="F4F6F8"/>
-                    </a:solidFill>
-                  </a:tcPr>
-                </a:tc>
-                <a:tc>
-                  <a:txBody>
-                    <a:bodyPr/>
-                    <a:lstStyle/>
-                    <a:p>
-                      <a:pPr algn="l"/>
-                      <a:r>
-                        <a:rPr sz="1050" b="0" i="0">
-                          <a:solidFill>
-                            <a:srgbClr val="1F2A37"/>
-                          </a:solidFill>
-                          <a:latin typeface="Calibri"/>
-                        </a:rPr>
-                        <a:t>appworld's state assertions,
-all-or-nothing</a:t>
-                      </a:r>
-                    </a:p>
-                  </a:txBody>
-                  <a:tcPr marL="63500" marR="63500" marT="12700" marB="12700" anchor="ctr">
-                    <a:solidFill>
-                      <a:srgbClr val="F4F6F8"/>
-                    </a:solidFill>
-                  </a:tcPr>
-                </a:tc>
-              </a:tr>
-              <a:tr h="537210">
-                <a:tc>
-                  <a:txBody>
-                    <a:bodyPr/>
-                    <a:lstStyle/>
-                    <a:p>
-                      <a:pPr algn="l"/>
-                      <a:r>
-                        <a:rPr sz="1050" b="1" i="0">
-                          <a:solidFill>
-                            <a:srgbClr val="1F2A37"/>
-                          </a:solidFill>
-                          <a:latin typeface="Calibri"/>
-                        </a:rPr>
-                        <a:t>It exists to test</a:t>
-                      </a:r>
-                    </a:p>
-                  </a:txBody>
-                  <a:tcPr marL="63500" marR="63500" marT="12700" marB="12700" anchor="ctr">
-                    <a:solidFill>
-                      <a:srgbClr val="FFFFFF"/>
-                    </a:solidFill>
-                  </a:tcPr>
-                </a:tc>
-                <a:tc>
-                  <a:txBody>
-                    <a:bodyPr/>
-                    <a:lstStyle/>
-                    <a:p>
-                      <a:pPr algn="l"/>
-                      <a:r>
-                        <a:rPr sz="1050" b="0" i="0">
-                          <a:solidFill>
-                            <a:srgbClr val="1F2A37"/>
-                          </a:solidFill>
-                          <a:latin typeface="Calibri"/>
-                        </a:rPr>
-                        <a:t>that the PLUMBING works:
-deploy, auth, telemetry, S3</a:t>
-                      </a:r>
-                    </a:p>
-                  </a:txBody>
-                  <a:tcPr marL="63500" marR="63500" marT="12700" marB="12700" anchor="ctr">
-                    <a:solidFill>
-                      <a:srgbClr val="FFFFFF"/>
-                    </a:solidFill>
-                  </a:tcPr>
-                </a:tc>
-                <a:tc>
-                  <a:txBody>
-                    <a:bodyPr/>
-                    <a:lstStyle/>
-                    <a:p>
-                      <a:pPr algn="l"/>
-                      <a:r>
-                        <a:rPr sz="1050" b="0" i="0">
-                          <a:solidFill>
-                            <a:srgbClr val="1F2A37"/>
-                          </a:solidFill>
-                          <a:latin typeface="Calibri"/>
-                        </a:rPr>
-                        <a:t>that the agent HOLDS STATE
-across turns and uses tools
-under a policy</a:t>
-                      </a:r>
-                    </a:p>
-                  </a:txBody>
-                  <a:tcPr marL="63500" marR="63500" marT="12700" marB="12700" anchor="ctr">
-                    <a:solidFill>
-                      <a:srgbClr val="FFFFFF"/>
-                    </a:solidFill>
-                  </a:tcPr>
-                </a:tc>
-                <a:tc>
-                  <a:txBody>
-                    <a:bodyPr/>
-                    <a:lstStyle/>
-                    <a:p>
-                      <a:pPr algn="l"/>
-                      <a:r>
-                        <a:rPr sz="1050" b="0" i="0">
-                          <a:solidFill>
-                            <a:srgbClr val="1F2A37"/>
-                          </a:solidFill>
-                          <a:latin typeface="Calibri"/>
-                        </a:rPr>
-                        <a:t>that the agent survives LONG
-HORIZONS: context growth,
-timeouts, partial failure</a:t>
-                      </a:r>
-                    </a:p>
-                  </a:txBody>
-                  <a:tcPr marL="63500" marR="63500" marT="12700" marB="12700" anchor="ctr">
-                    <a:solidFill>
-                      <a:srgbClr val="FFFFFF"/>
-                    </a:solidFill>
-                  </a:tcPr>
-                </a:tc>
-              </a:tr>
-              <a:tr h="537210">
-                <a:tc>
-                  <a:txBody>
-                    <a:bodyPr/>
-                    <a:lstStyle/>
-                    <a:p>
-                      <a:pPr algn="l"/>
-                      <a:r>
-                        <a:rPr sz="1050" b="1" i="0">
-                          <a:solidFill>
-                            <a:srgbClr val="1F2A37"/>
-                          </a:solidFill>
-                          <a:latin typeface="Calibri"/>
-                        </a:rPr>
-                        <a:t>A result is worth</a:t>
-                      </a:r>
-                    </a:p>
-                  </a:txBody>
-                  <a:tcPr marL="63500" marR="63500" marT="12700" marB="12700" anchor="ctr">
-                    <a:solidFill>
-                      <a:srgbClr val="F4F6F8"/>
-                    </a:solidFill>
-                  </a:tcPr>
-                </a:tc>
-                <a:tc>
-                  <a:txBody>
-                    <a:bodyPr/>
-                    <a:lstStyle/>
-                    <a:p>
-                      <a:pPr algn="l"/>
-                      <a:r>
-                        <a:rPr sz="1050" b="0" i="0">
-                          <a:solidFill>
-                            <a:srgbClr val="1F2A37"/>
-                          </a:solidFill>
-                          <a:latin typeface="Calibri"/>
-                        </a:rPr>
-                        <a:t>a go/no-go on infrastructure.
-It saturates near 1.0, so it
-cannot rank models</a:t>
-                      </a:r>
-                    </a:p>
-                  </a:txBody>
-                  <a:tcPr marL="63500" marR="63500" marT="12700" marB="12700" anchor="ctr">
-                    <a:solidFill>
-                      <a:srgbClr val="F4F6F8"/>
-                    </a:solidFill>
-                  </a:tcPr>
-                </a:tc>
-                <a:tc>
-                  <a:txBody>
-                    <a:bodyPr/>
-                    <a:lstStyle/>
-                    <a:p>
-                      <a:pPr algn="l"/>
-                      <a:r>
-                        <a:rPr sz="1050" b="0" i="0">
-                          <a:solidFill>
-                            <a:srgbClr val="1F2A37"/>
-                          </a:solidFill>
-                          <a:latin typeface="Calibri"/>
-                        </a:rPr>
-                        <a:t>a genuine model/config
-comparison — it discriminates,
-and 0.83 leaves headroom both ways</a:t>
-                      </a:r>
-                    </a:p>
-                  </a:txBody>
-                  <a:tcPr marL="63500" marR="63500" marT="12700" marB="12700" anchor="ctr">
-                    <a:solidFill>
-                      <a:srgbClr val="F4F6F8"/>
-                    </a:solidFill>
-                  </a:tcPr>
-                </a:tc>
-                <a:tc>
-                  <a:txBody>
-                    <a:bodyPr/>
-                    <a:lstStyle/>
-                    <a:p>
-                      <a:pPr algn="l"/>
-                      <a:r>
-                        <a:rPr sz="1050" b="0" i="0">
-                          <a:solidFill>
-                            <a:srgbClr val="1F2A37"/>
-                          </a:solidFill>
-                          <a:latin typeface="Calibri"/>
-                        </a:rPr>
-                        <a:t>a stress signal, not a capability
-score: at 0.00 it tells you what
-BREAKS, not who is better</a:t>
-                      </a:r>
-                    </a:p>
-                  </a:txBody>
-                  <a:tcPr marL="63500" marR="63500" marT="12700" marB="12700" anchor="ctr">
-                    <a:solidFill>
-                      <a:srgbClr val="F4F6F8"/>
-                    </a:solidFill>
-                  </a:tcPr>
-                </a:tc>
-              </a:tr>
-              <a:tr h="537210">
-                <a:tc>
-                  <a:txBody>
-                    <a:bodyPr/>
-                    <a:lstStyle/>
-                    <a:p>
-                      <a:pPr algn="l"/>
-                      <a:r>
-                        <a:rPr sz="1050" b="1" i="0">
-                          <a:solidFill>
-                            <a:srgbClr val="1F2A37"/>
-                          </a:solidFill>
-                          <a:latin typeface="Calibri"/>
-                        </a:rPr>
-                        <a:t>Watch out for</a:t>
-                      </a:r>
-                    </a:p>
-                  </a:txBody>
-                  <a:tcPr marL="63500" marR="63500" marT="12700" marB="12700" anchor="ctr">
-                    <a:solidFill>
-                      <a:srgbClr val="FFFFFF"/>
-                    </a:solidFill>
-                  </a:tcPr>
-                </a:tc>
-                <a:tc>
-                  <a:txBody>
-                    <a:bodyPr/>
-                    <a:lstStyle/>
-                    <a:p>
-                      <a:pPr algn="l"/>
-                      <a:r>
-                        <a:rPr sz="1050" b="0" i="0">
-                          <a:solidFill>
-                            <a:srgbClr val="1F2A37"/>
-                          </a:solidFill>
-                          <a:latin typeface="Calibri"/>
-                        </a:rPr>
-                        <a:t>1.0 proves nothing about
-the agent</a:t>
-                      </a:r>
-                    </a:p>
-                  </a:txBody>
-                  <a:tcPr marL="63500" marR="63500" marT="12700" marB="12700" anchor="ctr">
-                    <a:solidFill>
-                      <a:srgbClr val="FFFFFF"/>
-                    </a:solidFill>
-                  </a:tcPr>
-                </a:tc>
-                <a:tc>
-                  <a:txBody>
-                    <a:bodyPr/>
-                    <a:lstStyle/>
-                    <a:p>
-                      <a:pPr algn="l"/>
-                      <a:r>
-                        <a:rPr sz="1050" b="0" i="0">
-                          <a:solidFill>
-                            <a:srgbClr val="1F2A37"/>
-                          </a:solidFill>
-                          <a:latin typeface="Calibri"/>
-                        </a:rPr>
-                        <a:t>its user simulator is billed
-but NOT in our telemetry</a:t>
-                      </a:r>
-                    </a:p>
-                  </a:txBody>
-                  <a:tcPr marL="63500" marR="63500" marT="12700" marB="12700" anchor="ctr">
-                    <a:solidFill>
-                      <a:srgbClr val="FFFFFF"/>
-                    </a:solidFill>
-                  </a:tcPr>
-                </a:tc>
-                <a:tc>
-                  <a:txBody>
-                    <a:bodyPr/>
-                    <a:lstStyle/>
-                    <a:p>
-                      <a:pPr algn="l"/>
-                      <a:r>
-                        <a:rPr sz="1050" b="0" i="0">
-                          <a:solidFill>
-                            <a:srgbClr val="1F2A37"/>
-                          </a:solidFill>
-                          <a:latin typeface="Calibri"/>
-                        </a:rPr>
-                        <a:t>15 of 50 tasks time out, and a
-killed task leaves NO report row</a:t>
-                      </a:r>
-                    </a:p>
-                  </a:txBody>
-                  <a:tcPr marL="63500" marR="63500" marT="12700" marB="12700" anchor="ctr">
-                    <a:solidFill>
-                      <a:srgbClr val="FFFFFF"/>
-                    </a:solidFill>
-                  </a:tcPr>
-                </a:tc>
-              </a:tr>
-            </a:tbl>
-          </a:graphicData>
-        </a:graphic>
-      </p:graphicFrame>
-      <p:sp>
-        <p:nvSpPr>
-          <p:cNvPr id="4" name="Rounded Rectangle 3"/>
-          <p:cNvSpPr/>
-          <p:nvPr/>
-        </p:nvSpPr>
-        <p:spPr>
-          <a:xfrm>
-            <a:off x="411480" y="5623560"/>
-            <a:ext cx="11338560" cy="777240"/>
-          </a:xfrm>
-          <a:prstGeom prst="roundRect">
-            <a:avLst/>
-          </a:prstGeom>
-          <a:solidFill>
-            <a:srgbClr val="EEEFF1"/>
-          </a:solidFill>
-          <a:ln w="12700">
-            <a:solidFill>
-              <a:srgbClr val="6B6B6B"/>
-            </a:solidFill>
-          </a:ln>
-          <a:effectLst/>
-        </p:spPr>
-        <p:style>
-          <a:lnRef idx="1">
-            <a:schemeClr val="accent1"/>
-          </a:lnRef>
-          <a:fillRef idx="3">
-            <a:schemeClr val="accent1"/>
-          </a:fillRef>
-          <a:effectRef idx="2">
-            <a:schemeClr val="accent1"/>
-          </a:effectRef>
-          <a:fontRef idx="minor">
-            <a:schemeClr val="lt1"/>
-          </a:fontRef>
-        </p:style>
-        <p:txBody>
-          <a:bodyPr rtlCol="0" anchor="ctr" wrap="square" tIns="25400" bIns="25400" lIns="228600" rIns="228600"/>
-          <a:lstStyle/>
-          <a:p>
-            <a:pPr algn="ctr"/>
-            <a:r>
-              <a:rPr sz="1200" b="0" i="0">
-                <a:solidFill>
-                  <a:srgbClr val="1F2A37"/>
-                </a:solidFill>
-                <a:latin typeface="Calibri"/>
-              </a:rPr>
-              <a:t>gsm8k is a SMOKE TEST WITH A SCORE — reading its 0.97 as a model measurement is the most common misreading of these numbers.  tau2 is the only rung that discriminates, and it fails informatively: a wrong answer, a policy violation and a dropped thread are different failures.  appworld earns its place precisely BECAUSE it fails — it is the only leg that has ever exposed a timeout, a context limit or a cache effect before a user did.</a:t>
-            </a:r>
-          </a:p>
-        </p:txBody>
-      </p:sp>
-      <p:sp>
-        <p:nvSpPr>
-          <p:cNvPr id="5" name="TextBox 4"/>
-          <p:cNvSpPr txBox="1"/>
-          <p:nvPr/>
-        </p:nvSpPr>
-        <p:spPr>
-          <a:xfrm>
-            <a:off x="11795760" y="6437376"/>
-            <a:ext cx="320040" cy="310896"/>
-          </a:xfrm>
-          <a:prstGeom prst="rect">
-            <a:avLst/>
-          </a:prstGeom>
-          <a:noFill/>
-        </p:spPr>
-        <p:txBody>
-          <a:bodyPr wrap="none" anchor="ctr" lIns="0" rIns="0" tIns="0" bIns="0">
-            <a:spAutoFit/>
-          </a:bodyPr>
-          <a:lstStyle/>
-          <a:p>
-            <a:pPr algn="r">
-              <a:spcAft>
-                <a:spcPts val="300"/>
-              </a:spcAft>
-            </a:pPr>
-            <a:r>
-              <a:rPr sz="1200" b="0" i="0">
-                <a:solidFill>
-                  <a:srgbClr val="6B6B6B"/>
-                </a:solidFill>
-                <a:latin typeface="Calibri"/>
-              </a:rPr>
               <a:t>19</a:t>
             </a:r>
           </a:p>
@@ -14949,7 +14663,7 @@
                 </a:solidFill>
                 <a:latin typeface="Calibri"/>
               </a:rPr>
-              <a:t>6.1 the three benchmarks and the REST flow that drives them · 6.2 what each image bakes in</a:t>
+              <a:t>6.1 the three benchmarks and the REST flow that drives them · 6.2 what each image bakes in · 6.3 who decides what happens inside a task</a:t>
             </a:r>
           </a:p>
         </p:txBody>
@@ -15570,6 +15284,985 @@
 </file>
 
 <file path=ppt/slides/slide20.xml><?xml version="1.0" encoding="utf-8"?>
+<p:sld xmlns:a="http://schemas.openxmlformats.org/drawingml/2006/main" xmlns:p="http://schemas.openxmlformats.org/presentationml/2006/main" xmlns:r="http://schemas.openxmlformats.org/officeDocument/2006/relationships">
+  <p:cSld name="7.9 The Three Benchmarks Compared — Task, Purpose, Worth">
+    <p:spTree>
+      <p:nvGrpSpPr>
+        <p:cNvPr id="1" name=""/>
+        <p:cNvGrpSpPr/>
+        <p:nvPr/>
+      </p:nvGrpSpPr>
+      <p:grpSpPr/>
+      <p:sp>
+        <p:nvSpPr>
+          <p:cNvPr id="2" name="Rectangle 1"/>
+          <p:cNvSpPr/>
+          <p:nvPr/>
+        </p:nvSpPr>
+        <p:spPr>
+          <a:xfrm>
+            <a:off x="0" y="0"/>
+            <a:ext cx="12192000" cy="950000"/>
+          </a:xfrm>
+          <a:prstGeom prst="rect">
+            <a:avLst/>
+          </a:prstGeom>
+          <a:solidFill>
+            <a:srgbClr val="1B3A5C"/>
+          </a:solidFill>
+          <a:ln>
+            <a:noFill/>
+          </a:ln>
+          <a:effectLst/>
+        </p:spPr>
+        <p:style>
+          <a:lnRef idx="1">
+            <a:schemeClr val="accent1"/>
+          </a:lnRef>
+          <a:fillRef idx="3">
+            <a:schemeClr val="accent1"/>
+          </a:fillRef>
+          <a:effectRef idx="2">
+            <a:schemeClr val="accent1"/>
+          </a:effectRef>
+          <a:fontRef idx="minor">
+            <a:schemeClr val="lt1"/>
+          </a:fontRef>
+        </p:style>
+        <p:txBody>
+          <a:bodyPr rtlCol="0" anchor="ctr" lIns="355600"/>
+          <a:lstStyle/>
+          <a:p>
+            <a:pPr algn="ctr"/>
+            <a:r>
+              <a:rPr sz="2600" b="1" i="0">
+                <a:solidFill>
+                  <a:srgbClr val="FFFFFF"/>
+                </a:solidFill>
+                <a:latin typeface="Calibri"/>
+              </a:rPr>
+              <a:t>7.9  The Three Benchmarks Compared — Task, Purpose, Worth</a:t>
+            </a:r>
+          </a:p>
+          <a:p>
+            <a:r>
+              <a:rPr sz="1400" b="0" i="0">
+                <a:solidFill>
+                  <a:srgbClr val="C9D9EC"/>
+                </a:solidFill>
+                <a:latin typeface="Calibri"/>
+              </a:rPr>
+              <a:t>They differ in the SHAPE of a task, not just its size — which is what makes the ladder a ladder</a:t>
+            </a:r>
+          </a:p>
+        </p:txBody>
+      </p:sp>
+      <p:graphicFrame>
+        <p:nvGraphicFramePr>
+          <p:cNvPr id="3" name="Table 2"/>
+          <p:cNvGraphicFramePr>
+            <a:graphicFrameLocks noGrp="1"/>
+          </p:cNvGraphicFramePr>
+          <p:nvPr/>
+        </p:nvGraphicFramePr>
+        <p:xfrm>
+          <a:off x="411480" y="1143000"/>
+          <a:ext cx="11338560" cy="4297680"/>
+        </p:xfrm>
+        <a:graphic>
+          <a:graphicData uri="http://schemas.openxmlformats.org/drawingml/2006/table">
+            <a:tbl>
+              <a:tblPr firstRow="1">
+                <a:tableStyleId>{5C22544A-7EE6-4342-B048-85BDC9FD1C3A}</a:tableStyleId>
+              </a:tblPr>
+              <a:tblGrid>
+                <a:gridCol w="2011680"/>
+                <a:gridCol w="3063240"/>
+                <a:gridCol w="3154680"/>
+                <a:gridCol w="3108960"/>
+              </a:tblGrid>
+              <a:tr h="537210">
+                <a:tc>
+                  <a:txBody>
+                    <a:bodyPr/>
+                    <a:lstStyle/>
+                    <a:p>
+                      <a:pPr algn="l"/>
+                      <a:r>
+                        <a:rPr sz="1050" b="1" i="0">
+                          <a:solidFill>
+                            <a:srgbClr val="FFFFFF"/>
+                          </a:solidFill>
+                          <a:latin typeface="Calibri"/>
+                        </a:rPr>
+                        <a:t/>
+                      </a:r>
+                    </a:p>
+                  </a:txBody>
+                  <a:tcPr marL="63500" marR="63500" marT="12700" marB="12700" anchor="ctr">
+                    <a:solidFill>
+                      <a:srgbClr val="1B3A5C"/>
+                    </a:solidFill>
+                  </a:tcPr>
+                </a:tc>
+                <a:tc>
+                  <a:txBody>
+                    <a:bodyPr/>
+                    <a:lstStyle/>
+                    <a:p>
+                      <a:pPr algn="ctr"/>
+                      <a:r>
+                        <a:rPr sz="1050" b="1" i="0">
+                          <a:solidFill>
+                            <a:srgbClr val="FFFFFF"/>
+                          </a:solidFill>
+                          <a:latin typeface="Calibri"/>
+                        </a:rPr>
+                        <a:t>gsm8k</a:t>
+                      </a:r>
+                    </a:p>
+                  </a:txBody>
+                  <a:tcPr marL="63500" marR="63500" marT="12700" marB="12700" anchor="ctr">
+                    <a:solidFill>
+                      <a:srgbClr val="1B3A5C"/>
+                    </a:solidFill>
+                  </a:tcPr>
+                </a:tc>
+                <a:tc>
+                  <a:txBody>
+                    <a:bodyPr/>
+                    <a:lstStyle/>
+                    <a:p>
+                      <a:pPr algn="ctr"/>
+                      <a:r>
+                        <a:rPr sz="1050" b="1" i="0">
+                          <a:solidFill>
+                            <a:srgbClr val="FFFFFF"/>
+                          </a:solidFill>
+                          <a:latin typeface="Calibri"/>
+                        </a:rPr>
+                        <a:t>tau2</a:t>
+                      </a:r>
+                    </a:p>
+                  </a:txBody>
+                  <a:tcPr marL="63500" marR="63500" marT="12700" marB="12700" anchor="ctr">
+                    <a:solidFill>
+                      <a:srgbClr val="1B3A5C"/>
+                    </a:solidFill>
+                  </a:tcPr>
+                </a:tc>
+                <a:tc>
+                  <a:txBody>
+                    <a:bodyPr/>
+                    <a:lstStyle/>
+                    <a:p>
+                      <a:pPr algn="ctr"/>
+                      <a:r>
+                        <a:rPr sz="1050" b="1" i="0">
+                          <a:solidFill>
+                            <a:srgbClr val="FFFFFF"/>
+                          </a:solidFill>
+                          <a:latin typeface="Calibri"/>
+                        </a:rPr>
+                        <a:t>appworld</a:t>
+                      </a:r>
+                    </a:p>
+                  </a:txBody>
+                  <a:tcPr marL="63500" marR="63500" marT="12700" marB="12700" anchor="ctr">
+                    <a:solidFill>
+                      <a:srgbClr val="1B3A5C"/>
+                    </a:solidFill>
+                  </a:tcPr>
+                </a:tc>
+              </a:tr>
+              <a:tr h="537210">
+                <a:tc>
+                  <a:txBody>
+                    <a:bodyPr/>
+                    <a:lstStyle/>
+                    <a:p>
+                      <a:pPr algn="l"/>
+                      <a:r>
+                        <a:rPr sz="1050" b="1" i="0">
+                          <a:solidFill>
+                            <a:srgbClr val="1F2A37"/>
+                          </a:solidFill>
+                          <a:latin typeface="Calibri"/>
+                        </a:rPr>
+                        <a:t>A task IS</a:t>
+                      </a:r>
+                    </a:p>
+                  </a:txBody>
+                  <a:tcPr marL="63500" marR="63500" marT="12700" marB="12700" anchor="ctr">
+                    <a:solidFill>
+                      <a:srgbClr val="FFFFFF"/>
+                    </a:solidFill>
+                  </a:tcPr>
+                </a:tc>
+                <a:tc>
+                  <a:txBody>
+                    <a:bodyPr/>
+                    <a:lstStyle/>
+                    <a:p>
+                      <a:pPr algn="l"/>
+                      <a:r>
+                        <a:rPr sz="1050" b="0" i="0">
+                          <a:solidFill>
+                            <a:srgbClr val="1F2A37"/>
+                          </a:solidFill>
+                          <a:latin typeface="Calibri"/>
+                        </a:rPr>
+                        <a:t>one grade-school word problem,
+answered in text</a:t>
+                      </a:r>
+                    </a:p>
+                  </a:txBody>
+                  <a:tcPr marL="63500" marR="63500" marT="12700" marB="12700" anchor="ctr">
+                    <a:solidFill>
+                      <a:srgbClr val="FFFFFF"/>
+                    </a:solidFill>
+                  </a:tcPr>
+                </a:tc>
+                <a:tc>
+                  <a:txBody>
+                    <a:bodyPr/>
+                    <a:lstStyle/>
+                    <a:p>
+                      <a:pPr algn="l"/>
+                      <a:r>
+                        <a:rPr sz="1050" b="0" i="0">
+                          <a:solidFill>
+                            <a:srgbClr val="1F2A37"/>
+                          </a:solidFill>
+                          <a:latin typeface="Calibri"/>
+                        </a:rPr>
+                        <a:t>one retail customer-service
+conversation vs a simulated user</a:t>
+                      </a:r>
+                    </a:p>
+                  </a:txBody>
+                  <a:tcPr marL="63500" marR="63500" marT="12700" marB="12700" anchor="ctr">
+                    <a:solidFill>
+                      <a:srgbClr val="FFFFFF"/>
+                    </a:solidFill>
+                  </a:tcPr>
+                </a:tc>
+                <a:tc>
+                  <a:txBody>
+                    <a:bodyPr/>
+                    <a:lstStyle/>
+                    <a:p>
+                      <a:pPr algn="l"/>
+                      <a:r>
+                        <a:rPr sz="1050" b="0" i="0">
+                          <a:solidFill>
+                            <a:srgbClr val="1F2A37"/>
+                          </a:solidFill>
+                          <a:latin typeface="Calibri"/>
+                        </a:rPr>
+                        <a:t>one multi-app scenario automated
+through an API surface</a:t>
+                      </a:r>
+                    </a:p>
+                  </a:txBody>
+                  <a:tcPr marL="63500" marR="63500" marT="12700" marB="12700" anchor="ctr">
+                    <a:solidFill>
+                      <a:srgbClr val="FFFFFF"/>
+                    </a:solidFill>
+                  </a:tcPr>
+                </a:tc>
+              </a:tr>
+              <a:tr h="537210">
+                <a:tc>
+                  <a:txBody>
+                    <a:bodyPr/>
+                    <a:lstStyle/>
+                    <a:p>
+                      <a:pPr algn="l"/>
+                      <a:r>
+                        <a:rPr sz="1050" b="1" i="0">
+                          <a:solidFill>
+                            <a:srgbClr val="1F2A37"/>
+                          </a:solidFill>
+                          <a:latin typeface="Calibri"/>
+                        </a:rPr>
+                        <a:t>Turn structure</a:t>
+                      </a:r>
+                    </a:p>
+                  </a:txBody>
+                  <a:tcPr marL="63500" marR="63500" marT="12700" marB="12700" anchor="ctr">
+                    <a:solidFill>
+                      <a:srgbClr val="F4F6F8"/>
+                    </a:solidFill>
+                  </a:tcPr>
+                </a:tc>
+                <a:tc>
+                  <a:txBody>
+                    <a:bodyPr/>
+                    <a:lstStyle/>
+                    <a:p>
+                      <a:pPr algn="l"/>
+                      <a:r>
+                        <a:rPr sz="1050" b="0" i="0">
+                          <a:solidFill>
+                            <a:srgbClr val="1F2A37"/>
+                          </a:solidFill>
+                          <a:latin typeface="Calibri"/>
+                        </a:rPr>
+                        <a:t>1 model call, ~1 tool call</a:t>
+                      </a:r>
+                    </a:p>
+                  </a:txBody>
+                  <a:tcPr marL="63500" marR="63500" marT="12700" marB="12700" anchor="ctr">
+                    <a:solidFill>
+                      <a:srgbClr val="F4F6F8"/>
+                    </a:solidFill>
+                  </a:tcPr>
+                </a:tc>
+                <a:tc>
+                  <a:txBody>
+                    <a:bodyPr/>
+                    <a:lstStyle/>
+                    <a:p>
+                      <a:pPr algn="l"/>
+                      <a:r>
+                        <a:rPr sz="1050" b="0" i="0">
+                          <a:solidFill>
+                            <a:srgbClr val="1F2A37"/>
+                          </a:solidFill>
+                          <a:latin typeface="Calibri"/>
+                        </a:rPr>
+                        <a:t>~11 calls alternating with a
+USER SIMULATOR in character</a:t>
+                      </a:r>
+                    </a:p>
+                  </a:txBody>
+                  <a:tcPr marL="63500" marR="63500" marT="12700" marB="12700" anchor="ctr">
+                    <a:solidFill>
+                      <a:srgbClr val="F4F6F8"/>
+                    </a:solidFill>
+                  </a:tcPr>
+                </a:tc>
+                <a:tc>
+                  <a:txBody>
+                    <a:bodyPr/>
+                    <a:lstStyle/>
+                    <a:p>
+                      <a:pPr algn="l"/>
+                      <a:r>
+                        <a:rPr sz="1050" b="0" i="0">
+                          <a:solidFill>
+                            <a:srgbClr val="1F2A37"/>
+                          </a:solidFill>
+                          <a:latin typeface="Calibri"/>
+                        </a:rPr>
+                        <a:t>~29 calls, each re-sending the
+whole conversation</a:t>
+                      </a:r>
+                    </a:p>
+                  </a:txBody>
+                  <a:tcPr marL="63500" marR="63500" marT="12700" marB="12700" anchor="ctr">
+                    <a:solidFill>
+                      <a:srgbClr val="F4F6F8"/>
+                    </a:solidFill>
+                  </a:tcPr>
+                </a:tc>
+              </a:tr>
+              <a:tr h="537210">
+                <a:tc>
+                  <a:txBody>
+                    <a:bodyPr/>
+                    <a:lstStyle/>
+                    <a:p>
+                      <a:pPr algn="l"/>
+                      <a:r>
+                        <a:rPr sz="1050" b="1" i="0">
+                          <a:solidFill>
+                            <a:srgbClr val="1F2A37"/>
+                          </a:solidFill>
+                          <a:latin typeface="Calibri"/>
+                        </a:rPr>
+                        <a:t>Ends when</a:t>
+                      </a:r>
+                    </a:p>
+                  </a:txBody>
+                  <a:tcPr marL="63500" marR="63500" marT="12700" marB="12700" anchor="ctr">
+                    <a:solidFill>
+                      <a:srgbClr val="FFFFFF"/>
+                    </a:solidFill>
+                  </a:tcPr>
+                </a:tc>
+                <a:tc>
+                  <a:txBody>
+                    <a:bodyPr/>
+                    <a:lstStyle/>
+                    <a:p>
+                      <a:pPr algn="l"/>
+                      <a:r>
+                        <a:rPr sz="1050" b="0" i="0">
+                          <a:solidFill>
+                            <a:srgbClr val="1F2A37"/>
+                          </a:solidFill>
+                          <a:latin typeface="Calibri"/>
+                        </a:rPr>
+                        <a:t>the answer is emitted</a:t>
+                      </a:r>
+                    </a:p>
+                  </a:txBody>
+                  <a:tcPr marL="63500" marR="63500" marT="12700" marB="12700" anchor="ctr">
+                    <a:solidFill>
+                      <a:srgbClr val="FFFFFF"/>
+                    </a:solidFill>
+                  </a:tcPr>
+                </a:tc>
+                <a:tc>
+                  <a:txBody>
+                    <a:bodyPr/>
+                    <a:lstStyle/>
+                    <a:p>
+                      <a:pPr algn="l"/>
+                      <a:r>
+                        <a:rPr sz="1050" b="0" i="0">
+                          <a:solidFill>
+                            <a:srgbClr val="1F2A37"/>
+                          </a:solidFill>
+                          <a:latin typeface="Calibri"/>
+                        </a:rPr>
+                        <a:t>the dialogue resolves, or policy
+is violated</a:t>
+                      </a:r>
+                    </a:p>
+                  </a:txBody>
+                  <a:tcPr marL="63500" marR="63500" marT="12700" marB="12700" anchor="ctr">
+                    <a:solidFill>
+                      <a:srgbClr val="FFFFFF"/>
+                    </a:solidFill>
+                  </a:tcPr>
+                </a:tc>
+                <a:tc>
+                  <a:txBody>
+                    <a:bodyPr/>
+                    <a:lstStyle/>
+                    <a:p>
+                      <a:pPr algn="l"/>
+                      <a:r>
+                        <a:rPr sz="1050" b="0" i="0">
+                          <a:solidFill>
+                            <a:srgbClr val="1F2A37"/>
+                          </a:solidFill>
+                          <a:latin typeface="Calibri"/>
+                        </a:rPr>
+                        <a:t>the goal state is reached — or the
+600 s task timeout kills it</a:t>
+                      </a:r>
+                    </a:p>
+                  </a:txBody>
+                  <a:tcPr marL="63500" marR="63500" marT="12700" marB="12700" anchor="ctr">
+                    <a:solidFill>
+                      <a:srgbClr val="FFFFFF"/>
+                    </a:solidFill>
+                  </a:tcPr>
+                </a:tc>
+              </a:tr>
+              <a:tr h="537210">
+                <a:tc>
+                  <a:txBody>
+                    <a:bodyPr/>
+                    <a:lstStyle/>
+                    <a:p>
+                      <a:pPr algn="l"/>
+                      <a:r>
+                        <a:rPr sz="1050" b="1" i="0">
+                          <a:solidFill>
+                            <a:srgbClr val="1F2A37"/>
+                          </a:solidFill>
+                          <a:latin typeface="Calibri"/>
+                        </a:rPr>
+                        <a:t>Scored by</a:t>
+                      </a:r>
+                    </a:p>
+                  </a:txBody>
+                  <a:tcPr marL="63500" marR="63500" marT="12700" marB="12700" anchor="ctr">
+                    <a:solidFill>
+                      <a:srgbClr val="F4F6F8"/>
+                    </a:solidFill>
+                  </a:tcPr>
+                </a:tc>
+                <a:tc>
+                  <a:txBody>
+                    <a:bodyPr/>
+                    <a:lstStyle/>
+                    <a:p>
+                      <a:pPr algn="l"/>
+                      <a:r>
+                        <a:rPr sz="1050" b="0" i="0">
+                          <a:solidFill>
+                            <a:srgbClr val="1F2A37"/>
+                          </a:solidFill>
+                          <a:latin typeface="Calibri"/>
+                        </a:rPr>
+                        <a:t>exact numeric match</a:t>
+                      </a:r>
+                    </a:p>
+                  </a:txBody>
+                  <a:tcPr marL="63500" marR="63500" marT="12700" marB="12700" anchor="ctr">
+                    <a:solidFill>
+                      <a:srgbClr val="F4F6F8"/>
+                    </a:solidFill>
+                  </a:tcPr>
+                </a:tc>
+                <a:tc>
+                  <a:txBody>
+                    <a:bodyPr/>
+                    <a:lstStyle/>
+                    <a:p>
+                      <a:pPr algn="l"/>
+                      <a:r>
+                        <a:rPr sz="1050" b="0" i="0">
+                          <a:solidFill>
+                            <a:srgbClr val="1F2A37"/>
+                          </a:solidFill>
+                          <a:latin typeface="Calibri"/>
+                        </a:rPr>
+                        <a:t>task completion + policy
+compliance (tau2's own scorer)</a:t>
+                      </a:r>
+                    </a:p>
+                  </a:txBody>
+                  <a:tcPr marL="63500" marR="63500" marT="12700" marB="12700" anchor="ctr">
+                    <a:solidFill>
+                      <a:srgbClr val="F4F6F8"/>
+                    </a:solidFill>
+                  </a:tcPr>
+                </a:tc>
+                <a:tc>
+                  <a:txBody>
+                    <a:bodyPr/>
+                    <a:lstStyle/>
+                    <a:p>
+                      <a:pPr algn="l"/>
+                      <a:r>
+                        <a:rPr sz="1050" b="0" i="0">
+                          <a:solidFill>
+                            <a:srgbClr val="1F2A37"/>
+                          </a:solidFill>
+                          <a:latin typeface="Calibri"/>
+                        </a:rPr>
+                        <a:t>appworld's state assertions,
+all-or-nothing</a:t>
+                      </a:r>
+                    </a:p>
+                  </a:txBody>
+                  <a:tcPr marL="63500" marR="63500" marT="12700" marB="12700" anchor="ctr">
+                    <a:solidFill>
+                      <a:srgbClr val="F4F6F8"/>
+                    </a:solidFill>
+                  </a:tcPr>
+                </a:tc>
+              </a:tr>
+              <a:tr h="537210">
+                <a:tc>
+                  <a:txBody>
+                    <a:bodyPr/>
+                    <a:lstStyle/>
+                    <a:p>
+                      <a:pPr algn="l"/>
+                      <a:r>
+                        <a:rPr sz="1050" b="1" i="0">
+                          <a:solidFill>
+                            <a:srgbClr val="1F2A37"/>
+                          </a:solidFill>
+                          <a:latin typeface="Calibri"/>
+                        </a:rPr>
+                        <a:t>It exists to test</a:t>
+                      </a:r>
+                    </a:p>
+                  </a:txBody>
+                  <a:tcPr marL="63500" marR="63500" marT="12700" marB="12700" anchor="ctr">
+                    <a:solidFill>
+                      <a:srgbClr val="FFFFFF"/>
+                    </a:solidFill>
+                  </a:tcPr>
+                </a:tc>
+                <a:tc>
+                  <a:txBody>
+                    <a:bodyPr/>
+                    <a:lstStyle/>
+                    <a:p>
+                      <a:pPr algn="l"/>
+                      <a:r>
+                        <a:rPr sz="1050" b="0" i="0">
+                          <a:solidFill>
+                            <a:srgbClr val="1F2A37"/>
+                          </a:solidFill>
+                          <a:latin typeface="Calibri"/>
+                        </a:rPr>
+                        <a:t>that the PLUMBING works:
+deploy, auth, telemetry, S3</a:t>
+                      </a:r>
+                    </a:p>
+                  </a:txBody>
+                  <a:tcPr marL="63500" marR="63500" marT="12700" marB="12700" anchor="ctr">
+                    <a:solidFill>
+                      <a:srgbClr val="FFFFFF"/>
+                    </a:solidFill>
+                  </a:tcPr>
+                </a:tc>
+                <a:tc>
+                  <a:txBody>
+                    <a:bodyPr/>
+                    <a:lstStyle/>
+                    <a:p>
+                      <a:pPr algn="l"/>
+                      <a:r>
+                        <a:rPr sz="1050" b="0" i="0">
+                          <a:solidFill>
+                            <a:srgbClr val="1F2A37"/>
+                          </a:solidFill>
+                          <a:latin typeface="Calibri"/>
+                        </a:rPr>
+                        <a:t>that the agent HOLDS STATE
+across turns and uses tools
+under a policy</a:t>
+                      </a:r>
+                    </a:p>
+                  </a:txBody>
+                  <a:tcPr marL="63500" marR="63500" marT="12700" marB="12700" anchor="ctr">
+                    <a:solidFill>
+                      <a:srgbClr val="FFFFFF"/>
+                    </a:solidFill>
+                  </a:tcPr>
+                </a:tc>
+                <a:tc>
+                  <a:txBody>
+                    <a:bodyPr/>
+                    <a:lstStyle/>
+                    <a:p>
+                      <a:pPr algn="l"/>
+                      <a:r>
+                        <a:rPr sz="1050" b="0" i="0">
+                          <a:solidFill>
+                            <a:srgbClr val="1F2A37"/>
+                          </a:solidFill>
+                          <a:latin typeface="Calibri"/>
+                        </a:rPr>
+                        <a:t>that the agent survives LONG
+HORIZONS: context growth,
+timeouts, partial failure</a:t>
+                      </a:r>
+                    </a:p>
+                  </a:txBody>
+                  <a:tcPr marL="63500" marR="63500" marT="12700" marB="12700" anchor="ctr">
+                    <a:solidFill>
+                      <a:srgbClr val="FFFFFF"/>
+                    </a:solidFill>
+                  </a:tcPr>
+                </a:tc>
+              </a:tr>
+              <a:tr h="537210">
+                <a:tc>
+                  <a:txBody>
+                    <a:bodyPr/>
+                    <a:lstStyle/>
+                    <a:p>
+                      <a:pPr algn="l"/>
+                      <a:r>
+                        <a:rPr sz="1050" b="1" i="0">
+                          <a:solidFill>
+                            <a:srgbClr val="1F2A37"/>
+                          </a:solidFill>
+                          <a:latin typeface="Calibri"/>
+                        </a:rPr>
+                        <a:t>A result is worth</a:t>
+                      </a:r>
+                    </a:p>
+                  </a:txBody>
+                  <a:tcPr marL="63500" marR="63500" marT="12700" marB="12700" anchor="ctr">
+                    <a:solidFill>
+                      <a:srgbClr val="F4F6F8"/>
+                    </a:solidFill>
+                  </a:tcPr>
+                </a:tc>
+                <a:tc>
+                  <a:txBody>
+                    <a:bodyPr/>
+                    <a:lstStyle/>
+                    <a:p>
+                      <a:pPr algn="l"/>
+                      <a:r>
+                        <a:rPr sz="1050" b="0" i="0">
+                          <a:solidFill>
+                            <a:srgbClr val="1F2A37"/>
+                          </a:solidFill>
+                          <a:latin typeface="Calibri"/>
+                        </a:rPr>
+                        <a:t>a go/no-go on infrastructure.
+It saturates near 1.0, so it
+cannot rank models</a:t>
+                      </a:r>
+                    </a:p>
+                  </a:txBody>
+                  <a:tcPr marL="63500" marR="63500" marT="12700" marB="12700" anchor="ctr">
+                    <a:solidFill>
+                      <a:srgbClr val="F4F6F8"/>
+                    </a:solidFill>
+                  </a:tcPr>
+                </a:tc>
+                <a:tc>
+                  <a:txBody>
+                    <a:bodyPr/>
+                    <a:lstStyle/>
+                    <a:p>
+                      <a:pPr algn="l"/>
+                      <a:r>
+                        <a:rPr sz="1050" b="0" i="0">
+                          <a:solidFill>
+                            <a:srgbClr val="1F2A37"/>
+                          </a:solidFill>
+                          <a:latin typeface="Calibri"/>
+                        </a:rPr>
+                        <a:t>a genuine model/config
+comparison — it discriminates,
+and 0.83 leaves headroom both ways</a:t>
+                      </a:r>
+                    </a:p>
+                  </a:txBody>
+                  <a:tcPr marL="63500" marR="63500" marT="12700" marB="12700" anchor="ctr">
+                    <a:solidFill>
+                      <a:srgbClr val="F4F6F8"/>
+                    </a:solidFill>
+                  </a:tcPr>
+                </a:tc>
+                <a:tc>
+                  <a:txBody>
+                    <a:bodyPr/>
+                    <a:lstStyle/>
+                    <a:p>
+                      <a:pPr algn="l"/>
+                      <a:r>
+                        <a:rPr sz="1050" b="0" i="0">
+                          <a:solidFill>
+                            <a:srgbClr val="1F2A37"/>
+                          </a:solidFill>
+                          <a:latin typeface="Calibri"/>
+                        </a:rPr>
+                        <a:t>a stress signal, not a capability
+score: at 0.00 it tells you what
+BREAKS, not who is better</a:t>
+                      </a:r>
+                    </a:p>
+                  </a:txBody>
+                  <a:tcPr marL="63500" marR="63500" marT="12700" marB="12700" anchor="ctr">
+                    <a:solidFill>
+                      <a:srgbClr val="F4F6F8"/>
+                    </a:solidFill>
+                  </a:tcPr>
+                </a:tc>
+              </a:tr>
+              <a:tr h="537210">
+                <a:tc>
+                  <a:txBody>
+                    <a:bodyPr/>
+                    <a:lstStyle/>
+                    <a:p>
+                      <a:pPr algn="l"/>
+                      <a:r>
+                        <a:rPr sz="1050" b="1" i="0">
+                          <a:solidFill>
+                            <a:srgbClr val="1F2A37"/>
+                          </a:solidFill>
+                          <a:latin typeface="Calibri"/>
+                        </a:rPr>
+                        <a:t>Watch out for</a:t>
+                      </a:r>
+                    </a:p>
+                  </a:txBody>
+                  <a:tcPr marL="63500" marR="63500" marT="12700" marB="12700" anchor="ctr">
+                    <a:solidFill>
+                      <a:srgbClr val="FFFFFF"/>
+                    </a:solidFill>
+                  </a:tcPr>
+                </a:tc>
+                <a:tc>
+                  <a:txBody>
+                    <a:bodyPr/>
+                    <a:lstStyle/>
+                    <a:p>
+                      <a:pPr algn="l"/>
+                      <a:r>
+                        <a:rPr sz="1050" b="0" i="0">
+                          <a:solidFill>
+                            <a:srgbClr val="1F2A37"/>
+                          </a:solidFill>
+                          <a:latin typeface="Calibri"/>
+                        </a:rPr>
+                        <a:t>1.0 proves nothing about
+the agent</a:t>
+                      </a:r>
+                    </a:p>
+                  </a:txBody>
+                  <a:tcPr marL="63500" marR="63500" marT="12700" marB="12700" anchor="ctr">
+                    <a:solidFill>
+                      <a:srgbClr val="FFFFFF"/>
+                    </a:solidFill>
+                  </a:tcPr>
+                </a:tc>
+                <a:tc>
+                  <a:txBody>
+                    <a:bodyPr/>
+                    <a:lstStyle/>
+                    <a:p>
+                      <a:pPr algn="l"/>
+                      <a:r>
+                        <a:rPr sz="1050" b="0" i="0">
+                          <a:solidFill>
+                            <a:srgbClr val="1F2A37"/>
+                          </a:solidFill>
+                          <a:latin typeface="Calibri"/>
+                        </a:rPr>
+                        <a:t>its user simulator is billed
+but NOT in our telemetry</a:t>
+                      </a:r>
+                    </a:p>
+                  </a:txBody>
+                  <a:tcPr marL="63500" marR="63500" marT="12700" marB="12700" anchor="ctr">
+                    <a:solidFill>
+                      <a:srgbClr val="FFFFFF"/>
+                    </a:solidFill>
+                  </a:tcPr>
+                </a:tc>
+                <a:tc>
+                  <a:txBody>
+                    <a:bodyPr/>
+                    <a:lstStyle/>
+                    <a:p>
+                      <a:pPr algn="l"/>
+                      <a:r>
+                        <a:rPr sz="1050" b="0" i="0">
+                          <a:solidFill>
+                            <a:srgbClr val="1F2A37"/>
+                          </a:solidFill>
+                          <a:latin typeface="Calibri"/>
+                        </a:rPr>
+                        <a:t>15 of 50 tasks time out, and a
+killed task leaves NO report row</a:t>
+                      </a:r>
+                    </a:p>
+                  </a:txBody>
+                  <a:tcPr marL="63500" marR="63500" marT="12700" marB="12700" anchor="ctr">
+                    <a:solidFill>
+                      <a:srgbClr val="FFFFFF"/>
+                    </a:solidFill>
+                  </a:tcPr>
+                </a:tc>
+              </a:tr>
+            </a:tbl>
+          </a:graphicData>
+        </a:graphic>
+      </p:graphicFrame>
+      <p:sp>
+        <p:nvSpPr>
+          <p:cNvPr id="4" name="Rounded Rectangle 3"/>
+          <p:cNvSpPr/>
+          <p:nvPr/>
+        </p:nvSpPr>
+        <p:spPr>
+          <a:xfrm>
+            <a:off x="411480" y="5623560"/>
+            <a:ext cx="11338560" cy="777240"/>
+          </a:xfrm>
+          <a:prstGeom prst="roundRect">
+            <a:avLst/>
+          </a:prstGeom>
+          <a:solidFill>
+            <a:srgbClr val="EEEFF1"/>
+          </a:solidFill>
+          <a:ln w="12700">
+            <a:solidFill>
+              <a:srgbClr val="6B6B6B"/>
+            </a:solidFill>
+          </a:ln>
+          <a:effectLst/>
+        </p:spPr>
+        <p:style>
+          <a:lnRef idx="1">
+            <a:schemeClr val="accent1"/>
+          </a:lnRef>
+          <a:fillRef idx="3">
+            <a:schemeClr val="accent1"/>
+          </a:fillRef>
+          <a:effectRef idx="2">
+            <a:schemeClr val="accent1"/>
+          </a:effectRef>
+          <a:fontRef idx="minor">
+            <a:schemeClr val="lt1"/>
+          </a:fontRef>
+        </p:style>
+        <p:txBody>
+          <a:bodyPr rtlCol="0" anchor="ctr" wrap="square" tIns="25400" bIns="25400" lIns="228600" rIns="228600"/>
+          <a:lstStyle/>
+          <a:p>
+            <a:pPr algn="ctr"/>
+            <a:r>
+              <a:rPr sz="1200" b="0" i="0">
+                <a:solidFill>
+                  <a:srgbClr val="1F2A37"/>
+                </a:solidFill>
+                <a:latin typeface="Calibri"/>
+              </a:rPr>
+              <a:t>gsm8k is a SMOKE TEST WITH A SCORE — reading its 0.97 as a model measurement is the most common misreading of these numbers.  tau2 is the only rung that discriminates, and it fails informatively: a wrong answer, a policy violation and a dropped thread are different failures.  appworld earns its place precisely BECAUSE it fails — it is the only leg that has ever exposed a timeout, a context limit or a cache effect before a user did.</a:t>
+            </a:r>
+          </a:p>
+        </p:txBody>
+      </p:sp>
+      <p:sp>
+        <p:nvSpPr>
+          <p:cNvPr id="5" name="TextBox 4"/>
+          <p:cNvSpPr txBox="1"/>
+          <p:nvPr/>
+        </p:nvSpPr>
+        <p:spPr>
+          <a:xfrm>
+            <a:off x="11795760" y="6437376"/>
+            <a:ext cx="320040" cy="310896"/>
+          </a:xfrm>
+          <a:prstGeom prst="rect">
+            <a:avLst/>
+          </a:prstGeom>
+          <a:noFill/>
+        </p:spPr>
+        <p:txBody>
+          <a:bodyPr wrap="none" anchor="ctr" lIns="0" rIns="0" tIns="0" bIns="0">
+            <a:spAutoFit/>
+          </a:bodyPr>
+          <a:lstStyle/>
+          <a:p>
+            <a:pPr algn="r">
+              <a:spcAft>
+                <a:spcPts val="300"/>
+              </a:spcAft>
+            </a:pPr>
+            <a:r>
+              <a:rPr sz="1200" b="0" i="0">
+                <a:solidFill>
+                  <a:srgbClr val="6B6B6B"/>
+                </a:solidFill>
+                <a:latin typeface="Calibri"/>
+              </a:rPr>
+              <a:t>20</a:t>
+            </a:r>
+          </a:p>
+        </p:txBody>
+      </p:sp>
+    </p:spTree>
+  </p:cSld>
+  <p:clrMapOvr>
+    <a:masterClrMapping/>
+  </p:clrMapOvr>
+</p:sld>
+</file>
+
+<file path=ppt/slides/slide21.xml><?xml version="1.0" encoding="utf-8"?>
 <p:sld xmlns:a="http://schemas.openxmlformats.org/drawingml/2006/main" xmlns:p="http://schemas.openxmlformats.org/presentationml/2006/main" xmlns:r="http://schemas.openxmlformats.org/officeDocument/2006/relationships">
   <p:cSld name="7.10 The 12 Runs Compared — What Each Band Established">
     <p:spTree>
@@ -16274,7 +16967,7 @@
                 </a:solidFill>
                 <a:latin typeface="Calibri"/>
               </a:rPr>
-              <a:t>20</a:t>
+              <a:t>21</a:t>
             </a:r>
           </a:p>
         </p:txBody>
@@ -16287,7 +16980,7 @@
 </p:sld>
 </file>
 
-<file path=ppt/slides/slide21.xml><?xml version="1.0" encoding="utf-8"?>
+<file path=ppt/slides/slide22.xml><?xml version="1.0" encoding="utf-8"?>
 <p:sld xmlns:a="http://schemas.openxmlformats.org/drawingml/2006/main" xmlns:p="http://schemas.openxmlformats.org/presentationml/2006/main" xmlns:r="http://schemas.openxmlformats.org/officeDocument/2006/relationships">
   <p:cSld name="8.1 The Canonical 12-Run Matrix">
     <p:spTree>
@@ -18000,7 +18693,7 @@
                 </a:solidFill>
                 <a:latin typeface="Calibri"/>
               </a:rPr>
-              <a:t>21</a:t>
+              <a:t>22</a:t>
             </a:r>
           </a:p>
         </p:txBody>
@@ -18013,7 +18706,7 @@
 </p:sld>
 </file>
 
-<file path=ppt/slides/slide22.xml><?xml version="1.0" encoding="utf-8"?>
+<file path=ppt/slides/slide23.xml><?xml version="1.0" encoding="utf-8"?>
 <p:sld xmlns:a="http://schemas.openxmlformats.org/drawingml/2006/main" xmlns:p="http://schemas.openxmlformats.org/presentationml/2006/main" xmlns:r="http://schemas.openxmlformats.org/officeDocument/2006/relationships">
   <p:cSld name="8.2 What the 12 Runs Measured">
     <p:spTree>
@@ -20306,7 +20999,7 @@
                 </a:solidFill>
                 <a:latin typeface="Calibri"/>
               </a:rPr>
-              <a:t>22</a:t>
+              <a:t>23</a:t>
             </a:r>
           </a:p>
         </p:txBody>
@@ -20319,7 +21012,7 @@
 </p:sld>
 </file>
 
-<file path=ppt/slides/slide23.xml><?xml version="1.0" encoding="utf-8"?>
+<file path=ppt/slides/slide24.xml><?xml version="1.0" encoding="utf-8"?>
 <p:sld xmlns:a="http://schemas.openxmlformats.org/drawingml/2006/main" xmlns:p="http://schemas.openxmlformats.org/presentationml/2006/main" xmlns:r="http://schemas.openxmlformats.org/officeDocument/2006/relationships">
   <p:cSld name="9.1 OpenShift vs KinD — Like-for-Like">
     <p:spTree>
@@ -22912,7 +23605,7 @@
                 </a:solidFill>
                 <a:latin typeface="Calibri"/>
               </a:rPr>
-              <a:t>23</a:t>
+              <a:t>24</a:t>
             </a:r>
           </a:p>
         </p:txBody>
@@ -22925,7 +23618,7 @@
 </p:sld>
 </file>
 
-<file path=ppt/slides/slide24.xml><?xml version="1.0" encoding="utf-8"?>
+<file path=ppt/slides/slide25.xml><?xml version="1.0" encoding="utf-8"?>
 <p:sld xmlns:a="http://schemas.openxmlformats.org/drawingml/2006/main" xmlns:p="http://schemas.openxmlformats.org/presentationml/2006/main" xmlns:r="http://schemas.openxmlformats.org/officeDocument/2006/relationships">
   <p:cSld name="9.2 What AuthBridge Costs — and Why It Has No Single Number">
     <p:spTree>
@@ -24718,7 +25411,7 @@
                 </a:solidFill>
                 <a:latin typeface="Calibri"/>
               </a:rPr>
-              <a:t>24</a:t>
+              <a:t>25</a:t>
             </a:r>
           </a:p>
         </p:txBody>
@@ -24731,7 +25424,7 @@
 </p:sld>
 </file>
 
-<file path=ppt/slides/slide25.xml><?xml version="1.0" encoding="utf-8"?>
+<file path=ppt/slides/slide26.xml><?xml version="1.0" encoding="utf-8"?>
 <p:sld xmlns:a="http://schemas.openxmlformats.org/drawingml/2006/main" xmlns:p="http://schemas.openxmlformats.org/presentationml/2006/main" xmlns:r="http://schemas.openxmlformats.org/officeDocument/2006/relationships">
   <p:cSld name="10. What the Service Can &amp; Cannot Enact">
     <p:spTree>
@@ -25322,7 +26015,7 @@
                 </a:solidFill>
                 <a:latin typeface="Calibri"/>
               </a:rPr>
-              <a:t>25</a:t>
+              <a:t>26</a:t>
             </a:r>
           </a:p>
         </p:txBody>

--- a/docs/AutoBench.pptx
+++ b/docs/AutoBench.pptx
@@ -31,6 +31,7 @@
     <p:sldId id="279" r:id="rId30"/>
     <p:sldId id="280" r:id="rId31"/>
     <p:sldId id="281" r:id="rId32"/>
+    <p:sldId id="282" r:id="rId33"/>
   </p:sldIdLst>
   <p:sldSz cx="12192000" cy="6858000" type="screen4x3"/>
   <p:notesSz cx="6858000" cy="9144000"/>
@@ -3368,7 +3369,7 @@
                 </a:solidFill>
                 <a:latin typeface="Calibri"/>
               </a:rPr>
-              <a:t>Last modified 2026-09-20 20:58 EDT</a:t>
+              <a:t>Last modified 2026-09-20 21:22 EDT</a:t>
             </a:r>
           </a:p>
         </p:txBody>
@@ -4136,7 +4137,7 @@
 
 <file path=ppt/slides/slide11.xml><?xml version="1.0" encoding="utf-8"?>
 <p:sld xmlns:a="http://schemas.openxmlformats.org/drawingml/2006/main" xmlns:p="http://schemas.openxmlformats.org/presentationml/2006/main" xmlns:r="http://schemas.openxmlformats.org/officeDocument/2006/relationships">
-  <p:cSld name="6.3 Who Decides What Happens Inside a Task">
+  <p:cSld name="6.3 One Task, End to End">
     <p:spTree>
       <p:nvGrpSpPr>
         <p:cNvPr id="1" name=""/>
@@ -4192,7 +4193,1066 @@
                 </a:solidFill>
                 <a:latin typeface="Calibri"/>
               </a:rPr>
-              <a:t>6.3  Who Decides What Happens Inside a Task</a:t>
+              <a:t>6.3  One Task, End to End</a:t>
+            </a:r>
+          </a:p>
+          <a:p>
+            <a:r>
+              <a:rPr sz="1400" b="0" i="0">
+                <a:solidFill>
+                  <a:srgbClr val="C9D9EC"/>
+                </a:solidFill>
+                <a:latin typeface="Calibri"/>
+              </a:rPr>
+              <a:t>The same system in time — and every model call and tool call lives inside ONE A2A turn</a:t>
+            </a:r>
+          </a:p>
+        </p:txBody>
+      </p:sp>
+      <p:graphicFrame>
+        <p:nvGraphicFramePr>
+          <p:cNvPr id="3" name="Table 2"/>
+          <p:cNvGraphicFramePr>
+            <a:graphicFrameLocks noGrp="1"/>
+          </p:cNvGraphicFramePr>
+          <p:nvPr/>
+        </p:nvGraphicFramePr>
+        <p:xfrm>
+          <a:off x="411480" y="1143000"/>
+          <a:ext cx="11338560" cy="3611880"/>
+        </p:xfrm>
+        <a:graphic>
+          <a:graphicData uri="http://schemas.openxmlformats.org/drawingml/2006/table">
+            <a:tbl>
+              <a:tblPr firstRow="1">
+                <a:tableStyleId>{5C22544A-7EE6-4342-B048-85BDC9FD1C3A}</a:tableStyleId>
+              </a:tblPr>
+              <a:tblGrid>
+                <a:gridCol w="1051560"/>
+                <a:gridCol w="7178040"/>
+                <a:gridCol w="3108960"/>
+              </a:tblGrid>
+              <a:tr h="361188">
+                <a:tc>
+                  <a:txBody>
+                    <a:bodyPr/>
+                    <a:lstStyle/>
+                    <a:p>
+                      <a:pPr algn="l"/>
+                      <a:r>
+                        <a:rPr sz="1100" b="1" i="0">
+                          <a:solidFill>
+                            <a:srgbClr val="FFFFFF"/>
+                          </a:solidFill>
+                          <a:latin typeface="Calibri"/>
+                        </a:rPr>
+                        <a:t>who</a:t>
+                      </a:r>
+                    </a:p>
+                  </a:txBody>
+                  <a:tcPr marL="63500" marR="63500" marT="12700" marB="12700" anchor="ctr">
+                    <a:solidFill>
+                      <a:srgbClr val="1B3A5C"/>
+                    </a:solidFill>
+                  </a:tcPr>
+                </a:tc>
+                <a:tc>
+                  <a:txBody>
+                    <a:bodyPr/>
+                    <a:lstStyle/>
+                    <a:p>
+                      <a:pPr algn="ctr"/>
+                      <a:r>
+                        <a:rPr sz="1100" b="1" i="0">
+                          <a:solidFill>
+                            <a:srgbClr val="FFFFFF"/>
+                          </a:solidFill>
+                          <a:latin typeface="Calibri"/>
+                        </a:rPr>
+                        <a:t>step</a:t>
+                      </a:r>
+                    </a:p>
+                  </a:txBody>
+                  <a:tcPr marL="63500" marR="63500" marT="12700" marB="12700" anchor="ctr">
+                    <a:solidFill>
+                      <a:srgbClr val="1B3A5C"/>
+                    </a:solidFill>
+                  </a:tcPr>
+                </a:tc>
+                <a:tc>
+                  <a:txBody>
+                    <a:bodyPr/>
+                    <a:lstStyle/>
+                    <a:p>
+                      <a:pPr algn="ctr"/>
+                      <a:r>
+                        <a:rPr sz="1100" b="1" i="0">
+                          <a:solidFill>
+                            <a:srgbClr val="FFFFFF"/>
+                          </a:solidFill>
+                          <a:latin typeface="Calibri"/>
+                        </a:rPr>
+                        <a:t>span it appears as</a:t>
+                      </a:r>
+                    </a:p>
+                  </a:txBody>
+                  <a:tcPr marL="63500" marR="63500" marT="12700" marB="12700" anchor="ctr">
+                    <a:solidFill>
+                      <a:srgbClr val="1B3A5C"/>
+                    </a:solidFill>
+                  </a:tcPr>
+                </a:tc>
+              </a:tr>
+              <a:tr h="361188">
+                <a:tc>
+                  <a:txBody>
+                    <a:bodyPr/>
+                    <a:lstStyle/>
+                    <a:p>
+                      <a:pPr algn="l"/>
+                      <a:r>
+                        <a:rPr sz="1100" b="1" i="0">
+                          <a:solidFill>
+                            <a:srgbClr val="1F2A37"/>
+                          </a:solidFill>
+                          <a:latin typeface="Calibri"/>
+                        </a:rPr>
+                        <a:t>Service</a:t>
+                      </a:r>
+                    </a:p>
+                  </a:txBody>
+                  <a:tcPr marL="63500" marR="63500" marT="12700" marB="12700" anchor="ctr">
+                    <a:solidFill>
+                      <a:srgbClr val="FFFFFF"/>
+                    </a:solidFill>
+                  </a:tcPr>
+                </a:tc>
+                <a:tc>
+                  <a:txBody>
+                    <a:bodyPr/>
+                    <a:lstStyle/>
+                    <a:p>
+                      <a:pPr algn="ctr"/>
+                      <a:r>
+                        <a:rPr sz="1100" b="0" i="0">
+                          <a:solidFill>
+                            <a:srgbClr val="1F2A37"/>
+                          </a:solidFill>
+                          <a:latin typeface="Calibri"/>
+                        </a:rPr>
+                        <a:t>create_session(task_id)  →  MCP pod</a:t>
+                      </a:r>
+                    </a:p>
+                  </a:txBody>
+                  <a:tcPr marL="63500" marR="63500" marT="12700" marB="12700" anchor="ctr">
+                    <a:solidFill>
+                      <a:srgbClr val="FFFFFF"/>
+                    </a:solidFill>
+                  </a:tcPr>
+                </a:tc>
+                <a:tc>
+                  <a:txBody>
+                    <a:bodyPr/>
+                    <a:lstStyle/>
+                    <a:p>
+                      <a:pPr algn="ctr"/>
+                      <a:r>
+                        <a:rPr sz="1100" b="0" i="0">
+                          <a:solidFill>
+                            <a:srgbClr val="1F2A37"/>
+                          </a:solidFill>
+                          <a:latin typeface="Calibri"/>
+                        </a:rPr>
+                        <a:t>MCP.CreateSession</a:t>
+                      </a:r>
+                    </a:p>
+                  </a:txBody>
+                  <a:tcPr marL="63500" marR="63500" marT="12700" marB="12700" anchor="ctr">
+                    <a:solidFill>
+                      <a:srgbClr val="FFFFFF"/>
+                    </a:solidFill>
+                  </a:tcPr>
+                </a:tc>
+              </a:tr>
+              <a:tr h="361188">
+                <a:tc>
+                  <a:txBody>
+                    <a:bodyPr/>
+                    <a:lstStyle/>
+                    <a:p>
+                      <a:pPr algn="l"/>
+                      <a:r>
+                        <a:rPr sz="1100" b="1" i="0">
+                          <a:solidFill>
+                            <a:srgbClr val="1F2A37"/>
+                          </a:solidFill>
+                          <a:latin typeface="Calibri"/>
+                        </a:rPr>
+                        <a:t>Service</a:t>
+                      </a:r>
+                    </a:p>
+                  </a:txBody>
+                  <a:tcPr marL="63500" marR="63500" marT="12700" marB="12700" anchor="ctr">
+                    <a:solidFill>
+                      <a:srgbClr val="F4F6F8"/>
+                    </a:solidFill>
+                  </a:tcPr>
+                </a:tc>
+                <a:tc>
+                  <a:txBody>
+                    <a:bodyPr/>
+                    <a:lstStyle/>
+                    <a:p>
+                      <a:pPr algn="ctr"/>
+                      <a:r>
+                        <a:rPr sz="1100" b="0" i="0">
+                          <a:solidFill>
+                            <a:srgbClr val="1F2A37"/>
+                          </a:solidFill>
+                          <a:latin typeface="Calibri"/>
+                        </a:rPr>
+                        <a:t>send_prompt(task text; session_id in A2A request metadata)  →  agent   — ONE message, once per task</a:t>
+                      </a:r>
+                    </a:p>
+                  </a:txBody>
+                  <a:tcPr marL="63500" marR="63500" marT="12700" marB="12700" anchor="ctr">
+                    <a:solidFill>
+                      <a:srgbClr val="F4F6F8"/>
+                    </a:solidFill>
+                  </a:tcPr>
+                </a:tc>
+                <a:tc>
+                  <a:txBody>
+                    <a:bodyPr/>
+                    <a:lstStyle/>
+                    <a:p>
+                      <a:pPr algn="ctr"/>
+                      <a:r>
+                        <a:rPr sz="1100" b="0" i="0">
+                          <a:solidFill>
+                            <a:srgbClr val="1F2A37"/>
+                          </a:solidFill>
+                          <a:latin typeface="Calibri"/>
+                        </a:rPr>
+                        <a:t>Agent.Call</a:t>
+                      </a:r>
+                    </a:p>
+                  </a:txBody>
+                  <a:tcPr marL="63500" marR="63500" marT="12700" marB="12700" anchor="ctr">
+                    <a:solidFill>
+                      <a:srgbClr val="F4F6F8"/>
+                    </a:solidFill>
+                  </a:tcPr>
+                </a:tc>
+              </a:tr>
+              <a:tr h="361188">
+                <a:tc>
+                  <a:txBody>
+                    <a:bodyPr/>
+                    <a:lstStyle/>
+                    <a:p>
+                      <a:pPr algn="l"/>
+                      <a:r>
+                        <a:rPr sz="1100" b="1" i="0">
+                          <a:solidFill>
+                            <a:srgbClr val="1F2A37"/>
+                          </a:solidFill>
+                          <a:latin typeface="Calibri"/>
+                        </a:rPr>
+                        <a:t>agent</a:t>
+                      </a:r>
+                    </a:p>
+                  </a:txBody>
+                  <a:tcPr marL="63500" marR="63500" marT="12700" marB="12700" anchor="ctr">
+                    <a:solidFill>
+                      <a:srgbClr val="FFFFFF"/>
+                    </a:solidFill>
+                  </a:tcPr>
+                </a:tc>
+                <a:tc>
+                  <a:txBody>
+                    <a:bodyPr/>
+                    <a:lstStyle/>
+                    <a:p>
+                      <a:pPr algn="ctr"/>
+                      <a:r>
+                        <a:rPr sz="1100" b="0" i="0">
+                          <a:solidFill>
+                            <a:srgbClr val="1F2A37"/>
+                          </a:solidFill>
+                          <a:latin typeface="Calibri"/>
+                        </a:rPr>
+                        <a:t>connect_mcp — tools/list  →  MCP pod   (per task, not per pod; ~27–38 ms)</a:t>
+                      </a:r>
+                    </a:p>
+                  </a:txBody>
+                  <a:tcPr marL="63500" marR="63500" marT="12700" marB="12700" anchor="ctr">
+                    <a:solidFill>
+                      <a:srgbClr val="FFFFFF"/>
+                    </a:solidFill>
+                  </a:tcPr>
+                </a:tc>
+                <a:tc>
+                  <a:txBody>
+                    <a:bodyPr/>
+                    <a:lstStyle/>
+                    <a:p>
+                      <a:pPr algn="ctr"/>
+                      <a:r>
+                        <a:rPr sz="1100" b="0" i="0">
+                          <a:solidFill>
+                            <a:srgbClr val="1F2A37"/>
+                          </a:solidFill>
+                          <a:latin typeface="Calibri"/>
+                        </a:rPr>
+                        <a:t>connect_mcp</a:t>
+                      </a:r>
+                    </a:p>
+                  </a:txBody>
+                  <a:tcPr marL="63500" marR="63500" marT="12700" marB="12700" anchor="ctr">
+                    <a:solidFill>
+                      <a:srgbClr val="FFFFFF"/>
+                    </a:solidFill>
+                  </a:tcPr>
+                </a:tc>
+              </a:tr>
+              <a:tr h="361188">
+                <a:tc>
+                  <a:txBody>
+                    <a:bodyPr/>
+                    <a:lstStyle/>
+                    <a:p>
+                      <a:pPr algn="l"/>
+                      <a:r>
+                        <a:rPr sz="1100" b="1" i="0">
+                          <a:solidFill>
+                            <a:srgbClr val="1F2A37"/>
+                          </a:solidFill>
+                          <a:latin typeface="Calibri"/>
+                        </a:rPr>
+                        <a:t>agent</a:t>
+                      </a:r>
+                    </a:p>
+                  </a:txBody>
+                  <a:tcPr marL="63500" marR="63500" marT="12700" marB="12700" anchor="ctr">
+                    <a:solidFill>
+                      <a:srgbClr val="F4F6F8"/>
+                    </a:solidFill>
+                  </a:tcPr>
+                </a:tc>
+                <a:tc>
+                  <a:txBody>
+                    <a:bodyPr/>
+                    <a:lstStyle/>
+                    <a:p>
+                      <a:pPr algn="ctr"/>
+                      <a:r>
+                        <a:rPr sz="1100" b="0" i="0">
+                          <a:solidFill>
+                            <a:srgbClr val="1F2A37"/>
+                          </a:solidFill>
+                          <a:latin typeface="Calibri"/>
+                        </a:rPr>
+                        <a:t>create_agent   (6.7 ms warm, up to 6.5 s on a cold pod)</a:t>
+                      </a:r>
+                    </a:p>
+                  </a:txBody>
+                  <a:tcPr marL="63500" marR="63500" marT="12700" marB="12700" anchor="ctr">
+                    <a:solidFill>
+                      <a:srgbClr val="F4F6F8"/>
+                    </a:solidFill>
+                  </a:tcPr>
+                </a:tc>
+                <a:tc>
+                  <a:txBody>
+                    <a:bodyPr/>
+                    <a:lstStyle/>
+                    <a:p>
+                      <a:pPr algn="ctr"/>
+                      <a:r>
+                        <a:rPr sz="1100" b="0" i="0">
+                          <a:solidFill>
+                            <a:srgbClr val="1F2A37"/>
+                          </a:solidFill>
+                          <a:latin typeface="Calibri"/>
+                        </a:rPr>
+                        <a:t>create_agent</a:t>
+                      </a:r>
+                    </a:p>
+                  </a:txBody>
+                  <a:tcPr marL="63500" marR="63500" marT="12700" marB="12700" anchor="ctr">
+                    <a:solidFill>
+                      <a:srgbClr val="F4F6F8"/>
+                    </a:solidFill>
+                  </a:tcPr>
+                </a:tc>
+              </a:tr>
+              <a:tr h="361188">
+                <a:tc>
+                  <a:txBody>
+                    <a:bodyPr/>
+                    <a:lstStyle/>
+                    <a:p>
+                      <a:pPr algn="l"/>
+                      <a:r>
+                        <a:rPr sz="1100" b="1" i="0">
+                          <a:solidFill>
+                            <a:srgbClr val="1F2A37"/>
+                          </a:solidFill>
+                          <a:latin typeface="Calibri"/>
+                        </a:rPr>
+                        <a:t>agent</a:t>
+                      </a:r>
+                    </a:p>
+                  </a:txBody>
+                  <a:tcPr marL="63500" marR="63500" marT="12700" marB="12700" anchor="ctr">
+                    <a:solidFill>
+                      <a:srgbClr val="FFFFFF"/>
+                    </a:solidFill>
+                  </a:tcPr>
+                </a:tc>
+                <a:tc>
+                  <a:txBody>
+                    <a:bodyPr/>
+                    <a:lstStyle/>
+                    <a:p>
+                      <a:pPr algn="ctr"/>
+                      <a:r>
+                        <a:rPr sz="1100" b="0" i="0">
+                          <a:solidFill>
+                            <a:srgbClr val="1F2A37"/>
+                          </a:solidFill>
+                          <a:latin typeface="Calibri"/>
+                        </a:rPr>
+                        <a:t>initial_observation — local, no I/O, ~50 µs</a:t>
+                      </a:r>
+                    </a:p>
+                  </a:txBody>
+                  <a:tcPr marL="63500" marR="63500" marT="12700" marB="12700" anchor="ctr">
+                    <a:solidFill>
+                      <a:srgbClr val="FFFFFF"/>
+                    </a:solidFill>
+                  </a:tcPr>
+                </a:tc>
+                <a:tc>
+                  <a:txBody>
+                    <a:bodyPr/>
+                    <a:lstStyle/>
+                    <a:p>
+                      <a:pPr algn="ctr"/>
+                      <a:r>
+                        <a:rPr sz="1100" b="0" i="0">
+                          <a:solidFill>
+                            <a:srgbClr val="1F2A37"/>
+                          </a:solidFill>
+                          <a:latin typeface="Calibri"/>
+                        </a:rPr>
+                        <a:t>execute_tool initial_observation  (never counted)</a:t>
+                      </a:r>
+                    </a:p>
+                  </a:txBody>
+                  <a:tcPr marL="63500" marR="63500" marT="12700" marB="12700" anchor="ctr">
+                    <a:solidFill>
+                      <a:srgbClr val="FFFFFF"/>
+                    </a:solidFill>
+                  </a:tcPr>
+                </a:tc>
+              </a:tr>
+              <a:tr h="361188">
+                <a:tc>
+                  <a:txBody>
+                    <a:bodyPr/>
+                    <a:lstStyle/>
+                    <a:p>
+                      <a:pPr algn="l"/>
+                      <a:r>
+                        <a:rPr sz="1100" b="1" i="0">
+                          <a:solidFill>
+                            <a:srgbClr val="1F2A37"/>
+                          </a:solidFill>
+                          <a:latin typeface="Calibri"/>
+                        </a:rPr>
+                        <a:t>agent</a:t>
+                      </a:r>
+                    </a:p>
+                  </a:txBody>
+                  <a:tcPr marL="63500" marR="63500" marT="12700" marB="12700" anchor="ctr">
+                    <a:solidFill>
+                      <a:srgbClr val="F4F6F8"/>
+                    </a:solidFill>
+                  </a:tcPr>
+                </a:tc>
+                <a:tc>
+                  <a:txBody>
+                    <a:bodyPr/>
+                    <a:lstStyle/>
+                    <a:p>
+                      <a:pPr algn="ctr"/>
+                      <a:r>
+                        <a:rPr sz="1100" b="0" i="0">
+                          <a:solidFill>
+                            <a:srgbClr val="1F2A37"/>
+                          </a:solidFill>
+                          <a:latin typeface="Calibri"/>
+                        </a:rPr>
+                        <a:t>LOOP:  chat(model)  →  execute_tool(…)  →  MCP pod  →  observation  →  chat  →  …</a:t>
+                      </a:r>
+                    </a:p>
+                  </a:txBody>
+                  <a:tcPr marL="63500" marR="63500" marT="12700" marB="12700" anchor="ctr">
+                    <a:solidFill>
+                      <a:srgbClr val="F4F6F8"/>
+                    </a:solidFill>
+                  </a:tcPr>
+                </a:tc>
+                <a:tc>
+                  <a:txBody>
+                    <a:bodyPr/>
+                    <a:lstStyle/>
+                    <a:p>
+                      <a:pPr algn="ctr"/>
+                      <a:r>
+                        <a:rPr sz="1100" b="0" i="0">
+                          <a:solidFill>
+                            <a:srgbClr val="1F2A37"/>
+                          </a:solidFill>
+                          <a:latin typeface="Calibri"/>
+                        </a:rPr>
+                        <a:t>chat &lt;model&gt;  ·  execute_tool &lt;tool&gt;</a:t>
+                      </a:r>
+                    </a:p>
+                  </a:txBody>
+                  <a:tcPr marL="63500" marR="63500" marT="12700" marB="12700" anchor="ctr">
+                    <a:solidFill>
+                      <a:srgbClr val="F4F6F8"/>
+                    </a:solidFill>
+                  </a:tcPr>
+                </a:tc>
+              </a:tr>
+              <a:tr h="361188">
+                <a:tc>
+                  <a:txBody>
+                    <a:bodyPr/>
+                    <a:lstStyle/>
+                    <a:p>
+                      <a:pPr algn="l"/>
+                      <a:r>
+                        <a:rPr sz="1100" b="1" i="0">
+                          <a:solidFill>
+                            <a:srgbClr val="1F2A37"/>
+                          </a:solidFill>
+                          <a:latin typeface="Calibri"/>
+                        </a:rPr>
+                        <a:t>agent</a:t>
+                      </a:r>
+                    </a:p>
+                  </a:txBody>
+                  <a:tcPr marL="63500" marR="63500" marT="12700" marB="12700" anchor="ctr">
+                    <a:solidFill>
+                      <a:srgbClr val="FFFFFF"/>
+                    </a:solidFill>
+                  </a:tcPr>
+                </a:tc>
+                <a:tc>
+                  <a:txBody>
+                    <a:bodyPr/>
+                    <a:lstStyle/>
+                    <a:p>
+                      <a:pPr algn="ctr"/>
+                      <a:r>
+                        <a:rPr sz="1100" b="0" i="0">
+                          <a:solidFill>
+                            <a:srgbClr val="1F2A37"/>
+                          </a:solidFill>
+                          <a:latin typeface="Calibri"/>
+                        </a:rPr>
+                        <a:t>returns its final message, when the model asks for no further tool</a:t>
+                      </a:r>
+                    </a:p>
+                  </a:txBody>
+                  <a:tcPr marL="63500" marR="63500" marT="12700" marB="12700" anchor="ctr">
+                    <a:solidFill>
+                      <a:srgbClr val="FFFFFF"/>
+                    </a:solidFill>
+                  </a:tcPr>
+                </a:tc>
+                <a:tc>
+                  <a:txBody>
+                    <a:bodyPr/>
+                    <a:lstStyle/>
+                    <a:p>
+                      <a:pPr algn="ctr"/>
+                      <a:r>
+                        <a:rPr sz="1100" b="0" i="0">
+                          <a:solidFill>
+                            <a:srgbClr val="1F2A37"/>
+                          </a:solidFill>
+                          <a:latin typeface="Calibri"/>
+                        </a:rPr>
+                        <a:t>(the runner discards the text)</a:t>
+                      </a:r>
+                    </a:p>
+                  </a:txBody>
+                  <a:tcPr marL="63500" marR="63500" marT="12700" marB="12700" anchor="ctr">
+                    <a:solidFill>
+                      <a:srgbClr val="FFFFFF"/>
+                    </a:solidFill>
+                  </a:tcPr>
+                </a:tc>
+              </a:tr>
+              <a:tr h="361188">
+                <a:tc>
+                  <a:txBody>
+                    <a:bodyPr/>
+                    <a:lstStyle/>
+                    <a:p>
+                      <a:pPr algn="l"/>
+                      <a:r>
+                        <a:rPr sz="1100" b="1" i="0">
+                          <a:solidFill>
+                            <a:srgbClr val="1F2A37"/>
+                          </a:solidFill>
+                          <a:latin typeface="Calibri"/>
+                        </a:rPr>
+                        <a:t>Service</a:t>
+                      </a:r>
+                    </a:p>
+                  </a:txBody>
+                  <a:tcPr marL="63500" marR="63500" marT="12700" marB="12700" anchor="ctr">
+                    <a:solidFill>
+                      <a:srgbClr val="F4F6F8"/>
+                    </a:solidFill>
+                  </a:tcPr>
+                </a:tc>
+                <a:tc>
+                  <a:txBody>
+                    <a:bodyPr/>
+                    <a:lstStyle/>
+                    <a:p>
+                      <a:pPr algn="ctr"/>
+                      <a:r>
+                        <a:rPr sz="1100" b="0" i="0">
+                          <a:solidFill>
+                            <a:srgbClr val="1F2A37"/>
+                          </a:solidFill>
+                          <a:latin typeface="Calibri"/>
+                        </a:rPr>
+                        <a:t>evaluate_session  →  MCP pod:  the verdict, read off the session's final state</a:t>
+                      </a:r>
+                    </a:p>
+                  </a:txBody>
+                  <a:tcPr marL="63500" marR="63500" marT="12700" marB="12700" anchor="ctr">
+                    <a:solidFill>
+                      <a:srgbClr val="F4F6F8"/>
+                    </a:solidFill>
+                  </a:tcPr>
+                </a:tc>
+                <a:tc>
+                  <a:txBody>
+                    <a:bodyPr/>
+                    <a:lstStyle/>
+                    <a:p>
+                      <a:pPr algn="ctr"/>
+                      <a:r>
+                        <a:rPr sz="1100" b="0" i="0">
+                          <a:solidFill>
+                            <a:srgbClr val="1F2A37"/>
+                          </a:solidFill>
+                          <a:latin typeface="Calibri"/>
+                        </a:rPr>
+                        <a:t>Evaluator.Evaluate</a:t>
+                      </a:r>
+                    </a:p>
+                  </a:txBody>
+                  <a:tcPr marL="63500" marR="63500" marT="12700" marB="12700" anchor="ctr">
+                    <a:solidFill>
+                      <a:srgbClr val="F4F6F8"/>
+                    </a:solidFill>
+                  </a:tcPr>
+                </a:tc>
+              </a:tr>
+              <a:tr h="361188">
+                <a:tc>
+                  <a:txBody>
+                    <a:bodyPr/>
+                    <a:lstStyle/>
+                    <a:p>
+                      <a:pPr algn="l"/>
+                      <a:r>
+                        <a:rPr sz="1100" b="1" i="0">
+                          <a:solidFill>
+                            <a:srgbClr val="1F2A37"/>
+                          </a:solidFill>
+                          <a:latin typeface="Calibri"/>
+                        </a:rPr>
+                        <a:t>Service</a:t>
+                      </a:r>
+                    </a:p>
+                  </a:txBody>
+                  <a:tcPr marL="63500" marR="63500" marT="12700" marB="12700" anchor="ctr">
+                    <a:solidFill>
+                      <a:srgbClr val="FFFFFF"/>
+                    </a:solidFill>
+                  </a:tcPr>
+                </a:tc>
+                <a:tc>
+                  <a:txBody>
+                    <a:bodyPr/>
+                    <a:lstStyle/>
+                    <a:p>
+                      <a:pPr algn="ctr"/>
+                      <a:r>
+                        <a:rPr sz="1100" b="0" i="0">
+                          <a:solidFill>
+                            <a:srgbClr val="1F2A37"/>
+                          </a:solidFill>
+                          <a:latin typeface="Calibri"/>
+                        </a:rPr>
+                        <a:t>delete_session  →  MCP pod, in a finally</a:t>
+                      </a:r>
+                    </a:p>
+                  </a:txBody>
+                  <a:tcPr marL="63500" marR="63500" marT="12700" marB="12700" anchor="ctr">
+                    <a:solidFill>
+                      <a:srgbClr val="FFFFFF"/>
+                    </a:solidFill>
+                  </a:tcPr>
+                </a:tc>
+                <a:tc>
+                  <a:txBody>
+                    <a:bodyPr/>
+                    <a:lstStyle/>
+                    <a:p>
+                      <a:pPr algn="ctr"/>
+                      <a:r>
+                        <a:rPr sz="1100" b="0" i="0">
+                          <a:solidFill>
+                            <a:srgbClr val="1F2A37"/>
+                          </a:solidFill>
+                          <a:latin typeface="Calibri"/>
+                        </a:rPr>
+                        <a:t>(no span)</a:t>
+                      </a:r>
+                    </a:p>
+                  </a:txBody>
+                  <a:tcPr marL="63500" marR="63500" marT="12700" marB="12700" anchor="ctr">
+                    <a:solidFill>
+                      <a:srgbClr val="FFFFFF"/>
+                    </a:solidFill>
+                  </a:tcPr>
+                </a:tc>
+              </a:tr>
+            </a:tbl>
+          </a:graphicData>
+        </a:graphic>
+      </p:graphicFrame>
+      <p:sp>
+        <p:nvSpPr>
+          <p:cNvPr id="4" name="Rounded Rectangle 3"/>
+          <p:cNvSpPr/>
+          <p:nvPr/>
+        </p:nvSpPr>
+        <p:spPr>
+          <a:xfrm>
+            <a:off x="411480" y="4983480"/>
+            <a:ext cx="3657600" cy="1325880"/>
+          </a:xfrm>
+          <a:prstGeom prst="roundRect">
+            <a:avLst/>
+          </a:prstGeom>
+          <a:solidFill>
+            <a:srgbClr val="E8F1FB"/>
+          </a:solidFill>
+          <a:ln w="12700">
+            <a:solidFill>
+              <a:srgbClr val="2E6FB5"/>
+            </a:solidFill>
+          </a:ln>
+          <a:effectLst/>
+        </p:spPr>
+        <p:style>
+          <a:lnRef idx="1">
+            <a:schemeClr val="accent1"/>
+          </a:lnRef>
+          <a:fillRef idx="3">
+            <a:schemeClr val="accent1"/>
+          </a:fillRef>
+          <a:effectRef idx="2">
+            <a:schemeClr val="accent1"/>
+          </a:effectRef>
+          <a:fontRef idx="minor">
+            <a:schemeClr val="lt1"/>
+          </a:fontRef>
+        </p:style>
+        <p:txBody>
+          <a:bodyPr rtlCol="0" anchor="ctr" wrap="square" tIns="25400" bIns="25400"/>
+          <a:lstStyle/>
+          <a:p>
+            <a:pPr algn="ctr"/>
+            <a:r>
+              <a:rPr sz="1350" b="1" i="0">
+                <a:solidFill>
+                  <a:srgbClr val="2E6FB5"/>
+                </a:solidFill>
+                <a:latin typeface="Calibri"/>
+              </a:rPr>
+              <a:t>One A2A turn per task</a:t>
+            </a:r>
+          </a:p>
+          <a:p>
+            <a:pPr algn="ctr"/>
+            <a:r>
+              <a:rPr sz="1050" b="0" i="0">
+                <a:solidFill>
+                  <a:srgbClr val="1F2A37"/>
+                </a:solidFill>
+                <a:latin typeface="Calibri"/>
+              </a:rPr>
+              <a:t>Everything the agent does happens inside that single streaming request. Its POST / span brackets it, so Agent.Call − POST / is the Service's own cost: 16.9 ms of a 10.4 s gsm8k task, 13.2 ms of a 70.3 s tau2 one.</a:t>
+            </a:r>
+          </a:p>
+        </p:txBody>
+      </p:sp>
+      <p:sp>
+        <p:nvSpPr>
+          <p:cNvPr id="5" name="Rounded Rectangle 4"/>
+          <p:cNvSpPr/>
+          <p:nvPr/>
+        </p:nvSpPr>
+        <p:spPr>
+          <a:xfrm>
+            <a:off x="4251960" y="4983480"/>
+            <a:ext cx="3657600" cy="1325880"/>
+          </a:xfrm>
+          <a:prstGeom prst="roundRect">
+            <a:avLst/>
+          </a:prstGeom>
+          <a:solidFill>
+            <a:srgbClr val="E4F0F0"/>
+          </a:solidFill>
+          <a:ln w="12700">
+            <a:solidFill>
+              <a:srgbClr val="3D6E70"/>
+            </a:solidFill>
+          </a:ln>
+          <a:effectLst/>
+        </p:spPr>
+        <p:style>
+          <a:lnRef idx="1">
+            <a:schemeClr val="accent1"/>
+          </a:lnRef>
+          <a:fillRef idx="3">
+            <a:schemeClr val="accent1"/>
+          </a:fillRef>
+          <a:effectRef idx="2">
+            <a:schemeClr val="accent1"/>
+          </a:effectRef>
+          <a:fontRef idx="minor">
+            <a:schemeClr val="lt1"/>
+          </a:fontRef>
+        </p:style>
+        <p:txBody>
+          <a:bodyPr rtlCol="0" anchor="ctr" wrap="square" tIns="25400" bIns="25400"/>
+          <a:lstStyle/>
+          <a:p>
+            <a:pPr algn="ctr"/>
+            <a:r>
+              <a:rPr sz="1350" b="1" i="0">
+                <a:solidFill>
+                  <a:srgbClr val="3D6E70"/>
+                </a:solidFill>
+                <a:latin typeface="Calibri"/>
+              </a:rPr>
+              <a:t>The Service issues no tool call</a:t>
+            </a:r>
+          </a:p>
+          <a:p>
+            <a:pPr algn="ctr"/>
+            <a:r>
+              <a:rPr sz="1050" b="0" i="0">
+                <a:solidFill>
+                  <a:srgbClr val="1F2A37"/>
+                </a:solidFill>
+                <a:latin typeface="Calibri"/>
+              </a:rPr>
+              <a:t>Its MCP traffic is list_tasks / create_session / evaluate_session / delete_session. execute_tool is the AGENT's outbound call, named by the agent — the Service never learns a tool's name.</a:t>
+            </a:r>
+          </a:p>
+        </p:txBody>
+      </p:sp>
+      <p:sp>
+        <p:nvSpPr>
+          <p:cNvPr id="6" name="Rounded Rectangle 5"/>
+          <p:cNvSpPr/>
+          <p:nvPr/>
+        </p:nvSpPr>
+        <p:spPr>
+          <a:xfrm>
+            <a:off x="8092440" y="4983480"/>
+            <a:ext cx="3657600" cy="1325880"/>
+          </a:xfrm>
+          <a:prstGeom prst="roundRect">
+            <a:avLst/>
+          </a:prstGeom>
+          <a:solidFill>
+            <a:srgbClr val="EEEFF1"/>
+          </a:solidFill>
+          <a:ln w="12700">
+            <a:solidFill>
+              <a:srgbClr val="6B6B6B"/>
+            </a:solidFill>
+          </a:ln>
+          <a:effectLst/>
+        </p:spPr>
+        <p:style>
+          <a:lnRef idx="1">
+            <a:schemeClr val="accent1"/>
+          </a:lnRef>
+          <a:fillRef idx="3">
+            <a:schemeClr val="accent1"/>
+          </a:fillRef>
+          <a:effectRef idx="2">
+            <a:schemeClr val="accent1"/>
+          </a:effectRef>
+          <a:fontRef idx="minor">
+            <a:schemeClr val="lt1"/>
+          </a:fontRef>
+        </p:style>
+        <p:txBody>
+          <a:bodyPr rtlCol="0" anchor="ctr" wrap="square" tIns="25400" bIns="25400"/>
+          <a:lstStyle/>
+          <a:p>
+            <a:pPr algn="ctr"/>
+            <a:r>
+              <a:rPr sz="1350" b="1" i="0">
+                <a:solidFill>
+                  <a:srgbClr val="1F2A37"/>
+                </a:solidFill>
+                <a:latin typeface="Calibri"/>
+              </a:rPr>
+              <a:t>The session id joins the two halves</a:t>
+            </a:r>
+          </a:p>
+          <a:p>
+            <a:pPr algn="ctr"/>
+            <a:r>
+              <a:rPr sz="1050" b="0" i="0">
+                <a:solidFill>
+                  <a:srgbClr val="1F2A37"/>
+                </a:solidFill>
+                <a:latin typeface="Calibri"/>
+              </a:rPr>
+              <a:t>It travels in A2A request metadata, never in the prompt text — which is why the agent's tool calls mutate the session the Service will grade, and why prose alone fails a gsm8k task.</a:t>
+            </a:r>
+          </a:p>
+        </p:txBody>
+      </p:sp>
+      <p:sp>
+        <p:nvSpPr>
+          <p:cNvPr id="7" name="TextBox 6"/>
+          <p:cNvSpPr txBox="1"/>
+          <p:nvPr/>
+        </p:nvSpPr>
+        <p:spPr>
+          <a:xfrm>
+            <a:off x="11795760" y="6437376"/>
+            <a:ext cx="320040" cy="310896"/>
+          </a:xfrm>
+          <a:prstGeom prst="rect">
+            <a:avLst/>
+          </a:prstGeom>
+          <a:noFill/>
+        </p:spPr>
+        <p:txBody>
+          <a:bodyPr wrap="none" anchor="ctr" lIns="0" rIns="0" tIns="0" bIns="0">
+            <a:spAutoFit/>
+          </a:bodyPr>
+          <a:lstStyle/>
+          <a:p>
+            <a:pPr algn="r">
+              <a:spcAft>
+                <a:spcPts val="300"/>
+              </a:spcAft>
+            </a:pPr>
+            <a:r>
+              <a:rPr sz="1200" b="0" i="0">
+                <a:solidFill>
+                  <a:srgbClr val="6B6B6B"/>
+                </a:solidFill>
+                <a:latin typeface="Calibri"/>
+              </a:rPr>
+              <a:t>11</a:t>
+            </a:r>
+          </a:p>
+        </p:txBody>
+      </p:sp>
+    </p:spTree>
+  </p:cSld>
+  <p:clrMapOvr>
+    <a:masterClrMapping/>
+  </p:clrMapOvr>
+</p:sld>
+</file>
+
+<file path=ppt/slides/slide12.xml><?xml version="1.0" encoding="utf-8"?>
+<p:sld xmlns:a="http://schemas.openxmlformats.org/drawingml/2006/main" xmlns:p="http://schemas.openxmlformats.org/presentationml/2006/main" xmlns:r="http://schemas.openxmlformats.org/officeDocument/2006/relationships">
+  <p:cSld name="6.4 Who Decides What Happens Inside a Task">
+    <p:spTree>
+      <p:nvGrpSpPr>
+        <p:cNvPr id="1" name=""/>
+        <p:cNvGrpSpPr/>
+        <p:nvPr/>
+      </p:nvGrpSpPr>
+      <p:grpSpPr/>
+      <p:sp>
+        <p:nvSpPr>
+          <p:cNvPr id="2" name="Rectangle 1"/>
+          <p:cNvSpPr/>
+          <p:nvPr/>
+        </p:nvSpPr>
+        <p:spPr>
+          <a:xfrm>
+            <a:off x="0" y="0"/>
+            <a:ext cx="12192000" cy="950000"/>
+          </a:xfrm>
+          <a:prstGeom prst="rect">
+            <a:avLst/>
+          </a:prstGeom>
+          <a:solidFill>
+            <a:srgbClr val="1B3A5C"/>
+          </a:solidFill>
+          <a:ln>
+            <a:noFill/>
+          </a:ln>
+          <a:effectLst/>
+        </p:spPr>
+        <p:style>
+          <a:lnRef idx="1">
+            <a:schemeClr val="accent1"/>
+          </a:lnRef>
+          <a:fillRef idx="3">
+            <a:schemeClr val="accent1"/>
+          </a:fillRef>
+          <a:effectRef idx="2">
+            <a:schemeClr val="accent1"/>
+          </a:effectRef>
+          <a:fontRef idx="minor">
+            <a:schemeClr val="lt1"/>
+          </a:fontRef>
+        </p:style>
+        <p:txBody>
+          <a:bodyPr rtlCol="0" anchor="ctr" lIns="355600"/>
+          <a:lstStyle/>
+          <a:p>
+            <a:pPr algn="ctr"/>
+            <a:r>
+              <a:rPr sz="2600" b="1" i="0">
+                <a:solidFill>
+                  <a:srgbClr val="FFFFFF"/>
+                </a:solidFill>
+                <a:latin typeface="Calibri"/>
+              </a:rPr>
+              <a:t>6.4  Who Decides What Happens Inside a Task</a:t>
             </a:r>
           </a:p>
           <a:p>
@@ -4813,7 +5873,7 @@
                 </a:solidFill>
                 <a:latin typeface="Calibri"/>
               </a:rPr>
-              <a:t>11</a:t>
+              <a:t>12</a:t>
             </a:r>
           </a:p>
         </p:txBody>
@@ -4826,7 +5886,7 @@
 </p:sld>
 </file>
 
-<file path=ppt/slides/slide12.xml><?xml version="1.0" encoding="utf-8"?>
+<file path=ppt/slides/slide13.xml><?xml version="1.0" encoding="utf-8"?>
 <p:sld xmlns:a="http://schemas.openxmlformats.org/drawingml/2006/main" xmlns:p="http://schemas.openxmlformats.org/presentationml/2006/main" xmlns:r="http://schemas.openxmlformats.org/officeDocument/2006/relationships">
   <p:cSld name="7.1 The Three Benchmarks — a Difficulty Ladder">
     <p:spTree>
@@ -6427,7 +7487,7 @@
                 </a:solidFill>
                 <a:latin typeface="Calibri"/>
               </a:rPr>
-              <a:t>12</a:t>
+              <a:t>13</a:t>
             </a:r>
           </a:p>
         </p:txBody>
@@ -6440,7 +7500,7 @@
 </p:sld>
 </file>
 
-<file path=ppt/slides/slide13.xml><?xml version="1.0" encoding="utf-8"?>
+<file path=ppt/slides/slide14.xml><?xml version="1.0" encoding="utf-8"?>
 <p:sld xmlns:a="http://schemas.openxmlformats.org/drawingml/2006/main" xmlns:p="http://schemas.openxmlformats.org/presentationml/2006/main" xmlns:r="http://schemas.openxmlformats.org/officeDocument/2006/relationships">
   <p:cSld name="7.2 What Each Benchmark Stresses">
     <p:spTree>
@@ -7343,7 +8403,7 @@
                 </a:solidFill>
                 <a:latin typeface="Calibri"/>
               </a:rPr>
-              <a:t>13</a:t>
+              <a:t>14</a:t>
             </a:r>
           </a:p>
         </p:txBody>
@@ -7356,7 +8416,7 @@
 </p:sld>
 </file>
 
-<file path=ppt/slides/slide14.xml><?xml version="1.0" encoding="utf-8"?>
+<file path=ppt/slides/slide15.xml><?xml version="1.0" encoding="utf-8"?>
 <p:sld xmlns:a="http://schemas.openxmlformats.org/drawingml/2006/main" xmlns:p="http://schemas.openxmlformats.org/presentationml/2006/main" xmlns:r="http://schemas.openxmlformats.org/officeDocument/2006/relationships">
   <p:cSld name="7.3 Reading the Numbers — Five Things That Mislead">
     <p:spTree>
@@ -7799,7 +8859,7 @@
                 </a:solidFill>
                 <a:latin typeface="Calibri"/>
               </a:rPr>
-              <a:t>14</a:t>
+              <a:t>15</a:t>
             </a:r>
           </a:p>
         </p:txBody>
@@ -7812,7 +8872,7 @@
 </p:sld>
 </file>
 
-<file path=ppt/slides/slide15.xml><?xml version="1.0" encoding="utf-8"?>
+<file path=ppt/slides/slide16.xml><?xml version="1.0" encoding="utf-8"?>
 <p:sld xmlns:a="http://schemas.openxmlformats.org/drawingml/2006/main" xmlns:p="http://schemas.openxmlformats.org/presentationml/2006/main" xmlns:r="http://schemas.openxmlformats.org/officeDocument/2006/relationships">
   <p:cSld name="7.4 Picking a Benchmark — and What That Leg Costs">
     <p:spTree>
@@ -9644,7 +10704,7 @@
                 </a:solidFill>
                 <a:latin typeface="Calibri"/>
               </a:rPr>
-              <a:t>15</a:t>
+              <a:t>16</a:t>
             </a:r>
           </a:p>
         </p:txBody>
@@ -9657,7 +10717,7 @@
 </p:sld>
 </file>
 
-<file path=ppt/slides/slide16.xml><?xml version="1.0" encoding="utf-8"?>
+<file path=ppt/slides/slide17.xml><?xml version="1.0" encoding="utf-8"?>
 <p:sld xmlns:a="http://schemas.openxmlformats.org/drawingml/2006/main" xmlns:p="http://schemas.openxmlformats.org/presentationml/2006/main" xmlns:r="http://schemas.openxmlformats.org/officeDocument/2006/relationships">
   <p:cSld name="7.5 The Cost Model — Tokens, Models, Money">
     <p:spTree>
@@ -11943,7 +13003,7 @@
                 </a:solidFill>
                 <a:latin typeface="Calibri"/>
               </a:rPr>
-              <a:t>16</a:t>
+              <a:t>17</a:t>
             </a:r>
           </a:p>
         </p:txBody>
@@ -11956,7 +13016,7 @@
 </p:sld>
 </file>
 
-<file path=ppt/slides/slide17.xml><?xml version="1.0" encoding="utf-8"?>
+<file path=ppt/slides/slide18.xml><?xml version="1.0" encoding="utf-8"?>
 <p:sld xmlns:a="http://schemas.openxmlformats.org/drawingml/2006/main" xmlns:p="http://schemas.openxmlformats.org/presentationml/2006/main" xmlns:r="http://schemas.openxmlformats.org/officeDocument/2006/relationships">
   <p:cSld name="7.6 The Rate Card — and Which Way the Dollars Are Wrong">
     <p:spTree>
@@ -12995,7 +14055,7 @@
                 </a:solidFill>
                 <a:latin typeface="Calibri"/>
               </a:rPr>
-              <a:t>17</a:t>
+              <a:t>18</a:t>
             </a:r>
           </a:p>
         </p:txBody>
@@ -13008,7 +14068,7 @@
 </p:sld>
 </file>
 
-<file path=ppt/slides/slide18.xml><?xml version="1.0" encoding="utf-8"?>
+<file path=ppt/slides/slide19.xml><?xml version="1.0" encoding="utf-8"?>
 <p:sld xmlns:a="http://schemas.openxmlformats.org/drawingml/2006/main" xmlns:p="http://schemas.openxmlformats.org/presentationml/2006/main" xmlns:r="http://schemas.openxmlformats.org/officeDocument/2006/relationships">
   <p:cSld name="7.7 Token- and Cost-Efficiency — Where the Money Actually Goes">
     <p:spTree>
@@ -13389,7 +14449,7 @@
                 </a:solidFill>
                 <a:latin typeface="Calibri"/>
               </a:rPr>
-              <a:t>18</a:t>
+              <a:t>19</a:t>
             </a:r>
           </a:p>
         </p:txBody>
@@ -13402,7 +14462,1494 @@
 </p:sld>
 </file>
 
-<file path=ppt/slides/slide19.xml><?xml version="1.0" encoding="utf-8"?>
+<file path=ppt/slides/slide2.xml><?xml version="1.0" encoding="utf-8"?>
+<p:sld xmlns:a="http://schemas.openxmlformats.org/drawingml/2006/main" xmlns:p="http://schemas.openxmlformats.org/presentationml/2006/main" xmlns:r="http://schemas.openxmlformats.org/officeDocument/2006/relationships">
+  <p:cSld name="Agenda">
+    <p:spTree>
+      <p:nvGrpSpPr>
+        <p:cNvPr id="1" name=""/>
+        <p:cNvGrpSpPr/>
+        <p:nvPr/>
+      </p:nvGrpSpPr>
+      <p:grpSpPr/>
+      <p:sp>
+        <p:nvSpPr>
+          <p:cNvPr id="2" name="Rectangle 1"/>
+          <p:cNvSpPr/>
+          <p:nvPr/>
+        </p:nvSpPr>
+        <p:spPr>
+          <a:xfrm>
+            <a:off x="0" y="0"/>
+            <a:ext cx="12192000" cy="950000"/>
+          </a:xfrm>
+          <a:prstGeom prst="rect">
+            <a:avLst/>
+          </a:prstGeom>
+          <a:solidFill>
+            <a:srgbClr val="1B3A5C"/>
+          </a:solidFill>
+          <a:ln>
+            <a:noFill/>
+          </a:ln>
+          <a:effectLst/>
+        </p:spPr>
+        <p:style>
+          <a:lnRef idx="1">
+            <a:schemeClr val="accent1"/>
+          </a:lnRef>
+          <a:fillRef idx="3">
+            <a:schemeClr val="accent1"/>
+          </a:fillRef>
+          <a:effectRef idx="2">
+            <a:schemeClr val="accent1"/>
+          </a:effectRef>
+          <a:fontRef idx="minor">
+            <a:schemeClr val="lt1"/>
+          </a:fontRef>
+        </p:style>
+        <p:txBody>
+          <a:bodyPr rtlCol="0" anchor="ctr" lIns="355600"/>
+          <a:lstStyle/>
+          <a:p>
+            <a:pPr algn="ctr"/>
+            <a:r>
+              <a:rPr sz="2600" b="1" i="0">
+                <a:solidFill>
+                  <a:srgbClr val="FFFFFF"/>
+                </a:solidFill>
+                <a:latin typeface="Calibri"/>
+              </a:rPr>
+              <a:t>Agenda</a:t>
+            </a:r>
+          </a:p>
+          <a:p>
+            <a:r>
+              <a:rPr sz="1400" b="0" i="0">
+                <a:solidFill>
+                  <a:srgbClr val="C9D9EC"/>
+                </a:solidFill>
+                <a:latin typeface="Calibri"/>
+              </a:rPr>
+              <a:t>What this deck covers, in order</a:t>
+            </a:r>
+          </a:p>
+        </p:txBody>
+      </p:sp>
+      <p:sp>
+        <p:nvSpPr>
+          <p:cNvPr id="3" name="Oval 2"/>
+          <p:cNvSpPr/>
+          <p:nvPr/>
+        </p:nvSpPr>
+        <p:spPr>
+          <a:xfrm>
+            <a:off x="685800" y="1353312"/>
+            <a:ext cx="420624" cy="420624"/>
+          </a:xfrm>
+          <a:prstGeom prst="ellipse">
+            <a:avLst/>
+          </a:prstGeom>
+          <a:solidFill>
+            <a:srgbClr val="E87A1E"/>
+          </a:solidFill>
+          <a:ln w="15875">
+            <a:solidFill>
+              <a:srgbClr val="FFFFFF"/>
+            </a:solidFill>
+          </a:ln>
+          <a:effectLst/>
+        </p:spPr>
+        <p:style>
+          <a:lnRef idx="1">
+            <a:schemeClr val="accent1"/>
+          </a:lnRef>
+          <a:fillRef idx="3">
+            <a:schemeClr val="accent1"/>
+          </a:fillRef>
+          <a:effectRef idx="2">
+            <a:schemeClr val="accent1"/>
+          </a:effectRef>
+          <a:fontRef idx="minor">
+            <a:schemeClr val="lt1"/>
+          </a:fontRef>
+        </p:style>
+        <p:txBody>
+          <a:bodyPr rtlCol="0" anchor="ctr" lIns="0" rIns="0" tIns="0" bIns="0"/>
+          <a:lstStyle/>
+          <a:p>
+            <a:pPr algn="ctr"/>
+            <a:r>
+              <a:rPr sz="1400" b="1" i="0">
+                <a:solidFill>
+                  <a:srgbClr val="FFFFFF"/>
+                </a:solidFill>
+                <a:latin typeface="Calibri"/>
+              </a:rPr>
+              <a:t>1</a:t>
+            </a:r>
+          </a:p>
+        </p:txBody>
+      </p:sp>
+      <p:sp>
+        <p:nvSpPr>
+          <p:cNvPr id="4" name="TextBox 3"/>
+          <p:cNvSpPr txBox="1"/>
+          <p:nvPr/>
+        </p:nvSpPr>
+        <p:spPr>
+          <a:xfrm>
+            <a:off x="1280160" y="1298448"/>
+            <a:ext cx="4526280" cy="292608"/>
+          </a:xfrm>
+          <a:prstGeom prst="rect">
+            <a:avLst/>
+          </a:prstGeom>
+          <a:noFill/>
+        </p:spPr>
+        <p:txBody>
+          <a:bodyPr wrap="square" anchor="t">
+            <a:spAutoFit/>
+          </a:bodyPr>
+          <a:lstStyle/>
+          <a:p>
+            <a:pPr algn="l">
+              <a:spcAft>
+                <a:spcPts val="300"/>
+              </a:spcAft>
+            </a:pPr>
+            <a:r>
+              <a:rPr sz="1700" b="1" i="0">
+                <a:solidFill>
+                  <a:srgbClr val="1B3A5C"/>
+                </a:solidFill>
+                <a:latin typeface="Calibri"/>
+              </a:rPr>
+              <a:t>Overview &amp; key design decisions</a:t>
+            </a:r>
+          </a:p>
+        </p:txBody>
+      </p:sp>
+      <p:sp>
+        <p:nvSpPr>
+          <p:cNvPr id="5" name="TextBox 4"/>
+          <p:cNvSpPr txBox="1"/>
+          <p:nvPr/>
+        </p:nvSpPr>
+        <p:spPr>
+          <a:xfrm>
+            <a:off x="1280160" y="1600200"/>
+            <a:ext cx="4526280" cy="457200"/>
+          </a:xfrm>
+          <a:prstGeom prst="rect">
+            <a:avLst/>
+          </a:prstGeom>
+          <a:noFill/>
+        </p:spPr>
+        <p:txBody>
+          <a:bodyPr wrap="square" anchor="t">
+            <a:spAutoFit/>
+          </a:bodyPr>
+          <a:lstStyle/>
+          <a:p>
+            <a:pPr algn="l">
+              <a:spcAft>
+                <a:spcPts val="300"/>
+              </a:spcAft>
+            </a:pPr>
+            <a:r>
+              <a:rPr sz="1250" b="0" i="0">
+                <a:solidFill>
+                  <a:srgbClr val="3A4654"/>
+                </a:solidFill>
+                <a:latin typeface="Calibri"/>
+              </a:rPr>
+              <a:t>what the Service is, and the seven choices that shape it</a:t>
+            </a:r>
+          </a:p>
+        </p:txBody>
+      </p:sp>
+      <p:sp>
+        <p:nvSpPr>
+          <p:cNvPr id="6" name="Oval 5"/>
+          <p:cNvSpPr/>
+          <p:nvPr/>
+        </p:nvSpPr>
+        <p:spPr>
+          <a:xfrm>
+            <a:off x="685800" y="2304288"/>
+            <a:ext cx="420624" cy="420624"/>
+          </a:xfrm>
+          <a:prstGeom prst="ellipse">
+            <a:avLst/>
+          </a:prstGeom>
+          <a:solidFill>
+            <a:srgbClr val="E87A1E"/>
+          </a:solidFill>
+          <a:ln w="15875">
+            <a:solidFill>
+              <a:srgbClr val="FFFFFF"/>
+            </a:solidFill>
+          </a:ln>
+          <a:effectLst/>
+        </p:spPr>
+        <p:style>
+          <a:lnRef idx="1">
+            <a:schemeClr val="accent1"/>
+          </a:lnRef>
+          <a:fillRef idx="3">
+            <a:schemeClr val="accent1"/>
+          </a:fillRef>
+          <a:effectRef idx="2">
+            <a:schemeClr val="accent1"/>
+          </a:effectRef>
+          <a:fontRef idx="minor">
+            <a:schemeClr val="lt1"/>
+          </a:fontRef>
+        </p:style>
+        <p:txBody>
+          <a:bodyPr rtlCol="0" anchor="ctr" lIns="0" rIns="0" tIns="0" bIns="0"/>
+          <a:lstStyle/>
+          <a:p>
+            <a:pPr algn="ctr"/>
+            <a:r>
+              <a:rPr sz="1400" b="1" i="0">
+                <a:solidFill>
+                  <a:srgbClr val="FFFFFF"/>
+                </a:solidFill>
+                <a:latin typeface="Calibri"/>
+              </a:rPr>
+              <a:t>2</a:t>
+            </a:r>
+          </a:p>
+        </p:txBody>
+      </p:sp>
+      <p:sp>
+        <p:nvSpPr>
+          <p:cNvPr id="7" name="TextBox 6"/>
+          <p:cNvSpPr txBox="1"/>
+          <p:nvPr/>
+        </p:nvSpPr>
+        <p:spPr>
+          <a:xfrm>
+            <a:off x="1280160" y="2249424"/>
+            <a:ext cx="4526280" cy="292608"/>
+          </a:xfrm>
+          <a:prstGeom prst="rect">
+            <a:avLst/>
+          </a:prstGeom>
+          <a:noFill/>
+        </p:spPr>
+        <p:txBody>
+          <a:bodyPr wrap="square" anchor="t">
+            <a:spAutoFit/>
+          </a:bodyPr>
+          <a:lstStyle/>
+          <a:p>
+            <a:pPr algn="l">
+              <a:spcAft>
+                <a:spcPts val="300"/>
+              </a:spcAft>
+            </a:pPr>
+            <a:r>
+              <a:rPr sz="1700" b="1" i="0">
+                <a:solidFill>
+                  <a:srgbClr val="1B3A5C"/>
+                </a:solidFill>
+                <a:latin typeface="Calibri"/>
+              </a:rPr>
+              <a:t>Auto-benchmarking design motif</a:t>
+            </a:r>
+          </a:p>
+        </p:txBody>
+      </p:sp>
+      <p:sp>
+        <p:nvSpPr>
+          <p:cNvPr id="8" name="TextBox 7"/>
+          <p:cNvSpPr txBox="1"/>
+          <p:nvPr/>
+        </p:nvSpPr>
+        <p:spPr>
+          <a:xfrm>
+            <a:off x="1280160" y="2551176"/>
+            <a:ext cx="4526280" cy="457200"/>
+          </a:xfrm>
+          <a:prstGeom prst="rect">
+            <a:avLst/>
+          </a:prstGeom>
+          <a:noFill/>
+        </p:spPr>
+        <p:txBody>
+          <a:bodyPr wrap="square" anchor="t">
+            <a:spAutoFit/>
+          </a:bodyPr>
+          <a:lstStyle/>
+          <a:p>
+            <a:pPr algn="l">
+              <a:spcAft>
+                <a:spcPts val="300"/>
+              </a:spcAft>
+            </a:pPr>
+            <a:r>
+              <a:rPr sz="1250" b="0" i="0">
+                <a:solidFill>
+                  <a:srgbClr val="3A4654"/>
+                </a:solidFill>
+                <a:latin typeface="Calibri"/>
+              </a:rPr>
+              <a:t>the shape of the system, before the wiring detail</a:t>
+            </a:r>
+          </a:p>
+        </p:txBody>
+      </p:sp>
+      <p:sp>
+        <p:nvSpPr>
+          <p:cNvPr id="9" name="Oval 8"/>
+          <p:cNvSpPr/>
+          <p:nvPr/>
+        </p:nvSpPr>
+        <p:spPr>
+          <a:xfrm>
+            <a:off x="685800" y="3255264"/>
+            <a:ext cx="420624" cy="420624"/>
+          </a:xfrm>
+          <a:prstGeom prst="ellipse">
+            <a:avLst/>
+          </a:prstGeom>
+          <a:solidFill>
+            <a:srgbClr val="E87A1E"/>
+          </a:solidFill>
+          <a:ln w="15875">
+            <a:solidFill>
+              <a:srgbClr val="FFFFFF"/>
+            </a:solidFill>
+          </a:ln>
+          <a:effectLst/>
+        </p:spPr>
+        <p:style>
+          <a:lnRef idx="1">
+            <a:schemeClr val="accent1"/>
+          </a:lnRef>
+          <a:fillRef idx="3">
+            <a:schemeClr val="accent1"/>
+          </a:fillRef>
+          <a:effectRef idx="2">
+            <a:schemeClr val="accent1"/>
+          </a:effectRef>
+          <a:fontRef idx="minor">
+            <a:schemeClr val="lt1"/>
+          </a:fontRef>
+        </p:style>
+        <p:txBody>
+          <a:bodyPr rtlCol="0" anchor="ctr" lIns="0" rIns="0" tIns="0" bIns="0"/>
+          <a:lstStyle/>
+          <a:p>
+            <a:pPr algn="ctr"/>
+            <a:r>
+              <a:rPr sz="1400" b="1" i="0">
+                <a:solidFill>
+                  <a:srgbClr val="FFFFFF"/>
+                </a:solidFill>
+                <a:latin typeface="Calibri"/>
+              </a:rPr>
+              <a:t>3</a:t>
+            </a:r>
+          </a:p>
+        </p:txBody>
+      </p:sp>
+      <p:sp>
+        <p:nvSpPr>
+          <p:cNvPr id="10" name="TextBox 9"/>
+          <p:cNvSpPr txBox="1"/>
+          <p:nvPr/>
+        </p:nvSpPr>
+        <p:spPr>
+          <a:xfrm>
+            <a:off x="1280160" y="3200400"/>
+            <a:ext cx="4526280" cy="292608"/>
+          </a:xfrm>
+          <a:prstGeom prst="rect">
+            <a:avLst/>
+          </a:prstGeom>
+          <a:noFill/>
+        </p:spPr>
+        <p:txBody>
+          <a:bodyPr wrap="square" anchor="t">
+            <a:spAutoFit/>
+          </a:bodyPr>
+          <a:lstStyle/>
+          <a:p>
+            <a:pPr algn="l">
+              <a:spcAft>
+                <a:spcPts val="300"/>
+              </a:spcAft>
+            </a:pPr>
+            <a:r>
+              <a:rPr sz="1700" b="1" i="0">
+                <a:solidFill>
+                  <a:srgbClr val="1B3A5C"/>
+                </a:solidFill>
+                <a:latin typeface="Calibri"/>
+              </a:rPr>
+              <a:t>Architecture</a:t>
+            </a:r>
+          </a:p>
+        </p:txBody>
+      </p:sp>
+      <p:sp>
+        <p:nvSpPr>
+          <p:cNvPr id="11" name="TextBox 10"/>
+          <p:cNvSpPr txBox="1"/>
+          <p:nvPr/>
+        </p:nvSpPr>
+        <p:spPr>
+          <a:xfrm>
+            <a:off x="1280160" y="3502152"/>
+            <a:ext cx="4526280" cy="457200"/>
+          </a:xfrm>
+          <a:prstGeom prst="rect">
+            <a:avLst/>
+          </a:prstGeom>
+          <a:noFill/>
+        </p:spPr>
+        <p:txBody>
+          <a:bodyPr wrap="square" anchor="t">
+            <a:spAutoFit/>
+          </a:bodyPr>
+          <a:lstStyle/>
+          <a:p>
+            <a:pPr algn="l">
+              <a:spcAft>
+                <a:spcPts val="300"/>
+              </a:spcAft>
+            </a:pPr>
+            <a:r>
+              <a:rPr sz="1250" b="0" i="0">
+                <a:solidFill>
+                  <a:srgbClr val="3A4654"/>
+                </a:solidFill>
+                <a:latin typeface="Calibri"/>
+              </a:rPr>
+              <a:t>client, Service, and the per-cluster instance selected by JWT iss</a:t>
+            </a:r>
+          </a:p>
+        </p:txBody>
+      </p:sp>
+      <p:sp>
+        <p:nvSpPr>
+          <p:cNvPr id="12" name="Oval 11"/>
+          <p:cNvSpPr/>
+          <p:nvPr/>
+        </p:nvSpPr>
+        <p:spPr>
+          <a:xfrm>
+            <a:off x="685800" y="4206240"/>
+            <a:ext cx="420624" cy="420624"/>
+          </a:xfrm>
+          <a:prstGeom prst="ellipse">
+            <a:avLst/>
+          </a:prstGeom>
+          <a:solidFill>
+            <a:srgbClr val="E87A1E"/>
+          </a:solidFill>
+          <a:ln w="15875">
+            <a:solidFill>
+              <a:srgbClr val="FFFFFF"/>
+            </a:solidFill>
+          </a:ln>
+          <a:effectLst/>
+        </p:spPr>
+        <p:style>
+          <a:lnRef idx="1">
+            <a:schemeClr val="accent1"/>
+          </a:lnRef>
+          <a:fillRef idx="3">
+            <a:schemeClr val="accent1"/>
+          </a:fillRef>
+          <a:effectRef idx="2">
+            <a:schemeClr val="accent1"/>
+          </a:effectRef>
+          <a:fontRef idx="minor">
+            <a:schemeClr val="lt1"/>
+          </a:fontRef>
+        </p:style>
+        <p:txBody>
+          <a:bodyPr rtlCol="0" anchor="ctr" lIns="0" rIns="0" tIns="0" bIns="0"/>
+          <a:lstStyle/>
+          <a:p>
+            <a:pPr algn="ctr"/>
+            <a:r>
+              <a:rPr sz="1400" b="1" i="0">
+                <a:solidFill>
+                  <a:srgbClr val="FFFFFF"/>
+                </a:solidFill>
+                <a:latin typeface="Calibri"/>
+              </a:rPr>
+              <a:t>4</a:t>
+            </a:r>
+          </a:p>
+        </p:txBody>
+      </p:sp>
+      <p:sp>
+        <p:nvSpPr>
+          <p:cNvPr id="13" name="TextBox 12"/>
+          <p:cNvSpPr txBox="1"/>
+          <p:nvPr/>
+        </p:nvSpPr>
+        <p:spPr>
+          <a:xfrm>
+            <a:off x="1280160" y="4151376"/>
+            <a:ext cx="4526280" cy="292608"/>
+          </a:xfrm>
+          <a:prstGeom prst="rect">
+            <a:avLst/>
+          </a:prstGeom>
+          <a:noFill/>
+        </p:spPr>
+        <p:txBody>
+          <a:bodyPr wrap="square" anchor="t">
+            <a:spAutoFit/>
+          </a:bodyPr>
+          <a:lstStyle/>
+          <a:p>
+            <a:pPr algn="l">
+              <a:spcAft>
+                <a:spcPts val="300"/>
+              </a:spcAft>
+            </a:pPr>
+            <a:r>
+              <a:rPr sz="1700" b="1" i="0">
+                <a:solidFill>
+                  <a:srgbClr val="1B3A5C"/>
+                </a:solidFill>
+                <a:latin typeface="Calibri"/>
+              </a:rPr>
+              <a:t>Architecture with workload specific components</a:t>
+            </a:r>
+          </a:p>
+        </p:txBody>
+      </p:sp>
+      <p:sp>
+        <p:nvSpPr>
+          <p:cNvPr id="14" name="TextBox 13"/>
+          <p:cNvSpPr txBox="1"/>
+          <p:nvPr/>
+        </p:nvSpPr>
+        <p:spPr>
+          <a:xfrm>
+            <a:off x="1280160" y="4453128"/>
+            <a:ext cx="4526280" cy="457200"/>
+          </a:xfrm>
+          <a:prstGeom prst="rect">
+            <a:avLst/>
+          </a:prstGeom>
+          <a:noFill/>
+        </p:spPr>
+        <p:txBody>
+          <a:bodyPr wrap="square" anchor="t">
+            <a:spAutoFit/>
+          </a:bodyPr>
+          <a:lstStyle/>
+          <a:p>
+            <a:pPr algn="l">
+              <a:spcAft>
+                <a:spcPts val="300"/>
+              </a:spcAft>
+            </a:pPr>
+            <a:r>
+              <a:rPr sz="1250" b="0" i="0">
+                <a:solidFill>
+                  <a:srgbClr val="3A4654"/>
+                </a:solidFill>
+                <a:latin typeface="Calibri"/>
+              </a:rPr>
+              <a:t>4.1 inside the workload: sidecar, user simulator, IBAC judge · 4.2 how interception is wired</a:t>
+            </a:r>
+          </a:p>
+        </p:txBody>
+      </p:sp>
+      <p:sp>
+        <p:nvSpPr>
+          <p:cNvPr id="15" name="Oval 14"/>
+          <p:cNvSpPr/>
+          <p:nvPr/>
+        </p:nvSpPr>
+        <p:spPr>
+          <a:xfrm>
+            <a:off x="685800" y="5157216"/>
+            <a:ext cx="420624" cy="420624"/>
+          </a:xfrm>
+          <a:prstGeom prst="ellipse">
+            <a:avLst/>
+          </a:prstGeom>
+          <a:solidFill>
+            <a:srgbClr val="E87A1E"/>
+          </a:solidFill>
+          <a:ln w="15875">
+            <a:solidFill>
+              <a:srgbClr val="FFFFFF"/>
+            </a:solidFill>
+          </a:ln>
+          <a:effectLst/>
+        </p:spPr>
+        <p:style>
+          <a:lnRef idx="1">
+            <a:schemeClr val="accent1"/>
+          </a:lnRef>
+          <a:fillRef idx="3">
+            <a:schemeClr val="accent1"/>
+          </a:fillRef>
+          <a:effectRef idx="2">
+            <a:schemeClr val="accent1"/>
+          </a:effectRef>
+          <a:fontRef idx="minor">
+            <a:schemeClr val="lt1"/>
+          </a:fontRef>
+        </p:style>
+        <p:txBody>
+          <a:bodyPr rtlCol="0" anchor="ctr" lIns="0" rIns="0" tIns="0" bIns="0"/>
+          <a:lstStyle/>
+          <a:p>
+            <a:pPr algn="ctr"/>
+            <a:r>
+              <a:rPr sz="1400" b="1" i="0">
+                <a:solidFill>
+                  <a:srgbClr val="FFFFFF"/>
+                </a:solidFill>
+                <a:latin typeface="Calibri"/>
+              </a:rPr>
+              <a:t>5</a:t>
+            </a:r>
+          </a:p>
+        </p:txBody>
+      </p:sp>
+      <p:sp>
+        <p:nvSpPr>
+          <p:cNvPr id="16" name="TextBox 15"/>
+          <p:cNvSpPr txBox="1"/>
+          <p:nvPr/>
+        </p:nvSpPr>
+        <p:spPr>
+          <a:xfrm>
+            <a:off x="1280160" y="5102352"/>
+            <a:ext cx="4526280" cy="292608"/>
+          </a:xfrm>
+          <a:prstGeom prst="rect">
+            <a:avLst/>
+          </a:prstGeom>
+          <a:noFill/>
+        </p:spPr>
+        <p:txBody>
+          <a:bodyPr wrap="square" anchor="t">
+            <a:spAutoFit/>
+          </a:bodyPr>
+          <a:lstStyle/>
+          <a:p>
+            <a:pPr algn="l">
+              <a:spcAft>
+                <a:spcPts val="300"/>
+              </a:spcAft>
+            </a:pPr>
+            <a:r>
+              <a:rPr sz="1700" b="1" i="0">
+                <a:solidFill>
+                  <a:srgbClr val="1B3A5C"/>
+                </a:solidFill>
+                <a:latin typeface="Calibri"/>
+              </a:rPr>
+              <a:t>The two-token auth model</a:t>
+            </a:r>
+          </a:p>
+        </p:txBody>
+      </p:sp>
+      <p:sp>
+        <p:nvSpPr>
+          <p:cNvPr id="17" name="TextBox 16"/>
+          <p:cNvSpPr txBox="1"/>
+          <p:nvPr/>
+        </p:nvSpPr>
+        <p:spPr>
+          <a:xfrm>
+            <a:off x="1280160" y="5404104"/>
+            <a:ext cx="4526280" cy="457200"/>
+          </a:xfrm>
+          <a:prstGeom prst="rect">
+            <a:avLst/>
+          </a:prstGeom>
+          <a:noFill/>
+        </p:spPr>
+        <p:txBody>
+          <a:bodyPr wrap="square" anchor="t">
+            <a:spAutoFit/>
+          </a:bodyPr>
+          <a:lstStyle/>
+          <a:p>
+            <a:pPr algn="l">
+              <a:spcAft>
+                <a:spcPts val="300"/>
+              </a:spcAft>
+            </a:pPr>
+            <a:r>
+              <a:rPr sz="1250" b="0" i="0">
+                <a:solidFill>
+                  <a:srgbClr val="3A4654"/>
+                </a:solidFill>
+                <a:latin typeface="Calibri"/>
+              </a:rPr>
+              <a:t>why the caller's token is never forwarded upstream</a:t>
+            </a:r>
+          </a:p>
+        </p:txBody>
+      </p:sp>
+      <p:sp>
+        <p:nvSpPr>
+          <p:cNvPr id="18" name="Oval 17"/>
+          <p:cNvSpPr/>
+          <p:nvPr/>
+        </p:nvSpPr>
+        <p:spPr>
+          <a:xfrm>
+            <a:off x="6492240" y="1353312"/>
+            <a:ext cx="420624" cy="420624"/>
+          </a:xfrm>
+          <a:prstGeom prst="ellipse">
+            <a:avLst/>
+          </a:prstGeom>
+          <a:solidFill>
+            <a:srgbClr val="E87A1E"/>
+          </a:solidFill>
+          <a:ln w="15875">
+            <a:solidFill>
+              <a:srgbClr val="FFFFFF"/>
+            </a:solidFill>
+          </a:ln>
+          <a:effectLst/>
+        </p:spPr>
+        <p:style>
+          <a:lnRef idx="1">
+            <a:schemeClr val="accent1"/>
+          </a:lnRef>
+          <a:fillRef idx="3">
+            <a:schemeClr val="accent1"/>
+          </a:fillRef>
+          <a:effectRef idx="2">
+            <a:schemeClr val="accent1"/>
+          </a:effectRef>
+          <a:fontRef idx="minor">
+            <a:schemeClr val="lt1"/>
+          </a:fontRef>
+        </p:style>
+        <p:txBody>
+          <a:bodyPr rtlCol="0" anchor="ctr" lIns="0" rIns="0" tIns="0" bIns="0"/>
+          <a:lstStyle/>
+          <a:p>
+            <a:pPr algn="ctr"/>
+            <a:r>
+              <a:rPr sz="1400" b="1" i="0">
+                <a:solidFill>
+                  <a:srgbClr val="FFFFFF"/>
+                </a:solidFill>
+                <a:latin typeface="Calibri"/>
+              </a:rPr>
+              <a:t>6</a:t>
+            </a:r>
+          </a:p>
+        </p:txBody>
+      </p:sp>
+      <p:sp>
+        <p:nvSpPr>
+          <p:cNvPr id="19" name="TextBox 18"/>
+          <p:cNvSpPr txBox="1"/>
+          <p:nvPr/>
+        </p:nvSpPr>
+        <p:spPr>
+          <a:xfrm>
+            <a:off x="7086600" y="1298448"/>
+            <a:ext cx="4663440" cy="292608"/>
+          </a:xfrm>
+          <a:prstGeom prst="rect">
+            <a:avLst/>
+          </a:prstGeom>
+          <a:noFill/>
+        </p:spPr>
+        <p:txBody>
+          <a:bodyPr wrap="square" anchor="t">
+            <a:spAutoFit/>
+          </a:bodyPr>
+          <a:lstStyle/>
+          <a:p>
+            <a:pPr algn="l">
+              <a:spcAft>
+                <a:spcPts val="300"/>
+              </a:spcAft>
+            </a:pPr>
+            <a:r>
+              <a:rPr sz="1700" b="1" i="0">
+                <a:solidFill>
+                  <a:srgbClr val="1B3A5C"/>
+                </a:solidFill>
+                <a:latin typeface="Calibri"/>
+              </a:rPr>
+              <a:t>Benchmark catalog &amp; run lifecycle</a:t>
+            </a:r>
+          </a:p>
+        </p:txBody>
+      </p:sp>
+      <p:sp>
+        <p:nvSpPr>
+          <p:cNvPr id="20" name="TextBox 19"/>
+          <p:cNvSpPr txBox="1"/>
+          <p:nvPr/>
+        </p:nvSpPr>
+        <p:spPr>
+          <a:xfrm>
+            <a:off x="7086600" y="1600200"/>
+            <a:ext cx="4663440" cy="457200"/>
+          </a:xfrm>
+          <a:prstGeom prst="rect">
+            <a:avLst/>
+          </a:prstGeom>
+          <a:noFill/>
+        </p:spPr>
+        <p:txBody>
+          <a:bodyPr wrap="square" anchor="t">
+            <a:spAutoFit/>
+          </a:bodyPr>
+          <a:lstStyle/>
+          <a:p>
+            <a:pPr algn="l">
+              <a:spcAft>
+                <a:spcPts val="300"/>
+              </a:spcAft>
+            </a:pPr>
+            <a:r>
+              <a:rPr sz="1250" b="0" i="0">
+                <a:solidFill>
+                  <a:srgbClr val="3A4654"/>
+                </a:solidFill>
+                <a:latin typeface="Calibri"/>
+              </a:rPr>
+              <a:t>6.1 the three benchmarks and the REST flow that drives them · 6.2 what each image bakes in · 6.3 one task end to end · 6.4 who decides what happens inside it</a:t>
+            </a:r>
+          </a:p>
+        </p:txBody>
+      </p:sp>
+      <p:sp>
+        <p:nvSpPr>
+          <p:cNvPr id="21" name="Oval 20"/>
+          <p:cNvSpPr/>
+          <p:nvPr/>
+        </p:nvSpPr>
+        <p:spPr>
+          <a:xfrm>
+            <a:off x="6492240" y="2304288"/>
+            <a:ext cx="420624" cy="420624"/>
+          </a:xfrm>
+          <a:prstGeom prst="ellipse">
+            <a:avLst/>
+          </a:prstGeom>
+          <a:solidFill>
+            <a:srgbClr val="E87A1E"/>
+          </a:solidFill>
+          <a:ln w="15875">
+            <a:solidFill>
+              <a:srgbClr val="FFFFFF"/>
+            </a:solidFill>
+          </a:ln>
+          <a:effectLst/>
+        </p:spPr>
+        <p:style>
+          <a:lnRef idx="1">
+            <a:schemeClr val="accent1"/>
+          </a:lnRef>
+          <a:fillRef idx="3">
+            <a:schemeClr val="accent1"/>
+          </a:fillRef>
+          <a:effectRef idx="2">
+            <a:schemeClr val="accent1"/>
+          </a:effectRef>
+          <a:fontRef idx="minor">
+            <a:schemeClr val="lt1"/>
+          </a:fontRef>
+        </p:style>
+        <p:txBody>
+          <a:bodyPr rtlCol="0" anchor="ctr" lIns="0" rIns="0" tIns="0" bIns="0"/>
+          <a:lstStyle/>
+          <a:p>
+            <a:pPr algn="ctr"/>
+            <a:r>
+              <a:rPr sz="1400" b="1" i="0">
+                <a:solidFill>
+                  <a:srgbClr val="FFFFFF"/>
+                </a:solidFill>
+                <a:latin typeface="Calibri"/>
+              </a:rPr>
+              <a:t>7</a:t>
+            </a:r>
+          </a:p>
+        </p:txBody>
+      </p:sp>
+      <p:sp>
+        <p:nvSpPr>
+          <p:cNvPr id="22" name="TextBox 21"/>
+          <p:cNvSpPr txBox="1"/>
+          <p:nvPr/>
+        </p:nvSpPr>
+        <p:spPr>
+          <a:xfrm>
+            <a:off x="7086600" y="2249424"/>
+            <a:ext cx="4663440" cy="292608"/>
+          </a:xfrm>
+          <a:prstGeom prst="rect">
+            <a:avLst/>
+          </a:prstGeom>
+          <a:noFill/>
+        </p:spPr>
+        <p:txBody>
+          <a:bodyPr wrap="square" anchor="t">
+            <a:spAutoFit/>
+          </a:bodyPr>
+          <a:lstStyle/>
+          <a:p>
+            <a:pPr algn="l">
+              <a:spcAft>
+                <a:spcPts val="300"/>
+              </a:spcAft>
+            </a:pPr>
+            <a:r>
+              <a:rPr sz="1700" b="1" i="0">
+                <a:solidFill>
+                  <a:srgbClr val="1B3A5C"/>
+                </a:solidFill>
+                <a:latin typeface="Calibri"/>
+              </a:rPr>
+              <a:t>The three benchmarks — what they measure</a:t>
+            </a:r>
+          </a:p>
+        </p:txBody>
+      </p:sp>
+      <p:sp>
+        <p:nvSpPr>
+          <p:cNvPr id="23" name="TextBox 22"/>
+          <p:cNvSpPr txBox="1"/>
+          <p:nvPr/>
+        </p:nvSpPr>
+        <p:spPr>
+          <a:xfrm>
+            <a:off x="7086600" y="2551176"/>
+            <a:ext cx="4663440" cy="457200"/>
+          </a:xfrm>
+          <a:prstGeom prst="rect">
+            <a:avLst/>
+          </a:prstGeom>
+          <a:noFill/>
+        </p:spPr>
+        <p:txBody>
+          <a:bodyPr wrap="square" anchor="t">
+            <a:spAutoFit/>
+          </a:bodyPr>
+          <a:lstStyle/>
+          <a:p>
+            <a:pPr algn="l">
+              <a:spcAft>
+                <a:spcPts val="300"/>
+              </a:spcAft>
+            </a:pPr>
+            <a:r>
+              <a:rPr sz="1250" b="0" i="0">
+                <a:solidFill>
+                  <a:srgbClr val="3A4654"/>
+                </a:solidFill>
+                <a:latin typeface="Calibri"/>
+              </a:rPr>
+              <a:t>7.1 the difficulty ladder · 7.2 what each stresses · 7.3 the traps · 7.4 picking one · 7.5 what it costs · 7.6 the rate card · 7.7–7.8 six efficiency figures · 7.9–7.10 the benchmarks and the 12 runs compared</a:t>
+            </a:r>
+          </a:p>
+        </p:txBody>
+      </p:sp>
+      <p:sp>
+        <p:nvSpPr>
+          <p:cNvPr id="24" name="Oval 23"/>
+          <p:cNvSpPr/>
+          <p:nvPr/>
+        </p:nvSpPr>
+        <p:spPr>
+          <a:xfrm>
+            <a:off x="6492240" y="3255264"/>
+            <a:ext cx="420624" cy="420624"/>
+          </a:xfrm>
+          <a:prstGeom prst="ellipse">
+            <a:avLst/>
+          </a:prstGeom>
+          <a:solidFill>
+            <a:srgbClr val="E87A1E"/>
+          </a:solidFill>
+          <a:ln w="15875">
+            <a:solidFill>
+              <a:srgbClr val="FFFFFF"/>
+            </a:solidFill>
+          </a:ln>
+          <a:effectLst/>
+        </p:spPr>
+        <p:style>
+          <a:lnRef idx="1">
+            <a:schemeClr val="accent1"/>
+          </a:lnRef>
+          <a:fillRef idx="3">
+            <a:schemeClr val="accent1"/>
+          </a:fillRef>
+          <a:effectRef idx="2">
+            <a:schemeClr val="accent1"/>
+          </a:effectRef>
+          <a:fontRef idx="minor">
+            <a:schemeClr val="lt1"/>
+          </a:fontRef>
+        </p:style>
+        <p:txBody>
+          <a:bodyPr rtlCol="0" anchor="ctr" lIns="0" rIns="0" tIns="0" bIns="0"/>
+          <a:lstStyle/>
+          <a:p>
+            <a:pPr algn="ctr"/>
+            <a:r>
+              <a:rPr sz="1400" b="1" i="0">
+                <a:solidFill>
+                  <a:srgbClr val="FFFFFF"/>
+                </a:solidFill>
+                <a:latin typeface="Calibri"/>
+              </a:rPr>
+              <a:t>8</a:t>
+            </a:r>
+          </a:p>
+        </p:txBody>
+      </p:sp>
+      <p:sp>
+        <p:nvSpPr>
+          <p:cNvPr id="25" name="TextBox 24"/>
+          <p:cNvSpPr txBox="1"/>
+          <p:nvPr/>
+        </p:nvSpPr>
+        <p:spPr>
+          <a:xfrm>
+            <a:off x="7086600" y="3200400"/>
+            <a:ext cx="4663440" cy="292608"/>
+          </a:xfrm>
+          <a:prstGeom prst="rect">
+            <a:avLst/>
+          </a:prstGeom>
+          <a:noFill/>
+        </p:spPr>
+        <p:txBody>
+          <a:bodyPr wrap="square" anchor="t">
+            <a:spAutoFit/>
+          </a:bodyPr>
+          <a:lstStyle/>
+          <a:p>
+            <a:pPr algn="l">
+              <a:spcAft>
+                <a:spcPts val="300"/>
+              </a:spcAft>
+            </a:pPr>
+            <a:r>
+              <a:rPr sz="1700" b="1" i="0">
+                <a:solidFill>
+                  <a:srgbClr val="1B3A5C"/>
+                </a:solidFill>
+                <a:latin typeface="Calibri"/>
+              </a:rPr>
+              <a:t>The canonical 12-run matrix</a:t>
+            </a:r>
+          </a:p>
+        </p:txBody>
+      </p:sp>
+      <p:sp>
+        <p:nvSpPr>
+          <p:cNvPr id="26" name="TextBox 25"/>
+          <p:cNvSpPr txBox="1"/>
+          <p:nvPr/>
+        </p:nvSpPr>
+        <p:spPr>
+          <a:xfrm>
+            <a:off x="7086600" y="3502152"/>
+            <a:ext cx="4663440" cy="457200"/>
+          </a:xfrm>
+          <a:prstGeom prst="rect">
+            <a:avLst/>
+          </a:prstGeom>
+          <a:noFill/>
+        </p:spPr>
+        <p:txBody>
+          <a:bodyPr wrap="square" anchor="t">
+            <a:spAutoFit/>
+          </a:bodyPr>
+          <a:lstStyle/>
+          <a:p>
+            <a:pPr algn="l">
+              <a:spcAft>
+                <a:spcPts val="300"/>
+              </a:spcAft>
+            </a:pPr>
+            <a:r>
+              <a:rPr sz="1250" b="0" i="0">
+                <a:solidFill>
+                  <a:srgbClr val="3A4654"/>
+                </a:solidFill>
+                <a:latin typeface="Calibri"/>
+              </a:rPr>
+              <a:t>8.1 what the 12 runs parameterize · 8.2 what they measured</a:t>
+            </a:r>
+          </a:p>
+        </p:txBody>
+      </p:sp>
+      <p:sp>
+        <p:nvSpPr>
+          <p:cNvPr id="27" name="Oval 26"/>
+          <p:cNvSpPr/>
+          <p:nvPr/>
+        </p:nvSpPr>
+        <p:spPr>
+          <a:xfrm>
+            <a:off x="6492240" y="4206240"/>
+            <a:ext cx="420624" cy="420624"/>
+          </a:xfrm>
+          <a:prstGeom prst="ellipse">
+            <a:avLst/>
+          </a:prstGeom>
+          <a:solidFill>
+            <a:srgbClr val="E87A1E"/>
+          </a:solidFill>
+          <a:ln w="15875">
+            <a:solidFill>
+              <a:srgbClr val="FFFFFF"/>
+            </a:solidFill>
+          </a:ln>
+          <a:effectLst/>
+        </p:spPr>
+        <p:style>
+          <a:lnRef idx="1">
+            <a:schemeClr val="accent1"/>
+          </a:lnRef>
+          <a:fillRef idx="3">
+            <a:schemeClr val="accent1"/>
+          </a:fillRef>
+          <a:effectRef idx="2">
+            <a:schemeClr val="accent1"/>
+          </a:effectRef>
+          <a:fontRef idx="minor">
+            <a:schemeClr val="lt1"/>
+          </a:fontRef>
+        </p:style>
+        <p:txBody>
+          <a:bodyPr rtlCol="0" anchor="ctr" lIns="0" rIns="0" tIns="0" bIns="0"/>
+          <a:lstStyle/>
+          <a:p>
+            <a:pPr algn="ctr"/>
+            <a:r>
+              <a:rPr sz="1400" b="1" i="0">
+                <a:solidFill>
+                  <a:srgbClr val="FFFFFF"/>
+                </a:solidFill>
+                <a:latin typeface="Calibri"/>
+              </a:rPr>
+              <a:t>9</a:t>
+            </a:r>
+          </a:p>
+        </p:txBody>
+      </p:sp>
+      <p:sp>
+        <p:nvSpPr>
+          <p:cNvPr id="28" name="TextBox 27"/>
+          <p:cNvSpPr txBox="1"/>
+          <p:nvPr/>
+        </p:nvSpPr>
+        <p:spPr>
+          <a:xfrm>
+            <a:off x="7086600" y="4151376"/>
+            <a:ext cx="4663440" cy="292608"/>
+          </a:xfrm>
+          <a:prstGeom prst="rect">
+            <a:avLst/>
+          </a:prstGeom>
+          <a:noFill/>
+        </p:spPr>
+        <p:txBody>
+          <a:bodyPr wrap="square" anchor="t">
+            <a:spAutoFit/>
+          </a:bodyPr>
+          <a:lstStyle/>
+          <a:p>
+            <a:pPr algn="l">
+              <a:spcAft>
+                <a:spcPts val="300"/>
+              </a:spcAft>
+            </a:pPr>
+            <a:r>
+              <a:rPr sz="1700" b="1" i="0">
+                <a:solidFill>
+                  <a:srgbClr val="1B3A5C"/>
+                </a:solidFill>
+                <a:latin typeface="Calibri"/>
+              </a:rPr>
+              <a:t>Cross-platform &amp; plugin overhead</a:t>
+            </a:r>
+          </a:p>
+        </p:txBody>
+      </p:sp>
+      <p:sp>
+        <p:nvSpPr>
+          <p:cNvPr id="29" name="TextBox 28"/>
+          <p:cNvSpPr txBox="1"/>
+          <p:nvPr/>
+        </p:nvSpPr>
+        <p:spPr>
+          <a:xfrm>
+            <a:off x="7086600" y="4453128"/>
+            <a:ext cx="4663440" cy="457200"/>
+          </a:xfrm>
+          <a:prstGeom prst="rect">
+            <a:avLst/>
+          </a:prstGeom>
+          <a:noFill/>
+        </p:spPr>
+        <p:txBody>
+          <a:bodyPr wrap="square" anchor="t">
+            <a:spAutoFit/>
+          </a:bodyPr>
+          <a:lstStyle/>
+          <a:p>
+            <a:pPr algn="l">
+              <a:spcAft>
+                <a:spcPts val="300"/>
+              </a:spcAft>
+            </a:pPr>
+            <a:r>
+              <a:rPr sz="1250" b="0" i="0">
+                <a:solidFill>
+                  <a:srgbClr val="3A4654"/>
+                </a:solidFill>
+                <a:latin typeface="Calibri"/>
+              </a:rPr>
+              <a:t>9.1 OpenShift vs KinD, like-for-like · 9.2 what AuthBridge costs</a:t>
+            </a:r>
+          </a:p>
+        </p:txBody>
+      </p:sp>
+      <p:sp>
+        <p:nvSpPr>
+          <p:cNvPr id="30" name="Oval 29"/>
+          <p:cNvSpPr/>
+          <p:nvPr/>
+        </p:nvSpPr>
+        <p:spPr>
+          <a:xfrm>
+            <a:off x="6492240" y="5157216"/>
+            <a:ext cx="420624" cy="420624"/>
+          </a:xfrm>
+          <a:prstGeom prst="ellipse">
+            <a:avLst/>
+          </a:prstGeom>
+          <a:solidFill>
+            <a:srgbClr val="E87A1E"/>
+          </a:solidFill>
+          <a:ln w="15875">
+            <a:solidFill>
+              <a:srgbClr val="FFFFFF"/>
+            </a:solidFill>
+          </a:ln>
+          <a:effectLst/>
+        </p:spPr>
+        <p:style>
+          <a:lnRef idx="1">
+            <a:schemeClr val="accent1"/>
+          </a:lnRef>
+          <a:fillRef idx="3">
+            <a:schemeClr val="accent1"/>
+          </a:fillRef>
+          <a:effectRef idx="2">
+            <a:schemeClr val="accent1"/>
+          </a:effectRef>
+          <a:fontRef idx="minor">
+            <a:schemeClr val="lt1"/>
+          </a:fontRef>
+        </p:style>
+        <p:txBody>
+          <a:bodyPr rtlCol="0" anchor="ctr" lIns="0" rIns="0" tIns="0" bIns="0"/>
+          <a:lstStyle/>
+          <a:p>
+            <a:pPr algn="ctr"/>
+            <a:r>
+              <a:rPr sz="1400" b="1" i="0">
+                <a:solidFill>
+                  <a:srgbClr val="FFFFFF"/>
+                </a:solidFill>
+                <a:latin typeface="Calibri"/>
+              </a:rPr>
+              <a:t>10</a:t>
+            </a:r>
+          </a:p>
+        </p:txBody>
+      </p:sp>
+      <p:sp>
+        <p:nvSpPr>
+          <p:cNvPr id="31" name="TextBox 30"/>
+          <p:cNvSpPr txBox="1"/>
+          <p:nvPr/>
+        </p:nvSpPr>
+        <p:spPr>
+          <a:xfrm>
+            <a:off x="7086600" y="5102352"/>
+            <a:ext cx="4663440" cy="292608"/>
+          </a:xfrm>
+          <a:prstGeom prst="rect">
+            <a:avLst/>
+          </a:prstGeom>
+          <a:noFill/>
+        </p:spPr>
+        <p:txBody>
+          <a:bodyPr wrap="square" anchor="t">
+            <a:spAutoFit/>
+          </a:bodyPr>
+          <a:lstStyle/>
+          <a:p>
+            <a:pPr algn="l">
+              <a:spcAft>
+                <a:spcPts val="300"/>
+              </a:spcAft>
+            </a:pPr>
+            <a:r>
+              <a:rPr sz="1700" b="1" i="0">
+                <a:solidFill>
+                  <a:srgbClr val="1B3A5C"/>
+                </a:solidFill>
+                <a:latin typeface="Calibri"/>
+              </a:rPr>
+              <a:t>What the Service can &amp; cannot enact</a:t>
+            </a:r>
+          </a:p>
+        </p:txBody>
+      </p:sp>
+      <p:sp>
+        <p:nvSpPr>
+          <p:cNvPr id="32" name="TextBox 31"/>
+          <p:cNvSpPr txBox="1"/>
+          <p:nvPr/>
+        </p:nvSpPr>
+        <p:spPr>
+          <a:xfrm>
+            <a:off x="7086600" y="5404104"/>
+            <a:ext cx="4663440" cy="457200"/>
+          </a:xfrm>
+          <a:prstGeom prst="rect">
+            <a:avLst/>
+          </a:prstGeom>
+          <a:noFill/>
+        </p:spPr>
+        <p:txBody>
+          <a:bodyPr wrap="square" anchor="t">
+            <a:spAutoFit/>
+          </a:bodyPr>
+          <a:lstStyle/>
+          <a:p>
+            <a:pPr algn="l">
+              <a:spcAft>
+                <a:spcPts val="300"/>
+              </a:spcAft>
+            </a:pPr>
+            <a:r>
+              <a:rPr sz="1250" b="0" i="0">
+                <a:solidFill>
+                  <a:srgbClr val="3A4654"/>
+                </a:solidFill>
+                <a:latin typeface="Calibri"/>
+              </a:rPr>
+              <a:t>the HTTP-only boundary, made explicit</a:t>
+            </a:r>
+          </a:p>
+        </p:txBody>
+      </p:sp>
+      <p:cxnSp>
+        <p:nvCxnSpPr>
+          <p:cNvPr id="33" name="Connector 32"/>
+          <p:cNvCxnSpPr/>
+          <p:nvPr/>
+        </p:nvCxnSpPr>
+        <p:spPr>
+          <a:xfrm>
+            <a:off x="6080760" y="1280160"/>
+            <a:ext cx="0" cy="4251960"/>
+          </a:xfrm>
+          <a:prstGeom prst="line">
+            <a:avLst/>
+          </a:prstGeom>
+          <a:ln w="12700">
+            <a:solidFill>
+              <a:srgbClr val="C7CED6"/>
+            </a:solidFill>
+          </a:ln>
+          <a:effectLst/>
+        </p:spPr>
+        <p:style>
+          <a:lnRef idx="2">
+            <a:schemeClr val="accent1"/>
+          </a:lnRef>
+          <a:fillRef idx="0">
+            <a:schemeClr val="accent1"/>
+          </a:fillRef>
+          <a:effectRef idx="1">
+            <a:schemeClr val="accent1"/>
+          </a:effectRef>
+          <a:fontRef idx="minor">
+            <a:schemeClr val="tx1"/>
+          </a:fontRef>
+        </p:style>
+      </p:cxnSp>
+      <p:sp>
+        <p:nvSpPr>
+          <p:cNvPr id="34" name="TextBox 33"/>
+          <p:cNvSpPr txBox="1"/>
+          <p:nvPr/>
+        </p:nvSpPr>
+        <p:spPr>
+          <a:xfrm>
+            <a:off x="11795760" y="6437376"/>
+            <a:ext cx="320040" cy="310896"/>
+          </a:xfrm>
+          <a:prstGeom prst="rect">
+            <a:avLst/>
+          </a:prstGeom>
+          <a:noFill/>
+        </p:spPr>
+        <p:txBody>
+          <a:bodyPr wrap="none" anchor="ctr" lIns="0" rIns="0" tIns="0" bIns="0">
+            <a:spAutoFit/>
+          </a:bodyPr>
+          <a:lstStyle/>
+          <a:p>
+            <a:pPr algn="r">
+              <a:spcAft>
+                <a:spcPts val="300"/>
+              </a:spcAft>
+            </a:pPr>
+            <a:r>
+              <a:rPr sz="1200" b="0" i="0">
+                <a:solidFill>
+                  <a:srgbClr val="6B6B6B"/>
+                </a:solidFill>
+                <a:latin typeface="Calibri"/>
+              </a:rPr>
+              <a:t>2</a:t>
+            </a:r>
+          </a:p>
+        </p:txBody>
+      </p:sp>
+    </p:spTree>
+  </p:cSld>
+  <p:clrMapOvr>
+    <a:masterClrMapping/>
+  </p:clrMapOvr>
+</p:sld>
+</file>
+
+<file path=ppt/slides/slide20.xml><?xml version="1.0" encoding="utf-8"?>
 <p:sld xmlns:a="http://schemas.openxmlformats.org/drawingml/2006/main" xmlns:p="http://schemas.openxmlformats.org/presentationml/2006/main" xmlns:r="http://schemas.openxmlformats.org/officeDocument/2006/relationships">
   <p:cSld name="7.8 Token- and Cost-Efficiency — What To Budget, and What To Divide By">
     <p:spTree>
@@ -13783,7 +16330,7 @@
                 </a:solidFill>
                 <a:latin typeface="Calibri"/>
               </a:rPr>
-              <a:t>19</a:t>
+              <a:t>20</a:t>
             </a:r>
           </a:p>
         </p:txBody>
@@ -13796,1494 +16343,7 @@
 </p:sld>
 </file>
 
-<file path=ppt/slides/slide2.xml><?xml version="1.0" encoding="utf-8"?>
-<p:sld xmlns:a="http://schemas.openxmlformats.org/drawingml/2006/main" xmlns:p="http://schemas.openxmlformats.org/presentationml/2006/main" xmlns:r="http://schemas.openxmlformats.org/officeDocument/2006/relationships">
-  <p:cSld name="Agenda">
-    <p:spTree>
-      <p:nvGrpSpPr>
-        <p:cNvPr id="1" name=""/>
-        <p:cNvGrpSpPr/>
-        <p:nvPr/>
-      </p:nvGrpSpPr>
-      <p:grpSpPr/>
-      <p:sp>
-        <p:nvSpPr>
-          <p:cNvPr id="2" name="Rectangle 1"/>
-          <p:cNvSpPr/>
-          <p:nvPr/>
-        </p:nvSpPr>
-        <p:spPr>
-          <a:xfrm>
-            <a:off x="0" y="0"/>
-            <a:ext cx="12192000" cy="950000"/>
-          </a:xfrm>
-          <a:prstGeom prst="rect">
-            <a:avLst/>
-          </a:prstGeom>
-          <a:solidFill>
-            <a:srgbClr val="1B3A5C"/>
-          </a:solidFill>
-          <a:ln>
-            <a:noFill/>
-          </a:ln>
-          <a:effectLst/>
-        </p:spPr>
-        <p:style>
-          <a:lnRef idx="1">
-            <a:schemeClr val="accent1"/>
-          </a:lnRef>
-          <a:fillRef idx="3">
-            <a:schemeClr val="accent1"/>
-          </a:fillRef>
-          <a:effectRef idx="2">
-            <a:schemeClr val="accent1"/>
-          </a:effectRef>
-          <a:fontRef idx="minor">
-            <a:schemeClr val="lt1"/>
-          </a:fontRef>
-        </p:style>
-        <p:txBody>
-          <a:bodyPr rtlCol="0" anchor="ctr" lIns="355600"/>
-          <a:lstStyle/>
-          <a:p>
-            <a:pPr algn="ctr"/>
-            <a:r>
-              <a:rPr sz="2600" b="1" i="0">
-                <a:solidFill>
-                  <a:srgbClr val="FFFFFF"/>
-                </a:solidFill>
-                <a:latin typeface="Calibri"/>
-              </a:rPr>
-              <a:t>Agenda</a:t>
-            </a:r>
-          </a:p>
-          <a:p>
-            <a:r>
-              <a:rPr sz="1400" b="0" i="0">
-                <a:solidFill>
-                  <a:srgbClr val="C9D9EC"/>
-                </a:solidFill>
-                <a:latin typeface="Calibri"/>
-              </a:rPr>
-              <a:t>What this deck covers, in order</a:t>
-            </a:r>
-          </a:p>
-        </p:txBody>
-      </p:sp>
-      <p:sp>
-        <p:nvSpPr>
-          <p:cNvPr id="3" name="Oval 2"/>
-          <p:cNvSpPr/>
-          <p:nvPr/>
-        </p:nvSpPr>
-        <p:spPr>
-          <a:xfrm>
-            <a:off x="685800" y="1353312"/>
-            <a:ext cx="420624" cy="420624"/>
-          </a:xfrm>
-          <a:prstGeom prst="ellipse">
-            <a:avLst/>
-          </a:prstGeom>
-          <a:solidFill>
-            <a:srgbClr val="E87A1E"/>
-          </a:solidFill>
-          <a:ln w="15875">
-            <a:solidFill>
-              <a:srgbClr val="FFFFFF"/>
-            </a:solidFill>
-          </a:ln>
-          <a:effectLst/>
-        </p:spPr>
-        <p:style>
-          <a:lnRef idx="1">
-            <a:schemeClr val="accent1"/>
-          </a:lnRef>
-          <a:fillRef idx="3">
-            <a:schemeClr val="accent1"/>
-          </a:fillRef>
-          <a:effectRef idx="2">
-            <a:schemeClr val="accent1"/>
-          </a:effectRef>
-          <a:fontRef idx="minor">
-            <a:schemeClr val="lt1"/>
-          </a:fontRef>
-        </p:style>
-        <p:txBody>
-          <a:bodyPr rtlCol="0" anchor="ctr" lIns="0" rIns="0" tIns="0" bIns="0"/>
-          <a:lstStyle/>
-          <a:p>
-            <a:pPr algn="ctr"/>
-            <a:r>
-              <a:rPr sz="1400" b="1" i="0">
-                <a:solidFill>
-                  <a:srgbClr val="FFFFFF"/>
-                </a:solidFill>
-                <a:latin typeface="Calibri"/>
-              </a:rPr>
-              <a:t>1</a:t>
-            </a:r>
-          </a:p>
-        </p:txBody>
-      </p:sp>
-      <p:sp>
-        <p:nvSpPr>
-          <p:cNvPr id="4" name="TextBox 3"/>
-          <p:cNvSpPr txBox="1"/>
-          <p:nvPr/>
-        </p:nvSpPr>
-        <p:spPr>
-          <a:xfrm>
-            <a:off x="1280160" y="1298448"/>
-            <a:ext cx="4526280" cy="292608"/>
-          </a:xfrm>
-          <a:prstGeom prst="rect">
-            <a:avLst/>
-          </a:prstGeom>
-          <a:noFill/>
-        </p:spPr>
-        <p:txBody>
-          <a:bodyPr wrap="square" anchor="t">
-            <a:spAutoFit/>
-          </a:bodyPr>
-          <a:lstStyle/>
-          <a:p>
-            <a:pPr algn="l">
-              <a:spcAft>
-                <a:spcPts val="300"/>
-              </a:spcAft>
-            </a:pPr>
-            <a:r>
-              <a:rPr sz="1700" b="1" i="0">
-                <a:solidFill>
-                  <a:srgbClr val="1B3A5C"/>
-                </a:solidFill>
-                <a:latin typeface="Calibri"/>
-              </a:rPr>
-              <a:t>Overview &amp; key design decisions</a:t>
-            </a:r>
-          </a:p>
-        </p:txBody>
-      </p:sp>
-      <p:sp>
-        <p:nvSpPr>
-          <p:cNvPr id="5" name="TextBox 4"/>
-          <p:cNvSpPr txBox="1"/>
-          <p:nvPr/>
-        </p:nvSpPr>
-        <p:spPr>
-          <a:xfrm>
-            <a:off x="1280160" y="1600200"/>
-            <a:ext cx="4526280" cy="457200"/>
-          </a:xfrm>
-          <a:prstGeom prst="rect">
-            <a:avLst/>
-          </a:prstGeom>
-          <a:noFill/>
-        </p:spPr>
-        <p:txBody>
-          <a:bodyPr wrap="square" anchor="t">
-            <a:spAutoFit/>
-          </a:bodyPr>
-          <a:lstStyle/>
-          <a:p>
-            <a:pPr algn="l">
-              <a:spcAft>
-                <a:spcPts val="300"/>
-              </a:spcAft>
-            </a:pPr>
-            <a:r>
-              <a:rPr sz="1250" b="0" i="0">
-                <a:solidFill>
-                  <a:srgbClr val="3A4654"/>
-                </a:solidFill>
-                <a:latin typeface="Calibri"/>
-              </a:rPr>
-              <a:t>what the Service is, and the seven choices that shape it</a:t>
-            </a:r>
-          </a:p>
-        </p:txBody>
-      </p:sp>
-      <p:sp>
-        <p:nvSpPr>
-          <p:cNvPr id="6" name="Oval 5"/>
-          <p:cNvSpPr/>
-          <p:nvPr/>
-        </p:nvSpPr>
-        <p:spPr>
-          <a:xfrm>
-            <a:off x="685800" y="2304288"/>
-            <a:ext cx="420624" cy="420624"/>
-          </a:xfrm>
-          <a:prstGeom prst="ellipse">
-            <a:avLst/>
-          </a:prstGeom>
-          <a:solidFill>
-            <a:srgbClr val="E87A1E"/>
-          </a:solidFill>
-          <a:ln w="15875">
-            <a:solidFill>
-              <a:srgbClr val="FFFFFF"/>
-            </a:solidFill>
-          </a:ln>
-          <a:effectLst/>
-        </p:spPr>
-        <p:style>
-          <a:lnRef idx="1">
-            <a:schemeClr val="accent1"/>
-          </a:lnRef>
-          <a:fillRef idx="3">
-            <a:schemeClr val="accent1"/>
-          </a:fillRef>
-          <a:effectRef idx="2">
-            <a:schemeClr val="accent1"/>
-          </a:effectRef>
-          <a:fontRef idx="minor">
-            <a:schemeClr val="lt1"/>
-          </a:fontRef>
-        </p:style>
-        <p:txBody>
-          <a:bodyPr rtlCol="0" anchor="ctr" lIns="0" rIns="0" tIns="0" bIns="0"/>
-          <a:lstStyle/>
-          <a:p>
-            <a:pPr algn="ctr"/>
-            <a:r>
-              <a:rPr sz="1400" b="1" i="0">
-                <a:solidFill>
-                  <a:srgbClr val="FFFFFF"/>
-                </a:solidFill>
-                <a:latin typeface="Calibri"/>
-              </a:rPr>
-              <a:t>2</a:t>
-            </a:r>
-          </a:p>
-        </p:txBody>
-      </p:sp>
-      <p:sp>
-        <p:nvSpPr>
-          <p:cNvPr id="7" name="TextBox 6"/>
-          <p:cNvSpPr txBox="1"/>
-          <p:nvPr/>
-        </p:nvSpPr>
-        <p:spPr>
-          <a:xfrm>
-            <a:off x="1280160" y="2249424"/>
-            <a:ext cx="4526280" cy="292608"/>
-          </a:xfrm>
-          <a:prstGeom prst="rect">
-            <a:avLst/>
-          </a:prstGeom>
-          <a:noFill/>
-        </p:spPr>
-        <p:txBody>
-          <a:bodyPr wrap="square" anchor="t">
-            <a:spAutoFit/>
-          </a:bodyPr>
-          <a:lstStyle/>
-          <a:p>
-            <a:pPr algn="l">
-              <a:spcAft>
-                <a:spcPts val="300"/>
-              </a:spcAft>
-            </a:pPr>
-            <a:r>
-              <a:rPr sz="1700" b="1" i="0">
-                <a:solidFill>
-                  <a:srgbClr val="1B3A5C"/>
-                </a:solidFill>
-                <a:latin typeface="Calibri"/>
-              </a:rPr>
-              <a:t>Auto-benchmarking design motif</a:t>
-            </a:r>
-          </a:p>
-        </p:txBody>
-      </p:sp>
-      <p:sp>
-        <p:nvSpPr>
-          <p:cNvPr id="8" name="TextBox 7"/>
-          <p:cNvSpPr txBox="1"/>
-          <p:nvPr/>
-        </p:nvSpPr>
-        <p:spPr>
-          <a:xfrm>
-            <a:off x="1280160" y="2551176"/>
-            <a:ext cx="4526280" cy="457200"/>
-          </a:xfrm>
-          <a:prstGeom prst="rect">
-            <a:avLst/>
-          </a:prstGeom>
-          <a:noFill/>
-        </p:spPr>
-        <p:txBody>
-          <a:bodyPr wrap="square" anchor="t">
-            <a:spAutoFit/>
-          </a:bodyPr>
-          <a:lstStyle/>
-          <a:p>
-            <a:pPr algn="l">
-              <a:spcAft>
-                <a:spcPts val="300"/>
-              </a:spcAft>
-            </a:pPr>
-            <a:r>
-              <a:rPr sz="1250" b="0" i="0">
-                <a:solidFill>
-                  <a:srgbClr val="3A4654"/>
-                </a:solidFill>
-                <a:latin typeface="Calibri"/>
-              </a:rPr>
-              <a:t>the shape of the system, before the wiring detail</a:t>
-            </a:r>
-          </a:p>
-        </p:txBody>
-      </p:sp>
-      <p:sp>
-        <p:nvSpPr>
-          <p:cNvPr id="9" name="Oval 8"/>
-          <p:cNvSpPr/>
-          <p:nvPr/>
-        </p:nvSpPr>
-        <p:spPr>
-          <a:xfrm>
-            <a:off x="685800" y="3255264"/>
-            <a:ext cx="420624" cy="420624"/>
-          </a:xfrm>
-          <a:prstGeom prst="ellipse">
-            <a:avLst/>
-          </a:prstGeom>
-          <a:solidFill>
-            <a:srgbClr val="E87A1E"/>
-          </a:solidFill>
-          <a:ln w="15875">
-            <a:solidFill>
-              <a:srgbClr val="FFFFFF"/>
-            </a:solidFill>
-          </a:ln>
-          <a:effectLst/>
-        </p:spPr>
-        <p:style>
-          <a:lnRef idx="1">
-            <a:schemeClr val="accent1"/>
-          </a:lnRef>
-          <a:fillRef idx="3">
-            <a:schemeClr val="accent1"/>
-          </a:fillRef>
-          <a:effectRef idx="2">
-            <a:schemeClr val="accent1"/>
-          </a:effectRef>
-          <a:fontRef idx="minor">
-            <a:schemeClr val="lt1"/>
-          </a:fontRef>
-        </p:style>
-        <p:txBody>
-          <a:bodyPr rtlCol="0" anchor="ctr" lIns="0" rIns="0" tIns="0" bIns="0"/>
-          <a:lstStyle/>
-          <a:p>
-            <a:pPr algn="ctr"/>
-            <a:r>
-              <a:rPr sz="1400" b="1" i="0">
-                <a:solidFill>
-                  <a:srgbClr val="FFFFFF"/>
-                </a:solidFill>
-                <a:latin typeface="Calibri"/>
-              </a:rPr>
-              <a:t>3</a:t>
-            </a:r>
-          </a:p>
-        </p:txBody>
-      </p:sp>
-      <p:sp>
-        <p:nvSpPr>
-          <p:cNvPr id="10" name="TextBox 9"/>
-          <p:cNvSpPr txBox="1"/>
-          <p:nvPr/>
-        </p:nvSpPr>
-        <p:spPr>
-          <a:xfrm>
-            <a:off x="1280160" y="3200400"/>
-            <a:ext cx="4526280" cy="292608"/>
-          </a:xfrm>
-          <a:prstGeom prst="rect">
-            <a:avLst/>
-          </a:prstGeom>
-          <a:noFill/>
-        </p:spPr>
-        <p:txBody>
-          <a:bodyPr wrap="square" anchor="t">
-            <a:spAutoFit/>
-          </a:bodyPr>
-          <a:lstStyle/>
-          <a:p>
-            <a:pPr algn="l">
-              <a:spcAft>
-                <a:spcPts val="300"/>
-              </a:spcAft>
-            </a:pPr>
-            <a:r>
-              <a:rPr sz="1700" b="1" i="0">
-                <a:solidFill>
-                  <a:srgbClr val="1B3A5C"/>
-                </a:solidFill>
-                <a:latin typeface="Calibri"/>
-              </a:rPr>
-              <a:t>Architecture</a:t>
-            </a:r>
-          </a:p>
-        </p:txBody>
-      </p:sp>
-      <p:sp>
-        <p:nvSpPr>
-          <p:cNvPr id="11" name="TextBox 10"/>
-          <p:cNvSpPr txBox="1"/>
-          <p:nvPr/>
-        </p:nvSpPr>
-        <p:spPr>
-          <a:xfrm>
-            <a:off x="1280160" y="3502152"/>
-            <a:ext cx="4526280" cy="457200"/>
-          </a:xfrm>
-          <a:prstGeom prst="rect">
-            <a:avLst/>
-          </a:prstGeom>
-          <a:noFill/>
-        </p:spPr>
-        <p:txBody>
-          <a:bodyPr wrap="square" anchor="t">
-            <a:spAutoFit/>
-          </a:bodyPr>
-          <a:lstStyle/>
-          <a:p>
-            <a:pPr algn="l">
-              <a:spcAft>
-                <a:spcPts val="300"/>
-              </a:spcAft>
-            </a:pPr>
-            <a:r>
-              <a:rPr sz="1250" b="0" i="0">
-                <a:solidFill>
-                  <a:srgbClr val="3A4654"/>
-                </a:solidFill>
-                <a:latin typeface="Calibri"/>
-              </a:rPr>
-              <a:t>client, Service, and the per-cluster instance selected by JWT iss</a:t>
-            </a:r>
-          </a:p>
-        </p:txBody>
-      </p:sp>
-      <p:sp>
-        <p:nvSpPr>
-          <p:cNvPr id="12" name="Oval 11"/>
-          <p:cNvSpPr/>
-          <p:nvPr/>
-        </p:nvSpPr>
-        <p:spPr>
-          <a:xfrm>
-            <a:off x="685800" y="4206240"/>
-            <a:ext cx="420624" cy="420624"/>
-          </a:xfrm>
-          <a:prstGeom prst="ellipse">
-            <a:avLst/>
-          </a:prstGeom>
-          <a:solidFill>
-            <a:srgbClr val="E87A1E"/>
-          </a:solidFill>
-          <a:ln w="15875">
-            <a:solidFill>
-              <a:srgbClr val="FFFFFF"/>
-            </a:solidFill>
-          </a:ln>
-          <a:effectLst/>
-        </p:spPr>
-        <p:style>
-          <a:lnRef idx="1">
-            <a:schemeClr val="accent1"/>
-          </a:lnRef>
-          <a:fillRef idx="3">
-            <a:schemeClr val="accent1"/>
-          </a:fillRef>
-          <a:effectRef idx="2">
-            <a:schemeClr val="accent1"/>
-          </a:effectRef>
-          <a:fontRef idx="minor">
-            <a:schemeClr val="lt1"/>
-          </a:fontRef>
-        </p:style>
-        <p:txBody>
-          <a:bodyPr rtlCol="0" anchor="ctr" lIns="0" rIns="0" tIns="0" bIns="0"/>
-          <a:lstStyle/>
-          <a:p>
-            <a:pPr algn="ctr"/>
-            <a:r>
-              <a:rPr sz="1400" b="1" i="0">
-                <a:solidFill>
-                  <a:srgbClr val="FFFFFF"/>
-                </a:solidFill>
-                <a:latin typeface="Calibri"/>
-              </a:rPr>
-              <a:t>4</a:t>
-            </a:r>
-          </a:p>
-        </p:txBody>
-      </p:sp>
-      <p:sp>
-        <p:nvSpPr>
-          <p:cNvPr id="13" name="TextBox 12"/>
-          <p:cNvSpPr txBox="1"/>
-          <p:nvPr/>
-        </p:nvSpPr>
-        <p:spPr>
-          <a:xfrm>
-            <a:off x="1280160" y="4151376"/>
-            <a:ext cx="4526280" cy="292608"/>
-          </a:xfrm>
-          <a:prstGeom prst="rect">
-            <a:avLst/>
-          </a:prstGeom>
-          <a:noFill/>
-        </p:spPr>
-        <p:txBody>
-          <a:bodyPr wrap="square" anchor="t">
-            <a:spAutoFit/>
-          </a:bodyPr>
-          <a:lstStyle/>
-          <a:p>
-            <a:pPr algn="l">
-              <a:spcAft>
-                <a:spcPts val="300"/>
-              </a:spcAft>
-            </a:pPr>
-            <a:r>
-              <a:rPr sz="1700" b="1" i="0">
-                <a:solidFill>
-                  <a:srgbClr val="1B3A5C"/>
-                </a:solidFill>
-                <a:latin typeface="Calibri"/>
-              </a:rPr>
-              <a:t>Architecture with workload specific components</a:t>
-            </a:r>
-          </a:p>
-        </p:txBody>
-      </p:sp>
-      <p:sp>
-        <p:nvSpPr>
-          <p:cNvPr id="14" name="TextBox 13"/>
-          <p:cNvSpPr txBox="1"/>
-          <p:nvPr/>
-        </p:nvSpPr>
-        <p:spPr>
-          <a:xfrm>
-            <a:off x="1280160" y="4453128"/>
-            <a:ext cx="4526280" cy="457200"/>
-          </a:xfrm>
-          <a:prstGeom prst="rect">
-            <a:avLst/>
-          </a:prstGeom>
-          <a:noFill/>
-        </p:spPr>
-        <p:txBody>
-          <a:bodyPr wrap="square" anchor="t">
-            <a:spAutoFit/>
-          </a:bodyPr>
-          <a:lstStyle/>
-          <a:p>
-            <a:pPr algn="l">
-              <a:spcAft>
-                <a:spcPts val="300"/>
-              </a:spcAft>
-            </a:pPr>
-            <a:r>
-              <a:rPr sz="1250" b="0" i="0">
-                <a:solidFill>
-                  <a:srgbClr val="3A4654"/>
-                </a:solidFill>
-                <a:latin typeface="Calibri"/>
-              </a:rPr>
-              <a:t>4.1 inside the workload: sidecar, user simulator, IBAC judge · 4.2 how interception is wired</a:t>
-            </a:r>
-          </a:p>
-        </p:txBody>
-      </p:sp>
-      <p:sp>
-        <p:nvSpPr>
-          <p:cNvPr id="15" name="Oval 14"/>
-          <p:cNvSpPr/>
-          <p:nvPr/>
-        </p:nvSpPr>
-        <p:spPr>
-          <a:xfrm>
-            <a:off x="685800" y="5157216"/>
-            <a:ext cx="420624" cy="420624"/>
-          </a:xfrm>
-          <a:prstGeom prst="ellipse">
-            <a:avLst/>
-          </a:prstGeom>
-          <a:solidFill>
-            <a:srgbClr val="E87A1E"/>
-          </a:solidFill>
-          <a:ln w="15875">
-            <a:solidFill>
-              <a:srgbClr val="FFFFFF"/>
-            </a:solidFill>
-          </a:ln>
-          <a:effectLst/>
-        </p:spPr>
-        <p:style>
-          <a:lnRef idx="1">
-            <a:schemeClr val="accent1"/>
-          </a:lnRef>
-          <a:fillRef idx="3">
-            <a:schemeClr val="accent1"/>
-          </a:fillRef>
-          <a:effectRef idx="2">
-            <a:schemeClr val="accent1"/>
-          </a:effectRef>
-          <a:fontRef idx="minor">
-            <a:schemeClr val="lt1"/>
-          </a:fontRef>
-        </p:style>
-        <p:txBody>
-          <a:bodyPr rtlCol="0" anchor="ctr" lIns="0" rIns="0" tIns="0" bIns="0"/>
-          <a:lstStyle/>
-          <a:p>
-            <a:pPr algn="ctr"/>
-            <a:r>
-              <a:rPr sz="1400" b="1" i="0">
-                <a:solidFill>
-                  <a:srgbClr val="FFFFFF"/>
-                </a:solidFill>
-                <a:latin typeface="Calibri"/>
-              </a:rPr>
-              <a:t>5</a:t>
-            </a:r>
-          </a:p>
-        </p:txBody>
-      </p:sp>
-      <p:sp>
-        <p:nvSpPr>
-          <p:cNvPr id="16" name="TextBox 15"/>
-          <p:cNvSpPr txBox="1"/>
-          <p:nvPr/>
-        </p:nvSpPr>
-        <p:spPr>
-          <a:xfrm>
-            <a:off x="1280160" y="5102352"/>
-            <a:ext cx="4526280" cy="292608"/>
-          </a:xfrm>
-          <a:prstGeom prst="rect">
-            <a:avLst/>
-          </a:prstGeom>
-          <a:noFill/>
-        </p:spPr>
-        <p:txBody>
-          <a:bodyPr wrap="square" anchor="t">
-            <a:spAutoFit/>
-          </a:bodyPr>
-          <a:lstStyle/>
-          <a:p>
-            <a:pPr algn="l">
-              <a:spcAft>
-                <a:spcPts val="300"/>
-              </a:spcAft>
-            </a:pPr>
-            <a:r>
-              <a:rPr sz="1700" b="1" i="0">
-                <a:solidFill>
-                  <a:srgbClr val="1B3A5C"/>
-                </a:solidFill>
-                <a:latin typeface="Calibri"/>
-              </a:rPr>
-              <a:t>The two-token auth model</a:t>
-            </a:r>
-          </a:p>
-        </p:txBody>
-      </p:sp>
-      <p:sp>
-        <p:nvSpPr>
-          <p:cNvPr id="17" name="TextBox 16"/>
-          <p:cNvSpPr txBox="1"/>
-          <p:nvPr/>
-        </p:nvSpPr>
-        <p:spPr>
-          <a:xfrm>
-            <a:off x="1280160" y="5404104"/>
-            <a:ext cx="4526280" cy="457200"/>
-          </a:xfrm>
-          <a:prstGeom prst="rect">
-            <a:avLst/>
-          </a:prstGeom>
-          <a:noFill/>
-        </p:spPr>
-        <p:txBody>
-          <a:bodyPr wrap="square" anchor="t">
-            <a:spAutoFit/>
-          </a:bodyPr>
-          <a:lstStyle/>
-          <a:p>
-            <a:pPr algn="l">
-              <a:spcAft>
-                <a:spcPts val="300"/>
-              </a:spcAft>
-            </a:pPr>
-            <a:r>
-              <a:rPr sz="1250" b="0" i="0">
-                <a:solidFill>
-                  <a:srgbClr val="3A4654"/>
-                </a:solidFill>
-                <a:latin typeface="Calibri"/>
-              </a:rPr>
-              <a:t>why the caller's token is never forwarded upstream</a:t>
-            </a:r>
-          </a:p>
-        </p:txBody>
-      </p:sp>
-      <p:sp>
-        <p:nvSpPr>
-          <p:cNvPr id="18" name="Oval 17"/>
-          <p:cNvSpPr/>
-          <p:nvPr/>
-        </p:nvSpPr>
-        <p:spPr>
-          <a:xfrm>
-            <a:off x="6492240" y="1353312"/>
-            <a:ext cx="420624" cy="420624"/>
-          </a:xfrm>
-          <a:prstGeom prst="ellipse">
-            <a:avLst/>
-          </a:prstGeom>
-          <a:solidFill>
-            <a:srgbClr val="E87A1E"/>
-          </a:solidFill>
-          <a:ln w="15875">
-            <a:solidFill>
-              <a:srgbClr val="FFFFFF"/>
-            </a:solidFill>
-          </a:ln>
-          <a:effectLst/>
-        </p:spPr>
-        <p:style>
-          <a:lnRef idx="1">
-            <a:schemeClr val="accent1"/>
-          </a:lnRef>
-          <a:fillRef idx="3">
-            <a:schemeClr val="accent1"/>
-          </a:fillRef>
-          <a:effectRef idx="2">
-            <a:schemeClr val="accent1"/>
-          </a:effectRef>
-          <a:fontRef idx="minor">
-            <a:schemeClr val="lt1"/>
-          </a:fontRef>
-        </p:style>
-        <p:txBody>
-          <a:bodyPr rtlCol="0" anchor="ctr" lIns="0" rIns="0" tIns="0" bIns="0"/>
-          <a:lstStyle/>
-          <a:p>
-            <a:pPr algn="ctr"/>
-            <a:r>
-              <a:rPr sz="1400" b="1" i="0">
-                <a:solidFill>
-                  <a:srgbClr val="FFFFFF"/>
-                </a:solidFill>
-                <a:latin typeface="Calibri"/>
-              </a:rPr>
-              <a:t>6</a:t>
-            </a:r>
-          </a:p>
-        </p:txBody>
-      </p:sp>
-      <p:sp>
-        <p:nvSpPr>
-          <p:cNvPr id="19" name="TextBox 18"/>
-          <p:cNvSpPr txBox="1"/>
-          <p:nvPr/>
-        </p:nvSpPr>
-        <p:spPr>
-          <a:xfrm>
-            <a:off x="7086600" y="1298448"/>
-            <a:ext cx="4663440" cy="292608"/>
-          </a:xfrm>
-          <a:prstGeom prst="rect">
-            <a:avLst/>
-          </a:prstGeom>
-          <a:noFill/>
-        </p:spPr>
-        <p:txBody>
-          <a:bodyPr wrap="square" anchor="t">
-            <a:spAutoFit/>
-          </a:bodyPr>
-          <a:lstStyle/>
-          <a:p>
-            <a:pPr algn="l">
-              <a:spcAft>
-                <a:spcPts val="300"/>
-              </a:spcAft>
-            </a:pPr>
-            <a:r>
-              <a:rPr sz="1700" b="1" i="0">
-                <a:solidFill>
-                  <a:srgbClr val="1B3A5C"/>
-                </a:solidFill>
-                <a:latin typeface="Calibri"/>
-              </a:rPr>
-              <a:t>Benchmark catalog &amp; run lifecycle</a:t>
-            </a:r>
-          </a:p>
-        </p:txBody>
-      </p:sp>
-      <p:sp>
-        <p:nvSpPr>
-          <p:cNvPr id="20" name="TextBox 19"/>
-          <p:cNvSpPr txBox="1"/>
-          <p:nvPr/>
-        </p:nvSpPr>
-        <p:spPr>
-          <a:xfrm>
-            <a:off x="7086600" y="1600200"/>
-            <a:ext cx="4663440" cy="457200"/>
-          </a:xfrm>
-          <a:prstGeom prst="rect">
-            <a:avLst/>
-          </a:prstGeom>
-          <a:noFill/>
-        </p:spPr>
-        <p:txBody>
-          <a:bodyPr wrap="square" anchor="t">
-            <a:spAutoFit/>
-          </a:bodyPr>
-          <a:lstStyle/>
-          <a:p>
-            <a:pPr algn="l">
-              <a:spcAft>
-                <a:spcPts val="300"/>
-              </a:spcAft>
-            </a:pPr>
-            <a:r>
-              <a:rPr sz="1250" b="0" i="0">
-                <a:solidFill>
-                  <a:srgbClr val="3A4654"/>
-                </a:solidFill>
-                <a:latin typeface="Calibri"/>
-              </a:rPr>
-              <a:t>6.1 the three benchmarks and the REST flow that drives them · 6.2 what each image bakes in · 6.3 who decides what happens inside a task</a:t>
-            </a:r>
-          </a:p>
-        </p:txBody>
-      </p:sp>
-      <p:sp>
-        <p:nvSpPr>
-          <p:cNvPr id="21" name="Oval 20"/>
-          <p:cNvSpPr/>
-          <p:nvPr/>
-        </p:nvSpPr>
-        <p:spPr>
-          <a:xfrm>
-            <a:off x="6492240" y="2304288"/>
-            <a:ext cx="420624" cy="420624"/>
-          </a:xfrm>
-          <a:prstGeom prst="ellipse">
-            <a:avLst/>
-          </a:prstGeom>
-          <a:solidFill>
-            <a:srgbClr val="E87A1E"/>
-          </a:solidFill>
-          <a:ln w="15875">
-            <a:solidFill>
-              <a:srgbClr val="FFFFFF"/>
-            </a:solidFill>
-          </a:ln>
-          <a:effectLst/>
-        </p:spPr>
-        <p:style>
-          <a:lnRef idx="1">
-            <a:schemeClr val="accent1"/>
-          </a:lnRef>
-          <a:fillRef idx="3">
-            <a:schemeClr val="accent1"/>
-          </a:fillRef>
-          <a:effectRef idx="2">
-            <a:schemeClr val="accent1"/>
-          </a:effectRef>
-          <a:fontRef idx="minor">
-            <a:schemeClr val="lt1"/>
-          </a:fontRef>
-        </p:style>
-        <p:txBody>
-          <a:bodyPr rtlCol="0" anchor="ctr" lIns="0" rIns="0" tIns="0" bIns="0"/>
-          <a:lstStyle/>
-          <a:p>
-            <a:pPr algn="ctr"/>
-            <a:r>
-              <a:rPr sz="1400" b="1" i="0">
-                <a:solidFill>
-                  <a:srgbClr val="FFFFFF"/>
-                </a:solidFill>
-                <a:latin typeface="Calibri"/>
-              </a:rPr>
-              <a:t>7</a:t>
-            </a:r>
-          </a:p>
-        </p:txBody>
-      </p:sp>
-      <p:sp>
-        <p:nvSpPr>
-          <p:cNvPr id="22" name="TextBox 21"/>
-          <p:cNvSpPr txBox="1"/>
-          <p:nvPr/>
-        </p:nvSpPr>
-        <p:spPr>
-          <a:xfrm>
-            <a:off x="7086600" y="2249424"/>
-            <a:ext cx="4663440" cy="292608"/>
-          </a:xfrm>
-          <a:prstGeom prst="rect">
-            <a:avLst/>
-          </a:prstGeom>
-          <a:noFill/>
-        </p:spPr>
-        <p:txBody>
-          <a:bodyPr wrap="square" anchor="t">
-            <a:spAutoFit/>
-          </a:bodyPr>
-          <a:lstStyle/>
-          <a:p>
-            <a:pPr algn="l">
-              <a:spcAft>
-                <a:spcPts val="300"/>
-              </a:spcAft>
-            </a:pPr>
-            <a:r>
-              <a:rPr sz="1700" b="1" i="0">
-                <a:solidFill>
-                  <a:srgbClr val="1B3A5C"/>
-                </a:solidFill>
-                <a:latin typeface="Calibri"/>
-              </a:rPr>
-              <a:t>The three benchmarks — what they measure</a:t>
-            </a:r>
-          </a:p>
-        </p:txBody>
-      </p:sp>
-      <p:sp>
-        <p:nvSpPr>
-          <p:cNvPr id="23" name="TextBox 22"/>
-          <p:cNvSpPr txBox="1"/>
-          <p:nvPr/>
-        </p:nvSpPr>
-        <p:spPr>
-          <a:xfrm>
-            <a:off x="7086600" y="2551176"/>
-            <a:ext cx="4663440" cy="457200"/>
-          </a:xfrm>
-          <a:prstGeom prst="rect">
-            <a:avLst/>
-          </a:prstGeom>
-          <a:noFill/>
-        </p:spPr>
-        <p:txBody>
-          <a:bodyPr wrap="square" anchor="t">
-            <a:spAutoFit/>
-          </a:bodyPr>
-          <a:lstStyle/>
-          <a:p>
-            <a:pPr algn="l">
-              <a:spcAft>
-                <a:spcPts val="300"/>
-              </a:spcAft>
-            </a:pPr>
-            <a:r>
-              <a:rPr sz="1250" b="0" i="0">
-                <a:solidFill>
-                  <a:srgbClr val="3A4654"/>
-                </a:solidFill>
-                <a:latin typeface="Calibri"/>
-              </a:rPr>
-              <a:t>7.1 the difficulty ladder · 7.2 what each stresses · 7.3 the traps · 7.4 picking one · 7.5 what it costs · 7.6 the rate card · 7.7–7.8 six efficiency figures · 7.9–7.10 the benchmarks and the 12 runs compared</a:t>
-            </a:r>
-          </a:p>
-        </p:txBody>
-      </p:sp>
-      <p:sp>
-        <p:nvSpPr>
-          <p:cNvPr id="24" name="Oval 23"/>
-          <p:cNvSpPr/>
-          <p:nvPr/>
-        </p:nvSpPr>
-        <p:spPr>
-          <a:xfrm>
-            <a:off x="6492240" y="3255264"/>
-            <a:ext cx="420624" cy="420624"/>
-          </a:xfrm>
-          <a:prstGeom prst="ellipse">
-            <a:avLst/>
-          </a:prstGeom>
-          <a:solidFill>
-            <a:srgbClr val="E87A1E"/>
-          </a:solidFill>
-          <a:ln w="15875">
-            <a:solidFill>
-              <a:srgbClr val="FFFFFF"/>
-            </a:solidFill>
-          </a:ln>
-          <a:effectLst/>
-        </p:spPr>
-        <p:style>
-          <a:lnRef idx="1">
-            <a:schemeClr val="accent1"/>
-          </a:lnRef>
-          <a:fillRef idx="3">
-            <a:schemeClr val="accent1"/>
-          </a:fillRef>
-          <a:effectRef idx="2">
-            <a:schemeClr val="accent1"/>
-          </a:effectRef>
-          <a:fontRef idx="minor">
-            <a:schemeClr val="lt1"/>
-          </a:fontRef>
-        </p:style>
-        <p:txBody>
-          <a:bodyPr rtlCol="0" anchor="ctr" lIns="0" rIns="0" tIns="0" bIns="0"/>
-          <a:lstStyle/>
-          <a:p>
-            <a:pPr algn="ctr"/>
-            <a:r>
-              <a:rPr sz="1400" b="1" i="0">
-                <a:solidFill>
-                  <a:srgbClr val="FFFFFF"/>
-                </a:solidFill>
-                <a:latin typeface="Calibri"/>
-              </a:rPr>
-              <a:t>8</a:t>
-            </a:r>
-          </a:p>
-        </p:txBody>
-      </p:sp>
-      <p:sp>
-        <p:nvSpPr>
-          <p:cNvPr id="25" name="TextBox 24"/>
-          <p:cNvSpPr txBox="1"/>
-          <p:nvPr/>
-        </p:nvSpPr>
-        <p:spPr>
-          <a:xfrm>
-            <a:off x="7086600" y="3200400"/>
-            <a:ext cx="4663440" cy="292608"/>
-          </a:xfrm>
-          <a:prstGeom prst="rect">
-            <a:avLst/>
-          </a:prstGeom>
-          <a:noFill/>
-        </p:spPr>
-        <p:txBody>
-          <a:bodyPr wrap="square" anchor="t">
-            <a:spAutoFit/>
-          </a:bodyPr>
-          <a:lstStyle/>
-          <a:p>
-            <a:pPr algn="l">
-              <a:spcAft>
-                <a:spcPts val="300"/>
-              </a:spcAft>
-            </a:pPr>
-            <a:r>
-              <a:rPr sz="1700" b="1" i="0">
-                <a:solidFill>
-                  <a:srgbClr val="1B3A5C"/>
-                </a:solidFill>
-                <a:latin typeface="Calibri"/>
-              </a:rPr>
-              <a:t>The canonical 12-run matrix</a:t>
-            </a:r>
-          </a:p>
-        </p:txBody>
-      </p:sp>
-      <p:sp>
-        <p:nvSpPr>
-          <p:cNvPr id="26" name="TextBox 25"/>
-          <p:cNvSpPr txBox="1"/>
-          <p:nvPr/>
-        </p:nvSpPr>
-        <p:spPr>
-          <a:xfrm>
-            <a:off x="7086600" y="3502152"/>
-            <a:ext cx="4663440" cy="457200"/>
-          </a:xfrm>
-          <a:prstGeom prst="rect">
-            <a:avLst/>
-          </a:prstGeom>
-          <a:noFill/>
-        </p:spPr>
-        <p:txBody>
-          <a:bodyPr wrap="square" anchor="t">
-            <a:spAutoFit/>
-          </a:bodyPr>
-          <a:lstStyle/>
-          <a:p>
-            <a:pPr algn="l">
-              <a:spcAft>
-                <a:spcPts val="300"/>
-              </a:spcAft>
-            </a:pPr>
-            <a:r>
-              <a:rPr sz="1250" b="0" i="0">
-                <a:solidFill>
-                  <a:srgbClr val="3A4654"/>
-                </a:solidFill>
-                <a:latin typeface="Calibri"/>
-              </a:rPr>
-              <a:t>8.1 what the 12 runs parameterize · 8.2 what they measured</a:t>
-            </a:r>
-          </a:p>
-        </p:txBody>
-      </p:sp>
-      <p:sp>
-        <p:nvSpPr>
-          <p:cNvPr id="27" name="Oval 26"/>
-          <p:cNvSpPr/>
-          <p:nvPr/>
-        </p:nvSpPr>
-        <p:spPr>
-          <a:xfrm>
-            <a:off x="6492240" y="4206240"/>
-            <a:ext cx="420624" cy="420624"/>
-          </a:xfrm>
-          <a:prstGeom prst="ellipse">
-            <a:avLst/>
-          </a:prstGeom>
-          <a:solidFill>
-            <a:srgbClr val="E87A1E"/>
-          </a:solidFill>
-          <a:ln w="15875">
-            <a:solidFill>
-              <a:srgbClr val="FFFFFF"/>
-            </a:solidFill>
-          </a:ln>
-          <a:effectLst/>
-        </p:spPr>
-        <p:style>
-          <a:lnRef idx="1">
-            <a:schemeClr val="accent1"/>
-          </a:lnRef>
-          <a:fillRef idx="3">
-            <a:schemeClr val="accent1"/>
-          </a:fillRef>
-          <a:effectRef idx="2">
-            <a:schemeClr val="accent1"/>
-          </a:effectRef>
-          <a:fontRef idx="minor">
-            <a:schemeClr val="lt1"/>
-          </a:fontRef>
-        </p:style>
-        <p:txBody>
-          <a:bodyPr rtlCol="0" anchor="ctr" lIns="0" rIns="0" tIns="0" bIns="0"/>
-          <a:lstStyle/>
-          <a:p>
-            <a:pPr algn="ctr"/>
-            <a:r>
-              <a:rPr sz="1400" b="1" i="0">
-                <a:solidFill>
-                  <a:srgbClr val="FFFFFF"/>
-                </a:solidFill>
-                <a:latin typeface="Calibri"/>
-              </a:rPr>
-              <a:t>9</a:t>
-            </a:r>
-          </a:p>
-        </p:txBody>
-      </p:sp>
-      <p:sp>
-        <p:nvSpPr>
-          <p:cNvPr id="28" name="TextBox 27"/>
-          <p:cNvSpPr txBox="1"/>
-          <p:nvPr/>
-        </p:nvSpPr>
-        <p:spPr>
-          <a:xfrm>
-            <a:off x="7086600" y="4151376"/>
-            <a:ext cx="4663440" cy="292608"/>
-          </a:xfrm>
-          <a:prstGeom prst="rect">
-            <a:avLst/>
-          </a:prstGeom>
-          <a:noFill/>
-        </p:spPr>
-        <p:txBody>
-          <a:bodyPr wrap="square" anchor="t">
-            <a:spAutoFit/>
-          </a:bodyPr>
-          <a:lstStyle/>
-          <a:p>
-            <a:pPr algn="l">
-              <a:spcAft>
-                <a:spcPts val="300"/>
-              </a:spcAft>
-            </a:pPr>
-            <a:r>
-              <a:rPr sz="1700" b="1" i="0">
-                <a:solidFill>
-                  <a:srgbClr val="1B3A5C"/>
-                </a:solidFill>
-                <a:latin typeface="Calibri"/>
-              </a:rPr>
-              <a:t>Cross-platform &amp; plugin overhead</a:t>
-            </a:r>
-          </a:p>
-        </p:txBody>
-      </p:sp>
-      <p:sp>
-        <p:nvSpPr>
-          <p:cNvPr id="29" name="TextBox 28"/>
-          <p:cNvSpPr txBox="1"/>
-          <p:nvPr/>
-        </p:nvSpPr>
-        <p:spPr>
-          <a:xfrm>
-            <a:off x="7086600" y="4453128"/>
-            <a:ext cx="4663440" cy="457200"/>
-          </a:xfrm>
-          <a:prstGeom prst="rect">
-            <a:avLst/>
-          </a:prstGeom>
-          <a:noFill/>
-        </p:spPr>
-        <p:txBody>
-          <a:bodyPr wrap="square" anchor="t">
-            <a:spAutoFit/>
-          </a:bodyPr>
-          <a:lstStyle/>
-          <a:p>
-            <a:pPr algn="l">
-              <a:spcAft>
-                <a:spcPts val="300"/>
-              </a:spcAft>
-            </a:pPr>
-            <a:r>
-              <a:rPr sz="1250" b="0" i="0">
-                <a:solidFill>
-                  <a:srgbClr val="3A4654"/>
-                </a:solidFill>
-                <a:latin typeface="Calibri"/>
-              </a:rPr>
-              <a:t>9.1 OpenShift vs KinD, like-for-like · 9.2 what AuthBridge costs</a:t>
-            </a:r>
-          </a:p>
-        </p:txBody>
-      </p:sp>
-      <p:sp>
-        <p:nvSpPr>
-          <p:cNvPr id="30" name="Oval 29"/>
-          <p:cNvSpPr/>
-          <p:nvPr/>
-        </p:nvSpPr>
-        <p:spPr>
-          <a:xfrm>
-            <a:off x="6492240" y="5157216"/>
-            <a:ext cx="420624" cy="420624"/>
-          </a:xfrm>
-          <a:prstGeom prst="ellipse">
-            <a:avLst/>
-          </a:prstGeom>
-          <a:solidFill>
-            <a:srgbClr val="E87A1E"/>
-          </a:solidFill>
-          <a:ln w="15875">
-            <a:solidFill>
-              <a:srgbClr val="FFFFFF"/>
-            </a:solidFill>
-          </a:ln>
-          <a:effectLst/>
-        </p:spPr>
-        <p:style>
-          <a:lnRef idx="1">
-            <a:schemeClr val="accent1"/>
-          </a:lnRef>
-          <a:fillRef idx="3">
-            <a:schemeClr val="accent1"/>
-          </a:fillRef>
-          <a:effectRef idx="2">
-            <a:schemeClr val="accent1"/>
-          </a:effectRef>
-          <a:fontRef idx="minor">
-            <a:schemeClr val="lt1"/>
-          </a:fontRef>
-        </p:style>
-        <p:txBody>
-          <a:bodyPr rtlCol="0" anchor="ctr" lIns="0" rIns="0" tIns="0" bIns="0"/>
-          <a:lstStyle/>
-          <a:p>
-            <a:pPr algn="ctr"/>
-            <a:r>
-              <a:rPr sz="1400" b="1" i="0">
-                <a:solidFill>
-                  <a:srgbClr val="FFFFFF"/>
-                </a:solidFill>
-                <a:latin typeface="Calibri"/>
-              </a:rPr>
-              <a:t>10</a:t>
-            </a:r>
-          </a:p>
-        </p:txBody>
-      </p:sp>
-      <p:sp>
-        <p:nvSpPr>
-          <p:cNvPr id="31" name="TextBox 30"/>
-          <p:cNvSpPr txBox="1"/>
-          <p:nvPr/>
-        </p:nvSpPr>
-        <p:spPr>
-          <a:xfrm>
-            <a:off x="7086600" y="5102352"/>
-            <a:ext cx="4663440" cy="292608"/>
-          </a:xfrm>
-          <a:prstGeom prst="rect">
-            <a:avLst/>
-          </a:prstGeom>
-          <a:noFill/>
-        </p:spPr>
-        <p:txBody>
-          <a:bodyPr wrap="square" anchor="t">
-            <a:spAutoFit/>
-          </a:bodyPr>
-          <a:lstStyle/>
-          <a:p>
-            <a:pPr algn="l">
-              <a:spcAft>
-                <a:spcPts val="300"/>
-              </a:spcAft>
-            </a:pPr>
-            <a:r>
-              <a:rPr sz="1700" b="1" i="0">
-                <a:solidFill>
-                  <a:srgbClr val="1B3A5C"/>
-                </a:solidFill>
-                <a:latin typeface="Calibri"/>
-              </a:rPr>
-              <a:t>What the Service can &amp; cannot enact</a:t>
-            </a:r>
-          </a:p>
-        </p:txBody>
-      </p:sp>
-      <p:sp>
-        <p:nvSpPr>
-          <p:cNvPr id="32" name="TextBox 31"/>
-          <p:cNvSpPr txBox="1"/>
-          <p:nvPr/>
-        </p:nvSpPr>
-        <p:spPr>
-          <a:xfrm>
-            <a:off x="7086600" y="5404104"/>
-            <a:ext cx="4663440" cy="457200"/>
-          </a:xfrm>
-          <a:prstGeom prst="rect">
-            <a:avLst/>
-          </a:prstGeom>
-          <a:noFill/>
-        </p:spPr>
-        <p:txBody>
-          <a:bodyPr wrap="square" anchor="t">
-            <a:spAutoFit/>
-          </a:bodyPr>
-          <a:lstStyle/>
-          <a:p>
-            <a:pPr algn="l">
-              <a:spcAft>
-                <a:spcPts val="300"/>
-              </a:spcAft>
-            </a:pPr>
-            <a:r>
-              <a:rPr sz="1250" b="0" i="0">
-                <a:solidFill>
-                  <a:srgbClr val="3A4654"/>
-                </a:solidFill>
-                <a:latin typeface="Calibri"/>
-              </a:rPr>
-              <a:t>the HTTP-only boundary, made explicit</a:t>
-            </a:r>
-          </a:p>
-        </p:txBody>
-      </p:sp>
-      <p:cxnSp>
-        <p:nvCxnSpPr>
-          <p:cNvPr id="33" name="Connector 32"/>
-          <p:cNvCxnSpPr/>
-          <p:nvPr/>
-        </p:nvCxnSpPr>
-        <p:spPr>
-          <a:xfrm>
-            <a:off x="6080760" y="1280160"/>
-            <a:ext cx="0" cy="4251960"/>
-          </a:xfrm>
-          <a:prstGeom prst="line">
-            <a:avLst/>
-          </a:prstGeom>
-          <a:ln w="12700">
-            <a:solidFill>
-              <a:srgbClr val="C7CED6"/>
-            </a:solidFill>
-          </a:ln>
-          <a:effectLst/>
-        </p:spPr>
-        <p:style>
-          <a:lnRef idx="2">
-            <a:schemeClr val="accent1"/>
-          </a:lnRef>
-          <a:fillRef idx="0">
-            <a:schemeClr val="accent1"/>
-          </a:fillRef>
-          <a:effectRef idx="1">
-            <a:schemeClr val="accent1"/>
-          </a:effectRef>
-          <a:fontRef idx="minor">
-            <a:schemeClr val="tx1"/>
-          </a:fontRef>
-        </p:style>
-      </p:cxnSp>
-      <p:sp>
-        <p:nvSpPr>
-          <p:cNvPr id="34" name="TextBox 33"/>
-          <p:cNvSpPr txBox="1"/>
-          <p:nvPr/>
-        </p:nvSpPr>
-        <p:spPr>
-          <a:xfrm>
-            <a:off x="11795760" y="6437376"/>
-            <a:ext cx="320040" cy="310896"/>
-          </a:xfrm>
-          <a:prstGeom prst="rect">
-            <a:avLst/>
-          </a:prstGeom>
-          <a:noFill/>
-        </p:spPr>
-        <p:txBody>
-          <a:bodyPr wrap="none" anchor="ctr" lIns="0" rIns="0" tIns="0" bIns="0">
-            <a:spAutoFit/>
-          </a:bodyPr>
-          <a:lstStyle/>
-          <a:p>
-            <a:pPr algn="r">
-              <a:spcAft>
-                <a:spcPts val="300"/>
-              </a:spcAft>
-            </a:pPr>
-            <a:r>
-              <a:rPr sz="1200" b="0" i="0">
-                <a:solidFill>
-                  <a:srgbClr val="6B6B6B"/>
-                </a:solidFill>
-                <a:latin typeface="Calibri"/>
-              </a:rPr>
-              <a:t>2</a:t>
-            </a:r>
-          </a:p>
-        </p:txBody>
-      </p:sp>
-    </p:spTree>
-  </p:cSld>
-  <p:clrMapOvr>
-    <a:masterClrMapping/>
-  </p:clrMapOvr>
-</p:sld>
-</file>
-
-<file path=ppt/slides/slide20.xml><?xml version="1.0" encoding="utf-8"?>
+<file path=ppt/slides/slide21.xml><?xml version="1.0" encoding="utf-8"?>
 <p:sld xmlns:a="http://schemas.openxmlformats.org/drawingml/2006/main" xmlns:p="http://schemas.openxmlformats.org/presentationml/2006/main" xmlns:r="http://schemas.openxmlformats.org/officeDocument/2006/relationships">
   <p:cSld name="7.9 The Three Benchmarks Compared — Task, Purpose, Worth">
     <p:spTree>
@@ -16249,7 +17309,7 @@
                 </a:solidFill>
                 <a:latin typeface="Calibri"/>
               </a:rPr>
-              <a:t>20</a:t>
+              <a:t>21</a:t>
             </a:r>
           </a:p>
         </p:txBody>
@@ -16262,7 +17322,7 @@
 </p:sld>
 </file>
 
-<file path=ppt/slides/slide21.xml><?xml version="1.0" encoding="utf-8"?>
+<file path=ppt/slides/slide22.xml><?xml version="1.0" encoding="utf-8"?>
 <p:sld xmlns:a="http://schemas.openxmlformats.org/drawingml/2006/main" xmlns:p="http://schemas.openxmlformats.org/presentationml/2006/main" xmlns:r="http://schemas.openxmlformats.org/officeDocument/2006/relationships">
   <p:cSld name="7.10 The 12 Runs Compared — What Each Band Established">
     <p:spTree>
@@ -16967,7 +18027,7 @@
                 </a:solidFill>
                 <a:latin typeface="Calibri"/>
               </a:rPr>
-              <a:t>21</a:t>
+              <a:t>22</a:t>
             </a:r>
           </a:p>
         </p:txBody>
@@ -16980,7 +18040,7 @@
 </p:sld>
 </file>
 
-<file path=ppt/slides/slide22.xml><?xml version="1.0" encoding="utf-8"?>
+<file path=ppt/slides/slide23.xml><?xml version="1.0" encoding="utf-8"?>
 <p:sld xmlns:a="http://schemas.openxmlformats.org/drawingml/2006/main" xmlns:p="http://schemas.openxmlformats.org/presentationml/2006/main" xmlns:r="http://schemas.openxmlformats.org/officeDocument/2006/relationships">
   <p:cSld name="8.1 The Canonical 12-Run Matrix">
     <p:spTree>
@@ -18693,7 +19753,7 @@
                 </a:solidFill>
                 <a:latin typeface="Calibri"/>
               </a:rPr>
-              <a:t>22</a:t>
+              <a:t>23</a:t>
             </a:r>
           </a:p>
         </p:txBody>
@@ -18706,7 +19766,7 @@
 </p:sld>
 </file>
 
-<file path=ppt/slides/slide23.xml><?xml version="1.0" encoding="utf-8"?>
+<file path=ppt/slides/slide24.xml><?xml version="1.0" encoding="utf-8"?>
 <p:sld xmlns:a="http://schemas.openxmlformats.org/drawingml/2006/main" xmlns:p="http://schemas.openxmlformats.org/presentationml/2006/main" xmlns:r="http://schemas.openxmlformats.org/officeDocument/2006/relationships">
   <p:cSld name="8.2 What the 12 Runs Measured">
     <p:spTree>
@@ -20999,7 +22059,7 @@
                 </a:solidFill>
                 <a:latin typeface="Calibri"/>
               </a:rPr>
-              <a:t>23</a:t>
+              <a:t>24</a:t>
             </a:r>
           </a:p>
         </p:txBody>
@@ -21012,7 +22072,7 @@
 </p:sld>
 </file>
 
-<file path=ppt/slides/slide24.xml><?xml version="1.0" encoding="utf-8"?>
+<file path=ppt/slides/slide25.xml><?xml version="1.0" encoding="utf-8"?>
 <p:sld xmlns:a="http://schemas.openxmlformats.org/drawingml/2006/main" xmlns:p="http://schemas.openxmlformats.org/presentationml/2006/main" xmlns:r="http://schemas.openxmlformats.org/officeDocument/2006/relationships">
   <p:cSld name="9.1 OpenShift vs KinD — Like-for-Like">
     <p:spTree>
@@ -23605,7 +24665,7 @@
                 </a:solidFill>
                 <a:latin typeface="Calibri"/>
               </a:rPr>
-              <a:t>24</a:t>
+              <a:t>25</a:t>
             </a:r>
           </a:p>
         </p:txBody>
@@ -23618,7 +24678,7 @@
 </p:sld>
 </file>
 
-<file path=ppt/slides/slide25.xml><?xml version="1.0" encoding="utf-8"?>
+<file path=ppt/slides/slide26.xml><?xml version="1.0" encoding="utf-8"?>
 <p:sld xmlns:a="http://schemas.openxmlformats.org/drawingml/2006/main" xmlns:p="http://schemas.openxmlformats.org/presentationml/2006/main" xmlns:r="http://schemas.openxmlformats.org/officeDocument/2006/relationships">
   <p:cSld name="9.2 What AuthBridge Costs — and Why It Has No Single Number">
     <p:spTree>
@@ -25411,7 +26471,7 @@
                 </a:solidFill>
                 <a:latin typeface="Calibri"/>
               </a:rPr>
-              <a:t>25</a:t>
+              <a:t>26</a:t>
             </a:r>
           </a:p>
         </p:txBody>
@@ -25424,7 +26484,7 @@
 </p:sld>
 </file>
 
-<file path=ppt/slides/slide26.xml><?xml version="1.0" encoding="utf-8"?>
+<file path=ppt/slides/slide27.xml><?xml version="1.0" encoding="utf-8"?>
 <p:sld xmlns:a="http://schemas.openxmlformats.org/drawingml/2006/main" xmlns:p="http://schemas.openxmlformats.org/presentationml/2006/main" xmlns:r="http://schemas.openxmlformats.org/officeDocument/2006/relationships">
   <p:cSld name="10. What the Service Can &amp; Cannot Enact">
     <p:spTree>
@@ -26015,7 +27075,7 @@
                 </a:solidFill>
                 <a:latin typeface="Calibri"/>
               </a:rPr>
-              <a:t>26</a:t>
+              <a:t>27</a:t>
             </a:r>
           </a:p>
         </p:txBody>

--- a/docs/AutoBench.pptx
+++ b/docs/AutoBench.pptx
@@ -3369,7 +3369,7 @@
                 </a:solidFill>
                 <a:latin typeface="Calibri"/>
               </a:rPr>
-              <a:t>Last modified 2026-09-20 21:22 EDT</a:t>
+              <a:t>Last modified 2026-09-20 22:17 EDT</a:t>
             </a:r>
           </a:p>
         </p:txBody>
@@ -7448,7 +7448,7 @@
                 </a:solidFill>
                 <a:latin typeface="Calibri"/>
               </a:rPr>
-              <a:t>Read the MODEL row before any dollar figure: the three rungs do not run the same model, and each default is dearer than the one below it — so no cost here transfers to another model. The scale gap is the headline: a tau2 task costs ~267× the input tokens of a gsm8k task, an appworld task ~792× — and in MONEY 279× and 1,069×, because that model change compounds with the token growth (7.5, 7.7). A 50-task gsm8k run is a minute and 2 cents; a 20-task appworld run is 30-45 minutes, millions of tokens and dollars. Budget by benchmark, not by task count.</a:t>
+              <a:t>Read the MODEL row before any dollar figure: the three rungs do not run the same model, and each default is dearer than the one below it — so no cost here transfers to another model. The scale gap is the headline: a tau2 task costs ~267× the input tokens of a gsm8k task, an appworld task ~792× — and in MONEY 279× and 1,069×, because that model change compounds with the token growth (7.6, 7.8). A 50-task gsm8k run is a minute and 2 cents; a 20-task appworld run is 30-45 minutes, millions of tokens and dollars. Budget by benchmark, not by task count.</a:t>
             </a:r>
           </a:p>
         </p:txBody>
@@ -7779,7 +7779,7 @@
                 </a:solidFill>
                 <a:latin typeface="Calibri"/>
               </a:rPr>
-              <a:t>• Cheap enough to run often: a 50-task leg is 25 K tokens — 0.4% of the whole 12-run matrix's bill, and less than a SINGLE appworld task (see 7.4).</a:t>
+              <a:t>• Cheap enough to run often: a 50-task leg is 25 K tokens — 0.4% of the whole 12-run matrix's bill, and less than a SINGLE appworld task (see 7.5).</a:t>
             </a:r>
           </a:p>
         </p:txBody>
@@ -8418,7 +8418,7 @@
 
 <file path=ppt/slides/slide15.xml><?xml version="1.0" encoding="utf-8"?>
 <p:sld xmlns:a="http://schemas.openxmlformats.org/drawingml/2006/main" xmlns:p="http://schemas.openxmlformats.org/presentationml/2006/main" xmlns:r="http://schemas.openxmlformats.org/officeDocument/2006/relationships">
-  <p:cSld name="7.3 Reading the Numbers — Five Things That Mislead">
+  <p:cSld name="7.3 The Three Benchmarks Compared — Task, Purpose, Worth">
     <p:spTree>
       <p:nvGrpSpPr>
         <p:cNvPr id="1" name=""/>
@@ -8474,7 +8474,7 @@
                 </a:solidFill>
                 <a:latin typeface="Calibri"/>
               </a:rPr>
-              <a:t>7.3  Reading the Numbers — Five Things That Mislead</a:t>
+              <a:t>7.3  The Three Benchmarks Compared — Task, Purpose, Worth</a:t>
             </a:r>
           </a:p>
           <a:p>
@@ -8485,78 +8485,814 @@
                 </a:solidFill>
                 <a:latin typeface="Calibri"/>
               </a:rPr>
-              <a:t>Every one of these cost us a wrong conclusion first</a:t>
+              <a:t>They differ in the SHAPE of a task, not just its size — which is what makes the ladder a ladder</a:t>
             </a:r>
           </a:p>
         </p:txBody>
       </p:sp>
-      <p:sp>
-        <p:nvSpPr>
-          <p:cNvPr id="3" name="Rounded Rectangle 2"/>
-          <p:cNvSpPr/>
+      <p:graphicFrame>
+        <p:nvGraphicFramePr>
+          <p:cNvPr id="3" name="Table 2"/>
+          <p:cNvGraphicFramePr>
+            <a:graphicFrameLocks noGrp="1"/>
+          </p:cNvGraphicFramePr>
           <p:nvPr/>
-        </p:nvSpPr>
-        <p:spPr>
-          <a:xfrm>
-            <a:off x="411480" y="1207008"/>
-            <a:ext cx="11338560" cy="914400"/>
-          </a:xfrm>
-          <a:prstGeom prst="roundRect">
-            <a:avLst/>
-          </a:prstGeom>
-          <a:solidFill>
-            <a:srgbClr val="FBEEE4"/>
-          </a:solidFill>
-          <a:ln w="12700">
-            <a:solidFill>
-              <a:srgbClr val="B55A2E"/>
-            </a:solidFill>
-          </a:ln>
-          <a:effectLst/>
-        </p:spPr>
-        <p:style>
-          <a:lnRef idx="1">
-            <a:schemeClr val="accent1"/>
-          </a:lnRef>
-          <a:fillRef idx="3">
-            <a:schemeClr val="accent1"/>
-          </a:fillRef>
-          <a:effectRef idx="2">
-            <a:schemeClr val="accent1"/>
-          </a:effectRef>
-          <a:fontRef idx="minor">
-            <a:schemeClr val="lt1"/>
-          </a:fontRef>
-        </p:style>
-        <p:txBody>
-          <a:bodyPr rtlCol="0" anchor="t" wrap="square" tIns="76200" bIns="25400" lIns="177800" rIns="177800"/>
-          <a:lstStyle/>
-          <a:p>
-            <a:pPr algn="l"/>
-            <a:r>
-              <a:rPr sz="1300" b="1" i="0">
-                <a:solidFill>
-                  <a:srgbClr val="1F2A37"/>
-                </a:solidFill>
-                <a:latin typeface="Calibri"/>
-              </a:rPr>
-              <a:t>1.  pass_rate = evaluated_pass / total</a:t>
-            </a:r>
-          </a:p>
-          <a:p>
-            <a:pPr algn="l"/>
-            <a:r>
-              <a:rPr sz="1100" b="0" i="0">
-                <a:solidFill>
-                  <a:srgbClr val="3A4654"/>
-                </a:solidFill>
-                <a:latin typeface="Calibri"/>
-              </a:rPr>
-              <a:t>A task that ERRORS before evaluation counts as not passed, so a low rate can mean “failed the task” or “never got judged”. Check the error column too.</a:t>
-            </a:r>
-          </a:p>
-        </p:txBody>
-      </p:sp>
+        </p:nvGraphicFramePr>
+        <p:xfrm>
+          <a:off x="411480" y="1143000"/>
+          <a:ext cx="11338560" cy="4297680"/>
+        </p:xfrm>
+        <a:graphic>
+          <a:graphicData uri="http://schemas.openxmlformats.org/drawingml/2006/table">
+            <a:tbl>
+              <a:tblPr firstRow="1">
+                <a:tableStyleId>{5C22544A-7EE6-4342-B048-85BDC9FD1C3A}</a:tableStyleId>
+              </a:tblPr>
+              <a:tblGrid>
+                <a:gridCol w="2011680"/>
+                <a:gridCol w="3063240"/>
+                <a:gridCol w="3154680"/>
+                <a:gridCol w="3108960"/>
+              </a:tblGrid>
+              <a:tr h="537210">
+                <a:tc>
+                  <a:txBody>
+                    <a:bodyPr/>
+                    <a:lstStyle/>
+                    <a:p>
+                      <a:pPr algn="l"/>
+                      <a:r>
+                        <a:rPr sz="1050" b="1" i="0">
+                          <a:solidFill>
+                            <a:srgbClr val="FFFFFF"/>
+                          </a:solidFill>
+                          <a:latin typeface="Calibri"/>
+                        </a:rPr>
+                        <a:t/>
+                      </a:r>
+                    </a:p>
+                  </a:txBody>
+                  <a:tcPr marL="63500" marR="63500" marT="12700" marB="12700" anchor="ctr">
+                    <a:solidFill>
+                      <a:srgbClr val="1B3A5C"/>
+                    </a:solidFill>
+                  </a:tcPr>
+                </a:tc>
+                <a:tc>
+                  <a:txBody>
+                    <a:bodyPr/>
+                    <a:lstStyle/>
+                    <a:p>
+                      <a:pPr algn="ctr"/>
+                      <a:r>
+                        <a:rPr sz="1050" b="1" i="0">
+                          <a:solidFill>
+                            <a:srgbClr val="FFFFFF"/>
+                          </a:solidFill>
+                          <a:latin typeface="Calibri"/>
+                        </a:rPr>
+                        <a:t>gsm8k</a:t>
+                      </a:r>
+                    </a:p>
+                  </a:txBody>
+                  <a:tcPr marL="63500" marR="63500" marT="12700" marB="12700" anchor="ctr">
+                    <a:solidFill>
+                      <a:srgbClr val="1B3A5C"/>
+                    </a:solidFill>
+                  </a:tcPr>
+                </a:tc>
+                <a:tc>
+                  <a:txBody>
+                    <a:bodyPr/>
+                    <a:lstStyle/>
+                    <a:p>
+                      <a:pPr algn="ctr"/>
+                      <a:r>
+                        <a:rPr sz="1050" b="1" i="0">
+                          <a:solidFill>
+                            <a:srgbClr val="FFFFFF"/>
+                          </a:solidFill>
+                          <a:latin typeface="Calibri"/>
+                        </a:rPr>
+                        <a:t>tau2</a:t>
+                      </a:r>
+                    </a:p>
+                  </a:txBody>
+                  <a:tcPr marL="63500" marR="63500" marT="12700" marB="12700" anchor="ctr">
+                    <a:solidFill>
+                      <a:srgbClr val="1B3A5C"/>
+                    </a:solidFill>
+                  </a:tcPr>
+                </a:tc>
+                <a:tc>
+                  <a:txBody>
+                    <a:bodyPr/>
+                    <a:lstStyle/>
+                    <a:p>
+                      <a:pPr algn="ctr"/>
+                      <a:r>
+                        <a:rPr sz="1050" b="1" i="0">
+                          <a:solidFill>
+                            <a:srgbClr val="FFFFFF"/>
+                          </a:solidFill>
+                          <a:latin typeface="Calibri"/>
+                        </a:rPr>
+                        <a:t>appworld</a:t>
+                      </a:r>
+                    </a:p>
+                  </a:txBody>
+                  <a:tcPr marL="63500" marR="63500" marT="12700" marB="12700" anchor="ctr">
+                    <a:solidFill>
+                      <a:srgbClr val="1B3A5C"/>
+                    </a:solidFill>
+                  </a:tcPr>
+                </a:tc>
+              </a:tr>
+              <a:tr h="537210">
+                <a:tc>
+                  <a:txBody>
+                    <a:bodyPr/>
+                    <a:lstStyle/>
+                    <a:p>
+                      <a:pPr algn="l"/>
+                      <a:r>
+                        <a:rPr sz="1050" b="1" i="0">
+                          <a:solidFill>
+                            <a:srgbClr val="1F2A37"/>
+                          </a:solidFill>
+                          <a:latin typeface="Calibri"/>
+                        </a:rPr>
+                        <a:t>A task IS</a:t>
+                      </a:r>
+                    </a:p>
+                  </a:txBody>
+                  <a:tcPr marL="63500" marR="63500" marT="12700" marB="12700" anchor="ctr">
+                    <a:solidFill>
+                      <a:srgbClr val="FFFFFF"/>
+                    </a:solidFill>
+                  </a:tcPr>
+                </a:tc>
+                <a:tc>
+                  <a:txBody>
+                    <a:bodyPr/>
+                    <a:lstStyle/>
+                    <a:p>
+                      <a:pPr algn="l"/>
+                      <a:r>
+                        <a:rPr sz="1050" b="0" i="0">
+                          <a:solidFill>
+                            <a:srgbClr val="1F2A37"/>
+                          </a:solidFill>
+                          <a:latin typeface="Calibri"/>
+                        </a:rPr>
+                        <a:t>one grade-school word problem,
+answered in text</a:t>
+                      </a:r>
+                    </a:p>
+                  </a:txBody>
+                  <a:tcPr marL="63500" marR="63500" marT="12700" marB="12700" anchor="ctr">
+                    <a:solidFill>
+                      <a:srgbClr val="FFFFFF"/>
+                    </a:solidFill>
+                  </a:tcPr>
+                </a:tc>
+                <a:tc>
+                  <a:txBody>
+                    <a:bodyPr/>
+                    <a:lstStyle/>
+                    <a:p>
+                      <a:pPr algn="l"/>
+                      <a:r>
+                        <a:rPr sz="1050" b="0" i="0">
+                          <a:solidFill>
+                            <a:srgbClr val="1F2A37"/>
+                          </a:solidFill>
+                          <a:latin typeface="Calibri"/>
+                        </a:rPr>
+                        <a:t>one retail customer-service
+conversation vs a simulated user</a:t>
+                      </a:r>
+                    </a:p>
+                  </a:txBody>
+                  <a:tcPr marL="63500" marR="63500" marT="12700" marB="12700" anchor="ctr">
+                    <a:solidFill>
+                      <a:srgbClr val="FFFFFF"/>
+                    </a:solidFill>
+                  </a:tcPr>
+                </a:tc>
+                <a:tc>
+                  <a:txBody>
+                    <a:bodyPr/>
+                    <a:lstStyle/>
+                    <a:p>
+                      <a:pPr algn="l"/>
+                      <a:r>
+                        <a:rPr sz="1050" b="0" i="0">
+                          <a:solidFill>
+                            <a:srgbClr val="1F2A37"/>
+                          </a:solidFill>
+                          <a:latin typeface="Calibri"/>
+                        </a:rPr>
+                        <a:t>one multi-app scenario automated
+through an API surface</a:t>
+                      </a:r>
+                    </a:p>
+                  </a:txBody>
+                  <a:tcPr marL="63500" marR="63500" marT="12700" marB="12700" anchor="ctr">
+                    <a:solidFill>
+                      <a:srgbClr val="FFFFFF"/>
+                    </a:solidFill>
+                  </a:tcPr>
+                </a:tc>
+              </a:tr>
+              <a:tr h="537210">
+                <a:tc>
+                  <a:txBody>
+                    <a:bodyPr/>
+                    <a:lstStyle/>
+                    <a:p>
+                      <a:pPr algn="l"/>
+                      <a:r>
+                        <a:rPr sz="1050" b="1" i="0">
+                          <a:solidFill>
+                            <a:srgbClr val="1F2A37"/>
+                          </a:solidFill>
+                          <a:latin typeface="Calibri"/>
+                        </a:rPr>
+                        <a:t>Turn structure</a:t>
+                      </a:r>
+                    </a:p>
+                  </a:txBody>
+                  <a:tcPr marL="63500" marR="63500" marT="12700" marB="12700" anchor="ctr">
+                    <a:solidFill>
+                      <a:srgbClr val="F4F6F8"/>
+                    </a:solidFill>
+                  </a:tcPr>
+                </a:tc>
+                <a:tc>
+                  <a:txBody>
+                    <a:bodyPr/>
+                    <a:lstStyle/>
+                    <a:p>
+                      <a:pPr algn="l"/>
+                      <a:r>
+                        <a:rPr sz="1050" b="0" i="0">
+                          <a:solidFill>
+                            <a:srgbClr val="1F2A37"/>
+                          </a:solidFill>
+                          <a:latin typeface="Calibri"/>
+                        </a:rPr>
+                        <a:t>1 model call, ~1 tool call</a:t>
+                      </a:r>
+                    </a:p>
+                  </a:txBody>
+                  <a:tcPr marL="63500" marR="63500" marT="12700" marB="12700" anchor="ctr">
+                    <a:solidFill>
+                      <a:srgbClr val="F4F6F8"/>
+                    </a:solidFill>
+                  </a:tcPr>
+                </a:tc>
+                <a:tc>
+                  <a:txBody>
+                    <a:bodyPr/>
+                    <a:lstStyle/>
+                    <a:p>
+                      <a:pPr algn="l"/>
+                      <a:r>
+                        <a:rPr sz="1050" b="0" i="0">
+                          <a:solidFill>
+                            <a:srgbClr val="1F2A37"/>
+                          </a:solidFill>
+                          <a:latin typeface="Calibri"/>
+                        </a:rPr>
+                        <a:t>~11 calls alternating with a
+USER SIMULATOR in character</a:t>
+                      </a:r>
+                    </a:p>
+                  </a:txBody>
+                  <a:tcPr marL="63500" marR="63500" marT="12700" marB="12700" anchor="ctr">
+                    <a:solidFill>
+                      <a:srgbClr val="F4F6F8"/>
+                    </a:solidFill>
+                  </a:tcPr>
+                </a:tc>
+                <a:tc>
+                  <a:txBody>
+                    <a:bodyPr/>
+                    <a:lstStyle/>
+                    <a:p>
+                      <a:pPr algn="l"/>
+                      <a:r>
+                        <a:rPr sz="1050" b="0" i="0">
+                          <a:solidFill>
+                            <a:srgbClr val="1F2A37"/>
+                          </a:solidFill>
+                          <a:latin typeface="Calibri"/>
+                        </a:rPr>
+                        <a:t>~29 calls, each re-sending the
+whole conversation</a:t>
+                      </a:r>
+                    </a:p>
+                  </a:txBody>
+                  <a:tcPr marL="63500" marR="63500" marT="12700" marB="12700" anchor="ctr">
+                    <a:solidFill>
+                      <a:srgbClr val="F4F6F8"/>
+                    </a:solidFill>
+                  </a:tcPr>
+                </a:tc>
+              </a:tr>
+              <a:tr h="537210">
+                <a:tc>
+                  <a:txBody>
+                    <a:bodyPr/>
+                    <a:lstStyle/>
+                    <a:p>
+                      <a:pPr algn="l"/>
+                      <a:r>
+                        <a:rPr sz="1050" b="1" i="0">
+                          <a:solidFill>
+                            <a:srgbClr val="1F2A37"/>
+                          </a:solidFill>
+                          <a:latin typeface="Calibri"/>
+                        </a:rPr>
+                        <a:t>Ends when</a:t>
+                      </a:r>
+                    </a:p>
+                  </a:txBody>
+                  <a:tcPr marL="63500" marR="63500" marT="12700" marB="12700" anchor="ctr">
+                    <a:solidFill>
+                      <a:srgbClr val="FFFFFF"/>
+                    </a:solidFill>
+                  </a:tcPr>
+                </a:tc>
+                <a:tc>
+                  <a:txBody>
+                    <a:bodyPr/>
+                    <a:lstStyle/>
+                    <a:p>
+                      <a:pPr algn="l"/>
+                      <a:r>
+                        <a:rPr sz="1050" b="0" i="0">
+                          <a:solidFill>
+                            <a:srgbClr val="1F2A37"/>
+                          </a:solidFill>
+                          <a:latin typeface="Calibri"/>
+                        </a:rPr>
+                        <a:t>the answer is emitted</a:t>
+                      </a:r>
+                    </a:p>
+                  </a:txBody>
+                  <a:tcPr marL="63500" marR="63500" marT="12700" marB="12700" anchor="ctr">
+                    <a:solidFill>
+                      <a:srgbClr val="FFFFFF"/>
+                    </a:solidFill>
+                  </a:tcPr>
+                </a:tc>
+                <a:tc>
+                  <a:txBody>
+                    <a:bodyPr/>
+                    <a:lstStyle/>
+                    <a:p>
+                      <a:pPr algn="l"/>
+                      <a:r>
+                        <a:rPr sz="1050" b="0" i="0">
+                          <a:solidFill>
+                            <a:srgbClr val="1F2A37"/>
+                          </a:solidFill>
+                          <a:latin typeface="Calibri"/>
+                        </a:rPr>
+                        <a:t>the dialogue resolves, or policy
+is violated</a:t>
+                      </a:r>
+                    </a:p>
+                  </a:txBody>
+                  <a:tcPr marL="63500" marR="63500" marT="12700" marB="12700" anchor="ctr">
+                    <a:solidFill>
+                      <a:srgbClr val="FFFFFF"/>
+                    </a:solidFill>
+                  </a:tcPr>
+                </a:tc>
+                <a:tc>
+                  <a:txBody>
+                    <a:bodyPr/>
+                    <a:lstStyle/>
+                    <a:p>
+                      <a:pPr algn="l"/>
+                      <a:r>
+                        <a:rPr sz="1050" b="0" i="0">
+                          <a:solidFill>
+                            <a:srgbClr val="1F2A37"/>
+                          </a:solidFill>
+                          <a:latin typeface="Calibri"/>
+                        </a:rPr>
+                        <a:t>the goal state is reached — or the
+600 s task timeout kills it</a:t>
+                      </a:r>
+                    </a:p>
+                  </a:txBody>
+                  <a:tcPr marL="63500" marR="63500" marT="12700" marB="12700" anchor="ctr">
+                    <a:solidFill>
+                      <a:srgbClr val="FFFFFF"/>
+                    </a:solidFill>
+                  </a:tcPr>
+                </a:tc>
+              </a:tr>
+              <a:tr h="537210">
+                <a:tc>
+                  <a:txBody>
+                    <a:bodyPr/>
+                    <a:lstStyle/>
+                    <a:p>
+                      <a:pPr algn="l"/>
+                      <a:r>
+                        <a:rPr sz="1050" b="1" i="0">
+                          <a:solidFill>
+                            <a:srgbClr val="1F2A37"/>
+                          </a:solidFill>
+                          <a:latin typeface="Calibri"/>
+                        </a:rPr>
+                        <a:t>Scored by</a:t>
+                      </a:r>
+                    </a:p>
+                  </a:txBody>
+                  <a:tcPr marL="63500" marR="63500" marT="12700" marB="12700" anchor="ctr">
+                    <a:solidFill>
+                      <a:srgbClr val="F4F6F8"/>
+                    </a:solidFill>
+                  </a:tcPr>
+                </a:tc>
+                <a:tc>
+                  <a:txBody>
+                    <a:bodyPr/>
+                    <a:lstStyle/>
+                    <a:p>
+                      <a:pPr algn="l"/>
+                      <a:r>
+                        <a:rPr sz="1050" b="0" i="0">
+                          <a:solidFill>
+                            <a:srgbClr val="1F2A37"/>
+                          </a:solidFill>
+                          <a:latin typeface="Calibri"/>
+                        </a:rPr>
+                        <a:t>exact numeric match</a:t>
+                      </a:r>
+                    </a:p>
+                  </a:txBody>
+                  <a:tcPr marL="63500" marR="63500" marT="12700" marB="12700" anchor="ctr">
+                    <a:solidFill>
+                      <a:srgbClr val="F4F6F8"/>
+                    </a:solidFill>
+                  </a:tcPr>
+                </a:tc>
+                <a:tc>
+                  <a:txBody>
+                    <a:bodyPr/>
+                    <a:lstStyle/>
+                    <a:p>
+                      <a:pPr algn="l"/>
+                      <a:r>
+                        <a:rPr sz="1050" b="0" i="0">
+                          <a:solidFill>
+                            <a:srgbClr val="1F2A37"/>
+                          </a:solidFill>
+                          <a:latin typeface="Calibri"/>
+                        </a:rPr>
+                        <a:t>task completion + policy
+compliance (tau2's own scorer)</a:t>
+                      </a:r>
+                    </a:p>
+                  </a:txBody>
+                  <a:tcPr marL="63500" marR="63500" marT="12700" marB="12700" anchor="ctr">
+                    <a:solidFill>
+                      <a:srgbClr val="F4F6F8"/>
+                    </a:solidFill>
+                  </a:tcPr>
+                </a:tc>
+                <a:tc>
+                  <a:txBody>
+                    <a:bodyPr/>
+                    <a:lstStyle/>
+                    <a:p>
+                      <a:pPr algn="l"/>
+                      <a:r>
+                        <a:rPr sz="1050" b="0" i="0">
+                          <a:solidFill>
+                            <a:srgbClr val="1F2A37"/>
+                          </a:solidFill>
+                          <a:latin typeface="Calibri"/>
+                        </a:rPr>
+                        <a:t>appworld's state assertions,
+all-or-nothing</a:t>
+                      </a:r>
+                    </a:p>
+                  </a:txBody>
+                  <a:tcPr marL="63500" marR="63500" marT="12700" marB="12700" anchor="ctr">
+                    <a:solidFill>
+                      <a:srgbClr val="F4F6F8"/>
+                    </a:solidFill>
+                  </a:tcPr>
+                </a:tc>
+              </a:tr>
+              <a:tr h="537210">
+                <a:tc>
+                  <a:txBody>
+                    <a:bodyPr/>
+                    <a:lstStyle/>
+                    <a:p>
+                      <a:pPr algn="l"/>
+                      <a:r>
+                        <a:rPr sz="1050" b="1" i="0">
+                          <a:solidFill>
+                            <a:srgbClr val="1F2A37"/>
+                          </a:solidFill>
+                          <a:latin typeface="Calibri"/>
+                        </a:rPr>
+                        <a:t>It exists to test</a:t>
+                      </a:r>
+                    </a:p>
+                  </a:txBody>
+                  <a:tcPr marL="63500" marR="63500" marT="12700" marB="12700" anchor="ctr">
+                    <a:solidFill>
+                      <a:srgbClr val="FFFFFF"/>
+                    </a:solidFill>
+                  </a:tcPr>
+                </a:tc>
+                <a:tc>
+                  <a:txBody>
+                    <a:bodyPr/>
+                    <a:lstStyle/>
+                    <a:p>
+                      <a:pPr algn="l"/>
+                      <a:r>
+                        <a:rPr sz="1050" b="0" i="0">
+                          <a:solidFill>
+                            <a:srgbClr val="1F2A37"/>
+                          </a:solidFill>
+                          <a:latin typeface="Calibri"/>
+                        </a:rPr>
+                        <a:t>that the PLUMBING works:
+deploy, auth, telemetry, S3</a:t>
+                      </a:r>
+                    </a:p>
+                  </a:txBody>
+                  <a:tcPr marL="63500" marR="63500" marT="12700" marB="12700" anchor="ctr">
+                    <a:solidFill>
+                      <a:srgbClr val="FFFFFF"/>
+                    </a:solidFill>
+                  </a:tcPr>
+                </a:tc>
+                <a:tc>
+                  <a:txBody>
+                    <a:bodyPr/>
+                    <a:lstStyle/>
+                    <a:p>
+                      <a:pPr algn="l"/>
+                      <a:r>
+                        <a:rPr sz="1050" b="0" i="0">
+                          <a:solidFill>
+                            <a:srgbClr val="1F2A37"/>
+                          </a:solidFill>
+                          <a:latin typeface="Calibri"/>
+                        </a:rPr>
+                        <a:t>that the agent HOLDS STATE
+across turns and uses tools
+under a policy</a:t>
+                      </a:r>
+                    </a:p>
+                  </a:txBody>
+                  <a:tcPr marL="63500" marR="63500" marT="12700" marB="12700" anchor="ctr">
+                    <a:solidFill>
+                      <a:srgbClr val="FFFFFF"/>
+                    </a:solidFill>
+                  </a:tcPr>
+                </a:tc>
+                <a:tc>
+                  <a:txBody>
+                    <a:bodyPr/>
+                    <a:lstStyle/>
+                    <a:p>
+                      <a:pPr algn="l"/>
+                      <a:r>
+                        <a:rPr sz="1050" b="0" i="0">
+                          <a:solidFill>
+                            <a:srgbClr val="1F2A37"/>
+                          </a:solidFill>
+                          <a:latin typeface="Calibri"/>
+                        </a:rPr>
+                        <a:t>that the agent survives LONG
+HORIZONS: context growth,
+timeouts, partial failure</a:t>
+                      </a:r>
+                    </a:p>
+                  </a:txBody>
+                  <a:tcPr marL="63500" marR="63500" marT="12700" marB="12700" anchor="ctr">
+                    <a:solidFill>
+                      <a:srgbClr val="FFFFFF"/>
+                    </a:solidFill>
+                  </a:tcPr>
+                </a:tc>
+              </a:tr>
+              <a:tr h="537210">
+                <a:tc>
+                  <a:txBody>
+                    <a:bodyPr/>
+                    <a:lstStyle/>
+                    <a:p>
+                      <a:pPr algn="l"/>
+                      <a:r>
+                        <a:rPr sz="1050" b="1" i="0">
+                          <a:solidFill>
+                            <a:srgbClr val="1F2A37"/>
+                          </a:solidFill>
+                          <a:latin typeface="Calibri"/>
+                        </a:rPr>
+                        <a:t>A result is worth</a:t>
+                      </a:r>
+                    </a:p>
+                  </a:txBody>
+                  <a:tcPr marL="63500" marR="63500" marT="12700" marB="12700" anchor="ctr">
+                    <a:solidFill>
+                      <a:srgbClr val="F4F6F8"/>
+                    </a:solidFill>
+                  </a:tcPr>
+                </a:tc>
+                <a:tc>
+                  <a:txBody>
+                    <a:bodyPr/>
+                    <a:lstStyle/>
+                    <a:p>
+                      <a:pPr algn="l"/>
+                      <a:r>
+                        <a:rPr sz="1050" b="0" i="0">
+                          <a:solidFill>
+                            <a:srgbClr val="1F2A37"/>
+                          </a:solidFill>
+                          <a:latin typeface="Calibri"/>
+                        </a:rPr>
+                        <a:t>a go/no-go on infrastructure.
+It saturates near 1.0, so it
+cannot rank models</a:t>
+                      </a:r>
+                    </a:p>
+                  </a:txBody>
+                  <a:tcPr marL="63500" marR="63500" marT="12700" marB="12700" anchor="ctr">
+                    <a:solidFill>
+                      <a:srgbClr val="F4F6F8"/>
+                    </a:solidFill>
+                  </a:tcPr>
+                </a:tc>
+                <a:tc>
+                  <a:txBody>
+                    <a:bodyPr/>
+                    <a:lstStyle/>
+                    <a:p>
+                      <a:pPr algn="l"/>
+                      <a:r>
+                        <a:rPr sz="1050" b="0" i="0">
+                          <a:solidFill>
+                            <a:srgbClr val="1F2A37"/>
+                          </a:solidFill>
+                          <a:latin typeface="Calibri"/>
+                        </a:rPr>
+                        <a:t>a genuine model/config
+comparison — it discriminates,
+and 0.83 leaves headroom both ways</a:t>
+                      </a:r>
+                    </a:p>
+                  </a:txBody>
+                  <a:tcPr marL="63500" marR="63500" marT="12700" marB="12700" anchor="ctr">
+                    <a:solidFill>
+                      <a:srgbClr val="F4F6F8"/>
+                    </a:solidFill>
+                  </a:tcPr>
+                </a:tc>
+                <a:tc>
+                  <a:txBody>
+                    <a:bodyPr/>
+                    <a:lstStyle/>
+                    <a:p>
+                      <a:pPr algn="l"/>
+                      <a:r>
+                        <a:rPr sz="1050" b="0" i="0">
+                          <a:solidFill>
+                            <a:srgbClr val="1F2A37"/>
+                          </a:solidFill>
+                          <a:latin typeface="Calibri"/>
+                        </a:rPr>
+                        <a:t>a stress signal, not a capability
+score: at 0.00 it tells you what
+BREAKS, not who is better</a:t>
+                      </a:r>
+                    </a:p>
+                  </a:txBody>
+                  <a:tcPr marL="63500" marR="63500" marT="12700" marB="12700" anchor="ctr">
+                    <a:solidFill>
+                      <a:srgbClr val="F4F6F8"/>
+                    </a:solidFill>
+                  </a:tcPr>
+                </a:tc>
+              </a:tr>
+              <a:tr h="537210">
+                <a:tc>
+                  <a:txBody>
+                    <a:bodyPr/>
+                    <a:lstStyle/>
+                    <a:p>
+                      <a:pPr algn="l"/>
+                      <a:r>
+                        <a:rPr sz="1050" b="1" i="0">
+                          <a:solidFill>
+                            <a:srgbClr val="1F2A37"/>
+                          </a:solidFill>
+                          <a:latin typeface="Calibri"/>
+                        </a:rPr>
+                        <a:t>Watch out for</a:t>
+                      </a:r>
+                    </a:p>
+                  </a:txBody>
+                  <a:tcPr marL="63500" marR="63500" marT="12700" marB="12700" anchor="ctr">
+                    <a:solidFill>
+                      <a:srgbClr val="FFFFFF"/>
+                    </a:solidFill>
+                  </a:tcPr>
+                </a:tc>
+                <a:tc>
+                  <a:txBody>
+                    <a:bodyPr/>
+                    <a:lstStyle/>
+                    <a:p>
+                      <a:pPr algn="l"/>
+                      <a:r>
+                        <a:rPr sz="1050" b="0" i="0">
+                          <a:solidFill>
+                            <a:srgbClr val="1F2A37"/>
+                          </a:solidFill>
+                          <a:latin typeface="Calibri"/>
+                        </a:rPr>
+                        <a:t>1.0 proves nothing about
+the agent</a:t>
+                      </a:r>
+                    </a:p>
+                  </a:txBody>
+                  <a:tcPr marL="63500" marR="63500" marT="12700" marB="12700" anchor="ctr">
+                    <a:solidFill>
+                      <a:srgbClr val="FFFFFF"/>
+                    </a:solidFill>
+                  </a:tcPr>
+                </a:tc>
+                <a:tc>
+                  <a:txBody>
+                    <a:bodyPr/>
+                    <a:lstStyle/>
+                    <a:p>
+                      <a:pPr algn="l"/>
+                      <a:r>
+                        <a:rPr sz="1050" b="0" i="0">
+                          <a:solidFill>
+                            <a:srgbClr val="1F2A37"/>
+                          </a:solidFill>
+                          <a:latin typeface="Calibri"/>
+                        </a:rPr>
+                        <a:t>its user simulator is billed
+but NOT in our telemetry</a:t>
+                      </a:r>
+                    </a:p>
+                  </a:txBody>
+                  <a:tcPr marL="63500" marR="63500" marT="12700" marB="12700" anchor="ctr">
+                    <a:solidFill>
+                      <a:srgbClr val="FFFFFF"/>
+                    </a:solidFill>
+                  </a:tcPr>
+                </a:tc>
+                <a:tc>
+                  <a:txBody>
+                    <a:bodyPr/>
+                    <a:lstStyle/>
+                    <a:p>
+                      <a:pPr algn="l"/>
+                      <a:r>
+                        <a:rPr sz="1050" b="0" i="0">
+                          <a:solidFill>
+                            <a:srgbClr val="1F2A37"/>
+                          </a:solidFill>
+                          <a:latin typeface="Calibri"/>
+                        </a:rPr>
+                        <a:t>15 of 50 tasks time out, and a
+killed task leaves NO report row</a:t>
+                      </a:r>
+                    </a:p>
+                  </a:txBody>
+                  <a:tcPr marL="63500" marR="63500" marT="12700" marB="12700" anchor="ctr">
+                    <a:solidFill>
+                      <a:srgbClr val="FFFFFF"/>
+                    </a:solidFill>
+                  </a:tcPr>
+                </a:tc>
+              </a:tr>
+            </a:tbl>
+          </a:graphicData>
+        </a:graphic>
+      </p:graphicFrame>
       <p:sp>
         <p:nvSpPr>
           <p:cNvPr id="4" name="Rounded Rectangle 3"/>
@@ -8565,18 +9301,18 @@
         </p:nvSpPr>
         <p:spPr>
           <a:xfrm>
-            <a:off x="411480" y="2267712"/>
-            <a:ext cx="11338560" cy="914400"/>
+            <a:off x="411480" y="5623560"/>
+            <a:ext cx="11338560" cy="777240"/>
           </a:xfrm>
           <a:prstGeom prst="roundRect">
             <a:avLst/>
           </a:prstGeom>
           <a:solidFill>
-            <a:srgbClr val="FBEEE4"/>
+            <a:srgbClr val="EEEFF1"/>
           </a:solidFill>
           <a:ln w="12700">
             <a:solidFill>
-              <a:srgbClr val="B55A2E"/>
+              <a:srgbClr val="6B6B6B"/>
             </a:solidFill>
           </a:ln>
           <a:effectLst/>
@@ -8596,238 +9332,25 @@
           </a:fontRef>
         </p:style>
         <p:txBody>
-          <a:bodyPr rtlCol="0" anchor="t" wrap="square" tIns="76200" bIns="25400" lIns="177800" rIns="177800"/>
+          <a:bodyPr rtlCol="0" anchor="ctr" wrap="square" tIns="25400" bIns="25400" lIns="228600" rIns="228600"/>
           <a:lstStyle/>
           <a:p>
-            <a:pPr algn="l"/>
-            <a:r>
-              <a:rPr sz="1300" b="1" i="0">
+            <a:pPr algn="ctr"/>
+            <a:r>
+              <a:rPr sz="1200" b="0" i="0">
                 <a:solidFill>
                   <a:srgbClr val="1F2A37"/>
                 </a:solidFill>
                 <a:latin typeface="Calibri"/>
               </a:rPr>
-              <a:t>2.  The llm column changed meaning between agent versions — never compare across it</a:t>
-            </a:r>
-          </a:p>
-          <a:p>
-            <a:pPr algn="l"/>
-            <a:r>
-              <a:rPr sz="1100" b="0" i="0">
-                <a:solidFill>
-                  <a:srgbClr val="3A4654"/>
-                </a:solidFill>
-                <a:latin typeface="Calibri"/>
-              </a:rPr>
-              <a:t>Agents up to exgentic 0.3.5.dev131 issued a max_tokens=1 capability probe counted as a chat span, so THEIR llm=2 on gsm8k means ONE real call. From dev145 the probe is an unbilled GET /v1/models that emits no span — verified absent across all 1,895 chat spans of these two matrices. Current runs count real calls 1:1, with no offset to subtract.</a:t>
+              <a:t>gsm8k is a SMOKE TEST WITH A SCORE — reading its 0.97 as a model measurement is the most common misreading of these numbers.  tau2 is the only rung that discriminates, and it fails informatively: a wrong answer, a policy violation and a dropped thread are different failures.  appworld earns its place precisely BECAUSE it fails — it is the only leg that has ever exposed a timeout, a context limit or a cache effect before a user did.</a:t>
             </a:r>
           </a:p>
         </p:txBody>
       </p:sp>
       <p:sp>
         <p:nvSpPr>
-          <p:cNvPr id="5" name="Rounded Rectangle 4"/>
-          <p:cNvSpPr/>
-          <p:nvPr/>
-        </p:nvSpPr>
-        <p:spPr>
-          <a:xfrm>
-            <a:off x="411480" y="3328416"/>
-            <a:ext cx="11338560" cy="914400"/>
-          </a:xfrm>
-          <a:prstGeom prst="roundRect">
-            <a:avLst/>
-          </a:prstGeom>
-          <a:solidFill>
-            <a:srgbClr val="FBEEE4"/>
-          </a:solidFill>
-          <a:ln w="12700">
-            <a:solidFill>
-              <a:srgbClr val="B55A2E"/>
-            </a:solidFill>
-          </a:ln>
-          <a:effectLst/>
-        </p:spPr>
-        <p:style>
-          <a:lnRef idx="1">
-            <a:schemeClr val="accent1"/>
-          </a:lnRef>
-          <a:fillRef idx="3">
-            <a:schemeClr val="accent1"/>
-          </a:fillRef>
-          <a:effectRef idx="2">
-            <a:schemeClr val="accent1"/>
-          </a:effectRef>
-          <a:fontRef idx="minor">
-            <a:schemeClr val="lt1"/>
-          </a:fontRef>
-        </p:style>
-        <p:txBody>
-          <a:bodyPr rtlCol="0" anchor="t" wrap="square" tIns="76200" bIns="25400" lIns="177800" rIns="177800"/>
-          <a:lstStyle/>
-          <a:p>
-            <a:pPr algn="l"/>
-            <a:r>
-              <a:rPr sz="1300" b="1" i="0">
-                <a:solidFill>
-                  <a:srgbClr val="1F2A37"/>
-                </a:solidFill>
-                <a:latin typeface="Calibri"/>
-              </a:rPr>
-              <a:t>3.  Implausibly small tokens = lost telemetry, and tokens == 0 will not catch it</a:t>
-            </a:r>
-          </a:p>
-          <a:p>
-            <a:pPr algn="l"/>
-            <a:r>
-              <a:rPr sz="1100" b="0" i="0">
-                <a:solidFill>
-                  <a:srgbClr val="3A4654"/>
-                </a:solidFill>
-                <a:latin typeface="Calibri"/>
-              </a:rPr>
-              <a:t>Use the structural test: llm &lt;= 1 with tool &gt;= 2 is impossible, since each tool call needs a preceding model turn. A zero-check misses the cases that matter — while the probe existed it was the span that SURVIVED the loss, carrying 8/1 on claude-sonnet-5 and 1/0 on gemini. The structural pair holds across agent versions; it is what the generators use.</a:t>
-            </a:r>
-          </a:p>
-        </p:txBody>
-      </p:sp>
-      <p:sp>
-        <p:nvSpPr>
-          <p:cNvPr id="6" name="Rounded Rectangle 5"/>
-          <p:cNvSpPr/>
-          <p:nvPr/>
-        </p:nvSpPr>
-        <p:spPr>
-          <a:xfrm>
-            <a:off x="411480" y="4389120"/>
-            <a:ext cx="11338560" cy="914400"/>
-          </a:xfrm>
-          <a:prstGeom prst="roundRect">
-            <a:avLst/>
-          </a:prstGeom>
-          <a:solidFill>
-            <a:srgbClr val="FBEEE4"/>
-          </a:solidFill>
-          <a:ln w="12700">
-            <a:solidFill>
-              <a:srgbClr val="B55A2E"/>
-            </a:solidFill>
-          </a:ln>
-          <a:effectLst/>
-        </p:spPr>
-        <p:style>
-          <a:lnRef idx="1">
-            <a:schemeClr val="accent1"/>
-          </a:lnRef>
-          <a:fillRef idx="3">
-            <a:schemeClr val="accent1"/>
-          </a:fillRef>
-          <a:effectRef idx="2">
-            <a:schemeClr val="accent1"/>
-          </a:effectRef>
-          <a:fontRef idx="minor">
-            <a:schemeClr val="lt1"/>
-          </a:fontRef>
-        </p:style>
-        <p:txBody>
-          <a:bodyPr rtlCol="0" anchor="t" wrap="square" tIns="76200" bIns="25400" lIns="177800" rIns="177800"/>
-          <a:lstStyle/>
-          <a:p>
-            <a:pPr algn="l"/>
-            <a:r>
-              <a:rPr sz="1300" b="1" i="0">
-                <a:solidFill>
-                  <a:srgbClr val="1F2A37"/>
-                </a:solidFill>
-                <a:latin typeface="Calibri"/>
-              </a:rPr>
-              <a:t>4.  Output varies MORE than input, in most runs</a:t>
-            </a:r>
-          </a:p>
-          <a:p>
-            <a:pPr algn="l"/>
-            <a:r>
-              <a:rPr sz="1100" b="0" i="0">
-                <a:solidFill>
-                  <a:srgbClr val="3A4654"/>
-                </a:solidFill>
-                <a:latin typeface="Calibri"/>
-              </a:rPr>
-              <a:t>Measured OUT CV &gt; IN CV in 15 of the 22 legs that ran more than one task. On a one-call model gsm8k's prompt is near-constant while answer length swings (IN 0.06-0.09 vs OUT 0.52-0.86); gpt-4.1 needs tool round-trips and varies on the input side too (IN 0.39-0.44). Only long-horizon appworld is input-led, in all four of its legs. Read the CV, not the mechanism.</a:t>
-            </a:r>
-          </a:p>
-        </p:txBody>
-      </p:sp>
-      <p:sp>
-        <p:nvSpPr>
-          <p:cNvPr id="7" name="Rounded Rectangle 6"/>
-          <p:cNvSpPr/>
-          <p:nvPr/>
-        </p:nvSpPr>
-        <p:spPr>
-          <a:xfrm>
-            <a:off x="411480" y="5449824"/>
-            <a:ext cx="11338560" cy="914400"/>
-          </a:xfrm>
-          <a:prstGeom prst="roundRect">
-            <a:avLst/>
-          </a:prstGeom>
-          <a:solidFill>
-            <a:srgbClr val="FBEEE4"/>
-          </a:solidFill>
-          <a:ln w="12700">
-            <a:solidFill>
-              <a:srgbClr val="B55A2E"/>
-            </a:solidFill>
-          </a:ln>
-          <a:effectLst/>
-        </p:spPr>
-        <p:style>
-          <a:lnRef idx="1">
-            <a:schemeClr val="accent1"/>
-          </a:lnRef>
-          <a:fillRef idx="3">
-            <a:schemeClr val="accent1"/>
-          </a:fillRef>
-          <a:effectRef idx="2">
-            <a:schemeClr val="accent1"/>
-          </a:effectRef>
-          <a:fontRef idx="minor">
-            <a:schemeClr val="lt1"/>
-          </a:fontRef>
-        </p:style>
-        <p:txBody>
-          <a:bodyPr rtlCol="0" anchor="t" wrap="square" tIns="76200" bIns="25400" lIns="177800" rIns="177800"/>
-          <a:lstStyle/>
-          <a:p>
-            <a:pPr algn="l"/>
-            <a:r>
-              <a:rPr sz="1300" b="1" i="0">
-                <a:solidFill>
-                  <a:srgbClr val="1F2A37"/>
-                </a:solidFill>
-                <a:latin typeface="Calibri"/>
-              </a:rPr>
-              <a:t>5.  Task selection is deterministic</a:t>
-            </a:r>
-          </a:p>
-          <a:p>
-            <a:pPr algn="l"/>
-            <a:r>
-              <a:rPr sz="1100" b="0" i="0">
-                <a:solidFill>
-                  <a:srgbClr val="3A4654"/>
-                </a:solidFill>
-                <a:latin typeface="Calibri"/>
-              </a:rPr>
-              <a:t>A run takes the first max_tasks tasks, so the same task_id is the same task across runs and clusters, and a smaller run is a prefix of a larger one. That is what makes cross-platform comparison like-for-like — six legs matched to the byte.</a:t>
-            </a:r>
-          </a:p>
-        </p:txBody>
-      </p:sp>
-      <p:sp>
-        <p:nvSpPr>
-          <p:cNvPr id="8" name="TextBox 7"/>
+          <p:cNvPr id="5" name="TextBox 4"/>
           <p:cNvSpPr txBox="1"/>
           <p:nvPr/>
         </p:nvSpPr>
@@ -8874,7 +9397,7 @@
 
 <file path=ppt/slides/slide16.xml><?xml version="1.0" encoding="utf-8"?>
 <p:sld xmlns:a="http://schemas.openxmlformats.org/drawingml/2006/main" xmlns:p="http://schemas.openxmlformats.org/presentationml/2006/main" xmlns:r="http://schemas.openxmlformats.org/officeDocument/2006/relationships">
-  <p:cSld name="7.4 Picking a Benchmark — and What That Leg Costs">
+  <p:cSld name="7.4 Reading the Numbers — Five Things That Mislead">
     <p:spTree>
       <p:nvGrpSpPr>
         <p:cNvPr id="1" name=""/>
@@ -8930,7 +9453,463 @@
                 </a:solidFill>
                 <a:latin typeface="Calibri"/>
               </a:rPr>
-              <a:t>7.4  Picking a Benchmark — and What That Leg Costs</a:t>
+              <a:t>7.4  Reading the Numbers — Five Things That Mislead</a:t>
+            </a:r>
+          </a:p>
+          <a:p>
+            <a:r>
+              <a:rPr sz="1400" b="0" i="0">
+                <a:solidFill>
+                  <a:srgbClr val="C9D9EC"/>
+                </a:solidFill>
+                <a:latin typeface="Calibri"/>
+              </a:rPr>
+              <a:t>Every one of these cost us a wrong conclusion first</a:t>
+            </a:r>
+          </a:p>
+        </p:txBody>
+      </p:sp>
+      <p:sp>
+        <p:nvSpPr>
+          <p:cNvPr id="3" name="Rounded Rectangle 2"/>
+          <p:cNvSpPr/>
+          <p:nvPr/>
+        </p:nvSpPr>
+        <p:spPr>
+          <a:xfrm>
+            <a:off x="411480" y="1207008"/>
+            <a:ext cx="11338560" cy="914400"/>
+          </a:xfrm>
+          <a:prstGeom prst="roundRect">
+            <a:avLst/>
+          </a:prstGeom>
+          <a:solidFill>
+            <a:srgbClr val="FBEEE4"/>
+          </a:solidFill>
+          <a:ln w="12700">
+            <a:solidFill>
+              <a:srgbClr val="B55A2E"/>
+            </a:solidFill>
+          </a:ln>
+          <a:effectLst/>
+        </p:spPr>
+        <p:style>
+          <a:lnRef idx="1">
+            <a:schemeClr val="accent1"/>
+          </a:lnRef>
+          <a:fillRef idx="3">
+            <a:schemeClr val="accent1"/>
+          </a:fillRef>
+          <a:effectRef idx="2">
+            <a:schemeClr val="accent1"/>
+          </a:effectRef>
+          <a:fontRef idx="minor">
+            <a:schemeClr val="lt1"/>
+          </a:fontRef>
+        </p:style>
+        <p:txBody>
+          <a:bodyPr rtlCol="0" anchor="t" wrap="square" tIns="76200" bIns="25400" lIns="177800" rIns="177800"/>
+          <a:lstStyle/>
+          <a:p>
+            <a:pPr algn="l"/>
+            <a:r>
+              <a:rPr sz="1300" b="1" i="0">
+                <a:solidFill>
+                  <a:srgbClr val="1F2A37"/>
+                </a:solidFill>
+                <a:latin typeface="Calibri"/>
+              </a:rPr>
+              <a:t>1.  pass_rate = evaluated_pass / total</a:t>
+            </a:r>
+          </a:p>
+          <a:p>
+            <a:pPr algn="l"/>
+            <a:r>
+              <a:rPr sz="1100" b="0" i="0">
+                <a:solidFill>
+                  <a:srgbClr val="3A4654"/>
+                </a:solidFill>
+                <a:latin typeface="Calibri"/>
+              </a:rPr>
+              <a:t>A task that ERRORS before evaluation counts as not passed, so a low rate can mean “failed the task” or “never got judged”. Check the error column too.</a:t>
+            </a:r>
+          </a:p>
+        </p:txBody>
+      </p:sp>
+      <p:sp>
+        <p:nvSpPr>
+          <p:cNvPr id="4" name="Rounded Rectangle 3"/>
+          <p:cNvSpPr/>
+          <p:nvPr/>
+        </p:nvSpPr>
+        <p:spPr>
+          <a:xfrm>
+            <a:off x="411480" y="2267712"/>
+            <a:ext cx="11338560" cy="914400"/>
+          </a:xfrm>
+          <a:prstGeom prst="roundRect">
+            <a:avLst/>
+          </a:prstGeom>
+          <a:solidFill>
+            <a:srgbClr val="FBEEE4"/>
+          </a:solidFill>
+          <a:ln w="12700">
+            <a:solidFill>
+              <a:srgbClr val="B55A2E"/>
+            </a:solidFill>
+          </a:ln>
+          <a:effectLst/>
+        </p:spPr>
+        <p:style>
+          <a:lnRef idx="1">
+            <a:schemeClr val="accent1"/>
+          </a:lnRef>
+          <a:fillRef idx="3">
+            <a:schemeClr val="accent1"/>
+          </a:fillRef>
+          <a:effectRef idx="2">
+            <a:schemeClr val="accent1"/>
+          </a:effectRef>
+          <a:fontRef idx="minor">
+            <a:schemeClr val="lt1"/>
+          </a:fontRef>
+        </p:style>
+        <p:txBody>
+          <a:bodyPr rtlCol="0" anchor="t" wrap="square" tIns="76200" bIns="25400" lIns="177800" rIns="177800"/>
+          <a:lstStyle/>
+          <a:p>
+            <a:pPr algn="l"/>
+            <a:r>
+              <a:rPr sz="1300" b="1" i="0">
+                <a:solidFill>
+                  <a:srgbClr val="1F2A37"/>
+                </a:solidFill>
+                <a:latin typeface="Calibri"/>
+              </a:rPr>
+              <a:t>2.  The llm column changed meaning between agent versions — never compare across it</a:t>
+            </a:r>
+          </a:p>
+          <a:p>
+            <a:pPr algn="l"/>
+            <a:r>
+              <a:rPr sz="1100" b="0" i="0">
+                <a:solidFill>
+                  <a:srgbClr val="3A4654"/>
+                </a:solidFill>
+                <a:latin typeface="Calibri"/>
+              </a:rPr>
+              <a:t>Agents up to exgentic 0.3.5.dev131 issued a max_tokens=1 capability probe counted as a chat span, so THEIR llm=2 on gsm8k means ONE real call. From dev145 the probe is an unbilled GET /v1/models that emits no span — verified absent across all 1,895 chat spans of these two matrices. Current runs count real calls 1:1, with no offset to subtract.</a:t>
+            </a:r>
+          </a:p>
+        </p:txBody>
+      </p:sp>
+      <p:sp>
+        <p:nvSpPr>
+          <p:cNvPr id="5" name="Rounded Rectangle 4"/>
+          <p:cNvSpPr/>
+          <p:nvPr/>
+        </p:nvSpPr>
+        <p:spPr>
+          <a:xfrm>
+            <a:off x="411480" y="3328416"/>
+            <a:ext cx="11338560" cy="914400"/>
+          </a:xfrm>
+          <a:prstGeom prst="roundRect">
+            <a:avLst/>
+          </a:prstGeom>
+          <a:solidFill>
+            <a:srgbClr val="FBEEE4"/>
+          </a:solidFill>
+          <a:ln w="12700">
+            <a:solidFill>
+              <a:srgbClr val="B55A2E"/>
+            </a:solidFill>
+          </a:ln>
+          <a:effectLst/>
+        </p:spPr>
+        <p:style>
+          <a:lnRef idx="1">
+            <a:schemeClr val="accent1"/>
+          </a:lnRef>
+          <a:fillRef idx="3">
+            <a:schemeClr val="accent1"/>
+          </a:fillRef>
+          <a:effectRef idx="2">
+            <a:schemeClr val="accent1"/>
+          </a:effectRef>
+          <a:fontRef idx="minor">
+            <a:schemeClr val="lt1"/>
+          </a:fontRef>
+        </p:style>
+        <p:txBody>
+          <a:bodyPr rtlCol="0" anchor="t" wrap="square" tIns="76200" bIns="25400" lIns="177800" rIns="177800"/>
+          <a:lstStyle/>
+          <a:p>
+            <a:pPr algn="l"/>
+            <a:r>
+              <a:rPr sz="1300" b="1" i="0">
+                <a:solidFill>
+                  <a:srgbClr val="1F2A37"/>
+                </a:solidFill>
+                <a:latin typeface="Calibri"/>
+              </a:rPr>
+              <a:t>3.  Implausibly small tokens = lost telemetry, and tokens == 0 will not catch it</a:t>
+            </a:r>
+          </a:p>
+          <a:p>
+            <a:pPr algn="l"/>
+            <a:r>
+              <a:rPr sz="1100" b="0" i="0">
+                <a:solidFill>
+                  <a:srgbClr val="3A4654"/>
+                </a:solidFill>
+                <a:latin typeface="Calibri"/>
+              </a:rPr>
+              <a:t>Use the structural test: llm &lt;= 1 with tool &gt;= 2 is impossible, since each tool call needs a preceding model turn. A zero-check misses the cases that matter — while the probe existed it was the span that SURVIVED the loss, carrying 8/1 on claude-sonnet-5 and 1/0 on gemini. The structural pair holds across agent versions; it is what the generators use.</a:t>
+            </a:r>
+          </a:p>
+        </p:txBody>
+      </p:sp>
+      <p:sp>
+        <p:nvSpPr>
+          <p:cNvPr id="6" name="Rounded Rectangle 5"/>
+          <p:cNvSpPr/>
+          <p:nvPr/>
+        </p:nvSpPr>
+        <p:spPr>
+          <a:xfrm>
+            <a:off x="411480" y="4389120"/>
+            <a:ext cx="11338560" cy="914400"/>
+          </a:xfrm>
+          <a:prstGeom prst="roundRect">
+            <a:avLst/>
+          </a:prstGeom>
+          <a:solidFill>
+            <a:srgbClr val="FBEEE4"/>
+          </a:solidFill>
+          <a:ln w="12700">
+            <a:solidFill>
+              <a:srgbClr val="B55A2E"/>
+            </a:solidFill>
+          </a:ln>
+          <a:effectLst/>
+        </p:spPr>
+        <p:style>
+          <a:lnRef idx="1">
+            <a:schemeClr val="accent1"/>
+          </a:lnRef>
+          <a:fillRef idx="3">
+            <a:schemeClr val="accent1"/>
+          </a:fillRef>
+          <a:effectRef idx="2">
+            <a:schemeClr val="accent1"/>
+          </a:effectRef>
+          <a:fontRef idx="minor">
+            <a:schemeClr val="lt1"/>
+          </a:fontRef>
+        </p:style>
+        <p:txBody>
+          <a:bodyPr rtlCol="0" anchor="t" wrap="square" tIns="76200" bIns="25400" lIns="177800" rIns="177800"/>
+          <a:lstStyle/>
+          <a:p>
+            <a:pPr algn="l"/>
+            <a:r>
+              <a:rPr sz="1300" b="1" i="0">
+                <a:solidFill>
+                  <a:srgbClr val="1F2A37"/>
+                </a:solidFill>
+                <a:latin typeface="Calibri"/>
+              </a:rPr>
+              <a:t>4.  Output varies MORE than input, in most runs</a:t>
+            </a:r>
+          </a:p>
+          <a:p>
+            <a:pPr algn="l"/>
+            <a:r>
+              <a:rPr sz="1100" b="0" i="0">
+                <a:solidFill>
+                  <a:srgbClr val="3A4654"/>
+                </a:solidFill>
+                <a:latin typeface="Calibri"/>
+              </a:rPr>
+              <a:t>Measured OUT CV &gt; IN CV in 15 of the 22 legs that ran more than one task. On a one-call model gsm8k's prompt is near-constant while answer length swings (IN 0.06-0.09 vs OUT 0.52-0.86); gpt-4.1 needs tool round-trips and varies on the input side too (IN 0.39-0.44). Only long-horizon appworld is input-led, in all four of its legs. Read the CV, not the mechanism.</a:t>
+            </a:r>
+          </a:p>
+        </p:txBody>
+      </p:sp>
+      <p:sp>
+        <p:nvSpPr>
+          <p:cNvPr id="7" name="Rounded Rectangle 6"/>
+          <p:cNvSpPr/>
+          <p:nvPr/>
+        </p:nvSpPr>
+        <p:spPr>
+          <a:xfrm>
+            <a:off x="411480" y="5449824"/>
+            <a:ext cx="11338560" cy="914400"/>
+          </a:xfrm>
+          <a:prstGeom prst="roundRect">
+            <a:avLst/>
+          </a:prstGeom>
+          <a:solidFill>
+            <a:srgbClr val="FBEEE4"/>
+          </a:solidFill>
+          <a:ln w="12700">
+            <a:solidFill>
+              <a:srgbClr val="B55A2E"/>
+            </a:solidFill>
+          </a:ln>
+          <a:effectLst/>
+        </p:spPr>
+        <p:style>
+          <a:lnRef idx="1">
+            <a:schemeClr val="accent1"/>
+          </a:lnRef>
+          <a:fillRef idx="3">
+            <a:schemeClr val="accent1"/>
+          </a:fillRef>
+          <a:effectRef idx="2">
+            <a:schemeClr val="accent1"/>
+          </a:effectRef>
+          <a:fontRef idx="minor">
+            <a:schemeClr val="lt1"/>
+          </a:fontRef>
+        </p:style>
+        <p:txBody>
+          <a:bodyPr rtlCol="0" anchor="t" wrap="square" tIns="76200" bIns="25400" lIns="177800" rIns="177800"/>
+          <a:lstStyle/>
+          <a:p>
+            <a:pPr algn="l"/>
+            <a:r>
+              <a:rPr sz="1300" b="1" i="0">
+                <a:solidFill>
+                  <a:srgbClr val="1F2A37"/>
+                </a:solidFill>
+                <a:latin typeface="Calibri"/>
+              </a:rPr>
+              <a:t>5.  Task selection is deterministic</a:t>
+            </a:r>
+          </a:p>
+          <a:p>
+            <a:pPr algn="l"/>
+            <a:r>
+              <a:rPr sz="1100" b="0" i="0">
+                <a:solidFill>
+                  <a:srgbClr val="3A4654"/>
+                </a:solidFill>
+                <a:latin typeface="Calibri"/>
+              </a:rPr>
+              <a:t>A run takes the first max_tasks tasks, so the same task_id is the same task across runs and clusters, and a smaller run is a prefix of a larger one. That is what makes cross-platform comparison like-for-like — six legs matched to the byte.</a:t>
+            </a:r>
+          </a:p>
+        </p:txBody>
+      </p:sp>
+      <p:sp>
+        <p:nvSpPr>
+          <p:cNvPr id="8" name="TextBox 7"/>
+          <p:cNvSpPr txBox="1"/>
+          <p:nvPr/>
+        </p:nvSpPr>
+        <p:spPr>
+          <a:xfrm>
+            <a:off x="11795760" y="6437376"/>
+            <a:ext cx="320040" cy="310896"/>
+          </a:xfrm>
+          <a:prstGeom prst="rect">
+            <a:avLst/>
+          </a:prstGeom>
+          <a:noFill/>
+        </p:spPr>
+        <p:txBody>
+          <a:bodyPr wrap="none" anchor="ctr" lIns="0" rIns="0" tIns="0" bIns="0">
+            <a:spAutoFit/>
+          </a:bodyPr>
+          <a:lstStyle/>
+          <a:p>
+            <a:pPr algn="r">
+              <a:spcAft>
+                <a:spcPts val="300"/>
+              </a:spcAft>
+            </a:pPr>
+            <a:r>
+              <a:rPr sz="1200" b="0" i="0">
+                <a:solidFill>
+                  <a:srgbClr val="6B6B6B"/>
+                </a:solidFill>
+                <a:latin typeface="Calibri"/>
+              </a:rPr>
+              <a:t>16</a:t>
+            </a:r>
+          </a:p>
+        </p:txBody>
+      </p:sp>
+    </p:spTree>
+  </p:cSld>
+  <p:clrMapOvr>
+    <a:masterClrMapping/>
+  </p:clrMapOvr>
+</p:sld>
+</file>
+
+<file path=ppt/slides/slide17.xml><?xml version="1.0" encoding="utf-8"?>
+<p:sld xmlns:a="http://schemas.openxmlformats.org/drawingml/2006/main" xmlns:p="http://schemas.openxmlformats.org/presentationml/2006/main" xmlns:r="http://schemas.openxmlformats.org/officeDocument/2006/relationships">
+  <p:cSld name="7.5 Picking a Benchmark — and What That Leg Costs">
+    <p:spTree>
+      <p:nvGrpSpPr>
+        <p:cNvPr id="1" name=""/>
+        <p:cNvGrpSpPr/>
+        <p:nvPr/>
+      </p:nvGrpSpPr>
+      <p:grpSpPr/>
+      <p:sp>
+        <p:nvSpPr>
+          <p:cNvPr id="2" name="Rectangle 1"/>
+          <p:cNvSpPr/>
+          <p:nvPr/>
+        </p:nvSpPr>
+        <p:spPr>
+          <a:xfrm>
+            <a:off x="0" y="0"/>
+            <a:ext cx="12192000" cy="950000"/>
+          </a:xfrm>
+          <a:prstGeom prst="rect">
+            <a:avLst/>
+          </a:prstGeom>
+          <a:solidFill>
+            <a:srgbClr val="1B3A5C"/>
+          </a:solidFill>
+          <a:ln>
+            <a:noFill/>
+          </a:ln>
+          <a:effectLst/>
+        </p:spPr>
+        <p:style>
+          <a:lnRef idx="1">
+            <a:schemeClr val="accent1"/>
+          </a:lnRef>
+          <a:fillRef idx="3">
+            <a:schemeClr val="accent1"/>
+          </a:fillRef>
+          <a:effectRef idx="2">
+            <a:schemeClr val="accent1"/>
+          </a:effectRef>
+          <a:fontRef idx="minor">
+            <a:schemeClr val="lt1"/>
+          </a:fontRef>
+        </p:style>
+        <p:txBody>
+          <a:bodyPr rtlCol="0" anchor="ctr" lIns="355600"/>
+          <a:lstStyle/>
+          <a:p>
+            <a:pPr algn="ctr"/>
+            <a:r>
+              <a:rPr sz="2600" b="1" i="0">
+                <a:solidFill>
+                  <a:srgbClr val="FFFFFF"/>
+                </a:solidFill>
+                <a:latin typeface="Calibri"/>
+              </a:rPr>
+              <a:t>7.5  Picking a Benchmark — and What That Leg Costs</a:t>
             </a:r>
           </a:p>
           <a:p>
@@ -10665,7 +11644,7 @@
                 </a:solidFill>
                 <a:latin typeface="Calibri"/>
               </a:rPr>
-              <a:t>And the totals UNDERSTATE it three ways:  a task killed by the per-task timeout burns tokens but leaves no report row, so appworld's 15 timed-out tasks are missing from the numbers above.  tau2's user simulator runs in the MCP pod, which is not instrumented — its inference is billed by the gateway and counted nowhere here.  And a leg that replays the gateway's completion cache re-reports stored usage for calls that were never made upstream.  7.6 puts a dollar figure on the fourth: the IBAC judge, which the agent's spans never see.</a:t>
+              <a:t>And the totals UNDERSTATE it three ways:  a task killed by the per-task timeout burns tokens but leaves no report row, so appworld's 15 timed-out tasks are missing from the numbers above.  tau2's user simulator runs in the MCP pod, which is not instrumented — its inference is billed by the gateway and counted nowhere here.  And a leg that replays the gateway's completion cache re-reports stored usage for calls that were never made upstream.  7.7 puts a dollar figure on the fourth: the IBAC judge, which the agent's spans never see.</a:t>
             </a:r>
           </a:p>
         </p:txBody>
@@ -10704,7 +11683,7 @@
                 </a:solidFill>
                 <a:latin typeface="Calibri"/>
               </a:rPr>
-              <a:t>16</a:t>
+              <a:t>17</a:t>
             </a:r>
           </a:p>
         </p:txBody>
@@ -10717,9 +11696,9 @@
 </p:sld>
 </file>
 
-<file path=ppt/slides/slide17.xml><?xml version="1.0" encoding="utf-8"?>
+<file path=ppt/slides/slide18.xml><?xml version="1.0" encoding="utf-8"?>
 <p:sld xmlns:a="http://schemas.openxmlformats.org/drawingml/2006/main" xmlns:p="http://schemas.openxmlformats.org/presentationml/2006/main" xmlns:r="http://schemas.openxmlformats.org/officeDocument/2006/relationships">
-  <p:cSld name="7.5 The Cost Model — Tokens, Models, Money">
+  <p:cSld name="7.6 The Cost Model — Tokens, Models, Money">
     <p:spTree>
       <p:nvGrpSpPr>
         <p:cNvPr id="1" name=""/>
@@ -10775,7 +11754,7 @@
                 </a:solidFill>
                 <a:latin typeface="Calibri"/>
               </a:rPr>
-              <a:t>7.5  The Cost Model — Tokens, Models, Money</a:t>
+              <a:t>7.6  The Cost Model — Tokens, Models, Money</a:t>
             </a:r>
           </a:p>
           <a:p>
@@ -13003,7 +13982,7 @@
                 </a:solidFill>
                 <a:latin typeface="Calibri"/>
               </a:rPr>
-              <a:t>17</a:t>
+              <a:t>18</a:t>
             </a:r>
           </a:p>
         </p:txBody>
@@ -13016,9 +13995,9 @@
 </p:sld>
 </file>
 
-<file path=ppt/slides/slide18.xml><?xml version="1.0" encoding="utf-8"?>
+<file path=ppt/slides/slide19.xml><?xml version="1.0" encoding="utf-8"?>
 <p:sld xmlns:a="http://schemas.openxmlformats.org/drawingml/2006/main" xmlns:p="http://schemas.openxmlformats.org/presentationml/2006/main" xmlns:r="http://schemas.openxmlformats.org/officeDocument/2006/relationships">
-  <p:cSld name="7.6 The Rate Card — and Which Way the Dollars Are Wrong">
+  <p:cSld name="7.7 The Rate Card — and Which Way the Dollars Are Wrong">
     <p:spTree>
       <p:nvGrpSpPr>
         <p:cNvPr id="1" name=""/>
@@ -13074,7 +14053,7 @@
                 </a:solidFill>
                 <a:latin typeface="Calibri"/>
               </a:rPr>
-              <a:t>7.6  The Rate Card — and Which Way the Dollars Are Wrong</a:t>
+              <a:t>7.7  The Rate Card — and Which Way the Dollars Are Wrong</a:t>
             </a:r>
           </a:p>
           <a:p>
@@ -14055,7 +15034,7 @@
                 </a:solidFill>
                 <a:latin typeface="Calibri"/>
               </a:rPr>
-              <a:t>18</a:t>
+              <a:t>19</a:t>
             </a:r>
           </a:p>
         </p:txBody>
@@ -14068,9 +15047,9 @@
 </p:sld>
 </file>
 
-<file path=ppt/slides/slide19.xml><?xml version="1.0" encoding="utf-8"?>
+<file path=ppt/slides/slide2.xml><?xml version="1.0" encoding="utf-8"?>
 <p:sld xmlns:a="http://schemas.openxmlformats.org/drawingml/2006/main" xmlns:p="http://schemas.openxmlformats.org/presentationml/2006/main" xmlns:r="http://schemas.openxmlformats.org/officeDocument/2006/relationships">
-  <p:cSld name="7.7 Token- and Cost-Efficiency — Where the Money Actually Goes">
+  <p:cSld name="Agenda">
     <p:spTree>
       <p:nvGrpSpPr>
         <p:cNvPr id="1" name=""/>
@@ -14126,7 +15105,7 @@
                 </a:solidFill>
                 <a:latin typeface="Calibri"/>
               </a:rPr>
-              <a:t>7.7  Token- and Cost-Efficiency — Where the Money Actually Goes</a:t>
+              <a:t>Agenda</a:t>
             </a:r>
           </a:p>
           <a:p>
@@ -14137,7 +15116,1494 @@
                 </a:solidFill>
                 <a:latin typeface="Calibri"/>
               </a:rPr>
-              <a:t>Measured on the v1.28 pair (267 task rows) at the rate card in 7.6 — one take-away per figure</a:t>
+              <a:t>What this deck covers, in order</a:t>
+            </a:r>
+          </a:p>
+        </p:txBody>
+      </p:sp>
+      <p:sp>
+        <p:nvSpPr>
+          <p:cNvPr id="3" name="Oval 2"/>
+          <p:cNvSpPr/>
+          <p:nvPr/>
+        </p:nvSpPr>
+        <p:spPr>
+          <a:xfrm>
+            <a:off x="685800" y="1353312"/>
+            <a:ext cx="420624" cy="420624"/>
+          </a:xfrm>
+          <a:prstGeom prst="ellipse">
+            <a:avLst/>
+          </a:prstGeom>
+          <a:solidFill>
+            <a:srgbClr val="E87A1E"/>
+          </a:solidFill>
+          <a:ln w="15875">
+            <a:solidFill>
+              <a:srgbClr val="FFFFFF"/>
+            </a:solidFill>
+          </a:ln>
+          <a:effectLst/>
+        </p:spPr>
+        <p:style>
+          <a:lnRef idx="1">
+            <a:schemeClr val="accent1"/>
+          </a:lnRef>
+          <a:fillRef idx="3">
+            <a:schemeClr val="accent1"/>
+          </a:fillRef>
+          <a:effectRef idx="2">
+            <a:schemeClr val="accent1"/>
+          </a:effectRef>
+          <a:fontRef idx="minor">
+            <a:schemeClr val="lt1"/>
+          </a:fontRef>
+        </p:style>
+        <p:txBody>
+          <a:bodyPr rtlCol="0" anchor="ctr" lIns="0" rIns="0" tIns="0" bIns="0"/>
+          <a:lstStyle/>
+          <a:p>
+            <a:pPr algn="ctr"/>
+            <a:r>
+              <a:rPr sz="1400" b="1" i="0">
+                <a:solidFill>
+                  <a:srgbClr val="FFFFFF"/>
+                </a:solidFill>
+                <a:latin typeface="Calibri"/>
+              </a:rPr>
+              <a:t>1</a:t>
+            </a:r>
+          </a:p>
+        </p:txBody>
+      </p:sp>
+      <p:sp>
+        <p:nvSpPr>
+          <p:cNvPr id="4" name="TextBox 3"/>
+          <p:cNvSpPr txBox="1"/>
+          <p:nvPr/>
+        </p:nvSpPr>
+        <p:spPr>
+          <a:xfrm>
+            <a:off x="1280160" y="1298448"/>
+            <a:ext cx="4526280" cy="292608"/>
+          </a:xfrm>
+          <a:prstGeom prst="rect">
+            <a:avLst/>
+          </a:prstGeom>
+          <a:noFill/>
+        </p:spPr>
+        <p:txBody>
+          <a:bodyPr wrap="square" anchor="t">
+            <a:spAutoFit/>
+          </a:bodyPr>
+          <a:lstStyle/>
+          <a:p>
+            <a:pPr algn="l">
+              <a:spcAft>
+                <a:spcPts val="300"/>
+              </a:spcAft>
+            </a:pPr>
+            <a:r>
+              <a:rPr sz="1700" b="1" i="0">
+                <a:solidFill>
+                  <a:srgbClr val="1B3A5C"/>
+                </a:solidFill>
+                <a:latin typeface="Calibri"/>
+              </a:rPr>
+              <a:t>Overview &amp; key design decisions</a:t>
+            </a:r>
+          </a:p>
+        </p:txBody>
+      </p:sp>
+      <p:sp>
+        <p:nvSpPr>
+          <p:cNvPr id="5" name="TextBox 4"/>
+          <p:cNvSpPr txBox="1"/>
+          <p:nvPr/>
+        </p:nvSpPr>
+        <p:spPr>
+          <a:xfrm>
+            <a:off x="1280160" y="1600200"/>
+            <a:ext cx="4526280" cy="457200"/>
+          </a:xfrm>
+          <a:prstGeom prst="rect">
+            <a:avLst/>
+          </a:prstGeom>
+          <a:noFill/>
+        </p:spPr>
+        <p:txBody>
+          <a:bodyPr wrap="square" anchor="t">
+            <a:spAutoFit/>
+          </a:bodyPr>
+          <a:lstStyle/>
+          <a:p>
+            <a:pPr algn="l">
+              <a:spcAft>
+                <a:spcPts val="300"/>
+              </a:spcAft>
+            </a:pPr>
+            <a:r>
+              <a:rPr sz="1250" b="0" i="0">
+                <a:solidFill>
+                  <a:srgbClr val="3A4654"/>
+                </a:solidFill>
+                <a:latin typeface="Calibri"/>
+              </a:rPr>
+              <a:t>what the Service is, and the seven choices that shape it</a:t>
+            </a:r>
+          </a:p>
+        </p:txBody>
+      </p:sp>
+      <p:sp>
+        <p:nvSpPr>
+          <p:cNvPr id="6" name="Oval 5"/>
+          <p:cNvSpPr/>
+          <p:nvPr/>
+        </p:nvSpPr>
+        <p:spPr>
+          <a:xfrm>
+            <a:off x="685800" y="2304288"/>
+            <a:ext cx="420624" cy="420624"/>
+          </a:xfrm>
+          <a:prstGeom prst="ellipse">
+            <a:avLst/>
+          </a:prstGeom>
+          <a:solidFill>
+            <a:srgbClr val="E87A1E"/>
+          </a:solidFill>
+          <a:ln w="15875">
+            <a:solidFill>
+              <a:srgbClr val="FFFFFF"/>
+            </a:solidFill>
+          </a:ln>
+          <a:effectLst/>
+        </p:spPr>
+        <p:style>
+          <a:lnRef idx="1">
+            <a:schemeClr val="accent1"/>
+          </a:lnRef>
+          <a:fillRef idx="3">
+            <a:schemeClr val="accent1"/>
+          </a:fillRef>
+          <a:effectRef idx="2">
+            <a:schemeClr val="accent1"/>
+          </a:effectRef>
+          <a:fontRef idx="minor">
+            <a:schemeClr val="lt1"/>
+          </a:fontRef>
+        </p:style>
+        <p:txBody>
+          <a:bodyPr rtlCol="0" anchor="ctr" lIns="0" rIns="0" tIns="0" bIns="0"/>
+          <a:lstStyle/>
+          <a:p>
+            <a:pPr algn="ctr"/>
+            <a:r>
+              <a:rPr sz="1400" b="1" i="0">
+                <a:solidFill>
+                  <a:srgbClr val="FFFFFF"/>
+                </a:solidFill>
+                <a:latin typeface="Calibri"/>
+              </a:rPr>
+              <a:t>2</a:t>
+            </a:r>
+          </a:p>
+        </p:txBody>
+      </p:sp>
+      <p:sp>
+        <p:nvSpPr>
+          <p:cNvPr id="7" name="TextBox 6"/>
+          <p:cNvSpPr txBox="1"/>
+          <p:nvPr/>
+        </p:nvSpPr>
+        <p:spPr>
+          <a:xfrm>
+            <a:off x="1280160" y="2249424"/>
+            <a:ext cx="4526280" cy="292608"/>
+          </a:xfrm>
+          <a:prstGeom prst="rect">
+            <a:avLst/>
+          </a:prstGeom>
+          <a:noFill/>
+        </p:spPr>
+        <p:txBody>
+          <a:bodyPr wrap="square" anchor="t">
+            <a:spAutoFit/>
+          </a:bodyPr>
+          <a:lstStyle/>
+          <a:p>
+            <a:pPr algn="l">
+              <a:spcAft>
+                <a:spcPts val="300"/>
+              </a:spcAft>
+            </a:pPr>
+            <a:r>
+              <a:rPr sz="1700" b="1" i="0">
+                <a:solidFill>
+                  <a:srgbClr val="1B3A5C"/>
+                </a:solidFill>
+                <a:latin typeface="Calibri"/>
+              </a:rPr>
+              <a:t>Auto-benchmarking design motif</a:t>
+            </a:r>
+          </a:p>
+        </p:txBody>
+      </p:sp>
+      <p:sp>
+        <p:nvSpPr>
+          <p:cNvPr id="8" name="TextBox 7"/>
+          <p:cNvSpPr txBox="1"/>
+          <p:nvPr/>
+        </p:nvSpPr>
+        <p:spPr>
+          <a:xfrm>
+            <a:off x="1280160" y="2551176"/>
+            <a:ext cx="4526280" cy="457200"/>
+          </a:xfrm>
+          <a:prstGeom prst="rect">
+            <a:avLst/>
+          </a:prstGeom>
+          <a:noFill/>
+        </p:spPr>
+        <p:txBody>
+          <a:bodyPr wrap="square" anchor="t">
+            <a:spAutoFit/>
+          </a:bodyPr>
+          <a:lstStyle/>
+          <a:p>
+            <a:pPr algn="l">
+              <a:spcAft>
+                <a:spcPts val="300"/>
+              </a:spcAft>
+            </a:pPr>
+            <a:r>
+              <a:rPr sz="1250" b="0" i="0">
+                <a:solidFill>
+                  <a:srgbClr val="3A4654"/>
+                </a:solidFill>
+                <a:latin typeface="Calibri"/>
+              </a:rPr>
+              <a:t>the shape of the system, before the wiring detail</a:t>
+            </a:r>
+          </a:p>
+        </p:txBody>
+      </p:sp>
+      <p:sp>
+        <p:nvSpPr>
+          <p:cNvPr id="9" name="Oval 8"/>
+          <p:cNvSpPr/>
+          <p:nvPr/>
+        </p:nvSpPr>
+        <p:spPr>
+          <a:xfrm>
+            <a:off x="685800" y="3255264"/>
+            <a:ext cx="420624" cy="420624"/>
+          </a:xfrm>
+          <a:prstGeom prst="ellipse">
+            <a:avLst/>
+          </a:prstGeom>
+          <a:solidFill>
+            <a:srgbClr val="E87A1E"/>
+          </a:solidFill>
+          <a:ln w="15875">
+            <a:solidFill>
+              <a:srgbClr val="FFFFFF"/>
+            </a:solidFill>
+          </a:ln>
+          <a:effectLst/>
+        </p:spPr>
+        <p:style>
+          <a:lnRef idx="1">
+            <a:schemeClr val="accent1"/>
+          </a:lnRef>
+          <a:fillRef idx="3">
+            <a:schemeClr val="accent1"/>
+          </a:fillRef>
+          <a:effectRef idx="2">
+            <a:schemeClr val="accent1"/>
+          </a:effectRef>
+          <a:fontRef idx="minor">
+            <a:schemeClr val="lt1"/>
+          </a:fontRef>
+        </p:style>
+        <p:txBody>
+          <a:bodyPr rtlCol="0" anchor="ctr" lIns="0" rIns="0" tIns="0" bIns="0"/>
+          <a:lstStyle/>
+          <a:p>
+            <a:pPr algn="ctr"/>
+            <a:r>
+              <a:rPr sz="1400" b="1" i="0">
+                <a:solidFill>
+                  <a:srgbClr val="FFFFFF"/>
+                </a:solidFill>
+                <a:latin typeface="Calibri"/>
+              </a:rPr>
+              <a:t>3</a:t>
+            </a:r>
+          </a:p>
+        </p:txBody>
+      </p:sp>
+      <p:sp>
+        <p:nvSpPr>
+          <p:cNvPr id="10" name="TextBox 9"/>
+          <p:cNvSpPr txBox="1"/>
+          <p:nvPr/>
+        </p:nvSpPr>
+        <p:spPr>
+          <a:xfrm>
+            <a:off x="1280160" y="3200400"/>
+            <a:ext cx="4526280" cy="292608"/>
+          </a:xfrm>
+          <a:prstGeom prst="rect">
+            <a:avLst/>
+          </a:prstGeom>
+          <a:noFill/>
+        </p:spPr>
+        <p:txBody>
+          <a:bodyPr wrap="square" anchor="t">
+            <a:spAutoFit/>
+          </a:bodyPr>
+          <a:lstStyle/>
+          <a:p>
+            <a:pPr algn="l">
+              <a:spcAft>
+                <a:spcPts val="300"/>
+              </a:spcAft>
+            </a:pPr>
+            <a:r>
+              <a:rPr sz="1700" b="1" i="0">
+                <a:solidFill>
+                  <a:srgbClr val="1B3A5C"/>
+                </a:solidFill>
+                <a:latin typeface="Calibri"/>
+              </a:rPr>
+              <a:t>Architecture</a:t>
+            </a:r>
+          </a:p>
+        </p:txBody>
+      </p:sp>
+      <p:sp>
+        <p:nvSpPr>
+          <p:cNvPr id="11" name="TextBox 10"/>
+          <p:cNvSpPr txBox="1"/>
+          <p:nvPr/>
+        </p:nvSpPr>
+        <p:spPr>
+          <a:xfrm>
+            <a:off x="1280160" y="3502152"/>
+            <a:ext cx="4526280" cy="457200"/>
+          </a:xfrm>
+          <a:prstGeom prst="rect">
+            <a:avLst/>
+          </a:prstGeom>
+          <a:noFill/>
+        </p:spPr>
+        <p:txBody>
+          <a:bodyPr wrap="square" anchor="t">
+            <a:spAutoFit/>
+          </a:bodyPr>
+          <a:lstStyle/>
+          <a:p>
+            <a:pPr algn="l">
+              <a:spcAft>
+                <a:spcPts val="300"/>
+              </a:spcAft>
+            </a:pPr>
+            <a:r>
+              <a:rPr sz="1250" b="0" i="0">
+                <a:solidFill>
+                  <a:srgbClr val="3A4654"/>
+                </a:solidFill>
+                <a:latin typeface="Calibri"/>
+              </a:rPr>
+              <a:t>client, Service, and the per-cluster instance selected by JWT iss</a:t>
+            </a:r>
+          </a:p>
+        </p:txBody>
+      </p:sp>
+      <p:sp>
+        <p:nvSpPr>
+          <p:cNvPr id="12" name="Oval 11"/>
+          <p:cNvSpPr/>
+          <p:nvPr/>
+        </p:nvSpPr>
+        <p:spPr>
+          <a:xfrm>
+            <a:off x="685800" y="4206240"/>
+            <a:ext cx="420624" cy="420624"/>
+          </a:xfrm>
+          <a:prstGeom prst="ellipse">
+            <a:avLst/>
+          </a:prstGeom>
+          <a:solidFill>
+            <a:srgbClr val="E87A1E"/>
+          </a:solidFill>
+          <a:ln w="15875">
+            <a:solidFill>
+              <a:srgbClr val="FFFFFF"/>
+            </a:solidFill>
+          </a:ln>
+          <a:effectLst/>
+        </p:spPr>
+        <p:style>
+          <a:lnRef idx="1">
+            <a:schemeClr val="accent1"/>
+          </a:lnRef>
+          <a:fillRef idx="3">
+            <a:schemeClr val="accent1"/>
+          </a:fillRef>
+          <a:effectRef idx="2">
+            <a:schemeClr val="accent1"/>
+          </a:effectRef>
+          <a:fontRef idx="minor">
+            <a:schemeClr val="lt1"/>
+          </a:fontRef>
+        </p:style>
+        <p:txBody>
+          <a:bodyPr rtlCol="0" anchor="ctr" lIns="0" rIns="0" tIns="0" bIns="0"/>
+          <a:lstStyle/>
+          <a:p>
+            <a:pPr algn="ctr"/>
+            <a:r>
+              <a:rPr sz="1400" b="1" i="0">
+                <a:solidFill>
+                  <a:srgbClr val="FFFFFF"/>
+                </a:solidFill>
+                <a:latin typeface="Calibri"/>
+              </a:rPr>
+              <a:t>4</a:t>
+            </a:r>
+          </a:p>
+        </p:txBody>
+      </p:sp>
+      <p:sp>
+        <p:nvSpPr>
+          <p:cNvPr id="13" name="TextBox 12"/>
+          <p:cNvSpPr txBox="1"/>
+          <p:nvPr/>
+        </p:nvSpPr>
+        <p:spPr>
+          <a:xfrm>
+            <a:off x="1280160" y="4151376"/>
+            <a:ext cx="4526280" cy="292608"/>
+          </a:xfrm>
+          <a:prstGeom prst="rect">
+            <a:avLst/>
+          </a:prstGeom>
+          <a:noFill/>
+        </p:spPr>
+        <p:txBody>
+          <a:bodyPr wrap="square" anchor="t">
+            <a:spAutoFit/>
+          </a:bodyPr>
+          <a:lstStyle/>
+          <a:p>
+            <a:pPr algn="l">
+              <a:spcAft>
+                <a:spcPts val="300"/>
+              </a:spcAft>
+            </a:pPr>
+            <a:r>
+              <a:rPr sz="1700" b="1" i="0">
+                <a:solidFill>
+                  <a:srgbClr val="1B3A5C"/>
+                </a:solidFill>
+                <a:latin typeface="Calibri"/>
+              </a:rPr>
+              <a:t>Architecture with workload specific components</a:t>
+            </a:r>
+          </a:p>
+        </p:txBody>
+      </p:sp>
+      <p:sp>
+        <p:nvSpPr>
+          <p:cNvPr id="14" name="TextBox 13"/>
+          <p:cNvSpPr txBox="1"/>
+          <p:nvPr/>
+        </p:nvSpPr>
+        <p:spPr>
+          <a:xfrm>
+            <a:off x="1280160" y="4453128"/>
+            <a:ext cx="4526280" cy="457200"/>
+          </a:xfrm>
+          <a:prstGeom prst="rect">
+            <a:avLst/>
+          </a:prstGeom>
+          <a:noFill/>
+        </p:spPr>
+        <p:txBody>
+          <a:bodyPr wrap="square" anchor="t">
+            <a:spAutoFit/>
+          </a:bodyPr>
+          <a:lstStyle/>
+          <a:p>
+            <a:pPr algn="l">
+              <a:spcAft>
+                <a:spcPts val="300"/>
+              </a:spcAft>
+            </a:pPr>
+            <a:r>
+              <a:rPr sz="1250" b="0" i="0">
+                <a:solidFill>
+                  <a:srgbClr val="3A4654"/>
+                </a:solidFill>
+                <a:latin typeface="Calibri"/>
+              </a:rPr>
+              <a:t>4.1 inside the workload: sidecar, user simulator, IBAC judge · 4.2 how interception is wired</a:t>
+            </a:r>
+          </a:p>
+        </p:txBody>
+      </p:sp>
+      <p:sp>
+        <p:nvSpPr>
+          <p:cNvPr id="15" name="Oval 14"/>
+          <p:cNvSpPr/>
+          <p:nvPr/>
+        </p:nvSpPr>
+        <p:spPr>
+          <a:xfrm>
+            <a:off x="685800" y="5157216"/>
+            <a:ext cx="420624" cy="420624"/>
+          </a:xfrm>
+          <a:prstGeom prst="ellipse">
+            <a:avLst/>
+          </a:prstGeom>
+          <a:solidFill>
+            <a:srgbClr val="E87A1E"/>
+          </a:solidFill>
+          <a:ln w="15875">
+            <a:solidFill>
+              <a:srgbClr val="FFFFFF"/>
+            </a:solidFill>
+          </a:ln>
+          <a:effectLst/>
+        </p:spPr>
+        <p:style>
+          <a:lnRef idx="1">
+            <a:schemeClr val="accent1"/>
+          </a:lnRef>
+          <a:fillRef idx="3">
+            <a:schemeClr val="accent1"/>
+          </a:fillRef>
+          <a:effectRef idx="2">
+            <a:schemeClr val="accent1"/>
+          </a:effectRef>
+          <a:fontRef idx="minor">
+            <a:schemeClr val="lt1"/>
+          </a:fontRef>
+        </p:style>
+        <p:txBody>
+          <a:bodyPr rtlCol="0" anchor="ctr" lIns="0" rIns="0" tIns="0" bIns="0"/>
+          <a:lstStyle/>
+          <a:p>
+            <a:pPr algn="ctr"/>
+            <a:r>
+              <a:rPr sz="1400" b="1" i="0">
+                <a:solidFill>
+                  <a:srgbClr val="FFFFFF"/>
+                </a:solidFill>
+                <a:latin typeface="Calibri"/>
+              </a:rPr>
+              <a:t>5</a:t>
+            </a:r>
+          </a:p>
+        </p:txBody>
+      </p:sp>
+      <p:sp>
+        <p:nvSpPr>
+          <p:cNvPr id="16" name="TextBox 15"/>
+          <p:cNvSpPr txBox="1"/>
+          <p:nvPr/>
+        </p:nvSpPr>
+        <p:spPr>
+          <a:xfrm>
+            <a:off x="1280160" y="5102352"/>
+            <a:ext cx="4526280" cy="292608"/>
+          </a:xfrm>
+          <a:prstGeom prst="rect">
+            <a:avLst/>
+          </a:prstGeom>
+          <a:noFill/>
+        </p:spPr>
+        <p:txBody>
+          <a:bodyPr wrap="square" anchor="t">
+            <a:spAutoFit/>
+          </a:bodyPr>
+          <a:lstStyle/>
+          <a:p>
+            <a:pPr algn="l">
+              <a:spcAft>
+                <a:spcPts val="300"/>
+              </a:spcAft>
+            </a:pPr>
+            <a:r>
+              <a:rPr sz="1700" b="1" i="0">
+                <a:solidFill>
+                  <a:srgbClr val="1B3A5C"/>
+                </a:solidFill>
+                <a:latin typeface="Calibri"/>
+              </a:rPr>
+              <a:t>The two-token auth model</a:t>
+            </a:r>
+          </a:p>
+        </p:txBody>
+      </p:sp>
+      <p:sp>
+        <p:nvSpPr>
+          <p:cNvPr id="17" name="TextBox 16"/>
+          <p:cNvSpPr txBox="1"/>
+          <p:nvPr/>
+        </p:nvSpPr>
+        <p:spPr>
+          <a:xfrm>
+            <a:off x="1280160" y="5404104"/>
+            <a:ext cx="4526280" cy="457200"/>
+          </a:xfrm>
+          <a:prstGeom prst="rect">
+            <a:avLst/>
+          </a:prstGeom>
+          <a:noFill/>
+        </p:spPr>
+        <p:txBody>
+          <a:bodyPr wrap="square" anchor="t">
+            <a:spAutoFit/>
+          </a:bodyPr>
+          <a:lstStyle/>
+          <a:p>
+            <a:pPr algn="l">
+              <a:spcAft>
+                <a:spcPts val="300"/>
+              </a:spcAft>
+            </a:pPr>
+            <a:r>
+              <a:rPr sz="1250" b="0" i="0">
+                <a:solidFill>
+                  <a:srgbClr val="3A4654"/>
+                </a:solidFill>
+                <a:latin typeface="Calibri"/>
+              </a:rPr>
+              <a:t>why the caller's token is never forwarded upstream</a:t>
+            </a:r>
+          </a:p>
+        </p:txBody>
+      </p:sp>
+      <p:sp>
+        <p:nvSpPr>
+          <p:cNvPr id="18" name="Oval 17"/>
+          <p:cNvSpPr/>
+          <p:nvPr/>
+        </p:nvSpPr>
+        <p:spPr>
+          <a:xfrm>
+            <a:off x="6492240" y="1353312"/>
+            <a:ext cx="420624" cy="420624"/>
+          </a:xfrm>
+          <a:prstGeom prst="ellipse">
+            <a:avLst/>
+          </a:prstGeom>
+          <a:solidFill>
+            <a:srgbClr val="E87A1E"/>
+          </a:solidFill>
+          <a:ln w="15875">
+            <a:solidFill>
+              <a:srgbClr val="FFFFFF"/>
+            </a:solidFill>
+          </a:ln>
+          <a:effectLst/>
+        </p:spPr>
+        <p:style>
+          <a:lnRef idx="1">
+            <a:schemeClr val="accent1"/>
+          </a:lnRef>
+          <a:fillRef idx="3">
+            <a:schemeClr val="accent1"/>
+          </a:fillRef>
+          <a:effectRef idx="2">
+            <a:schemeClr val="accent1"/>
+          </a:effectRef>
+          <a:fontRef idx="minor">
+            <a:schemeClr val="lt1"/>
+          </a:fontRef>
+        </p:style>
+        <p:txBody>
+          <a:bodyPr rtlCol="0" anchor="ctr" lIns="0" rIns="0" tIns="0" bIns="0"/>
+          <a:lstStyle/>
+          <a:p>
+            <a:pPr algn="ctr"/>
+            <a:r>
+              <a:rPr sz="1400" b="1" i="0">
+                <a:solidFill>
+                  <a:srgbClr val="FFFFFF"/>
+                </a:solidFill>
+                <a:latin typeface="Calibri"/>
+              </a:rPr>
+              <a:t>6</a:t>
+            </a:r>
+          </a:p>
+        </p:txBody>
+      </p:sp>
+      <p:sp>
+        <p:nvSpPr>
+          <p:cNvPr id="19" name="TextBox 18"/>
+          <p:cNvSpPr txBox="1"/>
+          <p:nvPr/>
+        </p:nvSpPr>
+        <p:spPr>
+          <a:xfrm>
+            <a:off x="7086600" y="1298448"/>
+            <a:ext cx="4663440" cy="292608"/>
+          </a:xfrm>
+          <a:prstGeom prst="rect">
+            <a:avLst/>
+          </a:prstGeom>
+          <a:noFill/>
+        </p:spPr>
+        <p:txBody>
+          <a:bodyPr wrap="square" anchor="t">
+            <a:spAutoFit/>
+          </a:bodyPr>
+          <a:lstStyle/>
+          <a:p>
+            <a:pPr algn="l">
+              <a:spcAft>
+                <a:spcPts val="300"/>
+              </a:spcAft>
+            </a:pPr>
+            <a:r>
+              <a:rPr sz="1700" b="1" i="0">
+                <a:solidFill>
+                  <a:srgbClr val="1B3A5C"/>
+                </a:solidFill>
+                <a:latin typeface="Calibri"/>
+              </a:rPr>
+              <a:t>Benchmark catalog &amp; run lifecycle</a:t>
+            </a:r>
+          </a:p>
+        </p:txBody>
+      </p:sp>
+      <p:sp>
+        <p:nvSpPr>
+          <p:cNvPr id="20" name="TextBox 19"/>
+          <p:cNvSpPr txBox="1"/>
+          <p:nvPr/>
+        </p:nvSpPr>
+        <p:spPr>
+          <a:xfrm>
+            <a:off x="7086600" y="1600200"/>
+            <a:ext cx="4663440" cy="457200"/>
+          </a:xfrm>
+          <a:prstGeom prst="rect">
+            <a:avLst/>
+          </a:prstGeom>
+          <a:noFill/>
+        </p:spPr>
+        <p:txBody>
+          <a:bodyPr wrap="square" anchor="t">
+            <a:spAutoFit/>
+          </a:bodyPr>
+          <a:lstStyle/>
+          <a:p>
+            <a:pPr algn="l">
+              <a:spcAft>
+                <a:spcPts val="300"/>
+              </a:spcAft>
+            </a:pPr>
+            <a:r>
+              <a:rPr sz="1250" b="0" i="0">
+                <a:solidFill>
+                  <a:srgbClr val="3A4654"/>
+                </a:solidFill>
+                <a:latin typeface="Calibri"/>
+              </a:rPr>
+              <a:t>6.1 the three benchmarks and the REST flow that drives them · 6.2 what each image bakes in · 6.3 one task end to end · 6.4 who decides what happens inside it</a:t>
+            </a:r>
+          </a:p>
+        </p:txBody>
+      </p:sp>
+      <p:sp>
+        <p:nvSpPr>
+          <p:cNvPr id="21" name="Oval 20"/>
+          <p:cNvSpPr/>
+          <p:nvPr/>
+        </p:nvSpPr>
+        <p:spPr>
+          <a:xfrm>
+            <a:off x="6492240" y="2304288"/>
+            <a:ext cx="420624" cy="420624"/>
+          </a:xfrm>
+          <a:prstGeom prst="ellipse">
+            <a:avLst/>
+          </a:prstGeom>
+          <a:solidFill>
+            <a:srgbClr val="E87A1E"/>
+          </a:solidFill>
+          <a:ln w="15875">
+            <a:solidFill>
+              <a:srgbClr val="FFFFFF"/>
+            </a:solidFill>
+          </a:ln>
+          <a:effectLst/>
+        </p:spPr>
+        <p:style>
+          <a:lnRef idx="1">
+            <a:schemeClr val="accent1"/>
+          </a:lnRef>
+          <a:fillRef idx="3">
+            <a:schemeClr val="accent1"/>
+          </a:fillRef>
+          <a:effectRef idx="2">
+            <a:schemeClr val="accent1"/>
+          </a:effectRef>
+          <a:fontRef idx="minor">
+            <a:schemeClr val="lt1"/>
+          </a:fontRef>
+        </p:style>
+        <p:txBody>
+          <a:bodyPr rtlCol="0" anchor="ctr" lIns="0" rIns="0" tIns="0" bIns="0"/>
+          <a:lstStyle/>
+          <a:p>
+            <a:pPr algn="ctr"/>
+            <a:r>
+              <a:rPr sz="1400" b="1" i="0">
+                <a:solidFill>
+                  <a:srgbClr val="FFFFFF"/>
+                </a:solidFill>
+                <a:latin typeface="Calibri"/>
+              </a:rPr>
+              <a:t>7</a:t>
+            </a:r>
+          </a:p>
+        </p:txBody>
+      </p:sp>
+      <p:sp>
+        <p:nvSpPr>
+          <p:cNvPr id="22" name="TextBox 21"/>
+          <p:cNvSpPr txBox="1"/>
+          <p:nvPr/>
+        </p:nvSpPr>
+        <p:spPr>
+          <a:xfrm>
+            <a:off x="7086600" y="2249424"/>
+            <a:ext cx="4663440" cy="292608"/>
+          </a:xfrm>
+          <a:prstGeom prst="rect">
+            <a:avLst/>
+          </a:prstGeom>
+          <a:noFill/>
+        </p:spPr>
+        <p:txBody>
+          <a:bodyPr wrap="square" anchor="t">
+            <a:spAutoFit/>
+          </a:bodyPr>
+          <a:lstStyle/>
+          <a:p>
+            <a:pPr algn="l">
+              <a:spcAft>
+                <a:spcPts val="300"/>
+              </a:spcAft>
+            </a:pPr>
+            <a:r>
+              <a:rPr sz="1700" b="1" i="0">
+                <a:solidFill>
+                  <a:srgbClr val="1B3A5C"/>
+                </a:solidFill>
+                <a:latin typeface="Calibri"/>
+              </a:rPr>
+              <a:t>The three benchmarks — what they measure</a:t>
+            </a:r>
+          </a:p>
+        </p:txBody>
+      </p:sp>
+      <p:sp>
+        <p:nvSpPr>
+          <p:cNvPr id="23" name="TextBox 22"/>
+          <p:cNvSpPr txBox="1"/>
+          <p:nvPr/>
+        </p:nvSpPr>
+        <p:spPr>
+          <a:xfrm>
+            <a:off x="7086600" y="2551176"/>
+            <a:ext cx="4663440" cy="457200"/>
+          </a:xfrm>
+          <a:prstGeom prst="rect">
+            <a:avLst/>
+          </a:prstGeom>
+          <a:noFill/>
+        </p:spPr>
+        <p:txBody>
+          <a:bodyPr wrap="square" anchor="t">
+            <a:spAutoFit/>
+          </a:bodyPr>
+          <a:lstStyle/>
+          <a:p>
+            <a:pPr algn="l">
+              <a:spcAft>
+                <a:spcPts val="300"/>
+              </a:spcAft>
+            </a:pPr>
+            <a:r>
+              <a:rPr sz="1250" b="0" i="0">
+                <a:solidFill>
+                  <a:srgbClr val="3A4654"/>
+                </a:solidFill>
+                <a:latin typeface="Calibri"/>
+              </a:rPr>
+              <a:t>7.1 the difficulty ladder · 7.2 what each stresses · 7.3 the three compared · 7.4 the traps · 7.5 picking one · 7.6 what it costs · 7.7 the rate card · 7.8–7.9 six efficiency figures</a:t>
+            </a:r>
+          </a:p>
+        </p:txBody>
+      </p:sp>
+      <p:sp>
+        <p:nvSpPr>
+          <p:cNvPr id="24" name="Oval 23"/>
+          <p:cNvSpPr/>
+          <p:nvPr/>
+        </p:nvSpPr>
+        <p:spPr>
+          <a:xfrm>
+            <a:off x="6492240" y="3255264"/>
+            <a:ext cx="420624" cy="420624"/>
+          </a:xfrm>
+          <a:prstGeom prst="ellipse">
+            <a:avLst/>
+          </a:prstGeom>
+          <a:solidFill>
+            <a:srgbClr val="E87A1E"/>
+          </a:solidFill>
+          <a:ln w="15875">
+            <a:solidFill>
+              <a:srgbClr val="FFFFFF"/>
+            </a:solidFill>
+          </a:ln>
+          <a:effectLst/>
+        </p:spPr>
+        <p:style>
+          <a:lnRef idx="1">
+            <a:schemeClr val="accent1"/>
+          </a:lnRef>
+          <a:fillRef idx="3">
+            <a:schemeClr val="accent1"/>
+          </a:fillRef>
+          <a:effectRef idx="2">
+            <a:schemeClr val="accent1"/>
+          </a:effectRef>
+          <a:fontRef idx="minor">
+            <a:schemeClr val="lt1"/>
+          </a:fontRef>
+        </p:style>
+        <p:txBody>
+          <a:bodyPr rtlCol="0" anchor="ctr" lIns="0" rIns="0" tIns="0" bIns="0"/>
+          <a:lstStyle/>
+          <a:p>
+            <a:pPr algn="ctr"/>
+            <a:r>
+              <a:rPr sz="1400" b="1" i="0">
+                <a:solidFill>
+                  <a:srgbClr val="FFFFFF"/>
+                </a:solidFill>
+                <a:latin typeface="Calibri"/>
+              </a:rPr>
+              <a:t>8</a:t>
+            </a:r>
+          </a:p>
+        </p:txBody>
+      </p:sp>
+      <p:sp>
+        <p:nvSpPr>
+          <p:cNvPr id="25" name="TextBox 24"/>
+          <p:cNvSpPr txBox="1"/>
+          <p:nvPr/>
+        </p:nvSpPr>
+        <p:spPr>
+          <a:xfrm>
+            <a:off x="7086600" y="3200400"/>
+            <a:ext cx="4663440" cy="292608"/>
+          </a:xfrm>
+          <a:prstGeom prst="rect">
+            <a:avLst/>
+          </a:prstGeom>
+          <a:noFill/>
+        </p:spPr>
+        <p:txBody>
+          <a:bodyPr wrap="square" anchor="t">
+            <a:spAutoFit/>
+          </a:bodyPr>
+          <a:lstStyle/>
+          <a:p>
+            <a:pPr algn="l">
+              <a:spcAft>
+                <a:spcPts val="300"/>
+              </a:spcAft>
+            </a:pPr>
+            <a:r>
+              <a:rPr sz="1700" b="1" i="0">
+                <a:solidFill>
+                  <a:srgbClr val="1B3A5C"/>
+                </a:solidFill>
+                <a:latin typeface="Calibri"/>
+              </a:rPr>
+              <a:t>The canonical 12-run matrix</a:t>
+            </a:r>
+          </a:p>
+        </p:txBody>
+      </p:sp>
+      <p:sp>
+        <p:nvSpPr>
+          <p:cNvPr id="26" name="TextBox 25"/>
+          <p:cNvSpPr txBox="1"/>
+          <p:nvPr/>
+        </p:nvSpPr>
+        <p:spPr>
+          <a:xfrm>
+            <a:off x="7086600" y="3502152"/>
+            <a:ext cx="4663440" cy="457200"/>
+          </a:xfrm>
+          <a:prstGeom prst="rect">
+            <a:avLst/>
+          </a:prstGeom>
+          <a:noFill/>
+        </p:spPr>
+        <p:txBody>
+          <a:bodyPr wrap="square" anchor="t">
+            <a:spAutoFit/>
+          </a:bodyPr>
+          <a:lstStyle/>
+          <a:p>
+            <a:pPr algn="l">
+              <a:spcAft>
+                <a:spcPts val="300"/>
+              </a:spcAft>
+            </a:pPr>
+            <a:r>
+              <a:rPr sz="1250" b="0" i="0">
+                <a:solidFill>
+                  <a:srgbClr val="3A4654"/>
+                </a:solidFill>
+                <a:latin typeface="Calibri"/>
+              </a:rPr>
+              <a:t>8.1 what the 12 runs parameterize · 8.2 what each band established · 8.3 what they measured</a:t>
+            </a:r>
+          </a:p>
+        </p:txBody>
+      </p:sp>
+      <p:sp>
+        <p:nvSpPr>
+          <p:cNvPr id="27" name="Oval 26"/>
+          <p:cNvSpPr/>
+          <p:nvPr/>
+        </p:nvSpPr>
+        <p:spPr>
+          <a:xfrm>
+            <a:off x="6492240" y="4206240"/>
+            <a:ext cx="420624" cy="420624"/>
+          </a:xfrm>
+          <a:prstGeom prst="ellipse">
+            <a:avLst/>
+          </a:prstGeom>
+          <a:solidFill>
+            <a:srgbClr val="E87A1E"/>
+          </a:solidFill>
+          <a:ln w="15875">
+            <a:solidFill>
+              <a:srgbClr val="FFFFFF"/>
+            </a:solidFill>
+          </a:ln>
+          <a:effectLst/>
+        </p:spPr>
+        <p:style>
+          <a:lnRef idx="1">
+            <a:schemeClr val="accent1"/>
+          </a:lnRef>
+          <a:fillRef idx="3">
+            <a:schemeClr val="accent1"/>
+          </a:fillRef>
+          <a:effectRef idx="2">
+            <a:schemeClr val="accent1"/>
+          </a:effectRef>
+          <a:fontRef idx="minor">
+            <a:schemeClr val="lt1"/>
+          </a:fontRef>
+        </p:style>
+        <p:txBody>
+          <a:bodyPr rtlCol="0" anchor="ctr" lIns="0" rIns="0" tIns="0" bIns="0"/>
+          <a:lstStyle/>
+          <a:p>
+            <a:pPr algn="ctr"/>
+            <a:r>
+              <a:rPr sz="1400" b="1" i="0">
+                <a:solidFill>
+                  <a:srgbClr val="FFFFFF"/>
+                </a:solidFill>
+                <a:latin typeface="Calibri"/>
+              </a:rPr>
+              <a:t>9</a:t>
+            </a:r>
+          </a:p>
+        </p:txBody>
+      </p:sp>
+      <p:sp>
+        <p:nvSpPr>
+          <p:cNvPr id="28" name="TextBox 27"/>
+          <p:cNvSpPr txBox="1"/>
+          <p:nvPr/>
+        </p:nvSpPr>
+        <p:spPr>
+          <a:xfrm>
+            <a:off x="7086600" y="4151376"/>
+            <a:ext cx="4663440" cy="292608"/>
+          </a:xfrm>
+          <a:prstGeom prst="rect">
+            <a:avLst/>
+          </a:prstGeom>
+          <a:noFill/>
+        </p:spPr>
+        <p:txBody>
+          <a:bodyPr wrap="square" anchor="t">
+            <a:spAutoFit/>
+          </a:bodyPr>
+          <a:lstStyle/>
+          <a:p>
+            <a:pPr algn="l">
+              <a:spcAft>
+                <a:spcPts val="300"/>
+              </a:spcAft>
+            </a:pPr>
+            <a:r>
+              <a:rPr sz="1700" b="1" i="0">
+                <a:solidFill>
+                  <a:srgbClr val="1B3A5C"/>
+                </a:solidFill>
+                <a:latin typeface="Calibri"/>
+              </a:rPr>
+              <a:t>Cross-platform &amp; plugin overhead</a:t>
+            </a:r>
+          </a:p>
+        </p:txBody>
+      </p:sp>
+      <p:sp>
+        <p:nvSpPr>
+          <p:cNvPr id="29" name="TextBox 28"/>
+          <p:cNvSpPr txBox="1"/>
+          <p:nvPr/>
+        </p:nvSpPr>
+        <p:spPr>
+          <a:xfrm>
+            <a:off x="7086600" y="4453128"/>
+            <a:ext cx="4663440" cy="457200"/>
+          </a:xfrm>
+          <a:prstGeom prst="rect">
+            <a:avLst/>
+          </a:prstGeom>
+          <a:noFill/>
+        </p:spPr>
+        <p:txBody>
+          <a:bodyPr wrap="square" anchor="t">
+            <a:spAutoFit/>
+          </a:bodyPr>
+          <a:lstStyle/>
+          <a:p>
+            <a:pPr algn="l">
+              <a:spcAft>
+                <a:spcPts val="300"/>
+              </a:spcAft>
+            </a:pPr>
+            <a:r>
+              <a:rPr sz="1250" b="0" i="0">
+                <a:solidFill>
+                  <a:srgbClr val="3A4654"/>
+                </a:solidFill>
+                <a:latin typeface="Calibri"/>
+              </a:rPr>
+              <a:t>9.1 OpenShift vs KinD, like-for-like · 9.2 what AuthBridge costs</a:t>
+            </a:r>
+          </a:p>
+        </p:txBody>
+      </p:sp>
+      <p:sp>
+        <p:nvSpPr>
+          <p:cNvPr id="30" name="Oval 29"/>
+          <p:cNvSpPr/>
+          <p:nvPr/>
+        </p:nvSpPr>
+        <p:spPr>
+          <a:xfrm>
+            <a:off x="6492240" y="5157216"/>
+            <a:ext cx="420624" cy="420624"/>
+          </a:xfrm>
+          <a:prstGeom prst="ellipse">
+            <a:avLst/>
+          </a:prstGeom>
+          <a:solidFill>
+            <a:srgbClr val="E87A1E"/>
+          </a:solidFill>
+          <a:ln w="15875">
+            <a:solidFill>
+              <a:srgbClr val="FFFFFF"/>
+            </a:solidFill>
+          </a:ln>
+          <a:effectLst/>
+        </p:spPr>
+        <p:style>
+          <a:lnRef idx="1">
+            <a:schemeClr val="accent1"/>
+          </a:lnRef>
+          <a:fillRef idx="3">
+            <a:schemeClr val="accent1"/>
+          </a:fillRef>
+          <a:effectRef idx="2">
+            <a:schemeClr val="accent1"/>
+          </a:effectRef>
+          <a:fontRef idx="minor">
+            <a:schemeClr val="lt1"/>
+          </a:fontRef>
+        </p:style>
+        <p:txBody>
+          <a:bodyPr rtlCol="0" anchor="ctr" lIns="0" rIns="0" tIns="0" bIns="0"/>
+          <a:lstStyle/>
+          <a:p>
+            <a:pPr algn="ctr"/>
+            <a:r>
+              <a:rPr sz="1400" b="1" i="0">
+                <a:solidFill>
+                  <a:srgbClr val="FFFFFF"/>
+                </a:solidFill>
+                <a:latin typeface="Calibri"/>
+              </a:rPr>
+              <a:t>10</a:t>
+            </a:r>
+          </a:p>
+        </p:txBody>
+      </p:sp>
+      <p:sp>
+        <p:nvSpPr>
+          <p:cNvPr id="31" name="TextBox 30"/>
+          <p:cNvSpPr txBox="1"/>
+          <p:nvPr/>
+        </p:nvSpPr>
+        <p:spPr>
+          <a:xfrm>
+            <a:off x="7086600" y="5102352"/>
+            <a:ext cx="4663440" cy="292608"/>
+          </a:xfrm>
+          <a:prstGeom prst="rect">
+            <a:avLst/>
+          </a:prstGeom>
+          <a:noFill/>
+        </p:spPr>
+        <p:txBody>
+          <a:bodyPr wrap="square" anchor="t">
+            <a:spAutoFit/>
+          </a:bodyPr>
+          <a:lstStyle/>
+          <a:p>
+            <a:pPr algn="l">
+              <a:spcAft>
+                <a:spcPts val="300"/>
+              </a:spcAft>
+            </a:pPr>
+            <a:r>
+              <a:rPr sz="1700" b="1" i="0">
+                <a:solidFill>
+                  <a:srgbClr val="1B3A5C"/>
+                </a:solidFill>
+                <a:latin typeface="Calibri"/>
+              </a:rPr>
+              <a:t>What the Service can &amp; cannot enact</a:t>
+            </a:r>
+          </a:p>
+        </p:txBody>
+      </p:sp>
+      <p:sp>
+        <p:nvSpPr>
+          <p:cNvPr id="32" name="TextBox 31"/>
+          <p:cNvSpPr txBox="1"/>
+          <p:nvPr/>
+        </p:nvSpPr>
+        <p:spPr>
+          <a:xfrm>
+            <a:off x="7086600" y="5404104"/>
+            <a:ext cx="4663440" cy="457200"/>
+          </a:xfrm>
+          <a:prstGeom prst="rect">
+            <a:avLst/>
+          </a:prstGeom>
+          <a:noFill/>
+        </p:spPr>
+        <p:txBody>
+          <a:bodyPr wrap="square" anchor="t">
+            <a:spAutoFit/>
+          </a:bodyPr>
+          <a:lstStyle/>
+          <a:p>
+            <a:pPr algn="l">
+              <a:spcAft>
+                <a:spcPts val="300"/>
+              </a:spcAft>
+            </a:pPr>
+            <a:r>
+              <a:rPr sz="1250" b="0" i="0">
+                <a:solidFill>
+                  <a:srgbClr val="3A4654"/>
+                </a:solidFill>
+                <a:latin typeface="Calibri"/>
+              </a:rPr>
+              <a:t>the HTTP-only boundary, made explicit</a:t>
+            </a:r>
+          </a:p>
+        </p:txBody>
+      </p:sp>
+      <p:cxnSp>
+        <p:nvCxnSpPr>
+          <p:cNvPr id="33" name="Connector 32"/>
+          <p:cNvCxnSpPr/>
+          <p:nvPr/>
+        </p:nvCxnSpPr>
+        <p:spPr>
+          <a:xfrm>
+            <a:off x="6080760" y="1280160"/>
+            <a:ext cx="0" cy="4251960"/>
+          </a:xfrm>
+          <a:prstGeom prst="line">
+            <a:avLst/>
+          </a:prstGeom>
+          <a:ln w="12700">
+            <a:solidFill>
+              <a:srgbClr val="C7CED6"/>
+            </a:solidFill>
+          </a:ln>
+          <a:effectLst/>
+        </p:spPr>
+        <p:style>
+          <a:lnRef idx="2">
+            <a:schemeClr val="accent1"/>
+          </a:lnRef>
+          <a:fillRef idx="0">
+            <a:schemeClr val="accent1"/>
+          </a:fillRef>
+          <a:effectRef idx="1">
+            <a:schemeClr val="accent1"/>
+          </a:effectRef>
+          <a:fontRef idx="minor">
+            <a:schemeClr val="tx1"/>
+          </a:fontRef>
+        </p:style>
+      </p:cxnSp>
+      <p:sp>
+        <p:nvSpPr>
+          <p:cNvPr id="34" name="TextBox 33"/>
+          <p:cNvSpPr txBox="1"/>
+          <p:nvPr/>
+        </p:nvSpPr>
+        <p:spPr>
+          <a:xfrm>
+            <a:off x="11795760" y="6437376"/>
+            <a:ext cx="320040" cy="310896"/>
+          </a:xfrm>
+          <a:prstGeom prst="rect">
+            <a:avLst/>
+          </a:prstGeom>
+          <a:noFill/>
+        </p:spPr>
+        <p:txBody>
+          <a:bodyPr wrap="none" anchor="ctr" lIns="0" rIns="0" tIns="0" bIns="0">
+            <a:spAutoFit/>
+          </a:bodyPr>
+          <a:lstStyle/>
+          <a:p>
+            <a:pPr algn="r">
+              <a:spcAft>
+                <a:spcPts val="300"/>
+              </a:spcAft>
+            </a:pPr>
+            <a:r>
+              <a:rPr sz="1200" b="0" i="0">
+                <a:solidFill>
+                  <a:srgbClr val="6B6B6B"/>
+                </a:solidFill>
+                <a:latin typeface="Calibri"/>
+              </a:rPr>
+              <a:t>2</a:t>
+            </a:r>
+          </a:p>
+        </p:txBody>
+      </p:sp>
+    </p:spTree>
+  </p:cSld>
+  <p:clrMapOvr>
+    <a:masterClrMapping/>
+  </p:clrMapOvr>
+</p:sld>
+</file>
+
+<file path=ppt/slides/slide20.xml><?xml version="1.0" encoding="utf-8"?>
+<p:sld xmlns:a="http://schemas.openxmlformats.org/drawingml/2006/main" xmlns:p="http://schemas.openxmlformats.org/presentationml/2006/main" xmlns:r="http://schemas.openxmlformats.org/officeDocument/2006/relationships">
+  <p:cSld name="7.8 Token- and Cost-Efficiency — Where the Money Actually Goes">
+    <p:spTree>
+      <p:nvGrpSpPr>
+        <p:cNvPr id="1" name=""/>
+        <p:cNvGrpSpPr/>
+        <p:nvPr/>
+      </p:nvGrpSpPr>
+      <p:grpSpPr/>
+      <p:sp>
+        <p:nvSpPr>
+          <p:cNvPr id="2" name="Rectangle 1"/>
+          <p:cNvSpPr/>
+          <p:nvPr/>
+        </p:nvSpPr>
+        <p:spPr>
+          <a:xfrm>
+            <a:off x="0" y="0"/>
+            <a:ext cx="12192000" cy="950000"/>
+          </a:xfrm>
+          <a:prstGeom prst="rect">
+            <a:avLst/>
+          </a:prstGeom>
+          <a:solidFill>
+            <a:srgbClr val="1B3A5C"/>
+          </a:solidFill>
+          <a:ln>
+            <a:noFill/>
+          </a:ln>
+          <a:effectLst/>
+        </p:spPr>
+        <p:style>
+          <a:lnRef idx="1">
+            <a:schemeClr val="accent1"/>
+          </a:lnRef>
+          <a:fillRef idx="3">
+            <a:schemeClr val="accent1"/>
+          </a:fillRef>
+          <a:effectRef idx="2">
+            <a:schemeClr val="accent1"/>
+          </a:effectRef>
+          <a:fontRef idx="minor">
+            <a:schemeClr val="lt1"/>
+          </a:fontRef>
+        </p:style>
+        <p:txBody>
+          <a:bodyPr rtlCol="0" anchor="ctr" lIns="355600"/>
+          <a:lstStyle/>
+          <a:p>
+            <a:pPr algn="ctr"/>
+            <a:r>
+              <a:rPr sz="2600" b="1" i="0">
+                <a:solidFill>
+                  <a:srgbClr val="FFFFFF"/>
+                </a:solidFill>
+                <a:latin typeface="Calibri"/>
+              </a:rPr>
+              <a:t>7.8  Token- and Cost-Efficiency — Where the Money Actually Goes</a:t>
+            </a:r>
+          </a:p>
+          <a:p>
+            <a:r>
+              <a:rPr sz="1400" b="0" i="0">
+                <a:solidFill>
+                  <a:srgbClr val="C9D9EC"/>
+                </a:solidFill>
+                <a:latin typeface="Calibri"/>
+              </a:rPr>
+              <a:t>Measured on the v1.28 pair (267 task rows) at the rate card in 7.7 — one take-away per figure</a:t>
             </a:r>
           </a:p>
         </p:txBody>
@@ -14449,7 +16915,7 @@
                 </a:solidFill>
                 <a:latin typeface="Calibri"/>
               </a:rPr>
-              <a:t>19</a:t>
+              <a:t>20</a:t>
             </a:r>
           </a:p>
         </p:txBody>
@@ -14462,9 +16928,9 @@
 </p:sld>
 </file>
 
-<file path=ppt/slides/slide2.xml><?xml version="1.0" encoding="utf-8"?>
+<file path=ppt/slides/slide21.xml><?xml version="1.0" encoding="utf-8"?>
 <p:sld xmlns:a="http://schemas.openxmlformats.org/drawingml/2006/main" xmlns:p="http://schemas.openxmlformats.org/presentationml/2006/main" xmlns:r="http://schemas.openxmlformats.org/officeDocument/2006/relationships">
-  <p:cSld name="Agenda">
+  <p:cSld name="7.9 Token- and Cost-Efficiency — What To Budget, and What To Divide By">
     <p:spTree>
       <p:nvGrpSpPr>
         <p:cNvPr id="1" name=""/>
@@ -14520,1494 +16986,7 @@
                 </a:solidFill>
                 <a:latin typeface="Calibri"/>
               </a:rPr>
-              <a:t>Agenda</a:t>
-            </a:r>
-          </a:p>
-          <a:p>
-            <a:r>
-              <a:rPr sz="1400" b="0" i="0">
-                <a:solidFill>
-                  <a:srgbClr val="C9D9EC"/>
-                </a:solidFill>
-                <a:latin typeface="Calibri"/>
-              </a:rPr>
-              <a:t>What this deck covers, in order</a:t>
-            </a:r>
-          </a:p>
-        </p:txBody>
-      </p:sp>
-      <p:sp>
-        <p:nvSpPr>
-          <p:cNvPr id="3" name="Oval 2"/>
-          <p:cNvSpPr/>
-          <p:nvPr/>
-        </p:nvSpPr>
-        <p:spPr>
-          <a:xfrm>
-            <a:off x="685800" y="1353312"/>
-            <a:ext cx="420624" cy="420624"/>
-          </a:xfrm>
-          <a:prstGeom prst="ellipse">
-            <a:avLst/>
-          </a:prstGeom>
-          <a:solidFill>
-            <a:srgbClr val="E87A1E"/>
-          </a:solidFill>
-          <a:ln w="15875">
-            <a:solidFill>
-              <a:srgbClr val="FFFFFF"/>
-            </a:solidFill>
-          </a:ln>
-          <a:effectLst/>
-        </p:spPr>
-        <p:style>
-          <a:lnRef idx="1">
-            <a:schemeClr val="accent1"/>
-          </a:lnRef>
-          <a:fillRef idx="3">
-            <a:schemeClr val="accent1"/>
-          </a:fillRef>
-          <a:effectRef idx="2">
-            <a:schemeClr val="accent1"/>
-          </a:effectRef>
-          <a:fontRef idx="minor">
-            <a:schemeClr val="lt1"/>
-          </a:fontRef>
-        </p:style>
-        <p:txBody>
-          <a:bodyPr rtlCol="0" anchor="ctr" lIns="0" rIns="0" tIns="0" bIns="0"/>
-          <a:lstStyle/>
-          <a:p>
-            <a:pPr algn="ctr"/>
-            <a:r>
-              <a:rPr sz="1400" b="1" i="0">
-                <a:solidFill>
-                  <a:srgbClr val="FFFFFF"/>
-                </a:solidFill>
-                <a:latin typeface="Calibri"/>
-              </a:rPr>
-              <a:t>1</a:t>
-            </a:r>
-          </a:p>
-        </p:txBody>
-      </p:sp>
-      <p:sp>
-        <p:nvSpPr>
-          <p:cNvPr id="4" name="TextBox 3"/>
-          <p:cNvSpPr txBox="1"/>
-          <p:nvPr/>
-        </p:nvSpPr>
-        <p:spPr>
-          <a:xfrm>
-            <a:off x="1280160" y="1298448"/>
-            <a:ext cx="4526280" cy="292608"/>
-          </a:xfrm>
-          <a:prstGeom prst="rect">
-            <a:avLst/>
-          </a:prstGeom>
-          <a:noFill/>
-        </p:spPr>
-        <p:txBody>
-          <a:bodyPr wrap="square" anchor="t">
-            <a:spAutoFit/>
-          </a:bodyPr>
-          <a:lstStyle/>
-          <a:p>
-            <a:pPr algn="l">
-              <a:spcAft>
-                <a:spcPts val="300"/>
-              </a:spcAft>
-            </a:pPr>
-            <a:r>
-              <a:rPr sz="1700" b="1" i="0">
-                <a:solidFill>
-                  <a:srgbClr val="1B3A5C"/>
-                </a:solidFill>
-                <a:latin typeface="Calibri"/>
-              </a:rPr>
-              <a:t>Overview &amp; key design decisions</a:t>
-            </a:r>
-          </a:p>
-        </p:txBody>
-      </p:sp>
-      <p:sp>
-        <p:nvSpPr>
-          <p:cNvPr id="5" name="TextBox 4"/>
-          <p:cNvSpPr txBox="1"/>
-          <p:nvPr/>
-        </p:nvSpPr>
-        <p:spPr>
-          <a:xfrm>
-            <a:off x="1280160" y="1600200"/>
-            <a:ext cx="4526280" cy="457200"/>
-          </a:xfrm>
-          <a:prstGeom prst="rect">
-            <a:avLst/>
-          </a:prstGeom>
-          <a:noFill/>
-        </p:spPr>
-        <p:txBody>
-          <a:bodyPr wrap="square" anchor="t">
-            <a:spAutoFit/>
-          </a:bodyPr>
-          <a:lstStyle/>
-          <a:p>
-            <a:pPr algn="l">
-              <a:spcAft>
-                <a:spcPts val="300"/>
-              </a:spcAft>
-            </a:pPr>
-            <a:r>
-              <a:rPr sz="1250" b="0" i="0">
-                <a:solidFill>
-                  <a:srgbClr val="3A4654"/>
-                </a:solidFill>
-                <a:latin typeface="Calibri"/>
-              </a:rPr>
-              <a:t>what the Service is, and the seven choices that shape it</a:t>
-            </a:r>
-          </a:p>
-        </p:txBody>
-      </p:sp>
-      <p:sp>
-        <p:nvSpPr>
-          <p:cNvPr id="6" name="Oval 5"/>
-          <p:cNvSpPr/>
-          <p:nvPr/>
-        </p:nvSpPr>
-        <p:spPr>
-          <a:xfrm>
-            <a:off x="685800" y="2304288"/>
-            <a:ext cx="420624" cy="420624"/>
-          </a:xfrm>
-          <a:prstGeom prst="ellipse">
-            <a:avLst/>
-          </a:prstGeom>
-          <a:solidFill>
-            <a:srgbClr val="E87A1E"/>
-          </a:solidFill>
-          <a:ln w="15875">
-            <a:solidFill>
-              <a:srgbClr val="FFFFFF"/>
-            </a:solidFill>
-          </a:ln>
-          <a:effectLst/>
-        </p:spPr>
-        <p:style>
-          <a:lnRef idx="1">
-            <a:schemeClr val="accent1"/>
-          </a:lnRef>
-          <a:fillRef idx="3">
-            <a:schemeClr val="accent1"/>
-          </a:fillRef>
-          <a:effectRef idx="2">
-            <a:schemeClr val="accent1"/>
-          </a:effectRef>
-          <a:fontRef idx="minor">
-            <a:schemeClr val="lt1"/>
-          </a:fontRef>
-        </p:style>
-        <p:txBody>
-          <a:bodyPr rtlCol="0" anchor="ctr" lIns="0" rIns="0" tIns="0" bIns="0"/>
-          <a:lstStyle/>
-          <a:p>
-            <a:pPr algn="ctr"/>
-            <a:r>
-              <a:rPr sz="1400" b="1" i="0">
-                <a:solidFill>
-                  <a:srgbClr val="FFFFFF"/>
-                </a:solidFill>
-                <a:latin typeface="Calibri"/>
-              </a:rPr>
-              <a:t>2</a:t>
-            </a:r>
-          </a:p>
-        </p:txBody>
-      </p:sp>
-      <p:sp>
-        <p:nvSpPr>
-          <p:cNvPr id="7" name="TextBox 6"/>
-          <p:cNvSpPr txBox="1"/>
-          <p:nvPr/>
-        </p:nvSpPr>
-        <p:spPr>
-          <a:xfrm>
-            <a:off x="1280160" y="2249424"/>
-            <a:ext cx="4526280" cy="292608"/>
-          </a:xfrm>
-          <a:prstGeom prst="rect">
-            <a:avLst/>
-          </a:prstGeom>
-          <a:noFill/>
-        </p:spPr>
-        <p:txBody>
-          <a:bodyPr wrap="square" anchor="t">
-            <a:spAutoFit/>
-          </a:bodyPr>
-          <a:lstStyle/>
-          <a:p>
-            <a:pPr algn="l">
-              <a:spcAft>
-                <a:spcPts val="300"/>
-              </a:spcAft>
-            </a:pPr>
-            <a:r>
-              <a:rPr sz="1700" b="1" i="0">
-                <a:solidFill>
-                  <a:srgbClr val="1B3A5C"/>
-                </a:solidFill>
-                <a:latin typeface="Calibri"/>
-              </a:rPr>
-              <a:t>Auto-benchmarking design motif</a:t>
-            </a:r>
-          </a:p>
-        </p:txBody>
-      </p:sp>
-      <p:sp>
-        <p:nvSpPr>
-          <p:cNvPr id="8" name="TextBox 7"/>
-          <p:cNvSpPr txBox="1"/>
-          <p:nvPr/>
-        </p:nvSpPr>
-        <p:spPr>
-          <a:xfrm>
-            <a:off x="1280160" y="2551176"/>
-            <a:ext cx="4526280" cy="457200"/>
-          </a:xfrm>
-          <a:prstGeom prst="rect">
-            <a:avLst/>
-          </a:prstGeom>
-          <a:noFill/>
-        </p:spPr>
-        <p:txBody>
-          <a:bodyPr wrap="square" anchor="t">
-            <a:spAutoFit/>
-          </a:bodyPr>
-          <a:lstStyle/>
-          <a:p>
-            <a:pPr algn="l">
-              <a:spcAft>
-                <a:spcPts val="300"/>
-              </a:spcAft>
-            </a:pPr>
-            <a:r>
-              <a:rPr sz="1250" b="0" i="0">
-                <a:solidFill>
-                  <a:srgbClr val="3A4654"/>
-                </a:solidFill>
-                <a:latin typeface="Calibri"/>
-              </a:rPr>
-              <a:t>the shape of the system, before the wiring detail</a:t>
-            </a:r>
-          </a:p>
-        </p:txBody>
-      </p:sp>
-      <p:sp>
-        <p:nvSpPr>
-          <p:cNvPr id="9" name="Oval 8"/>
-          <p:cNvSpPr/>
-          <p:nvPr/>
-        </p:nvSpPr>
-        <p:spPr>
-          <a:xfrm>
-            <a:off x="685800" y="3255264"/>
-            <a:ext cx="420624" cy="420624"/>
-          </a:xfrm>
-          <a:prstGeom prst="ellipse">
-            <a:avLst/>
-          </a:prstGeom>
-          <a:solidFill>
-            <a:srgbClr val="E87A1E"/>
-          </a:solidFill>
-          <a:ln w="15875">
-            <a:solidFill>
-              <a:srgbClr val="FFFFFF"/>
-            </a:solidFill>
-          </a:ln>
-          <a:effectLst/>
-        </p:spPr>
-        <p:style>
-          <a:lnRef idx="1">
-            <a:schemeClr val="accent1"/>
-          </a:lnRef>
-          <a:fillRef idx="3">
-            <a:schemeClr val="accent1"/>
-          </a:fillRef>
-          <a:effectRef idx="2">
-            <a:schemeClr val="accent1"/>
-          </a:effectRef>
-          <a:fontRef idx="minor">
-            <a:schemeClr val="lt1"/>
-          </a:fontRef>
-        </p:style>
-        <p:txBody>
-          <a:bodyPr rtlCol="0" anchor="ctr" lIns="0" rIns="0" tIns="0" bIns="0"/>
-          <a:lstStyle/>
-          <a:p>
-            <a:pPr algn="ctr"/>
-            <a:r>
-              <a:rPr sz="1400" b="1" i="0">
-                <a:solidFill>
-                  <a:srgbClr val="FFFFFF"/>
-                </a:solidFill>
-                <a:latin typeface="Calibri"/>
-              </a:rPr>
-              <a:t>3</a:t>
-            </a:r>
-          </a:p>
-        </p:txBody>
-      </p:sp>
-      <p:sp>
-        <p:nvSpPr>
-          <p:cNvPr id="10" name="TextBox 9"/>
-          <p:cNvSpPr txBox="1"/>
-          <p:nvPr/>
-        </p:nvSpPr>
-        <p:spPr>
-          <a:xfrm>
-            <a:off x="1280160" y="3200400"/>
-            <a:ext cx="4526280" cy="292608"/>
-          </a:xfrm>
-          <a:prstGeom prst="rect">
-            <a:avLst/>
-          </a:prstGeom>
-          <a:noFill/>
-        </p:spPr>
-        <p:txBody>
-          <a:bodyPr wrap="square" anchor="t">
-            <a:spAutoFit/>
-          </a:bodyPr>
-          <a:lstStyle/>
-          <a:p>
-            <a:pPr algn="l">
-              <a:spcAft>
-                <a:spcPts val="300"/>
-              </a:spcAft>
-            </a:pPr>
-            <a:r>
-              <a:rPr sz="1700" b="1" i="0">
-                <a:solidFill>
-                  <a:srgbClr val="1B3A5C"/>
-                </a:solidFill>
-                <a:latin typeface="Calibri"/>
-              </a:rPr>
-              <a:t>Architecture</a:t>
-            </a:r>
-          </a:p>
-        </p:txBody>
-      </p:sp>
-      <p:sp>
-        <p:nvSpPr>
-          <p:cNvPr id="11" name="TextBox 10"/>
-          <p:cNvSpPr txBox="1"/>
-          <p:nvPr/>
-        </p:nvSpPr>
-        <p:spPr>
-          <a:xfrm>
-            <a:off x="1280160" y="3502152"/>
-            <a:ext cx="4526280" cy="457200"/>
-          </a:xfrm>
-          <a:prstGeom prst="rect">
-            <a:avLst/>
-          </a:prstGeom>
-          <a:noFill/>
-        </p:spPr>
-        <p:txBody>
-          <a:bodyPr wrap="square" anchor="t">
-            <a:spAutoFit/>
-          </a:bodyPr>
-          <a:lstStyle/>
-          <a:p>
-            <a:pPr algn="l">
-              <a:spcAft>
-                <a:spcPts val="300"/>
-              </a:spcAft>
-            </a:pPr>
-            <a:r>
-              <a:rPr sz="1250" b="0" i="0">
-                <a:solidFill>
-                  <a:srgbClr val="3A4654"/>
-                </a:solidFill>
-                <a:latin typeface="Calibri"/>
-              </a:rPr>
-              <a:t>client, Service, and the per-cluster instance selected by JWT iss</a:t>
-            </a:r>
-          </a:p>
-        </p:txBody>
-      </p:sp>
-      <p:sp>
-        <p:nvSpPr>
-          <p:cNvPr id="12" name="Oval 11"/>
-          <p:cNvSpPr/>
-          <p:nvPr/>
-        </p:nvSpPr>
-        <p:spPr>
-          <a:xfrm>
-            <a:off x="685800" y="4206240"/>
-            <a:ext cx="420624" cy="420624"/>
-          </a:xfrm>
-          <a:prstGeom prst="ellipse">
-            <a:avLst/>
-          </a:prstGeom>
-          <a:solidFill>
-            <a:srgbClr val="E87A1E"/>
-          </a:solidFill>
-          <a:ln w="15875">
-            <a:solidFill>
-              <a:srgbClr val="FFFFFF"/>
-            </a:solidFill>
-          </a:ln>
-          <a:effectLst/>
-        </p:spPr>
-        <p:style>
-          <a:lnRef idx="1">
-            <a:schemeClr val="accent1"/>
-          </a:lnRef>
-          <a:fillRef idx="3">
-            <a:schemeClr val="accent1"/>
-          </a:fillRef>
-          <a:effectRef idx="2">
-            <a:schemeClr val="accent1"/>
-          </a:effectRef>
-          <a:fontRef idx="minor">
-            <a:schemeClr val="lt1"/>
-          </a:fontRef>
-        </p:style>
-        <p:txBody>
-          <a:bodyPr rtlCol="0" anchor="ctr" lIns="0" rIns="0" tIns="0" bIns="0"/>
-          <a:lstStyle/>
-          <a:p>
-            <a:pPr algn="ctr"/>
-            <a:r>
-              <a:rPr sz="1400" b="1" i="0">
-                <a:solidFill>
-                  <a:srgbClr val="FFFFFF"/>
-                </a:solidFill>
-                <a:latin typeface="Calibri"/>
-              </a:rPr>
-              <a:t>4</a:t>
-            </a:r>
-          </a:p>
-        </p:txBody>
-      </p:sp>
-      <p:sp>
-        <p:nvSpPr>
-          <p:cNvPr id="13" name="TextBox 12"/>
-          <p:cNvSpPr txBox="1"/>
-          <p:nvPr/>
-        </p:nvSpPr>
-        <p:spPr>
-          <a:xfrm>
-            <a:off x="1280160" y="4151376"/>
-            <a:ext cx="4526280" cy="292608"/>
-          </a:xfrm>
-          <a:prstGeom prst="rect">
-            <a:avLst/>
-          </a:prstGeom>
-          <a:noFill/>
-        </p:spPr>
-        <p:txBody>
-          <a:bodyPr wrap="square" anchor="t">
-            <a:spAutoFit/>
-          </a:bodyPr>
-          <a:lstStyle/>
-          <a:p>
-            <a:pPr algn="l">
-              <a:spcAft>
-                <a:spcPts val="300"/>
-              </a:spcAft>
-            </a:pPr>
-            <a:r>
-              <a:rPr sz="1700" b="1" i="0">
-                <a:solidFill>
-                  <a:srgbClr val="1B3A5C"/>
-                </a:solidFill>
-                <a:latin typeface="Calibri"/>
-              </a:rPr>
-              <a:t>Architecture with workload specific components</a:t>
-            </a:r>
-          </a:p>
-        </p:txBody>
-      </p:sp>
-      <p:sp>
-        <p:nvSpPr>
-          <p:cNvPr id="14" name="TextBox 13"/>
-          <p:cNvSpPr txBox="1"/>
-          <p:nvPr/>
-        </p:nvSpPr>
-        <p:spPr>
-          <a:xfrm>
-            <a:off x="1280160" y="4453128"/>
-            <a:ext cx="4526280" cy="457200"/>
-          </a:xfrm>
-          <a:prstGeom prst="rect">
-            <a:avLst/>
-          </a:prstGeom>
-          <a:noFill/>
-        </p:spPr>
-        <p:txBody>
-          <a:bodyPr wrap="square" anchor="t">
-            <a:spAutoFit/>
-          </a:bodyPr>
-          <a:lstStyle/>
-          <a:p>
-            <a:pPr algn="l">
-              <a:spcAft>
-                <a:spcPts val="300"/>
-              </a:spcAft>
-            </a:pPr>
-            <a:r>
-              <a:rPr sz="1250" b="0" i="0">
-                <a:solidFill>
-                  <a:srgbClr val="3A4654"/>
-                </a:solidFill>
-                <a:latin typeface="Calibri"/>
-              </a:rPr>
-              <a:t>4.1 inside the workload: sidecar, user simulator, IBAC judge · 4.2 how interception is wired</a:t>
-            </a:r>
-          </a:p>
-        </p:txBody>
-      </p:sp>
-      <p:sp>
-        <p:nvSpPr>
-          <p:cNvPr id="15" name="Oval 14"/>
-          <p:cNvSpPr/>
-          <p:nvPr/>
-        </p:nvSpPr>
-        <p:spPr>
-          <a:xfrm>
-            <a:off x="685800" y="5157216"/>
-            <a:ext cx="420624" cy="420624"/>
-          </a:xfrm>
-          <a:prstGeom prst="ellipse">
-            <a:avLst/>
-          </a:prstGeom>
-          <a:solidFill>
-            <a:srgbClr val="E87A1E"/>
-          </a:solidFill>
-          <a:ln w="15875">
-            <a:solidFill>
-              <a:srgbClr val="FFFFFF"/>
-            </a:solidFill>
-          </a:ln>
-          <a:effectLst/>
-        </p:spPr>
-        <p:style>
-          <a:lnRef idx="1">
-            <a:schemeClr val="accent1"/>
-          </a:lnRef>
-          <a:fillRef idx="3">
-            <a:schemeClr val="accent1"/>
-          </a:fillRef>
-          <a:effectRef idx="2">
-            <a:schemeClr val="accent1"/>
-          </a:effectRef>
-          <a:fontRef idx="minor">
-            <a:schemeClr val="lt1"/>
-          </a:fontRef>
-        </p:style>
-        <p:txBody>
-          <a:bodyPr rtlCol="0" anchor="ctr" lIns="0" rIns="0" tIns="0" bIns="0"/>
-          <a:lstStyle/>
-          <a:p>
-            <a:pPr algn="ctr"/>
-            <a:r>
-              <a:rPr sz="1400" b="1" i="0">
-                <a:solidFill>
-                  <a:srgbClr val="FFFFFF"/>
-                </a:solidFill>
-                <a:latin typeface="Calibri"/>
-              </a:rPr>
-              <a:t>5</a:t>
-            </a:r>
-          </a:p>
-        </p:txBody>
-      </p:sp>
-      <p:sp>
-        <p:nvSpPr>
-          <p:cNvPr id="16" name="TextBox 15"/>
-          <p:cNvSpPr txBox="1"/>
-          <p:nvPr/>
-        </p:nvSpPr>
-        <p:spPr>
-          <a:xfrm>
-            <a:off x="1280160" y="5102352"/>
-            <a:ext cx="4526280" cy="292608"/>
-          </a:xfrm>
-          <a:prstGeom prst="rect">
-            <a:avLst/>
-          </a:prstGeom>
-          <a:noFill/>
-        </p:spPr>
-        <p:txBody>
-          <a:bodyPr wrap="square" anchor="t">
-            <a:spAutoFit/>
-          </a:bodyPr>
-          <a:lstStyle/>
-          <a:p>
-            <a:pPr algn="l">
-              <a:spcAft>
-                <a:spcPts val="300"/>
-              </a:spcAft>
-            </a:pPr>
-            <a:r>
-              <a:rPr sz="1700" b="1" i="0">
-                <a:solidFill>
-                  <a:srgbClr val="1B3A5C"/>
-                </a:solidFill>
-                <a:latin typeface="Calibri"/>
-              </a:rPr>
-              <a:t>The two-token auth model</a:t>
-            </a:r>
-          </a:p>
-        </p:txBody>
-      </p:sp>
-      <p:sp>
-        <p:nvSpPr>
-          <p:cNvPr id="17" name="TextBox 16"/>
-          <p:cNvSpPr txBox="1"/>
-          <p:nvPr/>
-        </p:nvSpPr>
-        <p:spPr>
-          <a:xfrm>
-            <a:off x="1280160" y="5404104"/>
-            <a:ext cx="4526280" cy="457200"/>
-          </a:xfrm>
-          <a:prstGeom prst="rect">
-            <a:avLst/>
-          </a:prstGeom>
-          <a:noFill/>
-        </p:spPr>
-        <p:txBody>
-          <a:bodyPr wrap="square" anchor="t">
-            <a:spAutoFit/>
-          </a:bodyPr>
-          <a:lstStyle/>
-          <a:p>
-            <a:pPr algn="l">
-              <a:spcAft>
-                <a:spcPts val="300"/>
-              </a:spcAft>
-            </a:pPr>
-            <a:r>
-              <a:rPr sz="1250" b="0" i="0">
-                <a:solidFill>
-                  <a:srgbClr val="3A4654"/>
-                </a:solidFill>
-                <a:latin typeface="Calibri"/>
-              </a:rPr>
-              <a:t>why the caller's token is never forwarded upstream</a:t>
-            </a:r>
-          </a:p>
-        </p:txBody>
-      </p:sp>
-      <p:sp>
-        <p:nvSpPr>
-          <p:cNvPr id="18" name="Oval 17"/>
-          <p:cNvSpPr/>
-          <p:nvPr/>
-        </p:nvSpPr>
-        <p:spPr>
-          <a:xfrm>
-            <a:off x="6492240" y="1353312"/>
-            <a:ext cx="420624" cy="420624"/>
-          </a:xfrm>
-          <a:prstGeom prst="ellipse">
-            <a:avLst/>
-          </a:prstGeom>
-          <a:solidFill>
-            <a:srgbClr val="E87A1E"/>
-          </a:solidFill>
-          <a:ln w="15875">
-            <a:solidFill>
-              <a:srgbClr val="FFFFFF"/>
-            </a:solidFill>
-          </a:ln>
-          <a:effectLst/>
-        </p:spPr>
-        <p:style>
-          <a:lnRef idx="1">
-            <a:schemeClr val="accent1"/>
-          </a:lnRef>
-          <a:fillRef idx="3">
-            <a:schemeClr val="accent1"/>
-          </a:fillRef>
-          <a:effectRef idx="2">
-            <a:schemeClr val="accent1"/>
-          </a:effectRef>
-          <a:fontRef idx="minor">
-            <a:schemeClr val="lt1"/>
-          </a:fontRef>
-        </p:style>
-        <p:txBody>
-          <a:bodyPr rtlCol="0" anchor="ctr" lIns="0" rIns="0" tIns="0" bIns="0"/>
-          <a:lstStyle/>
-          <a:p>
-            <a:pPr algn="ctr"/>
-            <a:r>
-              <a:rPr sz="1400" b="1" i="0">
-                <a:solidFill>
-                  <a:srgbClr val="FFFFFF"/>
-                </a:solidFill>
-                <a:latin typeface="Calibri"/>
-              </a:rPr>
-              <a:t>6</a:t>
-            </a:r>
-          </a:p>
-        </p:txBody>
-      </p:sp>
-      <p:sp>
-        <p:nvSpPr>
-          <p:cNvPr id="19" name="TextBox 18"/>
-          <p:cNvSpPr txBox="1"/>
-          <p:nvPr/>
-        </p:nvSpPr>
-        <p:spPr>
-          <a:xfrm>
-            <a:off x="7086600" y="1298448"/>
-            <a:ext cx="4663440" cy="292608"/>
-          </a:xfrm>
-          <a:prstGeom prst="rect">
-            <a:avLst/>
-          </a:prstGeom>
-          <a:noFill/>
-        </p:spPr>
-        <p:txBody>
-          <a:bodyPr wrap="square" anchor="t">
-            <a:spAutoFit/>
-          </a:bodyPr>
-          <a:lstStyle/>
-          <a:p>
-            <a:pPr algn="l">
-              <a:spcAft>
-                <a:spcPts val="300"/>
-              </a:spcAft>
-            </a:pPr>
-            <a:r>
-              <a:rPr sz="1700" b="1" i="0">
-                <a:solidFill>
-                  <a:srgbClr val="1B3A5C"/>
-                </a:solidFill>
-                <a:latin typeface="Calibri"/>
-              </a:rPr>
-              <a:t>Benchmark catalog &amp; run lifecycle</a:t>
-            </a:r>
-          </a:p>
-        </p:txBody>
-      </p:sp>
-      <p:sp>
-        <p:nvSpPr>
-          <p:cNvPr id="20" name="TextBox 19"/>
-          <p:cNvSpPr txBox="1"/>
-          <p:nvPr/>
-        </p:nvSpPr>
-        <p:spPr>
-          <a:xfrm>
-            <a:off x="7086600" y="1600200"/>
-            <a:ext cx="4663440" cy="457200"/>
-          </a:xfrm>
-          <a:prstGeom prst="rect">
-            <a:avLst/>
-          </a:prstGeom>
-          <a:noFill/>
-        </p:spPr>
-        <p:txBody>
-          <a:bodyPr wrap="square" anchor="t">
-            <a:spAutoFit/>
-          </a:bodyPr>
-          <a:lstStyle/>
-          <a:p>
-            <a:pPr algn="l">
-              <a:spcAft>
-                <a:spcPts val="300"/>
-              </a:spcAft>
-            </a:pPr>
-            <a:r>
-              <a:rPr sz="1250" b="0" i="0">
-                <a:solidFill>
-                  <a:srgbClr val="3A4654"/>
-                </a:solidFill>
-                <a:latin typeface="Calibri"/>
-              </a:rPr>
-              <a:t>6.1 the three benchmarks and the REST flow that drives them · 6.2 what each image bakes in · 6.3 one task end to end · 6.4 who decides what happens inside it</a:t>
-            </a:r>
-          </a:p>
-        </p:txBody>
-      </p:sp>
-      <p:sp>
-        <p:nvSpPr>
-          <p:cNvPr id="21" name="Oval 20"/>
-          <p:cNvSpPr/>
-          <p:nvPr/>
-        </p:nvSpPr>
-        <p:spPr>
-          <a:xfrm>
-            <a:off x="6492240" y="2304288"/>
-            <a:ext cx="420624" cy="420624"/>
-          </a:xfrm>
-          <a:prstGeom prst="ellipse">
-            <a:avLst/>
-          </a:prstGeom>
-          <a:solidFill>
-            <a:srgbClr val="E87A1E"/>
-          </a:solidFill>
-          <a:ln w="15875">
-            <a:solidFill>
-              <a:srgbClr val="FFFFFF"/>
-            </a:solidFill>
-          </a:ln>
-          <a:effectLst/>
-        </p:spPr>
-        <p:style>
-          <a:lnRef idx="1">
-            <a:schemeClr val="accent1"/>
-          </a:lnRef>
-          <a:fillRef idx="3">
-            <a:schemeClr val="accent1"/>
-          </a:fillRef>
-          <a:effectRef idx="2">
-            <a:schemeClr val="accent1"/>
-          </a:effectRef>
-          <a:fontRef idx="minor">
-            <a:schemeClr val="lt1"/>
-          </a:fontRef>
-        </p:style>
-        <p:txBody>
-          <a:bodyPr rtlCol="0" anchor="ctr" lIns="0" rIns="0" tIns="0" bIns="0"/>
-          <a:lstStyle/>
-          <a:p>
-            <a:pPr algn="ctr"/>
-            <a:r>
-              <a:rPr sz="1400" b="1" i="0">
-                <a:solidFill>
-                  <a:srgbClr val="FFFFFF"/>
-                </a:solidFill>
-                <a:latin typeface="Calibri"/>
-              </a:rPr>
-              <a:t>7</a:t>
-            </a:r>
-          </a:p>
-        </p:txBody>
-      </p:sp>
-      <p:sp>
-        <p:nvSpPr>
-          <p:cNvPr id="22" name="TextBox 21"/>
-          <p:cNvSpPr txBox="1"/>
-          <p:nvPr/>
-        </p:nvSpPr>
-        <p:spPr>
-          <a:xfrm>
-            <a:off x="7086600" y="2249424"/>
-            <a:ext cx="4663440" cy="292608"/>
-          </a:xfrm>
-          <a:prstGeom prst="rect">
-            <a:avLst/>
-          </a:prstGeom>
-          <a:noFill/>
-        </p:spPr>
-        <p:txBody>
-          <a:bodyPr wrap="square" anchor="t">
-            <a:spAutoFit/>
-          </a:bodyPr>
-          <a:lstStyle/>
-          <a:p>
-            <a:pPr algn="l">
-              <a:spcAft>
-                <a:spcPts val="300"/>
-              </a:spcAft>
-            </a:pPr>
-            <a:r>
-              <a:rPr sz="1700" b="1" i="0">
-                <a:solidFill>
-                  <a:srgbClr val="1B3A5C"/>
-                </a:solidFill>
-                <a:latin typeface="Calibri"/>
-              </a:rPr>
-              <a:t>The three benchmarks — what they measure</a:t>
-            </a:r>
-          </a:p>
-        </p:txBody>
-      </p:sp>
-      <p:sp>
-        <p:nvSpPr>
-          <p:cNvPr id="23" name="TextBox 22"/>
-          <p:cNvSpPr txBox="1"/>
-          <p:nvPr/>
-        </p:nvSpPr>
-        <p:spPr>
-          <a:xfrm>
-            <a:off x="7086600" y="2551176"/>
-            <a:ext cx="4663440" cy="457200"/>
-          </a:xfrm>
-          <a:prstGeom prst="rect">
-            <a:avLst/>
-          </a:prstGeom>
-          <a:noFill/>
-        </p:spPr>
-        <p:txBody>
-          <a:bodyPr wrap="square" anchor="t">
-            <a:spAutoFit/>
-          </a:bodyPr>
-          <a:lstStyle/>
-          <a:p>
-            <a:pPr algn="l">
-              <a:spcAft>
-                <a:spcPts val="300"/>
-              </a:spcAft>
-            </a:pPr>
-            <a:r>
-              <a:rPr sz="1250" b="0" i="0">
-                <a:solidFill>
-                  <a:srgbClr val="3A4654"/>
-                </a:solidFill>
-                <a:latin typeface="Calibri"/>
-              </a:rPr>
-              <a:t>7.1 the difficulty ladder · 7.2 what each stresses · 7.3 the traps · 7.4 picking one · 7.5 what it costs · 7.6 the rate card · 7.7–7.8 six efficiency figures · 7.9–7.10 the benchmarks and the 12 runs compared</a:t>
-            </a:r>
-          </a:p>
-        </p:txBody>
-      </p:sp>
-      <p:sp>
-        <p:nvSpPr>
-          <p:cNvPr id="24" name="Oval 23"/>
-          <p:cNvSpPr/>
-          <p:nvPr/>
-        </p:nvSpPr>
-        <p:spPr>
-          <a:xfrm>
-            <a:off x="6492240" y="3255264"/>
-            <a:ext cx="420624" cy="420624"/>
-          </a:xfrm>
-          <a:prstGeom prst="ellipse">
-            <a:avLst/>
-          </a:prstGeom>
-          <a:solidFill>
-            <a:srgbClr val="E87A1E"/>
-          </a:solidFill>
-          <a:ln w="15875">
-            <a:solidFill>
-              <a:srgbClr val="FFFFFF"/>
-            </a:solidFill>
-          </a:ln>
-          <a:effectLst/>
-        </p:spPr>
-        <p:style>
-          <a:lnRef idx="1">
-            <a:schemeClr val="accent1"/>
-          </a:lnRef>
-          <a:fillRef idx="3">
-            <a:schemeClr val="accent1"/>
-          </a:fillRef>
-          <a:effectRef idx="2">
-            <a:schemeClr val="accent1"/>
-          </a:effectRef>
-          <a:fontRef idx="minor">
-            <a:schemeClr val="lt1"/>
-          </a:fontRef>
-        </p:style>
-        <p:txBody>
-          <a:bodyPr rtlCol="0" anchor="ctr" lIns="0" rIns="0" tIns="0" bIns="0"/>
-          <a:lstStyle/>
-          <a:p>
-            <a:pPr algn="ctr"/>
-            <a:r>
-              <a:rPr sz="1400" b="1" i="0">
-                <a:solidFill>
-                  <a:srgbClr val="FFFFFF"/>
-                </a:solidFill>
-                <a:latin typeface="Calibri"/>
-              </a:rPr>
-              <a:t>8</a:t>
-            </a:r>
-          </a:p>
-        </p:txBody>
-      </p:sp>
-      <p:sp>
-        <p:nvSpPr>
-          <p:cNvPr id="25" name="TextBox 24"/>
-          <p:cNvSpPr txBox="1"/>
-          <p:nvPr/>
-        </p:nvSpPr>
-        <p:spPr>
-          <a:xfrm>
-            <a:off x="7086600" y="3200400"/>
-            <a:ext cx="4663440" cy="292608"/>
-          </a:xfrm>
-          <a:prstGeom prst="rect">
-            <a:avLst/>
-          </a:prstGeom>
-          <a:noFill/>
-        </p:spPr>
-        <p:txBody>
-          <a:bodyPr wrap="square" anchor="t">
-            <a:spAutoFit/>
-          </a:bodyPr>
-          <a:lstStyle/>
-          <a:p>
-            <a:pPr algn="l">
-              <a:spcAft>
-                <a:spcPts val="300"/>
-              </a:spcAft>
-            </a:pPr>
-            <a:r>
-              <a:rPr sz="1700" b="1" i="0">
-                <a:solidFill>
-                  <a:srgbClr val="1B3A5C"/>
-                </a:solidFill>
-                <a:latin typeface="Calibri"/>
-              </a:rPr>
-              <a:t>The canonical 12-run matrix</a:t>
-            </a:r>
-          </a:p>
-        </p:txBody>
-      </p:sp>
-      <p:sp>
-        <p:nvSpPr>
-          <p:cNvPr id="26" name="TextBox 25"/>
-          <p:cNvSpPr txBox="1"/>
-          <p:nvPr/>
-        </p:nvSpPr>
-        <p:spPr>
-          <a:xfrm>
-            <a:off x="7086600" y="3502152"/>
-            <a:ext cx="4663440" cy="457200"/>
-          </a:xfrm>
-          <a:prstGeom prst="rect">
-            <a:avLst/>
-          </a:prstGeom>
-          <a:noFill/>
-        </p:spPr>
-        <p:txBody>
-          <a:bodyPr wrap="square" anchor="t">
-            <a:spAutoFit/>
-          </a:bodyPr>
-          <a:lstStyle/>
-          <a:p>
-            <a:pPr algn="l">
-              <a:spcAft>
-                <a:spcPts val="300"/>
-              </a:spcAft>
-            </a:pPr>
-            <a:r>
-              <a:rPr sz="1250" b="0" i="0">
-                <a:solidFill>
-                  <a:srgbClr val="3A4654"/>
-                </a:solidFill>
-                <a:latin typeface="Calibri"/>
-              </a:rPr>
-              <a:t>8.1 what the 12 runs parameterize · 8.2 what they measured</a:t>
-            </a:r>
-          </a:p>
-        </p:txBody>
-      </p:sp>
-      <p:sp>
-        <p:nvSpPr>
-          <p:cNvPr id="27" name="Oval 26"/>
-          <p:cNvSpPr/>
-          <p:nvPr/>
-        </p:nvSpPr>
-        <p:spPr>
-          <a:xfrm>
-            <a:off x="6492240" y="4206240"/>
-            <a:ext cx="420624" cy="420624"/>
-          </a:xfrm>
-          <a:prstGeom prst="ellipse">
-            <a:avLst/>
-          </a:prstGeom>
-          <a:solidFill>
-            <a:srgbClr val="E87A1E"/>
-          </a:solidFill>
-          <a:ln w="15875">
-            <a:solidFill>
-              <a:srgbClr val="FFFFFF"/>
-            </a:solidFill>
-          </a:ln>
-          <a:effectLst/>
-        </p:spPr>
-        <p:style>
-          <a:lnRef idx="1">
-            <a:schemeClr val="accent1"/>
-          </a:lnRef>
-          <a:fillRef idx="3">
-            <a:schemeClr val="accent1"/>
-          </a:fillRef>
-          <a:effectRef idx="2">
-            <a:schemeClr val="accent1"/>
-          </a:effectRef>
-          <a:fontRef idx="minor">
-            <a:schemeClr val="lt1"/>
-          </a:fontRef>
-        </p:style>
-        <p:txBody>
-          <a:bodyPr rtlCol="0" anchor="ctr" lIns="0" rIns="0" tIns="0" bIns="0"/>
-          <a:lstStyle/>
-          <a:p>
-            <a:pPr algn="ctr"/>
-            <a:r>
-              <a:rPr sz="1400" b="1" i="0">
-                <a:solidFill>
-                  <a:srgbClr val="FFFFFF"/>
-                </a:solidFill>
-                <a:latin typeface="Calibri"/>
-              </a:rPr>
-              <a:t>9</a:t>
-            </a:r>
-          </a:p>
-        </p:txBody>
-      </p:sp>
-      <p:sp>
-        <p:nvSpPr>
-          <p:cNvPr id="28" name="TextBox 27"/>
-          <p:cNvSpPr txBox="1"/>
-          <p:nvPr/>
-        </p:nvSpPr>
-        <p:spPr>
-          <a:xfrm>
-            <a:off x="7086600" y="4151376"/>
-            <a:ext cx="4663440" cy="292608"/>
-          </a:xfrm>
-          <a:prstGeom prst="rect">
-            <a:avLst/>
-          </a:prstGeom>
-          <a:noFill/>
-        </p:spPr>
-        <p:txBody>
-          <a:bodyPr wrap="square" anchor="t">
-            <a:spAutoFit/>
-          </a:bodyPr>
-          <a:lstStyle/>
-          <a:p>
-            <a:pPr algn="l">
-              <a:spcAft>
-                <a:spcPts val="300"/>
-              </a:spcAft>
-            </a:pPr>
-            <a:r>
-              <a:rPr sz="1700" b="1" i="0">
-                <a:solidFill>
-                  <a:srgbClr val="1B3A5C"/>
-                </a:solidFill>
-                <a:latin typeface="Calibri"/>
-              </a:rPr>
-              <a:t>Cross-platform &amp; plugin overhead</a:t>
-            </a:r>
-          </a:p>
-        </p:txBody>
-      </p:sp>
-      <p:sp>
-        <p:nvSpPr>
-          <p:cNvPr id="29" name="TextBox 28"/>
-          <p:cNvSpPr txBox="1"/>
-          <p:nvPr/>
-        </p:nvSpPr>
-        <p:spPr>
-          <a:xfrm>
-            <a:off x="7086600" y="4453128"/>
-            <a:ext cx="4663440" cy="457200"/>
-          </a:xfrm>
-          <a:prstGeom prst="rect">
-            <a:avLst/>
-          </a:prstGeom>
-          <a:noFill/>
-        </p:spPr>
-        <p:txBody>
-          <a:bodyPr wrap="square" anchor="t">
-            <a:spAutoFit/>
-          </a:bodyPr>
-          <a:lstStyle/>
-          <a:p>
-            <a:pPr algn="l">
-              <a:spcAft>
-                <a:spcPts val="300"/>
-              </a:spcAft>
-            </a:pPr>
-            <a:r>
-              <a:rPr sz="1250" b="0" i="0">
-                <a:solidFill>
-                  <a:srgbClr val="3A4654"/>
-                </a:solidFill>
-                <a:latin typeface="Calibri"/>
-              </a:rPr>
-              <a:t>9.1 OpenShift vs KinD, like-for-like · 9.2 what AuthBridge costs</a:t>
-            </a:r>
-          </a:p>
-        </p:txBody>
-      </p:sp>
-      <p:sp>
-        <p:nvSpPr>
-          <p:cNvPr id="30" name="Oval 29"/>
-          <p:cNvSpPr/>
-          <p:nvPr/>
-        </p:nvSpPr>
-        <p:spPr>
-          <a:xfrm>
-            <a:off x="6492240" y="5157216"/>
-            <a:ext cx="420624" cy="420624"/>
-          </a:xfrm>
-          <a:prstGeom prst="ellipse">
-            <a:avLst/>
-          </a:prstGeom>
-          <a:solidFill>
-            <a:srgbClr val="E87A1E"/>
-          </a:solidFill>
-          <a:ln w="15875">
-            <a:solidFill>
-              <a:srgbClr val="FFFFFF"/>
-            </a:solidFill>
-          </a:ln>
-          <a:effectLst/>
-        </p:spPr>
-        <p:style>
-          <a:lnRef idx="1">
-            <a:schemeClr val="accent1"/>
-          </a:lnRef>
-          <a:fillRef idx="3">
-            <a:schemeClr val="accent1"/>
-          </a:fillRef>
-          <a:effectRef idx="2">
-            <a:schemeClr val="accent1"/>
-          </a:effectRef>
-          <a:fontRef idx="minor">
-            <a:schemeClr val="lt1"/>
-          </a:fontRef>
-        </p:style>
-        <p:txBody>
-          <a:bodyPr rtlCol="0" anchor="ctr" lIns="0" rIns="0" tIns="0" bIns="0"/>
-          <a:lstStyle/>
-          <a:p>
-            <a:pPr algn="ctr"/>
-            <a:r>
-              <a:rPr sz="1400" b="1" i="0">
-                <a:solidFill>
-                  <a:srgbClr val="FFFFFF"/>
-                </a:solidFill>
-                <a:latin typeface="Calibri"/>
-              </a:rPr>
-              <a:t>10</a:t>
-            </a:r>
-          </a:p>
-        </p:txBody>
-      </p:sp>
-      <p:sp>
-        <p:nvSpPr>
-          <p:cNvPr id="31" name="TextBox 30"/>
-          <p:cNvSpPr txBox="1"/>
-          <p:nvPr/>
-        </p:nvSpPr>
-        <p:spPr>
-          <a:xfrm>
-            <a:off x="7086600" y="5102352"/>
-            <a:ext cx="4663440" cy="292608"/>
-          </a:xfrm>
-          <a:prstGeom prst="rect">
-            <a:avLst/>
-          </a:prstGeom>
-          <a:noFill/>
-        </p:spPr>
-        <p:txBody>
-          <a:bodyPr wrap="square" anchor="t">
-            <a:spAutoFit/>
-          </a:bodyPr>
-          <a:lstStyle/>
-          <a:p>
-            <a:pPr algn="l">
-              <a:spcAft>
-                <a:spcPts val="300"/>
-              </a:spcAft>
-            </a:pPr>
-            <a:r>
-              <a:rPr sz="1700" b="1" i="0">
-                <a:solidFill>
-                  <a:srgbClr val="1B3A5C"/>
-                </a:solidFill>
-                <a:latin typeface="Calibri"/>
-              </a:rPr>
-              <a:t>What the Service can &amp; cannot enact</a:t>
-            </a:r>
-          </a:p>
-        </p:txBody>
-      </p:sp>
-      <p:sp>
-        <p:nvSpPr>
-          <p:cNvPr id="32" name="TextBox 31"/>
-          <p:cNvSpPr txBox="1"/>
-          <p:nvPr/>
-        </p:nvSpPr>
-        <p:spPr>
-          <a:xfrm>
-            <a:off x="7086600" y="5404104"/>
-            <a:ext cx="4663440" cy="457200"/>
-          </a:xfrm>
-          <a:prstGeom prst="rect">
-            <a:avLst/>
-          </a:prstGeom>
-          <a:noFill/>
-        </p:spPr>
-        <p:txBody>
-          <a:bodyPr wrap="square" anchor="t">
-            <a:spAutoFit/>
-          </a:bodyPr>
-          <a:lstStyle/>
-          <a:p>
-            <a:pPr algn="l">
-              <a:spcAft>
-                <a:spcPts val="300"/>
-              </a:spcAft>
-            </a:pPr>
-            <a:r>
-              <a:rPr sz="1250" b="0" i="0">
-                <a:solidFill>
-                  <a:srgbClr val="3A4654"/>
-                </a:solidFill>
-                <a:latin typeface="Calibri"/>
-              </a:rPr>
-              <a:t>the HTTP-only boundary, made explicit</a:t>
-            </a:r>
-          </a:p>
-        </p:txBody>
-      </p:sp>
-      <p:cxnSp>
-        <p:nvCxnSpPr>
-          <p:cNvPr id="33" name="Connector 32"/>
-          <p:cNvCxnSpPr/>
-          <p:nvPr/>
-        </p:nvCxnSpPr>
-        <p:spPr>
-          <a:xfrm>
-            <a:off x="6080760" y="1280160"/>
-            <a:ext cx="0" cy="4251960"/>
-          </a:xfrm>
-          <a:prstGeom prst="line">
-            <a:avLst/>
-          </a:prstGeom>
-          <a:ln w="12700">
-            <a:solidFill>
-              <a:srgbClr val="C7CED6"/>
-            </a:solidFill>
-          </a:ln>
-          <a:effectLst/>
-        </p:spPr>
-        <p:style>
-          <a:lnRef idx="2">
-            <a:schemeClr val="accent1"/>
-          </a:lnRef>
-          <a:fillRef idx="0">
-            <a:schemeClr val="accent1"/>
-          </a:fillRef>
-          <a:effectRef idx="1">
-            <a:schemeClr val="accent1"/>
-          </a:effectRef>
-          <a:fontRef idx="minor">
-            <a:schemeClr val="tx1"/>
-          </a:fontRef>
-        </p:style>
-      </p:cxnSp>
-      <p:sp>
-        <p:nvSpPr>
-          <p:cNvPr id="34" name="TextBox 33"/>
-          <p:cNvSpPr txBox="1"/>
-          <p:nvPr/>
-        </p:nvSpPr>
-        <p:spPr>
-          <a:xfrm>
-            <a:off x="11795760" y="6437376"/>
-            <a:ext cx="320040" cy="310896"/>
-          </a:xfrm>
-          <a:prstGeom prst="rect">
-            <a:avLst/>
-          </a:prstGeom>
-          <a:noFill/>
-        </p:spPr>
-        <p:txBody>
-          <a:bodyPr wrap="none" anchor="ctr" lIns="0" rIns="0" tIns="0" bIns="0">
-            <a:spAutoFit/>
-          </a:bodyPr>
-          <a:lstStyle/>
-          <a:p>
-            <a:pPr algn="r">
-              <a:spcAft>
-                <a:spcPts val="300"/>
-              </a:spcAft>
-            </a:pPr>
-            <a:r>
-              <a:rPr sz="1200" b="0" i="0">
-                <a:solidFill>
-                  <a:srgbClr val="6B6B6B"/>
-                </a:solidFill>
-                <a:latin typeface="Calibri"/>
-              </a:rPr>
-              <a:t>2</a:t>
-            </a:r>
-          </a:p>
-        </p:txBody>
-      </p:sp>
-    </p:spTree>
-  </p:cSld>
-  <p:clrMapOvr>
-    <a:masterClrMapping/>
-  </p:clrMapOvr>
-</p:sld>
-</file>
-
-<file path=ppt/slides/slide20.xml><?xml version="1.0" encoding="utf-8"?>
-<p:sld xmlns:a="http://schemas.openxmlformats.org/drawingml/2006/main" xmlns:p="http://schemas.openxmlformats.org/presentationml/2006/main" xmlns:r="http://schemas.openxmlformats.org/officeDocument/2006/relationships">
-  <p:cSld name="7.8 Token- and Cost-Efficiency — What To Budget, and What To Divide By">
-    <p:spTree>
-      <p:nvGrpSpPr>
-        <p:cNvPr id="1" name=""/>
-        <p:cNvGrpSpPr/>
-        <p:nvPr/>
-      </p:nvGrpSpPr>
-      <p:grpSpPr/>
-      <p:sp>
-        <p:nvSpPr>
-          <p:cNvPr id="2" name="Rectangle 1"/>
-          <p:cNvSpPr/>
-          <p:nvPr/>
-        </p:nvSpPr>
-        <p:spPr>
-          <a:xfrm>
-            <a:off x="0" y="0"/>
-            <a:ext cx="12192000" cy="950000"/>
-          </a:xfrm>
-          <a:prstGeom prst="rect">
-            <a:avLst/>
-          </a:prstGeom>
-          <a:solidFill>
-            <a:srgbClr val="1B3A5C"/>
-          </a:solidFill>
-          <a:ln>
-            <a:noFill/>
-          </a:ln>
-          <a:effectLst/>
-        </p:spPr>
-        <p:style>
-          <a:lnRef idx="1">
-            <a:schemeClr val="accent1"/>
-          </a:lnRef>
-          <a:fillRef idx="3">
-            <a:schemeClr val="accent1"/>
-          </a:fillRef>
-          <a:effectRef idx="2">
-            <a:schemeClr val="accent1"/>
-          </a:effectRef>
-          <a:fontRef idx="minor">
-            <a:schemeClr val="lt1"/>
-          </a:fontRef>
-        </p:style>
-        <p:txBody>
-          <a:bodyPr rtlCol="0" anchor="ctr" lIns="355600"/>
-          <a:lstStyle/>
-          <a:p>
-            <a:pPr algn="ctr"/>
-            <a:r>
-              <a:rPr sz="2600" b="1" i="0">
-                <a:solidFill>
-                  <a:srgbClr val="FFFFFF"/>
-                </a:solidFill>
-                <a:latin typeface="Calibri"/>
-              </a:rPr>
-              <a:t>7.8  Token- and Cost-Efficiency — What To Budget, and What To Divide By</a:t>
+              <a:t>7.9  Token- and Cost-Efficiency — What To Budget, and What To Divide By</a:t>
             </a:r>
           </a:p>
           <a:p>
@@ -16330,985 +17309,6 @@
                 </a:solidFill>
                 <a:latin typeface="Calibri"/>
               </a:rPr>
-              <a:t>20</a:t>
-            </a:r>
-          </a:p>
-        </p:txBody>
-      </p:sp>
-    </p:spTree>
-  </p:cSld>
-  <p:clrMapOvr>
-    <a:masterClrMapping/>
-  </p:clrMapOvr>
-</p:sld>
-</file>
-
-<file path=ppt/slides/slide21.xml><?xml version="1.0" encoding="utf-8"?>
-<p:sld xmlns:a="http://schemas.openxmlformats.org/drawingml/2006/main" xmlns:p="http://schemas.openxmlformats.org/presentationml/2006/main" xmlns:r="http://schemas.openxmlformats.org/officeDocument/2006/relationships">
-  <p:cSld name="7.9 The Three Benchmarks Compared — Task, Purpose, Worth">
-    <p:spTree>
-      <p:nvGrpSpPr>
-        <p:cNvPr id="1" name=""/>
-        <p:cNvGrpSpPr/>
-        <p:nvPr/>
-      </p:nvGrpSpPr>
-      <p:grpSpPr/>
-      <p:sp>
-        <p:nvSpPr>
-          <p:cNvPr id="2" name="Rectangle 1"/>
-          <p:cNvSpPr/>
-          <p:nvPr/>
-        </p:nvSpPr>
-        <p:spPr>
-          <a:xfrm>
-            <a:off x="0" y="0"/>
-            <a:ext cx="12192000" cy="950000"/>
-          </a:xfrm>
-          <a:prstGeom prst="rect">
-            <a:avLst/>
-          </a:prstGeom>
-          <a:solidFill>
-            <a:srgbClr val="1B3A5C"/>
-          </a:solidFill>
-          <a:ln>
-            <a:noFill/>
-          </a:ln>
-          <a:effectLst/>
-        </p:spPr>
-        <p:style>
-          <a:lnRef idx="1">
-            <a:schemeClr val="accent1"/>
-          </a:lnRef>
-          <a:fillRef idx="3">
-            <a:schemeClr val="accent1"/>
-          </a:fillRef>
-          <a:effectRef idx="2">
-            <a:schemeClr val="accent1"/>
-          </a:effectRef>
-          <a:fontRef idx="minor">
-            <a:schemeClr val="lt1"/>
-          </a:fontRef>
-        </p:style>
-        <p:txBody>
-          <a:bodyPr rtlCol="0" anchor="ctr" lIns="355600"/>
-          <a:lstStyle/>
-          <a:p>
-            <a:pPr algn="ctr"/>
-            <a:r>
-              <a:rPr sz="2600" b="1" i="0">
-                <a:solidFill>
-                  <a:srgbClr val="FFFFFF"/>
-                </a:solidFill>
-                <a:latin typeface="Calibri"/>
-              </a:rPr>
-              <a:t>7.9  The Three Benchmarks Compared — Task, Purpose, Worth</a:t>
-            </a:r>
-          </a:p>
-          <a:p>
-            <a:r>
-              <a:rPr sz="1400" b="0" i="0">
-                <a:solidFill>
-                  <a:srgbClr val="C9D9EC"/>
-                </a:solidFill>
-                <a:latin typeface="Calibri"/>
-              </a:rPr>
-              <a:t>They differ in the SHAPE of a task, not just its size — which is what makes the ladder a ladder</a:t>
-            </a:r>
-          </a:p>
-        </p:txBody>
-      </p:sp>
-      <p:graphicFrame>
-        <p:nvGraphicFramePr>
-          <p:cNvPr id="3" name="Table 2"/>
-          <p:cNvGraphicFramePr>
-            <a:graphicFrameLocks noGrp="1"/>
-          </p:cNvGraphicFramePr>
-          <p:nvPr/>
-        </p:nvGraphicFramePr>
-        <p:xfrm>
-          <a:off x="411480" y="1143000"/>
-          <a:ext cx="11338560" cy="4297680"/>
-        </p:xfrm>
-        <a:graphic>
-          <a:graphicData uri="http://schemas.openxmlformats.org/drawingml/2006/table">
-            <a:tbl>
-              <a:tblPr firstRow="1">
-                <a:tableStyleId>{5C22544A-7EE6-4342-B048-85BDC9FD1C3A}</a:tableStyleId>
-              </a:tblPr>
-              <a:tblGrid>
-                <a:gridCol w="2011680"/>
-                <a:gridCol w="3063240"/>
-                <a:gridCol w="3154680"/>
-                <a:gridCol w="3108960"/>
-              </a:tblGrid>
-              <a:tr h="537210">
-                <a:tc>
-                  <a:txBody>
-                    <a:bodyPr/>
-                    <a:lstStyle/>
-                    <a:p>
-                      <a:pPr algn="l"/>
-                      <a:r>
-                        <a:rPr sz="1050" b="1" i="0">
-                          <a:solidFill>
-                            <a:srgbClr val="FFFFFF"/>
-                          </a:solidFill>
-                          <a:latin typeface="Calibri"/>
-                        </a:rPr>
-                        <a:t/>
-                      </a:r>
-                    </a:p>
-                  </a:txBody>
-                  <a:tcPr marL="63500" marR="63500" marT="12700" marB="12700" anchor="ctr">
-                    <a:solidFill>
-                      <a:srgbClr val="1B3A5C"/>
-                    </a:solidFill>
-                  </a:tcPr>
-                </a:tc>
-                <a:tc>
-                  <a:txBody>
-                    <a:bodyPr/>
-                    <a:lstStyle/>
-                    <a:p>
-                      <a:pPr algn="ctr"/>
-                      <a:r>
-                        <a:rPr sz="1050" b="1" i="0">
-                          <a:solidFill>
-                            <a:srgbClr val="FFFFFF"/>
-                          </a:solidFill>
-                          <a:latin typeface="Calibri"/>
-                        </a:rPr>
-                        <a:t>gsm8k</a:t>
-                      </a:r>
-                    </a:p>
-                  </a:txBody>
-                  <a:tcPr marL="63500" marR="63500" marT="12700" marB="12700" anchor="ctr">
-                    <a:solidFill>
-                      <a:srgbClr val="1B3A5C"/>
-                    </a:solidFill>
-                  </a:tcPr>
-                </a:tc>
-                <a:tc>
-                  <a:txBody>
-                    <a:bodyPr/>
-                    <a:lstStyle/>
-                    <a:p>
-                      <a:pPr algn="ctr"/>
-                      <a:r>
-                        <a:rPr sz="1050" b="1" i="0">
-                          <a:solidFill>
-                            <a:srgbClr val="FFFFFF"/>
-                          </a:solidFill>
-                          <a:latin typeface="Calibri"/>
-                        </a:rPr>
-                        <a:t>tau2</a:t>
-                      </a:r>
-                    </a:p>
-                  </a:txBody>
-                  <a:tcPr marL="63500" marR="63500" marT="12700" marB="12700" anchor="ctr">
-                    <a:solidFill>
-                      <a:srgbClr val="1B3A5C"/>
-                    </a:solidFill>
-                  </a:tcPr>
-                </a:tc>
-                <a:tc>
-                  <a:txBody>
-                    <a:bodyPr/>
-                    <a:lstStyle/>
-                    <a:p>
-                      <a:pPr algn="ctr"/>
-                      <a:r>
-                        <a:rPr sz="1050" b="1" i="0">
-                          <a:solidFill>
-                            <a:srgbClr val="FFFFFF"/>
-                          </a:solidFill>
-                          <a:latin typeface="Calibri"/>
-                        </a:rPr>
-                        <a:t>appworld</a:t>
-                      </a:r>
-                    </a:p>
-                  </a:txBody>
-                  <a:tcPr marL="63500" marR="63500" marT="12700" marB="12700" anchor="ctr">
-                    <a:solidFill>
-                      <a:srgbClr val="1B3A5C"/>
-                    </a:solidFill>
-                  </a:tcPr>
-                </a:tc>
-              </a:tr>
-              <a:tr h="537210">
-                <a:tc>
-                  <a:txBody>
-                    <a:bodyPr/>
-                    <a:lstStyle/>
-                    <a:p>
-                      <a:pPr algn="l"/>
-                      <a:r>
-                        <a:rPr sz="1050" b="1" i="0">
-                          <a:solidFill>
-                            <a:srgbClr val="1F2A37"/>
-                          </a:solidFill>
-                          <a:latin typeface="Calibri"/>
-                        </a:rPr>
-                        <a:t>A task IS</a:t>
-                      </a:r>
-                    </a:p>
-                  </a:txBody>
-                  <a:tcPr marL="63500" marR="63500" marT="12700" marB="12700" anchor="ctr">
-                    <a:solidFill>
-                      <a:srgbClr val="FFFFFF"/>
-                    </a:solidFill>
-                  </a:tcPr>
-                </a:tc>
-                <a:tc>
-                  <a:txBody>
-                    <a:bodyPr/>
-                    <a:lstStyle/>
-                    <a:p>
-                      <a:pPr algn="l"/>
-                      <a:r>
-                        <a:rPr sz="1050" b="0" i="0">
-                          <a:solidFill>
-                            <a:srgbClr val="1F2A37"/>
-                          </a:solidFill>
-                          <a:latin typeface="Calibri"/>
-                        </a:rPr>
-                        <a:t>one grade-school word problem,
-answered in text</a:t>
-                      </a:r>
-                    </a:p>
-                  </a:txBody>
-                  <a:tcPr marL="63500" marR="63500" marT="12700" marB="12700" anchor="ctr">
-                    <a:solidFill>
-                      <a:srgbClr val="FFFFFF"/>
-                    </a:solidFill>
-                  </a:tcPr>
-                </a:tc>
-                <a:tc>
-                  <a:txBody>
-                    <a:bodyPr/>
-                    <a:lstStyle/>
-                    <a:p>
-                      <a:pPr algn="l"/>
-                      <a:r>
-                        <a:rPr sz="1050" b="0" i="0">
-                          <a:solidFill>
-                            <a:srgbClr val="1F2A37"/>
-                          </a:solidFill>
-                          <a:latin typeface="Calibri"/>
-                        </a:rPr>
-                        <a:t>one retail customer-service
-conversation vs a simulated user</a:t>
-                      </a:r>
-                    </a:p>
-                  </a:txBody>
-                  <a:tcPr marL="63500" marR="63500" marT="12700" marB="12700" anchor="ctr">
-                    <a:solidFill>
-                      <a:srgbClr val="FFFFFF"/>
-                    </a:solidFill>
-                  </a:tcPr>
-                </a:tc>
-                <a:tc>
-                  <a:txBody>
-                    <a:bodyPr/>
-                    <a:lstStyle/>
-                    <a:p>
-                      <a:pPr algn="l"/>
-                      <a:r>
-                        <a:rPr sz="1050" b="0" i="0">
-                          <a:solidFill>
-                            <a:srgbClr val="1F2A37"/>
-                          </a:solidFill>
-                          <a:latin typeface="Calibri"/>
-                        </a:rPr>
-                        <a:t>one multi-app scenario automated
-through an API surface</a:t>
-                      </a:r>
-                    </a:p>
-                  </a:txBody>
-                  <a:tcPr marL="63500" marR="63500" marT="12700" marB="12700" anchor="ctr">
-                    <a:solidFill>
-                      <a:srgbClr val="FFFFFF"/>
-                    </a:solidFill>
-                  </a:tcPr>
-                </a:tc>
-              </a:tr>
-              <a:tr h="537210">
-                <a:tc>
-                  <a:txBody>
-                    <a:bodyPr/>
-                    <a:lstStyle/>
-                    <a:p>
-                      <a:pPr algn="l"/>
-                      <a:r>
-                        <a:rPr sz="1050" b="1" i="0">
-                          <a:solidFill>
-                            <a:srgbClr val="1F2A37"/>
-                          </a:solidFill>
-                          <a:latin typeface="Calibri"/>
-                        </a:rPr>
-                        <a:t>Turn structure</a:t>
-                      </a:r>
-                    </a:p>
-                  </a:txBody>
-                  <a:tcPr marL="63500" marR="63500" marT="12700" marB="12700" anchor="ctr">
-                    <a:solidFill>
-                      <a:srgbClr val="F4F6F8"/>
-                    </a:solidFill>
-                  </a:tcPr>
-                </a:tc>
-                <a:tc>
-                  <a:txBody>
-                    <a:bodyPr/>
-                    <a:lstStyle/>
-                    <a:p>
-                      <a:pPr algn="l"/>
-                      <a:r>
-                        <a:rPr sz="1050" b="0" i="0">
-                          <a:solidFill>
-                            <a:srgbClr val="1F2A37"/>
-                          </a:solidFill>
-                          <a:latin typeface="Calibri"/>
-                        </a:rPr>
-                        <a:t>1 model call, ~1 tool call</a:t>
-                      </a:r>
-                    </a:p>
-                  </a:txBody>
-                  <a:tcPr marL="63500" marR="63500" marT="12700" marB="12700" anchor="ctr">
-                    <a:solidFill>
-                      <a:srgbClr val="F4F6F8"/>
-                    </a:solidFill>
-                  </a:tcPr>
-                </a:tc>
-                <a:tc>
-                  <a:txBody>
-                    <a:bodyPr/>
-                    <a:lstStyle/>
-                    <a:p>
-                      <a:pPr algn="l"/>
-                      <a:r>
-                        <a:rPr sz="1050" b="0" i="0">
-                          <a:solidFill>
-                            <a:srgbClr val="1F2A37"/>
-                          </a:solidFill>
-                          <a:latin typeface="Calibri"/>
-                        </a:rPr>
-                        <a:t>~11 calls alternating with a
-USER SIMULATOR in character</a:t>
-                      </a:r>
-                    </a:p>
-                  </a:txBody>
-                  <a:tcPr marL="63500" marR="63500" marT="12700" marB="12700" anchor="ctr">
-                    <a:solidFill>
-                      <a:srgbClr val="F4F6F8"/>
-                    </a:solidFill>
-                  </a:tcPr>
-                </a:tc>
-                <a:tc>
-                  <a:txBody>
-                    <a:bodyPr/>
-                    <a:lstStyle/>
-                    <a:p>
-                      <a:pPr algn="l"/>
-                      <a:r>
-                        <a:rPr sz="1050" b="0" i="0">
-                          <a:solidFill>
-                            <a:srgbClr val="1F2A37"/>
-                          </a:solidFill>
-                          <a:latin typeface="Calibri"/>
-                        </a:rPr>
-                        <a:t>~29 calls, each re-sending the
-whole conversation</a:t>
-                      </a:r>
-                    </a:p>
-                  </a:txBody>
-                  <a:tcPr marL="63500" marR="63500" marT="12700" marB="12700" anchor="ctr">
-                    <a:solidFill>
-                      <a:srgbClr val="F4F6F8"/>
-                    </a:solidFill>
-                  </a:tcPr>
-                </a:tc>
-              </a:tr>
-              <a:tr h="537210">
-                <a:tc>
-                  <a:txBody>
-                    <a:bodyPr/>
-                    <a:lstStyle/>
-                    <a:p>
-                      <a:pPr algn="l"/>
-                      <a:r>
-                        <a:rPr sz="1050" b="1" i="0">
-                          <a:solidFill>
-                            <a:srgbClr val="1F2A37"/>
-                          </a:solidFill>
-                          <a:latin typeface="Calibri"/>
-                        </a:rPr>
-                        <a:t>Ends when</a:t>
-                      </a:r>
-                    </a:p>
-                  </a:txBody>
-                  <a:tcPr marL="63500" marR="63500" marT="12700" marB="12700" anchor="ctr">
-                    <a:solidFill>
-                      <a:srgbClr val="FFFFFF"/>
-                    </a:solidFill>
-                  </a:tcPr>
-                </a:tc>
-                <a:tc>
-                  <a:txBody>
-                    <a:bodyPr/>
-                    <a:lstStyle/>
-                    <a:p>
-                      <a:pPr algn="l"/>
-                      <a:r>
-                        <a:rPr sz="1050" b="0" i="0">
-                          <a:solidFill>
-                            <a:srgbClr val="1F2A37"/>
-                          </a:solidFill>
-                          <a:latin typeface="Calibri"/>
-                        </a:rPr>
-                        <a:t>the answer is emitted</a:t>
-                      </a:r>
-                    </a:p>
-                  </a:txBody>
-                  <a:tcPr marL="63500" marR="63500" marT="12700" marB="12700" anchor="ctr">
-                    <a:solidFill>
-                      <a:srgbClr val="FFFFFF"/>
-                    </a:solidFill>
-                  </a:tcPr>
-                </a:tc>
-                <a:tc>
-                  <a:txBody>
-                    <a:bodyPr/>
-                    <a:lstStyle/>
-                    <a:p>
-                      <a:pPr algn="l"/>
-                      <a:r>
-                        <a:rPr sz="1050" b="0" i="0">
-                          <a:solidFill>
-                            <a:srgbClr val="1F2A37"/>
-                          </a:solidFill>
-                          <a:latin typeface="Calibri"/>
-                        </a:rPr>
-                        <a:t>the dialogue resolves, or policy
-is violated</a:t>
-                      </a:r>
-                    </a:p>
-                  </a:txBody>
-                  <a:tcPr marL="63500" marR="63500" marT="12700" marB="12700" anchor="ctr">
-                    <a:solidFill>
-                      <a:srgbClr val="FFFFFF"/>
-                    </a:solidFill>
-                  </a:tcPr>
-                </a:tc>
-                <a:tc>
-                  <a:txBody>
-                    <a:bodyPr/>
-                    <a:lstStyle/>
-                    <a:p>
-                      <a:pPr algn="l"/>
-                      <a:r>
-                        <a:rPr sz="1050" b="0" i="0">
-                          <a:solidFill>
-                            <a:srgbClr val="1F2A37"/>
-                          </a:solidFill>
-                          <a:latin typeface="Calibri"/>
-                        </a:rPr>
-                        <a:t>the goal state is reached — or the
-600 s task timeout kills it</a:t>
-                      </a:r>
-                    </a:p>
-                  </a:txBody>
-                  <a:tcPr marL="63500" marR="63500" marT="12700" marB="12700" anchor="ctr">
-                    <a:solidFill>
-                      <a:srgbClr val="FFFFFF"/>
-                    </a:solidFill>
-                  </a:tcPr>
-                </a:tc>
-              </a:tr>
-              <a:tr h="537210">
-                <a:tc>
-                  <a:txBody>
-                    <a:bodyPr/>
-                    <a:lstStyle/>
-                    <a:p>
-                      <a:pPr algn="l"/>
-                      <a:r>
-                        <a:rPr sz="1050" b="1" i="0">
-                          <a:solidFill>
-                            <a:srgbClr val="1F2A37"/>
-                          </a:solidFill>
-                          <a:latin typeface="Calibri"/>
-                        </a:rPr>
-                        <a:t>Scored by</a:t>
-                      </a:r>
-                    </a:p>
-                  </a:txBody>
-                  <a:tcPr marL="63500" marR="63500" marT="12700" marB="12700" anchor="ctr">
-                    <a:solidFill>
-                      <a:srgbClr val="F4F6F8"/>
-                    </a:solidFill>
-                  </a:tcPr>
-                </a:tc>
-                <a:tc>
-                  <a:txBody>
-                    <a:bodyPr/>
-                    <a:lstStyle/>
-                    <a:p>
-                      <a:pPr algn="l"/>
-                      <a:r>
-                        <a:rPr sz="1050" b="0" i="0">
-                          <a:solidFill>
-                            <a:srgbClr val="1F2A37"/>
-                          </a:solidFill>
-                          <a:latin typeface="Calibri"/>
-                        </a:rPr>
-                        <a:t>exact numeric match</a:t>
-                      </a:r>
-                    </a:p>
-                  </a:txBody>
-                  <a:tcPr marL="63500" marR="63500" marT="12700" marB="12700" anchor="ctr">
-                    <a:solidFill>
-                      <a:srgbClr val="F4F6F8"/>
-                    </a:solidFill>
-                  </a:tcPr>
-                </a:tc>
-                <a:tc>
-                  <a:txBody>
-                    <a:bodyPr/>
-                    <a:lstStyle/>
-                    <a:p>
-                      <a:pPr algn="l"/>
-                      <a:r>
-                        <a:rPr sz="1050" b="0" i="0">
-                          <a:solidFill>
-                            <a:srgbClr val="1F2A37"/>
-                          </a:solidFill>
-                          <a:latin typeface="Calibri"/>
-                        </a:rPr>
-                        <a:t>task completion + policy
-compliance (tau2's own scorer)</a:t>
-                      </a:r>
-                    </a:p>
-                  </a:txBody>
-                  <a:tcPr marL="63500" marR="63500" marT="12700" marB="12700" anchor="ctr">
-                    <a:solidFill>
-                      <a:srgbClr val="F4F6F8"/>
-                    </a:solidFill>
-                  </a:tcPr>
-                </a:tc>
-                <a:tc>
-                  <a:txBody>
-                    <a:bodyPr/>
-                    <a:lstStyle/>
-                    <a:p>
-                      <a:pPr algn="l"/>
-                      <a:r>
-                        <a:rPr sz="1050" b="0" i="0">
-                          <a:solidFill>
-                            <a:srgbClr val="1F2A37"/>
-                          </a:solidFill>
-                          <a:latin typeface="Calibri"/>
-                        </a:rPr>
-                        <a:t>appworld's state assertions,
-all-or-nothing</a:t>
-                      </a:r>
-                    </a:p>
-                  </a:txBody>
-                  <a:tcPr marL="63500" marR="63500" marT="12700" marB="12700" anchor="ctr">
-                    <a:solidFill>
-                      <a:srgbClr val="F4F6F8"/>
-                    </a:solidFill>
-                  </a:tcPr>
-                </a:tc>
-              </a:tr>
-              <a:tr h="537210">
-                <a:tc>
-                  <a:txBody>
-                    <a:bodyPr/>
-                    <a:lstStyle/>
-                    <a:p>
-                      <a:pPr algn="l"/>
-                      <a:r>
-                        <a:rPr sz="1050" b="1" i="0">
-                          <a:solidFill>
-                            <a:srgbClr val="1F2A37"/>
-                          </a:solidFill>
-                          <a:latin typeface="Calibri"/>
-                        </a:rPr>
-                        <a:t>It exists to test</a:t>
-                      </a:r>
-                    </a:p>
-                  </a:txBody>
-                  <a:tcPr marL="63500" marR="63500" marT="12700" marB="12700" anchor="ctr">
-                    <a:solidFill>
-                      <a:srgbClr val="FFFFFF"/>
-                    </a:solidFill>
-                  </a:tcPr>
-                </a:tc>
-                <a:tc>
-                  <a:txBody>
-                    <a:bodyPr/>
-                    <a:lstStyle/>
-                    <a:p>
-                      <a:pPr algn="l"/>
-                      <a:r>
-                        <a:rPr sz="1050" b="0" i="0">
-                          <a:solidFill>
-                            <a:srgbClr val="1F2A37"/>
-                          </a:solidFill>
-                          <a:latin typeface="Calibri"/>
-                        </a:rPr>
-                        <a:t>that the PLUMBING works:
-deploy, auth, telemetry, S3</a:t>
-                      </a:r>
-                    </a:p>
-                  </a:txBody>
-                  <a:tcPr marL="63500" marR="63500" marT="12700" marB="12700" anchor="ctr">
-                    <a:solidFill>
-                      <a:srgbClr val="FFFFFF"/>
-                    </a:solidFill>
-                  </a:tcPr>
-                </a:tc>
-                <a:tc>
-                  <a:txBody>
-                    <a:bodyPr/>
-                    <a:lstStyle/>
-                    <a:p>
-                      <a:pPr algn="l"/>
-                      <a:r>
-                        <a:rPr sz="1050" b="0" i="0">
-                          <a:solidFill>
-                            <a:srgbClr val="1F2A37"/>
-                          </a:solidFill>
-                          <a:latin typeface="Calibri"/>
-                        </a:rPr>
-                        <a:t>that the agent HOLDS STATE
-across turns and uses tools
-under a policy</a:t>
-                      </a:r>
-                    </a:p>
-                  </a:txBody>
-                  <a:tcPr marL="63500" marR="63500" marT="12700" marB="12700" anchor="ctr">
-                    <a:solidFill>
-                      <a:srgbClr val="FFFFFF"/>
-                    </a:solidFill>
-                  </a:tcPr>
-                </a:tc>
-                <a:tc>
-                  <a:txBody>
-                    <a:bodyPr/>
-                    <a:lstStyle/>
-                    <a:p>
-                      <a:pPr algn="l"/>
-                      <a:r>
-                        <a:rPr sz="1050" b="0" i="0">
-                          <a:solidFill>
-                            <a:srgbClr val="1F2A37"/>
-                          </a:solidFill>
-                          <a:latin typeface="Calibri"/>
-                        </a:rPr>
-                        <a:t>that the agent survives LONG
-HORIZONS: context growth,
-timeouts, partial failure</a:t>
-                      </a:r>
-                    </a:p>
-                  </a:txBody>
-                  <a:tcPr marL="63500" marR="63500" marT="12700" marB="12700" anchor="ctr">
-                    <a:solidFill>
-                      <a:srgbClr val="FFFFFF"/>
-                    </a:solidFill>
-                  </a:tcPr>
-                </a:tc>
-              </a:tr>
-              <a:tr h="537210">
-                <a:tc>
-                  <a:txBody>
-                    <a:bodyPr/>
-                    <a:lstStyle/>
-                    <a:p>
-                      <a:pPr algn="l"/>
-                      <a:r>
-                        <a:rPr sz="1050" b="1" i="0">
-                          <a:solidFill>
-                            <a:srgbClr val="1F2A37"/>
-                          </a:solidFill>
-                          <a:latin typeface="Calibri"/>
-                        </a:rPr>
-                        <a:t>A result is worth</a:t>
-                      </a:r>
-                    </a:p>
-                  </a:txBody>
-                  <a:tcPr marL="63500" marR="63500" marT="12700" marB="12700" anchor="ctr">
-                    <a:solidFill>
-                      <a:srgbClr val="F4F6F8"/>
-                    </a:solidFill>
-                  </a:tcPr>
-                </a:tc>
-                <a:tc>
-                  <a:txBody>
-                    <a:bodyPr/>
-                    <a:lstStyle/>
-                    <a:p>
-                      <a:pPr algn="l"/>
-                      <a:r>
-                        <a:rPr sz="1050" b="0" i="0">
-                          <a:solidFill>
-                            <a:srgbClr val="1F2A37"/>
-                          </a:solidFill>
-                          <a:latin typeface="Calibri"/>
-                        </a:rPr>
-                        <a:t>a go/no-go on infrastructure.
-It saturates near 1.0, so it
-cannot rank models</a:t>
-                      </a:r>
-                    </a:p>
-                  </a:txBody>
-                  <a:tcPr marL="63500" marR="63500" marT="12700" marB="12700" anchor="ctr">
-                    <a:solidFill>
-                      <a:srgbClr val="F4F6F8"/>
-                    </a:solidFill>
-                  </a:tcPr>
-                </a:tc>
-                <a:tc>
-                  <a:txBody>
-                    <a:bodyPr/>
-                    <a:lstStyle/>
-                    <a:p>
-                      <a:pPr algn="l"/>
-                      <a:r>
-                        <a:rPr sz="1050" b="0" i="0">
-                          <a:solidFill>
-                            <a:srgbClr val="1F2A37"/>
-                          </a:solidFill>
-                          <a:latin typeface="Calibri"/>
-                        </a:rPr>
-                        <a:t>a genuine model/config
-comparison — it discriminates,
-and 0.83 leaves headroom both ways</a:t>
-                      </a:r>
-                    </a:p>
-                  </a:txBody>
-                  <a:tcPr marL="63500" marR="63500" marT="12700" marB="12700" anchor="ctr">
-                    <a:solidFill>
-                      <a:srgbClr val="F4F6F8"/>
-                    </a:solidFill>
-                  </a:tcPr>
-                </a:tc>
-                <a:tc>
-                  <a:txBody>
-                    <a:bodyPr/>
-                    <a:lstStyle/>
-                    <a:p>
-                      <a:pPr algn="l"/>
-                      <a:r>
-                        <a:rPr sz="1050" b="0" i="0">
-                          <a:solidFill>
-                            <a:srgbClr val="1F2A37"/>
-                          </a:solidFill>
-                          <a:latin typeface="Calibri"/>
-                        </a:rPr>
-                        <a:t>a stress signal, not a capability
-score: at 0.00 it tells you what
-BREAKS, not who is better</a:t>
-                      </a:r>
-                    </a:p>
-                  </a:txBody>
-                  <a:tcPr marL="63500" marR="63500" marT="12700" marB="12700" anchor="ctr">
-                    <a:solidFill>
-                      <a:srgbClr val="F4F6F8"/>
-                    </a:solidFill>
-                  </a:tcPr>
-                </a:tc>
-              </a:tr>
-              <a:tr h="537210">
-                <a:tc>
-                  <a:txBody>
-                    <a:bodyPr/>
-                    <a:lstStyle/>
-                    <a:p>
-                      <a:pPr algn="l"/>
-                      <a:r>
-                        <a:rPr sz="1050" b="1" i="0">
-                          <a:solidFill>
-                            <a:srgbClr val="1F2A37"/>
-                          </a:solidFill>
-                          <a:latin typeface="Calibri"/>
-                        </a:rPr>
-                        <a:t>Watch out for</a:t>
-                      </a:r>
-                    </a:p>
-                  </a:txBody>
-                  <a:tcPr marL="63500" marR="63500" marT="12700" marB="12700" anchor="ctr">
-                    <a:solidFill>
-                      <a:srgbClr val="FFFFFF"/>
-                    </a:solidFill>
-                  </a:tcPr>
-                </a:tc>
-                <a:tc>
-                  <a:txBody>
-                    <a:bodyPr/>
-                    <a:lstStyle/>
-                    <a:p>
-                      <a:pPr algn="l"/>
-                      <a:r>
-                        <a:rPr sz="1050" b="0" i="0">
-                          <a:solidFill>
-                            <a:srgbClr val="1F2A37"/>
-                          </a:solidFill>
-                          <a:latin typeface="Calibri"/>
-                        </a:rPr>
-                        <a:t>1.0 proves nothing about
-the agent</a:t>
-                      </a:r>
-                    </a:p>
-                  </a:txBody>
-                  <a:tcPr marL="63500" marR="63500" marT="12700" marB="12700" anchor="ctr">
-                    <a:solidFill>
-                      <a:srgbClr val="FFFFFF"/>
-                    </a:solidFill>
-                  </a:tcPr>
-                </a:tc>
-                <a:tc>
-                  <a:txBody>
-                    <a:bodyPr/>
-                    <a:lstStyle/>
-                    <a:p>
-                      <a:pPr algn="l"/>
-                      <a:r>
-                        <a:rPr sz="1050" b="0" i="0">
-                          <a:solidFill>
-                            <a:srgbClr val="1F2A37"/>
-                          </a:solidFill>
-                          <a:latin typeface="Calibri"/>
-                        </a:rPr>
-                        <a:t>its user simulator is billed
-but NOT in our telemetry</a:t>
-                      </a:r>
-                    </a:p>
-                  </a:txBody>
-                  <a:tcPr marL="63500" marR="63500" marT="12700" marB="12700" anchor="ctr">
-                    <a:solidFill>
-                      <a:srgbClr val="FFFFFF"/>
-                    </a:solidFill>
-                  </a:tcPr>
-                </a:tc>
-                <a:tc>
-                  <a:txBody>
-                    <a:bodyPr/>
-                    <a:lstStyle/>
-                    <a:p>
-                      <a:pPr algn="l"/>
-                      <a:r>
-                        <a:rPr sz="1050" b="0" i="0">
-                          <a:solidFill>
-                            <a:srgbClr val="1F2A37"/>
-                          </a:solidFill>
-                          <a:latin typeface="Calibri"/>
-                        </a:rPr>
-                        <a:t>15 of 50 tasks time out, and a
-killed task leaves NO report row</a:t>
-                      </a:r>
-                    </a:p>
-                  </a:txBody>
-                  <a:tcPr marL="63500" marR="63500" marT="12700" marB="12700" anchor="ctr">
-                    <a:solidFill>
-                      <a:srgbClr val="FFFFFF"/>
-                    </a:solidFill>
-                  </a:tcPr>
-                </a:tc>
-              </a:tr>
-            </a:tbl>
-          </a:graphicData>
-        </a:graphic>
-      </p:graphicFrame>
-      <p:sp>
-        <p:nvSpPr>
-          <p:cNvPr id="4" name="Rounded Rectangle 3"/>
-          <p:cNvSpPr/>
-          <p:nvPr/>
-        </p:nvSpPr>
-        <p:spPr>
-          <a:xfrm>
-            <a:off x="411480" y="5623560"/>
-            <a:ext cx="11338560" cy="777240"/>
-          </a:xfrm>
-          <a:prstGeom prst="roundRect">
-            <a:avLst/>
-          </a:prstGeom>
-          <a:solidFill>
-            <a:srgbClr val="EEEFF1"/>
-          </a:solidFill>
-          <a:ln w="12700">
-            <a:solidFill>
-              <a:srgbClr val="6B6B6B"/>
-            </a:solidFill>
-          </a:ln>
-          <a:effectLst/>
-        </p:spPr>
-        <p:style>
-          <a:lnRef idx="1">
-            <a:schemeClr val="accent1"/>
-          </a:lnRef>
-          <a:fillRef idx="3">
-            <a:schemeClr val="accent1"/>
-          </a:fillRef>
-          <a:effectRef idx="2">
-            <a:schemeClr val="accent1"/>
-          </a:effectRef>
-          <a:fontRef idx="minor">
-            <a:schemeClr val="lt1"/>
-          </a:fontRef>
-        </p:style>
-        <p:txBody>
-          <a:bodyPr rtlCol="0" anchor="ctr" wrap="square" tIns="25400" bIns="25400" lIns="228600" rIns="228600"/>
-          <a:lstStyle/>
-          <a:p>
-            <a:pPr algn="ctr"/>
-            <a:r>
-              <a:rPr sz="1200" b="0" i="0">
-                <a:solidFill>
-                  <a:srgbClr val="1F2A37"/>
-                </a:solidFill>
-                <a:latin typeface="Calibri"/>
-              </a:rPr>
-              <a:t>gsm8k is a SMOKE TEST WITH A SCORE — reading its 0.97 as a model measurement is the most common misreading of these numbers.  tau2 is the only rung that discriminates, and it fails informatively: a wrong answer, a policy violation and a dropped thread are different failures.  appworld earns its place precisely BECAUSE it fails — it is the only leg that has ever exposed a timeout, a context limit or a cache effect before a user did.</a:t>
-            </a:r>
-          </a:p>
-        </p:txBody>
-      </p:sp>
-      <p:sp>
-        <p:nvSpPr>
-          <p:cNvPr id="5" name="TextBox 4"/>
-          <p:cNvSpPr txBox="1"/>
-          <p:nvPr/>
-        </p:nvSpPr>
-        <p:spPr>
-          <a:xfrm>
-            <a:off x="11795760" y="6437376"/>
-            <a:ext cx="320040" cy="310896"/>
-          </a:xfrm>
-          <a:prstGeom prst="rect">
-            <a:avLst/>
-          </a:prstGeom>
-          <a:noFill/>
-        </p:spPr>
-        <p:txBody>
-          <a:bodyPr wrap="none" anchor="ctr" lIns="0" rIns="0" tIns="0" bIns="0">
-            <a:spAutoFit/>
-          </a:bodyPr>
-          <a:lstStyle/>
-          <a:p>
-            <a:pPr algn="r">
-              <a:spcAft>
-                <a:spcPts val="300"/>
-              </a:spcAft>
-            </a:pPr>
-            <a:r>
-              <a:rPr sz="1200" b="0" i="0">
-                <a:solidFill>
-                  <a:srgbClr val="6B6B6B"/>
-                </a:solidFill>
-                <a:latin typeface="Calibri"/>
-              </a:rPr>
               <a:t>21</a:t>
             </a:r>
           </a:p>
@@ -17323,724 +17323,6 @@
 </file>
 
 <file path=ppt/slides/slide22.xml><?xml version="1.0" encoding="utf-8"?>
-<p:sld xmlns:a="http://schemas.openxmlformats.org/drawingml/2006/main" xmlns:p="http://schemas.openxmlformats.org/presentationml/2006/main" xmlns:r="http://schemas.openxmlformats.org/officeDocument/2006/relationships">
-  <p:cSld name="7.10 The 12 Runs Compared — What Each Band Established">
-    <p:spTree>
-      <p:nvGrpSpPr>
-        <p:cNvPr id="1" name=""/>
-        <p:cNvGrpSpPr/>
-        <p:nvPr/>
-      </p:nvGrpSpPr>
-      <p:grpSpPr/>
-      <p:sp>
-        <p:nvSpPr>
-          <p:cNvPr id="2" name="Rectangle 1"/>
-          <p:cNvSpPr/>
-          <p:nvPr/>
-        </p:nvSpPr>
-        <p:spPr>
-          <a:xfrm>
-            <a:off x="0" y="0"/>
-            <a:ext cx="12192000" cy="950000"/>
-          </a:xfrm>
-          <a:prstGeom prst="rect">
-            <a:avLst/>
-          </a:prstGeom>
-          <a:solidFill>
-            <a:srgbClr val="1B3A5C"/>
-          </a:solidFill>
-          <a:ln>
-            <a:noFill/>
-          </a:ln>
-          <a:effectLst/>
-        </p:spPr>
-        <p:style>
-          <a:lnRef idx="1">
-            <a:schemeClr val="accent1"/>
-          </a:lnRef>
-          <a:fillRef idx="3">
-            <a:schemeClr val="accent1"/>
-          </a:fillRef>
-          <a:effectRef idx="2">
-            <a:schemeClr val="accent1"/>
-          </a:effectRef>
-          <a:fontRef idx="minor">
-            <a:schemeClr val="lt1"/>
-          </a:fontRef>
-        </p:style>
-        <p:txBody>
-          <a:bodyPr rtlCol="0" anchor="ctr" lIns="355600"/>
-          <a:lstStyle/>
-          <a:p>
-            <a:pPr algn="ctr"/>
-            <a:r>
-              <a:rPr sz="2600" b="1" i="0">
-                <a:solidFill>
-                  <a:srgbClr val="FFFFFF"/>
-                </a:solidFill>
-                <a:latin typeface="Calibri"/>
-              </a:rPr>
-              <a:t>7.10  The 12 Runs Compared — What Each Band Established</a:t>
-            </a:r>
-          </a:p>
-          <a:p>
-            <a:r>
-              <a:rPr sz="1400" b="0" i="0">
-                <a:solidFill>
-                  <a:srgbClr val="C9D9EC"/>
-                </a:solidFill>
-                <a:latin typeface="Calibri"/>
-              </a:rPr>
-              <a:t>Each leg changes exactly ONE thing against the leg before it, so a difference has one candidate explanation</a:t>
-            </a:r>
-          </a:p>
-        </p:txBody>
-      </p:sp>
-      <p:graphicFrame>
-        <p:nvGraphicFramePr>
-          <p:cNvPr id="3" name="Table 2"/>
-          <p:cNvGraphicFramePr>
-            <a:graphicFrameLocks noGrp="1"/>
-          </p:cNvGraphicFramePr>
-          <p:nvPr/>
-        </p:nvGraphicFramePr>
-        <p:xfrm>
-          <a:off x="411480" y="1143000"/>
-          <a:ext cx="11338559" cy="3017520"/>
-        </p:xfrm>
-        <a:graphic>
-          <a:graphicData uri="http://schemas.openxmlformats.org/drawingml/2006/table">
-            <a:tbl>
-              <a:tblPr firstRow="1">
-                <a:tableStyleId>{5C22544A-7EE6-4342-B048-85BDC9FD1C3A}</a:tableStyleId>
-              </a:tblPr>
-              <a:tblGrid>
-                <a:gridCol w="960120"/>
-                <a:gridCol w="3977639"/>
-                <a:gridCol w="6400800"/>
-              </a:tblGrid>
-              <a:tr h="502920">
-                <a:tc>
-                  <a:txBody>
-                    <a:bodyPr/>
-                    <a:lstStyle/>
-                    <a:p>
-                      <a:pPr algn="l"/>
-                      <a:r>
-                        <a:rPr sz="1050" b="1" i="0">
-                          <a:solidFill>
-                            <a:srgbClr val="FFFFFF"/>
-                          </a:solidFill>
-                          <a:latin typeface="Calibri"/>
-                        </a:rPr>
-                        <a:t>legs</a:t>
-                      </a:r>
-                    </a:p>
-                  </a:txBody>
-                  <a:tcPr marL="63500" marR="63500" marT="12700" marB="12700" anchor="ctr">
-                    <a:solidFill>
-                      <a:srgbClr val="1B3A5C"/>
-                    </a:solidFill>
-                  </a:tcPr>
-                </a:tc>
-                <a:tc>
-                  <a:txBody>
-                    <a:bodyPr/>
-                    <a:lstStyle/>
-                    <a:p>
-                      <a:pPr algn="ctr"/>
-                      <a:r>
-                        <a:rPr sz="1050" b="1" i="0">
-                          <a:solidFill>
-                            <a:srgbClr val="FFFFFF"/>
-                          </a:solidFill>
-                          <a:latin typeface="Calibri"/>
-                        </a:rPr>
-                        <a:t>what they parameterize</a:t>
-                      </a:r>
-                    </a:p>
-                  </a:txBody>
-                  <a:tcPr marL="63500" marR="63500" marT="12700" marB="12700" anchor="ctr">
-                    <a:solidFill>
-                      <a:srgbClr val="1B3A5C"/>
-                    </a:solidFill>
-                  </a:tcPr>
-                </a:tc>
-                <a:tc>
-                  <a:txBody>
-                    <a:bodyPr/>
-                    <a:lstStyle/>
-                    <a:p>
-                      <a:pPr algn="ctr"/>
-                      <a:r>
-                        <a:rPr sz="1050" b="1" i="0">
-                          <a:solidFill>
-                            <a:srgbClr val="FFFFFF"/>
-                          </a:solidFill>
-                          <a:latin typeface="Calibri"/>
-                        </a:rPr>
-                        <a:t>what having run them established</a:t>
-                      </a:r>
-                    </a:p>
-                  </a:txBody>
-                  <a:tcPr marL="63500" marR="63500" marT="12700" marB="12700" anchor="ctr">
-                    <a:solidFill>
-                      <a:srgbClr val="1B3A5C"/>
-                    </a:solidFill>
-                  </a:tcPr>
-                </a:tc>
-              </a:tr>
-              <a:tr h="502920">
-                <a:tc>
-                  <a:txBody>
-                    <a:bodyPr/>
-                    <a:lstStyle/>
-                    <a:p>
-                      <a:pPr algn="l"/>
-                      <a:r>
-                        <a:rPr sz="1050" b="1" i="0">
-                          <a:solidFill>
-                            <a:srgbClr val="1F2A37"/>
-                          </a:solidFill>
-                          <a:latin typeface="Calibri"/>
-                        </a:rPr>
-                        <a:t>#1–#3</a:t>
-                      </a:r>
-                    </a:p>
-                  </a:txBody>
-                  <a:tcPr marL="63500" marR="63500" marT="12700" marB="12700" anchor="ctr">
-                    <a:solidFill>
-                      <a:srgbClr val="FFFFFF"/>
-                    </a:solidFill>
-                  </a:tcPr>
-                </a:tc>
-                <a:tc>
-                  <a:txBody>
-                    <a:bodyPr/>
-                    <a:lstStyle/>
-                    <a:p>
-                      <a:pPr algn="l"/>
-                      <a:r>
-                        <a:rPr sz="1050" b="0" i="0">
-                          <a:solidFill>
-                            <a:srgbClr val="1F2A37"/>
-                          </a:solidFill>
-                          <a:latin typeface="Calibri"/>
-                        </a:rPr>
-                        <a:t>gsm8k 1 → 10 → 50 tasks, p=1 → 4
-(volume, then concurrency)</a:t>
-                      </a:r>
-                    </a:p>
-                  </a:txBody>
-                  <a:tcPr marL="63500" marR="63500" marT="12700" marB="12700" anchor="ctr">
-                    <a:solidFill>
-                      <a:srgbClr val="FFFFFF"/>
-                    </a:solidFill>
-                  </a:tcPr>
-                </a:tc>
-                <a:tc>
-                  <a:txBody>
-                    <a:bodyPr/>
-                    <a:lstStyle/>
-                    <a:p>
-                      <a:pPr algn="l"/>
-                      <a:r>
-                        <a:rPr sz="1050" b="0" i="0">
-                          <a:solidFill>
-                            <a:srgbClr val="1F2A37"/>
-                          </a:solidFill>
-                          <a:latin typeface="Calibri"/>
-                        </a:rPr>
-                        <a:t>the pipeline is stable and DETERMINISTIC: 6 of 12 legs have byte-identical input-token
-totals across two unlike clusters — the strongest like-for-like check available</a:t>
-                      </a:r>
-                    </a:p>
-                  </a:txBody>
-                  <a:tcPr marL="63500" marR="63500" marT="12700" marB="12700" anchor="ctr">
-                    <a:solidFill>
-                      <a:srgbClr val="FFFFFF"/>
-                    </a:solidFill>
-                  </a:tcPr>
-                </a:tc>
-              </a:tr>
-              <a:tr h="502920">
-                <a:tc>
-                  <a:txBody>
-                    <a:bodyPr/>
-                    <a:lstStyle/>
-                    <a:p>
-                      <a:pPr algn="l"/>
-                      <a:r>
-                        <a:rPr sz="1050" b="1" i="0">
-                          <a:solidFill>
-                            <a:srgbClr val="1F2A37"/>
-                          </a:solidFill>
-                          <a:latin typeface="Calibri"/>
-                        </a:rPr>
-                        <a:t>#4</a:t>
-                      </a:r>
-                    </a:p>
-                  </a:txBody>
-                  <a:tcPr marL="63500" marR="63500" marT="12700" marB="12700" anchor="ctr">
-                    <a:solidFill>
-                      <a:srgbClr val="F4F6F8"/>
-                    </a:solidFill>
-                  </a:tcPr>
-                </a:tc>
-                <a:tc>
-                  <a:txBody>
-                    <a:bodyPr/>
-                    <a:lstStyle/>
-                    <a:p>
-                      <a:pPr algn="l"/>
-                      <a:r>
-                        <a:rPr sz="1050" b="0" i="0">
-                          <a:solidFill>
-                            <a:srgbClr val="1F2A37"/>
-                          </a:solidFill>
-                          <a:latin typeface="Calibri"/>
-                        </a:rPr>
-                        <a:t>gsm8k on Azure/gpt-4.1
-(model swap, identical tasks)</a:t>
-                      </a:r>
-                    </a:p>
-                  </a:txBody>
-                  <a:tcPr marL="63500" marR="63500" marT="12700" marB="12700" anchor="ctr">
-                    <a:solidFill>
-                      <a:srgbClr val="F4F6F8"/>
-                    </a:solidFill>
-                  </a:tcPr>
-                </a:tc>
-                <a:tc>
-                  <a:txBody>
-                    <a:bodyPr/>
-                    <a:lstStyle/>
-                    <a:p>
-                      <a:pPr algn="l"/>
-                      <a:r>
-                        <a:rPr sz="1050" b="0" i="0">
-                          <a:solidFill>
-                            <a:srgbClr val="1F2A37"/>
-                          </a:solidFill>
-                          <a:latin typeface="Calibri"/>
-                        </a:rPr>
-                        <a:t>the only clean model comparison in the matrix: gpt-4.1 costs 4.1× gpt-5-mini for no
-pass-rate gain at this difficulty, and the INPUT side decides it alone (7.7)</a:t>
-                      </a:r>
-                    </a:p>
-                  </a:txBody>
-                  <a:tcPr marL="63500" marR="63500" marT="12700" marB="12700" anchor="ctr">
-                    <a:solidFill>
-                      <a:srgbClr val="F4F6F8"/>
-                    </a:solidFill>
-                  </a:tcPr>
-                </a:tc>
-              </a:tr>
-              <a:tr h="502920">
-                <a:tc>
-                  <a:txBody>
-                    <a:bodyPr/>
-                    <a:lstStyle/>
-                    <a:p>
-                      <a:pPr algn="l"/>
-                      <a:r>
-                        <a:rPr sz="1050" b="1" i="0">
-                          <a:solidFill>
-                            <a:srgbClr val="1F2A37"/>
-                          </a:solidFill>
-                          <a:latin typeface="Calibri"/>
-                        </a:rPr>
-                        <a:t>#5–#8</a:t>
-                      </a:r>
-                    </a:p>
-                  </a:txBody>
-                  <a:tcPr marL="63500" marR="63500" marT="12700" marB="12700" anchor="ctr">
-                    <a:solidFill>
-                      <a:srgbClr val="FFFFFF"/>
-                    </a:solidFill>
-                  </a:tcPr>
-                </a:tc>
-                <a:tc>
-                  <a:txBody>
-                    <a:bodyPr/>
-                    <a:lstStyle/>
-                    <a:p>
-                      <a:pPr algn="l"/>
-                      <a:r>
-                        <a:rPr sz="1050" b="0" i="0">
-                          <a:solidFill>
-                            <a:srgbClr val="1F2A37"/>
-                          </a:solidFill>
-                          <a:latin typeface="Calibri"/>
-                        </a:rPr>
-                        <a:t>AuthBridge auth-only / ibac-only / full /
-full + per-plugin override, same 5 tasks</a:t>
-                      </a:r>
-                    </a:p>
-                  </a:txBody>
-                  <a:tcPr marL="63500" marR="63500" marT="12700" marB="12700" anchor="ctr">
-                    <a:solidFill>
-                      <a:srgbClr val="FFFFFF"/>
-                    </a:solidFill>
-                  </a:tcPr>
-                </a:tc>
-                <a:tc>
-                  <a:txBody>
-                    <a:bodyPr/>
-                    <a:lstStyle/>
-                    <a:p>
-                      <a:pPr algn="l"/>
-                      <a:r>
-                        <a:rPr sz="1050" b="0" i="0">
-                          <a:solidFill>
-                            <a:srgbClr val="1F2A37"/>
-                          </a:solidFill>
-                          <a:latin typeface="Calibri"/>
-                        </a:rPr>
-                        <a:t>plugin cost is PLATFORM-SPECIFIC: OpenShift pays in the sidecar (+13.68 s/task), KinD in
-the judge (+1.54 s) — never quote a per-task overhead without naming the cluster</a:t>
-                      </a:r>
-                    </a:p>
-                  </a:txBody>
-                  <a:tcPr marL="63500" marR="63500" marT="12700" marB="12700" anchor="ctr">
-                    <a:solidFill>
-                      <a:srgbClr val="FFFFFF"/>
-                    </a:solidFill>
-                  </a:tcPr>
-                </a:tc>
-              </a:tr>
-              <a:tr h="502920">
-                <a:tc>
-                  <a:txBody>
-                    <a:bodyPr/>
-                    <a:lstStyle/>
-                    <a:p>
-                      <a:pPr algn="l"/>
-                      <a:r>
-                        <a:rPr sz="1050" b="1" i="0">
-                          <a:solidFill>
-                            <a:srgbClr val="1F2A37"/>
-                          </a:solidFill>
-                          <a:latin typeface="Calibri"/>
-                        </a:rPr>
-                        <a:t>#9–#10</a:t>
-                      </a:r>
-                    </a:p>
-                  </a:txBody>
-                  <a:tcPr marL="63500" marR="63500" marT="12700" marB="12700" anchor="ctr">
-                    <a:solidFill>
-                      <a:srgbClr val="F4F6F8"/>
-                    </a:solidFill>
-                  </a:tcPr>
-                </a:tc>
-                <a:tc>
-                  <a:txBody>
-                    <a:bodyPr/>
-                    <a:lstStyle/>
-                    <a:p>
-                      <a:pPr algn="l"/>
-                      <a:r>
-                        <a:rPr sz="1050" b="0" i="0">
-                          <a:solidFill>
-                            <a:srgbClr val="1F2A37"/>
-                          </a:solidFill>
-                          <a:latin typeface="Calibri"/>
-                        </a:rPr>
-                        <a:t>tau2 10 → 20 tasks, p=1 → 4
-(multi-turn, then under load)</a:t>
-                      </a:r>
-                    </a:p>
-                  </a:txBody>
-                  <a:tcPr marL="63500" marR="63500" marT="12700" marB="12700" anchor="ctr">
-                    <a:solidFill>
-                      <a:srgbClr val="F4F6F8"/>
-                    </a:solidFill>
-                  </a:tcPr>
-                </a:tc>
-                <a:tc>
-                  <a:txBody>
-                    <a:bodyPr/>
-                    <a:lstStyle/>
-                    <a:p>
-                      <a:pPr algn="l"/>
-                      <a:r>
-                        <a:rPr sz="1050" b="0" i="0">
-                          <a:solidFill>
-                            <a:srgbClr val="1F2A37"/>
-                          </a:solidFill>
-                          <a:latin typeface="Calibri"/>
-                        </a:rPr>
-                        <a:t>multi-turn works end to end, user simulator included — and tau2 is where pass rates
-carry information (0.75–1.00 across sides)</a:t>
-                      </a:r>
-                    </a:p>
-                  </a:txBody>
-                  <a:tcPr marL="63500" marR="63500" marT="12700" marB="12700" anchor="ctr">
-                    <a:solidFill>
-                      <a:srgbClr val="F4F6F8"/>
-                    </a:solidFill>
-                  </a:tcPr>
-                </a:tc>
-              </a:tr>
-              <a:tr h="502920">
-                <a:tc>
-                  <a:txBody>
-                    <a:bodyPr/>
-                    <a:lstStyle/>
-                    <a:p>
-                      <a:pPr algn="l"/>
-                      <a:r>
-                        <a:rPr sz="1050" b="1" i="0">
-                          <a:solidFill>
-                            <a:srgbClr val="1F2A37"/>
-                          </a:solidFill>
-                          <a:latin typeface="Calibri"/>
-                        </a:rPr>
-                        <a:t>#11–#12</a:t>
-                      </a:r>
-                    </a:p>
-                  </a:txBody>
-                  <a:tcPr marL="63500" marR="63500" marT="12700" marB="12700" anchor="ctr">
-                    <a:solidFill>
-                      <a:srgbClr val="FFFFFF"/>
-                    </a:solidFill>
-                  </a:tcPr>
-                </a:tc>
-                <a:tc>
-                  <a:txBody>
-                    <a:bodyPr/>
-                    <a:lstStyle/>
-                    <a:p>
-                      <a:pPr algn="l"/>
-                      <a:r>
-                        <a:rPr sz="1050" b="0" i="0">
-                          <a:solidFill>
-                            <a:srgbClr val="1F2A37"/>
-                          </a:solidFill>
-                          <a:latin typeface="Calibri"/>
-                        </a:rPr>
-                        <a:t>appworld 5 → 20 tasks, p=1 → 4
-(long horizon, then under load)</a:t>
-                      </a:r>
-                    </a:p>
-                  </a:txBody>
-                  <a:tcPr marL="63500" marR="63500" marT="12700" marB="12700" anchor="ctr">
-                    <a:solidFill>
-                      <a:srgbClr val="FFFFFF"/>
-                    </a:solidFill>
-                  </a:tcPr>
-                </a:tc>
-                <a:tc>
-                  <a:txBody>
-                    <a:bodyPr/>
-                    <a:lstStyle/>
-                    <a:p>
-                      <a:pPr algn="l"/>
-                      <a:r>
-                        <a:rPr sz="1050" b="0" i="0">
-                          <a:solidFill>
-                            <a:srgbClr val="1F2A37"/>
-                          </a:solidFill>
-                          <a:latin typeface="Calibri"/>
-                        </a:rPr>
-                        <a:t>the limits are real and they are UPSTREAM: 15 timeouts, a 0.00 pass rate, and 76% of
-the whole matrix's bill in two legs</a:t>
-                      </a:r>
-                    </a:p>
-                  </a:txBody>
-                  <a:tcPr marL="63500" marR="63500" marT="12700" marB="12700" anchor="ctr">
-                    <a:solidFill>
-                      <a:srgbClr val="FFFFFF"/>
-                    </a:solidFill>
-                  </a:tcPr>
-                </a:tc>
-              </a:tr>
-            </a:tbl>
-          </a:graphicData>
-        </a:graphic>
-      </p:graphicFrame>
-      <p:sp>
-        <p:nvSpPr>
-          <p:cNvPr id="4" name="Rounded Rectangle 3"/>
-          <p:cNvSpPr/>
-          <p:nvPr/>
-        </p:nvSpPr>
-        <p:spPr>
-          <a:xfrm>
-            <a:off x="411480" y="4343400"/>
-            <a:ext cx="5623560" cy="2057400"/>
-          </a:xfrm>
-          <a:prstGeom prst="roundRect">
-            <a:avLst/>
-          </a:prstGeom>
-          <a:solidFill>
-            <a:srgbClr val="E4F0F0"/>
-          </a:solidFill>
-          <a:ln w="12700">
-            <a:solidFill>
-              <a:srgbClr val="3D6E70"/>
-            </a:solidFill>
-          </a:ln>
-          <a:effectLst/>
-        </p:spPr>
-        <p:style>
-          <a:lnRef idx="1">
-            <a:schemeClr val="accent1"/>
-          </a:lnRef>
-          <a:fillRef idx="3">
-            <a:schemeClr val="accent1"/>
-          </a:fillRef>
-          <a:effectRef idx="2">
-            <a:schemeClr val="accent1"/>
-          </a:effectRef>
-          <a:fontRef idx="minor">
-            <a:schemeClr val="lt1"/>
-          </a:fontRef>
-        </p:style>
-        <p:txBody>
-          <a:bodyPr rtlCol="0" anchor="ctr" wrap="square" tIns="25400" bIns="25400"/>
-          <a:lstStyle/>
-          <a:p>
-            <a:pPr algn="ctr"/>
-            <a:r>
-              <a:rPr sz="1350" b="1" i="0">
-                <a:solidFill>
-                  <a:srgbClr val="3D6E70"/>
-                </a:solidFill>
-                <a:latin typeface="Calibri"/>
-              </a:rPr>
-              <a:t>What the matrix as a whole is worth</a:t>
-            </a:r>
-          </a:p>
-          <a:p>
-            <a:pPr algn="ctr"/>
-            <a:r>
-              <a:rPr sz="1050" b="0" i="0">
-                <a:solidFill>
-                  <a:srgbClr val="1F2A37"/>
-                </a:solidFill>
-                <a:latin typeface="Calibri"/>
-              </a:rPr>
-              <a:t>Not the pass rates — that the SAME 12 request bodies produce comparable measurements on two unlike clusters. On the v1.28 pair: token capture complete (0 of 267 rows lost their usage span), every task reached the model (0 health-probe losses), 7 of 12 pass rates identical. The 5 that differ are mostly arithmetic on small runs — one task moves a 5-task leg by 0.20.</a:t>
-            </a:r>
-          </a:p>
-        </p:txBody>
-      </p:sp>
-      <p:sp>
-        <p:nvSpPr>
-          <p:cNvPr id="5" name="Rounded Rectangle 4"/>
-          <p:cNvSpPr/>
-          <p:nvPr/>
-        </p:nvSpPr>
-        <p:spPr>
-          <a:xfrm>
-            <a:off x="6309360" y="4343400"/>
-            <a:ext cx="5440680" cy="2057400"/>
-          </a:xfrm>
-          <a:prstGeom prst="roundRect">
-            <a:avLst/>
-          </a:prstGeom>
-          <a:solidFill>
-            <a:srgbClr val="FBEEE4"/>
-          </a:solidFill>
-          <a:ln w="12700">
-            <a:solidFill>
-              <a:srgbClr val="B55A2E"/>
-            </a:solidFill>
-          </a:ln>
-          <a:effectLst/>
-        </p:spPr>
-        <p:style>
-          <a:lnRef idx="1">
-            <a:schemeClr val="accent1"/>
-          </a:lnRef>
-          <a:fillRef idx="3">
-            <a:schemeClr val="accent1"/>
-          </a:fillRef>
-          <a:effectRef idx="2">
-            <a:schemeClr val="accent1"/>
-          </a:effectRef>
-          <a:fontRef idx="minor">
-            <a:schemeClr val="lt1"/>
-          </a:fontRef>
-        </p:style>
-        <p:txBody>
-          <a:bodyPr rtlCol="0" anchor="ctr" wrap="square" tIns="25400" bIns="25400"/>
-          <a:lstStyle/>
-          <a:p>
-            <a:pPr algn="ctr"/>
-            <a:r>
-              <a:rPr sz="1350" b="1" i="0">
-                <a:solidFill>
-                  <a:srgbClr val="B55A2E"/>
-                </a:solidFill>
-                <a:latin typeface="Calibri"/>
-              </a:rPr>
-              <a:t>So read the per-CAUSE table, then the rate</a:t>
-            </a:r>
-          </a:p>
-          <a:p>
-            <a:pPr algn="ctr"/>
-            <a:r>
-              <a:rPr sz="1050" b="0" i="0">
-                <a:solidFill>
-                  <a:srgbClr val="1F2A37"/>
-                </a:solidFill>
-                <a:latin typeface="Calibri"/>
-              </a:rPr>
-              <a:t>A task lost to a socket and a task lost to a wrong answer land in the same denominator and only one says anything about the agent — which is why every report buckets them (OCP/KinD: transport 1/0, per-task timeout 4/11, upstream agent defect 1/0, wrong answer 2/1). Two further limits: absolute LATENCY does not travel (4–93× apart between our clusters), and the DEPLOY, not the task, is the unit of replication — adding tasks tightens the wrong interval.</a:t>
-            </a:r>
-          </a:p>
-        </p:txBody>
-      </p:sp>
-      <p:sp>
-        <p:nvSpPr>
-          <p:cNvPr id="6" name="TextBox 5"/>
-          <p:cNvSpPr txBox="1"/>
-          <p:nvPr/>
-        </p:nvSpPr>
-        <p:spPr>
-          <a:xfrm>
-            <a:off x="11795760" y="6437376"/>
-            <a:ext cx="320040" cy="310896"/>
-          </a:xfrm>
-          <a:prstGeom prst="rect">
-            <a:avLst/>
-          </a:prstGeom>
-          <a:noFill/>
-        </p:spPr>
-        <p:txBody>
-          <a:bodyPr wrap="none" anchor="ctr" lIns="0" rIns="0" tIns="0" bIns="0">
-            <a:spAutoFit/>
-          </a:bodyPr>
-          <a:lstStyle/>
-          <a:p>
-            <a:pPr algn="r">
-              <a:spcAft>
-                <a:spcPts val="300"/>
-              </a:spcAft>
-            </a:pPr>
-            <a:r>
-              <a:rPr sz="1200" b="0" i="0">
-                <a:solidFill>
-                  <a:srgbClr val="6B6B6B"/>
-                </a:solidFill>
-                <a:latin typeface="Calibri"/>
-              </a:rPr>
-              <a:t>22</a:t>
-            </a:r>
-          </a:p>
-        </p:txBody>
-      </p:sp>
-    </p:spTree>
-  </p:cSld>
-  <p:clrMapOvr>
-    <a:masterClrMapping/>
-  </p:clrMapOvr>
-</p:sld>
-</file>
-
-<file path=ppt/slides/slide23.xml><?xml version="1.0" encoding="utf-8"?>
 <p:sld xmlns:a="http://schemas.openxmlformats.org/drawingml/2006/main" xmlns:p="http://schemas.openxmlformats.org/presentationml/2006/main" xmlns:r="http://schemas.openxmlformats.org/officeDocument/2006/relationships">
   <p:cSld name="8.1 The Canonical 12-Run Matrix">
     <p:spTree>
@@ -19753,7 +19035,7 @@
                 </a:solidFill>
                 <a:latin typeface="Calibri"/>
               </a:rPr>
-              <a:t>23</a:t>
+              <a:t>22</a:t>
             </a:r>
           </a:p>
         </p:txBody>
@@ -19766,9 +19048,9 @@
 </p:sld>
 </file>
 
-<file path=ppt/slides/slide24.xml><?xml version="1.0" encoding="utf-8"?>
+<file path=ppt/slides/slide23.xml><?xml version="1.0" encoding="utf-8"?>
 <p:sld xmlns:a="http://schemas.openxmlformats.org/drawingml/2006/main" xmlns:p="http://schemas.openxmlformats.org/presentationml/2006/main" xmlns:r="http://schemas.openxmlformats.org/officeDocument/2006/relationships">
-  <p:cSld name="8.2 What the 12 Runs Measured">
+  <p:cSld name="8.2 The 12 Runs Compared — What Each Band Established">
     <p:spTree>
       <p:nvGrpSpPr>
         <p:cNvPr id="1" name=""/>
@@ -19824,7 +19106,725 @@
                 </a:solidFill>
                 <a:latin typeface="Calibri"/>
               </a:rPr>
-              <a:t>8.2  What the 12 Runs Measured</a:t>
+              <a:t>8.2  The 12 Runs Compared — What Each Band Established</a:t>
+            </a:r>
+          </a:p>
+          <a:p>
+            <a:r>
+              <a:rPr sz="1400" b="0" i="0">
+                <a:solidFill>
+                  <a:srgbClr val="C9D9EC"/>
+                </a:solidFill>
+                <a:latin typeface="Calibri"/>
+              </a:rPr>
+              <a:t>Each leg changes exactly ONE thing against the leg before it, so a difference has one candidate explanation</a:t>
+            </a:r>
+          </a:p>
+        </p:txBody>
+      </p:sp>
+      <p:graphicFrame>
+        <p:nvGraphicFramePr>
+          <p:cNvPr id="3" name="Table 2"/>
+          <p:cNvGraphicFramePr>
+            <a:graphicFrameLocks noGrp="1"/>
+          </p:cNvGraphicFramePr>
+          <p:nvPr/>
+        </p:nvGraphicFramePr>
+        <p:xfrm>
+          <a:off x="411480" y="1143000"/>
+          <a:ext cx="11338559" cy="3017520"/>
+        </p:xfrm>
+        <a:graphic>
+          <a:graphicData uri="http://schemas.openxmlformats.org/drawingml/2006/table">
+            <a:tbl>
+              <a:tblPr firstRow="1">
+                <a:tableStyleId>{5C22544A-7EE6-4342-B048-85BDC9FD1C3A}</a:tableStyleId>
+              </a:tblPr>
+              <a:tblGrid>
+                <a:gridCol w="960120"/>
+                <a:gridCol w="3977639"/>
+                <a:gridCol w="6400800"/>
+              </a:tblGrid>
+              <a:tr h="502920">
+                <a:tc>
+                  <a:txBody>
+                    <a:bodyPr/>
+                    <a:lstStyle/>
+                    <a:p>
+                      <a:pPr algn="l"/>
+                      <a:r>
+                        <a:rPr sz="1050" b="1" i="0">
+                          <a:solidFill>
+                            <a:srgbClr val="FFFFFF"/>
+                          </a:solidFill>
+                          <a:latin typeface="Calibri"/>
+                        </a:rPr>
+                        <a:t>legs</a:t>
+                      </a:r>
+                    </a:p>
+                  </a:txBody>
+                  <a:tcPr marL="63500" marR="63500" marT="12700" marB="12700" anchor="ctr">
+                    <a:solidFill>
+                      <a:srgbClr val="1B3A5C"/>
+                    </a:solidFill>
+                  </a:tcPr>
+                </a:tc>
+                <a:tc>
+                  <a:txBody>
+                    <a:bodyPr/>
+                    <a:lstStyle/>
+                    <a:p>
+                      <a:pPr algn="ctr"/>
+                      <a:r>
+                        <a:rPr sz="1050" b="1" i="0">
+                          <a:solidFill>
+                            <a:srgbClr val="FFFFFF"/>
+                          </a:solidFill>
+                          <a:latin typeface="Calibri"/>
+                        </a:rPr>
+                        <a:t>what they parameterize</a:t>
+                      </a:r>
+                    </a:p>
+                  </a:txBody>
+                  <a:tcPr marL="63500" marR="63500" marT="12700" marB="12700" anchor="ctr">
+                    <a:solidFill>
+                      <a:srgbClr val="1B3A5C"/>
+                    </a:solidFill>
+                  </a:tcPr>
+                </a:tc>
+                <a:tc>
+                  <a:txBody>
+                    <a:bodyPr/>
+                    <a:lstStyle/>
+                    <a:p>
+                      <a:pPr algn="ctr"/>
+                      <a:r>
+                        <a:rPr sz="1050" b="1" i="0">
+                          <a:solidFill>
+                            <a:srgbClr val="FFFFFF"/>
+                          </a:solidFill>
+                          <a:latin typeface="Calibri"/>
+                        </a:rPr>
+                        <a:t>what having run them established</a:t>
+                      </a:r>
+                    </a:p>
+                  </a:txBody>
+                  <a:tcPr marL="63500" marR="63500" marT="12700" marB="12700" anchor="ctr">
+                    <a:solidFill>
+                      <a:srgbClr val="1B3A5C"/>
+                    </a:solidFill>
+                  </a:tcPr>
+                </a:tc>
+              </a:tr>
+              <a:tr h="502920">
+                <a:tc>
+                  <a:txBody>
+                    <a:bodyPr/>
+                    <a:lstStyle/>
+                    <a:p>
+                      <a:pPr algn="l"/>
+                      <a:r>
+                        <a:rPr sz="1050" b="1" i="0">
+                          <a:solidFill>
+                            <a:srgbClr val="1F2A37"/>
+                          </a:solidFill>
+                          <a:latin typeface="Calibri"/>
+                        </a:rPr>
+                        <a:t>#1–#3</a:t>
+                      </a:r>
+                    </a:p>
+                  </a:txBody>
+                  <a:tcPr marL="63500" marR="63500" marT="12700" marB="12700" anchor="ctr">
+                    <a:solidFill>
+                      <a:srgbClr val="FFFFFF"/>
+                    </a:solidFill>
+                  </a:tcPr>
+                </a:tc>
+                <a:tc>
+                  <a:txBody>
+                    <a:bodyPr/>
+                    <a:lstStyle/>
+                    <a:p>
+                      <a:pPr algn="l"/>
+                      <a:r>
+                        <a:rPr sz="1050" b="0" i="0">
+                          <a:solidFill>
+                            <a:srgbClr val="1F2A37"/>
+                          </a:solidFill>
+                          <a:latin typeface="Calibri"/>
+                        </a:rPr>
+                        <a:t>gsm8k 1 → 10 → 50 tasks, p=1 → 4
+(volume, then concurrency)</a:t>
+                      </a:r>
+                    </a:p>
+                  </a:txBody>
+                  <a:tcPr marL="63500" marR="63500" marT="12700" marB="12700" anchor="ctr">
+                    <a:solidFill>
+                      <a:srgbClr val="FFFFFF"/>
+                    </a:solidFill>
+                  </a:tcPr>
+                </a:tc>
+                <a:tc>
+                  <a:txBody>
+                    <a:bodyPr/>
+                    <a:lstStyle/>
+                    <a:p>
+                      <a:pPr algn="l"/>
+                      <a:r>
+                        <a:rPr sz="1050" b="0" i="0">
+                          <a:solidFill>
+                            <a:srgbClr val="1F2A37"/>
+                          </a:solidFill>
+                          <a:latin typeface="Calibri"/>
+                        </a:rPr>
+                        <a:t>the pipeline is stable and DETERMINISTIC: 6 of 12 legs have byte-identical input-token
+totals across two unlike clusters — the strongest like-for-like check available</a:t>
+                      </a:r>
+                    </a:p>
+                  </a:txBody>
+                  <a:tcPr marL="63500" marR="63500" marT="12700" marB="12700" anchor="ctr">
+                    <a:solidFill>
+                      <a:srgbClr val="FFFFFF"/>
+                    </a:solidFill>
+                  </a:tcPr>
+                </a:tc>
+              </a:tr>
+              <a:tr h="502920">
+                <a:tc>
+                  <a:txBody>
+                    <a:bodyPr/>
+                    <a:lstStyle/>
+                    <a:p>
+                      <a:pPr algn="l"/>
+                      <a:r>
+                        <a:rPr sz="1050" b="1" i="0">
+                          <a:solidFill>
+                            <a:srgbClr val="1F2A37"/>
+                          </a:solidFill>
+                          <a:latin typeface="Calibri"/>
+                        </a:rPr>
+                        <a:t>#4</a:t>
+                      </a:r>
+                    </a:p>
+                  </a:txBody>
+                  <a:tcPr marL="63500" marR="63500" marT="12700" marB="12700" anchor="ctr">
+                    <a:solidFill>
+                      <a:srgbClr val="F4F6F8"/>
+                    </a:solidFill>
+                  </a:tcPr>
+                </a:tc>
+                <a:tc>
+                  <a:txBody>
+                    <a:bodyPr/>
+                    <a:lstStyle/>
+                    <a:p>
+                      <a:pPr algn="l"/>
+                      <a:r>
+                        <a:rPr sz="1050" b="0" i="0">
+                          <a:solidFill>
+                            <a:srgbClr val="1F2A37"/>
+                          </a:solidFill>
+                          <a:latin typeface="Calibri"/>
+                        </a:rPr>
+                        <a:t>gsm8k on Azure/gpt-4.1
+(model swap, identical tasks)</a:t>
+                      </a:r>
+                    </a:p>
+                  </a:txBody>
+                  <a:tcPr marL="63500" marR="63500" marT="12700" marB="12700" anchor="ctr">
+                    <a:solidFill>
+                      <a:srgbClr val="F4F6F8"/>
+                    </a:solidFill>
+                  </a:tcPr>
+                </a:tc>
+                <a:tc>
+                  <a:txBody>
+                    <a:bodyPr/>
+                    <a:lstStyle/>
+                    <a:p>
+                      <a:pPr algn="l"/>
+                      <a:r>
+                        <a:rPr sz="1050" b="0" i="0">
+                          <a:solidFill>
+                            <a:srgbClr val="1F2A37"/>
+                          </a:solidFill>
+                          <a:latin typeface="Calibri"/>
+                        </a:rPr>
+                        <a:t>the only clean model comparison in the matrix: gpt-4.1 costs 4.1× gpt-5-mini for no
+pass-rate gain at this difficulty, and the INPUT side decides it alone (7.7)</a:t>
+                      </a:r>
+                    </a:p>
+                  </a:txBody>
+                  <a:tcPr marL="63500" marR="63500" marT="12700" marB="12700" anchor="ctr">
+                    <a:solidFill>
+                      <a:srgbClr val="F4F6F8"/>
+                    </a:solidFill>
+                  </a:tcPr>
+                </a:tc>
+              </a:tr>
+              <a:tr h="502920">
+                <a:tc>
+                  <a:txBody>
+                    <a:bodyPr/>
+                    <a:lstStyle/>
+                    <a:p>
+                      <a:pPr algn="l"/>
+                      <a:r>
+                        <a:rPr sz="1050" b="1" i="0">
+                          <a:solidFill>
+                            <a:srgbClr val="1F2A37"/>
+                          </a:solidFill>
+                          <a:latin typeface="Calibri"/>
+                        </a:rPr>
+                        <a:t>#5–#8</a:t>
+                      </a:r>
+                    </a:p>
+                  </a:txBody>
+                  <a:tcPr marL="63500" marR="63500" marT="12700" marB="12700" anchor="ctr">
+                    <a:solidFill>
+                      <a:srgbClr val="FFFFFF"/>
+                    </a:solidFill>
+                  </a:tcPr>
+                </a:tc>
+                <a:tc>
+                  <a:txBody>
+                    <a:bodyPr/>
+                    <a:lstStyle/>
+                    <a:p>
+                      <a:pPr algn="l"/>
+                      <a:r>
+                        <a:rPr sz="1050" b="0" i="0">
+                          <a:solidFill>
+                            <a:srgbClr val="1F2A37"/>
+                          </a:solidFill>
+                          <a:latin typeface="Calibri"/>
+                        </a:rPr>
+                        <a:t>AuthBridge auth-only / ibac-only / full /
+full + per-plugin override, same 5 tasks</a:t>
+                      </a:r>
+                    </a:p>
+                  </a:txBody>
+                  <a:tcPr marL="63500" marR="63500" marT="12700" marB="12700" anchor="ctr">
+                    <a:solidFill>
+                      <a:srgbClr val="FFFFFF"/>
+                    </a:solidFill>
+                  </a:tcPr>
+                </a:tc>
+                <a:tc>
+                  <a:txBody>
+                    <a:bodyPr/>
+                    <a:lstStyle/>
+                    <a:p>
+                      <a:pPr algn="l"/>
+                      <a:r>
+                        <a:rPr sz="1050" b="0" i="0">
+                          <a:solidFill>
+                            <a:srgbClr val="1F2A37"/>
+                          </a:solidFill>
+                          <a:latin typeface="Calibri"/>
+                        </a:rPr>
+                        <a:t>plugin cost is PLATFORM-SPECIFIC: OpenShift pays in the sidecar (+13.68 s/task), KinD in
+the judge (+1.54 s) — never quote a per-task overhead without naming the cluster</a:t>
+                      </a:r>
+                    </a:p>
+                  </a:txBody>
+                  <a:tcPr marL="63500" marR="63500" marT="12700" marB="12700" anchor="ctr">
+                    <a:solidFill>
+                      <a:srgbClr val="FFFFFF"/>
+                    </a:solidFill>
+                  </a:tcPr>
+                </a:tc>
+              </a:tr>
+              <a:tr h="502920">
+                <a:tc>
+                  <a:txBody>
+                    <a:bodyPr/>
+                    <a:lstStyle/>
+                    <a:p>
+                      <a:pPr algn="l"/>
+                      <a:r>
+                        <a:rPr sz="1050" b="1" i="0">
+                          <a:solidFill>
+                            <a:srgbClr val="1F2A37"/>
+                          </a:solidFill>
+                          <a:latin typeface="Calibri"/>
+                        </a:rPr>
+                        <a:t>#9–#10</a:t>
+                      </a:r>
+                    </a:p>
+                  </a:txBody>
+                  <a:tcPr marL="63500" marR="63500" marT="12700" marB="12700" anchor="ctr">
+                    <a:solidFill>
+                      <a:srgbClr val="F4F6F8"/>
+                    </a:solidFill>
+                  </a:tcPr>
+                </a:tc>
+                <a:tc>
+                  <a:txBody>
+                    <a:bodyPr/>
+                    <a:lstStyle/>
+                    <a:p>
+                      <a:pPr algn="l"/>
+                      <a:r>
+                        <a:rPr sz="1050" b="0" i="0">
+                          <a:solidFill>
+                            <a:srgbClr val="1F2A37"/>
+                          </a:solidFill>
+                          <a:latin typeface="Calibri"/>
+                        </a:rPr>
+                        <a:t>tau2 10 → 20 tasks, p=1 → 4
+(multi-turn, then under load)</a:t>
+                      </a:r>
+                    </a:p>
+                  </a:txBody>
+                  <a:tcPr marL="63500" marR="63500" marT="12700" marB="12700" anchor="ctr">
+                    <a:solidFill>
+                      <a:srgbClr val="F4F6F8"/>
+                    </a:solidFill>
+                  </a:tcPr>
+                </a:tc>
+                <a:tc>
+                  <a:txBody>
+                    <a:bodyPr/>
+                    <a:lstStyle/>
+                    <a:p>
+                      <a:pPr algn="l"/>
+                      <a:r>
+                        <a:rPr sz="1050" b="0" i="0">
+                          <a:solidFill>
+                            <a:srgbClr val="1F2A37"/>
+                          </a:solidFill>
+                          <a:latin typeface="Calibri"/>
+                        </a:rPr>
+                        <a:t>multi-turn works end to end, user simulator included — and tau2 is where pass rates
+carry information (0.75–1.00 across sides)</a:t>
+                      </a:r>
+                    </a:p>
+                  </a:txBody>
+                  <a:tcPr marL="63500" marR="63500" marT="12700" marB="12700" anchor="ctr">
+                    <a:solidFill>
+                      <a:srgbClr val="F4F6F8"/>
+                    </a:solidFill>
+                  </a:tcPr>
+                </a:tc>
+              </a:tr>
+              <a:tr h="502920">
+                <a:tc>
+                  <a:txBody>
+                    <a:bodyPr/>
+                    <a:lstStyle/>
+                    <a:p>
+                      <a:pPr algn="l"/>
+                      <a:r>
+                        <a:rPr sz="1050" b="1" i="0">
+                          <a:solidFill>
+                            <a:srgbClr val="1F2A37"/>
+                          </a:solidFill>
+                          <a:latin typeface="Calibri"/>
+                        </a:rPr>
+                        <a:t>#11–#12</a:t>
+                      </a:r>
+                    </a:p>
+                  </a:txBody>
+                  <a:tcPr marL="63500" marR="63500" marT="12700" marB="12700" anchor="ctr">
+                    <a:solidFill>
+                      <a:srgbClr val="FFFFFF"/>
+                    </a:solidFill>
+                  </a:tcPr>
+                </a:tc>
+                <a:tc>
+                  <a:txBody>
+                    <a:bodyPr/>
+                    <a:lstStyle/>
+                    <a:p>
+                      <a:pPr algn="l"/>
+                      <a:r>
+                        <a:rPr sz="1050" b="0" i="0">
+                          <a:solidFill>
+                            <a:srgbClr val="1F2A37"/>
+                          </a:solidFill>
+                          <a:latin typeface="Calibri"/>
+                        </a:rPr>
+                        <a:t>appworld 5 → 20 tasks, p=1 → 4
+(long horizon, then under load)</a:t>
+                      </a:r>
+                    </a:p>
+                  </a:txBody>
+                  <a:tcPr marL="63500" marR="63500" marT="12700" marB="12700" anchor="ctr">
+                    <a:solidFill>
+                      <a:srgbClr val="FFFFFF"/>
+                    </a:solidFill>
+                  </a:tcPr>
+                </a:tc>
+                <a:tc>
+                  <a:txBody>
+                    <a:bodyPr/>
+                    <a:lstStyle/>
+                    <a:p>
+                      <a:pPr algn="l"/>
+                      <a:r>
+                        <a:rPr sz="1050" b="0" i="0">
+                          <a:solidFill>
+                            <a:srgbClr val="1F2A37"/>
+                          </a:solidFill>
+                          <a:latin typeface="Calibri"/>
+                        </a:rPr>
+                        <a:t>the limits are real and they are UPSTREAM: 15 timeouts, a 0.00 pass rate, and 76% of
+the whole matrix's bill in two legs</a:t>
+                      </a:r>
+                    </a:p>
+                  </a:txBody>
+                  <a:tcPr marL="63500" marR="63500" marT="12700" marB="12700" anchor="ctr">
+                    <a:solidFill>
+                      <a:srgbClr val="FFFFFF"/>
+                    </a:solidFill>
+                  </a:tcPr>
+                </a:tc>
+              </a:tr>
+            </a:tbl>
+          </a:graphicData>
+        </a:graphic>
+      </p:graphicFrame>
+      <p:sp>
+        <p:nvSpPr>
+          <p:cNvPr id="4" name="Rounded Rectangle 3"/>
+          <p:cNvSpPr/>
+          <p:nvPr/>
+        </p:nvSpPr>
+        <p:spPr>
+          <a:xfrm>
+            <a:off x="411480" y="4343400"/>
+            <a:ext cx="5623560" cy="2057400"/>
+          </a:xfrm>
+          <a:prstGeom prst="roundRect">
+            <a:avLst/>
+          </a:prstGeom>
+          <a:solidFill>
+            <a:srgbClr val="E4F0F0"/>
+          </a:solidFill>
+          <a:ln w="12700">
+            <a:solidFill>
+              <a:srgbClr val="3D6E70"/>
+            </a:solidFill>
+          </a:ln>
+          <a:effectLst/>
+        </p:spPr>
+        <p:style>
+          <a:lnRef idx="1">
+            <a:schemeClr val="accent1"/>
+          </a:lnRef>
+          <a:fillRef idx="3">
+            <a:schemeClr val="accent1"/>
+          </a:fillRef>
+          <a:effectRef idx="2">
+            <a:schemeClr val="accent1"/>
+          </a:effectRef>
+          <a:fontRef idx="minor">
+            <a:schemeClr val="lt1"/>
+          </a:fontRef>
+        </p:style>
+        <p:txBody>
+          <a:bodyPr rtlCol="0" anchor="ctr" wrap="square" tIns="25400" bIns="25400"/>
+          <a:lstStyle/>
+          <a:p>
+            <a:pPr algn="ctr"/>
+            <a:r>
+              <a:rPr sz="1350" b="1" i="0">
+                <a:solidFill>
+                  <a:srgbClr val="3D6E70"/>
+                </a:solidFill>
+                <a:latin typeface="Calibri"/>
+              </a:rPr>
+              <a:t>What the matrix as a whole is worth</a:t>
+            </a:r>
+          </a:p>
+          <a:p>
+            <a:pPr algn="ctr"/>
+            <a:r>
+              <a:rPr sz="1050" b="0" i="0">
+                <a:solidFill>
+                  <a:srgbClr val="1F2A37"/>
+                </a:solidFill>
+                <a:latin typeface="Calibri"/>
+              </a:rPr>
+              <a:t>Not the pass rates — that the SAME 12 request bodies produce comparable measurements on two unlike clusters. On the v1.28 pair: token capture complete (0 of 267 rows lost their usage span), every task reached the model (0 health-probe losses), 7 of 12 pass rates identical. The 5 that differ are mostly arithmetic on small runs — one task moves a 5-task leg by 0.20.</a:t>
+            </a:r>
+          </a:p>
+        </p:txBody>
+      </p:sp>
+      <p:sp>
+        <p:nvSpPr>
+          <p:cNvPr id="5" name="Rounded Rectangle 4"/>
+          <p:cNvSpPr/>
+          <p:nvPr/>
+        </p:nvSpPr>
+        <p:spPr>
+          <a:xfrm>
+            <a:off x="6309360" y="4343400"/>
+            <a:ext cx="5440680" cy="2057400"/>
+          </a:xfrm>
+          <a:prstGeom prst="roundRect">
+            <a:avLst/>
+          </a:prstGeom>
+          <a:solidFill>
+            <a:srgbClr val="FBEEE4"/>
+          </a:solidFill>
+          <a:ln w="12700">
+            <a:solidFill>
+              <a:srgbClr val="B55A2E"/>
+            </a:solidFill>
+          </a:ln>
+          <a:effectLst/>
+        </p:spPr>
+        <p:style>
+          <a:lnRef idx="1">
+            <a:schemeClr val="accent1"/>
+          </a:lnRef>
+          <a:fillRef idx="3">
+            <a:schemeClr val="accent1"/>
+          </a:fillRef>
+          <a:effectRef idx="2">
+            <a:schemeClr val="accent1"/>
+          </a:effectRef>
+          <a:fontRef idx="minor">
+            <a:schemeClr val="lt1"/>
+          </a:fontRef>
+        </p:style>
+        <p:txBody>
+          <a:bodyPr rtlCol="0" anchor="ctr" wrap="square" tIns="25400" bIns="25400"/>
+          <a:lstStyle/>
+          <a:p>
+            <a:pPr algn="ctr"/>
+            <a:r>
+              <a:rPr sz="1350" b="1" i="0">
+                <a:solidFill>
+                  <a:srgbClr val="B55A2E"/>
+                </a:solidFill>
+                <a:latin typeface="Calibri"/>
+              </a:rPr>
+              <a:t>So read the per-CAUSE table, then the rate</a:t>
+            </a:r>
+          </a:p>
+          <a:p>
+            <a:pPr algn="ctr"/>
+            <a:r>
+              <a:rPr sz="1050" b="0" i="0">
+                <a:solidFill>
+                  <a:srgbClr val="1F2A37"/>
+                </a:solidFill>
+                <a:latin typeface="Calibri"/>
+              </a:rPr>
+              <a:t>A task lost to a socket and a task lost to a wrong answer land in the same denominator and only one says anything about the agent — which is why every report buckets them (OCP/KinD: transport 1/0, per-task timeout 4/11, upstream agent defect 1/0, wrong answer 2/1). Two further limits: absolute LATENCY does not travel (4–93× apart between our clusters), and the DEPLOY, not the task, is the unit of replication — adding tasks tightens the wrong interval.</a:t>
+            </a:r>
+          </a:p>
+        </p:txBody>
+      </p:sp>
+      <p:sp>
+        <p:nvSpPr>
+          <p:cNvPr id="6" name="TextBox 5"/>
+          <p:cNvSpPr txBox="1"/>
+          <p:nvPr/>
+        </p:nvSpPr>
+        <p:spPr>
+          <a:xfrm>
+            <a:off x="11795760" y="6437376"/>
+            <a:ext cx="320040" cy="310896"/>
+          </a:xfrm>
+          <a:prstGeom prst="rect">
+            <a:avLst/>
+          </a:prstGeom>
+          <a:noFill/>
+        </p:spPr>
+        <p:txBody>
+          <a:bodyPr wrap="none" anchor="ctr" lIns="0" rIns="0" tIns="0" bIns="0">
+            <a:spAutoFit/>
+          </a:bodyPr>
+          <a:lstStyle/>
+          <a:p>
+            <a:pPr algn="r">
+              <a:spcAft>
+                <a:spcPts val="300"/>
+              </a:spcAft>
+            </a:pPr>
+            <a:r>
+              <a:rPr sz="1200" b="0" i="0">
+                <a:solidFill>
+                  <a:srgbClr val="6B6B6B"/>
+                </a:solidFill>
+                <a:latin typeface="Calibri"/>
+              </a:rPr>
+              <a:t>23</a:t>
+            </a:r>
+          </a:p>
+        </p:txBody>
+      </p:sp>
+    </p:spTree>
+  </p:cSld>
+  <p:clrMapOvr>
+    <a:masterClrMapping/>
+  </p:clrMapOvr>
+</p:sld>
+</file>
+
+<file path=ppt/slides/slide24.xml><?xml version="1.0" encoding="utf-8"?>
+<p:sld xmlns:a="http://schemas.openxmlformats.org/drawingml/2006/main" xmlns:p="http://schemas.openxmlformats.org/presentationml/2006/main" xmlns:r="http://schemas.openxmlformats.org/officeDocument/2006/relationships">
+  <p:cSld name="8.3 What the 12 Runs Measured">
+    <p:spTree>
+      <p:nvGrpSpPr>
+        <p:cNvPr id="1" name=""/>
+        <p:cNvGrpSpPr/>
+        <p:nvPr/>
+      </p:nvGrpSpPr>
+      <p:grpSpPr/>
+      <p:sp>
+        <p:nvSpPr>
+          <p:cNvPr id="2" name="Rectangle 1"/>
+          <p:cNvSpPr/>
+          <p:nvPr/>
+        </p:nvSpPr>
+        <p:spPr>
+          <a:xfrm>
+            <a:off x="0" y="0"/>
+            <a:ext cx="12192000" cy="950000"/>
+          </a:xfrm>
+          <a:prstGeom prst="rect">
+            <a:avLst/>
+          </a:prstGeom>
+          <a:solidFill>
+            <a:srgbClr val="1B3A5C"/>
+          </a:solidFill>
+          <a:ln>
+            <a:noFill/>
+          </a:ln>
+          <a:effectLst/>
+        </p:spPr>
+        <p:style>
+          <a:lnRef idx="1">
+            <a:schemeClr val="accent1"/>
+          </a:lnRef>
+          <a:fillRef idx="3">
+            <a:schemeClr val="accent1"/>
+          </a:fillRef>
+          <a:effectRef idx="2">
+            <a:schemeClr val="accent1"/>
+          </a:effectRef>
+          <a:fontRef idx="minor">
+            <a:schemeClr val="lt1"/>
+          </a:fontRef>
+        </p:style>
+        <p:txBody>
+          <a:bodyPr rtlCol="0" anchor="ctr" lIns="355600"/>
+          <a:lstStyle/>
+          <a:p>
+            <a:pPr algn="ctr"/>
+            <a:r>
+              <a:rPr sz="2600" b="1" i="0">
+                <a:solidFill>
+                  <a:srgbClr val="FFFFFF"/>
+                </a:solidFill>
+                <a:latin typeface="Calibri"/>
+              </a:rPr>
+              <a:t>8.3  What the 12 Runs Measured</a:t>
             </a:r>
           </a:p>
           <a:p>

--- a/docs/AutoBench.pptx
+++ b/docs/AutoBench.pptx
@@ -3369,7 +3369,7 @@
                 </a:solidFill>
                 <a:latin typeface="Calibri"/>
               </a:rPr>
-              <a:t>Last modified 2026-09-20 22:17 EDT</a:t>
+              <a:t>Last modified 2026-09-21 13:24 EDT</a:t>
             </a:r>
           </a:p>
         </p:txBody>
@@ -3673,7 +3673,7 @@
                           </a:solidFill>
                           <a:latin typeface="Calibri"/>
                         </a:rPr>
-                        <a:t>the HuggingFace dataset loader — 8.5K problems, fetched at pod startup</a:t>
+                        <a:t>the HuggingFace loader, pinned to main/test — those 1,319 rows fetched at pod startup</a:t>
                       </a:r>
                     </a:p>
                   </a:txBody>
@@ -3767,7 +3767,7 @@
                           </a:solidFill>
                           <a:latin typeface="Calibri"/>
                         </a:rPr>
-                        <a:t>the tau2-bench library + its retail domain (114 tasks), and a user-simulator LLM</a:t>
+                        <a:t>tau2-bench at tag v0.1.3 + its retail domain (114 tasks), and a user-simulator LLM</a:t>
                       </a:r>
                     </a:p>
                   </a:txBody>
@@ -3861,7 +3861,7 @@
                           </a:solidFill>
                           <a:latin typeface="Calibri"/>
                         </a:rPr>
-                        <a:t>the whole app-suite sandbox (exgentic install --benchmark appworld)</a:t>
+                        <a:t>the whole app-suite sandbox (exgentic install --benchmark appworld), test_normal split</a:t>
                       </a:r>
                     </a:p>
                   </a:txBody>
@@ -7337,7 +7337,7 @@
                           </a:solidFill>
                           <a:latin typeface="Calibri"/>
                         </a:rPr>
-                        <a:t>8.5K (HuggingFace)</a:t>
+                        <a:t>1,319 (main/test split)</a:t>
                       </a:r>
                     </a:p>
                   </a:txBody>
@@ -7383,7 +7383,7 @@
                           </a:solidFill>
                           <a:latin typeface="Calibri"/>
                         </a:rPr>
-                        <a:t>grouped scenarios</a:t>
+                        <a:t>168 (test_normal split)</a:t>
                       </a:r>
                     </a:p>
                   </a:txBody>

--- a/docs/AutoBench.pptx
+++ b/docs/AutoBench.pptx
@@ -3369,7 +3369,7 @@
                 </a:solidFill>
                 <a:latin typeface="Calibri"/>
               </a:rPr>
-              <a:t>Last modified 2026-09-21 13:24 EDT</a:t>
+              <a:t>Last modified 2026-09-21 13:38 EDT</a:t>
             </a:r>
           </a:p>
         </p:txBody>
@@ -3861,7 +3861,7 @@
                           </a:solidFill>
                           <a:latin typeface="Calibri"/>
                         </a:rPr>
-                        <a:t>the whole app-suite sandbox (exgentic install --benchmark appworld), test_normal split</a:t>
+                        <a:t>the whole app-suite sandbox at upstream commit edc96012, under a CUSTOM tool-per-API adapter; test_normal split</a:t>
                       </a:r>
                     </a:p>
                   </a:txBody>

--- a/docs/AutoBench.pptx
+++ b/docs/AutoBench.pptx
@@ -3369,7 +3369,7 @@
                 </a:solidFill>
                 <a:latin typeface="Calibri"/>
               </a:rPr>
-              <a:t>Last modified 2026-09-21 13:38 EDT</a:t>
+              <a:t>Last modified 2026-09-29 20:59 EDT</a:t>
             </a:r>
           </a:p>
         </p:txBody>
@@ -32267,7 +32267,7 @@
                 </a:solidFill>
                 <a:latin typeface="Calibri"/>
               </a:rPr>
-              <a:t>LLM gateway (per instance)   ·   ete-litellm   ·   external for OCP / internal vpc-int for KinD</a:t>
+              <a:t>LLM gateway (per instance)   ·   ete-litellm   ·   external (vpc) for internet OCP / internal (vpc-int) for intranet KinD and OCP</a:t>
             </a:r>
           </a:p>
         </p:txBody>

--- a/docs/AutoBench.pptx
+++ b/docs/AutoBench.pptx
@@ -3369,7 +3369,7 @@
                 </a:solidFill>
                 <a:latin typeface="Calibri"/>
               </a:rPr>
-              <a:t>Last modified 2026-09-29 20:59 EDT</a:t>
+              <a:t>Last modified 2026-09-29 21:03 EDT</a:t>
             </a:r>
           </a:p>
         </p:txBody>
@@ -32267,7 +32267,7 @@
                 </a:solidFill>
                 <a:latin typeface="Calibri"/>
               </a:rPr>
-              <a:t>LLM gateway (per instance)   ·   ete-litellm   ·   external (vpc) for internet OCP / internal (vpc-int) for intranet KinD and OCP</a:t>
+              <a:t>LLM gateway (per instance)   ·   ete-litellm   ·   external (vpc) for Internet OCP / internal (vpc-int) for intranet KinD and OCP</a:t>
             </a:r>
           </a:p>
         </p:txBody>

--- a/docs/AutoBench.pptx
+++ b/docs/AutoBench.pptx
@@ -3369,7 +3369,7 @@
                 </a:solidFill>
                 <a:latin typeface="Calibri"/>
               </a:rPr>
-              <a:t>Last modified 2026-09-29 21:03 EDT</a:t>
+              <a:t>Last modified 2026-09-29 21:18 EDT</a:t>
             </a:r>
           </a:p>
         </p:txBody>
@@ -32267,7 +32267,7 @@
                 </a:solidFill>
                 <a:latin typeface="Calibri"/>
               </a:rPr>
-              <a:t>LLM gateway (per instance)   ·   ete-litellm   ·   external (vpc) for Internet OCP / internal (vpc-int) for intranet KinD and OCP</a:t>
+              <a:t>LLM gateway (per instance)   ·   any LLM or LiteLLM service   ·   Internet cluster → an Internet service;   intranet cluster → either</a:t>
             </a:r>
           </a:p>
         </p:txBody>

--- a/docs/AutoBench.pptx
+++ b/docs/AutoBench.pptx
@@ -3330,7 +3330,7 @@
                 </a:solidFill>
                 <a:latin typeface="Calibri"/>
               </a:rPr>
-              <a:t>across multiple cluster-specific Rossoctl instances.</a:t>
+              <a:t>on a Rossoctl cluster, alongside the workloads it benchmarks.</a:t>
             </a:r>
           </a:p>
         </p:txBody>
@@ -3369,7 +3369,7 @@
                 </a:solidFill>
                 <a:latin typeface="Calibri"/>
               </a:rPr>
-              <a:t>Last modified 2026-09-29 21:18 EDT</a:t>
+              <a:t>Last modified 2026-10-05 20:12 EDT</a:t>
             </a:r>
           </a:p>
         </p:txBody>
@@ -4482,7 +4482,7 @@
                           </a:solidFill>
                           <a:latin typeface="Calibri"/>
                         </a:rPr>
-                        <a:t>connect_mcp — tools/list  →  MCP pod   (per task, not per pod; ~27–38 ms)</a:t>
+                        <a:t>connect_mcp — tools/list  →  MCP pod   (per task, not per pod; ~40–50 ms)</a:t>
                       </a:r>
                     </a:p>
                   </a:txBody>
@@ -4553,7 +4553,7 @@
                           </a:solidFill>
                           <a:latin typeface="Calibri"/>
                         </a:rPr>
-                        <a:t>create_agent   (6.7 ms warm, up to 6.5 s on a cold pod)</a:t>
+                        <a:t>create_agent   (~12–15 ms warm, up to 5.2 s on a cold pod)</a:t>
                       </a:r>
                     </a:p>
                   </a:txBody>
@@ -4624,7 +4624,7 @@
                           </a:solidFill>
                           <a:latin typeface="Calibri"/>
                         </a:rPr>
-                        <a:t>initial_observation — local, no I/O, ~50 µs</a:t>
+                        <a:t>initial_observation — local, no I/O, ~70 µs</a:t>
                       </a:r>
                     </a:p>
                   </a:txBody>
@@ -5008,7 +5008,7 @@
                 </a:solidFill>
                 <a:latin typeface="Calibri"/>
               </a:rPr>
-              <a:t>Everything the agent does happens inside that single streaming request. Its POST / span brackets it, so Agent.Call − POST / is the Service's own cost: 16.9 ms of a 10.4 s gsm8k task, 13.2 ms of a 70.3 s tau2 one.</a:t>
+              <a:t>Everything the agent does happens inside that single streaming request. Its POST / span brackets it, so Agent.Call − POST / is the Service's own cost: a median 16.3 ms of a 2.5 s gsm8k task, 15.9 ms of a 40 s tau2 one.</a:t>
             </a:r>
           </a:p>
         </p:txBody>
@@ -5712,7 +5712,7 @@
                 </a:solidFill>
                 <a:latin typeface="Calibri"/>
               </a:rPr>
-              <a:t>Same task id, same model, same platform, two different legs: tau2 task 2 took 13 chat / 13 tool in one and 9 / 9 in the other; appworld 3d9a636_3 took 20 / 10 and 26 / 13. Of tasks appearing in more than one leg, 8 of 10 tau2 and 3 of 3 appworld differ — the 10 that agree are all gsm8k, where 1 chat / 1 tool leaves nothing to vary.</a:t>
+              <a:t>Same task id, same model, same platform, two different legs: tau2 task 7 took 12 chat / 12 tool in one and 10 / 10 in the other; appworld 3d9a636_3 took 24 / 12 and 20 / 10. Of tasks appearing in more than one leg, 14 of 20 tau2 and 10 of 10 appworld differ, while all 20 gsm8k tasks agree — 1 chat / 1 tool leaves nothing to vary.</a:t>
             </a:r>
           </a:p>
         </p:txBody>
@@ -5779,7 +5779,7 @@
                 </a:solidFill>
                 <a:latin typeface="Calibri"/>
               </a:rPr>
-              <a:t>No terminal tool name exists anywhere in the Service. The agent reads the tool declarations at connect_mcp, and gsm8k's whole first model call is 320 input tokens — system prompt, task text and every schema. It lands: submit 173/173 on gsm8k, finish 34/35 on appworld (the miss timed out), while tau2 has NO terminal tool — 60/60 end on message.</a:t>
+              <a:t>No terminal tool name exists anywhere in the Service. The agent reads the tool declarations at connect_mcp, and gsm8k's whole first model call is 320 input tokens — system prompt, task text and every schema. It lands: submit 172/172 on gsm8k, finish 41/49 on appworld (the rest stopped on the agent's own defect), while tau2 has NO terminal tool — 60/60 end on message.</a:t>
             </a:r>
           </a:p>
         </p:txBody>
@@ -6443,7 +6443,7 @@
                           </a:solidFill>
                           <a:latin typeface="Calibri"/>
                         </a:rPr>
-                        <a:t>35 of 50 (15 timed out)</a:t>
+                        <a:t>49 of 50 (1 timed out)</a:t>
                       </a:r>
                     </a:p>
                   </a:txBody>
@@ -6585,7 +6585,7 @@
                           </a:solidFill>
                           <a:latin typeface="Calibri"/>
                         </a:rPr>
-                        <a:t>0.97</a:t>
+                        <a:t>0.98</a:t>
                       </a:r>
                     </a:p>
                   </a:txBody>
@@ -6608,7 +6608,7 @@
                           </a:solidFill>
                           <a:latin typeface="Calibri"/>
                         </a:rPr>
-                        <a:t>0.83</a:t>
+                        <a:t>0.90</a:t>
                       </a:r>
                     </a:p>
                   </a:txBody>
@@ -6679,7 +6679,7 @@
                           </a:solidFill>
                           <a:latin typeface="Calibri"/>
                         </a:rPr>
-                        <a:t>341</a:t>
+                        <a:t>343</a:t>
                       </a:r>
                     </a:p>
                   </a:txBody>
@@ -6702,7 +6702,7 @@
                           </a:solidFill>
                           <a:latin typeface="Calibri"/>
                         </a:rPr>
-                        <a:t>90,902</a:t>
+                        <a:t>87,935</a:t>
                       </a:r>
                     </a:p>
                   </a:txBody>
@@ -6725,7 +6725,7 @@
                           </a:solidFill>
                           <a:latin typeface="Calibri"/>
                         </a:rPr>
-                        <a:t>269,953</a:t>
+                        <a:t>291,509</a:t>
                       </a:r>
                     </a:p>
                   </a:txBody>
@@ -6773,7 +6773,7 @@
                           </a:solidFill>
                           <a:latin typeface="Calibri"/>
                         </a:rPr>
-                        <a:t>180</a:t>
+                        <a:t>170</a:t>
                       </a:r>
                     </a:p>
                   </a:txBody>
@@ -6796,7 +6796,7 @@
                           </a:solidFill>
                           <a:latin typeface="Calibri"/>
                         </a:rPr>
-                        <a:t>2,061</a:t>
+                        <a:t>2,071</a:t>
                       </a:r>
                     </a:p>
                   </a:txBody>
@@ -6819,7 +6819,7 @@
                           </a:solidFill>
                           <a:latin typeface="Calibri"/>
                         </a:rPr>
-                        <a:t>25,140</a:t>
+                        <a:t>26,950</a:t>
                       </a:r>
                     </a:p>
                   </a:txBody>
@@ -6867,7 +6867,7 @@
                           </a:solidFill>
                           <a:latin typeface="Calibri"/>
                         </a:rPr>
-                        <a:t>$0.00055</a:t>
+                        <a:t>$0.00053</a:t>
                       </a:r>
                     </a:p>
                   </a:txBody>
@@ -6890,7 +6890,7 @@
                           </a:solidFill>
                           <a:latin typeface="Calibri"/>
                         </a:rPr>
-                        <a:t>$0.154</a:t>
+                        <a:t>$0.149</a:t>
                       </a:r>
                     </a:p>
                   </a:txBody>
@@ -6913,7 +6913,7 @@
                           </a:solidFill>
                           <a:latin typeface="Calibri"/>
                         </a:rPr>
-                        <a:t>$0.589</a:t>
+                        <a:t>$0.634</a:t>
                       </a:r>
                     </a:p>
                   </a:txBody>
@@ -6984,7 +6984,7 @@
                           </a:solidFill>
                           <a:latin typeface="Calibri"/>
                         </a:rPr>
-                        <a:t>11.4</a:t>
+                        <a:t>11.1</a:t>
                       </a:r>
                     </a:p>
                   </a:txBody>
@@ -7007,7 +7007,7 @@
                           </a:solidFill>
                           <a:latin typeface="Calibri"/>
                         </a:rPr>
-                        <a:t>29.2</a:t>
+                        <a:t>30.2</a:t>
                       </a:r>
                     </a:p>
                   </a:txBody>
@@ -7078,7 +7078,7 @@
                           </a:solidFill>
                           <a:latin typeface="Calibri"/>
                         </a:rPr>
-                        <a:t>11.4</a:t>
+                        <a:t>11.1</a:t>
                       </a:r>
                     </a:p>
                   </a:txBody>
@@ -7101,7 +7101,7 @@
                           </a:solidFill>
                           <a:latin typeface="Calibri"/>
                         </a:rPr>
-                        <a:t>14.6</a:t>
+                        <a:t>14.9</a:t>
                       </a:r>
                     </a:p>
                   </a:txBody>
@@ -7149,7 +7149,7 @@
                           </a:solidFill>
                           <a:latin typeface="Calibri"/>
                         </a:rPr>
-                        <a:t>4.9 s</a:t>
+                        <a:t>2.5 s</a:t>
                       </a:r>
                     </a:p>
                   </a:txBody>
@@ -7172,7 +7172,7 @@
                           </a:solidFill>
                           <a:latin typeface="Calibri"/>
                         </a:rPr>
-                        <a:t>84 s</a:t>
+                        <a:t>48 s</a:t>
                       </a:r>
                     </a:p>
                   </a:txBody>
@@ -7195,7 +7195,7 @@
                           </a:solidFill>
                           <a:latin typeface="Calibri"/>
                         </a:rPr>
-                        <a:t>264 s</a:t>
+                        <a:t>222 s</a:t>
                       </a:r>
                     </a:p>
                   </a:txBody>
@@ -7243,7 +7243,7 @@
                           </a:solidFill>
                           <a:latin typeface="Calibri"/>
                         </a:rPr>
-                        <a:t>39 s</a:t>
+                        <a:t>15 s</a:t>
                       </a:r>
                     </a:p>
                   </a:txBody>
@@ -7266,7 +7266,7 @@
                           </a:solidFill>
                           <a:latin typeface="Calibri"/>
                         </a:rPr>
-                        <a:t>136 s</a:t>
+                        <a:t>75 s</a:t>
                       </a:r>
                     </a:p>
                   </a:txBody>
@@ -7289,7 +7289,7 @@
                           </a:solidFill>
                           <a:latin typeface="Calibri"/>
                         </a:rPr>
-                        <a:t>592 s</a:t>
+                        <a:t>591 s</a:t>
                       </a:r>
                     </a:p>
                   </a:txBody>
@@ -7448,7 +7448,7 @@
                 </a:solidFill>
                 <a:latin typeface="Calibri"/>
               </a:rPr>
-              <a:t>Read the MODEL row before any dollar figure: the three rungs do not run the same model, and each default is dearer than the one below it — so no cost here transfers to another model. The scale gap is the headline: a tau2 task costs ~267× the input tokens of a gsm8k task, an appworld task ~792× — and in MONEY 279× and 1,069×, because that model change compounds with the token growth (7.6, 7.8). A 50-task gsm8k run is a minute and 2 cents; a 20-task appworld run is 30-45 minutes, millions of tokens and dollars. Budget by benchmark, not by task count.</a:t>
+              <a:t>Read the MODEL row before any dollar figure: the three rungs do not run the same model, and each default is dearer than the one below it — so no cost here transfers to another model. The scale gap is the headline: a tau2 task costs ~256× the input tokens of a gsm8k task, an appworld task ~850× — and in MONEY 282× and 1,195×, because that model change compounds with the token growth (7.6, 7.8). A 50-task gsm8k run is half a minute and 2 cents; a 20-task appworld run is ~25 minutes, millions of tokens and dollars. Budget by benchmark, not by task count.</a:t>
             </a:r>
           </a:p>
         </p:txBody>
@@ -7779,7 +7779,7 @@
                 </a:solidFill>
                 <a:latin typeface="Calibri"/>
               </a:rPr>
-              <a:t>• Cheap enough to run often: a 50-task leg is 25 K tokens — 0.4% of the whole 12-run matrix's bill, and less than a SINGLE appworld task (see 7.5).</a:t>
+              <a:t>• Cheap enough to run often: a 50-task leg is ~24 K tokens — 0.1% of the whole 12-run matrix's bill, and less than a SINGLE appworld task (see 7.5).</a:t>
             </a:r>
           </a:p>
         </p:txBody>
@@ -8044,7 +8044,7 @@
                 </a:solidFill>
                 <a:latin typeface="Calibri"/>
               </a:rPr>
-              <a:t>• 27% of a task's wall time sits INSIDE tool calls — that is the simulator generating, server-side, and its tokens appear in no report of ours.</a:t>
+              <a:t>• 22% of a task's wall time sits INSIDE tool calls — that is the simulator generating, server-side, and its tokens appear in no report of ours.</a:t>
             </a:r>
           </a:p>
         </p:txBody>
@@ -8229,7 +8229,7 @@
                 </a:solidFill>
                 <a:latin typeface="Calibri"/>
               </a:rPr>
-              <a:t>• ~29 LLM calls, ~15 tool calls, ~270k input, ~4.5 min per task.</a:t>
+              <a:t>• ~30 LLM calls, ~15 tool calls, ~290k input, ~3.7 min per task.</a:t>
             </a:r>
           </a:p>
           <a:p>
@@ -8277,7 +8277,7 @@
                 </a:solidFill>
                 <a:latin typeface="Calibri"/>
               </a:rPr>
-              <a:t>• 34 of 35 measured tasks call finish: it believes it is done and the assertions disagree. No verification pass.</a:t>
+              <a:t>• 41 of 49 measured tasks call finish: it believes it is done and the assertions disagree. No verification pass.</a:t>
             </a:r>
           </a:p>
           <a:p>
@@ -8309,7 +8309,7 @@
                 </a:solidFill>
                 <a:latin typeface="Calibri"/>
               </a:rPr>
-              <a:t>• Two model calls per tool call — tool shortlisting, which only bites with an API surface this large. The first carries 68% of the input tokens.</a:t>
+              <a:t>• Two model calls per tool call — tool shortlisting, which only bites with an API surface this large. The first carries 67% of the input tokens.</a:t>
             </a:r>
           </a:p>
         </p:txBody>
@@ -8789,7 +8789,7 @@
                           </a:solidFill>
                           <a:latin typeface="Calibri"/>
                         </a:rPr>
-                        <a:t>~29 calls, each re-sending the
+                        <a:t>~30 calls, each re-sending the
 whole conversation</a:t>
                       </a:r>
                     </a:p>
@@ -9156,7 +9156,7 @@
                         </a:rPr>
                         <a:t>a genuine model/config
 comparison — it discriminates,
-and 0.83 leaves headroom both ways</a:t>
+and 0.90 leaves headroom both ways</a:t>
                       </a:r>
                     </a:p>
                   </a:txBody>
@@ -9277,8 +9277,9 @@
                           </a:solidFill>
                           <a:latin typeface="Calibri"/>
                         </a:rPr>
-                        <a:t>15 of 50 tasks time out, and a
-killed task leaves NO report row</a:t>
+                        <a:t>long tasks can hit the 600 s
+timeout, and a killed task
+leaves NO report row</a:t>
                       </a:r>
                     </a:p>
                   </a:txBody>
@@ -9343,7 +9344,7 @@
                 </a:solidFill>
                 <a:latin typeface="Calibri"/>
               </a:rPr>
-              <a:t>gsm8k is a SMOKE TEST WITH A SCORE — reading its 0.97 as a model measurement is the most common misreading of these numbers.  tau2 is the only rung that discriminates, and it fails informatively: a wrong answer, a policy violation and a dropped thread are different failures.  appworld earns its place precisely BECAUSE it fails — it is the only leg that has ever exposed a timeout, a context limit or a cache effect before a user did.</a:t>
+              <a:t>gsm8k is a SMOKE TEST WITH A SCORE — reading its 0.98 as a model measurement is the most common misreading of these numbers.  tau2 is the only rung that discriminates, and it fails informatively: a wrong answer, a policy violation and a dropped thread are different failures.  appworld earns its place precisely BECAUSE it fails — it is the only leg that has ever exposed a timeout, a context limit or a cache effect before a user did.</a:t>
             </a:r>
           </a:p>
         </p:txBody>
@@ -9598,7 +9599,7 @@
                 </a:solidFill>
                 <a:latin typeface="Calibri"/>
               </a:rPr>
-              <a:t>Agents up to exgentic 0.3.5.dev131 issued a max_tokens=1 capability probe counted as a chat span, so THEIR llm=2 on gsm8k means ONE real call. From dev145 the probe is an unbilled GET /v1/models that emits no span — verified absent across all 1,895 chat spans of these two matrices. Current runs count real calls 1:1, with no offset to subtract.</a:t>
+              <a:t>Agents up to exgentic 0.3.5.dev131 issued a max_tokens=1 capability probe counted as a chat span, so THEIR llm=2 on gsm8k means ONE real call. The current agent sends no such probe — verified absent across all 2,338 chat spans of these two matrices. Current runs count real calls 1:1, with no offset to subtract.</a:t>
             </a:r>
           </a:p>
         </p:txBody>
@@ -9732,7 +9733,7 @@
                 </a:solidFill>
                 <a:latin typeface="Calibri"/>
               </a:rPr>
-              <a:t>Measured OUT CV &gt; IN CV in 15 of the 22 legs that ran more than one task. On a one-call model gsm8k's prompt is near-constant while answer length swings (IN 0.06-0.09 vs OUT 0.52-0.86); gpt-4.1 needs tool round-trips and varies on the input side too (IN 0.39-0.44). Only long-horizon appworld is input-led, in all four of its legs. Read the CV, not the mechanism.</a:t>
+              <a:t>Measured OUT CV &gt; IN CV in 16 of the 22 legs that ran more than one task. On a one-call model gsm8k's prompt is near-constant while answer length swings (IN 0.06-0.09 vs OUT 0.55-0.99); gpt-4.1 needs tool round-trips and varies on the input side too (IN 0.38-0.44). Only long-horizon appworld is input-led, in all four of its legs. Read the CV, not the mechanism.</a:t>
             </a:r>
           </a:p>
         </p:txBody>
@@ -9799,7 +9800,7 @@
                 </a:solidFill>
                 <a:latin typeface="Calibri"/>
               </a:rPr>
-              <a:t>A run takes the first max_tasks tasks, so the same task_id is the same task across runs and clusters, and a smaller run is a prefix of a larger one. That is what makes cross-platform comparison like-for-like — six legs matched to the byte.</a:t>
+              <a:t>A run takes the first max_tasks tasks, so the same task_id is the same task across runs and clusters, and a smaller run is a prefix of a larger one. That is what makes cross-platform comparison like-for-like — seven legs matched to the byte.</a:t>
             </a:r>
           </a:p>
         </p:txBody>
@@ -10221,7 +10222,7 @@
                           </a:solidFill>
                           <a:latin typeface="Calibri"/>
                         </a:rPr>
-                        <a:t>$1.70 / 10</a:t>
+                        <a:t>$1.60 / 10</a:t>
                       </a:r>
                     </a:p>
                   </a:txBody>
@@ -10292,7 +10293,7 @@
                           </a:solidFill>
                           <a:latin typeface="Calibri"/>
                         </a:rPr>
-                        <a:t>$1.90–2.80 / 5</a:t>
+                        <a:t>$3.10–3.40 / 5</a:t>
                       </a:r>
                     </a:p>
                   </a:txBody>
@@ -10417,7 +10418,7 @@
                           </a:solidFill>
                           <a:latin typeface="Calibri"/>
                         </a:rPr>
-                        <a:t>leg (v1.28)</a:t>
+                        <a:t>leg (v1.35)</a:t>
                       </a:r>
                     </a:p>
                   </a:txBody>
@@ -10557,7 +10558,7 @@
                           </a:solidFill>
                           <a:latin typeface="Calibri"/>
                         </a:rPr>
-                        <a:t>470</a:t>
+                        <a:t>406</a:t>
                       </a:r>
                     </a:p>
                   </a:txBody>
@@ -10580,7 +10581,7 @@
                           </a:solidFill>
                           <a:latin typeface="Calibri"/>
                         </a:rPr>
-                        <a:t>$0.0004</a:t>
+                        <a:t>$0.0003</a:t>
                       </a:r>
                     </a:p>
                   </a:txBody>
@@ -10603,7 +10604,7 @@
                           </a:solidFill>
                           <a:latin typeface="Calibri"/>
                         </a:rPr>
-                        <a:t>790</a:t>
+                        <a:t>406</a:t>
                       </a:r>
                     </a:p>
                   </a:txBody>
@@ -10626,7 +10627,7 @@
                           </a:solidFill>
                           <a:latin typeface="Calibri"/>
                         </a:rPr>
-                        <a:t>$0.0010</a:t>
+                        <a:t>$0.0003</a:t>
                       </a:r>
                     </a:p>
                   </a:txBody>
@@ -10791,6 +10792,52 @@
                           </a:solidFill>
                           <a:latin typeface="Calibri"/>
                         </a:rPr>
+                        <a:t>24 K</a:t>
+                      </a:r>
+                    </a:p>
+                  </a:txBody>
+                  <a:tcPr marL="63500" marR="63500" marT="12700" marB="12700" anchor="ctr">
+                    <a:solidFill>
+                      <a:srgbClr val="FFFFFF"/>
+                    </a:solidFill>
+                  </a:tcPr>
+                </a:tc>
+                <a:tc>
+                  <a:txBody>
+                    <a:bodyPr/>
+                    <a:lstStyle/>
+                    <a:p>
+                      <a:pPr algn="ctr"/>
+                      <a:r>
+                        <a:rPr sz="1050" b="0" i="0">
+                          <a:solidFill>
+                            <a:srgbClr val="1F2A37"/>
+                          </a:solidFill>
+                          <a:latin typeface="Calibri"/>
+                        </a:rPr>
+                        <a:t>$0.020</a:t>
+                      </a:r>
+                    </a:p>
+                  </a:txBody>
+                  <a:tcPr marL="63500" marR="63500" marT="12700" marB="12700" anchor="ctr">
+                    <a:solidFill>
+                      <a:srgbClr val="FFFFFF"/>
+                    </a:solidFill>
+                  </a:tcPr>
+                </a:tc>
+                <a:tc>
+                  <a:txBody>
+                    <a:bodyPr/>
+                    <a:lstStyle/>
+                    <a:p>
+                      <a:pPr algn="ctr"/>
+                      <a:r>
+                        <a:rPr sz="1050" b="0" i="0">
+                          <a:solidFill>
+                            <a:srgbClr val="1F2A37"/>
+                          </a:solidFill>
+                          <a:latin typeface="Calibri"/>
+                        </a:rPr>
                         <a:t>25 K</a:t>
                       </a:r>
                     </a:p>
@@ -10814,53 +10861,7 @@
                           </a:solidFill>
                           <a:latin typeface="Calibri"/>
                         </a:rPr>
-                        <a:t>$0.023</a:t>
-                      </a:r>
-                    </a:p>
-                  </a:txBody>
-                  <a:tcPr marL="63500" marR="63500" marT="12700" marB="12700" anchor="ctr">
-                    <a:solidFill>
-                      <a:srgbClr val="FFFFFF"/>
-                    </a:solidFill>
-                  </a:tcPr>
-                </a:tc>
-                <a:tc>
-                  <a:txBody>
-                    <a:bodyPr/>
-                    <a:lstStyle/>
-                    <a:p>
-                      <a:pPr algn="ctr"/>
-                      <a:r>
-                        <a:rPr sz="1050" b="0" i="0">
-                          <a:solidFill>
-                            <a:srgbClr val="1F2A37"/>
-                          </a:solidFill>
-                          <a:latin typeface="Calibri"/>
-                        </a:rPr>
-                        <a:t>24 K</a:t>
-                      </a:r>
-                    </a:p>
-                  </a:txBody>
-                  <a:tcPr marL="63500" marR="63500" marT="12700" marB="12700" anchor="ctr">
-                    <a:solidFill>
-                      <a:srgbClr val="FFFFFF"/>
-                    </a:solidFill>
-                  </a:tcPr>
-                </a:tc>
-                <a:tc>
-                  <a:txBody>
-                    <a:bodyPr/>
-                    <a:lstStyle/>
-                    <a:p>
-                      <a:pPr algn="ctr"/>
-                      <a:r>
-                        <a:rPr sz="1050" b="0" i="0">
-                          <a:solidFill>
-                            <a:srgbClr val="1F2A37"/>
-                          </a:solidFill>
-                          <a:latin typeface="Calibri"/>
-                        </a:rPr>
-                        <a:t>$0.021</a:t>
+                        <a:t>$0.022</a:t>
                       </a:r>
                     </a:p>
                   </a:txBody>
@@ -10908,7 +10909,7 @@
                           </a:solidFill>
                           <a:latin typeface="Calibri"/>
                         </a:rPr>
-                        <a:t>1.01 M</a:t>
+                        <a:t>0.96 M</a:t>
                       </a:r>
                     </a:p>
                   </a:txBody>
@@ -10931,7 +10932,7 @@
                           </a:solidFill>
                           <a:latin typeface="Calibri"/>
                         </a:rPr>
-                        <a:t>$1.66</a:t>
+                        <a:t>$1.59</a:t>
                       </a:r>
                     </a:p>
                   </a:txBody>
@@ -10954,7 +10955,7 @@
                           </a:solidFill>
                           <a:latin typeface="Calibri"/>
                         </a:rPr>
-                        <a:t>1.04 M</a:t>
+                        <a:t>0.94 M</a:t>
                       </a:r>
                     </a:p>
                   </a:txBody>
@@ -10977,7 +10978,7 @@
                           </a:solidFill>
                           <a:latin typeface="Calibri"/>
                         </a:rPr>
-                        <a:t>$1.73</a:t>
+                        <a:t>$1.56</a:t>
                       </a:r>
                     </a:p>
                   </a:txBody>
@@ -11048,7 +11049,7 @@
                           </a:solidFill>
                           <a:latin typeface="Calibri"/>
                         </a:rPr>
-                        <a:t>$2.90</a:t>
+                        <a:t>$2.88</a:t>
                       </a:r>
                     </a:p>
                   </a:txBody>
@@ -11071,7 +11072,7 @@
                           </a:solidFill>
                           <a:latin typeface="Calibri"/>
                         </a:rPr>
-                        <a:t>1.78 M</a:t>
+                        <a:t>1.77 M</a:t>
                       </a:r>
                     </a:p>
                   </a:txBody>
@@ -11094,7 +11095,7 @@
                           </a:solidFill>
                           <a:latin typeface="Calibri"/>
                         </a:rPr>
-                        <a:t>$2.94</a:t>
+                        <a:t>$2.93</a:t>
                       </a:r>
                     </a:p>
                   </a:txBody>
@@ -11142,7 +11143,7 @@
                           </a:solidFill>
                           <a:latin typeface="Calibri"/>
                         </a:rPr>
-                        <a:t>1.49 M</a:t>
+                        <a:t>1.55 M</a:t>
                       </a:r>
                     </a:p>
                   </a:txBody>
@@ -11165,7 +11166,7 @@
                           </a:solidFill>
                           <a:latin typeface="Calibri"/>
                         </a:rPr>
-                        <a:t>$2.79</a:t>
+                        <a:t>$3.10</a:t>
                       </a:r>
                     </a:p>
                   </a:txBody>
@@ -11188,7 +11189,7 @@
                           </a:solidFill>
                           <a:latin typeface="Calibri"/>
                         </a:rPr>
-                        <a:t>0.93 M</a:t>
+                        <a:t>1.71 M</a:t>
                       </a:r>
                     </a:p>
                   </a:txBody>
@@ -11211,7 +11212,7 @@
                           </a:solidFill>
                           <a:latin typeface="Calibri"/>
                         </a:rPr>
-                        <a:t>$1.90</a:t>
+                        <a:t>$3.39</a:t>
                       </a:r>
                     </a:p>
                   </a:txBody>
@@ -11259,7 +11260,7 @@
                           </a:solidFill>
                           <a:latin typeface="Calibri"/>
                         </a:rPr>
-                        <a:t>5.71 M</a:t>
+                        <a:t>6.47 M</a:t>
                       </a:r>
                     </a:p>
                   </a:txBody>
@@ -11282,7 +11283,7 @@
                           </a:solidFill>
                           <a:latin typeface="Calibri"/>
                         </a:rPr>
-                        <a:t>$11.52</a:t>
+                        <a:t>$12.63</a:t>
                       </a:r>
                     </a:p>
                   </a:txBody>
@@ -11305,7 +11306,7 @@
                           </a:solidFill>
                           <a:latin typeface="Calibri"/>
                         </a:rPr>
-                        <a:t>2.20 M</a:t>
+                        <a:t>5.87 M</a:t>
                       </a:r>
                     </a:p>
                   </a:txBody>
@@ -11328,7 +11329,7 @@
                           </a:solidFill>
                           <a:latin typeface="Calibri"/>
                         </a:rPr>
-                        <a:t>$4.40</a:t>
+                        <a:t>$11.94</a:t>
                       </a:r>
                     </a:p>
                   </a:txBody>
@@ -11376,7 +11377,7 @@
                           </a:solidFill>
                           <a:latin typeface="Calibri"/>
                         </a:rPr>
-                        <a:t>10.0 M</a:t>
+                        <a:t>10.8 M</a:t>
                       </a:r>
                     </a:p>
                   </a:txBody>
@@ -11399,7 +11400,7 @@
                           </a:solidFill>
                           <a:latin typeface="Calibri"/>
                         </a:rPr>
-                        <a:t>$18.91</a:t>
+                        <a:t>$20.25</a:t>
                       </a:r>
                     </a:p>
                   </a:txBody>
@@ -11422,7 +11423,7 @@
                           </a:solidFill>
                           <a:latin typeface="Calibri"/>
                         </a:rPr>
-                        <a:t>6.0 M</a:t>
+                        <a:t>10.3 M</a:t>
                       </a:r>
                     </a:p>
                   </a:txBody>
@@ -11445,7 +11446,7 @@
                           </a:solidFill>
                           <a:latin typeface="Calibri"/>
                         </a:rPr>
-                        <a:t>$11.02</a:t>
+                        <a:t>$19.87</a:t>
                       </a:r>
                     </a:p>
                   </a:txBody>
@@ -11522,7 +11523,7 @@
                 </a:solidFill>
                 <a:latin typeface="Calibri"/>
               </a:rPr>
-              <a:t>The eight gsm8k legs together are 0.2% of the matrix's bill on OpenShift (0.4% on KinD). appworld's two legs are 76% of it (57%); tau2's two are 24% (42%). A 50-task gsm8k leg costs 2 cents — less than a twenty-fifth of a SINGLE appworld task.</a:t>
+              <a:t>The eight gsm8k legs together are 0.2% of the matrix's bill on both platforms. appworld's two legs are 78% of it on OpenShift (77% on KinD); tau2's two are 22% (23%). A 50-task gsm8k leg costs 2 cents — about a thirtieth of a SINGLE appworld task.</a:t>
             </a:r>
           </a:p>
         </p:txBody>
@@ -11577,7 +11578,7 @@
                 </a:solidFill>
                 <a:latin typeface="Calibri"/>
               </a:rPr>
-              <a:t>Two legs of the same size are not the same bill</a:t>
+              <a:t>The same work, close to the same bill — not by law</a:t>
             </a:r>
           </a:p>
           <a:p>
@@ -11589,7 +11590,7 @@
                 </a:solidFill>
                 <a:latin typeface="Calibri"/>
               </a:rPr>
-              <a:t>#12 cost 2.6× more on OpenShift than on KinD for the same 20 requested tasks: appworld turn counts are nondeterministic, and the slower cluster's tasks ran longer before the 600 s timeout. So the two $18.91 / $11.02 totals are NOT a platform comparison — OpenShift completed 18 appworld tasks against KinD's 10. Size appworld on YOUR cluster.</a:t>
+              <a:t>The two totals land within 2% ($20.25 / $19.87), #12 within 6%: the same request bodies through one gateway. But appworld turn counts are nondeterministic (21 tasks completed on OpenShift, 20 on KinD), and a cluster whose tasks run longer before the 600 s timeout bills more for the same work. Size appworld on YOUR cluster.</a:t>
             </a:r>
           </a:p>
         </p:txBody>
@@ -11644,7 +11645,7 @@
                 </a:solidFill>
                 <a:latin typeface="Calibri"/>
               </a:rPr>
-              <a:t>And the totals UNDERSTATE it three ways:  a task killed by the per-task timeout burns tokens but leaves no report row, so appworld's 15 timed-out tasks are missing from the numbers above.  tau2's user simulator runs in the MCP pod, which is not instrumented — its inference is billed by the gateway and counted nowhere here.  And a leg that replays the gateway's completion cache re-reports stored usage for calls that were never made upstream.  7.7 puts a dollar figure on the fourth: the IBAC judge, which the agent's spans never see.</a:t>
+              <a:t>And the totals UNDERSTATE it three ways:  a task killed by the per-task timeout burns tokens but leaves no report row, so appworld's one timed-out task is missing from the numbers above.  tau2's user simulator runs in the MCP pod, which is not instrumented — its inference is billed by the gateway and counted nowhere here.  And a leg that replays the gateway's completion cache re-reports stored usage for calls that were never made upstream.  7.7 puts a dollar figure on the fourth: the IBAC judge, which the agent's spans never see.</a:t>
             </a:r>
           </a:p>
         </p:txBody>
@@ -12113,7 +12114,7 @@
                           </a:solidFill>
                           <a:latin typeface="Calibri"/>
                         </a:rPr>
-                        <a:t>1.10</a:t>
+                        <a:t>1.11</a:t>
                       </a:r>
                     </a:p>
                   </a:txBody>
@@ -12136,7 +12137,7 @@
                           </a:solidFill>
                           <a:latin typeface="Calibri"/>
                         </a:rPr>
-                        <a:t>11.38</a:t>
+                        <a:t>11.10</a:t>
                       </a:r>
                     </a:p>
                   </a:txBody>
@@ -12159,7 +12160,7 @@
                           </a:solidFill>
                           <a:latin typeface="Calibri"/>
                         </a:rPr>
-                        <a:t>29.20</a:t>
+                        <a:t>30.22</a:t>
                       </a:r>
                     </a:p>
                   </a:txBody>
@@ -12207,7 +12208,7 @@
                           </a:solidFill>
                           <a:latin typeface="Calibri"/>
                         </a:rPr>
-                        <a:t>341</a:t>
+                        <a:t>343</a:t>
                       </a:r>
                     </a:p>
                   </a:txBody>
@@ -12230,7 +12231,7 @@
                           </a:solidFill>
                           <a:latin typeface="Calibri"/>
                         </a:rPr>
-                        <a:t>90,902</a:t>
+                        <a:t>87,935</a:t>
                       </a:r>
                     </a:p>
                   </a:txBody>
@@ -12253,7 +12254,7 @@
                           </a:solidFill>
                           <a:latin typeface="Calibri"/>
                         </a:rPr>
-                        <a:t>269,953</a:t>
+                        <a:t>291,509</a:t>
                       </a:r>
                     </a:p>
                   </a:txBody>
@@ -12301,7 +12302,7 @@
                           </a:solidFill>
                           <a:latin typeface="Calibri"/>
                         </a:rPr>
-                        <a:t>180</a:t>
+                        <a:t>170</a:t>
                       </a:r>
                     </a:p>
                   </a:txBody>
@@ -12324,7 +12325,7 @@
                           </a:solidFill>
                           <a:latin typeface="Calibri"/>
                         </a:rPr>
-                        <a:t>2,061</a:t>
+                        <a:t>2,071</a:t>
                       </a:r>
                     </a:p>
                   </a:txBody>
@@ -12347,7 +12348,7 @@
                           </a:solidFill>
                           <a:latin typeface="Calibri"/>
                         </a:rPr>
-                        <a:t>25,140</a:t>
+                        <a:t>26,950</a:t>
                       </a:r>
                     </a:p>
                   </a:txBody>
@@ -12395,7 +12396,7 @@
                           </a:solidFill>
                           <a:latin typeface="Calibri"/>
                         </a:rPr>
-                        <a:t>520</a:t>
+                        <a:t>513</a:t>
                       </a:r>
                     </a:p>
                   </a:txBody>
@@ -12418,7 +12419,7 @@
                           </a:solidFill>
                           <a:latin typeface="Calibri"/>
                         </a:rPr>
-                        <a:t>92,963</a:t>
+                        <a:t>90,006</a:t>
                       </a:r>
                     </a:p>
                   </a:txBody>
@@ -12441,7 +12442,7 @@
                           </a:solidFill>
                           <a:latin typeface="Calibri"/>
                         </a:rPr>
-                        <a:t>295,093</a:t>
+                        <a:t>318,459</a:t>
                       </a:r>
                     </a:p>
                   </a:txBody>
@@ -12512,7 +12513,7 @@
                           </a:solidFill>
                           <a:latin typeface="Calibri"/>
                         </a:rPr>
-                        <a:t>178×</a:t>
+                        <a:t>175×</a:t>
                       </a:r>
                     </a:p>
                   </a:txBody>
@@ -12535,7 +12536,7 @@
                           </a:solidFill>
                           <a:latin typeface="Calibri"/>
                         </a:rPr>
-                        <a:t>564×</a:t>
+                        <a:t>621×</a:t>
                       </a:r>
                     </a:p>
                   </a:txBody>
@@ -12583,7 +12584,7 @@
                           </a:solidFill>
                           <a:latin typeface="Calibri"/>
                         </a:rPr>
-                        <a:t>$0.00055</a:t>
+                        <a:t>$0.00053</a:t>
                       </a:r>
                     </a:p>
                   </a:txBody>
@@ -12606,7 +12607,7 @@
                           </a:solidFill>
                           <a:latin typeface="Calibri"/>
                         </a:rPr>
-                        <a:t>$0.154</a:t>
+                        <a:t>$0.149</a:t>
                       </a:r>
                     </a:p>
                   </a:txBody>
@@ -12629,7 +12630,7 @@
                           </a:solidFill>
                           <a:latin typeface="Calibri"/>
                         </a:rPr>
-                        <a:t>$0.589</a:t>
+                        <a:t>$0.634</a:t>
                       </a:r>
                     </a:p>
                   </a:txBody>
@@ -12700,7 +12701,7 @@
                           </a:solidFill>
                           <a:latin typeface="Calibri"/>
                         </a:rPr>
-                        <a:t>279×</a:t>
+                        <a:t>282×</a:t>
                       </a:r>
                     </a:p>
                   </a:txBody>
@@ -12723,7 +12724,7 @@
                           </a:solidFill>
                           <a:latin typeface="Calibri"/>
                         </a:rPr>
-                        <a:t>1,069×</a:t>
+                        <a:t>1,195×</a:t>
                       </a:r>
                     </a:p>
                   </a:txBody>
@@ -12771,7 +12772,7 @@
                           </a:solidFill>
                           <a:latin typeface="Calibri"/>
                         </a:rPr>
-                        <a:t>$0.06</a:t>
+                        <a:t>$0.05</a:t>
                       </a:r>
                     </a:p>
                   </a:txBody>
@@ -12794,7 +12795,7 @@
                           </a:solidFill>
                           <a:latin typeface="Calibri"/>
                         </a:rPr>
-                        <a:t>$15.38</a:t>
+                        <a:t>$14.94</a:t>
                       </a:r>
                     </a:p>
                   </a:txBody>
@@ -12817,7 +12818,7 @@
                           </a:solidFill>
                           <a:latin typeface="Calibri"/>
                         </a:rPr>
-                        <a:t>$58.88</a:t>
+                        <a:t>$63.39</a:t>
                       </a:r>
                     </a:p>
                   </a:txBody>
@@ -12865,7 +12866,7 @@
                           </a:solidFill>
                           <a:latin typeface="Calibri"/>
                         </a:rPr>
-                        <a:t>66%</a:t>
+                        <a:t>67%</a:t>
                       </a:r>
                     </a:p>
                   </a:txBody>
@@ -12959,7 +12960,7 @@
                           </a:solidFill>
                           <a:latin typeface="Calibri"/>
                         </a:rPr>
-                        <a:t>31%</a:t>
+                        <a:t>32%</a:t>
                       </a:r>
                     </a:p>
                   </a:txBody>
@@ -12982,7 +12983,7 @@
                           </a:solidFill>
                           <a:latin typeface="Calibri"/>
                         </a:rPr>
-                        <a:t>90%</a:t>
+                        <a:t>89%</a:t>
                       </a:r>
                     </a:p>
                   </a:txBody>
@@ -13053,7 +13054,7 @@
                           </a:solidFill>
                           <a:latin typeface="Calibri"/>
                         </a:rPr>
-                        <a:t>4.9 s</a:t>
+                        <a:t>2.5 s</a:t>
                       </a:r>
                     </a:p>
                   </a:txBody>
@@ -13076,7 +13077,7 @@
                           </a:solidFill>
                           <a:latin typeface="Calibri"/>
                         </a:rPr>
-                        <a:t>84 s</a:t>
+                        <a:t>48 s</a:t>
                       </a:r>
                     </a:p>
                   </a:txBody>
@@ -13099,7 +13100,7 @@
                           </a:solidFill>
                           <a:latin typeface="Calibri"/>
                         </a:rPr>
-                        <a:t>264 s</a:t>
+                        <a:t>222 s</a:t>
                       </a:r>
                     </a:p>
                   </a:txBody>
@@ -13147,7 +13148,7 @@
                           </a:solidFill>
                           <a:latin typeface="Calibri"/>
                         </a:rPr>
-                        <a:t>90%</a:t>
+                        <a:t>82%</a:t>
                       </a:r>
                     </a:p>
                   </a:txBody>
@@ -13170,7 +13171,7 @@
                           </a:solidFill>
                           <a:latin typeface="Calibri"/>
                         </a:rPr>
-                        <a:t>58%</a:t>
+                        <a:t>60%</a:t>
                       </a:r>
                     </a:p>
                   </a:txBody>
@@ -13193,7 +13194,7 @@
                           </a:solidFill>
                           <a:latin typeface="Calibri"/>
                         </a:rPr>
-                        <a:t>96%</a:t>
+                        <a:t>95%</a:t>
                       </a:r>
                     </a:p>
                   </a:txBody>
@@ -13241,7 +13242,7 @@
                           </a:solidFill>
                           <a:latin typeface="Calibri"/>
                         </a:rPr>
-                        <a:t>0.97</a:t>
+                        <a:t>0.98</a:t>
                       </a:r>
                     </a:p>
                   </a:txBody>
@@ -13264,7 +13265,7 @@
                           </a:solidFill>
                           <a:latin typeface="Calibri"/>
                         </a:rPr>
-                        <a:t>0.83</a:t>
+                        <a:t>0.90</a:t>
                       </a:r>
                     </a:p>
                   </a:txBody>
@@ -13433,7 +13434,7 @@
                           </a:solidFill>
                           <a:latin typeface="Calibri"/>
                         </a:rPr>
-                        <a:t>0.80 / 1.00</a:t>
+                        <a:t>0.80 / 0.80</a:t>
                       </a:r>
                     </a:p>
                   </a:txBody>
@@ -13575,7 +13576,7 @@
                           </a:solidFill>
                           <a:latin typeface="Calibri"/>
                         </a:rPr>
-                        <a:t>775 – 837</a:t>
+                        <a:t>782 – 835</a:t>
                       </a:r>
                     </a:p>
                   </a:txBody>
@@ -13646,7 +13647,7 @@
                           </a:solidFill>
                           <a:latin typeface="Calibri"/>
                         </a:rPr>
-                        <a:t>57 – 63</a:t>
+                        <a:t>63</a:t>
                       </a:r>
                     </a:p>
                   </a:txBody>
@@ -13669,7 +13670,7 @@
                           </a:solidFill>
                           <a:latin typeface="Calibri"/>
                         </a:rPr>
-                        <a:t>125 – 368</a:t>
+                        <a:t>201 – 214</a:t>
                       </a:r>
                     </a:p>
                   </a:txBody>
@@ -13717,7 +13718,7 @@
                           </a:solidFill>
                           <a:latin typeface="Calibri"/>
                         </a:rPr>
-                        <a:t>832 – 900</a:t>
+                        <a:t>844 – 898</a:t>
                       </a:r>
                     </a:p>
                   </a:txBody>
@@ -13740,7 +13741,7 @@
                           </a:solidFill>
                           <a:latin typeface="Calibri"/>
                         </a:rPr>
-                        <a:t>438 – 681</a:t>
+                        <a:t>514 – 527</a:t>
                       </a:r>
                     </a:p>
                   </a:txBody>
@@ -13788,7 +13789,7 @@
                           </a:solidFill>
                           <a:latin typeface="Calibri"/>
                         </a:rPr>
-                        <a:t>$0.0020 – 0.0022</a:t>
+                        <a:t>$0.0021 – 0.0022</a:t>
                       </a:r>
                     </a:p>
                   </a:txBody>
@@ -13811,7 +13812,7 @@
                           </a:solidFill>
                           <a:latin typeface="Calibri"/>
                         </a:rPr>
-                        <a:t>$0.00033 – 0.00081</a:t>
+                        <a:t>$0.00048 – 0.00051</a:t>
                       </a:r>
                     </a:p>
                   </a:txBody>
@@ -13876,7 +13877,7 @@
                 </a:solidFill>
                 <a:latin typeface="Calibri"/>
               </a:rPr>
-              <a:t>Same five tasks: gpt-4.1 costs 4.1× gpt-5-mini</a:t>
+              <a:t>Same five tasks: gpt-4.1 costs 4.6× gpt-5-mini</a:t>
             </a:r>
           </a:p>
           <a:p>
@@ -13888,7 +13889,7 @@
                 </a:solidFill>
                 <a:latin typeface="Calibri"/>
               </a:rPr>
-              <a:t>Mean of its 2 legs against gpt-5-mini's 7; leg-to-leg the ratio spans 2.5×–6.7×, because gpt-5-mini's output length swings with reasoning effort. The reasoning model answers in ONE call; gpt-4.1 needs ~3 tool round-trips. On our card the INPUT side decides it alone — 2.6× the tokens at 8× the price is a 21× input bill, and the output side cannot offset it (gpt-5-mini emits 3.6× more output at a quarter the rate, so the two output bills land within 10% of each other).</a:t>
+              <a:t>Mean of its 2 legs against gpt-5-mini's 8; leg-to-leg the ratio spans 3.3×–6.6×, because gpt-5-mini's output length swings with reasoning effort. The reasoning model answers in ONE call; gpt-4.1 needs ~3 tool round-trips. On our card the INPUT side decides it alone — 2.6× the tokens at 8× the price is a 21× input bill, and the output side cannot offset it (gpt-5-mini emits 3.3× more output at a quarter the rate, so the two output bills land within 24% of each other).</a:t>
             </a:r>
           </a:p>
         </p:txBody>
@@ -13943,7 +13944,7 @@
                 </a:solidFill>
                 <a:latin typeface="Calibri"/>
               </a:rPr>
-              <a:t>cost per task  =  (input tokens × P_in  +  output tokens × P_out) / 1 M     — which model is cheaper is a property of the PRICE LIST, not of the models: compute it for your own rates.  Money AMPLIFIES the difficulty ladder rather than tracking it (tau2 178× a gsm8k task in tokens but 279× in dollars; appworld 564× but 1,069×), because the harder benchmarks also run the dearer models — a budget scaled off the token ratios is short by 1.6–1.9×.</a:t>
+              <a:t>cost per task  =  (input tokens × P_in  +  output tokens × P_out) / 1 M     — which model is cheaper is a property of the PRICE LIST, not of the models: compute it for your own rates.  Money AMPLIFIES the difficulty ladder rather than tracking it (tau2 175× a gsm8k task in tokens but 282× in dollars; appworld 621× but 1,195×), because the harder benchmarks also run the dearer models — a budget scaled off the token ratios is short by 1.6–1.9×.</a:t>
             </a:r>
           </a:p>
         </p:txBody>
@@ -14928,7 +14929,7 @@
                 </a:solidFill>
                 <a:latin typeface="Calibri"/>
               </a:rPr>
-              <a:t>The judge makes ~1 completion per authorized tool call, on Azure/gpt-4.1 — the dearest model on the card — against a FIXED 1,577-char system prompt that does not shrink with the task. That is ≥ $0.00111 per call, which is 2.4× the entire gsm8k task it is authorizing ($0.00045), and 1.4×–4.4× the agent's whole bill across legs #6–#8. On the plugin legs IBAC is not overhead on the bill; it IS the bill.  tau2's user simulator is invisible the same way: same model as the agent, but inside the uninstrumented MCP pod.</a:t>
+              <a:t>The judge makes ~1 completion per authorized tool call, on Azure/gpt-4.1 — the dearest model on the card — against a FIXED 1,577-char system prompt that does not shrink with the task. That is ≥ $0.00111 per call, which is 2.6× the entire gsm8k task it is authorizing ($0.00043), and 1.7×–3.4× the agent's whole bill across legs #6–#8. On the plugin legs IBAC is not overhead on the bill; it IS the bill.  tau2's user simulator is invisible the same way: same model as the agent, but inside the uninstrumented MCP pod.</a:t>
             </a:r>
           </a:p>
         </p:txBody>
@@ -14995,7 +14996,7 @@
                 </a:solidFill>
                 <a:latin typeface="Calibri"/>
               </a:rPr>
-              <a:t>The gateway REPORTS cached input (usage.prompt_tokens_details.cached_tokens, verified by probe) but publishes no cached-input rate, and report.ndjson stores one undifferentiated llm_input_tokens — so no past run can be re-priced. The exposure is capped by input's share of the bill: if cached input were FREE, tau2 would floor at $0.0157 a task instead of $0.154 and appworld at $0.251 instead of $0.589, while gsm8k barely moves. That ordering is structural — caching pays off on a long re-sent prefix, which is what makes input dominate.</a:t>
+              <a:t>The gateway REPORTS cached input (usage.prompt_tokens_details.cached_tokens, verified by probe) but publishes no cached-input rate, and report.ndjson stores one undifferentiated llm_input_tokens — so no past run can be re-priced. The exposure is capped by input's share of the bill: if cached input were FREE, tau2 would floor at $0.0157 a task instead of $0.149 and appworld at $0.270 instead of $0.634, while gsm8k barely moves. That ordering is structural — caching pays off on a long re-sent prefix, which is what makes input dominate.</a:t>
             </a:r>
           </a:p>
         </p:txBody>
@@ -16603,7 +16604,7 @@
                 </a:solidFill>
                 <a:latin typeface="Calibri"/>
               </a:rPr>
-              <a:t>Measured on the v1.28 pair (267 task rows) at the rate card in 7.7 — one take-away per figure</a:t>
+              <a:t>Measured on the v1.35 pair (281 task rows) at the rate card in 7.7 — one take-away per figure</a:t>
             </a:r>
           </a:p>
         </p:txBody>
@@ -16694,7 +16695,7 @@
                 </a:solidFill>
                 <a:latin typeface="Calibri"/>
               </a:rPr>
-              <a:t>Money climbs the difficulty ladder faster than tokens do: tau2 is 178× a gsm8k task in tokens but 279× in dollars, appworld is 564× a gsm8k task in tokens but 1,069× in dollars — so a budget scaled off the token ratios is short by 1.6–1.9×.</a:t>
+              <a:t>Money climbs the difficulty ladder faster than tokens do: tau2 is 175× a gsm8k task in tokens but 282× in dollars, appworld is 621× a gsm8k task in tokens but 1,195× in dollars — so a budget scaled off the token ratios is short by 1.6–1.9×.</a:t>
             </a:r>
           </a:p>
         </p:txBody>
@@ -16785,7 +16786,7 @@
                 </a:solidFill>
                 <a:latin typeface="Calibri"/>
               </a:rPr>
-              <a:t>Output is priced 4–8× input on every model we use, so the token split misstates the bill every time: gsm8k on gpt-5-mini is 63% input by tokens and only 17% by cost.</a:t>
+              <a:t>Output is priced 4–8× input on every model we use, so the token split misstates the bill every time: gsm8k on gpt-5-mini is 64% input by tokens and only 18% by cost.</a:t>
             </a:r>
           </a:p>
         </p:txBody>
@@ -16807,7 +16808,7 @@
         <p:spPr>
           <a:xfrm>
             <a:off x="8183879" y="1234440"/>
-            <a:ext cx="3611880" cy="1756890"/>
+            <a:ext cx="3611880" cy="1774415"/>
           </a:xfrm>
           <a:prstGeom prst="rect">
             <a:avLst/>
@@ -16822,7 +16823,7 @@
         </p:nvSpPr>
         <p:spPr>
           <a:xfrm>
-            <a:off x="8183879" y="3082770"/>
+            <a:off x="8183879" y="3100295"/>
             <a:ext cx="3611880" cy="2148840"/>
           </a:xfrm>
           <a:prstGeom prst="roundRect">
@@ -16876,7 +16877,7 @@
                 </a:solidFill>
                 <a:latin typeface="Calibri"/>
               </a:rPr>
-              <a:t>gpt-4.1 costs 4.1× gpt-5-mini on the identical 5 gsm8k tasks, and the input side decides it alone: 21× the input bill, against an output bill the two models split within 10%.</a:t>
+              <a:t>gpt-4.1 costs 4.6× gpt-5-mini on the identical 5 gsm8k tasks, and the input side decides it alone: 21× the input bill, against an output bill the two models split within 24%.</a:t>
             </a:r>
           </a:p>
         </p:txBody>
@@ -17088,7 +17089,7 @@
                 </a:solidFill>
                 <a:latin typeface="Calibri"/>
               </a:rPr>
-              <a:t>Two of the twelve legs are 76% of a matrix's bill, while all 8 gsm8k legs together are 0.2% of it — so budget by benchmark, not by task count.</a:t>
+              <a:t>Two of the twelve legs are 78% of a matrix's bill, while all 8 gsm8k legs together are 0.2% of it — so budget by benchmark, not by task count.</a:t>
             </a:r>
           </a:p>
         </p:txBody>
@@ -17110,7 +17111,7 @@
         <p:spPr>
           <a:xfrm>
             <a:off x="4297680" y="1234440"/>
-            <a:ext cx="3611880" cy="2080492"/>
+            <a:ext cx="3611880" cy="2092865"/>
           </a:xfrm>
           <a:prstGeom prst="rect">
             <a:avLst/>
@@ -17125,7 +17126,7 @@
         </p:nvSpPr>
         <p:spPr>
           <a:xfrm>
-            <a:off x="4297680" y="3406372"/>
+            <a:off x="4297680" y="3418745"/>
             <a:ext cx="3611880" cy="2148840"/>
           </a:xfrm>
           <a:prstGeom prst="roundRect">
@@ -17179,7 +17180,7 @@
                 </a:solidFill>
                 <a:latin typeface="Calibri"/>
               </a:rPr>
-              <a:t>Dividing by the pass rate is what turns a token count into an efficiency figure: gsm8k $0.00055 per task becomes $0.00056 per PASS; tau2 $0.1538 per task becomes $0.1846 per PASS — and appworld has no finite cost per success at all, because it passed nothing.</a:t>
+              <a:t>Dividing by the pass rate is what turns a token count into an efficiency figure: gsm8k $0.00053 per task becomes $0.00054 per PASS; tau2 $0.1494 per task becomes $0.1660 per PASS — and appworld has no finite cost per success at all, because it passed nothing.</a:t>
             </a:r>
           </a:p>
         </p:txBody>
@@ -17201,7 +17202,7 @@
         <p:spPr>
           <a:xfrm>
             <a:off x="8183879" y="1234440"/>
-            <a:ext cx="3611880" cy="2099443"/>
+            <a:ext cx="3611880" cy="2035312"/>
           </a:xfrm>
           <a:prstGeom prst="rect">
             <a:avLst/>
@@ -17216,7 +17217,7 @@
         </p:nvSpPr>
         <p:spPr>
           <a:xfrm>
-            <a:off x="8183879" y="3425323"/>
+            <a:off x="8183879" y="3361192"/>
             <a:ext cx="3611880" cy="2148840"/>
           </a:xfrm>
           <a:prstGeom prst="roundRect">
@@ -17270,7 +17271,7 @@
                 </a:solidFill>
                 <a:latin typeface="Calibri"/>
               </a:rPr>
-              <a:t>One IBAC judge completion costs at least $0.00111 — 2.4× the entire gsm8k task on gpt-5-mini it is authorizing — so across legs #6/#7/#8 the judge bills 1.4–4.4× what the agent does.</a:t>
+              <a:t>One IBAC judge completion costs at least $0.00111 — 2.6× the entire gsm8k task on gpt-5-mini it is authorizing — so across legs #6/#7/#8 the judge bills 1.7–3.4× what the agent does.</a:t>
             </a:r>
           </a:p>
         </p:txBody>
@@ -18996,7 +18997,7 @@
                 </a:solidFill>
                 <a:latin typeface="Calibri"/>
               </a:rPr>
-              <a:t>Why a FIXED matrix: task selection is deterministic, so the same leg run anywhere executes the same tasks in the same order. That is what makes a difference attributable to the platform rather than to the workload. Every leg deploys fresh — originally because a warm agent lost telemetry (fixed in agent dev145), now because only a NEWLY CREATED pod re-pulls :latest. Driven by one command (reference/run-12.py): ~1h35m of leg wall time per platform, plus the deploys and ~33 min of gateway-cache gaps. The generated documents in docs/results/ derive every number from the mirrored artifacts.</a:t>
+              <a:t>Why a FIXED matrix: task selection is deterministic, so the same leg run anywhere executes the same tasks in the same order. That is what makes a difference attributable to the platform rather than to the workload. Every leg deploys fresh, because only a NEWLY CREATED pod re-pulls :latest. Driven by one command (reference/run-12.py): about an hour of run time per platform, plus the deploys and ~40 min of gateway-cache gaps. The generated documents in docs/results/ derive every number from the mirrored artifacts.</a:t>
             </a:r>
           </a:p>
         </p:txBody>
@@ -19277,7 +19278,7 @@
                           </a:solidFill>
                           <a:latin typeface="Calibri"/>
                         </a:rPr>
-                        <a:t>the pipeline is stable and DETERMINISTIC: 6 of 12 legs have byte-identical input-token
+                        <a:t>the pipeline is stable and DETERMINISTIC: 7 of 12 legs have byte-identical input-token
 totals across two unlike clusters — the strongest like-for-like check available</a:t>
                       </a:r>
                     </a:p>
@@ -19350,7 +19351,7 @@
                           </a:solidFill>
                           <a:latin typeface="Calibri"/>
                         </a:rPr>
-                        <a:t>the only clean model comparison in the matrix: gpt-4.1 costs 4.1× gpt-5-mini for no
+                        <a:t>the only clean model comparison in the matrix: gpt-4.1 costs 4.6× gpt-5-mini for no
 pass-rate gain at this difficulty, and the INPUT side decides it alone (7.7)</a:t>
                       </a:r>
                     </a:p>
@@ -19423,8 +19424,8 @@
                           </a:solidFill>
                           <a:latin typeface="Calibri"/>
                         </a:rPr>
-                        <a:t>plugin cost is PLATFORM-SPECIFIC: OpenShift pays in the sidecar (+13.68 s/task), KinD in
-the judge (+1.54 s) — never quote a per-task overhead without naming the cluster</a:t>
+                        <a:t>plugin cost lands in the IBAC JUDGE on both clusters: +1.36 s/task on OpenShift, +1.48 s
+on KinD — the sidecar and every other layer are below the noise floor (9.2)</a:t>
                       </a:r>
                     </a:p>
                   </a:txBody>
@@ -19497,7 +19498,7 @@
                           <a:latin typeface="Calibri"/>
                         </a:rPr>
                         <a:t>multi-turn works end to end, user simulator included — and tau2 is where pass rates
-carry information (0.75–1.00 across sides)</a:t>
+carry information (0.85–1.00 across sides)</a:t>
                       </a:r>
                     </a:p>
                   </a:txBody>
@@ -19569,8 +19570,8 @@
                           </a:solidFill>
                           <a:latin typeface="Calibri"/>
                         </a:rPr>
-                        <a:t>the limits are real and they are UPSTREAM: 15 timeouts, a 0.00 pass rate, and 76% of
-the whole matrix's bill in two legs</a:t>
+                        <a:t>the limits are real and they are UPSTREAM: a 0.00 pass rate, the matrix's only timeout,
+and ~77% of the whole matrix's bill in two legs</a:t>
                       </a:r>
                     </a:p>
                   </a:txBody>
@@ -19647,7 +19648,7 @@
                 </a:solidFill>
                 <a:latin typeface="Calibri"/>
               </a:rPr>
-              <a:t>Not the pass rates — that the SAME 12 request bodies produce comparable measurements on two unlike clusters. On the v1.28 pair: token capture complete (0 of 267 rows lost their usage span), every task reached the model (0 health-probe losses), 7 of 12 pass rates identical. The 5 that differ are mostly arithmetic on small runs — one task moves a 5-task leg by 0.20.</a:t>
+              <a:t>Not the pass rates — that the SAME 12 request bodies produce comparable measurements on two unlike clusters. On the v1.35 pair: token capture complete (0 of 281 rows lost their usage span), every task reached the model (0 health-probe losses), nothing lost to infrastructure, 8 of 12 pass rates identical. The 4 that differ are each one task — one task moves a 5-task leg by 0.20.</a:t>
             </a:r>
           </a:p>
         </p:txBody>
@@ -19714,7 +19715,7 @@
                 </a:solidFill>
                 <a:latin typeface="Calibri"/>
               </a:rPr>
-              <a:t>A task lost to a socket and a task lost to a wrong answer land in the same denominator and only one says anything about the agent — which is why every report buckets them (OCP/KinD: transport 1/0, per-task timeout 4/11, upstream agent defect 1/0, wrong answer 2/1). Two further limits: absolute LATENCY does not travel (4–93× apart between our clusters), and the DEPLOY, not the task, is the unit of replication — adding tasks tightens the wrong interval.</a:t>
+              <a:t>A task lost to a socket and a task lost to a wrong answer land in the same denominator and only one says anything about the agent — which is why every report buckets them (OCP/KinD: per-task timeout 0/1, upstream agent defect 4/4, wrong answer 1/1). Two further limits: absolute LATENCY travels only approximately (up to 1.7× apart between our clusters), and the DEPLOY, not the task, is the unit of replication — adding tasks tightens the wrong interval.</a:t>
             </a:r>
           </a:p>
         </p:txBody>
@@ -19835,7 +19836,7 @@
                 </a:solidFill>
                 <a:latin typeface="Calibri"/>
               </a:rPr>
-              <a:t>v1.28 on OpenShift (Service on ykt3, workloads on ykt2) — 141 tasks, all 12 legs succeeded</a:t>
+              <a:t>v1.35 on OpenShift (single-cluster, ykt3) — 141 tasks, all 12 legs succeeded</a:t>
             </a:r>
           </a:p>
         </p:txBody>
@@ -20112,7 +20113,7 @@
                           </a:solidFill>
                           <a:latin typeface="Calibri"/>
                         </a:rPr>
-                        <a:t>7 s</a:t>
+                        <a:t>4 s</a:t>
                       </a:r>
                     </a:p>
                   </a:txBody>
@@ -20252,7 +20253,7 @@
                           </a:solidFill>
                           <a:latin typeface="Calibri"/>
                         </a:rPr>
-                        <a:t>41 s</a:t>
+                        <a:t>29 s</a:t>
                       </a:r>
                     </a:p>
                   </a:txBody>
@@ -20392,7 +20393,7 @@
                           </a:solidFill>
                           <a:latin typeface="Calibri"/>
                         </a:rPr>
-                        <a:t>46 s</a:t>
+                        <a:t>34 s</a:t>
                       </a:r>
                     </a:p>
                   </a:txBody>
@@ -20532,7 +20533,7 @@
                           </a:solidFill>
                           <a:latin typeface="Calibri"/>
                         </a:rPr>
-                        <a:t>16 s</a:t>
+                        <a:t>9 s</a:t>
                       </a:r>
                     </a:p>
                   </a:txBody>
@@ -20555,7 +20556,7 @@
                           </a:solidFill>
                           <a:latin typeface="Calibri"/>
                         </a:rPr>
-                        <a:t>3,874</a:t>
+                        <a:t>3,908</a:t>
                       </a:r>
                     </a:p>
                   </a:txBody>
@@ -20672,7 +20673,7 @@
                           </a:solidFill>
                           <a:latin typeface="Calibri"/>
                         </a:rPr>
-                        <a:t>25 s</a:t>
+                        <a:t>6 s</a:t>
                       </a:r>
                     </a:p>
                   </a:txBody>
@@ -20766,7 +20767,7 @@
                           </a:solidFill>
                           <a:latin typeface="Calibri"/>
                         </a:rPr>
-                        <a:t>0.60</a:t>
+                        <a:t>1.00</a:t>
                       </a:r>
                     </a:p>
                   </a:txBody>
@@ -20789,7 +20790,7 @@
                           </a:solidFill>
                           <a:latin typeface="Calibri"/>
                         </a:rPr>
-                        <a:t>2/5</a:t>
+                        <a:t>0/5</a:t>
                       </a:r>
                     </a:p>
                   </a:txBody>
@@ -20812,7 +20813,7 @@
                           </a:solidFill>
                           <a:latin typeface="Calibri"/>
                         </a:rPr>
-                        <a:t>39 s</a:t>
+                        <a:t>6 s</a:t>
                       </a:r>
                     </a:p>
                   </a:txBody>
@@ -20835,7 +20836,7 @@
                           </a:solidFill>
                           <a:latin typeface="Calibri"/>
                         </a:rPr>
-                        <a:t>1,258</a:t>
+                        <a:t>1,564</a:t>
                       </a:r>
                     </a:p>
                   </a:txBody>
@@ -20952,7 +20953,7 @@
                           </a:solidFill>
                           <a:latin typeface="Calibri"/>
                         </a:rPr>
-                        <a:t>30 s</a:t>
+                        <a:t>9 s</a:t>
                       </a:r>
                     </a:p>
                   </a:txBody>
@@ -21092,7 +21093,7 @@
                           </a:solidFill>
                           <a:latin typeface="Calibri"/>
                         </a:rPr>
-                        <a:t>23 s</a:t>
+                        <a:t>7 s</a:t>
                       </a:r>
                     </a:p>
                   </a:txBody>
@@ -21232,7 +21233,7 @@
                           </a:solidFill>
                           <a:latin typeface="Calibri"/>
                         </a:rPr>
-                        <a:t>803 s</a:t>
+                        <a:t>511 s</a:t>
                       </a:r>
                     </a:p>
                   </a:txBody>
@@ -21255,7 +21256,7 @@
                           </a:solidFill>
                           <a:latin typeface="Calibri"/>
                         </a:rPr>
-                        <a:t>988,110</a:t>
+                        <a:t>936,612</a:t>
                       </a:r>
                     </a:p>
                   </a:txBody>
@@ -21326,7 +21327,7 @@
                           </a:solidFill>
                           <a:latin typeface="Calibri"/>
                         </a:rPr>
-                        <a:t>0.75</a:t>
+                        <a:t>0.90</a:t>
                       </a:r>
                     </a:p>
                   </a:txBody>
@@ -21372,7 +21373,7 @@
                           </a:solidFill>
                           <a:latin typeface="Calibri"/>
                         </a:rPr>
-                        <a:t>436 s</a:t>
+                        <a:t>282 s</a:t>
                       </a:r>
                     </a:p>
                   </a:txBody>
@@ -21395,7 +21396,7 @@
                           </a:solidFill>
                           <a:latin typeface="Calibri"/>
                         </a:rPr>
-                        <a:t>1,703,460</a:t>
+                        <a:t>1,695,959</a:t>
                       </a:r>
                     </a:p>
                   </a:txBody>
@@ -21489,7 +21490,7 @@
                           </a:solidFill>
                           <a:latin typeface="Calibri"/>
                         </a:rPr>
-                        <a:t>2/5</a:t>
+                        <a:t>1/5</a:t>
                       </a:r>
                     </a:p>
                   </a:txBody>
@@ -21512,7 +21513,7 @@
                           </a:solidFill>
                           <a:latin typeface="Calibri"/>
                         </a:rPr>
-                        <a:t>2433 s</a:t>
+                        <a:t>1284 s</a:t>
                       </a:r>
                     </a:p>
                   </a:txBody>
@@ -21535,7 +21536,7 @@
                           </a:solidFill>
                           <a:latin typeface="Calibri"/>
                         </a:rPr>
-                        <a:t>1,387,383</a:t>
+                        <a:t>1,420,531</a:t>
                       </a:r>
                     </a:p>
                   </a:txBody>
@@ -21652,7 +21653,7 @@
                           </a:solidFill>
                           <a:latin typeface="Calibri"/>
                         </a:rPr>
-                        <a:t>1818 s</a:t>
+                        <a:t>1402 s</a:t>
                       </a:r>
                     </a:p>
                   </a:txBody>
@@ -21675,7 +21676,7 @@
                           </a:solidFill>
                           <a:latin typeface="Calibri"/>
                         </a:rPr>
-                        <a:t>5,211,584</a:t>
+                        <a:t>5,949,228</a:t>
                       </a:r>
                     </a:p>
                   </a:txBody>
@@ -21740,7 +21741,7 @@
                 </a:solidFill>
                 <a:latin typeface="Calibri"/>
               </a:rPr>
-              <a:t>gsm8k does not quite saturate here: 5 of 8 legs at 1.00</a:t>
+              <a:t>gsm8k nearly saturates: 6 of 8 legs at 1.00</a:t>
             </a:r>
           </a:p>
           <a:p>
@@ -21752,7 +21753,7 @@
                 </a:solidFill>
                 <a:latin typeface="Calibri"/>
               </a:rPr>
-              <a:t>#4's gpt-4.1 swap and #7 lose one task of five, #6 two — five of 86. Read the CAUSE, not the rate: one of #6's was a dropped socket, not the model. The runner retries those now.</a:t>
+              <a:t>#4's gpt-4.1 swap and #7 each lose one task of five — two of 86, both the model's own answers. Read the CAUSE, not the rate: nothing on this side was lost to the plumbing.</a:t>
             </a:r>
           </a:p>
         </p:txBody>
@@ -21819,7 +21820,7 @@
                 </a:solidFill>
                 <a:latin typeface="Calibri"/>
               </a:rPr>
-              <a:t>0.90 and 0.75 here, 1.00 and 0.80 on KinD. Episodes are nondeterministic: at n=10 one task is worth 0.10, so it cannot resolve less.</a:t>
+              <a:t>0.90 and 0.90 here, 1.00 and 0.85 on KinD. Episodes are nondeterministic: at n=10 one task is worth 0.10, so it cannot resolve less.</a:t>
             </a:r>
           </a:p>
         </p:txBody>
@@ -21886,7 +21887,7 @@
                 </a:solidFill>
                 <a:latin typeface="Calibri"/>
               </a:rPr>
-              <a:t>Runs complete, tokens record, evaluation says the goal was not met — 34 of 35 tasks self-declare finish. The per-task TIMEOUT dominates: 4 of 25 tasks left no report row, so err reads run.json.</a:t>
+              <a:t>Runs complete, tokens record, evaluation says the goal was not met — most tasks self-declare finish (41 of 49, both platforms). All 4 errors here are the agent's own defect; none hit the 600 s timeout. err reads run.json.</a:t>
             </a:r>
           </a:p>
         </p:txBody>
@@ -21941,7 +21942,7 @@
                 </a:solidFill>
                 <a:latin typeface="Calibri"/>
               </a:rPr>
-              <a:t>0 rows lost attribution, 0 tasks lost to the health probe</a:t>
+              <a:t>0 rows lost attribution, 0 tasks lost to infrastructure</a:t>
             </a:r>
           </a:p>
           <a:p>
@@ -21953,7 +21954,7 @@
                 </a:solidFill>
                 <a:latin typeface="Calibri"/>
               </a:rPr>
-              <a:t>The dev145 agent's per-task GET /v1/models probe (10 s cap, no retry) killed 12 of 141 KinD tasks; dev146 fixed it. An earlier matrix's 15 damaged rows passed a tokens == 0 check as clean — hence the structural detector.</a:t>
+              <a:t>No task died to the health probe, the gateway, the judge or transport. v1.35 caps each agent LLM call at 120 s, so a stalled gateway call is cut and retried, not waited out.</a:t>
             </a:r>
           </a:p>
         </p:txBody>
@@ -22008,7 +22009,7 @@
                 </a:solidFill>
                 <a:latin typeface="Calibri"/>
               </a:rPr>
-              <a:t>9.3M input / 683k output tokens</a:t>
+              <a:t>10.0M input / 728k output tokens</a:t>
             </a:r>
           </a:p>
           <a:p>
@@ -22020,7 +22021,7 @@
                 </a:solidFill>
                 <a:latin typeface="Calibri"/>
               </a:rPr>
-              <a:t>over 5,719 s of leg wall time — appworld alone is 71% of the input, on 21 of 137 rows.</a:t>
+              <a:t>over 3,583 s of run time — appworld alone is 73% of the input, on 25 of 141 rows.</a:t>
             </a:r>
           </a:p>
         </p:txBody>
@@ -22908,7 +22909,7 @@
                           </a:solidFill>
                           <a:latin typeface="Calibri"/>
                         </a:rPr>
-                        <a:t>1.00</a:t>
+                        <a:t>0.80</a:t>
                       </a:r>
                     </a:p>
                   </a:txBody>
@@ -22931,7 +22932,7 @@
                           </a:solidFill>
                           <a:latin typeface="Calibri"/>
                         </a:rPr>
-                        <a:t>3,874</a:t>
+                        <a:t>3,908</a:t>
                       </a:r>
                     </a:p>
                   </a:txBody>
@@ -22954,7 +22955,7 @@
                           </a:solidFill>
                           <a:latin typeface="Calibri"/>
                         </a:rPr>
-                        <a:t>4,183</a:t>
+                        <a:t>4,177</a:t>
                       </a:r>
                     </a:p>
                   </a:txBody>
@@ -23211,7 +23212,7 @@
                           </a:solidFill>
                           <a:latin typeface="Calibri"/>
                         </a:rPr>
-                        <a:t>0.60</a:t>
+                        <a:t>1.00</a:t>
                       </a:r>
                     </a:p>
                   </a:txBody>
@@ -23257,7 +23258,7 @@
                           </a:solidFill>
                           <a:latin typeface="Calibri"/>
                         </a:rPr>
-                        <a:t>1,258</a:t>
+                        <a:t>1,564</a:t>
                       </a:r>
                     </a:p>
                   </a:txBody>
@@ -23303,7 +23304,7 @@
                           </a:solidFill>
                           <a:latin typeface="Calibri"/>
                         </a:rPr>
-                        <a:t/>
+                        <a:t>identical</a:t>
                       </a:r>
                     </a:p>
                   </a:txBody>
@@ -23746,7 +23747,7 @@
                           </a:solidFill>
                           <a:latin typeface="Calibri"/>
                         </a:rPr>
-                        <a:t>988,110</a:t>
+                        <a:t>936,612</a:t>
                       </a:r>
                     </a:p>
                   </a:txBody>
@@ -23769,7 +23770,7 @@
                           </a:solidFill>
                           <a:latin typeface="Calibri"/>
                         </a:rPr>
-                        <a:t>1,019,232</a:t>
+                        <a:t>916,576</a:t>
                       </a:r>
                     </a:p>
                   </a:txBody>
@@ -23863,7 +23864,7 @@
                           </a:solidFill>
                           <a:latin typeface="Calibri"/>
                         </a:rPr>
-                        <a:t>0.75</a:t>
+                        <a:t>0.90</a:t>
                       </a:r>
                     </a:p>
                   </a:txBody>
@@ -23886,7 +23887,7 @@
                           </a:solidFill>
                           <a:latin typeface="Calibri"/>
                         </a:rPr>
-                        <a:t>0.80</a:t>
+                        <a:t>0.85</a:t>
                       </a:r>
                     </a:p>
                   </a:txBody>
@@ -23909,7 +23910,7 @@
                           </a:solidFill>
                           <a:latin typeface="Calibri"/>
                         </a:rPr>
-                        <a:t>1,703,460</a:t>
+                        <a:t>1,695,959</a:t>
                       </a:r>
                     </a:p>
                   </a:txBody>
@@ -23932,7 +23933,7 @@
                           </a:solidFill>
                           <a:latin typeface="Calibri"/>
                         </a:rPr>
-                        <a:t>1,743,312</a:t>
+                        <a:t>1,726,957</a:t>
                       </a:r>
                     </a:p>
                   </a:txBody>
@@ -24072,7 +24073,7 @@
                           </a:solidFill>
                           <a:latin typeface="Calibri"/>
                         </a:rPr>
-                        <a:t>1,387,383</a:t>
+                        <a:t>1,420,531</a:t>
                       </a:r>
                     </a:p>
                   </a:txBody>
@@ -24095,7 +24096,7 @@
                           </a:solidFill>
                           <a:latin typeface="Calibri"/>
                         </a:rPr>
-                        <a:t>840,030</a:t>
+                        <a:t>1,564,276</a:t>
                       </a:r>
                     </a:p>
                   </a:txBody>
@@ -24235,7 +24236,7 @@
                           </a:solidFill>
                           <a:latin typeface="Calibri"/>
                         </a:rPr>
-                        <a:t>5,211,584</a:t>
+                        <a:t>5,949,228</a:t>
                       </a:r>
                     </a:p>
                   </a:txBody>
@@ -24258,7 +24259,7 @@
                           </a:solidFill>
                           <a:latin typeface="Calibri"/>
                         </a:rPr>
-                        <a:t>2,009,348</a:t>
+                        <a:t>5,349,900</a:t>
                       </a:r>
                     </a:p>
                   </a:txBody>
@@ -24346,7 +24347,7 @@
                 </a:solidFill>
                 <a:latin typeface="Calibri"/>
               </a:rPr>
-              <a:t>7 of 12 pass rates identical, and all 5 deltas favour KinD</a:t>
+              <a:t>8 of 12 pass rates identical; the 4 deltas split 2–2</a:t>
             </a:r>
           </a:p>
           <a:p>
@@ -24358,7 +24359,7 @@
                 </a:solidFill>
                 <a:latin typeface="Calibri"/>
               </a:rPr>
-              <a:t>So read the per-CAUSE table instead of the rate: wrong answers split 2 (OCP) to 1 (KinD), per-task timeouts 4 to 11 — all appworld — and one dropped socket, OCP #6.</a:t>
+              <a:t>Each is one task. The per-CAUSE table says why: wrong answers 1 to 1, agent defects 4 to 4, one appworld timeout on KinD — and nothing lost to infrastructure on either side.</a:t>
             </a:r>
           </a:p>
         </p:txBody>
@@ -24413,7 +24414,7 @@
                 </a:solidFill>
                 <a:latin typeface="Calibri"/>
               </a:rPr>
-              <a:t>6 legs byte-identical on input tokens</a:t>
+              <a:t>7 legs byte-identical on input tokens</a:t>
             </a:r>
           </a:p>
           <a:p>
@@ -24425,7 +24426,7 @@
                 </a:solidFill>
                 <a:latin typeface="Calibri"/>
               </a:rPr>
-              <a:t>320 / 3,166 / 15,684 / 1,564 x3. Deterministic task selection plus the same model means identical work — the strongest available proof this is a like-for-like comparison, not merely a similar one.</a:t>
+              <a:t>320 / 3,166 / 15,684 / 1,564 ×4. Deterministic task selection plus the same model means identical work — the strongest available proof this is a like-for-like comparison, not merely a similar one.</a:t>
             </a:r>
           </a:p>
         </p:txBody>
@@ -24480,7 +24481,7 @@
                 </a:solidFill>
                 <a:latin typeface="Calibri"/>
               </a:rPr>
-              <a:t>#7 is in that set at 0.80 vs 1.00</a:t>
+              <a:t>#6 and #7 are in that set with different pass rates</a:t>
             </a:r>
           </a:p>
           <a:p>
@@ -24547,7 +24548,7 @@
                 </a:solidFill>
                 <a:latin typeface="Calibri"/>
               </a:rPr>
-              <a:t>Wall time: 5,719 s OCP vs 5,975 s KinD</a:t>
+              <a:t>Wall time: 3,583 s OCP vs 3,791 s KinD</a:t>
             </a:r>
           </a:p>
           <a:p>
@@ -24559,7 +24560,7 @@
                 </a:solidFill>
                 <a:latin typeface="Calibri"/>
               </a:rPr>
-              <a:t>Within 5% overall, but individual legs differ by up to 2.3× in either direction, and appworld — which dominates the total — inverts: #11 is faster on KinD, #12 is slower.</a:t>
+              <a:t>Within 6% overall. The short gsm8k legs differ by up to 2× either way (seconds, mostly startup); the long tau2 and appworld legs stay within 15%.</a:t>
             </a:r>
           </a:p>
         </p:txBody>
@@ -24626,7 +24627,7 @@
                 </a:solidFill>
                 <a:latin typeface="Calibri"/>
               </a:rPr>
-              <a:t>137 OCP rows against 130 KinD. The 7-row gap is appworld tasks that timed out before the Service wrote a row (4 OCP, 11 KinD) — not lost telemetry.</a:t>
+              <a:t>141 OCP rows against 140 KinD. The one-row gap is a KinD appworld task that timed out before the Service wrote a row — not lost telemetry.</a:t>
             </a:r>
           </a:p>
         </p:txBody>
@@ -24680,7 +24681,7 @@
 
 <file path=ppt/slides/slide26.xml><?xml version="1.0" encoding="utf-8"?>
 <p:sld xmlns:a="http://schemas.openxmlformats.org/drawingml/2006/main" xmlns:p="http://schemas.openxmlformats.org/presentationml/2006/main" xmlns:r="http://schemas.openxmlformats.org/officeDocument/2006/relationships">
-  <p:cSld name="9.2 What AuthBridge Costs — and Why It Has No Single Number">
+  <p:cSld name="9.2 What AuthBridge Costs — Almost All of It Is the Judge">
     <p:spTree>
       <p:nvGrpSpPr>
         <p:cNvPr id="1" name=""/>
@@ -24736,7 +24737,7 @@
                 </a:solidFill>
                 <a:latin typeface="Calibri"/>
               </a:rPr>
-              <a:t>9.2  What AuthBridge Costs — and Why It Has No Single Number</a:t>
+              <a:t>9.2  What AuthBridge Costs — Almost All of It Is the Judge</a:t>
             </a:r>
           </a:p>
           <a:p>
@@ -24747,7 +24748,7 @@
                 </a:solidFill>
                 <a:latin typeface="Calibri"/>
               </a:rPr>
-              <a:t>The designed 13-leg experiment (n=50, crossover replicates, gateway cache spaced), v1.28</a:t>
+              <a:t>The designed 13-leg experiment (n=50, crossover replicates, gateway cache spaced), v1.35</a:t>
             </a:r>
           </a:p>
         </p:txBody>
@@ -24931,7 +24932,7 @@
                           </a:solidFill>
                           <a:latin typeface="Calibri"/>
                         </a:rPr>
-                        <a:t>0.423</a:t>
+                        <a:t>0.168</a:t>
                       </a:r>
                     </a:p>
                   </a:txBody>
@@ -24954,7 +24955,7 @@
                           </a:solidFill>
                           <a:latin typeface="Calibri"/>
                         </a:rPr>
-                        <a:t>0.099</a:t>
+                        <a:t>0.097</a:t>
                       </a:r>
                     </a:p>
                   </a:txBody>
@@ -25048,7 +25049,7 @@
                           </a:solidFill>
                           <a:latin typeface="Calibri"/>
                         </a:rPr>
-                        <a:t>14.101</a:t>
+                        <a:t>0.214</a:t>
                       </a:r>
                     </a:p>
                   </a:txBody>
@@ -25071,7 +25072,7 @@
                           </a:solidFill>
                           <a:latin typeface="Calibri"/>
                         </a:rPr>
-                        <a:t>0.152</a:t>
+                        <a:t>0.130</a:t>
                       </a:r>
                     </a:p>
                   </a:txBody>
@@ -25094,7 +25095,7 @@
                           </a:solidFill>
                           <a:latin typeface="Calibri"/>
                         </a:rPr>
-                        <a:t>+13.68</a:t>
+                        <a:t>+0.05</a:t>
                       </a:r>
                     </a:p>
                   </a:txBody>
@@ -25117,7 +25118,7 @@
                           </a:solidFill>
                           <a:latin typeface="Calibri"/>
                         </a:rPr>
-                        <a:t>+0.05</a:t>
+                        <a:t>+0.03</a:t>
                       </a:r>
                     </a:p>
                   </a:txBody>
@@ -25165,7 +25166,7 @@
                           </a:solidFill>
                           <a:latin typeface="Calibri"/>
                         </a:rPr>
-                        <a:t>14.148</a:t>
+                        <a:t>1.569</a:t>
                       </a:r>
                     </a:p>
                   </a:txBody>
@@ -25188,7 +25189,7 @@
                           </a:solidFill>
                           <a:latin typeface="Calibri"/>
                         </a:rPr>
-                        <a:t>1.688</a:t>
+                        <a:t>1.610</a:t>
                       </a:r>
                     </a:p>
                   </a:txBody>
@@ -25211,7 +25212,7 @@
                           </a:solidFill>
                           <a:latin typeface="Calibri"/>
                         </a:rPr>
-                        <a:t>+0.05</a:t>
+                        <a:t>+1.36</a:t>
                       </a:r>
                     </a:p>
                   </a:txBody>
@@ -25234,7 +25235,7 @@
                           </a:solidFill>
                           <a:latin typeface="Calibri"/>
                         </a:rPr>
-                        <a:t>+1.54</a:t>
+                        <a:t>+1.48</a:t>
                       </a:r>
                     </a:p>
                   </a:txBody>
@@ -25282,7 +25283,7 @@
                           </a:solidFill>
                           <a:latin typeface="Calibri"/>
                         </a:rPr>
-                        <a:t>14.446</a:t>
+                        <a:t>1.584</a:t>
                       </a:r>
                     </a:p>
                   </a:txBody>
@@ -25305,7 +25306,7 @@
                           </a:solidFill>
                           <a:latin typeface="Calibri"/>
                         </a:rPr>
-                        <a:t>1.824</a:t>
+                        <a:t>1.602</a:t>
                       </a:r>
                     </a:p>
                   </a:txBody>
@@ -25328,7 +25329,7 @@
                           </a:solidFill>
                           <a:latin typeface="Calibri"/>
                         </a:rPr>
-                        <a:t>+0.30</a:t>
+                        <a:t>+0.01</a:t>
                       </a:r>
                     </a:p>
                   </a:txBody>
@@ -25351,7 +25352,7 @@
                           </a:solidFill>
                           <a:latin typeface="Calibri"/>
                         </a:rPr>
-                        <a:t>+0.14</a:t>
+                        <a:t>−0.01</a:t>
                       </a:r>
                     </a:p>
                   </a:txBody>
@@ -25399,7 +25400,7 @@
                           </a:solidFill>
                           <a:latin typeface="Calibri"/>
                         </a:rPr>
-                        <a:t>14.598</a:t>
+                        <a:t>1.583</a:t>
                       </a:r>
                     </a:p>
                   </a:txBody>
@@ -25422,7 +25423,7 @@
                           </a:solidFill>
                           <a:latin typeface="Calibri"/>
                         </a:rPr>
-                        <a:t>1.826</a:t>
+                        <a:t>1.607</a:t>
                       </a:r>
                     </a:p>
                   </a:txBody>
@@ -25445,7 +25446,7 @@
                           </a:solidFill>
                           <a:latin typeface="Calibri"/>
                         </a:rPr>
-                        <a:t>+0.15</a:t>
+                        <a:t>−0.00</a:t>
                       </a:r>
                     </a:p>
                   </a:txBody>
@@ -25638,7 +25639,7 @@
                           </a:solidFill>
                           <a:latin typeface="Calibri"/>
                         </a:rPr>
-                        <a:t>the sidecar</a:t>
+                        <a:t>the judge</a:t>
                       </a:r>
                     </a:p>
                   </a:txBody>
@@ -25684,7 +25685,7 @@
                           </a:solidFill>
                           <a:latin typeface="Calibri"/>
                         </a:rPr>
-                        <a:t>NO</a:t>
+                        <a:t>YES</a:t>
                       </a:r>
                     </a:p>
                   </a:txBody>
@@ -25826,7 +25827,7 @@
                           </a:solidFill>
                           <a:latin typeface="Calibri"/>
                         </a:rPr>
-                        <a:t>0.90–0.98</a:t>
+                        <a:t>0.94–1.00</a:t>
                       </a:r>
                     </a:p>
                   </a:txBody>
@@ -25849,7 +25850,7 @@
                           </a:solidFill>
                           <a:latin typeface="Calibri"/>
                         </a:rPr>
-                        <a:t>0.90–0.98</a:t>
+                        <a:t>0.96–1.02</a:t>
                       </a:r>
                     </a:p>
                   </a:txBody>
@@ -25920,7 +25921,7 @@
                           </a:solidFill>
                           <a:latin typeface="Calibri"/>
                         </a:rPr>
-                        <a:t>0.31×</a:t>
+                        <a:t>1.66×</a:t>
                       </a:r>
                     </a:p>
                   </a:txBody>
@@ -25943,7 +25944,7 @@
                           </a:solidFill>
                           <a:latin typeface="Calibri"/>
                         </a:rPr>
-                        <a:t>2.49×</a:t>
+                        <a:t>2.01×</a:t>
                       </a:r>
                     </a:p>
                   </a:txBody>
@@ -25966,7 +25967,7 @@
                           </a:solidFill>
                           <a:latin typeface="Calibri"/>
                         </a:rPr>
-                        <a:t>NO</a:t>
+                        <a:t>PARTLY</a:t>
                       </a:r>
                     </a:p>
                   </a:txBody>
@@ -26014,7 +26015,7 @@
                           </a:solidFill>
                           <a:latin typeface="Calibri"/>
                         </a:rPr>
-                        <a:t>0.22 s</a:t>
+                        <a:t>0.02 s</a:t>
                       </a:r>
                     </a:p>
                   </a:txBody>
@@ -26037,7 +26038,7 @@
                           </a:solidFill>
                           <a:latin typeface="Calibri"/>
                         </a:rPr>
-                        <a:t>0.155 s</a:t>
+                        <a:t>0.12 s</a:t>
                       </a:r>
                     </a:p>
                   </a:txBody>
@@ -26060,7 +26061,7 @@
                           </a:solidFill>
                           <a:latin typeface="Calibri"/>
                         </a:rPr>
-                        <a:t>YES</a:t>
+                        <a:t>NO</a:t>
                       </a:r>
                     </a:p>
                   </a:txBody>
@@ -26219,7 +26220,7 @@
                 </a:solidFill>
                 <a:latin typeface="Calibri"/>
               </a:rPr>
-              <a:t>The two clusters disagree about WHICH layer costs anything</a:t>
+              <a:t>Both clusters put the cost in the JUDGE</a:t>
             </a:r>
           </a:p>
           <a:p>
@@ -26231,7 +26232,7 @@
                 </a:solidFill>
                 <a:latin typeface="Calibri"/>
               </a:rPr>
-              <a:t>On OpenShift the whole expense is the sidecar's mere presence and the judge is noise; on KinD the sidecar is nearly free and the judge is all of it. Both are right about their own cluster, and the same condition on the same image measures 4–93× apart. Never quote an absolute per-task plugin figure without naming the cluster.</a:t>
+              <a:t>+1.36 s/task on OpenShift, +1.48 s on KinD; the sidecar's presence costs 0.03–0.05 s and every other layer is noise. With the judge engaged the same condition lands within 3% on the two clusters (1.57 / 1.61 s). Still name the cluster: on KinD ~0.26 s of each judged call is the node's DNS being retried.</a:t>
             </a:r>
           </a:p>
         </p:txBody>
@@ -26298,7 +26299,7 @@
                 </a:solidFill>
                 <a:latin typeface="Calibri"/>
               </a:rPr>
-              <a:t>A timeout piles values on a round number. OpenShift's auth-only runs 8.05–17.93 s, SD 1.92, broad and unimodal: contention and queueing. On the quiet cluster the tail moves to full (median 1.82 s, max 14.00 s) because the judge is itself an LLM call — so the sidecar costs reproducibility, not only latency.</a:t>
+              <a:t>A timeout piles values on a round number. Judged tasks run 0.21–9.63 s (OpenShift) and 0.12–7.75 s (KinD) around a ~1.6 s median, no 0.1 s bin above 12%: variable latency. The tail is the judge, itself an LLM call — so engaging it costs reproducibility, not only latency.</a:t>
             </a:r>
           </a:p>
         </p:txBody>
@@ -26365,7 +26366,7 @@
                 </a:solidFill>
                 <a:latin typeface="Calibri"/>
               </a:rPr>
-              <a:t>Every gsm8k leg sends the SAME 50 prompts and the gateway replays completions for ~10 min: unspaced, later legs measure the cache, in run order — the shape of a plugin effect. BM_CACHE_GAP=900 spaces them. The check needs no statistics: the conditions NEST, so no sidecar leg can beat a sidecar-free one. Clear by 41.8× (OCP), 1.4× (KinD).</a:t>
+              <a:t>Every gsm8k leg sends the SAME 50 prompts and the gateway replays completions for ~10 min: unspaced, later legs measure the cache, in run order — the shape of a plugin effect. BM_CACHE_GAP=900 spaces them. The check needs no statistics: the conditions NEST, so no sidecar leg can beat a sidecar-free one. Clear by 1.3× on both clusters.</a:t>
             </a:r>
           </a:p>
         </p:txBody>
@@ -26432,7 +26433,7 @@
                 </a:solidFill>
                 <a:latin typeface="Calibri"/>
               </a:rPr>
-              <a:t>A per-task interval measures variance WITHIN one deploy. The honest floor is between two deploys of one condition, and it exceeds every step but the dominant layer — so presets cannot be RANKED at any task count; add deploys, not tasks. Cut the other way: at σ ≈ 0.23 s two deploys already resolve a 1 s effect, so the small steps are genuinely small rather than unresolved.</a:t>
+              <a:t>A per-task interval measures variance WITHIN one deploy. The honest floor is between two deploys of one condition, and it exceeds every step but the judge's — so presets cannot be RANKED at any task count; add deploys, not tasks. Cut the other way: at σ ≈ 0.02 s (OpenShift) and 0.13 s (KinD) two deploys already resolve a 1 s effect, so the small steps are genuinely small rather than unresolved.</a:t>
             </a:r>
           </a:p>
         </p:txBody>
@@ -27036,7 +27037,7 @@
                 </a:solidFill>
                 <a:latin typeface="Calibri"/>
               </a:rPr>
-              <a:t>Cluster-agnostic by construction: works on kind / vanilla k8s / OpenShift; cross-cluster runs use per-instance route templates + a reachable internal issuer.</a:t>
+              <a:t>Cluster-agnostic by construction: the same chart installs on KinD and OpenShift, with the Service and its workloads on one cluster.</a:t>
             </a:r>
           </a:p>
         </p:txBody>
@@ -27304,7 +27305,7 @@
                 </a:solidFill>
                 <a:latin typeface="Calibri"/>
               </a:rPr>
-              <a:t>• Easy to configure in-cluster &amp; cross-cluster benchmark runs</a:t>
+              <a:t>• Easy to install on a cluster and run against it: KinD or OpenShift</a:t>
             </a:r>
           </a:p>
           <a:p>
@@ -27822,7 +27823,7 @@
                 </a:solidFill>
                 <a:latin typeface="Calibri"/>
               </a:rPr>
-              <a:t>One file per issuer: Rossoctl URL, benchmarker cred, MLflow/S3, optional Keycloak backchannel + workload route templates.</a:t>
+              <a:t>One file per issuer: Rossoctl URL, benchmarker cred, MLflow/S3, optional Keycloak backchannel.</a:t>
             </a:r>
           </a:p>
         </p:txBody>
@@ -27956,7 +27957,7 @@
                 </a:solidFill>
                 <a:latin typeface="Calibri"/>
               </a:rPr>
-              <a:t>MLflow is co-located with the Service (per-service traces it emits + reads), not in the workload cluster; S3 is an external cloud service — the shared cross-service sink.</a:t>
+              <a:t>MLflow runs on the Service's own cluster (the traces it emits and reads); S3 is an external cloud service — the shared cross-cluster sink for results.</a:t>
             </a:r>
           </a:p>
         </p:txBody>

--- a/docs/AutoBench.pptx
+++ b/docs/AutoBench.pptx
@@ -3369,7 +3369,7 @@
                 </a:solidFill>
                 <a:latin typeface="Calibri"/>
               </a:rPr>
-              <a:t>Last modified 2026-10-05 20:12 EDT</a:t>
+              <a:t>Last modified 2026-10-05 21:16 EDT</a:t>
             </a:r>
           </a:p>
         </p:txBody>
@@ -27037,7 +27037,7 @@
                 </a:solidFill>
                 <a:latin typeface="Calibri"/>
               </a:rPr>
-              <a:t>Cluster-agnostic by construction: the same chart installs on KinD and OpenShift, with the Service and its workloads on one cluster.</a:t>
+              <a:t>One install per cluster, with all benchmark workloads in one namespace — the same chart on KinD and OpenShift.</a:t>
             </a:r>
           </a:p>
         </p:txBody>
@@ -27305,7 +27305,7 @@
                 </a:solidFill>
                 <a:latin typeface="Calibri"/>
               </a:rPr>
-              <a:t>• Easy to install on a cluster and run against it: KinD or OpenShift</a:t>
+              <a:t>• One install per cluster, all benchmark workloads in one namespace (team1)</a:t>
             </a:r>
           </a:p>
           <a:p>

--- a/docs/AutoBench.pptx
+++ b/docs/AutoBench.pptx
@@ -32,6 +32,7 @@
     <p:sldId id="280" r:id="rId31"/>
     <p:sldId id="281" r:id="rId32"/>
     <p:sldId id="282" r:id="rId33"/>
+    <p:sldId id="283" r:id="rId34"/>
   </p:sldIdLst>
   <p:sldSz cx="12192000" cy="6858000" type="screen4x3"/>
   <p:notesSz cx="6858000" cy="9144000"/>
@@ -3369,7 +3370,7 @@
                 </a:solidFill>
                 <a:latin typeface="Calibri"/>
               </a:rPr>
-              <a:t>Last modified 2026-10-05 21:16 EDT</a:t>
+              <a:t>Last modified 2026-10-05 23:17 EDT</a:t>
             </a:r>
           </a:p>
         </p:txBody>
@@ -15263,7 +15264,7 @@
         </p:nvSpPr>
         <p:spPr>
           <a:xfrm>
-            <a:off x="685800" y="2304288"/>
+            <a:off x="685800" y="2194560"/>
             <a:ext cx="420624" cy="420624"/>
           </a:xfrm>
           <a:prstGeom prst="ellipse">
@@ -15318,7 +15319,7 @@
         </p:nvSpPr>
         <p:spPr>
           <a:xfrm>
-            <a:off x="1280160" y="2249424"/>
+            <a:off x="1280160" y="2139696"/>
             <a:ext cx="4526280" cy="292608"/>
           </a:xfrm>
           <a:prstGeom prst="rect">
@@ -15357,7 +15358,7 @@
         </p:nvSpPr>
         <p:spPr>
           <a:xfrm>
-            <a:off x="1280160" y="2551176"/>
+            <a:off x="1280160" y="2441448"/>
             <a:ext cx="4526280" cy="457200"/>
           </a:xfrm>
           <a:prstGeom prst="rect">
@@ -15396,7 +15397,7 @@
         </p:nvSpPr>
         <p:spPr>
           <a:xfrm>
-            <a:off x="685800" y="3255264"/>
+            <a:off x="685800" y="3035808"/>
             <a:ext cx="420624" cy="420624"/>
           </a:xfrm>
           <a:prstGeom prst="ellipse">
@@ -15451,7 +15452,7 @@
         </p:nvSpPr>
         <p:spPr>
           <a:xfrm>
-            <a:off x="1280160" y="3200400"/>
+            <a:off x="1280160" y="2980944"/>
             <a:ext cx="4526280" cy="292608"/>
           </a:xfrm>
           <a:prstGeom prst="rect">
@@ -15490,7 +15491,7 @@
         </p:nvSpPr>
         <p:spPr>
           <a:xfrm>
-            <a:off x="1280160" y="3502152"/>
+            <a:off x="1280160" y="3282696"/>
             <a:ext cx="4526280" cy="457200"/>
           </a:xfrm>
           <a:prstGeom prst="rect">
@@ -15529,7 +15530,7 @@
         </p:nvSpPr>
         <p:spPr>
           <a:xfrm>
-            <a:off x="685800" y="4206240"/>
+            <a:off x="685800" y="3877056"/>
             <a:ext cx="420624" cy="420624"/>
           </a:xfrm>
           <a:prstGeom prst="ellipse">
@@ -15584,7 +15585,7 @@
         </p:nvSpPr>
         <p:spPr>
           <a:xfrm>
-            <a:off x="1280160" y="4151376"/>
+            <a:off x="1280160" y="3822192"/>
             <a:ext cx="4526280" cy="292608"/>
           </a:xfrm>
           <a:prstGeom prst="rect">
@@ -15623,7 +15624,7 @@
         </p:nvSpPr>
         <p:spPr>
           <a:xfrm>
-            <a:off x="1280160" y="4453128"/>
+            <a:off x="1280160" y="4123944"/>
             <a:ext cx="4526280" cy="457200"/>
           </a:xfrm>
           <a:prstGeom prst="rect">
@@ -15662,7 +15663,7 @@
         </p:nvSpPr>
         <p:spPr>
           <a:xfrm>
-            <a:off x="685800" y="5157216"/>
+            <a:off x="685800" y="4718304"/>
             <a:ext cx="420624" cy="420624"/>
           </a:xfrm>
           <a:prstGeom prst="ellipse">
@@ -15717,7 +15718,7 @@
         </p:nvSpPr>
         <p:spPr>
           <a:xfrm>
-            <a:off x="1280160" y="5102352"/>
+            <a:off x="1280160" y="4663440"/>
             <a:ext cx="4526280" cy="292608"/>
           </a:xfrm>
           <a:prstGeom prst="rect">
@@ -15756,7 +15757,7 @@
         </p:nvSpPr>
         <p:spPr>
           <a:xfrm>
-            <a:off x="1280160" y="5404104"/>
+            <a:off x="1280160" y="4965192"/>
             <a:ext cx="4526280" cy="457200"/>
           </a:xfrm>
           <a:prstGeom prst="rect">
@@ -15790,6 +15791,139 @@
       <p:sp>
         <p:nvSpPr>
           <p:cNvPr id="18" name="Oval 17"/>
+          <p:cNvSpPr/>
+          <p:nvPr/>
+        </p:nvSpPr>
+        <p:spPr>
+          <a:xfrm>
+            <a:off x="685800" y="5559552"/>
+            <a:ext cx="420624" cy="420624"/>
+          </a:xfrm>
+          <a:prstGeom prst="ellipse">
+            <a:avLst/>
+          </a:prstGeom>
+          <a:solidFill>
+            <a:srgbClr val="E87A1E"/>
+          </a:solidFill>
+          <a:ln w="15875">
+            <a:solidFill>
+              <a:srgbClr val="FFFFFF"/>
+            </a:solidFill>
+          </a:ln>
+          <a:effectLst/>
+        </p:spPr>
+        <p:style>
+          <a:lnRef idx="1">
+            <a:schemeClr val="accent1"/>
+          </a:lnRef>
+          <a:fillRef idx="3">
+            <a:schemeClr val="accent1"/>
+          </a:fillRef>
+          <a:effectRef idx="2">
+            <a:schemeClr val="accent1"/>
+          </a:effectRef>
+          <a:fontRef idx="minor">
+            <a:schemeClr val="lt1"/>
+          </a:fontRef>
+        </p:style>
+        <p:txBody>
+          <a:bodyPr rtlCol="0" anchor="ctr" lIns="0" rIns="0" tIns="0" bIns="0"/>
+          <a:lstStyle/>
+          <a:p>
+            <a:pPr algn="ctr"/>
+            <a:r>
+              <a:rPr sz="1400" b="1" i="0">
+                <a:solidFill>
+                  <a:srgbClr val="FFFFFF"/>
+                </a:solidFill>
+                <a:latin typeface="Calibri"/>
+              </a:rPr>
+              <a:t>6</a:t>
+            </a:r>
+          </a:p>
+        </p:txBody>
+      </p:sp>
+      <p:sp>
+        <p:nvSpPr>
+          <p:cNvPr id="19" name="TextBox 18"/>
+          <p:cNvSpPr txBox="1"/>
+          <p:nvPr/>
+        </p:nvSpPr>
+        <p:spPr>
+          <a:xfrm>
+            <a:off x="1280160" y="5504688"/>
+            <a:ext cx="4526280" cy="292608"/>
+          </a:xfrm>
+          <a:prstGeom prst="rect">
+            <a:avLst/>
+          </a:prstGeom>
+          <a:noFill/>
+        </p:spPr>
+        <p:txBody>
+          <a:bodyPr wrap="square" anchor="t">
+            <a:spAutoFit/>
+          </a:bodyPr>
+          <a:lstStyle/>
+          <a:p>
+            <a:pPr algn="l">
+              <a:spcAft>
+                <a:spcPts val="300"/>
+              </a:spcAft>
+            </a:pPr>
+            <a:r>
+              <a:rPr sz="1700" b="1" i="0">
+                <a:solidFill>
+                  <a:srgbClr val="1B3A5C"/>
+                </a:solidFill>
+                <a:latin typeface="Calibri"/>
+              </a:rPr>
+              <a:t>Benchmark catalog &amp; run lifecycle</a:t>
+            </a:r>
+          </a:p>
+        </p:txBody>
+      </p:sp>
+      <p:sp>
+        <p:nvSpPr>
+          <p:cNvPr id="20" name="TextBox 19"/>
+          <p:cNvSpPr txBox="1"/>
+          <p:nvPr/>
+        </p:nvSpPr>
+        <p:spPr>
+          <a:xfrm>
+            <a:off x="1280160" y="5806440"/>
+            <a:ext cx="4526280" cy="457200"/>
+          </a:xfrm>
+          <a:prstGeom prst="rect">
+            <a:avLst/>
+          </a:prstGeom>
+          <a:noFill/>
+        </p:spPr>
+        <p:txBody>
+          <a:bodyPr wrap="square" anchor="t">
+            <a:spAutoFit/>
+          </a:bodyPr>
+          <a:lstStyle/>
+          <a:p>
+            <a:pPr algn="l">
+              <a:spcAft>
+                <a:spcPts val="300"/>
+              </a:spcAft>
+            </a:pPr>
+            <a:r>
+              <a:rPr sz="1250" b="0" i="0">
+                <a:solidFill>
+                  <a:srgbClr val="3A4654"/>
+                </a:solidFill>
+                <a:latin typeface="Calibri"/>
+              </a:rPr>
+              <a:t>6.1 the three benchmarks and the REST flow that drives them · 6.2 what each image bakes in · 6.3 one task end to end · 6.4 who decides what happens inside it</a:t>
+            </a:r>
+          </a:p>
+        </p:txBody>
+      </p:sp>
+      <p:sp>
+        <p:nvSpPr>
+          <p:cNvPr id="21" name="Oval 20"/>
           <p:cNvSpPr/>
           <p:nvPr/>
         </p:nvSpPr>
@@ -15837,14 +15971,14 @@
                 </a:solidFill>
                 <a:latin typeface="Calibri"/>
               </a:rPr>
-              <a:t>6</a:t>
+              <a:t>7</a:t>
             </a:r>
           </a:p>
         </p:txBody>
       </p:sp>
       <p:sp>
         <p:nvSpPr>
-          <p:cNvPr id="19" name="TextBox 18"/>
+          <p:cNvPr id="22" name="TextBox 21"/>
           <p:cNvSpPr txBox="1"/>
           <p:nvPr/>
         </p:nvSpPr>
@@ -15876,14 +16010,14 @@
                 </a:solidFill>
                 <a:latin typeface="Calibri"/>
               </a:rPr>
-              <a:t>Benchmark catalog &amp; run lifecycle</a:t>
+              <a:t>The three benchmarks — what they measure</a:t>
             </a:r>
           </a:p>
         </p:txBody>
       </p:sp>
       <p:sp>
         <p:nvSpPr>
-          <p:cNvPr id="20" name="TextBox 19"/>
+          <p:cNvPr id="23" name="TextBox 22"/>
           <p:cNvSpPr txBox="1"/>
           <p:nvPr/>
         </p:nvSpPr>
@@ -15915,14 +16049,14 @@
                 </a:solidFill>
                 <a:latin typeface="Calibri"/>
               </a:rPr>
-              <a:t>6.1 the three benchmarks and the REST flow that drives them · 6.2 what each image bakes in · 6.3 one task end to end · 6.4 who decides what happens inside it</a:t>
+              <a:t>7.1 the difficulty ladder · 7.2 what each stresses · 7.3 the three compared · 7.4 the traps · 7.5 picking one · 7.6 what it costs · 7.7 the rate card · 7.8–7.9 six efficiency figures</a:t>
             </a:r>
           </a:p>
         </p:txBody>
       </p:sp>
       <p:sp>
         <p:nvSpPr>
-          <p:cNvPr id="21" name="Oval 20"/>
+          <p:cNvPr id="24" name="Oval 23"/>
           <p:cNvSpPr/>
           <p:nvPr/>
         </p:nvSpPr>
@@ -15970,14 +16104,14 @@
                 </a:solidFill>
                 <a:latin typeface="Calibri"/>
               </a:rPr>
-              <a:t>7</a:t>
+              <a:t>8</a:t>
             </a:r>
           </a:p>
         </p:txBody>
       </p:sp>
       <p:sp>
         <p:nvSpPr>
-          <p:cNvPr id="22" name="TextBox 21"/>
+          <p:cNvPr id="25" name="TextBox 24"/>
           <p:cNvSpPr txBox="1"/>
           <p:nvPr/>
         </p:nvSpPr>
@@ -16009,14 +16143,14 @@
                 </a:solidFill>
                 <a:latin typeface="Calibri"/>
               </a:rPr>
-              <a:t>The three benchmarks — what they measure</a:t>
+              <a:t>The canonical 12-run matrix</a:t>
             </a:r>
           </a:p>
         </p:txBody>
       </p:sp>
       <p:sp>
         <p:nvSpPr>
-          <p:cNvPr id="23" name="TextBox 22"/>
+          <p:cNvPr id="26" name="TextBox 25"/>
           <p:cNvSpPr txBox="1"/>
           <p:nvPr/>
         </p:nvSpPr>
@@ -16048,14 +16182,14 @@
                 </a:solidFill>
                 <a:latin typeface="Calibri"/>
               </a:rPr>
-              <a:t>7.1 the difficulty ladder · 7.2 what each stresses · 7.3 the three compared · 7.4 the traps · 7.5 picking one · 7.6 what it costs · 7.7 the rate card · 7.8–7.9 six efficiency figures</a:t>
+              <a:t>8.1 what the 12 runs parameterize · 8.2 what each band established · 8.3 what they measured</a:t>
             </a:r>
           </a:p>
         </p:txBody>
       </p:sp>
       <p:sp>
         <p:nvSpPr>
-          <p:cNvPr id="24" name="Oval 23"/>
+          <p:cNvPr id="27" name="Oval 26"/>
           <p:cNvSpPr/>
           <p:nvPr/>
         </p:nvSpPr>
@@ -16103,14 +16237,14 @@
                 </a:solidFill>
                 <a:latin typeface="Calibri"/>
               </a:rPr>
-              <a:t>8</a:t>
+              <a:t>9</a:t>
             </a:r>
           </a:p>
         </p:txBody>
       </p:sp>
       <p:sp>
         <p:nvSpPr>
-          <p:cNvPr id="25" name="TextBox 24"/>
+          <p:cNvPr id="28" name="TextBox 27"/>
           <p:cNvSpPr txBox="1"/>
           <p:nvPr/>
         </p:nvSpPr>
@@ -16142,14 +16276,14 @@
                 </a:solidFill>
                 <a:latin typeface="Calibri"/>
               </a:rPr>
-              <a:t>The canonical 12-run matrix</a:t>
+              <a:t>Cross-platform &amp; plugin overhead</a:t>
             </a:r>
           </a:p>
         </p:txBody>
       </p:sp>
       <p:sp>
         <p:nvSpPr>
-          <p:cNvPr id="26" name="TextBox 25"/>
+          <p:cNvPr id="29" name="TextBox 28"/>
           <p:cNvSpPr txBox="1"/>
           <p:nvPr/>
         </p:nvSpPr>
@@ -16181,14 +16315,14 @@
                 </a:solidFill>
                 <a:latin typeface="Calibri"/>
               </a:rPr>
-              <a:t>8.1 what the 12 runs parameterize · 8.2 what each band established · 8.3 what they measured</a:t>
+              <a:t>9.1 OpenShift vs KinD, like-for-like · 9.2 what AuthBridge costs</a:t>
             </a:r>
           </a:p>
         </p:txBody>
       </p:sp>
       <p:sp>
         <p:nvSpPr>
-          <p:cNvPr id="27" name="Oval 26"/>
+          <p:cNvPr id="30" name="Oval 29"/>
           <p:cNvSpPr/>
           <p:nvPr/>
         </p:nvSpPr>
@@ -16236,14 +16370,14 @@
                 </a:solidFill>
                 <a:latin typeface="Calibri"/>
               </a:rPr>
-              <a:t>9</a:t>
+              <a:t>10</a:t>
             </a:r>
           </a:p>
         </p:txBody>
       </p:sp>
       <p:sp>
         <p:nvSpPr>
-          <p:cNvPr id="28" name="TextBox 27"/>
+          <p:cNvPr id="31" name="TextBox 30"/>
           <p:cNvSpPr txBox="1"/>
           <p:nvPr/>
         </p:nvSpPr>
@@ -16275,14 +16409,14 @@
                 </a:solidFill>
                 <a:latin typeface="Calibri"/>
               </a:rPr>
-              <a:t>Cross-platform &amp; plugin overhead</a:t>
+              <a:t>What the Service can &amp; cannot enact</a:t>
             </a:r>
           </a:p>
         </p:txBody>
       </p:sp>
       <p:sp>
         <p:nvSpPr>
-          <p:cNvPr id="29" name="TextBox 28"/>
+          <p:cNvPr id="32" name="TextBox 31"/>
           <p:cNvSpPr txBox="1"/>
           <p:nvPr/>
         </p:nvSpPr>
@@ -16314,14 +16448,14 @@
                 </a:solidFill>
                 <a:latin typeface="Calibri"/>
               </a:rPr>
-              <a:t>9.1 OpenShift vs KinD, like-for-like · 9.2 what AuthBridge costs</a:t>
+              <a:t>the HTTP-only boundary, made explicit</a:t>
             </a:r>
           </a:p>
         </p:txBody>
       </p:sp>
       <p:sp>
         <p:nvSpPr>
-          <p:cNvPr id="30" name="Oval 29"/>
+          <p:cNvPr id="33" name="Oval 32"/>
           <p:cNvSpPr/>
           <p:nvPr/>
         </p:nvSpPr>
@@ -16369,14 +16503,14 @@
                 </a:solidFill>
                 <a:latin typeface="Calibri"/>
               </a:rPr>
-              <a:t>10</a:t>
+              <a:t>11</a:t>
             </a:r>
           </a:p>
         </p:txBody>
       </p:sp>
       <p:sp>
         <p:nvSpPr>
-          <p:cNvPr id="31" name="TextBox 30"/>
+          <p:cNvPr id="34" name="TextBox 33"/>
           <p:cNvSpPr txBox="1"/>
           <p:nvPr/>
         </p:nvSpPr>
@@ -16408,14 +16542,14 @@
                 </a:solidFill>
                 <a:latin typeface="Calibri"/>
               </a:rPr>
-              <a:t>What the Service can &amp; cannot enact</a:t>
+              <a:t>Installing &amp; uninstalling</a:t>
             </a:r>
           </a:p>
         </p:txBody>
       </p:sp>
       <p:sp>
         <p:nvSpPr>
-          <p:cNvPr id="32" name="TextBox 31"/>
+          <p:cNvPr id="35" name="TextBox 34"/>
           <p:cNvSpPr txBox="1"/>
           <p:nvPr/>
         </p:nvSpPr>
@@ -16447,14 +16581,14 @@
                 </a:solidFill>
                 <a:latin typeface="Calibri"/>
               </a:rPr>
-              <a:t>the HTTP-only boundary, made explicit</a:t>
+              <a:t>what the scripts automate (one cluster), and the cross-cluster setup they leave to you</a:t>
             </a:r>
           </a:p>
         </p:txBody>
       </p:sp>
       <p:cxnSp>
         <p:nvCxnSpPr>
-          <p:cNvPr id="33" name="Connector 32"/>
+          <p:cNvPr id="36" name="Connector 35"/>
           <p:cNvCxnSpPr/>
           <p:nvPr/>
         </p:nvCxnSpPr>
@@ -16490,7 +16624,7 @@
       </p:cxnSp>
       <p:sp>
         <p:nvSpPr>
-          <p:cNvPr id="34" name="TextBox 33"/>
+          <p:cNvPr id="37" name="TextBox 36"/>
           <p:cNvSpPr txBox="1"/>
           <p:nvPr/>
         </p:nvSpPr>
@@ -27037,7 +27171,7 @@
                 </a:solidFill>
                 <a:latin typeface="Calibri"/>
               </a:rPr>
-              <a:t>One install per cluster, with all benchmark workloads in one namespace — the same chart on KinD and OpenShift.</a:t>
+              <a:t>Cluster-agnostic: the same chart on KinD and OpenShift — the iss-keyed instance picks where workloads run.</a:t>
             </a:r>
           </a:p>
         </p:txBody>
@@ -27077,6 +27211,610 @@
                 <a:latin typeface="Calibri"/>
               </a:rPr>
               <a:t>27</a:t>
+            </a:r>
+          </a:p>
+        </p:txBody>
+      </p:sp>
+    </p:spTree>
+  </p:cSld>
+  <p:clrMapOvr>
+    <a:masterClrMapping/>
+  </p:clrMapOvr>
+</p:sld>
+</file>
+
+<file path=ppt/slides/slide28.xml><?xml version="1.0" encoding="utf-8"?>
+<p:sld xmlns:a="http://schemas.openxmlformats.org/drawingml/2006/main" xmlns:p="http://schemas.openxmlformats.org/presentationml/2006/main" xmlns:r="http://schemas.openxmlformats.org/officeDocument/2006/relationships">
+  <p:cSld name="11. Installing &amp; Uninstalling">
+    <p:spTree>
+      <p:nvGrpSpPr>
+        <p:cNvPr id="1" name=""/>
+        <p:cNvGrpSpPr/>
+        <p:nvPr/>
+      </p:nvGrpSpPr>
+      <p:grpSpPr/>
+      <p:sp>
+        <p:nvSpPr>
+          <p:cNvPr id="2" name="Rectangle 1"/>
+          <p:cNvSpPr/>
+          <p:nvPr/>
+        </p:nvSpPr>
+        <p:spPr>
+          <a:xfrm>
+            <a:off x="0" y="0"/>
+            <a:ext cx="12192000" cy="950000"/>
+          </a:xfrm>
+          <a:prstGeom prst="rect">
+            <a:avLst/>
+          </a:prstGeom>
+          <a:solidFill>
+            <a:srgbClr val="1B3A5C"/>
+          </a:solidFill>
+          <a:ln>
+            <a:noFill/>
+          </a:ln>
+          <a:effectLst/>
+        </p:spPr>
+        <p:style>
+          <a:lnRef idx="1">
+            <a:schemeClr val="accent1"/>
+          </a:lnRef>
+          <a:fillRef idx="3">
+            <a:schemeClr val="accent1"/>
+          </a:fillRef>
+          <a:effectRef idx="2">
+            <a:schemeClr val="accent1"/>
+          </a:effectRef>
+          <a:fontRef idx="minor">
+            <a:schemeClr val="lt1"/>
+          </a:fontRef>
+        </p:style>
+        <p:txBody>
+          <a:bodyPr rtlCol="0" anchor="ctr" lIns="355600"/>
+          <a:lstStyle/>
+          <a:p>
+            <a:pPr algn="ctr"/>
+            <a:r>
+              <a:rPr sz="2600" b="1" i="0">
+                <a:solidFill>
+                  <a:srgbClr val="FFFFFF"/>
+                </a:solidFill>
+                <a:latin typeface="Calibri"/>
+              </a:rPr>
+              <a:t>11.  Installing &amp; Uninstalling</a:t>
+            </a:r>
+          </a:p>
+          <a:p>
+            <a:r>
+              <a:rPr sz="1400" b="0" i="0">
+                <a:solidFill>
+                  <a:srgbClr val="C9D9EC"/>
+                </a:solidFill>
+                <a:latin typeface="Calibri"/>
+              </a:rPr>
+              <a:t>What the scripts automate — one cluster — and the cross-cluster setup they leave to you</a:t>
+            </a:r>
+          </a:p>
+        </p:txBody>
+      </p:sp>
+      <p:sp>
+        <p:nvSpPr>
+          <p:cNvPr id="3" name="Rectangle 2"/>
+          <p:cNvSpPr/>
+          <p:nvPr/>
+        </p:nvSpPr>
+        <p:spPr>
+          <a:xfrm>
+            <a:off x="457200" y="1234440"/>
+            <a:ext cx="5394960" cy="457200"/>
+          </a:xfrm>
+          <a:prstGeom prst="rect">
+            <a:avLst/>
+          </a:prstGeom>
+          <a:solidFill>
+            <a:srgbClr val="2E6FB5"/>
+          </a:solidFill>
+          <a:ln w="12700">
+            <a:solidFill>
+              <a:srgbClr val="2E6FB5"/>
+            </a:solidFill>
+          </a:ln>
+          <a:effectLst/>
+        </p:spPr>
+        <p:style>
+          <a:lnRef idx="1">
+            <a:schemeClr val="accent1"/>
+          </a:lnRef>
+          <a:fillRef idx="3">
+            <a:schemeClr val="accent1"/>
+          </a:fillRef>
+          <a:effectRef idx="2">
+            <a:schemeClr val="accent1"/>
+          </a:effectRef>
+          <a:fontRef idx="minor">
+            <a:schemeClr val="lt1"/>
+          </a:fontRef>
+        </p:style>
+        <p:txBody>
+          <a:bodyPr rtlCol="0" anchor="ctr" wrap="square" tIns="25400" bIns="25400"/>
+          <a:lstStyle/>
+          <a:p>
+            <a:pPr algn="ctr"/>
+            <a:r>
+              <a:rPr sz="1500" b="1" i="0">
+                <a:solidFill>
+                  <a:srgbClr val="FFFFFF"/>
+                </a:solidFill>
+                <a:latin typeface="Calibri"/>
+              </a:rPr>
+              <a:t>reference/autobench-install.sh</a:t>
+            </a:r>
+          </a:p>
+        </p:txBody>
+      </p:sp>
+      <p:sp>
+        <p:nvSpPr>
+          <p:cNvPr id="4" name="TextBox 3"/>
+          <p:cNvSpPr txBox="1"/>
+          <p:nvPr/>
+        </p:nvSpPr>
+        <p:spPr>
+          <a:xfrm>
+            <a:off x="548640" y="1828800"/>
+            <a:ext cx="5303520" cy="4206240"/>
+          </a:xfrm>
+          <a:prstGeom prst="rect">
+            <a:avLst/>
+          </a:prstGeom>
+          <a:noFill/>
+        </p:spPr>
+        <p:txBody>
+          <a:bodyPr wrap="square" anchor="t">
+            <a:spAutoFit/>
+          </a:bodyPr>
+          <a:lstStyle/>
+          <a:p>
+            <a:pPr algn="l" lvl="1">
+              <a:spcAft>
+                <a:spcPts val="300"/>
+              </a:spcAft>
+            </a:pPr>
+            <a:r>
+              <a:rPr sz="1300" b="0" i="0">
+                <a:solidFill>
+                  <a:srgbClr val="1F2A37"/>
+                </a:solidFill>
+                <a:latin typeface="Calibri"/>
+              </a:rPr>
+              <a:t>• One env file, one command, on KinD or OpenShift</a:t>
+            </a:r>
+          </a:p>
+          <a:p>
+            <a:pPr algn="l" lvl="1">
+              <a:spcAft>
+                <a:spcPts val="300"/>
+              </a:spcAft>
+            </a:pPr>
+            <a:r>
+              <a:rPr sz="1300" b="0" i="0">
+                <a:solidFill>
+                  <a:srgbClr val="1F2A37"/>
+                </a:solidFill>
+                <a:latin typeface="Calibri"/>
+              </a:rPr>
+              <a:t>• Preflight first — 0 failures, or it stops</a:t>
+            </a:r>
+          </a:p>
+          <a:p>
+            <a:pPr algn="l" lvl="1">
+              <a:spcAft>
+                <a:spcPts val="300"/>
+              </a:spcAft>
+            </a:pPr>
+            <a:r>
+              <a:rPr sz="1300" b="0" i="0">
+                <a:solidFill>
+                  <a:srgbClr val="1F2A37"/>
+                </a:solidFill>
+                <a:latin typeface="Calibri"/>
+              </a:rPr>
+              <a:t>• MLflow read path, instance file, Secret, Helm, restart</a:t>
+            </a:r>
+          </a:p>
+          <a:p>
+            <a:pPr algn="l" lvl="1">
+              <a:spcAft>
+                <a:spcPts val="300"/>
+              </a:spcAft>
+            </a:pPr>
+            <a:r>
+              <a:rPr sz="1300" b="0" i="0">
+                <a:solidFill>
+                  <a:srgbClr val="1F2A37"/>
+                </a:solidFill>
+                <a:latin typeface="Calibri"/>
+              </a:rPr>
+              <a:t>• Verify: /healthz, the S3 block, preflight + MLflow round trip</a:t>
+            </a:r>
+          </a:p>
+          <a:p>
+            <a:pPr algn="l" lvl="1">
+              <a:spcAft>
+                <a:spcPts val="300"/>
+              </a:spcAft>
+            </a:pPr>
+            <a:r>
+              <a:rPr sz="1300" b="0" i="0">
+                <a:solidFill>
+                  <a:srgbClr val="1F2A37"/>
+                </a:solidFill>
+                <a:latin typeface="Calibri"/>
+              </a:rPr>
+              <a:t>• --ibac-judge adds the judge for the plugin legs</a:t>
+            </a:r>
+          </a:p>
+          <a:p>
+            <a:pPr algn="l">
+              <a:spcAft>
+                <a:spcPts val="300"/>
+              </a:spcAft>
+            </a:pPr>
+            <a:r>
+              <a:rPr sz="1350" b="1" i="0">
+                <a:solidFill>
+                  <a:srgbClr val="2E6FB5"/>
+                </a:solidFill>
+                <a:latin typeface="Calibri"/>
+              </a:rPr>
+              <a:t>reference/autobench-uninstall.sh</a:t>
+            </a:r>
+          </a:p>
+          <a:p>
+            <a:pPr algn="l" lvl="1">
+              <a:spcAft>
+                <a:spcPts val="300"/>
+              </a:spcAft>
+            </a:pPr>
+            <a:r>
+              <a:rPr sz="1300" b="0" i="0">
+                <a:solidFill>
+                  <a:srgbClr val="1F2A37"/>
+                </a:solidFill>
+                <a:latin typeface="Calibri"/>
+              </a:rPr>
+              <a:t>• Workloads first, through the Service; then helm uninstall</a:t>
+            </a:r>
+          </a:p>
+          <a:p>
+            <a:pPr algn="l" lvl="1">
+              <a:spcAft>
+                <a:spcPts val="300"/>
+              </a:spcAft>
+            </a:pPr>
+            <a:r>
+              <a:rPr sz="1300" b="0" i="0">
+                <a:solidFill>
+                  <a:srgbClr val="1F2A37"/>
+                </a:solidFill>
+                <a:latin typeface="Calibri"/>
+              </a:rPr>
+              <a:t>• Verify every owned object is gone; judge fields restored</a:t>
+            </a:r>
+          </a:p>
+          <a:p>
+            <a:pPr algn="l" lvl="1">
+              <a:spcAft>
+                <a:spcPts val="300"/>
+              </a:spcAft>
+            </a:pPr>
+            <a:r>
+              <a:rPr sz="1300" b="0" i="0">
+                <a:solidFill>
+                  <a:srgbClr val="1F2A37"/>
+                </a:solidFill>
+                <a:latin typeface="Calibri"/>
+              </a:rPr>
+              <a:t>• Removes only what the installer recorded creating</a:t>
+            </a:r>
+          </a:p>
+        </p:txBody>
+      </p:sp>
+      <p:sp>
+        <p:nvSpPr>
+          <p:cNvPr id="5" name="Rectangle 4"/>
+          <p:cNvSpPr/>
+          <p:nvPr/>
+        </p:nvSpPr>
+        <p:spPr>
+          <a:xfrm>
+            <a:off x="6309360" y="1234440"/>
+            <a:ext cx="5394960" cy="457200"/>
+          </a:xfrm>
+          <a:prstGeom prst="rect">
+            <a:avLst/>
+          </a:prstGeom>
+          <a:solidFill>
+            <a:srgbClr val="3D6E70"/>
+          </a:solidFill>
+          <a:ln w="12700">
+            <a:solidFill>
+              <a:srgbClr val="3D6E70"/>
+            </a:solidFill>
+          </a:ln>
+          <a:effectLst/>
+        </p:spPr>
+        <p:style>
+          <a:lnRef idx="1">
+            <a:schemeClr val="accent1"/>
+          </a:lnRef>
+          <a:fillRef idx="3">
+            <a:schemeClr val="accent1"/>
+          </a:fillRef>
+          <a:effectRef idx="2">
+            <a:schemeClr val="accent1"/>
+          </a:effectRef>
+          <a:fontRef idx="minor">
+            <a:schemeClr val="lt1"/>
+          </a:fontRef>
+        </p:style>
+        <p:txBody>
+          <a:bodyPr rtlCol="0" anchor="ctr" wrap="square" tIns="25400" bIns="25400"/>
+          <a:lstStyle/>
+          <a:p>
+            <a:pPr algn="ctr"/>
+            <a:r>
+              <a:rPr sz="1500" b="1" i="0">
+                <a:solidFill>
+                  <a:srgbClr val="FFFFFF"/>
+                </a:solidFill>
+                <a:latin typeface="Calibri"/>
+              </a:rPr>
+              <a:t>Scope: one cluster</a:t>
+            </a:r>
+          </a:p>
+        </p:txBody>
+      </p:sp>
+      <p:sp>
+        <p:nvSpPr>
+          <p:cNvPr id="6" name="TextBox 5"/>
+          <p:cNvSpPr txBox="1"/>
+          <p:nvPr/>
+        </p:nvSpPr>
+        <p:spPr>
+          <a:xfrm>
+            <a:off x="6400800" y="1828800"/>
+            <a:ext cx="5303520" cy="4206240"/>
+          </a:xfrm>
+          <a:prstGeom prst="rect">
+            <a:avLst/>
+          </a:prstGeom>
+          <a:noFill/>
+        </p:spPr>
+        <p:txBody>
+          <a:bodyPr wrap="square" anchor="t">
+            <a:spAutoFit/>
+          </a:bodyPr>
+          <a:lstStyle/>
+          <a:p>
+            <a:pPr algn="l" lvl="1">
+              <a:spcAft>
+                <a:spcPts val="300"/>
+              </a:spcAft>
+            </a:pPr>
+            <a:r>
+              <a:rPr sz="1300" b="0" i="0">
+                <a:solidFill>
+                  <a:srgbClr val="1F2A37"/>
+                </a:solidFill>
+                <a:latin typeface="Calibri"/>
+              </a:rPr>
+              <a:t>• Service and its workloads on the same cluster</a:t>
+            </a:r>
+          </a:p>
+          <a:p>
+            <a:pPr algn="l" lvl="2">
+              <a:spcAft>
+                <a:spcPts val="300"/>
+              </a:spcAft>
+            </a:pPr>
+            <a:r>
+              <a:rPr sz="1150" b="0" i="0">
+                <a:solidFill>
+                  <a:srgbClr val="3A4654"/>
+                </a:solidFill>
+                <a:latin typeface="Calibri"/>
+              </a:rPr>
+              <a:t>instance file for that cluster's own iss; endpoint templates null</a:t>
+            </a:r>
+          </a:p>
+          <a:p>
+            <a:pPr algn="l">
+              <a:spcAft>
+                <a:spcPts val="300"/>
+              </a:spcAft>
+            </a:pPr>
+            <a:r>
+              <a:rPr sz="1350" b="1" i="0">
+                <a:solidFill>
+                  <a:srgbClr val="B55A2E"/>
+                </a:solidFill>
+                <a:latin typeface="Calibri"/>
+              </a:rPr>
+              <a:t>Cross-cluster service–workload: supported, not scripted</a:t>
+            </a:r>
+          </a:p>
+          <a:p>
+            <a:pPr algn="l" lvl="1">
+              <a:spcAft>
+                <a:spcPts val="300"/>
+              </a:spcAft>
+            </a:pPr>
+            <a:r>
+              <a:rPr sz="1300" b="0" i="0">
+                <a:solidFill>
+                  <a:srgbClr val="1F2A37"/>
+                </a:solidFill>
+                <a:latin typeface="Calibri"/>
+              </a:rPr>
+              <a:t>• Instance file keyed to the workload cluster's iss</a:t>
+            </a:r>
+          </a:p>
+          <a:p>
+            <a:pPr algn="l" lvl="2">
+              <a:spcAft>
+                <a:spcPts val="300"/>
+              </a:spcAft>
+            </a:pPr>
+            <a:r>
+              <a:rPr sz="1150" b="0" i="0">
+                <a:solidFill>
+                  <a:srgbClr val="3A4654"/>
+                </a:solidFill>
+                <a:latin typeface="Calibri"/>
+              </a:rPr>
+              <a:t>Rossoctl URL, endpoint templates, workload_otel, Service-side MLflow</a:t>
+            </a:r>
+          </a:p>
+          <a:p>
+            <a:pPr algn="l" lvl="1">
+              <a:spcAft>
+                <a:spcPts val="300"/>
+              </a:spcAft>
+            </a:pPr>
+            <a:r>
+              <a:rPr sz="1300" b="0" i="0">
+                <a:solidFill>
+                  <a:srgbClr val="1F2A37"/>
+                </a:solidFill>
+                <a:latin typeface="Calibri"/>
+              </a:rPr>
+              <a:t>• Collector on the workload cluster → the Service's MLflow</a:t>
+            </a:r>
+          </a:p>
+          <a:p>
+            <a:pPr algn="l" lvl="1">
+              <a:spcAft>
+                <a:spcPts val="300"/>
+              </a:spcAft>
+            </a:pPr>
+            <a:r>
+              <a:rPr sz="1300" b="0" i="0">
+                <a:solidFill>
+                  <a:srgbClr val="1F2A37"/>
+                </a:solidFill>
+                <a:latin typeface="Calibri"/>
+              </a:rPr>
+              <a:t>• IBAC judge on the workload cluster</a:t>
+            </a:r>
+          </a:p>
+          <a:p>
+            <a:pPr algn="l" lvl="1">
+              <a:spcAft>
+                <a:spcPts val="300"/>
+              </a:spcAft>
+            </a:pPr>
+            <a:r>
+              <a:rPr sz="1300" b="0" i="0">
+                <a:solidFill>
+                  <a:srgbClr val="1F2A37"/>
+                </a:solidFill>
+                <a:latin typeface="Calibri"/>
+              </a:rPr>
+              <a:t>• Caller token from the workload cluster's Keycloak</a:t>
+            </a:r>
+          </a:p>
+        </p:txBody>
+      </p:sp>
+      <p:sp>
+        <p:nvSpPr>
+          <p:cNvPr id="7" name="Rounded Rectangle 6"/>
+          <p:cNvSpPr/>
+          <p:nvPr/>
+        </p:nvSpPr>
+        <p:spPr>
+          <a:xfrm>
+            <a:off x="1463040" y="5257800"/>
+            <a:ext cx="9235440" cy="685800"/>
+          </a:xfrm>
+          <a:prstGeom prst="roundRect">
+            <a:avLst/>
+          </a:prstGeom>
+          <a:solidFill>
+            <a:srgbClr val="EEEFF1"/>
+          </a:solidFill>
+          <a:ln w="12700">
+            <a:solidFill>
+              <a:srgbClr val="6B6B6B"/>
+            </a:solidFill>
+          </a:ln>
+          <a:effectLst/>
+        </p:spPr>
+        <p:style>
+          <a:lnRef idx="1">
+            <a:schemeClr val="accent1"/>
+          </a:lnRef>
+          <a:fillRef idx="3">
+            <a:schemeClr val="accent1"/>
+          </a:fillRef>
+          <a:effectRef idx="2">
+            <a:schemeClr val="accent1"/>
+          </a:effectRef>
+          <a:fontRef idx="minor">
+            <a:schemeClr val="lt1"/>
+          </a:fontRef>
+        </p:style>
+        <p:txBody>
+          <a:bodyPr rtlCol="0" anchor="ctr" wrap="square" tIns="25400" bIns="25400"/>
+          <a:lstStyle/>
+          <a:p>
+            <a:pPr algn="ctr"/>
+            <a:r>
+              <a:rPr sz="1250" b="1" i="0">
+                <a:solidFill>
+                  <a:srgbClr val="1F2A37"/>
+                </a:solidFill>
+                <a:latin typeface="Calibri"/>
+              </a:rPr>
+              <a:t>The Service needs no change for a cross-cluster setup — only provisioning, which the scripts do not yet do.</a:t>
+            </a:r>
+          </a:p>
+        </p:txBody>
+      </p:sp>
+      <p:sp>
+        <p:nvSpPr>
+          <p:cNvPr id="8" name="TextBox 7"/>
+          <p:cNvSpPr txBox="1"/>
+          <p:nvPr/>
+        </p:nvSpPr>
+        <p:spPr>
+          <a:xfrm>
+            <a:off x="11795760" y="6437376"/>
+            <a:ext cx="320040" cy="310896"/>
+          </a:xfrm>
+          <a:prstGeom prst="rect">
+            <a:avLst/>
+          </a:prstGeom>
+          <a:noFill/>
+        </p:spPr>
+        <p:txBody>
+          <a:bodyPr wrap="none" anchor="ctr" lIns="0" rIns="0" tIns="0" bIns="0">
+            <a:spAutoFit/>
+          </a:bodyPr>
+          <a:lstStyle/>
+          <a:p>
+            <a:pPr algn="r">
+              <a:spcAft>
+                <a:spcPts val="300"/>
+              </a:spcAft>
+            </a:pPr>
+            <a:r>
+              <a:rPr sz="1200" b="0" i="0">
+                <a:solidFill>
+                  <a:srgbClr val="6B6B6B"/>
+                </a:solidFill>
+                <a:latin typeface="Calibri"/>
+              </a:rPr>
+              <a:t>28</a:t>
             </a:r>
           </a:p>
         </p:txBody>
@@ -27305,7 +28043,7 @@
                 </a:solidFill>
                 <a:latin typeface="Calibri"/>
               </a:rPr>
-              <a:t>• One install per cluster, all benchmark workloads in one namespace (team1)</a:t>
+              <a:t>• One Service, many clusters — the JWT iss picks the instance</a:t>
             </a:r>
           </a:p>
           <a:p>

--- a/docs/AutoBench.pptx
+++ b/docs/AutoBench.pptx
@@ -196,7 +196,7 @@
             <p14:sldId id="284"/>
           </p14:sldIdLst>
         </p14:section>
-        <p14:section name="6 Results (v1.35)" id="{A0B00006-0000-4000-8000-000000000006}">
+        <p14:section name="6 Results (v1.36)" id="{A0B00006-0000-4000-8000-000000000006}">
           <p14:sldIdLst>
             <p14:sldId id="285"/>
             <p14:sldId id="286"/>
@@ -264,10 +264,10 @@
                 <c:formatCode>#,##0"×"</c:formatCode>
                 <c:ptCount val="2"/>
                 <c:pt idx="0">
-                  <c:v>175</c:v>
+                  <c:v>176</c:v>
                 </c:pt>
                 <c:pt idx="1">
-                  <c:v>621</c:v>
+                  <c:v>569</c:v>
                 </c:pt>
               </c:numCache>
             </c:numRef>
@@ -316,10 +316,10 @@
                 <c:formatCode>#,##0"×"</c:formatCode>
                 <c:ptCount val="2"/>
                 <c:pt idx="0">
-                  <c:v>19</c:v>
+                  <c:v>21</c:v>
                 </c:pt>
                 <c:pt idx="1">
-                  <c:v>87</c:v>
+                  <c:v>52</c:v>
                 </c:pt>
               </c:numCache>
             </c:numRef>
@@ -368,10 +368,10 @@
                 <c:formatCode>#,##0"×"</c:formatCode>
                 <c:ptCount val="2"/>
                 <c:pt idx="0">
-                  <c:v>282</c:v>
+                  <c:v>279</c:v>
                 </c:pt>
                 <c:pt idx="1">
-                  <c:v>1195</c:v>
+                  <c:v>1108</c:v>
                 </c:pt>
               </c:numCache>
             </c:numRef>
@@ -575,16 +575,16 @@
                 <c:formatCode>0"%"</c:formatCode>
                 <c:ptCount val="4"/>
                 <c:pt idx="0">
-                  <c:v>92.8</c:v>
+                  <c:v>93.1</c:v>
                 </c:pt>
                 <c:pt idx="1">
-                  <c:v>64.0</c:v>
+                  <c:v>63.0</c:v>
                 </c:pt>
                 <c:pt idx="2">
                   <c:v>97.7</c:v>
                 </c:pt>
                 <c:pt idx="3">
-                  <c:v>91.5</c:v>
+                  <c:v>91.1</c:v>
                 </c:pt>
               </c:numCache>
             </c:numRef>
@@ -639,16 +639,16 @@
                 <c:formatCode>0"%"</c:formatCode>
                 <c:ptCount val="4"/>
                 <c:pt idx="0">
-                  <c:v>76.3</c:v>
+                  <c:v>77.0</c:v>
                 </c:pt>
                 <c:pt idx="1">
-                  <c:v>18.1</c:v>
+                  <c:v>17.5</c:v>
                 </c:pt>
                 <c:pt idx="2">
-                  <c:v>89.5</c:v>
+                  <c:v>89.6</c:v>
                 </c:pt>
                 <c:pt idx="3">
-                  <c:v>57.5</c:v>
+                  <c:v>56.0</c:v>
                 </c:pt>
               </c:numCache>
             </c:numRef>
@@ -851,7 +851,7 @@
                   <c:v>7.82e-05</c:v>
                 </c:pt>
                 <c:pt idx="1">
-                  <c:v>0.001617</c:v>
+                  <c:v>0.001588</c:v>
                 </c:pt>
               </c:numCache>
             </c:numRef>
@@ -900,10 +900,10 @@
                 <c:formatCode>"$"0.0000</c:formatCode>
                 <c:ptCount val="2"/>
                 <c:pt idx="0">
-                  <c:v>0.0003836</c:v>
+                  <c:v>0.00043160000000000003</c:v>
                 </c:pt>
                 <c:pt idx="1">
-                  <c:v>0.0005016</c:v>
+                  <c:v>0.0004736</c:v>
                 </c:pt>
               </c:numCache>
             </c:numRef>
@@ -1066,10 +1066,10 @@
                   <c:v>#12 appworld</c:v>
                 </c:pt>
                 <c:pt idx="1">
-                  <c:v>#11 appworld</c:v>
+                  <c:v>#10 tau2</c:v>
                 </c:pt>
                 <c:pt idx="2">
-                  <c:v>#10 tau2</c:v>
+                  <c:v>#11 appworld</c:v>
                 </c:pt>
                 <c:pt idx="3">
                   <c:v>#9 tau2</c:v>
@@ -1084,16 +1084,16 @@
                   <c:v>#2 gsm8k</c:v>
                 </c:pt>
                 <c:pt idx="7">
+                  <c:v>#8 gsm8k</c:v>
+                </c:pt>
+                <c:pt idx="8">
+                  <c:v>#6 gsm8k</c:v>
+                </c:pt>
+                <c:pt idx="9">
                   <c:v>#5 gsm8k</c:v>
                 </c:pt>
-                <c:pt idx="8">
+                <c:pt idx="10">
                   <c:v>#7 gsm8k</c:v>
-                </c:pt>
-                <c:pt idx="9">
-                  <c:v>#8 gsm8k</c:v>
-                </c:pt>
-                <c:pt idx="10">
-                  <c:v>#6 gsm8k</c:v>
                 </c:pt>
                 <c:pt idx="11">
                   <c:v>#1 gsm8k</c:v>
@@ -1108,37 +1108,37 @@
                 <c:formatCode>[&gt;=0.01]"$"#,##0.00;"under $0.01"</c:formatCode>
                 <c:ptCount val="12"/>
                 <c:pt idx="0">
-                  <c:v>12.628705</c:v>
+                  <c:v>11.83124125</c:v>
                 </c:pt>
                 <c:pt idx="1">
-                  <c:v>3.09937375</c:v>
+                  <c:v>2.92489344</c:v>
                 </c:pt>
                 <c:pt idx="2">
-                  <c:v>2.88066448</c:v>
+                  <c:v>2.243245</c:v>
                 </c:pt>
                 <c:pt idx="3">
-                  <c:v>1.59490864</c:v>
+                  <c:v>1.62097056</c:v>
                 </c:pt>
                 <c:pt idx="4">
-                  <c:v>0.019949</c:v>
+                  <c:v>0.020205</c:v>
                 </c:pt>
                 <c:pt idx="5">
-                  <c:v>0.010328</c:v>
+                  <c:v>0.011208</c:v>
                 </c:pt>
                 <c:pt idx="6">
-                  <c:v>0.0046895</c:v>
+                  <c:v>0.0049455</c:v>
                 </c:pt>
                 <c:pt idx="7">
-                  <c:v>0.002533</c:v>
+                  <c:v>0.004453</c:v>
                 </c:pt>
                 <c:pt idx="8">
-                  <c:v>0.002277</c:v>
+                  <c:v>0.0020210000000000002</c:v>
                 </c:pt>
                 <c:pt idx="9">
-                  <c:v>0.0018930000000000002</c:v>
+                  <c:v>0.002021</c:v>
                 </c:pt>
                 <c:pt idx="10">
-                  <c:v>0.001637</c:v>
+                  <c:v>0.0018930000000000002</c:v>
                 </c:pt>
                 <c:pt idx="11">
                   <c:v>0.000252</c:v>
@@ -1335,22 +1335,22 @@
                 <c:formatCode>"$"0.000</c:formatCode>
                 <c:ptCount val="6"/>
                 <c:pt idx="0">
-                  <c:v>0.001637</c:v>
+                  <c:v>0.0020210000000000002</c:v>
                 </c:pt>
                 <c:pt idx="1">
-                  <c:v>0.002277</c:v>
+                  <c:v>0.0018930000000000002</c:v>
                 </c:pt>
                 <c:pt idx="2">
-                  <c:v>0.0018930000000000002</c:v>
+                  <c:v>0.004453</c:v>
                 </c:pt>
                 <c:pt idx="3">
-                  <c:v>0.0017649999999999999</c:v>
+                  <c:v>0.002405</c:v>
                 </c:pt>
                 <c:pt idx="4">
-                  <c:v>0.003173</c:v>
+                  <c:v>0.0020210000000000002</c:v>
                 </c:pt>
                 <c:pt idx="5">
-                  <c:v>0.002789</c:v>
+                  <c:v>0.003045</c:v>
                 </c:pt>
               </c:numCache>
             </c:numRef>
@@ -2090,7 +2090,7 @@
           <a:lstStyle/>
           <a:p>
             <a:r>
-              <a:t>Driven by reference/run-12.py: about an hour of run time per platform, plus the deploys and ~40 min of gateway-cache gaps (BM_CACHE_GAP=900).</a:t>
+              <a:t>Driven by reference/run-12.py: about two hours of run time per platform on v1.36's slow gateway day, plus the deploys and 14-28 min of gateway-cache gaps (BM_CACHE_GAP=900).</a:t>
             </a:r>
           </a:p>
         </p:txBody>
@@ -2380,13 +2380,13 @@
           <a:lstStyle/>
           <a:p>
             <a:r>
-              <a:t>Each rung is a different model, which is why the dollar bar outruns the token bar: climbing the ladder also buys a dearer model. Wall-clock climbs SLOWEST of the three (19× tau2, 87× appworld), because the harder benchmarks parallelize their turns while their bills add up.</a:t>
+              <a:t>Each rung is a different model, which is why the dollar bar outruns the token bar: climbing the ladder also buys a dearer model. Wall-clock climbs SLOWEST of the three (21× tau2, 52× appworld), because the harder benchmarks parallelize their turns while their bills add up.</a:t>
             </a:r>
           </a:p>
           <a:p/>
           <a:p>
             <a:r>
-              <a:t>gsm8k baseline: 513 tokens, $0.00053, 2.5 s median, over 172 task rows.</a:t>
+              <a:t>gsm8k baseline: 519 tokens, $0.00054, 5.7 s median, over 172 task rows.</a:t>
             </a:r>
           </a:p>
         </p:txBody>
@@ -2532,7 +2532,7 @@
           <a:lstStyle/>
           <a:p>
             <a:r>
-              <a:t>Mean of gpt-4.1's 2 legs against gpt-5-mini's 8; leg to leg the ratio spans 3.3×–6.6×, because the reasoning model's output length swings with how much it reasons. Note the shape rather than the winner: gpt-5-mini answers in one call and emits MORE output, gpt-4.1 takes ~3 tool round-trips and sends far more input. Which one is cheaper is a property of the price list, not of the models.</a:t>
+              <a:t>Mean of gpt-4.1's 2 legs against gpt-5-mini's 8; leg to leg the ratio spans 2.1×–5.9×, because the reasoning model's output length swings with how much it reasons. Note the shape rather than the winner: gpt-5-mini answers in one call and emits MORE output, gpt-4.1 takes ~3 tool round-trips and sends far more input. Which one is cheaper is a property of the price list, not of the models.</a:t>
             </a:r>
           </a:p>
           <a:p/>
@@ -5851,7 +5851,7 @@
                 </a:solidFill>
                 <a:latin typeface="Arial"/>
               </a:rPr>
-              <a:t>v1.35 · OpenShift and KinD · 2026-10-06</a:t>
+              <a:t>v1.36 · OpenShift and KinD · 2026-10-12</a:t>
             </a:r>
           </a:p>
         </p:txBody>
@@ -10215,7 +10215,7 @@
                 </a:solidFill>
                 <a:latin typeface="Arial"/>
               </a:rPr>
-              <a:t> span is the Service's own cost: a median 16.3 ms of a 2.5 s gsm8k task, 15.9 ms of a 40 s tau2 one.</a:t>
+              <a:t> span is the Service's own cost: a median 16.0 ms of a 5.7 s gsm8k task, 19.4 ms of a 104 s tau2 one.</a:t>
             </a:r>
           </a:p>
         </p:txBody>
@@ -11098,7 +11098,7 @@
                 </a:solidFill>
                 <a:latin typeface="Arial"/>
               </a:rPr>
-              <a:t>Same task, model and platform, two legs: tau2 task 7 took 12 chat / 12 tool in one and 10 / 10 in the other. 14 of 20 repeated tau2 tasks and 10 of 10 appworld differ; all 20 gsm8k agree.</a:t>
+              <a:t>Same task, model and platform, two legs: tau2 task 9 took 12 chat / 12 tool in one and 11 / 11 in the other. 12 of 20 repeated tau2 tasks and 8 of 8 appworld differ; all 20 gsm8k agree.</a:t>
             </a:r>
           </a:p>
         </p:txBody>
@@ -11211,7 +11211,7 @@
                 </a:solidFill>
                 <a:latin typeface="Arial"/>
               </a:rPr>
-              <a:t> 41/49; tau2 has no terminal tool, and 60/60 end on a message.</a:t>
+              <a:t> 41/47; tau2 has no terminal tool, and 60/60 end on a message.</a:t>
             </a:r>
           </a:p>
         </p:txBody>
@@ -11427,7 +11427,7 @@
                 </a:solidFill>
                 <a:latin typeface="Arial"/>
               </a:rPr>
-              <a:t>Per task, measured on our own v1.35 runs, both platforms pooled; not the benchmarks' published papers</a:t>
+              <a:t>Per task, measured on our own v1.36 runs, both platforms pooled; not the benchmarks' published papers</a:t>
             </a:r>
           </a:p>
         </p:txBody>
@@ -12019,7 +12019,7 @@
                           </a:solidFill>
                           <a:latin typeface="Arial"/>
                         </a:rPr>
-                        <a:t>49 of 50 (1 timed out)</a:t>
+                        <a:t>47 of 50 (3 timed out)</a:t>
                       </a:r>
                     </a:p>
                   </a:txBody>
@@ -12090,7 +12090,7 @@
                           </a:solidFill>
                           <a:latin typeface="Arial"/>
                         </a:rPr>
-                        <a:t>0.90</a:t>
+                        <a:t>0.83</a:t>
                       </a:r>
                     </a:p>
                   </a:txBody>
@@ -12161,7 +12161,7 @@
                           </a:solidFill>
                           <a:latin typeface="Arial"/>
                         </a:rPr>
-                        <a:t>343 / 170</a:t>
+                        <a:t>342 / 177</a:t>
                       </a:r>
                     </a:p>
                   </a:txBody>
@@ -12184,7 +12184,7 @@
                           </a:solidFill>
                           <a:latin typeface="Arial"/>
                         </a:rPr>
-                        <a:t>87,935 / 2,071</a:t>
+                        <a:t>89,122 / 2,078</a:t>
                       </a:r>
                     </a:p>
                   </a:txBody>
@@ -12207,7 +12207,7 @@
                           </a:solidFill>
                           <a:latin typeface="Arial"/>
                         </a:rPr>
-                        <a:t>291,509 / 26,950</a:t>
+                        <a:t>268,880 / 26,382</a:t>
                       </a:r>
                     </a:p>
                   </a:txBody>
@@ -12255,7 +12255,7 @@
                           </a:solidFill>
                           <a:latin typeface="Arial"/>
                         </a:rPr>
-                        <a:t>$0.00053</a:t>
+                        <a:t>$0.00054</a:t>
                       </a:r>
                     </a:p>
                   </a:txBody>
@@ -12278,7 +12278,7 @@
                           </a:solidFill>
                           <a:latin typeface="Arial"/>
                         </a:rPr>
-                        <a:t>$0.149</a:t>
+                        <a:t>$0.151</a:t>
                       </a:r>
                     </a:p>
                   </a:txBody>
@@ -12301,7 +12301,7 @@
                           </a:solidFill>
                           <a:latin typeface="Arial"/>
                         </a:rPr>
-                        <a:t>$0.634</a:t>
+                        <a:t>$0.600</a:t>
                       </a:r>
                     </a:p>
                   </a:txBody>
@@ -12372,7 +12372,7 @@
                           </a:solidFill>
                           <a:latin typeface="Arial"/>
                         </a:rPr>
-                        <a:t>11.1 / 11.1</a:t>
+                        <a:t>11.2 / 11.2</a:t>
                       </a:r>
                     </a:p>
                   </a:txBody>
@@ -12395,7 +12395,7 @@
                           </a:solidFill>
                           <a:latin typeface="Arial"/>
                         </a:rPr>
-                        <a:t>30.2 / 14.9</a:t>
+                        <a:t>28.0 / 13.9</a:t>
                       </a:r>
                     </a:p>
                   </a:txBody>
@@ -12420,7 +12420,7 @@
                           </a:solidFill>
                           <a:latin typeface="Arial"/>
                         </a:rPr>
-                        <a:t>median / slowest task</a:t>
+                        <a:t>median / slowest task*</a:t>
                       </a:r>
                     </a:p>
                   </a:txBody>
@@ -12443,7 +12443,7 @@
                           </a:solidFill>
                           <a:latin typeface="Arial"/>
                         </a:rPr>
-                        <a:t>2.5 s / 15 s</a:t>
+                        <a:t>5.7 s / 19 s</a:t>
                       </a:r>
                     </a:p>
                   </a:txBody>
@@ -12466,7 +12466,7 @@
                           </a:solidFill>
                           <a:latin typeface="Arial"/>
                         </a:rPr>
-                        <a:t>48 s / 75 s</a:t>
+                        <a:t>121 s / 214 s</a:t>
                       </a:r>
                     </a:p>
                   </a:txBody>
@@ -12489,7 +12489,7 @@
                           </a:solidFill>
                           <a:latin typeface="Arial"/>
                         </a:rPr>
-                        <a:t>222 s / 591 s</a:t>
+                        <a:t>298 s / 581 s</a:t>
                       </a:r>
                     </a:p>
                   </a:txBody>
@@ -12670,7 +12670,7 @@
                 </a:solidFill>
                 <a:latin typeface="Arial"/>
               </a:rPr>
-              <a:t>The rungs do not run the same model, so no cost here transfers to another one. A tau2 task is ~256× a gsm8k task's input tokens and 282× its dollars; appworld ~850× and 1,195×. Budget by benchmark, not by task count.</a:t>
+              <a:t>The rungs do not run the same model, so no cost here transfers to another one. A tau2 task is ~260× a gsm8k task's input tokens and 279× its dollars; appworld ~790× and 1,108×. *Latency on a slow gateway day: 2–3× v1.35's per call.</a:t>
             </a:r>
           </a:p>
         </p:txBody>
@@ -13197,7 +13197,7 @@
                 </a:solidFill>
                 <a:latin typeface="Arial"/>
               </a:rPr>
-              <a:t>Nondeterministic: the same 10 tasks scored 0.90 and 1.00 on two clusters</a:t>
+              <a:t>Nondeterministic: the same 10 tasks scored 0.70 and 0.90 on two clusters</a:t>
             </a:r>
           </a:p>
           <a:p>
@@ -13214,7 +13214,7 @@
                 </a:solidFill>
                 <a:latin typeface="Arial"/>
               </a:rPr>
-              <a:t>22% of wall time is the simulator, whose tokens no report of ours sees</a:t>
+              <a:t>23% of wall time is the simulator, whose tokens no report of ours sees</a:t>
             </a:r>
           </a:p>
         </p:txBody>
@@ -13292,7 +13292,7 @@
                 </a:solidFill>
                 <a:latin typeface="Arial"/>
               </a:rPr>
-              <a:t>Chores across simulated apps: ~30 LLM calls, ~15 tool calls, ~290 K input</a:t>
+              <a:t>Chores across simulated apps: ~28 LLM calls, ~14 tool calls, ~270 K input</a:t>
             </a:r>
           </a:p>
           <a:p>
@@ -13343,7 +13343,7 @@
                 </a:solidFill>
                 <a:latin typeface="Arial"/>
               </a:rPr>
-              <a:t>41 of 49 tasks call </a:t>
+              <a:t>41 of 47 tasks call </a:t>
             </a:r>
             <a:r>
               <a:rPr sz="1300" b="0" i="0">
@@ -13921,7 +13921,7 @@
                           </a:solidFill>
                           <a:latin typeface="Arial"/>
                         </a:rPr>
-                        <a:t>~30 calls, each re-sending the whole conversation</a:t>
+                        <a:t>~28 calls, each re-sending the whole conversation</a:t>
                       </a:r>
                     </a:p>
                   </a:txBody>
@@ -14843,7 +14843,7 @@
                 </a:solidFill>
                 <a:latin typeface="Arial"/>
               </a:rPr>
-              <a:t>Agents up to exgentic 0.3.5.dev131 sent a counted probe; the current one sends none (absent across all 2,338 chat spans). Never compare across it.</a:t>
+              <a:t>Agents up to exgentic 0.3.5.dev131 sent a counted probe; the current one sends none (absent across all 2,179 chat spans). Never compare across it.</a:t>
             </a:r>
           </a:p>
         </p:txBody>
@@ -15051,7 +15051,7 @@
                 </a:solidFill>
                 <a:latin typeface="Arial"/>
               </a:rPr>
-              <a:t>OUT CV &gt; IN CV in 16 of 22 multi-task legs; only appworld is input-led. Read the CV.</a:t>
+              <a:t>OUT CV &gt; IN CV in 17 of 22 multi-task legs; only appworld is input-led. Read the CV.</a:t>
             </a:r>
           </a:p>
         </p:txBody>
@@ -15303,7 +15303,7 @@
                 </a:solidFill>
                 <a:latin typeface="Arial"/>
               </a:rPr>
-              <a:t>Dollars at the rate card on the cost slides; v1.35 measured costs</a:t>
+              <a:t>Dollars at the rate card on the cost slides; v1.36 measured costs</a:t>
             </a:r>
           </a:p>
         </p:txBody>
@@ -15717,7 +15717,7 @@
                           </a:solidFill>
                           <a:latin typeface="Arial"/>
                         </a:rPr>
-                        <a:t>$1.60 / 10</a:t>
+                        <a:t>$1.62 / 10</a:t>
                       </a:r>
                     </a:p>
                   </a:txBody>
@@ -15788,7 +15788,7 @@
                           </a:solidFill>
                           <a:latin typeface="Arial"/>
                         </a:rPr>
-                        <a:t>$3.10–3.40 / 5</a:t>
+                        <a:t>$2.10–2.25 / 5</a:t>
                       </a:r>
                     </a:p>
                   </a:txBody>
@@ -15946,7 +15946,7 @@
                 </a:solidFill>
                 <a:latin typeface="Arial"/>
               </a:rPr>
-              <a:t>The eight gsm8k legs together are 0.2% of the matrix's bill on both platforms; appworld's two legs are 78% of it on OpenShift (77% on KinD). A 50-task gsm8k leg costs 2 cents, about a thirtieth of a single appworld task.</a:t>
+              <a:t>The eight gsm8k legs together are 0.2–0.3% of the matrix's bill; appworld's two legs are 75% of it on both platforms. A 50-task gsm8k leg costs 2 cents, about a thirtieth of a single appworld task.</a:t>
             </a:r>
           </a:p>
         </p:txBody>
@@ -17086,7 +17086,7 @@
                 </a:solidFill>
                 <a:latin typeface="Arial"/>
               </a:rPr>
-              <a:t>Tokens and dollars per leg, v1.35, OpenShift (OCP) and KinD</a:t>
+              <a:t>Tokens and dollars per leg, v1.36, OpenShift (OCP) and KinD</a:t>
             </a:r>
           </a:p>
         </p:txBody>
@@ -17429,7 +17429,7 @@
                           </a:solidFill>
                           <a:latin typeface="Arial"/>
                         </a:rPr>
-                        <a:t>406</a:t>
+                        <a:t>470</a:t>
                       </a:r>
                     </a:p>
                   </a:txBody>
@@ -17452,7 +17452,7 @@
                           </a:solidFill>
                           <a:latin typeface="Arial"/>
                         </a:rPr>
-                        <a:t>$0.0003</a:t>
+                        <a:t>$0.0004</a:t>
                       </a:r>
                     </a:p>
                   </a:txBody>
@@ -17500,7 +17500,7 @@
                           </a:solidFill>
                           <a:latin typeface="Arial"/>
                         </a:rPr>
-                        <a:t>5.1 K</a:t>
+                        <a:t>5.2 K</a:t>
                       </a:r>
                     </a:p>
                   </a:txBody>
@@ -17546,7 +17546,7 @@
                           </a:solidFill>
                           <a:latin typeface="Arial"/>
                         </a:rPr>
-                        <a:t>5.1 K</a:t>
+                        <a:t>4.8 K</a:t>
                       </a:r>
                     </a:p>
                   </a:txBody>
@@ -17569,7 +17569,7 @@
                           </a:solidFill>
                           <a:latin typeface="Arial"/>
                         </a:rPr>
-                        <a:t>$0.005</a:t>
+                        <a:t>$0.004</a:t>
                       </a:r>
                     </a:p>
                   </a:txBody>
@@ -17734,7 +17734,7 @@
                           </a:solidFill>
                           <a:latin typeface="Arial"/>
                         </a:rPr>
-                        <a:t>0.96 M</a:t>
+                        <a:t>0.97 M</a:t>
                       </a:r>
                     </a:p>
                   </a:txBody>
@@ -17757,7 +17757,7 @@
                           </a:solidFill>
                           <a:latin typeface="Arial"/>
                         </a:rPr>
-                        <a:t>$1.59</a:t>
+                        <a:t>$1.62</a:t>
                       </a:r>
                     </a:p>
                   </a:txBody>
@@ -17780,7 +17780,7 @@
                           </a:solidFill>
                           <a:latin typeface="Arial"/>
                         </a:rPr>
-                        <a:t>0.94 M</a:t>
+                        <a:t>0.99 M</a:t>
                       </a:r>
                     </a:p>
                   </a:txBody>
@@ -17803,7 +17803,7 @@
                           </a:solidFill>
                           <a:latin typeface="Arial"/>
                         </a:rPr>
-                        <a:t>$1.56</a:t>
+                        <a:t>$1.64</a:t>
                       </a:r>
                     </a:p>
                   </a:txBody>
@@ -17851,7 +17851,7 @@
                           </a:solidFill>
                           <a:latin typeface="Arial"/>
                         </a:rPr>
-                        <a:t>1.74 M</a:t>
+                        <a:t>1.76 M</a:t>
                       </a:r>
                     </a:p>
                   </a:txBody>
@@ -17874,7 +17874,7 @@
                           </a:solidFill>
                           <a:latin typeface="Arial"/>
                         </a:rPr>
-                        <a:t>$2.88</a:t>
+                        <a:t>$2.92</a:t>
                       </a:r>
                     </a:p>
                   </a:txBody>
@@ -17897,7 +17897,7 @@
                           </a:solidFill>
                           <a:latin typeface="Arial"/>
                         </a:rPr>
-                        <a:t>1.77 M</a:t>
+                        <a:t>1.75 M</a:t>
                       </a:r>
                     </a:p>
                   </a:txBody>
@@ -17920,7 +17920,7 @@
                           </a:solidFill>
                           <a:latin typeface="Arial"/>
                         </a:rPr>
-                        <a:t>$2.93</a:t>
+                        <a:t>$2.89</a:t>
                       </a:r>
                     </a:p>
                   </a:txBody>
@@ -17968,7 +17968,7 @@
                           </a:solidFill>
                           <a:latin typeface="Arial"/>
                         </a:rPr>
-                        <a:t>1.55 M</a:t>
+                        <a:t>1.10 M</a:t>
                       </a:r>
                     </a:p>
                   </a:txBody>
@@ -17991,7 +17991,7 @@
                           </a:solidFill>
                           <a:latin typeface="Arial"/>
                         </a:rPr>
-                        <a:t>$3.10</a:t>
+                        <a:t>$2.24</a:t>
                       </a:r>
                     </a:p>
                   </a:txBody>
@@ -18014,7 +18014,7 @@
                           </a:solidFill>
                           <a:latin typeface="Arial"/>
                         </a:rPr>
-                        <a:t>1.71 M</a:t>
+                        <a:t>1.01 M</a:t>
                       </a:r>
                     </a:p>
                   </a:txBody>
@@ -18037,7 +18037,7 @@
                           </a:solidFill>
                           <a:latin typeface="Arial"/>
                         </a:rPr>
-                        <a:t>$3.39</a:t>
+                        <a:t>$2.11</a:t>
                       </a:r>
                     </a:p>
                   </a:txBody>
@@ -18085,7 +18085,7 @@
                           </a:solidFill>
                           <a:latin typeface="Arial"/>
                         </a:rPr>
-                        <a:t>6.47 M</a:t>
+                        <a:t>5.86 M</a:t>
                       </a:r>
                     </a:p>
                   </a:txBody>
@@ -18108,7 +18108,7 @@
                           </a:solidFill>
                           <a:latin typeface="Arial"/>
                         </a:rPr>
-                        <a:t>$12.63</a:t>
+                        <a:t>$11.83</a:t>
                       </a:r>
                     </a:p>
                   </a:txBody>
@@ -18131,7 +18131,7 @@
                           </a:solidFill>
                           <a:latin typeface="Arial"/>
                         </a:rPr>
-                        <a:t>5.87 M</a:t>
+                        <a:t>5.91 M</a:t>
                       </a:r>
                     </a:p>
                   </a:txBody>
@@ -18154,7 +18154,7 @@
                           </a:solidFill>
                           <a:latin typeface="Arial"/>
                         </a:rPr>
-                        <a:t>$11.94</a:t>
+                        <a:t>$12.02</a:t>
                       </a:r>
                     </a:p>
                   </a:txBody>
@@ -18202,7 +18202,7 @@
                           </a:solidFill>
                           <a:latin typeface="Arial"/>
                         </a:rPr>
-                        <a:t>10.8 M</a:t>
+                        <a:t>9.7 M</a:t>
                       </a:r>
                     </a:p>
                   </a:txBody>
@@ -18225,7 +18225,7 @@
                           </a:solidFill>
                           <a:latin typeface="Arial"/>
                         </a:rPr>
-                        <a:t>$20.25</a:t>
+                        <a:t>$18.67</a:t>
                       </a:r>
                     </a:p>
                   </a:txBody>
@@ -18248,7 +18248,7 @@
                           </a:solidFill>
                           <a:latin typeface="Arial"/>
                         </a:rPr>
-                        <a:t>10.3 M</a:t>
+                        <a:t>9.7 M</a:t>
                       </a:r>
                     </a:p>
                   </a:txBody>
@@ -18271,7 +18271,7 @@
                           </a:solidFill>
                           <a:latin typeface="Arial"/>
                         </a:rPr>
-                        <a:t>$19.87</a:t>
+                        <a:t>$18.70</a:t>
                       </a:r>
                     </a:p>
                   </a:txBody>
@@ -18342,7 +18342,7 @@
                 </a:solidFill>
                 <a:latin typeface="Arial"/>
               </a:rPr>
-              <a:t>Within 2%, but not by law</a:t>
+              <a:t>Within 0.2%, but not by law</a:t>
             </a:r>
           </a:p>
           <a:p>
@@ -18358,7 +18358,7 @@
                 </a:solidFill>
                 <a:latin typeface="Arial"/>
               </a:rPr>
-              <a:t>The totals land within 2% ($20.25 / $19.87): the same request bodies through one gateway. appworld turn counts are nondeterministic, so size it on your cluster.</a:t>
+              <a:t>The totals land within 0.2% ($18.67 / $18.70): the same request bodies through one gateway. appworld turn counts are nondeterministic, so size it on your cluster.</a:t>
             </a:r>
           </a:p>
         </p:txBody>
@@ -19016,7 +19016,7 @@
                           </a:solidFill>
                           <a:latin typeface="Arial"/>
                         </a:rPr>
-                        <a:t>11.10</a:t>
+                        <a:t>11.18</a:t>
                       </a:r>
                     </a:p>
                   </a:txBody>
@@ -19039,7 +19039,7 @@
                           </a:solidFill>
                           <a:latin typeface="Arial"/>
                         </a:rPr>
-                        <a:t>30.22</a:t>
+                        <a:t>28.02</a:t>
                       </a:r>
                     </a:p>
                   </a:txBody>
@@ -19087,7 +19087,7 @@
                           </a:solidFill>
                           <a:latin typeface="Arial"/>
                         </a:rPr>
-                        <a:t>513</a:t>
+                        <a:t>519</a:t>
                       </a:r>
                     </a:p>
                   </a:txBody>
@@ -19110,7 +19110,7 @@
                           </a:solidFill>
                           <a:latin typeface="Arial"/>
                         </a:rPr>
-                        <a:t>90,006</a:t>
+                        <a:t>91,201</a:t>
                       </a:r>
                     </a:p>
                   </a:txBody>
@@ -19133,7 +19133,7 @@
                           </a:solidFill>
                           <a:latin typeface="Arial"/>
                         </a:rPr>
-                        <a:t>318,459</a:t>
+                        <a:t>295,261</a:t>
                       </a:r>
                     </a:p>
                   </a:txBody>
@@ -19204,7 +19204,7 @@
                           </a:solidFill>
                           <a:latin typeface="Arial"/>
                         </a:rPr>
-                        <a:t>175×</a:t>
+                        <a:t>176×</a:t>
                       </a:r>
                     </a:p>
                   </a:txBody>
@@ -19227,7 +19227,7 @@
                           </a:solidFill>
                           <a:latin typeface="Arial"/>
                         </a:rPr>
-                        <a:t>621×</a:t>
+                        <a:t>569×</a:t>
                       </a:r>
                     </a:p>
                   </a:txBody>
@@ -19275,7 +19275,7 @@
                           </a:solidFill>
                           <a:latin typeface="Arial"/>
                         </a:rPr>
-                        <a:t>$0.00053</a:t>
+                        <a:t>$0.00054</a:t>
                       </a:r>
                     </a:p>
                   </a:txBody>
@@ -19298,7 +19298,7 @@
                           </a:solidFill>
                           <a:latin typeface="Arial"/>
                         </a:rPr>
-                        <a:t>$0.149</a:t>
+                        <a:t>$0.151</a:t>
                       </a:r>
                     </a:p>
                   </a:txBody>
@@ -19321,7 +19321,7 @@
                           </a:solidFill>
                           <a:latin typeface="Arial"/>
                         </a:rPr>
-                        <a:t>$0.634</a:t>
+                        <a:t>$0.600</a:t>
                       </a:r>
                     </a:p>
                   </a:txBody>
@@ -19392,7 +19392,7 @@
                           </a:solidFill>
                           <a:latin typeface="Arial"/>
                         </a:rPr>
-                        <a:t>282×</a:t>
+                        <a:t>279×</a:t>
                       </a:r>
                     </a:p>
                   </a:txBody>
@@ -19415,7 +19415,7 @@
                           </a:solidFill>
                           <a:latin typeface="Arial"/>
                         </a:rPr>
-                        <a:t>1,195×</a:t>
+                        <a:t>1,108×</a:t>
                       </a:r>
                     </a:p>
                   </a:txBody>
@@ -19486,7 +19486,7 @@
                           </a:solidFill>
                           <a:latin typeface="Arial"/>
                         </a:rPr>
-                        <a:t>$14.94</a:t>
+                        <a:t>$15.13</a:t>
                       </a:r>
                     </a:p>
                   </a:txBody>
@@ -19509,7 +19509,7 @@
                           </a:solidFill>
                           <a:latin typeface="Arial"/>
                         </a:rPr>
-                        <a:t>$63.39</a:t>
+                        <a:t>$59.99</a:t>
                       </a:r>
                     </a:p>
                   </a:txBody>
@@ -19557,7 +19557,7 @@
                           </a:solidFill>
                           <a:latin typeface="Arial"/>
                         </a:rPr>
-                        <a:t>67%</a:t>
+                        <a:t>66%</a:t>
                       </a:r>
                     </a:p>
                   </a:txBody>
@@ -19603,7 +19603,7 @@
                           </a:solidFill>
                           <a:latin typeface="Arial"/>
                         </a:rPr>
-                        <a:t>92%</a:t>
+                        <a:t>91%</a:t>
                       </a:r>
                     </a:p>
                   </a:txBody>
@@ -19651,7 +19651,7 @@
                           </a:solidFill>
                           <a:latin typeface="Arial"/>
                         </a:rPr>
-                        <a:t>32%</a:t>
+                        <a:t>31%</a:t>
                       </a:r>
                     </a:p>
                   </a:txBody>
@@ -19674,7 +19674,7 @@
                           </a:solidFill>
                           <a:latin typeface="Arial"/>
                         </a:rPr>
-                        <a:t>89%</a:t>
+                        <a:t>90%</a:t>
                       </a:r>
                     </a:p>
                   </a:txBody>
@@ -19697,7 +19697,7 @@
                           </a:solidFill>
                           <a:latin typeface="Arial"/>
                         </a:rPr>
-                        <a:t>57%</a:t>
+                        <a:t>56%</a:t>
                       </a:r>
                     </a:p>
                   </a:txBody>
@@ -19745,7 +19745,7 @@
                           </a:solidFill>
                           <a:latin typeface="Arial"/>
                         </a:rPr>
-                        <a:t>82%</a:t>
+                        <a:t>77%</a:t>
                       </a:r>
                     </a:p>
                   </a:txBody>
@@ -19768,7 +19768,7 @@
                           </a:solidFill>
                           <a:latin typeface="Arial"/>
                         </a:rPr>
-                        <a:t>60%</a:t>
+                        <a:t>64%</a:t>
                       </a:r>
                     </a:p>
                   </a:txBody>
@@ -19955,7 +19955,7 @@
                 </a:solidFill>
                 <a:latin typeface="Arial"/>
               </a:rPr>
-              <a:t>The harder benchmarks also run the dearer models: tau2 is 175× a gsm8k task in tokens but 282× in dollars, appworld 621× but 1,195×. A budget scaled off the token ratios is short by 1.6–1.9×.</a:t>
+              <a:t>The harder benchmarks also run the dearer models: tau2 is 176× a gsm8k task in tokens but 279× in dollars, appworld 569× but 1,108×. A budget scaled off the token ratios is short by 1.6–1.9×.</a:t>
             </a:r>
           </a:p>
         </p:txBody>
@@ -21414,7 +21414,7 @@
                 </a:solidFill>
                 <a:latin typeface="Arial"/>
               </a:rPr>
-              <a:t>≥ $0.00111 per call: 2.6× the whole gsm8k task it authorizes</a:t>
+              <a:t>≥ $0.00111 per call: 2.5× the whole gsm8k task it authorizes</a:t>
             </a:r>
           </a:p>
           <a:p>
@@ -21431,7 +21431,7 @@
                 </a:solidFill>
                 <a:latin typeface="Arial"/>
               </a:rPr>
-              <a:t>1.7–3.4× the agent's own bill on legs #6–#8</a:t>
+              <a:t>1.2–2.9× the agent's own bill on legs #6–#8</a:t>
             </a:r>
           </a:p>
           <a:p>
@@ -21569,7 +21569,7 @@
                 </a:solidFill>
                 <a:latin typeface="Arial"/>
               </a:rPr>
-              <a:t>if cached input were free: tau2 floors at $0.0157 a task (not $0.149), appworld at $0.270 (not $0.634)</a:t>
+              <a:t>if cached input were free: tau2 floors at $0.0158 a task (not $0.151), appworld at $0.264 (not $0.600)</a:t>
             </a:r>
           </a:p>
           <a:p>
@@ -21725,7 +21725,7 @@
                 </a:solidFill>
                 <a:latin typeface="Arial"/>
               </a:rPr>
-              <a:t>Multiple of one gsm8k task on gpt-5-mini per task; v1.35, both platforms pooled</a:t>
+              <a:t>Multiple of one gsm8k task on gpt-5-mini per task; v1.36, both platforms pooled</a:t>
             </a:r>
           </a:p>
         </p:txBody>
@@ -21895,7 +21895,7 @@
                 </a:solidFill>
                 <a:latin typeface="Arial"/>
               </a:rPr>
-              <a:t>Money climbs the difficulty ladder faster than tokens do: tau2 is 175× a gsm8k task in tokens but 282× in dollars, appworld is 621× a gsm8k task in tokens but 1,195× in dollars — so a budget scaled off the token ratios is short by 1.6–1.9×.</a:t>
+              <a:t>Money climbs the difficulty ladder faster than tokens do: tau2 is 176× a gsm8k task in tokens but 279× in dollars, appworld is 569× a gsm8k task in tokens but 1,108× in dollars — so a budget scaled off the token ratios is short by 1.6–1.9×.</a:t>
             </a:r>
           </a:p>
         </p:txBody>
@@ -22204,7 +22204,7 @@
                 </a:solidFill>
                 <a:latin typeface="Arial"/>
               </a:rPr>
-              <a:t>Output is priced 4–8× input on every model we use, so the token split misstates the bill every time: gsm8k on gpt-5-mini is 64% input by tokens and only 18% by cost.</a:t>
+              <a:t>Output is priced 4–8× input on every model we use, so the token split misstates the bill every time: gsm8k on gpt-5-mini is 63% input by tokens and only 18% by cost.</a:t>
             </a:r>
           </a:p>
         </p:txBody>
@@ -22610,7 +22610,7 @@
                           </a:solidFill>
                           <a:latin typeface="Arial"/>
                         </a:rPr>
-                        <a:t>$0.00046</a:t>
+                        <a:t>$0.00051</a:t>
                       </a:r>
                     </a:p>
                   </a:txBody>
@@ -22633,7 +22633,7 @@
                           </a:solidFill>
                           <a:latin typeface="Arial"/>
                         </a:rPr>
-                        <a:t>$0.00212</a:t>
+                        <a:t>$0.00206</a:t>
                       </a:r>
                     </a:p>
                   </a:txBody>
@@ -22704,7 +22704,7 @@
                           </a:solidFill>
                           <a:latin typeface="Arial"/>
                         </a:rPr>
-                        <a:t>808</a:t>
+                        <a:t>794</a:t>
                       </a:r>
                     </a:p>
                   </a:txBody>
@@ -22752,7 +22752,7 @@
                           </a:solidFill>
                           <a:latin typeface="Arial"/>
                         </a:rPr>
-                        <a:t>192</a:t>
+                        <a:t>216</a:t>
                       </a:r>
                     </a:p>
                   </a:txBody>
@@ -22775,7 +22775,7 @@
                           </a:solidFill>
                           <a:latin typeface="Arial"/>
                         </a:rPr>
-                        <a:t>63</a:t>
+                        <a:t>59</a:t>
                       </a:r>
                     </a:p>
                   </a:txBody>
@@ -22823,7 +22823,7 @@
                           </a:solidFill>
                           <a:latin typeface="Arial"/>
                         </a:rPr>
-                        <a:t>0.95</a:t>
+                        <a:t>0.97</a:t>
                       </a:r>
                     </a:p>
                   </a:txBody>
@@ -22895,7 +22895,7 @@
                 </a:solidFill>
                 <a:latin typeface="Arial"/>
               </a:rPr>
-              <a:t>4.6×</a:t>
+              <a:t>4.0×</a:t>
             </a:r>
             <a:r>
               <a:rPr sz="1300" b="0" i="0">
@@ -22943,7 +22943,7 @@
                 </a:solidFill>
                 <a:latin typeface="Arial"/>
               </a:rPr>
-              <a:t>gpt-4.1 costs 4.6× gpt-5-mini on the identical 5 gsm8k tasks, and the input side decides it alone: 21× the input bill, against an output bill the two models split within 24%.</a:t>
+              <a:t>gpt-4.1 costs 4.0× gpt-5-mini on the identical 5 gsm8k tasks, and the input side decides it alone: 20× the input bill, against an output bill the two models split within 9%.</a:t>
             </a:r>
           </a:p>
         </p:txBody>
@@ -23082,7 +23082,7 @@
                 </a:solidFill>
                 <a:latin typeface="Arial"/>
               </a:rPr>
-              <a:t>Dollars per leg, OpenShift v1.35: $20.25 for all twelve, the top two 78% of it</a:t>
+              <a:t>Dollars per leg, OpenShift v1.36: $18.67 for all twelve, the top two 79% of it</a:t>
             </a:r>
           </a:p>
         </p:txBody>
@@ -23252,7 +23252,7 @@
                 </a:solidFill>
                 <a:latin typeface="Arial"/>
               </a:rPr>
-              <a:t>Two of the twelve legs are 78% of a matrix's bill, while all 8 gsm8k legs together are 0.2% of it — so budget by benchmark, not by task count.</a:t>
+              <a:t>Two of the twelve legs are 79% of a matrix's bill, while all 8 gsm8k legs together are 0.3% of it — so budget by benchmark, not by task count.</a:t>
             </a:r>
           </a:p>
         </p:txBody>
@@ -23664,7 +23664,7 @@
                           </a:solidFill>
                           <a:latin typeface="Arial"/>
                         </a:rPr>
-                        <a:t>$0.00053</a:t>
+                        <a:t>$0.00054</a:t>
                       </a:r>
                     </a:p>
                   </a:txBody>
@@ -23710,7 +23710,7 @@
                           </a:solidFill>
                           <a:latin typeface="Arial"/>
                         </a:rPr>
-                        <a:t>$0.00054</a:t>
+                        <a:t>$0.00055</a:t>
                       </a:r>
                     </a:p>
                   </a:txBody>
@@ -23758,7 +23758,7 @@
                           </a:solidFill>
                           <a:latin typeface="Arial"/>
                         </a:rPr>
-                        <a:t>$0.14940</a:t>
+                        <a:t>$0.15126</a:t>
                       </a:r>
                     </a:p>
                   </a:txBody>
@@ -23781,7 +23781,7 @@
                           </a:solidFill>
                           <a:latin typeface="Arial"/>
                         </a:rPr>
-                        <a:t>0.90</a:t>
+                        <a:t>0.83</a:t>
                       </a:r>
                     </a:p>
                   </a:txBody>
@@ -23804,7 +23804,7 @@
                           </a:solidFill>
                           <a:latin typeface="Arial"/>
                         </a:rPr>
-                        <a:t>$0.16600</a:t>
+                        <a:t>$0.18151</a:t>
                       </a:r>
                     </a:p>
                   </a:txBody>
@@ -23852,7 +23852,7 @@
                           </a:solidFill>
                           <a:latin typeface="Arial"/>
                         </a:rPr>
-                        <a:t>$0.63389</a:t>
+                        <a:t>$0.59992</a:t>
                       </a:r>
                     </a:p>
                   </a:txBody>
@@ -24024,7 +24024,7 @@
                 </a:solidFill>
                 <a:latin typeface="Arial"/>
               </a:rPr>
-              <a:t>Dividing by the pass rate is what turns a token count into an efficiency figure: gsm8k $0.00053 per task becomes $0.00054 per PASS; tau2 $0.1494 per task becomes $0.1660 per PASS — and appworld has no finite cost per success at all, because it passed nothing.</a:t>
+              <a:t>Dividing by the pass rate is what turns a token count into an efficiency figure: gsm8k $0.00054 per task becomes $0.00055 per PASS; tau2 $0.1513 per task becomes $0.1815 per PASS — and appworld has no finite cost per success at all, because it passed nothing.</a:t>
             </a:r>
           </a:p>
         </p:txBody>
@@ -24333,7 +24333,7 @@
                 </a:solidFill>
                 <a:latin typeface="Arial"/>
               </a:rPr>
-              <a:t>One IBAC judge completion costs at least $0.00111 — 2.6× the entire gsm8k task on gpt-5-mini it is authorizing — so across legs #6/#7/#8 the judge bills 1.7–3.4× what the agent does.</a:t>
+              <a:t>One IBAC judge completion costs at least $0.00111 — 2.5× the entire gsm8k task on gpt-5-mini it is authorizing — so across legs #6/#7/#8 the judge bills 1.2–2.9× what the agent does.</a:t>
             </a:r>
           </a:p>
         </p:txBody>
@@ -26689,7 +26689,7 @@
                 </a:solidFill>
                 <a:latin typeface="Arial"/>
               </a:rPr>
-              <a:t>AutoBench · architecture &amp; design · 6  Results (v1.35)</a:t>
+              <a:t>AutoBench · architecture &amp; design · 6  Results (v1.36)</a:t>
             </a:r>
           </a:p>
         </p:txBody>
@@ -28717,7 +28717,7 @@
                 </a:solidFill>
                 <a:latin typeface="Arial"/>
               </a:rPr>
-              <a:t>AutoBench · architecture &amp; design · 6  Results (v1.35)</a:t>
+              <a:t>AutoBench · architecture &amp; design · 6  Results (v1.36)</a:t>
             </a:r>
           </a:p>
         </p:txBody>
@@ -28986,7 +28986,7 @@
                           </a:solidFill>
                           <a:latin typeface="Arial"/>
                         </a:rPr>
-                        <a:t>the one clean model comparison: 4.6× the cost of gpt-5-mini for no pass-rate gain</a:t>
+                        <a:t>the one clean model comparison: 4.0× the cost of gpt-5-mini for no pass-rate gain</a:t>
                       </a:r>
                     </a:p>
                   </a:txBody>
@@ -29128,7 +29128,7 @@
                           </a:solidFill>
                           <a:latin typeface="Arial"/>
                         </a:rPr>
-                        <a:t>multi-turn works end to end; pass rates carry information (0.85–1.00)</a:t>
+                        <a:t>multi-turn works end to end; pass rates carry information (0.70–0.90)</a:t>
                       </a:r>
                     </a:p>
                   </a:txBody>
@@ -29199,7 +29199,7 @@
                           </a:solidFill>
                           <a:latin typeface="Arial"/>
                         </a:rPr>
-                        <a:t>the limits are upstream: 0.00, the only timeout, ~77% of the bill in two legs</a:t>
+                        <a:t>the limits are upstream: 0.00, all three timeouts, ~75% of the bill in two legs</a:t>
                       </a:r>
                     </a:p>
                   </a:txBody>
@@ -29286,7 +29286,7 @@
                 </a:solidFill>
                 <a:latin typeface="Arial"/>
               </a:rPr>
-              <a:t>That the same 12 request bodies measure comparably on two unlike clusters: 0 of 281 rows lost their usage, nothing lost to infrastructure, 8 of 12 pass rates identical.</a:t>
+              <a:t>That the same 12 request bodies measure comparably on two unlike clusters: 0 of 279 rows lost their usage, nothing lost to infrastructure, 9 of 12 pass rates identical.</a:t>
             </a:r>
           </a:p>
         </p:txBody>
@@ -29363,7 +29363,7 @@
                 </a:solidFill>
                 <a:latin typeface="Arial"/>
               </a:rPr>
-              <a:t>A socket loss and a wrong answer share a denominator. OCP/KinD: timeout 0/1, agent defect 4/4, wrong answer 1/1. Latency travels only approximately (up to 1.7×).</a:t>
+              <a:t>A socket loss and a wrong answer share a denominator. OCP/KinD: timeout 1/2, agent defect 3/2, wrong answer 1/0. Latency travels only approximately (up to 1.8×).</a:t>
             </a:r>
           </a:p>
         </p:txBody>
@@ -29502,7 +29502,7 @@
                 </a:solidFill>
                 <a:latin typeface="Arial"/>
               </a:rPr>
-              <a:t>v1.35 on OpenShift (ykt3): 141 tasks, all 12 legs succeeded</a:t>
+              <a:t>v1.36 on OpenShift (ykt3): 141 tasks, all 12 legs succeeded</a:t>
             </a:r>
           </a:p>
         </p:txBody>
@@ -29576,7 +29576,7 @@
                 </a:solidFill>
                 <a:latin typeface="Arial"/>
               </a:rPr>
-              <a:t>AutoBench · architecture &amp; design · 6  Results (v1.35)</a:t>
+              <a:t>AutoBench · architecture &amp; design · 6  Results (v1.36)</a:t>
             </a:r>
           </a:p>
         </p:txBody>
@@ -29892,7 +29892,7 @@
                           </a:solidFill>
                           <a:latin typeface="Arial"/>
                         </a:rPr>
-                        <a:t>4 s</a:t>
+                        <a:t>7 s</a:t>
                       </a:r>
                     </a:p>
                   </a:txBody>
@@ -30032,7 +30032,7 @@
                           </a:solidFill>
                           <a:latin typeface="Arial"/>
                         </a:rPr>
-                        <a:t>29 s</a:t>
+                        <a:t>64 s</a:t>
                       </a:r>
                     </a:p>
                   </a:txBody>
@@ -30172,7 +30172,7 @@
                           </a:solidFill>
                           <a:latin typeface="Arial"/>
                         </a:rPr>
-                        <a:t>34 s</a:t>
+                        <a:t>80 s</a:t>
                       </a:r>
                     </a:p>
                   </a:txBody>
@@ -30312,7 +30312,7 @@
                           </a:solidFill>
                           <a:latin typeface="Arial"/>
                         </a:rPr>
-                        <a:t>9 s</a:t>
+                        <a:t>21 s</a:t>
                       </a:r>
                     </a:p>
                   </a:txBody>
@@ -30335,7 +30335,7 @@
                           </a:solidFill>
                           <a:latin typeface="Arial"/>
                         </a:rPr>
-                        <a:t>3,908</a:t>
+                        <a:t>4,404</a:t>
                       </a:r>
                     </a:p>
                   </a:txBody>
@@ -30452,7 +30452,7 @@
                           </a:solidFill>
                           <a:latin typeface="Arial"/>
                         </a:rPr>
-                        <a:t>6 s</a:t>
+                        <a:t>9 s</a:t>
                       </a:r>
                     </a:p>
                   </a:txBody>
@@ -30592,7 +30592,7 @@
                           </a:solidFill>
                           <a:latin typeface="Arial"/>
                         </a:rPr>
-                        <a:t>6 s</a:t>
+                        <a:t>16 s</a:t>
                       </a:r>
                     </a:p>
                   </a:txBody>
@@ -30732,7 +30732,7 @@
                           </a:solidFill>
                           <a:latin typeface="Arial"/>
                         </a:rPr>
-                        <a:t>9 s</a:t>
+                        <a:t>16 s</a:t>
                       </a:r>
                     </a:p>
                   </a:txBody>
@@ -30872,7 +30872,7 @@
                           </a:solidFill>
                           <a:latin typeface="Arial"/>
                         </a:rPr>
-                        <a:t>7 s</a:t>
+                        <a:t>14 s</a:t>
                       </a:r>
                     </a:p>
                   </a:txBody>
@@ -30966,7 +30966,7 @@
                           </a:solidFill>
                           <a:latin typeface="Arial"/>
                         </a:rPr>
-                        <a:t>0.90</a:t>
+                        <a:t>0.70</a:t>
                       </a:r>
                     </a:p>
                   </a:txBody>
@@ -31012,7 +31012,7 @@
                           </a:solidFill>
                           <a:latin typeface="Arial"/>
                         </a:rPr>
-                        <a:t>511 s</a:t>
+                        <a:t>933 s</a:t>
                       </a:r>
                     </a:p>
                   </a:txBody>
@@ -31035,7 +31035,7 @@
                           </a:solidFill>
                           <a:latin typeface="Arial"/>
                         </a:rPr>
-                        <a:t>936,612</a:t>
+                        <a:t>950,408</a:t>
                       </a:r>
                     </a:p>
                   </a:txBody>
@@ -31152,7 +31152,7 @@
                           </a:solidFill>
                           <a:latin typeface="Arial"/>
                         </a:rPr>
-                        <a:t>282 s</a:t>
+                        <a:t>765 s</a:t>
                       </a:r>
                     </a:p>
                   </a:txBody>
@@ -31175,7 +31175,7 @@
                           </a:solidFill>
                           <a:latin typeface="Arial"/>
                         </a:rPr>
-                        <a:t>1,695,959</a:t>
+                        <a:t>1,722,097</a:t>
                       </a:r>
                     </a:p>
                   </a:txBody>
@@ -31292,7 +31292,7 @@
                           </a:solidFill>
                           <a:latin typeface="Arial"/>
                         </a:rPr>
-                        <a:t>1,284 s</a:t>
+                        <a:t>2,280 s</a:t>
                       </a:r>
                     </a:p>
                   </a:txBody>
@@ -31315,7 +31315,7 @@
                           </a:solidFill>
                           <a:latin typeface="Arial"/>
                         </a:rPr>
-                        <a:t>1,420,531</a:t>
+                        <a:t>998,804</a:t>
                       </a:r>
                     </a:p>
                   </a:txBody>
@@ -31432,7 +31432,7 @@
                           </a:solidFill>
                           <a:latin typeface="Arial"/>
                         </a:rPr>
-                        <a:t>1,402 s</a:t>
+                        <a:t>1,513 s</a:t>
                       </a:r>
                     </a:p>
                   </a:txBody>
@@ -31455,7 +31455,7 @@
                           </a:solidFill>
                           <a:latin typeface="Arial"/>
                         </a:rPr>
-                        <a:t>5,949,228</a:t>
+                        <a:t>5,349,737</a:t>
                       </a:r>
                     </a:p>
                   </a:txBody>
@@ -31619,7 +31619,7 @@
                 </a:solidFill>
                 <a:latin typeface="Arial"/>
               </a:rPr>
-              <a:t>0.90 and 0.90 here, 1.00 and 0.85 on KinD: at n=10 one task is worth 0.10.</a:t>
+              <a:t>0.70 and 0.90 here, 0.90 and 0.80 on KinD: at n=10 one task is worth 0.10.</a:t>
             </a:r>
           </a:p>
         </p:txBody>
@@ -31696,7 +31696,7 @@
                 </a:solidFill>
                 <a:latin typeface="Arial"/>
               </a:rPr>
-              <a:t>Runs complete and tokens record; all 4 errors are the agent's own defect.</a:t>
+              <a:t>Runs complete and tokens record; of its 4 errors, 3 are the agent's own defect, 1 the 600 s budget.</a:t>
             </a:r>
           </a:p>
         </p:txBody>
@@ -31773,7 +31773,7 @@
                 </a:solidFill>
                 <a:latin typeface="Arial"/>
               </a:rPr>
-              <a:t>v1.35 caps an agent LLM call at 120 s, so a stalled call is cut and retried.</a:t>
+              <a:t>An agent LLM call is capped at 120 s (since v1.35), so a stalled call is cut and retried.</a:t>
             </a:r>
           </a:p>
         </p:txBody>
@@ -31834,7 +31834,7 @@
                 </a:solidFill>
                 <a:latin typeface="Arial"/>
               </a:rPr>
-              <a:t>10.0 M input, 728 K output tokens</a:t>
+              <a:t>9.1 M input, 693 K output tokens</a:t>
             </a:r>
           </a:p>
           <a:p>
@@ -31850,7 +31850,7 @@
                 </a:solidFill>
                 <a:latin typeface="Arial"/>
               </a:rPr>
-              <a:t>over 3,583 s of run time; appworld is 73% of the input on 25 of 141 rows.</a:t>
+              <a:t>over 5,717 s of run time; appworld is 70% of the input on 24 of 140 rows.</a:t>
             </a:r>
           </a:p>
         </p:txBody>
@@ -32063,7 +32063,7 @@
                 </a:solidFill>
                 <a:latin typeface="Arial"/>
               </a:rPr>
-              <a:t>AutoBench · architecture &amp; design · 6  Results (v1.35)</a:t>
+              <a:t>AutoBench · architecture &amp; design · 6  Results (v1.36)</a:t>
             </a:r>
           </a:p>
         </p:txBody>
@@ -32799,7 +32799,7 @@
                           </a:solidFill>
                           <a:latin typeface="Arial"/>
                         </a:rPr>
-                        <a:t>3,908</a:t>
+                        <a:t>4,404</a:t>
                       </a:r>
                     </a:p>
                   </a:txBody>
@@ -32822,7 +32822,7 @@
                           </a:solidFill>
                           <a:latin typeface="Arial"/>
                         </a:rPr>
-                        <a:t>4,177</a:t>
+                        <a:t>3,536</a:t>
                       </a:r>
                     </a:p>
                   </a:txBody>
@@ -33056,7 +33056,7 @@
                           </a:solidFill>
                           <a:latin typeface="Arial"/>
                         </a:rPr>
-                        <a:t>0.80</a:t>
+                        <a:t>1.00</a:t>
                       </a:r>
                     </a:p>
                   </a:txBody>
@@ -33453,6 +33453,29 @@
                           </a:solidFill>
                           <a:latin typeface="Arial"/>
                         </a:rPr>
+                        <a:t>0.70</a:t>
+                      </a:r>
+                    </a:p>
+                  </a:txBody>
+                  <a:tcPr marL="54864" marR="54864" marT="18288" marB="18288" anchor="ctr">
+                    <a:solidFill>
+                      <a:srgbClr val="FFFFFF"/>
+                    </a:solidFill>
+                  </a:tcPr>
+                </a:tc>
+                <a:tc>
+                  <a:txBody>
+                    <a:bodyPr wrap="square"/>
+                    <a:lstStyle/>
+                    <a:p>
+                      <a:pPr algn="r"/>
+                      <a:r>
+                        <a:rPr sz="1200" b="0" i="0">
+                          <a:solidFill>
+                            <a:srgbClr val="1F2A44"/>
+                          </a:solidFill>
+                          <a:latin typeface="Arial"/>
+                        </a:rPr>
                         <a:t>0.90</a:t>
                       </a:r>
                     </a:p>
@@ -33476,7 +33499,7 @@
                           </a:solidFill>
                           <a:latin typeface="Arial"/>
                         </a:rPr>
-                        <a:t>1.00</a:t>
+                        <a:t>950,408</a:t>
                       </a:r>
                     </a:p>
                   </a:txBody>
@@ -33499,30 +33522,7 @@
                           </a:solidFill>
                           <a:latin typeface="Arial"/>
                         </a:rPr>
-                        <a:t>936,612</a:t>
-                      </a:r>
-                    </a:p>
-                  </a:txBody>
-                  <a:tcPr marL="54864" marR="54864" marT="18288" marB="18288" anchor="ctr">
-                    <a:solidFill>
-                      <a:srgbClr val="FFFFFF"/>
-                    </a:solidFill>
-                  </a:tcPr>
-                </a:tc>
-                <a:tc>
-                  <a:txBody>
-                    <a:bodyPr wrap="square"/>
-                    <a:lstStyle/>
-                    <a:p>
-                      <a:pPr algn="r"/>
-                      <a:r>
-                        <a:rPr sz="1200" b="0" i="0">
-                          <a:solidFill>
-                            <a:srgbClr val="1F2A44"/>
-                          </a:solidFill>
-                          <a:latin typeface="Arial"/>
-                        </a:rPr>
-                        <a:t>916,576</a:t>
+                        <a:t>965,083</a:t>
                       </a:r>
                     </a:p>
                   </a:txBody>
@@ -33616,7 +33616,7 @@
                           </a:solidFill>
                           <a:latin typeface="Arial"/>
                         </a:rPr>
-                        <a:t>0.85</a:t>
+                        <a:t>0.80</a:t>
                       </a:r>
                     </a:p>
                   </a:txBody>
@@ -33639,7 +33639,7 @@
                           </a:solidFill>
                           <a:latin typeface="Arial"/>
                         </a:rPr>
-                        <a:t>1,695,959</a:t>
+                        <a:t>1,722,097</a:t>
                       </a:r>
                     </a:p>
                   </a:txBody>
@@ -33662,7 +33662,7 @@
                           </a:solidFill>
                           <a:latin typeface="Arial"/>
                         </a:rPr>
-                        <a:t>1,726,957</a:t>
+                        <a:t>1,709,751</a:t>
                       </a:r>
                     </a:p>
                   </a:txBody>
@@ -33779,7 +33779,7 @@
                           </a:solidFill>
                           <a:latin typeface="Arial"/>
                         </a:rPr>
-                        <a:t>1,420,531</a:t>
+                        <a:t>998,804</a:t>
                       </a:r>
                     </a:p>
                   </a:txBody>
@@ -33802,7 +33802,7 @@
                           </a:solidFill>
                           <a:latin typeface="Arial"/>
                         </a:rPr>
-                        <a:t>1,564,276</a:t>
+                        <a:t>911,103</a:t>
                       </a:r>
                     </a:p>
                   </a:txBody>
@@ -33919,7 +33919,7 @@
                           </a:solidFill>
                           <a:latin typeface="Arial"/>
                         </a:rPr>
-                        <a:t>5,949,228</a:t>
+                        <a:t>5,349,737</a:t>
                       </a:r>
                     </a:p>
                   </a:txBody>
@@ -33942,7 +33942,7 @@
                           </a:solidFill>
                           <a:latin typeface="Arial"/>
                         </a:rPr>
-                        <a:t>5,349,900</a:t>
+                        <a:t>5,377,703</a:t>
                       </a:r>
                     </a:p>
                   </a:txBody>
@@ -34013,7 +34013,7 @@
                 </a:solidFill>
                 <a:latin typeface="Arial"/>
               </a:rPr>
-              <a:t>8 of 12 pass rates identical</a:t>
+              <a:t>9 of 12 pass rates identical</a:t>
             </a:r>
           </a:p>
           <a:p>
@@ -34029,7 +34029,7 @@
                 </a:solidFill>
                 <a:latin typeface="Arial"/>
               </a:rPr>
-              <a:t>Each delta is one task; wrong answers 1 to 1, agent defects 4 to 4.</a:t>
+              <a:t>Each delta is one task; wrong answers 1 to 0, agent defects 3 to 2.</a:t>
             </a:r>
           </a:p>
         </p:txBody>
@@ -34167,7 +34167,7 @@
                 </a:solidFill>
                 <a:latin typeface="Arial"/>
               </a:rPr>
-              <a:t>#6 and #7 differ in pass, not work</a:t>
+              <a:t>#7 differs in pass, not work</a:t>
             </a:r>
           </a:p>
           <a:p>
@@ -34244,7 +34244,7 @@
                 </a:solidFill>
                 <a:latin typeface="Arial"/>
               </a:rPr>
-              <a:t>Wall time within 6%</a:t>
+              <a:t>Wall time within 11%</a:t>
             </a:r>
           </a:p>
           <a:p>
@@ -34260,7 +34260,7 @@
                 </a:solidFill>
                 <a:latin typeface="Arial"/>
               </a:rPr>
-              <a:t>3,583 s against 3,791 s; the long legs stay within 15%.</a:t>
+              <a:t>5,717 s against 5,165 s; the long legs stay within 40%.</a:t>
             </a:r>
           </a:p>
         </p:txBody>
@@ -34337,7 +34337,7 @@
                 </a:solidFill>
                 <a:latin typeface="Arial"/>
               </a:rPr>
-              <a:t>141 rows against 140: a KinD appworld task timed out before its row was written.</a:t>
+              <a:t>140 rows against 139: KinD's appworld lost one more task to the 600 s budget before its row was written.</a:t>
             </a:r>
           </a:p>
         </p:txBody>
@@ -34550,7 +34550,7 @@
                 </a:solidFill>
                 <a:latin typeface="Arial"/>
               </a:rPr>
-              <a:t>AutoBench · architecture &amp; design · 6  Results (v1.35)</a:t>
+              <a:t>AutoBench · architecture &amp; design · 6  Results (v1.36)</a:t>
             </a:r>
           </a:p>
         </p:txBody>
@@ -36194,7 +36194,7 @@
                 </a:solidFill>
                 <a:latin typeface="Arial"/>
               </a:rPr>
-              <a:t>AutoBench · architecture &amp; design · 6  Results (v1.35)</a:t>
+              <a:t>AutoBench · architecture &amp; design · 6  Results (v1.36)</a:t>
             </a:r>
           </a:p>
         </p:txBody>
@@ -38091,7 +38091,7 @@
                 </a:solidFill>
                 <a:latin typeface="Arial"/>
               </a:rPr>
-              <a:t>6  Results (v1.35)</a:t>
+              <a:t>6  Results (v1.36)</a:t>
             </a:r>
           </a:p>
         </p:txBody>
@@ -38130,7 +38130,7 @@
                 </a:solidFill>
                 <a:latin typeface="Arial"/>
               </a:rPr>
-              <a:t>the 12-run matrix, OpenShift vs KinD, plugins</a:t>
+              <a:t>the 12-run matrix, OpenShift vs KinD, plugins (v1.35)</a:t>
             </a:r>
           </a:p>
         </p:txBody>

--- a/docs/AutoBench.pptx
+++ b/docs/AutoBench.pptx
@@ -6,7 +6,7 @@
   </p:sldMasterIdLst>
   <p:sldIdLst>
     <p:sldId id="256" r:id="rId7"/>
-    <p:sldId id="291" r:id="rId43"/>
+    <p:sldId id="293" r:id="rId45"/>
     <p:sldId id="257" r:id="rId8"/>
     <p:sldId id="258" r:id="rId9"/>
     <p:sldId id="259" r:id="rId11"/>
@@ -41,6 +41,8 @@
     <p:sldId id="288" r:id="rId40"/>
     <p:sldId id="289" r:id="rId41"/>
     <p:sldId id="290" r:id="rId42"/>
+    <p:sldId id="291" r:id="rId43"/>
+    <p:sldId id="292" r:id="rId44"/>
   </p:sldIdLst>
   <p:sldSz cx="12191695" cy="6858000" type="screen4x3"/>
   <p:notesSz cx="6858000" cy="9144000"/>
@@ -145,7 +147,7 @@
         <p14:section name="Overview" id="{A0B00000-0000-4000-8000-000000000000}">
           <p14:sldIdLst>
             <p14:sldId id="256"/>
-            <p14:sldId id="291"/>
+            <p14:sldId id="293"/>
           </p14:sldIdLst>
         </p14:section>
         <p14:section name="1 The design" id="{A0B00001-0000-4000-8000-000000000001}">
@@ -204,6 +206,8 @@
             <p14:sldId id="288"/>
             <p14:sldId id="289"/>
             <p14:sldId id="290"/>
+            <p14:sldId id="291"/>
+            <p14:sldId id="292"/>
           </p14:sldIdLst>
         </p14:section>
       </p14:sectionLst>
@@ -1549,6 +1553,271 @@
 </c:chartSpace>
 </file>
 
+<file path=ppt/charts/chart6.xml><?xml version="1.0" encoding="utf-8"?>
+<c:chartSpace xmlns:c="http://schemas.openxmlformats.org/drawingml/2006/chart" xmlns:a="http://schemas.openxmlformats.org/drawingml/2006/main" xmlns:r="http://schemas.openxmlformats.org/officeDocument/2006/relationships">
+  <c:date1904 val="0"/>
+  <c:chart>
+    <c:autoTitleDeleted val="1"/>
+    <c:plotArea>
+      <c:barChart>
+        <c:barDir val="bar"/>
+        <c:grouping val="clustered"/>
+        <c:ser>
+          <c:idx val="0"/>
+          <c:order val="0"/>
+          <c:tx>
+            <c:strRef>
+              <c:f>Sheet1!$B$1</c:f>
+              <c:strCache>
+                <c:ptCount val="1"/>
+                <c:pt idx="0">
+                  <c:v>tokens per finished task</c:v>
+                </c:pt>
+              </c:strCache>
+            </c:strRef>
+          </c:tx>
+          <c:spPr>
+            <a:solidFill>
+              <a:srgbClr val="6B7280"/>
+            </a:solidFill>
+            <a:ln>
+              <a:noFill/>
+            </a:ln>
+          </c:spPr>
+          <c:cat>
+            <c:strRef>
+              <c:f>Sheet1!$A$2:$A$4</c:f>
+              <c:strCache>
+                <c:ptCount val="3"/>
+                <c:pt idx="0">
+                  <c:v>gsm8k</c:v>
+                </c:pt>
+                <c:pt idx="1">
+                  <c:v>tau2</c:v>
+                </c:pt>
+                <c:pt idx="2">
+                  <c:v>appworld</c:v>
+                </c:pt>
+              </c:strCache>
+            </c:strRef>
+          </c:cat>
+          <c:val>
+            <c:numRef>
+              <c:f>Sheet1!$B$2:$B$4</c:f>
+              <c:numCache>
+                <c:formatCode>0.00"×"</c:formatCode>
+                <c:ptCount val="3"/>
+                <c:pt idx="0">
+                  <c:v>2.348814696413697</c:v>
+                </c:pt>
+                <c:pt idx="1">
+                  <c:v>0.8072039861076895</c:v>
+                </c:pt>
+                <c:pt idx="2">
+                  <c:v>0.8465679551281476</c:v>
+                </c:pt>
+              </c:numCache>
+            </c:numRef>
+          </c:val>
+        </c:ser>
+        <c:ser>
+          <c:idx val="1"/>
+          <c:order val="1"/>
+          <c:tx>
+            <c:strRef>
+              <c:f>Sheet1!$C$1</c:f>
+              <c:strCache>
+                <c:ptCount val="1"/>
+                <c:pt idx="0">
+                  <c:v>run time</c:v>
+                </c:pt>
+              </c:strCache>
+            </c:strRef>
+          </c:tx>
+          <c:spPr>
+            <a:solidFill>
+              <a:srgbClr val="3B6EA8"/>
+            </a:solidFill>
+            <a:ln>
+              <a:noFill/>
+            </a:ln>
+          </c:spPr>
+          <c:cat>
+            <c:strRef>
+              <c:f>Sheet1!$A$2:$A$4</c:f>
+              <c:strCache>
+                <c:ptCount val="3"/>
+                <c:pt idx="0">
+                  <c:v>gsm8k</c:v>
+                </c:pt>
+                <c:pt idx="1">
+                  <c:v>tau2</c:v>
+                </c:pt>
+                <c:pt idx="2">
+                  <c:v>appworld</c:v>
+                </c:pt>
+              </c:strCache>
+            </c:strRef>
+          </c:cat>
+          <c:val>
+            <c:numRef>
+              <c:f>Sheet1!$C$2:$C$4</c:f>
+              <c:numCache>
+                <c:formatCode>0.00"×"</c:formatCode>
+                <c:ptCount val="3"/>
+                <c:pt idx="0">
+                  <c:v>1.5085398068583227</c:v>
+                </c:pt>
+                <c:pt idx="1">
+                  <c:v>0.8344799405637398</c:v>
+                </c:pt>
+                <c:pt idx="2">
+                  <c:v>1.330948662402307</c:v>
+                </c:pt>
+              </c:numCache>
+            </c:numRef>
+          </c:val>
+        </c:ser>
+        <c:dLbls>
+          <c:numFmt formatCode="0.00&quot;×&quot;" sourceLinked="0"/>
+          <c:txPr>
+            <a:bodyPr/>
+            <a:lstStyle/>
+            <a:p>
+              <a:pPr>
+                <a:defRPr sz="1200">
+                  <a:solidFill>
+                    <a:srgbClr val="1F2A44"/>
+                  </a:solidFill>
+                </a:defRPr>
+              </a:pPr>
+            </a:p>
+          </c:txPr>
+          <c:dLblPos val="outEnd"/>
+          <c:showLegendKey val="0"/>
+          <c:showVal val="1"/>
+          <c:showCatName val="0"/>
+          <c:showSerName val="0"/>
+          <c:showPercent val="0"/>
+          <c:showBubbleSize val="0"/>
+          <c:showLeaderLines val="1"/>
+        </c:dLbls>
+        <c:gapWidth val="60"/>
+        <c:axId val="-2068027336"/>
+        <c:axId val="-2113994440"/>
+      </c:barChart>
+      <c:catAx>
+        <c:axId val="-2068027336"/>
+        <c:scaling>
+          <c:orientation val="maxMin"/>
+        </c:scaling>
+        <c:delete val="0"/>
+        <c:axPos val="l"/>
+        <c:majorTickMark val="out"/>
+        <c:minorTickMark val="none"/>
+        <c:tickLblPos val="nextTo"/>
+        <c:spPr>
+          <a:ln>
+            <a:solidFill>
+              <a:srgbClr val="C9CFDA"/>
+            </a:solidFill>
+          </a:ln>
+        </c:spPr>
+        <c:txPr>
+          <a:bodyPr/>
+          <a:lstStyle/>
+          <a:p>
+            <a:pPr>
+              <a:defRPr sz="1200"/>
+            </a:pPr>
+          </a:p>
+        </c:txPr>
+        <c:crossAx val="-2113994440"/>
+        <c:crosses val="autoZero"/>
+        <c:auto val="1"/>
+        <c:lblAlgn val="ctr"/>
+        <c:lblOffset val="100"/>
+        <c:noMultiLvlLbl val="0"/>
+      </c:catAx>
+      <c:valAx>
+        <c:axId val="-2113994440"/>
+        <c:scaling/>
+        <c:delete val="0"/>
+        <c:axPos val="b"/>
+        <c:majorGridlines>
+          <c:spPr>
+            <a:ln>
+              <a:solidFill>
+                <a:srgbClr val="C9CFDA"/>
+              </a:solidFill>
+            </a:ln>
+          </c:spPr>
+        </c:majorGridlines>
+        <c:majorTickMark val="out"/>
+        <c:minorTickMark val="none"/>
+        <c:tickLblPos val="nextTo"/>
+        <c:spPr>
+          <a:ln>
+            <a:noFill/>
+          </a:ln>
+        </c:spPr>
+        <c:txPr>
+          <a:bodyPr/>
+          <a:lstStyle/>
+          <a:p>
+            <a:pPr>
+              <a:defRPr sz="1100">
+                <a:solidFill>
+                  <a:srgbClr val="5B6477"/>
+                </a:solidFill>
+              </a:defRPr>
+            </a:pPr>
+          </a:p>
+        </c:txPr>
+        <c:crossAx val="-2068027336"/>
+        <c:crosses val="max"/>
+      </c:valAx>
+    </c:plotArea>
+    <c:legend>
+      <c:legendPos val="b"/>
+      <c:overlay val="0"/>
+      <c:txPr>
+        <a:bodyPr/>
+        <a:lstStyle/>
+        <a:p>
+          <a:pPr>
+            <a:defRPr sz="1200">
+              <a:solidFill>
+                <a:srgbClr val="1F2A44"/>
+              </a:solidFill>
+            </a:defRPr>
+          </a:pPr>
+        </a:p>
+      </c:txPr>
+    </c:legend>
+    <c:dispBlanksAs val="gap"/>
+  </c:chart>
+  <c:txPr>
+    <a:bodyPr/>
+    <a:lstStyle/>
+    <a:p>
+      <a:pPr>
+        <a:defRPr sz="1200">
+          <a:solidFill>
+            <a:srgbClr val="1F2A44"/>
+          </a:solidFill>
+          <a:latin typeface="Arial"/>
+        </a:defRPr>
+      </a:pPr>
+      <a:endParaRPr lang="en-US"/>
+    </a:p>
+  </c:txPr>
+  <c:externalData r:id="rId1">
+    <c:autoUpdate val="0"/>
+  </c:externalData>
+</c:chartSpace>
+</file>
+
 <file path=ppt/notesMasters/notesMaster1.xml><?xml version="1.0" encoding="utf-8"?>
 <p:notesMaster xmlns:a="http://schemas.openxmlformats.org/drawingml/2006/main" xmlns:p="http://schemas.openxmlformats.org/presentationml/2006/main" xmlns:r="http://schemas.openxmlformats.org/officeDocument/2006/relationships">
   <p:cSld>
@@ -2091,6 +2360,76 @@
           <a:p>
             <a:r>
               <a:t>Driven by reference/run-12.py: about two hours of run time per platform on v1.36's slow gateway day, plus the deploys and 14-28 min of gateway-cache gaps (BM_CACHE_GAP=900).</a:t>
+            </a:r>
+          </a:p>
+        </p:txBody>
+      </p:sp>
+      <p:sp>
+        <p:nvSpPr>
+          <p:cNvPr id="4" name="Slide Number Placeholder 3"/>
+          <p:cNvSpPr>
+            <a:spLocks noGrp="1"/>
+          </p:cNvSpPr>
+          <p:nvPr>
+            <p:ph type="sldNum" idx="5" sz="quarter"/>
+          </p:nvPr>
+        </p:nvSpPr>
+        <p:spPr/>
+      </p:sp>
+    </p:spTree>
+  </p:cSld>
+  <p:clrMapOvr>
+    <a:masterClrMapping/>
+  </p:clrMapOvr>
+</p:notes>
+</file>
+
+<file path=ppt/notesSlides/notesSlide12.xml><?xml version="1.0" encoding="utf-8"?>
+<p:notes xmlns:a="http://schemas.openxmlformats.org/drawingml/2006/main" xmlns:p="http://schemas.openxmlformats.org/presentationml/2006/main" xmlns:r="http://schemas.openxmlformats.org/officeDocument/2006/relationships">
+  <p:cSld>
+    <p:spTree>
+      <p:nvGrpSpPr>
+        <p:cNvPr id="1" name=""/>
+        <p:cNvGrpSpPr/>
+        <p:nvPr/>
+      </p:nvGrpSpPr>
+      <p:grpSpPr>
+        <a:xfrm>
+          <a:off x="0" y="0"/>
+          <a:ext cx="0" cy="0"/>
+          <a:chOff x="0" y="0"/>
+          <a:chExt cx="0" cy="0"/>
+        </a:xfrm>
+      </p:grpSpPr>
+      <p:sp>
+        <p:nvSpPr>
+          <p:cNvPr id="2" name="Slide Image Placeholder 1"/>
+          <p:cNvSpPr>
+            <a:spLocks noGrp="1"/>
+          </p:cNvSpPr>
+          <p:nvPr>
+            <p:ph type="sldImg" idx="2"/>
+          </p:nvPr>
+        </p:nvSpPr>
+        <p:spPr/>
+      </p:sp>
+      <p:sp>
+        <p:nvSpPr>
+          <p:cNvPr id="3" name="Notes Placeholder 2"/>
+          <p:cNvSpPr>
+            <a:spLocks noGrp="1"/>
+          </p:cNvSpPr>
+          <p:nvPr>
+            <p:ph type="body" idx="3" sz="quarter"/>
+          </p:nvPr>
+        </p:nvSpPr>
+        <p:spPr/>
+        <p:txBody>
+          <a:bodyPr/>
+          <a:lstStyle/>
+          <a:p>
+            <a:r>
+              <a:t>Tokens and wall time cover the tasks that finished: a task killed by the 600 s budget leaves no report row. cb's $0.00 is its posted rate (self-hosted hosted_vllm models, no per-token price), not its compute cost. On tau2 and appworld the model changes with the gateway, so those rows compare combinations, not gateways alone.</a:t>
             </a:r>
           </a:p>
         </p:txBody>
@@ -5851,7 +6190,7 @@
                 </a:solidFill>
                 <a:latin typeface="Arial"/>
               </a:rPr>
-              <a:t>v1.36 · OpenShift and KinD · 2026-10-12</a:t>
+              <a:t>v1.36 · OpenShift and KinD · 2026-10-14</a:t>
             </a:r>
           </a:p>
         </p:txBody>
@@ -34437,7 +34776,7 @@
                 </a:solidFill>
                 <a:latin typeface="Arial"/>
               </a:rPr>
-              <a:t>What AuthBridge costs: almost all of it is the judge</a:t>
+              <a:t>cb vs ETE-Ext, leg by leg: 55% of the tokens, at $0.00</a:t>
             </a:r>
           </a:p>
         </p:txBody>
@@ -34476,7 +34815,7 @@
                 </a:solidFill>
                 <a:latin typeface="Arial"/>
               </a:rPr>
-              <a:t>Non-LLM seconds per task, steady state; the designed 13-leg study, n=50, v1.35</a:t>
+              <a:t>ETE-Ext: the baseline's own models · cb: glm-5-3, Nemotron-3-Ultra on #4 · the IBAC judge on ETE-Ext for both · one KinD node, 2026-10-12</a:t>
             </a:r>
           </a:p>
         </p:txBody>
@@ -34604,7 +34943,7 @@
         </p:nvGraphicFramePr>
         <p:xfrm>
           <a:off x="411480" y="1325880"/>
-          <a:ext cx="6400800" cy="2523744"/>
+          <a:ext cx="11365990" cy="4544568"/>
         </p:xfrm>
         <a:graphic>
           <a:graphicData uri="http://schemas.openxmlformats.org/drawingml/2006/table">
@@ -34613,13 +34952,18 @@
                 <a:tableStyleId>{5C22544A-7EE6-4342-B048-85BDC9FD1C3A}</a:tableStyleId>
               </a:tblPr>
               <a:tblGrid>
-                <a:gridCol w="2377440"/>
-                <a:gridCol w="1005840"/>
-                <a:gridCol w="1005840"/>
-                <a:gridCol w="1005840"/>
-                <a:gridCol w="1005840"/>
+                <a:gridCol w="546920"/>
+                <a:gridCol w="1243000"/>
+                <a:gridCol w="1044120"/>
+                <a:gridCol w="994400"/>
+                <a:gridCol w="1441880"/>
+                <a:gridCol w="1392159"/>
+                <a:gridCol w="1243000"/>
+                <a:gridCol w="1193279"/>
+                <a:gridCol w="1173392"/>
+                <a:gridCol w="1093840"/>
               </a:tblGrid>
-              <a:tr h="420624">
+              <a:tr h="324612">
                 <a:tc>
                   <a:txBody>
                     <a:bodyPr wrap="square"/>
@@ -34627,13 +34971,13 @@
                     <a:p>
                       <a:pPr algn="l"/>
                       <a:r>
-                        <a:rPr sz="1200" b="1" i="0">
+                        <a:rPr sz="1100" b="1" i="0">
                           <a:solidFill>
                             <a:srgbClr val="FFFFFF"/>
                           </a:solidFill>
                           <a:latin typeface="Arial"/>
                         </a:rPr>
-                        <a:t>condition</a:t>
+                        <a:t>#</a:t>
                       </a:r>
                     </a:p>
                   </a:txBody>
@@ -34648,15 +34992,38 @@
                     <a:bodyPr wrap="square"/>
                     <a:lstStyle/>
                     <a:p>
+                      <a:pPr algn="l"/>
+                      <a:r>
+                        <a:rPr sz="1100" b="1" i="0">
+                          <a:solidFill>
+                            <a:srgbClr val="FFFFFF"/>
+                          </a:solidFill>
+                          <a:latin typeface="Arial"/>
+                        </a:rPr>
+                        <a:t>bench</a:t>
+                      </a:r>
+                    </a:p>
+                  </a:txBody>
+                  <a:tcPr marL="54864" marR="54864" marT="18288" marB="18288" anchor="ctr">
+                    <a:solidFill>
+                      <a:srgbClr val="1F2A44"/>
+                    </a:solidFill>
+                  </a:tcPr>
+                </a:tc>
+                <a:tc>
+                  <a:txBody>
+                    <a:bodyPr wrap="square"/>
+                    <a:lstStyle/>
+                    <a:p>
                       <a:pPr algn="r"/>
                       <a:r>
-                        <a:rPr sz="1200" b="1" i="0">
+                        <a:rPr sz="1100" b="1" i="0">
                           <a:solidFill>
                             <a:srgbClr val="FFFFFF"/>
                           </a:solidFill>
                           <a:latin typeface="Arial"/>
                         </a:rPr>
-                        <a:t>OpenShift</a:t>
+                        <a:t>pass ETE-Ext</a:t>
                       </a:r>
                     </a:p>
                   </a:txBody>
@@ -34673,13 +35040,13 @@
                     <a:p>
                       <a:pPr algn="r"/>
                       <a:r>
-                        <a:rPr sz="1200" b="1" i="0">
+                        <a:rPr sz="1100" b="1" i="0">
                           <a:solidFill>
                             <a:srgbClr val="FFFFFF"/>
                           </a:solidFill>
                           <a:latin typeface="Arial"/>
                         </a:rPr>
-                        <a:t>KinD</a:t>
+                        <a:t>pass cb</a:t>
                       </a:r>
                     </a:p>
                   </a:txBody>
@@ -34696,13 +35063,13 @@
                     <a:p>
                       <a:pPr algn="r"/>
                       <a:r>
-                        <a:rPr sz="1200" b="1" i="0">
+                        <a:rPr sz="1100" b="1" i="0">
                           <a:solidFill>
                             <a:srgbClr val="FFFFFF"/>
                           </a:solidFill>
                           <a:latin typeface="Arial"/>
                         </a:rPr>
-                        <a:t>OCP step</a:t>
+                        <a:t>tokens ETE-Ext</a:t>
                       </a:r>
                     </a:p>
                   </a:txBody>
@@ -34719,13 +35086,13 @@
                     <a:p>
                       <a:pPr algn="r"/>
                       <a:r>
-                        <a:rPr sz="1200" b="1" i="0">
+                        <a:rPr sz="1100" b="1" i="0">
                           <a:solidFill>
                             <a:srgbClr val="FFFFFF"/>
                           </a:solidFill>
                           <a:latin typeface="Arial"/>
                         </a:rPr>
-                        <a:t>KinD step</a:t>
+                        <a:t>tokens cb</a:t>
                       </a:r>
                     </a:p>
                   </a:txBody>
@@ -34735,8 +35102,100 @@
                     </a:solidFill>
                   </a:tcPr>
                 </a:tc>
+                <a:tc>
+                  <a:txBody>
+                    <a:bodyPr wrap="square"/>
+                    <a:lstStyle/>
+                    <a:p>
+                      <a:pPr algn="r"/>
+                      <a:r>
+                        <a:rPr sz="1100" b="1" i="0">
+                          <a:solidFill>
+                            <a:srgbClr val="FFFFFF"/>
+                          </a:solidFill>
+                          <a:latin typeface="Arial"/>
+                        </a:rPr>
+                        <a:t>wall ETE-Ext</a:t>
+                      </a:r>
+                    </a:p>
+                  </a:txBody>
+                  <a:tcPr marL="54864" marR="54864" marT="18288" marB="18288" anchor="ctr">
+                    <a:solidFill>
+                      <a:srgbClr val="1F2A44"/>
+                    </a:solidFill>
+                  </a:tcPr>
+                </a:tc>
+                <a:tc>
+                  <a:txBody>
+                    <a:bodyPr wrap="square"/>
+                    <a:lstStyle/>
+                    <a:p>
+                      <a:pPr algn="r"/>
+                      <a:r>
+                        <a:rPr sz="1100" b="1" i="0">
+                          <a:solidFill>
+                            <a:srgbClr val="FFFFFF"/>
+                          </a:solidFill>
+                          <a:latin typeface="Arial"/>
+                        </a:rPr>
+                        <a:t>wall cb</a:t>
+                      </a:r>
+                    </a:p>
+                  </a:txBody>
+                  <a:tcPr marL="54864" marR="54864" marT="18288" marB="18288" anchor="ctr">
+                    <a:solidFill>
+                      <a:srgbClr val="1F2A44"/>
+                    </a:solidFill>
+                  </a:tcPr>
+                </a:tc>
+                <a:tc>
+                  <a:txBody>
+                    <a:bodyPr wrap="square"/>
+                    <a:lstStyle/>
+                    <a:p>
+                      <a:pPr algn="r"/>
+                      <a:r>
+                        <a:rPr sz="1100" b="1" i="0">
+                          <a:solidFill>
+                            <a:srgbClr val="FFFFFF"/>
+                          </a:solidFill>
+                          <a:latin typeface="Arial"/>
+                        </a:rPr>
+                        <a:t>$ ETE-Ext</a:t>
+                      </a:r>
+                    </a:p>
+                  </a:txBody>
+                  <a:tcPr marL="54864" marR="54864" marT="18288" marB="18288" anchor="ctr">
+                    <a:solidFill>
+                      <a:srgbClr val="1F2A44"/>
+                    </a:solidFill>
+                  </a:tcPr>
+                </a:tc>
+                <a:tc>
+                  <a:txBody>
+                    <a:bodyPr wrap="square"/>
+                    <a:lstStyle/>
+                    <a:p>
+                      <a:pPr algn="r"/>
+                      <a:r>
+                        <a:rPr sz="1100" b="1" i="0">
+                          <a:solidFill>
+                            <a:srgbClr val="FFFFFF"/>
+                          </a:solidFill>
+                          <a:latin typeface="Arial"/>
+                        </a:rPr>
+                        <a:t>$ cb</a:t>
+                      </a:r>
+                    </a:p>
+                  </a:txBody>
+                  <a:tcPr marL="54864" marR="54864" marT="18288" marB="18288" anchor="ctr">
+                    <a:solidFill>
+                      <a:srgbClr val="1F2A44"/>
+                    </a:solidFill>
+                  </a:tcPr>
+                </a:tc>
               </a:tr>
-              <a:tr h="420624">
+              <a:tr h="324612">
                 <a:tc>
                   <a:txBody>
                     <a:bodyPr wrap="square"/>
@@ -34744,13 +35203,13 @@
                     <a:p>
                       <a:pPr algn="l"/>
                       <a:r>
-                        <a:rPr sz="1200" b="0" i="0">
-                          <a:solidFill>
-                            <a:srgbClr val="1F2A44"/>
-                          </a:solidFill>
-                          <a:latin typeface="Arial"/>
-                        </a:rPr>
-                        <a:t>baseline (AuthBridge off)</a:t>
+                        <a:rPr sz="1100" b="0" i="0">
+                          <a:solidFill>
+                            <a:srgbClr val="1F2A44"/>
+                          </a:solidFill>
+                          <a:latin typeface="Arial"/>
+                        </a:rPr>
+                        <a:t>1</a:t>
                       </a:r>
                     </a:p>
                   </a:txBody>
@@ -34765,15 +35224,38 @@
                     <a:bodyPr wrap="square"/>
                     <a:lstStyle/>
                     <a:p>
+                      <a:pPr algn="l"/>
+                      <a:r>
+                        <a:rPr sz="1100" b="0" i="0">
+                          <a:solidFill>
+                            <a:srgbClr val="1F2A44"/>
+                          </a:solidFill>
+                          <a:latin typeface="Arial"/>
+                        </a:rPr>
+                        <a:t>gsm8k</a:t>
+                      </a:r>
+                    </a:p>
+                  </a:txBody>
+                  <a:tcPr marL="54864" marR="54864" marT="18288" marB="18288" anchor="ctr">
+                    <a:solidFill>
+                      <a:srgbClr val="FFFFFF"/>
+                    </a:solidFill>
+                  </a:tcPr>
+                </a:tc>
+                <a:tc>
+                  <a:txBody>
+                    <a:bodyPr wrap="square"/>
+                    <a:lstStyle/>
+                    <a:p>
                       <a:pPr algn="r"/>
                       <a:r>
-                        <a:rPr sz="1200" b="0" i="0">
-                          <a:solidFill>
-                            <a:srgbClr val="1F2A44"/>
-                          </a:solidFill>
-                          <a:latin typeface="Arial"/>
-                        </a:rPr>
-                        <a:t>0.168</a:t>
+                        <a:rPr sz="1100" b="0" i="0">
+                          <a:solidFill>
+                            <a:srgbClr val="1F2A44"/>
+                          </a:solidFill>
+                          <a:latin typeface="Arial"/>
+                        </a:rPr>
+                        <a:t>1.00</a:t>
                       </a:r>
                     </a:p>
                   </a:txBody>
@@ -34790,13 +35272,13 @@
                     <a:p>
                       <a:pPr algn="r"/>
                       <a:r>
-                        <a:rPr sz="1200" b="0" i="0">
-                          <a:solidFill>
-                            <a:srgbClr val="1F2A44"/>
-                          </a:solidFill>
-                          <a:latin typeface="Arial"/>
-                        </a:rPr>
-                        <a:t>0.097</a:t>
+                        <a:rPr sz="1100" b="0" i="0">
+                          <a:solidFill>
+                            <a:srgbClr val="1F2A44"/>
+                          </a:solidFill>
+                          <a:latin typeface="Arial"/>
+                        </a:rPr>
+                        <a:t>1.00</a:t>
                       </a:r>
                     </a:p>
                   </a:txBody>
@@ -34813,13 +35295,13 @@
                     <a:p>
                       <a:pPr algn="r"/>
                       <a:r>
-                        <a:rPr sz="1200" b="0" i="0">
-                          <a:solidFill>
-                            <a:srgbClr val="1F2A44"/>
-                          </a:solidFill>
-                          <a:latin typeface="Arial"/>
-                        </a:rPr>
-                        <a:t>—</a:t>
+                        <a:rPr sz="1100" b="0" i="0">
+                          <a:solidFill>
+                            <a:srgbClr val="1F2A44"/>
+                          </a:solidFill>
+                          <a:latin typeface="Arial"/>
+                        </a:rPr>
+                        <a:t>470</a:t>
                       </a:r>
                     </a:p>
                   </a:txBody>
@@ -34836,13 +35318,13 @@
                     <a:p>
                       <a:pPr algn="r"/>
                       <a:r>
-                        <a:rPr sz="1200" b="0" i="0">
-                          <a:solidFill>
-                            <a:srgbClr val="1F2A44"/>
-                          </a:solidFill>
-                          <a:latin typeface="Arial"/>
-                        </a:rPr>
-                        <a:t>—</a:t>
+                        <a:rPr sz="1100" b="0" i="0">
+                          <a:solidFill>
+                            <a:srgbClr val="1F2A44"/>
+                          </a:solidFill>
+                          <a:latin typeface="Arial"/>
+                        </a:rPr>
+                        <a:t>1,010</a:t>
                       </a:r>
                     </a:p>
                   </a:txBody>
@@ -34852,8 +35334,100 @@
                     </a:solidFill>
                   </a:tcPr>
                 </a:tc>
+                <a:tc>
+                  <a:txBody>
+                    <a:bodyPr wrap="square"/>
+                    <a:lstStyle/>
+                    <a:p>
+                      <a:pPr algn="r"/>
+                      <a:r>
+                        <a:rPr sz="1100" b="0" i="0">
+                          <a:solidFill>
+                            <a:srgbClr val="1F2A44"/>
+                          </a:solidFill>
+                          <a:latin typeface="Arial"/>
+                        </a:rPr>
+                        <a:t>7 s</a:t>
+                      </a:r>
+                    </a:p>
+                  </a:txBody>
+                  <a:tcPr marL="54864" marR="54864" marT="18288" marB="18288" anchor="ctr">
+                    <a:solidFill>
+                      <a:srgbClr val="FFFFFF"/>
+                    </a:solidFill>
+                  </a:tcPr>
+                </a:tc>
+                <a:tc>
+                  <a:txBody>
+                    <a:bodyPr wrap="square"/>
+                    <a:lstStyle/>
+                    <a:p>
+                      <a:pPr algn="r"/>
+                      <a:r>
+                        <a:rPr sz="1100" b="0" i="0">
+                          <a:solidFill>
+                            <a:srgbClr val="1F2A44"/>
+                          </a:solidFill>
+                          <a:latin typeface="Arial"/>
+                        </a:rPr>
+                        <a:t>5 s</a:t>
+                      </a:r>
+                    </a:p>
+                  </a:txBody>
+                  <a:tcPr marL="54864" marR="54864" marT="18288" marB="18288" anchor="ctr">
+                    <a:solidFill>
+                      <a:srgbClr val="FFFFFF"/>
+                    </a:solidFill>
+                  </a:tcPr>
+                </a:tc>
+                <a:tc>
+                  <a:txBody>
+                    <a:bodyPr wrap="square"/>
+                    <a:lstStyle/>
+                    <a:p>
+                      <a:pPr algn="r"/>
+                      <a:r>
+                        <a:rPr sz="1100" b="0" i="0">
+                          <a:solidFill>
+                            <a:srgbClr val="1F2A44"/>
+                          </a:solidFill>
+                          <a:latin typeface="Arial"/>
+                        </a:rPr>
+                        <a:t>$0.0004</a:t>
+                      </a:r>
+                    </a:p>
+                  </a:txBody>
+                  <a:tcPr marL="54864" marR="54864" marT="18288" marB="18288" anchor="ctr">
+                    <a:solidFill>
+                      <a:srgbClr val="FFFFFF"/>
+                    </a:solidFill>
+                  </a:tcPr>
+                </a:tc>
+                <a:tc>
+                  <a:txBody>
+                    <a:bodyPr wrap="square"/>
+                    <a:lstStyle/>
+                    <a:p>
+                      <a:pPr algn="r"/>
+                      <a:r>
+                        <a:rPr sz="1100" b="0" i="0">
+                          <a:solidFill>
+                            <a:srgbClr val="1F2A44"/>
+                          </a:solidFill>
+                          <a:latin typeface="Arial"/>
+                        </a:rPr>
+                        <a:t>$0.00</a:t>
+                      </a:r>
+                    </a:p>
+                  </a:txBody>
+                  <a:tcPr marL="54864" marR="54864" marT="18288" marB="18288" anchor="ctr">
+                    <a:solidFill>
+                      <a:srgbClr val="FFFFFF"/>
+                    </a:solidFill>
+                  </a:tcPr>
+                </a:tc>
               </a:tr>
-              <a:tr h="420624">
+              <a:tr h="324612">
                 <a:tc>
                   <a:txBody>
                     <a:bodyPr wrap="square"/>
@@ -34861,13 +35435,13 @@
                     <a:p>
                       <a:pPr algn="l"/>
                       <a:r>
-                        <a:rPr sz="1200" b="0" i="0">
-                          <a:solidFill>
-                            <a:srgbClr val="1F2A44"/>
-                          </a:solidFill>
-                          <a:latin typeface="Arial"/>
-                        </a:rPr>
-                        <a:t>auth-only</a:t>
+                        <a:rPr sz="1100" b="0" i="0">
+                          <a:solidFill>
+                            <a:srgbClr val="1F2A44"/>
+                          </a:solidFill>
+                          <a:latin typeface="Arial"/>
+                        </a:rPr>
+                        <a:t>2</a:t>
                       </a:r>
                     </a:p>
                   </a:txBody>
@@ -34882,15 +35456,38 @@
                     <a:bodyPr wrap="square"/>
                     <a:lstStyle/>
                     <a:p>
+                      <a:pPr algn="l"/>
+                      <a:r>
+                        <a:rPr sz="1100" b="0" i="0">
+                          <a:solidFill>
+                            <a:srgbClr val="1F2A44"/>
+                          </a:solidFill>
+                          <a:latin typeface="Arial"/>
+                        </a:rPr>
+                        <a:t>gsm8k</a:t>
+                      </a:r>
+                    </a:p>
+                  </a:txBody>
+                  <a:tcPr marL="54864" marR="54864" marT="18288" marB="18288" anchor="ctr">
+                    <a:solidFill>
+                      <a:srgbClr val="F3F5F9"/>
+                    </a:solidFill>
+                  </a:tcPr>
+                </a:tc>
+                <a:tc>
+                  <a:txBody>
+                    <a:bodyPr wrap="square"/>
+                    <a:lstStyle/>
+                    <a:p>
                       <a:pPr algn="r"/>
                       <a:r>
-                        <a:rPr sz="1200" b="0" i="0">
-                          <a:solidFill>
-                            <a:srgbClr val="1F2A44"/>
-                          </a:solidFill>
-                          <a:latin typeface="Arial"/>
-                        </a:rPr>
-                        <a:t>0.214</a:t>
+                        <a:rPr sz="1100" b="0" i="0">
+                          <a:solidFill>
+                            <a:srgbClr val="1F2A44"/>
+                          </a:solidFill>
+                          <a:latin typeface="Arial"/>
+                        </a:rPr>
+                        <a:t>1.00</a:t>
                       </a:r>
                     </a:p>
                   </a:txBody>
@@ -34907,13 +35504,13 @@
                     <a:p>
                       <a:pPr algn="r"/>
                       <a:r>
-                        <a:rPr sz="1200" b="0" i="0">
-                          <a:solidFill>
-                            <a:srgbClr val="1F2A44"/>
-                          </a:solidFill>
-                          <a:latin typeface="Arial"/>
-                        </a:rPr>
-                        <a:t>0.130</a:t>
+                        <a:rPr sz="1100" b="0" i="0">
+                          <a:solidFill>
+                            <a:srgbClr val="1F2A44"/>
+                          </a:solidFill>
+                          <a:latin typeface="Arial"/>
+                        </a:rPr>
+                        <a:t>1.00</a:t>
                       </a:r>
                     </a:p>
                   </a:txBody>
@@ -34930,13 +35527,13 @@
                     <a:p>
                       <a:pPr algn="r"/>
                       <a:r>
-                        <a:rPr sz="1200" b="0" i="0">
-                          <a:solidFill>
-                            <a:srgbClr val="1F2A44"/>
-                          </a:solidFill>
-                          <a:latin typeface="Arial"/>
-                        </a:rPr>
-                        <a:t>+0.05</a:t>
+                        <a:rPr sz="1100" b="0" i="0">
+                          <a:solidFill>
+                            <a:srgbClr val="1F2A44"/>
+                          </a:solidFill>
+                          <a:latin typeface="Arial"/>
+                        </a:rPr>
+                        <a:t>4,795</a:t>
                       </a:r>
                     </a:p>
                   </a:txBody>
@@ -34953,13 +35550,13 @@
                     <a:p>
                       <a:pPr algn="r"/>
                       <a:r>
-                        <a:rPr sz="1200" b="0" i="0">
-                          <a:solidFill>
-                            <a:srgbClr val="1F2A44"/>
-                          </a:solidFill>
-                          <a:latin typeface="Arial"/>
-                        </a:rPr>
-                        <a:t>+0.03</a:t>
+                        <a:rPr sz="1100" b="0" i="0">
+                          <a:solidFill>
+                            <a:srgbClr val="1F2A44"/>
+                          </a:solidFill>
+                          <a:latin typeface="Arial"/>
+                        </a:rPr>
+                        <a:t>10.9 K</a:t>
                       </a:r>
                     </a:p>
                   </a:txBody>
@@ -34969,8 +35566,100 @@
                     </a:solidFill>
                   </a:tcPr>
                 </a:tc>
+                <a:tc>
+                  <a:txBody>
+                    <a:bodyPr wrap="square"/>
+                    <a:lstStyle/>
+                    <a:p>
+                      <a:pPr algn="r"/>
+                      <a:r>
+                        <a:rPr sz="1100" b="0" i="0">
+                          <a:solidFill>
+                            <a:srgbClr val="1F2A44"/>
+                          </a:solidFill>
+                          <a:latin typeface="Arial"/>
+                        </a:rPr>
+                        <a:t>45 s</a:t>
+                      </a:r>
+                    </a:p>
+                  </a:txBody>
+                  <a:tcPr marL="54864" marR="54864" marT="18288" marB="18288" anchor="ctr">
+                    <a:solidFill>
+                      <a:srgbClr val="F3F5F9"/>
+                    </a:solidFill>
+                  </a:tcPr>
+                </a:tc>
+                <a:tc>
+                  <a:txBody>
+                    <a:bodyPr wrap="square"/>
+                    <a:lstStyle/>
+                    <a:p>
+                      <a:pPr algn="r"/>
+                      <a:r>
+                        <a:rPr sz="1100" b="0" i="0">
+                          <a:solidFill>
+                            <a:srgbClr val="1F2A44"/>
+                          </a:solidFill>
+                          <a:latin typeface="Arial"/>
+                        </a:rPr>
+                        <a:t>36 s</a:t>
+                      </a:r>
+                    </a:p>
+                  </a:txBody>
+                  <a:tcPr marL="54864" marR="54864" marT="18288" marB="18288" anchor="ctr">
+                    <a:solidFill>
+                      <a:srgbClr val="F3F5F9"/>
+                    </a:solidFill>
+                  </a:tcPr>
+                </a:tc>
+                <a:tc>
+                  <a:txBody>
+                    <a:bodyPr wrap="square"/>
+                    <a:lstStyle/>
+                    <a:p>
+                      <a:pPr algn="r"/>
+                      <a:r>
+                        <a:rPr sz="1100" b="0" i="0">
+                          <a:solidFill>
+                            <a:srgbClr val="1F2A44"/>
+                          </a:solidFill>
+                          <a:latin typeface="Arial"/>
+                        </a:rPr>
+                        <a:t>$0.0040</a:t>
+                      </a:r>
+                    </a:p>
+                  </a:txBody>
+                  <a:tcPr marL="54864" marR="54864" marT="18288" marB="18288" anchor="ctr">
+                    <a:solidFill>
+                      <a:srgbClr val="F3F5F9"/>
+                    </a:solidFill>
+                  </a:tcPr>
+                </a:tc>
+                <a:tc>
+                  <a:txBody>
+                    <a:bodyPr wrap="square"/>
+                    <a:lstStyle/>
+                    <a:p>
+                      <a:pPr algn="r"/>
+                      <a:r>
+                        <a:rPr sz="1100" b="0" i="0">
+                          <a:solidFill>
+                            <a:srgbClr val="1F2A44"/>
+                          </a:solidFill>
+                          <a:latin typeface="Arial"/>
+                        </a:rPr>
+                        <a:t>$0.00</a:t>
+                      </a:r>
+                    </a:p>
+                  </a:txBody>
+                  <a:tcPr marL="54864" marR="54864" marT="18288" marB="18288" anchor="ctr">
+                    <a:solidFill>
+                      <a:srgbClr val="F3F5F9"/>
+                    </a:solidFill>
+                  </a:tcPr>
+                </a:tc>
               </a:tr>
-              <a:tr h="420624">
+              <a:tr h="324612">
                 <a:tc>
                   <a:txBody>
                     <a:bodyPr wrap="square"/>
@@ -34978,13 +35667,13 @@
                     <a:p>
                       <a:pPr algn="l"/>
                       <a:r>
-                        <a:rPr sz="1200" b="0" i="0">
-                          <a:solidFill>
-                            <a:srgbClr val="1F2A44"/>
-                          </a:solidFill>
-                          <a:latin typeface="Arial"/>
-                        </a:rPr>
-                        <a:t>ibac-only</a:t>
+                        <a:rPr sz="1100" b="0" i="0">
+                          <a:solidFill>
+                            <a:srgbClr val="1F2A44"/>
+                          </a:solidFill>
+                          <a:latin typeface="Arial"/>
+                        </a:rPr>
+                        <a:t>3</a:t>
                       </a:r>
                     </a:p>
                   </a:txBody>
@@ -34999,15 +35688,38 @@
                     <a:bodyPr wrap="square"/>
                     <a:lstStyle/>
                     <a:p>
+                      <a:pPr algn="l"/>
+                      <a:r>
+                        <a:rPr sz="1100" b="0" i="0">
+                          <a:solidFill>
+                            <a:srgbClr val="1F2A44"/>
+                          </a:solidFill>
+                          <a:latin typeface="Arial"/>
+                        </a:rPr>
+                        <a:t>gsm8k</a:t>
+                      </a:r>
+                    </a:p>
+                  </a:txBody>
+                  <a:tcPr marL="54864" marR="54864" marT="18288" marB="18288" anchor="ctr">
+                    <a:solidFill>
+                      <a:srgbClr val="FFFFFF"/>
+                    </a:solidFill>
+                  </a:tcPr>
+                </a:tc>
+                <a:tc>
+                  <a:txBody>
+                    <a:bodyPr wrap="square"/>
+                    <a:lstStyle/>
+                    <a:p>
                       <a:pPr algn="r"/>
                       <a:r>
-                        <a:rPr sz="1200" b="0" i="0">
-                          <a:solidFill>
-                            <a:srgbClr val="1F2A44"/>
-                          </a:solidFill>
-                          <a:latin typeface="Arial"/>
-                        </a:rPr>
-                        <a:t>1.569</a:t>
+                        <a:rPr sz="1100" b="0" i="0">
+                          <a:solidFill>
+                            <a:srgbClr val="1F2A44"/>
+                          </a:solidFill>
+                          <a:latin typeface="Arial"/>
+                        </a:rPr>
+                        <a:t>1.00</a:t>
                       </a:r>
                     </a:p>
                   </a:txBody>
@@ -35024,13 +35736,13 @@
                     <a:p>
                       <a:pPr algn="r"/>
                       <a:r>
-                        <a:rPr sz="1200" b="0" i="0">
-                          <a:solidFill>
-                            <a:srgbClr val="1F2A44"/>
-                          </a:solidFill>
-                          <a:latin typeface="Arial"/>
-                        </a:rPr>
-                        <a:t>1.610</a:t>
+                        <a:rPr sz="1100" b="0" i="0">
+                          <a:solidFill>
+                            <a:srgbClr val="1F2A44"/>
+                          </a:solidFill>
+                          <a:latin typeface="Arial"/>
+                        </a:rPr>
+                        <a:t>0.98</a:t>
                       </a:r>
                     </a:p>
                   </a:txBody>
@@ -35047,13 +35759,13 @@
                     <a:p>
                       <a:pPr algn="r"/>
                       <a:r>
-                        <a:rPr sz="1200" b="1" i="0">
-                          <a:solidFill>
-                            <a:srgbClr val="1F2A44"/>
-                          </a:solidFill>
-                          <a:latin typeface="Arial"/>
-                        </a:rPr>
-                        <a:t>+1.36</a:t>
+                        <a:rPr sz="1100" b="0" i="0">
+                          <a:solidFill>
+                            <a:srgbClr val="1F2A44"/>
+                          </a:solidFill>
+                          <a:latin typeface="Arial"/>
+                        </a:rPr>
+                        <a:t>24.9 K</a:t>
                       </a:r>
                     </a:p>
                   </a:txBody>
@@ -35070,13 +35782,13 @@
                     <a:p>
                       <a:pPr algn="r"/>
                       <a:r>
-                        <a:rPr sz="1200" b="1" i="0">
-                          <a:solidFill>
-                            <a:srgbClr val="1F2A44"/>
-                          </a:solidFill>
-                          <a:latin typeface="Arial"/>
-                        </a:rPr>
-                        <a:t>+1.48</a:t>
+                        <a:rPr sz="1100" b="0" i="0">
+                          <a:solidFill>
+                            <a:srgbClr val="1F2A44"/>
+                          </a:solidFill>
+                          <a:latin typeface="Arial"/>
+                        </a:rPr>
+                        <a:t>66.3 K</a:t>
                       </a:r>
                     </a:p>
                   </a:txBody>
@@ -35086,8 +35798,100 @@
                     </a:solidFill>
                   </a:tcPr>
                 </a:tc>
+                <a:tc>
+                  <a:txBody>
+                    <a:bodyPr wrap="square"/>
+                    <a:lstStyle/>
+                    <a:p>
+                      <a:pPr algn="r"/>
+                      <a:r>
+                        <a:rPr sz="1100" b="0" i="0">
+                          <a:solidFill>
+                            <a:srgbClr val="1F2A44"/>
+                          </a:solidFill>
+                          <a:latin typeface="Arial"/>
+                        </a:rPr>
+                        <a:t>44 s</a:t>
+                      </a:r>
+                    </a:p>
+                  </a:txBody>
+                  <a:tcPr marL="54864" marR="54864" marT="18288" marB="18288" anchor="ctr">
+                    <a:solidFill>
+                      <a:srgbClr val="FFFFFF"/>
+                    </a:solidFill>
+                  </a:tcPr>
+                </a:tc>
+                <a:tc>
+                  <a:txBody>
+                    <a:bodyPr wrap="square"/>
+                    <a:lstStyle/>
+                    <a:p>
+                      <a:pPr algn="r"/>
+                      <a:r>
+                        <a:rPr sz="1100" b="0" i="0">
+                          <a:solidFill>
+                            <a:srgbClr val="1F2A44"/>
+                          </a:solidFill>
+                          <a:latin typeface="Arial"/>
+                        </a:rPr>
+                        <a:t>135 s</a:t>
+                      </a:r>
+                    </a:p>
+                  </a:txBody>
+                  <a:tcPr marL="54864" marR="54864" marT="18288" marB="18288" anchor="ctr">
+                    <a:solidFill>
+                      <a:srgbClr val="FFFFFF"/>
+                    </a:solidFill>
+                  </a:tcPr>
+                </a:tc>
+                <a:tc>
+                  <a:txBody>
+                    <a:bodyPr wrap="square"/>
+                    <a:lstStyle/>
+                    <a:p>
+                      <a:pPr algn="r"/>
+                      <a:r>
+                        <a:rPr sz="1100" b="0" i="0">
+                          <a:solidFill>
+                            <a:srgbClr val="1F2A44"/>
+                          </a:solidFill>
+                          <a:latin typeface="Arial"/>
+                        </a:rPr>
+                        <a:t>$0.0223</a:t>
+                      </a:r>
+                    </a:p>
+                  </a:txBody>
+                  <a:tcPr marL="54864" marR="54864" marT="18288" marB="18288" anchor="ctr">
+                    <a:solidFill>
+                      <a:srgbClr val="FFFFFF"/>
+                    </a:solidFill>
+                  </a:tcPr>
+                </a:tc>
+                <a:tc>
+                  <a:txBody>
+                    <a:bodyPr wrap="square"/>
+                    <a:lstStyle/>
+                    <a:p>
+                      <a:pPr algn="r"/>
+                      <a:r>
+                        <a:rPr sz="1100" b="0" i="0">
+                          <a:solidFill>
+                            <a:srgbClr val="1F2A44"/>
+                          </a:solidFill>
+                          <a:latin typeface="Arial"/>
+                        </a:rPr>
+                        <a:t>$0.00</a:t>
+                      </a:r>
+                    </a:p>
+                  </a:txBody>
+                  <a:tcPr marL="54864" marR="54864" marT="18288" marB="18288" anchor="ctr">
+                    <a:solidFill>
+                      <a:srgbClr val="FFFFFF"/>
+                    </a:solidFill>
+                  </a:tcPr>
+                </a:tc>
               </a:tr>
-              <a:tr h="420624">
+              <a:tr h="324612">
                 <a:tc>
                   <a:txBody>
                     <a:bodyPr wrap="square"/>
@@ -35095,13 +35899,13 @@
                     <a:p>
                       <a:pPr algn="l"/>
                       <a:r>
-                        <a:rPr sz="1200" b="0" i="0">
-                          <a:solidFill>
-                            <a:srgbClr val="1F2A44"/>
-                          </a:solidFill>
-                          <a:latin typeface="Arial"/>
-                        </a:rPr>
-                        <a:t>full (auth + ibac)</a:t>
+                        <a:rPr sz="1100" b="0" i="0">
+                          <a:solidFill>
+                            <a:srgbClr val="1F2A44"/>
+                          </a:solidFill>
+                          <a:latin typeface="Arial"/>
+                        </a:rPr>
+                        <a:t>4</a:t>
                       </a:r>
                     </a:p>
                   </a:txBody>
@@ -35116,15 +35920,38 @@
                     <a:bodyPr wrap="square"/>
                     <a:lstStyle/>
                     <a:p>
+                      <a:pPr algn="l"/>
+                      <a:r>
+                        <a:rPr sz="1100" b="0" i="0">
+                          <a:solidFill>
+                            <a:srgbClr val="1F2A44"/>
+                          </a:solidFill>
+                          <a:latin typeface="Arial"/>
+                        </a:rPr>
+                        <a:t>gsm8k</a:t>
+                      </a:r>
+                    </a:p>
+                  </a:txBody>
+                  <a:tcPr marL="54864" marR="54864" marT="18288" marB="18288" anchor="ctr">
+                    <a:solidFill>
+                      <a:srgbClr val="F3F5F9"/>
+                    </a:solidFill>
+                  </a:tcPr>
+                </a:tc>
+                <a:tc>
+                  <a:txBody>
+                    <a:bodyPr wrap="square"/>
+                    <a:lstStyle/>
+                    <a:p>
                       <a:pPr algn="r"/>
                       <a:r>
-                        <a:rPr sz="1200" b="0" i="0">
-                          <a:solidFill>
-                            <a:srgbClr val="1F2A44"/>
-                          </a:solidFill>
-                          <a:latin typeface="Arial"/>
-                        </a:rPr>
-                        <a:t>1.584</a:t>
+                        <a:rPr sz="1100" b="0" i="0">
+                          <a:solidFill>
+                            <a:srgbClr val="1F2A44"/>
+                          </a:solidFill>
+                          <a:latin typeface="Arial"/>
+                        </a:rPr>
+                        <a:t>0.80</a:t>
                       </a:r>
                     </a:p>
                   </a:txBody>
@@ -35141,13 +35968,13 @@
                     <a:p>
                       <a:pPr algn="r"/>
                       <a:r>
-                        <a:rPr sz="1200" b="0" i="0">
-                          <a:solidFill>
-                            <a:srgbClr val="1F2A44"/>
-                          </a:solidFill>
-                          <a:latin typeface="Arial"/>
-                        </a:rPr>
-                        <a:t>1.602</a:t>
+                        <a:rPr sz="1100" b="0" i="0">
+                          <a:solidFill>
+                            <a:srgbClr val="1F2A44"/>
+                          </a:solidFill>
+                          <a:latin typeface="Arial"/>
+                        </a:rPr>
+                        <a:t>0.80</a:t>
                       </a:r>
                     </a:p>
                   </a:txBody>
@@ -35164,13 +35991,13 @@
                     <a:p>
                       <a:pPr algn="r"/>
                       <a:r>
-                        <a:rPr sz="1200" b="0" i="0">
-                          <a:solidFill>
-                            <a:srgbClr val="1F2A44"/>
-                          </a:solidFill>
-                          <a:latin typeface="Arial"/>
-                        </a:rPr>
-                        <a:t>+0.01</a:t>
+                        <a:rPr sz="1100" b="0" i="0">
+                          <a:solidFill>
+                            <a:srgbClr val="1F2A44"/>
+                          </a:solidFill>
+                          <a:latin typeface="Arial"/>
+                        </a:rPr>
+                        <a:t>3,828</a:t>
                       </a:r>
                     </a:p>
                   </a:txBody>
@@ -35187,13 +36014,13 @@
                     <a:p>
                       <a:pPr algn="r"/>
                       <a:r>
-                        <a:rPr sz="1200" b="0" i="0">
-                          <a:solidFill>
-                            <a:srgbClr val="1F2A44"/>
-                          </a:solidFill>
-                          <a:latin typeface="Arial"/>
-                        </a:rPr>
-                        <a:t>−0.01</a:t>
+                        <a:rPr sz="1100" b="0" i="0">
+                          <a:solidFill>
+                            <a:srgbClr val="1F2A44"/>
+                          </a:solidFill>
+                          <a:latin typeface="Arial"/>
+                        </a:rPr>
+                        <a:t>4,528</a:t>
                       </a:r>
                     </a:p>
                   </a:txBody>
@@ -35203,8 +36030,100 @@
                     </a:solidFill>
                   </a:tcPr>
                 </a:tc>
+                <a:tc>
+                  <a:txBody>
+                    <a:bodyPr wrap="square"/>
+                    <a:lstStyle/>
+                    <a:p>
+                      <a:pPr algn="r"/>
+                      <a:r>
+                        <a:rPr sz="1100" b="0" i="0">
+                          <a:solidFill>
+                            <a:srgbClr val="1F2A44"/>
+                          </a:solidFill>
+                          <a:latin typeface="Arial"/>
+                        </a:rPr>
+                        <a:t>19 s</a:t>
+                      </a:r>
+                    </a:p>
+                  </a:txBody>
+                  <a:tcPr marL="54864" marR="54864" marT="18288" marB="18288" anchor="ctr">
+                    <a:solidFill>
+                      <a:srgbClr val="F3F5F9"/>
+                    </a:solidFill>
+                  </a:tcPr>
+                </a:tc>
+                <a:tc>
+                  <a:txBody>
+                    <a:bodyPr wrap="square"/>
+                    <a:lstStyle/>
+                    <a:p>
+                      <a:pPr algn="r"/>
+                      <a:r>
+                        <a:rPr sz="1100" b="0" i="0">
+                          <a:solidFill>
+                            <a:srgbClr val="1F2A44"/>
+                          </a:solidFill>
+                          <a:latin typeface="Arial"/>
+                        </a:rPr>
+                        <a:t>7 s</a:t>
+                      </a:r>
+                    </a:p>
+                  </a:txBody>
+                  <a:tcPr marL="54864" marR="54864" marT="18288" marB="18288" anchor="ctr">
+                    <a:solidFill>
+                      <a:srgbClr val="F3F5F9"/>
+                    </a:solidFill>
+                  </a:tcPr>
+                </a:tc>
+                <a:tc>
+                  <a:txBody>
+                    <a:bodyPr wrap="square"/>
+                    <a:lstStyle/>
+                    <a:p>
+                      <a:pPr algn="r"/>
+                      <a:r>
+                        <a:rPr sz="1100" b="0" i="0">
+                          <a:solidFill>
+                            <a:srgbClr val="1F2A44"/>
+                          </a:solidFill>
+                          <a:latin typeface="Arial"/>
+                        </a:rPr>
+                        <a:t>$0.0094</a:t>
+                      </a:r>
+                    </a:p>
+                  </a:txBody>
+                  <a:tcPr marL="54864" marR="54864" marT="18288" marB="18288" anchor="ctr">
+                    <a:solidFill>
+                      <a:srgbClr val="F3F5F9"/>
+                    </a:solidFill>
+                  </a:tcPr>
+                </a:tc>
+                <a:tc>
+                  <a:txBody>
+                    <a:bodyPr wrap="square"/>
+                    <a:lstStyle/>
+                    <a:p>
+                      <a:pPr algn="r"/>
+                      <a:r>
+                        <a:rPr sz="1100" b="0" i="0">
+                          <a:solidFill>
+                            <a:srgbClr val="1F2A44"/>
+                          </a:solidFill>
+                          <a:latin typeface="Arial"/>
+                        </a:rPr>
+                        <a:t>$0.00</a:t>
+                      </a:r>
+                    </a:p>
+                  </a:txBody>
+                  <a:tcPr marL="54864" marR="54864" marT="18288" marB="18288" anchor="ctr">
+                    <a:solidFill>
+                      <a:srgbClr val="F3F5F9"/>
+                    </a:solidFill>
+                  </a:tcPr>
+                </a:tc>
               </a:tr>
-              <a:tr h="420624">
+              <a:tr h="324612">
                 <a:tc>
                   <a:txBody>
                     <a:bodyPr wrap="square"/>
@@ -35212,22 +36131,13 @@
                     <a:p>
                       <a:pPr algn="l"/>
                       <a:r>
-                        <a:rPr sz="1200" b="0" i="0">
-                          <a:solidFill>
-                            <a:srgbClr val="1F2A44"/>
-                          </a:solidFill>
-                          <a:latin typeface="Arial"/>
-                        </a:rPr>
-                        <a:t>full + </a:t>
-                      </a:r>
-                      <a:r>
-                        <a:rPr sz="1200" b="0" i="0">
-                          <a:solidFill>
-                            <a:srgbClr val="1F2A44"/>
-                          </a:solidFill>
-                          <a:latin typeface="Consolas"/>
-                        </a:rPr>
-                        <a:t>ibac:observe</a:t>
+                        <a:rPr sz="1100" b="0" i="0">
+                          <a:solidFill>
+                            <a:srgbClr val="1F2A44"/>
+                          </a:solidFill>
+                          <a:latin typeface="Arial"/>
+                        </a:rPr>
+                        <a:t>5</a:t>
                       </a:r>
                     </a:p>
                   </a:txBody>
@@ -35242,15 +36152,38 @@
                     <a:bodyPr wrap="square"/>
                     <a:lstStyle/>
                     <a:p>
+                      <a:pPr algn="l"/>
+                      <a:r>
+                        <a:rPr sz="1100" b="0" i="0">
+                          <a:solidFill>
+                            <a:srgbClr val="1F2A44"/>
+                          </a:solidFill>
+                          <a:latin typeface="Arial"/>
+                        </a:rPr>
+                        <a:t>gsm8k</a:t>
+                      </a:r>
+                    </a:p>
+                  </a:txBody>
+                  <a:tcPr marL="54864" marR="54864" marT="18288" marB="18288" anchor="ctr">
+                    <a:solidFill>
+                      <a:srgbClr val="FFFFFF"/>
+                    </a:solidFill>
+                  </a:tcPr>
+                </a:tc>
+                <a:tc>
+                  <a:txBody>
+                    <a:bodyPr wrap="square"/>
+                    <a:lstStyle/>
+                    <a:p>
                       <a:pPr algn="r"/>
                       <a:r>
-                        <a:rPr sz="1200" b="0" i="0">
-                          <a:solidFill>
-                            <a:srgbClr val="1F2A44"/>
-                          </a:solidFill>
-                          <a:latin typeface="Arial"/>
-                        </a:rPr>
-                        <a:t>1.583</a:t>
+                        <a:rPr sz="1100" b="0" i="0">
+                          <a:solidFill>
+                            <a:srgbClr val="1F2A44"/>
+                          </a:solidFill>
+                          <a:latin typeface="Arial"/>
+                        </a:rPr>
+                        <a:t>1.00</a:t>
                       </a:r>
                     </a:p>
                   </a:txBody>
@@ -35267,13 +36200,13 @@
                     <a:p>
                       <a:pPr algn="r"/>
                       <a:r>
-                        <a:rPr sz="1200" b="0" i="0">
-                          <a:solidFill>
-                            <a:srgbClr val="1F2A44"/>
-                          </a:solidFill>
-                          <a:latin typeface="Arial"/>
-                        </a:rPr>
-                        <a:t>1.607</a:t>
+                        <a:rPr sz="1100" b="0" i="0">
+                          <a:solidFill>
+                            <a:srgbClr val="1F2A44"/>
+                          </a:solidFill>
+                          <a:latin typeface="Arial"/>
+                        </a:rPr>
+                        <a:t>1.00</a:t>
                       </a:r>
                     </a:p>
                   </a:txBody>
@@ -35290,13 +36223,13 @@
                     <a:p>
                       <a:pPr algn="r"/>
                       <a:r>
-                        <a:rPr sz="1200" b="0" i="0">
-                          <a:solidFill>
-                            <a:srgbClr val="1F2A44"/>
-                          </a:solidFill>
-                          <a:latin typeface="Arial"/>
-                        </a:rPr>
-                        <a:t>−0.00</a:t>
+                        <a:rPr sz="1100" b="0" i="0">
+                          <a:solidFill>
+                            <a:srgbClr val="1F2A44"/>
+                          </a:solidFill>
+                          <a:latin typeface="Arial"/>
+                        </a:rPr>
+                        <a:t>2,635</a:t>
                       </a:r>
                     </a:p>
                   </a:txBody>
@@ -35313,13 +36246,1934 @@
                     <a:p>
                       <a:pPr algn="r"/>
                       <a:r>
-                        <a:rPr sz="1200" b="0" i="0">
-                          <a:solidFill>
-                            <a:srgbClr val="1F2A44"/>
-                          </a:solidFill>
-                          <a:latin typeface="Arial"/>
-                        </a:rPr>
-                        <a:t>+0.00</a:t>
+                        <a:rPr sz="1100" b="0" i="0">
+                          <a:solidFill>
+                            <a:srgbClr val="1F2A44"/>
+                          </a:solidFill>
+                          <a:latin typeface="Arial"/>
+                        </a:rPr>
+                        <a:t>5,556</a:t>
+                      </a:r>
+                    </a:p>
+                  </a:txBody>
+                  <a:tcPr marL="54864" marR="54864" marT="18288" marB="18288" anchor="ctr">
+                    <a:solidFill>
+                      <a:srgbClr val="FFFFFF"/>
+                    </a:solidFill>
+                  </a:tcPr>
+                </a:tc>
+                <a:tc>
+                  <a:txBody>
+                    <a:bodyPr wrap="square"/>
+                    <a:lstStyle/>
+                    <a:p>
+                      <a:pPr algn="r"/>
+                      <a:r>
+                        <a:rPr sz="1100" b="0" i="0">
+                          <a:solidFill>
+                            <a:srgbClr val="1F2A44"/>
+                          </a:solidFill>
+                          <a:latin typeface="Arial"/>
+                        </a:rPr>
+                        <a:t>14 s</a:t>
+                      </a:r>
+                    </a:p>
+                  </a:txBody>
+                  <a:tcPr marL="54864" marR="54864" marT="18288" marB="18288" anchor="ctr">
+                    <a:solidFill>
+                      <a:srgbClr val="FFFFFF"/>
+                    </a:solidFill>
+                  </a:tcPr>
+                </a:tc>
+                <a:tc>
+                  <a:txBody>
+                    <a:bodyPr wrap="square"/>
+                    <a:lstStyle/>
+                    <a:p>
+                      <a:pPr algn="r"/>
+                      <a:r>
+                        <a:rPr sz="1100" b="0" i="0">
+                          <a:solidFill>
+                            <a:srgbClr val="1F2A44"/>
+                          </a:solidFill>
+                          <a:latin typeface="Arial"/>
+                        </a:rPr>
+                        <a:t>10 s</a:t>
+                      </a:r>
+                    </a:p>
+                  </a:txBody>
+                  <a:tcPr marL="54864" marR="54864" marT="18288" marB="18288" anchor="ctr">
+                    <a:solidFill>
+                      <a:srgbClr val="FFFFFF"/>
+                    </a:solidFill>
+                  </a:tcPr>
+                </a:tc>
+                <a:tc>
+                  <a:txBody>
+                    <a:bodyPr wrap="square"/>
+                    <a:lstStyle/>
+                    <a:p>
+                      <a:pPr algn="r"/>
+                      <a:r>
+                        <a:rPr sz="1100" b="0" i="0">
+                          <a:solidFill>
+                            <a:srgbClr val="1F2A44"/>
+                          </a:solidFill>
+                          <a:latin typeface="Arial"/>
+                        </a:rPr>
+                        <a:t>$0.0025</a:t>
+                      </a:r>
+                    </a:p>
+                  </a:txBody>
+                  <a:tcPr marL="54864" marR="54864" marT="18288" marB="18288" anchor="ctr">
+                    <a:solidFill>
+                      <a:srgbClr val="FFFFFF"/>
+                    </a:solidFill>
+                  </a:tcPr>
+                </a:tc>
+                <a:tc>
+                  <a:txBody>
+                    <a:bodyPr wrap="square"/>
+                    <a:lstStyle/>
+                    <a:p>
+                      <a:pPr algn="r"/>
+                      <a:r>
+                        <a:rPr sz="1100" b="0" i="0">
+                          <a:solidFill>
+                            <a:srgbClr val="1F2A44"/>
+                          </a:solidFill>
+                          <a:latin typeface="Arial"/>
+                        </a:rPr>
+                        <a:t>$0.00</a:t>
+                      </a:r>
+                    </a:p>
+                  </a:txBody>
+                  <a:tcPr marL="54864" marR="54864" marT="18288" marB="18288" anchor="ctr">
+                    <a:solidFill>
+                      <a:srgbClr val="FFFFFF"/>
+                    </a:solidFill>
+                  </a:tcPr>
+                </a:tc>
+              </a:tr>
+              <a:tr h="324612">
+                <a:tc>
+                  <a:txBody>
+                    <a:bodyPr wrap="square"/>
+                    <a:lstStyle/>
+                    <a:p>
+                      <a:pPr algn="l"/>
+                      <a:r>
+                        <a:rPr sz="1100" b="0" i="0">
+                          <a:solidFill>
+                            <a:srgbClr val="1F2A44"/>
+                          </a:solidFill>
+                          <a:latin typeface="Arial"/>
+                        </a:rPr>
+                        <a:t>6</a:t>
+                      </a:r>
+                    </a:p>
+                  </a:txBody>
+                  <a:tcPr marL="54864" marR="54864" marT="18288" marB="18288" anchor="ctr">
+                    <a:solidFill>
+                      <a:srgbClr val="F3F5F9"/>
+                    </a:solidFill>
+                  </a:tcPr>
+                </a:tc>
+                <a:tc>
+                  <a:txBody>
+                    <a:bodyPr wrap="square"/>
+                    <a:lstStyle/>
+                    <a:p>
+                      <a:pPr algn="l"/>
+                      <a:r>
+                        <a:rPr sz="1100" b="0" i="0">
+                          <a:solidFill>
+                            <a:srgbClr val="1F2A44"/>
+                          </a:solidFill>
+                          <a:latin typeface="Arial"/>
+                        </a:rPr>
+                        <a:t>gsm8k</a:t>
+                      </a:r>
+                    </a:p>
+                  </a:txBody>
+                  <a:tcPr marL="54864" marR="54864" marT="18288" marB="18288" anchor="ctr">
+                    <a:solidFill>
+                      <a:srgbClr val="F3F5F9"/>
+                    </a:solidFill>
+                  </a:tcPr>
+                </a:tc>
+                <a:tc>
+                  <a:txBody>
+                    <a:bodyPr wrap="square"/>
+                    <a:lstStyle/>
+                    <a:p>
+                      <a:pPr algn="r"/>
+                      <a:r>
+                        <a:rPr sz="1100" b="0" i="0">
+                          <a:solidFill>
+                            <a:srgbClr val="1F2A44"/>
+                          </a:solidFill>
+                          <a:latin typeface="Arial"/>
+                        </a:rPr>
+                        <a:t>1.00</a:t>
+                      </a:r>
+                    </a:p>
+                  </a:txBody>
+                  <a:tcPr marL="54864" marR="54864" marT="18288" marB="18288" anchor="ctr">
+                    <a:solidFill>
+                      <a:srgbClr val="F3F5F9"/>
+                    </a:solidFill>
+                  </a:tcPr>
+                </a:tc>
+                <a:tc>
+                  <a:txBody>
+                    <a:bodyPr wrap="square"/>
+                    <a:lstStyle/>
+                    <a:p>
+                      <a:pPr algn="r"/>
+                      <a:r>
+                        <a:rPr sz="1100" b="0" i="0">
+                          <a:solidFill>
+                            <a:srgbClr val="1F2A44"/>
+                          </a:solidFill>
+                          <a:latin typeface="Arial"/>
+                        </a:rPr>
+                        <a:t>1.00</a:t>
+                      </a:r>
+                    </a:p>
+                  </a:txBody>
+                  <a:tcPr marL="54864" marR="54864" marT="18288" marB="18288" anchor="ctr">
+                    <a:solidFill>
+                      <a:srgbClr val="F3F5F9"/>
+                    </a:solidFill>
+                  </a:tcPr>
+                </a:tc>
+                <a:tc>
+                  <a:txBody>
+                    <a:bodyPr wrap="square"/>
+                    <a:lstStyle/>
+                    <a:p>
+                      <a:pPr algn="r"/>
+                      <a:r>
+                        <a:rPr sz="1100" b="0" i="0">
+                          <a:solidFill>
+                            <a:srgbClr val="1F2A44"/>
+                          </a:solidFill>
+                          <a:latin typeface="Arial"/>
+                        </a:rPr>
+                        <a:t>2,571</a:t>
+                      </a:r>
+                    </a:p>
+                  </a:txBody>
+                  <a:tcPr marL="54864" marR="54864" marT="18288" marB="18288" anchor="ctr">
+                    <a:solidFill>
+                      <a:srgbClr val="F3F5F9"/>
+                    </a:solidFill>
+                  </a:tcPr>
+                </a:tc>
+                <a:tc>
+                  <a:txBody>
+                    <a:bodyPr wrap="square"/>
+                    <a:lstStyle/>
+                    <a:p>
+                      <a:pPr algn="r"/>
+                      <a:r>
+                        <a:rPr sz="1100" b="0" i="0">
+                          <a:solidFill>
+                            <a:srgbClr val="1F2A44"/>
+                          </a:solidFill>
+                          <a:latin typeface="Arial"/>
+                        </a:rPr>
+                        <a:t>5,317</a:t>
+                      </a:r>
+                    </a:p>
+                  </a:txBody>
+                  <a:tcPr marL="54864" marR="54864" marT="18288" marB="18288" anchor="ctr">
+                    <a:solidFill>
+                      <a:srgbClr val="F3F5F9"/>
+                    </a:solidFill>
+                  </a:tcPr>
+                </a:tc>
+                <a:tc>
+                  <a:txBody>
+                    <a:bodyPr wrap="square"/>
+                    <a:lstStyle/>
+                    <a:p>
+                      <a:pPr algn="r"/>
+                      <a:r>
+                        <a:rPr sz="1100" b="0" i="0">
+                          <a:solidFill>
+                            <a:srgbClr val="1F2A44"/>
+                          </a:solidFill>
+                          <a:latin typeface="Arial"/>
+                        </a:rPr>
+                        <a:t>14 s</a:t>
+                      </a:r>
+                    </a:p>
+                  </a:txBody>
+                  <a:tcPr marL="54864" marR="54864" marT="18288" marB="18288" anchor="ctr">
+                    <a:solidFill>
+                      <a:srgbClr val="F3F5F9"/>
+                    </a:solidFill>
+                  </a:tcPr>
+                </a:tc>
+                <a:tc>
+                  <a:txBody>
+                    <a:bodyPr wrap="square"/>
+                    <a:lstStyle/>
+                    <a:p>
+                      <a:pPr algn="r"/>
+                      <a:r>
+                        <a:rPr sz="1100" b="0" i="0">
+                          <a:solidFill>
+                            <a:srgbClr val="1F2A44"/>
+                          </a:solidFill>
+                          <a:latin typeface="Arial"/>
+                        </a:rPr>
+                        <a:t>27 s</a:t>
+                      </a:r>
+                    </a:p>
+                  </a:txBody>
+                  <a:tcPr marL="54864" marR="54864" marT="18288" marB="18288" anchor="ctr">
+                    <a:solidFill>
+                      <a:srgbClr val="F3F5F9"/>
+                    </a:solidFill>
+                  </a:tcPr>
+                </a:tc>
+                <a:tc>
+                  <a:txBody>
+                    <a:bodyPr wrap="square"/>
+                    <a:lstStyle/>
+                    <a:p>
+                      <a:pPr algn="r"/>
+                      <a:r>
+                        <a:rPr sz="1100" b="0" i="0">
+                          <a:solidFill>
+                            <a:srgbClr val="1F2A44"/>
+                          </a:solidFill>
+                          <a:latin typeface="Arial"/>
+                        </a:rPr>
+                        <a:t>$0.0024</a:t>
+                      </a:r>
+                    </a:p>
+                  </a:txBody>
+                  <a:tcPr marL="54864" marR="54864" marT="18288" marB="18288" anchor="ctr">
+                    <a:solidFill>
+                      <a:srgbClr val="F3F5F9"/>
+                    </a:solidFill>
+                  </a:tcPr>
+                </a:tc>
+                <a:tc>
+                  <a:txBody>
+                    <a:bodyPr wrap="square"/>
+                    <a:lstStyle/>
+                    <a:p>
+                      <a:pPr algn="r"/>
+                      <a:r>
+                        <a:rPr sz="1100" b="0" i="0">
+                          <a:solidFill>
+                            <a:srgbClr val="1F2A44"/>
+                          </a:solidFill>
+                          <a:latin typeface="Arial"/>
+                        </a:rPr>
+                        <a:t>$0.00</a:t>
+                      </a:r>
+                    </a:p>
+                  </a:txBody>
+                  <a:tcPr marL="54864" marR="54864" marT="18288" marB="18288" anchor="ctr">
+                    <a:solidFill>
+                      <a:srgbClr val="F3F5F9"/>
+                    </a:solidFill>
+                  </a:tcPr>
+                </a:tc>
+              </a:tr>
+              <a:tr h="324612">
+                <a:tc>
+                  <a:txBody>
+                    <a:bodyPr wrap="square"/>
+                    <a:lstStyle/>
+                    <a:p>
+                      <a:pPr algn="l"/>
+                      <a:r>
+                        <a:rPr sz="1100" b="0" i="0">
+                          <a:solidFill>
+                            <a:srgbClr val="1F2A44"/>
+                          </a:solidFill>
+                          <a:latin typeface="Arial"/>
+                        </a:rPr>
+                        <a:t>7</a:t>
+                      </a:r>
+                    </a:p>
+                  </a:txBody>
+                  <a:tcPr marL="54864" marR="54864" marT="18288" marB="18288" anchor="ctr">
+                    <a:solidFill>
+                      <a:srgbClr val="FFFFFF"/>
+                    </a:solidFill>
+                  </a:tcPr>
+                </a:tc>
+                <a:tc>
+                  <a:txBody>
+                    <a:bodyPr wrap="square"/>
+                    <a:lstStyle/>
+                    <a:p>
+                      <a:pPr algn="l"/>
+                      <a:r>
+                        <a:rPr sz="1100" b="0" i="0">
+                          <a:solidFill>
+                            <a:srgbClr val="1F2A44"/>
+                          </a:solidFill>
+                          <a:latin typeface="Arial"/>
+                        </a:rPr>
+                        <a:t>gsm8k</a:t>
+                      </a:r>
+                    </a:p>
+                  </a:txBody>
+                  <a:tcPr marL="54864" marR="54864" marT="18288" marB="18288" anchor="ctr">
+                    <a:solidFill>
+                      <a:srgbClr val="FFFFFF"/>
+                    </a:solidFill>
+                  </a:tcPr>
+                </a:tc>
+                <a:tc>
+                  <a:txBody>
+                    <a:bodyPr wrap="square"/>
+                    <a:lstStyle/>
+                    <a:p>
+                      <a:pPr algn="r"/>
+                      <a:r>
+                        <a:rPr sz="1100" b="0" i="0">
+                          <a:solidFill>
+                            <a:srgbClr val="1F2A44"/>
+                          </a:solidFill>
+                          <a:latin typeface="Arial"/>
+                        </a:rPr>
+                        <a:t>1.00</a:t>
+                      </a:r>
+                    </a:p>
+                  </a:txBody>
+                  <a:tcPr marL="54864" marR="54864" marT="18288" marB="18288" anchor="ctr">
+                    <a:solidFill>
+                      <a:srgbClr val="FFFFFF"/>
+                    </a:solidFill>
+                  </a:tcPr>
+                </a:tc>
+                <a:tc>
+                  <a:txBody>
+                    <a:bodyPr wrap="square"/>
+                    <a:lstStyle/>
+                    <a:p>
+                      <a:pPr algn="r"/>
+                      <a:r>
+                        <a:rPr sz="1100" b="0" i="0">
+                          <a:solidFill>
+                            <a:srgbClr val="1F2A44"/>
+                          </a:solidFill>
+                          <a:latin typeface="Arial"/>
+                        </a:rPr>
+                        <a:t>1.00</a:t>
+                      </a:r>
+                    </a:p>
+                  </a:txBody>
+                  <a:tcPr marL="54864" marR="54864" marT="18288" marB="18288" anchor="ctr">
+                    <a:solidFill>
+                      <a:srgbClr val="FFFFFF"/>
+                    </a:solidFill>
+                  </a:tcPr>
+                </a:tc>
+                <a:tc>
+                  <a:txBody>
+                    <a:bodyPr wrap="square"/>
+                    <a:lstStyle/>
+                    <a:p>
+                      <a:pPr algn="r"/>
+                      <a:r>
+                        <a:rPr sz="1100" b="0" i="0">
+                          <a:solidFill>
+                            <a:srgbClr val="1F2A44"/>
+                          </a:solidFill>
+                          <a:latin typeface="Arial"/>
+                        </a:rPr>
+                        <a:t>2,379</a:t>
+                      </a:r>
+                    </a:p>
+                  </a:txBody>
+                  <a:tcPr marL="54864" marR="54864" marT="18288" marB="18288" anchor="ctr">
+                    <a:solidFill>
+                      <a:srgbClr val="FFFFFF"/>
+                    </a:solidFill>
+                  </a:tcPr>
+                </a:tc>
+                <a:tc>
+                  <a:txBody>
+                    <a:bodyPr wrap="square"/>
+                    <a:lstStyle/>
+                    <a:p>
+                      <a:pPr algn="r"/>
+                      <a:r>
+                        <a:rPr sz="1100" b="0" i="0">
+                          <a:solidFill>
+                            <a:srgbClr val="1F2A44"/>
+                          </a:solidFill>
+                          <a:latin typeface="Arial"/>
+                        </a:rPr>
+                        <a:t>5,468</a:t>
+                      </a:r>
+                    </a:p>
+                  </a:txBody>
+                  <a:tcPr marL="54864" marR="54864" marT="18288" marB="18288" anchor="ctr">
+                    <a:solidFill>
+                      <a:srgbClr val="FFFFFF"/>
+                    </a:solidFill>
+                  </a:tcPr>
+                </a:tc>
+                <a:tc>
+                  <a:txBody>
+                    <a:bodyPr wrap="square"/>
+                    <a:lstStyle/>
+                    <a:p>
+                      <a:pPr algn="r"/>
+                      <a:r>
+                        <a:rPr sz="1100" b="0" i="0">
+                          <a:solidFill>
+                            <a:srgbClr val="1F2A44"/>
+                          </a:solidFill>
+                          <a:latin typeface="Arial"/>
+                        </a:rPr>
+                        <a:t>12 s</a:t>
+                      </a:r>
+                    </a:p>
+                  </a:txBody>
+                  <a:tcPr marL="54864" marR="54864" marT="18288" marB="18288" anchor="ctr">
+                    <a:solidFill>
+                      <a:srgbClr val="FFFFFF"/>
+                    </a:solidFill>
+                  </a:tcPr>
+                </a:tc>
+                <a:tc>
+                  <a:txBody>
+                    <a:bodyPr wrap="square"/>
+                    <a:lstStyle/>
+                    <a:p>
+                      <a:pPr algn="r"/>
+                      <a:r>
+                        <a:rPr sz="1100" b="0" i="0">
+                          <a:solidFill>
+                            <a:srgbClr val="1F2A44"/>
+                          </a:solidFill>
+                          <a:latin typeface="Arial"/>
+                        </a:rPr>
+                        <a:t>21 s</a:t>
+                      </a:r>
+                    </a:p>
+                  </a:txBody>
+                  <a:tcPr marL="54864" marR="54864" marT="18288" marB="18288" anchor="ctr">
+                    <a:solidFill>
+                      <a:srgbClr val="FFFFFF"/>
+                    </a:solidFill>
+                  </a:tcPr>
+                </a:tc>
+                <a:tc>
+                  <a:txBody>
+                    <a:bodyPr wrap="square"/>
+                    <a:lstStyle/>
+                    <a:p>
+                      <a:pPr algn="r"/>
+                      <a:r>
+                        <a:rPr sz="1100" b="0" i="0">
+                          <a:solidFill>
+                            <a:srgbClr val="1F2A44"/>
+                          </a:solidFill>
+                          <a:latin typeface="Arial"/>
+                        </a:rPr>
+                        <a:t>$0.0020</a:t>
+                      </a:r>
+                    </a:p>
+                  </a:txBody>
+                  <a:tcPr marL="54864" marR="54864" marT="18288" marB="18288" anchor="ctr">
+                    <a:solidFill>
+                      <a:srgbClr val="FFFFFF"/>
+                    </a:solidFill>
+                  </a:tcPr>
+                </a:tc>
+                <a:tc>
+                  <a:txBody>
+                    <a:bodyPr wrap="square"/>
+                    <a:lstStyle/>
+                    <a:p>
+                      <a:pPr algn="r"/>
+                      <a:r>
+                        <a:rPr sz="1100" b="0" i="0">
+                          <a:solidFill>
+                            <a:srgbClr val="1F2A44"/>
+                          </a:solidFill>
+                          <a:latin typeface="Arial"/>
+                        </a:rPr>
+                        <a:t>$0.00</a:t>
+                      </a:r>
+                    </a:p>
+                  </a:txBody>
+                  <a:tcPr marL="54864" marR="54864" marT="18288" marB="18288" anchor="ctr">
+                    <a:solidFill>
+                      <a:srgbClr val="FFFFFF"/>
+                    </a:solidFill>
+                  </a:tcPr>
+                </a:tc>
+              </a:tr>
+              <a:tr h="324612">
+                <a:tc>
+                  <a:txBody>
+                    <a:bodyPr wrap="square"/>
+                    <a:lstStyle/>
+                    <a:p>
+                      <a:pPr algn="l"/>
+                      <a:r>
+                        <a:rPr sz="1100" b="0" i="0">
+                          <a:solidFill>
+                            <a:srgbClr val="1F2A44"/>
+                          </a:solidFill>
+                          <a:latin typeface="Arial"/>
+                        </a:rPr>
+                        <a:t>8</a:t>
+                      </a:r>
+                    </a:p>
+                  </a:txBody>
+                  <a:tcPr marL="54864" marR="54864" marT="18288" marB="18288" anchor="ctr">
+                    <a:solidFill>
+                      <a:srgbClr val="F3F5F9"/>
+                    </a:solidFill>
+                  </a:tcPr>
+                </a:tc>
+                <a:tc>
+                  <a:txBody>
+                    <a:bodyPr wrap="square"/>
+                    <a:lstStyle/>
+                    <a:p>
+                      <a:pPr algn="l"/>
+                      <a:r>
+                        <a:rPr sz="1100" b="0" i="0">
+                          <a:solidFill>
+                            <a:srgbClr val="1F2A44"/>
+                          </a:solidFill>
+                          <a:latin typeface="Arial"/>
+                        </a:rPr>
+                        <a:t>gsm8k</a:t>
+                      </a:r>
+                    </a:p>
+                  </a:txBody>
+                  <a:tcPr marL="54864" marR="54864" marT="18288" marB="18288" anchor="ctr">
+                    <a:solidFill>
+                      <a:srgbClr val="F3F5F9"/>
+                    </a:solidFill>
+                  </a:tcPr>
+                </a:tc>
+                <a:tc>
+                  <a:txBody>
+                    <a:bodyPr wrap="square"/>
+                    <a:lstStyle/>
+                    <a:p>
+                      <a:pPr algn="r"/>
+                      <a:r>
+                        <a:rPr sz="1100" b="0" i="0">
+                          <a:solidFill>
+                            <a:srgbClr val="1F2A44"/>
+                          </a:solidFill>
+                          <a:latin typeface="Arial"/>
+                        </a:rPr>
+                        <a:t>1.00</a:t>
+                      </a:r>
+                    </a:p>
+                  </a:txBody>
+                  <a:tcPr marL="54864" marR="54864" marT="18288" marB="18288" anchor="ctr">
+                    <a:solidFill>
+                      <a:srgbClr val="F3F5F9"/>
+                    </a:solidFill>
+                  </a:tcPr>
+                </a:tc>
+                <a:tc>
+                  <a:txBody>
+                    <a:bodyPr wrap="square"/>
+                    <a:lstStyle/>
+                    <a:p>
+                      <a:pPr algn="r"/>
+                      <a:r>
+                        <a:rPr sz="1100" b="0" i="0">
+                          <a:solidFill>
+                            <a:srgbClr val="1F2A44"/>
+                          </a:solidFill>
+                          <a:latin typeface="Arial"/>
+                        </a:rPr>
+                        <a:t>1.00</a:t>
+                      </a:r>
+                    </a:p>
+                  </a:txBody>
+                  <a:tcPr marL="54864" marR="54864" marT="18288" marB="18288" anchor="ctr">
+                    <a:solidFill>
+                      <a:srgbClr val="F3F5F9"/>
+                    </a:solidFill>
+                  </a:tcPr>
+                </a:tc>
+                <a:tc>
+                  <a:txBody>
+                    <a:bodyPr wrap="square"/>
+                    <a:lstStyle/>
+                    <a:p>
+                      <a:pPr algn="r"/>
+                      <a:r>
+                        <a:rPr sz="1100" b="0" i="0">
+                          <a:solidFill>
+                            <a:srgbClr val="1F2A44"/>
+                          </a:solidFill>
+                          <a:latin typeface="Arial"/>
+                        </a:rPr>
+                        <a:t>2,891</a:t>
+                      </a:r>
+                    </a:p>
+                  </a:txBody>
+                  <a:tcPr marL="54864" marR="54864" marT="18288" marB="18288" anchor="ctr">
+                    <a:solidFill>
+                      <a:srgbClr val="F3F5F9"/>
+                    </a:solidFill>
+                  </a:tcPr>
+                </a:tc>
+                <a:tc>
+                  <a:txBody>
+                    <a:bodyPr wrap="square"/>
+                    <a:lstStyle/>
+                    <a:p>
+                      <a:pPr algn="r"/>
+                      <a:r>
+                        <a:rPr sz="1100" b="0" i="0">
+                          <a:solidFill>
+                            <a:srgbClr val="1F2A44"/>
+                          </a:solidFill>
+                          <a:latin typeface="Arial"/>
+                        </a:rPr>
+                        <a:t>5,324</a:t>
+                      </a:r>
+                    </a:p>
+                  </a:txBody>
+                  <a:tcPr marL="54864" marR="54864" marT="18288" marB="18288" anchor="ctr">
+                    <a:solidFill>
+                      <a:srgbClr val="F3F5F9"/>
+                    </a:solidFill>
+                  </a:tcPr>
+                </a:tc>
+                <a:tc>
+                  <a:txBody>
+                    <a:bodyPr wrap="square"/>
+                    <a:lstStyle/>
+                    <a:p>
+                      <a:pPr algn="r"/>
+                      <a:r>
+                        <a:rPr sz="1100" b="0" i="0">
+                          <a:solidFill>
+                            <a:srgbClr val="1F2A44"/>
+                          </a:solidFill>
+                          <a:latin typeface="Arial"/>
+                        </a:rPr>
+                        <a:t>17 s</a:t>
+                      </a:r>
+                    </a:p>
+                  </a:txBody>
+                  <a:tcPr marL="54864" marR="54864" marT="18288" marB="18288" anchor="ctr">
+                    <a:solidFill>
+                      <a:srgbClr val="F3F5F9"/>
+                    </a:solidFill>
+                  </a:tcPr>
+                </a:tc>
+                <a:tc>
+                  <a:txBody>
+                    <a:bodyPr wrap="square"/>
+                    <a:lstStyle/>
+                    <a:p>
+                      <a:pPr algn="r"/>
+                      <a:r>
+                        <a:rPr sz="1100" b="0" i="0">
+                          <a:solidFill>
+                            <a:srgbClr val="1F2A44"/>
+                          </a:solidFill>
+                          <a:latin typeface="Arial"/>
+                        </a:rPr>
+                        <a:t>19 s</a:t>
+                      </a:r>
+                    </a:p>
+                  </a:txBody>
+                  <a:tcPr marL="54864" marR="54864" marT="18288" marB="18288" anchor="ctr">
+                    <a:solidFill>
+                      <a:srgbClr val="F3F5F9"/>
+                    </a:solidFill>
+                  </a:tcPr>
+                </a:tc>
+                <a:tc>
+                  <a:txBody>
+                    <a:bodyPr wrap="square"/>
+                    <a:lstStyle/>
+                    <a:p>
+                      <a:pPr algn="r"/>
+                      <a:r>
+                        <a:rPr sz="1100" b="0" i="0">
+                          <a:solidFill>
+                            <a:srgbClr val="1F2A44"/>
+                          </a:solidFill>
+                          <a:latin typeface="Arial"/>
+                        </a:rPr>
+                        <a:t>$0.0030</a:t>
+                      </a:r>
+                    </a:p>
+                  </a:txBody>
+                  <a:tcPr marL="54864" marR="54864" marT="18288" marB="18288" anchor="ctr">
+                    <a:solidFill>
+                      <a:srgbClr val="F3F5F9"/>
+                    </a:solidFill>
+                  </a:tcPr>
+                </a:tc>
+                <a:tc>
+                  <a:txBody>
+                    <a:bodyPr wrap="square"/>
+                    <a:lstStyle/>
+                    <a:p>
+                      <a:pPr algn="r"/>
+                      <a:r>
+                        <a:rPr sz="1100" b="0" i="0">
+                          <a:solidFill>
+                            <a:srgbClr val="1F2A44"/>
+                          </a:solidFill>
+                          <a:latin typeface="Arial"/>
+                        </a:rPr>
+                        <a:t>$0.00</a:t>
+                      </a:r>
+                    </a:p>
+                  </a:txBody>
+                  <a:tcPr marL="54864" marR="54864" marT="18288" marB="18288" anchor="ctr">
+                    <a:solidFill>
+                      <a:srgbClr val="F3F5F9"/>
+                    </a:solidFill>
+                  </a:tcPr>
+                </a:tc>
+              </a:tr>
+              <a:tr h="324612">
+                <a:tc>
+                  <a:txBody>
+                    <a:bodyPr wrap="square"/>
+                    <a:lstStyle/>
+                    <a:p>
+                      <a:pPr algn="l"/>
+                      <a:r>
+                        <a:rPr sz="1100" b="0" i="0">
+                          <a:solidFill>
+                            <a:srgbClr val="1F2A44"/>
+                          </a:solidFill>
+                          <a:latin typeface="Arial"/>
+                        </a:rPr>
+                        <a:t>9</a:t>
+                      </a:r>
+                    </a:p>
+                  </a:txBody>
+                  <a:tcPr marL="54864" marR="54864" marT="18288" marB="18288" anchor="ctr">
+                    <a:solidFill>
+                      <a:srgbClr val="FFFFFF"/>
+                    </a:solidFill>
+                  </a:tcPr>
+                </a:tc>
+                <a:tc>
+                  <a:txBody>
+                    <a:bodyPr wrap="square"/>
+                    <a:lstStyle/>
+                    <a:p>
+                      <a:pPr algn="l"/>
+                      <a:r>
+                        <a:rPr sz="1100" b="0" i="0">
+                          <a:solidFill>
+                            <a:srgbClr val="1F2A44"/>
+                          </a:solidFill>
+                          <a:latin typeface="Arial"/>
+                        </a:rPr>
+                        <a:t>tau2</a:t>
+                      </a:r>
+                    </a:p>
+                  </a:txBody>
+                  <a:tcPr marL="54864" marR="54864" marT="18288" marB="18288" anchor="ctr">
+                    <a:solidFill>
+                      <a:srgbClr val="FFFFFF"/>
+                    </a:solidFill>
+                  </a:tcPr>
+                </a:tc>
+                <a:tc>
+                  <a:txBody>
+                    <a:bodyPr wrap="square"/>
+                    <a:lstStyle/>
+                    <a:p>
+                      <a:pPr algn="r"/>
+                      <a:r>
+                        <a:rPr sz="1100" b="0" i="0">
+                          <a:solidFill>
+                            <a:srgbClr val="1F2A44"/>
+                          </a:solidFill>
+                          <a:latin typeface="Arial"/>
+                        </a:rPr>
+                        <a:t>0.90</a:t>
+                      </a:r>
+                    </a:p>
+                  </a:txBody>
+                  <a:tcPr marL="54864" marR="54864" marT="18288" marB="18288" anchor="ctr">
+                    <a:solidFill>
+                      <a:srgbClr val="FFFFFF"/>
+                    </a:solidFill>
+                  </a:tcPr>
+                </a:tc>
+                <a:tc>
+                  <a:txBody>
+                    <a:bodyPr wrap="square"/>
+                    <a:lstStyle/>
+                    <a:p>
+                      <a:pPr algn="r"/>
+                      <a:r>
+                        <a:rPr sz="1100" b="0" i="0">
+                          <a:solidFill>
+                            <a:srgbClr val="1F2A44"/>
+                          </a:solidFill>
+                          <a:latin typeface="Arial"/>
+                        </a:rPr>
+                        <a:t>1.00</a:t>
+                      </a:r>
+                    </a:p>
+                  </a:txBody>
+                  <a:tcPr marL="54864" marR="54864" marT="18288" marB="18288" anchor="ctr">
+                    <a:solidFill>
+                      <a:srgbClr val="FFFFFF"/>
+                    </a:solidFill>
+                  </a:tcPr>
+                </a:tc>
+                <a:tc>
+                  <a:txBody>
+                    <a:bodyPr wrap="square"/>
+                    <a:lstStyle/>
+                    <a:p>
+                      <a:pPr algn="r"/>
+                      <a:r>
+                        <a:rPr sz="1100" b="0" i="0">
+                          <a:solidFill>
+                            <a:srgbClr val="1F2A44"/>
+                          </a:solidFill>
+                          <a:latin typeface="Arial"/>
+                        </a:rPr>
+                        <a:t>988.0 K</a:t>
+                      </a:r>
+                    </a:p>
+                  </a:txBody>
+                  <a:tcPr marL="54864" marR="54864" marT="18288" marB="18288" anchor="ctr">
+                    <a:solidFill>
+                      <a:srgbClr val="FFFFFF"/>
+                    </a:solidFill>
+                  </a:tcPr>
+                </a:tc>
+                <a:tc>
+                  <a:txBody>
+                    <a:bodyPr wrap="square"/>
+                    <a:lstStyle/>
+                    <a:p>
+                      <a:pPr algn="r"/>
+                      <a:r>
+                        <a:rPr sz="1100" b="0" i="0">
+                          <a:solidFill>
+                            <a:srgbClr val="1F2A44"/>
+                          </a:solidFill>
+                          <a:latin typeface="Arial"/>
+                        </a:rPr>
+                        <a:t>844.5 K</a:t>
+                      </a:r>
+                    </a:p>
+                  </a:txBody>
+                  <a:tcPr marL="54864" marR="54864" marT="18288" marB="18288" anchor="ctr">
+                    <a:solidFill>
+                      <a:srgbClr val="FFFFFF"/>
+                    </a:solidFill>
+                  </a:tcPr>
+                </a:tc>
+                <a:tc>
+                  <a:txBody>
+                    <a:bodyPr wrap="square"/>
+                    <a:lstStyle/>
+                    <a:p>
+                      <a:pPr algn="r"/>
+                      <a:r>
+                        <a:rPr sz="1100" b="0" i="0">
+                          <a:solidFill>
+                            <a:srgbClr val="1F2A44"/>
+                          </a:solidFill>
+                          <a:latin typeface="Arial"/>
+                        </a:rPr>
+                        <a:t>705 s</a:t>
+                      </a:r>
+                    </a:p>
+                  </a:txBody>
+                  <a:tcPr marL="54864" marR="54864" marT="18288" marB="18288" anchor="ctr">
+                    <a:solidFill>
+                      <a:srgbClr val="FFFFFF"/>
+                    </a:solidFill>
+                  </a:tcPr>
+                </a:tc>
+                <a:tc>
+                  <a:txBody>
+                    <a:bodyPr wrap="square"/>
+                    <a:lstStyle/>
+                    <a:p>
+                      <a:pPr algn="r"/>
+                      <a:r>
+                        <a:rPr sz="1100" b="0" i="0">
+                          <a:solidFill>
+                            <a:srgbClr val="1F2A44"/>
+                          </a:solidFill>
+                          <a:latin typeface="Arial"/>
+                        </a:rPr>
+                        <a:t>879 s</a:t>
+                      </a:r>
+                    </a:p>
+                  </a:txBody>
+                  <a:tcPr marL="54864" marR="54864" marT="18288" marB="18288" anchor="ctr">
+                    <a:solidFill>
+                      <a:srgbClr val="FFFFFF"/>
+                    </a:solidFill>
+                  </a:tcPr>
+                </a:tc>
+                <a:tc>
+                  <a:txBody>
+                    <a:bodyPr wrap="square"/>
+                    <a:lstStyle/>
+                    <a:p>
+                      <a:pPr algn="r"/>
+                      <a:r>
+                        <a:rPr sz="1100" b="0" i="0">
+                          <a:solidFill>
+                            <a:srgbClr val="1F2A44"/>
+                          </a:solidFill>
+                          <a:latin typeface="Arial"/>
+                        </a:rPr>
+                        <a:t>$1.64</a:t>
+                      </a:r>
+                    </a:p>
+                  </a:txBody>
+                  <a:tcPr marL="54864" marR="54864" marT="18288" marB="18288" anchor="ctr">
+                    <a:solidFill>
+                      <a:srgbClr val="FFFFFF"/>
+                    </a:solidFill>
+                  </a:tcPr>
+                </a:tc>
+                <a:tc>
+                  <a:txBody>
+                    <a:bodyPr wrap="square"/>
+                    <a:lstStyle/>
+                    <a:p>
+                      <a:pPr algn="r"/>
+                      <a:r>
+                        <a:rPr sz="1100" b="0" i="0">
+                          <a:solidFill>
+                            <a:srgbClr val="1F2A44"/>
+                          </a:solidFill>
+                          <a:latin typeface="Arial"/>
+                        </a:rPr>
+                        <a:t>$0.00</a:t>
+                      </a:r>
+                    </a:p>
+                  </a:txBody>
+                  <a:tcPr marL="54864" marR="54864" marT="18288" marB="18288" anchor="ctr">
+                    <a:solidFill>
+                      <a:srgbClr val="FFFFFF"/>
+                    </a:solidFill>
+                  </a:tcPr>
+                </a:tc>
+              </a:tr>
+              <a:tr h="324612">
+                <a:tc>
+                  <a:txBody>
+                    <a:bodyPr wrap="square"/>
+                    <a:lstStyle/>
+                    <a:p>
+                      <a:pPr algn="l"/>
+                      <a:r>
+                        <a:rPr sz="1100" b="0" i="0">
+                          <a:solidFill>
+                            <a:srgbClr val="1F2A44"/>
+                          </a:solidFill>
+                          <a:latin typeface="Arial"/>
+                        </a:rPr>
+                        <a:t>10</a:t>
+                      </a:r>
+                    </a:p>
+                  </a:txBody>
+                  <a:tcPr marL="54864" marR="54864" marT="18288" marB="18288" anchor="ctr">
+                    <a:solidFill>
+                      <a:srgbClr val="F3F5F9"/>
+                    </a:solidFill>
+                  </a:tcPr>
+                </a:tc>
+                <a:tc>
+                  <a:txBody>
+                    <a:bodyPr wrap="square"/>
+                    <a:lstStyle/>
+                    <a:p>
+                      <a:pPr algn="l"/>
+                      <a:r>
+                        <a:rPr sz="1100" b="0" i="0">
+                          <a:solidFill>
+                            <a:srgbClr val="1F2A44"/>
+                          </a:solidFill>
+                          <a:latin typeface="Arial"/>
+                        </a:rPr>
+                        <a:t>tau2</a:t>
+                      </a:r>
+                    </a:p>
+                  </a:txBody>
+                  <a:tcPr marL="54864" marR="54864" marT="18288" marB="18288" anchor="ctr">
+                    <a:solidFill>
+                      <a:srgbClr val="F3F5F9"/>
+                    </a:solidFill>
+                  </a:tcPr>
+                </a:tc>
+                <a:tc>
+                  <a:txBody>
+                    <a:bodyPr wrap="square"/>
+                    <a:lstStyle/>
+                    <a:p>
+                      <a:pPr algn="r"/>
+                      <a:r>
+                        <a:rPr sz="1100" b="0" i="0">
+                          <a:solidFill>
+                            <a:srgbClr val="1F2A44"/>
+                          </a:solidFill>
+                          <a:latin typeface="Arial"/>
+                        </a:rPr>
+                        <a:t>0.80</a:t>
+                      </a:r>
+                    </a:p>
+                  </a:txBody>
+                  <a:tcPr marL="54864" marR="54864" marT="18288" marB="18288" anchor="ctr">
+                    <a:solidFill>
+                      <a:srgbClr val="F3F5F9"/>
+                    </a:solidFill>
+                  </a:tcPr>
+                </a:tc>
+                <a:tc>
+                  <a:txBody>
+                    <a:bodyPr wrap="square"/>
+                    <a:lstStyle/>
+                    <a:p>
+                      <a:pPr algn="r"/>
+                      <a:r>
+                        <a:rPr sz="1100" b="0" i="0">
+                          <a:solidFill>
+                            <a:srgbClr val="1F2A44"/>
+                          </a:solidFill>
+                          <a:latin typeface="Arial"/>
+                        </a:rPr>
+                        <a:t>0.85</a:t>
+                      </a:r>
+                    </a:p>
+                  </a:txBody>
+                  <a:tcPr marL="54864" marR="54864" marT="18288" marB="18288" anchor="ctr">
+                    <a:solidFill>
+                      <a:srgbClr val="F3F5F9"/>
+                    </a:solidFill>
+                  </a:tcPr>
+                </a:tc>
+                <a:tc>
+                  <a:txBody>
+                    <a:bodyPr wrap="square"/>
+                    <a:lstStyle/>
+                    <a:p>
+                      <a:pPr algn="r"/>
+                      <a:r>
+                        <a:rPr sz="1100" b="0" i="0">
+                          <a:solidFill>
+                            <a:srgbClr val="1F2A44"/>
+                          </a:solidFill>
+                          <a:latin typeface="Arial"/>
+                        </a:rPr>
+                        <a:t>1.75 M</a:t>
+                      </a:r>
+                    </a:p>
+                  </a:txBody>
+                  <a:tcPr marL="54864" marR="54864" marT="18288" marB="18288" anchor="ctr">
+                    <a:solidFill>
+                      <a:srgbClr val="F3F5F9"/>
+                    </a:solidFill>
+                  </a:tcPr>
+                </a:tc>
+                <a:tc>
+                  <a:txBody>
+                    <a:bodyPr wrap="square"/>
+                    <a:lstStyle/>
+                    <a:p>
+                      <a:pPr algn="r"/>
+                      <a:r>
+                        <a:rPr sz="1100" b="0" i="0">
+                          <a:solidFill>
+                            <a:srgbClr val="1F2A44"/>
+                          </a:solidFill>
+                          <a:latin typeface="Arial"/>
+                        </a:rPr>
+                        <a:t>1.36 M</a:t>
+                      </a:r>
+                    </a:p>
+                  </a:txBody>
+                  <a:tcPr marL="54864" marR="54864" marT="18288" marB="18288" anchor="ctr">
+                    <a:solidFill>
+                      <a:srgbClr val="F3F5F9"/>
+                    </a:solidFill>
+                  </a:tcPr>
+                </a:tc>
+                <a:tc>
+                  <a:txBody>
+                    <a:bodyPr wrap="square"/>
+                    <a:lstStyle/>
+                    <a:p>
+                      <a:pPr algn="r"/>
+                      <a:r>
+                        <a:rPr sz="1100" b="0" i="0">
+                          <a:solidFill>
+                            <a:srgbClr val="1F2A44"/>
+                          </a:solidFill>
+                          <a:latin typeface="Arial"/>
+                        </a:rPr>
+                        <a:t>877 s</a:t>
+                      </a:r>
+                    </a:p>
+                  </a:txBody>
+                  <a:tcPr marL="54864" marR="54864" marT="18288" marB="18288" anchor="ctr">
+                    <a:solidFill>
+                      <a:srgbClr val="F3F5F9"/>
+                    </a:solidFill>
+                  </a:tcPr>
+                </a:tc>
+                <a:tc>
+                  <a:txBody>
+                    <a:bodyPr wrap="square"/>
+                    <a:lstStyle/>
+                    <a:p>
+                      <a:pPr algn="r"/>
+                      <a:r>
+                        <a:rPr sz="1100" b="0" i="0">
+                          <a:solidFill>
+                            <a:srgbClr val="1F2A44"/>
+                          </a:solidFill>
+                          <a:latin typeface="Arial"/>
+                        </a:rPr>
+                        <a:t>441 s</a:t>
+                      </a:r>
+                    </a:p>
+                  </a:txBody>
+                  <a:tcPr marL="54864" marR="54864" marT="18288" marB="18288" anchor="ctr">
+                    <a:solidFill>
+                      <a:srgbClr val="F3F5F9"/>
+                    </a:solidFill>
+                  </a:tcPr>
+                </a:tc>
+                <a:tc>
+                  <a:txBody>
+                    <a:bodyPr wrap="square"/>
+                    <a:lstStyle/>
+                    <a:p>
+                      <a:pPr algn="r"/>
+                      <a:r>
+                        <a:rPr sz="1100" b="0" i="0">
+                          <a:solidFill>
+                            <a:srgbClr val="1F2A44"/>
+                          </a:solidFill>
+                          <a:latin typeface="Arial"/>
+                        </a:rPr>
+                        <a:t>$2.89</a:t>
+                      </a:r>
+                    </a:p>
+                  </a:txBody>
+                  <a:tcPr marL="54864" marR="54864" marT="18288" marB="18288" anchor="ctr">
+                    <a:solidFill>
+                      <a:srgbClr val="F3F5F9"/>
+                    </a:solidFill>
+                  </a:tcPr>
+                </a:tc>
+                <a:tc>
+                  <a:txBody>
+                    <a:bodyPr wrap="square"/>
+                    <a:lstStyle/>
+                    <a:p>
+                      <a:pPr algn="r"/>
+                      <a:r>
+                        <a:rPr sz="1100" b="0" i="0">
+                          <a:solidFill>
+                            <a:srgbClr val="1F2A44"/>
+                          </a:solidFill>
+                          <a:latin typeface="Arial"/>
+                        </a:rPr>
+                        <a:t>$0.00</a:t>
+                      </a:r>
+                    </a:p>
+                  </a:txBody>
+                  <a:tcPr marL="54864" marR="54864" marT="18288" marB="18288" anchor="ctr">
+                    <a:solidFill>
+                      <a:srgbClr val="F3F5F9"/>
+                    </a:solidFill>
+                  </a:tcPr>
+                </a:tc>
+              </a:tr>
+              <a:tr h="324612">
+                <a:tc>
+                  <a:txBody>
+                    <a:bodyPr wrap="square"/>
+                    <a:lstStyle/>
+                    <a:p>
+                      <a:pPr algn="l"/>
+                      <a:r>
+                        <a:rPr sz="1100" b="0" i="0">
+                          <a:solidFill>
+                            <a:srgbClr val="1F2A44"/>
+                          </a:solidFill>
+                          <a:latin typeface="Arial"/>
+                        </a:rPr>
+                        <a:t>11</a:t>
+                      </a:r>
+                    </a:p>
+                  </a:txBody>
+                  <a:tcPr marL="54864" marR="54864" marT="18288" marB="18288" anchor="ctr">
+                    <a:solidFill>
+                      <a:srgbClr val="FFFFFF"/>
+                    </a:solidFill>
+                  </a:tcPr>
+                </a:tc>
+                <a:tc>
+                  <a:txBody>
+                    <a:bodyPr wrap="square"/>
+                    <a:lstStyle/>
+                    <a:p>
+                      <a:pPr algn="l"/>
+                      <a:r>
+                        <a:rPr sz="1100" b="0" i="0">
+                          <a:solidFill>
+                            <a:srgbClr val="1F2A44"/>
+                          </a:solidFill>
+                          <a:latin typeface="Arial"/>
+                        </a:rPr>
+                        <a:t>appworld</a:t>
+                      </a:r>
+                    </a:p>
+                  </a:txBody>
+                  <a:tcPr marL="54864" marR="54864" marT="18288" marB="18288" anchor="ctr">
+                    <a:solidFill>
+                      <a:srgbClr val="FFFFFF"/>
+                    </a:solidFill>
+                  </a:tcPr>
+                </a:tc>
+                <a:tc>
+                  <a:txBody>
+                    <a:bodyPr wrap="square"/>
+                    <a:lstStyle/>
+                    <a:p>
+                      <a:pPr algn="r"/>
+                      <a:r>
+                        <a:rPr sz="1100" b="0" i="0">
+                          <a:solidFill>
+                            <a:srgbClr val="1F2A44"/>
+                          </a:solidFill>
+                          <a:latin typeface="Arial"/>
+                        </a:rPr>
+                        <a:t>0.00</a:t>
+                      </a:r>
+                    </a:p>
+                  </a:txBody>
+                  <a:tcPr marL="54864" marR="54864" marT="18288" marB="18288" anchor="ctr">
+                    <a:solidFill>
+                      <a:srgbClr val="FFFFFF"/>
+                    </a:solidFill>
+                  </a:tcPr>
+                </a:tc>
+                <a:tc>
+                  <a:txBody>
+                    <a:bodyPr wrap="square"/>
+                    <a:lstStyle/>
+                    <a:p>
+                      <a:pPr algn="r"/>
+                      <a:r>
+                        <a:rPr sz="1100" b="0" i="0">
+                          <a:solidFill>
+                            <a:srgbClr val="1F2A44"/>
+                          </a:solidFill>
+                          <a:latin typeface="Arial"/>
+                        </a:rPr>
+                        <a:t>0.00</a:t>
+                      </a:r>
+                    </a:p>
+                  </a:txBody>
+                  <a:tcPr marL="54864" marR="54864" marT="18288" marB="18288" anchor="ctr">
+                    <a:solidFill>
+                      <a:srgbClr val="FFFFFF"/>
+                    </a:solidFill>
+                  </a:tcPr>
+                </a:tc>
+                <a:tc>
+                  <a:txBody>
+                    <a:bodyPr wrap="square"/>
+                    <a:lstStyle/>
+                    <a:p>
+                      <a:pPr algn="r"/>
+                      <a:r>
+                        <a:rPr sz="1100" b="0" i="0">
+                          <a:solidFill>
+                            <a:srgbClr val="1F2A44"/>
+                          </a:solidFill>
+                          <a:latin typeface="Arial"/>
+                        </a:rPr>
+                        <a:t>1.01 M</a:t>
+                      </a:r>
+                    </a:p>
+                  </a:txBody>
+                  <a:tcPr marL="54864" marR="54864" marT="18288" marB="18288" anchor="ctr">
+                    <a:solidFill>
+                      <a:srgbClr val="FFFFFF"/>
+                    </a:solidFill>
+                  </a:tcPr>
+                </a:tc>
+                <a:tc>
+                  <a:txBody>
+                    <a:bodyPr wrap="square"/>
+                    <a:lstStyle/>
+                    <a:p>
+                      <a:pPr algn="r"/>
+                      <a:r>
+                        <a:rPr sz="1100" b="0" i="0">
+                          <a:solidFill>
+                            <a:srgbClr val="1F2A44"/>
+                          </a:solidFill>
+                          <a:latin typeface="Arial"/>
+                        </a:rPr>
+                        <a:t>759.5 K</a:t>
+                      </a:r>
+                    </a:p>
+                  </a:txBody>
+                  <a:tcPr marL="54864" marR="54864" marT="18288" marB="18288" anchor="ctr">
+                    <a:solidFill>
+                      <a:srgbClr val="FFFFFF"/>
+                    </a:solidFill>
+                  </a:tcPr>
+                </a:tc>
+                <a:tc>
+                  <a:txBody>
+                    <a:bodyPr wrap="square"/>
+                    <a:lstStyle/>
+                    <a:p>
+                      <a:pPr algn="r"/>
+                      <a:r>
+                        <a:rPr sz="1100" b="0" i="0">
+                          <a:solidFill>
+                            <a:srgbClr val="1F2A44"/>
+                          </a:solidFill>
+                          <a:latin typeface="Arial"/>
+                        </a:rPr>
+                        <a:t>1,629 s</a:t>
+                      </a:r>
+                    </a:p>
+                  </a:txBody>
+                  <a:tcPr marL="54864" marR="54864" marT="18288" marB="18288" anchor="ctr">
+                    <a:solidFill>
+                      <a:srgbClr val="FFFFFF"/>
+                    </a:solidFill>
+                  </a:tcPr>
+                </a:tc>
+                <a:tc>
+                  <a:txBody>
+                    <a:bodyPr wrap="square"/>
+                    <a:lstStyle/>
+                    <a:p>
+                      <a:pPr algn="r"/>
+                      <a:r>
+                        <a:rPr sz="1100" b="0" i="0">
+                          <a:solidFill>
+                            <a:srgbClr val="1F2A44"/>
+                          </a:solidFill>
+                          <a:latin typeface="Arial"/>
+                        </a:rPr>
+                        <a:t>2,058 s</a:t>
+                      </a:r>
+                    </a:p>
+                  </a:txBody>
+                  <a:tcPr marL="54864" marR="54864" marT="18288" marB="18288" anchor="ctr">
+                    <a:solidFill>
+                      <a:srgbClr val="FFFFFF"/>
+                    </a:solidFill>
+                  </a:tcPr>
+                </a:tc>
+                <a:tc>
+                  <a:txBody>
+                    <a:bodyPr wrap="square"/>
+                    <a:lstStyle/>
+                    <a:p>
+                      <a:pPr algn="r"/>
+                      <a:r>
+                        <a:rPr sz="1100" b="0" i="0">
+                          <a:solidFill>
+                            <a:srgbClr val="1F2A44"/>
+                          </a:solidFill>
+                          <a:latin typeface="Arial"/>
+                        </a:rPr>
+                        <a:t>$2.11</a:t>
+                      </a:r>
+                    </a:p>
+                  </a:txBody>
+                  <a:tcPr marL="54864" marR="54864" marT="18288" marB="18288" anchor="ctr">
+                    <a:solidFill>
+                      <a:srgbClr val="FFFFFF"/>
+                    </a:solidFill>
+                  </a:tcPr>
+                </a:tc>
+                <a:tc>
+                  <a:txBody>
+                    <a:bodyPr wrap="square"/>
+                    <a:lstStyle/>
+                    <a:p>
+                      <a:pPr algn="r"/>
+                      <a:r>
+                        <a:rPr sz="1100" b="0" i="0">
+                          <a:solidFill>
+                            <a:srgbClr val="1F2A44"/>
+                          </a:solidFill>
+                          <a:latin typeface="Arial"/>
+                        </a:rPr>
+                        <a:t>$0.00</a:t>
+                      </a:r>
+                    </a:p>
+                  </a:txBody>
+                  <a:tcPr marL="54864" marR="54864" marT="18288" marB="18288" anchor="ctr">
+                    <a:solidFill>
+                      <a:srgbClr val="FFFFFF"/>
+                    </a:solidFill>
+                  </a:tcPr>
+                </a:tc>
+              </a:tr>
+              <a:tr h="324612">
+                <a:tc>
+                  <a:txBody>
+                    <a:bodyPr wrap="square"/>
+                    <a:lstStyle/>
+                    <a:p>
+                      <a:pPr algn="l"/>
+                      <a:r>
+                        <a:rPr sz="1100" b="0" i="0">
+                          <a:solidFill>
+                            <a:srgbClr val="1F2A44"/>
+                          </a:solidFill>
+                          <a:latin typeface="Arial"/>
+                        </a:rPr>
+                        <a:t>12</a:t>
+                      </a:r>
+                    </a:p>
+                  </a:txBody>
+                  <a:tcPr marL="54864" marR="54864" marT="18288" marB="18288" anchor="ctr">
+                    <a:solidFill>
+                      <a:srgbClr val="F3F5F9"/>
+                    </a:solidFill>
+                  </a:tcPr>
+                </a:tc>
+                <a:tc>
+                  <a:txBody>
+                    <a:bodyPr wrap="square"/>
+                    <a:lstStyle/>
+                    <a:p>
+                      <a:pPr algn="l"/>
+                      <a:r>
+                        <a:rPr sz="1100" b="0" i="0">
+                          <a:solidFill>
+                            <a:srgbClr val="1F2A44"/>
+                          </a:solidFill>
+                          <a:latin typeface="Arial"/>
+                        </a:rPr>
+                        <a:t>appworld</a:t>
+                      </a:r>
+                    </a:p>
+                  </a:txBody>
+                  <a:tcPr marL="54864" marR="54864" marT="18288" marB="18288" anchor="ctr">
+                    <a:solidFill>
+                      <a:srgbClr val="F3F5F9"/>
+                    </a:solidFill>
+                  </a:tcPr>
+                </a:tc>
+                <a:tc>
+                  <a:txBody>
+                    <a:bodyPr wrap="square"/>
+                    <a:lstStyle/>
+                    <a:p>
+                      <a:pPr algn="r"/>
+                      <a:r>
+                        <a:rPr sz="1100" b="0" i="0">
+                          <a:solidFill>
+                            <a:srgbClr val="1F2A44"/>
+                          </a:solidFill>
+                          <a:latin typeface="Arial"/>
+                        </a:rPr>
+                        <a:t>0.00</a:t>
+                      </a:r>
+                    </a:p>
+                  </a:txBody>
+                  <a:tcPr marL="54864" marR="54864" marT="18288" marB="18288" anchor="ctr">
+                    <a:solidFill>
+                      <a:srgbClr val="F3F5F9"/>
+                    </a:solidFill>
+                  </a:tcPr>
+                </a:tc>
+                <a:tc>
+                  <a:txBody>
+                    <a:bodyPr wrap="square"/>
+                    <a:lstStyle/>
+                    <a:p>
+                      <a:pPr algn="r"/>
+                      <a:r>
+                        <a:rPr sz="1100" b="0" i="0">
+                          <a:solidFill>
+                            <a:srgbClr val="1F2A44"/>
+                          </a:solidFill>
+                          <a:latin typeface="Arial"/>
+                        </a:rPr>
+                        <a:t>0.00</a:t>
+                      </a:r>
+                    </a:p>
+                  </a:txBody>
+                  <a:tcPr marL="54864" marR="54864" marT="18288" marB="18288" anchor="ctr">
+                    <a:solidFill>
+                      <a:srgbClr val="F3F5F9"/>
+                    </a:solidFill>
+                  </a:tcPr>
+                </a:tc>
+                <a:tc>
+                  <a:txBody>
+                    <a:bodyPr wrap="square"/>
+                    <a:lstStyle/>
+                    <a:p>
+                      <a:pPr algn="r"/>
+                      <a:r>
+                        <a:rPr sz="1100" b="0" i="0">
+                          <a:solidFill>
+                            <a:srgbClr val="1F2A44"/>
+                          </a:solidFill>
+                          <a:latin typeface="Arial"/>
+                        </a:rPr>
+                        <a:t>5.91 M</a:t>
+                      </a:r>
+                    </a:p>
+                  </a:txBody>
+                  <a:tcPr marL="54864" marR="54864" marT="18288" marB="18288" anchor="ctr">
+                    <a:solidFill>
+                      <a:srgbClr val="F3F5F9"/>
+                    </a:solidFill>
+                  </a:tcPr>
+                </a:tc>
+                <a:tc>
+                  <a:txBody>
+                    <a:bodyPr wrap="square"/>
+                    <a:lstStyle/>
+                    <a:p>
+                      <a:pPr algn="r"/>
+                      <a:r>
+                        <a:rPr sz="1100" b="0" i="0">
+                          <a:solidFill>
+                            <a:srgbClr val="1F2A44"/>
+                          </a:solidFill>
+                          <a:latin typeface="Arial"/>
+                        </a:rPr>
+                        <a:t>2.29 M</a:t>
+                      </a:r>
+                    </a:p>
+                  </a:txBody>
+                  <a:tcPr marL="54864" marR="54864" marT="18288" marB="18288" anchor="ctr">
+                    <a:solidFill>
+                      <a:srgbClr val="F3F5F9"/>
+                    </a:solidFill>
+                  </a:tcPr>
+                </a:tc>
+                <a:tc>
+                  <a:txBody>
+                    <a:bodyPr wrap="square"/>
+                    <a:lstStyle/>
+                    <a:p>
+                      <a:pPr algn="r"/>
+                      <a:r>
+                        <a:rPr sz="1100" b="0" i="0">
+                          <a:solidFill>
+                            <a:srgbClr val="1F2A44"/>
+                          </a:solidFill>
+                          <a:latin typeface="Arial"/>
+                        </a:rPr>
+                        <a:t>1,782 s</a:t>
+                      </a:r>
+                    </a:p>
+                  </a:txBody>
+                  <a:tcPr marL="54864" marR="54864" marT="18288" marB="18288" anchor="ctr">
+                    <a:solidFill>
+                      <a:srgbClr val="F3F5F9"/>
+                    </a:solidFill>
+                  </a:tcPr>
+                </a:tc>
+                <a:tc>
+                  <a:txBody>
+                    <a:bodyPr wrap="square"/>
+                    <a:lstStyle/>
+                    <a:p>
+                      <a:pPr algn="r"/>
+                      <a:r>
+                        <a:rPr sz="1100" b="0" i="0">
+                          <a:solidFill>
+                            <a:srgbClr val="1F2A44"/>
+                          </a:solidFill>
+                          <a:latin typeface="Arial"/>
+                        </a:rPr>
+                        <a:t>2,482 s</a:t>
+                      </a:r>
+                    </a:p>
+                  </a:txBody>
+                  <a:tcPr marL="54864" marR="54864" marT="18288" marB="18288" anchor="ctr">
+                    <a:solidFill>
+                      <a:srgbClr val="F3F5F9"/>
+                    </a:solidFill>
+                  </a:tcPr>
+                </a:tc>
+                <a:tc>
+                  <a:txBody>
+                    <a:bodyPr wrap="square"/>
+                    <a:lstStyle/>
+                    <a:p>
+                      <a:pPr algn="r"/>
+                      <a:r>
+                        <a:rPr sz="1100" b="0" i="0">
+                          <a:solidFill>
+                            <a:srgbClr val="1F2A44"/>
+                          </a:solidFill>
+                          <a:latin typeface="Arial"/>
+                        </a:rPr>
+                        <a:t>$12.02</a:t>
+                      </a:r>
+                    </a:p>
+                  </a:txBody>
+                  <a:tcPr marL="54864" marR="54864" marT="18288" marB="18288" anchor="ctr">
+                    <a:solidFill>
+                      <a:srgbClr val="F3F5F9"/>
+                    </a:solidFill>
+                  </a:tcPr>
+                </a:tc>
+                <a:tc>
+                  <a:txBody>
+                    <a:bodyPr wrap="square"/>
+                    <a:lstStyle/>
+                    <a:p>
+                      <a:pPr algn="r"/>
+                      <a:r>
+                        <a:rPr sz="1100" b="0" i="0">
+                          <a:solidFill>
+                            <a:srgbClr val="1F2A44"/>
+                          </a:solidFill>
+                          <a:latin typeface="Arial"/>
+                        </a:rPr>
+                        <a:t>$0.00</a:t>
+                      </a:r>
+                    </a:p>
+                  </a:txBody>
+                  <a:tcPr marL="54864" marR="54864" marT="18288" marB="18288" anchor="ctr">
+                    <a:solidFill>
+                      <a:srgbClr val="F3F5F9"/>
+                    </a:solidFill>
+                  </a:tcPr>
+                </a:tc>
+              </a:tr>
+              <a:tr h="324612">
+                <a:tc>
+                  <a:txBody>
+                    <a:bodyPr wrap="square"/>
+                    <a:lstStyle/>
+                    <a:p>
+                      <a:pPr algn="l"/>
+                    </a:p>
+                  </a:txBody>
+                  <a:tcPr marL="54864" marR="54864" marT="18288" marB="18288" anchor="ctr">
+                    <a:solidFill>
+                      <a:srgbClr val="FFFFFF"/>
+                    </a:solidFill>
+                  </a:tcPr>
+                </a:tc>
+                <a:tc>
+                  <a:txBody>
+                    <a:bodyPr wrap="square"/>
+                    <a:lstStyle/>
+                    <a:p>
+                      <a:pPr algn="l"/>
+                      <a:r>
+                        <a:rPr sz="1100" b="1" i="0">
+                          <a:solidFill>
+                            <a:srgbClr val="1F2A44"/>
+                          </a:solidFill>
+                          <a:latin typeface="Arial"/>
+                        </a:rPr>
+                        <a:t>all 12</a:t>
+                      </a:r>
+                    </a:p>
+                  </a:txBody>
+                  <a:tcPr marL="54864" marR="54864" marT="18288" marB="18288" anchor="ctr">
+                    <a:solidFill>
+                      <a:srgbClr val="FFFFFF"/>
+                    </a:solidFill>
+                  </a:tcPr>
+                </a:tc>
+                <a:tc>
+                  <a:txBody>
+                    <a:bodyPr wrap="square"/>
+                    <a:lstStyle/>
+                    <a:p>
+                      <a:pPr algn="r"/>
+                    </a:p>
+                  </a:txBody>
+                  <a:tcPr marL="54864" marR="54864" marT="18288" marB="18288" anchor="ctr">
+                    <a:solidFill>
+                      <a:srgbClr val="FFFFFF"/>
+                    </a:solidFill>
+                  </a:tcPr>
+                </a:tc>
+                <a:tc>
+                  <a:txBody>
+                    <a:bodyPr wrap="square"/>
+                    <a:lstStyle/>
+                    <a:p>
+                      <a:pPr algn="r"/>
+                    </a:p>
+                  </a:txBody>
+                  <a:tcPr marL="54864" marR="54864" marT="18288" marB="18288" anchor="ctr">
+                    <a:solidFill>
+                      <a:srgbClr val="FFFFFF"/>
+                    </a:solidFill>
+                  </a:tcPr>
+                </a:tc>
+                <a:tc>
+                  <a:txBody>
+                    <a:bodyPr wrap="square"/>
+                    <a:lstStyle/>
+                    <a:p>
+                      <a:pPr algn="r"/>
+                      <a:r>
+                        <a:rPr sz="1100" b="1" i="0">
+                          <a:solidFill>
+                            <a:srgbClr val="1F2A44"/>
+                          </a:solidFill>
+                          <a:latin typeface="Arial"/>
+                        </a:rPr>
+                        <a:t>9.70 M</a:t>
+                      </a:r>
+                    </a:p>
+                  </a:txBody>
+                  <a:tcPr marL="54864" marR="54864" marT="18288" marB="18288" anchor="ctr">
+                    <a:solidFill>
+                      <a:srgbClr val="FFFFFF"/>
+                    </a:solidFill>
+                  </a:tcPr>
+                </a:tc>
+                <a:tc>
+                  <a:txBody>
+                    <a:bodyPr wrap="square"/>
+                    <a:lstStyle/>
+                    <a:p>
+                      <a:pPr algn="r"/>
+                      <a:r>
+                        <a:rPr sz="1100" b="1" i="0">
+                          <a:solidFill>
+                            <a:srgbClr val="1F2A44"/>
+                          </a:solidFill>
+                          <a:latin typeface="Arial"/>
+                        </a:rPr>
+                        <a:t>5.37 M</a:t>
+                      </a:r>
+                    </a:p>
+                  </a:txBody>
+                  <a:tcPr marL="54864" marR="54864" marT="18288" marB="18288" anchor="ctr">
+                    <a:solidFill>
+                      <a:srgbClr val="FFFFFF"/>
+                    </a:solidFill>
+                  </a:tcPr>
+                </a:tc>
+                <a:tc>
+                  <a:txBody>
+                    <a:bodyPr wrap="square"/>
+                    <a:lstStyle/>
+                    <a:p>
+                      <a:pPr algn="r"/>
+                      <a:r>
+                        <a:rPr sz="1100" b="1" i="0">
+                          <a:solidFill>
+                            <a:srgbClr val="1F2A44"/>
+                          </a:solidFill>
+                          <a:latin typeface="Arial"/>
+                        </a:rPr>
+                        <a:t>5,165 s</a:t>
+                      </a:r>
+                    </a:p>
+                  </a:txBody>
+                  <a:tcPr marL="54864" marR="54864" marT="18288" marB="18288" anchor="ctr">
+                    <a:solidFill>
+                      <a:srgbClr val="FFFFFF"/>
+                    </a:solidFill>
+                  </a:tcPr>
+                </a:tc>
+                <a:tc>
+                  <a:txBody>
+                    <a:bodyPr wrap="square"/>
+                    <a:lstStyle/>
+                    <a:p>
+                      <a:pPr algn="r"/>
+                      <a:r>
+                        <a:rPr sz="1100" b="1" i="0">
+                          <a:solidFill>
+                            <a:srgbClr val="1F2A44"/>
+                          </a:solidFill>
+                          <a:latin typeface="Arial"/>
+                        </a:rPr>
+                        <a:t>6,119 s</a:t>
+                      </a:r>
+                    </a:p>
+                  </a:txBody>
+                  <a:tcPr marL="54864" marR="54864" marT="18288" marB="18288" anchor="ctr">
+                    <a:solidFill>
+                      <a:srgbClr val="FFFFFF"/>
+                    </a:solidFill>
+                  </a:tcPr>
+                </a:tc>
+                <a:tc>
+                  <a:txBody>
+                    <a:bodyPr wrap="square"/>
+                    <a:lstStyle/>
+                    <a:p>
+                      <a:pPr algn="r"/>
+                      <a:r>
+                        <a:rPr sz="1100" b="1" i="0">
+                          <a:solidFill>
+                            <a:srgbClr val="1F2A44"/>
+                          </a:solidFill>
+                          <a:latin typeface="Arial"/>
+                        </a:rPr>
+                        <a:t>$18.70</a:t>
+                      </a:r>
+                    </a:p>
+                  </a:txBody>
+                  <a:tcPr marL="54864" marR="54864" marT="18288" marB="18288" anchor="ctr">
+                    <a:solidFill>
+                      <a:srgbClr val="FFFFFF"/>
+                    </a:solidFill>
+                  </a:tcPr>
+                </a:tc>
+                <a:tc>
+                  <a:txBody>
+                    <a:bodyPr wrap="square"/>
+                    <a:lstStyle/>
+                    <a:p>
+                      <a:pPr algn="r"/>
+                      <a:r>
+                        <a:rPr sz="1100" b="1" i="0">
+                          <a:solidFill>
+                            <a:srgbClr val="1F2A44"/>
+                          </a:solidFill>
+                          <a:latin typeface="Arial"/>
+                        </a:rPr>
+                        <a:t>$0.00</a:t>
                       </a:r>
                     </a:p>
                   </a:txBody>
@@ -35334,658 +38188,6 @@
           </a:graphicData>
         </a:graphic>
       </p:graphicFrame>
-      <p:graphicFrame>
-        <p:nvGraphicFramePr>
-          <p:cNvPr id="9" name="Table 8"/>
-          <p:cNvGraphicFramePr>
-            <a:graphicFrameLocks noGrp="1"/>
-          </p:cNvGraphicFramePr>
-          <p:nvPr/>
-        </p:nvGraphicFramePr>
-        <p:xfrm>
-          <a:off x="411480" y="4069080"/>
-          <a:ext cx="6400800" cy="2103120"/>
-        </p:xfrm>
-        <a:graphic>
-          <a:graphicData uri="http://schemas.openxmlformats.org/drawingml/2006/table">
-            <a:tbl>
-              <a:tblPr firstRow="0" bandRow="0">
-                <a:tableStyleId>{5C22544A-7EE6-4342-B048-85BDC9FD1C3A}</a:tableStyleId>
-              </a:tblPr>
-              <a:tblGrid>
-                <a:gridCol w="2651760"/>
-                <a:gridCol w="1280160"/>
-                <a:gridCol w="1280160"/>
-                <a:gridCol w="1188720"/>
-              </a:tblGrid>
-              <a:tr h="420624">
-                <a:tc>
-                  <a:txBody>
-                    <a:bodyPr wrap="square"/>
-                    <a:lstStyle/>
-                    <a:p>
-                      <a:pPr algn="l"/>
-                      <a:r>
-                        <a:rPr sz="1200" b="1" i="0">
-                          <a:solidFill>
-                            <a:srgbClr val="FFFFFF"/>
-                          </a:solidFill>
-                          <a:latin typeface="Arial"/>
-                        </a:rPr>
-                        <a:t>does the finding travel?</a:t>
-                      </a:r>
-                    </a:p>
-                  </a:txBody>
-                  <a:tcPr marL="54864" marR="54864" marT="18288" marB="18288" anchor="ctr">
-                    <a:solidFill>
-                      <a:srgbClr val="1F2A44"/>
-                    </a:solidFill>
-                  </a:tcPr>
-                </a:tc>
-                <a:tc>
-                  <a:txBody>
-                    <a:bodyPr wrap="square"/>
-                    <a:lstStyle/>
-                    <a:p>
-                      <a:pPr algn="r"/>
-                      <a:r>
-                        <a:rPr sz="1200" b="1" i="0">
-                          <a:solidFill>
-                            <a:srgbClr val="FFFFFF"/>
-                          </a:solidFill>
-                          <a:latin typeface="Arial"/>
-                        </a:rPr>
-                        <a:t>OpenShift</a:t>
-                      </a:r>
-                    </a:p>
-                  </a:txBody>
-                  <a:tcPr marL="54864" marR="54864" marT="18288" marB="18288" anchor="ctr">
-                    <a:solidFill>
-                      <a:srgbClr val="1F2A44"/>
-                    </a:solidFill>
-                  </a:tcPr>
-                </a:tc>
-                <a:tc>
-                  <a:txBody>
-                    <a:bodyPr wrap="square"/>
-                    <a:lstStyle/>
-                    <a:p>
-                      <a:pPr algn="r"/>
-                      <a:r>
-                        <a:rPr sz="1200" b="1" i="0">
-                          <a:solidFill>
-                            <a:srgbClr val="FFFFFF"/>
-                          </a:solidFill>
-                          <a:latin typeface="Arial"/>
-                        </a:rPr>
-                        <a:t>KinD</a:t>
-                      </a:r>
-                    </a:p>
-                  </a:txBody>
-                  <a:tcPr marL="54864" marR="54864" marT="18288" marB="18288" anchor="ctr">
-                    <a:solidFill>
-                      <a:srgbClr val="1F2A44"/>
-                    </a:solidFill>
-                  </a:tcPr>
-                </a:tc>
-                <a:tc>
-                  <a:txBody>
-                    <a:bodyPr wrap="square"/>
-                    <a:lstStyle/>
-                    <a:p>
-                      <a:pPr algn="r"/>
-                      <a:r>
-                        <a:rPr sz="1200" b="1" i="0">
-                          <a:solidFill>
-                            <a:srgbClr val="FFFFFF"/>
-                          </a:solidFill>
-                          <a:latin typeface="Arial"/>
-                        </a:rPr>
-                        <a:t>travels?</a:t>
-                      </a:r>
-                    </a:p>
-                  </a:txBody>
-                  <a:tcPr marL="54864" marR="54864" marT="18288" marB="18288" anchor="ctr">
-                    <a:solidFill>
-                      <a:srgbClr val="1F2A44"/>
-                    </a:solidFill>
-                  </a:tcPr>
-                </a:tc>
-              </a:tr>
-              <a:tr h="420624">
-                <a:tc>
-                  <a:txBody>
-                    <a:bodyPr wrap="square"/>
-                    <a:lstStyle/>
-                    <a:p>
-                      <a:pPr algn="l"/>
-                      <a:r>
-                        <a:rPr sz="1200" b="0" i="0">
-                          <a:solidFill>
-                            <a:srgbClr val="1F2A44"/>
-                          </a:solidFill>
-                          <a:latin typeface="Arial"/>
-                        </a:rPr>
-                        <a:t>which layer costs anything</a:t>
-                      </a:r>
-                    </a:p>
-                  </a:txBody>
-                  <a:tcPr marL="54864" marR="54864" marT="18288" marB="18288" anchor="ctr">
-                    <a:solidFill>
-                      <a:srgbClr val="FFFFFF"/>
-                    </a:solidFill>
-                  </a:tcPr>
-                </a:tc>
-                <a:tc>
-                  <a:txBody>
-                    <a:bodyPr wrap="square"/>
-                    <a:lstStyle/>
-                    <a:p>
-                      <a:pPr algn="r"/>
-                      <a:r>
-                        <a:rPr sz="1200" b="0" i="0">
-                          <a:solidFill>
-                            <a:srgbClr val="1F2A44"/>
-                          </a:solidFill>
-                          <a:latin typeface="Arial"/>
-                        </a:rPr>
-                        <a:t>the judge</a:t>
-                      </a:r>
-                    </a:p>
-                  </a:txBody>
-                  <a:tcPr marL="54864" marR="54864" marT="18288" marB="18288" anchor="ctr">
-                    <a:solidFill>
-                      <a:srgbClr val="FFFFFF"/>
-                    </a:solidFill>
-                  </a:tcPr>
-                </a:tc>
-                <a:tc>
-                  <a:txBody>
-                    <a:bodyPr wrap="square"/>
-                    <a:lstStyle/>
-                    <a:p>
-                      <a:pPr algn="r"/>
-                      <a:r>
-                        <a:rPr sz="1200" b="0" i="0">
-                          <a:solidFill>
-                            <a:srgbClr val="1F2A44"/>
-                          </a:solidFill>
-                          <a:latin typeface="Arial"/>
-                        </a:rPr>
-                        <a:t>the judge</a:t>
-                      </a:r>
-                    </a:p>
-                  </a:txBody>
-                  <a:tcPr marL="54864" marR="54864" marT="18288" marB="18288" anchor="ctr">
-                    <a:solidFill>
-                      <a:srgbClr val="FFFFFF"/>
-                    </a:solidFill>
-                  </a:tcPr>
-                </a:tc>
-                <a:tc>
-                  <a:txBody>
-                    <a:bodyPr wrap="square"/>
-                    <a:lstStyle/>
-                    <a:p>
-                      <a:pPr algn="r"/>
-                      <a:r>
-                        <a:rPr sz="1200" b="0" i="0">
-                          <a:solidFill>
-                            <a:srgbClr val="1F2A44"/>
-                          </a:solidFill>
-                          <a:latin typeface="Arial"/>
-                        </a:rPr>
-                        <a:t>yes</a:t>
-                      </a:r>
-                    </a:p>
-                  </a:txBody>
-                  <a:tcPr marL="54864" marR="54864" marT="18288" marB="18288" anchor="ctr">
-                    <a:solidFill>
-                      <a:srgbClr val="FFFFFF"/>
-                    </a:solidFill>
-                  </a:tcPr>
-                </a:tc>
-              </a:tr>
-              <a:tr h="420624">
-                <a:tc>
-                  <a:txBody>
-                    <a:bodyPr wrap="square"/>
-                    <a:lstStyle/>
-                    <a:p>
-                      <a:pPr algn="l"/>
-                      <a:r>
-                        <a:rPr sz="1200" b="0" i="0">
-                          <a:solidFill>
-                            <a:srgbClr val="1F2A44"/>
-                          </a:solidFill>
-                          <a:latin typeface="Arial"/>
-                        </a:rPr>
-                        <a:t>serial tool calls judged (p=1)</a:t>
-                      </a:r>
-                    </a:p>
-                  </a:txBody>
-                  <a:tcPr marL="54864" marR="54864" marT="18288" marB="18288" anchor="ctr">
-                    <a:solidFill>
-                      <a:srgbClr val="F3F5F9"/>
-                    </a:solidFill>
-                  </a:tcPr>
-                </a:tc>
-                <a:tc>
-                  <a:txBody>
-                    <a:bodyPr wrap="square"/>
-                    <a:lstStyle/>
-                    <a:p>
-                      <a:pPr algn="r"/>
-                      <a:r>
-                        <a:rPr sz="1200" b="0" i="0">
-                          <a:solidFill>
-                            <a:srgbClr val="1F2A44"/>
-                          </a:solidFill>
-                          <a:latin typeface="Arial"/>
-                        </a:rPr>
-                        <a:t>10 / 10</a:t>
-                      </a:r>
-                    </a:p>
-                  </a:txBody>
-                  <a:tcPr marL="54864" marR="54864" marT="18288" marB="18288" anchor="ctr">
-                    <a:solidFill>
-                      <a:srgbClr val="F3F5F9"/>
-                    </a:solidFill>
-                  </a:tcPr>
-                </a:tc>
-                <a:tc>
-                  <a:txBody>
-                    <a:bodyPr wrap="square"/>
-                    <a:lstStyle/>
-                    <a:p>
-                      <a:pPr algn="r"/>
-                      <a:r>
-                        <a:rPr sz="1200" b="0" i="0">
-                          <a:solidFill>
-                            <a:srgbClr val="1F2A44"/>
-                          </a:solidFill>
-                          <a:latin typeface="Arial"/>
-                        </a:rPr>
-                        <a:t>10 / 10</a:t>
-                      </a:r>
-                    </a:p>
-                  </a:txBody>
-                  <a:tcPr marL="54864" marR="54864" marT="18288" marB="18288" anchor="ctr">
-                    <a:solidFill>
-                      <a:srgbClr val="F3F5F9"/>
-                    </a:solidFill>
-                  </a:tcPr>
-                </a:tc>
-                <a:tc>
-                  <a:txBody>
-                    <a:bodyPr wrap="square"/>
-                    <a:lstStyle/>
-                    <a:p>
-                      <a:pPr algn="r"/>
-                      <a:r>
-                        <a:rPr sz="1200" b="0" i="0">
-                          <a:solidFill>
-                            <a:srgbClr val="1F2A44"/>
-                          </a:solidFill>
-                          <a:latin typeface="Arial"/>
-                        </a:rPr>
-                        <a:t>yes</a:t>
-                      </a:r>
-                    </a:p>
-                  </a:txBody>
-                  <a:tcPr marL="54864" marR="54864" marT="18288" marB="18288" anchor="ctr">
-                    <a:solidFill>
-                      <a:srgbClr val="F3F5F9"/>
-                    </a:solidFill>
-                  </a:tcPr>
-                </a:tc>
-              </a:tr>
-              <a:tr h="420624">
-                <a:tc>
-                  <a:txBody>
-                    <a:bodyPr wrap="square"/>
-                    <a:lstStyle/>
-                    <a:p>
-                      <a:pPr algn="l"/>
-                      <a:r>
-                        <a:rPr sz="1200" b="0" i="0">
-                          <a:solidFill>
-                            <a:srgbClr val="1F2A44"/>
-                          </a:solidFill>
-                          <a:latin typeface="Arial"/>
-                        </a:rPr>
-                        <a:t>judged / tool-call ratio, n=50</a:t>
-                      </a:r>
-                    </a:p>
-                  </a:txBody>
-                  <a:tcPr marL="54864" marR="54864" marT="18288" marB="18288" anchor="ctr">
-                    <a:solidFill>
-                      <a:srgbClr val="FFFFFF"/>
-                    </a:solidFill>
-                  </a:tcPr>
-                </a:tc>
-                <a:tc>
-                  <a:txBody>
-                    <a:bodyPr wrap="square"/>
-                    <a:lstStyle/>
-                    <a:p>
-                      <a:pPr algn="r"/>
-                      <a:r>
-                        <a:rPr sz="1200" b="0" i="0">
-                          <a:solidFill>
-                            <a:srgbClr val="1F2A44"/>
-                          </a:solidFill>
-                          <a:latin typeface="Arial"/>
-                        </a:rPr>
-                        <a:t>0.94–1.00</a:t>
-                      </a:r>
-                    </a:p>
-                  </a:txBody>
-                  <a:tcPr marL="54864" marR="54864" marT="18288" marB="18288" anchor="ctr">
-                    <a:solidFill>
-                      <a:srgbClr val="FFFFFF"/>
-                    </a:solidFill>
-                  </a:tcPr>
-                </a:tc>
-                <a:tc>
-                  <a:txBody>
-                    <a:bodyPr wrap="square"/>
-                    <a:lstStyle/>
-                    <a:p>
-                      <a:pPr algn="r"/>
-                      <a:r>
-                        <a:rPr sz="1200" b="0" i="0">
-                          <a:solidFill>
-                            <a:srgbClr val="1F2A44"/>
-                          </a:solidFill>
-                          <a:latin typeface="Arial"/>
-                        </a:rPr>
-                        <a:t>0.96–1.02</a:t>
-                      </a:r>
-                    </a:p>
-                  </a:txBody>
-                  <a:tcPr marL="54864" marR="54864" marT="18288" marB="18288" anchor="ctr">
-                    <a:solidFill>
-                      <a:srgbClr val="FFFFFF"/>
-                    </a:solidFill>
-                  </a:tcPr>
-                </a:tc>
-                <a:tc>
-                  <a:txBody>
-                    <a:bodyPr wrap="square"/>
-                    <a:lstStyle/>
-                    <a:p>
-                      <a:pPr algn="r"/>
-                      <a:r>
-                        <a:rPr sz="1200" b="0" i="0">
-                          <a:solidFill>
-                            <a:srgbClr val="1F2A44"/>
-                          </a:solidFill>
-                          <a:latin typeface="Arial"/>
-                        </a:rPr>
-                        <a:t>yes</a:t>
-                      </a:r>
-                    </a:p>
-                  </a:txBody>
-                  <a:tcPr marL="54864" marR="54864" marT="18288" marB="18288" anchor="ctr">
-                    <a:solidFill>
-                      <a:srgbClr val="FFFFFF"/>
-                    </a:solidFill>
-                  </a:tcPr>
-                </a:tc>
-              </a:tr>
-              <a:tr h="420624">
-                <a:tc>
-                  <a:txBody>
-                    <a:bodyPr wrap="square"/>
-                    <a:lstStyle/>
-                    <a:p>
-                      <a:pPr algn="l"/>
-                      <a:r>
-                        <a:rPr sz="1200" b="0" i="0">
-                          <a:solidFill>
-                            <a:srgbClr val="1F2A44"/>
-                          </a:solidFill>
-                          <a:latin typeface="Arial"/>
-                        </a:rPr>
-                        <a:t>tau2 measured / projected</a:t>
-                      </a:r>
-                    </a:p>
-                  </a:txBody>
-                  <a:tcPr marL="54864" marR="54864" marT="18288" marB="18288" anchor="ctr">
-                    <a:solidFill>
-                      <a:srgbClr val="F3F5F9"/>
-                    </a:solidFill>
-                  </a:tcPr>
-                </a:tc>
-                <a:tc>
-                  <a:txBody>
-                    <a:bodyPr wrap="square"/>
-                    <a:lstStyle/>
-                    <a:p>
-                      <a:pPr algn="r"/>
-                      <a:r>
-                        <a:rPr sz="1200" b="0" i="0">
-                          <a:solidFill>
-                            <a:srgbClr val="1F2A44"/>
-                          </a:solidFill>
-                          <a:latin typeface="Arial"/>
-                        </a:rPr>
-                        <a:t>1.66×</a:t>
-                      </a:r>
-                    </a:p>
-                  </a:txBody>
-                  <a:tcPr marL="54864" marR="54864" marT="18288" marB="18288" anchor="ctr">
-                    <a:solidFill>
-                      <a:srgbClr val="F3F5F9"/>
-                    </a:solidFill>
-                  </a:tcPr>
-                </a:tc>
-                <a:tc>
-                  <a:txBody>
-                    <a:bodyPr wrap="square"/>
-                    <a:lstStyle/>
-                    <a:p>
-                      <a:pPr algn="r"/>
-                      <a:r>
-                        <a:rPr sz="1200" b="0" i="0">
-                          <a:solidFill>
-                            <a:srgbClr val="1F2A44"/>
-                          </a:solidFill>
-                          <a:latin typeface="Arial"/>
-                        </a:rPr>
-                        <a:t>2.01×</a:t>
-                      </a:r>
-                    </a:p>
-                  </a:txBody>
-                  <a:tcPr marL="54864" marR="54864" marT="18288" marB="18288" anchor="ctr">
-                    <a:solidFill>
-                      <a:srgbClr val="F3F5F9"/>
-                    </a:solidFill>
-                  </a:tcPr>
-                </a:tc>
-                <a:tc>
-                  <a:txBody>
-                    <a:bodyPr wrap="square"/>
-                    <a:lstStyle/>
-                    <a:p>
-                      <a:pPr algn="r"/>
-                      <a:r>
-                        <a:rPr sz="1200" b="0" i="0">
-                          <a:solidFill>
-                            <a:srgbClr val="1F2A44"/>
-                          </a:solidFill>
-                          <a:latin typeface="Arial"/>
-                        </a:rPr>
-                        <a:t>partly</a:t>
-                      </a:r>
-                    </a:p>
-                  </a:txBody>
-                  <a:tcPr marL="54864" marR="54864" marT="18288" marB="18288" anchor="ctr">
-                    <a:solidFill>
-                      <a:srgbClr val="F3F5F9"/>
-                    </a:solidFill>
-                  </a:tcPr>
-                </a:tc>
-              </a:tr>
-            </a:tbl>
-          </a:graphicData>
-        </a:graphic>
-      </p:graphicFrame>
-      <p:sp>
-        <p:nvSpPr>
-          <p:cNvPr id="10" name="Rounded Rectangle 9"/>
-          <p:cNvSpPr/>
-          <p:nvPr/>
-        </p:nvSpPr>
-        <p:spPr>
-          <a:xfrm>
-            <a:off x="7040880" y="1325880"/>
-            <a:ext cx="4736592" cy="1417320"/>
-          </a:xfrm>
-          <a:prstGeom prst="roundRect">
-            <a:avLst>
-              <a:gd name="adj" fmla="val 10322"/>
-            </a:avLst>
-          </a:prstGeom>
-          <a:solidFill>
-            <a:srgbClr val="FFFFFF"/>
-          </a:solidFill>
-          <a:ln w="15875">
-            <a:solidFill>
-              <a:srgbClr val="8A93A3"/>
-            </a:solidFill>
-          </a:ln>
-          <a:effectLst/>
-        </p:spPr>
-        <p:style>
-          <a:lnRef idx="1">
-            <a:schemeClr val="accent1"/>
-          </a:lnRef>
-          <a:fillRef idx="3">
-            <a:schemeClr val="accent1"/>
-          </a:fillRef>
-          <a:effectRef idx="2">
-            <a:schemeClr val="accent1"/>
-          </a:effectRef>
-          <a:fontRef idx="minor">
-            <a:schemeClr val="lt1"/>
-          </a:fontRef>
-        </p:style>
-        <p:txBody>
-          <a:bodyPr rtlCol="0" anchor="t" lIns="73152" rIns="73152" tIns="36576" bIns="36576" wrap="square"/>
-          <a:lstStyle/>
-          <a:p>
-            <a:pPr algn="l">
-              <a:spcAft>
-                <a:spcPts val="300"/>
-              </a:spcAft>
-            </a:pPr>
-            <a:r>
-              <a:rPr sz="1300" b="1" i="0">
-                <a:solidFill>
-                  <a:srgbClr val="1F2A44"/>
-                </a:solidFill>
-                <a:latin typeface="Arial"/>
-              </a:rPr>
-              <a:t>The judge is the cost, on both clusters</a:t>
-            </a:r>
-          </a:p>
-          <a:p>
-            <a:pPr algn="l">
-              <a:spcAft>
-                <a:spcPts val="300"/>
-              </a:spcAft>
-            </a:pPr>
-            <a:r>
-              <a:rPr sz="1200" b="0" i="0">
-                <a:solidFill>
-                  <a:srgbClr val="1F2A44"/>
-                </a:solidFill>
-                <a:latin typeface="Arial"/>
-              </a:rPr>
-              <a:t>+1.36 s/task on OpenShift, +1.48 s on KinD. The sidecar's presence costs 0.03–0.05 s, every other layer is noise, and with the judge on the two land within 3%.</a:t>
-            </a:r>
-          </a:p>
-        </p:txBody>
-      </p:sp>
-      <p:sp>
-        <p:nvSpPr>
-          <p:cNvPr id="11" name="Rounded Rectangle 10"/>
-          <p:cNvSpPr/>
-          <p:nvPr/>
-        </p:nvSpPr>
-        <p:spPr>
-          <a:xfrm>
-            <a:off x="7040880" y="2926080"/>
-            <a:ext cx="4736592" cy="1188720"/>
-          </a:xfrm>
-          <a:prstGeom prst="roundRect">
-            <a:avLst>
-              <a:gd name="adj" fmla="val 12000"/>
-            </a:avLst>
-          </a:prstGeom>
-          <a:solidFill>
-            <a:srgbClr val="FBECEA"/>
-          </a:solidFill>
-          <a:ln w="15875">
-            <a:solidFill>
-              <a:srgbClr val="B03A2E"/>
-            </a:solidFill>
-          </a:ln>
-          <a:effectLst/>
-        </p:spPr>
-        <p:style>
-          <a:lnRef idx="1">
-            <a:schemeClr val="accent1"/>
-          </a:lnRef>
-          <a:fillRef idx="3">
-            <a:schemeClr val="accent1"/>
-          </a:fillRef>
-          <a:effectRef idx="2">
-            <a:schemeClr val="accent1"/>
-          </a:effectRef>
-          <a:fontRef idx="minor">
-            <a:schemeClr val="lt1"/>
-          </a:fontRef>
-        </p:style>
-        <p:txBody>
-          <a:bodyPr rtlCol="0" anchor="t" lIns="73152" rIns="73152" tIns="36576" bIns="36576" wrap="square"/>
-          <a:lstStyle/>
-          <a:p>
-            <a:pPr algn="l">
-              <a:spcAft>
-                <a:spcPts val="200"/>
-              </a:spcAft>
-            </a:pPr>
-            <a:r>
-              <a:rPr sz="1200" b="1" i="0">
-                <a:solidFill>
-                  <a:srgbClr val="1F2A44"/>
-                </a:solidFill>
-                <a:latin typeface="Arial"/>
-              </a:rPr>
-              <a:t>Still name the cluster</a:t>
-            </a:r>
-          </a:p>
-          <a:p>
-            <a:pPr algn="l">
-              <a:spcAft>
-                <a:spcPts val="200"/>
-              </a:spcAft>
-            </a:pPr>
-            <a:r>
-              <a:rPr sz="1200" b="0" i="0">
-                <a:solidFill>
-                  <a:srgbClr val="1F2A44"/>
-                </a:solidFill>
-                <a:latin typeface="Arial"/>
-              </a:rPr>
-              <a:t>The between-deploy noise floor is 0.02 s on OpenShift and 0.12 s on KinD, and ~0.26 s of each judged call on KinD is the node's DNS being retried.</a:t>
-            </a:r>
-          </a:p>
-        </p:txBody>
-      </p:sp>
     </p:spTree>
   </p:cSld>
   <p:clrMapOvr>
@@ -36081,7 +38283,7 @@
                 </a:solidFill>
                 <a:latin typeface="Arial"/>
               </a:rPr>
-              <a:t>Why the plugin result can be trusted</a:t>
+              <a:t>cb ÷ ETE-Ext: 0.81× the tokens on tau2, 2.35× on gsm8k</a:t>
             </a:r>
           </a:p>
         </p:txBody>
@@ -36120,7 +38322,7 @@
                 </a:solidFill>
                 <a:latin typeface="Arial"/>
               </a:rPr>
-              <a:t>The checks behind the numbers on the previous slide</a:t>
+              <a:t>1.00× = the same as ETE-Ext. Tokens per finished task; run time summed over the benchmark's legs</a:t>
             </a:r>
           </a:p>
         </p:txBody>
@@ -36238,20 +38440,115 @@
           </a:p>
         </p:txBody>
       </p:sp>
+      <p:graphicFrame>
+        <p:nvGraphicFramePr>
+          <p:cNvPr id="8" name="Chart 7"/>
+          <p:cNvGraphicFramePr>
+            <a:graphicFrameLocks noGrp="1"/>
+          </p:cNvGraphicFramePr>
+          <p:nvPr/>
+        </p:nvGraphicFramePr>
+        <p:xfrm>
+          <a:off x="411480" y="1280160"/>
+          <a:ext cx="6949440" cy="4297680"/>
+        </p:xfrm>
+        <a:graphic>
+          <a:graphicData uri="http://schemas.openxmlformats.org/drawingml/2006/chart">
+            <c:chart xmlns:c="http://schemas.openxmlformats.org/drawingml/2006/chart" r:id="rId2"/>
+          </a:graphicData>
+        </a:graphic>
+      </p:graphicFrame>
       <p:sp>
         <p:nvSpPr>
-          <p:cNvPr id="8" name="Rounded Rectangle 7"/>
+          <p:cNvPr id="9" name="Rounded Rectangle 8"/>
           <p:cNvSpPr/>
           <p:nvPr/>
         </p:nvSpPr>
         <p:spPr>
           <a:xfrm>
-            <a:off x="411480" y="1325880"/>
-            <a:ext cx="5577840" cy="1828800"/>
+            <a:off x="7589520" y="1325880"/>
+            <a:ext cx="4187952" cy="1325880"/>
           </a:xfrm>
           <a:prstGeom prst="roundRect">
             <a:avLst>
-              <a:gd name="adj" fmla="val 8000"/>
+              <a:gd name="adj" fmla="val 11034"/>
+            </a:avLst>
+          </a:prstGeom>
+          <a:solidFill>
+            <a:srgbClr val="FBECEA"/>
+          </a:solidFill>
+          <a:ln w="15875">
+            <a:solidFill>
+              <a:srgbClr val="B03A2E"/>
+            </a:solidFill>
+          </a:ln>
+          <a:effectLst/>
+        </p:spPr>
+        <p:style>
+          <a:lnRef idx="1">
+            <a:schemeClr val="accent1"/>
+          </a:lnRef>
+          <a:fillRef idx="3">
+            <a:schemeClr val="accent1"/>
+          </a:fillRef>
+          <a:effectRef idx="2">
+            <a:schemeClr val="accent1"/>
+          </a:effectRef>
+          <a:fontRef idx="minor">
+            <a:schemeClr val="lt1"/>
+          </a:fontRef>
+        </p:style>
+        <p:txBody>
+          <a:bodyPr rtlCol="0" anchor="t" lIns="73152" rIns="73152" tIns="36576" bIns="36576" wrap="square"/>
+          <a:lstStyle/>
+          <a:p>
+            <a:pPr algn="l">
+              <a:spcAft>
+                <a:spcPts val="200"/>
+              </a:spcAft>
+            </a:pPr>
+            <a:r>
+              <a:rPr sz="1200" b="1" i="0">
+                <a:solidFill>
+                  <a:srgbClr val="1F2A44"/>
+                </a:solidFill>
+                <a:latin typeface="Arial"/>
+              </a:rPr>
+              <a:t>appworld lost tasks to the budget</a:t>
+            </a:r>
+          </a:p>
+          <a:p>
+            <a:pPr algn="l">
+              <a:spcAft>
+                <a:spcPts val="200"/>
+              </a:spcAft>
+            </a:pPr>
+            <a:r>
+              <a:rPr sz="1200" b="0" i="0">
+                <a:solidFill>
+                  <a:srgbClr val="1F2A44"/>
+                </a:solidFill>
+                <a:latin typeface="Arial"/>
+              </a:rPr>
+              <a:t>13 of 25 appworld tasks hit the 600 s timeout on cb, against 2 on ETE-Ext: its token bar covers fewer tasks.</a:t>
+            </a:r>
+          </a:p>
+        </p:txBody>
+      </p:sp>
+      <p:sp>
+        <p:nvSpPr>
+          <p:cNvPr id="10" name="Rounded Rectangle 9"/>
+          <p:cNvSpPr/>
+          <p:nvPr/>
+        </p:nvSpPr>
+        <p:spPr>
+          <a:xfrm>
+            <a:off x="7589520" y="2834640"/>
+            <a:ext cx="4187952" cy="1188720"/>
+          </a:xfrm>
+          <a:prstGeom prst="roundRect">
+            <a:avLst>
+              <a:gd name="adj" fmla="val 12000"/>
             </a:avLst>
           </a:prstGeom>
           <a:solidFill>
@@ -36288,13 +38585,13 @@
               </a:spcAft>
             </a:pPr>
             <a:r>
-              <a:rPr sz="1500" b="1" i="0">
-                <a:solidFill>
-                  <a:srgbClr val="1F2A44"/>
-                </a:solidFill>
-                <a:latin typeface="Arial"/>
-              </a:rPr>
-              <a:t>Not a timeout: we checked</a:t>
+              <a:rPr sz="1300" b="1" i="0">
+                <a:solidFill>
+                  <a:srgbClr val="1F2A44"/>
+                </a:solidFill>
+                <a:latin typeface="Arial"/>
+              </a:rPr>
+              <a:t>$0.00 is cb's posted rate</a:t>
             </a:r>
           </a:p>
           <a:p>
@@ -36304,31 +38601,31 @@
               </a:spcAft>
             </a:pPr>
             <a:r>
-              <a:rPr sz="1400" b="0" i="0">
-                <a:solidFill>
-                  <a:srgbClr val="1F2A44"/>
-                </a:solidFill>
-                <a:latin typeface="Arial"/>
-              </a:rPr>
-              <a:t>A timeout piles values on a round number. Judged tasks run 0.21–9.63 s (OpenShift) and 0.12–7.75 s (KinD) around a ~1.6 s median, no 0.1 s bin above 12%: variable latency, inherited from the judge's own LLM call.</a:t>
+              <a:rPr sz="1200" b="0" i="0">
+                <a:solidFill>
+                  <a:srgbClr val="1F2A44"/>
+                </a:solidFill>
+                <a:latin typeface="Arial"/>
+              </a:rPr>
+              <a:t>Its models are self-hosted, with no per-token price: compute is not in it.</a:t>
             </a:r>
           </a:p>
         </p:txBody>
       </p:sp>
       <p:sp>
         <p:nvSpPr>
-          <p:cNvPr id="9" name="Rounded Rectangle 8"/>
+          <p:cNvPr id="11" name="Rounded Rectangle 10"/>
           <p:cNvSpPr/>
           <p:nvPr/>
         </p:nvSpPr>
         <p:spPr>
           <a:xfrm>
-            <a:off x="6199632" y="1325880"/>
-            <a:ext cx="5577840" cy="1828800"/>
+            <a:off x="7589520" y="4206240"/>
+            <a:ext cx="4187952" cy="1188720"/>
           </a:xfrm>
           <a:prstGeom prst="roundRect">
             <a:avLst>
-              <a:gd name="adj" fmla="val 8000"/>
+              <a:gd name="adj" fmla="val 12000"/>
             </a:avLst>
           </a:prstGeom>
           <a:solidFill>
@@ -36365,13 +38662,13 @@
               </a:spcAft>
             </a:pPr>
             <a:r>
-              <a:rPr sz="1500" b="1" i="0">
-                <a:solidFill>
-                  <a:srgbClr val="1F2A44"/>
-                </a:solidFill>
-                <a:latin typeface="Arial"/>
-              </a:rPr>
-              <a:t>One flag decides whether it measures anything</a:t>
+              <a:rPr sz="1300" b="1" i="0">
+                <a:solidFill>
+                  <a:srgbClr val="1F2A44"/>
+                </a:solidFill>
+                <a:latin typeface="Arial"/>
+              </a:rPr>
+              <a:t>The model moves with the gateway</a:t>
             </a:r>
           </a:p>
           <a:p>
@@ -36381,185 +38678,13 @@
               </a:spcAft>
             </a:pPr>
             <a:r>
-              <a:rPr sz="1400" b="0" i="0">
-                <a:solidFill>
-                  <a:srgbClr val="1F2A44"/>
-                </a:solidFill>
-                <a:latin typeface="Arial"/>
-              </a:rPr>
-              <a:t>Every gsm8k leg sends the same 50 prompts, and the gateway replays completions for ~10 min. </a:t>
-            </a:r>
-            <a:r>
-              <a:rPr sz="1400" b="0" i="0">
-                <a:solidFill>
-                  <a:srgbClr val="1F2A44"/>
-                </a:solidFill>
-                <a:latin typeface="Consolas"/>
-              </a:rPr>
-              <a:t>BM_CACHE_GAP=900</a:t>
-            </a:r>
-            <a:r>
-              <a:rPr sz="1400" b="0" i="0">
-                <a:solidFill>
-                  <a:srgbClr val="1F2A44"/>
-                </a:solidFill>
-                <a:latin typeface="Arial"/>
-              </a:rPr>
-              <a:t> spaces the legs; the nesting check (no sidecar leg can beat a sidecar-free one) clears by 1.3× on both.</a:t>
-            </a:r>
-          </a:p>
-        </p:txBody>
-      </p:sp>
-      <p:sp>
-        <p:nvSpPr>
-          <p:cNvPr id="10" name="Rounded Rectangle 9"/>
-          <p:cNvSpPr/>
-          <p:nvPr/>
-        </p:nvSpPr>
-        <p:spPr>
-          <a:xfrm>
-            <a:off x="411480" y="3337560"/>
-            <a:ext cx="5577840" cy="1828800"/>
-          </a:xfrm>
-          <a:prstGeom prst="roundRect">
-            <a:avLst>
-              <a:gd name="adj" fmla="val 8000"/>
-            </a:avLst>
-          </a:prstGeom>
-          <a:solidFill>
-            <a:srgbClr val="FFFFFF"/>
-          </a:solidFill>
-          <a:ln w="15875">
-            <a:solidFill>
-              <a:srgbClr val="8A93A3"/>
-            </a:solidFill>
-          </a:ln>
-          <a:effectLst/>
-        </p:spPr>
-        <p:style>
-          <a:lnRef idx="1">
-            <a:schemeClr val="accent1"/>
-          </a:lnRef>
-          <a:fillRef idx="3">
-            <a:schemeClr val="accent1"/>
-          </a:fillRef>
-          <a:effectRef idx="2">
-            <a:schemeClr val="accent1"/>
-          </a:effectRef>
-          <a:fontRef idx="minor">
-            <a:schemeClr val="lt1"/>
-          </a:fontRef>
-        </p:style>
-        <p:txBody>
-          <a:bodyPr rtlCol="0" anchor="t" lIns="73152" rIns="73152" tIns="36576" bIns="36576" wrap="square"/>
-          <a:lstStyle/>
-          <a:p>
-            <a:pPr algn="l">
-              <a:spcAft>
-                <a:spcPts val="300"/>
-              </a:spcAft>
-            </a:pPr>
-            <a:r>
-              <a:rPr sz="1500" b="1" i="0">
-                <a:solidFill>
-                  <a:srgbClr val="1F2A44"/>
-                </a:solidFill>
-                <a:latin typeface="Arial"/>
-              </a:rPr>
-              <a:t>The deploy is the unit of replication</a:t>
-            </a:r>
-          </a:p>
-          <a:p>
-            <a:pPr algn="l">
-              <a:spcAft>
-                <a:spcPts val="300"/>
-              </a:spcAft>
-            </a:pPr>
-            <a:r>
-              <a:rPr sz="1400" b="0" i="0">
-                <a:solidFill>
-                  <a:srgbClr val="1F2A44"/>
-                </a:solidFill>
-                <a:latin typeface="Arial"/>
-              </a:rPr>
-              <a:t>A per-task interval measures variance within one deploy. The honest floor is between two deploys, and only the judge's step clears it: add deploys to rank presets, not tasks.</a:t>
-            </a:r>
-          </a:p>
-        </p:txBody>
-      </p:sp>
-      <p:sp>
-        <p:nvSpPr>
-          <p:cNvPr id="11" name="Rounded Rectangle 10"/>
-          <p:cNvSpPr/>
-          <p:nvPr/>
-        </p:nvSpPr>
-        <p:spPr>
-          <a:xfrm>
-            <a:off x="6199632" y="3337560"/>
-            <a:ext cx="5577840" cy="1828800"/>
-          </a:xfrm>
-          <a:prstGeom prst="roundRect">
-            <a:avLst>
-              <a:gd name="adj" fmla="val 8000"/>
-            </a:avLst>
-          </a:prstGeom>
-          <a:solidFill>
-            <a:srgbClr val="FFFFFF"/>
-          </a:solidFill>
-          <a:ln w="15875">
-            <a:solidFill>
-              <a:srgbClr val="8A93A3"/>
-            </a:solidFill>
-          </a:ln>
-          <a:effectLst/>
-        </p:spPr>
-        <p:style>
-          <a:lnRef idx="1">
-            <a:schemeClr val="accent1"/>
-          </a:lnRef>
-          <a:fillRef idx="3">
-            <a:schemeClr val="accent1"/>
-          </a:fillRef>
-          <a:effectRef idx="2">
-            <a:schemeClr val="accent1"/>
-          </a:effectRef>
-          <a:fontRef idx="minor">
-            <a:schemeClr val="lt1"/>
-          </a:fontRef>
-        </p:style>
-        <p:txBody>
-          <a:bodyPr rtlCol="0" anchor="t" lIns="73152" rIns="73152" tIns="36576" bIns="36576" wrap="square"/>
-          <a:lstStyle/>
-          <a:p>
-            <a:pPr algn="l">
-              <a:spcAft>
-                <a:spcPts val="300"/>
-              </a:spcAft>
-            </a:pPr>
-            <a:r>
-              <a:rPr sz="1500" b="1" i="0">
-                <a:solidFill>
-                  <a:srgbClr val="1F2A44"/>
-                </a:solidFill>
-                <a:latin typeface="Arial"/>
-              </a:rPr>
-              <a:t>Two deploys already resolve a 1 s effect</a:t>
-            </a:r>
-          </a:p>
-          <a:p>
-            <a:pPr algn="l">
-              <a:spcAft>
-                <a:spcPts val="300"/>
-              </a:spcAft>
-            </a:pPr>
-            <a:r>
-              <a:rPr sz="1400" b="0" i="0">
-                <a:solidFill>
-                  <a:srgbClr val="1F2A44"/>
-                </a:solidFill>
-                <a:latin typeface="Arial"/>
-              </a:rPr>
-              <a:t>At σ ≈ 0.02 s (OpenShift) and 0.13 s (KinD), so the small steps are genuinely small rather than unresolved.</a:t>
+              <a:rPr sz="1200" b="0" i="0">
+                <a:solidFill>
+                  <a:srgbClr val="1F2A44"/>
+                </a:solidFill>
+                <a:latin typeface="Arial"/>
+              </a:rPr>
+              <a:t>On tau2 and appworld these are gateway × model combinations, not gateways alone.</a:t>
             </a:r>
           </a:p>
         </p:txBody>
@@ -36659,6 +38784,2228 @@
                 </a:solidFill>
                 <a:latin typeface="Arial"/>
               </a:rPr>
+              <a:t>What AuthBridge costs: almost all of it is the judge</a:t>
+            </a:r>
+          </a:p>
+        </p:txBody>
+      </p:sp>
+      <p:sp>
+        <p:nvSpPr>
+          <p:cNvPr id="4" name="TextBox 3"/>
+          <p:cNvSpPr txBox="1"/>
+          <p:nvPr/>
+        </p:nvSpPr>
+        <p:spPr>
+          <a:xfrm>
+            <a:off x="411480" y="786384"/>
+            <a:ext cx="11338560" cy="329184"/>
+          </a:xfrm>
+          <a:prstGeom prst="rect">
+            <a:avLst/>
+          </a:prstGeom>
+          <a:noFill/>
+        </p:spPr>
+        <p:txBody>
+          <a:bodyPr wrap="square" lIns="36576" rIns="36576" tIns="18288" bIns="18288" anchor="t">
+            <a:spAutoFit/>
+          </a:bodyPr>
+          <a:lstStyle/>
+          <a:p>
+            <a:pPr algn="l">
+              <a:spcAft>
+                <a:spcPts val="600"/>
+              </a:spcAft>
+            </a:pPr>
+            <a:r>
+              <a:rPr sz="1400" b="0" i="0">
+                <a:solidFill>
+                  <a:srgbClr val="5B6477"/>
+                </a:solidFill>
+                <a:latin typeface="Arial"/>
+              </a:rPr>
+              <a:t>Non-LLM seconds per task, steady state; the designed 13-leg study, n=50, v1.35</a:t>
+            </a:r>
+          </a:p>
+        </p:txBody>
+      </p:sp>
+      <p:cxnSp>
+        <p:nvCxnSpPr>
+          <p:cNvPr id="5" name="Connector 4"/>
+          <p:cNvCxnSpPr/>
+          <p:nvPr/>
+        </p:nvCxnSpPr>
+        <p:spPr>
+          <a:xfrm>
+            <a:off x="411480" y="6446520"/>
+            <a:ext cx="11365992" cy="0"/>
+          </a:xfrm>
+          <a:prstGeom prst="line">
+            <a:avLst/>
+          </a:prstGeom>
+          <a:ln w="9525">
+            <a:solidFill>
+              <a:srgbClr val="C9CFDA"/>
+            </a:solidFill>
+          </a:ln>
+        </p:spPr>
+        <p:style>
+          <a:lnRef idx="2">
+            <a:schemeClr val="accent1"/>
+          </a:lnRef>
+          <a:fillRef idx="0">
+            <a:schemeClr val="accent1"/>
+          </a:fillRef>
+          <a:effectRef idx="1">
+            <a:schemeClr val="accent1"/>
+          </a:effectRef>
+          <a:fontRef idx="minor">
+            <a:schemeClr val="tx1"/>
+          </a:fontRef>
+        </p:style>
+      </p:cxnSp>
+      <p:sp>
+        <p:nvSpPr>
+          <p:cNvPr id="6" name="TextBox 5"/>
+          <p:cNvSpPr txBox="1"/>
+          <p:nvPr/>
+        </p:nvSpPr>
+        <p:spPr>
+          <a:xfrm>
+            <a:off x="411480" y="6492240"/>
+            <a:ext cx="8229600" cy="274320"/>
+          </a:xfrm>
+          <a:prstGeom prst="rect">
+            <a:avLst/>
+          </a:prstGeom>
+          <a:noFill/>
+        </p:spPr>
+        <p:txBody>
+          <a:bodyPr wrap="square" lIns="36576" rIns="36576" tIns="18288" bIns="18288" anchor="ctr">
+            <a:spAutoFit/>
+          </a:bodyPr>
+          <a:lstStyle/>
+          <a:p>
+            <a:pPr algn="l">
+              <a:spcAft>
+                <a:spcPts val="0"/>
+              </a:spcAft>
+            </a:pPr>
+            <a:r>
+              <a:rPr sz="1000" b="0" i="0">
+                <a:solidFill>
+                  <a:srgbClr val="5B6477"/>
+                </a:solidFill>
+                <a:latin typeface="Arial"/>
+              </a:rPr>
+              <a:t>AutoBench · architecture &amp; design · 6  Results (v1.36)</a:t>
+            </a:r>
+          </a:p>
+        </p:txBody>
+      </p:sp>
+      <p:sp>
+        <p:nvSpPr>
+          <p:cNvPr id="7" name="TextBox 6"/>
+          <p:cNvSpPr txBox="1"/>
+          <p:nvPr/>
+        </p:nvSpPr>
+        <p:spPr>
+          <a:xfrm>
+            <a:off x="10881360" y="6492240"/>
+            <a:ext cx="914400" cy="274320"/>
+          </a:xfrm>
+          <a:prstGeom prst="rect">
+            <a:avLst/>
+          </a:prstGeom>
+          <a:noFill/>
+        </p:spPr>
+        <p:txBody>
+          <a:bodyPr wrap="square" lIns="36576" rIns="36576" tIns="18288" bIns="18288" anchor="ctr">
+            <a:spAutoFit/>
+          </a:bodyPr>
+          <a:lstStyle/>
+          <a:p>
+            <a:pPr algn="r">
+              <a:spcAft>
+                <a:spcPts val="0"/>
+              </a:spcAft>
+            </a:pPr>
+            <a:r>
+              <a:rPr sz="1000" b="0" i="0">
+                <a:solidFill>
+                  <a:srgbClr val="5B6477"/>
+                </a:solidFill>
+                <a:latin typeface="Arial"/>
+              </a:rPr>
+              <a:t>37</a:t>
+            </a:r>
+          </a:p>
+        </p:txBody>
+      </p:sp>
+      <p:graphicFrame>
+        <p:nvGraphicFramePr>
+          <p:cNvPr id="8" name="Table 7"/>
+          <p:cNvGraphicFramePr>
+            <a:graphicFrameLocks noGrp="1"/>
+          </p:cNvGraphicFramePr>
+          <p:nvPr/>
+        </p:nvGraphicFramePr>
+        <p:xfrm>
+          <a:off x="411480" y="1325880"/>
+          <a:ext cx="6400800" cy="2523744"/>
+        </p:xfrm>
+        <a:graphic>
+          <a:graphicData uri="http://schemas.openxmlformats.org/drawingml/2006/table">
+            <a:tbl>
+              <a:tblPr firstRow="0" bandRow="0">
+                <a:tableStyleId>{5C22544A-7EE6-4342-B048-85BDC9FD1C3A}</a:tableStyleId>
+              </a:tblPr>
+              <a:tblGrid>
+                <a:gridCol w="2377440"/>
+                <a:gridCol w="1005840"/>
+                <a:gridCol w="1005840"/>
+                <a:gridCol w="1005840"/>
+                <a:gridCol w="1005840"/>
+              </a:tblGrid>
+              <a:tr h="420624">
+                <a:tc>
+                  <a:txBody>
+                    <a:bodyPr wrap="square"/>
+                    <a:lstStyle/>
+                    <a:p>
+                      <a:pPr algn="l"/>
+                      <a:r>
+                        <a:rPr sz="1200" b="1" i="0">
+                          <a:solidFill>
+                            <a:srgbClr val="FFFFFF"/>
+                          </a:solidFill>
+                          <a:latin typeface="Arial"/>
+                        </a:rPr>
+                        <a:t>condition</a:t>
+                      </a:r>
+                    </a:p>
+                  </a:txBody>
+                  <a:tcPr marL="54864" marR="54864" marT="18288" marB="18288" anchor="ctr">
+                    <a:solidFill>
+                      <a:srgbClr val="1F2A44"/>
+                    </a:solidFill>
+                  </a:tcPr>
+                </a:tc>
+                <a:tc>
+                  <a:txBody>
+                    <a:bodyPr wrap="square"/>
+                    <a:lstStyle/>
+                    <a:p>
+                      <a:pPr algn="r"/>
+                      <a:r>
+                        <a:rPr sz="1200" b="1" i="0">
+                          <a:solidFill>
+                            <a:srgbClr val="FFFFFF"/>
+                          </a:solidFill>
+                          <a:latin typeface="Arial"/>
+                        </a:rPr>
+                        <a:t>OpenShift</a:t>
+                      </a:r>
+                    </a:p>
+                  </a:txBody>
+                  <a:tcPr marL="54864" marR="54864" marT="18288" marB="18288" anchor="ctr">
+                    <a:solidFill>
+                      <a:srgbClr val="1F2A44"/>
+                    </a:solidFill>
+                  </a:tcPr>
+                </a:tc>
+                <a:tc>
+                  <a:txBody>
+                    <a:bodyPr wrap="square"/>
+                    <a:lstStyle/>
+                    <a:p>
+                      <a:pPr algn="r"/>
+                      <a:r>
+                        <a:rPr sz="1200" b="1" i="0">
+                          <a:solidFill>
+                            <a:srgbClr val="FFFFFF"/>
+                          </a:solidFill>
+                          <a:latin typeface="Arial"/>
+                        </a:rPr>
+                        <a:t>KinD</a:t>
+                      </a:r>
+                    </a:p>
+                  </a:txBody>
+                  <a:tcPr marL="54864" marR="54864" marT="18288" marB="18288" anchor="ctr">
+                    <a:solidFill>
+                      <a:srgbClr val="1F2A44"/>
+                    </a:solidFill>
+                  </a:tcPr>
+                </a:tc>
+                <a:tc>
+                  <a:txBody>
+                    <a:bodyPr wrap="square"/>
+                    <a:lstStyle/>
+                    <a:p>
+                      <a:pPr algn="r"/>
+                      <a:r>
+                        <a:rPr sz="1200" b="1" i="0">
+                          <a:solidFill>
+                            <a:srgbClr val="FFFFFF"/>
+                          </a:solidFill>
+                          <a:latin typeface="Arial"/>
+                        </a:rPr>
+                        <a:t>OCP step</a:t>
+                      </a:r>
+                    </a:p>
+                  </a:txBody>
+                  <a:tcPr marL="54864" marR="54864" marT="18288" marB="18288" anchor="ctr">
+                    <a:solidFill>
+                      <a:srgbClr val="1F2A44"/>
+                    </a:solidFill>
+                  </a:tcPr>
+                </a:tc>
+                <a:tc>
+                  <a:txBody>
+                    <a:bodyPr wrap="square"/>
+                    <a:lstStyle/>
+                    <a:p>
+                      <a:pPr algn="r"/>
+                      <a:r>
+                        <a:rPr sz="1200" b="1" i="0">
+                          <a:solidFill>
+                            <a:srgbClr val="FFFFFF"/>
+                          </a:solidFill>
+                          <a:latin typeface="Arial"/>
+                        </a:rPr>
+                        <a:t>KinD step</a:t>
+                      </a:r>
+                    </a:p>
+                  </a:txBody>
+                  <a:tcPr marL="54864" marR="54864" marT="18288" marB="18288" anchor="ctr">
+                    <a:solidFill>
+                      <a:srgbClr val="1F2A44"/>
+                    </a:solidFill>
+                  </a:tcPr>
+                </a:tc>
+              </a:tr>
+              <a:tr h="420624">
+                <a:tc>
+                  <a:txBody>
+                    <a:bodyPr wrap="square"/>
+                    <a:lstStyle/>
+                    <a:p>
+                      <a:pPr algn="l"/>
+                      <a:r>
+                        <a:rPr sz="1200" b="0" i="0">
+                          <a:solidFill>
+                            <a:srgbClr val="1F2A44"/>
+                          </a:solidFill>
+                          <a:latin typeface="Arial"/>
+                        </a:rPr>
+                        <a:t>baseline (AuthBridge off)</a:t>
+                      </a:r>
+                    </a:p>
+                  </a:txBody>
+                  <a:tcPr marL="54864" marR="54864" marT="18288" marB="18288" anchor="ctr">
+                    <a:solidFill>
+                      <a:srgbClr val="FFFFFF"/>
+                    </a:solidFill>
+                  </a:tcPr>
+                </a:tc>
+                <a:tc>
+                  <a:txBody>
+                    <a:bodyPr wrap="square"/>
+                    <a:lstStyle/>
+                    <a:p>
+                      <a:pPr algn="r"/>
+                      <a:r>
+                        <a:rPr sz="1200" b="0" i="0">
+                          <a:solidFill>
+                            <a:srgbClr val="1F2A44"/>
+                          </a:solidFill>
+                          <a:latin typeface="Arial"/>
+                        </a:rPr>
+                        <a:t>0.168</a:t>
+                      </a:r>
+                    </a:p>
+                  </a:txBody>
+                  <a:tcPr marL="54864" marR="54864" marT="18288" marB="18288" anchor="ctr">
+                    <a:solidFill>
+                      <a:srgbClr val="FFFFFF"/>
+                    </a:solidFill>
+                  </a:tcPr>
+                </a:tc>
+                <a:tc>
+                  <a:txBody>
+                    <a:bodyPr wrap="square"/>
+                    <a:lstStyle/>
+                    <a:p>
+                      <a:pPr algn="r"/>
+                      <a:r>
+                        <a:rPr sz="1200" b="0" i="0">
+                          <a:solidFill>
+                            <a:srgbClr val="1F2A44"/>
+                          </a:solidFill>
+                          <a:latin typeface="Arial"/>
+                        </a:rPr>
+                        <a:t>0.097</a:t>
+                      </a:r>
+                    </a:p>
+                  </a:txBody>
+                  <a:tcPr marL="54864" marR="54864" marT="18288" marB="18288" anchor="ctr">
+                    <a:solidFill>
+                      <a:srgbClr val="FFFFFF"/>
+                    </a:solidFill>
+                  </a:tcPr>
+                </a:tc>
+                <a:tc>
+                  <a:txBody>
+                    <a:bodyPr wrap="square"/>
+                    <a:lstStyle/>
+                    <a:p>
+                      <a:pPr algn="r"/>
+                      <a:r>
+                        <a:rPr sz="1200" b="0" i="0">
+                          <a:solidFill>
+                            <a:srgbClr val="1F2A44"/>
+                          </a:solidFill>
+                          <a:latin typeface="Arial"/>
+                        </a:rPr>
+                        <a:t>—</a:t>
+                      </a:r>
+                    </a:p>
+                  </a:txBody>
+                  <a:tcPr marL="54864" marR="54864" marT="18288" marB="18288" anchor="ctr">
+                    <a:solidFill>
+                      <a:srgbClr val="FFFFFF"/>
+                    </a:solidFill>
+                  </a:tcPr>
+                </a:tc>
+                <a:tc>
+                  <a:txBody>
+                    <a:bodyPr wrap="square"/>
+                    <a:lstStyle/>
+                    <a:p>
+                      <a:pPr algn="r"/>
+                      <a:r>
+                        <a:rPr sz="1200" b="0" i="0">
+                          <a:solidFill>
+                            <a:srgbClr val="1F2A44"/>
+                          </a:solidFill>
+                          <a:latin typeface="Arial"/>
+                        </a:rPr>
+                        <a:t>—</a:t>
+                      </a:r>
+                    </a:p>
+                  </a:txBody>
+                  <a:tcPr marL="54864" marR="54864" marT="18288" marB="18288" anchor="ctr">
+                    <a:solidFill>
+                      <a:srgbClr val="FFFFFF"/>
+                    </a:solidFill>
+                  </a:tcPr>
+                </a:tc>
+              </a:tr>
+              <a:tr h="420624">
+                <a:tc>
+                  <a:txBody>
+                    <a:bodyPr wrap="square"/>
+                    <a:lstStyle/>
+                    <a:p>
+                      <a:pPr algn="l"/>
+                      <a:r>
+                        <a:rPr sz="1200" b="0" i="0">
+                          <a:solidFill>
+                            <a:srgbClr val="1F2A44"/>
+                          </a:solidFill>
+                          <a:latin typeface="Arial"/>
+                        </a:rPr>
+                        <a:t>auth-only</a:t>
+                      </a:r>
+                    </a:p>
+                  </a:txBody>
+                  <a:tcPr marL="54864" marR="54864" marT="18288" marB="18288" anchor="ctr">
+                    <a:solidFill>
+                      <a:srgbClr val="F3F5F9"/>
+                    </a:solidFill>
+                  </a:tcPr>
+                </a:tc>
+                <a:tc>
+                  <a:txBody>
+                    <a:bodyPr wrap="square"/>
+                    <a:lstStyle/>
+                    <a:p>
+                      <a:pPr algn="r"/>
+                      <a:r>
+                        <a:rPr sz="1200" b="0" i="0">
+                          <a:solidFill>
+                            <a:srgbClr val="1F2A44"/>
+                          </a:solidFill>
+                          <a:latin typeface="Arial"/>
+                        </a:rPr>
+                        <a:t>0.214</a:t>
+                      </a:r>
+                    </a:p>
+                  </a:txBody>
+                  <a:tcPr marL="54864" marR="54864" marT="18288" marB="18288" anchor="ctr">
+                    <a:solidFill>
+                      <a:srgbClr val="F3F5F9"/>
+                    </a:solidFill>
+                  </a:tcPr>
+                </a:tc>
+                <a:tc>
+                  <a:txBody>
+                    <a:bodyPr wrap="square"/>
+                    <a:lstStyle/>
+                    <a:p>
+                      <a:pPr algn="r"/>
+                      <a:r>
+                        <a:rPr sz="1200" b="0" i="0">
+                          <a:solidFill>
+                            <a:srgbClr val="1F2A44"/>
+                          </a:solidFill>
+                          <a:latin typeface="Arial"/>
+                        </a:rPr>
+                        <a:t>0.130</a:t>
+                      </a:r>
+                    </a:p>
+                  </a:txBody>
+                  <a:tcPr marL="54864" marR="54864" marT="18288" marB="18288" anchor="ctr">
+                    <a:solidFill>
+                      <a:srgbClr val="F3F5F9"/>
+                    </a:solidFill>
+                  </a:tcPr>
+                </a:tc>
+                <a:tc>
+                  <a:txBody>
+                    <a:bodyPr wrap="square"/>
+                    <a:lstStyle/>
+                    <a:p>
+                      <a:pPr algn="r"/>
+                      <a:r>
+                        <a:rPr sz="1200" b="0" i="0">
+                          <a:solidFill>
+                            <a:srgbClr val="1F2A44"/>
+                          </a:solidFill>
+                          <a:latin typeface="Arial"/>
+                        </a:rPr>
+                        <a:t>+0.05</a:t>
+                      </a:r>
+                    </a:p>
+                  </a:txBody>
+                  <a:tcPr marL="54864" marR="54864" marT="18288" marB="18288" anchor="ctr">
+                    <a:solidFill>
+                      <a:srgbClr val="F3F5F9"/>
+                    </a:solidFill>
+                  </a:tcPr>
+                </a:tc>
+                <a:tc>
+                  <a:txBody>
+                    <a:bodyPr wrap="square"/>
+                    <a:lstStyle/>
+                    <a:p>
+                      <a:pPr algn="r"/>
+                      <a:r>
+                        <a:rPr sz="1200" b="0" i="0">
+                          <a:solidFill>
+                            <a:srgbClr val="1F2A44"/>
+                          </a:solidFill>
+                          <a:latin typeface="Arial"/>
+                        </a:rPr>
+                        <a:t>+0.03</a:t>
+                      </a:r>
+                    </a:p>
+                  </a:txBody>
+                  <a:tcPr marL="54864" marR="54864" marT="18288" marB="18288" anchor="ctr">
+                    <a:solidFill>
+                      <a:srgbClr val="F3F5F9"/>
+                    </a:solidFill>
+                  </a:tcPr>
+                </a:tc>
+              </a:tr>
+              <a:tr h="420624">
+                <a:tc>
+                  <a:txBody>
+                    <a:bodyPr wrap="square"/>
+                    <a:lstStyle/>
+                    <a:p>
+                      <a:pPr algn="l"/>
+                      <a:r>
+                        <a:rPr sz="1200" b="0" i="0">
+                          <a:solidFill>
+                            <a:srgbClr val="1F2A44"/>
+                          </a:solidFill>
+                          <a:latin typeface="Arial"/>
+                        </a:rPr>
+                        <a:t>ibac-only</a:t>
+                      </a:r>
+                    </a:p>
+                  </a:txBody>
+                  <a:tcPr marL="54864" marR="54864" marT="18288" marB="18288" anchor="ctr">
+                    <a:solidFill>
+                      <a:srgbClr val="FFFFFF"/>
+                    </a:solidFill>
+                  </a:tcPr>
+                </a:tc>
+                <a:tc>
+                  <a:txBody>
+                    <a:bodyPr wrap="square"/>
+                    <a:lstStyle/>
+                    <a:p>
+                      <a:pPr algn="r"/>
+                      <a:r>
+                        <a:rPr sz="1200" b="0" i="0">
+                          <a:solidFill>
+                            <a:srgbClr val="1F2A44"/>
+                          </a:solidFill>
+                          <a:latin typeface="Arial"/>
+                        </a:rPr>
+                        <a:t>1.569</a:t>
+                      </a:r>
+                    </a:p>
+                  </a:txBody>
+                  <a:tcPr marL="54864" marR="54864" marT="18288" marB="18288" anchor="ctr">
+                    <a:solidFill>
+                      <a:srgbClr val="FFFFFF"/>
+                    </a:solidFill>
+                  </a:tcPr>
+                </a:tc>
+                <a:tc>
+                  <a:txBody>
+                    <a:bodyPr wrap="square"/>
+                    <a:lstStyle/>
+                    <a:p>
+                      <a:pPr algn="r"/>
+                      <a:r>
+                        <a:rPr sz="1200" b="0" i="0">
+                          <a:solidFill>
+                            <a:srgbClr val="1F2A44"/>
+                          </a:solidFill>
+                          <a:latin typeface="Arial"/>
+                        </a:rPr>
+                        <a:t>1.610</a:t>
+                      </a:r>
+                    </a:p>
+                  </a:txBody>
+                  <a:tcPr marL="54864" marR="54864" marT="18288" marB="18288" anchor="ctr">
+                    <a:solidFill>
+                      <a:srgbClr val="FFFFFF"/>
+                    </a:solidFill>
+                  </a:tcPr>
+                </a:tc>
+                <a:tc>
+                  <a:txBody>
+                    <a:bodyPr wrap="square"/>
+                    <a:lstStyle/>
+                    <a:p>
+                      <a:pPr algn="r"/>
+                      <a:r>
+                        <a:rPr sz="1200" b="1" i="0">
+                          <a:solidFill>
+                            <a:srgbClr val="1F2A44"/>
+                          </a:solidFill>
+                          <a:latin typeface="Arial"/>
+                        </a:rPr>
+                        <a:t>+1.36</a:t>
+                      </a:r>
+                    </a:p>
+                  </a:txBody>
+                  <a:tcPr marL="54864" marR="54864" marT="18288" marB="18288" anchor="ctr">
+                    <a:solidFill>
+                      <a:srgbClr val="FFFFFF"/>
+                    </a:solidFill>
+                  </a:tcPr>
+                </a:tc>
+                <a:tc>
+                  <a:txBody>
+                    <a:bodyPr wrap="square"/>
+                    <a:lstStyle/>
+                    <a:p>
+                      <a:pPr algn="r"/>
+                      <a:r>
+                        <a:rPr sz="1200" b="1" i="0">
+                          <a:solidFill>
+                            <a:srgbClr val="1F2A44"/>
+                          </a:solidFill>
+                          <a:latin typeface="Arial"/>
+                        </a:rPr>
+                        <a:t>+1.48</a:t>
+                      </a:r>
+                    </a:p>
+                  </a:txBody>
+                  <a:tcPr marL="54864" marR="54864" marT="18288" marB="18288" anchor="ctr">
+                    <a:solidFill>
+                      <a:srgbClr val="FFFFFF"/>
+                    </a:solidFill>
+                  </a:tcPr>
+                </a:tc>
+              </a:tr>
+              <a:tr h="420624">
+                <a:tc>
+                  <a:txBody>
+                    <a:bodyPr wrap="square"/>
+                    <a:lstStyle/>
+                    <a:p>
+                      <a:pPr algn="l"/>
+                      <a:r>
+                        <a:rPr sz="1200" b="0" i="0">
+                          <a:solidFill>
+                            <a:srgbClr val="1F2A44"/>
+                          </a:solidFill>
+                          <a:latin typeface="Arial"/>
+                        </a:rPr>
+                        <a:t>full (auth + ibac)</a:t>
+                      </a:r>
+                    </a:p>
+                  </a:txBody>
+                  <a:tcPr marL="54864" marR="54864" marT="18288" marB="18288" anchor="ctr">
+                    <a:solidFill>
+                      <a:srgbClr val="F3F5F9"/>
+                    </a:solidFill>
+                  </a:tcPr>
+                </a:tc>
+                <a:tc>
+                  <a:txBody>
+                    <a:bodyPr wrap="square"/>
+                    <a:lstStyle/>
+                    <a:p>
+                      <a:pPr algn="r"/>
+                      <a:r>
+                        <a:rPr sz="1200" b="0" i="0">
+                          <a:solidFill>
+                            <a:srgbClr val="1F2A44"/>
+                          </a:solidFill>
+                          <a:latin typeface="Arial"/>
+                        </a:rPr>
+                        <a:t>1.584</a:t>
+                      </a:r>
+                    </a:p>
+                  </a:txBody>
+                  <a:tcPr marL="54864" marR="54864" marT="18288" marB="18288" anchor="ctr">
+                    <a:solidFill>
+                      <a:srgbClr val="F3F5F9"/>
+                    </a:solidFill>
+                  </a:tcPr>
+                </a:tc>
+                <a:tc>
+                  <a:txBody>
+                    <a:bodyPr wrap="square"/>
+                    <a:lstStyle/>
+                    <a:p>
+                      <a:pPr algn="r"/>
+                      <a:r>
+                        <a:rPr sz="1200" b="0" i="0">
+                          <a:solidFill>
+                            <a:srgbClr val="1F2A44"/>
+                          </a:solidFill>
+                          <a:latin typeface="Arial"/>
+                        </a:rPr>
+                        <a:t>1.602</a:t>
+                      </a:r>
+                    </a:p>
+                  </a:txBody>
+                  <a:tcPr marL="54864" marR="54864" marT="18288" marB="18288" anchor="ctr">
+                    <a:solidFill>
+                      <a:srgbClr val="F3F5F9"/>
+                    </a:solidFill>
+                  </a:tcPr>
+                </a:tc>
+                <a:tc>
+                  <a:txBody>
+                    <a:bodyPr wrap="square"/>
+                    <a:lstStyle/>
+                    <a:p>
+                      <a:pPr algn="r"/>
+                      <a:r>
+                        <a:rPr sz="1200" b="0" i="0">
+                          <a:solidFill>
+                            <a:srgbClr val="1F2A44"/>
+                          </a:solidFill>
+                          <a:latin typeface="Arial"/>
+                        </a:rPr>
+                        <a:t>+0.01</a:t>
+                      </a:r>
+                    </a:p>
+                  </a:txBody>
+                  <a:tcPr marL="54864" marR="54864" marT="18288" marB="18288" anchor="ctr">
+                    <a:solidFill>
+                      <a:srgbClr val="F3F5F9"/>
+                    </a:solidFill>
+                  </a:tcPr>
+                </a:tc>
+                <a:tc>
+                  <a:txBody>
+                    <a:bodyPr wrap="square"/>
+                    <a:lstStyle/>
+                    <a:p>
+                      <a:pPr algn="r"/>
+                      <a:r>
+                        <a:rPr sz="1200" b="0" i="0">
+                          <a:solidFill>
+                            <a:srgbClr val="1F2A44"/>
+                          </a:solidFill>
+                          <a:latin typeface="Arial"/>
+                        </a:rPr>
+                        <a:t>−0.01</a:t>
+                      </a:r>
+                    </a:p>
+                  </a:txBody>
+                  <a:tcPr marL="54864" marR="54864" marT="18288" marB="18288" anchor="ctr">
+                    <a:solidFill>
+                      <a:srgbClr val="F3F5F9"/>
+                    </a:solidFill>
+                  </a:tcPr>
+                </a:tc>
+              </a:tr>
+              <a:tr h="420624">
+                <a:tc>
+                  <a:txBody>
+                    <a:bodyPr wrap="square"/>
+                    <a:lstStyle/>
+                    <a:p>
+                      <a:pPr algn="l"/>
+                      <a:r>
+                        <a:rPr sz="1200" b="0" i="0">
+                          <a:solidFill>
+                            <a:srgbClr val="1F2A44"/>
+                          </a:solidFill>
+                          <a:latin typeface="Arial"/>
+                        </a:rPr>
+                        <a:t>full + </a:t>
+                      </a:r>
+                      <a:r>
+                        <a:rPr sz="1200" b="0" i="0">
+                          <a:solidFill>
+                            <a:srgbClr val="1F2A44"/>
+                          </a:solidFill>
+                          <a:latin typeface="Consolas"/>
+                        </a:rPr>
+                        <a:t>ibac:observe</a:t>
+                      </a:r>
+                    </a:p>
+                  </a:txBody>
+                  <a:tcPr marL="54864" marR="54864" marT="18288" marB="18288" anchor="ctr">
+                    <a:solidFill>
+                      <a:srgbClr val="FFFFFF"/>
+                    </a:solidFill>
+                  </a:tcPr>
+                </a:tc>
+                <a:tc>
+                  <a:txBody>
+                    <a:bodyPr wrap="square"/>
+                    <a:lstStyle/>
+                    <a:p>
+                      <a:pPr algn="r"/>
+                      <a:r>
+                        <a:rPr sz="1200" b="0" i="0">
+                          <a:solidFill>
+                            <a:srgbClr val="1F2A44"/>
+                          </a:solidFill>
+                          <a:latin typeface="Arial"/>
+                        </a:rPr>
+                        <a:t>1.583</a:t>
+                      </a:r>
+                    </a:p>
+                  </a:txBody>
+                  <a:tcPr marL="54864" marR="54864" marT="18288" marB="18288" anchor="ctr">
+                    <a:solidFill>
+                      <a:srgbClr val="FFFFFF"/>
+                    </a:solidFill>
+                  </a:tcPr>
+                </a:tc>
+                <a:tc>
+                  <a:txBody>
+                    <a:bodyPr wrap="square"/>
+                    <a:lstStyle/>
+                    <a:p>
+                      <a:pPr algn="r"/>
+                      <a:r>
+                        <a:rPr sz="1200" b="0" i="0">
+                          <a:solidFill>
+                            <a:srgbClr val="1F2A44"/>
+                          </a:solidFill>
+                          <a:latin typeface="Arial"/>
+                        </a:rPr>
+                        <a:t>1.607</a:t>
+                      </a:r>
+                    </a:p>
+                  </a:txBody>
+                  <a:tcPr marL="54864" marR="54864" marT="18288" marB="18288" anchor="ctr">
+                    <a:solidFill>
+                      <a:srgbClr val="FFFFFF"/>
+                    </a:solidFill>
+                  </a:tcPr>
+                </a:tc>
+                <a:tc>
+                  <a:txBody>
+                    <a:bodyPr wrap="square"/>
+                    <a:lstStyle/>
+                    <a:p>
+                      <a:pPr algn="r"/>
+                      <a:r>
+                        <a:rPr sz="1200" b="0" i="0">
+                          <a:solidFill>
+                            <a:srgbClr val="1F2A44"/>
+                          </a:solidFill>
+                          <a:latin typeface="Arial"/>
+                        </a:rPr>
+                        <a:t>−0.00</a:t>
+                      </a:r>
+                    </a:p>
+                  </a:txBody>
+                  <a:tcPr marL="54864" marR="54864" marT="18288" marB="18288" anchor="ctr">
+                    <a:solidFill>
+                      <a:srgbClr val="FFFFFF"/>
+                    </a:solidFill>
+                  </a:tcPr>
+                </a:tc>
+                <a:tc>
+                  <a:txBody>
+                    <a:bodyPr wrap="square"/>
+                    <a:lstStyle/>
+                    <a:p>
+                      <a:pPr algn="r"/>
+                      <a:r>
+                        <a:rPr sz="1200" b="0" i="0">
+                          <a:solidFill>
+                            <a:srgbClr val="1F2A44"/>
+                          </a:solidFill>
+                          <a:latin typeface="Arial"/>
+                        </a:rPr>
+                        <a:t>+0.00</a:t>
+                      </a:r>
+                    </a:p>
+                  </a:txBody>
+                  <a:tcPr marL="54864" marR="54864" marT="18288" marB="18288" anchor="ctr">
+                    <a:solidFill>
+                      <a:srgbClr val="FFFFFF"/>
+                    </a:solidFill>
+                  </a:tcPr>
+                </a:tc>
+              </a:tr>
+            </a:tbl>
+          </a:graphicData>
+        </a:graphic>
+      </p:graphicFrame>
+      <p:graphicFrame>
+        <p:nvGraphicFramePr>
+          <p:cNvPr id="9" name="Table 8"/>
+          <p:cNvGraphicFramePr>
+            <a:graphicFrameLocks noGrp="1"/>
+          </p:cNvGraphicFramePr>
+          <p:nvPr/>
+        </p:nvGraphicFramePr>
+        <p:xfrm>
+          <a:off x="411480" y="4069080"/>
+          <a:ext cx="6400800" cy="2103120"/>
+        </p:xfrm>
+        <a:graphic>
+          <a:graphicData uri="http://schemas.openxmlformats.org/drawingml/2006/table">
+            <a:tbl>
+              <a:tblPr firstRow="0" bandRow="0">
+                <a:tableStyleId>{5C22544A-7EE6-4342-B048-85BDC9FD1C3A}</a:tableStyleId>
+              </a:tblPr>
+              <a:tblGrid>
+                <a:gridCol w="2651760"/>
+                <a:gridCol w="1280160"/>
+                <a:gridCol w="1280160"/>
+                <a:gridCol w="1188720"/>
+              </a:tblGrid>
+              <a:tr h="420624">
+                <a:tc>
+                  <a:txBody>
+                    <a:bodyPr wrap="square"/>
+                    <a:lstStyle/>
+                    <a:p>
+                      <a:pPr algn="l"/>
+                      <a:r>
+                        <a:rPr sz="1200" b="1" i="0">
+                          <a:solidFill>
+                            <a:srgbClr val="FFFFFF"/>
+                          </a:solidFill>
+                          <a:latin typeface="Arial"/>
+                        </a:rPr>
+                        <a:t>does the finding travel?</a:t>
+                      </a:r>
+                    </a:p>
+                  </a:txBody>
+                  <a:tcPr marL="54864" marR="54864" marT="18288" marB="18288" anchor="ctr">
+                    <a:solidFill>
+                      <a:srgbClr val="1F2A44"/>
+                    </a:solidFill>
+                  </a:tcPr>
+                </a:tc>
+                <a:tc>
+                  <a:txBody>
+                    <a:bodyPr wrap="square"/>
+                    <a:lstStyle/>
+                    <a:p>
+                      <a:pPr algn="r"/>
+                      <a:r>
+                        <a:rPr sz="1200" b="1" i="0">
+                          <a:solidFill>
+                            <a:srgbClr val="FFFFFF"/>
+                          </a:solidFill>
+                          <a:latin typeface="Arial"/>
+                        </a:rPr>
+                        <a:t>OpenShift</a:t>
+                      </a:r>
+                    </a:p>
+                  </a:txBody>
+                  <a:tcPr marL="54864" marR="54864" marT="18288" marB="18288" anchor="ctr">
+                    <a:solidFill>
+                      <a:srgbClr val="1F2A44"/>
+                    </a:solidFill>
+                  </a:tcPr>
+                </a:tc>
+                <a:tc>
+                  <a:txBody>
+                    <a:bodyPr wrap="square"/>
+                    <a:lstStyle/>
+                    <a:p>
+                      <a:pPr algn="r"/>
+                      <a:r>
+                        <a:rPr sz="1200" b="1" i="0">
+                          <a:solidFill>
+                            <a:srgbClr val="FFFFFF"/>
+                          </a:solidFill>
+                          <a:latin typeface="Arial"/>
+                        </a:rPr>
+                        <a:t>KinD</a:t>
+                      </a:r>
+                    </a:p>
+                  </a:txBody>
+                  <a:tcPr marL="54864" marR="54864" marT="18288" marB="18288" anchor="ctr">
+                    <a:solidFill>
+                      <a:srgbClr val="1F2A44"/>
+                    </a:solidFill>
+                  </a:tcPr>
+                </a:tc>
+                <a:tc>
+                  <a:txBody>
+                    <a:bodyPr wrap="square"/>
+                    <a:lstStyle/>
+                    <a:p>
+                      <a:pPr algn="r"/>
+                      <a:r>
+                        <a:rPr sz="1200" b="1" i="0">
+                          <a:solidFill>
+                            <a:srgbClr val="FFFFFF"/>
+                          </a:solidFill>
+                          <a:latin typeface="Arial"/>
+                        </a:rPr>
+                        <a:t>travels?</a:t>
+                      </a:r>
+                    </a:p>
+                  </a:txBody>
+                  <a:tcPr marL="54864" marR="54864" marT="18288" marB="18288" anchor="ctr">
+                    <a:solidFill>
+                      <a:srgbClr val="1F2A44"/>
+                    </a:solidFill>
+                  </a:tcPr>
+                </a:tc>
+              </a:tr>
+              <a:tr h="420624">
+                <a:tc>
+                  <a:txBody>
+                    <a:bodyPr wrap="square"/>
+                    <a:lstStyle/>
+                    <a:p>
+                      <a:pPr algn="l"/>
+                      <a:r>
+                        <a:rPr sz="1200" b="0" i="0">
+                          <a:solidFill>
+                            <a:srgbClr val="1F2A44"/>
+                          </a:solidFill>
+                          <a:latin typeface="Arial"/>
+                        </a:rPr>
+                        <a:t>which layer costs anything</a:t>
+                      </a:r>
+                    </a:p>
+                  </a:txBody>
+                  <a:tcPr marL="54864" marR="54864" marT="18288" marB="18288" anchor="ctr">
+                    <a:solidFill>
+                      <a:srgbClr val="FFFFFF"/>
+                    </a:solidFill>
+                  </a:tcPr>
+                </a:tc>
+                <a:tc>
+                  <a:txBody>
+                    <a:bodyPr wrap="square"/>
+                    <a:lstStyle/>
+                    <a:p>
+                      <a:pPr algn="r"/>
+                      <a:r>
+                        <a:rPr sz="1200" b="0" i="0">
+                          <a:solidFill>
+                            <a:srgbClr val="1F2A44"/>
+                          </a:solidFill>
+                          <a:latin typeface="Arial"/>
+                        </a:rPr>
+                        <a:t>the judge</a:t>
+                      </a:r>
+                    </a:p>
+                  </a:txBody>
+                  <a:tcPr marL="54864" marR="54864" marT="18288" marB="18288" anchor="ctr">
+                    <a:solidFill>
+                      <a:srgbClr val="FFFFFF"/>
+                    </a:solidFill>
+                  </a:tcPr>
+                </a:tc>
+                <a:tc>
+                  <a:txBody>
+                    <a:bodyPr wrap="square"/>
+                    <a:lstStyle/>
+                    <a:p>
+                      <a:pPr algn="r"/>
+                      <a:r>
+                        <a:rPr sz="1200" b="0" i="0">
+                          <a:solidFill>
+                            <a:srgbClr val="1F2A44"/>
+                          </a:solidFill>
+                          <a:latin typeface="Arial"/>
+                        </a:rPr>
+                        <a:t>the judge</a:t>
+                      </a:r>
+                    </a:p>
+                  </a:txBody>
+                  <a:tcPr marL="54864" marR="54864" marT="18288" marB="18288" anchor="ctr">
+                    <a:solidFill>
+                      <a:srgbClr val="FFFFFF"/>
+                    </a:solidFill>
+                  </a:tcPr>
+                </a:tc>
+                <a:tc>
+                  <a:txBody>
+                    <a:bodyPr wrap="square"/>
+                    <a:lstStyle/>
+                    <a:p>
+                      <a:pPr algn="r"/>
+                      <a:r>
+                        <a:rPr sz="1200" b="0" i="0">
+                          <a:solidFill>
+                            <a:srgbClr val="1F2A44"/>
+                          </a:solidFill>
+                          <a:latin typeface="Arial"/>
+                        </a:rPr>
+                        <a:t>yes</a:t>
+                      </a:r>
+                    </a:p>
+                  </a:txBody>
+                  <a:tcPr marL="54864" marR="54864" marT="18288" marB="18288" anchor="ctr">
+                    <a:solidFill>
+                      <a:srgbClr val="FFFFFF"/>
+                    </a:solidFill>
+                  </a:tcPr>
+                </a:tc>
+              </a:tr>
+              <a:tr h="420624">
+                <a:tc>
+                  <a:txBody>
+                    <a:bodyPr wrap="square"/>
+                    <a:lstStyle/>
+                    <a:p>
+                      <a:pPr algn="l"/>
+                      <a:r>
+                        <a:rPr sz="1200" b="0" i="0">
+                          <a:solidFill>
+                            <a:srgbClr val="1F2A44"/>
+                          </a:solidFill>
+                          <a:latin typeface="Arial"/>
+                        </a:rPr>
+                        <a:t>serial tool calls judged (p=1)</a:t>
+                      </a:r>
+                    </a:p>
+                  </a:txBody>
+                  <a:tcPr marL="54864" marR="54864" marT="18288" marB="18288" anchor="ctr">
+                    <a:solidFill>
+                      <a:srgbClr val="F3F5F9"/>
+                    </a:solidFill>
+                  </a:tcPr>
+                </a:tc>
+                <a:tc>
+                  <a:txBody>
+                    <a:bodyPr wrap="square"/>
+                    <a:lstStyle/>
+                    <a:p>
+                      <a:pPr algn="r"/>
+                      <a:r>
+                        <a:rPr sz="1200" b="0" i="0">
+                          <a:solidFill>
+                            <a:srgbClr val="1F2A44"/>
+                          </a:solidFill>
+                          <a:latin typeface="Arial"/>
+                        </a:rPr>
+                        <a:t>10 / 10</a:t>
+                      </a:r>
+                    </a:p>
+                  </a:txBody>
+                  <a:tcPr marL="54864" marR="54864" marT="18288" marB="18288" anchor="ctr">
+                    <a:solidFill>
+                      <a:srgbClr val="F3F5F9"/>
+                    </a:solidFill>
+                  </a:tcPr>
+                </a:tc>
+                <a:tc>
+                  <a:txBody>
+                    <a:bodyPr wrap="square"/>
+                    <a:lstStyle/>
+                    <a:p>
+                      <a:pPr algn="r"/>
+                      <a:r>
+                        <a:rPr sz="1200" b="0" i="0">
+                          <a:solidFill>
+                            <a:srgbClr val="1F2A44"/>
+                          </a:solidFill>
+                          <a:latin typeface="Arial"/>
+                        </a:rPr>
+                        <a:t>10 / 10</a:t>
+                      </a:r>
+                    </a:p>
+                  </a:txBody>
+                  <a:tcPr marL="54864" marR="54864" marT="18288" marB="18288" anchor="ctr">
+                    <a:solidFill>
+                      <a:srgbClr val="F3F5F9"/>
+                    </a:solidFill>
+                  </a:tcPr>
+                </a:tc>
+                <a:tc>
+                  <a:txBody>
+                    <a:bodyPr wrap="square"/>
+                    <a:lstStyle/>
+                    <a:p>
+                      <a:pPr algn="r"/>
+                      <a:r>
+                        <a:rPr sz="1200" b="0" i="0">
+                          <a:solidFill>
+                            <a:srgbClr val="1F2A44"/>
+                          </a:solidFill>
+                          <a:latin typeface="Arial"/>
+                        </a:rPr>
+                        <a:t>yes</a:t>
+                      </a:r>
+                    </a:p>
+                  </a:txBody>
+                  <a:tcPr marL="54864" marR="54864" marT="18288" marB="18288" anchor="ctr">
+                    <a:solidFill>
+                      <a:srgbClr val="F3F5F9"/>
+                    </a:solidFill>
+                  </a:tcPr>
+                </a:tc>
+              </a:tr>
+              <a:tr h="420624">
+                <a:tc>
+                  <a:txBody>
+                    <a:bodyPr wrap="square"/>
+                    <a:lstStyle/>
+                    <a:p>
+                      <a:pPr algn="l"/>
+                      <a:r>
+                        <a:rPr sz="1200" b="0" i="0">
+                          <a:solidFill>
+                            <a:srgbClr val="1F2A44"/>
+                          </a:solidFill>
+                          <a:latin typeface="Arial"/>
+                        </a:rPr>
+                        <a:t>judged / tool-call ratio, n=50</a:t>
+                      </a:r>
+                    </a:p>
+                  </a:txBody>
+                  <a:tcPr marL="54864" marR="54864" marT="18288" marB="18288" anchor="ctr">
+                    <a:solidFill>
+                      <a:srgbClr val="FFFFFF"/>
+                    </a:solidFill>
+                  </a:tcPr>
+                </a:tc>
+                <a:tc>
+                  <a:txBody>
+                    <a:bodyPr wrap="square"/>
+                    <a:lstStyle/>
+                    <a:p>
+                      <a:pPr algn="r"/>
+                      <a:r>
+                        <a:rPr sz="1200" b="0" i="0">
+                          <a:solidFill>
+                            <a:srgbClr val="1F2A44"/>
+                          </a:solidFill>
+                          <a:latin typeface="Arial"/>
+                        </a:rPr>
+                        <a:t>0.94–1.00</a:t>
+                      </a:r>
+                    </a:p>
+                  </a:txBody>
+                  <a:tcPr marL="54864" marR="54864" marT="18288" marB="18288" anchor="ctr">
+                    <a:solidFill>
+                      <a:srgbClr val="FFFFFF"/>
+                    </a:solidFill>
+                  </a:tcPr>
+                </a:tc>
+                <a:tc>
+                  <a:txBody>
+                    <a:bodyPr wrap="square"/>
+                    <a:lstStyle/>
+                    <a:p>
+                      <a:pPr algn="r"/>
+                      <a:r>
+                        <a:rPr sz="1200" b="0" i="0">
+                          <a:solidFill>
+                            <a:srgbClr val="1F2A44"/>
+                          </a:solidFill>
+                          <a:latin typeface="Arial"/>
+                        </a:rPr>
+                        <a:t>0.96–1.02</a:t>
+                      </a:r>
+                    </a:p>
+                  </a:txBody>
+                  <a:tcPr marL="54864" marR="54864" marT="18288" marB="18288" anchor="ctr">
+                    <a:solidFill>
+                      <a:srgbClr val="FFFFFF"/>
+                    </a:solidFill>
+                  </a:tcPr>
+                </a:tc>
+                <a:tc>
+                  <a:txBody>
+                    <a:bodyPr wrap="square"/>
+                    <a:lstStyle/>
+                    <a:p>
+                      <a:pPr algn="r"/>
+                      <a:r>
+                        <a:rPr sz="1200" b="0" i="0">
+                          <a:solidFill>
+                            <a:srgbClr val="1F2A44"/>
+                          </a:solidFill>
+                          <a:latin typeface="Arial"/>
+                        </a:rPr>
+                        <a:t>yes</a:t>
+                      </a:r>
+                    </a:p>
+                  </a:txBody>
+                  <a:tcPr marL="54864" marR="54864" marT="18288" marB="18288" anchor="ctr">
+                    <a:solidFill>
+                      <a:srgbClr val="FFFFFF"/>
+                    </a:solidFill>
+                  </a:tcPr>
+                </a:tc>
+              </a:tr>
+              <a:tr h="420624">
+                <a:tc>
+                  <a:txBody>
+                    <a:bodyPr wrap="square"/>
+                    <a:lstStyle/>
+                    <a:p>
+                      <a:pPr algn="l"/>
+                      <a:r>
+                        <a:rPr sz="1200" b="0" i="0">
+                          <a:solidFill>
+                            <a:srgbClr val="1F2A44"/>
+                          </a:solidFill>
+                          <a:latin typeface="Arial"/>
+                        </a:rPr>
+                        <a:t>tau2 measured / projected</a:t>
+                      </a:r>
+                    </a:p>
+                  </a:txBody>
+                  <a:tcPr marL="54864" marR="54864" marT="18288" marB="18288" anchor="ctr">
+                    <a:solidFill>
+                      <a:srgbClr val="F3F5F9"/>
+                    </a:solidFill>
+                  </a:tcPr>
+                </a:tc>
+                <a:tc>
+                  <a:txBody>
+                    <a:bodyPr wrap="square"/>
+                    <a:lstStyle/>
+                    <a:p>
+                      <a:pPr algn="r"/>
+                      <a:r>
+                        <a:rPr sz="1200" b="0" i="0">
+                          <a:solidFill>
+                            <a:srgbClr val="1F2A44"/>
+                          </a:solidFill>
+                          <a:latin typeface="Arial"/>
+                        </a:rPr>
+                        <a:t>1.66×</a:t>
+                      </a:r>
+                    </a:p>
+                  </a:txBody>
+                  <a:tcPr marL="54864" marR="54864" marT="18288" marB="18288" anchor="ctr">
+                    <a:solidFill>
+                      <a:srgbClr val="F3F5F9"/>
+                    </a:solidFill>
+                  </a:tcPr>
+                </a:tc>
+                <a:tc>
+                  <a:txBody>
+                    <a:bodyPr wrap="square"/>
+                    <a:lstStyle/>
+                    <a:p>
+                      <a:pPr algn="r"/>
+                      <a:r>
+                        <a:rPr sz="1200" b="0" i="0">
+                          <a:solidFill>
+                            <a:srgbClr val="1F2A44"/>
+                          </a:solidFill>
+                          <a:latin typeface="Arial"/>
+                        </a:rPr>
+                        <a:t>2.01×</a:t>
+                      </a:r>
+                    </a:p>
+                  </a:txBody>
+                  <a:tcPr marL="54864" marR="54864" marT="18288" marB="18288" anchor="ctr">
+                    <a:solidFill>
+                      <a:srgbClr val="F3F5F9"/>
+                    </a:solidFill>
+                  </a:tcPr>
+                </a:tc>
+                <a:tc>
+                  <a:txBody>
+                    <a:bodyPr wrap="square"/>
+                    <a:lstStyle/>
+                    <a:p>
+                      <a:pPr algn="r"/>
+                      <a:r>
+                        <a:rPr sz="1200" b="0" i="0">
+                          <a:solidFill>
+                            <a:srgbClr val="1F2A44"/>
+                          </a:solidFill>
+                          <a:latin typeface="Arial"/>
+                        </a:rPr>
+                        <a:t>partly</a:t>
+                      </a:r>
+                    </a:p>
+                  </a:txBody>
+                  <a:tcPr marL="54864" marR="54864" marT="18288" marB="18288" anchor="ctr">
+                    <a:solidFill>
+                      <a:srgbClr val="F3F5F9"/>
+                    </a:solidFill>
+                  </a:tcPr>
+                </a:tc>
+              </a:tr>
+            </a:tbl>
+          </a:graphicData>
+        </a:graphic>
+      </p:graphicFrame>
+      <p:sp>
+        <p:nvSpPr>
+          <p:cNvPr id="10" name="Rounded Rectangle 9"/>
+          <p:cNvSpPr/>
+          <p:nvPr/>
+        </p:nvSpPr>
+        <p:spPr>
+          <a:xfrm>
+            <a:off x="7040880" y="1325880"/>
+            <a:ext cx="4736592" cy="1417320"/>
+          </a:xfrm>
+          <a:prstGeom prst="roundRect">
+            <a:avLst>
+              <a:gd name="adj" fmla="val 10322"/>
+            </a:avLst>
+          </a:prstGeom>
+          <a:solidFill>
+            <a:srgbClr val="FFFFFF"/>
+          </a:solidFill>
+          <a:ln w="15875">
+            <a:solidFill>
+              <a:srgbClr val="8A93A3"/>
+            </a:solidFill>
+          </a:ln>
+          <a:effectLst/>
+        </p:spPr>
+        <p:style>
+          <a:lnRef idx="1">
+            <a:schemeClr val="accent1"/>
+          </a:lnRef>
+          <a:fillRef idx="3">
+            <a:schemeClr val="accent1"/>
+          </a:fillRef>
+          <a:effectRef idx="2">
+            <a:schemeClr val="accent1"/>
+          </a:effectRef>
+          <a:fontRef idx="minor">
+            <a:schemeClr val="lt1"/>
+          </a:fontRef>
+        </p:style>
+        <p:txBody>
+          <a:bodyPr rtlCol="0" anchor="t" lIns="73152" rIns="73152" tIns="36576" bIns="36576" wrap="square"/>
+          <a:lstStyle/>
+          <a:p>
+            <a:pPr algn="l">
+              <a:spcAft>
+                <a:spcPts val="300"/>
+              </a:spcAft>
+            </a:pPr>
+            <a:r>
+              <a:rPr sz="1300" b="1" i="0">
+                <a:solidFill>
+                  <a:srgbClr val="1F2A44"/>
+                </a:solidFill>
+                <a:latin typeface="Arial"/>
+              </a:rPr>
+              <a:t>The judge is the cost, on both clusters</a:t>
+            </a:r>
+          </a:p>
+          <a:p>
+            <a:pPr algn="l">
+              <a:spcAft>
+                <a:spcPts val="300"/>
+              </a:spcAft>
+            </a:pPr>
+            <a:r>
+              <a:rPr sz="1200" b="0" i="0">
+                <a:solidFill>
+                  <a:srgbClr val="1F2A44"/>
+                </a:solidFill>
+                <a:latin typeface="Arial"/>
+              </a:rPr>
+              <a:t>+1.36 s/task on OpenShift, +1.48 s on KinD. The sidecar's presence costs 0.03–0.05 s, every other layer is noise, and with the judge on the two land within 3%.</a:t>
+            </a:r>
+          </a:p>
+        </p:txBody>
+      </p:sp>
+      <p:sp>
+        <p:nvSpPr>
+          <p:cNvPr id="11" name="Rounded Rectangle 10"/>
+          <p:cNvSpPr/>
+          <p:nvPr/>
+        </p:nvSpPr>
+        <p:spPr>
+          <a:xfrm>
+            <a:off x="7040880" y="2926080"/>
+            <a:ext cx="4736592" cy="1188720"/>
+          </a:xfrm>
+          <a:prstGeom prst="roundRect">
+            <a:avLst>
+              <a:gd name="adj" fmla="val 12000"/>
+            </a:avLst>
+          </a:prstGeom>
+          <a:solidFill>
+            <a:srgbClr val="FBECEA"/>
+          </a:solidFill>
+          <a:ln w="15875">
+            <a:solidFill>
+              <a:srgbClr val="B03A2E"/>
+            </a:solidFill>
+          </a:ln>
+          <a:effectLst/>
+        </p:spPr>
+        <p:style>
+          <a:lnRef idx="1">
+            <a:schemeClr val="accent1"/>
+          </a:lnRef>
+          <a:fillRef idx="3">
+            <a:schemeClr val="accent1"/>
+          </a:fillRef>
+          <a:effectRef idx="2">
+            <a:schemeClr val="accent1"/>
+          </a:effectRef>
+          <a:fontRef idx="minor">
+            <a:schemeClr val="lt1"/>
+          </a:fontRef>
+        </p:style>
+        <p:txBody>
+          <a:bodyPr rtlCol="0" anchor="t" lIns="73152" rIns="73152" tIns="36576" bIns="36576" wrap="square"/>
+          <a:lstStyle/>
+          <a:p>
+            <a:pPr algn="l">
+              <a:spcAft>
+                <a:spcPts val="200"/>
+              </a:spcAft>
+            </a:pPr>
+            <a:r>
+              <a:rPr sz="1200" b="1" i="0">
+                <a:solidFill>
+                  <a:srgbClr val="1F2A44"/>
+                </a:solidFill>
+                <a:latin typeface="Arial"/>
+              </a:rPr>
+              <a:t>Still name the cluster</a:t>
+            </a:r>
+          </a:p>
+          <a:p>
+            <a:pPr algn="l">
+              <a:spcAft>
+                <a:spcPts val="200"/>
+              </a:spcAft>
+            </a:pPr>
+            <a:r>
+              <a:rPr sz="1200" b="0" i="0">
+                <a:solidFill>
+                  <a:srgbClr val="1F2A44"/>
+                </a:solidFill>
+                <a:latin typeface="Arial"/>
+              </a:rPr>
+              <a:t>The between-deploy noise floor is 0.02 s on OpenShift and 0.12 s on KinD, and ~0.26 s of each judged call on KinD is the node's DNS being retried.</a:t>
+            </a:r>
+          </a:p>
+        </p:txBody>
+      </p:sp>
+    </p:spTree>
+  </p:cSld>
+  <p:clrMapOvr>
+    <a:masterClrMapping/>
+  </p:clrMapOvr>
+</p:sld>
+</file>
+
+<file path=ppt/slides/slide37.xml><?xml version="1.0" encoding="utf-8"?>
+<p:sld xmlns:a="http://schemas.openxmlformats.org/drawingml/2006/main" xmlns:p="http://schemas.openxmlformats.org/presentationml/2006/main" xmlns:r="http://schemas.openxmlformats.org/officeDocument/2006/relationships">
+  <p:cSld>
+    <p:spTree>
+      <p:nvGrpSpPr>
+        <p:cNvPr id="1" name=""/>
+        <p:cNvGrpSpPr/>
+        <p:nvPr/>
+      </p:nvGrpSpPr>
+      <p:grpSpPr/>
+      <p:sp>
+        <p:nvSpPr>
+          <p:cNvPr id="2" name="Rectangle 1"/>
+          <p:cNvSpPr/>
+          <p:nvPr/>
+        </p:nvSpPr>
+        <p:spPr>
+          <a:xfrm>
+            <a:off x="0" y="0"/>
+            <a:ext cx="12191695" cy="109728"/>
+          </a:xfrm>
+          <a:prstGeom prst="rect">
+            <a:avLst/>
+          </a:prstGeom>
+          <a:solidFill>
+            <a:srgbClr val="1F2A44"/>
+          </a:solidFill>
+          <a:ln>
+            <a:noFill/>
+          </a:ln>
+        </p:spPr>
+        <p:style>
+          <a:lnRef idx="1">
+            <a:schemeClr val="accent1"/>
+          </a:lnRef>
+          <a:fillRef idx="3">
+            <a:schemeClr val="accent1"/>
+          </a:fillRef>
+          <a:effectRef idx="2">
+            <a:schemeClr val="accent1"/>
+          </a:effectRef>
+          <a:fontRef idx="minor">
+            <a:schemeClr val="lt1"/>
+          </a:fontRef>
+        </p:style>
+        <p:txBody>
+          <a:bodyPr rtlCol="0" anchor="ctr"/>
+          <a:lstStyle/>
+          <a:p>
+            <a:pPr algn="ctr"/>
+          </a:p>
+        </p:txBody>
+      </p:sp>
+      <p:sp>
+        <p:nvSpPr>
+          <p:cNvPr id="3" name="TextBox 2"/>
+          <p:cNvSpPr txBox="1"/>
+          <p:nvPr/>
+        </p:nvSpPr>
+        <p:spPr>
+          <a:xfrm>
+            <a:off x="411480" y="256032"/>
+            <a:ext cx="11338560" cy="566928"/>
+          </a:xfrm>
+          <a:prstGeom prst="rect">
+            <a:avLst/>
+          </a:prstGeom>
+          <a:noFill/>
+        </p:spPr>
+        <p:txBody>
+          <a:bodyPr wrap="square" lIns="36576" rIns="36576" tIns="18288" bIns="18288" anchor="ctr">
+            <a:spAutoFit/>
+          </a:bodyPr>
+          <a:lstStyle/>
+          <a:p>
+            <a:pPr algn="l">
+              <a:spcAft>
+                <a:spcPts val="600"/>
+              </a:spcAft>
+            </a:pPr>
+            <a:r>
+              <a:rPr sz="2600" b="1" i="0">
+                <a:solidFill>
+                  <a:srgbClr val="1F2A44"/>
+                </a:solidFill>
+                <a:latin typeface="Arial"/>
+              </a:rPr>
+              <a:t>Why the plugin result can be trusted</a:t>
+            </a:r>
+          </a:p>
+        </p:txBody>
+      </p:sp>
+      <p:sp>
+        <p:nvSpPr>
+          <p:cNvPr id="4" name="TextBox 3"/>
+          <p:cNvSpPr txBox="1"/>
+          <p:nvPr/>
+        </p:nvSpPr>
+        <p:spPr>
+          <a:xfrm>
+            <a:off x="411480" y="786384"/>
+            <a:ext cx="11338560" cy="329184"/>
+          </a:xfrm>
+          <a:prstGeom prst="rect">
+            <a:avLst/>
+          </a:prstGeom>
+          <a:noFill/>
+        </p:spPr>
+        <p:txBody>
+          <a:bodyPr wrap="square" lIns="36576" rIns="36576" tIns="18288" bIns="18288" anchor="t">
+            <a:spAutoFit/>
+          </a:bodyPr>
+          <a:lstStyle/>
+          <a:p>
+            <a:pPr algn="l">
+              <a:spcAft>
+                <a:spcPts val="600"/>
+              </a:spcAft>
+            </a:pPr>
+            <a:r>
+              <a:rPr sz="1400" b="0" i="0">
+                <a:solidFill>
+                  <a:srgbClr val="5B6477"/>
+                </a:solidFill>
+                <a:latin typeface="Arial"/>
+              </a:rPr>
+              <a:t>The checks behind the numbers on the previous slide</a:t>
+            </a:r>
+          </a:p>
+        </p:txBody>
+      </p:sp>
+      <p:cxnSp>
+        <p:nvCxnSpPr>
+          <p:cNvPr id="5" name="Connector 4"/>
+          <p:cNvCxnSpPr/>
+          <p:nvPr/>
+        </p:nvCxnSpPr>
+        <p:spPr>
+          <a:xfrm>
+            <a:off x="411480" y="6446520"/>
+            <a:ext cx="11365992" cy="0"/>
+          </a:xfrm>
+          <a:prstGeom prst="line">
+            <a:avLst/>
+          </a:prstGeom>
+          <a:ln w="9525">
+            <a:solidFill>
+              <a:srgbClr val="C9CFDA"/>
+            </a:solidFill>
+          </a:ln>
+        </p:spPr>
+        <p:style>
+          <a:lnRef idx="2">
+            <a:schemeClr val="accent1"/>
+          </a:lnRef>
+          <a:fillRef idx="0">
+            <a:schemeClr val="accent1"/>
+          </a:fillRef>
+          <a:effectRef idx="1">
+            <a:schemeClr val="accent1"/>
+          </a:effectRef>
+          <a:fontRef idx="minor">
+            <a:schemeClr val="tx1"/>
+          </a:fontRef>
+        </p:style>
+      </p:cxnSp>
+      <p:sp>
+        <p:nvSpPr>
+          <p:cNvPr id="6" name="TextBox 5"/>
+          <p:cNvSpPr txBox="1"/>
+          <p:nvPr/>
+        </p:nvSpPr>
+        <p:spPr>
+          <a:xfrm>
+            <a:off x="411480" y="6492240"/>
+            <a:ext cx="8229600" cy="274320"/>
+          </a:xfrm>
+          <a:prstGeom prst="rect">
+            <a:avLst/>
+          </a:prstGeom>
+          <a:noFill/>
+        </p:spPr>
+        <p:txBody>
+          <a:bodyPr wrap="square" lIns="36576" rIns="36576" tIns="18288" bIns="18288" anchor="ctr">
+            <a:spAutoFit/>
+          </a:bodyPr>
+          <a:lstStyle/>
+          <a:p>
+            <a:pPr algn="l">
+              <a:spcAft>
+                <a:spcPts val="0"/>
+              </a:spcAft>
+            </a:pPr>
+            <a:r>
+              <a:rPr sz="1000" b="0" i="0">
+                <a:solidFill>
+                  <a:srgbClr val="5B6477"/>
+                </a:solidFill>
+                <a:latin typeface="Arial"/>
+              </a:rPr>
+              <a:t>AutoBench · architecture &amp; design · 6  Results (v1.36)</a:t>
+            </a:r>
+          </a:p>
+        </p:txBody>
+      </p:sp>
+      <p:sp>
+        <p:nvSpPr>
+          <p:cNvPr id="7" name="TextBox 6"/>
+          <p:cNvSpPr txBox="1"/>
+          <p:nvPr/>
+        </p:nvSpPr>
+        <p:spPr>
+          <a:xfrm>
+            <a:off x="10881360" y="6492240"/>
+            <a:ext cx="914400" cy="274320"/>
+          </a:xfrm>
+          <a:prstGeom prst="rect">
+            <a:avLst/>
+          </a:prstGeom>
+          <a:noFill/>
+        </p:spPr>
+        <p:txBody>
+          <a:bodyPr wrap="square" lIns="36576" rIns="36576" tIns="18288" bIns="18288" anchor="ctr">
+            <a:spAutoFit/>
+          </a:bodyPr>
+          <a:lstStyle/>
+          <a:p>
+            <a:pPr algn="r">
+              <a:spcAft>
+                <a:spcPts val="0"/>
+              </a:spcAft>
+            </a:pPr>
+            <a:r>
+              <a:rPr sz="1000" b="0" i="0">
+                <a:solidFill>
+                  <a:srgbClr val="5B6477"/>
+                </a:solidFill>
+                <a:latin typeface="Arial"/>
+              </a:rPr>
+              <a:t>38</a:t>
+            </a:r>
+          </a:p>
+        </p:txBody>
+      </p:sp>
+      <p:sp>
+        <p:nvSpPr>
+          <p:cNvPr id="8" name="Rounded Rectangle 7"/>
+          <p:cNvSpPr/>
+          <p:nvPr/>
+        </p:nvSpPr>
+        <p:spPr>
+          <a:xfrm>
+            <a:off x="411480" y="1325880"/>
+            <a:ext cx="5577840" cy="1828800"/>
+          </a:xfrm>
+          <a:prstGeom prst="roundRect">
+            <a:avLst>
+              <a:gd name="adj" fmla="val 8000"/>
+            </a:avLst>
+          </a:prstGeom>
+          <a:solidFill>
+            <a:srgbClr val="FFFFFF"/>
+          </a:solidFill>
+          <a:ln w="15875">
+            <a:solidFill>
+              <a:srgbClr val="8A93A3"/>
+            </a:solidFill>
+          </a:ln>
+          <a:effectLst/>
+        </p:spPr>
+        <p:style>
+          <a:lnRef idx="1">
+            <a:schemeClr val="accent1"/>
+          </a:lnRef>
+          <a:fillRef idx="3">
+            <a:schemeClr val="accent1"/>
+          </a:fillRef>
+          <a:effectRef idx="2">
+            <a:schemeClr val="accent1"/>
+          </a:effectRef>
+          <a:fontRef idx="minor">
+            <a:schemeClr val="lt1"/>
+          </a:fontRef>
+        </p:style>
+        <p:txBody>
+          <a:bodyPr rtlCol="0" anchor="t" lIns="73152" rIns="73152" tIns="36576" bIns="36576" wrap="square"/>
+          <a:lstStyle/>
+          <a:p>
+            <a:pPr algn="l">
+              <a:spcAft>
+                <a:spcPts val="300"/>
+              </a:spcAft>
+            </a:pPr>
+            <a:r>
+              <a:rPr sz="1500" b="1" i="0">
+                <a:solidFill>
+                  <a:srgbClr val="1F2A44"/>
+                </a:solidFill>
+                <a:latin typeface="Arial"/>
+              </a:rPr>
+              <a:t>Not a timeout: we checked</a:t>
+            </a:r>
+          </a:p>
+          <a:p>
+            <a:pPr algn="l">
+              <a:spcAft>
+                <a:spcPts val="300"/>
+              </a:spcAft>
+            </a:pPr>
+            <a:r>
+              <a:rPr sz="1400" b="0" i="0">
+                <a:solidFill>
+                  <a:srgbClr val="1F2A44"/>
+                </a:solidFill>
+                <a:latin typeface="Arial"/>
+              </a:rPr>
+              <a:t>A timeout piles values on a round number. Judged tasks run 0.21–9.63 s (OpenShift) and 0.12–7.75 s (KinD) around a ~1.6 s median, no 0.1 s bin above 12%: variable latency, inherited from the judge's own LLM call.</a:t>
+            </a:r>
+          </a:p>
+        </p:txBody>
+      </p:sp>
+      <p:sp>
+        <p:nvSpPr>
+          <p:cNvPr id="9" name="Rounded Rectangle 8"/>
+          <p:cNvSpPr/>
+          <p:nvPr/>
+        </p:nvSpPr>
+        <p:spPr>
+          <a:xfrm>
+            <a:off x="6199632" y="1325880"/>
+            <a:ext cx="5577840" cy="1828800"/>
+          </a:xfrm>
+          <a:prstGeom prst="roundRect">
+            <a:avLst>
+              <a:gd name="adj" fmla="val 8000"/>
+            </a:avLst>
+          </a:prstGeom>
+          <a:solidFill>
+            <a:srgbClr val="FFFFFF"/>
+          </a:solidFill>
+          <a:ln w="15875">
+            <a:solidFill>
+              <a:srgbClr val="8A93A3"/>
+            </a:solidFill>
+          </a:ln>
+          <a:effectLst/>
+        </p:spPr>
+        <p:style>
+          <a:lnRef idx="1">
+            <a:schemeClr val="accent1"/>
+          </a:lnRef>
+          <a:fillRef idx="3">
+            <a:schemeClr val="accent1"/>
+          </a:fillRef>
+          <a:effectRef idx="2">
+            <a:schemeClr val="accent1"/>
+          </a:effectRef>
+          <a:fontRef idx="minor">
+            <a:schemeClr val="lt1"/>
+          </a:fontRef>
+        </p:style>
+        <p:txBody>
+          <a:bodyPr rtlCol="0" anchor="t" lIns="73152" rIns="73152" tIns="36576" bIns="36576" wrap="square"/>
+          <a:lstStyle/>
+          <a:p>
+            <a:pPr algn="l">
+              <a:spcAft>
+                <a:spcPts val="300"/>
+              </a:spcAft>
+            </a:pPr>
+            <a:r>
+              <a:rPr sz="1500" b="1" i="0">
+                <a:solidFill>
+                  <a:srgbClr val="1F2A44"/>
+                </a:solidFill>
+                <a:latin typeface="Arial"/>
+              </a:rPr>
+              <a:t>One flag decides whether it measures anything</a:t>
+            </a:r>
+          </a:p>
+          <a:p>
+            <a:pPr algn="l">
+              <a:spcAft>
+                <a:spcPts val="300"/>
+              </a:spcAft>
+            </a:pPr>
+            <a:r>
+              <a:rPr sz="1400" b="0" i="0">
+                <a:solidFill>
+                  <a:srgbClr val="1F2A44"/>
+                </a:solidFill>
+                <a:latin typeface="Arial"/>
+              </a:rPr>
+              <a:t>Every gsm8k leg sends the same 50 prompts, and the gateway replays completions for ~10 min. </a:t>
+            </a:r>
+            <a:r>
+              <a:rPr sz="1400" b="0" i="0">
+                <a:solidFill>
+                  <a:srgbClr val="1F2A44"/>
+                </a:solidFill>
+                <a:latin typeface="Consolas"/>
+              </a:rPr>
+              <a:t>BM_CACHE_GAP=900</a:t>
+            </a:r>
+            <a:r>
+              <a:rPr sz="1400" b="0" i="0">
+                <a:solidFill>
+                  <a:srgbClr val="1F2A44"/>
+                </a:solidFill>
+                <a:latin typeface="Arial"/>
+              </a:rPr>
+              <a:t> spaces the legs; the nesting check (no sidecar leg can beat a sidecar-free one) clears by 1.3× on both.</a:t>
+            </a:r>
+          </a:p>
+        </p:txBody>
+      </p:sp>
+      <p:sp>
+        <p:nvSpPr>
+          <p:cNvPr id="10" name="Rounded Rectangle 9"/>
+          <p:cNvSpPr/>
+          <p:nvPr/>
+        </p:nvSpPr>
+        <p:spPr>
+          <a:xfrm>
+            <a:off x="411480" y="3337560"/>
+            <a:ext cx="5577840" cy="1828800"/>
+          </a:xfrm>
+          <a:prstGeom prst="roundRect">
+            <a:avLst>
+              <a:gd name="adj" fmla="val 8000"/>
+            </a:avLst>
+          </a:prstGeom>
+          <a:solidFill>
+            <a:srgbClr val="FFFFFF"/>
+          </a:solidFill>
+          <a:ln w="15875">
+            <a:solidFill>
+              <a:srgbClr val="8A93A3"/>
+            </a:solidFill>
+          </a:ln>
+          <a:effectLst/>
+        </p:spPr>
+        <p:style>
+          <a:lnRef idx="1">
+            <a:schemeClr val="accent1"/>
+          </a:lnRef>
+          <a:fillRef idx="3">
+            <a:schemeClr val="accent1"/>
+          </a:fillRef>
+          <a:effectRef idx="2">
+            <a:schemeClr val="accent1"/>
+          </a:effectRef>
+          <a:fontRef idx="minor">
+            <a:schemeClr val="lt1"/>
+          </a:fontRef>
+        </p:style>
+        <p:txBody>
+          <a:bodyPr rtlCol="0" anchor="t" lIns="73152" rIns="73152" tIns="36576" bIns="36576" wrap="square"/>
+          <a:lstStyle/>
+          <a:p>
+            <a:pPr algn="l">
+              <a:spcAft>
+                <a:spcPts val="300"/>
+              </a:spcAft>
+            </a:pPr>
+            <a:r>
+              <a:rPr sz="1500" b="1" i="0">
+                <a:solidFill>
+                  <a:srgbClr val="1F2A44"/>
+                </a:solidFill>
+                <a:latin typeface="Arial"/>
+              </a:rPr>
+              <a:t>The deploy is the unit of replication</a:t>
+            </a:r>
+          </a:p>
+          <a:p>
+            <a:pPr algn="l">
+              <a:spcAft>
+                <a:spcPts val="300"/>
+              </a:spcAft>
+            </a:pPr>
+            <a:r>
+              <a:rPr sz="1400" b="0" i="0">
+                <a:solidFill>
+                  <a:srgbClr val="1F2A44"/>
+                </a:solidFill>
+                <a:latin typeface="Arial"/>
+              </a:rPr>
+              <a:t>A per-task interval measures variance within one deploy. The honest floor is between two deploys, and only the judge's step clears it: add deploys to rank presets, not tasks.</a:t>
+            </a:r>
+          </a:p>
+        </p:txBody>
+      </p:sp>
+      <p:sp>
+        <p:nvSpPr>
+          <p:cNvPr id="11" name="Rounded Rectangle 10"/>
+          <p:cNvSpPr/>
+          <p:nvPr/>
+        </p:nvSpPr>
+        <p:spPr>
+          <a:xfrm>
+            <a:off x="6199632" y="3337560"/>
+            <a:ext cx="5577840" cy="1828800"/>
+          </a:xfrm>
+          <a:prstGeom prst="roundRect">
+            <a:avLst>
+              <a:gd name="adj" fmla="val 8000"/>
+            </a:avLst>
+          </a:prstGeom>
+          <a:solidFill>
+            <a:srgbClr val="FFFFFF"/>
+          </a:solidFill>
+          <a:ln w="15875">
+            <a:solidFill>
+              <a:srgbClr val="8A93A3"/>
+            </a:solidFill>
+          </a:ln>
+          <a:effectLst/>
+        </p:spPr>
+        <p:style>
+          <a:lnRef idx="1">
+            <a:schemeClr val="accent1"/>
+          </a:lnRef>
+          <a:fillRef idx="3">
+            <a:schemeClr val="accent1"/>
+          </a:fillRef>
+          <a:effectRef idx="2">
+            <a:schemeClr val="accent1"/>
+          </a:effectRef>
+          <a:fontRef idx="minor">
+            <a:schemeClr val="lt1"/>
+          </a:fontRef>
+        </p:style>
+        <p:txBody>
+          <a:bodyPr rtlCol="0" anchor="t" lIns="73152" rIns="73152" tIns="36576" bIns="36576" wrap="square"/>
+          <a:lstStyle/>
+          <a:p>
+            <a:pPr algn="l">
+              <a:spcAft>
+                <a:spcPts val="300"/>
+              </a:spcAft>
+            </a:pPr>
+            <a:r>
+              <a:rPr sz="1500" b="1" i="0">
+                <a:solidFill>
+                  <a:srgbClr val="1F2A44"/>
+                </a:solidFill>
+                <a:latin typeface="Arial"/>
+              </a:rPr>
+              <a:t>Two deploys already resolve a 1 s effect</a:t>
+            </a:r>
+          </a:p>
+          <a:p>
+            <a:pPr algn="l">
+              <a:spcAft>
+                <a:spcPts val="300"/>
+              </a:spcAft>
+            </a:pPr>
+            <a:r>
+              <a:rPr sz="1400" b="0" i="0">
+                <a:solidFill>
+                  <a:srgbClr val="1F2A44"/>
+                </a:solidFill>
+                <a:latin typeface="Arial"/>
+              </a:rPr>
+              <a:t>At σ ≈ 0.02 s (OpenShift) and 0.13 s (KinD), so the small steps are genuinely small rather than unresolved.</a:t>
+            </a:r>
+          </a:p>
+        </p:txBody>
+      </p:sp>
+    </p:spTree>
+  </p:cSld>
+  <p:clrMapOvr>
+    <a:masterClrMapping/>
+  </p:clrMapOvr>
+</p:sld>
+</file>
+
+<file path=ppt/slides/slide38.xml><?xml version="1.0" encoding="utf-8"?>
+<p:sld xmlns:a="http://schemas.openxmlformats.org/drawingml/2006/main" xmlns:p="http://schemas.openxmlformats.org/presentationml/2006/main" xmlns:r="http://schemas.openxmlformats.org/officeDocument/2006/relationships">
+  <p:cSld>
+    <p:spTree>
+      <p:nvGrpSpPr>
+        <p:cNvPr id="1" name=""/>
+        <p:cNvGrpSpPr/>
+        <p:nvPr/>
+      </p:nvGrpSpPr>
+      <p:grpSpPr/>
+      <p:sp>
+        <p:nvSpPr>
+          <p:cNvPr id="2" name="Rectangle 1"/>
+          <p:cNvSpPr/>
+          <p:nvPr/>
+        </p:nvSpPr>
+        <p:spPr>
+          <a:xfrm>
+            <a:off x="0" y="0"/>
+            <a:ext cx="12191695" cy="109728"/>
+          </a:xfrm>
+          <a:prstGeom prst="rect">
+            <a:avLst/>
+          </a:prstGeom>
+          <a:solidFill>
+            <a:srgbClr val="1F2A44"/>
+          </a:solidFill>
+          <a:ln>
+            <a:noFill/>
+          </a:ln>
+        </p:spPr>
+        <p:style>
+          <a:lnRef idx="1">
+            <a:schemeClr val="accent1"/>
+          </a:lnRef>
+          <a:fillRef idx="3">
+            <a:schemeClr val="accent1"/>
+          </a:fillRef>
+          <a:effectRef idx="2">
+            <a:schemeClr val="accent1"/>
+          </a:effectRef>
+          <a:fontRef idx="minor">
+            <a:schemeClr val="lt1"/>
+          </a:fontRef>
+        </p:style>
+        <p:txBody>
+          <a:bodyPr rtlCol="0" anchor="ctr"/>
+          <a:lstStyle/>
+          <a:p>
+            <a:pPr algn="ctr"/>
+          </a:p>
+        </p:txBody>
+      </p:sp>
+      <p:sp>
+        <p:nvSpPr>
+          <p:cNvPr id="3" name="TextBox 2"/>
+          <p:cNvSpPr txBox="1"/>
+          <p:nvPr/>
+        </p:nvSpPr>
+        <p:spPr>
+          <a:xfrm>
+            <a:off x="411480" y="256032"/>
+            <a:ext cx="11338560" cy="566928"/>
+          </a:xfrm>
+          <a:prstGeom prst="rect">
+            <a:avLst/>
+          </a:prstGeom>
+          <a:noFill/>
+        </p:spPr>
+        <p:txBody>
+          <a:bodyPr wrap="square" lIns="36576" rIns="36576" tIns="18288" bIns="18288" anchor="ctr">
+            <a:spAutoFit/>
+          </a:bodyPr>
+          <a:lstStyle/>
+          <a:p>
+            <a:pPr algn="l">
+              <a:spcAft>
+                <a:spcPts val="600"/>
+              </a:spcAft>
+            </a:pPr>
+            <a:r>
+              <a:rPr sz="2600" b="1" i="0">
+                <a:solidFill>
+                  <a:srgbClr val="1F2A44"/>
+                </a:solidFill>
+                <a:latin typeface="Arial"/>
+              </a:rPr>
               <a:t>Outline</a:t>
             </a:r>
           </a:p>
@@ -38130,7 +42477,7 @@
                 </a:solidFill>
                 <a:latin typeface="Arial"/>
               </a:rPr>
-              <a:t>the 12-run matrix, OpenShift vs KinD, plugins (v1.35)</a:t>
+              <a:t>12-run, OpenShift vs KinD, cb vs ETE-Ext, plugins</a:t>
             </a:r>
           </a:p>
         </p:txBody>
@@ -38233,7 +42580,7 @@
                 </a:solidFill>
                 <a:latin typeface="Arial"/>
               </a:rPr>
-              <a:t>35   What AuthBridge costs</a:t>
+              <a:t>35   cb vs ETE-Ext, leg by leg</a:t>
             </a:r>
           </a:p>
           <a:p>
@@ -38249,7 +42596,39 @@
                 </a:solidFill>
                 <a:latin typeface="Arial"/>
               </a:rPr>
-              <a:t>36   Why the plugin result holds</a:t>
+              <a:t>36   cb vs ETE-Ext, by benchmark</a:t>
+            </a:r>
+          </a:p>
+          <a:p>
+            <a:pPr algn="l">
+              <a:spcAft>
+                <a:spcPts val="0"/>
+              </a:spcAft>
+            </a:pPr>
+            <a:r>
+              <a:rPr sz="1100" b="0" i="0">
+                <a:solidFill>
+                  <a:srgbClr val="1F2A44"/>
+                </a:solidFill>
+                <a:latin typeface="Arial"/>
+              </a:rPr>
+              <a:t>37   What AuthBridge costs</a:t>
+            </a:r>
+          </a:p>
+          <a:p>
+            <a:pPr algn="l">
+              <a:spcAft>
+                <a:spcPts val="0"/>
+              </a:spcAft>
+            </a:pPr>
+            <a:r>
+              <a:rPr sz="1100" b="0" i="0">
+                <a:solidFill>
+                  <a:srgbClr val="1F2A44"/>
+                </a:solidFill>
+                <a:latin typeface="Arial"/>
+              </a:rPr>
+              <a:t>38   Why the plugin result holds</a:t>
             </a:r>
           </a:p>
         </p:txBody>

--- a/docs/AutoBench.pptx
+++ b/docs/AutoBench.pptx
@@ -6190,7 +6190,7 @@
                 </a:solidFill>
                 <a:latin typeface="Arial"/>
               </a:rPr>
-              <a:t>v1.36 · OpenShift and KinD · 2026-10-14</a:t>
+              <a:t>v1.36 · OpenShift and KinD · 2026-10-21</a:t>
             </a:r>
           </a:p>
         </p:txBody>
@@ -38823,7 +38823,7 @@
                 </a:solidFill>
                 <a:latin typeface="Arial"/>
               </a:rPr>
-              <a:t>Non-LLM seconds per task, steady state; the designed 13-leg study, n=50, v1.35</a:t>
+              <a:t>Non-LLM seconds per gsm8k task, steady state; the designed study's gsm8k legs, n=50, two deploys each, v1.35</a:t>
             </a:r>
           </a:p>
         </p:txBody>
@@ -39691,7 +39691,7 @@
         </p:nvGraphicFramePr>
         <p:xfrm>
           <a:off x="411480" y="4069080"/>
-          <a:ext cx="6400800" cy="2103120"/>
+          <a:ext cx="6400800" cy="1682496"/>
         </p:xfrm>
         <a:graphic>
           <a:graphicData uri="http://schemas.openxmlformats.org/drawingml/2006/table">
@@ -40077,100 +40077,6 @@
                   <a:tcPr marL="54864" marR="54864" marT="18288" marB="18288" anchor="ctr">
                     <a:solidFill>
                       <a:srgbClr val="FFFFFF"/>
-                    </a:solidFill>
-                  </a:tcPr>
-                </a:tc>
-              </a:tr>
-              <a:tr h="420624">
-                <a:tc>
-                  <a:txBody>
-                    <a:bodyPr wrap="square"/>
-                    <a:lstStyle/>
-                    <a:p>
-                      <a:pPr algn="l"/>
-                      <a:r>
-                        <a:rPr sz="1200" b="0" i="0">
-                          <a:solidFill>
-                            <a:srgbClr val="1F2A44"/>
-                          </a:solidFill>
-                          <a:latin typeface="Arial"/>
-                        </a:rPr>
-                        <a:t>tau2 measured / projected</a:t>
-                      </a:r>
-                    </a:p>
-                  </a:txBody>
-                  <a:tcPr marL="54864" marR="54864" marT="18288" marB="18288" anchor="ctr">
-                    <a:solidFill>
-                      <a:srgbClr val="F3F5F9"/>
-                    </a:solidFill>
-                  </a:tcPr>
-                </a:tc>
-                <a:tc>
-                  <a:txBody>
-                    <a:bodyPr wrap="square"/>
-                    <a:lstStyle/>
-                    <a:p>
-                      <a:pPr algn="r"/>
-                      <a:r>
-                        <a:rPr sz="1200" b="0" i="0">
-                          <a:solidFill>
-                            <a:srgbClr val="1F2A44"/>
-                          </a:solidFill>
-                          <a:latin typeface="Arial"/>
-                        </a:rPr>
-                        <a:t>1.66×</a:t>
-                      </a:r>
-                    </a:p>
-                  </a:txBody>
-                  <a:tcPr marL="54864" marR="54864" marT="18288" marB="18288" anchor="ctr">
-                    <a:solidFill>
-                      <a:srgbClr val="F3F5F9"/>
-                    </a:solidFill>
-                  </a:tcPr>
-                </a:tc>
-                <a:tc>
-                  <a:txBody>
-                    <a:bodyPr wrap="square"/>
-                    <a:lstStyle/>
-                    <a:p>
-                      <a:pPr algn="r"/>
-                      <a:r>
-                        <a:rPr sz="1200" b="0" i="0">
-                          <a:solidFill>
-                            <a:srgbClr val="1F2A44"/>
-                          </a:solidFill>
-                          <a:latin typeface="Arial"/>
-                        </a:rPr>
-                        <a:t>2.01×</a:t>
-                      </a:r>
-                    </a:p>
-                  </a:txBody>
-                  <a:tcPr marL="54864" marR="54864" marT="18288" marB="18288" anchor="ctr">
-                    <a:solidFill>
-                      <a:srgbClr val="F3F5F9"/>
-                    </a:solidFill>
-                  </a:tcPr>
-                </a:tc>
-                <a:tc>
-                  <a:txBody>
-                    <a:bodyPr wrap="square"/>
-                    <a:lstStyle/>
-                    <a:p>
-                      <a:pPr algn="r"/>
-                      <a:r>
-                        <a:rPr sz="1200" b="0" i="0">
-                          <a:solidFill>
-                            <a:srgbClr val="1F2A44"/>
-                          </a:solidFill>
-                          <a:latin typeface="Arial"/>
-                        </a:rPr>
-                        <a:t>partly</a:t>
-                      </a:r>
-                    </a:p>
-                  </a:txBody>
-                  <a:tcPr marL="54864" marR="54864" marT="18288" marB="18288" anchor="ctr">
-                    <a:solidFill>
-                      <a:srgbClr val="F3F5F9"/>
                     </a:solidFill>
                   </a:tcPr>
                 </a:tc>
@@ -40329,6 +40235,83 @@
                 <a:latin typeface="Arial"/>
               </a:rPr>
               <a:t>The between-deploy noise floor is 0.02 s on OpenShift and 0.12 s on KinD, and ~0.26 s of each judged call on KinD is the node's DNS being retried.</a:t>
+            </a:r>
+          </a:p>
+        </p:txBody>
+      </p:sp>
+      <p:sp>
+        <p:nvSpPr>
+          <p:cNvPr id="12" name="Rounded Rectangle 11"/>
+          <p:cNvSpPr/>
+          <p:nvPr/>
+        </p:nvSpPr>
+        <p:spPr>
+          <a:xfrm>
+            <a:off x="7040880" y="4297680"/>
+            <a:ext cx="4736592" cy="1600200"/>
+          </a:xfrm>
+          <a:prstGeom prst="roundRect">
+            <a:avLst>
+              <a:gd name="adj" fmla="val 9142"/>
+            </a:avLst>
+          </a:prstGeom>
+          <a:solidFill>
+            <a:srgbClr val="FBECEA"/>
+          </a:solidFill>
+          <a:ln w="15875">
+            <a:solidFill>
+              <a:srgbClr val="B03A2E"/>
+            </a:solidFill>
+          </a:ln>
+          <a:effectLst/>
+        </p:spPr>
+        <p:style>
+          <a:lnRef idx="1">
+            <a:schemeClr val="accent1"/>
+          </a:lnRef>
+          <a:fillRef idx="3">
+            <a:schemeClr val="accent1"/>
+          </a:fillRef>
+          <a:effectRef idx="2">
+            <a:schemeClr val="accent1"/>
+          </a:effectRef>
+          <a:fontRef idx="minor">
+            <a:schemeClr val="lt1"/>
+          </a:fontRef>
+        </p:style>
+        <p:txBody>
+          <a:bodyPr rtlCol="0" anchor="t" lIns="73152" rIns="73152" tIns="36576" bIns="36576" wrap="square"/>
+          <a:lstStyle/>
+          <a:p>
+            <a:pPr algn="l">
+              <a:spcAft>
+                <a:spcPts val="200"/>
+              </a:spcAft>
+            </a:pPr>
+            <a:r>
+              <a:rPr sz="1200" b="1" i="0">
+                <a:solidFill>
+                  <a:srgbClr val="1F2A44"/>
+                </a:solidFill>
+                <a:latin typeface="Arial"/>
+              </a:rPr>
+              <a:t>gsm8k does not predict a harder benchmark</a:t>
+            </a:r>
+          </a:p>
+          <a:p>
+            <a:pPr algn="l">
+              <a:spcAft>
+                <a:spcPts val="200"/>
+              </a:spcAft>
+            </a:pPr>
+            <a:r>
+              <a:rPr sz="1200" b="0" i="0">
+                <a:solidFill>
+                  <a:srgbClr val="1F2A44"/>
+                </a:solidFill>
+                <a:latin typeface="Arial"/>
+              </a:rPr>
+              <a:t>AuthBridge's cost on a more complex benchmark cannot be estimated well from gsm8k: on tau2, scaling gsm8k's cost per tool call under-shot the measured cost on both clusters. Measure the benchmark itself: two legs, AuthBridge off and on.</a:t>
             </a:r>
           </a:p>
         </p:txBody>
